--- a/paper/slides/compiling-recurrent-agent-workflows-into-guarded-programs.pptx
+++ b/paper/slides/compiling-recurrent-agent-workflows-into-guarded-programs.pptx
@@ -2,38 +2,38 @@
 <file path=ppt/presentation.xml><?xml version="1.0" encoding="utf-8"?>
 <p:presentation xmlns:p="http://schemas.openxmlformats.org/presentationml/2006/main">
   <p:sldMasterIdLst>
-    <p:sldMasterId xmlns:r="http://schemas.openxmlformats.org/officeDocument/2006/relationships" id="2147483648" r:id="Rf2f5b19aab194919"/>
+    <p:sldMasterId xmlns:r="http://schemas.openxmlformats.org/officeDocument/2006/relationships" id="2147483648" r:id="Rce29f11f1d9041fa"/>
   </p:sldMasterIdLst>
   <p:notesMasterIdLst>
-    <p:notesMasterId xmlns:r="http://schemas.openxmlformats.org/officeDocument/2006/relationships" r:id="R54f0894f8d8e4116"/>
+    <p:notesMasterId xmlns:r="http://schemas.openxmlformats.org/officeDocument/2006/relationships" r:id="Re9c1679ec47b4a24"/>
   </p:notesMasterIdLst>
   <p:sldIdLst>
-    <p:sldId xmlns:r="http://schemas.openxmlformats.org/officeDocument/2006/relationships" id="256" r:id="R61590eae29ee4050"/>
-    <p:sldId xmlns:r="http://schemas.openxmlformats.org/officeDocument/2006/relationships" id="257" r:id="R9dfb689c5c1945f6"/>
-    <p:sldId xmlns:r="http://schemas.openxmlformats.org/officeDocument/2006/relationships" id="258" r:id="Rbaa235f239da46b9"/>
-    <p:sldId xmlns:r="http://schemas.openxmlformats.org/officeDocument/2006/relationships" id="259" r:id="Rab2414cbfee14c28"/>
-    <p:sldId xmlns:r="http://schemas.openxmlformats.org/officeDocument/2006/relationships" id="260" r:id="R8cf7ef70ca6347d7"/>
-    <p:sldId xmlns:r="http://schemas.openxmlformats.org/officeDocument/2006/relationships" id="261" r:id="R2acecb2a5b43421c"/>
-    <p:sldId xmlns:r="http://schemas.openxmlformats.org/officeDocument/2006/relationships" id="262" r:id="R6c186aeca5d246c0"/>
-    <p:sldId xmlns:r="http://schemas.openxmlformats.org/officeDocument/2006/relationships" id="263" r:id="R274a0f645fb14306"/>
-    <p:sldId xmlns:r="http://schemas.openxmlformats.org/officeDocument/2006/relationships" id="264" r:id="Rf4de550fad50491e"/>
-    <p:sldId xmlns:r="http://schemas.openxmlformats.org/officeDocument/2006/relationships" id="265" r:id="Ree3252aecd9b4ed1"/>
-    <p:sldId xmlns:r="http://schemas.openxmlformats.org/officeDocument/2006/relationships" id="266" r:id="R53edc41eea364ba8"/>
-    <p:sldId xmlns:r="http://schemas.openxmlformats.org/officeDocument/2006/relationships" id="267" r:id="Rbf3b641b72774e94"/>
-    <p:sldId xmlns:r="http://schemas.openxmlformats.org/officeDocument/2006/relationships" id="268" r:id="Rc2de947d946b410a"/>
-    <p:sldId xmlns:r="http://schemas.openxmlformats.org/officeDocument/2006/relationships" id="269" r:id="Re49e4ac19bb2418c"/>
-    <p:sldId xmlns:r="http://schemas.openxmlformats.org/officeDocument/2006/relationships" id="270" r:id="R200b93ad776049e7"/>
-    <p:sldId xmlns:r="http://schemas.openxmlformats.org/officeDocument/2006/relationships" id="271" r:id="Red949c10e9bd4825"/>
-    <p:sldId xmlns:r="http://schemas.openxmlformats.org/officeDocument/2006/relationships" id="272" r:id="R6bd6b107e292404c"/>
-    <p:sldId xmlns:r="http://schemas.openxmlformats.org/officeDocument/2006/relationships" id="273" r:id="Ra0bf27a100804d44"/>
-    <p:sldId xmlns:r="http://schemas.openxmlformats.org/officeDocument/2006/relationships" id="274" r:id="R00de4c9a10264adf"/>
-    <p:sldId xmlns:r="http://schemas.openxmlformats.org/officeDocument/2006/relationships" id="275" r:id="Rc13f84bb29694ac3"/>
-    <p:sldId xmlns:r="http://schemas.openxmlformats.org/officeDocument/2006/relationships" id="276" r:id="R0543def164364e71"/>
-    <p:sldId xmlns:r="http://schemas.openxmlformats.org/officeDocument/2006/relationships" id="277" r:id="R9ad33a96d5bf4260"/>
-    <p:sldId xmlns:r="http://schemas.openxmlformats.org/officeDocument/2006/relationships" id="278" r:id="R0b1c604459da441e"/>
-    <p:sldId xmlns:r="http://schemas.openxmlformats.org/officeDocument/2006/relationships" id="279" r:id="Rdebde0c34df54296"/>
-    <p:sldId xmlns:r="http://schemas.openxmlformats.org/officeDocument/2006/relationships" id="280" r:id="R0466ba1177ec4245"/>
-    <p:sldId xmlns:r="http://schemas.openxmlformats.org/officeDocument/2006/relationships" id="281" r:id="R0944b979e6a94fed"/>
+    <p:sldId xmlns:r="http://schemas.openxmlformats.org/officeDocument/2006/relationships" id="256" r:id="R8bdf753474a34829"/>
+    <p:sldId xmlns:r="http://schemas.openxmlformats.org/officeDocument/2006/relationships" id="257" r:id="Rb1ab76d2a1a04cf8"/>
+    <p:sldId xmlns:r="http://schemas.openxmlformats.org/officeDocument/2006/relationships" id="258" r:id="R6c85d90483cc44cf"/>
+    <p:sldId xmlns:r="http://schemas.openxmlformats.org/officeDocument/2006/relationships" id="259" r:id="R655558f59e3b4ed0"/>
+    <p:sldId xmlns:r="http://schemas.openxmlformats.org/officeDocument/2006/relationships" id="260" r:id="R48f037405ce14d3b"/>
+    <p:sldId xmlns:r="http://schemas.openxmlformats.org/officeDocument/2006/relationships" id="261" r:id="Rac212f82434d48f9"/>
+    <p:sldId xmlns:r="http://schemas.openxmlformats.org/officeDocument/2006/relationships" id="262" r:id="Rf1f0fd3717bb46a9"/>
+    <p:sldId xmlns:r="http://schemas.openxmlformats.org/officeDocument/2006/relationships" id="263" r:id="Readef34528c84b7b"/>
+    <p:sldId xmlns:r="http://schemas.openxmlformats.org/officeDocument/2006/relationships" id="264" r:id="R10d012d791f74b51"/>
+    <p:sldId xmlns:r="http://schemas.openxmlformats.org/officeDocument/2006/relationships" id="265" r:id="Rb25499e751c34752"/>
+    <p:sldId xmlns:r="http://schemas.openxmlformats.org/officeDocument/2006/relationships" id="266" r:id="R16be100fa0ab4c62"/>
+    <p:sldId xmlns:r="http://schemas.openxmlformats.org/officeDocument/2006/relationships" id="267" r:id="Ra8725462d2224e38"/>
+    <p:sldId xmlns:r="http://schemas.openxmlformats.org/officeDocument/2006/relationships" id="268" r:id="Rf908538c7e1e4dff"/>
+    <p:sldId xmlns:r="http://schemas.openxmlformats.org/officeDocument/2006/relationships" id="269" r:id="R6362c09a79874d3e"/>
+    <p:sldId xmlns:r="http://schemas.openxmlformats.org/officeDocument/2006/relationships" id="270" r:id="Ra28f5cbfcad2407b"/>
+    <p:sldId xmlns:r="http://schemas.openxmlformats.org/officeDocument/2006/relationships" id="271" r:id="R5dc66e576c2b4972"/>
+    <p:sldId xmlns:r="http://schemas.openxmlformats.org/officeDocument/2006/relationships" id="272" r:id="R54f10c74691445a0"/>
+    <p:sldId xmlns:r="http://schemas.openxmlformats.org/officeDocument/2006/relationships" id="273" r:id="R7aaf7d886bf34a28"/>
+    <p:sldId xmlns:r="http://schemas.openxmlformats.org/officeDocument/2006/relationships" id="274" r:id="Rc2eacfa69fb54e99"/>
+    <p:sldId xmlns:r="http://schemas.openxmlformats.org/officeDocument/2006/relationships" id="275" r:id="R4cf5cf9572b444b3"/>
+    <p:sldId xmlns:r="http://schemas.openxmlformats.org/officeDocument/2006/relationships" id="276" r:id="R8da10ba50b5f4aca"/>
+    <p:sldId xmlns:r="http://schemas.openxmlformats.org/officeDocument/2006/relationships" id="277" r:id="R2ad41e5fe9f24012"/>
+    <p:sldId xmlns:r="http://schemas.openxmlformats.org/officeDocument/2006/relationships" id="278" r:id="R63c501aefca447f2"/>
+    <p:sldId xmlns:r="http://schemas.openxmlformats.org/officeDocument/2006/relationships" id="279" r:id="Rd269fc5abf79424b"/>
+    <p:sldId xmlns:r="http://schemas.openxmlformats.org/officeDocument/2006/relationships" id="280" r:id="Re66cc7d65dc640cb"/>
+    <p:sldId xmlns:r="http://schemas.openxmlformats.org/officeDocument/2006/relationships" id="281" r:id="Rd6277e2102904a18"/>
   </p:sldIdLst>
   <p:sldSz cx="12192000" cy="6858000"/>
   <p:notesSz cx="6858000" cy="9144000"/>
@@ -2285,7 +2285,7 @@
   </p:cSld>
   <p:clrMap bg1="lt1" tx1="dk1" bg2="lt2" tx2="dk2" accent1="accent1" accent2="accent2" accent3="accent3" accent4="accent4" accent5="accent5" accent6="accent6" hlink="hlink" folHlink="folHlink"/>
   <p:sldLayoutIdLst>
-    <p:sldLayoutId xmlns:r="http://schemas.openxmlformats.org/officeDocument/2006/relationships" id="2147483649" r:id="Rfdbbebc4d7574a8d"/>
+    <p:sldLayoutId xmlns:r="http://schemas.openxmlformats.org/officeDocument/2006/relationships" id="2147483649" r:id="R71243e9b53554bc6"/>
   </p:sldLayoutIdLst>
   <p:txStyles>
     <p:titleStyle>
@@ -3718,7 +3718,7 @@
           <p:cNvPr id="2" name="Shape 0">
             <a:extLst xmlns:a="http://schemas.openxmlformats.org/drawingml/2006/main">
               <a:ext uri="{FF2B5EF4-FFF2-40B4-BE49-F238E27FC236}">
-                <a16:creationId xmlns:a16="http://schemas.microsoft.com/office/drawing/2014/main" id="{A4F8B9FC-30FA-472B-B97C-56865F58698A}"/>
+                <a16:creationId xmlns:a16="http://schemas.microsoft.com/office/drawing/2014/main" id="{6053C142-1F0B-4FB3-9B3A-2D667E8CA855}"/>
               </a:ext>
             </a:extLst>
           </p:cNvPr>
@@ -3758,7 +3758,7 @@
           <p:cNvPr id="3" name="Shape 1">
             <a:extLst xmlns:a="http://schemas.openxmlformats.org/drawingml/2006/main">
               <a:ext uri="{FF2B5EF4-FFF2-40B4-BE49-F238E27FC236}">
-                <a16:creationId xmlns:a16="http://schemas.microsoft.com/office/drawing/2014/main" id="{2317708A-BB67-4E7C-A822-17DDE4A1FF02}"/>
+                <a16:creationId xmlns:a16="http://schemas.microsoft.com/office/drawing/2014/main" id="{2A837441-8A5D-4A14-9DD8-684748FCCD24}"/>
               </a:ext>
             </a:extLst>
           </p:cNvPr>
@@ -3798,7 +3798,7 @@
           <p:cNvPr id="4" name="Shape 2">
             <a:extLst xmlns:a="http://schemas.openxmlformats.org/drawingml/2006/main">
               <a:ext uri="{FF2B5EF4-FFF2-40B4-BE49-F238E27FC236}">
-                <a16:creationId xmlns:a16="http://schemas.microsoft.com/office/drawing/2014/main" id="{87271A6C-D19D-4FAB-A6E9-CB5112B590FB}"/>
+                <a16:creationId xmlns:a16="http://schemas.microsoft.com/office/drawing/2014/main" id="{2707E9C2-83FE-47A6-880A-3D9106D54894}"/>
               </a:ext>
             </a:extLst>
           </p:cNvPr>
@@ -3838,7 +3838,7 @@
           <p:cNvPr id="5" name="Text 3">
             <a:extLst xmlns:a="http://schemas.openxmlformats.org/drawingml/2006/main">
               <a:ext uri="{FF2B5EF4-FFF2-40B4-BE49-F238E27FC236}">
-                <a16:creationId xmlns:a16="http://schemas.microsoft.com/office/drawing/2014/main" id="{1A34FFFB-498C-476D-9ADD-87293D51CA13}"/>
+                <a16:creationId xmlns:a16="http://schemas.microsoft.com/office/drawing/2014/main" id="{F770B360-153B-4AF8-8B4F-A36B81538ACF}"/>
               </a:ext>
             </a:extLst>
           </p:cNvPr>
@@ -3883,7 +3883,7 @@
           <p:cNvPr id="6" name="Text 4">
             <a:extLst xmlns:a="http://schemas.openxmlformats.org/drawingml/2006/main">
               <a:ext uri="{FF2B5EF4-FFF2-40B4-BE49-F238E27FC236}">
-                <a16:creationId xmlns:a16="http://schemas.microsoft.com/office/drawing/2014/main" id="{B35C7128-90C7-4FF6-A7B8-3AB2BF6B3C71}"/>
+                <a16:creationId xmlns:a16="http://schemas.microsoft.com/office/drawing/2014/main" id="{926FE871-0445-41B1-B57C-6A68D7619EF0}"/>
               </a:ext>
             </a:extLst>
           </p:cNvPr>
@@ -3931,7 +3931,7 @@
           <p:cNvPr id="7" name="Text 5">
             <a:extLst xmlns:a="http://schemas.openxmlformats.org/drawingml/2006/main">
               <a:ext uri="{FF2B5EF4-FFF2-40B4-BE49-F238E27FC236}">
-                <a16:creationId xmlns:a16="http://schemas.microsoft.com/office/drawing/2014/main" id="{58CB0571-4985-416E-81C8-992EF079B13D}"/>
+                <a16:creationId xmlns:a16="http://schemas.microsoft.com/office/drawing/2014/main" id="{6E4BC1E4-971F-49BD-B223-73B2B236AC35}"/>
               </a:ext>
             </a:extLst>
           </p:cNvPr>
@@ -3979,7 +3979,7 @@
           <p:cNvPr id="8" name="Shape 6">
             <a:extLst xmlns:a="http://schemas.openxmlformats.org/drawingml/2006/main">
               <a:ext uri="{FF2B5EF4-FFF2-40B4-BE49-F238E27FC236}">
-                <a16:creationId xmlns:a16="http://schemas.microsoft.com/office/drawing/2014/main" id="{3AFEC6A2-3054-4A07-A3DA-AF121F8CAB44}"/>
+                <a16:creationId xmlns:a16="http://schemas.microsoft.com/office/drawing/2014/main" id="{B04AF668-C105-404C-8C6F-B12FD6291555}"/>
               </a:ext>
             </a:extLst>
           </p:cNvPr>
@@ -4015,7 +4015,7 @@
           <p:cNvPr id="9" name="Text 7">
             <a:extLst xmlns:a="http://schemas.openxmlformats.org/drawingml/2006/main">
               <a:ext uri="{FF2B5EF4-FFF2-40B4-BE49-F238E27FC236}">
-                <a16:creationId xmlns:a16="http://schemas.microsoft.com/office/drawing/2014/main" id="{4ECA02E2-F65E-4659-A018-49A2BBF85A5E}"/>
+                <a16:creationId xmlns:a16="http://schemas.microsoft.com/office/drawing/2014/main" id="{1F4D356C-D6FA-4923-9AA1-AEA16FAD31B0}"/>
               </a:ext>
             </a:extLst>
           </p:cNvPr>
@@ -4060,7 +4060,7 @@
           <p:cNvPr id="10" name="Text 8">
             <a:extLst xmlns:a="http://schemas.openxmlformats.org/drawingml/2006/main">
               <a:ext uri="{FF2B5EF4-FFF2-40B4-BE49-F238E27FC236}">
-                <a16:creationId xmlns:a16="http://schemas.microsoft.com/office/drawing/2014/main" id="{B9FB81DB-A052-4645-BD05-12C0DBF29339}"/>
+                <a16:creationId xmlns:a16="http://schemas.microsoft.com/office/drawing/2014/main" id="{BB1E0346-21CB-4FF6-9578-220D38380D29}"/>
               </a:ext>
             </a:extLst>
           </p:cNvPr>
@@ -4127,7 +4127,7 @@
           <p:cNvPr id="11" name="Text 9">
             <a:extLst xmlns:a="http://schemas.openxmlformats.org/drawingml/2006/main">
               <a:ext uri="{FF2B5EF4-FFF2-40B4-BE49-F238E27FC236}">
-                <a16:creationId xmlns:a16="http://schemas.microsoft.com/office/drawing/2014/main" id="{E5F1C371-3562-4D3B-86AC-B1606CA18A5E}"/>
+                <a16:creationId xmlns:a16="http://schemas.microsoft.com/office/drawing/2014/main" id="{CE2C48E2-204B-4C48-AB27-DD4A49973F52}"/>
               </a:ext>
             </a:extLst>
           </p:cNvPr>
@@ -4172,7 +4172,7 @@
           <p:cNvPr id="12" name="Text 10">
             <a:extLst xmlns:a="http://schemas.openxmlformats.org/drawingml/2006/main">
               <a:ext uri="{FF2B5EF4-FFF2-40B4-BE49-F238E27FC236}">
-                <a16:creationId xmlns:a16="http://schemas.microsoft.com/office/drawing/2014/main" id="{5C8E827F-4069-4F8D-94FD-9E6C27912199}"/>
+                <a16:creationId xmlns:a16="http://schemas.microsoft.com/office/drawing/2014/main" id="{60668DD5-4FED-40E7-B95A-EBD60557B27E}"/>
               </a:ext>
             </a:extLst>
           </p:cNvPr>
@@ -4210,7 +4210,7 @@
                 <a:ea typeface="Calibri"/>
                 <a:cs typeface="Calibri"/>
               </a:rPr>
-              <a:t>5 live protocols on a</a:t>
+              <a:t>6 live protocols on a</a:t>
             </a:r>
           </a:p>
           <a:p xmlns:a="http://schemas.openxmlformats.org/drawingml/2006/main">
@@ -4239,7 +4239,7 @@
           <p:cNvPr id="13" name="Text 11">
             <a:extLst xmlns:a="http://schemas.openxmlformats.org/drawingml/2006/main">
               <a:ext uri="{FF2B5EF4-FFF2-40B4-BE49-F238E27FC236}">
-                <a16:creationId xmlns:a16="http://schemas.microsoft.com/office/drawing/2014/main" id="{FC8E2BAD-81A0-42CC-93D3-BB67E5408977}"/>
+                <a16:creationId xmlns:a16="http://schemas.microsoft.com/office/drawing/2014/main" id="{738017F9-4D1E-4F30-B24A-E08E4B711B24}"/>
               </a:ext>
             </a:extLst>
           </p:cNvPr>
@@ -4284,7 +4284,7 @@
           <p:cNvPr id="14" name="Text 12">
             <a:extLst xmlns:a="http://schemas.openxmlformats.org/drawingml/2006/main">
               <a:ext uri="{FF2B5EF4-FFF2-40B4-BE49-F238E27FC236}">
-                <a16:creationId xmlns:a16="http://schemas.microsoft.com/office/drawing/2014/main" id="{1C63D7B4-22A5-4414-BE20-1959186E7BF5}"/>
+                <a16:creationId xmlns:a16="http://schemas.microsoft.com/office/drawing/2014/main" id="{142C9CA0-DF7A-4B03-B8F2-A2B9009D137F}"/>
               </a:ext>
             </a:extLst>
           </p:cNvPr>
@@ -4351,7 +4351,7 @@
           <p:cNvPr id="15" name="Text 13">
             <a:extLst xmlns:a="http://schemas.openxmlformats.org/drawingml/2006/main">
               <a:ext uri="{FF2B5EF4-FFF2-40B4-BE49-F238E27FC236}">
-                <a16:creationId xmlns:a16="http://schemas.microsoft.com/office/drawing/2014/main" id="{2828769B-96E3-43C7-9DBD-1B0DCFCEFE23}"/>
+                <a16:creationId xmlns:a16="http://schemas.microsoft.com/office/drawing/2014/main" id="{EB7946BF-43C2-419C-A1C2-069AD6D6F5E1}"/>
               </a:ext>
             </a:extLst>
           </p:cNvPr>
@@ -4394,7 +4394,7 @@
     </p:spTree>
     <p:extLst>
       <p:ext uri="{BB962C8B-B14F-4D97-AF65-F5344CB8AC3E}">
-        <p14:creationId xmlns:p14="http://schemas.microsoft.com/office/powerpoint/2010/main" val="1065946133"/>
+        <p14:creationId xmlns:p14="http://schemas.microsoft.com/office/powerpoint/2010/main" val="608151696"/>
       </p:ext>
     </p:extLst>
   </p:cSld>
@@ -4425,7 +4425,7 @@
           <p:cNvPr id="2" name="Text 0">
             <a:extLst xmlns:a="http://schemas.openxmlformats.org/drawingml/2006/main">
               <a:ext uri="{FF2B5EF4-FFF2-40B4-BE49-F238E27FC236}">
-                <a16:creationId xmlns:a16="http://schemas.microsoft.com/office/drawing/2014/main" id="{7006950E-5E1D-41EB-9F1E-487D314126C3}"/>
+                <a16:creationId xmlns:a16="http://schemas.microsoft.com/office/drawing/2014/main" id="{C74D8893-F5FA-4A0A-95E9-1A3FD341E2B7}"/>
               </a:ext>
             </a:extLst>
           </p:cNvPr>
@@ -4470,7 +4470,7 @@
           <p:cNvPr id="3" name="Text 1">
             <a:extLst xmlns:a="http://schemas.openxmlformats.org/drawingml/2006/main">
               <a:ext uri="{FF2B5EF4-FFF2-40B4-BE49-F238E27FC236}">
-                <a16:creationId xmlns:a16="http://schemas.microsoft.com/office/drawing/2014/main" id="{91BCC3B8-413A-403F-9C35-D1432A2E4D9A}"/>
+                <a16:creationId xmlns:a16="http://schemas.microsoft.com/office/drawing/2014/main" id="{50BC4C33-250D-479D-9DED-EEA770B29A77}"/>
               </a:ext>
             </a:extLst>
           </p:cNvPr>
@@ -4515,7 +4515,7 @@
           <p:cNvPr id="4" name="Text 2">
             <a:extLst xmlns:a="http://schemas.openxmlformats.org/drawingml/2006/main">
               <a:ext uri="{FF2B5EF4-FFF2-40B4-BE49-F238E27FC236}">
-                <a16:creationId xmlns:a16="http://schemas.microsoft.com/office/drawing/2014/main" id="{4785721E-9BB0-41BE-9039-029D0E2F2DE2}"/>
+                <a16:creationId xmlns:a16="http://schemas.microsoft.com/office/drawing/2014/main" id="{DB603864-E1A5-443C-83A4-E2F06511E01E}"/>
               </a:ext>
             </a:extLst>
           </p:cNvPr>
@@ -4560,7 +4560,7 @@
           <p:cNvPr id="5" name="Text 3">
             <a:extLst xmlns:a="http://schemas.openxmlformats.org/drawingml/2006/main">
               <a:ext uri="{FF2B5EF4-FFF2-40B4-BE49-F238E27FC236}">
-                <a16:creationId xmlns:a16="http://schemas.microsoft.com/office/drawing/2014/main" id="{8E020A4A-E248-4016-AA21-4B16409CD6F3}"/>
+                <a16:creationId xmlns:a16="http://schemas.microsoft.com/office/drawing/2014/main" id="{3511CB3D-4A4E-4D97-8DD6-939580E84231}"/>
               </a:ext>
             </a:extLst>
           </p:cNvPr>
@@ -4605,7 +4605,7 @@
           <p:cNvPr id="6" name="Text 4">
             <a:extLst xmlns:a="http://schemas.openxmlformats.org/drawingml/2006/main">
               <a:ext uri="{FF2B5EF4-FFF2-40B4-BE49-F238E27FC236}">
-                <a16:creationId xmlns:a16="http://schemas.microsoft.com/office/drawing/2014/main" id="{D1C9DEB7-6E5F-4138-8E74-71E1CE04C536}"/>
+                <a16:creationId xmlns:a16="http://schemas.microsoft.com/office/drawing/2014/main" id="{53A6C2D3-0244-4969-97EB-DE7A75D460F7}"/>
               </a:ext>
             </a:extLst>
           </p:cNvPr>
@@ -4653,7 +4653,7 @@
           <p:cNvPr id="7" name="Shape 5">
             <a:extLst xmlns:a="http://schemas.openxmlformats.org/drawingml/2006/main">
               <a:ext uri="{FF2B5EF4-FFF2-40B4-BE49-F238E27FC236}">
-                <a16:creationId xmlns:a16="http://schemas.microsoft.com/office/drawing/2014/main" id="{487402EE-4275-4AB2-8912-0F6D30455C37}"/>
+                <a16:creationId xmlns:a16="http://schemas.microsoft.com/office/drawing/2014/main" id="{CE23E6E3-AF77-428E-A903-2FCFC3473E5E}"/>
               </a:ext>
             </a:extLst>
           </p:cNvPr>
@@ -4700,7 +4700,7 @@
           <p:cNvPr id="8" name="Shape 6">
             <a:extLst xmlns:a="http://schemas.openxmlformats.org/drawingml/2006/main">
               <a:ext uri="{FF2B5EF4-FFF2-40B4-BE49-F238E27FC236}">
-                <a16:creationId xmlns:a16="http://schemas.microsoft.com/office/drawing/2014/main" id="{3BC87C34-370A-4A31-8BC5-3417CB5C3D07}"/>
+                <a16:creationId xmlns:a16="http://schemas.microsoft.com/office/drawing/2014/main" id="{D7E26100-303A-4B3A-8ABC-970E54A4F5E9}"/>
               </a:ext>
             </a:extLst>
           </p:cNvPr>
@@ -4738,7 +4738,7 @@
           <p:cNvPr id="9" name="Text 7">
             <a:extLst xmlns:a="http://schemas.openxmlformats.org/drawingml/2006/main">
               <a:ext uri="{FF2B5EF4-FFF2-40B4-BE49-F238E27FC236}">
-                <a16:creationId xmlns:a16="http://schemas.microsoft.com/office/drawing/2014/main" id="{2397EEAB-E046-4C92-8756-C16874FF8342}"/>
+                <a16:creationId xmlns:a16="http://schemas.microsoft.com/office/drawing/2014/main" id="{FEA4F2D5-9B32-4A59-8920-24B955C190C0}"/>
               </a:ext>
             </a:extLst>
           </p:cNvPr>
@@ -4783,7 +4783,7 @@
           <p:cNvPr id="10" name="Text 8">
             <a:extLst xmlns:a="http://schemas.openxmlformats.org/drawingml/2006/main">
               <a:ext uri="{FF2B5EF4-FFF2-40B4-BE49-F238E27FC236}">
-                <a16:creationId xmlns:a16="http://schemas.microsoft.com/office/drawing/2014/main" id="{51238593-C1B6-4FBB-99A7-57202A430263}"/>
+                <a16:creationId xmlns:a16="http://schemas.microsoft.com/office/drawing/2014/main" id="{FBCB7317-326C-4DB0-AA94-4CD5CBBC0237}"/>
               </a:ext>
             </a:extLst>
           </p:cNvPr>
@@ -4828,7 +4828,7 @@
           <p:cNvPr id="11" name="Text 9">
             <a:extLst xmlns:a="http://schemas.openxmlformats.org/drawingml/2006/main">
               <a:ext uri="{FF2B5EF4-FFF2-40B4-BE49-F238E27FC236}">
-                <a16:creationId xmlns:a16="http://schemas.microsoft.com/office/drawing/2014/main" id="{9D87CF31-01F8-4FF1-B7A3-3F7FD2E21851}"/>
+                <a16:creationId xmlns:a16="http://schemas.microsoft.com/office/drawing/2014/main" id="{4E534F69-B1D6-4F3E-91A8-FD97AC9FFB1A}"/>
               </a:ext>
             </a:extLst>
           </p:cNvPr>
@@ -4873,7 +4873,7 @@
           <p:cNvPr id="12" name="Text 10">
             <a:extLst xmlns:a="http://schemas.openxmlformats.org/drawingml/2006/main">
               <a:ext uri="{FF2B5EF4-FFF2-40B4-BE49-F238E27FC236}">
-                <a16:creationId xmlns:a16="http://schemas.microsoft.com/office/drawing/2014/main" id="{0FA0F1BE-6BB2-486F-A35F-A37C0DDE2005}"/>
+                <a16:creationId xmlns:a16="http://schemas.microsoft.com/office/drawing/2014/main" id="{C910A422-BA3D-4997-BE5E-6CC7F04B735C}"/>
               </a:ext>
             </a:extLst>
           </p:cNvPr>
@@ -4921,7 +4921,7 @@
           <p:cNvPr id="13" name="Shape 11">
             <a:extLst xmlns:a="http://schemas.openxmlformats.org/drawingml/2006/main">
               <a:ext uri="{FF2B5EF4-FFF2-40B4-BE49-F238E27FC236}">
-                <a16:creationId xmlns:a16="http://schemas.microsoft.com/office/drawing/2014/main" id="{667425FF-473A-480F-93DE-3807CD5869BA}"/>
+                <a16:creationId xmlns:a16="http://schemas.microsoft.com/office/drawing/2014/main" id="{237ADEE3-129D-4B84-8125-644B62FDE5F4}"/>
               </a:ext>
             </a:extLst>
           </p:cNvPr>
@@ -4968,7 +4968,7 @@
           <p:cNvPr id="14" name="Shape 12">
             <a:extLst xmlns:a="http://schemas.openxmlformats.org/drawingml/2006/main">
               <a:ext uri="{FF2B5EF4-FFF2-40B4-BE49-F238E27FC236}">
-                <a16:creationId xmlns:a16="http://schemas.microsoft.com/office/drawing/2014/main" id="{4B783DE8-C6AE-48EC-BBBF-FF14C1690D9B}"/>
+                <a16:creationId xmlns:a16="http://schemas.microsoft.com/office/drawing/2014/main" id="{7AF1E6B1-BDF0-4B4F-8402-554C6277F3C7}"/>
               </a:ext>
             </a:extLst>
           </p:cNvPr>
@@ -5006,7 +5006,7 @@
           <p:cNvPr id="15" name="Text 13">
             <a:extLst xmlns:a="http://schemas.openxmlformats.org/drawingml/2006/main">
               <a:ext uri="{FF2B5EF4-FFF2-40B4-BE49-F238E27FC236}">
-                <a16:creationId xmlns:a16="http://schemas.microsoft.com/office/drawing/2014/main" id="{526E4B96-781E-44E1-ACEF-E74C234A4CFB}"/>
+                <a16:creationId xmlns:a16="http://schemas.microsoft.com/office/drawing/2014/main" id="{5DCE6D8C-D687-4F82-BDC4-23895795CF27}"/>
               </a:ext>
             </a:extLst>
           </p:cNvPr>
@@ -5051,7 +5051,7 @@
           <p:cNvPr id="16" name="Text 14">
             <a:extLst xmlns:a="http://schemas.openxmlformats.org/drawingml/2006/main">
               <a:ext uri="{FF2B5EF4-FFF2-40B4-BE49-F238E27FC236}">
-                <a16:creationId xmlns:a16="http://schemas.microsoft.com/office/drawing/2014/main" id="{5705306A-0341-46C6-B06F-80D693DCF6FE}"/>
+                <a16:creationId xmlns:a16="http://schemas.microsoft.com/office/drawing/2014/main" id="{9C16CDE7-8970-4D27-90B0-AFF15590A8BD}"/>
               </a:ext>
             </a:extLst>
           </p:cNvPr>
@@ -5096,7 +5096,7 @@
           <p:cNvPr id="17" name="Text 15">
             <a:extLst xmlns:a="http://schemas.openxmlformats.org/drawingml/2006/main">
               <a:ext uri="{FF2B5EF4-FFF2-40B4-BE49-F238E27FC236}">
-                <a16:creationId xmlns:a16="http://schemas.microsoft.com/office/drawing/2014/main" id="{3A68D64F-6336-4C8B-A148-B71E6B5CB7C6}"/>
+                <a16:creationId xmlns:a16="http://schemas.microsoft.com/office/drawing/2014/main" id="{0AB995AE-E390-433E-89D3-AB3C99906E8D}"/>
               </a:ext>
             </a:extLst>
           </p:cNvPr>
@@ -5141,7 +5141,7 @@
           <p:cNvPr id="18" name="Text 16">
             <a:extLst xmlns:a="http://schemas.openxmlformats.org/drawingml/2006/main">
               <a:ext uri="{FF2B5EF4-FFF2-40B4-BE49-F238E27FC236}">
-                <a16:creationId xmlns:a16="http://schemas.microsoft.com/office/drawing/2014/main" id="{9A100410-AB2E-4EA2-B2C2-967D4BBFDF1E}"/>
+                <a16:creationId xmlns:a16="http://schemas.microsoft.com/office/drawing/2014/main" id="{5DBA002A-BBAE-4DE4-AE19-F12076BAF9BE}"/>
               </a:ext>
             </a:extLst>
           </p:cNvPr>
@@ -5189,7 +5189,7 @@
           <p:cNvPr id="19" name="Shape 17">
             <a:extLst xmlns:a="http://schemas.openxmlformats.org/drawingml/2006/main">
               <a:ext uri="{FF2B5EF4-FFF2-40B4-BE49-F238E27FC236}">
-                <a16:creationId xmlns:a16="http://schemas.microsoft.com/office/drawing/2014/main" id="{85A31DDF-30B5-4297-8762-1E711FB57B51}"/>
+                <a16:creationId xmlns:a16="http://schemas.microsoft.com/office/drawing/2014/main" id="{1098A493-7C36-471F-BB8C-B3DA1FDCC7BC}"/>
               </a:ext>
             </a:extLst>
           </p:cNvPr>
@@ -5236,7 +5236,7 @@
           <p:cNvPr id="20" name="Shape 18">
             <a:extLst xmlns:a="http://schemas.openxmlformats.org/drawingml/2006/main">
               <a:ext uri="{FF2B5EF4-FFF2-40B4-BE49-F238E27FC236}">
-                <a16:creationId xmlns:a16="http://schemas.microsoft.com/office/drawing/2014/main" id="{7E0DE3ED-814D-4472-B8A6-9FA2360F1C42}"/>
+                <a16:creationId xmlns:a16="http://schemas.microsoft.com/office/drawing/2014/main" id="{7AD2E073-087A-453D-BF7E-9CB3A935F214}"/>
               </a:ext>
             </a:extLst>
           </p:cNvPr>
@@ -5274,7 +5274,7 @@
           <p:cNvPr id="21" name="Text 19">
             <a:extLst xmlns:a="http://schemas.openxmlformats.org/drawingml/2006/main">
               <a:ext uri="{FF2B5EF4-FFF2-40B4-BE49-F238E27FC236}">
-                <a16:creationId xmlns:a16="http://schemas.microsoft.com/office/drawing/2014/main" id="{2CA39239-E671-40F4-ACCE-351AEB4653D8}"/>
+                <a16:creationId xmlns:a16="http://schemas.microsoft.com/office/drawing/2014/main" id="{1D6BF9C2-136A-4853-9748-52515C64AE46}"/>
               </a:ext>
             </a:extLst>
           </p:cNvPr>
@@ -5319,7 +5319,7 @@
           <p:cNvPr id="22" name="Text 20">
             <a:extLst xmlns:a="http://schemas.openxmlformats.org/drawingml/2006/main">
               <a:ext uri="{FF2B5EF4-FFF2-40B4-BE49-F238E27FC236}">
-                <a16:creationId xmlns:a16="http://schemas.microsoft.com/office/drawing/2014/main" id="{00B9593A-30BE-4E77-B147-639273BB4F95}"/>
+                <a16:creationId xmlns:a16="http://schemas.microsoft.com/office/drawing/2014/main" id="{57D8526D-0EC7-4A6C-A0A8-FCBB28B96CF9}"/>
               </a:ext>
             </a:extLst>
           </p:cNvPr>
@@ -5364,7 +5364,7 @@
           <p:cNvPr id="23" name="Text 21">
             <a:extLst xmlns:a="http://schemas.openxmlformats.org/drawingml/2006/main">
               <a:ext uri="{FF2B5EF4-FFF2-40B4-BE49-F238E27FC236}">
-                <a16:creationId xmlns:a16="http://schemas.microsoft.com/office/drawing/2014/main" id="{4716C3BA-DD47-4735-BA57-7E453AA7E0E8}"/>
+                <a16:creationId xmlns:a16="http://schemas.microsoft.com/office/drawing/2014/main" id="{A5475EFF-A6DD-45A1-AF51-87E8113F4CC4}"/>
               </a:ext>
             </a:extLst>
           </p:cNvPr>
@@ -5409,7 +5409,7 @@
           <p:cNvPr id="24" name="Text 22">
             <a:extLst xmlns:a="http://schemas.openxmlformats.org/drawingml/2006/main">
               <a:ext uri="{FF2B5EF4-FFF2-40B4-BE49-F238E27FC236}">
-                <a16:creationId xmlns:a16="http://schemas.microsoft.com/office/drawing/2014/main" id="{7B95109B-DDAF-4567-B4E8-8EB99AAD349C}"/>
+                <a16:creationId xmlns:a16="http://schemas.microsoft.com/office/drawing/2014/main" id="{868404F0-4C70-4CED-8148-5547A9EA0336}"/>
               </a:ext>
             </a:extLst>
           </p:cNvPr>
@@ -5457,7 +5457,7 @@
           <p:cNvPr id="25" name="Shape 23">
             <a:extLst xmlns:a="http://schemas.openxmlformats.org/drawingml/2006/main">
               <a:ext uri="{FF2B5EF4-FFF2-40B4-BE49-F238E27FC236}">
-                <a16:creationId xmlns:a16="http://schemas.microsoft.com/office/drawing/2014/main" id="{75BD4CB9-9FF1-4654-B4DF-1DBA4EBF848B}"/>
+                <a16:creationId xmlns:a16="http://schemas.microsoft.com/office/drawing/2014/main" id="{ADCD27D5-E524-44B0-AC3A-E31FB055C7E4}"/>
               </a:ext>
             </a:extLst>
           </p:cNvPr>
@@ -5497,7 +5497,7 @@
           <p:cNvPr id="26" name="Text 24">
             <a:extLst xmlns:a="http://schemas.openxmlformats.org/drawingml/2006/main">
               <a:ext uri="{FF2B5EF4-FFF2-40B4-BE49-F238E27FC236}">
-                <a16:creationId xmlns:a16="http://schemas.microsoft.com/office/drawing/2014/main" id="{91633208-F87E-4A2B-AE1A-036760FE2964}"/>
+                <a16:creationId xmlns:a16="http://schemas.microsoft.com/office/drawing/2014/main" id="{33B42B3D-C2CB-43CE-B86A-5C580AA0492C}"/>
               </a:ext>
             </a:extLst>
           </p:cNvPr>
@@ -5556,7 +5556,7 @@
           <p:cNvPr id="27" name="Text 25">
             <a:extLst xmlns:a="http://schemas.openxmlformats.org/drawingml/2006/main">
               <a:ext uri="{FF2B5EF4-FFF2-40B4-BE49-F238E27FC236}">
-                <a16:creationId xmlns:a16="http://schemas.microsoft.com/office/drawing/2014/main" id="{186AA68C-B77C-493C-8677-CDED988CBE1A}"/>
+                <a16:creationId xmlns:a16="http://schemas.microsoft.com/office/drawing/2014/main" id="{077F90E4-E1C4-4B52-BB80-ADC8DB3D564D}"/>
               </a:ext>
             </a:extLst>
           </p:cNvPr>
@@ -5601,7 +5601,7 @@
           <p:cNvPr id="28" name="Shape 26">
             <a:extLst xmlns:a="http://schemas.openxmlformats.org/drawingml/2006/main">
               <a:ext uri="{FF2B5EF4-FFF2-40B4-BE49-F238E27FC236}">
-                <a16:creationId xmlns:a16="http://schemas.microsoft.com/office/drawing/2014/main" id="{5B960B41-17E0-4292-8E34-A461878A296C}"/>
+                <a16:creationId xmlns:a16="http://schemas.microsoft.com/office/drawing/2014/main" id="{0C338F39-58AA-46FD-8988-94AD3EF72EBB}"/>
               </a:ext>
             </a:extLst>
           </p:cNvPr>
@@ -5648,7 +5648,7 @@
           <p:cNvPr id="29" name="Text 27">
             <a:extLst xmlns:a="http://schemas.openxmlformats.org/drawingml/2006/main">
               <a:ext uri="{FF2B5EF4-FFF2-40B4-BE49-F238E27FC236}">
-                <a16:creationId xmlns:a16="http://schemas.microsoft.com/office/drawing/2014/main" id="{270FB956-0A40-4102-BAB7-9C6E18986464}"/>
+                <a16:creationId xmlns:a16="http://schemas.microsoft.com/office/drawing/2014/main" id="{E561C4BA-F9E8-4565-9DEC-6044D8D8CC1A}"/>
               </a:ext>
             </a:extLst>
           </p:cNvPr>
@@ -5693,7 +5693,7 @@
           <p:cNvPr id="30" name="Text 28">
             <a:extLst xmlns:a="http://schemas.openxmlformats.org/drawingml/2006/main">
               <a:ext uri="{FF2B5EF4-FFF2-40B4-BE49-F238E27FC236}">
-                <a16:creationId xmlns:a16="http://schemas.microsoft.com/office/drawing/2014/main" id="{90E4A94A-CD63-4E45-AACE-12CAEA27A4AA}"/>
+                <a16:creationId xmlns:a16="http://schemas.microsoft.com/office/drawing/2014/main" id="{7FF962BC-180F-4277-A95A-C9030D00864C}"/>
               </a:ext>
             </a:extLst>
           </p:cNvPr>
@@ -5738,7 +5738,7 @@
           <p:cNvPr id="31" name="Text 29">
             <a:extLst xmlns:a="http://schemas.openxmlformats.org/drawingml/2006/main">
               <a:ext uri="{FF2B5EF4-FFF2-40B4-BE49-F238E27FC236}">
-                <a16:creationId xmlns:a16="http://schemas.microsoft.com/office/drawing/2014/main" id="{00807E87-28B9-4BC6-924C-C567B42269BA}"/>
+                <a16:creationId xmlns:a16="http://schemas.microsoft.com/office/drawing/2014/main" id="{273A0FAF-57DC-4563-AB2E-55A0C839BFD5}"/>
               </a:ext>
             </a:extLst>
           </p:cNvPr>
@@ -5786,7 +5786,7 @@
           <p:cNvPr id="32" name="Shape 30">
             <a:extLst xmlns:a="http://schemas.openxmlformats.org/drawingml/2006/main">
               <a:ext uri="{FF2B5EF4-FFF2-40B4-BE49-F238E27FC236}">
-                <a16:creationId xmlns:a16="http://schemas.microsoft.com/office/drawing/2014/main" id="{FCD39C22-3575-488D-8ECC-940BDED26BB3}"/>
+                <a16:creationId xmlns:a16="http://schemas.microsoft.com/office/drawing/2014/main" id="{D1C8C9BA-D763-4E12-90A4-0346BBCCD997}"/>
               </a:ext>
             </a:extLst>
           </p:cNvPr>
@@ -5833,7 +5833,7 @@
           <p:cNvPr id="33" name="Text 31">
             <a:extLst xmlns:a="http://schemas.openxmlformats.org/drawingml/2006/main">
               <a:ext uri="{FF2B5EF4-FFF2-40B4-BE49-F238E27FC236}">
-                <a16:creationId xmlns:a16="http://schemas.microsoft.com/office/drawing/2014/main" id="{5CFEBF89-5849-45D8-A877-699BD4C44048}"/>
+                <a16:creationId xmlns:a16="http://schemas.microsoft.com/office/drawing/2014/main" id="{8C1F8F37-03B0-4C04-BD83-C5405C8704E0}"/>
               </a:ext>
             </a:extLst>
           </p:cNvPr>
@@ -5878,7 +5878,7 @@
           <p:cNvPr id="34" name="Text 32">
             <a:extLst xmlns:a="http://schemas.openxmlformats.org/drawingml/2006/main">
               <a:ext uri="{FF2B5EF4-FFF2-40B4-BE49-F238E27FC236}">
-                <a16:creationId xmlns:a16="http://schemas.microsoft.com/office/drawing/2014/main" id="{02F78123-EF92-412C-B0B6-34230535D62D}"/>
+                <a16:creationId xmlns:a16="http://schemas.microsoft.com/office/drawing/2014/main" id="{2254A5A2-4E0C-4B4F-8673-E8CDF49A96CF}"/>
               </a:ext>
             </a:extLst>
           </p:cNvPr>
@@ -5923,7 +5923,7 @@
           <p:cNvPr id="35" name="Text 33">
             <a:extLst xmlns:a="http://schemas.openxmlformats.org/drawingml/2006/main">
               <a:ext uri="{FF2B5EF4-FFF2-40B4-BE49-F238E27FC236}">
-                <a16:creationId xmlns:a16="http://schemas.microsoft.com/office/drawing/2014/main" id="{2565043C-8758-4B9E-8459-625656C6E4AF}"/>
+                <a16:creationId xmlns:a16="http://schemas.microsoft.com/office/drawing/2014/main" id="{28AB4A6F-9EAD-4395-B1D8-31DA4CA4C12A}"/>
               </a:ext>
             </a:extLst>
           </p:cNvPr>
@@ -5971,7 +5971,7 @@
           <p:cNvPr id="36" name="Shape 34">
             <a:extLst xmlns:a="http://schemas.openxmlformats.org/drawingml/2006/main">
               <a:ext uri="{FF2B5EF4-FFF2-40B4-BE49-F238E27FC236}">
-                <a16:creationId xmlns:a16="http://schemas.microsoft.com/office/drawing/2014/main" id="{9A18E547-17B0-4E35-8D97-71B5CE0996E6}"/>
+                <a16:creationId xmlns:a16="http://schemas.microsoft.com/office/drawing/2014/main" id="{BCD8687D-E6F5-4763-80A1-D5CC2037F8D0}"/>
               </a:ext>
             </a:extLst>
           </p:cNvPr>
@@ -6018,7 +6018,7 @@
           <p:cNvPr id="37" name="Text 35">
             <a:extLst xmlns:a="http://schemas.openxmlformats.org/drawingml/2006/main">
               <a:ext uri="{FF2B5EF4-FFF2-40B4-BE49-F238E27FC236}">
-                <a16:creationId xmlns:a16="http://schemas.microsoft.com/office/drawing/2014/main" id="{23C04B32-FF10-4DBA-BB5F-207062B51B16}"/>
+                <a16:creationId xmlns:a16="http://schemas.microsoft.com/office/drawing/2014/main" id="{4AA530E8-E92B-44F6-A19F-FB54B7EF2CE0}"/>
               </a:ext>
             </a:extLst>
           </p:cNvPr>
@@ -6063,7 +6063,7 @@
           <p:cNvPr id="38" name="Text 36">
             <a:extLst xmlns:a="http://schemas.openxmlformats.org/drawingml/2006/main">
               <a:ext uri="{FF2B5EF4-FFF2-40B4-BE49-F238E27FC236}">
-                <a16:creationId xmlns:a16="http://schemas.microsoft.com/office/drawing/2014/main" id="{95FC69AD-6074-45BC-B085-B91A93F4049D}"/>
+                <a16:creationId xmlns:a16="http://schemas.microsoft.com/office/drawing/2014/main" id="{A4F28B2D-F8E8-4869-A172-37C2726CF651}"/>
               </a:ext>
             </a:extLst>
           </p:cNvPr>
@@ -6108,7 +6108,7 @@
           <p:cNvPr id="39" name="Text 37">
             <a:extLst xmlns:a="http://schemas.openxmlformats.org/drawingml/2006/main">
               <a:ext uri="{FF2B5EF4-FFF2-40B4-BE49-F238E27FC236}">
-                <a16:creationId xmlns:a16="http://schemas.microsoft.com/office/drawing/2014/main" id="{72217F45-6396-4AEA-AE0A-11C580078E81}"/>
+                <a16:creationId xmlns:a16="http://schemas.microsoft.com/office/drawing/2014/main" id="{04A30CCC-5D8C-4891-B5DE-423198393442}"/>
               </a:ext>
             </a:extLst>
           </p:cNvPr>
@@ -6156,7 +6156,7 @@
           <p:cNvPr id="40" name="Shape 38">
             <a:extLst xmlns:a="http://schemas.openxmlformats.org/drawingml/2006/main">
               <a:ext uri="{FF2B5EF4-FFF2-40B4-BE49-F238E27FC236}">
-                <a16:creationId xmlns:a16="http://schemas.microsoft.com/office/drawing/2014/main" id="{620B5C35-F5A0-45B0-8EE7-913A4D2503E3}"/>
+                <a16:creationId xmlns:a16="http://schemas.microsoft.com/office/drawing/2014/main" id="{141B513E-4FB0-45A9-BEC5-EAAB808F2522}"/>
               </a:ext>
             </a:extLst>
           </p:cNvPr>
@@ -6203,7 +6203,7 @@
           <p:cNvPr id="41" name="Text 39">
             <a:extLst xmlns:a="http://schemas.openxmlformats.org/drawingml/2006/main">
               <a:ext uri="{FF2B5EF4-FFF2-40B4-BE49-F238E27FC236}">
-                <a16:creationId xmlns:a16="http://schemas.microsoft.com/office/drawing/2014/main" id="{3CF02BA7-00A9-4BFC-88B1-4B7145C1C64C}"/>
+                <a16:creationId xmlns:a16="http://schemas.microsoft.com/office/drawing/2014/main" id="{1A011EDC-D642-4F3B-BADB-564D4518F99D}"/>
               </a:ext>
             </a:extLst>
           </p:cNvPr>
@@ -6248,7 +6248,7 @@
           <p:cNvPr id="42" name="Text 40">
             <a:extLst xmlns:a="http://schemas.openxmlformats.org/drawingml/2006/main">
               <a:ext uri="{FF2B5EF4-FFF2-40B4-BE49-F238E27FC236}">
-                <a16:creationId xmlns:a16="http://schemas.microsoft.com/office/drawing/2014/main" id="{52D7FA52-6DEB-4299-98BF-D76365A5A621}"/>
+                <a16:creationId xmlns:a16="http://schemas.microsoft.com/office/drawing/2014/main" id="{10EC9FE6-72BC-4CD9-BDB5-52799DC512C3}"/>
               </a:ext>
             </a:extLst>
           </p:cNvPr>
@@ -6293,7 +6293,7 @@
           <p:cNvPr id="43" name="Text 41">
             <a:extLst xmlns:a="http://schemas.openxmlformats.org/drawingml/2006/main">
               <a:ext uri="{FF2B5EF4-FFF2-40B4-BE49-F238E27FC236}">
-                <a16:creationId xmlns:a16="http://schemas.microsoft.com/office/drawing/2014/main" id="{00822038-8635-4B85-A245-4904BA2AD515}"/>
+                <a16:creationId xmlns:a16="http://schemas.microsoft.com/office/drawing/2014/main" id="{747E2B1F-F690-48CA-A16A-1EBA9C2274CD}"/>
               </a:ext>
             </a:extLst>
           </p:cNvPr>
@@ -6341,7 +6341,7 @@
           <p:cNvPr id="44" name="Shape 42">
             <a:extLst xmlns:a="http://schemas.openxmlformats.org/drawingml/2006/main">
               <a:ext uri="{FF2B5EF4-FFF2-40B4-BE49-F238E27FC236}">
-                <a16:creationId xmlns:a16="http://schemas.microsoft.com/office/drawing/2014/main" id="{73DD6B12-CF13-4C82-A173-DCEEA990C2E3}"/>
+                <a16:creationId xmlns:a16="http://schemas.microsoft.com/office/drawing/2014/main" id="{BF74F8E6-D932-4437-9BE6-2D260CA5D124}"/>
               </a:ext>
             </a:extLst>
           </p:cNvPr>
@@ -6388,7 +6388,7 @@
           <p:cNvPr id="45" name="Text 43">
             <a:extLst xmlns:a="http://schemas.openxmlformats.org/drawingml/2006/main">
               <a:ext uri="{FF2B5EF4-FFF2-40B4-BE49-F238E27FC236}">
-                <a16:creationId xmlns:a16="http://schemas.microsoft.com/office/drawing/2014/main" id="{CBB8800C-AE89-49BD-A466-E307DE991D20}"/>
+                <a16:creationId xmlns:a16="http://schemas.microsoft.com/office/drawing/2014/main" id="{6444AB96-9603-48C3-94FB-F020C65B7B44}"/>
               </a:ext>
             </a:extLst>
           </p:cNvPr>
@@ -6433,7 +6433,7 @@
           <p:cNvPr id="46" name="Text 44">
             <a:extLst xmlns:a="http://schemas.openxmlformats.org/drawingml/2006/main">
               <a:ext uri="{FF2B5EF4-FFF2-40B4-BE49-F238E27FC236}">
-                <a16:creationId xmlns:a16="http://schemas.microsoft.com/office/drawing/2014/main" id="{2688AC75-FAD6-4231-A37F-34F94627D21B}"/>
+                <a16:creationId xmlns:a16="http://schemas.microsoft.com/office/drawing/2014/main" id="{BD641C89-B131-4C39-86CF-3171BD7DD37D}"/>
               </a:ext>
             </a:extLst>
           </p:cNvPr>
@@ -6478,7 +6478,7 @@
           <p:cNvPr id="47" name="Text 45">
             <a:extLst xmlns:a="http://schemas.openxmlformats.org/drawingml/2006/main">
               <a:ext uri="{FF2B5EF4-FFF2-40B4-BE49-F238E27FC236}">
-                <a16:creationId xmlns:a16="http://schemas.microsoft.com/office/drawing/2014/main" id="{4B116AF2-DF51-466E-AC59-800CDD54B111}"/>
+                <a16:creationId xmlns:a16="http://schemas.microsoft.com/office/drawing/2014/main" id="{C4956E1D-BF16-4B43-A3EC-EF54EAA74DFB}"/>
               </a:ext>
             </a:extLst>
           </p:cNvPr>
@@ -6526,7 +6526,7 @@
           <p:cNvPr id="48" name="Shape 46">
             <a:extLst xmlns:a="http://schemas.openxmlformats.org/drawingml/2006/main">
               <a:ext uri="{FF2B5EF4-FFF2-40B4-BE49-F238E27FC236}">
-                <a16:creationId xmlns:a16="http://schemas.microsoft.com/office/drawing/2014/main" id="{AB503850-FC5E-4137-AC08-C64217B17216}"/>
+                <a16:creationId xmlns:a16="http://schemas.microsoft.com/office/drawing/2014/main" id="{4C8B8136-0679-41D7-A25C-5EBB02E9250D}"/>
               </a:ext>
             </a:extLst>
           </p:cNvPr>
@@ -6573,7 +6573,7 @@
           <p:cNvPr id="49" name="Text 47">
             <a:extLst xmlns:a="http://schemas.openxmlformats.org/drawingml/2006/main">
               <a:ext uri="{FF2B5EF4-FFF2-40B4-BE49-F238E27FC236}">
-                <a16:creationId xmlns:a16="http://schemas.microsoft.com/office/drawing/2014/main" id="{048E6FF2-8025-456C-AFF6-3574B20F59B1}"/>
+                <a16:creationId xmlns:a16="http://schemas.microsoft.com/office/drawing/2014/main" id="{052C73AB-E920-4CE0-BD1A-4B9882382EA6}"/>
               </a:ext>
             </a:extLst>
           </p:cNvPr>
@@ -6618,7 +6618,7 @@
           <p:cNvPr id="50" name="Text 48">
             <a:extLst xmlns:a="http://schemas.openxmlformats.org/drawingml/2006/main">
               <a:ext uri="{FF2B5EF4-FFF2-40B4-BE49-F238E27FC236}">
-                <a16:creationId xmlns:a16="http://schemas.microsoft.com/office/drawing/2014/main" id="{517BB504-23E0-48DE-B6B0-95032DA93D13}"/>
+                <a16:creationId xmlns:a16="http://schemas.microsoft.com/office/drawing/2014/main" id="{A6FF8688-DE00-4062-889E-0E7B2166B2E5}"/>
               </a:ext>
             </a:extLst>
           </p:cNvPr>
@@ -6663,7 +6663,7 @@
           <p:cNvPr id="51" name="Text 49">
             <a:extLst xmlns:a="http://schemas.openxmlformats.org/drawingml/2006/main">
               <a:ext uri="{FF2B5EF4-FFF2-40B4-BE49-F238E27FC236}">
-                <a16:creationId xmlns:a16="http://schemas.microsoft.com/office/drawing/2014/main" id="{0CC6A3E4-C6A7-477B-BA9D-6B26ACDA6499}"/>
+                <a16:creationId xmlns:a16="http://schemas.microsoft.com/office/drawing/2014/main" id="{75C47CC3-3105-4FFF-B756-037CCACF6FCC}"/>
               </a:ext>
             </a:extLst>
           </p:cNvPr>
@@ -6711,7 +6711,7 @@
           <p:cNvPr id="52" name="Text 50">
             <a:extLst xmlns:a="http://schemas.openxmlformats.org/drawingml/2006/main">
               <a:ext uri="{FF2B5EF4-FFF2-40B4-BE49-F238E27FC236}">
-                <a16:creationId xmlns:a16="http://schemas.microsoft.com/office/drawing/2014/main" id="{4043DF46-9B3D-4807-87FD-6DCCA4195D65}"/>
+                <a16:creationId xmlns:a16="http://schemas.microsoft.com/office/drawing/2014/main" id="{3C121E2E-2511-4B5B-819D-88232DFD8268}"/>
               </a:ext>
             </a:extLst>
           </p:cNvPr>
@@ -6757,7 +6757,7 @@
     </p:spTree>
     <p:extLst>
       <p:ext uri="{BB962C8B-B14F-4D97-AF65-F5344CB8AC3E}">
-        <p14:creationId xmlns:p14="http://schemas.microsoft.com/office/powerpoint/2010/main" val="238593770"/>
+        <p14:creationId xmlns:p14="http://schemas.microsoft.com/office/powerpoint/2010/main" val="1115104044"/>
       </p:ext>
     </p:extLst>
   </p:cSld>
@@ -6788,7 +6788,7 @@
           <p:cNvPr id="2" name="Text 0">
             <a:extLst xmlns:a="http://schemas.openxmlformats.org/drawingml/2006/main">
               <a:ext uri="{FF2B5EF4-FFF2-40B4-BE49-F238E27FC236}">
-                <a16:creationId xmlns:a16="http://schemas.microsoft.com/office/drawing/2014/main" id="{439E3D11-7EED-48A4-8782-AE4817CC4EDE}"/>
+                <a16:creationId xmlns:a16="http://schemas.microsoft.com/office/drawing/2014/main" id="{3ED57903-4B52-4727-A5A9-F14DBA6110E0}"/>
               </a:ext>
             </a:extLst>
           </p:cNvPr>
@@ -6833,7 +6833,7 @@
           <p:cNvPr id="3" name="Text 1">
             <a:extLst xmlns:a="http://schemas.openxmlformats.org/drawingml/2006/main">
               <a:ext uri="{FF2B5EF4-FFF2-40B4-BE49-F238E27FC236}">
-                <a16:creationId xmlns:a16="http://schemas.microsoft.com/office/drawing/2014/main" id="{352D0EC0-6E09-4D83-98B5-EB8B5AF532E6}"/>
+                <a16:creationId xmlns:a16="http://schemas.microsoft.com/office/drawing/2014/main" id="{F6A2B037-01D3-4433-A713-55AF8B22E5F7}"/>
               </a:ext>
             </a:extLst>
           </p:cNvPr>
@@ -6878,7 +6878,7 @@
           <p:cNvPr id="4" name="Text 2">
             <a:extLst xmlns:a="http://schemas.openxmlformats.org/drawingml/2006/main">
               <a:ext uri="{FF2B5EF4-FFF2-40B4-BE49-F238E27FC236}">
-                <a16:creationId xmlns:a16="http://schemas.microsoft.com/office/drawing/2014/main" id="{A167092D-FF63-4761-8569-1FB278AAC1BF}"/>
+                <a16:creationId xmlns:a16="http://schemas.microsoft.com/office/drawing/2014/main" id="{0CAE22BE-E5E9-4E82-8520-6A0BB11687B2}"/>
               </a:ext>
             </a:extLst>
           </p:cNvPr>
@@ -6923,7 +6923,7 @@
           <p:cNvPr id="5" name="Text 3">
             <a:extLst xmlns:a="http://schemas.openxmlformats.org/drawingml/2006/main">
               <a:ext uri="{FF2B5EF4-FFF2-40B4-BE49-F238E27FC236}">
-                <a16:creationId xmlns:a16="http://schemas.microsoft.com/office/drawing/2014/main" id="{90B927DC-3A3E-4A4F-930C-BFF44BB341CE}"/>
+                <a16:creationId xmlns:a16="http://schemas.microsoft.com/office/drawing/2014/main" id="{ACC78217-3A70-48B8-B661-4BE60DB2547F}"/>
               </a:ext>
             </a:extLst>
           </p:cNvPr>
@@ -6968,7 +6968,7 @@
           <p:cNvPr id="6" name="Text 4">
             <a:extLst xmlns:a="http://schemas.openxmlformats.org/drawingml/2006/main">
               <a:ext uri="{FF2B5EF4-FFF2-40B4-BE49-F238E27FC236}">
-                <a16:creationId xmlns:a16="http://schemas.microsoft.com/office/drawing/2014/main" id="{9934239D-1316-4823-B1C7-AC3DD7E70B60}"/>
+                <a16:creationId xmlns:a16="http://schemas.microsoft.com/office/drawing/2014/main" id="{0292D74C-9F67-4C91-901E-ECB6F7BF522B}"/>
               </a:ext>
             </a:extLst>
           </p:cNvPr>
@@ -7016,7 +7016,7 @@
           <p:cNvPr id="7" name="Shape 5">
             <a:extLst xmlns:a="http://schemas.openxmlformats.org/drawingml/2006/main">
               <a:ext uri="{FF2B5EF4-FFF2-40B4-BE49-F238E27FC236}">
-                <a16:creationId xmlns:a16="http://schemas.microsoft.com/office/drawing/2014/main" id="{AFD68B09-0F11-4DB9-98A6-CF67E9D8D343}"/>
+                <a16:creationId xmlns:a16="http://schemas.microsoft.com/office/drawing/2014/main" id="{94832171-6381-4824-B423-719387CA6095}"/>
               </a:ext>
             </a:extLst>
           </p:cNvPr>
@@ -7060,7 +7060,7 @@
           <p:nvPr/>
         </p:nvPicPr>
         <p:blipFill>
-          <a:blip xmlns:r="http://schemas.openxmlformats.org/officeDocument/2006/relationships" xmlns:a="http://schemas.openxmlformats.org/drawingml/2006/main" r:embed="Ra8eec77ba32d4de0"/>
+          <a:blip xmlns:r="http://schemas.openxmlformats.org/officeDocument/2006/relationships" xmlns:a="http://schemas.openxmlformats.org/drawingml/2006/main" r:embed="R16877d1251b0474e"/>
           <a:stretch xmlns:a="http://schemas.openxmlformats.org/drawingml/2006/main">
             <a:fillRect l="0" t="0" r="0" b="0"/>
           </a:stretch>
@@ -7080,7 +7080,7 @@
           <p:cNvPr id="9" name="Text 6">
             <a:extLst xmlns:a="http://schemas.openxmlformats.org/drawingml/2006/main">
               <a:ext uri="{FF2B5EF4-FFF2-40B4-BE49-F238E27FC236}">
-                <a16:creationId xmlns:a16="http://schemas.microsoft.com/office/drawing/2014/main" id="{6F73282A-3348-48F4-B0B8-C7621FFF30DB}"/>
+                <a16:creationId xmlns:a16="http://schemas.microsoft.com/office/drawing/2014/main" id="{5CBFAE71-420E-4F55-A716-6E0AA5408AE1}"/>
               </a:ext>
             </a:extLst>
           </p:cNvPr>
@@ -7128,7 +7128,7 @@
           <p:cNvPr id="10" name="Text 7">
             <a:extLst xmlns:a="http://schemas.openxmlformats.org/drawingml/2006/main">
               <a:ext uri="{FF2B5EF4-FFF2-40B4-BE49-F238E27FC236}">
-                <a16:creationId xmlns:a16="http://schemas.microsoft.com/office/drawing/2014/main" id="{1A64F7CF-57F9-4BD1-ABE7-0A879F3EB6C1}"/>
+                <a16:creationId xmlns:a16="http://schemas.microsoft.com/office/drawing/2014/main" id="{A132C4FF-6305-480A-B9D5-D8274FB99686}"/>
               </a:ext>
             </a:extLst>
           </p:cNvPr>
@@ -7173,7 +7173,7 @@
           <p:cNvPr id="11" name="Shape 8">
             <a:extLst xmlns:a="http://schemas.openxmlformats.org/drawingml/2006/main">
               <a:ext uri="{FF2B5EF4-FFF2-40B4-BE49-F238E27FC236}">
-                <a16:creationId xmlns:a16="http://schemas.microsoft.com/office/drawing/2014/main" id="{E007335F-323E-417A-A031-2810C7B257A6}"/>
+                <a16:creationId xmlns:a16="http://schemas.microsoft.com/office/drawing/2014/main" id="{3527A359-B5AE-403F-BA19-3E581798AC58}"/>
               </a:ext>
             </a:extLst>
           </p:cNvPr>
@@ -7220,7 +7220,7 @@
           <p:cNvPr id="12" name="Text 9">
             <a:extLst xmlns:a="http://schemas.openxmlformats.org/drawingml/2006/main">
               <a:ext uri="{FF2B5EF4-FFF2-40B4-BE49-F238E27FC236}">
-                <a16:creationId xmlns:a16="http://schemas.microsoft.com/office/drawing/2014/main" id="{23AF2315-D890-4E69-92F5-5F01707B8A88}"/>
+                <a16:creationId xmlns:a16="http://schemas.microsoft.com/office/drawing/2014/main" id="{C0938070-5F51-41F2-83E2-9DBD347EE2B1}"/>
               </a:ext>
             </a:extLst>
           </p:cNvPr>
@@ -7279,7 +7279,7 @@
           <p:cNvPr id="13" name="Shape 10">
             <a:extLst xmlns:a="http://schemas.openxmlformats.org/drawingml/2006/main">
               <a:ext uri="{FF2B5EF4-FFF2-40B4-BE49-F238E27FC236}">
-                <a16:creationId xmlns:a16="http://schemas.microsoft.com/office/drawing/2014/main" id="{8B4E302E-5AAB-4FDE-8AAB-D936B9704345}"/>
+                <a16:creationId xmlns:a16="http://schemas.microsoft.com/office/drawing/2014/main" id="{0424A512-DA21-4162-9A19-8C0351E6A593}"/>
               </a:ext>
             </a:extLst>
           </p:cNvPr>
@@ -7323,7 +7323,7 @@
           <p:nvPr/>
         </p:nvPicPr>
         <p:blipFill>
-          <a:blip xmlns:r="http://schemas.openxmlformats.org/officeDocument/2006/relationships" xmlns:a="http://schemas.openxmlformats.org/drawingml/2006/main" r:embed="R9fc9e99a1b504696"/>
+          <a:blip xmlns:r="http://schemas.openxmlformats.org/officeDocument/2006/relationships" xmlns:a="http://schemas.openxmlformats.org/drawingml/2006/main" r:embed="Rd0b8479292334ad2"/>
           <a:stretch xmlns:a="http://schemas.openxmlformats.org/drawingml/2006/main">
             <a:fillRect l="0" t="0" r="0" b="0"/>
           </a:stretch>
@@ -7343,7 +7343,7 @@
           <p:cNvPr id="15" name="Text 11">
             <a:extLst xmlns:a="http://schemas.openxmlformats.org/drawingml/2006/main">
               <a:ext uri="{FF2B5EF4-FFF2-40B4-BE49-F238E27FC236}">
-                <a16:creationId xmlns:a16="http://schemas.microsoft.com/office/drawing/2014/main" id="{718A3E41-0491-4888-AA12-B53BAC4B275A}"/>
+                <a16:creationId xmlns:a16="http://schemas.microsoft.com/office/drawing/2014/main" id="{B43EB4F3-EBA5-4B99-89C6-88CAE698AAFD}"/>
               </a:ext>
             </a:extLst>
           </p:cNvPr>
@@ -7391,7 +7391,7 @@
           <p:cNvPr id="16" name="Text 12">
             <a:extLst xmlns:a="http://schemas.openxmlformats.org/drawingml/2006/main">
               <a:ext uri="{FF2B5EF4-FFF2-40B4-BE49-F238E27FC236}">
-                <a16:creationId xmlns:a16="http://schemas.microsoft.com/office/drawing/2014/main" id="{472EC90B-242D-49D7-8826-48E6400E724D}"/>
+                <a16:creationId xmlns:a16="http://schemas.microsoft.com/office/drawing/2014/main" id="{BA53BF83-6222-4311-B88B-06FCA955ED51}"/>
               </a:ext>
             </a:extLst>
           </p:cNvPr>
@@ -7436,7 +7436,7 @@
           <p:cNvPr id="17" name="Shape 13">
             <a:extLst xmlns:a="http://schemas.openxmlformats.org/drawingml/2006/main">
               <a:ext uri="{FF2B5EF4-FFF2-40B4-BE49-F238E27FC236}">
-                <a16:creationId xmlns:a16="http://schemas.microsoft.com/office/drawing/2014/main" id="{424E5DE7-7F29-4BA5-A14F-225EAE2E9B6E}"/>
+                <a16:creationId xmlns:a16="http://schemas.microsoft.com/office/drawing/2014/main" id="{2D747065-6555-4296-BD91-EB4A119CEEFE}"/>
               </a:ext>
             </a:extLst>
           </p:cNvPr>
@@ -7483,7 +7483,7 @@
           <p:cNvPr id="18" name="Text 14">
             <a:extLst xmlns:a="http://schemas.openxmlformats.org/drawingml/2006/main">
               <a:ext uri="{FF2B5EF4-FFF2-40B4-BE49-F238E27FC236}">
-                <a16:creationId xmlns:a16="http://schemas.microsoft.com/office/drawing/2014/main" id="{DBFD83B6-B71F-4D99-B02C-411A4038342B}"/>
+                <a16:creationId xmlns:a16="http://schemas.microsoft.com/office/drawing/2014/main" id="{72676266-99B7-4680-9631-65AE794970AA}"/>
               </a:ext>
             </a:extLst>
           </p:cNvPr>
@@ -7528,7 +7528,7 @@
           <p:cNvPr id="19" name="Text 15">
             <a:extLst xmlns:a="http://schemas.openxmlformats.org/drawingml/2006/main">
               <a:ext uri="{FF2B5EF4-FFF2-40B4-BE49-F238E27FC236}">
-                <a16:creationId xmlns:a16="http://schemas.microsoft.com/office/drawing/2014/main" id="{E82C6371-1AD5-488E-8D3A-6975C32E13CC}"/>
+                <a16:creationId xmlns:a16="http://schemas.microsoft.com/office/drawing/2014/main" id="{6439169A-773D-4980-98A7-13819196DEF4}"/>
               </a:ext>
             </a:extLst>
           </p:cNvPr>
@@ -7573,7 +7573,7 @@
           <p:cNvPr id="20" name="Text 16">
             <a:extLst xmlns:a="http://schemas.openxmlformats.org/drawingml/2006/main">
               <a:ext uri="{FF2B5EF4-FFF2-40B4-BE49-F238E27FC236}">
-                <a16:creationId xmlns:a16="http://schemas.microsoft.com/office/drawing/2014/main" id="{895E7345-5533-467B-9B73-F9F87A8FC29A}"/>
+                <a16:creationId xmlns:a16="http://schemas.microsoft.com/office/drawing/2014/main" id="{A316A697-E455-4A77-AB6E-A4344EB34463}"/>
               </a:ext>
             </a:extLst>
           </p:cNvPr>
@@ -7618,7 +7618,7 @@
           <p:cNvPr id="21" name="Text 17">
             <a:extLst xmlns:a="http://schemas.openxmlformats.org/drawingml/2006/main">
               <a:ext uri="{FF2B5EF4-FFF2-40B4-BE49-F238E27FC236}">
-                <a16:creationId xmlns:a16="http://schemas.microsoft.com/office/drawing/2014/main" id="{E09D6245-00F5-4717-9DDA-7EAA687359A8}"/>
+                <a16:creationId xmlns:a16="http://schemas.microsoft.com/office/drawing/2014/main" id="{7C58735D-92E2-4ACD-B16E-6C1BE8FB7A0C}"/>
               </a:ext>
             </a:extLst>
           </p:cNvPr>
@@ -7663,7 +7663,7 @@
           <p:cNvPr id="22" name="Text 18">
             <a:extLst xmlns:a="http://schemas.openxmlformats.org/drawingml/2006/main">
               <a:ext uri="{FF2B5EF4-FFF2-40B4-BE49-F238E27FC236}">
-                <a16:creationId xmlns:a16="http://schemas.microsoft.com/office/drawing/2014/main" id="{2737E225-D5D3-460C-8EFB-A95DF10449DC}"/>
+                <a16:creationId xmlns:a16="http://schemas.microsoft.com/office/drawing/2014/main" id="{33866E99-1CB3-464A-8081-19A4B5A30E4A}"/>
               </a:ext>
             </a:extLst>
           </p:cNvPr>
@@ -7708,7 +7708,7 @@
           <p:cNvPr id="23" name="Text 19">
             <a:extLst xmlns:a="http://schemas.openxmlformats.org/drawingml/2006/main">
               <a:ext uri="{FF2B5EF4-FFF2-40B4-BE49-F238E27FC236}">
-                <a16:creationId xmlns:a16="http://schemas.microsoft.com/office/drawing/2014/main" id="{88060CBF-DAF4-4062-91FD-9CED2F8576D9}"/>
+                <a16:creationId xmlns:a16="http://schemas.microsoft.com/office/drawing/2014/main" id="{F10A3E28-F0DA-49F6-992C-FC701D64FC85}"/>
               </a:ext>
             </a:extLst>
           </p:cNvPr>
@@ -7753,7 +7753,7 @@
           <p:cNvPr id="24" name="Text 20">
             <a:extLst xmlns:a="http://schemas.openxmlformats.org/drawingml/2006/main">
               <a:ext uri="{FF2B5EF4-FFF2-40B4-BE49-F238E27FC236}">
-                <a16:creationId xmlns:a16="http://schemas.microsoft.com/office/drawing/2014/main" id="{ED37D85A-5D81-4681-BC43-1EA0D39CAF6F}"/>
+                <a16:creationId xmlns:a16="http://schemas.microsoft.com/office/drawing/2014/main" id="{9AB5B5FE-5A7F-425C-8A60-9D426AA12E08}"/>
               </a:ext>
             </a:extLst>
           </p:cNvPr>
@@ -7798,7 +7798,7 @@
           <p:cNvPr id="25" name="Shape 21">
             <a:extLst xmlns:a="http://schemas.openxmlformats.org/drawingml/2006/main">
               <a:ext uri="{FF2B5EF4-FFF2-40B4-BE49-F238E27FC236}">
-                <a16:creationId xmlns:a16="http://schemas.microsoft.com/office/drawing/2014/main" id="{551C620B-EDB5-4C3D-96B1-45EEBB070790}"/>
+                <a16:creationId xmlns:a16="http://schemas.microsoft.com/office/drawing/2014/main" id="{F4D0F818-F612-4B09-AA1C-197FB9485523}"/>
               </a:ext>
             </a:extLst>
           </p:cNvPr>
@@ -7834,7 +7834,7 @@
           <p:cNvPr id="26" name="Text 22">
             <a:extLst xmlns:a="http://schemas.openxmlformats.org/drawingml/2006/main">
               <a:ext uri="{FF2B5EF4-FFF2-40B4-BE49-F238E27FC236}">
-                <a16:creationId xmlns:a16="http://schemas.microsoft.com/office/drawing/2014/main" id="{CBFF5ED0-FCF8-4AF0-9077-222E8389B304}"/>
+                <a16:creationId xmlns:a16="http://schemas.microsoft.com/office/drawing/2014/main" id="{FB64ABAE-E38B-4CE4-8DB3-75C8CA11BA2B}"/>
               </a:ext>
             </a:extLst>
           </p:cNvPr>
@@ -7912,7 +7912,7 @@
           <p:cNvPr id="27" name="Text 23">
             <a:extLst xmlns:a="http://schemas.openxmlformats.org/drawingml/2006/main">
               <a:ext uri="{FF2B5EF4-FFF2-40B4-BE49-F238E27FC236}">
-                <a16:creationId xmlns:a16="http://schemas.microsoft.com/office/drawing/2014/main" id="{A7D77B73-7CA3-4938-999C-A86233BA18F2}"/>
+                <a16:creationId xmlns:a16="http://schemas.microsoft.com/office/drawing/2014/main" id="{82635CC0-81EE-4C2F-8817-4E6DCEB71DF7}"/>
               </a:ext>
             </a:extLst>
           </p:cNvPr>
@@ -7958,7 +7958,7 @@
     </p:spTree>
     <p:extLst>
       <p:ext uri="{BB962C8B-B14F-4D97-AF65-F5344CB8AC3E}">
-        <p14:creationId xmlns:p14="http://schemas.microsoft.com/office/powerpoint/2010/main" val="65804213"/>
+        <p14:creationId xmlns:p14="http://schemas.microsoft.com/office/powerpoint/2010/main" val="163536948"/>
       </p:ext>
     </p:extLst>
   </p:cSld>
@@ -7989,7 +7989,7 @@
           <p:cNvPr id="2" name="Text 0">
             <a:extLst xmlns:a="http://schemas.openxmlformats.org/drawingml/2006/main">
               <a:ext uri="{FF2B5EF4-FFF2-40B4-BE49-F238E27FC236}">
-                <a16:creationId xmlns:a16="http://schemas.microsoft.com/office/drawing/2014/main" id="{0C3F007A-A2D3-42E9-BBFD-3ECE07169FD8}"/>
+                <a16:creationId xmlns:a16="http://schemas.microsoft.com/office/drawing/2014/main" id="{374EEFE2-BBC1-4B37-9839-89C745F85F5C}"/>
               </a:ext>
             </a:extLst>
           </p:cNvPr>
@@ -8034,7 +8034,7 @@
           <p:cNvPr id="3" name="Text 1">
             <a:extLst xmlns:a="http://schemas.openxmlformats.org/drawingml/2006/main">
               <a:ext uri="{FF2B5EF4-FFF2-40B4-BE49-F238E27FC236}">
-                <a16:creationId xmlns:a16="http://schemas.microsoft.com/office/drawing/2014/main" id="{A83743AE-565D-4283-B3A2-30FF5D4CCADD}"/>
+                <a16:creationId xmlns:a16="http://schemas.microsoft.com/office/drawing/2014/main" id="{3BE271EB-A036-4066-AEFA-E1BBFF11EE82}"/>
               </a:ext>
             </a:extLst>
           </p:cNvPr>
@@ -8079,7 +8079,7 @@
           <p:cNvPr id="4" name="Text 2">
             <a:extLst xmlns:a="http://schemas.openxmlformats.org/drawingml/2006/main">
               <a:ext uri="{FF2B5EF4-FFF2-40B4-BE49-F238E27FC236}">
-                <a16:creationId xmlns:a16="http://schemas.microsoft.com/office/drawing/2014/main" id="{B2BF6145-14A4-4E2A-AB75-AD6D4BE9A5B8}"/>
+                <a16:creationId xmlns:a16="http://schemas.microsoft.com/office/drawing/2014/main" id="{C4A9A898-3713-4ED8-8B18-37C7229B5134}"/>
               </a:ext>
             </a:extLst>
           </p:cNvPr>
@@ -8124,7 +8124,7 @@
           <p:cNvPr id="5" name="Text 3">
             <a:extLst xmlns:a="http://schemas.openxmlformats.org/drawingml/2006/main">
               <a:ext uri="{FF2B5EF4-FFF2-40B4-BE49-F238E27FC236}">
-                <a16:creationId xmlns:a16="http://schemas.microsoft.com/office/drawing/2014/main" id="{DACFD91B-9EED-4190-840F-A90B7E3F46B5}"/>
+                <a16:creationId xmlns:a16="http://schemas.microsoft.com/office/drawing/2014/main" id="{4BC4184B-4097-44F2-A963-E6202866B17F}"/>
               </a:ext>
             </a:extLst>
           </p:cNvPr>
@@ -8169,7 +8169,7 @@
           <p:cNvPr id="6" name="Shape 4">
             <a:extLst xmlns:a="http://schemas.openxmlformats.org/drawingml/2006/main">
               <a:ext uri="{FF2B5EF4-FFF2-40B4-BE49-F238E27FC236}">
-                <a16:creationId xmlns:a16="http://schemas.microsoft.com/office/drawing/2014/main" id="{62FED1B1-8174-4C46-95AD-5BB4826CD4D9}"/>
+                <a16:creationId xmlns:a16="http://schemas.microsoft.com/office/drawing/2014/main" id="{A668C6CF-7B1F-4903-AA3D-1A0164441DB3}"/>
               </a:ext>
             </a:extLst>
           </p:cNvPr>
@@ -8216,7 +8216,7 @@
           <p:cNvPr id="7" name="Text 5">
             <a:extLst xmlns:a="http://schemas.openxmlformats.org/drawingml/2006/main">
               <a:ext uri="{FF2B5EF4-FFF2-40B4-BE49-F238E27FC236}">
-                <a16:creationId xmlns:a16="http://schemas.microsoft.com/office/drawing/2014/main" id="{0C3D06FA-0C6E-4F6B-AB56-13F6A0449018}"/>
+                <a16:creationId xmlns:a16="http://schemas.microsoft.com/office/drawing/2014/main" id="{22F8CD21-38C9-439A-885D-162487E2EE4E}"/>
               </a:ext>
             </a:extLst>
           </p:cNvPr>
@@ -8261,7 +8261,7 @@
           <p:cNvPr id="8" name="Text 6">
             <a:extLst xmlns:a="http://schemas.openxmlformats.org/drawingml/2006/main">
               <a:ext uri="{FF2B5EF4-FFF2-40B4-BE49-F238E27FC236}">
-                <a16:creationId xmlns:a16="http://schemas.microsoft.com/office/drawing/2014/main" id="{791F96C4-2378-4F22-BC2A-98E0AEDA7223}"/>
+                <a16:creationId xmlns:a16="http://schemas.microsoft.com/office/drawing/2014/main" id="{DCF0EC79-7174-4AB8-B181-2AF4C2A5DD14}"/>
               </a:ext>
             </a:extLst>
           </p:cNvPr>
@@ -8378,7 +8378,7 @@
           <p:cNvPr id="9" name="Shape 7">
             <a:extLst xmlns:a="http://schemas.openxmlformats.org/drawingml/2006/main">
               <a:ext uri="{FF2B5EF4-FFF2-40B4-BE49-F238E27FC236}">
-                <a16:creationId xmlns:a16="http://schemas.microsoft.com/office/drawing/2014/main" id="{42B03E7C-8828-4390-B897-DA9F89C94047}"/>
+                <a16:creationId xmlns:a16="http://schemas.microsoft.com/office/drawing/2014/main" id="{962DF9CC-9AD0-4FF3-A743-852025645C46}"/>
               </a:ext>
             </a:extLst>
           </p:cNvPr>
@@ -8425,7 +8425,7 @@
           <p:cNvPr id="10" name="Text 8">
             <a:extLst xmlns:a="http://schemas.openxmlformats.org/drawingml/2006/main">
               <a:ext uri="{FF2B5EF4-FFF2-40B4-BE49-F238E27FC236}">
-                <a16:creationId xmlns:a16="http://schemas.microsoft.com/office/drawing/2014/main" id="{F4172407-983A-4CF2-8E9F-198E9BBD172E}"/>
+                <a16:creationId xmlns:a16="http://schemas.microsoft.com/office/drawing/2014/main" id="{7FA35072-05FE-439C-A8DD-AD669DEF9296}"/>
               </a:ext>
             </a:extLst>
           </p:cNvPr>
@@ -8470,7 +8470,7 @@
           <p:cNvPr id="11" name="Text 9">
             <a:extLst xmlns:a="http://schemas.openxmlformats.org/drawingml/2006/main">
               <a:ext uri="{FF2B5EF4-FFF2-40B4-BE49-F238E27FC236}">
-                <a16:creationId xmlns:a16="http://schemas.microsoft.com/office/drawing/2014/main" id="{E67D9AB2-37B9-4330-AF1B-A30CBCDC921E}"/>
+                <a16:creationId xmlns:a16="http://schemas.microsoft.com/office/drawing/2014/main" id="{D9693D36-F903-41A8-B868-0FE2F2BE897E}"/>
               </a:ext>
             </a:extLst>
           </p:cNvPr>
@@ -8609,7 +8609,7 @@
           <p:cNvPr id="12" name="Shape 10">
             <a:extLst xmlns:a="http://schemas.openxmlformats.org/drawingml/2006/main">
               <a:ext uri="{FF2B5EF4-FFF2-40B4-BE49-F238E27FC236}">
-                <a16:creationId xmlns:a16="http://schemas.microsoft.com/office/drawing/2014/main" id="{7D6520B3-B147-49BD-81D3-D0B6DF68DC04}"/>
+                <a16:creationId xmlns:a16="http://schemas.microsoft.com/office/drawing/2014/main" id="{E5B0C8AB-3F92-4A90-AC76-AFFDD74BFF64}"/>
               </a:ext>
             </a:extLst>
           </p:cNvPr>
@@ -8656,7 +8656,7 @@
           <p:cNvPr id="13" name="Text 11">
             <a:extLst xmlns:a="http://schemas.openxmlformats.org/drawingml/2006/main">
               <a:ext uri="{FF2B5EF4-FFF2-40B4-BE49-F238E27FC236}">
-                <a16:creationId xmlns:a16="http://schemas.microsoft.com/office/drawing/2014/main" id="{9DF3219B-1EB9-4DC8-A7AF-72DD6EE46C0D}"/>
+                <a16:creationId xmlns:a16="http://schemas.microsoft.com/office/drawing/2014/main" id="{EF13C634-D40E-4040-BA8B-63CBC3554574}"/>
               </a:ext>
             </a:extLst>
           </p:cNvPr>
@@ -8701,7 +8701,7 @@
           <p:cNvPr id="14" name="Text 12">
             <a:extLst xmlns:a="http://schemas.openxmlformats.org/drawingml/2006/main">
               <a:ext uri="{FF2B5EF4-FFF2-40B4-BE49-F238E27FC236}">
-                <a16:creationId xmlns:a16="http://schemas.microsoft.com/office/drawing/2014/main" id="{F2CAB0A7-C036-44CB-99C0-0EEEB5CB7371}"/>
+                <a16:creationId xmlns:a16="http://schemas.microsoft.com/office/drawing/2014/main" id="{B0AC1A37-381B-4457-A590-A9D82A9DA37A}"/>
               </a:ext>
             </a:extLst>
           </p:cNvPr>
@@ -8840,7 +8840,7 @@
           <p:cNvPr id="15" name="Shape 13">
             <a:extLst xmlns:a="http://schemas.openxmlformats.org/drawingml/2006/main">
               <a:ext uri="{FF2B5EF4-FFF2-40B4-BE49-F238E27FC236}">
-                <a16:creationId xmlns:a16="http://schemas.microsoft.com/office/drawing/2014/main" id="{453482A2-0168-494F-8ABF-79FF6D142DA2}"/>
+                <a16:creationId xmlns:a16="http://schemas.microsoft.com/office/drawing/2014/main" id="{C91BA920-023E-47D2-837C-EE863072F0D7}"/>
               </a:ext>
             </a:extLst>
           </p:cNvPr>
@@ -8887,7 +8887,7 @@
           <p:cNvPr id="16" name="Shape 14">
             <a:extLst xmlns:a="http://schemas.openxmlformats.org/drawingml/2006/main">
               <a:ext uri="{FF2B5EF4-FFF2-40B4-BE49-F238E27FC236}">
-                <a16:creationId xmlns:a16="http://schemas.microsoft.com/office/drawing/2014/main" id="{F835848D-B9D4-41EF-9220-78A8832C9147}"/>
+                <a16:creationId xmlns:a16="http://schemas.microsoft.com/office/drawing/2014/main" id="{5A492162-49DC-4222-80C5-9731B0692175}"/>
               </a:ext>
             </a:extLst>
           </p:cNvPr>
@@ -8925,7 +8925,7 @@
           <p:cNvPr id="17" name="Text 15">
             <a:extLst xmlns:a="http://schemas.openxmlformats.org/drawingml/2006/main">
               <a:ext uri="{FF2B5EF4-FFF2-40B4-BE49-F238E27FC236}">
-                <a16:creationId xmlns:a16="http://schemas.microsoft.com/office/drawing/2014/main" id="{E2508F43-0DE2-4AD1-B9EE-9AD960BA8616}"/>
+                <a16:creationId xmlns:a16="http://schemas.microsoft.com/office/drawing/2014/main" id="{5F2D83CD-0B7E-4861-8787-363668ECAFC4}"/>
               </a:ext>
             </a:extLst>
           </p:cNvPr>
@@ -8970,7 +8970,7 @@
           <p:cNvPr id="18" name="Text 16">
             <a:extLst xmlns:a="http://schemas.openxmlformats.org/drawingml/2006/main">
               <a:ext uri="{FF2B5EF4-FFF2-40B4-BE49-F238E27FC236}">
-                <a16:creationId xmlns:a16="http://schemas.microsoft.com/office/drawing/2014/main" id="{4B4847B8-9465-48DF-8242-773783475010}"/>
+                <a16:creationId xmlns:a16="http://schemas.microsoft.com/office/drawing/2014/main" id="{3CAF3867-E797-4BEC-B7DE-428871EDBFB5}"/>
               </a:ext>
             </a:extLst>
           </p:cNvPr>
@@ -9015,7 +9015,7 @@
           <p:cNvPr id="19" name="Text 17">
             <a:extLst xmlns:a="http://schemas.openxmlformats.org/drawingml/2006/main">
               <a:ext uri="{FF2B5EF4-FFF2-40B4-BE49-F238E27FC236}">
-                <a16:creationId xmlns:a16="http://schemas.microsoft.com/office/drawing/2014/main" id="{397B330E-3112-4C65-A683-BECB8B819852}"/>
+                <a16:creationId xmlns:a16="http://schemas.microsoft.com/office/drawing/2014/main" id="{CBE95EF2-D8E5-4C27-B950-1E233DBA969D}"/>
               </a:ext>
             </a:extLst>
           </p:cNvPr>
@@ -9061,7 +9061,7 @@
     </p:spTree>
     <p:extLst>
       <p:ext uri="{BB962C8B-B14F-4D97-AF65-F5344CB8AC3E}">
-        <p14:creationId xmlns:p14="http://schemas.microsoft.com/office/powerpoint/2010/main" val="678498378"/>
+        <p14:creationId xmlns:p14="http://schemas.microsoft.com/office/powerpoint/2010/main" val="731243456"/>
       </p:ext>
     </p:extLst>
   </p:cSld>
@@ -9092,7 +9092,7 @@
           <p:cNvPr id="2" name="Text 0">
             <a:extLst xmlns:a="http://schemas.openxmlformats.org/drawingml/2006/main">
               <a:ext uri="{FF2B5EF4-FFF2-40B4-BE49-F238E27FC236}">
-                <a16:creationId xmlns:a16="http://schemas.microsoft.com/office/drawing/2014/main" id="{3CC73C34-A681-41A4-92D8-12D0A4D8CBB3}"/>
+                <a16:creationId xmlns:a16="http://schemas.microsoft.com/office/drawing/2014/main" id="{1C5CA6DC-6627-4CF8-8997-C20F760ECD2F}"/>
               </a:ext>
             </a:extLst>
           </p:cNvPr>
@@ -9137,7 +9137,7 @@
           <p:cNvPr id="3" name="Text 1">
             <a:extLst xmlns:a="http://schemas.openxmlformats.org/drawingml/2006/main">
               <a:ext uri="{FF2B5EF4-FFF2-40B4-BE49-F238E27FC236}">
-                <a16:creationId xmlns:a16="http://schemas.microsoft.com/office/drawing/2014/main" id="{FB5FB973-AFEF-4ED3-8832-7DB53975A4C4}"/>
+                <a16:creationId xmlns:a16="http://schemas.microsoft.com/office/drawing/2014/main" id="{6B7AC977-1E97-48CD-A5C1-2E2FA9BF3132}"/>
               </a:ext>
             </a:extLst>
           </p:cNvPr>
@@ -9182,7 +9182,7 @@
           <p:cNvPr id="4" name="Text 2">
             <a:extLst xmlns:a="http://schemas.openxmlformats.org/drawingml/2006/main">
               <a:ext uri="{FF2B5EF4-FFF2-40B4-BE49-F238E27FC236}">
-                <a16:creationId xmlns:a16="http://schemas.microsoft.com/office/drawing/2014/main" id="{BA3961DB-20D4-49BE-856A-3CFCD96E647D}"/>
+                <a16:creationId xmlns:a16="http://schemas.microsoft.com/office/drawing/2014/main" id="{178D4D12-906B-4AB6-AF66-FAC895C83D62}"/>
               </a:ext>
             </a:extLst>
           </p:cNvPr>
@@ -9227,7 +9227,7 @@
           <p:cNvPr id="5" name="Text 3">
             <a:extLst xmlns:a="http://schemas.openxmlformats.org/drawingml/2006/main">
               <a:ext uri="{FF2B5EF4-FFF2-40B4-BE49-F238E27FC236}">
-                <a16:creationId xmlns:a16="http://schemas.microsoft.com/office/drawing/2014/main" id="{E4D17BB3-AB38-4813-9F3A-D7679CD2557D}"/>
+                <a16:creationId xmlns:a16="http://schemas.microsoft.com/office/drawing/2014/main" id="{A6AF3A3B-CB78-4EF4-AB30-CC5AAFCC02EB}"/>
               </a:ext>
             </a:extLst>
           </p:cNvPr>
@@ -9276,7 +9276,7 @@
           <p:nvPr/>
         </p:nvPicPr>
         <p:blipFill>
-          <a:blip xmlns:r="http://schemas.openxmlformats.org/officeDocument/2006/relationships" xmlns:a="http://schemas.openxmlformats.org/drawingml/2006/main" r:embed="R43ec7139b9824b48"/>
+          <a:blip xmlns:r="http://schemas.openxmlformats.org/officeDocument/2006/relationships" xmlns:a="http://schemas.openxmlformats.org/drawingml/2006/main" r:embed="R402997fd7c82483d"/>
           <a:stretch xmlns:a="http://schemas.openxmlformats.org/drawingml/2006/main">
             <a:fillRect l="0" t="0" r="0" b="0"/>
           </a:stretch>
@@ -9296,7 +9296,7 @@
           <p:cNvPr id="7" name="Text 4">
             <a:extLst xmlns:a="http://schemas.openxmlformats.org/drawingml/2006/main">
               <a:ext uri="{FF2B5EF4-FFF2-40B4-BE49-F238E27FC236}">
-                <a16:creationId xmlns:a16="http://schemas.microsoft.com/office/drawing/2014/main" id="{DC5E823D-705F-44F9-8D0C-AB64DD9BE549}"/>
+                <a16:creationId xmlns:a16="http://schemas.microsoft.com/office/drawing/2014/main" id="{490FD9F4-D71D-404C-9205-EF16775066ED}"/>
               </a:ext>
             </a:extLst>
           </p:cNvPr>
@@ -9341,7 +9341,7 @@
           <p:cNvPr id="8" name="Shape 5">
             <a:extLst xmlns:a="http://schemas.openxmlformats.org/drawingml/2006/main">
               <a:ext uri="{FF2B5EF4-FFF2-40B4-BE49-F238E27FC236}">
-                <a16:creationId xmlns:a16="http://schemas.microsoft.com/office/drawing/2014/main" id="{6EB5D58C-625E-4FD4-8400-6DCD09216C59}"/>
+                <a16:creationId xmlns:a16="http://schemas.microsoft.com/office/drawing/2014/main" id="{F0000324-5D55-4495-8259-E666E13F1E94}"/>
               </a:ext>
             </a:extLst>
           </p:cNvPr>
@@ -9385,7 +9385,7 @@
           <p:nvPr/>
         </p:nvPicPr>
         <p:blipFill>
-          <a:blip xmlns:r="http://schemas.openxmlformats.org/officeDocument/2006/relationships" xmlns:a="http://schemas.openxmlformats.org/drawingml/2006/main" r:embed="Rec7a96e80c784b71"/>
+          <a:blip xmlns:r="http://schemas.openxmlformats.org/officeDocument/2006/relationships" xmlns:a="http://schemas.openxmlformats.org/drawingml/2006/main" r:embed="Rc55399b8aa604205"/>
           <a:stretch xmlns:a="http://schemas.openxmlformats.org/drawingml/2006/main">
             <a:fillRect l="0" t="0" r="0" b="0"/>
           </a:stretch>
@@ -9405,7 +9405,7 @@
           <p:cNvPr id="10" name="Text 6">
             <a:extLst xmlns:a="http://schemas.openxmlformats.org/drawingml/2006/main">
               <a:ext uri="{FF2B5EF4-FFF2-40B4-BE49-F238E27FC236}">
-                <a16:creationId xmlns:a16="http://schemas.microsoft.com/office/drawing/2014/main" id="{236CC8DA-2289-4085-BCFF-10D88CA990C1}"/>
+                <a16:creationId xmlns:a16="http://schemas.microsoft.com/office/drawing/2014/main" id="{0FE20ECB-D571-447C-A78B-4C2FC970DF3E}"/>
               </a:ext>
             </a:extLst>
           </p:cNvPr>
@@ -9454,7 +9454,7 @@
           <p:nvPr/>
         </p:nvPicPr>
         <p:blipFill>
-          <a:blip xmlns:r="http://schemas.openxmlformats.org/officeDocument/2006/relationships" xmlns:a="http://schemas.openxmlformats.org/drawingml/2006/main" r:embed="Rdc0643524ed14355"/>
+          <a:blip xmlns:r="http://schemas.openxmlformats.org/officeDocument/2006/relationships" xmlns:a="http://schemas.openxmlformats.org/drawingml/2006/main" r:embed="R68270ecf91844b31"/>
           <a:stretch xmlns:a="http://schemas.openxmlformats.org/drawingml/2006/main">
             <a:fillRect l="0" t="0" r="0" b="0"/>
           </a:stretch>
@@ -9474,7 +9474,7 @@
           <p:cNvPr id="12" name="Text 7">
             <a:extLst xmlns:a="http://schemas.openxmlformats.org/drawingml/2006/main">
               <a:ext uri="{FF2B5EF4-FFF2-40B4-BE49-F238E27FC236}">
-                <a16:creationId xmlns:a16="http://schemas.microsoft.com/office/drawing/2014/main" id="{052888D8-28A1-40AC-BAED-02ED7D9F9460}"/>
+                <a16:creationId xmlns:a16="http://schemas.microsoft.com/office/drawing/2014/main" id="{2AF6EF03-B4B5-420C-BA20-1A20F7B42950}"/>
               </a:ext>
             </a:extLst>
           </p:cNvPr>
@@ -9519,7 +9519,7 @@
           <p:cNvPr id="13" name="Text 8">
             <a:extLst xmlns:a="http://schemas.openxmlformats.org/drawingml/2006/main">
               <a:ext uri="{FF2B5EF4-FFF2-40B4-BE49-F238E27FC236}">
-                <a16:creationId xmlns:a16="http://schemas.microsoft.com/office/drawing/2014/main" id="{8E70F827-400B-4034-A250-CF5471C0024E}"/>
+                <a16:creationId xmlns:a16="http://schemas.microsoft.com/office/drawing/2014/main" id="{8C7F940F-64CF-4C35-B360-787C14E45206}"/>
               </a:ext>
             </a:extLst>
           </p:cNvPr>
@@ -9567,7 +9567,7 @@
           <p:cNvPr id="14" name="Shape 9">
             <a:extLst xmlns:a="http://schemas.openxmlformats.org/drawingml/2006/main">
               <a:ext uri="{FF2B5EF4-FFF2-40B4-BE49-F238E27FC236}">
-                <a16:creationId xmlns:a16="http://schemas.microsoft.com/office/drawing/2014/main" id="{55A5D29F-CBBA-468C-A72F-4ED53AC32726}"/>
+                <a16:creationId xmlns:a16="http://schemas.microsoft.com/office/drawing/2014/main" id="{375BB857-A62F-4350-9D3D-F63089789819}"/>
               </a:ext>
             </a:extLst>
           </p:cNvPr>
@@ -9607,7 +9607,7 @@
           <p:cNvPr id="15" name="Text 10">
             <a:extLst xmlns:a="http://schemas.openxmlformats.org/drawingml/2006/main">
               <a:ext uri="{FF2B5EF4-FFF2-40B4-BE49-F238E27FC236}">
-                <a16:creationId xmlns:a16="http://schemas.microsoft.com/office/drawing/2014/main" id="{1AD9C505-FEAA-4DB2-99B2-5ED81FAE3DC8}"/>
+                <a16:creationId xmlns:a16="http://schemas.microsoft.com/office/drawing/2014/main" id="{2C64E0AD-7FF0-4565-85AC-7CB8830CC856}"/>
               </a:ext>
             </a:extLst>
           </p:cNvPr>
@@ -9652,7 +9652,7 @@
           <p:cNvPr id="16" name="Text 11">
             <a:extLst xmlns:a="http://schemas.openxmlformats.org/drawingml/2006/main">
               <a:ext uri="{FF2B5EF4-FFF2-40B4-BE49-F238E27FC236}">
-                <a16:creationId xmlns:a16="http://schemas.microsoft.com/office/drawing/2014/main" id="{F11333F1-1DB3-48E1-9223-978B760DDADD}"/>
+                <a16:creationId xmlns:a16="http://schemas.microsoft.com/office/drawing/2014/main" id="{6008D7BA-9946-4F98-AA67-A859D4C70D28}"/>
               </a:ext>
             </a:extLst>
           </p:cNvPr>
@@ -9700,7 +9700,7 @@
           <p:cNvPr id="17" name="Shape 12">
             <a:extLst xmlns:a="http://schemas.openxmlformats.org/drawingml/2006/main">
               <a:ext uri="{FF2B5EF4-FFF2-40B4-BE49-F238E27FC236}">
-                <a16:creationId xmlns:a16="http://schemas.microsoft.com/office/drawing/2014/main" id="{35741871-4CFE-4AB1-AEA1-D123739CE511}"/>
+                <a16:creationId xmlns:a16="http://schemas.microsoft.com/office/drawing/2014/main" id="{138C9484-927A-4588-B383-779E9B28D57F}"/>
               </a:ext>
             </a:extLst>
           </p:cNvPr>
@@ -9747,7 +9747,7 @@
           <p:cNvPr id="18" name="Text 13">
             <a:extLst xmlns:a="http://schemas.openxmlformats.org/drawingml/2006/main">
               <a:ext uri="{FF2B5EF4-FFF2-40B4-BE49-F238E27FC236}">
-                <a16:creationId xmlns:a16="http://schemas.microsoft.com/office/drawing/2014/main" id="{D5CE737A-87C4-4C47-BA98-75AB7DD51A09}"/>
+                <a16:creationId xmlns:a16="http://schemas.microsoft.com/office/drawing/2014/main" id="{A6DCFA23-126B-474D-88F7-BC2E2F999AF5}"/>
               </a:ext>
             </a:extLst>
           </p:cNvPr>
@@ -9796,7 +9796,7 @@
           <p:nvPr/>
         </p:nvPicPr>
         <p:blipFill>
-          <a:blip xmlns:r="http://schemas.openxmlformats.org/officeDocument/2006/relationships" xmlns:a="http://schemas.openxmlformats.org/drawingml/2006/main" r:embed="Rfef18992c9244572"/>
+          <a:blip xmlns:r="http://schemas.openxmlformats.org/officeDocument/2006/relationships" xmlns:a="http://schemas.openxmlformats.org/drawingml/2006/main" r:embed="Rb7b8c74be01a42ff"/>
           <a:stretch xmlns:a="http://schemas.openxmlformats.org/drawingml/2006/main">
             <a:fillRect l="0" t="0" r="0" b="0"/>
           </a:stretch>
@@ -9816,7 +9816,7 @@
           <p:cNvPr id="20" name="Text 14">
             <a:extLst xmlns:a="http://schemas.openxmlformats.org/drawingml/2006/main">
               <a:ext uri="{FF2B5EF4-FFF2-40B4-BE49-F238E27FC236}">
-                <a16:creationId xmlns:a16="http://schemas.microsoft.com/office/drawing/2014/main" id="{02FFAFCB-4926-4353-9E0C-BC4A1C02A0DB}"/>
+                <a16:creationId xmlns:a16="http://schemas.microsoft.com/office/drawing/2014/main" id="{7571387F-A4AC-4B27-9F91-24B57B4AD831}"/>
               </a:ext>
             </a:extLst>
           </p:cNvPr>
@@ -9861,7 +9861,7 @@
           <p:cNvPr id="21" name="Text 15">
             <a:extLst xmlns:a="http://schemas.openxmlformats.org/drawingml/2006/main">
               <a:ext uri="{FF2B5EF4-FFF2-40B4-BE49-F238E27FC236}">
-                <a16:creationId xmlns:a16="http://schemas.microsoft.com/office/drawing/2014/main" id="{9A9D833F-8D26-4788-A0A8-1C2EA679A10A}"/>
+                <a16:creationId xmlns:a16="http://schemas.microsoft.com/office/drawing/2014/main" id="{B2DFD4EB-9BAC-4CEB-A0E2-1593206A6845}"/>
               </a:ext>
             </a:extLst>
           </p:cNvPr>
@@ -9947,7 +9947,7 @@
           <p:cNvPr id="22" name="Text 16">
             <a:extLst xmlns:a="http://schemas.openxmlformats.org/drawingml/2006/main">
               <a:ext uri="{FF2B5EF4-FFF2-40B4-BE49-F238E27FC236}">
-                <a16:creationId xmlns:a16="http://schemas.microsoft.com/office/drawing/2014/main" id="{A4642EE6-9AA9-4605-973E-5007EFB71EED}"/>
+                <a16:creationId xmlns:a16="http://schemas.microsoft.com/office/drawing/2014/main" id="{F8FF219C-A578-49BD-AF88-36F946740152}"/>
               </a:ext>
             </a:extLst>
           </p:cNvPr>
@@ -9995,7 +9995,7 @@
           <p:cNvPr id="23" name="Shape 17">
             <a:extLst xmlns:a="http://schemas.openxmlformats.org/drawingml/2006/main">
               <a:ext uri="{FF2B5EF4-FFF2-40B4-BE49-F238E27FC236}">
-                <a16:creationId xmlns:a16="http://schemas.microsoft.com/office/drawing/2014/main" id="{50F38E6E-1E45-4E68-B420-01E9B6373518}"/>
+                <a16:creationId xmlns:a16="http://schemas.microsoft.com/office/drawing/2014/main" id="{11E6B3D3-5D4E-4E29-B4AC-5CF9D7016F58}"/>
               </a:ext>
             </a:extLst>
           </p:cNvPr>
@@ -10042,7 +10042,7 @@
           <p:cNvPr id="24" name="Text 18">
             <a:extLst xmlns:a="http://schemas.openxmlformats.org/drawingml/2006/main">
               <a:ext uri="{FF2B5EF4-FFF2-40B4-BE49-F238E27FC236}">
-                <a16:creationId xmlns:a16="http://schemas.microsoft.com/office/drawing/2014/main" id="{B3A4C782-CE44-4147-A963-DF39F4EAA90F}"/>
+                <a16:creationId xmlns:a16="http://schemas.microsoft.com/office/drawing/2014/main" id="{F27F0DB6-3E30-4DF9-B9AD-EAF34A6C9716}"/>
               </a:ext>
             </a:extLst>
           </p:cNvPr>
@@ -10087,7 +10087,7 @@
           <p:cNvPr id="25" name="Text 19">
             <a:extLst xmlns:a="http://schemas.openxmlformats.org/drawingml/2006/main">
               <a:ext uri="{FF2B5EF4-FFF2-40B4-BE49-F238E27FC236}">
-                <a16:creationId xmlns:a16="http://schemas.microsoft.com/office/drawing/2014/main" id="{10D39E12-BE19-4CC5-9A8E-6FC38CCB1A2E}"/>
+                <a16:creationId xmlns:a16="http://schemas.microsoft.com/office/drawing/2014/main" id="{EF7DD4BD-3B32-49F4-99D1-BAFF870AC66D}"/>
               </a:ext>
             </a:extLst>
           </p:cNvPr>
@@ -10135,7 +10135,7 @@
           <p:cNvPr id="26" name="Text 20">
             <a:extLst xmlns:a="http://schemas.openxmlformats.org/drawingml/2006/main">
               <a:ext uri="{FF2B5EF4-FFF2-40B4-BE49-F238E27FC236}">
-                <a16:creationId xmlns:a16="http://schemas.microsoft.com/office/drawing/2014/main" id="{E56A67C0-D720-4D5E-93DD-6EB037DE0F09}"/>
+                <a16:creationId xmlns:a16="http://schemas.microsoft.com/office/drawing/2014/main" id="{D4A4F641-100A-460F-9333-1599C353B9A3}"/>
               </a:ext>
             </a:extLst>
           </p:cNvPr>
@@ -10180,7 +10180,7 @@
           <p:cNvPr id="27" name="Shape 21">
             <a:extLst xmlns:a="http://schemas.openxmlformats.org/drawingml/2006/main">
               <a:ext uri="{FF2B5EF4-FFF2-40B4-BE49-F238E27FC236}">
-                <a16:creationId xmlns:a16="http://schemas.microsoft.com/office/drawing/2014/main" id="{1DAB59AF-665A-4F7E-9D20-0FC53657BFEA}"/>
+                <a16:creationId xmlns:a16="http://schemas.microsoft.com/office/drawing/2014/main" id="{2F67B21A-4E3B-4355-8CE6-E9AF4EE9FFC1}"/>
               </a:ext>
             </a:extLst>
           </p:cNvPr>
@@ -10227,7 +10227,7 @@
           <p:cNvPr id="28" name="Text 22">
             <a:extLst xmlns:a="http://schemas.openxmlformats.org/drawingml/2006/main">
               <a:ext uri="{FF2B5EF4-FFF2-40B4-BE49-F238E27FC236}">
-                <a16:creationId xmlns:a16="http://schemas.microsoft.com/office/drawing/2014/main" id="{7F3A5CEF-16A6-4241-8D9E-2864E8489F95}"/>
+                <a16:creationId xmlns:a16="http://schemas.microsoft.com/office/drawing/2014/main" id="{FD9A652C-AE25-490D-A26B-B15FA6CBC627}"/>
               </a:ext>
             </a:extLst>
           </p:cNvPr>
@@ -10272,7 +10272,7 @@
           <p:cNvPr id="29" name="Text 23">
             <a:extLst xmlns:a="http://schemas.openxmlformats.org/drawingml/2006/main">
               <a:ext uri="{FF2B5EF4-FFF2-40B4-BE49-F238E27FC236}">
-                <a16:creationId xmlns:a16="http://schemas.microsoft.com/office/drawing/2014/main" id="{3C42EB38-CF79-4B71-8EF3-B4EFE9CD68B8}"/>
+                <a16:creationId xmlns:a16="http://schemas.microsoft.com/office/drawing/2014/main" id="{8E52C848-5D08-4944-9D0F-06E2CD4B41B5}"/>
               </a:ext>
             </a:extLst>
           </p:cNvPr>
@@ -10320,7 +10320,7 @@
           <p:cNvPr id="30" name="Shape 24">
             <a:extLst xmlns:a="http://schemas.openxmlformats.org/drawingml/2006/main">
               <a:ext uri="{FF2B5EF4-FFF2-40B4-BE49-F238E27FC236}">
-                <a16:creationId xmlns:a16="http://schemas.microsoft.com/office/drawing/2014/main" id="{2FD60C94-3FE4-4706-9F1E-CEF7CEB136BF}"/>
+                <a16:creationId xmlns:a16="http://schemas.microsoft.com/office/drawing/2014/main" id="{B489E9BB-6262-42F1-8864-C7949E9A919C}"/>
               </a:ext>
             </a:extLst>
           </p:cNvPr>
@@ -10367,7 +10367,7 @@
           <p:cNvPr id="31" name="Text 25">
             <a:extLst xmlns:a="http://schemas.openxmlformats.org/drawingml/2006/main">
               <a:ext uri="{FF2B5EF4-FFF2-40B4-BE49-F238E27FC236}">
-                <a16:creationId xmlns:a16="http://schemas.microsoft.com/office/drawing/2014/main" id="{4D3AD5A3-8237-4089-9E12-6A0A5C4F7DE7}"/>
+                <a16:creationId xmlns:a16="http://schemas.microsoft.com/office/drawing/2014/main" id="{C1ABAB75-D091-4FF1-80C3-EB97DDF13086}"/>
               </a:ext>
             </a:extLst>
           </p:cNvPr>
@@ -10412,7 +10412,7 @@
           <p:cNvPr id="32" name="Text 26">
             <a:extLst xmlns:a="http://schemas.openxmlformats.org/drawingml/2006/main">
               <a:ext uri="{FF2B5EF4-FFF2-40B4-BE49-F238E27FC236}">
-                <a16:creationId xmlns:a16="http://schemas.microsoft.com/office/drawing/2014/main" id="{9990A48E-199E-4CDA-B8D5-B796B6EC2D7C}"/>
+                <a16:creationId xmlns:a16="http://schemas.microsoft.com/office/drawing/2014/main" id="{097F7BC4-3610-4EA4-9239-CEFF23B25581}"/>
               </a:ext>
             </a:extLst>
           </p:cNvPr>
@@ -10460,7 +10460,7 @@
           <p:cNvPr id="33" name="Shape 27">
             <a:extLst xmlns:a="http://schemas.openxmlformats.org/drawingml/2006/main">
               <a:ext uri="{FF2B5EF4-FFF2-40B4-BE49-F238E27FC236}">
-                <a16:creationId xmlns:a16="http://schemas.microsoft.com/office/drawing/2014/main" id="{493DEACC-DD39-4476-899D-B65AF8570781}"/>
+                <a16:creationId xmlns:a16="http://schemas.microsoft.com/office/drawing/2014/main" id="{2F7537DD-6D39-44C2-988A-AC28B1FCFE3E}"/>
               </a:ext>
             </a:extLst>
           </p:cNvPr>
@@ -10507,7 +10507,7 @@
           <p:cNvPr id="34" name="Text 28">
             <a:extLst xmlns:a="http://schemas.openxmlformats.org/drawingml/2006/main">
               <a:ext uri="{FF2B5EF4-FFF2-40B4-BE49-F238E27FC236}">
-                <a16:creationId xmlns:a16="http://schemas.microsoft.com/office/drawing/2014/main" id="{F24C9958-039E-4CB3-945C-A2E7063CFC4C}"/>
+                <a16:creationId xmlns:a16="http://schemas.microsoft.com/office/drawing/2014/main" id="{ABCEA75B-F293-4E8D-BDB5-B603E97188AF}"/>
               </a:ext>
             </a:extLst>
           </p:cNvPr>
@@ -10552,7 +10552,7 @@
           <p:cNvPr id="35" name="Text 29">
             <a:extLst xmlns:a="http://schemas.openxmlformats.org/drawingml/2006/main">
               <a:ext uri="{FF2B5EF4-FFF2-40B4-BE49-F238E27FC236}">
-                <a16:creationId xmlns:a16="http://schemas.microsoft.com/office/drawing/2014/main" id="{895A900F-7352-4F7D-862D-7510892D0EA5}"/>
+                <a16:creationId xmlns:a16="http://schemas.microsoft.com/office/drawing/2014/main" id="{5111CDCB-0B40-45EF-8CBC-69A25B997E73}"/>
               </a:ext>
             </a:extLst>
           </p:cNvPr>
@@ -10600,7 +10600,7 @@
           <p:cNvPr id="36" name="Text 30">
             <a:extLst xmlns:a="http://schemas.openxmlformats.org/drawingml/2006/main">
               <a:ext uri="{FF2B5EF4-FFF2-40B4-BE49-F238E27FC236}">
-                <a16:creationId xmlns:a16="http://schemas.microsoft.com/office/drawing/2014/main" id="{14E8229D-A214-4890-96BE-915FF6C0B9FD}"/>
+                <a16:creationId xmlns:a16="http://schemas.microsoft.com/office/drawing/2014/main" id="{C276CE32-14EC-4626-AB13-1D7DB6FD82DD}"/>
               </a:ext>
             </a:extLst>
           </p:cNvPr>
@@ -10646,7 +10646,7 @@
     </p:spTree>
     <p:extLst>
       <p:ext uri="{BB962C8B-B14F-4D97-AF65-F5344CB8AC3E}">
-        <p14:creationId xmlns:p14="http://schemas.microsoft.com/office/powerpoint/2010/main" val="1530825184"/>
+        <p14:creationId xmlns:p14="http://schemas.microsoft.com/office/powerpoint/2010/main" val="683667476"/>
       </p:ext>
     </p:extLst>
   </p:cSld>
@@ -10677,7 +10677,7 @@
           <p:cNvPr id="2" name="Text 0">
             <a:extLst xmlns:a="http://schemas.openxmlformats.org/drawingml/2006/main">
               <a:ext uri="{FF2B5EF4-FFF2-40B4-BE49-F238E27FC236}">
-                <a16:creationId xmlns:a16="http://schemas.microsoft.com/office/drawing/2014/main" id="{B4EB2413-3395-4DDC-8594-6A9D58D7ED27}"/>
+                <a16:creationId xmlns:a16="http://schemas.microsoft.com/office/drawing/2014/main" id="{7F74FAFB-87E4-4F5B-84B1-93AFFE4C75D0}"/>
               </a:ext>
             </a:extLst>
           </p:cNvPr>
@@ -10722,7 +10722,7 @@
           <p:cNvPr id="3" name="Text 1">
             <a:extLst xmlns:a="http://schemas.openxmlformats.org/drawingml/2006/main">
               <a:ext uri="{FF2B5EF4-FFF2-40B4-BE49-F238E27FC236}">
-                <a16:creationId xmlns:a16="http://schemas.microsoft.com/office/drawing/2014/main" id="{BAFFF696-5ADD-48D2-9A0B-65D1E2B43501}"/>
+                <a16:creationId xmlns:a16="http://schemas.microsoft.com/office/drawing/2014/main" id="{83564CC2-43D1-4123-9569-79D26B0576E4}"/>
               </a:ext>
             </a:extLst>
           </p:cNvPr>
@@ -10767,7 +10767,7 @@
           <p:cNvPr id="4" name="Text 2">
             <a:extLst xmlns:a="http://schemas.openxmlformats.org/drawingml/2006/main">
               <a:ext uri="{FF2B5EF4-FFF2-40B4-BE49-F238E27FC236}">
-                <a16:creationId xmlns:a16="http://schemas.microsoft.com/office/drawing/2014/main" id="{9ABA56E1-EF64-45C2-A0E0-6BC4F88F151F}"/>
+                <a16:creationId xmlns:a16="http://schemas.microsoft.com/office/drawing/2014/main" id="{58DBFEDA-1510-4D67-AACD-A90472DA207E}"/>
               </a:ext>
             </a:extLst>
           </p:cNvPr>
@@ -10812,7 +10812,7 @@
           <p:cNvPr id="5" name="Text 3">
             <a:extLst xmlns:a="http://schemas.openxmlformats.org/drawingml/2006/main">
               <a:ext uri="{FF2B5EF4-FFF2-40B4-BE49-F238E27FC236}">
-                <a16:creationId xmlns:a16="http://schemas.microsoft.com/office/drawing/2014/main" id="{46F8EF39-1F3A-4709-8F8A-B7E41CEE3A96}"/>
+                <a16:creationId xmlns:a16="http://schemas.microsoft.com/office/drawing/2014/main" id="{E57EBF94-8B6F-42B4-8EC4-1548A8976ECC}"/>
               </a:ext>
             </a:extLst>
           </p:cNvPr>
@@ -10857,7 +10857,7 @@
           <p:cNvPr id="6" name="Text 4">
             <a:extLst xmlns:a="http://schemas.openxmlformats.org/drawingml/2006/main">
               <a:ext uri="{FF2B5EF4-FFF2-40B4-BE49-F238E27FC236}">
-                <a16:creationId xmlns:a16="http://schemas.microsoft.com/office/drawing/2014/main" id="{B8E06817-ED75-4D09-A3D4-8FB5FD663BCD}"/>
+                <a16:creationId xmlns:a16="http://schemas.microsoft.com/office/drawing/2014/main" id="{FA059A09-C7AA-44D9-81EF-83B0E2AD6C34}"/>
               </a:ext>
             </a:extLst>
           </p:cNvPr>
@@ -10902,7 +10902,7 @@
           <p:cNvPr id="7" name="Shape 5">
             <a:extLst xmlns:a="http://schemas.openxmlformats.org/drawingml/2006/main">
               <a:ext uri="{FF2B5EF4-FFF2-40B4-BE49-F238E27FC236}">
-                <a16:creationId xmlns:a16="http://schemas.microsoft.com/office/drawing/2014/main" id="{C3FA1D9F-2DD0-4CEC-8AEA-910936C073B2}"/>
+                <a16:creationId xmlns:a16="http://schemas.microsoft.com/office/drawing/2014/main" id="{DB9AABC4-DE2A-4AB2-9D14-802E087109F3}"/>
               </a:ext>
             </a:extLst>
           </p:cNvPr>
@@ -10942,7 +10942,7 @@
           <p:cNvPr id="8" name="Text 6">
             <a:extLst xmlns:a="http://schemas.openxmlformats.org/drawingml/2006/main">
               <a:ext uri="{FF2B5EF4-FFF2-40B4-BE49-F238E27FC236}">
-                <a16:creationId xmlns:a16="http://schemas.microsoft.com/office/drawing/2014/main" id="{F510EA3D-4AF4-4ED4-A092-3034F3037F3E}"/>
+                <a16:creationId xmlns:a16="http://schemas.microsoft.com/office/drawing/2014/main" id="{E101C1AB-B2B1-4DF3-9D42-A57FE3EE6959}"/>
               </a:ext>
             </a:extLst>
           </p:cNvPr>
@@ -10987,7 +10987,7 @@
           <p:cNvPr id="9" name="Shape 7">
             <a:extLst xmlns:a="http://schemas.openxmlformats.org/drawingml/2006/main">
               <a:ext uri="{FF2B5EF4-FFF2-40B4-BE49-F238E27FC236}">
-                <a16:creationId xmlns:a16="http://schemas.microsoft.com/office/drawing/2014/main" id="{D1F9AEC4-0DDC-42A0-9CE9-6F601AA3A41B}"/>
+                <a16:creationId xmlns:a16="http://schemas.microsoft.com/office/drawing/2014/main" id="{59ED9BE2-FCD2-495D-ADC2-D5199AEA2E62}"/>
               </a:ext>
             </a:extLst>
           </p:cNvPr>
@@ -11027,7 +11027,7 @@
           <p:cNvPr id="10" name="Text 8">
             <a:extLst xmlns:a="http://schemas.openxmlformats.org/drawingml/2006/main">
               <a:ext uri="{FF2B5EF4-FFF2-40B4-BE49-F238E27FC236}">
-                <a16:creationId xmlns:a16="http://schemas.microsoft.com/office/drawing/2014/main" id="{CC1C3C90-38DC-483E-AA72-C93F4A312C9F}"/>
+                <a16:creationId xmlns:a16="http://schemas.microsoft.com/office/drawing/2014/main" id="{5FF97812-3340-406B-A836-4C23D3481106}"/>
               </a:ext>
             </a:extLst>
           </p:cNvPr>
@@ -11072,7 +11072,7 @@
           <p:cNvPr id="11" name="Shape 9">
             <a:extLst xmlns:a="http://schemas.openxmlformats.org/drawingml/2006/main">
               <a:ext uri="{FF2B5EF4-FFF2-40B4-BE49-F238E27FC236}">
-                <a16:creationId xmlns:a16="http://schemas.microsoft.com/office/drawing/2014/main" id="{1177E764-3763-43B8-96EE-2D842FA54F1B}"/>
+                <a16:creationId xmlns:a16="http://schemas.microsoft.com/office/drawing/2014/main" id="{62E57F6E-A2D1-4767-A021-A4A5AAAA812C}"/>
               </a:ext>
             </a:extLst>
           </p:cNvPr>
@@ -11112,7 +11112,7 @@
           <p:cNvPr id="12" name="Text 10">
             <a:extLst xmlns:a="http://schemas.openxmlformats.org/drawingml/2006/main">
               <a:ext uri="{FF2B5EF4-FFF2-40B4-BE49-F238E27FC236}">
-                <a16:creationId xmlns:a16="http://schemas.microsoft.com/office/drawing/2014/main" id="{9E55364A-EEA6-495E-BAEB-5AF0F621981B}"/>
+                <a16:creationId xmlns:a16="http://schemas.microsoft.com/office/drawing/2014/main" id="{ABB7F8FF-0C78-4B7B-B185-C93B52944DF2}"/>
               </a:ext>
             </a:extLst>
           </p:cNvPr>
@@ -11157,7 +11157,7 @@
           <p:cNvPr id="13" name="Shape 11">
             <a:extLst xmlns:a="http://schemas.openxmlformats.org/drawingml/2006/main">
               <a:ext uri="{FF2B5EF4-FFF2-40B4-BE49-F238E27FC236}">
-                <a16:creationId xmlns:a16="http://schemas.microsoft.com/office/drawing/2014/main" id="{473B1384-F50B-467F-A92A-056D8A0D8219}"/>
+                <a16:creationId xmlns:a16="http://schemas.microsoft.com/office/drawing/2014/main" id="{F1BFB445-4629-4F83-8BF8-C6D856D09D2F}"/>
               </a:ext>
             </a:extLst>
           </p:cNvPr>
@@ -11197,7 +11197,7 @@
           <p:cNvPr id="14" name="Text 12">
             <a:extLst xmlns:a="http://schemas.openxmlformats.org/drawingml/2006/main">
               <a:ext uri="{FF2B5EF4-FFF2-40B4-BE49-F238E27FC236}">
-                <a16:creationId xmlns:a16="http://schemas.microsoft.com/office/drawing/2014/main" id="{5C83A602-034C-4CF9-83F4-1D5ADDF287AE}"/>
+                <a16:creationId xmlns:a16="http://schemas.microsoft.com/office/drawing/2014/main" id="{9058FCFC-A6B5-44AC-A776-4E326A664FE8}"/>
               </a:ext>
             </a:extLst>
           </p:cNvPr>
@@ -11242,7 +11242,7 @@
           <p:cNvPr id="15" name="Shape 13">
             <a:extLst xmlns:a="http://schemas.openxmlformats.org/drawingml/2006/main">
               <a:ext uri="{FF2B5EF4-FFF2-40B4-BE49-F238E27FC236}">
-                <a16:creationId xmlns:a16="http://schemas.microsoft.com/office/drawing/2014/main" id="{683BB984-9C8A-40F8-9C05-E8F8614FF70A}"/>
+                <a16:creationId xmlns:a16="http://schemas.microsoft.com/office/drawing/2014/main" id="{5B9C4145-2923-4CB4-9322-8B6581CCAC09}"/>
               </a:ext>
             </a:extLst>
           </p:cNvPr>
@@ -11282,7 +11282,7 @@
           <p:cNvPr id="16" name="Text 14">
             <a:extLst xmlns:a="http://schemas.openxmlformats.org/drawingml/2006/main">
               <a:ext uri="{FF2B5EF4-FFF2-40B4-BE49-F238E27FC236}">
-                <a16:creationId xmlns:a16="http://schemas.microsoft.com/office/drawing/2014/main" id="{79E8EFDD-7DEE-4DDC-ABA6-DA7CBB8C7B12}"/>
+                <a16:creationId xmlns:a16="http://schemas.microsoft.com/office/drawing/2014/main" id="{C12C9A05-2664-4630-B653-B74CCB8C95DD}"/>
               </a:ext>
             </a:extLst>
           </p:cNvPr>
@@ -11327,7 +11327,7 @@
           <p:cNvPr id="17" name="Shape 15">
             <a:extLst xmlns:a="http://schemas.openxmlformats.org/drawingml/2006/main">
               <a:ext uri="{FF2B5EF4-FFF2-40B4-BE49-F238E27FC236}">
-                <a16:creationId xmlns:a16="http://schemas.microsoft.com/office/drawing/2014/main" id="{090440F1-04B7-47DD-A1E3-50581F8653EE}"/>
+                <a16:creationId xmlns:a16="http://schemas.microsoft.com/office/drawing/2014/main" id="{2400759D-3579-43E6-A5C1-EA58FB653761}"/>
               </a:ext>
             </a:extLst>
           </p:cNvPr>
@@ -11367,7 +11367,7 @@
           <p:cNvPr id="18" name="Text 16">
             <a:extLst xmlns:a="http://schemas.openxmlformats.org/drawingml/2006/main">
               <a:ext uri="{FF2B5EF4-FFF2-40B4-BE49-F238E27FC236}">
-                <a16:creationId xmlns:a16="http://schemas.microsoft.com/office/drawing/2014/main" id="{57196C7E-37B7-4FEE-AE49-7ECB949F5A55}"/>
+                <a16:creationId xmlns:a16="http://schemas.microsoft.com/office/drawing/2014/main" id="{986A880A-E1D4-47BB-8FA3-0A778CE3709C}"/>
               </a:ext>
             </a:extLst>
           </p:cNvPr>
@@ -11412,7 +11412,7 @@
           <p:cNvPr id="19" name="Text 17">
             <a:extLst xmlns:a="http://schemas.openxmlformats.org/drawingml/2006/main">
               <a:ext uri="{FF2B5EF4-FFF2-40B4-BE49-F238E27FC236}">
-                <a16:creationId xmlns:a16="http://schemas.microsoft.com/office/drawing/2014/main" id="{83F4B86A-F74E-4D5C-8289-C39D35832172}"/>
+                <a16:creationId xmlns:a16="http://schemas.microsoft.com/office/drawing/2014/main" id="{11C1010A-2D1C-4259-BC24-3896190BE392}"/>
               </a:ext>
             </a:extLst>
           </p:cNvPr>
@@ -11457,7 +11457,7 @@
           <p:cNvPr id="20" name="Shape 18">
             <a:extLst xmlns:a="http://schemas.openxmlformats.org/drawingml/2006/main">
               <a:ext uri="{FF2B5EF4-FFF2-40B4-BE49-F238E27FC236}">
-                <a16:creationId xmlns:a16="http://schemas.microsoft.com/office/drawing/2014/main" id="{2A066378-54D7-4723-81CA-45645059052C}"/>
+                <a16:creationId xmlns:a16="http://schemas.microsoft.com/office/drawing/2014/main" id="{2292BA78-80E7-433E-9E84-DCB432114B63}"/>
               </a:ext>
             </a:extLst>
           </p:cNvPr>
@@ -11504,7 +11504,7 @@
           <p:cNvPr id="21" name="Text 19">
             <a:extLst xmlns:a="http://schemas.openxmlformats.org/drawingml/2006/main">
               <a:ext uri="{FF2B5EF4-FFF2-40B4-BE49-F238E27FC236}">
-                <a16:creationId xmlns:a16="http://schemas.microsoft.com/office/drawing/2014/main" id="{50B3DD02-19AA-455B-8D65-A3BC684602E8}"/>
+                <a16:creationId xmlns:a16="http://schemas.microsoft.com/office/drawing/2014/main" id="{24E17753-31A9-4CB7-9C1A-E06B8D28A33F}"/>
               </a:ext>
             </a:extLst>
           </p:cNvPr>
@@ -11549,7 +11549,7 @@
           <p:cNvPr id="22" name="Text 20">
             <a:extLst xmlns:a="http://schemas.openxmlformats.org/drawingml/2006/main">
               <a:ext uri="{FF2B5EF4-FFF2-40B4-BE49-F238E27FC236}">
-                <a16:creationId xmlns:a16="http://schemas.microsoft.com/office/drawing/2014/main" id="{0B75F414-9333-4608-97FE-CA45A36F009D}"/>
+                <a16:creationId xmlns:a16="http://schemas.microsoft.com/office/drawing/2014/main" id="{B9C699EC-0391-4E52-8E95-2B2C23785B2C}"/>
               </a:ext>
             </a:extLst>
           </p:cNvPr>
@@ -11594,7 +11594,7 @@
           <p:cNvPr id="23" name="Text 21">
             <a:extLst xmlns:a="http://schemas.openxmlformats.org/drawingml/2006/main">
               <a:ext uri="{FF2B5EF4-FFF2-40B4-BE49-F238E27FC236}">
-                <a16:creationId xmlns:a16="http://schemas.microsoft.com/office/drawing/2014/main" id="{BF930000-25B0-4DB1-A706-1207EBD04C5A}"/>
+                <a16:creationId xmlns:a16="http://schemas.microsoft.com/office/drawing/2014/main" id="{A6F81513-8A2E-4D50-8247-B1298E72E5E8}"/>
               </a:ext>
             </a:extLst>
           </p:cNvPr>
@@ -11642,7 +11642,7 @@
           <p:cNvPr id="24" name="Shape 22">
             <a:extLst xmlns:a="http://schemas.openxmlformats.org/drawingml/2006/main">
               <a:ext uri="{FF2B5EF4-FFF2-40B4-BE49-F238E27FC236}">
-                <a16:creationId xmlns:a16="http://schemas.microsoft.com/office/drawing/2014/main" id="{A88FE5DC-33D5-4510-AD69-A077C3B149EE}"/>
+                <a16:creationId xmlns:a16="http://schemas.microsoft.com/office/drawing/2014/main" id="{EF0D73EF-28F0-4426-BC33-D3D21F397BA2}"/>
               </a:ext>
             </a:extLst>
           </p:cNvPr>
@@ -11689,7 +11689,7 @@
           <p:cNvPr id="25" name="Text 23">
             <a:extLst xmlns:a="http://schemas.openxmlformats.org/drawingml/2006/main">
               <a:ext uri="{FF2B5EF4-FFF2-40B4-BE49-F238E27FC236}">
-                <a16:creationId xmlns:a16="http://schemas.microsoft.com/office/drawing/2014/main" id="{6516D586-E6BE-40CC-9D9F-D17383934ACE}"/>
+                <a16:creationId xmlns:a16="http://schemas.microsoft.com/office/drawing/2014/main" id="{A122913D-D428-41B1-91F7-6C059B07FECD}"/>
               </a:ext>
             </a:extLst>
           </p:cNvPr>
@@ -11734,7 +11734,7 @@
           <p:cNvPr id="26" name="Text 24">
             <a:extLst xmlns:a="http://schemas.openxmlformats.org/drawingml/2006/main">
               <a:ext uri="{FF2B5EF4-FFF2-40B4-BE49-F238E27FC236}">
-                <a16:creationId xmlns:a16="http://schemas.microsoft.com/office/drawing/2014/main" id="{D699C1F6-1A88-43CC-A9D5-36E74B954778}"/>
+                <a16:creationId xmlns:a16="http://schemas.microsoft.com/office/drawing/2014/main" id="{86D05975-4577-4F35-B96A-0CE7CA37F263}"/>
               </a:ext>
             </a:extLst>
           </p:cNvPr>
@@ -11779,7 +11779,7 @@
           <p:cNvPr id="27" name="Text 25">
             <a:extLst xmlns:a="http://schemas.openxmlformats.org/drawingml/2006/main">
               <a:ext uri="{FF2B5EF4-FFF2-40B4-BE49-F238E27FC236}">
-                <a16:creationId xmlns:a16="http://schemas.microsoft.com/office/drawing/2014/main" id="{9D4C1265-09C3-45F8-AEA3-D3A02DCCFF72}"/>
+                <a16:creationId xmlns:a16="http://schemas.microsoft.com/office/drawing/2014/main" id="{B5620B2C-93D3-4B70-B223-351479EBEF03}"/>
               </a:ext>
             </a:extLst>
           </p:cNvPr>
@@ -11827,7 +11827,7 @@
           <p:cNvPr id="28" name="Shape 26">
             <a:extLst xmlns:a="http://schemas.openxmlformats.org/drawingml/2006/main">
               <a:ext uri="{FF2B5EF4-FFF2-40B4-BE49-F238E27FC236}">
-                <a16:creationId xmlns:a16="http://schemas.microsoft.com/office/drawing/2014/main" id="{8C1AFECB-6F59-47E9-BB21-EFB74620207C}"/>
+                <a16:creationId xmlns:a16="http://schemas.microsoft.com/office/drawing/2014/main" id="{BCD9898C-B4C3-4592-9A34-848C70BB9287}"/>
               </a:ext>
             </a:extLst>
           </p:cNvPr>
@@ -11874,7 +11874,7 @@
           <p:cNvPr id="29" name="Text 27">
             <a:extLst xmlns:a="http://schemas.openxmlformats.org/drawingml/2006/main">
               <a:ext uri="{FF2B5EF4-FFF2-40B4-BE49-F238E27FC236}">
-                <a16:creationId xmlns:a16="http://schemas.microsoft.com/office/drawing/2014/main" id="{712C8081-1653-4857-AD0A-91318EF17594}"/>
+                <a16:creationId xmlns:a16="http://schemas.microsoft.com/office/drawing/2014/main" id="{A8EEC52E-7BC5-43FE-AEC9-1779FC5BD177}"/>
               </a:ext>
             </a:extLst>
           </p:cNvPr>
@@ -11919,7 +11919,7 @@
           <p:cNvPr id="30" name="Text 28">
             <a:extLst xmlns:a="http://schemas.openxmlformats.org/drawingml/2006/main">
               <a:ext uri="{FF2B5EF4-FFF2-40B4-BE49-F238E27FC236}">
-                <a16:creationId xmlns:a16="http://schemas.microsoft.com/office/drawing/2014/main" id="{6CA890C5-9308-49DD-A93B-416CF007871F}"/>
+                <a16:creationId xmlns:a16="http://schemas.microsoft.com/office/drawing/2014/main" id="{35D10EB5-CEA7-40B9-AA84-76BF09F52438}"/>
               </a:ext>
             </a:extLst>
           </p:cNvPr>
@@ -11964,7 +11964,7 @@
           <p:cNvPr id="31" name="Text 29">
             <a:extLst xmlns:a="http://schemas.openxmlformats.org/drawingml/2006/main">
               <a:ext uri="{FF2B5EF4-FFF2-40B4-BE49-F238E27FC236}">
-                <a16:creationId xmlns:a16="http://schemas.microsoft.com/office/drawing/2014/main" id="{107C7CC4-86F3-4309-964E-C75A999B3169}"/>
+                <a16:creationId xmlns:a16="http://schemas.microsoft.com/office/drawing/2014/main" id="{15E7519E-96B9-4FB1-A1B9-FE5BF849B787}"/>
               </a:ext>
             </a:extLst>
           </p:cNvPr>
@@ -12012,7 +12012,7 @@
           <p:cNvPr id="32" name="Shape 30">
             <a:extLst xmlns:a="http://schemas.openxmlformats.org/drawingml/2006/main">
               <a:ext uri="{FF2B5EF4-FFF2-40B4-BE49-F238E27FC236}">
-                <a16:creationId xmlns:a16="http://schemas.microsoft.com/office/drawing/2014/main" id="{7D2B0A19-B56D-4752-8962-8A39EA9E5AAB}"/>
+                <a16:creationId xmlns:a16="http://schemas.microsoft.com/office/drawing/2014/main" id="{59B3DE87-8743-4BBC-AD3F-F28DC74A0914}"/>
               </a:ext>
             </a:extLst>
           </p:cNvPr>
@@ -12059,7 +12059,7 @@
           <p:cNvPr id="33" name="Text 31">
             <a:extLst xmlns:a="http://schemas.openxmlformats.org/drawingml/2006/main">
               <a:ext uri="{FF2B5EF4-FFF2-40B4-BE49-F238E27FC236}">
-                <a16:creationId xmlns:a16="http://schemas.microsoft.com/office/drawing/2014/main" id="{A16ADFD6-DA7E-4606-8FBC-315EF36BCC13}"/>
+                <a16:creationId xmlns:a16="http://schemas.microsoft.com/office/drawing/2014/main" id="{EF9C65CC-2185-43DF-8C53-FB20A9610469}"/>
               </a:ext>
             </a:extLst>
           </p:cNvPr>
@@ -12104,7 +12104,7 @@
           <p:cNvPr id="34" name="Text 32">
             <a:extLst xmlns:a="http://schemas.openxmlformats.org/drawingml/2006/main">
               <a:ext uri="{FF2B5EF4-FFF2-40B4-BE49-F238E27FC236}">
-                <a16:creationId xmlns:a16="http://schemas.microsoft.com/office/drawing/2014/main" id="{73C64AC1-C27F-42E4-B68C-F0FDF99FE7EA}"/>
+                <a16:creationId xmlns:a16="http://schemas.microsoft.com/office/drawing/2014/main" id="{4895C4FF-073F-4289-B393-F22FE1FB94BF}"/>
               </a:ext>
             </a:extLst>
           </p:cNvPr>
@@ -12149,7 +12149,7 @@
           <p:cNvPr id="35" name="Text 33">
             <a:extLst xmlns:a="http://schemas.openxmlformats.org/drawingml/2006/main">
               <a:ext uri="{FF2B5EF4-FFF2-40B4-BE49-F238E27FC236}">
-                <a16:creationId xmlns:a16="http://schemas.microsoft.com/office/drawing/2014/main" id="{C36B19D4-E434-4BE2-B6A9-5A7BE31C02F7}"/>
+                <a16:creationId xmlns:a16="http://schemas.microsoft.com/office/drawing/2014/main" id="{A6251CCB-053F-4361-AD7F-77072196181F}"/>
               </a:ext>
             </a:extLst>
           </p:cNvPr>
@@ -12197,7 +12197,7 @@
           <p:cNvPr id="36" name="Text 34">
             <a:extLst xmlns:a="http://schemas.openxmlformats.org/drawingml/2006/main">
               <a:ext uri="{FF2B5EF4-FFF2-40B4-BE49-F238E27FC236}">
-                <a16:creationId xmlns:a16="http://schemas.microsoft.com/office/drawing/2014/main" id="{007A65A3-BBD9-472B-B3FC-FC4438F226D9}"/>
+                <a16:creationId xmlns:a16="http://schemas.microsoft.com/office/drawing/2014/main" id="{67390078-E581-4344-845F-5252AB0ED4C3}"/>
               </a:ext>
             </a:extLst>
           </p:cNvPr>
@@ -12242,7 +12242,7 @@
           <p:cNvPr id="37" name="Text 35">
             <a:extLst xmlns:a="http://schemas.openxmlformats.org/drawingml/2006/main">
               <a:ext uri="{FF2B5EF4-FFF2-40B4-BE49-F238E27FC236}">
-                <a16:creationId xmlns:a16="http://schemas.microsoft.com/office/drawing/2014/main" id="{E840993D-70BA-44B2-983F-1F55C37E916B}"/>
+                <a16:creationId xmlns:a16="http://schemas.microsoft.com/office/drawing/2014/main" id="{497ED5FA-7E64-49C6-8709-9FB26404E948}"/>
               </a:ext>
             </a:extLst>
           </p:cNvPr>
@@ -12290,7 +12290,7 @@
           <p:cNvPr id="38" name="Text 36">
             <a:extLst xmlns:a="http://schemas.openxmlformats.org/drawingml/2006/main">
               <a:ext uri="{FF2B5EF4-FFF2-40B4-BE49-F238E27FC236}">
-                <a16:creationId xmlns:a16="http://schemas.microsoft.com/office/drawing/2014/main" id="{EC6F0E22-B55F-409E-9BA8-2D223165B818}"/>
+                <a16:creationId xmlns:a16="http://schemas.microsoft.com/office/drawing/2014/main" id="{4E41482F-5C9C-4B8C-836A-0F2A9D583F0C}"/>
               </a:ext>
             </a:extLst>
           </p:cNvPr>
@@ -12336,7 +12336,7 @@
     </p:spTree>
     <p:extLst>
       <p:ext uri="{BB962C8B-B14F-4D97-AF65-F5344CB8AC3E}">
-        <p14:creationId xmlns:p14="http://schemas.microsoft.com/office/powerpoint/2010/main" val="271346630"/>
+        <p14:creationId xmlns:p14="http://schemas.microsoft.com/office/powerpoint/2010/main" val="300415269"/>
       </p:ext>
     </p:extLst>
   </p:cSld>
@@ -12367,7 +12367,7 @@
           <p:cNvPr id="2" name="Text 0">
             <a:extLst xmlns:a="http://schemas.openxmlformats.org/drawingml/2006/main">
               <a:ext uri="{FF2B5EF4-FFF2-40B4-BE49-F238E27FC236}">
-                <a16:creationId xmlns:a16="http://schemas.microsoft.com/office/drawing/2014/main" id="{D9E05BC6-8CD9-4A09-BA4E-4935C9E28437}"/>
+                <a16:creationId xmlns:a16="http://schemas.microsoft.com/office/drawing/2014/main" id="{2C72A1FD-AD5C-4C85-A0C0-8B04C34907EE}"/>
               </a:ext>
             </a:extLst>
           </p:cNvPr>
@@ -12412,7 +12412,7 @@
           <p:cNvPr id="3" name="Text 1">
             <a:extLst xmlns:a="http://schemas.openxmlformats.org/drawingml/2006/main">
               <a:ext uri="{FF2B5EF4-FFF2-40B4-BE49-F238E27FC236}">
-                <a16:creationId xmlns:a16="http://schemas.microsoft.com/office/drawing/2014/main" id="{FA32386D-74CC-439B-9C48-5F99BA954904}"/>
+                <a16:creationId xmlns:a16="http://schemas.microsoft.com/office/drawing/2014/main" id="{95A18A85-199C-40C3-A1DE-AF9A729146B6}"/>
               </a:ext>
             </a:extLst>
           </p:cNvPr>
@@ -12457,7 +12457,7 @@
           <p:cNvPr id="4" name="Shape 2">
             <a:extLst xmlns:a="http://schemas.openxmlformats.org/drawingml/2006/main">
               <a:ext uri="{FF2B5EF4-FFF2-40B4-BE49-F238E27FC236}">
-                <a16:creationId xmlns:a16="http://schemas.microsoft.com/office/drawing/2014/main" id="{2AAD5DB5-200B-4FF9-82CB-AFF147B171CA}"/>
+                <a16:creationId xmlns:a16="http://schemas.microsoft.com/office/drawing/2014/main" id="{85AFBC2B-F9DF-4461-934A-5850E6B2AA43}"/>
               </a:ext>
             </a:extLst>
           </p:cNvPr>
@@ -12497,7 +12497,7 @@
           <p:cNvPr id="5" name="Shape 3">
             <a:extLst xmlns:a="http://schemas.openxmlformats.org/drawingml/2006/main">
               <a:ext uri="{FF2B5EF4-FFF2-40B4-BE49-F238E27FC236}">
-                <a16:creationId xmlns:a16="http://schemas.microsoft.com/office/drawing/2014/main" id="{3D98C3CF-E4D8-4D72-9FC4-1E3F8E08C8BC}"/>
+                <a16:creationId xmlns:a16="http://schemas.microsoft.com/office/drawing/2014/main" id="{ECD2F3B0-D901-4C3C-99D1-8B3FF6BA12DA}"/>
               </a:ext>
             </a:extLst>
           </p:cNvPr>
@@ -12537,7 +12537,7 @@
           <p:cNvPr id="6" name="Text 4">
             <a:extLst xmlns:a="http://schemas.openxmlformats.org/drawingml/2006/main">
               <a:ext uri="{FF2B5EF4-FFF2-40B4-BE49-F238E27FC236}">
-                <a16:creationId xmlns:a16="http://schemas.microsoft.com/office/drawing/2014/main" id="{BAB148E6-1DE8-4B89-BCAA-A28F5AFC1EC9}"/>
+                <a16:creationId xmlns:a16="http://schemas.microsoft.com/office/drawing/2014/main" id="{F2CBA905-03DF-489F-A114-85A499EAA4E8}"/>
               </a:ext>
             </a:extLst>
           </p:cNvPr>
@@ -12582,7 +12582,7 @@
           <p:cNvPr id="7" name="Text 5">
             <a:extLst xmlns:a="http://schemas.openxmlformats.org/drawingml/2006/main">
               <a:ext uri="{FF2B5EF4-FFF2-40B4-BE49-F238E27FC236}">
-                <a16:creationId xmlns:a16="http://schemas.microsoft.com/office/drawing/2014/main" id="{8BEEB988-7369-4907-99B2-E31217E73325}"/>
+                <a16:creationId xmlns:a16="http://schemas.microsoft.com/office/drawing/2014/main" id="{43541F11-E72D-4E76-BE56-0775A592F98A}"/>
               </a:ext>
             </a:extLst>
           </p:cNvPr>
@@ -12627,7 +12627,7 @@
           <p:cNvPr id="8" name="Text 6">
             <a:extLst xmlns:a="http://schemas.openxmlformats.org/drawingml/2006/main">
               <a:ext uri="{FF2B5EF4-FFF2-40B4-BE49-F238E27FC236}">
-                <a16:creationId xmlns:a16="http://schemas.microsoft.com/office/drawing/2014/main" id="{38E4F902-F86D-41C5-8B0A-0815E47B18EC}"/>
+                <a16:creationId xmlns:a16="http://schemas.microsoft.com/office/drawing/2014/main" id="{E9D7A180-BC8E-4925-80A9-EDB07D0C6D51}"/>
               </a:ext>
             </a:extLst>
           </p:cNvPr>
@@ -12673,7 +12673,7 @@
     </p:spTree>
     <p:extLst>
       <p:ext uri="{BB962C8B-B14F-4D97-AF65-F5344CB8AC3E}">
-        <p14:creationId xmlns:p14="http://schemas.microsoft.com/office/powerpoint/2010/main" val="2085605485"/>
+        <p14:creationId xmlns:p14="http://schemas.microsoft.com/office/powerpoint/2010/main" val="935904540"/>
       </p:ext>
     </p:extLst>
   </p:cSld>
@@ -12704,7 +12704,7 @@
           <p:cNvPr id="2" name="Text 0">
             <a:extLst xmlns:a="http://schemas.openxmlformats.org/drawingml/2006/main">
               <a:ext uri="{FF2B5EF4-FFF2-40B4-BE49-F238E27FC236}">
-                <a16:creationId xmlns:a16="http://schemas.microsoft.com/office/drawing/2014/main" id="{D3A9B8A0-DA35-4FF3-9C2F-62A411EE99E4}"/>
+                <a16:creationId xmlns:a16="http://schemas.microsoft.com/office/drawing/2014/main" id="{798FDC49-56CC-4193-BE40-379E22E1F97B}"/>
               </a:ext>
             </a:extLst>
           </p:cNvPr>
@@ -12749,7 +12749,7 @@
           <p:cNvPr id="3" name="Text 1">
             <a:extLst xmlns:a="http://schemas.openxmlformats.org/drawingml/2006/main">
               <a:ext uri="{FF2B5EF4-FFF2-40B4-BE49-F238E27FC236}">
-                <a16:creationId xmlns:a16="http://schemas.microsoft.com/office/drawing/2014/main" id="{70745080-B852-429D-8BF8-018D6CA037A9}"/>
+                <a16:creationId xmlns:a16="http://schemas.microsoft.com/office/drawing/2014/main" id="{253AEE7D-BBC9-466D-9A00-AA8B25D6A700}"/>
               </a:ext>
             </a:extLst>
           </p:cNvPr>
@@ -12794,7 +12794,7 @@
           <p:cNvPr id="4" name="Text 2">
             <a:extLst xmlns:a="http://schemas.openxmlformats.org/drawingml/2006/main">
               <a:ext uri="{FF2B5EF4-FFF2-40B4-BE49-F238E27FC236}">
-                <a16:creationId xmlns:a16="http://schemas.microsoft.com/office/drawing/2014/main" id="{830CE035-D7FB-4019-A468-8AC104DA0D3C}"/>
+                <a16:creationId xmlns:a16="http://schemas.microsoft.com/office/drawing/2014/main" id="{029A61F6-A617-48CF-8304-E3EBE0CB5ED0}"/>
               </a:ext>
             </a:extLst>
           </p:cNvPr>
@@ -12839,7 +12839,7 @@
           <p:cNvPr id="5" name="Text 3">
             <a:extLst xmlns:a="http://schemas.openxmlformats.org/drawingml/2006/main">
               <a:ext uri="{FF2B5EF4-FFF2-40B4-BE49-F238E27FC236}">
-                <a16:creationId xmlns:a16="http://schemas.microsoft.com/office/drawing/2014/main" id="{543C8FAD-8144-4385-8797-B5917AF08C50}"/>
+                <a16:creationId xmlns:a16="http://schemas.microsoft.com/office/drawing/2014/main" id="{A3AE705C-11B7-43A3-A98F-DEBF3DBC42E7}"/>
               </a:ext>
             </a:extLst>
           </p:cNvPr>
@@ -12884,7 +12884,7 @@
           <p:cNvPr id="6" name="Shape 4">
             <a:extLst xmlns:a="http://schemas.openxmlformats.org/drawingml/2006/main">
               <a:ext uri="{FF2B5EF4-FFF2-40B4-BE49-F238E27FC236}">
-                <a16:creationId xmlns:a16="http://schemas.microsoft.com/office/drawing/2014/main" id="{0CAA795D-1455-472F-83D2-97C83CE9995A}"/>
+                <a16:creationId xmlns:a16="http://schemas.microsoft.com/office/drawing/2014/main" id="{EDCA030A-A876-4997-9A6F-A7FDC15CCB7D}"/>
               </a:ext>
             </a:extLst>
           </p:cNvPr>
@@ -12931,7 +12931,7 @@
           <p:cNvPr id="7" name="Shape 5">
             <a:extLst xmlns:a="http://schemas.openxmlformats.org/drawingml/2006/main">
               <a:ext uri="{FF2B5EF4-FFF2-40B4-BE49-F238E27FC236}">
-                <a16:creationId xmlns:a16="http://schemas.microsoft.com/office/drawing/2014/main" id="{706BBF6E-B03A-4FE5-9A73-8D06D2379F0A}"/>
+                <a16:creationId xmlns:a16="http://schemas.microsoft.com/office/drawing/2014/main" id="{53BEB674-D88B-4A9C-A5B3-69B3253E07A9}"/>
               </a:ext>
             </a:extLst>
           </p:cNvPr>
@@ -12969,7 +12969,7 @@
           <p:cNvPr id="8" name="Text 6">
             <a:extLst xmlns:a="http://schemas.openxmlformats.org/drawingml/2006/main">
               <a:ext uri="{FF2B5EF4-FFF2-40B4-BE49-F238E27FC236}">
-                <a16:creationId xmlns:a16="http://schemas.microsoft.com/office/drawing/2014/main" id="{F001227E-38C3-4533-8529-1A7DBAD865DC}"/>
+                <a16:creationId xmlns:a16="http://schemas.microsoft.com/office/drawing/2014/main" id="{64AC4158-88C4-4A22-81FC-F2418C42350D}"/>
               </a:ext>
             </a:extLst>
           </p:cNvPr>
@@ -13014,7 +13014,7 @@
           <p:cNvPr id="9" name="Text 7">
             <a:extLst xmlns:a="http://schemas.openxmlformats.org/drawingml/2006/main">
               <a:ext uri="{FF2B5EF4-FFF2-40B4-BE49-F238E27FC236}">
-                <a16:creationId xmlns:a16="http://schemas.microsoft.com/office/drawing/2014/main" id="{E8500EFB-882B-489C-AD2E-C4B167573E1C}"/>
+                <a16:creationId xmlns:a16="http://schemas.microsoft.com/office/drawing/2014/main" id="{7C08ADC5-A8B7-4859-866C-AFE39E7CC748}"/>
               </a:ext>
             </a:extLst>
           </p:cNvPr>
@@ -13062,7 +13062,7 @@
           <p:cNvPr id="10" name="Text 8">
             <a:extLst xmlns:a="http://schemas.openxmlformats.org/drawingml/2006/main">
               <a:ext uri="{FF2B5EF4-FFF2-40B4-BE49-F238E27FC236}">
-                <a16:creationId xmlns:a16="http://schemas.microsoft.com/office/drawing/2014/main" id="{6978BED9-BF4C-4EC5-AAEE-AFB11BD9032B}"/>
+                <a16:creationId xmlns:a16="http://schemas.microsoft.com/office/drawing/2014/main" id="{F025FBC3-A63E-4719-B526-04DB938669FE}"/>
               </a:ext>
             </a:extLst>
           </p:cNvPr>
@@ -13110,7 +13110,7 @@
           <p:cNvPr id="11" name="Text 9">
             <a:extLst xmlns:a="http://schemas.openxmlformats.org/drawingml/2006/main">
               <a:ext uri="{FF2B5EF4-FFF2-40B4-BE49-F238E27FC236}">
-                <a16:creationId xmlns:a16="http://schemas.microsoft.com/office/drawing/2014/main" id="{7881BF8A-B34F-4EED-AA36-0A523A7CE45A}"/>
+                <a16:creationId xmlns:a16="http://schemas.microsoft.com/office/drawing/2014/main" id="{29B56186-A97A-46A0-8A46-7527F68D7943}"/>
               </a:ext>
             </a:extLst>
           </p:cNvPr>
@@ -13205,7 +13205,7 @@
           <p:cNvPr id="12" name="Shape 10">
             <a:extLst xmlns:a="http://schemas.openxmlformats.org/drawingml/2006/main">
               <a:ext uri="{FF2B5EF4-FFF2-40B4-BE49-F238E27FC236}">
-                <a16:creationId xmlns:a16="http://schemas.microsoft.com/office/drawing/2014/main" id="{D042A275-ABE2-4CC6-B53F-E051EF1E50A8}"/>
+                <a16:creationId xmlns:a16="http://schemas.microsoft.com/office/drawing/2014/main" id="{144A906B-DE75-479B-AB14-C9491AB65426}"/>
               </a:ext>
             </a:extLst>
           </p:cNvPr>
@@ -13252,7 +13252,7 @@
           <p:cNvPr id="13" name="Shape 11">
             <a:extLst xmlns:a="http://schemas.openxmlformats.org/drawingml/2006/main">
               <a:ext uri="{FF2B5EF4-FFF2-40B4-BE49-F238E27FC236}">
-                <a16:creationId xmlns:a16="http://schemas.microsoft.com/office/drawing/2014/main" id="{F7B43E86-E9F2-4D4C-8855-3280ACA05FC8}"/>
+                <a16:creationId xmlns:a16="http://schemas.microsoft.com/office/drawing/2014/main" id="{BF82735C-1FB3-492D-8AEF-0D9FC688D5A0}"/>
               </a:ext>
             </a:extLst>
           </p:cNvPr>
@@ -13290,7 +13290,7 @@
           <p:cNvPr id="14" name="Text 12">
             <a:extLst xmlns:a="http://schemas.openxmlformats.org/drawingml/2006/main">
               <a:ext uri="{FF2B5EF4-FFF2-40B4-BE49-F238E27FC236}">
-                <a16:creationId xmlns:a16="http://schemas.microsoft.com/office/drawing/2014/main" id="{86D01171-6AC3-4BF1-8FF5-0C5E685322EA}"/>
+                <a16:creationId xmlns:a16="http://schemas.microsoft.com/office/drawing/2014/main" id="{7DA67003-8ED2-4755-BFE6-05062811744B}"/>
               </a:ext>
             </a:extLst>
           </p:cNvPr>
@@ -13335,7 +13335,7 @@
           <p:cNvPr id="15" name="Text 13">
             <a:extLst xmlns:a="http://schemas.openxmlformats.org/drawingml/2006/main">
               <a:ext uri="{FF2B5EF4-FFF2-40B4-BE49-F238E27FC236}">
-                <a16:creationId xmlns:a16="http://schemas.microsoft.com/office/drawing/2014/main" id="{ED7F1BB5-C5F0-4C78-87A8-CDC840F1F1E3}"/>
+                <a16:creationId xmlns:a16="http://schemas.microsoft.com/office/drawing/2014/main" id="{439F0626-36C3-4D7B-BCEE-557C24D1C996}"/>
               </a:ext>
             </a:extLst>
           </p:cNvPr>
@@ -13383,7 +13383,7 @@
           <p:cNvPr id="16" name="Text 14">
             <a:extLst xmlns:a="http://schemas.openxmlformats.org/drawingml/2006/main">
               <a:ext uri="{FF2B5EF4-FFF2-40B4-BE49-F238E27FC236}">
-                <a16:creationId xmlns:a16="http://schemas.microsoft.com/office/drawing/2014/main" id="{1D017FAF-5BAE-410A-BF54-F7E46D9AC983}"/>
+                <a16:creationId xmlns:a16="http://schemas.microsoft.com/office/drawing/2014/main" id="{EDE6D0DA-4135-4E48-BA17-ECA42209E7D0}"/>
               </a:ext>
             </a:extLst>
           </p:cNvPr>
@@ -13421,7 +13421,7 @@
                 <a:ea typeface="Calibri"/>
                 <a:cs typeface="Calibri"/>
               </a:rPr>
-              <a:t>Five GitHub protocols on a pinned 12.7 MB Apache-2.0 snapshot, including the later GCS/macro comparison</a:t>
+              <a:t>Six GitHub protocols on a pinned snapshot, including fair manual placement and bounded GEPA</a:t>
             </a:r>
           </a:p>
         </p:txBody>
@@ -13431,7 +13431,7 @@
           <p:cNvPr id="17" name="Text 15">
             <a:extLst xmlns:a="http://schemas.openxmlformats.org/drawingml/2006/main">
               <a:ext uri="{FF2B5EF4-FFF2-40B4-BE49-F238E27FC236}">
-                <a16:creationId xmlns:a16="http://schemas.microsoft.com/office/drawing/2014/main" id="{39CA1768-0565-4456-B467-79901FC931EA}"/>
+                <a16:creationId xmlns:a16="http://schemas.microsoft.com/office/drawing/2014/main" id="{E3CD0FFF-102C-4FAC-99EC-3ADF264239C7}"/>
               </a:ext>
             </a:extLst>
           </p:cNvPr>
@@ -13526,7 +13526,7 @@
           <p:cNvPr id="18" name="Shape 16">
             <a:extLst xmlns:a="http://schemas.openxmlformats.org/drawingml/2006/main">
               <a:ext uri="{FF2B5EF4-FFF2-40B4-BE49-F238E27FC236}">
-                <a16:creationId xmlns:a16="http://schemas.microsoft.com/office/drawing/2014/main" id="{D3E15A18-9543-412B-86CB-717A8DC42C7C}"/>
+                <a16:creationId xmlns:a16="http://schemas.microsoft.com/office/drawing/2014/main" id="{22B65D29-A216-4CA6-AAAE-712F4D13F03F}"/>
               </a:ext>
             </a:extLst>
           </p:cNvPr>
@@ -13573,7 +13573,7 @@
           <p:cNvPr id="19" name="Shape 17">
             <a:extLst xmlns:a="http://schemas.openxmlformats.org/drawingml/2006/main">
               <a:ext uri="{FF2B5EF4-FFF2-40B4-BE49-F238E27FC236}">
-                <a16:creationId xmlns:a16="http://schemas.microsoft.com/office/drawing/2014/main" id="{D5F42B69-3A13-4C6B-8D17-0A6B1A98F545}"/>
+                <a16:creationId xmlns:a16="http://schemas.microsoft.com/office/drawing/2014/main" id="{31657710-1929-4FE3-A390-42A64310F2BD}"/>
               </a:ext>
             </a:extLst>
           </p:cNvPr>
@@ -13611,7 +13611,7 @@
           <p:cNvPr id="20" name="Text 18">
             <a:extLst xmlns:a="http://schemas.openxmlformats.org/drawingml/2006/main">
               <a:ext uri="{FF2B5EF4-FFF2-40B4-BE49-F238E27FC236}">
-                <a16:creationId xmlns:a16="http://schemas.microsoft.com/office/drawing/2014/main" id="{DB2F8C4F-D204-4BF9-B5C9-5643F5D199EA}"/>
+                <a16:creationId xmlns:a16="http://schemas.microsoft.com/office/drawing/2014/main" id="{D08990FC-7181-447E-A9A7-C53C89F59E64}"/>
               </a:ext>
             </a:extLst>
           </p:cNvPr>
@@ -13656,7 +13656,7 @@
           <p:cNvPr id="21" name="Text 19">
             <a:extLst xmlns:a="http://schemas.openxmlformats.org/drawingml/2006/main">
               <a:ext uri="{FF2B5EF4-FFF2-40B4-BE49-F238E27FC236}">
-                <a16:creationId xmlns:a16="http://schemas.microsoft.com/office/drawing/2014/main" id="{03004AB0-80EF-49F4-A431-629853439A4F}"/>
+                <a16:creationId xmlns:a16="http://schemas.microsoft.com/office/drawing/2014/main" id="{C551E548-7853-43D3-B569-3ED34C18E48B}"/>
               </a:ext>
             </a:extLst>
           </p:cNvPr>
@@ -13704,7 +13704,7 @@
           <p:cNvPr id="22" name="Text 20">
             <a:extLst xmlns:a="http://schemas.openxmlformats.org/drawingml/2006/main">
               <a:ext uri="{FF2B5EF4-FFF2-40B4-BE49-F238E27FC236}">
-                <a16:creationId xmlns:a16="http://schemas.microsoft.com/office/drawing/2014/main" id="{A96D15A5-DB1D-4A92-94FD-B56DF3649C09}"/>
+                <a16:creationId xmlns:a16="http://schemas.microsoft.com/office/drawing/2014/main" id="{C7E027AF-C81E-45E1-974E-C07330B3F657}"/>
               </a:ext>
             </a:extLst>
           </p:cNvPr>
@@ -13752,7 +13752,7 @@
           <p:cNvPr id="23" name="Text 21">
             <a:extLst xmlns:a="http://schemas.openxmlformats.org/drawingml/2006/main">
               <a:ext uri="{FF2B5EF4-FFF2-40B4-BE49-F238E27FC236}">
-                <a16:creationId xmlns:a16="http://schemas.microsoft.com/office/drawing/2014/main" id="{08E339C5-64C7-4F8A-9CF7-2C82E0EDCAF5}"/>
+                <a16:creationId xmlns:a16="http://schemas.microsoft.com/office/drawing/2014/main" id="{505B54A1-4237-4CAF-A570-17B2F8EDC44B}"/>
               </a:ext>
             </a:extLst>
           </p:cNvPr>
@@ -13847,7 +13847,7 @@
           <p:cNvPr id="24" name="Text 22">
             <a:extLst xmlns:a="http://schemas.openxmlformats.org/drawingml/2006/main">
               <a:ext uri="{FF2B5EF4-FFF2-40B4-BE49-F238E27FC236}">
-                <a16:creationId xmlns:a16="http://schemas.microsoft.com/office/drawing/2014/main" id="{85CF8DDF-C15D-440C-A65F-EF1FA4012664}"/>
+                <a16:creationId xmlns:a16="http://schemas.microsoft.com/office/drawing/2014/main" id="{3FAFBCA1-F654-438E-987F-A09D5CF5B683}"/>
               </a:ext>
             </a:extLst>
           </p:cNvPr>
@@ -13892,7 +13892,7 @@
           <p:cNvPr id="25" name="Shape 23">
             <a:extLst xmlns:a="http://schemas.openxmlformats.org/drawingml/2006/main">
               <a:ext uri="{FF2B5EF4-FFF2-40B4-BE49-F238E27FC236}">
-                <a16:creationId xmlns:a16="http://schemas.microsoft.com/office/drawing/2014/main" id="{0A4F365C-6E4D-4E92-8C35-7BC288BECE99}"/>
+                <a16:creationId xmlns:a16="http://schemas.microsoft.com/office/drawing/2014/main" id="{A86FA741-A2B6-4616-9BDF-E909BEB838BF}"/>
               </a:ext>
             </a:extLst>
           </p:cNvPr>
@@ -13930,7 +13930,7 @@
           <p:cNvPr id="26" name="Text 24">
             <a:extLst xmlns:a="http://schemas.openxmlformats.org/drawingml/2006/main">
               <a:ext uri="{FF2B5EF4-FFF2-40B4-BE49-F238E27FC236}">
-                <a16:creationId xmlns:a16="http://schemas.microsoft.com/office/drawing/2014/main" id="{0B467388-668F-4081-BC3B-6956135AE7D1}"/>
+                <a16:creationId xmlns:a16="http://schemas.microsoft.com/office/drawing/2014/main" id="{2347726F-FC98-4E03-A94C-6D4EBFB7ED52}"/>
               </a:ext>
             </a:extLst>
           </p:cNvPr>
@@ -13975,7 +13975,7 @@
           <p:cNvPr id="27" name="Text 25">
             <a:extLst xmlns:a="http://schemas.openxmlformats.org/drawingml/2006/main">
               <a:ext uri="{FF2B5EF4-FFF2-40B4-BE49-F238E27FC236}">
-                <a16:creationId xmlns:a16="http://schemas.microsoft.com/office/drawing/2014/main" id="{9B204C7B-CECD-4D7E-AE23-ECEB56F6C9B2}"/>
+                <a16:creationId xmlns:a16="http://schemas.microsoft.com/office/drawing/2014/main" id="{35D7ACBA-C29D-416F-A406-22B6CCEC1FBA}"/>
               </a:ext>
             </a:extLst>
           </p:cNvPr>
@@ -14023,7 +14023,7 @@
           <p:cNvPr id="28" name="Shape 26">
             <a:extLst xmlns:a="http://schemas.openxmlformats.org/drawingml/2006/main">
               <a:ext uri="{FF2B5EF4-FFF2-40B4-BE49-F238E27FC236}">
-                <a16:creationId xmlns:a16="http://schemas.microsoft.com/office/drawing/2014/main" id="{F774D0EE-5FC0-413D-8E6D-076F7F6F582E}"/>
+                <a16:creationId xmlns:a16="http://schemas.microsoft.com/office/drawing/2014/main" id="{6FB9743C-3925-4227-95C6-68CCFC3B1A07}"/>
               </a:ext>
             </a:extLst>
           </p:cNvPr>
@@ -14061,7 +14061,7 @@
           <p:cNvPr id="29" name="Text 27">
             <a:extLst xmlns:a="http://schemas.openxmlformats.org/drawingml/2006/main">
               <a:ext uri="{FF2B5EF4-FFF2-40B4-BE49-F238E27FC236}">
-                <a16:creationId xmlns:a16="http://schemas.microsoft.com/office/drawing/2014/main" id="{E43FE2D5-5511-43A9-9B90-9D00E6944F83}"/>
+                <a16:creationId xmlns:a16="http://schemas.microsoft.com/office/drawing/2014/main" id="{12CBD4ED-0919-4B0A-BC31-CBC64671F058}"/>
               </a:ext>
             </a:extLst>
           </p:cNvPr>
@@ -14106,7 +14106,7 @@
           <p:cNvPr id="30" name="Text 28">
             <a:extLst xmlns:a="http://schemas.openxmlformats.org/drawingml/2006/main">
               <a:ext uri="{FF2B5EF4-FFF2-40B4-BE49-F238E27FC236}">
-                <a16:creationId xmlns:a16="http://schemas.microsoft.com/office/drawing/2014/main" id="{738AC211-672E-400F-919F-326FC7A01417}"/>
+                <a16:creationId xmlns:a16="http://schemas.microsoft.com/office/drawing/2014/main" id="{CF84D191-C405-413A-B461-50A01AE2B0F5}"/>
               </a:ext>
             </a:extLst>
           </p:cNvPr>
@@ -14154,7 +14154,7 @@
           <p:cNvPr id="31" name="Shape 29">
             <a:extLst xmlns:a="http://schemas.openxmlformats.org/drawingml/2006/main">
               <a:ext uri="{FF2B5EF4-FFF2-40B4-BE49-F238E27FC236}">
-                <a16:creationId xmlns:a16="http://schemas.microsoft.com/office/drawing/2014/main" id="{47550338-506F-4E23-9544-2FFE24029653}"/>
+                <a16:creationId xmlns:a16="http://schemas.microsoft.com/office/drawing/2014/main" id="{D66F284F-AF73-4E53-A0CD-16E1CF9FB672}"/>
               </a:ext>
             </a:extLst>
           </p:cNvPr>
@@ -14192,7 +14192,7 @@
           <p:cNvPr id="32" name="Text 30">
             <a:extLst xmlns:a="http://schemas.openxmlformats.org/drawingml/2006/main">
               <a:ext uri="{FF2B5EF4-FFF2-40B4-BE49-F238E27FC236}">
-                <a16:creationId xmlns:a16="http://schemas.microsoft.com/office/drawing/2014/main" id="{EE689677-2621-4BA0-967D-A7A16C9A08EF}"/>
+                <a16:creationId xmlns:a16="http://schemas.microsoft.com/office/drawing/2014/main" id="{DC896EE4-CD0E-44A1-8D55-E480D977D662}"/>
               </a:ext>
             </a:extLst>
           </p:cNvPr>
@@ -14237,7 +14237,7 @@
           <p:cNvPr id="33" name="Text 31">
             <a:extLst xmlns:a="http://schemas.openxmlformats.org/drawingml/2006/main">
               <a:ext uri="{FF2B5EF4-FFF2-40B4-BE49-F238E27FC236}">
-                <a16:creationId xmlns:a16="http://schemas.microsoft.com/office/drawing/2014/main" id="{FE34B122-1330-4962-A774-E36773272BBE}"/>
+                <a16:creationId xmlns:a16="http://schemas.microsoft.com/office/drawing/2014/main" id="{4306186E-7F11-49A7-8039-41CDFF25E7DC}"/>
               </a:ext>
             </a:extLst>
           </p:cNvPr>
@@ -14285,7 +14285,7 @@
           <p:cNvPr id="34" name="Shape 32">
             <a:extLst xmlns:a="http://schemas.openxmlformats.org/drawingml/2006/main">
               <a:ext uri="{FF2B5EF4-FFF2-40B4-BE49-F238E27FC236}">
-                <a16:creationId xmlns:a16="http://schemas.microsoft.com/office/drawing/2014/main" id="{ED905147-0ECA-498E-8509-BECD47BA562F}"/>
+                <a16:creationId xmlns:a16="http://schemas.microsoft.com/office/drawing/2014/main" id="{6E5EDFF0-C62C-4C8F-BE0F-75B227903814}"/>
               </a:ext>
             </a:extLst>
           </p:cNvPr>
@@ -14323,7 +14323,7 @@
           <p:cNvPr id="35" name="Text 33">
             <a:extLst xmlns:a="http://schemas.openxmlformats.org/drawingml/2006/main">
               <a:ext uri="{FF2B5EF4-FFF2-40B4-BE49-F238E27FC236}">
-                <a16:creationId xmlns:a16="http://schemas.microsoft.com/office/drawing/2014/main" id="{6A88123B-3319-455E-874E-EFAE6D9454FE}"/>
+                <a16:creationId xmlns:a16="http://schemas.microsoft.com/office/drawing/2014/main" id="{A3FCCB97-D8DF-4D6E-B183-7B8BF732CD81}"/>
               </a:ext>
             </a:extLst>
           </p:cNvPr>
@@ -14368,7 +14368,7 @@
           <p:cNvPr id="36" name="Text 34">
             <a:extLst xmlns:a="http://schemas.openxmlformats.org/drawingml/2006/main">
               <a:ext uri="{FF2B5EF4-FFF2-40B4-BE49-F238E27FC236}">
-                <a16:creationId xmlns:a16="http://schemas.microsoft.com/office/drawing/2014/main" id="{A89DE052-CE57-446D-96B9-6979CE9ACB3A}"/>
+                <a16:creationId xmlns:a16="http://schemas.microsoft.com/office/drawing/2014/main" id="{5CBCD300-D21C-486D-A06D-D08FBE0BA5F0}"/>
               </a:ext>
             </a:extLst>
           </p:cNvPr>
@@ -14416,7 +14416,7 @@
           <p:cNvPr id="37" name="Shape 35">
             <a:extLst xmlns:a="http://schemas.openxmlformats.org/drawingml/2006/main">
               <a:ext uri="{FF2B5EF4-FFF2-40B4-BE49-F238E27FC236}">
-                <a16:creationId xmlns:a16="http://schemas.microsoft.com/office/drawing/2014/main" id="{C41652D3-EB02-466B-97BD-C19EB20C87EE}"/>
+                <a16:creationId xmlns:a16="http://schemas.microsoft.com/office/drawing/2014/main" id="{65967129-FA46-430F-A247-165154C684FF}"/>
               </a:ext>
             </a:extLst>
           </p:cNvPr>
@@ -14454,7 +14454,7 @@
           <p:cNvPr id="38" name="Text 36">
             <a:extLst xmlns:a="http://schemas.openxmlformats.org/drawingml/2006/main">
               <a:ext uri="{FF2B5EF4-FFF2-40B4-BE49-F238E27FC236}">
-                <a16:creationId xmlns:a16="http://schemas.microsoft.com/office/drawing/2014/main" id="{2C0B3A04-62B5-4069-A2F2-6B30575CDE8B}"/>
+                <a16:creationId xmlns:a16="http://schemas.microsoft.com/office/drawing/2014/main" id="{0E13B5C1-98A4-461A-8A5F-7B64CBBE8D42}"/>
               </a:ext>
             </a:extLst>
           </p:cNvPr>
@@ -14499,7 +14499,7 @@
           <p:cNvPr id="39" name="Text 37">
             <a:extLst xmlns:a="http://schemas.openxmlformats.org/drawingml/2006/main">
               <a:ext uri="{FF2B5EF4-FFF2-40B4-BE49-F238E27FC236}">
-                <a16:creationId xmlns:a16="http://schemas.microsoft.com/office/drawing/2014/main" id="{65EF1D31-1A2E-445E-9D4C-7EBB6707314D}"/>
+                <a16:creationId xmlns:a16="http://schemas.microsoft.com/office/drawing/2014/main" id="{0D870B4A-F856-4CC5-A726-D9696A66B098}"/>
               </a:ext>
             </a:extLst>
           </p:cNvPr>
@@ -14547,7 +14547,7 @@
           <p:cNvPr id="40" name="Shape 38">
             <a:extLst xmlns:a="http://schemas.openxmlformats.org/drawingml/2006/main">
               <a:ext uri="{FF2B5EF4-FFF2-40B4-BE49-F238E27FC236}">
-                <a16:creationId xmlns:a16="http://schemas.microsoft.com/office/drawing/2014/main" id="{A4D9222E-9E7B-4F3E-82ED-375BF0B2F9E6}"/>
+                <a16:creationId xmlns:a16="http://schemas.microsoft.com/office/drawing/2014/main" id="{DFBBC17E-6D66-4BB0-A750-FC5575A458CD}"/>
               </a:ext>
             </a:extLst>
           </p:cNvPr>
@@ -14585,7 +14585,7 @@
           <p:cNvPr id="41" name="Text 39">
             <a:extLst xmlns:a="http://schemas.openxmlformats.org/drawingml/2006/main">
               <a:ext uri="{FF2B5EF4-FFF2-40B4-BE49-F238E27FC236}">
-                <a16:creationId xmlns:a16="http://schemas.microsoft.com/office/drawing/2014/main" id="{CC2F3C14-0F41-4A42-B0F4-18B1EC13DA3E}"/>
+                <a16:creationId xmlns:a16="http://schemas.microsoft.com/office/drawing/2014/main" id="{41178860-9E99-4C69-99B5-8163B011F7D1}"/>
               </a:ext>
             </a:extLst>
           </p:cNvPr>
@@ -14630,7 +14630,7 @@
           <p:cNvPr id="42" name="Text 40">
             <a:extLst xmlns:a="http://schemas.openxmlformats.org/drawingml/2006/main">
               <a:ext uri="{FF2B5EF4-FFF2-40B4-BE49-F238E27FC236}">
-                <a16:creationId xmlns:a16="http://schemas.microsoft.com/office/drawing/2014/main" id="{CE0239F7-226A-4804-B7FA-C6D1C81854ED}"/>
+                <a16:creationId xmlns:a16="http://schemas.microsoft.com/office/drawing/2014/main" id="{00B95D76-AC4D-478F-9B4E-A1AE02E5A154}"/>
               </a:ext>
             </a:extLst>
           </p:cNvPr>
@@ -14678,7 +14678,7 @@
           <p:cNvPr id="43" name="Text 41">
             <a:extLst xmlns:a="http://schemas.openxmlformats.org/drawingml/2006/main">
               <a:ext uri="{FF2B5EF4-FFF2-40B4-BE49-F238E27FC236}">
-                <a16:creationId xmlns:a16="http://schemas.microsoft.com/office/drawing/2014/main" id="{E600EE25-2D68-4560-9FD2-BBC66E20E7DC}"/>
+                <a16:creationId xmlns:a16="http://schemas.microsoft.com/office/drawing/2014/main" id="{9ABFB39C-3688-45CD-9C84-051B12EB1FCF}"/>
               </a:ext>
             </a:extLst>
           </p:cNvPr>
@@ -14721,7 +14721,7 @@
     </p:spTree>
     <p:extLst>
       <p:ext uri="{BB962C8B-B14F-4D97-AF65-F5344CB8AC3E}">
-        <p14:creationId xmlns:p14="http://schemas.microsoft.com/office/powerpoint/2010/main" val="654320016"/>
+        <p14:creationId xmlns:p14="http://schemas.microsoft.com/office/powerpoint/2010/main" val="445518188"/>
       </p:ext>
     </p:extLst>
   </p:cSld>
@@ -14752,7 +14752,7 @@
           <p:cNvPr id="2" name="Text 0">
             <a:extLst xmlns:a="http://schemas.openxmlformats.org/drawingml/2006/main">
               <a:ext uri="{FF2B5EF4-FFF2-40B4-BE49-F238E27FC236}">
-                <a16:creationId xmlns:a16="http://schemas.microsoft.com/office/drawing/2014/main" id="{0A8CBE12-CE2B-4678-975C-2BB55714198E}"/>
+                <a16:creationId xmlns:a16="http://schemas.microsoft.com/office/drawing/2014/main" id="{A19900A9-3D67-4811-8618-9905C956C53C}"/>
               </a:ext>
             </a:extLst>
           </p:cNvPr>
@@ -14797,7 +14797,7 @@
           <p:cNvPr id="3" name="Text 1">
             <a:extLst xmlns:a="http://schemas.openxmlformats.org/drawingml/2006/main">
               <a:ext uri="{FF2B5EF4-FFF2-40B4-BE49-F238E27FC236}">
-                <a16:creationId xmlns:a16="http://schemas.microsoft.com/office/drawing/2014/main" id="{D78B7EE8-99DA-465E-8566-FAF0416FDCF8}"/>
+                <a16:creationId xmlns:a16="http://schemas.microsoft.com/office/drawing/2014/main" id="{BF52C146-E1F4-493D-A9E6-EFDA55388198}"/>
               </a:ext>
             </a:extLst>
           </p:cNvPr>
@@ -14842,7 +14842,7 @@
           <p:cNvPr id="4" name="Text 2">
             <a:extLst xmlns:a="http://schemas.openxmlformats.org/drawingml/2006/main">
               <a:ext uri="{FF2B5EF4-FFF2-40B4-BE49-F238E27FC236}">
-                <a16:creationId xmlns:a16="http://schemas.microsoft.com/office/drawing/2014/main" id="{0D55405D-7BE5-45CD-8ABF-A661C731218D}"/>
+                <a16:creationId xmlns:a16="http://schemas.microsoft.com/office/drawing/2014/main" id="{25759BEF-C5A0-4251-93A0-AD0B1B46CBDF}"/>
               </a:ext>
             </a:extLst>
           </p:cNvPr>
@@ -14887,7 +14887,7 @@
           <p:cNvPr id="5" name="Text 3">
             <a:extLst xmlns:a="http://schemas.openxmlformats.org/drawingml/2006/main">
               <a:ext uri="{FF2B5EF4-FFF2-40B4-BE49-F238E27FC236}">
-                <a16:creationId xmlns:a16="http://schemas.microsoft.com/office/drawing/2014/main" id="{413B1525-3F3C-4675-A92C-3C5EB6B50565}"/>
+                <a16:creationId xmlns:a16="http://schemas.microsoft.com/office/drawing/2014/main" id="{CA5D42DA-D237-4BE3-9B38-AD81C9C72487}"/>
               </a:ext>
             </a:extLst>
           </p:cNvPr>
@@ -14932,7 +14932,7 @@
           <p:cNvPr id="6" name="Text 4">
             <a:extLst xmlns:a="http://schemas.openxmlformats.org/drawingml/2006/main">
               <a:ext uri="{FF2B5EF4-FFF2-40B4-BE49-F238E27FC236}">
-                <a16:creationId xmlns:a16="http://schemas.microsoft.com/office/drawing/2014/main" id="{5C016C1C-1C4E-4BC5-9889-47D73B045D75}"/>
+                <a16:creationId xmlns:a16="http://schemas.microsoft.com/office/drawing/2014/main" id="{66958B85-A1D2-4A76-AE78-F68E4025736A}"/>
               </a:ext>
             </a:extLst>
           </p:cNvPr>
@@ -15027,7 +15027,7 @@
           <p:cNvPr id="7" name="Shape 5">
             <a:extLst xmlns:a="http://schemas.openxmlformats.org/drawingml/2006/main">
               <a:ext uri="{FF2B5EF4-FFF2-40B4-BE49-F238E27FC236}">
-                <a16:creationId xmlns:a16="http://schemas.microsoft.com/office/drawing/2014/main" id="{3B9CBC2B-E993-4636-9CEF-9CFA73CFB279}"/>
+                <a16:creationId xmlns:a16="http://schemas.microsoft.com/office/drawing/2014/main" id="{8DBC6D79-E467-4C9F-9BAE-E153B0131F93}"/>
               </a:ext>
             </a:extLst>
           </p:cNvPr>
@@ -15074,7 +15074,7 @@
           <p:cNvPr id="8" name="Text 6">
             <a:extLst xmlns:a="http://schemas.openxmlformats.org/drawingml/2006/main">
               <a:ext uri="{FF2B5EF4-FFF2-40B4-BE49-F238E27FC236}">
-                <a16:creationId xmlns:a16="http://schemas.microsoft.com/office/drawing/2014/main" id="{CC410C2C-1921-4581-B365-1771BB7A96DD}"/>
+                <a16:creationId xmlns:a16="http://schemas.microsoft.com/office/drawing/2014/main" id="{348177A4-C8DC-47B8-BE4A-55A4F7DD55EF}"/>
               </a:ext>
             </a:extLst>
           </p:cNvPr>
@@ -15140,7 +15140,7 @@
         </p:xfrm>
         <a:graphic xmlns:a="http://schemas.openxmlformats.org/drawingml/2006/main">
           <a:graphicData uri="http://schemas.openxmlformats.org/drawingml/2006/chart">
-            <c:chart xmlns:r="http://schemas.openxmlformats.org/officeDocument/2006/relationships" xmlns:c="http://schemas.openxmlformats.org/drawingml/2006/chart" r:id="R95680af5a7894d1f"/>
+            <c:chart xmlns:r="http://schemas.openxmlformats.org/officeDocument/2006/relationships" xmlns:c="http://schemas.openxmlformats.org/drawingml/2006/chart" r:id="Rb6e6b1474cf94eb3"/>
           </a:graphicData>
         </a:graphic>
       </p:graphicFrame>
@@ -15149,7 +15149,7 @@
           <p:cNvPr id="10" name="Text 7">
             <a:extLst xmlns:a="http://schemas.openxmlformats.org/drawingml/2006/main">
               <a:ext uri="{FF2B5EF4-FFF2-40B4-BE49-F238E27FC236}">
-                <a16:creationId xmlns:a16="http://schemas.microsoft.com/office/drawing/2014/main" id="{5BF0363B-5437-498E-BB0C-3FAF6E8CEA13}"/>
+                <a16:creationId xmlns:a16="http://schemas.microsoft.com/office/drawing/2014/main" id="{678E39A1-33FF-46A9-A624-727868989F30}"/>
               </a:ext>
             </a:extLst>
           </p:cNvPr>
@@ -15194,7 +15194,7 @@
           <p:cNvPr id="11" name="Shape 8">
             <a:extLst xmlns:a="http://schemas.openxmlformats.org/drawingml/2006/main">
               <a:ext uri="{FF2B5EF4-FFF2-40B4-BE49-F238E27FC236}">
-                <a16:creationId xmlns:a16="http://schemas.microsoft.com/office/drawing/2014/main" id="{7562A1EF-5E7D-40CD-AF02-70E44464A4D4}"/>
+                <a16:creationId xmlns:a16="http://schemas.microsoft.com/office/drawing/2014/main" id="{8CA1C278-1FC4-4E8E-93CD-CD65A4C7D532}"/>
               </a:ext>
             </a:extLst>
           </p:cNvPr>
@@ -15241,7 +15241,7 @@
           <p:cNvPr id="12" name="Text 9">
             <a:extLst xmlns:a="http://schemas.openxmlformats.org/drawingml/2006/main">
               <a:ext uri="{FF2B5EF4-FFF2-40B4-BE49-F238E27FC236}">
-                <a16:creationId xmlns:a16="http://schemas.microsoft.com/office/drawing/2014/main" id="{221FBD05-AD3E-4BFE-8432-4BD245C9FD1C}"/>
+                <a16:creationId xmlns:a16="http://schemas.microsoft.com/office/drawing/2014/main" id="{7FEBD6D6-A7B6-4BF1-B11D-6ECA9BC11923}"/>
               </a:ext>
             </a:extLst>
           </p:cNvPr>
@@ -15286,7 +15286,7 @@
           <p:cNvPr id="13" name="Text 10">
             <a:extLst xmlns:a="http://schemas.openxmlformats.org/drawingml/2006/main">
               <a:ext uri="{FF2B5EF4-FFF2-40B4-BE49-F238E27FC236}">
-                <a16:creationId xmlns:a16="http://schemas.microsoft.com/office/drawing/2014/main" id="{95D3A703-527D-43E0-BC0E-8C1FDDFA9912}"/>
+                <a16:creationId xmlns:a16="http://schemas.microsoft.com/office/drawing/2014/main" id="{4A685C6D-B752-40A5-B991-20D2F3982E99}"/>
               </a:ext>
             </a:extLst>
           </p:cNvPr>
@@ -15334,7 +15334,7 @@
           <p:cNvPr id="14" name="Shape 11">
             <a:extLst xmlns:a="http://schemas.openxmlformats.org/drawingml/2006/main">
               <a:ext uri="{FF2B5EF4-FFF2-40B4-BE49-F238E27FC236}">
-                <a16:creationId xmlns:a16="http://schemas.microsoft.com/office/drawing/2014/main" id="{38DEEEA6-CD0F-498F-BE03-7F21B86A3948}"/>
+                <a16:creationId xmlns:a16="http://schemas.microsoft.com/office/drawing/2014/main" id="{ECD4FF54-1217-403E-BDB7-041DDDE52C6C}"/>
               </a:ext>
             </a:extLst>
           </p:cNvPr>
@@ -15381,7 +15381,7 @@
           <p:cNvPr id="15" name="Text 12">
             <a:extLst xmlns:a="http://schemas.openxmlformats.org/drawingml/2006/main">
               <a:ext uri="{FF2B5EF4-FFF2-40B4-BE49-F238E27FC236}">
-                <a16:creationId xmlns:a16="http://schemas.microsoft.com/office/drawing/2014/main" id="{AB1AF66A-A20B-48C8-BAC1-F988E7CB5D02}"/>
+                <a16:creationId xmlns:a16="http://schemas.microsoft.com/office/drawing/2014/main" id="{4D2034AD-1912-4862-A172-42C6480BF6AE}"/>
               </a:ext>
             </a:extLst>
           </p:cNvPr>
@@ -15426,7 +15426,7 @@
           <p:cNvPr id="16" name="Text 13">
             <a:extLst xmlns:a="http://schemas.openxmlformats.org/drawingml/2006/main">
               <a:ext uri="{FF2B5EF4-FFF2-40B4-BE49-F238E27FC236}">
-                <a16:creationId xmlns:a16="http://schemas.microsoft.com/office/drawing/2014/main" id="{DC3BF2B3-1E01-40FF-8548-D44D8E6D8CE8}"/>
+                <a16:creationId xmlns:a16="http://schemas.microsoft.com/office/drawing/2014/main" id="{51CF5EA3-AABF-4A1D-9571-A37324F69D22}"/>
               </a:ext>
             </a:extLst>
           </p:cNvPr>
@@ -15474,7 +15474,7 @@
           <p:cNvPr id="17" name="Shape 14">
             <a:extLst xmlns:a="http://schemas.openxmlformats.org/drawingml/2006/main">
               <a:ext uri="{FF2B5EF4-FFF2-40B4-BE49-F238E27FC236}">
-                <a16:creationId xmlns:a16="http://schemas.microsoft.com/office/drawing/2014/main" id="{D0507139-7BFE-4C2B-94F8-390E8D3D9308}"/>
+                <a16:creationId xmlns:a16="http://schemas.microsoft.com/office/drawing/2014/main" id="{2DD2B8FA-1BA6-45D7-9A85-89DD153740C9}"/>
               </a:ext>
             </a:extLst>
           </p:cNvPr>
@@ -15521,7 +15521,7 @@
           <p:cNvPr id="18" name="Text 15">
             <a:extLst xmlns:a="http://schemas.openxmlformats.org/drawingml/2006/main">
               <a:ext uri="{FF2B5EF4-FFF2-40B4-BE49-F238E27FC236}">
-                <a16:creationId xmlns:a16="http://schemas.microsoft.com/office/drawing/2014/main" id="{0C365D81-B66A-4EC2-BFEC-288F7DEE4ED2}"/>
+                <a16:creationId xmlns:a16="http://schemas.microsoft.com/office/drawing/2014/main" id="{B8650A1B-C847-4BD3-A43C-862E35971866}"/>
               </a:ext>
             </a:extLst>
           </p:cNvPr>
@@ -15566,7 +15566,7 @@
           <p:cNvPr id="19" name="Text 16">
             <a:extLst xmlns:a="http://schemas.openxmlformats.org/drawingml/2006/main">
               <a:ext uri="{FF2B5EF4-FFF2-40B4-BE49-F238E27FC236}">
-                <a16:creationId xmlns:a16="http://schemas.microsoft.com/office/drawing/2014/main" id="{81B164C3-DACB-4CA7-8EE1-5BF01CFF419B}"/>
+                <a16:creationId xmlns:a16="http://schemas.microsoft.com/office/drawing/2014/main" id="{59A79052-2DAF-478C-BD84-9966F1DA8F33}"/>
               </a:ext>
             </a:extLst>
           </p:cNvPr>
@@ -15614,7 +15614,7 @@
           <p:cNvPr id="20" name="Shape 17">
             <a:extLst xmlns:a="http://schemas.openxmlformats.org/drawingml/2006/main">
               <a:ext uri="{FF2B5EF4-FFF2-40B4-BE49-F238E27FC236}">
-                <a16:creationId xmlns:a16="http://schemas.microsoft.com/office/drawing/2014/main" id="{68D47801-AB36-41B5-A277-BD7A25005177}"/>
+                <a16:creationId xmlns:a16="http://schemas.microsoft.com/office/drawing/2014/main" id="{D7C6A28A-694B-4612-A8A1-188AFCE9E9DC}"/>
               </a:ext>
             </a:extLst>
           </p:cNvPr>
@@ -15661,7 +15661,7 @@
           <p:cNvPr id="21" name="Text 18">
             <a:extLst xmlns:a="http://schemas.openxmlformats.org/drawingml/2006/main">
               <a:ext uri="{FF2B5EF4-FFF2-40B4-BE49-F238E27FC236}">
-                <a16:creationId xmlns:a16="http://schemas.microsoft.com/office/drawing/2014/main" id="{D7DD01D4-576D-4EA8-BBA0-7ED16F4B4555}"/>
+                <a16:creationId xmlns:a16="http://schemas.microsoft.com/office/drawing/2014/main" id="{AF5F9D72-D822-42A6-A323-7B3147BE4394}"/>
               </a:ext>
             </a:extLst>
           </p:cNvPr>
@@ -15706,7 +15706,7 @@
           <p:cNvPr id="22" name="Text 19">
             <a:extLst xmlns:a="http://schemas.openxmlformats.org/drawingml/2006/main">
               <a:ext uri="{FF2B5EF4-FFF2-40B4-BE49-F238E27FC236}">
-                <a16:creationId xmlns:a16="http://schemas.microsoft.com/office/drawing/2014/main" id="{283AC99D-4D43-4E1A-AF09-6CE3BAE445A7}"/>
+                <a16:creationId xmlns:a16="http://schemas.microsoft.com/office/drawing/2014/main" id="{75D14131-4314-43D0-B87A-422F08B2E617}"/>
               </a:ext>
             </a:extLst>
           </p:cNvPr>
@@ -15754,7 +15754,7 @@
           <p:cNvPr id="23" name="Shape 20">
             <a:extLst xmlns:a="http://schemas.openxmlformats.org/drawingml/2006/main">
               <a:ext uri="{FF2B5EF4-FFF2-40B4-BE49-F238E27FC236}">
-                <a16:creationId xmlns:a16="http://schemas.microsoft.com/office/drawing/2014/main" id="{8F59D5E1-A735-4AF3-B881-6AC15E01BC5D}"/>
+                <a16:creationId xmlns:a16="http://schemas.microsoft.com/office/drawing/2014/main" id="{99F1AEF2-9523-4E2D-8B26-CD465A289E7C}"/>
               </a:ext>
             </a:extLst>
           </p:cNvPr>
@@ -15801,7 +15801,7 @@
           <p:cNvPr id="24" name="Text 21">
             <a:extLst xmlns:a="http://schemas.openxmlformats.org/drawingml/2006/main">
               <a:ext uri="{FF2B5EF4-FFF2-40B4-BE49-F238E27FC236}">
-                <a16:creationId xmlns:a16="http://schemas.microsoft.com/office/drawing/2014/main" id="{3B6854AD-6F51-446C-BE01-4479AED6A5DF}"/>
+                <a16:creationId xmlns:a16="http://schemas.microsoft.com/office/drawing/2014/main" id="{F2BB16D1-4D83-4424-994C-19E65E3AF8AA}"/>
               </a:ext>
             </a:extLst>
           </p:cNvPr>
@@ -15846,7 +15846,7 @@
           <p:cNvPr id="25" name="Text 22">
             <a:extLst xmlns:a="http://schemas.openxmlformats.org/drawingml/2006/main">
               <a:ext uri="{FF2B5EF4-FFF2-40B4-BE49-F238E27FC236}">
-                <a16:creationId xmlns:a16="http://schemas.microsoft.com/office/drawing/2014/main" id="{6CF2223D-BA79-4A8E-BF1E-7262E71FF6B3}"/>
+                <a16:creationId xmlns:a16="http://schemas.microsoft.com/office/drawing/2014/main" id="{12B60230-A682-4C15-9F24-AE611D1FE814}"/>
               </a:ext>
             </a:extLst>
           </p:cNvPr>
@@ -15894,7 +15894,7 @@
           <p:cNvPr id="26" name="Shape 23">
             <a:extLst xmlns:a="http://schemas.openxmlformats.org/drawingml/2006/main">
               <a:ext uri="{FF2B5EF4-FFF2-40B4-BE49-F238E27FC236}">
-                <a16:creationId xmlns:a16="http://schemas.microsoft.com/office/drawing/2014/main" id="{F4625906-8C61-44EF-BD22-0506DDF96CF3}"/>
+                <a16:creationId xmlns:a16="http://schemas.microsoft.com/office/drawing/2014/main" id="{37D451ED-0166-4378-9219-1F85B6B57DBF}"/>
               </a:ext>
             </a:extLst>
           </p:cNvPr>
@@ -15941,7 +15941,7 @@
           <p:cNvPr id="27" name="Text 24">
             <a:extLst xmlns:a="http://schemas.openxmlformats.org/drawingml/2006/main">
               <a:ext uri="{FF2B5EF4-FFF2-40B4-BE49-F238E27FC236}">
-                <a16:creationId xmlns:a16="http://schemas.microsoft.com/office/drawing/2014/main" id="{5DA1DFA7-476A-486F-97F2-5C900B753FD6}"/>
+                <a16:creationId xmlns:a16="http://schemas.microsoft.com/office/drawing/2014/main" id="{C2E16F46-86D7-49CE-8B54-BDC2F410EDA2}"/>
               </a:ext>
             </a:extLst>
           </p:cNvPr>
@@ -15986,7 +15986,7 @@
           <p:cNvPr id="28" name="Text 25">
             <a:extLst xmlns:a="http://schemas.openxmlformats.org/drawingml/2006/main">
               <a:ext uri="{FF2B5EF4-FFF2-40B4-BE49-F238E27FC236}">
-                <a16:creationId xmlns:a16="http://schemas.microsoft.com/office/drawing/2014/main" id="{4D3B9CD6-9F94-4175-9B15-FCC6F80B407B}"/>
+                <a16:creationId xmlns:a16="http://schemas.microsoft.com/office/drawing/2014/main" id="{30F244F3-8A10-4C78-90B2-B04F7E9276B8}"/>
               </a:ext>
             </a:extLst>
           </p:cNvPr>
@@ -16034,7 +16034,7 @@
           <p:cNvPr id="29" name="Shape 26">
             <a:extLst xmlns:a="http://schemas.openxmlformats.org/drawingml/2006/main">
               <a:ext uri="{FF2B5EF4-FFF2-40B4-BE49-F238E27FC236}">
-                <a16:creationId xmlns:a16="http://schemas.microsoft.com/office/drawing/2014/main" id="{D35C0B38-1370-40B2-B63F-D403E204D44E}"/>
+                <a16:creationId xmlns:a16="http://schemas.microsoft.com/office/drawing/2014/main" id="{816656AC-B1DC-478F-A574-482298282DD2}"/>
               </a:ext>
             </a:extLst>
           </p:cNvPr>
@@ -16081,7 +16081,7 @@
           <p:cNvPr id="30" name="Text 27">
             <a:extLst xmlns:a="http://schemas.openxmlformats.org/drawingml/2006/main">
               <a:ext uri="{FF2B5EF4-FFF2-40B4-BE49-F238E27FC236}">
-                <a16:creationId xmlns:a16="http://schemas.microsoft.com/office/drawing/2014/main" id="{D657191E-99BF-40D5-AEC5-8C19F7269D54}"/>
+                <a16:creationId xmlns:a16="http://schemas.microsoft.com/office/drawing/2014/main" id="{0CA74AE2-EA59-4C7E-B77C-6A9BCE96E1C5}"/>
               </a:ext>
             </a:extLst>
           </p:cNvPr>
@@ -16126,7 +16126,7 @@
           <p:cNvPr id="31" name="Text 28">
             <a:extLst xmlns:a="http://schemas.openxmlformats.org/drawingml/2006/main">
               <a:ext uri="{FF2B5EF4-FFF2-40B4-BE49-F238E27FC236}">
-                <a16:creationId xmlns:a16="http://schemas.microsoft.com/office/drawing/2014/main" id="{493CC2C9-D099-4B2E-8567-FB5FEA1A7E6D}"/>
+                <a16:creationId xmlns:a16="http://schemas.microsoft.com/office/drawing/2014/main" id="{621CFB54-FE1F-47C0-9290-F4A815D71A20}"/>
               </a:ext>
             </a:extLst>
           </p:cNvPr>
@@ -16172,7 +16172,7 @@
     </p:spTree>
     <p:extLst>
       <p:ext uri="{BB962C8B-B14F-4D97-AF65-F5344CB8AC3E}">
-        <p14:creationId xmlns:p14="http://schemas.microsoft.com/office/powerpoint/2010/main" val="1143347955"/>
+        <p14:creationId xmlns:p14="http://schemas.microsoft.com/office/powerpoint/2010/main" val="49547603"/>
       </p:ext>
     </p:extLst>
   </p:cSld>
@@ -16203,7 +16203,7 @@
           <p:cNvPr id="2" name="Text 0">
             <a:extLst xmlns:a="http://schemas.openxmlformats.org/drawingml/2006/main">
               <a:ext uri="{FF2B5EF4-FFF2-40B4-BE49-F238E27FC236}">
-                <a16:creationId xmlns:a16="http://schemas.microsoft.com/office/drawing/2014/main" id="{DCCCBC48-42D4-4B41-AE5F-6346A6CBDEF5}"/>
+                <a16:creationId xmlns:a16="http://schemas.microsoft.com/office/drawing/2014/main" id="{66FE9AD7-3E75-4DBD-B115-AD2237ED5D19}"/>
               </a:ext>
             </a:extLst>
           </p:cNvPr>
@@ -16248,7 +16248,7 @@
           <p:cNvPr id="3" name="Text 1">
             <a:extLst xmlns:a="http://schemas.openxmlformats.org/drawingml/2006/main">
               <a:ext uri="{FF2B5EF4-FFF2-40B4-BE49-F238E27FC236}">
-                <a16:creationId xmlns:a16="http://schemas.microsoft.com/office/drawing/2014/main" id="{E364513E-98D0-4E26-B8D4-02A2911FE1B9}"/>
+                <a16:creationId xmlns:a16="http://schemas.microsoft.com/office/drawing/2014/main" id="{681DA4C6-09EA-4D2B-8B4A-3421B3DFE302}"/>
               </a:ext>
             </a:extLst>
           </p:cNvPr>
@@ -16293,7 +16293,7 @@
           <p:cNvPr id="4" name="Text 2">
             <a:extLst xmlns:a="http://schemas.openxmlformats.org/drawingml/2006/main">
               <a:ext uri="{FF2B5EF4-FFF2-40B4-BE49-F238E27FC236}">
-                <a16:creationId xmlns:a16="http://schemas.microsoft.com/office/drawing/2014/main" id="{9866F8E9-040C-475F-9973-1FF52E5B973A}"/>
+                <a16:creationId xmlns:a16="http://schemas.microsoft.com/office/drawing/2014/main" id="{92626B58-D0C3-4127-9D5C-0B9B01562789}"/>
               </a:ext>
             </a:extLst>
           </p:cNvPr>
@@ -16338,7 +16338,7 @@
           <p:cNvPr id="5" name="Text 3">
             <a:extLst xmlns:a="http://schemas.openxmlformats.org/drawingml/2006/main">
               <a:ext uri="{FF2B5EF4-FFF2-40B4-BE49-F238E27FC236}">
-                <a16:creationId xmlns:a16="http://schemas.microsoft.com/office/drawing/2014/main" id="{39F0EAD8-9FAE-4AFD-B2F6-7DDDDA49C59F}"/>
+                <a16:creationId xmlns:a16="http://schemas.microsoft.com/office/drawing/2014/main" id="{96A6B489-DF38-4138-A00A-CBD49E5855F4}"/>
               </a:ext>
             </a:extLst>
           </p:cNvPr>
@@ -16390,7 +16390,7 @@
         </p:xfrm>
         <a:graphic xmlns:a="http://schemas.openxmlformats.org/drawingml/2006/main">
           <a:graphicData uri="http://schemas.openxmlformats.org/drawingml/2006/chart">
-            <c:chart xmlns:r="http://schemas.openxmlformats.org/officeDocument/2006/relationships" xmlns:c="http://schemas.openxmlformats.org/drawingml/2006/chart" r:id="R86aaa671b1ea4cde"/>
+            <c:chart xmlns:r="http://schemas.openxmlformats.org/officeDocument/2006/relationships" xmlns:c="http://schemas.openxmlformats.org/drawingml/2006/chart" r:id="Rbd7883a979654590"/>
           </a:graphicData>
         </a:graphic>
       </p:graphicFrame>
@@ -16399,7 +16399,7 @@
           <p:cNvPr id="7" name="Shape 4">
             <a:extLst xmlns:a="http://schemas.openxmlformats.org/drawingml/2006/main">
               <a:ext uri="{FF2B5EF4-FFF2-40B4-BE49-F238E27FC236}">
-                <a16:creationId xmlns:a16="http://schemas.microsoft.com/office/drawing/2014/main" id="{DBE0AB6C-2AA3-4E6F-B3CC-231B24667629}"/>
+                <a16:creationId xmlns:a16="http://schemas.microsoft.com/office/drawing/2014/main" id="{2E3831B3-A657-494B-9EFA-F036D8355D77}"/>
               </a:ext>
             </a:extLst>
           </p:cNvPr>
@@ -16446,7 +16446,7 @@
           <p:cNvPr id="8" name="Text 5">
             <a:extLst xmlns:a="http://schemas.openxmlformats.org/drawingml/2006/main">
               <a:ext uri="{FF2B5EF4-FFF2-40B4-BE49-F238E27FC236}">
-                <a16:creationId xmlns:a16="http://schemas.microsoft.com/office/drawing/2014/main" id="{26BD1B44-DDA3-400A-99E7-33982D32B15B}"/>
+                <a16:creationId xmlns:a16="http://schemas.microsoft.com/office/drawing/2014/main" id="{6D0545A9-1C2A-4E6A-8094-A93F175A72FC}"/>
               </a:ext>
             </a:extLst>
           </p:cNvPr>
@@ -16491,7 +16491,7 @@
           <p:cNvPr id="9" name="Text 6">
             <a:extLst xmlns:a="http://schemas.openxmlformats.org/drawingml/2006/main">
               <a:ext uri="{FF2B5EF4-FFF2-40B4-BE49-F238E27FC236}">
-                <a16:creationId xmlns:a16="http://schemas.microsoft.com/office/drawing/2014/main" id="{D126E4E4-DEE9-46FC-B6F6-0BF3CED2820E}"/>
+                <a16:creationId xmlns:a16="http://schemas.microsoft.com/office/drawing/2014/main" id="{603A2EAB-6609-4591-ABFA-4F4B9617FEDE}"/>
               </a:ext>
             </a:extLst>
           </p:cNvPr>
@@ -16630,7 +16630,7 @@
           <p:cNvPr id="10" name="Shape 7">
             <a:extLst xmlns:a="http://schemas.openxmlformats.org/drawingml/2006/main">
               <a:ext uri="{FF2B5EF4-FFF2-40B4-BE49-F238E27FC236}">
-                <a16:creationId xmlns:a16="http://schemas.microsoft.com/office/drawing/2014/main" id="{ACDC4BFE-2473-426D-A2FC-ED0D1B0D5C26}"/>
+                <a16:creationId xmlns:a16="http://schemas.microsoft.com/office/drawing/2014/main" id="{BC365F57-0D33-439B-BF03-B6778663959B}"/>
               </a:ext>
             </a:extLst>
           </p:cNvPr>
@@ -16677,7 +16677,7 @@
           <p:cNvPr id="11" name="Text 8">
             <a:extLst xmlns:a="http://schemas.openxmlformats.org/drawingml/2006/main">
               <a:ext uri="{FF2B5EF4-FFF2-40B4-BE49-F238E27FC236}">
-                <a16:creationId xmlns:a16="http://schemas.microsoft.com/office/drawing/2014/main" id="{90A93F58-A2D8-4F80-9F61-C6133891A02C}"/>
+                <a16:creationId xmlns:a16="http://schemas.microsoft.com/office/drawing/2014/main" id="{8E0CBAC9-6C81-4B92-9ED7-DDAE5E470775}"/>
               </a:ext>
             </a:extLst>
           </p:cNvPr>
@@ -16722,7 +16722,7 @@
           <p:cNvPr id="12" name="Text 9">
             <a:extLst xmlns:a="http://schemas.openxmlformats.org/drawingml/2006/main">
               <a:ext uri="{FF2B5EF4-FFF2-40B4-BE49-F238E27FC236}">
-                <a16:creationId xmlns:a16="http://schemas.microsoft.com/office/drawing/2014/main" id="{A523EF5A-487C-4D8A-B98C-AAC0C82A298E}"/>
+                <a16:creationId xmlns:a16="http://schemas.microsoft.com/office/drawing/2014/main" id="{0E6FB631-921F-41EB-9991-9DC75C184469}"/>
               </a:ext>
             </a:extLst>
           </p:cNvPr>
@@ -16770,7 +16770,7 @@
           <p:cNvPr id="13" name="Shape 10">
             <a:extLst xmlns:a="http://schemas.openxmlformats.org/drawingml/2006/main">
               <a:ext uri="{FF2B5EF4-FFF2-40B4-BE49-F238E27FC236}">
-                <a16:creationId xmlns:a16="http://schemas.microsoft.com/office/drawing/2014/main" id="{126E762D-720A-4366-8006-E4EDAE54AB5F}"/>
+                <a16:creationId xmlns:a16="http://schemas.microsoft.com/office/drawing/2014/main" id="{F184DD4D-59F9-45B6-B217-9BA7865EE115}"/>
               </a:ext>
             </a:extLst>
           </p:cNvPr>
@@ -16817,7 +16817,7 @@
           <p:cNvPr id="14" name="Text 11">
             <a:extLst xmlns:a="http://schemas.openxmlformats.org/drawingml/2006/main">
               <a:ext uri="{FF2B5EF4-FFF2-40B4-BE49-F238E27FC236}">
-                <a16:creationId xmlns:a16="http://schemas.microsoft.com/office/drawing/2014/main" id="{5FCBD161-C15F-4C6F-9A44-78F861FC9C60}"/>
+                <a16:creationId xmlns:a16="http://schemas.microsoft.com/office/drawing/2014/main" id="{5943CF23-7D6E-457C-93BC-F262FEF039A4}"/>
               </a:ext>
             </a:extLst>
           </p:cNvPr>
@@ -16862,7 +16862,7 @@
           <p:cNvPr id="15" name="Text 12">
             <a:extLst xmlns:a="http://schemas.openxmlformats.org/drawingml/2006/main">
               <a:ext uri="{FF2B5EF4-FFF2-40B4-BE49-F238E27FC236}">
-                <a16:creationId xmlns:a16="http://schemas.microsoft.com/office/drawing/2014/main" id="{8525344D-9AB6-486C-B775-773DEBD2143D}"/>
+                <a16:creationId xmlns:a16="http://schemas.microsoft.com/office/drawing/2014/main" id="{D60AAFB5-4B28-4C2F-8CD9-112368755A83}"/>
               </a:ext>
             </a:extLst>
           </p:cNvPr>
@@ -16910,7 +16910,7 @@
           <p:cNvPr id="16" name="Shape 13">
             <a:extLst xmlns:a="http://schemas.openxmlformats.org/drawingml/2006/main">
               <a:ext uri="{FF2B5EF4-FFF2-40B4-BE49-F238E27FC236}">
-                <a16:creationId xmlns:a16="http://schemas.microsoft.com/office/drawing/2014/main" id="{9723CE3F-5B01-4AFB-A8C8-E7598E43EAA4}"/>
+                <a16:creationId xmlns:a16="http://schemas.microsoft.com/office/drawing/2014/main" id="{A6D67CDF-04EF-4232-B22C-412B9AC3ABD5}"/>
               </a:ext>
             </a:extLst>
           </p:cNvPr>
@@ -16957,7 +16957,7 @@
           <p:cNvPr id="17" name="Text 14">
             <a:extLst xmlns:a="http://schemas.openxmlformats.org/drawingml/2006/main">
               <a:ext uri="{FF2B5EF4-FFF2-40B4-BE49-F238E27FC236}">
-                <a16:creationId xmlns:a16="http://schemas.microsoft.com/office/drawing/2014/main" id="{AAB7BAD9-0F2F-4828-B6E9-D72B8C220DE1}"/>
+                <a16:creationId xmlns:a16="http://schemas.microsoft.com/office/drawing/2014/main" id="{C2209C08-D9B5-42F0-AEBC-32DD9B3982F9}"/>
               </a:ext>
             </a:extLst>
           </p:cNvPr>
@@ -17002,7 +17002,7 @@
           <p:cNvPr id="18" name="Text 15">
             <a:extLst xmlns:a="http://schemas.openxmlformats.org/drawingml/2006/main">
               <a:ext uri="{FF2B5EF4-FFF2-40B4-BE49-F238E27FC236}">
-                <a16:creationId xmlns:a16="http://schemas.microsoft.com/office/drawing/2014/main" id="{4294C04F-16CF-40C0-B469-337E6C636B77}"/>
+                <a16:creationId xmlns:a16="http://schemas.microsoft.com/office/drawing/2014/main" id="{C5ECE3DB-CDAF-413B-A140-AD3A7800780F}"/>
               </a:ext>
             </a:extLst>
           </p:cNvPr>
@@ -17050,7 +17050,7 @@
           <p:cNvPr id="19" name="Shape 16">
             <a:extLst xmlns:a="http://schemas.openxmlformats.org/drawingml/2006/main">
               <a:ext uri="{FF2B5EF4-FFF2-40B4-BE49-F238E27FC236}">
-                <a16:creationId xmlns:a16="http://schemas.microsoft.com/office/drawing/2014/main" id="{29A3A72A-70E3-412E-91D4-68F16DE266DF}"/>
+                <a16:creationId xmlns:a16="http://schemas.microsoft.com/office/drawing/2014/main" id="{18436634-A6FE-4A6E-B575-789F666748B8}"/>
               </a:ext>
             </a:extLst>
           </p:cNvPr>
@@ -17097,7 +17097,7 @@
           <p:cNvPr id="20" name="Text 17">
             <a:extLst xmlns:a="http://schemas.openxmlformats.org/drawingml/2006/main">
               <a:ext uri="{FF2B5EF4-FFF2-40B4-BE49-F238E27FC236}">
-                <a16:creationId xmlns:a16="http://schemas.microsoft.com/office/drawing/2014/main" id="{08C1EEF5-4894-4EAA-86D9-9AB05BD87046}"/>
+                <a16:creationId xmlns:a16="http://schemas.microsoft.com/office/drawing/2014/main" id="{E2AA0C74-635E-44EB-B9D5-29F389069B76}"/>
               </a:ext>
             </a:extLst>
           </p:cNvPr>
@@ -17142,7 +17142,7 @@
           <p:cNvPr id="21" name="Text 18">
             <a:extLst xmlns:a="http://schemas.openxmlformats.org/drawingml/2006/main">
               <a:ext uri="{FF2B5EF4-FFF2-40B4-BE49-F238E27FC236}">
-                <a16:creationId xmlns:a16="http://schemas.microsoft.com/office/drawing/2014/main" id="{283399C2-27DC-4FC1-AD33-41AF87319B01}"/>
+                <a16:creationId xmlns:a16="http://schemas.microsoft.com/office/drawing/2014/main" id="{CE1FCCAF-67D4-49D2-AB8F-274F2CA6576E}"/>
               </a:ext>
             </a:extLst>
           </p:cNvPr>
@@ -17190,7 +17190,7 @@
           <p:cNvPr id="22" name="Shape 19">
             <a:extLst xmlns:a="http://schemas.openxmlformats.org/drawingml/2006/main">
               <a:ext uri="{FF2B5EF4-FFF2-40B4-BE49-F238E27FC236}">
-                <a16:creationId xmlns:a16="http://schemas.microsoft.com/office/drawing/2014/main" id="{1C3BFAA0-863B-4B6E-8D8C-73FD78294E3B}"/>
+                <a16:creationId xmlns:a16="http://schemas.microsoft.com/office/drawing/2014/main" id="{D13C8D8C-56F5-4D47-95BA-A831B45455BE}"/>
               </a:ext>
             </a:extLst>
           </p:cNvPr>
@@ -17237,7 +17237,7 @@
           <p:cNvPr id="23" name="Text 20">
             <a:extLst xmlns:a="http://schemas.openxmlformats.org/drawingml/2006/main">
               <a:ext uri="{FF2B5EF4-FFF2-40B4-BE49-F238E27FC236}">
-                <a16:creationId xmlns:a16="http://schemas.microsoft.com/office/drawing/2014/main" id="{556C40E2-3E3D-4D60-B4B7-A9068419877A}"/>
+                <a16:creationId xmlns:a16="http://schemas.microsoft.com/office/drawing/2014/main" id="{9BA5A292-E4AF-49D4-B0E2-5029A2D43708}"/>
               </a:ext>
             </a:extLst>
           </p:cNvPr>
@@ -17282,7 +17282,7 @@
           <p:cNvPr id="24" name="Text 21">
             <a:extLst xmlns:a="http://schemas.openxmlformats.org/drawingml/2006/main">
               <a:ext uri="{FF2B5EF4-FFF2-40B4-BE49-F238E27FC236}">
-                <a16:creationId xmlns:a16="http://schemas.microsoft.com/office/drawing/2014/main" id="{57D3C066-47A4-41E4-A98C-9BE2B1126DCC}"/>
+                <a16:creationId xmlns:a16="http://schemas.microsoft.com/office/drawing/2014/main" id="{770B251A-DA54-46B1-B6C4-DDEE5E2B7825}"/>
               </a:ext>
             </a:extLst>
           </p:cNvPr>
@@ -17330,7 +17330,7 @@
           <p:cNvPr id="25" name="Shape 22">
             <a:extLst xmlns:a="http://schemas.openxmlformats.org/drawingml/2006/main">
               <a:ext uri="{FF2B5EF4-FFF2-40B4-BE49-F238E27FC236}">
-                <a16:creationId xmlns:a16="http://schemas.microsoft.com/office/drawing/2014/main" id="{925FE6D6-4D86-4FDF-B555-8235646A1DFE}"/>
+                <a16:creationId xmlns:a16="http://schemas.microsoft.com/office/drawing/2014/main" id="{3F4AAC5C-1E3D-489E-8C24-80B73CA95674}"/>
               </a:ext>
             </a:extLst>
           </p:cNvPr>
@@ -17377,7 +17377,7 @@
           <p:cNvPr id="26" name="Text 23">
             <a:extLst xmlns:a="http://schemas.openxmlformats.org/drawingml/2006/main">
               <a:ext uri="{FF2B5EF4-FFF2-40B4-BE49-F238E27FC236}">
-                <a16:creationId xmlns:a16="http://schemas.microsoft.com/office/drawing/2014/main" id="{556E124D-C477-4F52-BB03-47895BB9EEEC}"/>
+                <a16:creationId xmlns:a16="http://schemas.microsoft.com/office/drawing/2014/main" id="{A3307886-5FAF-4B43-9361-BE3BE0094B17}"/>
               </a:ext>
             </a:extLst>
           </p:cNvPr>
@@ -17422,7 +17422,7 @@
           <p:cNvPr id="27" name="Text 24">
             <a:extLst xmlns:a="http://schemas.openxmlformats.org/drawingml/2006/main">
               <a:ext uri="{FF2B5EF4-FFF2-40B4-BE49-F238E27FC236}">
-                <a16:creationId xmlns:a16="http://schemas.microsoft.com/office/drawing/2014/main" id="{0AF6778F-63F7-40D2-991C-B6E8FC7989B4}"/>
+                <a16:creationId xmlns:a16="http://schemas.microsoft.com/office/drawing/2014/main" id="{53AB8450-F098-4906-9105-1371C67A9E04}"/>
               </a:ext>
             </a:extLst>
           </p:cNvPr>
@@ -17470,7 +17470,7 @@
           <p:cNvPr id="28" name="Text 25">
             <a:extLst xmlns:a="http://schemas.openxmlformats.org/drawingml/2006/main">
               <a:ext uri="{FF2B5EF4-FFF2-40B4-BE49-F238E27FC236}">
-                <a16:creationId xmlns:a16="http://schemas.microsoft.com/office/drawing/2014/main" id="{CA40FA3F-78D2-4930-93DA-E22A46A192D5}"/>
+                <a16:creationId xmlns:a16="http://schemas.microsoft.com/office/drawing/2014/main" id="{5E222E14-BA51-4DD1-8F79-3E222BC8F44D}"/>
               </a:ext>
             </a:extLst>
           </p:cNvPr>
@@ -17513,7 +17513,7 @@
     </p:spTree>
     <p:extLst>
       <p:ext uri="{BB962C8B-B14F-4D97-AF65-F5344CB8AC3E}">
-        <p14:creationId xmlns:p14="http://schemas.microsoft.com/office/powerpoint/2010/main" val="708549521"/>
+        <p14:creationId xmlns:p14="http://schemas.microsoft.com/office/powerpoint/2010/main" val="1479871615"/>
       </p:ext>
     </p:extLst>
   </p:cSld>
@@ -17544,7 +17544,7 @@
           <p:cNvPr id="2" name="Text 0">
             <a:extLst xmlns:a="http://schemas.openxmlformats.org/drawingml/2006/main">
               <a:ext uri="{FF2B5EF4-FFF2-40B4-BE49-F238E27FC236}">
-                <a16:creationId xmlns:a16="http://schemas.microsoft.com/office/drawing/2014/main" id="{2647E10F-FE9C-43B6-8503-E12EFC86C40E}"/>
+                <a16:creationId xmlns:a16="http://schemas.microsoft.com/office/drawing/2014/main" id="{BD4445A8-6074-427D-B033-D56A9B591768}"/>
               </a:ext>
             </a:extLst>
           </p:cNvPr>
@@ -17589,7 +17589,7 @@
           <p:cNvPr id="3" name="Text 1">
             <a:extLst xmlns:a="http://schemas.openxmlformats.org/drawingml/2006/main">
               <a:ext uri="{FF2B5EF4-FFF2-40B4-BE49-F238E27FC236}">
-                <a16:creationId xmlns:a16="http://schemas.microsoft.com/office/drawing/2014/main" id="{5AEE8CA0-CC32-47F9-A9ED-4067AEB6DD8D}"/>
+                <a16:creationId xmlns:a16="http://schemas.microsoft.com/office/drawing/2014/main" id="{D3E182EF-DBB3-40F6-9E5E-62ADCE675383}"/>
               </a:ext>
             </a:extLst>
           </p:cNvPr>
@@ -17634,7 +17634,7 @@
           <p:cNvPr id="4" name="Text 2">
             <a:extLst xmlns:a="http://schemas.openxmlformats.org/drawingml/2006/main">
               <a:ext uri="{FF2B5EF4-FFF2-40B4-BE49-F238E27FC236}">
-                <a16:creationId xmlns:a16="http://schemas.microsoft.com/office/drawing/2014/main" id="{71FB37E7-8292-4A2E-AD39-C3EC7917C6E3}"/>
+                <a16:creationId xmlns:a16="http://schemas.microsoft.com/office/drawing/2014/main" id="{223CAEA3-7FA6-4FC7-AC97-8F29786520DA}"/>
               </a:ext>
             </a:extLst>
           </p:cNvPr>
@@ -17679,7 +17679,7 @@
           <p:cNvPr id="5" name="Text 3">
             <a:extLst xmlns:a="http://schemas.openxmlformats.org/drawingml/2006/main">
               <a:ext uri="{FF2B5EF4-FFF2-40B4-BE49-F238E27FC236}">
-                <a16:creationId xmlns:a16="http://schemas.microsoft.com/office/drawing/2014/main" id="{688BA95E-CE5F-4D21-B142-CE208DCEE8A6}"/>
+                <a16:creationId xmlns:a16="http://schemas.microsoft.com/office/drawing/2014/main" id="{2637632D-6DA6-4424-99E2-EA2BB6143285}"/>
               </a:ext>
             </a:extLst>
           </p:cNvPr>
@@ -17724,7 +17724,7 @@
           <p:cNvPr id="6" name="Shape 4">
             <a:extLst xmlns:a="http://schemas.openxmlformats.org/drawingml/2006/main">
               <a:ext uri="{FF2B5EF4-FFF2-40B4-BE49-F238E27FC236}">
-                <a16:creationId xmlns:a16="http://schemas.microsoft.com/office/drawing/2014/main" id="{415E1A35-4EDE-4F01-82AC-DF3CD39DE392}"/>
+                <a16:creationId xmlns:a16="http://schemas.microsoft.com/office/drawing/2014/main" id="{3DAA1F49-4991-40AB-B330-4CF7FB9B025E}"/>
               </a:ext>
             </a:extLst>
           </p:cNvPr>
@@ -17771,7 +17771,7 @@
           <p:cNvPr id="7" name="Text 5">
             <a:extLst xmlns:a="http://schemas.openxmlformats.org/drawingml/2006/main">
               <a:ext uri="{FF2B5EF4-FFF2-40B4-BE49-F238E27FC236}">
-                <a16:creationId xmlns:a16="http://schemas.microsoft.com/office/drawing/2014/main" id="{C9665E9B-E209-430F-B6A9-A266F8F7A359}"/>
+                <a16:creationId xmlns:a16="http://schemas.microsoft.com/office/drawing/2014/main" id="{9C797E81-0511-4B93-A74B-5DC73CCE643D}"/>
               </a:ext>
             </a:extLst>
           </p:cNvPr>
@@ -17816,7 +17816,7 @@
           <p:cNvPr id="8" name="Text 6">
             <a:extLst xmlns:a="http://schemas.openxmlformats.org/drawingml/2006/main">
               <a:ext uri="{FF2B5EF4-FFF2-40B4-BE49-F238E27FC236}">
-                <a16:creationId xmlns:a16="http://schemas.microsoft.com/office/drawing/2014/main" id="{DF930B3B-EEA7-4641-A5F6-BD6E280916A4}"/>
+                <a16:creationId xmlns:a16="http://schemas.microsoft.com/office/drawing/2014/main" id="{2BB8D892-C8DB-4704-B0B5-D09A6C1727F0}"/>
               </a:ext>
             </a:extLst>
           </p:cNvPr>
@@ -17861,7 +17861,7 @@
           <p:cNvPr id="9" name="Text 7">
             <a:extLst xmlns:a="http://schemas.openxmlformats.org/drawingml/2006/main">
               <a:ext uri="{FF2B5EF4-FFF2-40B4-BE49-F238E27FC236}">
-                <a16:creationId xmlns:a16="http://schemas.microsoft.com/office/drawing/2014/main" id="{456F9081-6D0C-4EE4-8024-0D6DA8AE647A}"/>
+                <a16:creationId xmlns:a16="http://schemas.microsoft.com/office/drawing/2014/main" id="{4188443C-E278-4627-858C-CB0CA7D47B8F}"/>
               </a:ext>
             </a:extLst>
           </p:cNvPr>
@@ -17906,7 +17906,7 @@
           <p:cNvPr id="10" name="Text 8">
             <a:extLst xmlns:a="http://schemas.openxmlformats.org/drawingml/2006/main">
               <a:ext uri="{FF2B5EF4-FFF2-40B4-BE49-F238E27FC236}">
-                <a16:creationId xmlns:a16="http://schemas.microsoft.com/office/drawing/2014/main" id="{868B8FFF-B430-4338-AAE4-F2ECB29546EF}"/>
+                <a16:creationId xmlns:a16="http://schemas.microsoft.com/office/drawing/2014/main" id="{36C0D674-6F7E-48FD-ADE7-F0F76B413562}"/>
               </a:ext>
             </a:extLst>
           </p:cNvPr>
@@ -17951,7 +17951,7 @@
           <p:cNvPr id="11" name="Text 9">
             <a:extLst xmlns:a="http://schemas.openxmlformats.org/drawingml/2006/main">
               <a:ext uri="{FF2B5EF4-FFF2-40B4-BE49-F238E27FC236}">
-                <a16:creationId xmlns:a16="http://schemas.microsoft.com/office/drawing/2014/main" id="{CEE0B421-DEEE-4EA4-8B8C-E9BC4790D890}"/>
+                <a16:creationId xmlns:a16="http://schemas.microsoft.com/office/drawing/2014/main" id="{C474424B-DD8E-4A3F-BC85-C3701554DA7B}"/>
               </a:ext>
             </a:extLst>
           </p:cNvPr>
@@ -17996,7 +17996,7 @@
           <p:cNvPr id="12" name="Text 10">
             <a:extLst xmlns:a="http://schemas.openxmlformats.org/drawingml/2006/main">
               <a:ext uri="{FF2B5EF4-FFF2-40B4-BE49-F238E27FC236}">
-                <a16:creationId xmlns:a16="http://schemas.microsoft.com/office/drawing/2014/main" id="{F5FF496B-0F32-4F7F-89A3-0A36F8EC8864}"/>
+                <a16:creationId xmlns:a16="http://schemas.microsoft.com/office/drawing/2014/main" id="{44A2785D-137B-45E7-A535-CBA9330AB82D}"/>
               </a:ext>
             </a:extLst>
           </p:cNvPr>
@@ -18041,7 +18041,7 @@
           <p:cNvPr id="13" name="Text 11">
             <a:extLst xmlns:a="http://schemas.openxmlformats.org/drawingml/2006/main">
               <a:ext uri="{FF2B5EF4-FFF2-40B4-BE49-F238E27FC236}">
-                <a16:creationId xmlns:a16="http://schemas.microsoft.com/office/drawing/2014/main" id="{9719B299-97C3-49A9-857A-5AFA011B83C5}"/>
+                <a16:creationId xmlns:a16="http://schemas.microsoft.com/office/drawing/2014/main" id="{20BF824D-E6D5-4C29-8D08-C17735145C7E}"/>
               </a:ext>
             </a:extLst>
           </p:cNvPr>
@@ -18086,7 +18086,7 @@
           <p:cNvPr id="14" name="Text 12">
             <a:extLst xmlns:a="http://schemas.openxmlformats.org/drawingml/2006/main">
               <a:ext uri="{FF2B5EF4-FFF2-40B4-BE49-F238E27FC236}">
-                <a16:creationId xmlns:a16="http://schemas.microsoft.com/office/drawing/2014/main" id="{B66D81B0-DBC0-450C-9ACA-0CBA450A67FC}"/>
+                <a16:creationId xmlns:a16="http://schemas.microsoft.com/office/drawing/2014/main" id="{C5F0987D-C09B-487C-9E41-370899B926A0}"/>
               </a:ext>
             </a:extLst>
           </p:cNvPr>
@@ -18131,7 +18131,7 @@
           <p:cNvPr id="15" name="Text 13">
             <a:extLst xmlns:a="http://schemas.openxmlformats.org/drawingml/2006/main">
               <a:ext uri="{FF2B5EF4-FFF2-40B4-BE49-F238E27FC236}">
-                <a16:creationId xmlns:a16="http://schemas.microsoft.com/office/drawing/2014/main" id="{4E27B026-9EA2-499B-8AF7-5D36AD721D12}"/>
+                <a16:creationId xmlns:a16="http://schemas.microsoft.com/office/drawing/2014/main" id="{EFB642E0-C6B2-49C8-A415-B8C13D68ABE9}"/>
               </a:ext>
             </a:extLst>
           </p:cNvPr>
@@ -18176,7 +18176,7 @@
           <p:cNvPr id="16" name="Text 14">
             <a:extLst xmlns:a="http://schemas.openxmlformats.org/drawingml/2006/main">
               <a:ext uri="{FF2B5EF4-FFF2-40B4-BE49-F238E27FC236}">
-                <a16:creationId xmlns:a16="http://schemas.microsoft.com/office/drawing/2014/main" id="{FD2F99FF-2E50-4895-A776-E022150A6AF4}"/>
+                <a16:creationId xmlns:a16="http://schemas.microsoft.com/office/drawing/2014/main" id="{8E795298-DE1F-4825-A97E-25D56356E310}"/>
               </a:ext>
             </a:extLst>
           </p:cNvPr>
@@ -18221,7 +18221,7 @@
           <p:cNvPr id="17" name="Text 15">
             <a:extLst xmlns:a="http://schemas.openxmlformats.org/drawingml/2006/main">
               <a:ext uri="{FF2B5EF4-FFF2-40B4-BE49-F238E27FC236}">
-                <a16:creationId xmlns:a16="http://schemas.microsoft.com/office/drawing/2014/main" id="{1138B6D7-7B1F-4B00-B4E3-51B8A4A812A8}"/>
+                <a16:creationId xmlns:a16="http://schemas.microsoft.com/office/drawing/2014/main" id="{F0B46B1F-4CFF-4321-A17D-EA4EEFEF1F57}"/>
               </a:ext>
             </a:extLst>
           </p:cNvPr>
@@ -18269,7 +18269,7 @@
           <p:cNvPr id="18" name="Shape 16">
             <a:extLst xmlns:a="http://schemas.openxmlformats.org/drawingml/2006/main">
               <a:ext uri="{FF2B5EF4-FFF2-40B4-BE49-F238E27FC236}">
-                <a16:creationId xmlns:a16="http://schemas.microsoft.com/office/drawing/2014/main" id="{9982B751-D851-4B95-9F96-D3FD02363B91}"/>
+                <a16:creationId xmlns:a16="http://schemas.microsoft.com/office/drawing/2014/main" id="{E8FAAF6C-61CE-42F3-BA8B-9E43C1F50DDF}"/>
               </a:ext>
             </a:extLst>
           </p:cNvPr>
@@ -18316,7 +18316,7 @@
           <p:cNvPr id="19" name="Text 17">
             <a:extLst xmlns:a="http://schemas.openxmlformats.org/drawingml/2006/main">
               <a:ext uri="{FF2B5EF4-FFF2-40B4-BE49-F238E27FC236}">
-                <a16:creationId xmlns:a16="http://schemas.microsoft.com/office/drawing/2014/main" id="{45860F06-3074-4A57-934B-D5B0597A4061}"/>
+                <a16:creationId xmlns:a16="http://schemas.microsoft.com/office/drawing/2014/main" id="{1B6E2EC8-F43D-468D-9A61-D5B790434D0C}"/>
               </a:ext>
             </a:extLst>
           </p:cNvPr>
@@ -18361,7 +18361,7 @@
           <p:cNvPr id="20" name="Text 18">
             <a:extLst xmlns:a="http://schemas.openxmlformats.org/drawingml/2006/main">
               <a:ext uri="{FF2B5EF4-FFF2-40B4-BE49-F238E27FC236}">
-                <a16:creationId xmlns:a16="http://schemas.microsoft.com/office/drawing/2014/main" id="{88BAB702-9C32-4713-A295-8372C3EF47AE}"/>
+                <a16:creationId xmlns:a16="http://schemas.microsoft.com/office/drawing/2014/main" id="{B18CF6AD-3C11-4B2B-96FD-B4B8B81518B9}"/>
               </a:ext>
             </a:extLst>
           </p:cNvPr>
@@ -18406,7 +18406,7 @@
           <p:cNvPr id="21" name="Text 19">
             <a:extLst xmlns:a="http://schemas.openxmlformats.org/drawingml/2006/main">
               <a:ext uri="{FF2B5EF4-FFF2-40B4-BE49-F238E27FC236}">
-                <a16:creationId xmlns:a16="http://schemas.microsoft.com/office/drawing/2014/main" id="{975AF44B-21C9-4B13-AB1C-AF9CABFAA38F}"/>
+                <a16:creationId xmlns:a16="http://schemas.microsoft.com/office/drawing/2014/main" id="{A8D8156D-366A-4BA1-B604-5E8700E772E1}"/>
               </a:ext>
             </a:extLst>
           </p:cNvPr>
@@ -18451,7 +18451,7 @@
           <p:cNvPr id="22" name="Text 20">
             <a:extLst xmlns:a="http://schemas.openxmlformats.org/drawingml/2006/main">
               <a:ext uri="{FF2B5EF4-FFF2-40B4-BE49-F238E27FC236}">
-                <a16:creationId xmlns:a16="http://schemas.microsoft.com/office/drawing/2014/main" id="{E97C5262-0DC1-417A-AD48-7D37A18B008E}"/>
+                <a16:creationId xmlns:a16="http://schemas.microsoft.com/office/drawing/2014/main" id="{0B7C7C0E-6CD5-45DB-B81D-E5809770201F}"/>
               </a:ext>
             </a:extLst>
           </p:cNvPr>
@@ -18496,7 +18496,7 @@
           <p:cNvPr id="23" name="Text 21">
             <a:extLst xmlns:a="http://schemas.openxmlformats.org/drawingml/2006/main">
               <a:ext uri="{FF2B5EF4-FFF2-40B4-BE49-F238E27FC236}">
-                <a16:creationId xmlns:a16="http://schemas.microsoft.com/office/drawing/2014/main" id="{5591A2A5-8980-4EBD-8EA9-A43833FF3EB8}"/>
+                <a16:creationId xmlns:a16="http://schemas.microsoft.com/office/drawing/2014/main" id="{46303D0E-CA15-4217-B42D-8A106A3BBEBF}"/>
               </a:ext>
             </a:extLst>
           </p:cNvPr>
@@ -18541,7 +18541,7 @@
           <p:cNvPr id="24" name="Text 22">
             <a:extLst xmlns:a="http://schemas.openxmlformats.org/drawingml/2006/main">
               <a:ext uri="{FF2B5EF4-FFF2-40B4-BE49-F238E27FC236}">
-                <a16:creationId xmlns:a16="http://schemas.microsoft.com/office/drawing/2014/main" id="{2803EF5D-D139-4A49-A4EB-A0BEA84148D5}"/>
+                <a16:creationId xmlns:a16="http://schemas.microsoft.com/office/drawing/2014/main" id="{E3EF1B12-490F-48F4-9C22-E255F685ED25}"/>
               </a:ext>
             </a:extLst>
           </p:cNvPr>
@@ -18586,7 +18586,7 @@
           <p:cNvPr id="25" name="Text 23">
             <a:extLst xmlns:a="http://schemas.openxmlformats.org/drawingml/2006/main">
               <a:ext uri="{FF2B5EF4-FFF2-40B4-BE49-F238E27FC236}">
-                <a16:creationId xmlns:a16="http://schemas.microsoft.com/office/drawing/2014/main" id="{BC8E8908-FE96-43F0-8464-E94ADDC7784B}"/>
+                <a16:creationId xmlns:a16="http://schemas.microsoft.com/office/drawing/2014/main" id="{BD65BB1B-BC45-4BDE-B694-6B505A84B028}"/>
               </a:ext>
             </a:extLst>
           </p:cNvPr>
@@ -18631,7 +18631,7 @@
           <p:cNvPr id="26" name="Text 24">
             <a:extLst xmlns:a="http://schemas.openxmlformats.org/drawingml/2006/main">
               <a:ext uri="{FF2B5EF4-FFF2-40B4-BE49-F238E27FC236}">
-                <a16:creationId xmlns:a16="http://schemas.microsoft.com/office/drawing/2014/main" id="{3ACE4DA7-F149-4B1B-8F0C-03C818972BD8}"/>
+                <a16:creationId xmlns:a16="http://schemas.microsoft.com/office/drawing/2014/main" id="{44D6856C-140D-4EA4-A95C-15A8F5FB2481}"/>
               </a:ext>
             </a:extLst>
           </p:cNvPr>
@@ -18676,7 +18676,7 @@
           <p:cNvPr id="27" name="Text 25">
             <a:extLst xmlns:a="http://schemas.openxmlformats.org/drawingml/2006/main">
               <a:ext uri="{FF2B5EF4-FFF2-40B4-BE49-F238E27FC236}">
-                <a16:creationId xmlns:a16="http://schemas.microsoft.com/office/drawing/2014/main" id="{5D0A31DD-650F-4DB8-B94A-EDE7731C360D}"/>
+                <a16:creationId xmlns:a16="http://schemas.microsoft.com/office/drawing/2014/main" id="{040715C7-CC03-4758-8D9D-205AC0B3EF79}"/>
               </a:ext>
             </a:extLst>
           </p:cNvPr>
@@ -18721,7 +18721,7 @@
           <p:cNvPr id="28" name="Text 26">
             <a:extLst xmlns:a="http://schemas.openxmlformats.org/drawingml/2006/main">
               <a:ext uri="{FF2B5EF4-FFF2-40B4-BE49-F238E27FC236}">
-                <a16:creationId xmlns:a16="http://schemas.microsoft.com/office/drawing/2014/main" id="{42F5541E-7003-4525-96F0-A8B803A2E06E}"/>
+                <a16:creationId xmlns:a16="http://schemas.microsoft.com/office/drawing/2014/main" id="{5F8451AC-250B-4BBE-B103-F2CD40A64E3E}"/>
               </a:ext>
             </a:extLst>
           </p:cNvPr>
@@ -18766,7 +18766,7 @@
           <p:cNvPr id="29" name="Text 27">
             <a:extLst xmlns:a="http://schemas.openxmlformats.org/drawingml/2006/main">
               <a:ext uri="{FF2B5EF4-FFF2-40B4-BE49-F238E27FC236}">
-                <a16:creationId xmlns:a16="http://schemas.microsoft.com/office/drawing/2014/main" id="{B8730E49-2838-4AE0-AB2A-07BC5B557245}"/>
+                <a16:creationId xmlns:a16="http://schemas.microsoft.com/office/drawing/2014/main" id="{6411C82A-B0BF-4EFC-8D29-3647A49C5B2A}"/>
               </a:ext>
             </a:extLst>
           </p:cNvPr>
@@ -18814,7 +18814,7 @@
           <p:cNvPr id="30" name="Shape 28">
             <a:extLst xmlns:a="http://schemas.openxmlformats.org/drawingml/2006/main">
               <a:ext uri="{FF2B5EF4-FFF2-40B4-BE49-F238E27FC236}">
-                <a16:creationId xmlns:a16="http://schemas.microsoft.com/office/drawing/2014/main" id="{F7D2CA91-A32D-4354-94BA-2DBBC2DFD28F}"/>
+                <a16:creationId xmlns:a16="http://schemas.microsoft.com/office/drawing/2014/main" id="{94F84324-1C18-4C68-ABA7-0D2EB2E008C8}"/>
               </a:ext>
             </a:extLst>
           </p:cNvPr>
@@ -18861,7 +18861,7 @@
           <p:cNvPr id="31" name="Shape 29">
             <a:extLst xmlns:a="http://schemas.openxmlformats.org/drawingml/2006/main">
               <a:ext uri="{FF2B5EF4-FFF2-40B4-BE49-F238E27FC236}">
-                <a16:creationId xmlns:a16="http://schemas.microsoft.com/office/drawing/2014/main" id="{751E8FC4-6FF9-4C39-8253-B9A8A3D5162C}"/>
+                <a16:creationId xmlns:a16="http://schemas.microsoft.com/office/drawing/2014/main" id="{30F4B94F-EE6C-4596-B6BE-BD874E5A74A5}"/>
               </a:ext>
             </a:extLst>
           </p:cNvPr>
@@ -18899,7 +18899,7 @@
           <p:cNvPr id="32" name="Text 30">
             <a:extLst xmlns:a="http://schemas.openxmlformats.org/drawingml/2006/main">
               <a:ext uri="{FF2B5EF4-FFF2-40B4-BE49-F238E27FC236}">
-                <a16:creationId xmlns:a16="http://schemas.microsoft.com/office/drawing/2014/main" id="{964335EE-8240-49F4-9122-A569B035E25C}"/>
+                <a16:creationId xmlns:a16="http://schemas.microsoft.com/office/drawing/2014/main" id="{BAA8B9F1-7C12-455E-AE10-0A2A94FA0104}"/>
               </a:ext>
             </a:extLst>
           </p:cNvPr>
@@ -18944,7 +18944,7 @@
           <p:cNvPr id="33" name="Text 31">
             <a:extLst xmlns:a="http://schemas.openxmlformats.org/drawingml/2006/main">
               <a:ext uri="{FF2B5EF4-FFF2-40B4-BE49-F238E27FC236}">
-                <a16:creationId xmlns:a16="http://schemas.microsoft.com/office/drawing/2014/main" id="{683D9704-7612-41EC-82B2-BE77AC6E990A}"/>
+                <a16:creationId xmlns:a16="http://schemas.microsoft.com/office/drawing/2014/main" id="{0CF2DCAD-D7F5-4EB7-96CE-AFCBCE2AE8D8}"/>
               </a:ext>
             </a:extLst>
           </p:cNvPr>
@@ -18989,7 +18989,7 @@
           <p:cNvPr id="34" name="Text 32">
             <a:extLst xmlns:a="http://schemas.openxmlformats.org/drawingml/2006/main">
               <a:ext uri="{FF2B5EF4-FFF2-40B4-BE49-F238E27FC236}">
-                <a16:creationId xmlns:a16="http://schemas.microsoft.com/office/drawing/2014/main" id="{A12C7DE2-A733-47A5-84E6-C3A2D09C869A}"/>
+                <a16:creationId xmlns:a16="http://schemas.microsoft.com/office/drawing/2014/main" id="{BBC36130-4884-4329-A16C-E3937AA2E4C8}"/>
               </a:ext>
             </a:extLst>
           </p:cNvPr>
@@ -19037,7 +19037,7 @@
           <p:cNvPr id="35" name="Text 33">
             <a:extLst xmlns:a="http://schemas.openxmlformats.org/drawingml/2006/main">
               <a:ext uri="{FF2B5EF4-FFF2-40B4-BE49-F238E27FC236}">
-                <a16:creationId xmlns:a16="http://schemas.microsoft.com/office/drawing/2014/main" id="{5CC64EDC-9B88-46CD-A1CB-924B12805BD9}"/>
+                <a16:creationId xmlns:a16="http://schemas.microsoft.com/office/drawing/2014/main" id="{97E5C6FF-77DE-433F-AB6A-7A916C2126DE}"/>
               </a:ext>
             </a:extLst>
           </p:cNvPr>
@@ -19083,7 +19083,7 @@
     </p:spTree>
     <p:extLst>
       <p:ext uri="{BB962C8B-B14F-4D97-AF65-F5344CB8AC3E}">
-        <p14:creationId xmlns:p14="http://schemas.microsoft.com/office/powerpoint/2010/main" val="1213437260"/>
+        <p14:creationId xmlns:p14="http://schemas.microsoft.com/office/powerpoint/2010/main" val="402392730"/>
       </p:ext>
     </p:extLst>
   </p:cSld>
@@ -19114,7 +19114,7 @@
           <p:cNvPr id="2" name="Text 0">
             <a:extLst xmlns:a="http://schemas.openxmlformats.org/drawingml/2006/main">
               <a:ext uri="{FF2B5EF4-FFF2-40B4-BE49-F238E27FC236}">
-                <a16:creationId xmlns:a16="http://schemas.microsoft.com/office/drawing/2014/main" id="{A6476AFC-D989-4568-806E-6ABDAB1E8742}"/>
+                <a16:creationId xmlns:a16="http://schemas.microsoft.com/office/drawing/2014/main" id="{5412AED5-776A-4832-A86C-7F0294EBA215}"/>
               </a:ext>
             </a:extLst>
           </p:cNvPr>
@@ -19159,7 +19159,7 @@
           <p:cNvPr id="3" name="Text 1">
             <a:extLst xmlns:a="http://schemas.openxmlformats.org/drawingml/2006/main">
               <a:ext uri="{FF2B5EF4-FFF2-40B4-BE49-F238E27FC236}">
-                <a16:creationId xmlns:a16="http://schemas.microsoft.com/office/drawing/2014/main" id="{F4A8AFC5-AC2D-4E30-B32D-1A214FB20259}"/>
+                <a16:creationId xmlns:a16="http://schemas.microsoft.com/office/drawing/2014/main" id="{E202B7D4-624D-4F42-8659-5C918F46EC65}"/>
               </a:ext>
             </a:extLst>
           </p:cNvPr>
@@ -19204,7 +19204,7 @@
           <p:cNvPr id="4" name="Text 2">
             <a:extLst xmlns:a="http://schemas.openxmlformats.org/drawingml/2006/main">
               <a:ext uri="{FF2B5EF4-FFF2-40B4-BE49-F238E27FC236}">
-                <a16:creationId xmlns:a16="http://schemas.microsoft.com/office/drawing/2014/main" id="{6760A2F5-E14C-47FA-907F-785664BDC3D1}"/>
+                <a16:creationId xmlns:a16="http://schemas.microsoft.com/office/drawing/2014/main" id="{E1B1D374-15BD-4AA2-A237-97AAF9C38261}"/>
               </a:ext>
             </a:extLst>
           </p:cNvPr>
@@ -19249,7 +19249,7 @@
           <p:cNvPr id="5" name="Text 3">
             <a:extLst xmlns:a="http://schemas.openxmlformats.org/drawingml/2006/main">
               <a:ext uri="{FF2B5EF4-FFF2-40B4-BE49-F238E27FC236}">
-                <a16:creationId xmlns:a16="http://schemas.microsoft.com/office/drawing/2014/main" id="{D8C36104-DB63-4F28-A64D-A6E79D81B4D8}"/>
+                <a16:creationId xmlns:a16="http://schemas.microsoft.com/office/drawing/2014/main" id="{DC092E56-6701-4087-B562-E461DC782388}"/>
               </a:ext>
             </a:extLst>
           </p:cNvPr>
@@ -19294,7 +19294,7 @@
           <p:cNvPr id="6" name="Text 4">
             <a:extLst xmlns:a="http://schemas.openxmlformats.org/drawingml/2006/main">
               <a:ext uri="{FF2B5EF4-FFF2-40B4-BE49-F238E27FC236}">
-                <a16:creationId xmlns:a16="http://schemas.microsoft.com/office/drawing/2014/main" id="{C8C7D74C-FF13-4819-AEFC-2CA6AA3B5630}"/>
+                <a16:creationId xmlns:a16="http://schemas.microsoft.com/office/drawing/2014/main" id="{BD508C0A-0C2B-4B88-B89D-185142B47A56}"/>
               </a:ext>
             </a:extLst>
           </p:cNvPr>
@@ -19353,7 +19353,7 @@
           <p:cNvPr id="7" name="Text 5">
             <a:extLst xmlns:a="http://schemas.openxmlformats.org/drawingml/2006/main">
               <a:ext uri="{FF2B5EF4-FFF2-40B4-BE49-F238E27FC236}">
-                <a16:creationId xmlns:a16="http://schemas.microsoft.com/office/drawing/2014/main" id="{09D9E89E-F342-4EBC-B627-9898E42247DD}"/>
+                <a16:creationId xmlns:a16="http://schemas.microsoft.com/office/drawing/2014/main" id="{4BDA99D1-06EB-4295-9520-DCDD7173E8EA}"/>
               </a:ext>
             </a:extLst>
           </p:cNvPr>
@@ -19398,7 +19398,7 @@
           <p:cNvPr id="8" name="Shape 6">
             <a:extLst xmlns:a="http://schemas.openxmlformats.org/drawingml/2006/main">
               <a:ext uri="{FF2B5EF4-FFF2-40B4-BE49-F238E27FC236}">
-                <a16:creationId xmlns:a16="http://schemas.microsoft.com/office/drawing/2014/main" id="{06E7D94A-9D34-4661-B48F-933D0448261D}"/>
+                <a16:creationId xmlns:a16="http://schemas.microsoft.com/office/drawing/2014/main" id="{D8953978-2207-472D-A6A4-CF63556F41E5}"/>
               </a:ext>
             </a:extLst>
           </p:cNvPr>
@@ -19445,7 +19445,7 @@
           <p:cNvPr id="9" name="Shape 7">
             <a:extLst xmlns:a="http://schemas.openxmlformats.org/drawingml/2006/main">
               <a:ext uri="{FF2B5EF4-FFF2-40B4-BE49-F238E27FC236}">
-                <a16:creationId xmlns:a16="http://schemas.microsoft.com/office/drawing/2014/main" id="{9E7CF91B-C75B-4D1C-960F-A968EBAE9DB2}"/>
+                <a16:creationId xmlns:a16="http://schemas.microsoft.com/office/drawing/2014/main" id="{DE8AB9C6-2E45-4118-A7FD-9651127837FB}"/>
               </a:ext>
             </a:extLst>
           </p:cNvPr>
@@ -19483,7 +19483,7 @@
           <p:cNvPr id="10" name="Text 8">
             <a:extLst xmlns:a="http://schemas.openxmlformats.org/drawingml/2006/main">
               <a:ext uri="{FF2B5EF4-FFF2-40B4-BE49-F238E27FC236}">
-                <a16:creationId xmlns:a16="http://schemas.microsoft.com/office/drawing/2014/main" id="{B87D9B36-22BA-4E81-8218-B6B20F75E726}"/>
+                <a16:creationId xmlns:a16="http://schemas.microsoft.com/office/drawing/2014/main" id="{92AAB059-1433-438A-970F-4153ED7D9086}"/>
               </a:ext>
             </a:extLst>
           </p:cNvPr>
@@ -19528,7 +19528,7 @@
           <p:cNvPr id="11" name="Text 9">
             <a:extLst xmlns:a="http://schemas.openxmlformats.org/drawingml/2006/main">
               <a:ext uri="{FF2B5EF4-FFF2-40B4-BE49-F238E27FC236}">
-                <a16:creationId xmlns:a16="http://schemas.microsoft.com/office/drawing/2014/main" id="{D6CBB719-BFE3-4ED8-BF98-09945DBD094F}"/>
+                <a16:creationId xmlns:a16="http://schemas.microsoft.com/office/drawing/2014/main" id="{A7195DCA-0A47-46B9-9BDF-8250E6BDF608}"/>
               </a:ext>
             </a:extLst>
           </p:cNvPr>
@@ -19576,7 +19576,7 @@
           <p:cNvPr id="12" name="Text 10">
             <a:extLst xmlns:a="http://schemas.openxmlformats.org/drawingml/2006/main">
               <a:ext uri="{FF2B5EF4-FFF2-40B4-BE49-F238E27FC236}">
-                <a16:creationId xmlns:a16="http://schemas.microsoft.com/office/drawing/2014/main" id="{91731FC6-33A5-4B38-A0AE-48882578A175}"/>
+                <a16:creationId xmlns:a16="http://schemas.microsoft.com/office/drawing/2014/main" id="{0145B119-C72B-475D-A254-5D5CD7508E80}"/>
               </a:ext>
             </a:extLst>
           </p:cNvPr>
@@ -19624,7 +19624,7 @@
           <p:cNvPr id="13" name="Shape 11">
             <a:extLst xmlns:a="http://schemas.openxmlformats.org/drawingml/2006/main">
               <a:ext uri="{FF2B5EF4-FFF2-40B4-BE49-F238E27FC236}">
-                <a16:creationId xmlns:a16="http://schemas.microsoft.com/office/drawing/2014/main" id="{5F81B3F0-935D-45B8-BFAC-ECE9EB54436E}"/>
+                <a16:creationId xmlns:a16="http://schemas.microsoft.com/office/drawing/2014/main" id="{81B496CC-AB3B-424D-842E-0851B7A47D12}"/>
               </a:ext>
             </a:extLst>
           </p:cNvPr>
@@ -19671,7 +19671,7 @@
           <p:cNvPr id="14" name="Shape 12">
             <a:extLst xmlns:a="http://schemas.openxmlformats.org/drawingml/2006/main">
               <a:ext uri="{FF2B5EF4-FFF2-40B4-BE49-F238E27FC236}">
-                <a16:creationId xmlns:a16="http://schemas.microsoft.com/office/drawing/2014/main" id="{E2B13E5A-7B8E-4690-8314-1D629E0A0C75}"/>
+                <a16:creationId xmlns:a16="http://schemas.microsoft.com/office/drawing/2014/main" id="{719786E9-1F2F-4D17-BEB8-15BCF4A81C93}"/>
               </a:ext>
             </a:extLst>
           </p:cNvPr>
@@ -19709,7 +19709,7 @@
           <p:cNvPr id="15" name="Text 13">
             <a:extLst xmlns:a="http://schemas.openxmlformats.org/drawingml/2006/main">
               <a:ext uri="{FF2B5EF4-FFF2-40B4-BE49-F238E27FC236}">
-                <a16:creationId xmlns:a16="http://schemas.microsoft.com/office/drawing/2014/main" id="{5F97E657-B33C-420D-A045-FAC851133791}"/>
+                <a16:creationId xmlns:a16="http://schemas.microsoft.com/office/drawing/2014/main" id="{8A70BE18-CDB6-4D73-A038-23E5F4EFFB22}"/>
               </a:ext>
             </a:extLst>
           </p:cNvPr>
@@ -19754,7 +19754,7 @@
           <p:cNvPr id="16" name="Text 14">
             <a:extLst xmlns:a="http://schemas.openxmlformats.org/drawingml/2006/main">
               <a:ext uri="{FF2B5EF4-FFF2-40B4-BE49-F238E27FC236}">
-                <a16:creationId xmlns:a16="http://schemas.microsoft.com/office/drawing/2014/main" id="{7500E031-0B7D-4BAF-BF1C-F659040713F1}"/>
+                <a16:creationId xmlns:a16="http://schemas.microsoft.com/office/drawing/2014/main" id="{1E5CA7CD-7EC6-445C-9D80-C64802105D51}"/>
               </a:ext>
             </a:extLst>
           </p:cNvPr>
@@ -19802,7 +19802,7 @@
           <p:cNvPr id="17" name="Text 15">
             <a:extLst xmlns:a="http://schemas.openxmlformats.org/drawingml/2006/main">
               <a:ext uri="{FF2B5EF4-FFF2-40B4-BE49-F238E27FC236}">
-                <a16:creationId xmlns:a16="http://schemas.microsoft.com/office/drawing/2014/main" id="{50F53551-B757-4CCF-AC10-8079A8A5EB96}"/>
+                <a16:creationId xmlns:a16="http://schemas.microsoft.com/office/drawing/2014/main" id="{5A50E6F4-B6EA-4C9B-BA78-F46CEE71EF04}"/>
               </a:ext>
             </a:extLst>
           </p:cNvPr>
@@ -19850,7 +19850,7 @@
           <p:cNvPr id="18" name="Shape 16">
             <a:extLst xmlns:a="http://schemas.openxmlformats.org/drawingml/2006/main">
               <a:ext uri="{FF2B5EF4-FFF2-40B4-BE49-F238E27FC236}">
-                <a16:creationId xmlns:a16="http://schemas.microsoft.com/office/drawing/2014/main" id="{661E42DE-5081-4849-94D4-D5E3CD5740B6}"/>
+                <a16:creationId xmlns:a16="http://schemas.microsoft.com/office/drawing/2014/main" id="{2B0D8A1F-EA9E-4C3E-B141-C5DCDD9A68C3}"/>
               </a:ext>
             </a:extLst>
           </p:cNvPr>
@@ -19897,7 +19897,7 @@
           <p:cNvPr id="19" name="Shape 17">
             <a:extLst xmlns:a="http://schemas.openxmlformats.org/drawingml/2006/main">
               <a:ext uri="{FF2B5EF4-FFF2-40B4-BE49-F238E27FC236}">
-                <a16:creationId xmlns:a16="http://schemas.microsoft.com/office/drawing/2014/main" id="{6AED749C-A33A-4079-A114-C40D68EA4984}"/>
+                <a16:creationId xmlns:a16="http://schemas.microsoft.com/office/drawing/2014/main" id="{2B7CF8A9-463B-4343-9243-60916E1910D2}"/>
               </a:ext>
             </a:extLst>
           </p:cNvPr>
@@ -19935,7 +19935,7 @@
           <p:cNvPr id="20" name="Text 18">
             <a:extLst xmlns:a="http://schemas.openxmlformats.org/drawingml/2006/main">
               <a:ext uri="{FF2B5EF4-FFF2-40B4-BE49-F238E27FC236}">
-                <a16:creationId xmlns:a16="http://schemas.microsoft.com/office/drawing/2014/main" id="{05057E88-14B6-448C-B601-BE1E7A172B4A}"/>
+                <a16:creationId xmlns:a16="http://schemas.microsoft.com/office/drawing/2014/main" id="{6DAABAFA-88F0-45A3-8FF9-98B0B7DCD5E7}"/>
               </a:ext>
             </a:extLst>
           </p:cNvPr>
@@ -19980,7 +19980,7 @@
           <p:cNvPr id="21" name="Text 19">
             <a:extLst xmlns:a="http://schemas.openxmlformats.org/drawingml/2006/main">
               <a:ext uri="{FF2B5EF4-FFF2-40B4-BE49-F238E27FC236}">
-                <a16:creationId xmlns:a16="http://schemas.microsoft.com/office/drawing/2014/main" id="{5BAB088B-3EE7-4574-A897-BB9382AA1397}"/>
+                <a16:creationId xmlns:a16="http://schemas.microsoft.com/office/drawing/2014/main" id="{4153A7C3-5E25-4577-9C41-39A1B1F24B54}"/>
               </a:ext>
             </a:extLst>
           </p:cNvPr>
@@ -20028,7 +20028,7 @@
           <p:cNvPr id="22" name="Text 20">
             <a:extLst xmlns:a="http://schemas.openxmlformats.org/drawingml/2006/main">
               <a:ext uri="{FF2B5EF4-FFF2-40B4-BE49-F238E27FC236}">
-                <a16:creationId xmlns:a16="http://schemas.microsoft.com/office/drawing/2014/main" id="{8C98DA75-2BC1-4FA5-9C3E-9E333B08E884}"/>
+                <a16:creationId xmlns:a16="http://schemas.microsoft.com/office/drawing/2014/main" id="{58544CF0-03F3-4A4B-AC8E-F6D85B626EF7}"/>
               </a:ext>
             </a:extLst>
           </p:cNvPr>
@@ -20076,7 +20076,7 @@
           <p:cNvPr id="23" name="Shape 21">
             <a:extLst xmlns:a="http://schemas.openxmlformats.org/drawingml/2006/main">
               <a:ext uri="{FF2B5EF4-FFF2-40B4-BE49-F238E27FC236}">
-                <a16:creationId xmlns:a16="http://schemas.microsoft.com/office/drawing/2014/main" id="{7738FA81-DF7F-4E43-8770-22265D7C2130}"/>
+                <a16:creationId xmlns:a16="http://schemas.microsoft.com/office/drawing/2014/main" id="{F5DC00BD-DE2C-4B82-9FD7-2FD30AD28466}"/>
               </a:ext>
             </a:extLst>
           </p:cNvPr>
@@ -20123,7 +20123,7 @@
           <p:cNvPr id="24" name="Shape 22">
             <a:extLst xmlns:a="http://schemas.openxmlformats.org/drawingml/2006/main">
               <a:ext uri="{FF2B5EF4-FFF2-40B4-BE49-F238E27FC236}">
-                <a16:creationId xmlns:a16="http://schemas.microsoft.com/office/drawing/2014/main" id="{B586B2F3-267F-4EE2-86A4-10D67A9C058C}"/>
+                <a16:creationId xmlns:a16="http://schemas.microsoft.com/office/drawing/2014/main" id="{B1B64D7E-6DD6-4C62-9676-A9CE73B4D658}"/>
               </a:ext>
             </a:extLst>
           </p:cNvPr>
@@ -20161,7 +20161,7 @@
           <p:cNvPr id="25" name="Text 23">
             <a:extLst xmlns:a="http://schemas.openxmlformats.org/drawingml/2006/main">
               <a:ext uri="{FF2B5EF4-FFF2-40B4-BE49-F238E27FC236}">
-                <a16:creationId xmlns:a16="http://schemas.microsoft.com/office/drawing/2014/main" id="{6919EFD0-5397-4068-8426-A32AF1991069}"/>
+                <a16:creationId xmlns:a16="http://schemas.microsoft.com/office/drawing/2014/main" id="{355AADD4-C91C-4524-A4D2-AB7C28DDB52E}"/>
               </a:ext>
             </a:extLst>
           </p:cNvPr>
@@ -20206,7 +20206,7 @@
           <p:cNvPr id="26" name="Text 24">
             <a:extLst xmlns:a="http://schemas.openxmlformats.org/drawingml/2006/main">
               <a:ext uri="{FF2B5EF4-FFF2-40B4-BE49-F238E27FC236}">
-                <a16:creationId xmlns:a16="http://schemas.microsoft.com/office/drawing/2014/main" id="{E1220C5F-B89D-4AA3-A5CE-814AE78B3CA0}"/>
+                <a16:creationId xmlns:a16="http://schemas.microsoft.com/office/drawing/2014/main" id="{4CC8389A-582A-4EAB-A054-D69ADF1F71D7}"/>
               </a:ext>
             </a:extLst>
           </p:cNvPr>
@@ -20254,7 +20254,7 @@
           <p:cNvPr id="27" name="Text 25">
             <a:extLst xmlns:a="http://schemas.openxmlformats.org/drawingml/2006/main">
               <a:ext uri="{FF2B5EF4-FFF2-40B4-BE49-F238E27FC236}">
-                <a16:creationId xmlns:a16="http://schemas.microsoft.com/office/drawing/2014/main" id="{C6B81067-410A-43DF-BAC7-650C98C663E1}"/>
+                <a16:creationId xmlns:a16="http://schemas.microsoft.com/office/drawing/2014/main" id="{1284E030-125B-4F62-9198-821A557F37D2}"/>
               </a:ext>
             </a:extLst>
           </p:cNvPr>
@@ -20302,7 +20302,7 @@
           <p:cNvPr id="28" name="Shape 26">
             <a:extLst xmlns:a="http://schemas.openxmlformats.org/drawingml/2006/main">
               <a:ext uri="{FF2B5EF4-FFF2-40B4-BE49-F238E27FC236}">
-                <a16:creationId xmlns:a16="http://schemas.microsoft.com/office/drawing/2014/main" id="{08A29DCC-08FC-4DFA-8ABA-82ED566E1EBA}"/>
+                <a16:creationId xmlns:a16="http://schemas.microsoft.com/office/drawing/2014/main" id="{4D0E01A5-8319-42CC-9C08-6982A40E4427}"/>
               </a:ext>
             </a:extLst>
           </p:cNvPr>
@@ -20349,7 +20349,7 @@
           <p:cNvPr id="29" name="Text 27">
             <a:extLst xmlns:a="http://schemas.openxmlformats.org/drawingml/2006/main">
               <a:ext uri="{FF2B5EF4-FFF2-40B4-BE49-F238E27FC236}">
-                <a16:creationId xmlns:a16="http://schemas.microsoft.com/office/drawing/2014/main" id="{4A2D4B04-5A7C-4233-A26F-B61607B4ABD4}"/>
+                <a16:creationId xmlns:a16="http://schemas.microsoft.com/office/drawing/2014/main" id="{381CA075-1F03-4A68-955D-7E2881351157}"/>
               </a:ext>
             </a:extLst>
           </p:cNvPr>
@@ -20394,7 +20394,7 @@
           <p:cNvPr id="30" name="Text 28">
             <a:extLst xmlns:a="http://schemas.openxmlformats.org/drawingml/2006/main">
               <a:ext uri="{FF2B5EF4-FFF2-40B4-BE49-F238E27FC236}">
-                <a16:creationId xmlns:a16="http://schemas.microsoft.com/office/drawing/2014/main" id="{ED3D76F3-3F0C-4AF6-8961-D6D8DC9749AB}"/>
+                <a16:creationId xmlns:a16="http://schemas.microsoft.com/office/drawing/2014/main" id="{1D3FD3B7-CF2B-4E45-B144-8A9797E5DF58}"/>
               </a:ext>
             </a:extLst>
           </p:cNvPr>
@@ -20442,7 +20442,7 @@
           <p:cNvPr id="31" name="Shape 29">
             <a:extLst xmlns:a="http://schemas.openxmlformats.org/drawingml/2006/main">
               <a:ext uri="{FF2B5EF4-FFF2-40B4-BE49-F238E27FC236}">
-                <a16:creationId xmlns:a16="http://schemas.microsoft.com/office/drawing/2014/main" id="{E0C9B724-6EC4-4C1E-AA2A-6ED63CB8A5EA}"/>
+                <a16:creationId xmlns:a16="http://schemas.microsoft.com/office/drawing/2014/main" id="{E194218B-5507-44AF-804B-167EA2B4C576}"/>
               </a:ext>
             </a:extLst>
           </p:cNvPr>
@@ -20489,7 +20489,7 @@
           <p:cNvPr id="32" name="Text 30">
             <a:extLst xmlns:a="http://schemas.openxmlformats.org/drawingml/2006/main">
               <a:ext uri="{FF2B5EF4-FFF2-40B4-BE49-F238E27FC236}">
-                <a16:creationId xmlns:a16="http://schemas.microsoft.com/office/drawing/2014/main" id="{34BAA422-80C0-4E0E-9845-612766947FCC}"/>
+                <a16:creationId xmlns:a16="http://schemas.microsoft.com/office/drawing/2014/main" id="{B4BAA42C-F198-4AF9-8675-298F245922DF}"/>
               </a:ext>
             </a:extLst>
           </p:cNvPr>
@@ -20534,7 +20534,7 @@
           <p:cNvPr id="33" name="Text 31">
             <a:extLst xmlns:a="http://schemas.openxmlformats.org/drawingml/2006/main">
               <a:ext uri="{FF2B5EF4-FFF2-40B4-BE49-F238E27FC236}">
-                <a16:creationId xmlns:a16="http://schemas.microsoft.com/office/drawing/2014/main" id="{CA440CD7-0112-423B-B7F4-84EE304408F6}"/>
+                <a16:creationId xmlns:a16="http://schemas.microsoft.com/office/drawing/2014/main" id="{76AA18B9-27C3-41A8-AA5C-B7C98C5B8BF0}"/>
               </a:ext>
             </a:extLst>
           </p:cNvPr>
@@ -20582,7 +20582,7 @@
           <p:cNvPr id="34" name="Text 32">
             <a:extLst xmlns:a="http://schemas.openxmlformats.org/drawingml/2006/main">
               <a:ext uri="{FF2B5EF4-FFF2-40B4-BE49-F238E27FC236}">
-                <a16:creationId xmlns:a16="http://schemas.microsoft.com/office/drawing/2014/main" id="{3F943E56-1C8B-4F99-AE51-CEBC15E09937}"/>
+                <a16:creationId xmlns:a16="http://schemas.microsoft.com/office/drawing/2014/main" id="{E88A0011-DF7F-4006-8C2A-CC13BE7A783A}"/>
               </a:ext>
             </a:extLst>
           </p:cNvPr>
@@ -20625,7 +20625,7 @@
     </p:spTree>
     <p:extLst>
       <p:ext uri="{BB962C8B-B14F-4D97-AF65-F5344CB8AC3E}">
-        <p14:creationId xmlns:p14="http://schemas.microsoft.com/office/powerpoint/2010/main" val="486950672"/>
+        <p14:creationId xmlns:p14="http://schemas.microsoft.com/office/powerpoint/2010/main" val="1160607270"/>
       </p:ext>
     </p:extLst>
   </p:cSld>
@@ -20656,7 +20656,7 @@
           <p:cNvPr id="2" name="Text 0">
             <a:extLst xmlns:a="http://schemas.openxmlformats.org/drawingml/2006/main">
               <a:ext uri="{FF2B5EF4-FFF2-40B4-BE49-F238E27FC236}">
-                <a16:creationId xmlns:a16="http://schemas.microsoft.com/office/drawing/2014/main" id="{C458044B-2142-4582-BFBA-3D481004078C}"/>
+                <a16:creationId xmlns:a16="http://schemas.microsoft.com/office/drawing/2014/main" id="{7F842534-BE30-419E-8B77-EEAC4C78F985}"/>
               </a:ext>
             </a:extLst>
           </p:cNvPr>
@@ -20701,7 +20701,7 @@
           <p:cNvPr id="3" name="Text 1">
             <a:extLst xmlns:a="http://schemas.openxmlformats.org/drawingml/2006/main">
               <a:ext uri="{FF2B5EF4-FFF2-40B4-BE49-F238E27FC236}">
-                <a16:creationId xmlns:a16="http://schemas.microsoft.com/office/drawing/2014/main" id="{384D1CEF-B701-4498-ADF0-59C2A120B140}"/>
+                <a16:creationId xmlns:a16="http://schemas.microsoft.com/office/drawing/2014/main" id="{A9AE9227-EE34-4E04-A18F-6F3197CFEA76}"/>
               </a:ext>
             </a:extLst>
           </p:cNvPr>
@@ -20746,7 +20746,7 @@
           <p:cNvPr id="4" name="Text 2">
             <a:extLst xmlns:a="http://schemas.openxmlformats.org/drawingml/2006/main">
               <a:ext uri="{FF2B5EF4-FFF2-40B4-BE49-F238E27FC236}">
-                <a16:creationId xmlns:a16="http://schemas.microsoft.com/office/drawing/2014/main" id="{75AE5BC2-0010-451B-BE6B-F222090A32AF}"/>
+                <a16:creationId xmlns:a16="http://schemas.microsoft.com/office/drawing/2014/main" id="{69366E13-6816-4E5A-B3CE-091AEB86DB9C}"/>
               </a:ext>
             </a:extLst>
           </p:cNvPr>
@@ -20791,7 +20791,7 @@
           <p:cNvPr id="5" name="Text 3">
             <a:extLst xmlns:a="http://schemas.openxmlformats.org/drawingml/2006/main">
               <a:ext uri="{FF2B5EF4-FFF2-40B4-BE49-F238E27FC236}">
-                <a16:creationId xmlns:a16="http://schemas.microsoft.com/office/drawing/2014/main" id="{E8A6CE6D-5986-4C8E-A8F3-8AB9F183D73D}"/>
+                <a16:creationId xmlns:a16="http://schemas.microsoft.com/office/drawing/2014/main" id="{E58AE6B0-1C29-484A-89B4-876F88643E67}"/>
               </a:ext>
             </a:extLst>
           </p:cNvPr>
@@ -20843,7 +20843,7 @@
         </p:xfrm>
         <a:graphic xmlns:a="http://schemas.openxmlformats.org/drawingml/2006/main">
           <a:graphicData uri="http://schemas.openxmlformats.org/drawingml/2006/chart">
-            <c:chart xmlns:r="http://schemas.openxmlformats.org/officeDocument/2006/relationships" xmlns:c="http://schemas.openxmlformats.org/drawingml/2006/chart" r:id="Ra88f5c6002d44922"/>
+            <c:chart xmlns:r="http://schemas.openxmlformats.org/officeDocument/2006/relationships" xmlns:c="http://schemas.openxmlformats.org/drawingml/2006/chart" r:id="Rd31f61b0688f4624"/>
           </a:graphicData>
         </a:graphic>
       </p:graphicFrame>
@@ -20852,7 +20852,7 @@
           <p:cNvPr id="7" name="Shape 4">
             <a:extLst xmlns:a="http://schemas.openxmlformats.org/drawingml/2006/main">
               <a:ext uri="{FF2B5EF4-FFF2-40B4-BE49-F238E27FC236}">
-                <a16:creationId xmlns:a16="http://schemas.microsoft.com/office/drawing/2014/main" id="{15F47F47-C11E-47C3-A7E9-9FBFFDC49CF9}"/>
+                <a16:creationId xmlns:a16="http://schemas.microsoft.com/office/drawing/2014/main" id="{C7C6EBDB-2DCB-4ACE-8504-96BCFD2D8262}"/>
               </a:ext>
             </a:extLst>
           </p:cNvPr>
@@ -20899,7 +20899,7 @@
           <p:cNvPr id="8" name="Text 5">
             <a:extLst xmlns:a="http://schemas.openxmlformats.org/drawingml/2006/main">
               <a:ext uri="{FF2B5EF4-FFF2-40B4-BE49-F238E27FC236}">
-                <a16:creationId xmlns:a16="http://schemas.microsoft.com/office/drawing/2014/main" id="{2662908F-9546-4943-A36B-A661F90A8DE8}"/>
+                <a16:creationId xmlns:a16="http://schemas.microsoft.com/office/drawing/2014/main" id="{9A6ED847-00BE-4D3E-8569-597A1DBE954B}"/>
               </a:ext>
             </a:extLst>
           </p:cNvPr>
@@ -20947,7 +20947,7 @@
           <p:cNvPr id="9" name="Text 6">
             <a:extLst xmlns:a="http://schemas.openxmlformats.org/drawingml/2006/main">
               <a:ext uri="{FF2B5EF4-FFF2-40B4-BE49-F238E27FC236}">
-                <a16:creationId xmlns:a16="http://schemas.microsoft.com/office/drawing/2014/main" id="{3CB5957F-63CF-470D-8A70-CE1DCFA3AC7F}"/>
+                <a16:creationId xmlns:a16="http://schemas.microsoft.com/office/drawing/2014/main" id="{36F83074-11B7-4C3E-899B-754523830AD1}"/>
               </a:ext>
             </a:extLst>
           </p:cNvPr>
@@ -20995,7 +20995,7 @@
           <p:cNvPr id="10" name="Shape 7">
             <a:extLst xmlns:a="http://schemas.openxmlformats.org/drawingml/2006/main">
               <a:ext uri="{FF2B5EF4-FFF2-40B4-BE49-F238E27FC236}">
-                <a16:creationId xmlns:a16="http://schemas.microsoft.com/office/drawing/2014/main" id="{EEFE0927-6548-409B-B990-059958989596}"/>
+                <a16:creationId xmlns:a16="http://schemas.microsoft.com/office/drawing/2014/main" id="{895D5E2C-0B69-418C-96D4-D46796F39542}"/>
               </a:ext>
             </a:extLst>
           </p:cNvPr>
@@ -21042,7 +21042,7 @@
           <p:cNvPr id="11" name="Text 8">
             <a:extLst xmlns:a="http://schemas.openxmlformats.org/drawingml/2006/main">
               <a:ext uri="{FF2B5EF4-FFF2-40B4-BE49-F238E27FC236}">
-                <a16:creationId xmlns:a16="http://schemas.microsoft.com/office/drawing/2014/main" id="{E7243B59-54EB-4A4E-A7AE-48F117A68143}"/>
+                <a16:creationId xmlns:a16="http://schemas.microsoft.com/office/drawing/2014/main" id="{FDA33CCF-9572-413E-B63A-7C804055BBE1}"/>
               </a:ext>
             </a:extLst>
           </p:cNvPr>
@@ -21090,7 +21090,7 @@
           <p:cNvPr id="12" name="Text 9">
             <a:extLst xmlns:a="http://schemas.openxmlformats.org/drawingml/2006/main">
               <a:ext uri="{FF2B5EF4-FFF2-40B4-BE49-F238E27FC236}">
-                <a16:creationId xmlns:a16="http://schemas.microsoft.com/office/drawing/2014/main" id="{FA3118F0-C560-47C1-8ED2-5FCADC463603}"/>
+                <a16:creationId xmlns:a16="http://schemas.microsoft.com/office/drawing/2014/main" id="{6CE0E485-F73B-425D-8E0C-144D5DD22AE5}"/>
               </a:ext>
             </a:extLst>
           </p:cNvPr>
@@ -21138,7 +21138,7 @@
           <p:cNvPr id="13" name="Shape 10">
             <a:extLst xmlns:a="http://schemas.openxmlformats.org/drawingml/2006/main">
               <a:ext uri="{FF2B5EF4-FFF2-40B4-BE49-F238E27FC236}">
-                <a16:creationId xmlns:a16="http://schemas.microsoft.com/office/drawing/2014/main" id="{E7D5E85B-225E-439F-B86D-A76A07E2AEFF}"/>
+                <a16:creationId xmlns:a16="http://schemas.microsoft.com/office/drawing/2014/main" id="{C7E0D211-FDC7-4EDC-BD13-42DAA246027F}"/>
               </a:ext>
             </a:extLst>
           </p:cNvPr>
@@ -21185,7 +21185,7 @@
           <p:cNvPr id="14" name="Text 11">
             <a:extLst xmlns:a="http://schemas.openxmlformats.org/drawingml/2006/main">
               <a:ext uri="{FF2B5EF4-FFF2-40B4-BE49-F238E27FC236}">
-                <a16:creationId xmlns:a16="http://schemas.microsoft.com/office/drawing/2014/main" id="{9628DD85-E89B-4390-87F4-13C511CD2EA0}"/>
+                <a16:creationId xmlns:a16="http://schemas.microsoft.com/office/drawing/2014/main" id="{71323310-F9BD-48CF-A8BC-5FF54C68BFA2}"/>
               </a:ext>
             </a:extLst>
           </p:cNvPr>
@@ -21233,7 +21233,7 @@
           <p:cNvPr id="15" name="Text 12">
             <a:extLst xmlns:a="http://schemas.openxmlformats.org/drawingml/2006/main">
               <a:ext uri="{FF2B5EF4-FFF2-40B4-BE49-F238E27FC236}">
-                <a16:creationId xmlns:a16="http://schemas.microsoft.com/office/drawing/2014/main" id="{E720E770-2B9B-49D8-B71F-40B6CE986112}"/>
+                <a16:creationId xmlns:a16="http://schemas.microsoft.com/office/drawing/2014/main" id="{5C2994D3-FC89-4797-A3D1-E081A3FB4D44}"/>
               </a:ext>
             </a:extLst>
           </p:cNvPr>
@@ -21281,7 +21281,7 @@
           <p:cNvPr id="16" name="Shape 13">
             <a:extLst xmlns:a="http://schemas.openxmlformats.org/drawingml/2006/main">
               <a:ext uri="{FF2B5EF4-FFF2-40B4-BE49-F238E27FC236}">
-                <a16:creationId xmlns:a16="http://schemas.microsoft.com/office/drawing/2014/main" id="{8E3D4FF3-0A1E-4A07-926C-C87982B9CA14}"/>
+                <a16:creationId xmlns:a16="http://schemas.microsoft.com/office/drawing/2014/main" id="{346A7517-C665-4388-83A8-063B732277E5}"/>
               </a:ext>
             </a:extLst>
           </p:cNvPr>
@@ -21321,7 +21321,7 @@
           <p:cNvPr id="17" name="Text 14">
             <a:extLst xmlns:a="http://schemas.openxmlformats.org/drawingml/2006/main">
               <a:ext uri="{FF2B5EF4-FFF2-40B4-BE49-F238E27FC236}">
-                <a16:creationId xmlns:a16="http://schemas.microsoft.com/office/drawing/2014/main" id="{B440C891-4CC1-4B0C-8AB7-415DF2D412A4}"/>
+                <a16:creationId xmlns:a16="http://schemas.microsoft.com/office/drawing/2014/main" id="{C730E724-9E6C-4110-AB87-BA6BFC7BD875}"/>
               </a:ext>
             </a:extLst>
           </p:cNvPr>
@@ -21378,7 +21378,7 @@
     </p:spTree>
     <p:extLst>
       <p:ext uri="{BB962C8B-B14F-4D97-AF65-F5344CB8AC3E}">
-        <p14:creationId xmlns:p14="http://schemas.microsoft.com/office/powerpoint/2010/main" val="1922310433"/>
+        <p14:creationId xmlns:p14="http://schemas.microsoft.com/office/powerpoint/2010/main" val="1956128117"/>
       </p:ext>
     </p:extLst>
   </p:cSld>
@@ -21409,7 +21409,7 @@
           <p:cNvPr id="2" name="Text 0">
             <a:extLst xmlns:a="http://schemas.openxmlformats.org/drawingml/2006/main">
               <a:ext uri="{FF2B5EF4-FFF2-40B4-BE49-F238E27FC236}">
-                <a16:creationId xmlns:a16="http://schemas.microsoft.com/office/drawing/2014/main" id="{40A7B754-C8A5-4A3C-B12A-7B48F819893E}"/>
+                <a16:creationId xmlns:a16="http://schemas.microsoft.com/office/drawing/2014/main" id="{71402394-2F3A-4EC4-B56D-84F3A4D03D8A}"/>
               </a:ext>
             </a:extLst>
           </p:cNvPr>
@@ -21454,7 +21454,7 @@
           <p:cNvPr id="3" name="Text 1">
             <a:extLst xmlns:a="http://schemas.openxmlformats.org/drawingml/2006/main">
               <a:ext uri="{FF2B5EF4-FFF2-40B4-BE49-F238E27FC236}">
-                <a16:creationId xmlns:a16="http://schemas.microsoft.com/office/drawing/2014/main" id="{D8D36368-7951-468A-98C3-D414395EC18E}"/>
+                <a16:creationId xmlns:a16="http://schemas.microsoft.com/office/drawing/2014/main" id="{0BCCEF74-3333-4155-8A02-7800A8175B1B}"/>
               </a:ext>
             </a:extLst>
           </p:cNvPr>
@@ -21499,7 +21499,7 @@
           <p:cNvPr id="4" name="Text 2">
             <a:extLst xmlns:a="http://schemas.openxmlformats.org/drawingml/2006/main">
               <a:ext uri="{FF2B5EF4-FFF2-40B4-BE49-F238E27FC236}">
-                <a16:creationId xmlns:a16="http://schemas.microsoft.com/office/drawing/2014/main" id="{6D8E22FC-9623-40D1-8EB3-0B7AE1EABC5F}"/>
+                <a16:creationId xmlns:a16="http://schemas.microsoft.com/office/drawing/2014/main" id="{E11A7C23-A6C9-4223-858C-EE87EA81F532}"/>
               </a:ext>
             </a:extLst>
           </p:cNvPr>
@@ -21544,7 +21544,7 @@
           <p:cNvPr id="5" name="Text 3">
             <a:extLst xmlns:a="http://schemas.openxmlformats.org/drawingml/2006/main">
               <a:ext uri="{FF2B5EF4-FFF2-40B4-BE49-F238E27FC236}">
-                <a16:creationId xmlns:a16="http://schemas.microsoft.com/office/drawing/2014/main" id="{F569EA4F-6C10-4527-8170-9B1E4BCFB3F9}"/>
+                <a16:creationId xmlns:a16="http://schemas.microsoft.com/office/drawing/2014/main" id="{091B6EF1-D281-4662-91AD-C7A521B1DD0E}"/>
               </a:ext>
             </a:extLst>
           </p:cNvPr>
@@ -21589,7 +21589,7 @@
           <p:cNvPr id="6" name="Text 4">
             <a:extLst xmlns:a="http://schemas.openxmlformats.org/drawingml/2006/main">
               <a:ext uri="{FF2B5EF4-FFF2-40B4-BE49-F238E27FC236}">
-                <a16:creationId xmlns:a16="http://schemas.microsoft.com/office/drawing/2014/main" id="{EE3E35F2-E539-4DC5-84D4-B4A26BC6FE16}"/>
+                <a16:creationId xmlns:a16="http://schemas.microsoft.com/office/drawing/2014/main" id="{EA718CA2-81E4-48EC-B2DD-ADD20B0E4EE2}"/>
               </a:ext>
             </a:extLst>
           </p:cNvPr>
@@ -21637,7 +21637,7 @@
           <p:cNvPr id="7" name="Text 5">
             <a:extLst xmlns:a="http://schemas.openxmlformats.org/drawingml/2006/main">
               <a:ext uri="{FF2B5EF4-FFF2-40B4-BE49-F238E27FC236}">
-                <a16:creationId xmlns:a16="http://schemas.microsoft.com/office/drawing/2014/main" id="{D66E85B8-2918-4805-87F5-A7282E0F46EF}"/>
+                <a16:creationId xmlns:a16="http://schemas.microsoft.com/office/drawing/2014/main" id="{6750DBC0-16FA-401E-96F8-8FDCAF14365D}"/>
               </a:ext>
             </a:extLst>
           </p:cNvPr>
@@ -22942,7 +22942,7 @@
           <p:cNvPr id="9" name="Shape 6">
             <a:extLst xmlns:a="http://schemas.openxmlformats.org/drawingml/2006/main">
               <a:ext uri="{FF2B5EF4-FFF2-40B4-BE49-F238E27FC236}">
-                <a16:creationId xmlns:a16="http://schemas.microsoft.com/office/drawing/2014/main" id="{F8CC7679-2C06-4B68-BE9E-44CFEF08E9D5}"/>
+                <a16:creationId xmlns:a16="http://schemas.microsoft.com/office/drawing/2014/main" id="{90BB7975-DD8B-4D09-A74E-81A3DD14EA0F}"/>
               </a:ext>
             </a:extLst>
           </p:cNvPr>
@@ -22989,7 +22989,7 @@
           <p:cNvPr id="10" name="Text 7">
             <a:extLst xmlns:a="http://schemas.openxmlformats.org/drawingml/2006/main">
               <a:ext uri="{FF2B5EF4-FFF2-40B4-BE49-F238E27FC236}">
-                <a16:creationId xmlns:a16="http://schemas.microsoft.com/office/drawing/2014/main" id="{FEBBB73B-3967-400A-8F87-F0B4C0BE375C}"/>
+                <a16:creationId xmlns:a16="http://schemas.microsoft.com/office/drawing/2014/main" id="{0918BE96-F1E4-4925-80DB-28895A2DB485}"/>
               </a:ext>
             </a:extLst>
           </p:cNvPr>
@@ -23037,7 +23037,7 @@
           <p:cNvPr id="11" name="Shape 8">
             <a:extLst xmlns:a="http://schemas.openxmlformats.org/drawingml/2006/main">
               <a:ext uri="{FF2B5EF4-FFF2-40B4-BE49-F238E27FC236}">
-                <a16:creationId xmlns:a16="http://schemas.microsoft.com/office/drawing/2014/main" id="{3F94E0B3-ED4A-45E1-8A0F-24A6BD90610D}"/>
+                <a16:creationId xmlns:a16="http://schemas.microsoft.com/office/drawing/2014/main" id="{FF620A54-6589-4706-93FD-22275E35D7A5}"/>
               </a:ext>
             </a:extLst>
           </p:cNvPr>
@@ -23084,7 +23084,7 @@
           <p:cNvPr id="12" name="Shape 9">
             <a:extLst xmlns:a="http://schemas.openxmlformats.org/drawingml/2006/main">
               <a:ext uri="{FF2B5EF4-FFF2-40B4-BE49-F238E27FC236}">
-                <a16:creationId xmlns:a16="http://schemas.microsoft.com/office/drawing/2014/main" id="{DB97B89B-0E60-4500-9C36-2339860AFD3F}"/>
+                <a16:creationId xmlns:a16="http://schemas.microsoft.com/office/drawing/2014/main" id="{1086AF7D-10A0-4538-BAFB-8A3614B9219F}"/>
               </a:ext>
             </a:extLst>
           </p:cNvPr>
@@ -23122,7 +23122,7 @@
           <p:cNvPr id="13" name="Text 10">
             <a:extLst xmlns:a="http://schemas.openxmlformats.org/drawingml/2006/main">
               <a:ext uri="{FF2B5EF4-FFF2-40B4-BE49-F238E27FC236}">
-                <a16:creationId xmlns:a16="http://schemas.microsoft.com/office/drawing/2014/main" id="{70524E2C-AF54-447F-884D-74F3C454856C}"/>
+                <a16:creationId xmlns:a16="http://schemas.microsoft.com/office/drawing/2014/main" id="{99AFC40B-E1E0-4992-9812-A99AB3709429}"/>
               </a:ext>
             </a:extLst>
           </p:cNvPr>
@@ -23167,7 +23167,7 @@
           <p:cNvPr id="14" name="Text 11">
             <a:extLst xmlns:a="http://schemas.openxmlformats.org/drawingml/2006/main">
               <a:ext uri="{FF2B5EF4-FFF2-40B4-BE49-F238E27FC236}">
-                <a16:creationId xmlns:a16="http://schemas.microsoft.com/office/drawing/2014/main" id="{DEE6234D-B932-4842-8241-31D258A85CF1}"/>
+                <a16:creationId xmlns:a16="http://schemas.microsoft.com/office/drawing/2014/main" id="{13EBC104-5F29-42DF-AA38-19DF2D654CE8}"/>
               </a:ext>
             </a:extLst>
           </p:cNvPr>
@@ -23212,7 +23212,7 @@
           <p:cNvPr id="15" name="Text 12">
             <a:extLst xmlns:a="http://schemas.openxmlformats.org/drawingml/2006/main">
               <a:ext uri="{FF2B5EF4-FFF2-40B4-BE49-F238E27FC236}">
-                <a16:creationId xmlns:a16="http://schemas.microsoft.com/office/drawing/2014/main" id="{59D149A5-9E11-4EBE-822C-B5E8049CCC39}"/>
+                <a16:creationId xmlns:a16="http://schemas.microsoft.com/office/drawing/2014/main" id="{B57B4575-E1FA-4EA9-8729-3A7AD8D8CA65}"/>
               </a:ext>
             </a:extLst>
           </p:cNvPr>
@@ -23307,7 +23307,7 @@
           <p:cNvPr id="16" name="Shape 13">
             <a:extLst xmlns:a="http://schemas.openxmlformats.org/drawingml/2006/main">
               <a:ext uri="{FF2B5EF4-FFF2-40B4-BE49-F238E27FC236}">
-                <a16:creationId xmlns:a16="http://schemas.microsoft.com/office/drawing/2014/main" id="{45919365-8A23-40BA-90FF-A3A06769FD79}"/>
+                <a16:creationId xmlns:a16="http://schemas.microsoft.com/office/drawing/2014/main" id="{0A0CAEA5-F3EA-4C87-A07A-754AEEC77580}"/>
               </a:ext>
             </a:extLst>
           </p:cNvPr>
@@ -23354,7 +23354,7 @@
           <p:cNvPr id="17" name="Shape 14">
             <a:extLst xmlns:a="http://schemas.openxmlformats.org/drawingml/2006/main">
               <a:ext uri="{FF2B5EF4-FFF2-40B4-BE49-F238E27FC236}">
-                <a16:creationId xmlns:a16="http://schemas.microsoft.com/office/drawing/2014/main" id="{F659E871-C94D-4668-997A-3D4B9FA15BA4}"/>
+                <a16:creationId xmlns:a16="http://schemas.microsoft.com/office/drawing/2014/main" id="{10826366-3EDC-49D4-92F3-BAA028DE12E6}"/>
               </a:ext>
             </a:extLst>
           </p:cNvPr>
@@ -23392,7 +23392,7 @@
           <p:cNvPr id="18" name="Text 15">
             <a:extLst xmlns:a="http://schemas.openxmlformats.org/drawingml/2006/main">
               <a:ext uri="{FF2B5EF4-FFF2-40B4-BE49-F238E27FC236}">
-                <a16:creationId xmlns:a16="http://schemas.microsoft.com/office/drawing/2014/main" id="{A9F713CC-C05B-48D4-96B6-7B53DA6D7D2B}"/>
+                <a16:creationId xmlns:a16="http://schemas.microsoft.com/office/drawing/2014/main" id="{6B64A2A5-B545-4F04-9C09-C4BDD37C16D8}"/>
               </a:ext>
             </a:extLst>
           </p:cNvPr>
@@ -23437,7 +23437,7 @@
           <p:cNvPr id="19" name="Text 16">
             <a:extLst xmlns:a="http://schemas.openxmlformats.org/drawingml/2006/main">
               <a:ext uri="{FF2B5EF4-FFF2-40B4-BE49-F238E27FC236}">
-                <a16:creationId xmlns:a16="http://schemas.microsoft.com/office/drawing/2014/main" id="{6E17F69B-B635-4939-ADBA-B720D73C9BE5}"/>
+                <a16:creationId xmlns:a16="http://schemas.microsoft.com/office/drawing/2014/main" id="{8A6D0A3C-501F-492B-85B8-03955758BD87}"/>
               </a:ext>
             </a:extLst>
           </p:cNvPr>
@@ -23482,7 +23482,7 @@
           <p:cNvPr id="20" name="Text 17">
             <a:extLst xmlns:a="http://schemas.openxmlformats.org/drawingml/2006/main">
               <a:ext uri="{FF2B5EF4-FFF2-40B4-BE49-F238E27FC236}">
-                <a16:creationId xmlns:a16="http://schemas.microsoft.com/office/drawing/2014/main" id="{31982221-3597-4D0B-9F7C-C8BECECB6F1C}"/>
+                <a16:creationId xmlns:a16="http://schemas.microsoft.com/office/drawing/2014/main" id="{19D43D54-D5E5-4D3F-856D-05576FE9B640}"/>
               </a:ext>
             </a:extLst>
           </p:cNvPr>
@@ -23577,7 +23577,7 @@
           <p:cNvPr id="21" name="Shape 18">
             <a:extLst xmlns:a="http://schemas.openxmlformats.org/drawingml/2006/main">
               <a:ext uri="{FF2B5EF4-FFF2-40B4-BE49-F238E27FC236}">
-                <a16:creationId xmlns:a16="http://schemas.microsoft.com/office/drawing/2014/main" id="{E880A489-C288-416C-9E8F-31E6359A718C}"/>
+                <a16:creationId xmlns:a16="http://schemas.microsoft.com/office/drawing/2014/main" id="{D1CAD90D-4BAA-48E5-848D-CF938BC82624}"/>
               </a:ext>
             </a:extLst>
           </p:cNvPr>
@@ -23624,7 +23624,7 @@
           <p:cNvPr id="8" name="Text 19">
             <a:extLst xmlns:a="http://schemas.openxmlformats.org/drawingml/2006/main">
               <a:ext uri="{FF2B5EF4-FFF2-40B4-BE49-F238E27FC236}">
-                <a16:creationId xmlns:a16="http://schemas.microsoft.com/office/drawing/2014/main" id="{35760781-EBEF-49DC-A310-6D405351C009}"/>
+                <a16:creationId xmlns:a16="http://schemas.microsoft.com/office/drawing/2014/main" id="{397EDDF9-8949-423E-8C6D-B44EE325CA07}"/>
               </a:ext>
             </a:extLst>
           </p:cNvPr>
@@ -23669,7 +23669,7 @@
           <p:cNvPr id="23" name="Text 20">
             <a:extLst xmlns:a="http://schemas.openxmlformats.org/drawingml/2006/main">
               <a:ext uri="{FF2B5EF4-FFF2-40B4-BE49-F238E27FC236}">
-                <a16:creationId xmlns:a16="http://schemas.microsoft.com/office/drawing/2014/main" id="{B70A907A-FB6B-47D7-B5AB-DBEE00818BE0}"/>
+                <a16:creationId xmlns:a16="http://schemas.microsoft.com/office/drawing/2014/main" id="{F3E3A32F-34FD-4CC4-B926-63260528A308}"/>
               </a:ext>
             </a:extLst>
           </p:cNvPr>
@@ -23715,7 +23715,7 @@
     </p:spTree>
     <p:extLst>
       <p:ext uri="{BB962C8B-B14F-4D97-AF65-F5344CB8AC3E}">
-        <p14:creationId xmlns:p14="http://schemas.microsoft.com/office/powerpoint/2010/main" val="412111940"/>
+        <p14:creationId xmlns:p14="http://schemas.microsoft.com/office/powerpoint/2010/main" val="844497057"/>
       </p:ext>
     </p:extLst>
   </p:cSld>
@@ -23746,7 +23746,7 @@
           <p:cNvPr id="2" name="Text 0">
             <a:extLst xmlns:a="http://schemas.openxmlformats.org/drawingml/2006/main">
               <a:ext uri="{FF2B5EF4-FFF2-40B4-BE49-F238E27FC236}">
-                <a16:creationId xmlns:a16="http://schemas.microsoft.com/office/drawing/2014/main" id="{40A7B754-C8A5-4A3C-B12A-7B48F819893E}"/>
+                <a16:creationId xmlns:a16="http://schemas.microsoft.com/office/drawing/2014/main" id="{71402394-2F3A-4EC4-B56D-84F3A4D03D8A}"/>
               </a:ext>
             </a:extLst>
           </p:cNvPr>
@@ -23791,7 +23791,7 @@
           <p:cNvPr id="3" name="Text 1">
             <a:extLst xmlns:a="http://schemas.openxmlformats.org/drawingml/2006/main">
               <a:ext uri="{FF2B5EF4-FFF2-40B4-BE49-F238E27FC236}">
-                <a16:creationId xmlns:a16="http://schemas.microsoft.com/office/drawing/2014/main" id="{D8D36368-7951-468A-98C3-D414395EC18E}"/>
+                <a16:creationId xmlns:a16="http://schemas.microsoft.com/office/drawing/2014/main" id="{0BCCEF74-3333-4155-8A02-7800A8175B1B}"/>
               </a:ext>
             </a:extLst>
           </p:cNvPr>
@@ -23836,7 +23836,7 @@
           <p:cNvPr id="4" name="Text 2">
             <a:extLst xmlns:a="http://schemas.openxmlformats.org/drawingml/2006/main">
               <a:ext uri="{FF2B5EF4-FFF2-40B4-BE49-F238E27FC236}">
-                <a16:creationId xmlns:a16="http://schemas.microsoft.com/office/drawing/2014/main" id="{6D8E22FC-9623-40D1-8EB3-0B7AE1EABC5F}"/>
+                <a16:creationId xmlns:a16="http://schemas.microsoft.com/office/drawing/2014/main" id="{E11A7C23-A6C9-4223-858C-EE87EA81F532}"/>
               </a:ext>
             </a:extLst>
           </p:cNvPr>
@@ -23871,7 +23871,7 @@
                 <a:ea typeface="Calibri"/>
                 <a:cs typeface="Calibri"/>
               </a:rPr>
-              <a:t>RESULTS  ·  EXPLORATORY GCS EXTENSION  ·  REAL-PROVIDER PAIRED STUDY</a:t>
+              <a:t>RESULTS  ·  FAIR PLACEMENT + BOUNDED GEPA  ·  REAL-PROVIDER STUDY</a:t>
             </a:r>
           </a:p>
         </p:txBody>
@@ -23881,7 +23881,7 @@
           <p:cNvPr id="5" name="Text 3">
             <a:extLst xmlns:a="http://schemas.openxmlformats.org/drawingml/2006/main">
               <a:ext uri="{FF2B5EF4-FFF2-40B4-BE49-F238E27FC236}">
-                <a16:creationId xmlns:a16="http://schemas.microsoft.com/office/drawing/2014/main" id="{F569EA4F-6C10-4527-8170-9B1E4BCFB3F9}"/>
+                <a16:creationId xmlns:a16="http://schemas.microsoft.com/office/drawing/2014/main" id="{091B6EF1-D281-4662-91AD-C7A521B1DD0E}"/>
               </a:ext>
             </a:extLst>
           </p:cNvPr>
@@ -23916,7 +23916,7 @@
                 <a:ea typeface="Cambria"/>
                 <a:cs typeface="Cambria"/>
               </a:rPr>
-              <a:t>GCS removes the measured macro's extra model turn</a:t>
+              <a:t>Fair placement ties GCS; bounded GEPA retains its seed</a:t>
             </a:r>
           </a:p>
         </p:txBody>
@@ -23926,7 +23926,7 @@
           <p:cNvPr id="6" name="Text 4">
             <a:extLst xmlns:a="http://schemas.openxmlformats.org/drawingml/2006/main">
               <a:ext uri="{FF2B5EF4-FFF2-40B4-BE49-F238E27FC236}">
-                <a16:creationId xmlns:a16="http://schemas.microsoft.com/office/drawing/2014/main" id="{EE3E35F2-E539-4DC5-84D4-B4A26BC6FE16}"/>
+                <a16:creationId xmlns:a16="http://schemas.microsoft.com/office/drawing/2014/main" id="{EA718CA2-81E4-48EC-B2DD-ADD20B0E4EE2}"/>
               </a:ext>
             </a:extLst>
           </p:cNvPr>
@@ -23964,7 +23964,7 @@
                 <a:ea typeface="Calibri"/>
                 <a:cs typeface="Calibri"/>
               </a:rPr>
-              <a:t>Both arms preserve 12/12 exact contracts. GCS moves an admitted three-read program before the first provider request and returns one bounded task observation.</a:t>
+              <a:t>All five arms pass 6/6. GCS and an independent manual pre-model program tie at one request, one interface, and identical input tokens; GEPA leaves the four-request workflow unchanged.</a:t>
             </a:r>
           </a:p>
         </p:txBody>
@@ -23974,7 +23974,7 @@
           <p:cNvPr id="7" name="Text 5">
             <a:extLst xmlns:a="http://schemas.openxmlformats.org/drawingml/2006/main">
               <a:ext uri="{FF2B5EF4-FFF2-40B4-BE49-F238E27FC236}">
-                <a16:creationId xmlns:a16="http://schemas.microsoft.com/office/drawing/2014/main" id="{D66E85B8-2918-4805-87F5-A7282E0F46EF}"/>
+                <a16:creationId xmlns:a16="http://schemas.microsoft.com/office/drawing/2014/main" id="{6750DBC0-16FA-401E-96F8-8FDCAF14365D}"/>
               </a:ext>
             </a:extLst>
           </p:cNvPr>
@@ -24009,7 +24009,7 @@
                 <a:ea typeface="Calibri"/>
                 <a:cs typeface="Calibri"/>
               </a:rPr>
-              <a:t>12 FRESH, CALIBRATION-DISJOINT PUBLIC ISSUES — LOWER RESOURCE USE IS BETTER</a:t>
+              <a:t>6 FRESH HELD-OUT PUBLIC ISSUES — OPTIMIZATION COST EXCLUDED FROM DEPLOYMENT</a:t>
             </a:r>
           </a:p>
         </p:txBody>
@@ -24052,7 +24052,7 @@
                           <a:ea typeface="Calibri"/>
                           <a:cs typeface="Calibri"/>
                         </a:rPr>
-                        <a:t>Metric</a:t>
+                        <a:t>Condition</a:t>
                       </a:r>
                     </a:p>
                   </a:txBody>
@@ -24103,7 +24103,7 @@
                           <a:ea typeface="Calibri"/>
                           <a:cs typeface="Calibri"/>
                         </a:rPr>
-                        <a:t>Macro</a:t>
+                        <a:t>Requests</a:t>
                       </a:r>
                     </a:p>
                   </a:txBody>
@@ -24154,7 +24154,7 @@
                           <a:ea typeface="Calibri"/>
                           <a:cs typeface="Calibri"/>
                         </a:rPr>
-                        <a:t>GCS</a:t>
+                        <a:t>Interfaces</a:t>
                       </a:r>
                     </a:p>
                   </a:txBody>
@@ -24205,7 +24205,7 @@
                           <a:ea typeface="Calibri"/>
                           <a:cs typeface="Calibri"/>
                         </a:rPr>
-                        <a:t>Result</a:t>
+                        <a:t>Exact</a:t>
                       </a:r>
                     </a:p>
                   </a:txBody>
@@ -24258,7 +24258,7 @@
                           <a:ea typeface="Calibri"/>
                           <a:cs typeface="Calibri"/>
                         </a:rPr>
-                        <a:t>Provider requests</a:t>
+                        <a:t>Unchanged</a:t>
                       </a:r>
                     </a:p>
                   </a:txBody>
@@ -24309,7 +24309,7 @@
                           <a:ea typeface="Calibri"/>
                           <a:cs typeface="Calibri"/>
                         </a:rPr>
-                        <a:t>2.00</a:t>
+                        <a:t>4.0</a:t>
                       </a:r>
                     </a:p>
                   </a:txBody>
@@ -24360,7 +24360,7 @@
                           <a:ea typeface="Calibri"/>
                           <a:cs typeface="Calibri"/>
                         </a:rPr>
-                        <a:t>1.00</a:t>
+                        <a:t>3.0</a:t>
                       </a:r>
                     </a:p>
                   </a:txBody>
@@ -24411,7 +24411,7 @@
                           <a:ea typeface="Calibri"/>
                           <a:cs typeface="Calibri"/>
                         </a:rPr>
-                        <a:t>−50.0%</a:t>
+                        <a:t>6/6</a:t>
                       </a:r>
                     </a:p>
                   </a:txBody>
@@ -24464,7 +24464,7 @@
                           <a:ea typeface="Calibri"/>
                           <a:cs typeface="Calibri"/>
                         </a:rPr>
-                        <a:t>Tool interfaces</a:t>
+                        <a:t>GEPA · seed</a:t>
                       </a:r>
                     </a:p>
                   </a:txBody>
@@ -24515,7 +24515,7 @@
                           <a:ea typeface="Calibri"/>
                           <a:cs typeface="Calibri"/>
                         </a:rPr>
-                        <a:t>1.00</a:t>
+                        <a:t>4.0</a:t>
                       </a:r>
                     </a:p>
                   </a:txBody>
@@ -24566,7 +24566,7 @@
                           <a:ea typeface="Calibri"/>
                           <a:cs typeface="Calibri"/>
                         </a:rPr>
-                        <a:t>1.00</a:t>
+                        <a:t>3.0</a:t>
                       </a:r>
                     </a:p>
                   </a:txBody>
@@ -24617,7 +24617,7 @@
                           <a:ea typeface="Calibri"/>
                           <a:cs typeface="Calibri"/>
                         </a:rPr>
-                        <a:t>tie</a:t>
+                        <a:t>6/6</a:t>
                       </a:r>
                     </a:p>
                   </a:txBody>
@@ -24670,7 +24670,7 @@
                           <a:ea typeface="Calibri"/>
                           <a:cs typeface="Calibri"/>
                         </a:rPr>
-                        <a:t>Total tokens</a:t>
+                        <a:t>GCS</a:t>
                       </a:r>
                     </a:p>
                   </a:txBody>
@@ -24721,7 +24721,7 @@
                           <a:ea typeface="Calibri"/>
                           <a:cs typeface="Calibri"/>
                         </a:rPr>
-                        <a:t>1,524</a:t>
+                        <a:t>1.0</a:t>
                       </a:r>
                     </a:p>
                   </a:txBody>
@@ -24772,7 +24772,7 @@
                           <a:ea typeface="Calibri"/>
                           <a:cs typeface="Calibri"/>
                         </a:rPr>
-                        <a:t>931</a:t>
+                        <a:t>1.0</a:t>
                       </a:r>
                     </a:p>
                   </a:txBody>
@@ -24823,7 +24823,7 @@
                           <a:ea typeface="Calibri"/>
                           <a:cs typeface="Calibri"/>
                         </a:rPr>
-                        <a:t>−38.9%</a:t>
+                        <a:t>6/6</a:t>
                       </a:r>
                     </a:p>
                   </a:txBody>
@@ -24876,7 +24876,7 @@
                           <a:ea typeface="Calibri"/>
                           <a:cs typeface="Calibri"/>
                         </a:rPr>
-                        <a:t>Wall latency</a:t>
+                        <a:t>GCS + seed</a:t>
                       </a:r>
                     </a:p>
                   </a:txBody>
@@ -24927,7 +24927,7 @@
                           <a:ea typeface="Calibri"/>
                           <a:cs typeface="Calibri"/>
                         </a:rPr>
-                        <a:t>2,485 ms</a:t>
+                        <a:t>1.0</a:t>
                       </a:r>
                     </a:p>
                   </a:txBody>
@@ -24978,7 +24978,7 @@
                           <a:ea typeface="Calibri"/>
                           <a:cs typeface="Calibri"/>
                         </a:rPr>
-                        <a:t>1,490 ms</a:t>
+                        <a:t>1.0</a:t>
                       </a:r>
                     </a:p>
                   </a:txBody>
@@ -25029,7 +25029,7 @@
                           <a:ea typeface="Calibri"/>
                           <a:cs typeface="Calibri"/>
                         </a:rPr>
-                        <a:t>−40.0%</a:t>
+                        <a:t>6/6</a:t>
                       </a:r>
                     </a:p>
                   </a:txBody>
@@ -25082,7 +25082,7 @@
                           <a:ea typeface="Calibri"/>
                           <a:cs typeface="Calibri"/>
                         </a:rPr>
-                        <a:t>Estimated cost</a:t>
+                        <a:t>Manual pre-model</a:t>
                       </a:r>
                     </a:p>
                   </a:txBody>
@@ -25133,7 +25133,7 @@
                           <a:ea typeface="Calibri"/>
                           <a:cs typeface="Calibri"/>
                         </a:rPr>
-                        <a:t>$0.000430</a:t>
+                        <a:t>1.0</a:t>
                       </a:r>
                     </a:p>
                   </a:txBody>
@@ -25184,7 +25184,7 @@
                           <a:ea typeface="Calibri"/>
                           <a:cs typeface="Calibri"/>
                         </a:rPr>
-                        <a:t>$0.000291</a:t>
+                        <a:t>1.0</a:t>
                       </a:r>
                     </a:p>
                   </a:txBody>
@@ -25235,7 +25235,7 @@
                           <a:ea typeface="Calibri"/>
                           <a:cs typeface="Calibri"/>
                         </a:rPr>
-                        <a:t>−32.3%</a:t>
+                        <a:t>6/6</a:t>
                       </a:r>
                     </a:p>
                   </a:txBody>
@@ -25279,7 +25279,7 @@
           <p:cNvPr id="9" name="Shape 6">
             <a:extLst xmlns:a="http://schemas.openxmlformats.org/drawingml/2006/main">
               <a:ext uri="{FF2B5EF4-FFF2-40B4-BE49-F238E27FC236}">
-                <a16:creationId xmlns:a16="http://schemas.microsoft.com/office/drawing/2014/main" id="{F8CC7679-2C06-4B68-BE9E-44CFEF08E9D5}"/>
+                <a16:creationId xmlns:a16="http://schemas.microsoft.com/office/drawing/2014/main" id="{90BB7975-DD8B-4D09-A74E-81A3DD14EA0F}"/>
               </a:ext>
             </a:extLst>
           </p:cNvPr>
@@ -25326,7 +25326,7 @@
           <p:cNvPr id="10" name="Text 7">
             <a:extLst xmlns:a="http://schemas.openxmlformats.org/drawingml/2006/main">
               <a:ext uri="{FF2B5EF4-FFF2-40B4-BE49-F238E27FC236}">
-                <a16:creationId xmlns:a16="http://schemas.microsoft.com/office/drawing/2014/main" id="{FEBBB73B-3967-400A-8F87-F0B4C0BE375C}"/>
+                <a16:creationId xmlns:a16="http://schemas.microsoft.com/office/drawing/2014/main" id="{0918BE96-F1E4-4925-80DB-28895A2DB485}"/>
               </a:ext>
             </a:extLst>
           </p:cNvPr>
@@ -25364,7 +25364,7 @@
                 <a:ea typeface="Calibri"/>
                 <a:cs typeface="Calibri"/>
               </a:rPr>
-              <a:t>Provider-backed OpenAI Agents SDK executions over pinned real public records, counterbalanced by condition order and disjoint from all 424 earlier issue IDs. Exposed interfaces tie 1–1; internal source reads tie 3–3.</a:t>
+              <a:t>Real OpenAI Agents SDK executions over pinned public records. Disjoint 4/2/6 optimization train/validation/test splits were frozen before provider outcomes; condition order is balanced.</a:t>
             </a:r>
           </a:p>
         </p:txBody>
@@ -25374,7 +25374,7 @@
           <p:cNvPr id="11" name="Shape 8">
             <a:extLst xmlns:a="http://schemas.openxmlformats.org/drawingml/2006/main">
               <a:ext uri="{FF2B5EF4-FFF2-40B4-BE49-F238E27FC236}">
-                <a16:creationId xmlns:a16="http://schemas.microsoft.com/office/drawing/2014/main" id="{3F94E0B3-ED4A-45E1-8A0F-24A6BD90610D}"/>
+                <a16:creationId xmlns:a16="http://schemas.microsoft.com/office/drawing/2014/main" id="{FF620A54-6589-4706-93FD-22275E35D7A5}"/>
               </a:ext>
             </a:extLst>
           </p:cNvPr>
@@ -25421,7 +25421,7 @@
           <p:cNvPr id="12" name="Shape 9">
             <a:extLst xmlns:a="http://schemas.openxmlformats.org/drawingml/2006/main">
               <a:ext uri="{FF2B5EF4-FFF2-40B4-BE49-F238E27FC236}">
-                <a16:creationId xmlns:a16="http://schemas.microsoft.com/office/drawing/2014/main" id="{DB97B89B-0E60-4500-9C36-2339860AFD3F}"/>
+                <a16:creationId xmlns:a16="http://schemas.microsoft.com/office/drawing/2014/main" id="{1086AF7D-10A0-4538-BAFB-8A3614B9219F}"/>
               </a:ext>
             </a:extLst>
           </p:cNvPr>
@@ -25459,7 +25459,7 @@
           <p:cNvPr id="13" name="Text 10">
             <a:extLst xmlns:a="http://schemas.openxmlformats.org/drawingml/2006/main">
               <a:ext uri="{FF2B5EF4-FFF2-40B4-BE49-F238E27FC236}">
-                <a16:creationId xmlns:a16="http://schemas.microsoft.com/office/drawing/2014/main" id="{70524E2C-AF54-447F-884D-74F3C454856C}"/>
+                <a16:creationId xmlns:a16="http://schemas.microsoft.com/office/drawing/2014/main" id="{99AFC40B-E1E0-4992-9812-A99AB3709429}"/>
               </a:ext>
             </a:extLst>
           </p:cNvPr>
@@ -25504,7 +25504,7 @@
           <p:cNvPr id="14" name="Text 11">
             <a:extLst xmlns:a="http://schemas.openxmlformats.org/drawingml/2006/main">
               <a:ext uri="{FF2B5EF4-FFF2-40B4-BE49-F238E27FC236}">
-                <a16:creationId xmlns:a16="http://schemas.microsoft.com/office/drawing/2014/main" id="{DEE6234D-B932-4842-8241-31D258A85CF1}"/>
+                <a16:creationId xmlns:a16="http://schemas.microsoft.com/office/drawing/2014/main" id="{13EBC104-5F29-42DF-AA38-19DF2D654CE8}"/>
               </a:ext>
             </a:extLst>
           </p:cNvPr>
@@ -25539,7 +25539,7 @@
                 <a:ea typeface="Cambria"/>
                 <a:cs typeface="Cambria"/>
               </a:rPr>
-              <a:t>GCS wins the measured interface when…</a:t>
+              <a:t>What the fair test resolves…</a:t>
             </a:r>
           </a:p>
         </p:txBody>
@@ -25549,7 +25549,7 @@
           <p:cNvPr id="15" name="Text 12">
             <a:extLst xmlns:a="http://schemas.openxmlformats.org/drawingml/2006/main">
               <a:ext uri="{FF2B5EF4-FFF2-40B4-BE49-F238E27FC236}">
-                <a16:creationId xmlns:a16="http://schemas.microsoft.com/office/drawing/2014/main" id="{59D149A5-9E11-4EBE-822C-B5E8049CCC39}"/>
+                <a16:creationId xmlns:a16="http://schemas.microsoft.com/office/drawing/2014/main" id="{B57B4575-E1FA-4EA9-8729-3A7AD8D8CA65}"/>
               </a:ext>
             </a:extLst>
           </p:cNvPr>
@@ -25590,7 +25590,7 @@
                 <a:ea typeface="Calibri"/>
                 <a:cs typeface="Calibri"/>
               </a:rPr>
-              <a:t>the read program already passed admission</a:t>
+              <a:t>manual placement can remove the same turns</a:t>
             </a:r>
           </a:p>
           <a:p xmlns:a="http://schemas.openxmlformats.org/drawingml/2006/main">
@@ -25612,7 +25612,7 @@
                 <a:ea typeface="Calibri"/>
                 <a:cs typeface="Calibri"/>
               </a:rPr>
-              <a:t>task projection is live-out-only and bounded</a:t>
+              <a:t>GCS value shifts to discovery + admission</a:t>
             </a:r>
           </a:p>
           <a:p xmlns:a="http://schemas.openxmlformats.org/drawingml/2006/main">
@@ -25634,7 +25634,7 @@
                 <a:ea typeface="Calibri"/>
                 <a:cs typeface="Calibri"/>
               </a:rPr>
-              <a:t>the continuation manifest is pinned exactly</a:t>
+              <a:t>GEPA does not improve this bounded run</a:t>
             </a:r>
           </a:p>
         </p:txBody>
@@ -25644,7 +25644,7 @@
           <p:cNvPr id="16" name="Shape 13">
             <a:extLst xmlns:a="http://schemas.openxmlformats.org/drawingml/2006/main">
               <a:ext uri="{FF2B5EF4-FFF2-40B4-BE49-F238E27FC236}">
-                <a16:creationId xmlns:a16="http://schemas.microsoft.com/office/drawing/2014/main" id="{45919365-8A23-40BA-90FF-A3A06769FD79}"/>
+                <a16:creationId xmlns:a16="http://schemas.microsoft.com/office/drawing/2014/main" id="{0A0CAEA5-F3EA-4C87-A07A-754AEEC77580}"/>
               </a:ext>
             </a:extLst>
           </p:cNvPr>
@@ -25691,7 +25691,7 @@
           <p:cNvPr id="17" name="Shape 14">
             <a:extLst xmlns:a="http://schemas.openxmlformats.org/drawingml/2006/main">
               <a:ext uri="{FF2B5EF4-FFF2-40B4-BE49-F238E27FC236}">
-                <a16:creationId xmlns:a16="http://schemas.microsoft.com/office/drawing/2014/main" id="{F659E871-C94D-4668-997A-3D4B9FA15BA4}"/>
+                <a16:creationId xmlns:a16="http://schemas.microsoft.com/office/drawing/2014/main" id="{10826366-3EDC-49D4-92F3-BAA028DE12E6}"/>
               </a:ext>
             </a:extLst>
           </p:cNvPr>
@@ -25729,7 +25729,7 @@
           <p:cNvPr id="18" name="Text 15">
             <a:extLst xmlns:a="http://schemas.openxmlformats.org/drawingml/2006/main">
               <a:ext uri="{FF2B5EF4-FFF2-40B4-BE49-F238E27FC236}">
-                <a16:creationId xmlns:a16="http://schemas.microsoft.com/office/drawing/2014/main" id="{A9F713CC-C05B-48D4-96B6-7B53DA6D7D2B}"/>
+                <a16:creationId xmlns:a16="http://schemas.microsoft.com/office/drawing/2014/main" id="{6B64A2A5-B545-4F04-9C09-C4BDD37C16D8}"/>
               </a:ext>
             </a:extLst>
           </p:cNvPr>
@@ -25774,7 +25774,7 @@
           <p:cNvPr id="19" name="Text 16">
             <a:extLst xmlns:a="http://schemas.openxmlformats.org/drawingml/2006/main">
               <a:ext uri="{FF2B5EF4-FFF2-40B4-BE49-F238E27FC236}">
-                <a16:creationId xmlns:a16="http://schemas.microsoft.com/office/drawing/2014/main" id="{6E17F69B-B635-4939-ADBA-B720D73C9BE5}"/>
+                <a16:creationId xmlns:a16="http://schemas.microsoft.com/office/drawing/2014/main" id="{8A6D0A3C-501F-492B-85B8-03955758BD87}"/>
               </a:ext>
             </a:extLst>
           </p:cNvPr>
@@ -25809,7 +25809,7 @@
                 <a:ea typeface="Cambria"/>
                 <a:cs typeface="Cambria"/>
               </a:rPr>
-              <a:t>The remaining comparator…</a:t>
+              <a:t>What remains unresolved…</a:t>
             </a:r>
           </a:p>
         </p:txBody>
@@ -25819,7 +25819,7 @@
           <p:cNvPr id="20" name="Text 17">
             <a:extLst xmlns:a="http://schemas.openxmlformats.org/drawingml/2006/main">
               <a:ext uri="{FF2B5EF4-FFF2-40B4-BE49-F238E27FC236}">
-                <a16:creationId xmlns:a16="http://schemas.microsoft.com/office/drawing/2014/main" id="{31982221-3597-4D0B-9F7C-C8BECECB6F1C}"/>
+                <a16:creationId xmlns:a16="http://schemas.microsoft.com/office/drawing/2014/main" id="{19D43D54-D5E5-4D3F-856D-05576FE9B640}"/>
               </a:ext>
             </a:extLst>
           </p:cNvPr>
@@ -25860,7 +25860,7 @@
                 <a:ea typeface="Calibri"/>
                 <a:cs typeface="Calibri"/>
               </a:rPr>
-              <a:t>an equally pre-executed manual macro</a:t>
+              <a:t>manual engineering and review effort</a:t>
             </a:r>
           </a:p>
           <a:p xmlns:a="http://schemas.openxmlformats.org/drawingml/2006/main">
@@ -25882,7 +25882,7 @@
                 <a:ea typeface="Calibri"/>
                 <a:cs typeface="Calibri"/>
               </a:rPr>
-              <a:t>the same projection and continuation contract</a:t>
+              <a:t>AWO · Agent JIT · EvoC2F execution</a:t>
             </a:r>
           </a:p>
           <a:p xmlns:a="http://schemas.openxmlformats.org/drawingml/2006/main">
@@ -25904,7 +25904,7 @@
                 <a:ea typeface="Calibri"/>
                 <a:cs typeface="Calibri"/>
               </a:rPr>
-              <a:t>multiple workflow families and time-forward drift</a:t>
+              <a:t>multiple families and time-forward drift</a:t>
             </a:r>
           </a:p>
         </p:txBody>
@@ -25914,7 +25914,7 @@
           <p:cNvPr id="21" name="Shape 18">
             <a:extLst xmlns:a="http://schemas.openxmlformats.org/drawingml/2006/main">
               <a:ext uri="{FF2B5EF4-FFF2-40B4-BE49-F238E27FC236}">
-                <a16:creationId xmlns:a16="http://schemas.microsoft.com/office/drawing/2014/main" id="{E880A489-C288-416C-9E8F-31E6359A718C}"/>
+                <a16:creationId xmlns:a16="http://schemas.microsoft.com/office/drawing/2014/main" id="{D1CAD90D-4BAA-48E5-848D-CF938BC82624}"/>
               </a:ext>
             </a:extLst>
           </p:cNvPr>
@@ -25961,7 +25961,7 @@
           <p:cNvPr id="8" name="Text 19">
             <a:extLst xmlns:a="http://schemas.openxmlformats.org/drawingml/2006/main">
               <a:ext uri="{FF2B5EF4-FFF2-40B4-BE49-F238E27FC236}">
-                <a16:creationId xmlns:a16="http://schemas.microsoft.com/office/drawing/2014/main" id="{35760781-EBEF-49DC-A310-6D405351C009}"/>
+                <a16:creationId xmlns:a16="http://schemas.microsoft.com/office/drawing/2014/main" id="{397EDDF9-8949-423E-8C6D-B44EE325CA07}"/>
               </a:ext>
             </a:extLst>
           </p:cNvPr>
@@ -26006,7 +26006,7 @@
           <p:cNvPr id="23" name="Text 20">
             <a:extLst xmlns:a="http://schemas.openxmlformats.org/drawingml/2006/main">
               <a:ext uri="{FF2B5EF4-FFF2-40B4-BE49-F238E27FC236}">
-                <a16:creationId xmlns:a16="http://schemas.microsoft.com/office/drawing/2014/main" id="{B70A907A-FB6B-47D7-B5AB-DBEE00818BE0}"/>
+                <a16:creationId xmlns:a16="http://schemas.microsoft.com/office/drawing/2014/main" id="{F3E3A32F-34FD-4CC4-B926-63260528A308}"/>
               </a:ext>
             </a:extLst>
           </p:cNvPr>
@@ -26044,7 +26044,7 @@
                 <a:ea typeface="Calibri"/>
                 <a:cs typeface="Calibri"/>
               </a:rPr>
-              <a:t>Placement — not a new read algorithm — explains the measured advantage. The provider-visible macro spends one request selecting its composite and a second producing the answer; GCS verifies and executes before request one. Requests, tokens, observed latency, and estimated cost improve, while exact quality, interface count, and source reads tie. This post-study result covers one workflow family and does not show that GCS dominates an equally pre-executed manual program.</a:t>
+              <a:t>The fair manual program closes the earlier placement confound: GCS and manual execution tie on requests, interfaces, input tokens, and exact quality. Official GEPA 0.1.4 makes 14 real task evaluations and three reflections, but retains its seed. Its 59-request, 63,954-token optimization overhead is reported separately. This six-case result supports automatic guarded specialization—not runtime dominance or general GEPA failure.</a:t>
             </a:r>
           </a:p>
         </p:txBody>
@@ -26052,7 +26052,7 @@
     </p:spTree>
     <p:extLst>
       <p:ext uri="{BB962C8B-B14F-4D97-AF65-F5344CB8AC3E}">
-        <p14:creationId xmlns:p14="http://schemas.microsoft.com/office/powerpoint/2010/main" val="412111940"/>
+        <p14:creationId xmlns:p14="http://schemas.microsoft.com/office/powerpoint/2010/main" val="844497057"/>
       </p:ext>
     </p:extLst>
   </p:cSld>
@@ -26083,7 +26083,7 @@
           <p:cNvPr id="2" name="Text 0">
             <a:extLst xmlns:a="http://schemas.openxmlformats.org/drawingml/2006/main">
               <a:ext uri="{FF2B5EF4-FFF2-40B4-BE49-F238E27FC236}">
-                <a16:creationId xmlns:a16="http://schemas.microsoft.com/office/drawing/2014/main" id="{8565976D-82E6-4E87-81A7-1DB0D46920D1}"/>
+                <a16:creationId xmlns:a16="http://schemas.microsoft.com/office/drawing/2014/main" id="{CFAC31BA-C4E7-4BC7-86A1-20E2DC88B84E}"/>
               </a:ext>
             </a:extLst>
           </p:cNvPr>
@@ -26128,7 +26128,7 @@
           <p:cNvPr id="3" name="Text 1">
             <a:extLst xmlns:a="http://schemas.openxmlformats.org/drawingml/2006/main">
               <a:ext uri="{FF2B5EF4-FFF2-40B4-BE49-F238E27FC236}">
-                <a16:creationId xmlns:a16="http://schemas.microsoft.com/office/drawing/2014/main" id="{51351C39-21B6-4904-81A0-5B5E450370AC}"/>
+                <a16:creationId xmlns:a16="http://schemas.microsoft.com/office/drawing/2014/main" id="{E1D3EDC2-6530-46EE-B2B7-6A4A7E811777}"/>
               </a:ext>
             </a:extLst>
           </p:cNvPr>
@@ -26173,7 +26173,7 @@
           <p:cNvPr id="4" name="Text 2">
             <a:extLst xmlns:a="http://schemas.openxmlformats.org/drawingml/2006/main">
               <a:ext uri="{FF2B5EF4-FFF2-40B4-BE49-F238E27FC236}">
-                <a16:creationId xmlns:a16="http://schemas.microsoft.com/office/drawing/2014/main" id="{EEEF7A55-210A-478A-8D9C-ABA25B389943}"/>
+                <a16:creationId xmlns:a16="http://schemas.microsoft.com/office/drawing/2014/main" id="{1531DAD6-DC62-4538-B79C-9BCD662957D4}"/>
               </a:ext>
             </a:extLst>
           </p:cNvPr>
@@ -26218,7 +26218,7 @@
           <p:cNvPr id="5" name="Text 3">
             <a:extLst xmlns:a="http://schemas.openxmlformats.org/drawingml/2006/main">
               <a:ext uri="{FF2B5EF4-FFF2-40B4-BE49-F238E27FC236}">
-                <a16:creationId xmlns:a16="http://schemas.microsoft.com/office/drawing/2014/main" id="{DBB3E887-73C5-426E-B840-4E3F1417DB76}"/>
+                <a16:creationId xmlns:a16="http://schemas.microsoft.com/office/drawing/2014/main" id="{0455377C-2248-4E09-B97E-077CB32D6274}"/>
               </a:ext>
             </a:extLst>
           </p:cNvPr>
@@ -26263,7 +26263,7 @@
           <p:cNvPr id="6" name="Shape 4">
             <a:extLst xmlns:a="http://schemas.openxmlformats.org/drawingml/2006/main">
               <a:ext uri="{FF2B5EF4-FFF2-40B4-BE49-F238E27FC236}">
-                <a16:creationId xmlns:a16="http://schemas.microsoft.com/office/drawing/2014/main" id="{555477A0-13D1-4EDD-A644-5B3C88F36B86}"/>
+                <a16:creationId xmlns:a16="http://schemas.microsoft.com/office/drawing/2014/main" id="{662B5727-0699-4001-A728-F731C11CCEC7}"/>
               </a:ext>
             </a:extLst>
           </p:cNvPr>
@@ -26307,7 +26307,7 @@
           <p:nvPr/>
         </p:nvPicPr>
         <p:blipFill>
-          <a:blip xmlns:r="http://schemas.openxmlformats.org/officeDocument/2006/relationships" xmlns:a="http://schemas.openxmlformats.org/drawingml/2006/main" r:embed="R651c17727cd74d91"/>
+          <a:blip xmlns:r="http://schemas.openxmlformats.org/officeDocument/2006/relationships" xmlns:a="http://schemas.openxmlformats.org/drawingml/2006/main" r:embed="R0f8ff7bc1d7a4626"/>
           <a:stretch xmlns:a="http://schemas.openxmlformats.org/drawingml/2006/main">
             <a:fillRect l="0" t="0" r="0" b="0"/>
           </a:stretch>
@@ -26327,7 +26327,7 @@
           <p:cNvPr id="8" name="Text 5">
             <a:extLst xmlns:a="http://schemas.openxmlformats.org/drawingml/2006/main">
               <a:ext uri="{FF2B5EF4-FFF2-40B4-BE49-F238E27FC236}">
-                <a16:creationId xmlns:a16="http://schemas.microsoft.com/office/drawing/2014/main" id="{70506DB0-E1D4-4809-BA9E-21A2F23EA4CD}"/>
+                <a16:creationId xmlns:a16="http://schemas.microsoft.com/office/drawing/2014/main" id="{93533594-B625-4D33-9300-F272E1FE2A00}"/>
               </a:ext>
             </a:extLst>
           </p:cNvPr>
@@ -26375,7 +26375,7 @@
           <p:cNvPr id="9" name="Text 6">
             <a:extLst xmlns:a="http://schemas.openxmlformats.org/drawingml/2006/main">
               <a:ext uri="{FF2B5EF4-FFF2-40B4-BE49-F238E27FC236}">
-                <a16:creationId xmlns:a16="http://schemas.microsoft.com/office/drawing/2014/main" id="{2C00DF73-9505-4351-AD84-86D4EE8075A5}"/>
+                <a16:creationId xmlns:a16="http://schemas.microsoft.com/office/drawing/2014/main" id="{5400AD1E-94BE-42D6-BBDC-4E6D9B3A786C}"/>
               </a:ext>
             </a:extLst>
           </p:cNvPr>
@@ -26420,7 +26420,7 @@
           <p:cNvPr id="10" name="Shape 7">
             <a:extLst xmlns:a="http://schemas.openxmlformats.org/drawingml/2006/main">
               <a:ext uri="{FF2B5EF4-FFF2-40B4-BE49-F238E27FC236}">
-                <a16:creationId xmlns:a16="http://schemas.microsoft.com/office/drawing/2014/main" id="{D7A23CF1-CFAF-4A83-BBB7-4E051B76C4AD}"/>
+                <a16:creationId xmlns:a16="http://schemas.microsoft.com/office/drawing/2014/main" id="{29C8C421-9C4B-456D-AA61-4E50DB3EE4B1}"/>
               </a:ext>
             </a:extLst>
           </p:cNvPr>
@@ -26464,7 +26464,7 @@
           <p:nvPr/>
         </p:nvPicPr>
         <p:blipFill>
-          <a:blip xmlns:r="http://schemas.openxmlformats.org/officeDocument/2006/relationships" xmlns:a="http://schemas.openxmlformats.org/drawingml/2006/main" r:embed="Rf677407c43b34352"/>
+          <a:blip xmlns:r="http://schemas.openxmlformats.org/officeDocument/2006/relationships" xmlns:a="http://schemas.openxmlformats.org/drawingml/2006/main" r:embed="R7e0e441444684789"/>
           <a:stretch xmlns:a="http://schemas.openxmlformats.org/drawingml/2006/main">
             <a:fillRect l="0" t="0" r="0" b="0"/>
           </a:stretch>
@@ -26484,7 +26484,7 @@
           <p:cNvPr id="12" name="Text 8">
             <a:extLst xmlns:a="http://schemas.openxmlformats.org/drawingml/2006/main">
               <a:ext uri="{FF2B5EF4-FFF2-40B4-BE49-F238E27FC236}">
-                <a16:creationId xmlns:a16="http://schemas.microsoft.com/office/drawing/2014/main" id="{77166BA6-EFCE-4B1C-8B46-EFD49C3BECB3}"/>
+                <a16:creationId xmlns:a16="http://schemas.microsoft.com/office/drawing/2014/main" id="{01F3B356-2484-44AD-900D-341F524EBC8D}"/>
               </a:ext>
             </a:extLst>
           </p:cNvPr>
@@ -26532,7 +26532,7 @@
           <p:cNvPr id="13" name="Text 9">
             <a:extLst xmlns:a="http://schemas.openxmlformats.org/drawingml/2006/main">
               <a:ext uri="{FF2B5EF4-FFF2-40B4-BE49-F238E27FC236}">
-                <a16:creationId xmlns:a16="http://schemas.microsoft.com/office/drawing/2014/main" id="{3D239B83-52CB-40DF-947B-F1E7CBE858F4}"/>
+                <a16:creationId xmlns:a16="http://schemas.microsoft.com/office/drawing/2014/main" id="{0D29A411-0493-4B7E-A7F7-61D20C04FD72}"/>
               </a:ext>
             </a:extLst>
           </p:cNvPr>
@@ -26584,7 +26584,7 @@
         </p:xfrm>
         <a:graphic xmlns:a="http://schemas.openxmlformats.org/drawingml/2006/main">
           <a:graphicData uri="http://schemas.openxmlformats.org/drawingml/2006/chart">
-            <c:chart xmlns:r="http://schemas.openxmlformats.org/officeDocument/2006/relationships" xmlns:c="http://schemas.openxmlformats.org/drawingml/2006/chart" r:id="Rd76e38fd667740d4"/>
+            <c:chart xmlns:r="http://schemas.openxmlformats.org/officeDocument/2006/relationships" xmlns:c="http://schemas.openxmlformats.org/drawingml/2006/chart" r:id="R893ce95251be483a"/>
           </a:graphicData>
         </a:graphic>
       </p:graphicFrame>
@@ -26593,7 +26593,7 @@
           <p:cNvPr id="15" name="Text 10">
             <a:extLst xmlns:a="http://schemas.openxmlformats.org/drawingml/2006/main">
               <a:ext uri="{FF2B5EF4-FFF2-40B4-BE49-F238E27FC236}">
-                <a16:creationId xmlns:a16="http://schemas.microsoft.com/office/drawing/2014/main" id="{364162D8-FCBC-4019-A406-9F53325B8889}"/>
+                <a16:creationId xmlns:a16="http://schemas.microsoft.com/office/drawing/2014/main" id="{591264BB-9576-42D2-B2A8-E4C7D55C9F57}"/>
               </a:ext>
             </a:extLst>
           </p:cNvPr>
@@ -26641,7 +26641,7 @@
           <p:cNvPr id="16" name="Shape 11">
             <a:extLst xmlns:a="http://schemas.openxmlformats.org/drawingml/2006/main">
               <a:ext uri="{FF2B5EF4-FFF2-40B4-BE49-F238E27FC236}">
-                <a16:creationId xmlns:a16="http://schemas.microsoft.com/office/drawing/2014/main" id="{96EE861C-E6C8-4018-8A5B-7C1862D476BA}"/>
+                <a16:creationId xmlns:a16="http://schemas.microsoft.com/office/drawing/2014/main" id="{A89C9C41-2212-42B2-A1E4-EAF99A8F5E94}"/>
               </a:ext>
             </a:extLst>
           </p:cNvPr>
@@ -26688,7 +26688,7 @@
           <p:cNvPr id="17" name="Text 12">
             <a:extLst xmlns:a="http://schemas.openxmlformats.org/drawingml/2006/main">
               <a:ext uri="{FF2B5EF4-FFF2-40B4-BE49-F238E27FC236}">
-                <a16:creationId xmlns:a16="http://schemas.microsoft.com/office/drawing/2014/main" id="{2E43B973-E591-4AB4-AA4D-87C0A5FDD1FB}"/>
+                <a16:creationId xmlns:a16="http://schemas.microsoft.com/office/drawing/2014/main" id="{38A48DDA-55D9-482C-AE46-35FAD2E5EFAB}"/>
               </a:ext>
             </a:extLst>
           </p:cNvPr>
@@ -26736,7 +26736,7 @@
           <p:cNvPr id="18" name="Text 13">
             <a:extLst xmlns:a="http://schemas.openxmlformats.org/drawingml/2006/main">
               <a:ext uri="{FF2B5EF4-FFF2-40B4-BE49-F238E27FC236}">
-                <a16:creationId xmlns:a16="http://schemas.microsoft.com/office/drawing/2014/main" id="{8CA6E618-4F59-4E70-9163-0D114624816B}"/>
+                <a16:creationId xmlns:a16="http://schemas.microsoft.com/office/drawing/2014/main" id="{6B0BCE55-636A-47DD-BE3D-04324AAE6A05}"/>
               </a:ext>
             </a:extLst>
           </p:cNvPr>
@@ -26781,7 +26781,7 @@
           <p:cNvPr id="19" name="Text 14">
             <a:extLst xmlns:a="http://schemas.openxmlformats.org/drawingml/2006/main">
               <a:ext uri="{FF2B5EF4-FFF2-40B4-BE49-F238E27FC236}">
-                <a16:creationId xmlns:a16="http://schemas.microsoft.com/office/drawing/2014/main" id="{71AB1023-E46D-4D50-A949-133491038638}"/>
+                <a16:creationId xmlns:a16="http://schemas.microsoft.com/office/drawing/2014/main" id="{FC4A2958-C93A-4BB0-8F72-C7EB2CA71581}"/>
               </a:ext>
             </a:extLst>
           </p:cNvPr>
@@ -26826,7 +26826,7 @@
           <p:cNvPr id="20" name="Text 15">
             <a:extLst xmlns:a="http://schemas.openxmlformats.org/drawingml/2006/main">
               <a:ext uri="{FF2B5EF4-FFF2-40B4-BE49-F238E27FC236}">
-                <a16:creationId xmlns:a16="http://schemas.microsoft.com/office/drawing/2014/main" id="{3A3F42BA-1913-49B0-ADCD-77DD9E655EC2}"/>
+                <a16:creationId xmlns:a16="http://schemas.microsoft.com/office/drawing/2014/main" id="{82468E19-429F-42D6-A634-8A8615FF0E8A}"/>
               </a:ext>
             </a:extLst>
           </p:cNvPr>
@@ -26871,7 +26871,7 @@
           <p:cNvPr id="21" name="Text 16">
             <a:extLst xmlns:a="http://schemas.openxmlformats.org/drawingml/2006/main">
               <a:ext uri="{FF2B5EF4-FFF2-40B4-BE49-F238E27FC236}">
-                <a16:creationId xmlns:a16="http://schemas.microsoft.com/office/drawing/2014/main" id="{49D295CB-37DC-4B3D-92AF-D10FF80AD8E7}"/>
+                <a16:creationId xmlns:a16="http://schemas.microsoft.com/office/drawing/2014/main" id="{EE73DF0A-73AF-40FE-A491-9E9D15A4E12A}"/>
               </a:ext>
             </a:extLst>
           </p:cNvPr>
@@ -26916,7 +26916,7 @@
           <p:cNvPr id="22" name="Text 17">
             <a:extLst xmlns:a="http://schemas.openxmlformats.org/drawingml/2006/main">
               <a:ext uri="{FF2B5EF4-FFF2-40B4-BE49-F238E27FC236}">
-                <a16:creationId xmlns:a16="http://schemas.microsoft.com/office/drawing/2014/main" id="{E70C3559-F934-4C97-A06F-DDA031BFECC4}"/>
+                <a16:creationId xmlns:a16="http://schemas.microsoft.com/office/drawing/2014/main" id="{49005AB0-A585-428E-B287-DB626CE133F1}"/>
               </a:ext>
             </a:extLst>
           </p:cNvPr>
@@ -26961,7 +26961,7 @@
           <p:cNvPr id="23" name="Text 18">
             <a:extLst xmlns:a="http://schemas.openxmlformats.org/drawingml/2006/main">
               <a:ext uri="{FF2B5EF4-FFF2-40B4-BE49-F238E27FC236}">
-                <a16:creationId xmlns:a16="http://schemas.microsoft.com/office/drawing/2014/main" id="{17196CA5-AAFD-4889-9A08-7B9E9D0934FA}"/>
+                <a16:creationId xmlns:a16="http://schemas.microsoft.com/office/drawing/2014/main" id="{EA95BD81-1047-4F1E-A8B9-89AC9325D287}"/>
               </a:ext>
             </a:extLst>
           </p:cNvPr>
@@ -27006,7 +27006,7 @@
           <p:cNvPr id="24" name="Text 19">
             <a:extLst xmlns:a="http://schemas.openxmlformats.org/drawingml/2006/main">
               <a:ext uri="{FF2B5EF4-FFF2-40B4-BE49-F238E27FC236}">
-                <a16:creationId xmlns:a16="http://schemas.microsoft.com/office/drawing/2014/main" id="{8839BE52-29B7-4B95-996E-B0E71BAC850F}"/>
+                <a16:creationId xmlns:a16="http://schemas.microsoft.com/office/drawing/2014/main" id="{C836C142-AA35-4E13-8657-2A8C33028439}"/>
               </a:ext>
             </a:extLst>
           </p:cNvPr>
@@ -27051,7 +27051,7 @@
           <p:cNvPr id="25" name="Text 20">
             <a:extLst xmlns:a="http://schemas.openxmlformats.org/drawingml/2006/main">
               <a:ext uri="{FF2B5EF4-FFF2-40B4-BE49-F238E27FC236}">
-                <a16:creationId xmlns:a16="http://schemas.microsoft.com/office/drawing/2014/main" id="{CEF38940-D82A-4D0F-905B-81B5D76AB523}"/>
+                <a16:creationId xmlns:a16="http://schemas.microsoft.com/office/drawing/2014/main" id="{8474C340-1578-47D3-BCDF-AC4B0351E5B3}"/>
               </a:ext>
             </a:extLst>
           </p:cNvPr>
@@ -27096,7 +27096,7 @@
           <p:cNvPr id="26" name="Text 21">
             <a:extLst xmlns:a="http://schemas.openxmlformats.org/drawingml/2006/main">
               <a:ext uri="{FF2B5EF4-FFF2-40B4-BE49-F238E27FC236}">
-                <a16:creationId xmlns:a16="http://schemas.microsoft.com/office/drawing/2014/main" id="{D09C1EA5-A2C9-4E93-BDC1-42DC6503B12A}"/>
+                <a16:creationId xmlns:a16="http://schemas.microsoft.com/office/drawing/2014/main" id="{FB77617B-5BEE-472C-ACF4-C85B1727D68D}"/>
               </a:ext>
             </a:extLst>
           </p:cNvPr>
@@ -27141,7 +27141,7 @@
           <p:cNvPr id="27" name="Text 22">
             <a:extLst xmlns:a="http://schemas.openxmlformats.org/drawingml/2006/main">
               <a:ext uri="{FF2B5EF4-FFF2-40B4-BE49-F238E27FC236}">
-                <a16:creationId xmlns:a16="http://schemas.microsoft.com/office/drawing/2014/main" id="{9F848F72-41D1-4440-BBCB-B6143822EBB9}"/>
+                <a16:creationId xmlns:a16="http://schemas.microsoft.com/office/drawing/2014/main" id="{56512A13-1921-4BD0-8525-D786E01AACB4}"/>
               </a:ext>
             </a:extLst>
           </p:cNvPr>
@@ -27186,7 +27186,7 @@
           <p:cNvPr id="28" name="Text 23">
             <a:extLst xmlns:a="http://schemas.openxmlformats.org/drawingml/2006/main">
               <a:ext uri="{FF2B5EF4-FFF2-40B4-BE49-F238E27FC236}">
-                <a16:creationId xmlns:a16="http://schemas.microsoft.com/office/drawing/2014/main" id="{4A15D8CA-618D-4467-BE56-0DF5BE49D95A}"/>
+                <a16:creationId xmlns:a16="http://schemas.microsoft.com/office/drawing/2014/main" id="{719FD193-4042-4CCB-9343-F6369D79C813}"/>
               </a:ext>
             </a:extLst>
           </p:cNvPr>
@@ -27231,7 +27231,7 @@
           <p:cNvPr id="29" name="Text 24">
             <a:extLst xmlns:a="http://schemas.openxmlformats.org/drawingml/2006/main">
               <a:ext uri="{FF2B5EF4-FFF2-40B4-BE49-F238E27FC236}">
-                <a16:creationId xmlns:a16="http://schemas.microsoft.com/office/drawing/2014/main" id="{6284358A-0224-40BA-8CE1-9D1743A6EFC2}"/>
+                <a16:creationId xmlns:a16="http://schemas.microsoft.com/office/drawing/2014/main" id="{8FEE1972-F3C1-44D2-A296-73BBE8AFAAF2}"/>
               </a:ext>
             </a:extLst>
           </p:cNvPr>
@@ -27276,7 +27276,7 @@
           <p:cNvPr id="30" name="Shape 25">
             <a:extLst xmlns:a="http://schemas.openxmlformats.org/drawingml/2006/main">
               <a:ext uri="{FF2B5EF4-FFF2-40B4-BE49-F238E27FC236}">
-                <a16:creationId xmlns:a16="http://schemas.microsoft.com/office/drawing/2014/main" id="{C98BB5CC-74FB-41CE-BD6C-7C2856C2BD37}"/>
+                <a16:creationId xmlns:a16="http://schemas.microsoft.com/office/drawing/2014/main" id="{89CC3003-E956-48DD-9E90-0650C19DAB60}"/>
               </a:ext>
             </a:extLst>
           </p:cNvPr>
@@ -27323,7 +27323,7 @@
           <p:cNvPr id="31" name="Text 26">
             <a:extLst xmlns:a="http://schemas.openxmlformats.org/drawingml/2006/main">
               <a:ext uri="{FF2B5EF4-FFF2-40B4-BE49-F238E27FC236}">
-                <a16:creationId xmlns:a16="http://schemas.microsoft.com/office/drawing/2014/main" id="{AE4E21FC-01F3-4011-95F2-CFC00C03BB77}"/>
+                <a16:creationId xmlns:a16="http://schemas.microsoft.com/office/drawing/2014/main" id="{56902917-04D0-4937-841A-393FD82429DA}"/>
               </a:ext>
             </a:extLst>
           </p:cNvPr>
@@ -27368,7 +27368,7 @@
           <p:cNvPr id="32" name="Text 27">
             <a:extLst xmlns:a="http://schemas.openxmlformats.org/drawingml/2006/main">
               <a:ext uri="{FF2B5EF4-FFF2-40B4-BE49-F238E27FC236}">
-                <a16:creationId xmlns:a16="http://schemas.microsoft.com/office/drawing/2014/main" id="{CB4F9EB6-8D2C-4F83-8173-BAD917B69D63}"/>
+                <a16:creationId xmlns:a16="http://schemas.microsoft.com/office/drawing/2014/main" id="{2FAC526D-1E7E-4594-8FBD-70F265E66C58}"/>
               </a:ext>
             </a:extLst>
           </p:cNvPr>
@@ -27414,7 +27414,7 @@
     </p:spTree>
     <p:extLst>
       <p:ext uri="{BB962C8B-B14F-4D97-AF65-F5344CB8AC3E}">
-        <p14:creationId xmlns:p14="http://schemas.microsoft.com/office/powerpoint/2010/main" val="1936470321"/>
+        <p14:creationId xmlns:p14="http://schemas.microsoft.com/office/powerpoint/2010/main" val="1325609746"/>
       </p:ext>
     </p:extLst>
   </p:cSld>
@@ -27445,7 +27445,7 @@
           <p:cNvPr id="2" name="Text 0">
             <a:extLst xmlns:a="http://schemas.openxmlformats.org/drawingml/2006/main">
               <a:ext uri="{FF2B5EF4-FFF2-40B4-BE49-F238E27FC236}">
-                <a16:creationId xmlns:a16="http://schemas.microsoft.com/office/drawing/2014/main" id="{76DAEAF8-DC22-4304-AD6B-CC7D4190C8BA}"/>
+                <a16:creationId xmlns:a16="http://schemas.microsoft.com/office/drawing/2014/main" id="{99273DE4-E637-4BE2-A069-7F746FD0E1F1}"/>
               </a:ext>
             </a:extLst>
           </p:cNvPr>
@@ -27490,7 +27490,7 @@
           <p:cNvPr id="3" name="Text 1">
             <a:extLst xmlns:a="http://schemas.openxmlformats.org/drawingml/2006/main">
               <a:ext uri="{FF2B5EF4-FFF2-40B4-BE49-F238E27FC236}">
-                <a16:creationId xmlns:a16="http://schemas.microsoft.com/office/drawing/2014/main" id="{1A8441F9-B24B-49AC-9D97-07E067BE5C37}"/>
+                <a16:creationId xmlns:a16="http://schemas.microsoft.com/office/drawing/2014/main" id="{D1F79227-E67B-4900-9838-FE869FB88325}"/>
               </a:ext>
             </a:extLst>
           </p:cNvPr>
@@ -27535,7 +27535,7 @@
           <p:cNvPr id="4" name="Text 2">
             <a:extLst xmlns:a="http://schemas.openxmlformats.org/drawingml/2006/main">
               <a:ext uri="{FF2B5EF4-FFF2-40B4-BE49-F238E27FC236}">
-                <a16:creationId xmlns:a16="http://schemas.microsoft.com/office/drawing/2014/main" id="{09F445A2-CCA1-418B-840C-C09C15DD611E}"/>
+                <a16:creationId xmlns:a16="http://schemas.microsoft.com/office/drawing/2014/main" id="{1ADC31EA-8771-4520-9164-4BB95A0A721C}"/>
               </a:ext>
             </a:extLst>
           </p:cNvPr>
@@ -27580,7 +27580,7 @@
           <p:cNvPr id="5" name="Text 3">
             <a:extLst xmlns:a="http://schemas.openxmlformats.org/drawingml/2006/main">
               <a:ext uri="{FF2B5EF4-FFF2-40B4-BE49-F238E27FC236}">
-                <a16:creationId xmlns:a16="http://schemas.microsoft.com/office/drawing/2014/main" id="{E98438C3-AA5F-4106-83AE-C620CC5CB43A}"/>
+                <a16:creationId xmlns:a16="http://schemas.microsoft.com/office/drawing/2014/main" id="{664A3028-6298-44F4-A152-245EF935CAC5}"/>
               </a:ext>
             </a:extLst>
           </p:cNvPr>
@@ -27625,7 +27625,7 @@
           <p:cNvPr id="6" name="Shape 4">
             <a:extLst xmlns:a="http://schemas.openxmlformats.org/drawingml/2006/main">
               <a:ext uri="{FF2B5EF4-FFF2-40B4-BE49-F238E27FC236}">
-                <a16:creationId xmlns:a16="http://schemas.microsoft.com/office/drawing/2014/main" id="{C7717A9B-EEAA-460B-9578-C75CDA7DA25A}"/>
+                <a16:creationId xmlns:a16="http://schemas.microsoft.com/office/drawing/2014/main" id="{BF75A2B7-5188-4BFC-9D39-AA6431586856}"/>
               </a:ext>
             </a:extLst>
           </p:cNvPr>
@@ -27672,7 +27672,7 @@
           <p:cNvPr id="7" name="Shape 5">
             <a:extLst xmlns:a="http://schemas.openxmlformats.org/drawingml/2006/main">
               <a:ext uri="{FF2B5EF4-FFF2-40B4-BE49-F238E27FC236}">
-                <a16:creationId xmlns:a16="http://schemas.microsoft.com/office/drawing/2014/main" id="{179E66F0-BC08-400A-9320-D992A0A2145E}"/>
+                <a16:creationId xmlns:a16="http://schemas.microsoft.com/office/drawing/2014/main" id="{30E22D51-4983-4931-8DDB-A5E25B5A3715}"/>
               </a:ext>
             </a:extLst>
           </p:cNvPr>
@@ -27710,7 +27710,7 @@
           <p:cNvPr id="8" name="Text 6">
             <a:extLst xmlns:a="http://schemas.openxmlformats.org/drawingml/2006/main">
               <a:ext uri="{FF2B5EF4-FFF2-40B4-BE49-F238E27FC236}">
-                <a16:creationId xmlns:a16="http://schemas.microsoft.com/office/drawing/2014/main" id="{DD262505-346C-430C-8738-42490F787487}"/>
+                <a16:creationId xmlns:a16="http://schemas.microsoft.com/office/drawing/2014/main" id="{358C581E-2FA0-4340-88A6-6FBEB3375763}"/>
               </a:ext>
             </a:extLst>
           </p:cNvPr>
@@ -27755,7 +27755,7 @@
           <p:cNvPr id="9" name="Text 7">
             <a:extLst xmlns:a="http://schemas.openxmlformats.org/drawingml/2006/main">
               <a:ext uri="{FF2B5EF4-FFF2-40B4-BE49-F238E27FC236}">
-                <a16:creationId xmlns:a16="http://schemas.microsoft.com/office/drawing/2014/main" id="{70AA5F6B-E2B7-4CA7-BD5D-DD9204BC9D73}"/>
+                <a16:creationId xmlns:a16="http://schemas.microsoft.com/office/drawing/2014/main" id="{A629D5A6-2AED-44BC-AC36-FFE339656430}"/>
               </a:ext>
             </a:extLst>
           </p:cNvPr>
@@ -27803,7 +27803,7 @@
           <p:cNvPr id="10" name="Text 8">
             <a:extLst xmlns:a="http://schemas.openxmlformats.org/drawingml/2006/main">
               <a:ext uri="{FF2B5EF4-FFF2-40B4-BE49-F238E27FC236}">
-                <a16:creationId xmlns:a16="http://schemas.microsoft.com/office/drawing/2014/main" id="{766343F1-FFAF-4183-B107-5293F385BED8}"/>
+                <a16:creationId xmlns:a16="http://schemas.microsoft.com/office/drawing/2014/main" id="{E07071C0-37D1-4838-B219-DCD2014E5A8A}"/>
               </a:ext>
             </a:extLst>
           </p:cNvPr>
@@ -27851,7 +27851,7 @@
           <p:cNvPr id="11" name="Shape 9">
             <a:extLst xmlns:a="http://schemas.openxmlformats.org/drawingml/2006/main">
               <a:ext uri="{FF2B5EF4-FFF2-40B4-BE49-F238E27FC236}">
-                <a16:creationId xmlns:a16="http://schemas.microsoft.com/office/drawing/2014/main" id="{19A04989-21DF-4566-8127-8F5B0E340E41}"/>
+                <a16:creationId xmlns:a16="http://schemas.microsoft.com/office/drawing/2014/main" id="{79E085D4-46B6-43FD-B486-AB3D17E73AEB}"/>
               </a:ext>
             </a:extLst>
           </p:cNvPr>
@@ -27898,7 +27898,7 @@
           <p:cNvPr id="12" name="Shape 10">
             <a:extLst xmlns:a="http://schemas.openxmlformats.org/drawingml/2006/main">
               <a:ext uri="{FF2B5EF4-FFF2-40B4-BE49-F238E27FC236}">
-                <a16:creationId xmlns:a16="http://schemas.microsoft.com/office/drawing/2014/main" id="{B37EB596-40B5-4C8C-A9A0-5CD702765A80}"/>
+                <a16:creationId xmlns:a16="http://schemas.microsoft.com/office/drawing/2014/main" id="{20CCAE95-D96C-4273-A92D-063BC962C9B2}"/>
               </a:ext>
             </a:extLst>
           </p:cNvPr>
@@ -27936,7 +27936,7 @@
           <p:cNvPr id="13" name="Text 11">
             <a:extLst xmlns:a="http://schemas.openxmlformats.org/drawingml/2006/main">
               <a:ext uri="{FF2B5EF4-FFF2-40B4-BE49-F238E27FC236}">
-                <a16:creationId xmlns:a16="http://schemas.microsoft.com/office/drawing/2014/main" id="{B72E0319-D360-4EFF-BC26-A65B8ABE32CE}"/>
+                <a16:creationId xmlns:a16="http://schemas.microsoft.com/office/drawing/2014/main" id="{180A51C8-10E8-4549-9907-F31D9D26BF38}"/>
               </a:ext>
             </a:extLst>
           </p:cNvPr>
@@ -27981,7 +27981,7 @@
           <p:cNvPr id="14" name="Text 12">
             <a:extLst xmlns:a="http://schemas.openxmlformats.org/drawingml/2006/main">
               <a:ext uri="{FF2B5EF4-FFF2-40B4-BE49-F238E27FC236}">
-                <a16:creationId xmlns:a16="http://schemas.microsoft.com/office/drawing/2014/main" id="{65686951-247F-4BA0-AE7C-2C5BB140517A}"/>
+                <a16:creationId xmlns:a16="http://schemas.microsoft.com/office/drawing/2014/main" id="{CC604327-84E9-44B7-87E8-0499315419D4}"/>
               </a:ext>
             </a:extLst>
           </p:cNvPr>
@@ -28029,7 +28029,7 @@
           <p:cNvPr id="15" name="Text 13">
             <a:extLst xmlns:a="http://schemas.openxmlformats.org/drawingml/2006/main">
               <a:ext uri="{FF2B5EF4-FFF2-40B4-BE49-F238E27FC236}">
-                <a16:creationId xmlns:a16="http://schemas.microsoft.com/office/drawing/2014/main" id="{6103C5EE-A2AE-4326-9CA1-ECD34E11F7D4}"/>
+                <a16:creationId xmlns:a16="http://schemas.microsoft.com/office/drawing/2014/main" id="{CBC845EB-1152-42F4-A65B-BF78B677C5CA}"/>
               </a:ext>
             </a:extLst>
           </p:cNvPr>
@@ -28077,7 +28077,7 @@
           <p:cNvPr id="16" name="Shape 14">
             <a:extLst xmlns:a="http://schemas.openxmlformats.org/drawingml/2006/main">
               <a:ext uri="{FF2B5EF4-FFF2-40B4-BE49-F238E27FC236}">
-                <a16:creationId xmlns:a16="http://schemas.microsoft.com/office/drawing/2014/main" id="{EBC6B18B-4ED7-4AD7-8874-C30C2FA96F81}"/>
+                <a16:creationId xmlns:a16="http://schemas.microsoft.com/office/drawing/2014/main" id="{C90B2251-FCB5-4AE9-B194-D1D8947A916D}"/>
               </a:ext>
             </a:extLst>
           </p:cNvPr>
@@ -28124,7 +28124,7 @@
           <p:cNvPr id="17" name="Shape 15">
             <a:extLst xmlns:a="http://schemas.openxmlformats.org/drawingml/2006/main">
               <a:ext uri="{FF2B5EF4-FFF2-40B4-BE49-F238E27FC236}">
-                <a16:creationId xmlns:a16="http://schemas.microsoft.com/office/drawing/2014/main" id="{6D559416-9678-4F45-9AFF-DB09917907F6}"/>
+                <a16:creationId xmlns:a16="http://schemas.microsoft.com/office/drawing/2014/main" id="{74D8CC12-A52E-4FA9-B2AF-7E8B3B6B2DA2}"/>
               </a:ext>
             </a:extLst>
           </p:cNvPr>
@@ -28162,7 +28162,7 @@
           <p:cNvPr id="18" name="Text 16">
             <a:extLst xmlns:a="http://schemas.openxmlformats.org/drawingml/2006/main">
               <a:ext uri="{FF2B5EF4-FFF2-40B4-BE49-F238E27FC236}">
-                <a16:creationId xmlns:a16="http://schemas.microsoft.com/office/drawing/2014/main" id="{064091F1-C9A7-4417-BF57-67DCE337029C}"/>
+                <a16:creationId xmlns:a16="http://schemas.microsoft.com/office/drawing/2014/main" id="{49F35B28-0BBA-4424-9D73-5C0E459B9635}"/>
               </a:ext>
             </a:extLst>
           </p:cNvPr>
@@ -28207,7 +28207,7 @@
           <p:cNvPr id="19" name="Text 17">
             <a:extLst xmlns:a="http://schemas.openxmlformats.org/drawingml/2006/main">
               <a:ext uri="{FF2B5EF4-FFF2-40B4-BE49-F238E27FC236}">
-                <a16:creationId xmlns:a16="http://schemas.microsoft.com/office/drawing/2014/main" id="{7D482056-9B72-4622-924E-7034A06180F0}"/>
+                <a16:creationId xmlns:a16="http://schemas.microsoft.com/office/drawing/2014/main" id="{E847DA57-683A-4EDE-8740-D5987552DD9E}"/>
               </a:ext>
             </a:extLst>
           </p:cNvPr>
@@ -28255,7 +28255,7 @@
           <p:cNvPr id="20" name="Text 18">
             <a:extLst xmlns:a="http://schemas.openxmlformats.org/drawingml/2006/main">
               <a:ext uri="{FF2B5EF4-FFF2-40B4-BE49-F238E27FC236}">
-                <a16:creationId xmlns:a16="http://schemas.microsoft.com/office/drawing/2014/main" id="{36B353FB-C94D-4EA5-8E43-86E3C57CD8DB}"/>
+                <a16:creationId xmlns:a16="http://schemas.microsoft.com/office/drawing/2014/main" id="{D5FB633B-AA63-4D42-8C01-CDEFBD86BD6A}"/>
               </a:ext>
             </a:extLst>
           </p:cNvPr>
@@ -28303,7 +28303,7 @@
           <p:cNvPr id="21" name="Shape 19">
             <a:extLst xmlns:a="http://schemas.openxmlformats.org/drawingml/2006/main">
               <a:ext uri="{FF2B5EF4-FFF2-40B4-BE49-F238E27FC236}">
-                <a16:creationId xmlns:a16="http://schemas.microsoft.com/office/drawing/2014/main" id="{E948E773-92C5-4C47-9C71-F9ED55221BC0}"/>
+                <a16:creationId xmlns:a16="http://schemas.microsoft.com/office/drawing/2014/main" id="{3F6FCB0B-B381-4E5A-9ED3-DE7EE3749006}"/>
               </a:ext>
             </a:extLst>
           </p:cNvPr>
@@ -28350,7 +28350,7 @@
           <p:cNvPr id="22" name="Shape 20">
             <a:extLst xmlns:a="http://schemas.openxmlformats.org/drawingml/2006/main">
               <a:ext uri="{FF2B5EF4-FFF2-40B4-BE49-F238E27FC236}">
-                <a16:creationId xmlns:a16="http://schemas.microsoft.com/office/drawing/2014/main" id="{3B483912-BC5E-4F27-8AB2-34B4DCA04A32}"/>
+                <a16:creationId xmlns:a16="http://schemas.microsoft.com/office/drawing/2014/main" id="{2BEFFACF-3649-4A04-B13B-AFE157ABC3A6}"/>
               </a:ext>
             </a:extLst>
           </p:cNvPr>
@@ -28388,7 +28388,7 @@
           <p:cNvPr id="23" name="Text 21">
             <a:extLst xmlns:a="http://schemas.openxmlformats.org/drawingml/2006/main">
               <a:ext uri="{FF2B5EF4-FFF2-40B4-BE49-F238E27FC236}">
-                <a16:creationId xmlns:a16="http://schemas.microsoft.com/office/drawing/2014/main" id="{CF871081-BB7A-4DA3-AB80-26A556A038D7}"/>
+                <a16:creationId xmlns:a16="http://schemas.microsoft.com/office/drawing/2014/main" id="{A4EC5187-6C23-4110-8100-12019C5AF19C}"/>
               </a:ext>
             </a:extLst>
           </p:cNvPr>
@@ -28433,7 +28433,7 @@
           <p:cNvPr id="24" name="Text 22">
             <a:extLst xmlns:a="http://schemas.openxmlformats.org/drawingml/2006/main">
               <a:ext uri="{FF2B5EF4-FFF2-40B4-BE49-F238E27FC236}">
-                <a16:creationId xmlns:a16="http://schemas.microsoft.com/office/drawing/2014/main" id="{6D4F54C9-7ECE-4C03-8F19-FAF9247AE338}"/>
+                <a16:creationId xmlns:a16="http://schemas.microsoft.com/office/drawing/2014/main" id="{20C3A9AC-70A2-4184-9240-4851F371C0A7}"/>
               </a:ext>
             </a:extLst>
           </p:cNvPr>
@@ -28481,7 +28481,7 @@
           <p:cNvPr id="25" name="Text 23">
             <a:extLst xmlns:a="http://schemas.openxmlformats.org/drawingml/2006/main">
               <a:ext uri="{FF2B5EF4-FFF2-40B4-BE49-F238E27FC236}">
-                <a16:creationId xmlns:a16="http://schemas.microsoft.com/office/drawing/2014/main" id="{1F3A88B4-61C4-41A8-BDA0-36CEBD8D3A24}"/>
+                <a16:creationId xmlns:a16="http://schemas.microsoft.com/office/drawing/2014/main" id="{18047BDA-17CE-411E-8B44-4A90C8FC9F52}"/>
               </a:ext>
             </a:extLst>
           </p:cNvPr>
@@ -28529,7 +28529,7 @@
           <p:cNvPr id="26" name="Shape 24">
             <a:extLst xmlns:a="http://schemas.openxmlformats.org/drawingml/2006/main">
               <a:ext uri="{FF2B5EF4-FFF2-40B4-BE49-F238E27FC236}">
-                <a16:creationId xmlns:a16="http://schemas.microsoft.com/office/drawing/2014/main" id="{4AEB1B13-BCB1-442D-B6D7-397BBF478656}"/>
+                <a16:creationId xmlns:a16="http://schemas.microsoft.com/office/drawing/2014/main" id="{B2E21380-B788-4A6A-8547-FD8D9643F6CC}"/>
               </a:ext>
             </a:extLst>
           </p:cNvPr>
@@ -28576,7 +28576,7 @@
           <p:cNvPr id="27" name="Shape 25">
             <a:extLst xmlns:a="http://schemas.openxmlformats.org/drawingml/2006/main">
               <a:ext uri="{FF2B5EF4-FFF2-40B4-BE49-F238E27FC236}">
-                <a16:creationId xmlns:a16="http://schemas.microsoft.com/office/drawing/2014/main" id="{882E6449-3F7D-425F-AF47-622B78800FE6}"/>
+                <a16:creationId xmlns:a16="http://schemas.microsoft.com/office/drawing/2014/main" id="{6097098C-8376-4651-B812-00CFE53C08E3}"/>
               </a:ext>
             </a:extLst>
           </p:cNvPr>
@@ -28614,7 +28614,7 @@
           <p:cNvPr id="28" name="Text 26">
             <a:extLst xmlns:a="http://schemas.openxmlformats.org/drawingml/2006/main">
               <a:ext uri="{FF2B5EF4-FFF2-40B4-BE49-F238E27FC236}">
-                <a16:creationId xmlns:a16="http://schemas.microsoft.com/office/drawing/2014/main" id="{D01F3A33-5BE3-4C9F-89E2-358271CFA779}"/>
+                <a16:creationId xmlns:a16="http://schemas.microsoft.com/office/drawing/2014/main" id="{93127630-C04C-408D-BF26-3F1D50BB2724}"/>
               </a:ext>
             </a:extLst>
           </p:cNvPr>
@@ -28659,7 +28659,7 @@
           <p:cNvPr id="29" name="Text 27">
             <a:extLst xmlns:a="http://schemas.openxmlformats.org/drawingml/2006/main">
               <a:ext uri="{FF2B5EF4-FFF2-40B4-BE49-F238E27FC236}">
-                <a16:creationId xmlns:a16="http://schemas.microsoft.com/office/drawing/2014/main" id="{31DCE33F-83BD-4A6A-8DA0-08EDCE29621E}"/>
+                <a16:creationId xmlns:a16="http://schemas.microsoft.com/office/drawing/2014/main" id="{F336A581-AD3D-4020-BB97-906F396EB6ED}"/>
               </a:ext>
             </a:extLst>
           </p:cNvPr>
@@ -28707,7 +28707,7 @@
           <p:cNvPr id="30" name="Text 28">
             <a:extLst xmlns:a="http://schemas.openxmlformats.org/drawingml/2006/main">
               <a:ext uri="{FF2B5EF4-FFF2-40B4-BE49-F238E27FC236}">
-                <a16:creationId xmlns:a16="http://schemas.microsoft.com/office/drawing/2014/main" id="{B2DB98D2-C671-4320-877D-520148675642}"/>
+                <a16:creationId xmlns:a16="http://schemas.microsoft.com/office/drawing/2014/main" id="{7F26DC49-7DF8-47CC-9E25-592EBACA0FD0}"/>
               </a:ext>
             </a:extLst>
           </p:cNvPr>
@@ -28755,7 +28755,7 @@
           <p:cNvPr id="31" name="Shape 29">
             <a:extLst xmlns:a="http://schemas.openxmlformats.org/drawingml/2006/main">
               <a:ext uri="{FF2B5EF4-FFF2-40B4-BE49-F238E27FC236}">
-                <a16:creationId xmlns:a16="http://schemas.microsoft.com/office/drawing/2014/main" id="{6F5CDD6C-56BE-42DE-8B27-DCB29A986F6B}"/>
+                <a16:creationId xmlns:a16="http://schemas.microsoft.com/office/drawing/2014/main" id="{BF285F8C-9543-4137-85EF-350EB7A0569B}"/>
               </a:ext>
             </a:extLst>
           </p:cNvPr>
@@ -28802,7 +28802,7 @@
           <p:cNvPr id="32" name="Shape 30">
             <a:extLst xmlns:a="http://schemas.openxmlformats.org/drawingml/2006/main">
               <a:ext uri="{FF2B5EF4-FFF2-40B4-BE49-F238E27FC236}">
-                <a16:creationId xmlns:a16="http://schemas.microsoft.com/office/drawing/2014/main" id="{A058315B-121C-4CD0-A789-E1183207C300}"/>
+                <a16:creationId xmlns:a16="http://schemas.microsoft.com/office/drawing/2014/main" id="{AD0F1693-B393-4B5D-91FF-A4D163F36D5F}"/>
               </a:ext>
             </a:extLst>
           </p:cNvPr>
@@ -28840,7 +28840,7 @@
           <p:cNvPr id="33" name="Text 31">
             <a:extLst xmlns:a="http://schemas.openxmlformats.org/drawingml/2006/main">
               <a:ext uri="{FF2B5EF4-FFF2-40B4-BE49-F238E27FC236}">
-                <a16:creationId xmlns:a16="http://schemas.microsoft.com/office/drawing/2014/main" id="{4CF039E9-BC2C-4FA8-B4C6-71D266B87AD4}"/>
+                <a16:creationId xmlns:a16="http://schemas.microsoft.com/office/drawing/2014/main" id="{7FB29361-AE7C-4BFE-8E03-02B07527D9AF}"/>
               </a:ext>
             </a:extLst>
           </p:cNvPr>
@@ -28885,7 +28885,7 @@
           <p:cNvPr id="34" name="Text 32">
             <a:extLst xmlns:a="http://schemas.openxmlformats.org/drawingml/2006/main">
               <a:ext uri="{FF2B5EF4-FFF2-40B4-BE49-F238E27FC236}">
-                <a16:creationId xmlns:a16="http://schemas.microsoft.com/office/drawing/2014/main" id="{AACBE34E-D0B1-411C-A63A-BB1021B769E6}"/>
+                <a16:creationId xmlns:a16="http://schemas.microsoft.com/office/drawing/2014/main" id="{50AC2AF1-964C-47BE-BEED-9F683265D69C}"/>
               </a:ext>
             </a:extLst>
           </p:cNvPr>
@@ -28933,7 +28933,7 @@
           <p:cNvPr id="35" name="Text 33">
             <a:extLst xmlns:a="http://schemas.openxmlformats.org/drawingml/2006/main">
               <a:ext uri="{FF2B5EF4-FFF2-40B4-BE49-F238E27FC236}">
-                <a16:creationId xmlns:a16="http://schemas.microsoft.com/office/drawing/2014/main" id="{FDD2E62D-676F-4168-8C42-692BF4B2FB94}"/>
+                <a16:creationId xmlns:a16="http://schemas.microsoft.com/office/drawing/2014/main" id="{586FBF12-1BC4-468F-BEDF-7D59EA068AEB}"/>
               </a:ext>
             </a:extLst>
           </p:cNvPr>
@@ -28981,7 +28981,7 @@
           <p:cNvPr id="36" name="Text 34">
             <a:extLst xmlns:a="http://schemas.openxmlformats.org/drawingml/2006/main">
               <a:ext uri="{FF2B5EF4-FFF2-40B4-BE49-F238E27FC236}">
-                <a16:creationId xmlns:a16="http://schemas.microsoft.com/office/drawing/2014/main" id="{363E559D-7D3E-4811-AC9E-C238E98560E7}"/>
+                <a16:creationId xmlns:a16="http://schemas.microsoft.com/office/drawing/2014/main" id="{B6626DE8-134D-41ED-B730-D542C036FF19}"/>
               </a:ext>
             </a:extLst>
           </p:cNvPr>
@@ -29019,7 +29019,7 @@
                 <a:ea typeface="Calibri"/>
                 <a:cs typeface="Calibri"/>
               </a:rPr>
-              <a:t>Also: discovery is not free (132 episodes cost 528 provider requests, 533,293 tokens, and about $0.096, with break-even between 176 and 292 eligible future episodes); GCS is a post-study, one-family extension with no equally pre-executed manual comparator; risk control is per artifact; the closed DSL intentionally misses legitimate transformations and loops; and pre-snapshot Git ancestry cannot be reconstructed.</a:t>
+              <a:t>Also: discovery is not free (132 episodes cost 528 provider requests, 533,293 tokens, and about $0.096); the fair-placement/GEPA study has only six held-out records; risk control is per artifact; the closed DSL misses legitimate transformations and loops; and pre-snapshot Git ancestry cannot be reconstructed.</a:t>
             </a:r>
           </a:p>
         </p:txBody>
@@ -29027,7 +29027,7 @@
     </p:spTree>
     <p:extLst>
       <p:ext uri="{BB962C8B-B14F-4D97-AF65-F5344CB8AC3E}">
-        <p14:creationId xmlns:p14="http://schemas.microsoft.com/office/powerpoint/2010/main" val="562053012"/>
+        <p14:creationId xmlns:p14="http://schemas.microsoft.com/office/powerpoint/2010/main" val="2040303112"/>
       </p:ext>
     </p:extLst>
   </p:cSld>
@@ -29058,7 +29058,7 @@
           <p:cNvPr id="2" name="Text 0">
             <a:extLst xmlns:a="http://schemas.openxmlformats.org/drawingml/2006/main">
               <a:ext uri="{FF2B5EF4-FFF2-40B4-BE49-F238E27FC236}">
-                <a16:creationId xmlns:a16="http://schemas.microsoft.com/office/drawing/2014/main" id="{F4C97FBE-9A3D-4C48-95A2-1F8AA44D7D71}"/>
+                <a16:creationId xmlns:a16="http://schemas.microsoft.com/office/drawing/2014/main" id="{3E21CCCB-EB9D-4A7E-A69A-0D2958194885}"/>
               </a:ext>
             </a:extLst>
           </p:cNvPr>
@@ -29103,7 +29103,7 @@
           <p:cNvPr id="3" name="Text 1">
             <a:extLst xmlns:a="http://schemas.openxmlformats.org/drawingml/2006/main">
               <a:ext uri="{FF2B5EF4-FFF2-40B4-BE49-F238E27FC236}">
-                <a16:creationId xmlns:a16="http://schemas.microsoft.com/office/drawing/2014/main" id="{CBF876DC-9E2D-4281-9B48-D9A52C7122C5}"/>
+                <a16:creationId xmlns:a16="http://schemas.microsoft.com/office/drawing/2014/main" id="{E7A65A94-08D1-4257-A4DA-0D504B56DB35}"/>
               </a:ext>
             </a:extLst>
           </p:cNvPr>
@@ -29148,7 +29148,7 @@
           <p:cNvPr id="4" name="Text 2">
             <a:extLst xmlns:a="http://schemas.openxmlformats.org/drawingml/2006/main">
               <a:ext uri="{FF2B5EF4-FFF2-40B4-BE49-F238E27FC236}">
-                <a16:creationId xmlns:a16="http://schemas.microsoft.com/office/drawing/2014/main" id="{A0B2E0CA-BE46-444C-BDCA-7B9FCC84AC3C}"/>
+                <a16:creationId xmlns:a16="http://schemas.microsoft.com/office/drawing/2014/main" id="{B56D3CE2-C294-42D6-85F4-A33F67CA85DB}"/>
               </a:ext>
             </a:extLst>
           </p:cNvPr>
@@ -29193,7 +29193,7 @@
           <p:cNvPr id="5" name="Text 3">
             <a:extLst xmlns:a="http://schemas.openxmlformats.org/drawingml/2006/main">
               <a:ext uri="{FF2B5EF4-FFF2-40B4-BE49-F238E27FC236}">
-                <a16:creationId xmlns:a16="http://schemas.microsoft.com/office/drawing/2014/main" id="{3744B78D-497C-4CFC-B4D6-FE8FC9F9D1EC}"/>
+                <a16:creationId xmlns:a16="http://schemas.microsoft.com/office/drawing/2014/main" id="{F7B21DA3-440A-43AB-A2F1-D01B32932821}"/>
               </a:ext>
             </a:extLst>
           </p:cNvPr>
@@ -31227,7 +31227,7 @@
                           <a:ea typeface="Calibri"/>
                           <a:cs typeface="Calibri"/>
                         </a:rPr>
-                        <a:t>Macro beats partial GRC; GCS beats the provider-visible macro on 12 fresh pairs</a:t>
+                        <a:t>Macro beats partial GRC; fair pre-model manual ties GCS on 6 fresh pairs</a:t>
                       </a:r>
                     </a:p>
                   </a:txBody>
@@ -31278,7 +31278,7 @@
                           <a:ea typeface="Calibri"/>
                           <a:cs typeface="Calibri"/>
                         </a:rPr>
-                        <a:t>Not supported across interfaces</a:t>
+                        <a:t>Not supported; structural parity</a:t>
                       </a:r>
                     </a:p>
                   </a:txBody>
@@ -32146,7 +32146,7 @@
           <p:cNvPr id="7" name="Text 4">
             <a:extLst xmlns:a="http://schemas.openxmlformats.org/drawingml/2006/main">
               <a:ext uri="{FF2B5EF4-FFF2-40B4-BE49-F238E27FC236}">
-                <a16:creationId xmlns:a16="http://schemas.microsoft.com/office/drawing/2014/main" id="{7F18793C-4913-4DAE-A28E-FFED04AF8A1F}"/>
+                <a16:creationId xmlns:a16="http://schemas.microsoft.com/office/drawing/2014/main" id="{4E5A407A-A931-4281-83D2-94051772DA3D}"/>
               </a:ext>
             </a:extLst>
           </p:cNvPr>
@@ -32181,7 +32181,7 @@
                 <a:ea typeface="Calibri"/>
                 <a:cs typeface="Calibri"/>
               </a:rPr>
-              <a:t>The register preserves both directions of the macro result: manual composition beats partial GRC, while GCS later beats the measured provider-visible macro. Neither establishes universal superiority.</a:t>
+              <a:t>Manual composition beats partial GRC; once placement is equal, the manual program ties GCS. GEPA also retains its seed under the bounded search. No arm establishes universal superiority.</a:t>
             </a:r>
           </a:p>
         </p:txBody>
@@ -32191,7 +32191,7 @@
           <p:cNvPr id="8" name="Shape 5">
             <a:extLst xmlns:a="http://schemas.openxmlformats.org/drawingml/2006/main">
               <a:ext uri="{FF2B5EF4-FFF2-40B4-BE49-F238E27FC236}">
-                <a16:creationId xmlns:a16="http://schemas.microsoft.com/office/drawing/2014/main" id="{18CEE8B8-7E80-473A-A710-AECEE91FD657}"/>
+                <a16:creationId xmlns:a16="http://schemas.microsoft.com/office/drawing/2014/main" id="{93C699A6-73C4-4FBF-923F-F30334E1746A}"/>
               </a:ext>
             </a:extLst>
           </p:cNvPr>
@@ -32231,7 +32231,7 @@
           <p:cNvPr id="9" name="Text 6">
             <a:extLst xmlns:a="http://schemas.openxmlformats.org/drawingml/2006/main">
               <a:ext uri="{FF2B5EF4-FFF2-40B4-BE49-F238E27FC236}">
-                <a16:creationId xmlns:a16="http://schemas.microsoft.com/office/drawing/2014/main" id="{BEB87029-91DE-42A8-AA7A-C4D5E31F36C9}"/>
+                <a16:creationId xmlns:a16="http://schemas.microsoft.com/office/drawing/2014/main" id="{44380EF7-AE8A-4E16-8E6D-64F125D18657}"/>
               </a:ext>
             </a:extLst>
           </p:cNvPr>
@@ -32276,7 +32276,7 @@
           <p:cNvPr id="10" name="Text 7">
             <a:extLst xmlns:a="http://schemas.openxmlformats.org/drawingml/2006/main">
               <a:ext uri="{FF2B5EF4-FFF2-40B4-BE49-F238E27FC236}">
-                <a16:creationId xmlns:a16="http://schemas.microsoft.com/office/drawing/2014/main" id="{FDCDDF5F-5908-4DC7-8277-66597143C32D}"/>
+                <a16:creationId xmlns:a16="http://schemas.microsoft.com/office/drawing/2014/main" id="{11F6AB5A-4C9D-42F8-A09A-EB5EEB0B3066}"/>
               </a:ext>
             </a:extLst>
           </p:cNvPr>
@@ -32322,7 +32322,7 @@
     </p:spTree>
     <p:extLst>
       <p:ext uri="{BB962C8B-B14F-4D97-AF65-F5344CB8AC3E}">
-        <p14:creationId xmlns:p14="http://schemas.microsoft.com/office/powerpoint/2010/main" val="1695443054"/>
+        <p14:creationId xmlns:p14="http://schemas.microsoft.com/office/powerpoint/2010/main" val="1384485831"/>
       </p:ext>
     </p:extLst>
   </p:cSld>
@@ -32353,7 +32353,7 @@
           <p:cNvPr id="2" name="Text 0">
             <a:extLst xmlns:a="http://schemas.openxmlformats.org/drawingml/2006/main">
               <a:ext uri="{FF2B5EF4-FFF2-40B4-BE49-F238E27FC236}">
-                <a16:creationId xmlns:a16="http://schemas.microsoft.com/office/drawing/2014/main" id="{879ABB71-A30D-475C-A2F4-C017DBC45911}"/>
+                <a16:creationId xmlns:a16="http://schemas.microsoft.com/office/drawing/2014/main" id="{B82F4F48-19FD-441C-8311-DB7FC3A8CA13}"/>
               </a:ext>
             </a:extLst>
           </p:cNvPr>
@@ -32398,7 +32398,7 @@
           <p:cNvPr id="3" name="Text 1">
             <a:extLst xmlns:a="http://schemas.openxmlformats.org/drawingml/2006/main">
               <a:ext uri="{FF2B5EF4-FFF2-40B4-BE49-F238E27FC236}">
-                <a16:creationId xmlns:a16="http://schemas.microsoft.com/office/drawing/2014/main" id="{2AF0BE91-E43A-46B6-A18C-510AC1457FD2}"/>
+                <a16:creationId xmlns:a16="http://schemas.microsoft.com/office/drawing/2014/main" id="{588CB18A-A44D-4313-8302-5829D852887F}"/>
               </a:ext>
             </a:extLst>
           </p:cNvPr>
@@ -32443,7 +32443,7 @@
           <p:cNvPr id="4" name="Shape 2">
             <a:extLst xmlns:a="http://schemas.openxmlformats.org/drawingml/2006/main">
               <a:ext uri="{FF2B5EF4-FFF2-40B4-BE49-F238E27FC236}">
-                <a16:creationId xmlns:a16="http://schemas.microsoft.com/office/drawing/2014/main" id="{235F071F-4252-4D5C-A761-FA8C49A0E987}"/>
+                <a16:creationId xmlns:a16="http://schemas.microsoft.com/office/drawing/2014/main" id="{31071777-F67E-4171-AC60-BEACE762EEE1}"/>
               </a:ext>
             </a:extLst>
           </p:cNvPr>
@@ -32483,7 +32483,7 @@
           <p:cNvPr id="5" name="Shape 3">
             <a:extLst xmlns:a="http://schemas.openxmlformats.org/drawingml/2006/main">
               <a:ext uri="{FF2B5EF4-FFF2-40B4-BE49-F238E27FC236}">
-                <a16:creationId xmlns:a16="http://schemas.microsoft.com/office/drawing/2014/main" id="{B584E3B8-375D-4413-BDD7-AC2637A6259F}"/>
+                <a16:creationId xmlns:a16="http://schemas.microsoft.com/office/drawing/2014/main" id="{0FA88144-1E80-4C09-A7E5-A4475792C2BC}"/>
               </a:ext>
             </a:extLst>
           </p:cNvPr>
@@ -32523,7 +32523,7 @@
           <p:cNvPr id="6" name="Text 4">
             <a:extLst xmlns:a="http://schemas.openxmlformats.org/drawingml/2006/main">
               <a:ext uri="{FF2B5EF4-FFF2-40B4-BE49-F238E27FC236}">
-                <a16:creationId xmlns:a16="http://schemas.microsoft.com/office/drawing/2014/main" id="{75E9F1B8-83E7-492E-815E-00ED79545D3C}"/>
+                <a16:creationId xmlns:a16="http://schemas.microsoft.com/office/drawing/2014/main" id="{8573D87B-DF7D-440D-8207-31D40D0E3BBA}"/>
               </a:ext>
             </a:extLst>
           </p:cNvPr>
@@ -32568,7 +32568,7 @@
           <p:cNvPr id="7" name="Text 5">
             <a:extLst xmlns:a="http://schemas.openxmlformats.org/drawingml/2006/main">
               <a:ext uri="{FF2B5EF4-FFF2-40B4-BE49-F238E27FC236}">
-                <a16:creationId xmlns:a16="http://schemas.microsoft.com/office/drawing/2014/main" id="{A8E84B82-CEAF-4671-B819-5F625B26320D}"/>
+                <a16:creationId xmlns:a16="http://schemas.microsoft.com/office/drawing/2014/main" id="{01AB7426-93DF-4ADC-8560-B49FAD2D29A9}"/>
               </a:ext>
             </a:extLst>
           </p:cNvPr>
@@ -32613,7 +32613,7 @@
           <p:cNvPr id="8" name="Shape 6">
             <a:extLst xmlns:a="http://schemas.openxmlformats.org/drawingml/2006/main">
               <a:ext uri="{FF2B5EF4-FFF2-40B4-BE49-F238E27FC236}">
-                <a16:creationId xmlns:a16="http://schemas.microsoft.com/office/drawing/2014/main" id="{C3D84B29-A12D-4DCD-B6A9-7657D0A349BC}"/>
+                <a16:creationId xmlns:a16="http://schemas.microsoft.com/office/drawing/2014/main" id="{F44013AA-768B-4C0C-B43C-3CDC7FE6C266}"/>
               </a:ext>
             </a:extLst>
           </p:cNvPr>
@@ -32651,7 +32651,7 @@
           <p:cNvPr id="9" name="Text 7">
             <a:extLst xmlns:a="http://schemas.openxmlformats.org/drawingml/2006/main">
               <a:ext uri="{FF2B5EF4-FFF2-40B4-BE49-F238E27FC236}">
-                <a16:creationId xmlns:a16="http://schemas.microsoft.com/office/drawing/2014/main" id="{53B776F6-66C4-4221-8B35-7E874EAC4AA0}"/>
+                <a16:creationId xmlns:a16="http://schemas.microsoft.com/office/drawing/2014/main" id="{64B500EB-4A8B-470F-B054-5DF8BBBD0178}"/>
               </a:ext>
             </a:extLst>
           </p:cNvPr>
@@ -32696,7 +32696,7 @@
           <p:cNvPr id="10" name="Text 8">
             <a:extLst xmlns:a="http://schemas.openxmlformats.org/drawingml/2006/main">
               <a:ext uri="{FF2B5EF4-FFF2-40B4-BE49-F238E27FC236}">
-                <a16:creationId xmlns:a16="http://schemas.microsoft.com/office/drawing/2014/main" id="{31FFB60E-79CA-4F81-899E-9CE68F39A5EA}"/>
+                <a16:creationId xmlns:a16="http://schemas.microsoft.com/office/drawing/2014/main" id="{7A479983-A215-4C3C-AC4E-1FE50193505D}"/>
               </a:ext>
             </a:extLst>
           </p:cNvPr>
@@ -32744,7 +32744,7 @@
           <p:cNvPr id="11" name="Text 9">
             <a:extLst xmlns:a="http://schemas.openxmlformats.org/drawingml/2006/main">
               <a:ext uri="{FF2B5EF4-FFF2-40B4-BE49-F238E27FC236}">
-                <a16:creationId xmlns:a16="http://schemas.microsoft.com/office/drawing/2014/main" id="{DA2BA0E6-FE35-406C-A260-D002E47E3F7E}"/>
+                <a16:creationId xmlns:a16="http://schemas.microsoft.com/office/drawing/2014/main" id="{EFD4C2C8-7CFA-438A-B7D3-476E5EA171D7}"/>
               </a:ext>
             </a:extLst>
           </p:cNvPr>
@@ -32792,7 +32792,7 @@
           <p:cNvPr id="12" name="Shape 10">
             <a:extLst xmlns:a="http://schemas.openxmlformats.org/drawingml/2006/main">
               <a:ext uri="{FF2B5EF4-FFF2-40B4-BE49-F238E27FC236}">
-                <a16:creationId xmlns:a16="http://schemas.microsoft.com/office/drawing/2014/main" id="{D213418A-B26F-4717-8DA6-15C0A9BC2674}"/>
+                <a16:creationId xmlns:a16="http://schemas.microsoft.com/office/drawing/2014/main" id="{1E62EC62-84F2-401B-B62D-160BFC54C33F}"/>
               </a:ext>
             </a:extLst>
           </p:cNvPr>
@@ -32830,7 +32830,7 @@
           <p:cNvPr id="13" name="Text 11">
             <a:extLst xmlns:a="http://schemas.openxmlformats.org/drawingml/2006/main">
               <a:ext uri="{FF2B5EF4-FFF2-40B4-BE49-F238E27FC236}">
-                <a16:creationId xmlns:a16="http://schemas.microsoft.com/office/drawing/2014/main" id="{A0209FF7-7855-4FC9-98AC-16A22F68C1C9}"/>
+                <a16:creationId xmlns:a16="http://schemas.microsoft.com/office/drawing/2014/main" id="{5E7754AB-5826-4F43-A6D3-03E44B92D10E}"/>
               </a:ext>
             </a:extLst>
           </p:cNvPr>
@@ -32875,7 +32875,7 @@
           <p:cNvPr id="14" name="Text 12">
             <a:extLst xmlns:a="http://schemas.openxmlformats.org/drawingml/2006/main">
               <a:ext uri="{FF2B5EF4-FFF2-40B4-BE49-F238E27FC236}">
-                <a16:creationId xmlns:a16="http://schemas.microsoft.com/office/drawing/2014/main" id="{E0A18CFC-27F8-420A-8AFE-DF8B427CA8CA}"/>
+                <a16:creationId xmlns:a16="http://schemas.microsoft.com/office/drawing/2014/main" id="{ED173E38-A761-4DE1-A0DE-18F6521DC9E5}"/>
               </a:ext>
             </a:extLst>
           </p:cNvPr>
@@ -32923,7 +32923,7 @@
           <p:cNvPr id="15" name="Text 13">
             <a:extLst xmlns:a="http://schemas.openxmlformats.org/drawingml/2006/main">
               <a:ext uri="{FF2B5EF4-FFF2-40B4-BE49-F238E27FC236}">
-                <a16:creationId xmlns:a16="http://schemas.microsoft.com/office/drawing/2014/main" id="{22F19FF9-ECC8-4D71-8713-1B2481D9F93A}"/>
+                <a16:creationId xmlns:a16="http://schemas.microsoft.com/office/drawing/2014/main" id="{D31B83D8-168A-4759-B21D-50D2D4CB13DF}"/>
               </a:ext>
             </a:extLst>
           </p:cNvPr>
@@ -32971,7 +32971,7 @@
           <p:cNvPr id="16" name="Shape 14">
             <a:extLst xmlns:a="http://schemas.openxmlformats.org/drawingml/2006/main">
               <a:ext uri="{FF2B5EF4-FFF2-40B4-BE49-F238E27FC236}">
-                <a16:creationId xmlns:a16="http://schemas.microsoft.com/office/drawing/2014/main" id="{D4113F48-7217-4696-94DF-C70E5645ACED}"/>
+                <a16:creationId xmlns:a16="http://schemas.microsoft.com/office/drawing/2014/main" id="{F0AAA35C-1EE9-43B7-BFAE-D806B2CF8C52}"/>
               </a:ext>
             </a:extLst>
           </p:cNvPr>
@@ -33009,7 +33009,7 @@
           <p:cNvPr id="17" name="Text 15">
             <a:extLst xmlns:a="http://schemas.openxmlformats.org/drawingml/2006/main">
               <a:ext uri="{FF2B5EF4-FFF2-40B4-BE49-F238E27FC236}">
-                <a16:creationId xmlns:a16="http://schemas.microsoft.com/office/drawing/2014/main" id="{23A4DC14-4AEB-4F8F-8281-8A25005ABA4A}"/>
+                <a16:creationId xmlns:a16="http://schemas.microsoft.com/office/drawing/2014/main" id="{58E23455-0D01-443F-A874-B71C7289C4FA}"/>
               </a:ext>
             </a:extLst>
           </p:cNvPr>
@@ -33054,7 +33054,7 @@
           <p:cNvPr id="18" name="Text 16">
             <a:extLst xmlns:a="http://schemas.openxmlformats.org/drawingml/2006/main">
               <a:ext uri="{FF2B5EF4-FFF2-40B4-BE49-F238E27FC236}">
-                <a16:creationId xmlns:a16="http://schemas.microsoft.com/office/drawing/2014/main" id="{3312D707-3D97-40D3-8B7B-AC8EC7362D6E}"/>
+                <a16:creationId xmlns:a16="http://schemas.microsoft.com/office/drawing/2014/main" id="{3FC2646A-D84B-47AC-B5CD-C2699C5ED88B}"/>
               </a:ext>
             </a:extLst>
           </p:cNvPr>
@@ -33102,7 +33102,7 @@
           <p:cNvPr id="19" name="Text 17">
             <a:extLst xmlns:a="http://schemas.openxmlformats.org/drawingml/2006/main">
               <a:ext uri="{FF2B5EF4-FFF2-40B4-BE49-F238E27FC236}">
-                <a16:creationId xmlns:a16="http://schemas.microsoft.com/office/drawing/2014/main" id="{6B7BB72C-4C97-4BEB-B05E-938BBB79CCE0}"/>
+                <a16:creationId xmlns:a16="http://schemas.microsoft.com/office/drawing/2014/main" id="{06E641FB-8552-4BCC-BDAA-783810CF602A}"/>
               </a:ext>
             </a:extLst>
           </p:cNvPr>
@@ -33140,7 +33140,7 @@
                 <a:ea typeface="Calibri"/>
                 <a:cs typeface="Calibri"/>
               </a:rPr>
-              <a:t>The two-read artifact holds 30/30 while halving requests; the deeper artifact records a factual miss. Manual composition beats partial GRC, while GCS later matches 12/12 quality and beats the measured provider-visible macro. Neither direction is universal.</a:t>
+              <a:t>The two-read artifact holds 30/30 while halving requests; the deeper artifact records a factual miss. Manual composition beats partial GRC, and fair pre-model placement later ties GCS at 6/6. Runtime dominance is not the contribution.</a:t>
             </a:r>
           </a:p>
         </p:txBody>
@@ -33150,7 +33150,7 @@
           <p:cNvPr id="20" name="Shape 18">
             <a:extLst xmlns:a="http://schemas.openxmlformats.org/drawingml/2006/main">
               <a:ext uri="{FF2B5EF4-FFF2-40B4-BE49-F238E27FC236}">
-                <a16:creationId xmlns:a16="http://schemas.microsoft.com/office/drawing/2014/main" id="{3146D719-2933-4AA8-8714-C836D4BB49B0}"/>
+                <a16:creationId xmlns:a16="http://schemas.microsoft.com/office/drawing/2014/main" id="{BDA987E6-2F38-4BDE-921D-FCE84AD6D745}"/>
               </a:ext>
             </a:extLst>
           </p:cNvPr>
@@ -33188,7 +33188,7 @@
           <p:cNvPr id="21" name="Text 19">
             <a:extLst xmlns:a="http://schemas.openxmlformats.org/drawingml/2006/main">
               <a:ext uri="{FF2B5EF4-FFF2-40B4-BE49-F238E27FC236}">
-                <a16:creationId xmlns:a16="http://schemas.microsoft.com/office/drawing/2014/main" id="{0DA35D92-2E11-4529-BCF4-77C3373C6DF8}"/>
+                <a16:creationId xmlns:a16="http://schemas.microsoft.com/office/drawing/2014/main" id="{7F20C01C-0DEF-4861-8FAA-C66506BD6986}"/>
               </a:ext>
             </a:extLst>
           </p:cNvPr>
@@ -33233,7 +33233,7 @@
           <p:cNvPr id="22" name="Text 20">
             <a:extLst xmlns:a="http://schemas.openxmlformats.org/drawingml/2006/main">
               <a:ext uri="{FF2B5EF4-FFF2-40B4-BE49-F238E27FC236}">
-                <a16:creationId xmlns:a16="http://schemas.microsoft.com/office/drawing/2014/main" id="{0A036D27-8EA6-42DA-A1F1-AB33173E6764}"/>
+                <a16:creationId xmlns:a16="http://schemas.microsoft.com/office/drawing/2014/main" id="{EE49F09B-FAA5-4C03-8888-B361357E0F3B}"/>
               </a:ext>
             </a:extLst>
           </p:cNvPr>
@@ -33281,7 +33281,7 @@
           <p:cNvPr id="23" name="Text 21">
             <a:extLst xmlns:a="http://schemas.openxmlformats.org/drawingml/2006/main">
               <a:ext uri="{FF2B5EF4-FFF2-40B4-BE49-F238E27FC236}">
-                <a16:creationId xmlns:a16="http://schemas.microsoft.com/office/drawing/2014/main" id="{FA6A67C2-0AAC-42C3-9C7B-8085CF744771}"/>
+                <a16:creationId xmlns:a16="http://schemas.microsoft.com/office/drawing/2014/main" id="{9FC721E5-42B0-4344-A2C9-1F98015C9C20}"/>
               </a:ext>
             </a:extLst>
           </p:cNvPr>
@@ -33329,7 +33329,7 @@
           <p:cNvPr id="24" name="Shape 22">
             <a:extLst xmlns:a="http://schemas.openxmlformats.org/drawingml/2006/main">
               <a:ext uri="{FF2B5EF4-FFF2-40B4-BE49-F238E27FC236}">
-                <a16:creationId xmlns:a16="http://schemas.microsoft.com/office/drawing/2014/main" id="{D7AF92B1-7C1B-4344-88CD-4876106E103E}"/>
+                <a16:creationId xmlns:a16="http://schemas.microsoft.com/office/drawing/2014/main" id="{03B2DB9B-5C94-494D-98E3-70343D3ED150}"/>
               </a:ext>
             </a:extLst>
           </p:cNvPr>
@@ -33365,7 +33365,7 @@
           <p:cNvPr id="25" name="Text 23">
             <a:extLst xmlns:a="http://schemas.openxmlformats.org/drawingml/2006/main">
               <a:ext uri="{FF2B5EF4-FFF2-40B4-BE49-F238E27FC236}">
-                <a16:creationId xmlns:a16="http://schemas.microsoft.com/office/drawing/2014/main" id="{1BAB2545-7503-4D1D-9835-7DC79A0DB455}"/>
+                <a16:creationId xmlns:a16="http://schemas.microsoft.com/office/drawing/2014/main" id="{5A8807CB-A9FB-4D03-ABF4-931E7DB28CD6}"/>
               </a:ext>
             </a:extLst>
           </p:cNvPr>
@@ -33400,7 +33400,7 @@
                 <a:ea typeface="Calibri"/>
                 <a:cs typeface="Calibri"/>
               </a:rPr>
-              <a:t>Next scientific threshold: preregistered multi-family, time-forward comparison against an equally pre-executed manual macro, with cache economics, maintenance effort, drift, and closer learned optimizers.</a:t>
+              <a:t>Next scientific threshold: preregistered multi-family, time-forward comparison with engineering effort, cache economics, drift, and executable AWO / Agent JIT / EvoC2F baselines.</a:t>
             </a:r>
           </a:p>
         </p:txBody>
@@ -33408,7 +33408,7 @@
     </p:spTree>
     <p:extLst>
       <p:ext uri="{BB962C8B-B14F-4D97-AF65-F5344CB8AC3E}">
-        <p14:creationId xmlns:p14="http://schemas.microsoft.com/office/powerpoint/2010/main" val="1669624141"/>
+        <p14:creationId xmlns:p14="http://schemas.microsoft.com/office/powerpoint/2010/main" val="1246689986"/>
       </p:ext>
     </p:extLst>
   </p:cSld>
@@ -33439,7 +33439,7 @@
           <p:cNvPr id="2" name="Text 0">
             <a:extLst xmlns:a="http://schemas.openxmlformats.org/drawingml/2006/main">
               <a:ext uri="{FF2B5EF4-FFF2-40B4-BE49-F238E27FC236}">
-                <a16:creationId xmlns:a16="http://schemas.microsoft.com/office/drawing/2014/main" id="{DDE83655-7994-4B01-B0B2-35EC37B393A5}"/>
+                <a16:creationId xmlns:a16="http://schemas.microsoft.com/office/drawing/2014/main" id="{17212638-86D7-45F1-82B1-8400ED7D4B33}"/>
               </a:ext>
             </a:extLst>
           </p:cNvPr>
@@ -33484,7 +33484,7 @@
           <p:cNvPr id="3" name="Text 1">
             <a:extLst xmlns:a="http://schemas.openxmlformats.org/drawingml/2006/main">
               <a:ext uri="{FF2B5EF4-FFF2-40B4-BE49-F238E27FC236}">
-                <a16:creationId xmlns:a16="http://schemas.microsoft.com/office/drawing/2014/main" id="{19A8840E-5B47-4567-BCA4-7DBF41945930}"/>
+                <a16:creationId xmlns:a16="http://schemas.microsoft.com/office/drawing/2014/main" id="{C2816327-1D62-4F1B-A23D-03DEF302BF4C}"/>
               </a:ext>
             </a:extLst>
           </p:cNvPr>
@@ -33529,7 +33529,7 @@
           <p:cNvPr id="4" name="Text 2">
             <a:extLst xmlns:a="http://schemas.openxmlformats.org/drawingml/2006/main">
               <a:ext uri="{FF2B5EF4-FFF2-40B4-BE49-F238E27FC236}">
-                <a16:creationId xmlns:a16="http://schemas.microsoft.com/office/drawing/2014/main" id="{FC1E3B1F-F0FC-4688-9204-0FAFD21CB80F}"/>
+                <a16:creationId xmlns:a16="http://schemas.microsoft.com/office/drawing/2014/main" id="{1ECA2BAF-91F8-48CA-9220-C70DD505AD77}"/>
               </a:ext>
             </a:extLst>
           </p:cNvPr>
@@ -33574,7 +33574,7 @@
           <p:cNvPr id="5" name="Text 3">
             <a:extLst xmlns:a="http://schemas.openxmlformats.org/drawingml/2006/main">
               <a:ext uri="{FF2B5EF4-FFF2-40B4-BE49-F238E27FC236}">
-                <a16:creationId xmlns:a16="http://schemas.microsoft.com/office/drawing/2014/main" id="{9EC73155-99C5-4EF1-AA91-E399D723F45D}"/>
+                <a16:creationId xmlns:a16="http://schemas.microsoft.com/office/drawing/2014/main" id="{B725FC20-AB29-474E-BDCC-055C34837D9D}"/>
               </a:ext>
             </a:extLst>
           </p:cNvPr>
@@ -36471,7 +36471,7 @@
           <p:cNvPr id="7" name="Shape 4">
             <a:extLst xmlns:a="http://schemas.openxmlformats.org/drawingml/2006/main">
               <a:ext uri="{FF2B5EF4-FFF2-40B4-BE49-F238E27FC236}">
-                <a16:creationId xmlns:a16="http://schemas.microsoft.com/office/drawing/2014/main" id="{C30E6C6B-DD8D-4A2F-8D60-2596D5181F11}"/>
+                <a16:creationId xmlns:a16="http://schemas.microsoft.com/office/drawing/2014/main" id="{68F3A331-4068-4862-ACA3-4AC153B7B0C7}"/>
               </a:ext>
             </a:extLst>
           </p:cNvPr>
@@ -36518,7 +36518,7 @@
           <p:cNvPr id="8" name="Text 5">
             <a:extLst xmlns:a="http://schemas.openxmlformats.org/drawingml/2006/main">
               <a:ext uri="{FF2B5EF4-FFF2-40B4-BE49-F238E27FC236}">
-                <a16:creationId xmlns:a16="http://schemas.microsoft.com/office/drawing/2014/main" id="{1D97FFDC-9EE8-492B-802E-4E0070C7FE38}"/>
+                <a16:creationId xmlns:a16="http://schemas.microsoft.com/office/drawing/2014/main" id="{0D39E0DE-1327-4D25-A604-658CA41810DE}"/>
               </a:ext>
             </a:extLst>
           </p:cNvPr>
@@ -36563,7 +36563,7 @@
           <p:cNvPr id="9" name="Text 6">
             <a:extLst xmlns:a="http://schemas.openxmlformats.org/drawingml/2006/main">
               <a:ext uri="{FF2B5EF4-FFF2-40B4-BE49-F238E27FC236}">
-                <a16:creationId xmlns:a16="http://schemas.microsoft.com/office/drawing/2014/main" id="{44AF126D-81C0-412A-9DF3-768E06F72F05}"/>
+                <a16:creationId xmlns:a16="http://schemas.microsoft.com/office/drawing/2014/main" id="{53A46D42-5A59-4A8D-8390-ADC724FC9ADE}"/>
               </a:ext>
             </a:extLst>
           </p:cNvPr>
@@ -36611,7 +36611,7 @@
           <p:cNvPr id="10" name="Shape 7">
             <a:extLst xmlns:a="http://schemas.openxmlformats.org/drawingml/2006/main">
               <a:ext uri="{FF2B5EF4-FFF2-40B4-BE49-F238E27FC236}">
-                <a16:creationId xmlns:a16="http://schemas.microsoft.com/office/drawing/2014/main" id="{66B405FD-13AA-47B5-BEA6-5C412E9CDA7A}"/>
+                <a16:creationId xmlns:a16="http://schemas.microsoft.com/office/drawing/2014/main" id="{E80E5AC2-70D2-49B7-A0DE-08646EE3EED0}"/>
               </a:ext>
             </a:extLst>
           </p:cNvPr>
@@ -36658,7 +36658,7 @@
           <p:cNvPr id="11" name="Text 8">
             <a:extLst xmlns:a="http://schemas.openxmlformats.org/drawingml/2006/main">
               <a:ext uri="{FF2B5EF4-FFF2-40B4-BE49-F238E27FC236}">
-                <a16:creationId xmlns:a16="http://schemas.microsoft.com/office/drawing/2014/main" id="{AAD17260-CDBB-4BD5-8788-F5B7071F5774}"/>
+                <a16:creationId xmlns:a16="http://schemas.microsoft.com/office/drawing/2014/main" id="{60E6D438-09E3-4AEE-AF57-F4306D474556}"/>
               </a:ext>
             </a:extLst>
           </p:cNvPr>
@@ -36703,7 +36703,7 @@
           <p:cNvPr id="12" name="Text 9">
             <a:extLst xmlns:a="http://schemas.openxmlformats.org/drawingml/2006/main">
               <a:ext uri="{FF2B5EF4-FFF2-40B4-BE49-F238E27FC236}">
-                <a16:creationId xmlns:a16="http://schemas.microsoft.com/office/drawing/2014/main" id="{1FED3952-3BFF-4CE6-A47D-EA0453A82902}"/>
+                <a16:creationId xmlns:a16="http://schemas.microsoft.com/office/drawing/2014/main" id="{56C94169-C7DF-4C0E-82A7-747E60056852}"/>
               </a:ext>
             </a:extLst>
           </p:cNvPr>
@@ -36749,7 +36749,7 @@
     </p:spTree>
     <p:extLst>
       <p:ext uri="{BB962C8B-B14F-4D97-AF65-F5344CB8AC3E}">
-        <p14:creationId xmlns:p14="http://schemas.microsoft.com/office/powerpoint/2010/main" val="1493625334"/>
+        <p14:creationId xmlns:p14="http://schemas.microsoft.com/office/powerpoint/2010/main" val="495331320"/>
       </p:ext>
     </p:extLst>
   </p:cSld>
@@ -36780,7 +36780,7 @@
           <p:cNvPr id="2" name="Text 0">
             <a:extLst xmlns:a="http://schemas.openxmlformats.org/drawingml/2006/main">
               <a:ext uri="{FF2B5EF4-FFF2-40B4-BE49-F238E27FC236}">
-                <a16:creationId xmlns:a16="http://schemas.microsoft.com/office/drawing/2014/main" id="{93CEE853-DDB9-4B4E-9C6A-E5AC361300C8}"/>
+                <a16:creationId xmlns:a16="http://schemas.microsoft.com/office/drawing/2014/main" id="{7682B1F3-C4B1-4CDE-B4DF-99C8EA2338BA}"/>
               </a:ext>
             </a:extLst>
           </p:cNvPr>
@@ -36825,7 +36825,7 @@
           <p:cNvPr id="3" name="Text 1">
             <a:extLst xmlns:a="http://schemas.openxmlformats.org/drawingml/2006/main">
               <a:ext uri="{FF2B5EF4-FFF2-40B4-BE49-F238E27FC236}">
-                <a16:creationId xmlns:a16="http://schemas.microsoft.com/office/drawing/2014/main" id="{2DE35A71-68B1-41C9-ADE4-9FD4F0DB5341}"/>
+                <a16:creationId xmlns:a16="http://schemas.microsoft.com/office/drawing/2014/main" id="{15D3FD52-9877-4A38-9C4B-A87D8883F4DF}"/>
               </a:ext>
             </a:extLst>
           </p:cNvPr>
@@ -36870,7 +36870,7 @@
           <p:cNvPr id="4" name="Text 2">
             <a:extLst xmlns:a="http://schemas.openxmlformats.org/drawingml/2006/main">
               <a:ext uri="{FF2B5EF4-FFF2-40B4-BE49-F238E27FC236}">
-                <a16:creationId xmlns:a16="http://schemas.microsoft.com/office/drawing/2014/main" id="{13F72F51-2689-456A-82DB-3B2F3FF6B1E4}"/>
+                <a16:creationId xmlns:a16="http://schemas.microsoft.com/office/drawing/2014/main" id="{1EE17A5C-0221-475C-B1B9-4DA2BCF2F30E}"/>
               </a:ext>
             </a:extLst>
           </p:cNvPr>
@@ -36915,7 +36915,7 @@
           <p:cNvPr id="5" name="Text 3">
             <a:extLst xmlns:a="http://schemas.openxmlformats.org/drawingml/2006/main">
               <a:ext uri="{FF2B5EF4-FFF2-40B4-BE49-F238E27FC236}">
-                <a16:creationId xmlns:a16="http://schemas.microsoft.com/office/drawing/2014/main" id="{2B87590E-0584-4488-BE21-31A85815AAE0}"/>
+                <a16:creationId xmlns:a16="http://schemas.microsoft.com/office/drawing/2014/main" id="{61D14982-0910-42F6-ACB4-647EC33DC4E7}"/>
               </a:ext>
             </a:extLst>
           </p:cNvPr>
@@ -36960,7 +36960,7 @@
           <p:cNvPr id="6" name="Shape 4">
             <a:extLst xmlns:a="http://schemas.openxmlformats.org/drawingml/2006/main">
               <a:ext uri="{FF2B5EF4-FFF2-40B4-BE49-F238E27FC236}">
-                <a16:creationId xmlns:a16="http://schemas.microsoft.com/office/drawing/2014/main" id="{01DC393C-BA68-43B5-B3B2-457E4A16CEFA}"/>
+                <a16:creationId xmlns:a16="http://schemas.microsoft.com/office/drawing/2014/main" id="{99108BFA-6FB0-4BD5-87A0-3CA15A42F7E7}"/>
               </a:ext>
             </a:extLst>
           </p:cNvPr>
@@ -37007,7 +37007,7 @@
           <p:cNvPr id="7" name="Text 5">
             <a:extLst xmlns:a="http://schemas.openxmlformats.org/drawingml/2006/main">
               <a:ext uri="{FF2B5EF4-FFF2-40B4-BE49-F238E27FC236}">
-                <a16:creationId xmlns:a16="http://schemas.microsoft.com/office/drawing/2014/main" id="{67815EA4-A36F-497E-A1DE-1FE5B7B0CC8B}"/>
+                <a16:creationId xmlns:a16="http://schemas.microsoft.com/office/drawing/2014/main" id="{9FB2BCA6-D142-4440-BEEF-14E16D37764B}"/>
               </a:ext>
             </a:extLst>
           </p:cNvPr>
@@ -37055,7 +37055,7 @@
           <p:cNvPr id="8" name="Text 6">
             <a:extLst xmlns:a="http://schemas.openxmlformats.org/drawingml/2006/main">
               <a:ext uri="{FF2B5EF4-FFF2-40B4-BE49-F238E27FC236}">
-                <a16:creationId xmlns:a16="http://schemas.microsoft.com/office/drawing/2014/main" id="{6014E192-3FC1-47F6-A796-62F0AC9F48EF}"/>
+                <a16:creationId xmlns:a16="http://schemas.microsoft.com/office/drawing/2014/main" id="{EC75C40B-C16F-4CAF-AB23-170FA1655B32}"/>
               </a:ext>
             </a:extLst>
           </p:cNvPr>
@@ -37100,7 +37100,7 @@
           <p:cNvPr id="9" name="Shape 7">
             <a:extLst xmlns:a="http://schemas.openxmlformats.org/drawingml/2006/main">
               <a:ext uri="{FF2B5EF4-FFF2-40B4-BE49-F238E27FC236}">
-                <a16:creationId xmlns:a16="http://schemas.microsoft.com/office/drawing/2014/main" id="{A1D4380F-3F2B-438E-AA8D-47644F612553}"/>
+                <a16:creationId xmlns:a16="http://schemas.microsoft.com/office/drawing/2014/main" id="{27233BDD-67AB-48C9-8104-69B87C4EE4F2}"/>
               </a:ext>
             </a:extLst>
           </p:cNvPr>
@@ -37138,7 +37138,7 @@
           <p:cNvPr id="10" name="Text 8">
             <a:extLst xmlns:a="http://schemas.openxmlformats.org/drawingml/2006/main">
               <a:ext uri="{FF2B5EF4-FFF2-40B4-BE49-F238E27FC236}">
-                <a16:creationId xmlns:a16="http://schemas.microsoft.com/office/drawing/2014/main" id="{2A5E0D41-5B05-4B7C-B94E-D189C8041006}"/>
+                <a16:creationId xmlns:a16="http://schemas.microsoft.com/office/drawing/2014/main" id="{0EE0FBB1-83EB-4571-99F6-881AD7E7C8C8}"/>
               </a:ext>
             </a:extLst>
           </p:cNvPr>
@@ -37183,7 +37183,7 @@
           <p:cNvPr id="11" name="Text 9">
             <a:extLst xmlns:a="http://schemas.openxmlformats.org/drawingml/2006/main">
               <a:ext uri="{FF2B5EF4-FFF2-40B4-BE49-F238E27FC236}">
-                <a16:creationId xmlns:a16="http://schemas.microsoft.com/office/drawing/2014/main" id="{C3D0295D-9254-4E7A-809F-21D4AFB6CAF2}"/>
+                <a16:creationId xmlns:a16="http://schemas.microsoft.com/office/drawing/2014/main" id="{123F86E8-541C-4C65-BAB5-8F47B4216601}"/>
               </a:ext>
             </a:extLst>
           </p:cNvPr>
@@ -37231,7 +37231,7 @@
           <p:cNvPr id="12" name="Shape 10">
             <a:extLst xmlns:a="http://schemas.openxmlformats.org/drawingml/2006/main">
               <a:ext uri="{FF2B5EF4-FFF2-40B4-BE49-F238E27FC236}">
-                <a16:creationId xmlns:a16="http://schemas.microsoft.com/office/drawing/2014/main" id="{9C6E15DF-FB2E-4398-A159-3549FB31A172}"/>
+                <a16:creationId xmlns:a16="http://schemas.microsoft.com/office/drawing/2014/main" id="{F1B15E6F-96D3-42D0-B7C2-97911A6EBA97}"/>
               </a:ext>
             </a:extLst>
           </p:cNvPr>
@@ -37269,7 +37269,7 @@
           <p:cNvPr id="13" name="Text 11">
             <a:extLst xmlns:a="http://schemas.openxmlformats.org/drawingml/2006/main">
               <a:ext uri="{FF2B5EF4-FFF2-40B4-BE49-F238E27FC236}">
-                <a16:creationId xmlns:a16="http://schemas.microsoft.com/office/drawing/2014/main" id="{9EE153E9-A4D5-4036-9E08-7182E4EBB21D}"/>
+                <a16:creationId xmlns:a16="http://schemas.microsoft.com/office/drawing/2014/main" id="{710333EE-C1F8-4A33-BB56-1E9F45824C47}"/>
               </a:ext>
             </a:extLst>
           </p:cNvPr>
@@ -37314,7 +37314,7 @@
           <p:cNvPr id="14" name="Text 12">
             <a:extLst xmlns:a="http://schemas.openxmlformats.org/drawingml/2006/main">
               <a:ext uri="{FF2B5EF4-FFF2-40B4-BE49-F238E27FC236}">
-                <a16:creationId xmlns:a16="http://schemas.microsoft.com/office/drawing/2014/main" id="{ACEB7B4F-B763-43BC-98DC-7706288DB5DA}"/>
+                <a16:creationId xmlns:a16="http://schemas.microsoft.com/office/drawing/2014/main" id="{F6B3B76C-2B6C-4800-8CBD-9A6B1AC8CB30}"/>
               </a:ext>
             </a:extLst>
           </p:cNvPr>
@@ -37362,7 +37362,7 @@
           <p:cNvPr id="15" name="Shape 13">
             <a:extLst xmlns:a="http://schemas.openxmlformats.org/drawingml/2006/main">
               <a:ext uri="{FF2B5EF4-FFF2-40B4-BE49-F238E27FC236}">
-                <a16:creationId xmlns:a16="http://schemas.microsoft.com/office/drawing/2014/main" id="{5DA38AA9-83B8-4558-B1A5-D03FB097DC92}"/>
+                <a16:creationId xmlns:a16="http://schemas.microsoft.com/office/drawing/2014/main" id="{0BBF21FA-919E-4010-8AE7-8E2C6DC9DC4B}"/>
               </a:ext>
             </a:extLst>
           </p:cNvPr>
@@ -37400,7 +37400,7 @@
           <p:cNvPr id="16" name="Text 14">
             <a:extLst xmlns:a="http://schemas.openxmlformats.org/drawingml/2006/main">
               <a:ext uri="{FF2B5EF4-FFF2-40B4-BE49-F238E27FC236}">
-                <a16:creationId xmlns:a16="http://schemas.microsoft.com/office/drawing/2014/main" id="{C599FF8F-64D5-4309-BB41-8091A1007FF4}"/>
+                <a16:creationId xmlns:a16="http://schemas.microsoft.com/office/drawing/2014/main" id="{554C3707-5FB8-4B43-AC40-746D04DAA19F}"/>
               </a:ext>
             </a:extLst>
           </p:cNvPr>
@@ -37445,7 +37445,7 @@
           <p:cNvPr id="17" name="Text 15">
             <a:extLst xmlns:a="http://schemas.openxmlformats.org/drawingml/2006/main">
               <a:ext uri="{FF2B5EF4-FFF2-40B4-BE49-F238E27FC236}">
-                <a16:creationId xmlns:a16="http://schemas.microsoft.com/office/drawing/2014/main" id="{DF2FD8F5-5A7C-455F-81FF-76A92DAA680C}"/>
+                <a16:creationId xmlns:a16="http://schemas.microsoft.com/office/drawing/2014/main" id="{DC5424D0-1C59-4ABD-A3A3-D9A7F41A44D0}"/>
               </a:ext>
             </a:extLst>
           </p:cNvPr>
@@ -37493,7 +37493,7 @@
           <p:cNvPr id="18" name="Shape 16">
             <a:extLst xmlns:a="http://schemas.openxmlformats.org/drawingml/2006/main">
               <a:ext uri="{FF2B5EF4-FFF2-40B4-BE49-F238E27FC236}">
-                <a16:creationId xmlns:a16="http://schemas.microsoft.com/office/drawing/2014/main" id="{3ED48257-63E3-4C3C-A385-797FBF3C5AFF}"/>
+                <a16:creationId xmlns:a16="http://schemas.microsoft.com/office/drawing/2014/main" id="{74EA52E6-9F25-4DF7-A013-461446A5D49E}"/>
               </a:ext>
             </a:extLst>
           </p:cNvPr>
@@ -37531,7 +37531,7 @@
           <p:cNvPr id="19" name="Text 17">
             <a:extLst xmlns:a="http://schemas.openxmlformats.org/drawingml/2006/main">
               <a:ext uri="{FF2B5EF4-FFF2-40B4-BE49-F238E27FC236}">
-                <a16:creationId xmlns:a16="http://schemas.microsoft.com/office/drawing/2014/main" id="{3331DFB0-EA87-423E-9B2A-246BCD490D3D}"/>
+                <a16:creationId xmlns:a16="http://schemas.microsoft.com/office/drawing/2014/main" id="{F5720C93-DFE7-48CB-A511-E36EC824F41C}"/>
               </a:ext>
             </a:extLst>
           </p:cNvPr>
@@ -37576,7 +37576,7 @@
           <p:cNvPr id="20" name="Text 18">
             <a:extLst xmlns:a="http://schemas.openxmlformats.org/drawingml/2006/main">
               <a:ext uri="{FF2B5EF4-FFF2-40B4-BE49-F238E27FC236}">
-                <a16:creationId xmlns:a16="http://schemas.microsoft.com/office/drawing/2014/main" id="{63732A04-ADBE-4A95-87F2-612454D9105F}"/>
+                <a16:creationId xmlns:a16="http://schemas.microsoft.com/office/drawing/2014/main" id="{65FB75A6-481B-4787-81A8-F609E2750C5D}"/>
               </a:ext>
             </a:extLst>
           </p:cNvPr>
@@ -37624,7 +37624,7 @@
           <p:cNvPr id="21" name="Shape 19">
             <a:extLst xmlns:a="http://schemas.openxmlformats.org/drawingml/2006/main">
               <a:ext uri="{FF2B5EF4-FFF2-40B4-BE49-F238E27FC236}">
-                <a16:creationId xmlns:a16="http://schemas.microsoft.com/office/drawing/2014/main" id="{E9FE8680-58FA-4045-8711-73A3FBBF40BC}"/>
+                <a16:creationId xmlns:a16="http://schemas.microsoft.com/office/drawing/2014/main" id="{7CD5E2EB-EE98-485F-A422-7FE1D9AE7BCD}"/>
               </a:ext>
             </a:extLst>
           </p:cNvPr>
@@ -37662,7 +37662,7 @@
           <p:cNvPr id="22" name="Text 20">
             <a:extLst xmlns:a="http://schemas.openxmlformats.org/drawingml/2006/main">
               <a:ext uri="{FF2B5EF4-FFF2-40B4-BE49-F238E27FC236}">
-                <a16:creationId xmlns:a16="http://schemas.microsoft.com/office/drawing/2014/main" id="{4468F8FE-7BB1-4652-9891-BD1B3CA6F41F}"/>
+                <a16:creationId xmlns:a16="http://schemas.microsoft.com/office/drawing/2014/main" id="{54FEEA7B-5768-4FB9-9277-50C6CB5D4259}"/>
               </a:ext>
             </a:extLst>
           </p:cNvPr>
@@ -37707,7 +37707,7 @@
           <p:cNvPr id="23" name="Text 21">
             <a:extLst xmlns:a="http://schemas.openxmlformats.org/drawingml/2006/main">
               <a:ext uri="{FF2B5EF4-FFF2-40B4-BE49-F238E27FC236}">
-                <a16:creationId xmlns:a16="http://schemas.microsoft.com/office/drawing/2014/main" id="{0E05FCBF-0947-45CC-8E29-6484416036D9}"/>
+                <a16:creationId xmlns:a16="http://schemas.microsoft.com/office/drawing/2014/main" id="{A690AB06-6411-4670-8E8A-5B0272AAEC02}"/>
               </a:ext>
             </a:extLst>
           </p:cNvPr>
@@ -37755,7 +37755,7 @@
           <p:cNvPr id="24" name="Text 22">
             <a:extLst xmlns:a="http://schemas.openxmlformats.org/drawingml/2006/main">
               <a:ext uri="{FF2B5EF4-FFF2-40B4-BE49-F238E27FC236}">
-                <a16:creationId xmlns:a16="http://schemas.microsoft.com/office/drawing/2014/main" id="{8706D38A-662A-4FCA-980B-2FDBAA992A80}"/>
+                <a16:creationId xmlns:a16="http://schemas.microsoft.com/office/drawing/2014/main" id="{3498D356-1C03-46BD-8014-0D9606814CCD}"/>
               </a:ext>
             </a:extLst>
           </p:cNvPr>
@@ -37800,7 +37800,7 @@
           <p:cNvPr id="25" name="Shape 23">
             <a:extLst xmlns:a="http://schemas.openxmlformats.org/drawingml/2006/main">
               <a:ext uri="{FF2B5EF4-FFF2-40B4-BE49-F238E27FC236}">
-                <a16:creationId xmlns:a16="http://schemas.microsoft.com/office/drawing/2014/main" id="{A0858793-BF71-4106-9BD1-F3DCE3A212E4}"/>
+                <a16:creationId xmlns:a16="http://schemas.microsoft.com/office/drawing/2014/main" id="{DFA30121-63E2-463A-BD4F-3152CA1C0A4A}"/>
               </a:ext>
             </a:extLst>
           </p:cNvPr>
@@ -37847,7 +37847,7 @@
           <p:cNvPr id="26" name="Text 24">
             <a:extLst xmlns:a="http://schemas.openxmlformats.org/drawingml/2006/main">
               <a:ext uri="{FF2B5EF4-FFF2-40B4-BE49-F238E27FC236}">
-                <a16:creationId xmlns:a16="http://schemas.microsoft.com/office/drawing/2014/main" id="{CE94D078-2FEB-40B8-9F37-0C40DB8F32C4}"/>
+                <a16:creationId xmlns:a16="http://schemas.microsoft.com/office/drawing/2014/main" id="{53FCC832-EC60-46D4-B6D9-6E6D733FD3A9}"/>
               </a:ext>
             </a:extLst>
           </p:cNvPr>
@@ -37986,7 +37986,7 @@
           <p:cNvPr id="27" name="Shape 25">
             <a:extLst xmlns:a="http://schemas.openxmlformats.org/drawingml/2006/main">
               <a:ext uri="{FF2B5EF4-FFF2-40B4-BE49-F238E27FC236}">
-                <a16:creationId xmlns:a16="http://schemas.microsoft.com/office/drawing/2014/main" id="{C1E28506-1545-4615-B36C-F89A0F9820F7}"/>
+                <a16:creationId xmlns:a16="http://schemas.microsoft.com/office/drawing/2014/main" id="{B231F1A5-8EA6-4B7A-BB24-1639463BF4F9}"/>
               </a:ext>
             </a:extLst>
           </p:cNvPr>
@@ -38033,7 +38033,7 @@
           <p:cNvPr id="28" name="Text 26">
             <a:extLst xmlns:a="http://schemas.openxmlformats.org/drawingml/2006/main">
               <a:ext uri="{FF2B5EF4-FFF2-40B4-BE49-F238E27FC236}">
-                <a16:creationId xmlns:a16="http://schemas.microsoft.com/office/drawing/2014/main" id="{18BA69FA-FEC9-4802-B849-E626F38AAD8D}"/>
+                <a16:creationId xmlns:a16="http://schemas.microsoft.com/office/drawing/2014/main" id="{4C28162D-262D-4224-9834-DB9A26C047CF}"/>
               </a:ext>
             </a:extLst>
           </p:cNvPr>
@@ -38078,7 +38078,7 @@
           <p:cNvPr id="29" name="Text 27">
             <a:extLst xmlns:a="http://schemas.openxmlformats.org/drawingml/2006/main">
               <a:ext uri="{FF2B5EF4-FFF2-40B4-BE49-F238E27FC236}">
-                <a16:creationId xmlns:a16="http://schemas.microsoft.com/office/drawing/2014/main" id="{743ED3D9-2124-416A-A438-AA8AA5397313}"/>
+                <a16:creationId xmlns:a16="http://schemas.microsoft.com/office/drawing/2014/main" id="{4C8C6CCF-CD75-4862-A4E5-FC88F97DD09B}"/>
               </a:ext>
             </a:extLst>
           </p:cNvPr>
@@ -38124,7 +38124,7 @@
     </p:spTree>
     <p:extLst>
       <p:ext uri="{BB962C8B-B14F-4D97-AF65-F5344CB8AC3E}">
-        <p14:creationId xmlns:p14="http://schemas.microsoft.com/office/powerpoint/2010/main" val="768659667"/>
+        <p14:creationId xmlns:p14="http://schemas.microsoft.com/office/powerpoint/2010/main" val="1531313"/>
       </p:ext>
     </p:extLst>
   </p:cSld>
@@ -38155,7 +38155,7 @@
           <p:cNvPr id="2" name="Text 0">
             <a:extLst xmlns:a="http://schemas.openxmlformats.org/drawingml/2006/main">
               <a:ext uri="{FF2B5EF4-FFF2-40B4-BE49-F238E27FC236}">
-                <a16:creationId xmlns:a16="http://schemas.microsoft.com/office/drawing/2014/main" id="{F0D188EA-7CA9-4CB4-9ACE-5B288B1E2C86}"/>
+                <a16:creationId xmlns:a16="http://schemas.microsoft.com/office/drawing/2014/main" id="{D5F2B7B5-F7AC-4AB6-8868-F6F7176EBA79}"/>
               </a:ext>
             </a:extLst>
           </p:cNvPr>
@@ -38200,7 +38200,7 @@
           <p:cNvPr id="3" name="Text 1">
             <a:extLst xmlns:a="http://schemas.openxmlformats.org/drawingml/2006/main">
               <a:ext uri="{FF2B5EF4-FFF2-40B4-BE49-F238E27FC236}">
-                <a16:creationId xmlns:a16="http://schemas.microsoft.com/office/drawing/2014/main" id="{C6ACF5D5-7B98-478C-9A9F-570741746172}"/>
+                <a16:creationId xmlns:a16="http://schemas.microsoft.com/office/drawing/2014/main" id="{EF85CDF0-33A5-4ECE-B04D-45919809818D}"/>
               </a:ext>
             </a:extLst>
           </p:cNvPr>
@@ -38245,7 +38245,7 @@
           <p:cNvPr id="4" name="Shape 2">
             <a:extLst xmlns:a="http://schemas.openxmlformats.org/drawingml/2006/main">
               <a:ext uri="{FF2B5EF4-FFF2-40B4-BE49-F238E27FC236}">
-                <a16:creationId xmlns:a16="http://schemas.microsoft.com/office/drawing/2014/main" id="{2DE55F32-65A3-427C-A897-03A9D3572880}"/>
+                <a16:creationId xmlns:a16="http://schemas.microsoft.com/office/drawing/2014/main" id="{3BE6632D-0534-4828-9014-7B9DF15BEE81}"/>
               </a:ext>
             </a:extLst>
           </p:cNvPr>
@@ -38285,7 +38285,7 @@
           <p:cNvPr id="5" name="Shape 3">
             <a:extLst xmlns:a="http://schemas.openxmlformats.org/drawingml/2006/main">
               <a:ext uri="{FF2B5EF4-FFF2-40B4-BE49-F238E27FC236}">
-                <a16:creationId xmlns:a16="http://schemas.microsoft.com/office/drawing/2014/main" id="{B998C84A-EEA7-46B2-8EDF-49D033B062BA}"/>
+                <a16:creationId xmlns:a16="http://schemas.microsoft.com/office/drawing/2014/main" id="{ABE41B67-9049-4320-B6B8-0CD2108447C7}"/>
               </a:ext>
             </a:extLst>
           </p:cNvPr>
@@ -38325,7 +38325,7 @@
           <p:cNvPr id="6" name="Text 4">
             <a:extLst xmlns:a="http://schemas.openxmlformats.org/drawingml/2006/main">
               <a:ext uri="{FF2B5EF4-FFF2-40B4-BE49-F238E27FC236}">
-                <a16:creationId xmlns:a16="http://schemas.microsoft.com/office/drawing/2014/main" id="{1F48FD01-4790-4B17-91C6-D9F7B314CDDD}"/>
+                <a16:creationId xmlns:a16="http://schemas.microsoft.com/office/drawing/2014/main" id="{4D6EB224-F123-40FF-9581-22FAE90E4999}"/>
               </a:ext>
             </a:extLst>
           </p:cNvPr>
@@ -38370,7 +38370,7 @@
           <p:cNvPr id="7" name="Text 5">
             <a:extLst xmlns:a="http://schemas.openxmlformats.org/drawingml/2006/main">
               <a:ext uri="{FF2B5EF4-FFF2-40B4-BE49-F238E27FC236}">
-                <a16:creationId xmlns:a16="http://schemas.microsoft.com/office/drawing/2014/main" id="{31934C4B-9A13-4AE9-85A2-C41B0C77B702}"/>
+                <a16:creationId xmlns:a16="http://schemas.microsoft.com/office/drawing/2014/main" id="{BF946E4B-9AC5-4A20-ACE9-9D4BF901B9E8}"/>
               </a:ext>
             </a:extLst>
           </p:cNvPr>
@@ -38415,7 +38415,7 @@
           <p:cNvPr id="8" name="Text 6">
             <a:extLst xmlns:a="http://schemas.openxmlformats.org/drawingml/2006/main">
               <a:ext uri="{FF2B5EF4-FFF2-40B4-BE49-F238E27FC236}">
-                <a16:creationId xmlns:a16="http://schemas.microsoft.com/office/drawing/2014/main" id="{A3189786-99D0-4C3B-B069-266CE1FE612D}"/>
+                <a16:creationId xmlns:a16="http://schemas.microsoft.com/office/drawing/2014/main" id="{54C14155-362F-4608-8F48-63A08B1F3C6E}"/>
               </a:ext>
             </a:extLst>
           </p:cNvPr>
@@ -38461,7 +38461,7 @@
     </p:spTree>
     <p:extLst>
       <p:ext uri="{BB962C8B-B14F-4D97-AF65-F5344CB8AC3E}">
-        <p14:creationId xmlns:p14="http://schemas.microsoft.com/office/powerpoint/2010/main" val="185567231"/>
+        <p14:creationId xmlns:p14="http://schemas.microsoft.com/office/powerpoint/2010/main" val="1856501477"/>
       </p:ext>
     </p:extLst>
   </p:cSld>
@@ -38492,7 +38492,7 @@
           <p:cNvPr id="2" name="Text 0">
             <a:extLst xmlns:a="http://schemas.openxmlformats.org/drawingml/2006/main">
               <a:ext uri="{FF2B5EF4-FFF2-40B4-BE49-F238E27FC236}">
-                <a16:creationId xmlns:a16="http://schemas.microsoft.com/office/drawing/2014/main" id="{E1D1ADF8-24CA-48A2-B241-D61F247DAF06}"/>
+                <a16:creationId xmlns:a16="http://schemas.microsoft.com/office/drawing/2014/main" id="{88364D62-237D-4D63-86EA-A9FE39956AEE}"/>
               </a:ext>
             </a:extLst>
           </p:cNvPr>
@@ -38537,7 +38537,7 @@
           <p:cNvPr id="3" name="Text 1">
             <a:extLst xmlns:a="http://schemas.openxmlformats.org/drawingml/2006/main">
               <a:ext uri="{FF2B5EF4-FFF2-40B4-BE49-F238E27FC236}">
-                <a16:creationId xmlns:a16="http://schemas.microsoft.com/office/drawing/2014/main" id="{2D7A1A07-D341-47D1-AFCC-CA553FD60764}"/>
+                <a16:creationId xmlns:a16="http://schemas.microsoft.com/office/drawing/2014/main" id="{3E93CA94-FA18-42C3-B18C-9387378DCCD2}"/>
               </a:ext>
             </a:extLst>
           </p:cNvPr>
@@ -38582,7 +38582,7 @@
           <p:cNvPr id="4" name="Text 2">
             <a:extLst xmlns:a="http://schemas.openxmlformats.org/drawingml/2006/main">
               <a:ext uri="{FF2B5EF4-FFF2-40B4-BE49-F238E27FC236}">
-                <a16:creationId xmlns:a16="http://schemas.microsoft.com/office/drawing/2014/main" id="{1C6052C1-3C45-42B4-AEA4-13BAF5B1026A}"/>
+                <a16:creationId xmlns:a16="http://schemas.microsoft.com/office/drawing/2014/main" id="{46CB77F1-87FE-4813-9F61-F47ABF1766A3}"/>
               </a:ext>
             </a:extLst>
           </p:cNvPr>
@@ -38627,7 +38627,7 @@
           <p:cNvPr id="5" name="Text 3">
             <a:extLst xmlns:a="http://schemas.openxmlformats.org/drawingml/2006/main">
               <a:ext uri="{FF2B5EF4-FFF2-40B4-BE49-F238E27FC236}">
-                <a16:creationId xmlns:a16="http://schemas.microsoft.com/office/drawing/2014/main" id="{8C5082A7-3BA0-4091-A146-B57CD369DF3D}"/>
+                <a16:creationId xmlns:a16="http://schemas.microsoft.com/office/drawing/2014/main" id="{F131DD6C-8A1B-49EE-ABEB-C25332E2DAEE}"/>
               </a:ext>
             </a:extLst>
           </p:cNvPr>
@@ -38672,7 +38672,7 @@
           <p:cNvPr id="6" name="Shape 4">
             <a:extLst xmlns:a="http://schemas.openxmlformats.org/drawingml/2006/main">
               <a:ext uri="{FF2B5EF4-FFF2-40B4-BE49-F238E27FC236}">
-                <a16:creationId xmlns:a16="http://schemas.microsoft.com/office/drawing/2014/main" id="{6E9A658D-023C-41DF-9B00-794A3F8DEB12}"/>
+                <a16:creationId xmlns:a16="http://schemas.microsoft.com/office/drawing/2014/main" id="{5A90B28C-4846-4916-B04E-18F482CF7102}"/>
               </a:ext>
             </a:extLst>
           </p:cNvPr>
@@ -38716,7 +38716,7 @@
           <p:nvPr/>
         </p:nvPicPr>
         <p:blipFill>
-          <a:blip xmlns:r="http://schemas.openxmlformats.org/officeDocument/2006/relationships" xmlns:a="http://schemas.openxmlformats.org/drawingml/2006/main" r:embed="Rea07e807e9d244c6"/>
+          <a:blip xmlns:r="http://schemas.openxmlformats.org/officeDocument/2006/relationships" xmlns:a="http://schemas.openxmlformats.org/drawingml/2006/main" r:embed="Rd101ccaeebdc4b0b"/>
           <a:stretch xmlns:a="http://schemas.openxmlformats.org/drawingml/2006/main">
             <a:fillRect l="0" t="0" r="0" b="0"/>
           </a:stretch>
@@ -38736,7 +38736,7 @@
           <p:cNvPr id="8" name="Text 5">
             <a:extLst xmlns:a="http://schemas.openxmlformats.org/drawingml/2006/main">
               <a:ext uri="{FF2B5EF4-FFF2-40B4-BE49-F238E27FC236}">
-                <a16:creationId xmlns:a16="http://schemas.microsoft.com/office/drawing/2014/main" id="{30C0EB7C-5616-4566-AA1C-57F0C6BF9655}"/>
+                <a16:creationId xmlns:a16="http://schemas.microsoft.com/office/drawing/2014/main" id="{D9416E7D-A33B-4277-8443-AD581294D66E}"/>
               </a:ext>
             </a:extLst>
           </p:cNvPr>
@@ -38781,7 +38781,7 @@
           <p:cNvPr id="9" name="Shape 6">
             <a:extLst xmlns:a="http://schemas.openxmlformats.org/drawingml/2006/main">
               <a:ext uri="{FF2B5EF4-FFF2-40B4-BE49-F238E27FC236}">
-                <a16:creationId xmlns:a16="http://schemas.microsoft.com/office/drawing/2014/main" id="{8598E5F7-2848-4CAE-8BCF-0343E4CB2CD9}"/>
+                <a16:creationId xmlns:a16="http://schemas.microsoft.com/office/drawing/2014/main" id="{4FEE9A57-C56D-4728-B4C3-1176A4824CE3}"/>
               </a:ext>
             </a:extLst>
           </p:cNvPr>
@@ -38825,7 +38825,7 @@
           <p:nvPr/>
         </p:nvPicPr>
         <p:blipFill>
-          <a:blip xmlns:r="http://schemas.openxmlformats.org/officeDocument/2006/relationships" xmlns:a="http://schemas.openxmlformats.org/drawingml/2006/main" r:embed="R235a7090b82547f3"/>
+          <a:blip xmlns:r="http://schemas.openxmlformats.org/officeDocument/2006/relationships" xmlns:a="http://schemas.openxmlformats.org/drawingml/2006/main" r:embed="R4742e8b8b80c4189"/>
           <a:stretch xmlns:a="http://schemas.openxmlformats.org/drawingml/2006/main">
             <a:fillRect l="0" t="0" r="0" b="0"/>
           </a:stretch>
@@ -38845,7 +38845,7 @@
           <p:cNvPr id="11" name="Text 7">
             <a:extLst xmlns:a="http://schemas.openxmlformats.org/drawingml/2006/main">
               <a:ext uri="{FF2B5EF4-FFF2-40B4-BE49-F238E27FC236}">
-                <a16:creationId xmlns:a16="http://schemas.microsoft.com/office/drawing/2014/main" id="{6BB03573-D8C1-4824-90FA-16B0930E1F76}"/>
+                <a16:creationId xmlns:a16="http://schemas.microsoft.com/office/drawing/2014/main" id="{7F43B222-0D2E-4E98-97F9-F265A7401809}"/>
               </a:ext>
             </a:extLst>
           </p:cNvPr>
@@ -38893,7 +38893,7 @@
           <p:cNvPr id="12" name="Text 8">
             <a:extLst xmlns:a="http://schemas.openxmlformats.org/drawingml/2006/main">
               <a:ext uri="{FF2B5EF4-FFF2-40B4-BE49-F238E27FC236}">
-                <a16:creationId xmlns:a16="http://schemas.microsoft.com/office/drawing/2014/main" id="{08C78692-F446-4F58-A023-7507A81B0440}"/>
+                <a16:creationId xmlns:a16="http://schemas.microsoft.com/office/drawing/2014/main" id="{F999DF7B-AD0D-4FB9-9DD6-BDB865D1D429}"/>
               </a:ext>
             </a:extLst>
           </p:cNvPr>
@@ -38938,7 +38938,7 @@
           <p:cNvPr id="13" name="Shape 9">
             <a:extLst xmlns:a="http://schemas.openxmlformats.org/drawingml/2006/main">
               <a:ext uri="{FF2B5EF4-FFF2-40B4-BE49-F238E27FC236}">
-                <a16:creationId xmlns:a16="http://schemas.microsoft.com/office/drawing/2014/main" id="{016B8212-F41F-49A3-A398-D01D3CDA7005}"/>
+                <a16:creationId xmlns:a16="http://schemas.microsoft.com/office/drawing/2014/main" id="{937B1D00-F290-4D2B-BEEF-A08A7C64E78B}"/>
               </a:ext>
             </a:extLst>
           </p:cNvPr>
@@ -38978,7 +38978,7 @@
           <p:cNvPr id="14" name="Text 10">
             <a:extLst xmlns:a="http://schemas.openxmlformats.org/drawingml/2006/main">
               <a:ext uri="{FF2B5EF4-FFF2-40B4-BE49-F238E27FC236}">
-                <a16:creationId xmlns:a16="http://schemas.microsoft.com/office/drawing/2014/main" id="{C80AA1FA-CB51-4421-BB80-358AA2AD152B}"/>
+                <a16:creationId xmlns:a16="http://schemas.microsoft.com/office/drawing/2014/main" id="{0096DD51-E40C-4393-8BAB-EE49C9186B5D}"/>
               </a:ext>
             </a:extLst>
           </p:cNvPr>
@@ -39023,7 +39023,7 @@
           <p:cNvPr id="15" name="Text 11">
             <a:extLst xmlns:a="http://schemas.openxmlformats.org/drawingml/2006/main">
               <a:ext uri="{FF2B5EF4-FFF2-40B4-BE49-F238E27FC236}">
-                <a16:creationId xmlns:a16="http://schemas.microsoft.com/office/drawing/2014/main" id="{114828BD-787C-4CF1-B5B0-0BE82E4EE74E}"/>
+                <a16:creationId xmlns:a16="http://schemas.microsoft.com/office/drawing/2014/main" id="{6FF48EF9-5992-4768-86BA-07E748456CDF}"/>
               </a:ext>
             </a:extLst>
           </p:cNvPr>
@@ -39071,7 +39071,7 @@
           <p:cNvPr id="16" name="Shape 12">
             <a:extLst xmlns:a="http://schemas.openxmlformats.org/drawingml/2006/main">
               <a:ext uri="{FF2B5EF4-FFF2-40B4-BE49-F238E27FC236}">
-                <a16:creationId xmlns:a16="http://schemas.microsoft.com/office/drawing/2014/main" id="{4A0DE0AA-5AC0-4671-B1AB-EC0894DA9B0D}"/>
+                <a16:creationId xmlns:a16="http://schemas.microsoft.com/office/drawing/2014/main" id="{3392F99D-1D3E-4B8C-8031-0E2B7DB07303}"/>
               </a:ext>
             </a:extLst>
           </p:cNvPr>
@@ -39115,7 +39115,7 @@
           <p:nvPr/>
         </p:nvPicPr>
         <p:blipFill>
-          <a:blip xmlns:r="http://schemas.openxmlformats.org/officeDocument/2006/relationships" xmlns:a="http://schemas.openxmlformats.org/drawingml/2006/main" r:embed="R05edccfe43a0433e"/>
+          <a:blip xmlns:r="http://schemas.openxmlformats.org/officeDocument/2006/relationships" xmlns:a="http://schemas.openxmlformats.org/drawingml/2006/main" r:embed="R03c5df1f8aab4b77"/>
           <a:stretch xmlns:a="http://schemas.openxmlformats.org/drawingml/2006/main">
             <a:fillRect l="0" t="0" r="0" b="0"/>
           </a:stretch>
@@ -39135,7 +39135,7 @@
           <p:cNvPr id="18" name="Text 13">
             <a:extLst xmlns:a="http://schemas.openxmlformats.org/drawingml/2006/main">
               <a:ext uri="{FF2B5EF4-FFF2-40B4-BE49-F238E27FC236}">
-                <a16:creationId xmlns:a16="http://schemas.microsoft.com/office/drawing/2014/main" id="{2077B837-A621-4B46-9174-2392D3F22FFC}"/>
+                <a16:creationId xmlns:a16="http://schemas.microsoft.com/office/drawing/2014/main" id="{26AE2554-6D91-4DA9-A08D-17C8D835899F}"/>
               </a:ext>
             </a:extLst>
           </p:cNvPr>
@@ -39180,7 +39180,7 @@
           <p:cNvPr id="19" name="Text 14">
             <a:extLst xmlns:a="http://schemas.openxmlformats.org/drawingml/2006/main">
               <a:ext uri="{FF2B5EF4-FFF2-40B4-BE49-F238E27FC236}">
-                <a16:creationId xmlns:a16="http://schemas.microsoft.com/office/drawing/2014/main" id="{F4DDAA8A-87E0-4F8D-A1D7-6A53AD07B87A}"/>
+                <a16:creationId xmlns:a16="http://schemas.microsoft.com/office/drawing/2014/main" id="{BACC6869-15A8-46F8-8DED-AE9112536A6F}"/>
               </a:ext>
             </a:extLst>
           </p:cNvPr>
@@ -39228,7 +39228,7 @@
           <p:cNvPr id="20" name="Text 15">
             <a:extLst xmlns:a="http://schemas.openxmlformats.org/drawingml/2006/main">
               <a:ext uri="{FF2B5EF4-FFF2-40B4-BE49-F238E27FC236}">
-                <a16:creationId xmlns:a16="http://schemas.microsoft.com/office/drawing/2014/main" id="{100DEFF6-947B-4B1A-AFF8-CC61107F7862}"/>
+                <a16:creationId xmlns:a16="http://schemas.microsoft.com/office/drawing/2014/main" id="{A5B286D5-90C4-4615-B2F9-5276D7695933}"/>
               </a:ext>
             </a:extLst>
           </p:cNvPr>
@@ -39273,7 +39273,7 @@
           <p:cNvPr id="21" name="Shape 16">
             <a:extLst xmlns:a="http://schemas.openxmlformats.org/drawingml/2006/main">
               <a:ext uri="{FF2B5EF4-FFF2-40B4-BE49-F238E27FC236}">
-                <a16:creationId xmlns:a16="http://schemas.microsoft.com/office/drawing/2014/main" id="{CDABF805-5472-4FE9-8F41-E80B472D6BB6}"/>
+                <a16:creationId xmlns:a16="http://schemas.microsoft.com/office/drawing/2014/main" id="{55E2EC8B-BFF5-4523-9269-56BDB15B8770}"/>
               </a:ext>
             </a:extLst>
           </p:cNvPr>
@@ -39320,7 +39320,7 @@
           <p:cNvPr id="22" name="Text 17">
             <a:extLst xmlns:a="http://schemas.openxmlformats.org/drawingml/2006/main">
               <a:ext uri="{FF2B5EF4-FFF2-40B4-BE49-F238E27FC236}">
-                <a16:creationId xmlns:a16="http://schemas.microsoft.com/office/drawing/2014/main" id="{221DA64D-CBFE-42D4-B523-739F3696C368}"/>
+                <a16:creationId xmlns:a16="http://schemas.microsoft.com/office/drawing/2014/main" id="{693F39E4-222F-4D20-BC40-6050B97B12D9}"/>
               </a:ext>
             </a:extLst>
           </p:cNvPr>
@@ -39365,7 +39365,7 @@
           <p:cNvPr id="23" name="Text 18">
             <a:extLst xmlns:a="http://schemas.openxmlformats.org/drawingml/2006/main">
               <a:ext uri="{FF2B5EF4-FFF2-40B4-BE49-F238E27FC236}">
-                <a16:creationId xmlns:a16="http://schemas.microsoft.com/office/drawing/2014/main" id="{5E801F5A-B206-4A00-B388-680C4D11214E}"/>
+                <a16:creationId xmlns:a16="http://schemas.microsoft.com/office/drawing/2014/main" id="{8C2585C7-9E35-46CA-9D74-9E373FB892FB}"/>
               </a:ext>
             </a:extLst>
           </p:cNvPr>
@@ -39410,7 +39410,7 @@
           <p:cNvPr id="24" name="Text 19">
             <a:extLst xmlns:a="http://schemas.openxmlformats.org/drawingml/2006/main">
               <a:ext uri="{FF2B5EF4-FFF2-40B4-BE49-F238E27FC236}">
-                <a16:creationId xmlns:a16="http://schemas.microsoft.com/office/drawing/2014/main" id="{598939CD-D80A-4081-A193-4461CA27479B}"/>
+                <a16:creationId xmlns:a16="http://schemas.microsoft.com/office/drawing/2014/main" id="{5346C1DC-3B35-470F-B61C-0CE23027AC6F}"/>
               </a:ext>
             </a:extLst>
           </p:cNvPr>
@@ -39455,7 +39455,7 @@
           <p:cNvPr id="25" name="Text 20">
             <a:extLst xmlns:a="http://schemas.openxmlformats.org/drawingml/2006/main">
               <a:ext uri="{FF2B5EF4-FFF2-40B4-BE49-F238E27FC236}">
-                <a16:creationId xmlns:a16="http://schemas.microsoft.com/office/drawing/2014/main" id="{2183B6F8-BBE3-4EFA-ABC3-99F59453C330}"/>
+                <a16:creationId xmlns:a16="http://schemas.microsoft.com/office/drawing/2014/main" id="{3C33A1E2-DAB4-4DF2-897F-AD572FA0D6FD}"/>
               </a:ext>
             </a:extLst>
           </p:cNvPr>
@@ -39500,7 +39500,7 @@
           <p:cNvPr id="26" name="Text 21">
             <a:extLst xmlns:a="http://schemas.openxmlformats.org/drawingml/2006/main">
               <a:ext uri="{FF2B5EF4-FFF2-40B4-BE49-F238E27FC236}">
-                <a16:creationId xmlns:a16="http://schemas.microsoft.com/office/drawing/2014/main" id="{A435E76B-3B07-4ED0-A547-DC0C9DD1A00F}"/>
+                <a16:creationId xmlns:a16="http://schemas.microsoft.com/office/drawing/2014/main" id="{860E9DAB-8734-4EAC-907A-96D5868DD920}"/>
               </a:ext>
             </a:extLst>
           </p:cNvPr>
@@ -39545,7 +39545,7 @@
           <p:cNvPr id="27" name="Text 22">
             <a:extLst xmlns:a="http://schemas.openxmlformats.org/drawingml/2006/main">
               <a:ext uri="{FF2B5EF4-FFF2-40B4-BE49-F238E27FC236}">
-                <a16:creationId xmlns:a16="http://schemas.microsoft.com/office/drawing/2014/main" id="{DF188397-EF3B-494F-A841-19E2F03BAD49}"/>
+                <a16:creationId xmlns:a16="http://schemas.microsoft.com/office/drawing/2014/main" id="{E70E742C-A606-42F5-8BE0-7C43007F6182}"/>
               </a:ext>
             </a:extLst>
           </p:cNvPr>
@@ -39590,7 +39590,7 @@
           <p:cNvPr id="28" name="Text 23">
             <a:extLst xmlns:a="http://schemas.openxmlformats.org/drawingml/2006/main">
               <a:ext uri="{FF2B5EF4-FFF2-40B4-BE49-F238E27FC236}">
-                <a16:creationId xmlns:a16="http://schemas.microsoft.com/office/drawing/2014/main" id="{C704D942-ECE9-4FEC-AE52-E0F10B783906}"/>
+                <a16:creationId xmlns:a16="http://schemas.microsoft.com/office/drawing/2014/main" id="{B36331CB-6B60-4225-958B-D494DEDADE39}"/>
               </a:ext>
             </a:extLst>
           </p:cNvPr>
@@ -39635,7 +39635,7 @@
           <p:cNvPr id="29" name="Text 24">
             <a:extLst xmlns:a="http://schemas.openxmlformats.org/drawingml/2006/main">
               <a:ext uri="{FF2B5EF4-FFF2-40B4-BE49-F238E27FC236}">
-                <a16:creationId xmlns:a16="http://schemas.microsoft.com/office/drawing/2014/main" id="{7F68A707-F9B7-4AA8-AF36-9BDD77AAA62D}"/>
+                <a16:creationId xmlns:a16="http://schemas.microsoft.com/office/drawing/2014/main" id="{29B67F0D-4981-4210-9037-63BED7FF5BDB}"/>
               </a:ext>
             </a:extLst>
           </p:cNvPr>
@@ -39680,7 +39680,7 @@
           <p:cNvPr id="30" name="Text 25">
             <a:extLst xmlns:a="http://schemas.openxmlformats.org/drawingml/2006/main">
               <a:ext uri="{FF2B5EF4-FFF2-40B4-BE49-F238E27FC236}">
-                <a16:creationId xmlns:a16="http://schemas.microsoft.com/office/drawing/2014/main" id="{2AEEE622-7E23-4C90-AAF6-A5745C83AFCF}"/>
+                <a16:creationId xmlns:a16="http://schemas.microsoft.com/office/drawing/2014/main" id="{BDEADF03-828C-45A2-8D57-8AC282B8B832}"/>
               </a:ext>
             </a:extLst>
           </p:cNvPr>
@@ -39725,7 +39725,7 @@
           <p:cNvPr id="31" name="Text 26">
             <a:extLst xmlns:a="http://schemas.openxmlformats.org/drawingml/2006/main">
               <a:ext uri="{FF2B5EF4-FFF2-40B4-BE49-F238E27FC236}">
-                <a16:creationId xmlns:a16="http://schemas.microsoft.com/office/drawing/2014/main" id="{24670C21-B08A-4EA0-932A-28CEBFEEC152}"/>
+                <a16:creationId xmlns:a16="http://schemas.microsoft.com/office/drawing/2014/main" id="{42F6D6C6-6D38-45F9-A306-8F7129FA4739}"/>
               </a:ext>
             </a:extLst>
           </p:cNvPr>
@@ -39770,7 +39770,7 @@
           <p:cNvPr id="32" name="Text 27">
             <a:extLst xmlns:a="http://schemas.openxmlformats.org/drawingml/2006/main">
               <a:ext uri="{FF2B5EF4-FFF2-40B4-BE49-F238E27FC236}">
-                <a16:creationId xmlns:a16="http://schemas.microsoft.com/office/drawing/2014/main" id="{809E8A3E-6AC2-4A46-85BF-09E0B4BD0924}"/>
+                <a16:creationId xmlns:a16="http://schemas.microsoft.com/office/drawing/2014/main" id="{8715CC95-FB52-4733-9B3B-ADF642464296}"/>
               </a:ext>
             </a:extLst>
           </p:cNvPr>
@@ -39815,7 +39815,7 @@
           <p:cNvPr id="33" name="Text 28">
             <a:extLst xmlns:a="http://schemas.openxmlformats.org/drawingml/2006/main">
               <a:ext uri="{FF2B5EF4-FFF2-40B4-BE49-F238E27FC236}">
-                <a16:creationId xmlns:a16="http://schemas.microsoft.com/office/drawing/2014/main" id="{44584EDC-AA72-4798-B5EC-7DAD8135DD94}"/>
+                <a16:creationId xmlns:a16="http://schemas.microsoft.com/office/drawing/2014/main" id="{35CD54D5-2263-4428-BCE4-FB6823541EA9}"/>
               </a:ext>
             </a:extLst>
           </p:cNvPr>
@@ -39860,7 +39860,7 @@
           <p:cNvPr id="34" name="Text 29">
             <a:extLst xmlns:a="http://schemas.openxmlformats.org/drawingml/2006/main">
               <a:ext uri="{FF2B5EF4-FFF2-40B4-BE49-F238E27FC236}">
-                <a16:creationId xmlns:a16="http://schemas.microsoft.com/office/drawing/2014/main" id="{4DF2BE98-8D66-4257-AC47-6E831B317525}"/>
+                <a16:creationId xmlns:a16="http://schemas.microsoft.com/office/drawing/2014/main" id="{B51E5C8A-36F9-4642-B030-E9495A5B2F91}"/>
               </a:ext>
             </a:extLst>
           </p:cNvPr>
@@ -39906,7 +39906,7 @@
     </p:spTree>
     <p:extLst>
       <p:ext uri="{BB962C8B-B14F-4D97-AF65-F5344CB8AC3E}">
-        <p14:creationId xmlns:p14="http://schemas.microsoft.com/office/powerpoint/2010/main" val="458972282"/>
+        <p14:creationId xmlns:p14="http://schemas.microsoft.com/office/powerpoint/2010/main" val="961799599"/>
       </p:ext>
     </p:extLst>
   </p:cSld>
@@ -39937,7 +39937,7 @@
           <p:cNvPr id="2" name="Text 0">
             <a:extLst xmlns:a="http://schemas.openxmlformats.org/drawingml/2006/main">
               <a:ext uri="{FF2B5EF4-FFF2-40B4-BE49-F238E27FC236}">
-                <a16:creationId xmlns:a16="http://schemas.microsoft.com/office/drawing/2014/main" id="{A3F43C41-FC2B-455C-B1BA-4C24D18581D4}"/>
+                <a16:creationId xmlns:a16="http://schemas.microsoft.com/office/drawing/2014/main" id="{666C132D-107C-4C44-A6A2-062D0C3B7928}"/>
               </a:ext>
             </a:extLst>
           </p:cNvPr>
@@ -39982,7 +39982,7 @@
           <p:cNvPr id="3" name="Text 1">
             <a:extLst xmlns:a="http://schemas.openxmlformats.org/drawingml/2006/main">
               <a:ext uri="{FF2B5EF4-FFF2-40B4-BE49-F238E27FC236}">
-                <a16:creationId xmlns:a16="http://schemas.microsoft.com/office/drawing/2014/main" id="{AEE4A7A1-CB6C-41A9-BE34-D57B8E2BEF05}"/>
+                <a16:creationId xmlns:a16="http://schemas.microsoft.com/office/drawing/2014/main" id="{DD90826B-8D5A-4AD4-AE77-399CF5180C50}"/>
               </a:ext>
             </a:extLst>
           </p:cNvPr>
@@ -40027,7 +40027,7 @@
           <p:cNvPr id="4" name="Text 2">
             <a:extLst xmlns:a="http://schemas.openxmlformats.org/drawingml/2006/main">
               <a:ext uri="{FF2B5EF4-FFF2-40B4-BE49-F238E27FC236}">
-                <a16:creationId xmlns:a16="http://schemas.microsoft.com/office/drawing/2014/main" id="{E1F8BE92-1FD5-474C-BAF2-4E842C1AC985}"/>
+                <a16:creationId xmlns:a16="http://schemas.microsoft.com/office/drawing/2014/main" id="{2D3CD029-BD37-474C-B790-57B8FA6FFA99}"/>
               </a:ext>
             </a:extLst>
           </p:cNvPr>
@@ -40072,7 +40072,7 @@
           <p:cNvPr id="5" name="Text 3">
             <a:extLst xmlns:a="http://schemas.openxmlformats.org/drawingml/2006/main">
               <a:ext uri="{FF2B5EF4-FFF2-40B4-BE49-F238E27FC236}">
-                <a16:creationId xmlns:a16="http://schemas.microsoft.com/office/drawing/2014/main" id="{4D842F2B-9E57-491B-9743-7B17B55F80AA}"/>
+                <a16:creationId xmlns:a16="http://schemas.microsoft.com/office/drawing/2014/main" id="{D09D7EC4-4CF5-4C1F-9CB6-05BC08D03311}"/>
               </a:ext>
             </a:extLst>
           </p:cNvPr>
@@ -40117,7 +40117,7 @@
           <p:cNvPr id="6" name="Text 4">
             <a:extLst xmlns:a="http://schemas.openxmlformats.org/drawingml/2006/main">
               <a:ext uri="{FF2B5EF4-FFF2-40B4-BE49-F238E27FC236}">
-                <a16:creationId xmlns:a16="http://schemas.microsoft.com/office/drawing/2014/main" id="{E4535B89-CE3A-433A-A095-494EC1412ECA}"/>
+                <a16:creationId xmlns:a16="http://schemas.microsoft.com/office/drawing/2014/main" id="{3C2B9862-7921-41BA-BDE1-4524BFBA3E60}"/>
               </a:ext>
             </a:extLst>
           </p:cNvPr>
@@ -40162,7 +40162,7 @@
           <p:cNvPr id="7" name="Shape 5">
             <a:extLst xmlns:a="http://schemas.openxmlformats.org/drawingml/2006/main">
               <a:ext uri="{FF2B5EF4-FFF2-40B4-BE49-F238E27FC236}">
-                <a16:creationId xmlns:a16="http://schemas.microsoft.com/office/drawing/2014/main" id="{BF26F3AF-5976-4810-9402-9397FAE1A19B}"/>
+                <a16:creationId xmlns:a16="http://schemas.microsoft.com/office/drawing/2014/main" id="{D9D93722-3DEB-4AA4-90B1-A44B1C4EBD71}"/>
               </a:ext>
             </a:extLst>
           </p:cNvPr>
@@ -40213,7 +40213,7 @@
           <p:nvPr/>
         </p:nvPicPr>
         <p:blipFill>
-          <a:blip xmlns:r="http://schemas.openxmlformats.org/officeDocument/2006/relationships" xmlns:a="http://schemas.openxmlformats.org/drawingml/2006/main" r:embed="R201177bb50a547dd"/>
+          <a:blip xmlns:r="http://schemas.openxmlformats.org/officeDocument/2006/relationships" xmlns:a="http://schemas.openxmlformats.org/drawingml/2006/main" r:embed="R1b24055affe74d69"/>
           <a:stretch xmlns:a="http://schemas.openxmlformats.org/drawingml/2006/main">
             <a:fillRect l="0" t="0" r="0" b="0"/>
           </a:stretch>
@@ -40233,7 +40233,7 @@
           <p:cNvPr id="9" name="Text 6">
             <a:extLst xmlns:a="http://schemas.openxmlformats.org/drawingml/2006/main">
               <a:ext uri="{FF2B5EF4-FFF2-40B4-BE49-F238E27FC236}">
-                <a16:creationId xmlns:a16="http://schemas.microsoft.com/office/drawing/2014/main" id="{B47727B5-F590-44AF-9FC0-88001D69070F}"/>
+                <a16:creationId xmlns:a16="http://schemas.microsoft.com/office/drawing/2014/main" id="{25EF9BCC-89D3-4DFF-B42F-2DB9005BEB69}"/>
               </a:ext>
             </a:extLst>
           </p:cNvPr>
@@ -40300,7 +40300,7 @@
           <p:cNvPr id="10" name="Shape 7">
             <a:extLst xmlns:a="http://schemas.openxmlformats.org/drawingml/2006/main">
               <a:ext uri="{FF2B5EF4-FFF2-40B4-BE49-F238E27FC236}">
-                <a16:creationId xmlns:a16="http://schemas.microsoft.com/office/drawing/2014/main" id="{F46F39F8-D3C4-4C27-B8EE-DB04D65B7EBC}"/>
+                <a16:creationId xmlns:a16="http://schemas.microsoft.com/office/drawing/2014/main" id="{DF90F15D-C615-40F1-97F2-E5E6A44B4236}"/>
               </a:ext>
             </a:extLst>
           </p:cNvPr>
@@ -40351,7 +40351,7 @@
           <p:nvPr/>
         </p:nvPicPr>
         <p:blipFill>
-          <a:blip xmlns:r="http://schemas.openxmlformats.org/officeDocument/2006/relationships" xmlns:a="http://schemas.openxmlformats.org/drawingml/2006/main" r:embed="Rfb6c2aee1ae5418a"/>
+          <a:blip xmlns:r="http://schemas.openxmlformats.org/officeDocument/2006/relationships" xmlns:a="http://schemas.openxmlformats.org/drawingml/2006/main" r:embed="Rf9ba4f03fa4e4ed6"/>
           <a:stretch xmlns:a="http://schemas.openxmlformats.org/drawingml/2006/main">
             <a:fillRect l="0" t="0" r="0" b="0"/>
           </a:stretch>
@@ -40371,7 +40371,7 @@
           <p:cNvPr id="12" name="Text 8">
             <a:extLst xmlns:a="http://schemas.openxmlformats.org/drawingml/2006/main">
               <a:ext uri="{FF2B5EF4-FFF2-40B4-BE49-F238E27FC236}">
-                <a16:creationId xmlns:a16="http://schemas.microsoft.com/office/drawing/2014/main" id="{7FBFC26C-52E2-44A3-BF8B-C59ACB7F1F7C}"/>
+                <a16:creationId xmlns:a16="http://schemas.microsoft.com/office/drawing/2014/main" id="{7FD7B09A-7AA6-4EB3-B30F-43742ABD59DF}"/>
               </a:ext>
             </a:extLst>
           </p:cNvPr>
@@ -40438,7 +40438,7 @@
           <p:cNvPr id="13" name="Shape 9">
             <a:extLst xmlns:a="http://schemas.openxmlformats.org/drawingml/2006/main">
               <a:ext uri="{FF2B5EF4-FFF2-40B4-BE49-F238E27FC236}">
-                <a16:creationId xmlns:a16="http://schemas.microsoft.com/office/drawing/2014/main" id="{1B83BD24-1579-4DBB-9438-3203A8EB525D}"/>
+                <a16:creationId xmlns:a16="http://schemas.microsoft.com/office/drawing/2014/main" id="{46045E2D-8084-4415-B7EE-0AFBD5C5CD92}"/>
               </a:ext>
             </a:extLst>
           </p:cNvPr>
@@ -40489,7 +40489,7 @@
           <p:nvPr/>
         </p:nvPicPr>
         <p:blipFill>
-          <a:blip xmlns:r="http://schemas.openxmlformats.org/officeDocument/2006/relationships" xmlns:a="http://schemas.openxmlformats.org/drawingml/2006/main" r:embed="Rca89a63c3c414f39"/>
+          <a:blip xmlns:r="http://schemas.openxmlformats.org/officeDocument/2006/relationships" xmlns:a="http://schemas.openxmlformats.org/drawingml/2006/main" r:embed="Rc257a1ff410a461f"/>
           <a:stretch xmlns:a="http://schemas.openxmlformats.org/drawingml/2006/main">
             <a:fillRect l="0" t="0" r="0" b="0"/>
           </a:stretch>
@@ -40509,7 +40509,7 @@
           <p:cNvPr id="15" name="Text 10">
             <a:extLst xmlns:a="http://schemas.openxmlformats.org/drawingml/2006/main">
               <a:ext uri="{FF2B5EF4-FFF2-40B4-BE49-F238E27FC236}">
-                <a16:creationId xmlns:a16="http://schemas.microsoft.com/office/drawing/2014/main" id="{27999E65-90F0-4543-BC96-496890481B3E}"/>
+                <a16:creationId xmlns:a16="http://schemas.microsoft.com/office/drawing/2014/main" id="{A162519D-3831-4640-95DB-C44405AC56AF}"/>
               </a:ext>
             </a:extLst>
           </p:cNvPr>
@@ -40576,7 +40576,7 @@
           <p:cNvPr id="16" name="Shape 11">
             <a:extLst xmlns:a="http://schemas.openxmlformats.org/drawingml/2006/main">
               <a:ext uri="{FF2B5EF4-FFF2-40B4-BE49-F238E27FC236}">
-                <a16:creationId xmlns:a16="http://schemas.microsoft.com/office/drawing/2014/main" id="{66CBC0C1-30D4-4007-87BE-25DDF2514831}"/>
+                <a16:creationId xmlns:a16="http://schemas.microsoft.com/office/drawing/2014/main" id="{A3AB07B9-F314-4889-9A71-363B7092FEDA}"/>
               </a:ext>
             </a:extLst>
           </p:cNvPr>
@@ -40627,7 +40627,7 @@
           <p:nvPr/>
         </p:nvPicPr>
         <p:blipFill>
-          <a:blip xmlns:r="http://schemas.openxmlformats.org/officeDocument/2006/relationships" xmlns:a="http://schemas.openxmlformats.org/drawingml/2006/main" r:embed="R3c51c08a84464aec"/>
+          <a:blip xmlns:r="http://schemas.openxmlformats.org/officeDocument/2006/relationships" xmlns:a="http://schemas.openxmlformats.org/drawingml/2006/main" r:embed="Rbf8488c658a74044"/>
           <a:stretch xmlns:a="http://schemas.openxmlformats.org/drawingml/2006/main">
             <a:fillRect l="0" t="0" r="0" b="0"/>
           </a:stretch>
@@ -40647,7 +40647,7 @@
           <p:cNvPr id="18" name="Text 12">
             <a:extLst xmlns:a="http://schemas.openxmlformats.org/drawingml/2006/main">
               <a:ext uri="{FF2B5EF4-FFF2-40B4-BE49-F238E27FC236}">
-                <a16:creationId xmlns:a16="http://schemas.microsoft.com/office/drawing/2014/main" id="{3FE7CDE6-90CF-4A56-8E46-AFBF8F169D4D}"/>
+                <a16:creationId xmlns:a16="http://schemas.microsoft.com/office/drawing/2014/main" id="{CF5DB0B7-1C07-4E7C-9CC5-D7E4E7A82136}"/>
               </a:ext>
             </a:extLst>
           </p:cNvPr>
@@ -40714,7 +40714,7 @@
           <p:cNvPr id="19" name="Shape 13">
             <a:extLst xmlns:a="http://schemas.openxmlformats.org/drawingml/2006/main">
               <a:ext uri="{FF2B5EF4-FFF2-40B4-BE49-F238E27FC236}">
-                <a16:creationId xmlns:a16="http://schemas.microsoft.com/office/drawing/2014/main" id="{6CF93AC7-43B4-4C42-B573-7B3FE2273207}"/>
+                <a16:creationId xmlns:a16="http://schemas.microsoft.com/office/drawing/2014/main" id="{C2995736-2FD4-427C-A29B-16DE5DCA7E43}"/>
               </a:ext>
             </a:extLst>
           </p:cNvPr>
@@ -40765,7 +40765,7 @@
           <p:nvPr/>
         </p:nvPicPr>
         <p:blipFill>
-          <a:blip xmlns:r="http://schemas.openxmlformats.org/officeDocument/2006/relationships" xmlns:a="http://schemas.openxmlformats.org/drawingml/2006/main" r:embed="Rbffc276383204946"/>
+          <a:blip xmlns:r="http://schemas.openxmlformats.org/officeDocument/2006/relationships" xmlns:a="http://schemas.openxmlformats.org/drawingml/2006/main" r:embed="R71074bfefa934efe"/>
           <a:stretch xmlns:a="http://schemas.openxmlformats.org/drawingml/2006/main">
             <a:fillRect l="0" t="0" r="0" b="0"/>
           </a:stretch>
@@ -40785,7 +40785,7 @@
           <p:cNvPr id="21" name="Text 14">
             <a:extLst xmlns:a="http://schemas.openxmlformats.org/drawingml/2006/main">
               <a:ext uri="{FF2B5EF4-FFF2-40B4-BE49-F238E27FC236}">
-                <a16:creationId xmlns:a16="http://schemas.microsoft.com/office/drawing/2014/main" id="{209C6230-C247-4AE2-8887-658BF95DA491}"/>
+                <a16:creationId xmlns:a16="http://schemas.microsoft.com/office/drawing/2014/main" id="{B01DFA7D-BB0D-412B-974F-387905C19B7D}"/>
               </a:ext>
             </a:extLst>
           </p:cNvPr>
@@ -40852,7 +40852,7 @@
           <p:cNvPr id="22" name="Shape 15">
             <a:extLst xmlns:a="http://schemas.openxmlformats.org/drawingml/2006/main">
               <a:ext uri="{FF2B5EF4-FFF2-40B4-BE49-F238E27FC236}">
-                <a16:creationId xmlns:a16="http://schemas.microsoft.com/office/drawing/2014/main" id="{1BDED44B-2F9A-42A7-876D-EEC3538E12A1}"/>
+                <a16:creationId xmlns:a16="http://schemas.microsoft.com/office/drawing/2014/main" id="{14705C7E-C8E8-498E-8997-9D4ABFA573AC}"/>
               </a:ext>
             </a:extLst>
           </p:cNvPr>
@@ -40903,7 +40903,7 @@
           <p:nvPr/>
         </p:nvPicPr>
         <p:blipFill>
-          <a:blip xmlns:r="http://schemas.openxmlformats.org/officeDocument/2006/relationships" xmlns:a="http://schemas.openxmlformats.org/drawingml/2006/main" r:embed="R0c949087df0a48c3"/>
+          <a:blip xmlns:r="http://schemas.openxmlformats.org/officeDocument/2006/relationships" xmlns:a="http://schemas.openxmlformats.org/drawingml/2006/main" r:embed="R61b7cacaa30c4b21"/>
           <a:stretch xmlns:a="http://schemas.openxmlformats.org/drawingml/2006/main">
             <a:fillRect l="0" t="0" r="0" b="0"/>
           </a:stretch>
@@ -40923,7 +40923,7 @@
           <p:cNvPr id="24" name="Text 16">
             <a:extLst xmlns:a="http://schemas.openxmlformats.org/drawingml/2006/main">
               <a:ext uri="{FF2B5EF4-FFF2-40B4-BE49-F238E27FC236}">
-                <a16:creationId xmlns:a16="http://schemas.microsoft.com/office/drawing/2014/main" id="{77E9498C-B759-4331-953B-18A729E8E438}"/>
+                <a16:creationId xmlns:a16="http://schemas.microsoft.com/office/drawing/2014/main" id="{2DB35CA1-0992-49E3-AF66-EE9988FEE519}"/>
               </a:ext>
             </a:extLst>
           </p:cNvPr>
@@ -40990,7 +40990,7 @@
           <p:cNvPr id="25" name="Shape 17">
             <a:extLst xmlns:a="http://schemas.openxmlformats.org/drawingml/2006/main">
               <a:ext uri="{FF2B5EF4-FFF2-40B4-BE49-F238E27FC236}">
-                <a16:creationId xmlns:a16="http://schemas.microsoft.com/office/drawing/2014/main" id="{2C1775CF-36B0-49BF-9350-2E983140090A}"/>
+                <a16:creationId xmlns:a16="http://schemas.microsoft.com/office/drawing/2014/main" id="{F4EE7A66-3B10-4A20-AAD9-D50EDF99334F}"/>
               </a:ext>
             </a:extLst>
           </p:cNvPr>
@@ -41034,7 +41034,7 @@
           <p:nvPr/>
         </p:nvPicPr>
         <p:blipFill>
-          <a:blip xmlns:r="http://schemas.openxmlformats.org/officeDocument/2006/relationships" xmlns:a="http://schemas.openxmlformats.org/drawingml/2006/main" r:embed="R6e59d0d0864d45a5"/>
+          <a:blip xmlns:r="http://schemas.openxmlformats.org/officeDocument/2006/relationships" xmlns:a="http://schemas.openxmlformats.org/drawingml/2006/main" r:embed="R0503536e26804039"/>
           <a:stretch xmlns:a="http://schemas.openxmlformats.org/drawingml/2006/main">
             <a:fillRect l="0" t="0" r="0" b="0"/>
           </a:stretch>
@@ -41054,7 +41054,7 @@
           <p:cNvPr id="27" name="Text 18">
             <a:extLst xmlns:a="http://schemas.openxmlformats.org/drawingml/2006/main">
               <a:ext uri="{FF2B5EF4-FFF2-40B4-BE49-F238E27FC236}">
-                <a16:creationId xmlns:a16="http://schemas.microsoft.com/office/drawing/2014/main" id="{B7D71ABE-5CC7-4F88-98CC-C73E4976EC1D}"/>
+                <a16:creationId xmlns:a16="http://schemas.microsoft.com/office/drawing/2014/main" id="{B7C2DFC9-4925-4FD8-8189-F6F7C75C0661}"/>
               </a:ext>
             </a:extLst>
           </p:cNvPr>
@@ -41102,7 +41102,7 @@
           <p:cNvPr id="28" name="Text 19">
             <a:extLst xmlns:a="http://schemas.openxmlformats.org/drawingml/2006/main">
               <a:ext uri="{FF2B5EF4-FFF2-40B4-BE49-F238E27FC236}">
-                <a16:creationId xmlns:a16="http://schemas.microsoft.com/office/drawing/2014/main" id="{B0508A09-211A-4B4D-80F6-31DAC83EA3ED}"/>
+                <a16:creationId xmlns:a16="http://schemas.microsoft.com/office/drawing/2014/main" id="{9E17D7C7-D532-41B4-8C7D-57D7CD34BD45}"/>
               </a:ext>
             </a:extLst>
           </p:cNvPr>
@@ -41147,7 +41147,7 @@
           <p:cNvPr id="29" name="Shape 20">
             <a:extLst xmlns:a="http://schemas.openxmlformats.org/drawingml/2006/main">
               <a:ext uri="{FF2B5EF4-FFF2-40B4-BE49-F238E27FC236}">
-                <a16:creationId xmlns:a16="http://schemas.microsoft.com/office/drawing/2014/main" id="{02DEB3B7-196D-4E07-AFA1-7BF31B1DDC13}"/>
+                <a16:creationId xmlns:a16="http://schemas.microsoft.com/office/drawing/2014/main" id="{D31C89B4-C108-4135-A962-B0F0DC7E3CC1}"/>
               </a:ext>
             </a:extLst>
           </p:cNvPr>
@@ -41191,7 +41191,7 @@
           <p:nvPr/>
         </p:nvPicPr>
         <p:blipFill>
-          <a:blip xmlns:r="http://schemas.openxmlformats.org/officeDocument/2006/relationships" xmlns:a="http://schemas.openxmlformats.org/drawingml/2006/main" r:embed="R5d8cb46a10e64188"/>
+          <a:blip xmlns:r="http://schemas.openxmlformats.org/officeDocument/2006/relationships" xmlns:a="http://schemas.openxmlformats.org/drawingml/2006/main" r:embed="R1a53be9286ce42fc"/>
           <a:stretch xmlns:a="http://schemas.openxmlformats.org/drawingml/2006/main">
             <a:fillRect l="0" t="0" r="0" b="0"/>
           </a:stretch>
@@ -41211,7 +41211,7 @@
           <p:cNvPr id="31" name="Text 21">
             <a:extLst xmlns:a="http://schemas.openxmlformats.org/drawingml/2006/main">
               <a:ext uri="{FF2B5EF4-FFF2-40B4-BE49-F238E27FC236}">
-                <a16:creationId xmlns:a16="http://schemas.microsoft.com/office/drawing/2014/main" id="{D23ACF5D-5268-4D32-AE17-B1724233726C}"/>
+                <a16:creationId xmlns:a16="http://schemas.microsoft.com/office/drawing/2014/main" id="{CE01FCD2-AB3C-4839-92DE-CF2491888EB5}"/>
               </a:ext>
             </a:extLst>
           </p:cNvPr>
@@ -41259,7 +41259,7 @@
           <p:cNvPr id="32" name="Text 22">
             <a:extLst xmlns:a="http://schemas.openxmlformats.org/drawingml/2006/main">
               <a:ext uri="{FF2B5EF4-FFF2-40B4-BE49-F238E27FC236}">
-                <a16:creationId xmlns:a16="http://schemas.microsoft.com/office/drawing/2014/main" id="{1FCE24A4-4DE4-43CA-BD07-EC50FE8FF555}"/>
+                <a16:creationId xmlns:a16="http://schemas.microsoft.com/office/drawing/2014/main" id="{515B9215-3312-4490-9567-9E6243AAE100}"/>
               </a:ext>
             </a:extLst>
           </p:cNvPr>
@@ -41304,7 +41304,7 @@
           <p:cNvPr id="33" name="Shape 23">
             <a:extLst xmlns:a="http://schemas.openxmlformats.org/drawingml/2006/main">
               <a:ext uri="{FF2B5EF4-FFF2-40B4-BE49-F238E27FC236}">
-                <a16:creationId xmlns:a16="http://schemas.microsoft.com/office/drawing/2014/main" id="{2FB5F301-8D6A-4A9F-9EB6-D61DF630AE41}"/>
+                <a16:creationId xmlns:a16="http://schemas.microsoft.com/office/drawing/2014/main" id="{E5FD7BB7-B54B-4BBA-A230-BEAB5C18A544}"/>
               </a:ext>
             </a:extLst>
           </p:cNvPr>
@@ -41351,7 +41351,7 @@
           <p:cNvPr id="34" name="Text 24">
             <a:extLst xmlns:a="http://schemas.openxmlformats.org/drawingml/2006/main">
               <a:ext uri="{FF2B5EF4-FFF2-40B4-BE49-F238E27FC236}">
-                <a16:creationId xmlns:a16="http://schemas.microsoft.com/office/drawing/2014/main" id="{BFEDE470-6692-4119-9CF9-EA9874394351}"/>
+                <a16:creationId xmlns:a16="http://schemas.microsoft.com/office/drawing/2014/main" id="{BF0134CD-8597-4056-B749-E711E1132653}"/>
               </a:ext>
             </a:extLst>
           </p:cNvPr>
@@ -41410,7 +41410,7 @@
           <p:cNvPr id="35" name="Text 25">
             <a:extLst xmlns:a="http://schemas.openxmlformats.org/drawingml/2006/main">
               <a:ext uri="{FF2B5EF4-FFF2-40B4-BE49-F238E27FC236}">
-                <a16:creationId xmlns:a16="http://schemas.microsoft.com/office/drawing/2014/main" id="{90AE6A92-ECC7-4A43-9B79-77E51B904CE9}"/>
+                <a16:creationId xmlns:a16="http://schemas.microsoft.com/office/drawing/2014/main" id="{E4B884D8-05CB-453B-8583-E57EC44D8B60}"/>
               </a:ext>
             </a:extLst>
           </p:cNvPr>
@@ -41455,7 +41455,7 @@
           <p:cNvPr id="36" name="Shape 26">
             <a:extLst xmlns:a="http://schemas.openxmlformats.org/drawingml/2006/main">
               <a:ext uri="{FF2B5EF4-FFF2-40B4-BE49-F238E27FC236}">
-                <a16:creationId xmlns:a16="http://schemas.microsoft.com/office/drawing/2014/main" id="{F023A7D9-AE6E-4D8A-90B0-C0A5B2BEA42E}"/>
+                <a16:creationId xmlns:a16="http://schemas.microsoft.com/office/drawing/2014/main" id="{5849E31C-38AF-447C-BB48-19EF4A34E57E}"/>
               </a:ext>
             </a:extLst>
           </p:cNvPr>
@@ -41502,7 +41502,7 @@
           <p:cNvPr id="37" name="Text 27">
             <a:extLst xmlns:a="http://schemas.openxmlformats.org/drawingml/2006/main">
               <a:ext uri="{FF2B5EF4-FFF2-40B4-BE49-F238E27FC236}">
-                <a16:creationId xmlns:a16="http://schemas.microsoft.com/office/drawing/2014/main" id="{3D86419F-DE50-4A10-B7C4-049927DBE0C9}"/>
+                <a16:creationId xmlns:a16="http://schemas.microsoft.com/office/drawing/2014/main" id="{34E54489-DA07-434A-9962-0C5E2B533213}"/>
               </a:ext>
             </a:extLst>
           </p:cNvPr>
@@ -41547,7 +41547,7 @@
           <p:cNvPr id="38" name="Text 28">
             <a:extLst xmlns:a="http://schemas.openxmlformats.org/drawingml/2006/main">
               <a:ext uri="{FF2B5EF4-FFF2-40B4-BE49-F238E27FC236}">
-                <a16:creationId xmlns:a16="http://schemas.microsoft.com/office/drawing/2014/main" id="{E5B881B2-686F-4538-B1C6-A3CD741DC239}"/>
+                <a16:creationId xmlns:a16="http://schemas.microsoft.com/office/drawing/2014/main" id="{DB1442EA-E7FE-4D51-A829-C016B1FAD0A3}"/>
               </a:ext>
             </a:extLst>
           </p:cNvPr>
@@ -41595,7 +41595,7 @@
           <p:cNvPr id="39" name="Shape 29">
             <a:extLst xmlns:a="http://schemas.openxmlformats.org/drawingml/2006/main">
               <a:ext uri="{FF2B5EF4-FFF2-40B4-BE49-F238E27FC236}">
-                <a16:creationId xmlns:a16="http://schemas.microsoft.com/office/drawing/2014/main" id="{73C77860-0A46-4287-8971-4DB8B02203DB}"/>
+                <a16:creationId xmlns:a16="http://schemas.microsoft.com/office/drawing/2014/main" id="{2FA3CB56-FBF2-461A-A72D-EFA72B16F97E}"/>
               </a:ext>
             </a:extLst>
           </p:cNvPr>
@@ -41642,7 +41642,7 @@
           <p:cNvPr id="40" name="Text 30">
             <a:extLst xmlns:a="http://schemas.openxmlformats.org/drawingml/2006/main">
               <a:ext uri="{FF2B5EF4-FFF2-40B4-BE49-F238E27FC236}">
-                <a16:creationId xmlns:a16="http://schemas.microsoft.com/office/drawing/2014/main" id="{38BA00C9-6517-4227-AD98-F732859D3FEA}"/>
+                <a16:creationId xmlns:a16="http://schemas.microsoft.com/office/drawing/2014/main" id="{35E75E08-B6DB-4FC5-BFE2-6ABB9741CEEB}"/>
               </a:ext>
             </a:extLst>
           </p:cNvPr>
@@ -41687,7 +41687,7 @@
           <p:cNvPr id="41" name="Text 31">
             <a:extLst xmlns:a="http://schemas.openxmlformats.org/drawingml/2006/main">
               <a:ext uri="{FF2B5EF4-FFF2-40B4-BE49-F238E27FC236}">
-                <a16:creationId xmlns:a16="http://schemas.microsoft.com/office/drawing/2014/main" id="{B64F6A0A-D246-4AEF-95A8-7D37C733208C}"/>
+                <a16:creationId xmlns:a16="http://schemas.microsoft.com/office/drawing/2014/main" id="{5C70E1EA-B931-4364-8295-D17F6B0B2FA5}"/>
               </a:ext>
             </a:extLst>
           </p:cNvPr>
@@ -41733,7 +41733,7 @@
     </p:spTree>
     <p:extLst>
       <p:ext uri="{BB962C8B-B14F-4D97-AF65-F5344CB8AC3E}">
-        <p14:creationId xmlns:p14="http://schemas.microsoft.com/office/powerpoint/2010/main" val="1139183270"/>
+        <p14:creationId xmlns:p14="http://schemas.microsoft.com/office/powerpoint/2010/main" val="21524653"/>
       </p:ext>
     </p:extLst>
   </p:cSld>
@@ -41764,7 +41764,7 @@
           <p:cNvPr id="2" name="Text 0">
             <a:extLst xmlns:a="http://schemas.openxmlformats.org/drawingml/2006/main">
               <a:ext uri="{FF2B5EF4-FFF2-40B4-BE49-F238E27FC236}">
-                <a16:creationId xmlns:a16="http://schemas.microsoft.com/office/drawing/2014/main" id="{3B9367CD-0CFD-4680-B814-27BA9CE99CCD}"/>
+                <a16:creationId xmlns:a16="http://schemas.microsoft.com/office/drawing/2014/main" id="{F986AC03-6C58-4769-BA1E-D516A8DA1179}"/>
               </a:ext>
             </a:extLst>
           </p:cNvPr>
@@ -41809,7 +41809,7 @@
           <p:cNvPr id="3" name="Text 1">
             <a:extLst xmlns:a="http://schemas.openxmlformats.org/drawingml/2006/main">
               <a:ext uri="{FF2B5EF4-FFF2-40B4-BE49-F238E27FC236}">
-                <a16:creationId xmlns:a16="http://schemas.microsoft.com/office/drawing/2014/main" id="{D7ADB6C8-6925-4495-8B7E-8A35F68F61DC}"/>
+                <a16:creationId xmlns:a16="http://schemas.microsoft.com/office/drawing/2014/main" id="{24F3ED19-D695-423C-B5CD-94B6D5AA8C14}"/>
               </a:ext>
             </a:extLst>
           </p:cNvPr>
@@ -41854,7 +41854,7 @@
           <p:cNvPr id="4" name="Shape 2">
             <a:extLst xmlns:a="http://schemas.openxmlformats.org/drawingml/2006/main">
               <a:ext uri="{FF2B5EF4-FFF2-40B4-BE49-F238E27FC236}">
-                <a16:creationId xmlns:a16="http://schemas.microsoft.com/office/drawing/2014/main" id="{3984429C-39BD-436D-959A-BD60F4AAA7EE}"/>
+                <a16:creationId xmlns:a16="http://schemas.microsoft.com/office/drawing/2014/main" id="{F6852CBD-1DD5-44FA-8B05-6D80D934A6D0}"/>
               </a:ext>
             </a:extLst>
           </p:cNvPr>
@@ -41894,7 +41894,7 @@
           <p:cNvPr id="5" name="Shape 3">
             <a:extLst xmlns:a="http://schemas.openxmlformats.org/drawingml/2006/main">
               <a:ext uri="{FF2B5EF4-FFF2-40B4-BE49-F238E27FC236}">
-                <a16:creationId xmlns:a16="http://schemas.microsoft.com/office/drawing/2014/main" id="{17CF0C0B-0F76-40D6-93E9-B2DED29B0446}"/>
+                <a16:creationId xmlns:a16="http://schemas.microsoft.com/office/drawing/2014/main" id="{FBAA2EAD-0D31-4344-B606-D307821687DC}"/>
               </a:ext>
             </a:extLst>
           </p:cNvPr>
@@ -41934,7 +41934,7 @@
           <p:cNvPr id="6" name="Text 4">
             <a:extLst xmlns:a="http://schemas.openxmlformats.org/drawingml/2006/main">
               <a:ext uri="{FF2B5EF4-FFF2-40B4-BE49-F238E27FC236}">
-                <a16:creationId xmlns:a16="http://schemas.microsoft.com/office/drawing/2014/main" id="{5FC51D3C-D536-4BBE-BEAC-1BFDE9148CBB}"/>
+                <a16:creationId xmlns:a16="http://schemas.microsoft.com/office/drawing/2014/main" id="{54BD8778-BBBC-4173-B83B-E936E2C9FDA2}"/>
               </a:ext>
             </a:extLst>
           </p:cNvPr>
@@ -41979,7 +41979,7 @@
           <p:cNvPr id="7" name="Text 5">
             <a:extLst xmlns:a="http://schemas.openxmlformats.org/drawingml/2006/main">
               <a:ext uri="{FF2B5EF4-FFF2-40B4-BE49-F238E27FC236}">
-                <a16:creationId xmlns:a16="http://schemas.microsoft.com/office/drawing/2014/main" id="{752F6B19-C1CF-4C71-8AF8-F6558ED9C815}"/>
+                <a16:creationId xmlns:a16="http://schemas.microsoft.com/office/drawing/2014/main" id="{A1816698-EFFA-4A67-85F6-867F0A74BE50}"/>
               </a:ext>
             </a:extLst>
           </p:cNvPr>
@@ -42024,7 +42024,7 @@
           <p:cNvPr id="8" name="Text 6">
             <a:extLst xmlns:a="http://schemas.openxmlformats.org/drawingml/2006/main">
               <a:ext uri="{FF2B5EF4-FFF2-40B4-BE49-F238E27FC236}">
-                <a16:creationId xmlns:a16="http://schemas.microsoft.com/office/drawing/2014/main" id="{7A8FC78A-9B8B-4071-B77A-657ADF26CD8D}"/>
+                <a16:creationId xmlns:a16="http://schemas.microsoft.com/office/drawing/2014/main" id="{A81C1478-41E3-4366-B2B6-5DA7F25C8720}"/>
               </a:ext>
             </a:extLst>
           </p:cNvPr>
@@ -42070,7 +42070,7 @@
     </p:spTree>
     <p:extLst>
       <p:ext uri="{BB962C8B-B14F-4D97-AF65-F5344CB8AC3E}">
-        <p14:creationId xmlns:p14="http://schemas.microsoft.com/office/powerpoint/2010/main" val="742387432"/>
+        <p14:creationId xmlns:p14="http://schemas.microsoft.com/office/powerpoint/2010/main" val="93369723"/>
       </p:ext>
     </p:extLst>
   </p:cSld>
@@ -42101,7 +42101,7 @@
           <p:cNvPr id="2" name="Text 0">
             <a:extLst xmlns:a="http://schemas.openxmlformats.org/drawingml/2006/main">
               <a:ext uri="{FF2B5EF4-FFF2-40B4-BE49-F238E27FC236}">
-                <a16:creationId xmlns:a16="http://schemas.microsoft.com/office/drawing/2014/main" id="{C7DA83BC-7B12-47C7-BF50-978051A0A9F6}"/>
+                <a16:creationId xmlns:a16="http://schemas.microsoft.com/office/drawing/2014/main" id="{B5C71A52-AEBF-43B4-B5A0-ADBAF3D7F2AF}"/>
               </a:ext>
             </a:extLst>
           </p:cNvPr>
@@ -42146,7 +42146,7 @@
           <p:cNvPr id="3" name="Text 1">
             <a:extLst xmlns:a="http://schemas.openxmlformats.org/drawingml/2006/main">
               <a:ext uri="{FF2B5EF4-FFF2-40B4-BE49-F238E27FC236}">
-                <a16:creationId xmlns:a16="http://schemas.microsoft.com/office/drawing/2014/main" id="{9C43C31A-DFF4-4C0D-84E1-450D1E627465}"/>
+                <a16:creationId xmlns:a16="http://schemas.microsoft.com/office/drawing/2014/main" id="{F69679F3-A972-4B81-AE0A-11CA24504C93}"/>
               </a:ext>
             </a:extLst>
           </p:cNvPr>
@@ -42191,7 +42191,7 @@
           <p:cNvPr id="4" name="Text 2">
             <a:extLst xmlns:a="http://schemas.openxmlformats.org/drawingml/2006/main">
               <a:ext uri="{FF2B5EF4-FFF2-40B4-BE49-F238E27FC236}">
-                <a16:creationId xmlns:a16="http://schemas.microsoft.com/office/drawing/2014/main" id="{24323E95-6179-4904-A0ED-FAE495BEA7CC}"/>
+                <a16:creationId xmlns:a16="http://schemas.microsoft.com/office/drawing/2014/main" id="{E2E1C50C-D454-401C-A47F-81B7B315A05F}"/>
               </a:ext>
             </a:extLst>
           </p:cNvPr>
@@ -42236,7 +42236,7 @@
           <p:cNvPr id="5" name="Text 3">
             <a:extLst xmlns:a="http://schemas.openxmlformats.org/drawingml/2006/main">
               <a:ext uri="{FF2B5EF4-FFF2-40B4-BE49-F238E27FC236}">
-                <a16:creationId xmlns:a16="http://schemas.microsoft.com/office/drawing/2014/main" id="{5FE7DB10-5D7F-4011-97C5-AB03C04BBD9E}"/>
+                <a16:creationId xmlns:a16="http://schemas.microsoft.com/office/drawing/2014/main" id="{95A9FD81-BE1E-4103-8114-1AFF426B2903}"/>
               </a:ext>
             </a:extLst>
           </p:cNvPr>
@@ -42281,7 +42281,7 @@
           <p:cNvPr id="6" name="Shape 4">
             <a:extLst xmlns:a="http://schemas.openxmlformats.org/drawingml/2006/main">
               <a:ext uri="{FF2B5EF4-FFF2-40B4-BE49-F238E27FC236}">
-                <a16:creationId xmlns:a16="http://schemas.microsoft.com/office/drawing/2014/main" id="{16F482B3-2B97-4576-8692-7469A99544AD}"/>
+                <a16:creationId xmlns:a16="http://schemas.microsoft.com/office/drawing/2014/main" id="{BC985C87-684B-44D5-9535-C480762AD5C8}"/>
               </a:ext>
             </a:extLst>
           </p:cNvPr>
@@ -42328,7 +42328,7 @@
           <p:cNvPr id="7" name="Shape 5">
             <a:extLst xmlns:a="http://schemas.openxmlformats.org/drawingml/2006/main">
               <a:ext uri="{FF2B5EF4-FFF2-40B4-BE49-F238E27FC236}">
-                <a16:creationId xmlns:a16="http://schemas.microsoft.com/office/drawing/2014/main" id="{A34F1B58-A30A-4FE1-954A-94184FA3362B}"/>
+                <a16:creationId xmlns:a16="http://schemas.microsoft.com/office/drawing/2014/main" id="{BEDFC45C-B60C-4242-A447-D49D0A3F0ED7}"/>
               </a:ext>
             </a:extLst>
           </p:cNvPr>
@@ -42366,7 +42366,7 @@
           <p:cNvPr id="8" name="Text 6">
             <a:extLst xmlns:a="http://schemas.openxmlformats.org/drawingml/2006/main">
               <a:ext uri="{FF2B5EF4-FFF2-40B4-BE49-F238E27FC236}">
-                <a16:creationId xmlns:a16="http://schemas.microsoft.com/office/drawing/2014/main" id="{9C6F05C9-7446-4F9A-AB45-AB8F18F08D54}"/>
+                <a16:creationId xmlns:a16="http://schemas.microsoft.com/office/drawing/2014/main" id="{1E34CBCD-B456-4A97-9342-034BBFD25476}"/>
               </a:ext>
             </a:extLst>
           </p:cNvPr>
@@ -42411,7 +42411,7 @@
           <p:cNvPr id="9" name="Text 7">
             <a:extLst xmlns:a="http://schemas.openxmlformats.org/drawingml/2006/main">
               <a:ext uri="{FF2B5EF4-FFF2-40B4-BE49-F238E27FC236}">
-                <a16:creationId xmlns:a16="http://schemas.microsoft.com/office/drawing/2014/main" id="{6F21175B-389B-4041-A7E4-641202458219}"/>
+                <a16:creationId xmlns:a16="http://schemas.microsoft.com/office/drawing/2014/main" id="{B8CE3F1F-030D-401E-BCE2-112AE70F9C4D}"/>
               </a:ext>
             </a:extLst>
           </p:cNvPr>
@@ -42456,7 +42456,7 @@
           <p:cNvPr id="10" name="Text 8">
             <a:extLst xmlns:a="http://schemas.openxmlformats.org/drawingml/2006/main">
               <a:ext uri="{FF2B5EF4-FFF2-40B4-BE49-F238E27FC236}">
-                <a16:creationId xmlns:a16="http://schemas.microsoft.com/office/drawing/2014/main" id="{92A77149-617B-40AB-9E98-379A936A7E3D}"/>
+                <a16:creationId xmlns:a16="http://schemas.microsoft.com/office/drawing/2014/main" id="{E55D2EE6-5840-4C59-9779-1E05D9BD719B}"/>
               </a:ext>
             </a:extLst>
           </p:cNvPr>
@@ -42501,7 +42501,7 @@
           <p:cNvPr id="11" name="Shape 9">
             <a:extLst xmlns:a="http://schemas.openxmlformats.org/drawingml/2006/main">
               <a:ext uri="{FF2B5EF4-FFF2-40B4-BE49-F238E27FC236}">
-                <a16:creationId xmlns:a16="http://schemas.microsoft.com/office/drawing/2014/main" id="{3B06AF78-9FB1-4E9D-A44C-AB4C159A3F69}"/>
+                <a16:creationId xmlns:a16="http://schemas.microsoft.com/office/drawing/2014/main" id="{175BC4A1-87EC-4ED1-87E8-C62E567E4930}"/>
               </a:ext>
             </a:extLst>
           </p:cNvPr>
@@ -42548,7 +42548,7 @@
           <p:cNvPr id="12" name="Shape 10">
             <a:extLst xmlns:a="http://schemas.openxmlformats.org/drawingml/2006/main">
               <a:ext uri="{FF2B5EF4-FFF2-40B4-BE49-F238E27FC236}">
-                <a16:creationId xmlns:a16="http://schemas.microsoft.com/office/drawing/2014/main" id="{078B31B9-948A-42F7-BB1A-679CA58F62A2}"/>
+                <a16:creationId xmlns:a16="http://schemas.microsoft.com/office/drawing/2014/main" id="{8EF242E9-CA0D-4C0E-AD8B-E9E59F9B13EB}"/>
               </a:ext>
             </a:extLst>
           </p:cNvPr>
@@ -42586,7 +42586,7 @@
           <p:cNvPr id="13" name="Text 11">
             <a:extLst xmlns:a="http://schemas.openxmlformats.org/drawingml/2006/main">
               <a:ext uri="{FF2B5EF4-FFF2-40B4-BE49-F238E27FC236}">
-                <a16:creationId xmlns:a16="http://schemas.microsoft.com/office/drawing/2014/main" id="{BAFF5BF8-216A-45C0-83B0-827B0CA1BB6C}"/>
+                <a16:creationId xmlns:a16="http://schemas.microsoft.com/office/drawing/2014/main" id="{68C87697-F981-472E-B82C-8AEE47AC1B79}"/>
               </a:ext>
             </a:extLst>
           </p:cNvPr>
@@ -42631,7 +42631,7 @@
           <p:cNvPr id="14" name="Text 12">
             <a:extLst xmlns:a="http://schemas.openxmlformats.org/drawingml/2006/main">
               <a:ext uri="{FF2B5EF4-FFF2-40B4-BE49-F238E27FC236}">
-                <a16:creationId xmlns:a16="http://schemas.microsoft.com/office/drawing/2014/main" id="{C110D839-4C33-4F9B-9CDD-C7E2C6415D2B}"/>
+                <a16:creationId xmlns:a16="http://schemas.microsoft.com/office/drawing/2014/main" id="{DAF8941A-A3BA-4D91-8AEB-E600177ECC6A}"/>
               </a:ext>
             </a:extLst>
           </p:cNvPr>
@@ -42676,7 +42676,7 @@
           <p:cNvPr id="15" name="Text 13">
             <a:extLst xmlns:a="http://schemas.openxmlformats.org/drawingml/2006/main">
               <a:ext uri="{FF2B5EF4-FFF2-40B4-BE49-F238E27FC236}">
-                <a16:creationId xmlns:a16="http://schemas.microsoft.com/office/drawing/2014/main" id="{CDF8A838-AC89-423E-85C2-30F9470B065B}"/>
+                <a16:creationId xmlns:a16="http://schemas.microsoft.com/office/drawing/2014/main" id="{7BC94FCD-E3C5-43EA-8F91-C04E6A13290A}"/>
               </a:ext>
             </a:extLst>
           </p:cNvPr>
@@ -42721,7 +42721,7 @@
           <p:cNvPr id="16" name="Shape 14">
             <a:extLst xmlns:a="http://schemas.openxmlformats.org/drawingml/2006/main">
               <a:ext uri="{FF2B5EF4-FFF2-40B4-BE49-F238E27FC236}">
-                <a16:creationId xmlns:a16="http://schemas.microsoft.com/office/drawing/2014/main" id="{F7BED056-AF14-4DA7-B3E7-E56A1FC32D0E}"/>
+                <a16:creationId xmlns:a16="http://schemas.microsoft.com/office/drawing/2014/main" id="{110AE73A-F288-417D-8E4E-2B30D8348064}"/>
               </a:ext>
             </a:extLst>
           </p:cNvPr>
@@ -42768,7 +42768,7 @@
           <p:cNvPr id="17" name="Shape 15">
             <a:extLst xmlns:a="http://schemas.openxmlformats.org/drawingml/2006/main">
               <a:ext uri="{FF2B5EF4-FFF2-40B4-BE49-F238E27FC236}">
-                <a16:creationId xmlns:a16="http://schemas.microsoft.com/office/drawing/2014/main" id="{8C0142F3-428E-4134-9FBA-A8E7F0E34D88}"/>
+                <a16:creationId xmlns:a16="http://schemas.microsoft.com/office/drawing/2014/main" id="{242441E2-0DCB-41D3-ABB6-BF5C4AC00504}"/>
               </a:ext>
             </a:extLst>
           </p:cNvPr>
@@ -42806,7 +42806,7 @@
           <p:cNvPr id="18" name="Text 16">
             <a:extLst xmlns:a="http://schemas.openxmlformats.org/drawingml/2006/main">
               <a:ext uri="{FF2B5EF4-FFF2-40B4-BE49-F238E27FC236}">
-                <a16:creationId xmlns:a16="http://schemas.microsoft.com/office/drawing/2014/main" id="{4177CF6A-3C57-42F7-9898-FD25F827C239}"/>
+                <a16:creationId xmlns:a16="http://schemas.microsoft.com/office/drawing/2014/main" id="{EED8D79A-E863-49F2-B294-8FA0E2118197}"/>
               </a:ext>
             </a:extLst>
           </p:cNvPr>
@@ -42851,7 +42851,7 @@
           <p:cNvPr id="19" name="Text 17">
             <a:extLst xmlns:a="http://schemas.openxmlformats.org/drawingml/2006/main">
               <a:ext uri="{FF2B5EF4-FFF2-40B4-BE49-F238E27FC236}">
-                <a16:creationId xmlns:a16="http://schemas.microsoft.com/office/drawing/2014/main" id="{6BAE8426-D1DA-4451-B0A2-1F11FCD8EDD8}"/>
+                <a16:creationId xmlns:a16="http://schemas.microsoft.com/office/drawing/2014/main" id="{3778BE6C-0294-48F8-9418-FDFFFC2297F0}"/>
               </a:ext>
             </a:extLst>
           </p:cNvPr>
@@ -42896,7 +42896,7 @@
           <p:cNvPr id="20" name="Text 18">
             <a:extLst xmlns:a="http://schemas.openxmlformats.org/drawingml/2006/main">
               <a:ext uri="{FF2B5EF4-FFF2-40B4-BE49-F238E27FC236}">
-                <a16:creationId xmlns:a16="http://schemas.microsoft.com/office/drawing/2014/main" id="{DF21A935-223E-439C-A8B7-92E6949D5C10}"/>
+                <a16:creationId xmlns:a16="http://schemas.microsoft.com/office/drawing/2014/main" id="{04469301-DDD7-46F7-A892-F32ED6A8863A}"/>
               </a:ext>
             </a:extLst>
           </p:cNvPr>
@@ -42941,7 +42941,7 @@
           <p:cNvPr id="21" name="Text 19">
             <a:extLst xmlns:a="http://schemas.openxmlformats.org/drawingml/2006/main">
               <a:ext uri="{FF2B5EF4-FFF2-40B4-BE49-F238E27FC236}">
-                <a16:creationId xmlns:a16="http://schemas.microsoft.com/office/drawing/2014/main" id="{068C2241-587A-43C0-B927-14EAA10EC3A5}"/>
+                <a16:creationId xmlns:a16="http://schemas.microsoft.com/office/drawing/2014/main" id="{5C11820B-3AD6-42F4-8CE6-4884C9816F9C}"/>
               </a:ext>
             </a:extLst>
           </p:cNvPr>
@@ -42986,7 +42986,7 @@
           <p:cNvPr id="22" name="Shape 20">
             <a:extLst xmlns:a="http://schemas.openxmlformats.org/drawingml/2006/main">
               <a:ext uri="{FF2B5EF4-FFF2-40B4-BE49-F238E27FC236}">
-                <a16:creationId xmlns:a16="http://schemas.microsoft.com/office/drawing/2014/main" id="{A8C39822-46FD-4EB8-9A32-5E16461F8A29}"/>
+                <a16:creationId xmlns:a16="http://schemas.microsoft.com/office/drawing/2014/main" id="{8F3EA003-33B6-4983-A7F9-779B2CAF8D1F}"/>
               </a:ext>
             </a:extLst>
           </p:cNvPr>
@@ -43033,7 +43033,7 @@
           <p:cNvPr id="23" name="Shape 21">
             <a:extLst xmlns:a="http://schemas.openxmlformats.org/drawingml/2006/main">
               <a:ext uri="{FF2B5EF4-FFF2-40B4-BE49-F238E27FC236}">
-                <a16:creationId xmlns:a16="http://schemas.microsoft.com/office/drawing/2014/main" id="{EF479252-6A1D-4814-BEA2-1754B1A8A5E4}"/>
+                <a16:creationId xmlns:a16="http://schemas.microsoft.com/office/drawing/2014/main" id="{674B854E-1B23-417F-8DF2-07B980402D5B}"/>
               </a:ext>
             </a:extLst>
           </p:cNvPr>
@@ -43071,7 +43071,7 @@
           <p:cNvPr id="24" name="Text 22">
             <a:extLst xmlns:a="http://schemas.openxmlformats.org/drawingml/2006/main">
               <a:ext uri="{FF2B5EF4-FFF2-40B4-BE49-F238E27FC236}">
-                <a16:creationId xmlns:a16="http://schemas.microsoft.com/office/drawing/2014/main" id="{8A234BD8-1870-4A23-8EDF-01FDD8ACBA97}"/>
+                <a16:creationId xmlns:a16="http://schemas.microsoft.com/office/drawing/2014/main" id="{B062E5A7-14CD-4CC4-A06D-D40EC4238C2D}"/>
               </a:ext>
             </a:extLst>
           </p:cNvPr>
@@ -43116,7 +43116,7 @@
           <p:cNvPr id="25" name="Text 23">
             <a:extLst xmlns:a="http://schemas.openxmlformats.org/drawingml/2006/main">
               <a:ext uri="{FF2B5EF4-FFF2-40B4-BE49-F238E27FC236}">
-                <a16:creationId xmlns:a16="http://schemas.microsoft.com/office/drawing/2014/main" id="{0F4DAE46-455B-40F9-8F2B-0066D9DA2881}"/>
+                <a16:creationId xmlns:a16="http://schemas.microsoft.com/office/drawing/2014/main" id="{5E5DF8CC-5ED6-43F2-8E57-31F7963323C7}"/>
               </a:ext>
             </a:extLst>
           </p:cNvPr>
@@ -43161,7 +43161,7 @@
           <p:cNvPr id="26" name="Text 24">
             <a:extLst xmlns:a="http://schemas.openxmlformats.org/drawingml/2006/main">
               <a:ext uri="{FF2B5EF4-FFF2-40B4-BE49-F238E27FC236}">
-                <a16:creationId xmlns:a16="http://schemas.microsoft.com/office/drawing/2014/main" id="{BAA02092-3747-421A-9BEC-52AD3C9DE03E}"/>
+                <a16:creationId xmlns:a16="http://schemas.microsoft.com/office/drawing/2014/main" id="{70F5CA7B-9104-4E2C-B0F5-DB8874A6BDA5}"/>
               </a:ext>
             </a:extLst>
           </p:cNvPr>
@@ -43209,7 +43209,7 @@
           <p:cNvPr id="27" name="Shape 25">
             <a:extLst xmlns:a="http://schemas.openxmlformats.org/drawingml/2006/main">
               <a:ext uri="{FF2B5EF4-FFF2-40B4-BE49-F238E27FC236}">
-                <a16:creationId xmlns:a16="http://schemas.microsoft.com/office/drawing/2014/main" id="{E5F28E83-7619-40C1-BF9C-D3A4DEF7126D}"/>
+                <a16:creationId xmlns:a16="http://schemas.microsoft.com/office/drawing/2014/main" id="{04688089-9461-4DED-AC4C-65CF1C90D8A3}"/>
               </a:ext>
             </a:extLst>
           </p:cNvPr>
@@ -43247,7 +43247,7 @@
           <p:cNvPr id="28" name="Shape 26">
             <a:extLst xmlns:a="http://schemas.openxmlformats.org/drawingml/2006/main">
               <a:ext uri="{FF2B5EF4-FFF2-40B4-BE49-F238E27FC236}">
-                <a16:creationId xmlns:a16="http://schemas.microsoft.com/office/drawing/2014/main" id="{44627C23-54E5-4BDC-906E-98F6E0C8D282}"/>
+                <a16:creationId xmlns:a16="http://schemas.microsoft.com/office/drawing/2014/main" id="{7F5BBD50-5116-4CDF-89D1-820DB41D80D6}"/>
               </a:ext>
             </a:extLst>
           </p:cNvPr>
@@ -43294,7 +43294,7 @@
           <p:cNvPr id="29" name="Shape 27">
             <a:extLst xmlns:a="http://schemas.openxmlformats.org/drawingml/2006/main">
               <a:ext uri="{FF2B5EF4-FFF2-40B4-BE49-F238E27FC236}">
-                <a16:creationId xmlns:a16="http://schemas.microsoft.com/office/drawing/2014/main" id="{6AA4D65F-9354-4B07-8244-6DA8CACCFC63}"/>
+                <a16:creationId xmlns:a16="http://schemas.microsoft.com/office/drawing/2014/main" id="{B2925A5E-C5C8-40D2-92FE-40AD9183E9DE}"/>
               </a:ext>
             </a:extLst>
           </p:cNvPr>
@@ -43332,7 +43332,7 @@
           <p:cNvPr id="30" name="Text 28">
             <a:extLst xmlns:a="http://schemas.openxmlformats.org/drawingml/2006/main">
               <a:ext uri="{FF2B5EF4-FFF2-40B4-BE49-F238E27FC236}">
-                <a16:creationId xmlns:a16="http://schemas.microsoft.com/office/drawing/2014/main" id="{E7F69B9B-6C41-4BC6-9625-1BE75718402A}"/>
+                <a16:creationId xmlns:a16="http://schemas.microsoft.com/office/drawing/2014/main" id="{CCEA8338-F807-49D4-B4C5-680A65C47239}"/>
               </a:ext>
             </a:extLst>
           </p:cNvPr>
@@ -43377,7 +43377,7 @@
           <p:cNvPr id="31" name="Text 29">
             <a:extLst xmlns:a="http://schemas.openxmlformats.org/drawingml/2006/main">
               <a:ext uri="{FF2B5EF4-FFF2-40B4-BE49-F238E27FC236}">
-                <a16:creationId xmlns:a16="http://schemas.microsoft.com/office/drawing/2014/main" id="{3DC35D6B-CDF5-49EC-8FCE-81A5077A2384}"/>
+                <a16:creationId xmlns:a16="http://schemas.microsoft.com/office/drawing/2014/main" id="{5B906F98-A43C-4209-A3AD-8096202056B2}"/>
               </a:ext>
             </a:extLst>
           </p:cNvPr>
@@ -43422,7 +43422,7 @@
           <p:cNvPr id="32" name="Text 30">
             <a:extLst xmlns:a="http://schemas.openxmlformats.org/drawingml/2006/main">
               <a:ext uri="{FF2B5EF4-FFF2-40B4-BE49-F238E27FC236}">
-                <a16:creationId xmlns:a16="http://schemas.microsoft.com/office/drawing/2014/main" id="{84A785F5-346B-4EA6-9766-10EC8F22424F}"/>
+                <a16:creationId xmlns:a16="http://schemas.microsoft.com/office/drawing/2014/main" id="{37EA00E4-1200-498B-BE55-C074C45EBC22}"/>
               </a:ext>
             </a:extLst>
           </p:cNvPr>
@@ -43470,7 +43470,7 @@
           <p:cNvPr id="33" name="Shape 31">
             <a:extLst xmlns:a="http://schemas.openxmlformats.org/drawingml/2006/main">
               <a:ext uri="{FF2B5EF4-FFF2-40B4-BE49-F238E27FC236}">
-                <a16:creationId xmlns:a16="http://schemas.microsoft.com/office/drawing/2014/main" id="{7EC19867-ED73-4A86-9B5C-467574E3B1C7}"/>
+                <a16:creationId xmlns:a16="http://schemas.microsoft.com/office/drawing/2014/main" id="{0C0879C4-D173-4A40-A6A5-FBED7A19F5CA}"/>
               </a:ext>
             </a:extLst>
           </p:cNvPr>
@@ -43508,7 +43508,7 @@
           <p:cNvPr id="34" name="Shape 32">
             <a:extLst xmlns:a="http://schemas.openxmlformats.org/drawingml/2006/main">
               <a:ext uri="{FF2B5EF4-FFF2-40B4-BE49-F238E27FC236}">
-                <a16:creationId xmlns:a16="http://schemas.microsoft.com/office/drawing/2014/main" id="{3C06D9FB-F43F-4D99-A26C-D4B5953378E9}"/>
+                <a16:creationId xmlns:a16="http://schemas.microsoft.com/office/drawing/2014/main" id="{85E95355-5D09-4E62-BD30-A42273CA6257}"/>
               </a:ext>
             </a:extLst>
           </p:cNvPr>
@@ -43555,7 +43555,7 @@
           <p:cNvPr id="35" name="Shape 33">
             <a:extLst xmlns:a="http://schemas.openxmlformats.org/drawingml/2006/main">
               <a:ext uri="{FF2B5EF4-FFF2-40B4-BE49-F238E27FC236}">
-                <a16:creationId xmlns:a16="http://schemas.microsoft.com/office/drawing/2014/main" id="{7397EA29-9271-4389-8AF9-E685389615D5}"/>
+                <a16:creationId xmlns:a16="http://schemas.microsoft.com/office/drawing/2014/main" id="{C2C53173-EFCA-4ADC-9543-8D72DC92F8BE}"/>
               </a:ext>
             </a:extLst>
           </p:cNvPr>
@@ -43593,7 +43593,7 @@
           <p:cNvPr id="36" name="Text 34">
             <a:extLst xmlns:a="http://schemas.openxmlformats.org/drawingml/2006/main">
               <a:ext uri="{FF2B5EF4-FFF2-40B4-BE49-F238E27FC236}">
-                <a16:creationId xmlns:a16="http://schemas.microsoft.com/office/drawing/2014/main" id="{2428FD5E-5F22-4DF2-9304-2CBF8F48A7CB}"/>
+                <a16:creationId xmlns:a16="http://schemas.microsoft.com/office/drawing/2014/main" id="{D15D726C-30A9-4855-B729-6C7462C9D0C6}"/>
               </a:ext>
             </a:extLst>
           </p:cNvPr>
@@ -43638,7 +43638,7 @@
           <p:cNvPr id="37" name="Text 35">
             <a:extLst xmlns:a="http://schemas.openxmlformats.org/drawingml/2006/main">
               <a:ext uri="{FF2B5EF4-FFF2-40B4-BE49-F238E27FC236}">
-                <a16:creationId xmlns:a16="http://schemas.microsoft.com/office/drawing/2014/main" id="{52CDB808-A406-44E7-87F2-F3EE0E87F598}"/>
+                <a16:creationId xmlns:a16="http://schemas.microsoft.com/office/drawing/2014/main" id="{1B445379-FE83-40B7-B0C1-6B65EB0CCB46}"/>
               </a:ext>
             </a:extLst>
           </p:cNvPr>
@@ -43683,7 +43683,7 @@
           <p:cNvPr id="38" name="Text 36">
             <a:extLst xmlns:a="http://schemas.openxmlformats.org/drawingml/2006/main">
               <a:ext uri="{FF2B5EF4-FFF2-40B4-BE49-F238E27FC236}">
-                <a16:creationId xmlns:a16="http://schemas.microsoft.com/office/drawing/2014/main" id="{7A00E8C3-ACF2-405A-822A-3525DD416E9B}"/>
+                <a16:creationId xmlns:a16="http://schemas.microsoft.com/office/drawing/2014/main" id="{3A047F74-E62A-43C2-ADBA-E16823495FBF}"/>
               </a:ext>
             </a:extLst>
           </p:cNvPr>
@@ -43731,7 +43731,7 @@
           <p:cNvPr id="39" name="Shape 37">
             <a:extLst xmlns:a="http://schemas.openxmlformats.org/drawingml/2006/main">
               <a:ext uri="{FF2B5EF4-FFF2-40B4-BE49-F238E27FC236}">
-                <a16:creationId xmlns:a16="http://schemas.microsoft.com/office/drawing/2014/main" id="{31FBC8E8-6ED6-43F9-855C-74C44351AFFF}"/>
+                <a16:creationId xmlns:a16="http://schemas.microsoft.com/office/drawing/2014/main" id="{4399449D-181A-422C-8B1E-6A14F182E3CC}"/>
               </a:ext>
             </a:extLst>
           </p:cNvPr>
@@ -43769,7 +43769,7 @@
           <p:cNvPr id="40" name="Shape 38">
             <a:extLst xmlns:a="http://schemas.openxmlformats.org/drawingml/2006/main">
               <a:ext uri="{FF2B5EF4-FFF2-40B4-BE49-F238E27FC236}">
-                <a16:creationId xmlns:a16="http://schemas.microsoft.com/office/drawing/2014/main" id="{4F2141D0-DB1C-4106-955A-3A9E070196C1}"/>
+                <a16:creationId xmlns:a16="http://schemas.microsoft.com/office/drawing/2014/main" id="{B107FF4B-8FAD-4832-85E0-742F04A8DD22}"/>
               </a:ext>
             </a:extLst>
           </p:cNvPr>
@@ -43816,7 +43816,7 @@
           <p:cNvPr id="41" name="Shape 39">
             <a:extLst xmlns:a="http://schemas.openxmlformats.org/drawingml/2006/main">
               <a:ext uri="{FF2B5EF4-FFF2-40B4-BE49-F238E27FC236}">
-                <a16:creationId xmlns:a16="http://schemas.microsoft.com/office/drawing/2014/main" id="{98EF003D-9E26-4C82-95E8-7CE976F99F79}"/>
+                <a16:creationId xmlns:a16="http://schemas.microsoft.com/office/drawing/2014/main" id="{D62F6F1C-9F09-4615-B2CF-17B3953C0CD4}"/>
               </a:ext>
             </a:extLst>
           </p:cNvPr>
@@ -43854,7 +43854,7 @@
           <p:cNvPr id="42" name="Text 40">
             <a:extLst xmlns:a="http://schemas.openxmlformats.org/drawingml/2006/main">
               <a:ext uri="{FF2B5EF4-FFF2-40B4-BE49-F238E27FC236}">
-                <a16:creationId xmlns:a16="http://schemas.microsoft.com/office/drawing/2014/main" id="{3DFB553B-E125-45A3-87F9-8C4CCB5C7BCC}"/>
+                <a16:creationId xmlns:a16="http://schemas.microsoft.com/office/drawing/2014/main" id="{04001C93-7393-4A3E-905C-1F949495747F}"/>
               </a:ext>
             </a:extLst>
           </p:cNvPr>
@@ -43899,7 +43899,7 @@
           <p:cNvPr id="43" name="Text 41">
             <a:extLst xmlns:a="http://schemas.openxmlformats.org/drawingml/2006/main">
               <a:ext uri="{FF2B5EF4-FFF2-40B4-BE49-F238E27FC236}">
-                <a16:creationId xmlns:a16="http://schemas.microsoft.com/office/drawing/2014/main" id="{DCE78D5C-3F73-443D-9FE8-D92E39678A02}"/>
+                <a16:creationId xmlns:a16="http://schemas.microsoft.com/office/drawing/2014/main" id="{07994C2B-4781-4A86-8451-8B06A7BB4CA8}"/>
               </a:ext>
             </a:extLst>
           </p:cNvPr>
@@ -43944,7 +43944,7 @@
           <p:cNvPr id="44" name="Text 42">
             <a:extLst xmlns:a="http://schemas.openxmlformats.org/drawingml/2006/main">
               <a:ext uri="{FF2B5EF4-FFF2-40B4-BE49-F238E27FC236}">
-                <a16:creationId xmlns:a16="http://schemas.microsoft.com/office/drawing/2014/main" id="{EA8B9238-405E-477C-A7EB-760371376A87}"/>
+                <a16:creationId xmlns:a16="http://schemas.microsoft.com/office/drawing/2014/main" id="{FE08975C-9D39-40F2-8DBB-B54A5A6ABBDE}"/>
               </a:ext>
             </a:extLst>
           </p:cNvPr>
@@ -43992,7 +43992,7 @@
           <p:cNvPr id="45" name="Shape 43">
             <a:extLst xmlns:a="http://schemas.openxmlformats.org/drawingml/2006/main">
               <a:ext uri="{FF2B5EF4-FFF2-40B4-BE49-F238E27FC236}">
-                <a16:creationId xmlns:a16="http://schemas.microsoft.com/office/drawing/2014/main" id="{9E3DE7E1-6B03-4FA5-A357-D952A89BB129}"/>
+                <a16:creationId xmlns:a16="http://schemas.microsoft.com/office/drawing/2014/main" id="{FB924303-C722-4528-8B14-A10423325E04}"/>
               </a:ext>
             </a:extLst>
           </p:cNvPr>
@@ -44030,7 +44030,7 @@
           <p:cNvPr id="46" name="Shape 44">
             <a:extLst xmlns:a="http://schemas.openxmlformats.org/drawingml/2006/main">
               <a:ext uri="{FF2B5EF4-FFF2-40B4-BE49-F238E27FC236}">
-                <a16:creationId xmlns:a16="http://schemas.microsoft.com/office/drawing/2014/main" id="{4405BE83-C79C-44F4-8DE4-9D62F92EDB85}"/>
+                <a16:creationId xmlns:a16="http://schemas.microsoft.com/office/drawing/2014/main" id="{A0F830BE-079B-42ED-9FC4-AAF1948FE491}"/>
               </a:ext>
             </a:extLst>
           </p:cNvPr>
@@ -44077,7 +44077,7 @@
           <p:cNvPr id="47" name="Shape 45">
             <a:extLst xmlns:a="http://schemas.openxmlformats.org/drawingml/2006/main">
               <a:ext uri="{FF2B5EF4-FFF2-40B4-BE49-F238E27FC236}">
-                <a16:creationId xmlns:a16="http://schemas.microsoft.com/office/drawing/2014/main" id="{5B06AB61-EC73-4F08-B023-EBD0679EC05C}"/>
+                <a16:creationId xmlns:a16="http://schemas.microsoft.com/office/drawing/2014/main" id="{670648AE-7E8E-4D4B-B7F1-5E596FD12A40}"/>
               </a:ext>
             </a:extLst>
           </p:cNvPr>
@@ -44115,7 +44115,7 @@
           <p:cNvPr id="48" name="Text 46">
             <a:extLst xmlns:a="http://schemas.openxmlformats.org/drawingml/2006/main">
               <a:ext uri="{FF2B5EF4-FFF2-40B4-BE49-F238E27FC236}">
-                <a16:creationId xmlns:a16="http://schemas.microsoft.com/office/drawing/2014/main" id="{5B28CE1B-0791-4CB1-82E5-053C0102DC97}"/>
+                <a16:creationId xmlns:a16="http://schemas.microsoft.com/office/drawing/2014/main" id="{D99967B2-1D6E-4147-9525-0587F490058E}"/>
               </a:ext>
             </a:extLst>
           </p:cNvPr>
@@ -44160,7 +44160,7 @@
           <p:cNvPr id="49" name="Text 47">
             <a:extLst xmlns:a="http://schemas.openxmlformats.org/drawingml/2006/main">
               <a:ext uri="{FF2B5EF4-FFF2-40B4-BE49-F238E27FC236}">
-                <a16:creationId xmlns:a16="http://schemas.microsoft.com/office/drawing/2014/main" id="{8A98D140-A8DB-4143-BAE9-99172717F48D}"/>
+                <a16:creationId xmlns:a16="http://schemas.microsoft.com/office/drawing/2014/main" id="{C6B63362-680F-4BE5-B034-90E694FD787A}"/>
               </a:ext>
             </a:extLst>
           </p:cNvPr>
@@ -44205,7 +44205,7 @@
           <p:cNvPr id="50" name="Text 48">
             <a:extLst xmlns:a="http://schemas.openxmlformats.org/drawingml/2006/main">
               <a:ext uri="{FF2B5EF4-FFF2-40B4-BE49-F238E27FC236}">
-                <a16:creationId xmlns:a16="http://schemas.microsoft.com/office/drawing/2014/main" id="{AFC621CC-1F0C-4C66-AA69-909471853937}"/>
+                <a16:creationId xmlns:a16="http://schemas.microsoft.com/office/drawing/2014/main" id="{913C79C2-87D1-4C2A-8679-BCE57FB9764A}"/>
               </a:ext>
             </a:extLst>
           </p:cNvPr>
@@ -44253,7 +44253,7 @@
           <p:cNvPr id="51" name="Shape 49">
             <a:extLst xmlns:a="http://schemas.openxmlformats.org/drawingml/2006/main">
               <a:ext uri="{FF2B5EF4-FFF2-40B4-BE49-F238E27FC236}">
-                <a16:creationId xmlns:a16="http://schemas.microsoft.com/office/drawing/2014/main" id="{FECC76C8-85B3-48DA-904C-B3D4724155CF}"/>
+                <a16:creationId xmlns:a16="http://schemas.microsoft.com/office/drawing/2014/main" id="{36BA22CE-9DF0-428D-B312-809F6B57CECE}"/>
               </a:ext>
             </a:extLst>
           </p:cNvPr>
@@ -44291,7 +44291,7 @@
           <p:cNvPr id="52" name="Shape 50">
             <a:extLst xmlns:a="http://schemas.openxmlformats.org/drawingml/2006/main">
               <a:ext uri="{FF2B5EF4-FFF2-40B4-BE49-F238E27FC236}">
-                <a16:creationId xmlns:a16="http://schemas.microsoft.com/office/drawing/2014/main" id="{824BF2C5-4F2D-4AE6-9A51-A5C24C7C43FD}"/>
+                <a16:creationId xmlns:a16="http://schemas.microsoft.com/office/drawing/2014/main" id="{E79D53F5-43E0-475D-B505-D329139ED081}"/>
               </a:ext>
             </a:extLst>
           </p:cNvPr>
@@ -44338,7 +44338,7 @@
           <p:cNvPr id="53" name="Shape 51">
             <a:extLst xmlns:a="http://schemas.openxmlformats.org/drawingml/2006/main">
               <a:ext uri="{FF2B5EF4-FFF2-40B4-BE49-F238E27FC236}">
-                <a16:creationId xmlns:a16="http://schemas.microsoft.com/office/drawing/2014/main" id="{980678ED-DFFD-4F55-B36C-81299821CC55}"/>
+                <a16:creationId xmlns:a16="http://schemas.microsoft.com/office/drawing/2014/main" id="{47FB02B9-BC7B-41CB-94DA-8CF886C1778B}"/>
               </a:ext>
             </a:extLst>
           </p:cNvPr>
@@ -44376,7 +44376,7 @@
           <p:cNvPr id="54" name="Text 52">
             <a:extLst xmlns:a="http://schemas.openxmlformats.org/drawingml/2006/main">
               <a:ext uri="{FF2B5EF4-FFF2-40B4-BE49-F238E27FC236}">
-                <a16:creationId xmlns:a16="http://schemas.microsoft.com/office/drawing/2014/main" id="{CB1AEC4A-8527-426A-8EAB-977EE26F22C3}"/>
+                <a16:creationId xmlns:a16="http://schemas.microsoft.com/office/drawing/2014/main" id="{B0E3E60C-BB72-4BB1-9E33-D3E9154AB518}"/>
               </a:ext>
             </a:extLst>
           </p:cNvPr>
@@ -44421,7 +44421,7 @@
           <p:cNvPr id="55" name="Text 53">
             <a:extLst xmlns:a="http://schemas.openxmlformats.org/drawingml/2006/main">
               <a:ext uri="{FF2B5EF4-FFF2-40B4-BE49-F238E27FC236}">
-                <a16:creationId xmlns:a16="http://schemas.microsoft.com/office/drawing/2014/main" id="{CA750309-FEC5-4E46-B2A6-C7BDD731F95A}"/>
+                <a16:creationId xmlns:a16="http://schemas.microsoft.com/office/drawing/2014/main" id="{CCF31C0F-0A41-4056-B4F4-2A2FD9FD8FE0}"/>
               </a:ext>
             </a:extLst>
           </p:cNvPr>
@@ -44466,7 +44466,7 @@
           <p:cNvPr id="56" name="Text 54">
             <a:extLst xmlns:a="http://schemas.openxmlformats.org/drawingml/2006/main">
               <a:ext uri="{FF2B5EF4-FFF2-40B4-BE49-F238E27FC236}">
-                <a16:creationId xmlns:a16="http://schemas.microsoft.com/office/drawing/2014/main" id="{F9C646BB-D1E3-4473-80DA-FEC707F73C6A}"/>
+                <a16:creationId xmlns:a16="http://schemas.microsoft.com/office/drawing/2014/main" id="{06356738-C4A9-4DA0-B0B7-F2227C4D261A}"/>
               </a:ext>
             </a:extLst>
           </p:cNvPr>
@@ -44514,7 +44514,7 @@
           <p:cNvPr id="57" name="Shape 55">
             <a:extLst xmlns:a="http://schemas.openxmlformats.org/drawingml/2006/main">
               <a:ext uri="{FF2B5EF4-FFF2-40B4-BE49-F238E27FC236}">
-                <a16:creationId xmlns:a16="http://schemas.microsoft.com/office/drawing/2014/main" id="{AD211414-43B7-411B-A585-D55CC6791557}"/>
+                <a16:creationId xmlns:a16="http://schemas.microsoft.com/office/drawing/2014/main" id="{D1C5C123-EA81-40AF-A5ED-CF50CB71B722}"/>
               </a:ext>
             </a:extLst>
           </p:cNvPr>
@@ -44561,7 +44561,7 @@
           <p:cNvPr id="58" name="Text 56">
             <a:extLst xmlns:a="http://schemas.openxmlformats.org/drawingml/2006/main">
               <a:ext uri="{FF2B5EF4-FFF2-40B4-BE49-F238E27FC236}">
-                <a16:creationId xmlns:a16="http://schemas.microsoft.com/office/drawing/2014/main" id="{719C70D3-BDF3-45CD-863E-1D124B644BF7}"/>
+                <a16:creationId xmlns:a16="http://schemas.microsoft.com/office/drawing/2014/main" id="{28F95F37-07B4-49D9-88E2-1D8BD8B16006}"/>
               </a:ext>
             </a:extLst>
           </p:cNvPr>
@@ -44606,7 +44606,7 @@
           <p:cNvPr id="59" name="Text 57">
             <a:extLst xmlns:a="http://schemas.openxmlformats.org/drawingml/2006/main">
               <a:ext uri="{FF2B5EF4-FFF2-40B4-BE49-F238E27FC236}">
-                <a16:creationId xmlns:a16="http://schemas.microsoft.com/office/drawing/2014/main" id="{2764B0EB-8785-4FED-9E2F-2B5E54C7E989}"/>
+                <a16:creationId xmlns:a16="http://schemas.microsoft.com/office/drawing/2014/main" id="{B4BA19F4-A8B4-45BB-891E-AC275C191FBA}"/>
               </a:ext>
             </a:extLst>
           </p:cNvPr>
@@ -44652,7 +44652,7 @@
     </p:spTree>
     <p:extLst>
       <p:ext uri="{BB962C8B-B14F-4D97-AF65-F5344CB8AC3E}">
-        <p14:creationId xmlns:p14="http://schemas.microsoft.com/office/powerpoint/2010/main" val="1463455089"/>
+        <p14:creationId xmlns:p14="http://schemas.microsoft.com/office/powerpoint/2010/main" val="1370262442"/>
       </p:ext>
     </p:extLst>
   </p:cSld>

--- a/paper/slides/compiling-recurrent-agent-workflows-into-guarded-programs.pptx
+++ b/paper/slides/compiling-recurrent-agent-workflows-into-guarded-programs.pptx
@@ -2,39 +2,39 @@
 <file path=ppt/presentation.xml><?xml version="1.0" encoding="utf-8"?>
 <p:presentation xmlns:p="http://schemas.openxmlformats.org/presentationml/2006/main">
   <p:sldMasterIdLst>
-    <p:sldMasterId xmlns:r="http://schemas.openxmlformats.org/officeDocument/2006/relationships" id="2147483648" r:id="R4309f2a81f4440c0"/>
+    <p:sldMasterId xmlns:r="http://schemas.openxmlformats.org/officeDocument/2006/relationships" id="2147483648" r:id="R9f402fae09054bf3"/>
   </p:sldMasterIdLst>
   <p:notesMasterIdLst>
-    <p:notesMasterId xmlns:r="http://schemas.openxmlformats.org/officeDocument/2006/relationships" r:id="Rd46d86f89e0c4a6d"/>
+    <p:notesMasterId xmlns:r="http://schemas.openxmlformats.org/officeDocument/2006/relationships" r:id="Re2772b1134a448ae"/>
   </p:notesMasterIdLst>
   <p:sldIdLst>
-    <p:sldId xmlns:r="http://schemas.openxmlformats.org/officeDocument/2006/relationships" id="256" r:id="Rb595cb1f1a47439d"/>
-    <p:sldId xmlns:r="http://schemas.openxmlformats.org/officeDocument/2006/relationships" id="257" r:id="Rf5e918fbb1944dd4"/>
-    <p:sldId xmlns:r="http://schemas.openxmlformats.org/officeDocument/2006/relationships" id="258" r:id="R74e026adde4f4cb5"/>
-    <p:sldId xmlns:r="http://schemas.openxmlformats.org/officeDocument/2006/relationships" id="259" r:id="R545b95a3957a43de"/>
-    <p:sldId xmlns:r="http://schemas.openxmlformats.org/officeDocument/2006/relationships" id="260" r:id="R1e8877b46b064bbe"/>
-    <p:sldId xmlns:r="http://schemas.openxmlformats.org/officeDocument/2006/relationships" id="261" r:id="R7d239c90248f4706"/>
-    <p:sldId xmlns:r="http://schemas.openxmlformats.org/officeDocument/2006/relationships" id="262" r:id="Re9e2b54381444b69"/>
-    <p:sldId xmlns:r="http://schemas.openxmlformats.org/officeDocument/2006/relationships" id="263" r:id="R11a17333266b4c6c"/>
-    <p:sldId xmlns:r="http://schemas.openxmlformats.org/officeDocument/2006/relationships" id="264" r:id="R040183dcc8944e94"/>
-    <p:sldId xmlns:r="http://schemas.openxmlformats.org/officeDocument/2006/relationships" id="265" r:id="R61a32964279e439a"/>
-    <p:sldId xmlns:r="http://schemas.openxmlformats.org/officeDocument/2006/relationships" id="266" r:id="Rc9aed2d1f08049cd"/>
-    <p:sldId xmlns:r="http://schemas.openxmlformats.org/officeDocument/2006/relationships" id="267" r:id="R1b01e82e3c544c84"/>
-    <p:sldId xmlns:r="http://schemas.openxmlformats.org/officeDocument/2006/relationships" id="268" r:id="Rc16685d2cb834009"/>
-    <p:sldId xmlns:r="http://schemas.openxmlformats.org/officeDocument/2006/relationships" id="269" r:id="R99c74f40d56046e4"/>
-    <p:sldId xmlns:r="http://schemas.openxmlformats.org/officeDocument/2006/relationships" id="270" r:id="R8cdc74f2e3a24747"/>
-    <p:sldId xmlns:r="http://schemas.openxmlformats.org/officeDocument/2006/relationships" id="271" r:id="R4a97572813764627"/>
-    <p:sldId xmlns:r="http://schemas.openxmlformats.org/officeDocument/2006/relationships" id="272" r:id="Rc0dc63cf4e404553"/>
-    <p:sldId xmlns:r="http://schemas.openxmlformats.org/officeDocument/2006/relationships" id="273" r:id="Rae3d8500a5254af3"/>
-    <p:sldId xmlns:r="http://schemas.openxmlformats.org/officeDocument/2006/relationships" id="274" r:id="R569bec5e9b9e42a5"/>
-    <p:sldId xmlns:r="http://schemas.openxmlformats.org/officeDocument/2006/relationships" id="275" r:id="Rf270967702fd47e7"/>
-    <p:sldId xmlns:r="http://schemas.openxmlformats.org/officeDocument/2006/relationships" id="276" r:id="Rda46187cb8174918"/>
-    <p:sldId xmlns:r="http://schemas.openxmlformats.org/officeDocument/2006/relationships" id="277" r:id="R24f55b89b7a84b8e"/>
-    <p:sldId xmlns:r="http://schemas.openxmlformats.org/officeDocument/2006/relationships" id="278" r:id="Rf534cde992804546"/>
-    <p:sldId xmlns:r="http://schemas.openxmlformats.org/officeDocument/2006/relationships" id="279" r:id="Rf59ce5de36d84b35"/>
-    <p:sldId xmlns:r="http://schemas.openxmlformats.org/officeDocument/2006/relationships" id="280" r:id="Rc1b64f93726e4b9f"/>
-    <p:sldId xmlns:r="http://schemas.openxmlformats.org/officeDocument/2006/relationships" id="281" r:id="R4a91eae7ef0c4335"/>
-    <p:sldId xmlns:r="http://schemas.openxmlformats.org/officeDocument/2006/relationships" id="282" r:id="R5fc2f4972da142f3"/>
+    <p:sldId xmlns:r="http://schemas.openxmlformats.org/officeDocument/2006/relationships" id="256" r:id="R2547694add834b98"/>
+    <p:sldId xmlns:r="http://schemas.openxmlformats.org/officeDocument/2006/relationships" id="257" r:id="Rc477d00c79f0436e"/>
+    <p:sldId xmlns:r="http://schemas.openxmlformats.org/officeDocument/2006/relationships" id="258" r:id="R229b5fddf08d4a73"/>
+    <p:sldId xmlns:r="http://schemas.openxmlformats.org/officeDocument/2006/relationships" id="259" r:id="Refa2f2cd6d5a4aad"/>
+    <p:sldId xmlns:r="http://schemas.openxmlformats.org/officeDocument/2006/relationships" id="260" r:id="R26bf9864515e4381"/>
+    <p:sldId xmlns:r="http://schemas.openxmlformats.org/officeDocument/2006/relationships" id="261" r:id="R75f19e12cced48f4"/>
+    <p:sldId xmlns:r="http://schemas.openxmlformats.org/officeDocument/2006/relationships" id="262" r:id="R59ab7917e90f487d"/>
+    <p:sldId xmlns:r="http://schemas.openxmlformats.org/officeDocument/2006/relationships" id="263" r:id="R4be2fde561c8409f"/>
+    <p:sldId xmlns:r="http://schemas.openxmlformats.org/officeDocument/2006/relationships" id="264" r:id="R6d3669da19994729"/>
+    <p:sldId xmlns:r="http://schemas.openxmlformats.org/officeDocument/2006/relationships" id="265" r:id="R68d69d6b5c054daa"/>
+    <p:sldId xmlns:r="http://schemas.openxmlformats.org/officeDocument/2006/relationships" id="266" r:id="R2eafa8cbc5fe41fb"/>
+    <p:sldId xmlns:r="http://schemas.openxmlformats.org/officeDocument/2006/relationships" id="267" r:id="R0a78af36994d4240"/>
+    <p:sldId xmlns:r="http://schemas.openxmlformats.org/officeDocument/2006/relationships" id="268" r:id="Rda5772d90eda4cb3"/>
+    <p:sldId xmlns:r="http://schemas.openxmlformats.org/officeDocument/2006/relationships" id="269" r:id="Rc929832839c14340"/>
+    <p:sldId xmlns:r="http://schemas.openxmlformats.org/officeDocument/2006/relationships" id="270" r:id="Rd753fb8afeb04975"/>
+    <p:sldId xmlns:r="http://schemas.openxmlformats.org/officeDocument/2006/relationships" id="271" r:id="Rc08593dc22564d96"/>
+    <p:sldId xmlns:r="http://schemas.openxmlformats.org/officeDocument/2006/relationships" id="272" r:id="R85237e9423e74c19"/>
+    <p:sldId xmlns:r="http://schemas.openxmlformats.org/officeDocument/2006/relationships" id="273" r:id="R40bebf42569a40b2"/>
+    <p:sldId xmlns:r="http://schemas.openxmlformats.org/officeDocument/2006/relationships" id="274" r:id="R3e05ec44dafe49cb"/>
+    <p:sldId xmlns:r="http://schemas.openxmlformats.org/officeDocument/2006/relationships" id="275" r:id="Rfc8397f5238f48e3"/>
+    <p:sldId xmlns:r="http://schemas.openxmlformats.org/officeDocument/2006/relationships" id="276" r:id="R993fec7be19b4712"/>
+    <p:sldId xmlns:r="http://schemas.openxmlformats.org/officeDocument/2006/relationships" id="277" r:id="R8b9e7b1ca04e4f17"/>
+    <p:sldId xmlns:r="http://schemas.openxmlformats.org/officeDocument/2006/relationships" id="278" r:id="Rfe82071f826f4625"/>
+    <p:sldId xmlns:r="http://schemas.openxmlformats.org/officeDocument/2006/relationships" id="279" r:id="Rc1414b2e5f6b492c"/>
+    <p:sldId xmlns:r="http://schemas.openxmlformats.org/officeDocument/2006/relationships" id="280" r:id="R4a418c5f8c9548ec"/>
+    <p:sldId xmlns:r="http://schemas.openxmlformats.org/officeDocument/2006/relationships" id="281" r:id="Reb2944ef19e9486f"/>
+    <p:sldId xmlns:r="http://schemas.openxmlformats.org/officeDocument/2006/relationships" id="282" r:id="Rd68b0039c50747e6"/>
   </p:sldIdLst>
   <p:sldSz cx="12192000" cy="6858000"/>
   <p:notesSz cx="6858000" cy="9144000"/>
@@ -2356,7 +2356,7 @@
   </p:cSld>
   <p:clrMap bg1="lt1" tx1="dk1" bg2="lt2" tx2="dk2" accent1="accent1" accent2="accent2" accent3="accent3" accent4="accent4" accent5="accent5" accent6="accent6" hlink="hlink" folHlink="folHlink"/>
   <p:sldLayoutIdLst>
-    <p:sldLayoutId xmlns:r="http://schemas.openxmlformats.org/officeDocument/2006/relationships" id="2147483649" r:id="Ra5e1516410de4969"/>
+    <p:sldLayoutId xmlns:r="http://schemas.openxmlformats.org/officeDocument/2006/relationships" id="2147483649" r:id="R785de914a7f1494a"/>
   </p:sldLayoutIdLst>
   <p:txStyles>
     <p:titleStyle>
@@ -2629,7 +2629,7 @@
                 <a:ea typeface="Calibri"/>
                 <a:cs typeface="Calibri"/>
               </a:rPr>
-              <a:t>All 32 NESTFUL families fall below the gate requirement</a:t>
+              <a:t>Token reduction by workflow family</a:t>
             </a:r>
           </a:p>
         </c:rich>
@@ -2668,7 +2668,7 @@
               <c:strCache>
                 <c:ptCount val="1"/>
                 <c:pt idx="0">
-                  <c:v>Independent group records</c:v>
+                  <c:v>Token reduction (%)</c:v>
                 </c:pt>
               </c:strCache>
             </c:strRef>
@@ -2690,12 +2690,15 @@
             <c:strRef>
               <c:f>Sheet1!$A$2:$A$3</c:f>
               <c:strCache>
-                <c:ptCount val="2"/>
+                <c:ptCount val="3"/>
                 <c:pt idx="0">
-                  <c:v>Best family support</c:v>
+                  <c:v>Issue type</c:v>
                 </c:pt>
                 <c:pt idx="1">
-                  <c:v>Exact-gate requirement</c:v>
+                  <c:v>PR outcome</c:v>
+                </c:pt>
+                <c:pt idx="2">
+                  <c:v>Backlog attention</c:v>
                 </c:pt>
               </c:strCache>
             </c:strRef>
@@ -2705,12 +2708,15 @@
               <c:f>Sheet1!$B$2:$B$3</c:f>
               <c:numCache>
                 <c:formatCode>General</c:formatCode>
-                <c:ptCount val="2"/>
+                <c:ptCount val="3"/>
                 <c:pt idx="0">
-                  <c:v>26</c:v>
+                  <c:v>39.5</c:v>
                 </c:pt>
                 <c:pt idx="1">
-                  <c:v>92</c:v>
+                  <c:v>80.8</c:v>
+                </c:pt>
+                <c:pt idx="2">
+                  <c:v>81.4</c:v>
                 </c:pt>
               </c:numCache>
             </c:numRef>
@@ -2786,7 +2792,7 @@
             </a:ln>
           </c:spPr>
         </c:majorGridlines>
-        <c:numFmt formatCode="General" sourceLinked="0"/>
+        <c:numFmt formatCode="0\%" sourceLinked="0"/>
         <c:majorTickMark val="out"/>
         <c:minorTickMark val="none"/>
         <c:tickLblPos val="nextTo"/>
@@ -2849,7 +2855,7 @@
                 <a:ea typeface="Calibri"/>
                 <a:cs typeface="Calibri"/>
               </a:rPr>
-              <a:t>All 32 NESTFUL families fall below the gate requirement</a:t>
+              <a:t>Token reduction by workflow family</a:t>
             </a:r>
           </a:p>
         </c:rich>
@@ -2888,7 +2894,7 @@
               <c:strCache>
                 <c:ptCount val="1"/>
                 <c:pt idx="0">
-                  <c:v>Independent group records</c:v>
+                  <c:v>Token reduction (%)</c:v>
                 </c:pt>
               </c:strCache>
             </c:strRef>
@@ -2910,12 +2916,15 @@
             <c:strRef>
               <c:f>Sheet1!$A$2:$A$3</c:f>
               <c:strCache>
-                <c:ptCount val="2"/>
+                <c:ptCount val="3"/>
                 <c:pt idx="0">
-                  <c:v>Best family support</c:v>
+                  <c:v>Issue type</c:v>
                 </c:pt>
                 <c:pt idx="1">
-                  <c:v>Exact-gate requirement</c:v>
+                  <c:v>PR outcome</c:v>
+                </c:pt>
+                <c:pt idx="2">
+                  <c:v>Backlog attention</c:v>
                 </c:pt>
               </c:strCache>
             </c:strRef>
@@ -2925,12 +2934,15 @@
               <c:f>Sheet1!$B$2:$B$3</c:f>
               <c:numCache>
                 <c:formatCode>General</c:formatCode>
-                <c:ptCount val="2"/>
+                <c:ptCount val="3"/>
                 <c:pt idx="0">
-                  <c:v>26</c:v>
+                  <c:v>39.5</c:v>
                 </c:pt>
                 <c:pt idx="1">
-                  <c:v>92</c:v>
+                  <c:v>80.8</c:v>
+                </c:pt>
+                <c:pt idx="2">
+                  <c:v>81.4</c:v>
                 </c:pt>
               </c:numCache>
             </c:numRef>
@@ -3006,7 +3018,7 @@
             </a:ln>
           </c:spPr>
         </c:majorGridlines>
-        <c:numFmt formatCode="General" sourceLinked="0"/>
+        <c:numFmt formatCode="0\%" sourceLinked="0"/>
         <c:majorTickMark val="out"/>
         <c:minorTickMark val="none"/>
         <c:tickLblPos val="nextTo"/>
@@ -4009,7 +4021,7 @@
           <p:cNvPr id="2" name="Shape 0">
             <a:extLst xmlns:a="http://schemas.openxmlformats.org/drawingml/2006/main">
               <a:ext uri="{FF2B5EF4-FFF2-40B4-BE49-F238E27FC236}">
-                <a16:creationId xmlns:a16="http://schemas.microsoft.com/office/drawing/2014/main" id="{3B3E1B39-0E8E-476B-A531-16F1DF56B2E6}"/>
+                <a16:creationId xmlns:a16="http://schemas.microsoft.com/office/drawing/2014/main" id="{798A6864-4997-4A5B-BE50-B7ED0BA6EA49}"/>
               </a:ext>
             </a:extLst>
           </p:cNvPr>
@@ -4049,7 +4061,7 @@
           <p:cNvPr id="3" name="Shape 1">
             <a:extLst xmlns:a="http://schemas.openxmlformats.org/drawingml/2006/main">
               <a:ext uri="{FF2B5EF4-FFF2-40B4-BE49-F238E27FC236}">
-                <a16:creationId xmlns:a16="http://schemas.microsoft.com/office/drawing/2014/main" id="{1DF99CA3-F3A2-4E26-8D0C-A03D53675BF5}"/>
+                <a16:creationId xmlns:a16="http://schemas.microsoft.com/office/drawing/2014/main" id="{98B003DF-B1AA-4628-AA79-D3C67FD8511A}"/>
               </a:ext>
             </a:extLst>
           </p:cNvPr>
@@ -4089,7 +4101,7 @@
           <p:cNvPr id="4" name="Shape 2">
             <a:extLst xmlns:a="http://schemas.openxmlformats.org/drawingml/2006/main">
               <a:ext uri="{FF2B5EF4-FFF2-40B4-BE49-F238E27FC236}">
-                <a16:creationId xmlns:a16="http://schemas.microsoft.com/office/drawing/2014/main" id="{D2B907B9-8447-4C1E-959C-7A2A8FFDAE5F}"/>
+                <a16:creationId xmlns:a16="http://schemas.microsoft.com/office/drawing/2014/main" id="{DDDEAFEF-F4E6-439D-AB1F-D37888A95BB7}"/>
               </a:ext>
             </a:extLst>
           </p:cNvPr>
@@ -4129,7 +4141,7 @@
           <p:cNvPr id="5" name="Text 3">
             <a:extLst xmlns:a="http://schemas.openxmlformats.org/drawingml/2006/main">
               <a:ext uri="{FF2B5EF4-FFF2-40B4-BE49-F238E27FC236}">
-                <a16:creationId xmlns:a16="http://schemas.microsoft.com/office/drawing/2014/main" id="{674C9099-BBA3-41F9-9F5D-EFEEC5ADEBF9}"/>
+                <a16:creationId xmlns:a16="http://schemas.microsoft.com/office/drawing/2014/main" id="{061D4504-961D-4A8E-AB71-4518D7B13187}"/>
               </a:ext>
             </a:extLst>
           </p:cNvPr>
@@ -4174,7 +4186,7 @@
           <p:cNvPr id="6" name="Text 4">
             <a:extLst xmlns:a="http://schemas.openxmlformats.org/drawingml/2006/main">
               <a:ext uri="{FF2B5EF4-FFF2-40B4-BE49-F238E27FC236}">
-                <a16:creationId xmlns:a16="http://schemas.microsoft.com/office/drawing/2014/main" id="{3C6044AF-A202-41E3-998D-3B3858E6E4B3}"/>
+                <a16:creationId xmlns:a16="http://schemas.microsoft.com/office/drawing/2014/main" id="{F6B2009C-4BD6-4D6E-AAF3-4F6782417088}"/>
               </a:ext>
             </a:extLst>
           </p:cNvPr>
@@ -4222,7 +4234,7 @@
           <p:cNvPr id="7" name="Text 5">
             <a:extLst xmlns:a="http://schemas.openxmlformats.org/drawingml/2006/main">
               <a:ext uri="{FF2B5EF4-FFF2-40B4-BE49-F238E27FC236}">
-                <a16:creationId xmlns:a16="http://schemas.microsoft.com/office/drawing/2014/main" id="{5085EB05-5C6D-4E73-B0F5-F93980413EE5}"/>
+                <a16:creationId xmlns:a16="http://schemas.microsoft.com/office/drawing/2014/main" id="{214A8CCB-4590-4C1C-B8FF-F8E9654B87F4}"/>
               </a:ext>
             </a:extLst>
           </p:cNvPr>
@@ -4270,7 +4282,7 @@
           <p:cNvPr id="8" name="Shape 6">
             <a:extLst xmlns:a="http://schemas.openxmlformats.org/drawingml/2006/main">
               <a:ext uri="{FF2B5EF4-FFF2-40B4-BE49-F238E27FC236}">
-                <a16:creationId xmlns:a16="http://schemas.microsoft.com/office/drawing/2014/main" id="{2B9E2BCA-8FB7-437C-B2B0-ED31EDDDD16E}"/>
+                <a16:creationId xmlns:a16="http://schemas.microsoft.com/office/drawing/2014/main" id="{D4899A11-1B6A-4275-B445-640EE008A6FF}"/>
               </a:ext>
             </a:extLst>
           </p:cNvPr>
@@ -4306,7 +4318,7 @@
           <p:cNvPr id="9" name="Text 7">
             <a:extLst xmlns:a="http://schemas.openxmlformats.org/drawingml/2006/main">
               <a:ext uri="{FF2B5EF4-FFF2-40B4-BE49-F238E27FC236}">
-                <a16:creationId xmlns:a16="http://schemas.microsoft.com/office/drawing/2014/main" id="{03F1EFA4-70EC-498B-AAD8-CA601FA8A8E0}"/>
+                <a16:creationId xmlns:a16="http://schemas.microsoft.com/office/drawing/2014/main" id="{0FB77748-62C0-41F9-BF6F-250C87137CB9}"/>
               </a:ext>
             </a:extLst>
           </p:cNvPr>
@@ -4341,7 +4353,7 @@
                 <a:ea typeface="Cambria"/>
                 <a:cs typeface="Cambria"/>
               </a:rPr>
-              <a:t>Benchmarks</a:t>
+              <a:t>Real workflows</a:t>
             </a:r>
           </a:p>
         </p:txBody>
@@ -4351,7 +4363,7 @@
           <p:cNvPr id="10" name="Text 8">
             <a:extLst xmlns:a="http://schemas.openxmlformats.org/drawingml/2006/main">
               <a:ext uri="{FF2B5EF4-FFF2-40B4-BE49-F238E27FC236}">
-                <a16:creationId xmlns:a16="http://schemas.microsoft.com/office/drawing/2014/main" id="{F5B535E1-8F1B-40BD-B36C-2FB019EE338D}"/>
+                <a16:creationId xmlns:a16="http://schemas.microsoft.com/office/drawing/2014/main" id="{E436A607-EA8A-4FB7-852F-28EE9047996D}"/>
               </a:ext>
             </a:extLst>
           </p:cNvPr>
@@ -4389,7 +4401,7 @@
                 <a:ea typeface="Calibri"/>
                 <a:cs typeface="Calibri"/>
               </a:rPr>
-              <a:t>10 families</a:t>
+              <a:t>3 families</a:t>
             </a:r>
           </a:p>
           <a:p xmlns:a="http://schemas.openxmlformats.org/drawingml/2006/main">
@@ -4408,7 +4420,7 @@
                 <a:ea typeface="Calibri"/>
                 <a:cs typeface="Calibri"/>
               </a:rPr>
-              <a:t>all explicit dispositions</a:t>
+              <a:t>90 held-out records</a:t>
             </a:r>
           </a:p>
         </p:txBody>
@@ -4418,7 +4430,7 @@
           <p:cNvPr id="11" name="Text 9">
             <a:extLst xmlns:a="http://schemas.openxmlformats.org/drawingml/2006/main">
               <a:ext uri="{FF2B5EF4-FFF2-40B4-BE49-F238E27FC236}">
-                <a16:creationId xmlns:a16="http://schemas.microsoft.com/office/drawing/2014/main" id="{668F45AF-2186-4C95-A9EC-B33B083664C3}"/>
+                <a16:creationId xmlns:a16="http://schemas.microsoft.com/office/drawing/2014/main" id="{509F00DC-36D9-48CB-BF2D-C66776CAAB26}"/>
               </a:ext>
             </a:extLst>
           </p:cNvPr>
@@ -4463,7 +4475,7 @@
           <p:cNvPr id="12" name="Text 10">
             <a:extLst xmlns:a="http://schemas.openxmlformats.org/drawingml/2006/main">
               <a:ext uri="{FF2B5EF4-FFF2-40B4-BE49-F238E27FC236}">
-                <a16:creationId xmlns:a16="http://schemas.microsoft.com/office/drawing/2014/main" id="{A749BB43-6D65-4270-BF4E-7579E09E7C8A}"/>
+                <a16:creationId xmlns:a16="http://schemas.microsoft.com/office/drawing/2014/main" id="{0CB476BD-837E-4BCE-ACF8-7D58098C1859}"/>
               </a:ext>
             </a:extLst>
           </p:cNvPr>
@@ -4501,7 +4513,7 @@
                 <a:ea typeface="Calibri"/>
                 <a:cs typeface="Calibri"/>
               </a:rPr>
-              <a:t>6 live protocols on a</a:t>
+              <a:t>Live provider calls on a</a:t>
             </a:r>
           </a:p>
           <a:p xmlns:a="http://schemas.openxmlformats.org/drawingml/2006/main">
@@ -4530,7 +4542,7 @@
           <p:cNvPr id="13" name="Text 11">
             <a:extLst xmlns:a="http://schemas.openxmlformats.org/drawingml/2006/main">
               <a:ext uri="{FF2B5EF4-FFF2-40B4-BE49-F238E27FC236}">
-                <a16:creationId xmlns:a16="http://schemas.microsoft.com/office/drawing/2014/main" id="{F9D5641B-996A-4740-8CEB-0AB835704A1B}"/>
+                <a16:creationId xmlns:a16="http://schemas.microsoft.com/office/drawing/2014/main" id="{DA0BD656-1392-4E63-A78D-C022C8EA8521}"/>
               </a:ext>
             </a:extLst>
           </p:cNvPr>
@@ -4575,7 +4587,7 @@
           <p:cNvPr id="14" name="Text 12">
             <a:extLst xmlns:a="http://schemas.openxmlformats.org/drawingml/2006/main">
               <a:ext uri="{FF2B5EF4-FFF2-40B4-BE49-F238E27FC236}">
-                <a16:creationId xmlns:a16="http://schemas.microsoft.com/office/drawing/2014/main" id="{6315DCC0-DFFD-4FD2-BBA1-EFB0B9F3AB83}"/>
+                <a16:creationId xmlns:a16="http://schemas.microsoft.com/office/drawing/2014/main" id="{7D5E89BE-8A0F-414E-80F5-817E1770D727}"/>
               </a:ext>
             </a:extLst>
           </p:cNvPr>
@@ -4642,7 +4654,7 @@
           <p:cNvPr id="15" name="Text 13">
             <a:extLst xmlns:a="http://schemas.openxmlformats.org/drawingml/2006/main">
               <a:ext uri="{FF2B5EF4-FFF2-40B4-BE49-F238E27FC236}">
-                <a16:creationId xmlns:a16="http://schemas.microsoft.com/office/drawing/2014/main" id="{C5165FB7-92D6-445E-95F0-8CA2F69A64D7}"/>
+                <a16:creationId xmlns:a16="http://schemas.microsoft.com/office/drawing/2014/main" id="{B4289B81-B165-40DE-BB1E-F3F112CE3D8F}"/>
               </a:ext>
             </a:extLst>
           </p:cNvPr>
@@ -4685,7 +4697,7 @@
     </p:spTree>
     <p:extLst>
       <p:ext uri="{BB962C8B-B14F-4D97-AF65-F5344CB8AC3E}">
-        <p14:creationId xmlns:p14="http://schemas.microsoft.com/office/powerpoint/2010/main" val="629366634"/>
+        <p14:creationId xmlns:p14="http://schemas.microsoft.com/office/powerpoint/2010/main" val="431059015"/>
       </p:ext>
     </p:extLst>
   </p:cSld>
@@ -4716,7 +4728,7 @@
           <p:cNvPr id="2" name="Text 0">
             <a:extLst xmlns:a="http://schemas.openxmlformats.org/drawingml/2006/main">
               <a:ext uri="{FF2B5EF4-FFF2-40B4-BE49-F238E27FC236}">
-                <a16:creationId xmlns:a16="http://schemas.microsoft.com/office/drawing/2014/main" id="{6DA987AE-12A5-46EB-8D4D-6EA99E5D6CB0}"/>
+                <a16:creationId xmlns:a16="http://schemas.microsoft.com/office/drawing/2014/main" id="{029D601B-80D5-4BFB-97F3-85EAD6F1EF59}"/>
               </a:ext>
             </a:extLst>
           </p:cNvPr>
@@ -4761,7 +4773,7 @@
           <p:cNvPr id="3" name="Text 1">
             <a:extLst xmlns:a="http://schemas.openxmlformats.org/drawingml/2006/main">
               <a:ext uri="{FF2B5EF4-FFF2-40B4-BE49-F238E27FC236}">
-                <a16:creationId xmlns:a16="http://schemas.microsoft.com/office/drawing/2014/main" id="{A5BF960B-0853-4FA1-9C8B-2FA9C01FFE69}"/>
+                <a16:creationId xmlns:a16="http://schemas.microsoft.com/office/drawing/2014/main" id="{4964D68B-1906-4CFC-8B23-E5964CBA043B}"/>
               </a:ext>
             </a:extLst>
           </p:cNvPr>
@@ -4806,7 +4818,7 @@
           <p:cNvPr id="4" name="Text 2">
             <a:extLst xmlns:a="http://schemas.openxmlformats.org/drawingml/2006/main">
               <a:ext uri="{FF2B5EF4-FFF2-40B4-BE49-F238E27FC236}">
-                <a16:creationId xmlns:a16="http://schemas.microsoft.com/office/drawing/2014/main" id="{3FDBD047-0AF1-4D3C-9955-1EFEBB14BCC9}"/>
+                <a16:creationId xmlns:a16="http://schemas.microsoft.com/office/drawing/2014/main" id="{A2D5BE75-150E-4EEC-A8FC-D90131E2C950}"/>
               </a:ext>
             </a:extLst>
           </p:cNvPr>
@@ -4851,7 +4863,7 @@
           <p:cNvPr id="5" name="Text 3">
             <a:extLst xmlns:a="http://schemas.openxmlformats.org/drawingml/2006/main">
               <a:ext uri="{FF2B5EF4-FFF2-40B4-BE49-F238E27FC236}">
-                <a16:creationId xmlns:a16="http://schemas.microsoft.com/office/drawing/2014/main" id="{14540051-F8E7-41CA-8401-FB03C4586F6C}"/>
+                <a16:creationId xmlns:a16="http://schemas.microsoft.com/office/drawing/2014/main" id="{A452E9CF-7ACA-459C-9FB3-C1D52B2EF024}"/>
               </a:ext>
             </a:extLst>
           </p:cNvPr>
@@ -4896,7 +4908,7 @@
           <p:cNvPr id="6" name="Text 4">
             <a:extLst xmlns:a="http://schemas.openxmlformats.org/drawingml/2006/main">
               <a:ext uri="{FF2B5EF4-FFF2-40B4-BE49-F238E27FC236}">
-                <a16:creationId xmlns:a16="http://schemas.microsoft.com/office/drawing/2014/main" id="{0F2F91A5-9162-4BB1-8260-7DE7C5A3F0EA}"/>
+                <a16:creationId xmlns:a16="http://schemas.microsoft.com/office/drawing/2014/main" id="{95F9805C-1A2D-41BD-97F7-2958846BAF04}"/>
               </a:ext>
             </a:extLst>
           </p:cNvPr>
@@ -4944,7 +4956,7 @@
           <p:cNvPr id="7" name="Shape 5">
             <a:extLst xmlns:a="http://schemas.openxmlformats.org/drawingml/2006/main">
               <a:ext uri="{FF2B5EF4-FFF2-40B4-BE49-F238E27FC236}">
-                <a16:creationId xmlns:a16="http://schemas.microsoft.com/office/drawing/2014/main" id="{50018E27-1D90-4246-8DC1-584B5DA31311}"/>
+                <a16:creationId xmlns:a16="http://schemas.microsoft.com/office/drawing/2014/main" id="{BF6CA0B5-E1CB-4353-BFB6-E65B66600C40}"/>
               </a:ext>
             </a:extLst>
           </p:cNvPr>
@@ -4991,7 +5003,7 @@
           <p:cNvPr id="8" name="Shape 6">
             <a:extLst xmlns:a="http://schemas.openxmlformats.org/drawingml/2006/main">
               <a:ext uri="{FF2B5EF4-FFF2-40B4-BE49-F238E27FC236}">
-                <a16:creationId xmlns:a16="http://schemas.microsoft.com/office/drawing/2014/main" id="{9857821C-CCF3-43D0-AAA8-422B9B38DBFC}"/>
+                <a16:creationId xmlns:a16="http://schemas.microsoft.com/office/drawing/2014/main" id="{B4ED6B45-57A8-4E90-9356-CD58E82DC42C}"/>
               </a:ext>
             </a:extLst>
           </p:cNvPr>
@@ -5029,7 +5041,7 @@
           <p:cNvPr id="9" name="Text 7">
             <a:extLst xmlns:a="http://schemas.openxmlformats.org/drawingml/2006/main">
               <a:ext uri="{FF2B5EF4-FFF2-40B4-BE49-F238E27FC236}">
-                <a16:creationId xmlns:a16="http://schemas.microsoft.com/office/drawing/2014/main" id="{0B5E3B71-E21B-4891-B109-A57C3C19A573}"/>
+                <a16:creationId xmlns:a16="http://schemas.microsoft.com/office/drawing/2014/main" id="{8284E78C-6BAB-47B1-BD39-B0C63BF20FAF}"/>
               </a:ext>
             </a:extLst>
           </p:cNvPr>
@@ -5074,7 +5086,7 @@
           <p:cNvPr id="10" name="Text 8">
             <a:extLst xmlns:a="http://schemas.openxmlformats.org/drawingml/2006/main">
               <a:ext uri="{FF2B5EF4-FFF2-40B4-BE49-F238E27FC236}">
-                <a16:creationId xmlns:a16="http://schemas.microsoft.com/office/drawing/2014/main" id="{7E51B2FF-E04B-447C-81C7-9F183E296164}"/>
+                <a16:creationId xmlns:a16="http://schemas.microsoft.com/office/drawing/2014/main" id="{CD93556A-E567-4B17-AD35-0AB244082189}"/>
               </a:ext>
             </a:extLst>
           </p:cNvPr>
@@ -5119,7 +5131,7 @@
           <p:cNvPr id="11" name="Text 9">
             <a:extLst xmlns:a="http://schemas.openxmlformats.org/drawingml/2006/main">
               <a:ext uri="{FF2B5EF4-FFF2-40B4-BE49-F238E27FC236}">
-                <a16:creationId xmlns:a16="http://schemas.microsoft.com/office/drawing/2014/main" id="{4FDD16D2-3FDB-4DFB-9B82-3BC9B35A5272}"/>
+                <a16:creationId xmlns:a16="http://schemas.microsoft.com/office/drawing/2014/main" id="{F8573556-5374-425B-A3A9-D673C9231AB0}"/>
               </a:ext>
             </a:extLst>
           </p:cNvPr>
@@ -5164,7 +5176,7 @@
           <p:cNvPr id="12" name="Text 10">
             <a:extLst xmlns:a="http://schemas.openxmlformats.org/drawingml/2006/main">
               <a:ext uri="{FF2B5EF4-FFF2-40B4-BE49-F238E27FC236}">
-                <a16:creationId xmlns:a16="http://schemas.microsoft.com/office/drawing/2014/main" id="{85413F1F-2B17-4C32-BBE0-9172E37A7B2A}"/>
+                <a16:creationId xmlns:a16="http://schemas.microsoft.com/office/drawing/2014/main" id="{A5D3AE3F-6B76-4D35-8541-59B766E521B2}"/>
               </a:ext>
             </a:extLst>
           </p:cNvPr>
@@ -5212,7 +5224,7 @@
           <p:cNvPr id="13" name="Shape 11">
             <a:extLst xmlns:a="http://schemas.openxmlformats.org/drawingml/2006/main">
               <a:ext uri="{FF2B5EF4-FFF2-40B4-BE49-F238E27FC236}">
-                <a16:creationId xmlns:a16="http://schemas.microsoft.com/office/drawing/2014/main" id="{E18BA52F-7737-4380-BF66-0C6AB693DE08}"/>
+                <a16:creationId xmlns:a16="http://schemas.microsoft.com/office/drawing/2014/main" id="{0C8FB9A9-109A-45AB-B8F8-27B4C4D44263}"/>
               </a:ext>
             </a:extLst>
           </p:cNvPr>
@@ -5259,7 +5271,7 @@
           <p:cNvPr id="14" name="Shape 12">
             <a:extLst xmlns:a="http://schemas.openxmlformats.org/drawingml/2006/main">
               <a:ext uri="{FF2B5EF4-FFF2-40B4-BE49-F238E27FC236}">
-                <a16:creationId xmlns:a16="http://schemas.microsoft.com/office/drawing/2014/main" id="{43D798EE-A6E4-4260-B801-D95A1E981C1F}"/>
+                <a16:creationId xmlns:a16="http://schemas.microsoft.com/office/drawing/2014/main" id="{D2552AA7-2DC5-431D-BE30-8219A1134B7B}"/>
               </a:ext>
             </a:extLst>
           </p:cNvPr>
@@ -5297,7 +5309,7 @@
           <p:cNvPr id="15" name="Text 13">
             <a:extLst xmlns:a="http://schemas.openxmlformats.org/drawingml/2006/main">
               <a:ext uri="{FF2B5EF4-FFF2-40B4-BE49-F238E27FC236}">
-                <a16:creationId xmlns:a16="http://schemas.microsoft.com/office/drawing/2014/main" id="{99E9482C-A06B-49CE-9775-78407822383A}"/>
+                <a16:creationId xmlns:a16="http://schemas.microsoft.com/office/drawing/2014/main" id="{84A80C35-0174-4E74-AF0B-13BC3972B8AC}"/>
               </a:ext>
             </a:extLst>
           </p:cNvPr>
@@ -5342,7 +5354,7 @@
           <p:cNvPr id="16" name="Text 14">
             <a:extLst xmlns:a="http://schemas.openxmlformats.org/drawingml/2006/main">
               <a:ext uri="{FF2B5EF4-FFF2-40B4-BE49-F238E27FC236}">
-                <a16:creationId xmlns:a16="http://schemas.microsoft.com/office/drawing/2014/main" id="{42C34E5F-8456-4DF7-84EB-6F23BC1CD53F}"/>
+                <a16:creationId xmlns:a16="http://schemas.microsoft.com/office/drawing/2014/main" id="{923472A3-2163-4BD3-9BBD-E584EB8B2BCD}"/>
               </a:ext>
             </a:extLst>
           </p:cNvPr>
@@ -5387,7 +5399,7 @@
           <p:cNvPr id="17" name="Text 15">
             <a:extLst xmlns:a="http://schemas.openxmlformats.org/drawingml/2006/main">
               <a:ext uri="{FF2B5EF4-FFF2-40B4-BE49-F238E27FC236}">
-                <a16:creationId xmlns:a16="http://schemas.microsoft.com/office/drawing/2014/main" id="{C335E08E-1075-4E76-9C70-E8625D6DF624}"/>
+                <a16:creationId xmlns:a16="http://schemas.microsoft.com/office/drawing/2014/main" id="{5AA74B2F-7E0C-4A7C-A92B-40F6B231527F}"/>
               </a:ext>
             </a:extLst>
           </p:cNvPr>
@@ -5432,7 +5444,7 @@
           <p:cNvPr id="18" name="Text 16">
             <a:extLst xmlns:a="http://schemas.openxmlformats.org/drawingml/2006/main">
               <a:ext uri="{FF2B5EF4-FFF2-40B4-BE49-F238E27FC236}">
-                <a16:creationId xmlns:a16="http://schemas.microsoft.com/office/drawing/2014/main" id="{C1C37198-FABD-4276-9BAD-1D922EDF3177}"/>
+                <a16:creationId xmlns:a16="http://schemas.microsoft.com/office/drawing/2014/main" id="{8D4F90E1-0AF9-4320-832E-2CF18DD92034}"/>
               </a:ext>
             </a:extLst>
           </p:cNvPr>
@@ -5480,7 +5492,7 @@
           <p:cNvPr id="19" name="Shape 17">
             <a:extLst xmlns:a="http://schemas.openxmlformats.org/drawingml/2006/main">
               <a:ext uri="{FF2B5EF4-FFF2-40B4-BE49-F238E27FC236}">
-                <a16:creationId xmlns:a16="http://schemas.microsoft.com/office/drawing/2014/main" id="{CD62EACF-573C-491B-A88A-D74970AF138F}"/>
+                <a16:creationId xmlns:a16="http://schemas.microsoft.com/office/drawing/2014/main" id="{CAADCA37-AEAF-4183-AFE5-B37D04E444F4}"/>
               </a:ext>
             </a:extLst>
           </p:cNvPr>
@@ -5527,7 +5539,7 @@
           <p:cNvPr id="20" name="Shape 18">
             <a:extLst xmlns:a="http://schemas.openxmlformats.org/drawingml/2006/main">
               <a:ext uri="{FF2B5EF4-FFF2-40B4-BE49-F238E27FC236}">
-                <a16:creationId xmlns:a16="http://schemas.microsoft.com/office/drawing/2014/main" id="{397CF486-4481-4798-A2FF-591A231AA7ED}"/>
+                <a16:creationId xmlns:a16="http://schemas.microsoft.com/office/drawing/2014/main" id="{B88F08BC-E13C-44FD-9F9F-B69B86953101}"/>
               </a:ext>
             </a:extLst>
           </p:cNvPr>
@@ -5565,7 +5577,7 @@
           <p:cNvPr id="21" name="Text 19">
             <a:extLst xmlns:a="http://schemas.openxmlformats.org/drawingml/2006/main">
               <a:ext uri="{FF2B5EF4-FFF2-40B4-BE49-F238E27FC236}">
-                <a16:creationId xmlns:a16="http://schemas.microsoft.com/office/drawing/2014/main" id="{A47CABCC-5756-41CA-8364-7A1017217F75}"/>
+                <a16:creationId xmlns:a16="http://schemas.microsoft.com/office/drawing/2014/main" id="{37F7907E-F3DD-490C-8351-359B97FCC60B}"/>
               </a:ext>
             </a:extLst>
           </p:cNvPr>
@@ -5610,7 +5622,7 @@
           <p:cNvPr id="22" name="Text 20">
             <a:extLst xmlns:a="http://schemas.openxmlformats.org/drawingml/2006/main">
               <a:ext uri="{FF2B5EF4-FFF2-40B4-BE49-F238E27FC236}">
-                <a16:creationId xmlns:a16="http://schemas.microsoft.com/office/drawing/2014/main" id="{40F2EF74-8057-45BC-B572-07B8A080DA2E}"/>
+                <a16:creationId xmlns:a16="http://schemas.microsoft.com/office/drawing/2014/main" id="{20F7402D-B621-4937-880F-E3169C656942}"/>
               </a:ext>
             </a:extLst>
           </p:cNvPr>
@@ -5655,7 +5667,7 @@
           <p:cNvPr id="23" name="Text 21">
             <a:extLst xmlns:a="http://schemas.openxmlformats.org/drawingml/2006/main">
               <a:ext uri="{FF2B5EF4-FFF2-40B4-BE49-F238E27FC236}">
-                <a16:creationId xmlns:a16="http://schemas.microsoft.com/office/drawing/2014/main" id="{FC5A9B20-C8B6-4C3D-8507-C4893DB4A557}"/>
+                <a16:creationId xmlns:a16="http://schemas.microsoft.com/office/drawing/2014/main" id="{69B250E3-56A3-4B10-9FEC-DB21D2DBECF3}"/>
               </a:ext>
             </a:extLst>
           </p:cNvPr>
@@ -5700,7 +5712,7 @@
           <p:cNvPr id="24" name="Text 22">
             <a:extLst xmlns:a="http://schemas.openxmlformats.org/drawingml/2006/main">
               <a:ext uri="{FF2B5EF4-FFF2-40B4-BE49-F238E27FC236}">
-                <a16:creationId xmlns:a16="http://schemas.microsoft.com/office/drawing/2014/main" id="{6BFB2210-A920-4D10-91E8-6F4C3D72FA49}"/>
+                <a16:creationId xmlns:a16="http://schemas.microsoft.com/office/drawing/2014/main" id="{77A3728D-E1C4-4F5E-900A-84AF9722F524}"/>
               </a:ext>
             </a:extLst>
           </p:cNvPr>
@@ -5748,7 +5760,7 @@
           <p:cNvPr id="25" name="Shape 23">
             <a:extLst xmlns:a="http://schemas.openxmlformats.org/drawingml/2006/main">
               <a:ext uri="{FF2B5EF4-FFF2-40B4-BE49-F238E27FC236}">
-                <a16:creationId xmlns:a16="http://schemas.microsoft.com/office/drawing/2014/main" id="{F7FD0176-7A83-4BAB-AA23-EF93DE938FCE}"/>
+                <a16:creationId xmlns:a16="http://schemas.microsoft.com/office/drawing/2014/main" id="{100BD8B6-C833-4608-BBCF-B041390731E9}"/>
               </a:ext>
             </a:extLst>
           </p:cNvPr>
@@ -5788,7 +5800,7 @@
           <p:cNvPr id="26" name="Text 24">
             <a:extLst xmlns:a="http://schemas.openxmlformats.org/drawingml/2006/main">
               <a:ext uri="{FF2B5EF4-FFF2-40B4-BE49-F238E27FC236}">
-                <a16:creationId xmlns:a16="http://schemas.microsoft.com/office/drawing/2014/main" id="{E7AA0A8C-0C59-4819-8C07-B7294CC067D9}"/>
+                <a16:creationId xmlns:a16="http://schemas.microsoft.com/office/drawing/2014/main" id="{9CD41E5D-6DDD-4E55-827F-AA1DBD11EE21}"/>
               </a:ext>
             </a:extLst>
           </p:cNvPr>
@@ -5847,7 +5859,7 @@
           <p:cNvPr id="27" name="Text 25">
             <a:extLst xmlns:a="http://schemas.openxmlformats.org/drawingml/2006/main">
               <a:ext uri="{FF2B5EF4-FFF2-40B4-BE49-F238E27FC236}">
-                <a16:creationId xmlns:a16="http://schemas.microsoft.com/office/drawing/2014/main" id="{C026B569-5274-4D5B-8C5E-BDF20CE7499F}"/>
+                <a16:creationId xmlns:a16="http://schemas.microsoft.com/office/drawing/2014/main" id="{B07A4AC2-FDB2-4987-AFA3-A11B088DEB3A}"/>
               </a:ext>
             </a:extLst>
           </p:cNvPr>
@@ -5892,7 +5904,7 @@
           <p:cNvPr id="28" name="Shape 26">
             <a:extLst xmlns:a="http://schemas.openxmlformats.org/drawingml/2006/main">
               <a:ext uri="{FF2B5EF4-FFF2-40B4-BE49-F238E27FC236}">
-                <a16:creationId xmlns:a16="http://schemas.microsoft.com/office/drawing/2014/main" id="{2A93DB8A-C6AF-4FC2-8831-4565B8A4B63C}"/>
+                <a16:creationId xmlns:a16="http://schemas.microsoft.com/office/drawing/2014/main" id="{08C77636-439B-4653-84DB-37554BA6034F}"/>
               </a:ext>
             </a:extLst>
           </p:cNvPr>
@@ -5939,7 +5951,7 @@
           <p:cNvPr id="29" name="Text 27">
             <a:extLst xmlns:a="http://schemas.openxmlformats.org/drawingml/2006/main">
               <a:ext uri="{FF2B5EF4-FFF2-40B4-BE49-F238E27FC236}">
-                <a16:creationId xmlns:a16="http://schemas.microsoft.com/office/drawing/2014/main" id="{F2F25D99-D00E-4336-BE1B-4B1F1DE10A9B}"/>
+                <a16:creationId xmlns:a16="http://schemas.microsoft.com/office/drawing/2014/main" id="{A96DEF05-56B4-4C96-9057-948E9B6AFDD9}"/>
               </a:ext>
             </a:extLst>
           </p:cNvPr>
@@ -5984,7 +5996,7 @@
           <p:cNvPr id="30" name="Text 28">
             <a:extLst xmlns:a="http://schemas.openxmlformats.org/drawingml/2006/main">
               <a:ext uri="{FF2B5EF4-FFF2-40B4-BE49-F238E27FC236}">
-                <a16:creationId xmlns:a16="http://schemas.microsoft.com/office/drawing/2014/main" id="{82FE5C01-4D7A-46D2-978B-02C1D443AC0E}"/>
+                <a16:creationId xmlns:a16="http://schemas.microsoft.com/office/drawing/2014/main" id="{AD9E803E-B614-4443-AC8B-101995F99EBA}"/>
               </a:ext>
             </a:extLst>
           </p:cNvPr>
@@ -6029,7 +6041,7 @@
           <p:cNvPr id="31" name="Text 29">
             <a:extLst xmlns:a="http://schemas.openxmlformats.org/drawingml/2006/main">
               <a:ext uri="{FF2B5EF4-FFF2-40B4-BE49-F238E27FC236}">
-                <a16:creationId xmlns:a16="http://schemas.microsoft.com/office/drawing/2014/main" id="{DB155E8D-4C14-48F2-BAE2-23FFB68998A9}"/>
+                <a16:creationId xmlns:a16="http://schemas.microsoft.com/office/drawing/2014/main" id="{2AA3A80E-39DE-441D-B725-312BB0F64AB5}"/>
               </a:ext>
             </a:extLst>
           </p:cNvPr>
@@ -6077,7 +6089,7 @@
           <p:cNvPr id="32" name="Shape 30">
             <a:extLst xmlns:a="http://schemas.openxmlformats.org/drawingml/2006/main">
               <a:ext uri="{FF2B5EF4-FFF2-40B4-BE49-F238E27FC236}">
-                <a16:creationId xmlns:a16="http://schemas.microsoft.com/office/drawing/2014/main" id="{F5E82EC6-1455-45E6-AB86-987ED6C501E1}"/>
+                <a16:creationId xmlns:a16="http://schemas.microsoft.com/office/drawing/2014/main" id="{6F70DBB7-6C72-40E9-BDEE-14A65200EE62}"/>
               </a:ext>
             </a:extLst>
           </p:cNvPr>
@@ -6124,7 +6136,7 @@
           <p:cNvPr id="33" name="Text 31">
             <a:extLst xmlns:a="http://schemas.openxmlformats.org/drawingml/2006/main">
               <a:ext uri="{FF2B5EF4-FFF2-40B4-BE49-F238E27FC236}">
-                <a16:creationId xmlns:a16="http://schemas.microsoft.com/office/drawing/2014/main" id="{EA620713-BF0F-4D08-9B12-438F9D531A48}"/>
+                <a16:creationId xmlns:a16="http://schemas.microsoft.com/office/drawing/2014/main" id="{300DDA09-DE03-4A19-BFF3-C280209F6434}"/>
               </a:ext>
             </a:extLst>
           </p:cNvPr>
@@ -6169,7 +6181,7 @@
           <p:cNvPr id="34" name="Text 32">
             <a:extLst xmlns:a="http://schemas.openxmlformats.org/drawingml/2006/main">
               <a:ext uri="{FF2B5EF4-FFF2-40B4-BE49-F238E27FC236}">
-                <a16:creationId xmlns:a16="http://schemas.microsoft.com/office/drawing/2014/main" id="{DD6C1CBA-E4CF-4540-9ADB-B26B41DDF7CF}"/>
+                <a16:creationId xmlns:a16="http://schemas.microsoft.com/office/drawing/2014/main" id="{23BEBFC6-F241-4928-A800-B8A22744F4F5}"/>
               </a:ext>
             </a:extLst>
           </p:cNvPr>
@@ -6214,7 +6226,7 @@
           <p:cNvPr id="35" name="Text 33">
             <a:extLst xmlns:a="http://schemas.openxmlformats.org/drawingml/2006/main">
               <a:ext uri="{FF2B5EF4-FFF2-40B4-BE49-F238E27FC236}">
-                <a16:creationId xmlns:a16="http://schemas.microsoft.com/office/drawing/2014/main" id="{3EFC1CAC-42E3-4833-8E0F-D2692F261604}"/>
+                <a16:creationId xmlns:a16="http://schemas.microsoft.com/office/drawing/2014/main" id="{949F0236-E291-4F65-989E-7CA461954FB8}"/>
               </a:ext>
             </a:extLst>
           </p:cNvPr>
@@ -6262,7 +6274,7 @@
           <p:cNvPr id="36" name="Shape 34">
             <a:extLst xmlns:a="http://schemas.openxmlformats.org/drawingml/2006/main">
               <a:ext uri="{FF2B5EF4-FFF2-40B4-BE49-F238E27FC236}">
-                <a16:creationId xmlns:a16="http://schemas.microsoft.com/office/drawing/2014/main" id="{5DE10A5F-D696-4850-8A12-06B26A2E1348}"/>
+                <a16:creationId xmlns:a16="http://schemas.microsoft.com/office/drawing/2014/main" id="{2822731B-9C32-4DD0-95AD-BE74A1D62A4D}"/>
               </a:ext>
             </a:extLst>
           </p:cNvPr>
@@ -6309,7 +6321,7 @@
           <p:cNvPr id="37" name="Text 35">
             <a:extLst xmlns:a="http://schemas.openxmlformats.org/drawingml/2006/main">
               <a:ext uri="{FF2B5EF4-FFF2-40B4-BE49-F238E27FC236}">
-                <a16:creationId xmlns:a16="http://schemas.microsoft.com/office/drawing/2014/main" id="{BFB824DB-EFA3-4D90-AB99-FA82BE75F6E1}"/>
+                <a16:creationId xmlns:a16="http://schemas.microsoft.com/office/drawing/2014/main" id="{C15E5371-EB44-4F5C-806E-5255078E7161}"/>
               </a:ext>
             </a:extLst>
           </p:cNvPr>
@@ -6354,7 +6366,7 @@
           <p:cNvPr id="38" name="Text 36">
             <a:extLst xmlns:a="http://schemas.openxmlformats.org/drawingml/2006/main">
               <a:ext uri="{FF2B5EF4-FFF2-40B4-BE49-F238E27FC236}">
-                <a16:creationId xmlns:a16="http://schemas.microsoft.com/office/drawing/2014/main" id="{93ECA0D4-4625-47F4-8643-137F812E337F}"/>
+                <a16:creationId xmlns:a16="http://schemas.microsoft.com/office/drawing/2014/main" id="{209133E2-0578-4E7F-8EC7-D473CB92092A}"/>
               </a:ext>
             </a:extLst>
           </p:cNvPr>
@@ -6399,7 +6411,7 @@
           <p:cNvPr id="39" name="Text 37">
             <a:extLst xmlns:a="http://schemas.openxmlformats.org/drawingml/2006/main">
               <a:ext uri="{FF2B5EF4-FFF2-40B4-BE49-F238E27FC236}">
-                <a16:creationId xmlns:a16="http://schemas.microsoft.com/office/drawing/2014/main" id="{2AA74998-2C4D-4887-886F-50024383A131}"/>
+                <a16:creationId xmlns:a16="http://schemas.microsoft.com/office/drawing/2014/main" id="{41E9A03E-2BE1-4F38-B4C3-2F29268C6E03}"/>
               </a:ext>
             </a:extLst>
           </p:cNvPr>
@@ -6447,7 +6459,7 @@
           <p:cNvPr id="40" name="Shape 38">
             <a:extLst xmlns:a="http://schemas.openxmlformats.org/drawingml/2006/main">
               <a:ext uri="{FF2B5EF4-FFF2-40B4-BE49-F238E27FC236}">
-                <a16:creationId xmlns:a16="http://schemas.microsoft.com/office/drawing/2014/main" id="{91879510-E36A-46E8-9456-156882E2DB1D}"/>
+                <a16:creationId xmlns:a16="http://schemas.microsoft.com/office/drawing/2014/main" id="{6F3FE31E-4DF9-4E46-8345-05807C817686}"/>
               </a:ext>
             </a:extLst>
           </p:cNvPr>
@@ -6494,7 +6506,7 @@
           <p:cNvPr id="41" name="Text 39">
             <a:extLst xmlns:a="http://schemas.openxmlformats.org/drawingml/2006/main">
               <a:ext uri="{FF2B5EF4-FFF2-40B4-BE49-F238E27FC236}">
-                <a16:creationId xmlns:a16="http://schemas.microsoft.com/office/drawing/2014/main" id="{F1BE1DED-FE20-4CCC-BB4E-DCE54EC490B6}"/>
+                <a16:creationId xmlns:a16="http://schemas.microsoft.com/office/drawing/2014/main" id="{BC300BEA-F349-49F2-B9DA-116058A89405}"/>
               </a:ext>
             </a:extLst>
           </p:cNvPr>
@@ -6539,7 +6551,7 @@
           <p:cNvPr id="42" name="Text 40">
             <a:extLst xmlns:a="http://schemas.openxmlformats.org/drawingml/2006/main">
               <a:ext uri="{FF2B5EF4-FFF2-40B4-BE49-F238E27FC236}">
-                <a16:creationId xmlns:a16="http://schemas.microsoft.com/office/drawing/2014/main" id="{2E7B128F-D58C-4807-BB28-495C26542965}"/>
+                <a16:creationId xmlns:a16="http://schemas.microsoft.com/office/drawing/2014/main" id="{72457F25-33B5-48BA-848C-2EA4DA7D3A82}"/>
               </a:ext>
             </a:extLst>
           </p:cNvPr>
@@ -6584,7 +6596,7 @@
           <p:cNvPr id="43" name="Text 41">
             <a:extLst xmlns:a="http://schemas.openxmlformats.org/drawingml/2006/main">
               <a:ext uri="{FF2B5EF4-FFF2-40B4-BE49-F238E27FC236}">
-                <a16:creationId xmlns:a16="http://schemas.microsoft.com/office/drawing/2014/main" id="{BECE1FA9-2A12-4ACB-9BEB-7DD32AA96E34}"/>
+                <a16:creationId xmlns:a16="http://schemas.microsoft.com/office/drawing/2014/main" id="{34E818F9-2E14-4532-A6E3-DD4F99A049B0}"/>
               </a:ext>
             </a:extLst>
           </p:cNvPr>
@@ -6632,7 +6644,7 @@
           <p:cNvPr id="44" name="Shape 42">
             <a:extLst xmlns:a="http://schemas.openxmlformats.org/drawingml/2006/main">
               <a:ext uri="{FF2B5EF4-FFF2-40B4-BE49-F238E27FC236}">
-                <a16:creationId xmlns:a16="http://schemas.microsoft.com/office/drawing/2014/main" id="{E7EEEAB3-912E-410B-9BEC-BF114A301A67}"/>
+                <a16:creationId xmlns:a16="http://schemas.microsoft.com/office/drawing/2014/main" id="{202184FA-E236-473C-B270-CB1D043248B2}"/>
               </a:ext>
             </a:extLst>
           </p:cNvPr>
@@ -6679,7 +6691,7 @@
           <p:cNvPr id="45" name="Text 43">
             <a:extLst xmlns:a="http://schemas.openxmlformats.org/drawingml/2006/main">
               <a:ext uri="{FF2B5EF4-FFF2-40B4-BE49-F238E27FC236}">
-                <a16:creationId xmlns:a16="http://schemas.microsoft.com/office/drawing/2014/main" id="{FC1E6FCE-D346-47DE-85CB-D4A722AEB546}"/>
+                <a16:creationId xmlns:a16="http://schemas.microsoft.com/office/drawing/2014/main" id="{58268BE8-121A-4648-9B27-39B76D1A4FD0}"/>
               </a:ext>
             </a:extLst>
           </p:cNvPr>
@@ -6724,7 +6736,7 @@
           <p:cNvPr id="46" name="Text 44">
             <a:extLst xmlns:a="http://schemas.openxmlformats.org/drawingml/2006/main">
               <a:ext uri="{FF2B5EF4-FFF2-40B4-BE49-F238E27FC236}">
-                <a16:creationId xmlns:a16="http://schemas.microsoft.com/office/drawing/2014/main" id="{F287D38F-9FF5-4706-8999-2D99378C8C89}"/>
+                <a16:creationId xmlns:a16="http://schemas.microsoft.com/office/drawing/2014/main" id="{1BEABF59-6515-4704-BDC2-3C58B431D612}"/>
               </a:ext>
             </a:extLst>
           </p:cNvPr>
@@ -6769,7 +6781,7 @@
           <p:cNvPr id="47" name="Text 45">
             <a:extLst xmlns:a="http://schemas.openxmlformats.org/drawingml/2006/main">
               <a:ext uri="{FF2B5EF4-FFF2-40B4-BE49-F238E27FC236}">
-                <a16:creationId xmlns:a16="http://schemas.microsoft.com/office/drawing/2014/main" id="{C5635A55-57DB-40CB-9DE5-2E93F4A047C9}"/>
+                <a16:creationId xmlns:a16="http://schemas.microsoft.com/office/drawing/2014/main" id="{D602032F-C15A-4C04-B38C-0E94D07FAA6B}"/>
               </a:ext>
             </a:extLst>
           </p:cNvPr>
@@ -6817,7 +6829,7 @@
           <p:cNvPr id="48" name="Shape 46">
             <a:extLst xmlns:a="http://schemas.openxmlformats.org/drawingml/2006/main">
               <a:ext uri="{FF2B5EF4-FFF2-40B4-BE49-F238E27FC236}">
-                <a16:creationId xmlns:a16="http://schemas.microsoft.com/office/drawing/2014/main" id="{208B2E6C-D1FD-4341-830F-38CE1C7081F4}"/>
+                <a16:creationId xmlns:a16="http://schemas.microsoft.com/office/drawing/2014/main" id="{CF3695D4-E4EA-4357-959B-AA2D377E9A4D}"/>
               </a:ext>
             </a:extLst>
           </p:cNvPr>
@@ -6864,7 +6876,7 @@
           <p:cNvPr id="49" name="Text 47">
             <a:extLst xmlns:a="http://schemas.openxmlformats.org/drawingml/2006/main">
               <a:ext uri="{FF2B5EF4-FFF2-40B4-BE49-F238E27FC236}">
-                <a16:creationId xmlns:a16="http://schemas.microsoft.com/office/drawing/2014/main" id="{A9A6DDB9-4DB6-4EC6-9E6B-3E17AF1AA342}"/>
+                <a16:creationId xmlns:a16="http://schemas.microsoft.com/office/drawing/2014/main" id="{AA0920C9-1193-492E-A4E2-A3FAB10BB58A}"/>
               </a:ext>
             </a:extLst>
           </p:cNvPr>
@@ -6909,7 +6921,7 @@
           <p:cNvPr id="50" name="Text 48">
             <a:extLst xmlns:a="http://schemas.openxmlformats.org/drawingml/2006/main">
               <a:ext uri="{FF2B5EF4-FFF2-40B4-BE49-F238E27FC236}">
-                <a16:creationId xmlns:a16="http://schemas.microsoft.com/office/drawing/2014/main" id="{0602024C-A588-48FB-AF86-1AF4B4775AE3}"/>
+                <a16:creationId xmlns:a16="http://schemas.microsoft.com/office/drawing/2014/main" id="{169E89B9-9DC6-4549-B29B-E85EDFBA2314}"/>
               </a:ext>
             </a:extLst>
           </p:cNvPr>
@@ -6954,7 +6966,7 @@
           <p:cNvPr id="51" name="Text 49">
             <a:extLst xmlns:a="http://schemas.openxmlformats.org/drawingml/2006/main">
               <a:ext uri="{FF2B5EF4-FFF2-40B4-BE49-F238E27FC236}">
-                <a16:creationId xmlns:a16="http://schemas.microsoft.com/office/drawing/2014/main" id="{54F6504B-17AC-45C9-9764-68C2E253A495}"/>
+                <a16:creationId xmlns:a16="http://schemas.microsoft.com/office/drawing/2014/main" id="{E91E95CC-A52F-46F7-B140-56BD3A6AEDF4}"/>
               </a:ext>
             </a:extLst>
           </p:cNvPr>
@@ -7002,7 +7014,7 @@
           <p:cNvPr id="52" name="Text 50">
             <a:extLst xmlns:a="http://schemas.openxmlformats.org/drawingml/2006/main">
               <a:ext uri="{FF2B5EF4-FFF2-40B4-BE49-F238E27FC236}">
-                <a16:creationId xmlns:a16="http://schemas.microsoft.com/office/drawing/2014/main" id="{53D091F6-E837-4C6C-BF2C-1A7E5FED7DE6}"/>
+                <a16:creationId xmlns:a16="http://schemas.microsoft.com/office/drawing/2014/main" id="{24F2A593-687B-49F7-B301-615A8208732D}"/>
               </a:ext>
             </a:extLst>
           </p:cNvPr>
@@ -7048,7 +7060,7 @@
     </p:spTree>
     <p:extLst>
       <p:ext uri="{BB962C8B-B14F-4D97-AF65-F5344CB8AC3E}">
-        <p14:creationId xmlns:p14="http://schemas.microsoft.com/office/powerpoint/2010/main" val="930425331"/>
+        <p14:creationId xmlns:p14="http://schemas.microsoft.com/office/powerpoint/2010/main" val="375488760"/>
       </p:ext>
     </p:extLst>
   </p:cSld>
@@ -7079,7 +7091,7 @@
           <p:cNvPr id="2" name="Text 0">
             <a:extLst xmlns:a="http://schemas.openxmlformats.org/drawingml/2006/main">
               <a:ext uri="{FF2B5EF4-FFF2-40B4-BE49-F238E27FC236}">
-                <a16:creationId xmlns:a16="http://schemas.microsoft.com/office/drawing/2014/main" id="{F4F3C6D4-B768-401B-9637-00C73492A214}"/>
+                <a16:creationId xmlns:a16="http://schemas.microsoft.com/office/drawing/2014/main" id="{FFEA6243-7117-49A4-AFCA-654E827CD71A}"/>
               </a:ext>
             </a:extLst>
           </p:cNvPr>
@@ -7124,7 +7136,7 @@
           <p:cNvPr id="3" name="Text 1">
             <a:extLst xmlns:a="http://schemas.openxmlformats.org/drawingml/2006/main">
               <a:ext uri="{FF2B5EF4-FFF2-40B4-BE49-F238E27FC236}">
-                <a16:creationId xmlns:a16="http://schemas.microsoft.com/office/drawing/2014/main" id="{44795B31-9A53-467D-8F5B-3DA49C330B68}"/>
+                <a16:creationId xmlns:a16="http://schemas.microsoft.com/office/drawing/2014/main" id="{18B449A7-D6E3-4972-93BE-19629744AE24}"/>
               </a:ext>
             </a:extLst>
           </p:cNvPr>
@@ -7169,7 +7181,7 @@
           <p:cNvPr id="4" name="Text 2">
             <a:extLst xmlns:a="http://schemas.openxmlformats.org/drawingml/2006/main">
               <a:ext uri="{FF2B5EF4-FFF2-40B4-BE49-F238E27FC236}">
-                <a16:creationId xmlns:a16="http://schemas.microsoft.com/office/drawing/2014/main" id="{81E49040-E74B-43CB-8995-7DB626BD1595}"/>
+                <a16:creationId xmlns:a16="http://schemas.microsoft.com/office/drawing/2014/main" id="{2F1CDA4E-404A-42A4-AD7B-09DA9319F65C}"/>
               </a:ext>
             </a:extLst>
           </p:cNvPr>
@@ -7214,7 +7226,7 @@
           <p:cNvPr id="5" name="Text 3">
             <a:extLst xmlns:a="http://schemas.openxmlformats.org/drawingml/2006/main">
               <a:ext uri="{FF2B5EF4-FFF2-40B4-BE49-F238E27FC236}">
-                <a16:creationId xmlns:a16="http://schemas.microsoft.com/office/drawing/2014/main" id="{1A4CAB1A-CD33-4E48-826D-7F25B72A99A5}"/>
+                <a16:creationId xmlns:a16="http://schemas.microsoft.com/office/drawing/2014/main" id="{57F4E772-D91D-4B11-A68F-412513A2514F}"/>
               </a:ext>
             </a:extLst>
           </p:cNvPr>
@@ -7259,7 +7271,7 @@
           <p:cNvPr id="6" name="Text 4">
             <a:extLst xmlns:a="http://schemas.openxmlformats.org/drawingml/2006/main">
               <a:ext uri="{FF2B5EF4-FFF2-40B4-BE49-F238E27FC236}">
-                <a16:creationId xmlns:a16="http://schemas.microsoft.com/office/drawing/2014/main" id="{E0593AE0-50FB-4655-A579-83D204DF05A2}"/>
+                <a16:creationId xmlns:a16="http://schemas.microsoft.com/office/drawing/2014/main" id="{2F324625-27BE-470B-87EE-D739B7B0C858}"/>
               </a:ext>
             </a:extLst>
           </p:cNvPr>
@@ -7307,7 +7319,7 @@
           <p:cNvPr id="7" name="Shape 5">
             <a:extLst xmlns:a="http://schemas.openxmlformats.org/drawingml/2006/main">
               <a:ext uri="{FF2B5EF4-FFF2-40B4-BE49-F238E27FC236}">
-                <a16:creationId xmlns:a16="http://schemas.microsoft.com/office/drawing/2014/main" id="{6EA87707-0CE5-440F-B3B7-0C5876617488}"/>
+                <a16:creationId xmlns:a16="http://schemas.microsoft.com/office/drawing/2014/main" id="{BEB5361F-FBDB-43A3-94EC-6EB11A702903}"/>
               </a:ext>
             </a:extLst>
           </p:cNvPr>
@@ -7351,7 +7363,7 @@
           <p:nvPr/>
         </p:nvPicPr>
         <p:blipFill>
-          <a:blip xmlns:r="http://schemas.openxmlformats.org/officeDocument/2006/relationships" xmlns:a="http://schemas.openxmlformats.org/drawingml/2006/main" r:embed="Rec5fab069bd9424b"/>
+          <a:blip xmlns:r="http://schemas.openxmlformats.org/officeDocument/2006/relationships" xmlns:a="http://schemas.openxmlformats.org/drawingml/2006/main" r:embed="Rf60217384cb34468"/>
           <a:stretch xmlns:a="http://schemas.openxmlformats.org/drawingml/2006/main">
             <a:fillRect l="0" t="0" r="0" b="0"/>
           </a:stretch>
@@ -7371,7 +7383,7 @@
           <p:cNvPr id="9" name="Text 6">
             <a:extLst xmlns:a="http://schemas.openxmlformats.org/drawingml/2006/main">
               <a:ext uri="{FF2B5EF4-FFF2-40B4-BE49-F238E27FC236}">
-                <a16:creationId xmlns:a16="http://schemas.microsoft.com/office/drawing/2014/main" id="{89C9BCFC-6B33-4267-8ED2-588C6AE84B18}"/>
+                <a16:creationId xmlns:a16="http://schemas.microsoft.com/office/drawing/2014/main" id="{27A56FAA-8F5D-47FA-8110-6043D66E3095}"/>
               </a:ext>
             </a:extLst>
           </p:cNvPr>
@@ -7419,7 +7431,7 @@
           <p:cNvPr id="10" name="Text 7">
             <a:extLst xmlns:a="http://schemas.openxmlformats.org/drawingml/2006/main">
               <a:ext uri="{FF2B5EF4-FFF2-40B4-BE49-F238E27FC236}">
-                <a16:creationId xmlns:a16="http://schemas.microsoft.com/office/drawing/2014/main" id="{B1B5A613-78E8-4FB1-8DE3-88D67AA6BF58}"/>
+                <a16:creationId xmlns:a16="http://schemas.microsoft.com/office/drawing/2014/main" id="{AF494CB4-9766-49C5-89F7-9511DA4B13AB}"/>
               </a:ext>
             </a:extLst>
           </p:cNvPr>
@@ -7464,7 +7476,7 @@
           <p:cNvPr id="11" name="Shape 8">
             <a:extLst xmlns:a="http://schemas.openxmlformats.org/drawingml/2006/main">
               <a:ext uri="{FF2B5EF4-FFF2-40B4-BE49-F238E27FC236}">
-                <a16:creationId xmlns:a16="http://schemas.microsoft.com/office/drawing/2014/main" id="{569553E8-5602-4E20-A569-7C753A32A79A}"/>
+                <a16:creationId xmlns:a16="http://schemas.microsoft.com/office/drawing/2014/main" id="{F345CFA9-3EE5-4381-BC2A-651A38683408}"/>
               </a:ext>
             </a:extLst>
           </p:cNvPr>
@@ -7511,7 +7523,7 @@
           <p:cNvPr id="12" name="Text 9">
             <a:extLst xmlns:a="http://schemas.openxmlformats.org/drawingml/2006/main">
               <a:ext uri="{FF2B5EF4-FFF2-40B4-BE49-F238E27FC236}">
-                <a16:creationId xmlns:a16="http://schemas.microsoft.com/office/drawing/2014/main" id="{01437578-DBD7-430D-BEBF-530087891E2C}"/>
+                <a16:creationId xmlns:a16="http://schemas.microsoft.com/office/drawing/2014/main" id="{00B22076-CB27-4F94-8FF9-D800DA71A0D6}"/>
               </a:ext>
             </a:extLst>
           </p:cNvPr>
@@ -7570,7 +7582,7 @@
           <p:cNvPr id="13" name="Shape 10">
             <a:extLst xmlns:a="http://schemas.openxmlformats.org/drawingml/2006/main">
               <a:ext uri="{FF2B5EF4-FFF2-40B4-BE49-F238E27FC236}">
-                <a16:creationId xmlns:a16="http://schemas.microsoft.com/office/drawing/2014/main" id="{A0E0C961-9EE5-4ED3-AD71-5CD4D1BF810E}"/>
+                <a16:creationId xmlns:a16="http://schemas.microsoft.com/office/drawing/2014/main" id="{14D08725-653C-471D-8ACF-233E7A71CE75}"/>
               </a:ext>
             </a:extLst>
           </p:cNvPr>
@@ -7614,7 +7626,7 @@
           <p:nvPr/>
         </p:nvPicPr>
         <p:blipFill>
-          <a:blip xmlns:r="http://schemas.openxmlformats.org/officeDocument/2006/relationships" xmlns:a="http://schemas.openxmlformats.org/drawingml/2006/main" r:embed="R870c46a0e744405b"/>
+          <a:blip xmlns:r="http://schemas.openxmlformats.org/officeDocument/2006/relationships" xmlns:a="http://schemas.openxmlformats.org/drawingml/2006/main" r:embed="R9364614e0bf74fa0"/>
           <a:stretch xmlns:a="http://schemas.openxmlformats.org/drawingml/2006/main">
             <a:fillRect l="0" t="0" r="0" b="0"/>
           </a:stretch>
@@ -7634,7 +7646,7 @@
           <p:cNvPr id="15" name="Text 11">
             <a:extLst xmlns:a="http://schemas.openxmlformats.org/drawingml/2006/main">
               <a:ext uri="{FF2B5EF4-FFF2-40B4-BE49-F238E27FC236}">
-                <a16:creationId xmlns:a16="http://schemas.microsoft.com/office/drawing/2014/main" id="{C031F6D3-3308-4EDD-86CC-BC17474661C8}"/>
+                <a16:creationId xmlns:a16="http://schemas.microsoft.com/office/drawing/2014/main" id="{A75C7A31-A695-4077-A31B-2E4D8DD4FAAD}"/>
               </a:ext>
             </a:extLst>
           </p:cNvPr>
@@ -7682,7 +7694,7 @@
           <p:cNvPr id="16" name="Text 12">
             <a:extLst xmlns:a="http://schemas.openxmlformats.org/drawingml/2006/main">
               <a:ext uri="{FF2B5EF4-FFF2-40B4-BE49-F238E27FC236}">
-                <a16:creationId xmlns:a16="http://schemas.microsoft.com/office/drawing/2014/main" id="{1123B159-427E-4055-B92F-D1708C318A57}"/>
+                <a16:creationId xmlns:a16="http://schemas.microsoft.com/office/drawing/2014/main" id="{0F0564E3-186F-41A6-931A-6A5CFF10F2EC}"/>
               </a:ext>
             </a:extLst>
           </p:cNvPr>
@@ -7727,7 +7739,7 @@
           <p:cNvPr id="17" name="Shape 13">
             <a:extLst xmlns:a="http://schemas.openxmlformats.org/drawingml/2006/main">
               <a:ext uri="{FF2B5EF4-FFF2-40B4-BE49-F238E27FC236}">
-                <a16:creationId xmlns:a16="http://schemas.microsoft.com/office/drawing/2014/main" id="{B48B019A-0A2A-460A-961E-32BF7C52F5A0}"/>
+                <a16:creationId xmlns:a16="http://schemas.microsoft.com/office/drawing/2014/main" id="{FA7DF620-A4F3-4EEF-B030-1F4ED3045D9E}"/>
               </a:ext>
             </a:extLst>
           </p:cNvPr>
@@ -7774,7 +7786,7 @@
           <p:cNvPr id="18" name="Text 14">
             <a:extLst xmlns:a="http://schemas.openxmlformats.org/drawingml/2006/main">
               <a:ext uri="{FF2B5EF4-FFF2-40B4-BE49-F238E27FC236}">
-                <a16:creationId xmlns:a16="http://schemas.microsoft.com/office/drawing/2014/main" id="{9C2438E9-EB07-4E34-98BD-17F3307FD335}"/>
+                <a16:creationId xmlns:a16="http://schemas.microsoft.com/office/drawing/2014/main" id="{1B4D314E-4954-4358-A8E1-E19AD9E80A41}"/>
               </a:ext>
             </a:extLst>
           </p:cNvPr>
@@ -7819,7 +7831,7 @@
           <p:cNvPr id="19" name="Text 15">
             <a:extLst xmlns:a="http://schemas.openxmlformats.org/drawingml/2006/main">
               <a:ext uri="{FF2B5EF4-FFF2-40B4-BE49-F238E27FC236}">
-                <a16:creationId xmlns:a16="http://schemas.microsoft.com/office/drawing/2014/main" id="{288034BE-C199-4C0C-8BEE-94BD7ABA9533}"/>
+                <a16:creationId xmlns:a16="http://schemas.microsoft.com/office/drawing/2014/main" id="{40524692-CA24-4986-AFA1-6DF32261EB15}"/>
               </a:ext>
             </a:extLst>
           </p:cNvPr>
@@ -7864,7 +7876,7 @@
           <p:cNvPr id="20" name="Text 16">
             <a:extLst xmlns:a="http://schemas.openxmlformats.org/drawingml/2006/main">
               <a:ext uri="{FF2B5EF4-FFF2-40B4-BE49-F238E27FC236}">
-                <a16:creationId xmlns:a16="http://schemas.microsoft.com/office/drawing/2014/main" id="{5AF0C6FA-70F4-4F8B-BD79-841A1D069B54}"/>
+                <a16:creationId xmlns:a16="http://schemas.microsoft.com/office/drawing/2014/main" id="{2D7C37CA-6EBC-42CE-BB3D-C5A9F9940EF1}"/>
               </a:ext>
             </a:extLst>
           </p:cNvPr>
@@ -7909,7 +7921,7 @@
           <p:cNvPr id="21" name="Text 17">
             <a:extLst xmlns:a="http://schemas.openxmlformats.org/drawingml/2006/main">
               <a:ext uri="{FF2B5EF4-FFF2-40B4-BE49-F238E27FC236}">
-                <a16:creationId xmlns:a16="http://schemas.microsoft.com/office/drawing/2014/main" id="{646DD03D-2486-420E-B7AE-DBBEDAE8A76E}"/>
+                <a16:creationId xmlns:a16="http://schemas.microsoft.com/office/drawing/2014/main" id="{F5C61FED-15D7-4BDD-8940-8BDE56FF880D}"/>
               </a:ext>
             </a:extLst>
           </p:cNvPr>
@@ -7954,7 +7966,7 @@
           <p:cNvPr id="22" name="Text 18">
             <a:extLst xmlns:a="http://schemas.openxmlformats.org/drawingml/2006/main">
               <a:ext uri="{FF2B5EF4-FFF2-40B4-BE49-F238E27FC236}">
-                <a16:creationId xmlns:a16="http://schemas.microsoft.com/office/drawing/2014/main" id="{8ACDF3CD-2E8E-4242-8F71-4F9E4592A19D}"/>
+                <a16:creationId xmlns:a16="http://schemas.microsoft.com/office/drawing/2014/main" id="{16ED643A-E1FC-486B-8E38-BB65FEA55289}"/>
               </a:ext>
             </a:extLst>
           </p:cNvPr>
@@ -7999,7 +8011,7 @@
           <p:cNvPr id="23" name="Text 19">
             <a:extLst xmlns:a="http://schemas.openxmlformats.org/drawingml/2006/main">
               <a:ext uri="{FF2B5EF4-FFF2-40B4-BE49-F238E27FC236}">
-                <a16:creationId xmlns:a16="http://schemas.microsoft.com/office/drawing/2014/main" id="{DD6607B5-11C4-482B-8477-AC6AB8A411D1}"/>
+                <a16:creationId xmlns:a16="http://schemas.microsoft.com/office/drawing/2014/main" id="{345AF3C9-B8AC-4BE2-86EC-9FC3AE78C8B3}"/>
               </a:ext>
             </a:extLst>
           </p:cNvPr>
@@ -8044,7 +8056,7 @@
           <p:cNvPr id="24" name="Text 20">
             <a:extLst xmlns:a="http://schemas.openxmlformats.org/drawingml/2006/main">
               <a:ext uri="{FF2B5EF4-FFF2-40B4-BE49-F238E27FC236}">
-                <a16:creationId xmlns:a16="http://schemas.microsoft.com/office/drawing/2014/main" id="{858C6216-77B4-4939-9878-08AB65F1838E}"/>
+                <a16:creationId xmlns:a16="http://schemas.microsoft.com/office/drawing/2014/main" id="{226F2B80-92E1-4095-BE4D-63876DCF557E}"/>
               </a:ext>
             </a:extLst>
           </p:cNvPr>
@@ -8089,7 +8101,7 @@
           <p:cNvPr id="25" name="Shape 21">
             <a:extLst xmlns:a="http://schemas.openxmlformats.org/drawingml/2006/main">
               <a:ext uri="{FF2B5EF4-FFF2-40B4-BE49-F238E27FC236}">
-                <a16:creationId xmlns:a16="http://schemas.microsoft.com/office/drawing/2014/main" id="{46ED7326-A0A1-4F8C-997E-3452955C9677}"/>
+                <a16:creationId xmlns:a16="http://schemas.microsoft.com/office/drawing/2014/main" id="{9A2DEE45-05BA-4BFD-A01D-918C1BD037E3}"/>
               </a:ext>
             </a:extLst>
           </p:cNvPr>
@@ -8125,7 +8137,7 @@
           <p:cNvPr id="26" name="Text 22">
             <a:extLst xmlns:a="http://schemas.openxmlformats.org/drawingml/2006/main">
               <a:ext uri="{FF2B5EF4-FFF2-40B4-BE49-F238E27FC236}">
-                <a16:creationId xmlns:a16="http://schemas.microsoft.com/office/drawing/2014/main" id="{886E963F-1271-432A-8D4E-534D4832B367}"/>
+                <a16:creationId xmlns:a16="http://schemas.microsoft.com/office/drawing/2014/main" id="{1E2F06D6-E5F4-4EA6-A823-825B64B07091}"/>
               </a:ext>
             </a:extLst>
           </p:cNvPr>
@@ -8203,7 +8215,7 @@
           <p:cNvPr id="27" name="Text 23">
             <a:extLst xmlns:a="http://schemas.openxmlformats.org/drawingml/2006/main">
               <a:ext uri="{FF2B5EF4-FFF2-40B4-BE49-F238E27FC236}">
-                <a16:creationId xmlns:a16="http://schemas.microsoft.com/office/drawing/2014/main" id="{3BED8DD6-59A5-4B41-BE64-DCFF93761950}"/>
+                <a16:creationId xmlns:a16="http://schemas.microsoft.com/office/drawing/2014/main" id="{21B41A13-B94F-4848-9459-A81F6717AD92}"/>
               </a:ext>
             </a:extLst>
           </p:cNvPr>
@@ -8249,7 +8261,7 @@
     </p:spTree>
     <p:extLst>
       <p:ext uri="{BB962C8B-B14F-4D97-AF65-F5344CB8AC3E}">
-        <p14:creationId xmlns:p14="http://schemas.microsoft.com/office/powerpoint/2010/main" val="1401914536"/>
+        <p14:creationId xmlns:p14="http://schemas.microsoft.com/office/powerpoint/2010/main" val="1671646746"/>
       </p:ext>
     </p:extLst>
   </p:cSld>
@@ -8280,7 +8292,7 @@
           <p:cNvPr id="2" name="Text 0">
             <a:extLst xmlns:a="http://schemas.openxmlformats.org/drawingml/2006/main">
               <a:ext uri="{FF2B5EF4-FFF2-40B4-BE49-F238E27FC236}">
-                <a16:creationId xmlns:a16="http://schemas.microsoft.com/office/drawing/2014/main" id="{3C41434F-8E83-4669-8A2E-11639F631CBA}"/>
+                <a16:creationId xmlns:a16="http://schemas.microsoft.com/office/drawing/2014/main" id="{80B4A953-911D-4271-9E45-BC1ECF075B4A}"/>
               </a:ext>
             </a:extLst>
           </p:cNvPr>
@@ -8325,7 +8337,7 @@
           <p:cNvPr id="3" name="Text 1">
             <a:extLst xmlns:a="http://schemas.openxmlformats.org/drawingml/2006/main">
               <a:ext uri="{FF2B5EF4-FFF2-40B4-BE49-F238E27FC236}">
-                <a16:creationId xmlns:a16="http://schemas.microsoft.com/office/drawing/2014/main" id="{4A4FE368-021D-446A-80FA-98AF0E2B9F2A}"/>
+                <a16:creationId xmlns:a16="http://schemas.microsoft.com/office/drawing/2014/main" id="{02DE17C0-A779-47F2-9EF4-B730C00EDE63}"/>
               </a:ext>
             </a:extLst>
           </p:cNvPr>
@@ -8370,7 +8382,7 @@
           <p:cNvPr id="4" name="Text 2">
             <a:extLst xmlns:a="http://schemas.openxmlformats.org/drawingml/2006/main">
               <a:ext uri="{FF2B5EF4-FFF2-40B4-BE49-F238E27FC236}">
-                <a16:creationId xmlns:a16="http://schemas.microsoft.com/office/drawing/2014/main" id="{DEE24A9D-B886-43B0-A941-29462E363429}"/>
+                <a16:creationId xmlns:a16="http://schemas.microsoft.com/office/drawing/2014/main" id="{813C6A0B-7993-45D3-B3A4-F17BFA26C26E}"/>
               </a:ext>
             </a:extLst>
           </p:cNvPr>
@@ -8415,7 +8427,7 @@
           <p:cNvPr id="5" name="Text 3">
             <a:extLst xmlns:a="http://schemas.openxmlformats.org/drawingml/2006/main">
               <a:ext uri="{FF2B5EF4-FFF2-40B4-BE49-F238E27FC236}">
-                <a16:creationId xmlns:a16="http://schemas.microsoft.com/office/drawing/2014/main" id="{22179E66-405A-494D-9C51-CC4A4913C59E}"/>
+                <a16:creationId xmlns:a16="http://schemas.microsoft.com/office/drawing/2014/main" id="{70777BAF-96E7-4265-A1EE-F9B7BEE37718}"/>
               </a:ext>
             </a:extLst>
           </p:cNvPr>
@@ -8460,7 +8472,7 @@
           <p:cNvPr id="6" name="Shape 4">
             <a:extLst xmlns:a="http://schemas.openxmlformats.org/drawingml/2006/main">
               <a:ext uri="{FF2B5EF4-FFF2-40B4-BE49-F238E27FC236}">
-                <a16:creationId xmlns:a16="http://schemas.microsoft.com/office/drawing/2014/main" id="{D72555F3-0E23-4E36-AA9D-741FFB57BC48}"/>
+                <a16:creationId xmlns:a16="http://schemas.microsoft.com/office/drawing/2014/main" id="{0A1EAED6-8519-40FC-A7CF-8F0591E3A26F}"/>
               </a:ext>
             </a:extLst>
           </p:cNvPr>
@@ -8507,7 +8519,7 @@
           <p:cNvPr id="7" name="Text 5">
             <a:extLst xmlns:a="http://schemas.openxmlformats.org/drawingml/2006/main">
               <a:ext uri="{FF2B5EF4-FFF2-40B4-BE49-F238E27FC236}">
-                <a16:creationId xmlns:a16="http://schemas.microsoft.com/office/drawing/2014/main" id="{10818488-11AC-4454-9B6C-6B030B4837A7}"/>
+                <a16:creationId xmlns:a16="http://schemas.microsoft.com/office/drawing/2014/main" id="{97FE9352-B0E4-438B-AD8D-18C7EC7FC74A}"/>
               </a:ext>
             </a:extLst>
           </p:cNvPr>
@@ -8552,7 +8564,7 @@
           <p:cNvPr id="8" name="Text 6">
             <a:extLst xmlns:a="http://schemas.openxmlformats.org/drawingml/2006/main">
               <a:ext uri="{FF2B5EF4-FFF2-40B4-BE49-F238E27FC236}">
-                <a16:creationId xmlns:a16="http://schemas.microsoft.com/office/drawing/2014/main" id="{FB3A379B-4B04-4BE4-81E4-B40D9F932EF1}"/>
+                <a16:creationId xmlns:a16="http://schemas.microsoft.com/office/drawing/2014/main" id="{B1E5EA18-F1CC-4CDF-9232-7940E761F5CA}"/>
               </a:ext>
             </a:extLst>
           </p:cNvPr>
@@ -8669,7 +8681,7 @@
           <p:cNvPr id="9" name="Shape 7">
             <a:extLst xmlns:a="http://schemas.openxmlformats.org/drawingml/2006/main">
               <a:ext uri="{FF2B5EF4-FFF2-40B4-BE49-F238E27FC236}">
-                <a16:creationId xmlns:a16="http://schemas.microsoft.com/office/drawing/2014/main" id="{E5DC239E-F128-4FCB-9E3E-ED04C47B71DA}"/>
+                <a16:creationId xmlns:a16="http://schemas.microsoft.com/office/drawing/2014/main" id="{9464B6A0-0A3F-4997-97DA-2AD11F3CEE56}"/>
               </a:ext>
             </a:extLst>
           </p:cNvPr>
@@ -8716,7 +8728,7 @@
           <p:cNvPr id="10" name="Text 8">
             <a:extLst xmlns:a="http://schemas.openxmlformats.org/drawingml/2006/main">
               <a:ext uri="{FF2B5EF4-FFF2-40B4-BE49-F238E27FC236}">
-                <a16:creationId xmlns:a16="http://schemas.microsoft.com/office/drawing/2014/main" id="{7C54B0C7-BAE3-4FB6-9D0C-9AE6568FBFAD}"/>
+                <a16:creationId xmlns:a16="http://schemas.microsoft.com/office/drawing/2014/main" id="{DE48EBE5-B4C6-4AF3-A48A-FA29350C284E}"/>
               </a:ext>
             </a:extLst>
           </p:cNvPr>
@@ -8761,7 +8773,7 @@
           <p:cNvPr id="11" name="Text 9">
             <a:extLst xmlns:a="http://schemas.openxmlformats.org/drawingml/2006/main">
               <a:ext uri="{FF2B5EF4-FFF2-40B4-BE49-F238E27FC236}">
-                <a16:creationId xmlns:a16="http://schemas.microsoft.com/office/drawing/2014/main" id="{21321662-62F5-436D-A590-BD746F6196C1}"/>
+                <a16:creationId xmlns:a16="http://schemas.microsoft.com/office/drawing/2014/main" id="{598BF406-2C95-4DE9-88FB-CE01FA34303F}"/>
               </a:ext>
             </a:extLst>
           </p:cNvPr>
@@ -8900,7 +8912,7 @@
           <p:cNvPr id="12" name="Shape 10">
             <a:extLst xmlns:a="http://schemas.openxmlformats.org/drawingml/2006/main">
               <a:ext uri="{FF2B5EF4-FFF2-40B4-BE49-F238E27FC236}">
-                <a16:creationId xmlns:a16="http://schemas.microsoft.com/office/drawing/2014/main" id="{F0CC7C22-E879-4482-BF17-CF376C0557FE}"/>
+                <a16:creationId xmlns:a16="http://schemas.microsoft.com/office/drawing/2014/main" id="{6517B240-15BE-4C67-BF07-4B1BE18BC58E}"/>
               </a:ext>
             </a:extLst>
           </p:cNvPr>
@@ -8947,7 +8959,7 @@
           <p:cNvPr id="13" name="Text 11">
             <a:extLst xmlns:a="http://schemas.openxmlformats.org/drawingml/2006/main">
               <a:ext uri="{FF2B5EF4-FFF2-40B4-BE49-F238E27FC236}">
-                <a16:creationId xmlns:a16="http://schemas.microsoft.com/office/drawing/2014/main" id="{9B1A9C12-5C1D-4F1F-B941-3E2361F79C45}"/>
+                <a16:creationId xmlns:a16="http://schemas.microsoft.com/office/drawing/2014/main" id="{47CAFCD5-7802-4AB4-99A6-2DE730EFFC06}"/>
               </a:ext>
             </a:extLst>
           </p:cNvPr>
@@ -8992,7 +9004,7 @@
           <p:cNvPr id="14" name="Text 12">
             <a:extLst xmlns:a="http://schemas.openxmlformats.org/drawingml/2006/main">
               <a:ext uri="{FF2B5EF4-FFF2-40B4-BE49-F238E27FC236}">
-                <a16:creationId xmlns:a16="http://schemas.microsoft.com/office/drawing/2014/main" id="{00DC8AF2-FEF8-4717-A4AD-7009B54503E9}"/>
+                <a16:creationId xmlns:a16="http://schemas.microsoft.com/office/drawing/2014/main" id="{241B6770-1551-4FA4-912E-D597CDFA9390}"/>
               </a:ext>
             </a:extLst>
           </p:cNvPr>
@@ -9131,7 +9143,7 @@
           <p:cNvPr id="15" name="Shape 13">
             <a:extLst xmlns:a="http://schemas.openxmlformats.org/drawingml/2006/main">
               <a:ext uri="{FF2B5EF4-FFF2-40B4-BE49-F238E27FC236}">
-                <a16:creationId xmlns:a16="http://schemas.microsoft.com/office/drawing/2014/main" id="{1221CBBC-AFAB-403D-9E64-45D8944FD0C9}"/>
+                <a16:creationId xmlns:a16="http://schemas.microsoft.com/office/drawing/2014/main" id="{9AB32CED-C395-4CF7-B9F0-9DB0F51ABAF9}"/>
               </a:ext>
             </a:extLst>
           </p:cNvPr>
@@ -9178,7 +9190,7 @@
           <p:cNvPr id="16" name="Shape 14">
             <a:extLst xmlns:a="http://schemas.openxmlformats.org/drawingml/2006/main">
               <a:ext uri="{FF2B5EF4-FFF2-40B4-BE49-F238E27FC236}">
-                <a16:creationId xmlns:a16="http://schemas.microsoft.com/office/drawing/2014/main" id="{F8E3B8A9-2B66-48A0-82B6-2AC63EFE773A}"/>
+                <a16:creationId xmlns:a16="http://schemas.microsoft.com/office/drawing/2014/main" id="{36E8D991-7215-4002-8406-42DC416A151E}"/>
               </a:ext>
             </a:extLst>
           </p:cNvPr>
@@ -9216,7 +9228,7 @@
           <p:cNvPr id="17" name="Text 15">
             <a:extLst xmlns:a="http://schemas.openxmlformats.org/drawingml/2006/main">
               <a:ext uri="{FF2B5EF4-FFF2-40B4-BE49-F238E27FC236}">
-                <a16:creationId xmlns:a16="http://schemas.microsoft.com/office/drawing/2014/main" id="{04D58E0E-34CC-40EB-AE7C-6F213E5A0483}"/>
+                <a16:creationId xmlns:a16="http://schemas.microsoft.com/office/drawing/2014/main" id="{D2797AD8-AA60-402C-B775-59D071BBE9F5}"/>
               </a:ext>
             </a:extLst>
           </p:cNvPr>
@@ -9261,7 +9273,7 @@
           <p:cNvPr id="18" name="Text 16">
             <a:extLst xmlns:a="http://schemas.openxmlformats.org/drawingml/2006/main">
               <a:ext uri="{FF2B5EF4-FFF2-40B4-BE49-F238E27FC236}">
-                <a16:creationId xmlns:a16="http://schemas.microsoft.com/office/drawing/2014/main" id="{711B8651-C8CE-495D-952E-CD351BF4A58F}"/>
+                <a16:creationId xmlns:a16="http://schemas.microsoft.com/office/drawing/2014/main" id="{D8905D48-F266-4F82-A346-7C650F5E07E8}"/>
               </a:ext>
             </a:extLst>
           </p:cNvPr>
@@ -9306,7 +9318,7 @@
           <p:cNvPr id="19" name="Text 17">
             <a:extLst xmlns:a="http://schemas.openxmlformats.org/drawingml/2006/main">
               <a:ext uri="{FF2B5EF4-FFF2-40B4-BE49-F238E27FC236}">
-                <a16:creationId xmlns:a16="http://schemas.microsoft.com/office/drawing/2014/main" id="{BB74002F-A760-4B05-AF94-E5952558F3A6}"/>
+                <a16:creationId xmlns:a16="http://schemas.microsoft.com/office/drawing/2014/main" id="{3236C627-88B0-43B9-8BEA-F751C57376CB}"/>
               </a:ext>
             </a:extLst>
           </p:cNvPr>
@@ -9352,7 +9364,7 @@
     </p:spTree>
     <p:extLst>
       <p:ext uri="{BB962C8B-B14F-4D97-AF65-F5344CB8AC3E}">
-        <p14:creationId xmlns:p14="http://schemas.microsoft.com/office/powerpoint/2010/main" val="970926009"/>
+        <p14:creationId xmlns:p14="http://schemas.microsoft.com/office/powerpoint/2010/main" val="664316324"/>
       </p:ext>
     </p:extLst>
   </p:cSld>
@@ -9383,7 +9395,7 @@
           <p:cNvPr id="2" name="Text 0">
             <a:extLst xmlns:a="http://schemas.openxmlformats.org/drawingml/2006/main">
               <a:ext uri="{FF2B5EF4-FFF2-40B4-BE49-F238E27FC236}">
-                <a16:creationId xmlns:a16="http://schemas.microsoft.com/office/drawing/2014/main" id="{AFF8CC8D-479F-4CBD-A163-ADFF408AB2FA}"/>
+                <a16:creationId xmlns:a16="http://schemas.microsoft.com/office/drawing/2014/main" id="{BF3D0C11-2058-4EFE-82A2-5569CC0D9EB9}"/>
               </a:ext>
             </a:extLst>
           </p:cNvPr>
@@ -9428,7 +9440,7 @@
           <p:cNvPr id="3" name="Text 1">
             <a:extLst xmlns:a="http://schemas.openxmlformats.org/drawingml/2006/main">
               <a:ext uri="{FF2B5EF4-FFF2-40B4-BE49-F238E27FC236}">
-                <a16:creationId xmlns:a16="http://schemas.microsoft.com/office/drawing/2014/main" id="{C66D7A42-65E6-4F25-942B-BAE4ED7F9E9D}"/>
+                <a16:creationId xmlns:a16="http://schemas.microsoft.com/office/drawing/2014/main" id="{8F25D2A2-FEFA-4CC0-84BF-66490D86DB33}"/>
               </a:ext>
             </a:extLst>
           </p:cNvPr>
@@ -9473,7 +9485,7 @@
           <p:cNvPr id="4" name="Text 2">
             <a:extLst xmlns:a="http://schemas.openxmlformats.org/drawingml/2006/main">
               <a:ext uri="{FF2B5EF4-FFF2-40B4-BE49-F238E27FC236}">
-                <a16:creationId xmlns:a16="http://schemas.microsoft.com/office/drawing/2014/main" id="{9D7336B6-F3E2-40E6-A315-003DFD0FD656}"/>
+                <a16:creationId xmlns:a16="http://schemas.microsoft.com/office/drawing/2014/main" id="{95DB7404-8D31-40F1-B0CD-3B84D004B97A}"/>
               </a:ext>
             </a:extLst>
           </p:cNvPr>
@@ -9518,7 +9530,7 @@
           <p:cNvPr id="5" name="Text 3">
             <a:extLst xmlns:a="http://schemas.openxmlformats.org/drawingml/2006/main">
               <a:ext uri="{FF2B5EF4-FFF2-40B4-BE49-F238E27FC236}">
-                <a16:creationId xmlns:a16="http://schemas.microsoft.com/office/drawing/2014/main" id="{72DDC0A2-53AD-468F-A55E-AA2F77F61C5D}"/>
+                <a16:creationId xmlns:a16="http://schemas.microsoft.com/office/drawing/2014/main" id="{95E74D8E-6591-45A4-A472-EE1E5C3D5A33}"/>
               </a:ext>
             </a:extLst>
           </p:cNvPr>
@@ -9567,7 +9579,7 @@
           <p:nvPr/>
         </p:nvPicPr>
         <p:blipFill>
-          <a:blip xmlns:r="http://schemas.openxmlformats.org/officeDocument/2006/relationships" xmlns:a="http://schemas.openxmlformats.org/drawingml/2006/main" r:embed="Rb952dc04509f4ad8"/>
+          <a:blip xmlns:r="http://schemas.openxmlformats.org/officeDocument/2006/relationships" xmlns:a="http://schemas.openxmlformats.org/drawingml/2006/main" r:embed="R84cb459bcdf84867"/>
           <a:stretch xmlns:a="http://schemas.openxmlformats.org/drawingml/2006/main">
             <a:fillRect l="0" t="0" r="0" b="0"/>
           </a:stretch>
@@ -9587,7 +9599,7 @@
           <p:cNvPr id="7" name="Text 4">
             <a:extLst xmlns:a="http://schemas.openxmlformats.org/drawingml/2006/main">
               <a:ext uri="{FF2B5EF4-FFF2-40B4-BE49-F238E27FC236}">
-                <a16:creationId xmlns:a16="http://schemas.microsoft.com/office/drawing/2014/main" id="{208181D4-300E-41BD-8EB7-DE6B3026A484}"/>
+                <a16:creationId xmlns:a16="http://schemas.microsoft.com/office/drawing/2014/main" id="{A9F7CB68-A3B1-472A-94BC-1B8CA6CE3D99}"/>
               </a:ext>
             </a:extLst>
           </p:cNvPr>
@@ -9632,7 +9644,7 @@
           <p:cNvPr id="8" name="Shape 5">
             <a:extLst xmlns:a="http://schemas.openxmlformats.org/drawingml/2006/main">
               <a:ext uri="{FF2B5EF4-FFF2-40B4-BE49-F238E27FC236}">
-                <a16:creationId xmlns:a16="http://schemas.microsoft.com/office/drawing/2014/main" id="{AB31C004-56C6-4F5F-B7FE-B93CBD5D576D}"/>
+                <a16:creationId xmlns:a16="http://schemas.microsoft.com/office/drawing/2014/main" id="{D2AB2C92-70EE-4BBA-8C15-94E4ED1E602F}"/>
               </a:ext>
             </a:extLst>
           </p:cNvPr>
@@ -9676,7 +9688,7 @@
           <p:nvPr/>
         </p:nvPicPr>
         <p:blipFill>
-          <a:blip xmlns:r="http://schemas.openxmlformats.org/officeDocument/2006/relationships" xmlns:a="http://schemas.openxmlformats.org/drawingml/2006/main" r:embed="Raf5399945e6d4002"/>
+          <a:blip xmlns:r="http://schemas.openxmlformats.org/officeDocument/2006/relationships" xmlns:a="http://schemas.openxmlformats.org/drawingml/2006/main" r:embed="R080e67e8e7464882"/>
           <a:stretch xmlns:a="http://schemas.openxmlformats.org/drawingml/2006/main">
             <a:fillRect l="0" t="0" r="0" b="0"/>
           </a:stretch>
@@ -9696,7 +9708,7 @@
           <p:cNvPr id="10" name="Text 6">
             <a:extLst xmlns:a="http://schemas.openxmlformats.org/drawingml/2006/main">
               <a:ext uri="{FF2B5EF4-FFF2-40B4-BE49-F238E27FC236}">
-                <a16:creationId xmlns:a16="http://schemas.microsoft.com/office/drawing/2014/main" id="{7361D6B6-DB6F-4E78-BE45-3C4B777992A4}"/>
+                <a16:creationId xmlns:a16="http://schemas.microsoft.com/office/drawing/2014/main" id="{91365205-E08B-4B5C-9326-282E878BE593}"/>
               </a:ext>
             </a:extLst>
           </p:cNvPr>
@@ -9745,7 +9757,7 @@
           <p:nvPr/>
         </p:nvPicPr>
         <p:blipFill>
-          <a:blip xmlns:r="http://schemas.openxmlformats.org/officeDocument/2006/relationships" xmlns:a="http://schemas.openxmlformats.org/drawingml/2006/main" r:embed="Rf49faf3d250047ff"/>
+          <a:blip xmlns:r="http://schemas.openxmlformats.org/officeDocument/2006/relationships" xmlns:a="http://schemas.openxmlformats.org/drawingml/2006/main" r:embed="R9103066dac1a49ef"/>
           <a:stretch xmlns:a="http://schemas.openxmlformats.org/drawingml/2006/main">
             <a:fillRect l="0" t="0" r="0" b="0"/>
           </a:stretch>
@@ -9765,7 +9777,7 @@
           <p:cNvPr id="12" name="Text 7">
             <a:extLst xmlns:a="http://schemas.openxmlformats.org/drawingml/2006/main">
               <a:ext uri="{FF2B5EF4-FFF2-40B4-BE49-F238E27FC236}">
-                <a16:creationId xmlns:a16="http://schemas.microsoft.com/office/drawing/2014/main" id="{0CDBEC02-0EB0-4E4D-9301-8C2A066FB471}"/>
+                <a16:creationId xmlns:a16="http://schemas.microsoft.com/office/drawing/2014/main" id="{A06BA3C0-3F8D-4DC1-878D-BAB6C91D0517}"/>
               </a:ext>
             </a:extLst>
           </p:cNvPr>
@@ -9810,7 +9822,7 @@
           <p:cNvPr id="13" name="Text 8">
             <a:extLst xmlns:a="http://schemas.openxmlformats.org/drawingml/2006/main">
               <a:ext uri="{FF2B5EF4-FFF2-40B4-BE49-F238E27FC236}">
-                <a16:creationId xmlns:a16="http://schemas.microsoft.com/office/drawing/2014/main" id="{6B2F770D-9505-4119-85FA-EF97AC19CB66}"/>
+                <a16:creationId xmlns:a16="http://schemas.microsoft.com/office/drawing/2014/main" id="{D2F34746-737A-4F9B-B42F-DF465576E1F6}"/>
               </a:ext>
             </a:extLst>
           </p:cNvPr>
@@ -9858,7 +9870,7 @@
           <p:cNvPr id="14" name="Shape 9">
             <a:extLst xmlns:a="http://schemas.openxmlformats.org/drawingml/2006/main">
               <a:ext uri="{FF2B5EF4-FFF2-40B4-BE49-F238E27FC236}">
-                <a16:creationId xmlns:a16="http://schemas.microsoft.com/office/drawing/2014/main" id="{9EB20BCD-7247-4A33-881D-B19FD78A0F45}"/>
+                <a16:creationId xmlns:a16="http://schemas.microsoft.com/office/drawing/2014/main" id="{92F92F01-1200-4373-B4BB-861A18E86EE6}"/>
               </a:ext>
             </a:extLst>
           </p:cNvPr>
@@ -9898,7 +9910,7 @@
           <p:cNvPr id="15" name="Text 10">
             <a:extLst xmlns:a="http://schemas.openxmlformats.org/drawingml/2006/main">
               <a:ext uri="{FF2B5EF4-FFF2-40B4-BE49-F238E27FC236}">
-                <a16:creationId xmlns:a16="http://schemas.microsoft.com/office/drawing/2014/main" id="{C1535338-4BC5-4B55-91AC-32AB47553C53}"/>
+                <a16:creationId xmlns:a16="http://schemas.microsoft.com/office/drawing/2014/main" id="{74E15FFE-66AD-4760-AB78-7468AD287436}"/>
               </a:ext>
             </a:extLst>
           </p:cNvPr>
@@ -9943,7 +9955,7 @@
           <p:cNvPr id="16" name="Text 11">
             <a:extLst xmlns:a="http://schemas.openxmlformats.org/drawingml/2006/main">
               <a:ext uri="{FF2B5EF4-FFF2-40B4-BE49-F238E27FC236}">
-                <a16:creationId xmlns:a16="http://schemas.microsoft.com/office/drawing/2014/main" id="{77B460B3-2CFA-4299-B7C5-D6D7D13C9D8C}"/>
+                <a16:creationId xmlns:a16="http://schemas.microsoft.com/office/drawing/2014/main" id="{1E61E934-F54D-4FB3-887F-0721A0A99F7C}"/>
               </a:ext>
             </a:extLst>
           </p:cNvPr>
@@ -9991,7 +10003,7 @@
           <p:cNvPr id="17" name="Shape 12">
             <a:extLst xmlns:a="http://schemas.openxmlformats.org/drawingml/2006/main">
               <a:ext uri="{FF2B5EF4-FFF2-40B4-BE49-F238E27FC236}">
-                <a16:creationId xmlns:a16="http://schemas.microsoft.com/office/drawing/2014/main" id="{05AD6C87-2131-4107-9872-0EB7365830DA}"/>
+                <a16:creationId xmlns:a16="http://schemas.microsoft.com/office/drawing/2014/main" id="{5B63F9CD-B85C-41FA-9259-29550E881823}"/>
               </a:ext>
             </a:extLst>
           </p:cNvPr>
@@ -10038,7 +10050,7 @@
           <p:cNvPr id="18" name="Text 13">
             <a:extLst xmlns:a="http://schemas.openxmlformats.org/drawingml/2006/main">
               <a:ext uri="{FF2B5EF4-FFF2-40B4-BE49-F238E27FC236}">
-                <a16:creationId xmlns:a16="http://schemas.microsoft.com/office/drawing/2014/main" id="{037E5551-B232-4CA7-AF36-A3619CE13A26}"/>
+                <a16:creationId xmlns:a16="http://schemas.microsoft.com/office/drawing/2014/main" id="{ED0FF6F6-038A-41F9-8F37-8C1D60DDB38E}"/>
               </a:ext>
             </a:extLst>
           </p:cNvPr>
@@ -10087,7 +10099,7 @@
           <p:nvPr/>
         </p:nvPicPr>
         <p:blipFill>
-          <a:blip xmlns:r="http://schemas.openxmlformats.org/officeDocument/2006/relationships" xmlns:a="http://schemas.openxmlformats.org/drawingml/2006/main" r:embed="R8ddb6410f4cb4418"/>
+          <a:blip xmlns:r="http://schemas.openxmlformats.org/officeDocument/2006/relationships" xmlns:a="http://schemas.openxmlformats.org/drawingml/2006/main" r:embed="Rc767b501dcb444e1"/>
           <a:stretch xmlns:a="http://schemas.openxmlformats.org/drawingml/2006/main">
             <a:fillRect l="0" t="0" r="0" b="0"/>
           </a:stretch>
@@ -10107,7 +10119,7 @@
           <p:cNvPr id="20" name="Text 14">
             <a:extLst xmlns:a="http://schemas.openxmlformats.org/drawingml/2006/main">
               <a:ext uri="{FF2B5EF4-FFF2-40B4-BE49-F238E27FC236}">
-                <a16:creationId xmlns:a16="http://schemas.microsoft.com/office/drawing/2014/main" id="{83A4FC23-114F-48D2-BEF0-911FBF9B9FD7}"/>
+                <a16:creationId xmlns:a16="http://schemas.microsoft.com/office/drawing/2014/main" id="{381D8C09-80FE-444D-85F5-70E9EB563E34}"/>
               </a:ext>
             </a:extLst>
           </p:cNvPr>
@@ -10152,7 +10164,7 @@
           <p:cNvPr id="21" name="Text 15">
             <a:extLst xmlns:a="http://schemas.openxmlformats.org/drawingml/2006/main">
               <a:ext uri="{FF2B5EF4-FFF2-40B4-BE49-F238E27FC236}">
-                <a16:creationId xmlns:a16="http://schemas.microsoft.com/office/drawing/2014/main" id="{E58BED01-8990-4D88-95E7-9D3E5B60921C}"/>
+                <a16:creationId xmlns:a16="http://schemas.microsoft.com/office/drawing/2014/main" id="{07FD1814-54A3-4439-B379-3E8C27BB98BF}"/>
               </a:ext>
             </a:extLst>
           </p:cNvPr>
@@ -10238,7 +10250,7 @@
           <p:cNvPr id="22" name="Text 16">
             <a:extLst xmlns:a="http://schemas.openxmlformats.org/drawingml/2006/main">
               <a:ext uri="{FF2B5EF4-FFF2-40B4-BE49-F238E27FC236}">
-                <a16:creationId xmlns:a16="http://schemas.microsoft.com/office/drawing/2014/main" id="{31AAB797-3AAF-475D-BE02-618892B9BB12}"/>
+                <a16:creationId xmlns:a16="http://schemas.microsoft.com/office/drawing/2014/main" id="{9B03E3C2-0734-4F05-B315-604977012891}"/>
               </a:ext>
             </a:extLst>
           </p:cNvPr>
@@ -10286,7 +10298,7 @@
           <p:cNvPr id="23" name="Shape 17">
             <a:extLst xmlns:a="http://schemas.openxmlformats.org/drawingml/2006/main">
               <a:ext uri="{FF2B5EF4-FFF2-40B4-BE49-F238E27FC236}">
-                <a16:creationId xmlns:a16="http://schemas.microsoft.com/office/drawing/2014/main" id="{6CF6A36D-D33E-47A0-BD93-CFADF1E3AAB8}"/>
+                <a16:creationId xmlns:a16="http://schemas.microsoft.com/office/drawing/2014/main" id="{B300BF07-77E0-4F7A-AE55-35584E54412D}"/>
               </a:ext>
             </a:extLst>
           </p:cNvPr>
@@ -10333,7 +10345,7 @@
           <p:cNvPr id="24" name="Text 18">
             <a:extLst xmlns:a="http://schemas.openxmlformats.org/drawingml/2006/main">
               <a:ext uri="{FF2B5EF4-FFF2-40B4-BE49-F238E27FC236}">
-                <a16:creationId xmlns:a16="http://schemas.microsoft.com/office/drawing/2014/main" id="{291A9DAB-6043-4C62-831D-2219ADF7ED7F}"/>
+                <a16:creationId xmlns:a16="http://schemas.microsoft.com/office/drawing/2014/main" id="{5638134B-BFD7-4715-8B88-9933DA9C10DC}"/>
               </a:ext>
             </a:extLst>
           </p:cNvPr>
@@ -10378,7 +10390,7 @@
           <p:cNvPr id="25" name="Text 19">
             <a:extLst xmlns:a="http://schemas.openxmlformats.org/drawingml/2006/main">
               <a:ext uri="{FF2B5EF4-FFF2-40B4-BE49-F238E27FC236}">
-                <a16:creationId xmlns:a16="http://schemas.microsoft.com/office/drawing/2014/main" id="{8A172CBC-5BDF-42D3-B70E-3C12008B8D8B}"/>
+                <a16:creationId xmlns:a16="http://schemas.microsoft.com/office/drawing/2014/main" id="{E9854A9C-47B3-449A-AEA1-96E745395969}"/>
               </a:ext>
             </a:extLst>
           </p:cNvPr>
@@ -10426,7 +10438,7 @@
           <p:cNvPr id="26" name="Text 20">
             <a:extLst xmlns:a="http://schemas.openxmlformats.org/drawingml/2006/main">
               <a:ext uri="{FF2B5EF4-FFF2-40B4-BE49-F238E27FC236}">
-                <a16:creationId xmlns:a16="http://schemas.microsoft.com/office/drawing/2014/main" id="{83666D2C-2BBA-4C3B-804B-1F7A8506C1F2}"/>
+                <a16:creationId xmlns:a16="http://schemas.microsoft.com/office/drawing/2014/main" id="{1A7E5788-50FF-441E-B673-122D47119E9A}"/>
               </a:ext>
             </a:extLst>
           </p:cNvPr>
@@ -10471,7 +10483,7 @@
           <p:cNvPr id="27" name="Shape 21">
             <a:extLst xmlns:a="http://schemas.openxmlformats.org/drawingml/2006/main">
               <a:ext uri="{FF2B5EF4-FFF2-40B4-BE49-F238E27FC236}">
-                <a16:creationId xmlns:a16="http://schemas.microsoft.com/office/drawing/2014/main" id="{F97D86F8-D1CE-4D84-BCD3-2C15FFB0E870}"/>
+                <a16:creationId xmlns:a16="http://schemas.microsoft.com/office/drawing/2014/main" id="{8FD2EDAC-C27E-454A-A228-34AEF3412EFC}"/>
               </a:ext>
             </a:extLst>
           </p:cNvPr>
@@ -10518,7 +10530,7 @@
           <p:cNvPr id="28" name="Text 22">
             <a:extLst xmlns:a="http://schemas.openxmlformats.org/drawingml/2006/main">
               <a:ext uri="{FF2B5EF4-FFF2-40B4-BE49-F238E27FC236}">
-                <a16:creationId xmlns:a16="http://schemas.microsoft.com/office/drawing/2014/main" id="{222A81A1-15DD-4C2F-957E-0E7667E0E3A5}"/>
+                <a16:creationId xmlns:a16="http://schemas.microsoft.com/office/drawing/2014/main" id="{6CACA926-479C-47FD-B001-F15C1E025672}"/>
               </a:ext>
             </a:extLst>
           </p:cNvPr>
@@ -10563,7 +10575,7 @@
           <p:cNvPr id="29" name="Text 23">
             <a:extLst xmlns:a="http://schemas.openxmlformats.org/drawingml/2006/main">
               <a:ext uri="{FF2B5EF4-FFF2-40B4-BE49-F238E27FC236}">
-                <a16:creationId xmlns:a16="http://schemas.microsoft.com/office/drawing/2014/main" id="{F3AE8C6C-92DD-484C-AD1E-687BEE9AC543}"/>
+                <a16:creationId xmlns:a16="http://schemas.microsoft.com/office/drawing/2014/main" id="{E6591113-F31E-4044-BB71-766B53800597}"/>
               </a:ext>
             </a:extLst>
           </p:cNvPr>
@@ -10611,7 +10623,7 @@
           <p:cNvPr id="30" name="Shape 24">
             <a:extLst xmlns:a="http://schemas.openxmlformats.org/drawingml/2006/main">
               <a:ext uri="{FF2B5EF4-FFF2-40B4-BE49-F238E27FC236}">
-                <a16:creationId xmlns:a16="http://schemas.microsoft.com/office/drawing/2014/main" id="{7B69DB23-E155-4FA4-8D01-196150A3E41B}"/>
+                <a16:creationId xmlns:a16="http://schemas.microsoft.com/office/drawing/2014/main" id="{589E704E-9958-4B33-B999-865616CFDB90}"/>
               </a:ext>
             </a:extLst>
           </p:cNvPr>
@@ -10658,7 +10670,7 @@
           <p:cNvPr id="31" name="Text 25">
             <a:extLst xmlns:a="http://schemas.openxmlformats.org/drawingml/2006/main">
               <a:ext uri="{FF2B5EF4-FFF2-40B4-BE49-F238E27FC236}">
-                <a16:creationId xmlns:a16="http://schemas.microsoft.com/office/drawing/2014/main" id="{62D73951-6B16-40A9-800E-0E110439C9E1}"/>
+                <a16:creationId xmlns:a16="http://schemas.microsoft.com/office/drawing/2014/main" id="{D9A4E16D-1CD6-4781-9147-330CD08A8B16}"/>
               </a:ext>
             </a:extLst>
           </p:cNvPr>
@@ -10703,7 +10715,7 @@
           <p:cNvPr id="32" name="Text 26">
             <a:extLst xmlns:a="http://schemas.openxmlformats.org/drawingml/2006/main">
               <a:ext uri="{FF2B5EF4-FFF2-40B4-BE49-F238E27FC236}">
-                <a16:creationId xmlns:a16="http://schemas.microsoft.com/office/drawing/2014/main" id="{8D8540A8-EDA7-498A-A248-A663667557B3}"/>
+                <a16:creationId xmlns:a16="http://schemas.microsoft.com/office/drawing/2014/main" id="{3C98F2B8-94EE-4A9A-9569-A9E6F0BCA34B}"/>
               </a:ext>
             </a:extLst>
           </p:cNvPr>
@@ -10751,7 +10763,7 @@
           <p:cNvPr id="33" name="Shape 27">
             <a:extLst xmlns:a="http://schemas.openxmlformats.org/drawingml/2006/main">
               <a:ext uri="{FF2B5EF4-FFF2-40B4-BE49-F238E27FC236}">
-                <a16:creationId xmlns:a16="http://schemas.microsoft.com/office/drawing/2014/main" id="{98FB4192-0044-4CC7-A85D-EB2C589387F3}"/>
+                <a16:creationId xmlns:a16="http://schemas.microsoft.com/office/drawing/2014/main" id="{68CCBC6E-8D90-482E-BDB7-2B12F456D90D}"/>
               </a:ext>
             </a:extLst>
           </p:cNvPr>
@@ -10798,7 +10810,7 @@
           <p:cNvPr id="34" name="Text 28">
             <a:extLst xmlns:a="http://schemas.openxmlformats.org/drawingml/2006/main">
               <a:ext uri="{FF2B5EF4-FFF2-40B4-BE49-F238E27FC236}">
-                <a16:creationId xmlns:a16="http://schemas.microsoft.com/office/drawing/2014/main" id="{2A462165-DB01-4E94-A39A-A8FE34B51850}"/>
+                <a16:creationId xmlns:a16="http://schemas.microsoft.com/office/drawing/2014/main" id="{62B1DE56-8084-40C4-929B-080B5ED98DBE}"/>
               </a:ext>
             </a:extLst>
           </p:cNvPr>
@@ -10843,7 +10855,7 @@
           <p:cNvPr id="35" name="Text 29">
             <a:extLst xmlns:a="http://schemas.openxmlformats.org/drawingml/2006/main">
               <a:ext uri="{FF2B5EF4-FFF2-40B4-BE49-F238E27FC236}">
-                <a16:creationId xmlns:a16="http://schemas.microsoft.com/office/drawing/2014/main" id="{47B5A1F5-C5CA-46FB-B55B-277000858DE9}"/>
+                <a16:creationId xmlns:a16="http://schemas.microsoft.com/office/drawing/2014/main" id="{8DC13B1E-B1D2-4F7A-8F9E-6AF000E54797}"/>
               </a:ext>
             </a:extLst>
           </p:cNvPr>
@@ -10891,7 +10903,7 @@
           <p:cNvPr id="36" name="Text 30">
             <a:extLst xmlns:a="http://schemas.openxmlformats.org/drawingml/2006/main">
               <a:ext uri="{FF2B5EF4-FFF2-40B4-BE49-F238E27FC236}">
-                <a16:creationId xmlns:a16="http://schemas.microsoft.com/office/drawing/2014/main" id="{1B22F930-D713-4AA4-A4C4-D99913EDC0CC}"/>
+                <a16:creationId xmlns:a16="http://schemas.microsoft.com/office/drawing/2014/main" id="{3BCED952-E03B-4BAA-832A-F5CBDC939DF8}"/>
               </a:ext>
             </a:extLst>
           </p:cNvPr>
@@ -10937,7 +10949,7 @@
     </p:spTree>
     <p:extLst>
       <p:ext uri="{BB962C8B-B14F-4D97-AF65-F5344CB8AC3E}">
-        <p14:creationId xmlns:p14="http://schemas.microsoft.com/office/powerpoint/2010/main" val="1518637408"/>
+        <p14:creationId xmlns:p14="http://schemas.microsoft.com/office/powerpoint/2010/main" val="1595599157"/>
       </p:ext>
     </p:extLst>
   </p:cSld>
@@ -10968,7 +10980,7 @@
           <p:cNvPr id="2" name="Text 0">
             <a:extLst xmlns:a="http://schemas.openxmlformats.org/drawingml/2006/main">
               <a:ext uri="{FF2B5EF4-FFF2-40B4-BE49-F238E27FC236}">
-                <a16:creationId xmlns:a16="http://schemas.microsoft.com/office/drawing/2014/main" id="{D62377DD-610F-4BCF-9BE2-F6C11B5E16C8}"/>
+                <a16:creationId xmlns:a16="http://schemas.microsoft.com/office/drawing/2014/main" id="{680433BD-66C4-4BD9-9C71-FF12FA843BFB}"/>
               </a:ext>
             </a:extLst>
           </p:cNvPr>
@@ -11013,7 +11025,7 @@
           <p:cNvPr id="3" name="Text 1">
             <a:extLst xmlns:a="http://schemas.openxmlformats.org/drawingml/2006/main">
               <a:ext uri="{FF2B5EF4-FFF2-40B4-BE49-F238E27FC236}">
-                <a16:creationId xmlns:a16="http://schemas.microsoft.com/office/drawing/2014/main" id="{CD09E307-2C1F-4D72-AFE2-D06600E533F0}"/>
+                <a16:creationId xmlns:a16="http://schemas.microsoft.com/office/drawing/2014/main" id="{B86E9609-4E38-4343-867B-54496AB287F3}"/>
               </a:ext>
             </a:extLst>
           </p:cNvPr>
@@ -11058,7 +11070,7 @@
           <p:cNvPr id="4" name="Text 2">
             <a:extLst xmlns:a="http://schemas.openxmlformats.org/drawingml/2006/main">
               <a:ext uri="{FF2B5EF4-FFF2-40B4-BE49-F238E27FC236}">
-                <a16:creationId xmlns:a16="http://schemas.microsoft.com/office/drawing/2014/main" id="{0BD3D509-CE55-49BD-A2A2-F6FB26DA487A}"/>
+                <a16:creationId xmlns:a16="http://schemas.microsoft.com/office/drawing/2014/main" id="{673A9E08-8BD3-4B31-8BE9-8B6BE0C3CAA6}"/>
               </a:ext>
             </a:extLst>
           </p:cNvPr>
@@ -11103,7 +11115,7 @@
           <p:cNvPr id="5" name="Text 3">
             <a:extLst xmlns:a="http://schemas.openxmlformats.org/drawingml/2006/main">
               <a:ext uri="{FF2B5EF4-FFF2-40B4-BE49-F238E27FC236}">
-                <a16:creationId xmlns:a16="http://schemas.microsoft.com/office/drawing/2014/main" id="{696902A8-F72D-4FE3-B8B4-1C34166D2533}"/>
+                <a16:creationId xmlns:a16="http://schemas.microsoft.com/office/drawing/2014/main" id="{DF4BF5F8-2D9F-482C-A7A1-FE812AD875F1}"/>
               </a:ext>
             </a:extLst>
           </p:cNvPr>
@@ -11148,7 +11160,7 @@
           <p:cNvPr id="6" name="Text 4">
             <a:extLst xmlns:a="http://schemas.openxmlformats.org/drawingml/2006/main">
               <a:ext uri="{FF2B5EF4-FFF2-40B4-BE49-F238E27FC236}">
-                <a16:creationId xmlns:a16="http://schemas.microsoft.com/office/drawing/2014/main" id="{2290CE27-1572-4606-A7DA-EC09E0E07549}"/>
+                <a16:creationId xmlns:a16="http://schemas.microsoft.com/office/drawing/2014/main" id="{AF145C39-B8BA-4BAC-8A6E-2BA076D5A435}"/>
               </a:ext>
             </a:extLst>
           </p:cNvPr>
@@ -11193,7 +11205,7 @@
           <p:cNvPr id="7" name="Shape 5">
             <a:extLst xmlns:a="http://schemas.openxmlformats.org/drawingml/2006/main">
               <a:ext uri="{FF2B5EF4-FFF2-40B4-BE49-F238E27FC236}">
-                <a16:creationId xmlns:a16="http://schemas.microsoft.com/office/drawing/2014/main" id="{D41554CA-C366-4FFD-85D4-F7EE6AD1EAE3}"/>
+                <a16:creationId xmlns:a16="http://schemas.microsoft.com/office/drawing/2014/main" id="{CA0AA3CD-F02F-426E-9182-6773636E1E36}"/>
               </a:ext>
             </a:extLst>
           </p:cNvPr>
@@ -11233,7 +11245,7 @@
           <p:cNvPr id="8" name="Text 6">
             <a:extLst xmlns:a="http://schemas.openxmlformats.org/drawingml/2006/main">
               <a:ext uri="{FF2B5EF4-FFF2-40B4-BE49-F238E27FC236}">
-                <a16:creationId xmlns:a16="http://schemas.microsoft.com/office/drawing/2014/main" id="{276D8B3B-DE9A-4CC9-A9EA-05BC7950823E}"/>
+                <a16:creationId xmlns:a16="http://schemas.microsoft.com/office/drawing/2014/main" id="{F0943166-8B72-4F79-A3C5-859AF6B6073B}"/>
               </a:ext>
             </a:extLst>
           </p:cNvPr>
@@ -11278,7 +11290,7 @@
           <p:cNvPr id="9" name="Shape 7">
             <a:extLst xmlns:a="http://schemas.openxmlformats.org/drawingml/2006/main">
               <a:ext uri="{FF2B5EF4-FFF2-40B4-BE49-F238E27FC236}">
-                <a16:creationId xmlns:a16="http://schemas.microsoft.com/office/drawing/2014/main" id="{35C563DA-1EB0-4147-8D10-0F0C9F0B6A58}"/>
+                <a16:creationId xmlns:a16="http://schemas.microsoft.com/office/drawing/2014/main" id="{FEC7D90D-95E1-4535-8DD7-1CA90FF36DB6}"/>
               </a:ext>
             </a:extLst>
           </p:cNvPr>
@@ -11318,7 +11330,7 @@
           <p:cNvPr id="10" name="Text 8">
             <a:extLst xmlns:a="http://schemas.openxmlformats.org/drawingml/2006/main">
               <a:ext uri="{FF2B5EF4-FFF2-40B4-BE49-F238E27FC236}">
-                <a16:creationId xmlns:a16="http://schemas.microsoft.com/office/drawing/2014/main" id="{C27E6A86-C38C-475E-BCB5-43C204015C93}"/>
+                <a16:creationId xmlns:a16="http://schemas.microsoft.com/office/drawing/2014/main" id="{9368F322-EAE4-4680-BB22-DE3F78E03F5A}"/>
               </a:ext>
             </a:extLst>
           </p:cNvPr>
@@ -11363,7 +11375,7 @@
           <p:cNvPr id="11" name="Shape 9">
             <a:extLst xmlns:a="http://schemas.openxmlformats.org/drawingml/2006/main">
               <a:ext uri="{FF2B5EF4-FFF2-40B4-BE49-F238E27FC236}">
-                <a16:creationId xmlns:a16="http://schemas.microsoft.com/office/drawing/2014/main" id="{7A98FFEB-7BA4-46D1-9135-28375BF570C7}"/>
+                <a16:creationId xmlns:a16="http://schemas.microsoft.com/office/drawing/2014/main" id="{47786BC2-C9F6-4FF5-8055-7021DFD9F507}"/>
               </a:ext>
             </a:extLst>
           </p:cNvPr>
@@ -11403,7 +11415,7 @@
           <p:cNvPr id="12" name="Text 10">
             <a:extLst xmlns:a="http://schemas.openxmlformats.org/drawingml/2006/main">
               <a:ext uri="{FF2B5EF4-FFF2-40B4-BE49-F238E27FC236}">
-                <a16:creationId xmlns:a16="http://schemas.microsoft.com/office/drawing/2014/main" id="{A2EC1D1D-3D33-44BF-A240-2EE41AEF8A95}"/>
+                <a16:creationId xmlns:a16="http://schemas.microsoft.com/office/drawing/2014/main" id="{8FED0E02-5C2E-4446-AAE5-495F848F6325}"/>
               </a:ext>
             </a:extLst>
           </p:cNvPr>
@@ -11448,7 +11460,7 @@
           <p:cNvPr id="13" name="Shape 11">
             <a:extLst xmlns:a="http://schemas.openxmlformats.org/drawingml/2006/main">
               <a:ext uri="{FF2B5EF4-FFF2-40B4-BE49-F238E27FC236}">
-                <a16:creationId xmlns:a16="http://schemas.microsoft.com/office/drawing/2014/main" id="{C7D67693-F1E9-49F8-820A-BABF216110A2}"/>
+                <a16:creationId xmlns:a16="http://schemas.microsoft.com/office/drawing/2014/main" id="{C3BB33FD-2D50-473C-AF38-1DD4AAC4824F}"/>
               </a:ext>
             </a:extLst>
           </p:cNvPr>
@@ -11488,7 +11500,7 @@
           <p:cNvPr id="14" name="Text 12">
             <a:extLst xmlns:a="http://schemas.openxmlformats.org/drawingml/2006/main">
               <a:ext uri="{FF2B5EF4-FFF2-40B4-BE49-F238E27FC236}">
-                <a16:creationId xmlns:a16="http://schemas.microsoft.com/office/drawing/2014/main" id="{E537D1CD-061B-444C-A9DF-A4F817A0DE97}"/>
+                <a16:creationId xmlns:a16="http://schemas.microsoft.com/office/drawing/2014/main" id="{40A52FD0-F597-451A-8B61-71D759A91809}"/>
               </a:ext>
             </a:extLst>
           </p:cNvPr>
@@ -11533,7 +11545,7 @@
           <p:cNvPr id="15" name="Shape 13">
             <a:extLst xmlns:a="http://schemas.openxmlformats.org/drawingml/2006/main">
               <a:ext uri="{FF2B5EF4-FFF2-40B4-BE49-F238E27FC236}">
-                <a16:creationId xmlns:a16="http://schemas.microsoft.com/office/drawing/2014/main" id="{D49F69CF-71B9-4B3E-BBF8-51BDBEA5CF63}"/>
+                <a16:creationId xmlns:a16="http://schemas.microsoft.com/office/drawing/2014/main" id="{8F632457-3B55-468D-A4A0-B623D2962886}"/>
               </a:ext>
             </a:extLst>
           </p:cNvPr>
@@ -11573,7 +11585,7 @@
           <p:cNvPr id="16" name="Text 14">
             <a:extLst xmlns:a="http://schemas.openxmlformats.org/drawingml/2006/main">
               <a:ext uri="{FF2B5EF4-FFF2-40B4-BE49-F238E27FC236}">
-                <a16:creationId xmlns:a16="http://schemas.microsoft.com/office/drawing/2014/main" id="{3A5554FF-2B29-4AC0-8A8C-FEAFE083B9D2}"/>
+                <a16:creationId xmlns:a16="http://schemas.microsoft.com/office/drawing/2014/main" id="{198A838C-1397-4665-9FCE-A2692883659F}"/>
               </a:ext>
             </a:extLst>
           </p:cNvPr>
@@ -11618,7 +11630,7 @@
           <p:cNvPr id="17" name="Shape 15">
             <a:extLst xmlns:a="http://schemas.openxmlformats.org/drawingml/2006/main">
               <a:ext uri="{FF2B5EF4-FFF2-40B4-BE49-F238E27FC236}">
-                <a16:creationId xmlns:a16="http://schemas.microsoft.com/office/drawing/2014/main" id="{0E6BE20A-3876-48D8-97A4-C179887C2C2F}"/>
+                <a16:creationId xmlns:a16="http://schemas.microsoft.com/office/drawing/2014/main" id="{4D845B0D-8748-4D51-B7E9-D19FF07DD789}"/>
               </a:ext>
             </a:extLst>
           </p:cNvPr>
@@ -11658,7 +11670,7 @@
           <p:cNvPr id="18" name="Text 16">
             <a:extLst xmlns:a="http://schemas.openxmlformats.org/drawingml/2006/main">
               <a:ext uri="{FF2B5EF4-FFF2-40B4-BE49-F238E27FC236}">
-                <a16:creationId xmlns:a16="http://schemas.microsoft.com/office/drawing/2014/main" id="{6AE90D99-857C-45B2-A3CC-D4FB0A74C7AA}"/>
+                <a16:creationId xmlns:a16="http://schemas.microsoft.com/office/drawing/2014/main" id="{164E0B83-4659-40DE-BAED-EE5E85A2A4F6}"/>
               </a:ext>
             </a:extLst>
           </p:cNvPr>
@@ -11703,7 +11715,7 @@
           <p:cNvPr id="19" name="Text 17">
             <a:extLst xmlns:a="http://schemas.openxmlformats.org/drawingml/2006/main">
               <a:ext uri="{FF2B5EF4-FFF2-40B4-BE49-F238E27FC236}">
-                <a16:creationId xmlns:a16="http://schemas.microsoft.com/office/drawing/2014/main" id="{A2E179B5-98BD-4DC6-9F17-8A65D7D9CFBE}"/>
+                <a16:creationId xmlns:a16="http://schemas.microsoft.com/office/drawing/2014/main" id="{D7285974-66FB-48C6-BDB2-3C72C0A75C75}"/>
               </a:ext>
             </a:extLst>
           </p:cNvPr>
@@ -11748,7 +11760,7 @@
           <p:cNvPr id="20" name="Shape 18">
             <a:extLst xmlns:a="http://schemas.openxmlformats.org/drawingml/2006/main">
               <a:ext uri="{FF2B5EF4-FFF2-40B4-BE49-F238E27FC236}">
-                <a16:creationId xmlns:a16="http://schemas.microsoft.com/office/drawing/2014/main" id="{E1CBCED3-21FF-4EC5-BBE5-B383A961C19C}"/>
+                <a16:creationId xmlns:a16="http://schemas.microsoft.com/office/drawing/2014/main" id="{04031A9A-FAD5-4D22-B118-012A2C9F257D}"/>
               </a:ext>
             </a:extLst>
           </p:cNvPr>
@@ -11795,7 +11807,7 @@
           <p:cNvPr id="21" name="Text 19">
             <a:extLst xmlns:a="http://schemas.openxmlformats.org/drawingml/2006/main">
               <a:ext uri="{FF2B5EF4-FFF2-40B4-BE49-F238E27FC236}">
-                <a16:creationId xmlns:a16="http://schemas.microsoft.com/office/drawing/2014/main" id="{74974CBB-F129-4E28-A3EA-8D74783AB233}"/>
+                <a16:creationId xmlns:a16="http://schemas.microsoft.com/office/drawing/2014/main" id="{593610D7-8E10-4DBF-A53E-40125CFFB1B1}"/>
               </a:ext>
             </a:extLst>
           </p:cNvPr>
@@ -11840,7 +11852,7 @@
           <p:cNvPr id="22" name="Text 20">
             <a:extLst xmlns:a="http://schemas.openxmlformats.org/drawingml/2006/main">
               <a:ext uri="{FF2B5EF4-FFF2-40B4-BE49-F238E27FC236}">
-                <a16:creationId xmlns:a16="http://schemas.microsoft.com/office/drawing/2014/main" id="{B297ED7F-804A-42C9-A006-0763793F1FBF}"/>
+                <a16:creationId xmlns:a16="http://schemas.microsoft.com/office/drawing/2014/main" id="{30770DE0-AB9A-4AC0-BCBE-053D7FAAC10E}"/>
               </a:ext>
             </a:extLst>
           </p:cNvPr>
@@ -11885,7 +11897,7 @@
           <p:cNvPr id="23" name="Text 21">
             <a:extLst xmlns:a="http://schemas.openxmlformats.org/drawingml/2006/main">
               <a:ext uri="{FF2B5EF4-FFF2-40B4-BE49-F238E27FC236}">
-                <a16:creationId xmlns:a16="http://schemas.microsoft.com/office/drawing/2014/main" id="{2A0B487F-7B97-4183-8364-5061ECEC5E2A}"/>
+                <a16:creationId xmlns:a16="http://schemas.microsoft.com/office/drawing/2014/main" id="{4E77408A-1FE8-4012-8F41-9310AC85AAA9}"/>
               </a:ext>
             </a:extLst>
           </p:cNvPr>
@@ -11933,7 +11945,7 @@
           <p:cNvPr id="24" name="Shape 22">
             <a:extLst xmlns:a="http://schemas.openxmlformats.org/drawingml/2006/main">
               <a:ext uri="{FF2B5EF4-FFF2-40B4-BE49-F238E27FC236}">
-                <a16:creationId xmlns:a16="http://schemas.microsoft.com/office/drawing/2014/main" id="{72A6146F-6951-4FA2-A4AC-2DBE07A16E98}"/>
+                <a16:creationId xmlns:a16="http://schemas.microsoft.com/office/drawing/2014/main" id="{BEE3E533-7B9F-4A9A-AD51-B09EDD334B3A}"/>
               </a:ext>
             </a:extLst>
           </p:cNvPr>
@@ -11980,7 +11992,7 @@
           <p:cNvPr id="25" name="Text 23">
             <a:extLst xmlns:a="http://schemas.openxmlformats.org/drawingml/2006/main">
               <a:ext uri="{FF2B5EF4-FFF2-40B4-BE49-F238E27FC236}">
-                <a16:creationId xmlns:a16="http://schemas.microsoft.com/office/drawing/2014/main" id="{44869C5E-0513-4DA8-AED5-9163CFC8AF83}"/>
+                <a16:creationId xmlns:a16="http://schemas.microsoft.com/office/drawing/2014/main" id="{85E990A1-7CE6-4FD9-8908-C6B3F02F07B6}"/>
               </a:ext>
             </a:extLst>
           </p:cNvPr>
@@ -12025,7 +12037,7 @@
           <p:cNvPr id="26" name="Text 24">
             <a:extLst xmlns:a="http://schemas.openxmlformats.org/drawingml/2006/main">
               <a:ext uri="{FF2B5EF4-FFF2-40B4-BE49-F238E27FC236}">
-                <a16:creationId xmlns:a16="http://schemas.microsoft.com/office/drawing/2014/main" id="{825CE0A1-1634-4433-A068-3865A788C6AC}"/>
+                <a16:creationId xmlns:a16="http://schemas.microsoft.com/office/drawing/2014/main" id="{89FCA97B-801B-4F21-B12F-16A2690479D1}"/>
               </a:ext>
             </a:extLst>
           </p:cNvPr>
@@ -12070,7 +12082,7 @@
           <p:cNvPr id="27" name="Text 25">
             <a:extLst xmlns:a="http://schemas.openxmlformats.org/drawingml/2006/main">
               <a:ext uri="{FF2B5EF4-FFF2-40B4-BE49-F238E27FC236}">
-                <a16:creationId xmlns:a16="http://schemas.microsoft.com/office/drawing/2014/main" id="{4AB03D29-30B9-495B-8725-E58F84A2B252}"/>
+                <a16:creationId xmlns:a16="http://schemas.microsoft.com/office/drawing/2014/main" id="{63906A46-7E36-40AF-8C10-46B3E502C619}"/>
               </a:ext>
             </a:extLst>
           </p:cNvPr>
@@ -12118,7 +12130,7 @@
           <p:cNvPr id="28" name="Shape 26">
             <a:extLst xmlns:a="http://schemas.openxmlformats.org/drawingml/2006/main">
               <a:ext uri="{FF2B5EF4-FFF2-40B4-BE49-F238E27FC236}">
-                <a16:creationId xmlns:a16="http://schemas.microsoft.com/office/drawing/2014/main" id="{367CCD20-69B2-45D7-B245-24BF699D855D}"/>
+                <a16:creationId xmlns:a16="http://schemas.microsoft.com/office/drawing/2014/main" id="{AC4A98E3-7776-4837-B626-D3676E5F6B48}"/>
               </a:ext>
             </a:extLst>
           </p:cNvPr>
@@ -12165,7 +12177,7 @@
           <p:cNvPr id="29" name="Text 27">
             <a:extLst xmlns:a="http://schemas.openxmlformats.org/drawingml/2006/main">
               <a:ext uri="{FF2B5EF4-FFF2-40B4-BE49-F238E27FC236}">
-                <a16:creationId xmlns:a16="http://schemas.microsoft.com/office/drawing/2014/main" id="{2A15B9BB-EACE-4480-877B-B392DCF78CB8}"/>
+                <a16:creationId xmlns:a16="http://schemas.microsoft.com/office/drawing/2014/main" id="{246686D3-AE41-4AEE-890C-56324397EBEE}"/>
               </a:ext>
             </a:extLst>
           </p:cNvPr>
@@ -12210,7 +12222,7 @@
           <p:cNvPr id="30" name="Text 28">
             <a:extLst xmlns:a="http://schemas.openxmlformats.org/drawingml/2006/main">
               <a:ext uri="{FF2B5EF4-FFF2-40B4-BE49-F238E27FC236}">
-                <a16:creationId xmlns:a16="http://schemas.microsoft.com/office/drawing/2014/main" id="{662E4B9C-262A-4127-8D61-A46C94097923}"/>
+                <a16:creationId xmlns:a16="http://schemas.microsoft.com/office/drawing/2014/main" id="{652E45A6-23B6-4BA7-A860-E2A06D12F043}"/>
               </a:ext>
             </a:extLst>
           </p:cNvPr>
@@ -12255,7 +12267,7 @@
           <p:cNvPr id="31" name="Text 29">
             <a:extLst xmlns:a="http://schemas.openxmlformats.org/drawingml/2006/main">
               <a:ext uri="{FF2B5EF4-FFF2-40B4-BE49-F238E27FC236}">
-                <a16:creationId xmlns:a16="http://schemas.microsoft.com/office/drawing/2014/main" id="{DBCE07C3-558B-4358-8961-34917E94F40D}"/>
+                <a16:creationId xmlns:a16="http://schemas.microsoft.com/office/drawing/2014/main" id="{F2791497-D17B-40CD-B686-BCB1A61688D1}"/>
               </a:ext>
             </a:extLst>
           </p:cNvPr>
@@ -12303,7 +12315,7 @@
           <p:cNvPr id="32" name="Shape 30">
             <a:extLst xmlns:a="http://schemas.openxmlformats.org/drawingml/2006/main">
               <a:ext uri="{FF2B5EF4-FFF2-40B4-BE49-F238E27FC236}">
-                <a16:creationId xmlns:a16="http://schemas.microsoft.com/office/drawing/2014/main" id="{23DEA473-3800-44C4-BDAB-81715A8D5608}"/>
+                <a16:creationId xmlns:a16="http://schemas.microsoft.com/office/drawing/2014/main" id="{D0C64257-7D40-409D-95A0-37932273C43B}"/>
               </a:ext>
             </a:extLst>
           </p:cNvPr>
@@ -12350,7 +12362,7 @@
           <p:cNvPr id="33" name="Text 31">
             <a:extLst xmlns:a="http://schemas.openxmlformats.org/drawingml/2006/main">
               <a:ext uri="{FF2B5EF4-FFF2-40B4-BE49-F238E27FC236}">
-                <a16:creationId xmlns:a16="http://schemas.microsoft.com/office/drawing/2014/main" id="{6C426055-C124-48BE-B7F5-A7A541C64CAA}"/>
+                <a16:creationId xmlns:a16="http://schemas.microsoft.com/office/drawing/2014/main" id="{AC9722D7-1400-4A90-B009-371483237D13}"/>
               </a:ext>
             </a:extLst>
           </p:cNvPr>
@@ -12395,7 +12407,7 @@
           <p:cNvPr id="34" name="Text 32">
             <a:extLst xmlns:a="http://schemas.openxmlformats.org/drawingml/2006/main">
               <a:ext uri="{FF2B5EF4-FFF2-40B4-BE49-F238E27FC236}">
-                <a16:creationId xmlns:a16="http://schemas.microsoft.com/office/drawing/2014/main" id="{E1E5C9D0-6DD3-4EB4-8A4D-F6314173F9E2}"/>
+                <a16:creationId xmlns:a16="http://schemas.microsoft.com/office/drawing/2014/main" id="{2D66F40A-E535-46FE-AB30-E63D31D04068}"/>
               </a:ext>
             </a:extLst>
           </p:cNvPr>
@@ -12440,7 +12452,7 @@
           <p:cNvPr id="35" name="Text 33">
             <a:extLst xmlns:a="http://schemas.openxmlformats.org/drawingml/2006/main">
               <a:ext uri="{FF2B5EF4-FFF2-40B4-BE49-F238E27FC236}">
-                <a16:creationId xmlns:a16="http://schemas.microsoft.com/office/drawing/2014/main" id="{6516D2A3-BD4B-48B0-BC14-E6DD9D456D78}"/>
+                <a16:creationId xmlns:a16="http://schemas.microsoft.com/office/drawing/2014/main" id="{F3038332-9641-4759-B6BC-1D6CC68AC2A4}"/>
               </a:ext>
             </a:extLst>
           </p:cNvPr>
@@ -12488,7 +12500,7 @@
           <p:cNvPr id="36" name="Text 34">
             <a:extLst xmlns:a="http://schemas.openxmlformats.org/drawingml/2006/main">
               <a:ext uri="{FF2B5EF4-FFF2-40B4-BE49-F238E27FC236}">
-                <a16:creationId xmlns:a16="http://schemas.microsoft.com/office/drawing/2014/main" id="{07069469-D817-429A-9E61-62F924403343}"/>
+                <a16:creationId xmlns:a16="http://schemas.microsoft.com/office/drawing/2014/main" id="{3651CB39-869A-4D4E-AE29-B2544C12259B}"/>
               </a:ext>
             </a:extLst>
           </p:cNvPr>
@@ -12533,7 +12545,7 @@
           <p:cNvPr id="37" name="Text 35">
             <a:extLst xmlns:a="http://schemas.openxmlformats.org/drawingml/2006/main">
               <a:ext uri="{FF2B5EF4-FFF2-40B4-BE49-F238E27FC236}">
-                <a16:creationId xmlns:a16="http://schemas.microsoft.com/office/drawing/2014/main" id="{FC5DBE09-E2D1-4CB9-B889-94452C5C65F7}"/>
+                <a16:creationId xmlns:a16="http://schemas.microsoft.com/office/drawing/2014/main" id="{8C6405E1-0E3B-475B-9AE6-3990D0C72899}"/>
               </a:ext>
             </a:extLst>
           </p:cNvPr>
@@ -12581,7 +12593,7 @@
           <p:cNvPr id="38" name="Text 36">
             <a:extLst xmlns:a="http://schemas.openxmlformats.org/drawingml/2006/main">
               <a:ext uri="{FF2B5EF4-FFF2-40B4-BE49-F238E27FC236}">
-                <a16:creationId xmlns:a16="http://schemas.microsoft.com/office/drawing/2014/main" id="{408565A7-73D7-4A9F-A08A-D39DCA7DDA6B}"/>
+                <a16:creationId xmlns:a16="http://schemas.microsoft.com/office/drawing/2014/main" id="{D82131E4-91EB-49C7-8689-89CF303D7EFB}"/>
               </a:ext>
             </a:extLst>
           </p:cNvPr>
@@ -12627,7 +12639,7 @@
     </p:spTree>
     <p:extLst>
       <p:ext uri="{BB962C8B-B14F-4D97-AF65-F5344CB8AC3E}">
-        <p14:creationId xmlns:p14="http://schemas.microsoft.com/office/powerpoint/2010/main" val="941904566"/>
+        <p14:creationId xmlns:p14="http://schemas.microsoft.com/office/powerpoint/2010/main" val="430555586"/>
       </p:ext>
     </p:extLst>
   </p:cSld>
@@ -12658,7 +12670,7 @@
           <p:cNvPr id="2" name="Text 0">
             <a:extLst xmlns:a="http://schemas.openxmlformats.org/drawingml/2006/main">
               <a:ext uri="{FF2B5EF4-FFF2-40B4-BE49-F238E27FC236}">
-                <a16:creationId xmlns:a16="http://schemas.microsoft.com/office/drawing/2014/main" id="{AF99B0D3-66B7-4D6F-A77E-2423D11F8469}"/>
+                <a16:creationId xmlns:a16="http://schemas.microsoft.com/office/drawing/2014/main" id="{DCE9050C-5C47-4CCF-AA23-36213958A4BB}"/>
               </a:ext>
             </a:extLst>
           </p:cNvPr>
@@ -12703,7 +12715,7 @@
           <p:cNvPr id="3" name="Text 1">
             <a:extLst xmlns:a="http://schemas.openxmlformats.org/drawingml/2006/main">
               <a:ext uri="{FF2B5EF4-FFF2-40B4-BE49-F238E27FC236}">
-                <a16:creationId xmlns:a16="http://schemas.microsoft.com/office/drawing/2014/main" id="{371BF02F-20AE-4A03-9E6D-25F360DC80B6}"/>
+                <a16:creationId xmlns:a16="http://schemas.microsoft.com/office/drawing/2014/main" id="{DBB7ED47-C961-4003-8893-A15A642CF8FA}"/>
               </a:ext>
             </a:extLst>
           </p:cNvPr>
@@ -12748,7 +12760,7 @@
           <p:cNvPr id="4" name="Shape 2">
             <a:extLst xmlns:a="http://schemas.openxmlformats.org/drawingml/2006/main">
               <a:ext uri="{FF2B5EF4-FFF2-40B4-BE49-F238E27FC236}">
-                <a16:creationId xmlns:a16="http://schemas.microsoft.com/office/drawing/2014/main" id="{AA0869D0-29E9-4ABA-ABD2-F46EC699AA2D}"/>
+                <a16:creationId xmlns:a16="http://schemas.microsoft.com/office/drawing/2014/main" id="{0810DBF9-703E-4D5D-8FC2-023FC94F9C36}"/>
               </a:ext>
             </a:extLst>
           </p:cNvPr>
@@ -12788,7 +12800,7 @@
           <p:cNvPr id="5" name="Shape 3">
             <a:extLst xmlns:a="http://schemas.openxmlformats.org/drawingml/2006/main">
               <a:ext uri="{FF2B5EF4-FFF2-40B4-BE49-F238E27FC236}">
-                <a16:creationId xmlns:a16="http://schemas.microsoft.com/office/drawing/2014/main" id="{A68E73C2-B4A8-4733-A38B-C634E7BCEAC3}"/>
+                <a16:creationId xmlns:a16="http://schemas.microsoft.com/office/drawing/2014/main" id="{FB75E91C-045B-492C-BB57-90C2AB9992D5}"/>
               </a:ext>
             </a:extLst>
           </p:cNvPr>
@@ -12828,7 +12840,7 @@
           <p:cNvPr id="6" name="Text 4">
             <a:extLst xmlns:a="http://schemas.openxmlformats.org/drawingml/2006/main">
               <a:ext uri="{FF2B5EF4-FFF2-40B4-BE49-F238E27FC236}">
-                <a16:creationId xmlns:a16="http://schemas.microsoft.com/office/drawing/2014/main" id="{7FB2353A-E354-4780-8F3B-F99F5A52DDAC}"/>
+                <a16:creationId xmlns:a16="http://schemas.microsoft.com/office/drawing/2014/main" id="{8521004D-D4E5-4675-8405-F5A4A4A60BE5}"/>
               </a:ext>
             </a:extLst>
           </p:cNvPr>
@@ -12873,7 +12885,7 @@
           <p:cNvPr id="7" name="Text 5">
             <a:extLst xmlns:a="http://schemas.openxmlformats.org/drawingml/2006/main">
               <a:ext uri="{FF2B5EF4-FFF2-40B4-BE49-F238E27FC236}">
-                <a16:creationId xmlns:a16="http://schemas.microsoft.com/office/drawing/2014/main" id="{DF22D1CF-F235-447E-957F-C592A8926572}"/>
+                <a16:creationId xmlns:a16="http://schemas.microsoft.com/office/drawing/2014/main" id="{14387C86-3C3C-4EF0-B9BE-FA5D23EF0C6F}"/>
               </a:ext>
             </a:extLst>
           </p:cNvPr>
@@ -12918,7 +12930,7 @@
           <p:cNvPr id="8" name="Text 6">
             <a:extLst xmlns:a="http://schemas.openxmlformats.org/drawingml/2006/main">
               <a:ext uri="{FF2B5EF4-FFF2-40B4-BE49-F238E27FC236}">
-                <a16:creationId xmlns:a16="http://schemas.microsoft.com/office/drawing/2014/main" id="{1FC70F4E-B95D-43BB-9A21-5ACF44538BF1}"/>
+                <a16:creationId xmlns:a16="http://schemas.microsoft.com/office/drawing/2014/main" id="{A0E66700-01F8-4FC9-A650-5205CD1F05BE}"/>
               </a:ext>
             </a:extLst>
           </p:cNvPr>
@@ -12964,7 +12976,7 @@
     </p:spTree>
     <p:extLst>
       <p:ext uri="{BB962C8B-B14F-4D97-AF65-F5344CB8AC3E}">
-        <p14:creationId xmlns:p14="http://schemas.microsoft.com/office/powerpoint/2010/main" val="1744922644"/>
+        <p14:creationId xmlns:p14="http://schemas.microsoft.com/office/powerpoint/2010/main" val="1036716278"/>
       </p:ext>
     </p:extLst>
   </p:cSld>
@@ -12995,7 +13007,7 @@
           <p:cNvPr id="2" name="Text 0">
             <a:extLst xmlns:a="http://schemas.openxmlformats.org/drawingml/2006/main">
               <a:ext uri="{FF2B5EF4-FFF2-40B4-BE49-F238E27FC236}">
-                <a16:creationId xmlns:a16="http://schemas.microsoft.com/office/drawing/2014/main" id="{E3526D16-837D-440C-AC9F-47D8946A9C98}"/>
+                <a16:creationId xmlns:a16="http://schemas.microsoft.com/office/drawing/2014/main" id="{A08F987B-AD7F-47EB-9882-AAF15DED3F59}"/>
               </a:ext>
             </a:extLst>
           </p:cNvPr>
@@ -13040,7 +13052,7 @@
           <p:cNvPr id="3" name="Text 1">
             <a:extLst xmlns:a="http://schemas.openxmlformats.org/drawingml/2006/main">
               <a:ext uri="{FF2B5EF4-FFF2-40B4-BE49-F238E27FC236}">
-                <a16:creationId xmlns:a16="http://schemas.microsoft.com/office/drawing/2014/main" id="{772A1F48-3E73-436C-A5D0-9D51322AEFA2}"/>
+                <a16:creationId xmlns:a16="http://schemas.microsoft.com/office/drawing/2014/main" id="{06FEAB90-FFDD-4A32-9432-42E8CF977A99}"/>
               </a:ext>
             </a:extLst>
           </p:cNvPr>
@@ -13085,7 +13097,7 @@
           <p:cNvPr id="4" name="Text 2">
             <a:extLst xmlns:a="http://schemas.openxmlformats.org/drawingml/2006/main">
               <a:ext uri="{FF2B5EF4-FFF2-40B4-BE49-F238E27FC236}">
-                <a16:creationId xmlns:a16="http://schemas.microsoft.com/office/drawing/2014/main" id="{F48AEC0B-67C6-4089-A19A-840A2FD40240}"/>
+                <a16:creationId xmlns:a16="http://schemas.microsoft.com/office/drawing/2014/main" id="{1F77A664-792C-4F02-A4BC-43A198584F99}"/>
               </a:ext>
             </a:extLst>
           </p:cNvPr>
@@ -13130,7 +13142,7 @@
           <p:cNvPr id="5" name="Text 3">
             <a:extLst xmlns:a="http://schemas.openxmlformats.org/drawingml/2006/main">
               <a:ext uri="{FF2B5EF4-FFF2-40B4-BE49-F238E27FC236}">
-                <a16:creationId xmlns:a16="http://schemas.microsoft.com/office/drawing/2014/main" id="{E67EAE6F-B79C-41B0-8B0A-007E3743C6FB}"/>
+                <a16:creationId xmlns:a16="http://schemas.microsoft.com/office/drawing/2014/main" id="{4EF569E1-CC1D-40FE-8B1A-22874A4586D8}"/>
               </a:ext>
             </a:extLst>
           </p:cNvPr>
@@ -13175,7 +13187,7 @@
           <p:cNvPr id="6" name="Shape 4">
             <a:extLst xmlns:a="http://schemas.openxmlformats.org/drawingml/2006/main">
               <a:ext uri="{FF2B5EF4-FFF2-40B4-BE49-F238E27FC236}">
-                <a16:creationId xmlns:a16="http://schemas.microsoft.com/office/drawing/2014/main" id="{C9F40E5A-5347-476E-83ED-FA49E2D2510F}"/>
+                <a16:creationId xmlns:a16="http://schemas.microsoft.com/office/drawing/2014/main" id="{3EC4D47D-6168-4B5A-9028-32A8A4954844}"/>
               </a:ext>
             </a:extLst>
           </p:cNvPr>
@@ -13222,7 +13234,7 @@
           <p:cNvPr id="7" name="Shape 5">
             <a:extLst xmlns:a="http://schemas.openxmlformats.org/drawingml/2006/main">
               <a:ext uri="{FF2B5EF4-FFF2-40B4-BE49-F238E27FC236}">
-                <a16:creationId xmlns:a16="http://schemas.microsoft.com/office/drawing/2014/main" id="{9844CC02-8C4C-4BD4-9081-EA0E9B732492}"/>
+                <a16:creationId xmlns:a16="http://schemas.microsoft.com/office/drawing/2014/main" id="{0B86A913-A4D3-465E-AED1-2DAC003A160E}"/>
               </a:ext>
             </a:extLst>
           </p:cNvPr>
@@ -13260,7 +13272,7 @@
           <p:cNvPr id="8" name="Text 6">
             <a:extLst xmlns:a="http://schemas.openxmlformats.org/drawingml/2006/main">
               <a:ext uri="{FF2B5EF4-FFF2-40B4-BE49-F238E27FC236}">
-                <a16:creationId xmlns:a16="http://schemas.microsoft.com/office/drawing/2014/main" id="{B41EEF7F-AA20-4FB2-8B02-6F11825E887B}"/>
+                <a16:creationId xmlns:a16="http://schemas.microsoft.com/office/drawing/2014/main" id="{E8A17156-446E-48BE-98B3-E925A9FCC526}"/>
               </a:ext>
             </a:extLst>
           </p:cNvPr>
@@ -13305,7 +13317,7 @@
           <p:cNvPr id="9" name="Text 7">
             <a:extLst xmlns:a="http://schemas.openxmlformats.org/drawingml/2006/main">
               <a:ext uri="{FF2B5EF4-FFF2-40B4-BE49-F238E27FC236}">
-                <a16:creationId xmlns:a16="http://schemas.microsoft.com/office/drawing/2014/main" id="{88C16D0C-CA21-42B7-AE06-EDC11ED4517B}"/>
+                <a16:creationId xmlns:a16="http://schemas.microsoft.com/office/drawing/2014/main" id="{EA42C537-9C61-499C-AB98-453FBCB1003B}"/>
               </a:ext>
             </a:extLst>
           </p:cNvPr>
@@ -13353,7 +13365,7 @@
           <p:cNvPr id="10" name="Text 8">
             <a:extLst xmlns:a="http://schemas.openxmlformats.org/drawingml/2006/main">
               <a:ext uri="{FF2B5EF4-FFF2-40B4-BE49-F238E27FC236}">
-                <a16:creationId xmlns:a16="http://schemas.microsoft.com/office/drawing/2014/main" id="{D3FCAB86-98FB-41D5-8420-261C39FD176B}"/>
+                <a16:creationId xmlns:a16="http://schemas.microsoft.com/office/drawing/2014/main" id="{8E93980E-47E6-4B4F-A55C-CCF3711367E1}"/>
               </a:ext>
             </a:extLst>
           </p:cNvPr>
@@ -13401,7 +13413,7 @@
           <p:cNvPr id="11" name="Text 9">
             <a:extLst xmlns:a="http://schemas.openxmlformats.org/drawingml/2006/main">
               <a:ext uri="{FF2B5EF4-FFF2-40B4-BE49-F238E27FC236}">
-                <a16:creationId xmlns:a16="http://schemas.microsoft.com/office/drawing/2014/main" id="{CD2C6030-F938-4183-B6D7-EF37D752CAB6}"/>
+                <a16:creationId xmlns:a16="http://schemas.microsoft.com/office/drawing/2014/main" id="{F8F8B8B0-02A7-4B44-A38B-FB1B4DFADF2F}"/>
               </a:ext>
             </a:extLst>
           </p:cNvPr>
@@ -13496,7 +13508,7 @@
           <p:cNvPr id="12" name="Shape 10">
             <a:extLst xmlns:a="http://schemas.openxmlformats.org/drawingml/2006/main">
               <a:ext uri="{FF2B5EF4-FFF2-40B4-BE49-F238E27FC236}">
-                <a16:creationId xmlns:a16="http://schemas.microsoft.com/office/drawing/2014/main" id="{4817675D-6B45-46B5-B807-248379399F6F}"/>
+                <a16:creationId xmlns:a16="http://schemas.microsoft.com/office/drawing/2014/main" id="{576196EF-C8A5-4677-8AF0-D43C01CFEFE1}"/>
               </a:ext>
             </a:extLst>
           </p:cNvPr>
@@ -13543,7 +13555,7 @@
           <p:cNvPr id="13" name="Shape 11">
             <a:extLst xmlns:a="http://schemas.openxmlformats.org/drawingml/2006/main">
               <a:ext uri="{FF2B5EF4-FFF2-40B4-BE49-F238E27FC236}">
-                <a16:creationId xmlns:a16="http://schemas.microsoft.com/office/drawing/2014/main" id="{68C18152-D27C-4D59-BFBC-DD1AAADF8FBC}"/>
+                <a16:creationId xmlns:a16="http://schemas.microsoft.com/office/drawing/2014/main" id="{5E7210F2-A2A9-4ADD-B3A9-586BC614C5A7}"/>
               </a:ext>
             </a:extLst>
           </p:cNvPr>
@@ -13581,7 +13593,7 @@
           <p:cNvPr id="14" name="Text 12">
             <a:extLst xmlns:a="http://schemas.openxmlformats.org/drawingml/2006/main">
               <a:ext uri="{FF2B5EF4-FFF2-40B4-BE49-F238E27FC236}">
-                <a16:creationId xmlns:a16="http://schemas.microsoft.com/office/drawing/2014/main" id="{76919F47-1BD4-456E-ABE9-C3A25413F2C9}"/>
+                <a16:creationId xmlns:a16="http://schemas.microsoft.com/office/drawing/2014/main" id="{07E79065-F923-4F5B-9873-CC552BF4F2E4}"/>
               </a:ext>
             </a:extLst>
           </p:cNvPr>
@@ -13626,7 +13638,7 @@
           <p:cNvPr id="15" name="Text 13">
             <a:extLst xmlns:a="http://schemas.openxmlformats.org/drawingml/2006/main">
               <a:ext uri="{FF2B5EF4-FFF2-40B4-BE49-F238E27FC236}">
-                <a16:creationId xmlns:a16="http://schemas.microsoft.com/office/drawing/2014/main" id="{45F51040-A4D3-4FE0-8CDC-35EEF28BC94A}"/>
+                <a16:creationId xmlns:a16="http://schemas.microsoft.com/office/drawing/2014/main" id="{D68CEE04-6536-4793-8D5F-C8D83999E20E}"/>
               </a:ext>
             </a:extLst>
           </p:cNvPr>
@@ -13674,7 +13686,7 @@
           <p:cNvPr id="16" name="Text 14">
             <a:extLst xmlns:a="http://schemas.openxmlformats.org/drawingml/2006/main">
               <a:ext uri="{FF2B5EF4-FFF2-40B4-BE49-F238E27FC236}">
-                <a16:creationId xmlns:a16="http://schemas.microsoft.com/office/drawing/2014/main" id="{FFFA693E-5224-49E2-B440-C63231EE244A}"/>
+                <a16:creationId xmlns:a16="http://schemas.microsoft.com/office/drawing/2014/main" id="{D02B9856-0263-4C4A-8D43-B8A5B45C748D}"/>
               </a:ext>
             </a:extLst>
           </p:cNvPr>
@@ -13712,7 +13724,7 @@
                 <a:ea typeface="Calibri"/>
                 <a:cs typeface="Calibri"/>
               </a:rPr>
-              <a:t>Six GitHub protocols on a pinned snapshot, including fair manual placement and bounded GEPA</a:t>
+              <a:t>Three primary GitHub workflow families plus scoped ablations on a pinned snapshot</a:t>
             </a:r>
           </a:p>
         </p:txBody>
@@ -13722,7 +13734,7 @@
           <p:cNvPr id="17" name="Text 15">
             <a:extLst xmlns:a="http://schemas.openxmlformats.org/drawingml/2006/main">
               <a:ext uri="{FF2B5EF4-FFF2-40B4-BE49-F238E27FC236}">
-                <a16:creationId xmlns:a16="http://schemas.microsoft.com/office/drawing/2014/main" id="{0F21C64C-F5F9-4E1F-B502-E22298114002}"/>
+                <a16:creationId xmlns:a16="http://schemas.microsoft.com/office/drawing/2014/main" id="{11A4EE48-ADDA-4332-AF0F-A8170F4A1F0F}"/>
               </a:ext>
             </a:extLst>
           </p:cNvPr>
@@ -13817,7 +13829,7 @@
           <p:cNvPr id="18" name="Shape 16">
             <a:extLst xmlns:a="http://schemas.openxmlformats.org/drawingml/2006/main">
               <a:ext uri="{FF2B5EF4-FFF2-40B4-BE49-F238E27FC236}">
-                <a16:creationId xmlns:a16="http://schemas.microsoft.com/office/drawing/2014/main" id="{21DC02E9-517F-4987-96D3-1306A8E2FF25}"/>
+                <a16:creationId xmlns:a16="http://schemas.microsoft.com/office/drawing/2014/main" id="{C1BDA678-6B42-4A01-B707-7DE51DDD998D}"/>
               </a:ext>
             </a:extLst>
           </p:cNvPr>
@@ -13864,7 +13876,7 @@
           <p:cNvPr id="19" name="Shape 17">
             <a:extLst xmlns:a="http://schemas.openxmlformats.org/drawingml/2006/main">
               <a:ext uri="{FF2B5EF4-FFF2-40B4-BE49-F238E27FC236}">
-                <a16:creationId xmlns:a16="http://schemas.microsoft.com/office/drawing/2014/main" id="{BFF63813-30F0-4AAF-8E6D-17D197A33841}"/>
+                <a16:creationId xmlns:a16="http://schemas.microsoft.com/office/drawing/2014/main" id="{6C3739E3-EB41-41B1-9885-12C586F34C34}"/>
               </a:ext>
             </a:extLst>
           </p:cNvPr>
@@ -13902,7 +13914,7 @@
           <p:cNvPr id="20" name="Text 18">
             <a:extLst xmlns:a="http://schemas.openxmlformats.org/drawingml/2006/main">
               <a:ext uri="{FF2B5EF4-FFF2-40B4-BE49-F238E27FC236}">
-                <a16:creationId xmlns:a16="http://schemas.microsoft.com/office/drawing/2014/main" id="{53A3989F-BEC7-4639-ADA5-A142B92A5A15}"/>
+                <a16:creationId xmlns:a16="http://schemas.microsoft.com/office/drawing/2014/main" id="{1926C4CA-C84D-47D7-8EDB-1F24C0B7E840}"/>
               </a:ext>
             </a:extLst>
           </p:cNvPr>
@@ -13947,7 +13959,7 @@
           <p:cNvPr id="21" name="Text 19">
             <a:extLst xmlns:a="http://schemas.openxmlformats.org/drawingml/2006/main">
               <a:ext uri="{FF2B5EF4-FFF2-40B4-BE49-F238E27FC236}">
-                <a16:creationId xmlns:a16="http://schemas.microsoft.com/office/drawing/2014/main" id="{AA4F9B84-3854-46A7-8525-B484242710DF}"/>
+                <a16:creationId xmlns:a16="http://schemas.microsoft.com/office/drawing/2014/main" id="{2673F193-2B8C-4C45-B750-2C17CCD0A66F}"/>
               </a:ext>
             </a:extLst>
           </p:cNvPr>
@@ -13995,7 +14007,7 @@
           <p:cNvPr id="22" name="Text 20">
             <a:extLst xmlns:a="http://schemas.openxmlformats.org/drawingml/2006/main">
               <a:ext uri="{FF2B5EF4-FFF2-40B4-BE49-F238E27FC236}">
-                <a16:creationId xmlns:a16="http://schemas.microsoft.com/office/drawing/2014/main" id="{3D30F4F6-CCF3-440F-AC44-B9761F460CCA}"/>
+                <a16:creationId xmlns:a16="http://schemas.microsoft.com/office/drawing/2014/main" id="{C6F62315-A986-43DE-AB99-75D6F3764CEB}"/>
               </a:ext>
             </a:extLst>
           </p:cNvPr>
@@ -14043,7 +14055,7 @@
           <p:cNvPr id="23" name="Text 21">
             <a:extLst xmlns:a="http://schemas.openxmlformats.org/drawingml/2006/main">
               <a:ext uri="{FF2B5EF4-FFF2-40B4-BE49-F238E27FC236}">
-                <a16:creationId xmlns:a16="http://schemas.microsoft.com/office/drawing/2014/main" id="{64F9BC3C-37DC-41A5-AF57-65330E3351D2}"/>
+                <a16:creationId xmlns:a16="http://schemas.microsoft.com/office/drawing/2014/main" id="{5B011794-F6EB-4137-BE39-A892582D125B}"/>
               </a:ext>
             </a:extLst>
           </p:cNvPr>
@@ -14138,7 +14150,7 @@
           <p:cNvPr id="24" name="Text 22">
             <a:extLst xmlns:a="http://schemas.openxmlformats.org/drawingml/2006/main">
               <a:ext uri="{FF2B5EF4-FFF2-40B4-BE49-F238E27FC236}">
-                <a16:creationId xmlns:a16="http://schemas.microsoft.com/office/drawing/2014/main" id="{703CB053-EE7E-4387-82F2-1D7924609298}"/>
+                <a16:creationId xmlns:a16="http://schemas.microsoft.com/office/drawing/2014/main" id="{173CE47A-140E-4019-BCA0-7F421C595347}"/>
               </a:ext>
             </a:extLst>
           </p:cNvPr>
@@ -14183,7 +14195,7 @@
           <p:cNvPr id="25" name="Shape 23">
             <a:extLst xmlns:a="http://schemas.openxmlformats.org/drawingml/2006/main">
               <a:ext uri="{FF2B5EF4-FFF2-40B4-BE49-F238E27FC236}">
-                <a16:creationId xmlns:a16="http://schemas.microsoft.com/office/drawing/2014/main" id="{8F0046E4-F91A-4FE1-9930-EB7102A9B9A1}"/>
+                <a16:creationId xmlns:a16="http://schemas.microsoft.com/office/drawing/2014/main" id="{C7CCAA43-84D6-4056-BCB6-AE86E3DEA06A}"/>
               </a:ext>
             </a:extLst>
           </p:cNvPr>
@@ -14221,7 +14233,7 @@
           <p:cNvPr id="26" name="Text 24">
             <a:extLst xmlns:a="http://schemas.openxmlformats.org/drawingml/2006/main">
               <a:ext uri="{FF2B5EF4-FFF2-40B4-BE49-F238E27FC236}">
-                <a16:creationId xmlns:a16="http://schemas.microsoft.com/office/drawing/2014/main" id="{07BF8FA8-4E33-408C-B2DE-8BED01B14E4D}"/>
+                <a16:creationId xmlns:a16="http://schemas.microsoft.com/office/drawing/2014/main" id="{C6F9E31A-FD93-45F0-BDE7-E41D886B4D33}"/>
               </a:ext>
             </a:extLst>
           </p:cNvPr>
@@ -14266,7 +14278,7 @@
           <p:cNvPr id="27" name="Text 25">
             <a:extLst xmlns:a="http://schemas.openxmlformats.org/drawingml/2006/main">
               <a:ext uri="{FF2B5EF4-FFF2-40B4-BE49-F238E27FC236}">
-                <a16:creationId xmlns:a16="http://schemas.microsoft.com/office/drawing/2014/main" id="{14A85EF5-A035-490B-B719-C36F4560E651}"/>
+                <a16:creationId xmlns:a16="http://schemas.microsoft.com/office/drawing/2014/main" id="{5766204A-112B-4FC6-A2BD-47A2798DC5B0}"/>
               </a:ext>
             </a:extLst>
           </p:cNvPr>
@@ -14314,7 +14326,7 @@
           <p:cNvPr id="28" name="Shape 26">
             <a:extLst xmlns:a="http://schemas.openxmlformats.org/drawingml/2006/main">
               <a:ext uri="{FF2B5EF4-FFF2-40B4-BE49-F238E27FC236}">
-                <a16:creationId xmlns:a16="http://schemas.microsoft.com/office/drawing/2014/main" id="{04AC8A77-4A2F-49E8-845F-6FDF077FE309}"/>
+                <a16:creationId xmlns:a16="http://schemas.microsoft.com/office/drawing/2014/main" id="{C1FF0893-374D-4FC3-B0A4-BDC1676763F3}"/>
               </a:ext>
             </a:extLst>
           </p:cNvPr>
@@ -14352,7 +14364,7 @@
           <p:cNvPr id="29" name="Text 27">
             <a:extLst xmlns:a="http://schemas.openxmlformats.org/drawingml/2006/main">
               <a:ext uri="{FF2B5EF4-FFF2-40B4-BE49-F238E27FC236}">
-                <a16:creationId xmlns:a16="http://schemas.microsoft.com/office/drawing/2014/main" id="{C357B77B-2827-4C05-BCB1-78AC35D8C1A3}"/>
+                <a16:creationId xmlns:a16="http://schemas.microsoft.com/office/drawing/2014/main" id="{4D33D5BA-BDD9-438A-91CE-20CADFB31D26}"/>
               </a:ext>
             </a:extLst>
           </p:cNvPr>
@@ -14397,7 +14409,7 @@
           <p:cNvPr id="30" name="Text 28">
             <a:extLst xmlns:a="http://schemas.openxmlformats.org/drawingml/2006/main">
               <a:ext uri="{FF2B5EF4-FFF2-40B4-BE49-F238E27FC236}">
-                <a16:creationId xmlns:a16="http://schemas.microsoft.com/office/drawing/2014/main" id="{9347339D-B36A-46C4-9A08-9C2D9E8B074E}"/>
+                <a16:creationId xmlns:a16="http://schemas.microsoft.com/office/drawing/2014/main" id="{E85AFBB4-7E34-4F85-8A12-B9624A5CDAA2}"/>
               </a:ext>
             </a:extLst>
           </p:cNvPr>
@@ -14445,7 +14457,7 @@
           <p:cNvPr id="31" name="Shape 29">
             <a:extLst xmlns:a="http://schemas.openxmlformats.org/drawingml/2006/main">
               <a:ext uri="{FF2B5EF4-FFF2-40B4-BE49-F238E27FC236}">
-                <a16:creationId xmlns:a16="http://schemas.microsoft.com/office/drawing/2014/main" id="{C0E31E68-74B0-4B45-B0B4-F375D07DFBAE}"/>
+                <a16:creationId xmlns:a16="http://schemas.microsoft.com/office/drawing/2014/main" id="{9EA52254-22B6-401D-9E92-DC7A238F3532}"/>
               </a:ext>
             </a:extLst>
           </p:cNvPr>
@@ -14483,7 +14495,7 @@
           <p:cNvPr id="32" name="Text 30">
             <a:extLst xmlns:a="http://schemas.openxmlformats.org/drawingml/2006/main">
               <a:ext uri="{FF2B5EF4-FFF2-40B4-BE49-F238E27FC236}">
-                <a16:creationId xmlns:a16="http://schemas.microsoft.com/office/drawing/2014/main" id="{332A480F-CB03-454F-8E7E-02BF87E569B8}"/>
+                <a16:creationId xmlns:a16="http://schemas.microsoft.com/office/drawing/2014/main" id="{D781DBC1-E386-4324-820B-30B3577A2354}"/>
               </a:ext>
             </a:extLst>
           </p:cNvPr>
@@ -14528,7 +14540,7 @@
           <p:cNvPr id="33" name="Text 31">
             <a:extLst xmlns:a="http://schemas.openxmlformats.org/drawingml/2006/main">
               <a:ext uri="{FF2B5EF4-FFF2-40B4-BE49-F238E27FC236}">
-                <a16:creationId xmlns:a16="http://schemas.microsoft.com/office/drawing/2014/main" id="{B3911AD8-55D3-4B03-BFBF-586EC5E0419E}"/>
+                <a16:creationId xmlns:a16="http://schemas.microsoft.com/office/drawing/2014/main" id="{08F89D42-29AA-4EB3-9AF3-9DAA9E8D1336}"/>
               </a:ext>
             </a:extLst>
           </p:cNvPr>
@@ -14576,7 +14588,7 @@
           <p:cNvPr id="34" name="Shape 32">
             <a:extLst xmlns:a="http://schemas.openxmlformats.org/drawingml/2006/main">
               <a:ext uri="{FF2B5EF4-FFF2-40B4-BE49-F238E27FC236}">
-                <a16:creationId xmlns:a16="http://schemas.microsoft.com/office/drawing/2014/main" id="{A84C8A9A-0671-44E5-B2D9-16312A970E85}"/>
+                <a16:creationId xmlns:a16="http://schemas.microsoft.com/office/drawing/2014/main" id="{C8061E82-D8DC-4D7C-A13C-E39828FE3CA1}"/>
               </a:ext>
             </a:extLst>
           </p:cNvPr>
@@ -14614,7 +14626,7 @@
           <p:cNvPr id="35" name="Text 33">
             <a:extLst xmlns:a="http://schemas.openxmlformats.org/drawingml/2006/main">
               <a:ext uri="{FF2B5EF4-FFF2-40B4-BE49-F238E27FC236}">
-                <a16:creationId xmlns:a16="http://schemas.microsoft.com/office/drawing/2014/main" id="{35441675-6EE7-49CD-BD9B-D94483424C00}"/>
+                <a16:creationId xmlns:a16="http://schemas.microsoft.com/office/drawing/2014/main" id="{15FF7C75-F32B-4AF3-BDEF-197436A25653}"/>
               </a:ext>
             </a:extLst>
           </p:cNvPr>
@@ -14659,7 +14671,7 @@
           <p:cNvPr id="36" name="Text 34">
             <a:extLst xmlns:a="http://schemas.openxmlformats.org/drawingml/2006/main">
               <a:ext uri="{FF2B5EF4-FFF2-40B4-BE49-F238E27FC236}">
-                <a16:creationId xmlns:a16="http://schemas.microsoft.com/office/drawing/2014/main" id="{9E860C70-0757-45D5-9688-087CBC9DE7ED}"/>
+                <a16:creationId xmlns:a16="http://schemas.microsoft.com/office/drawing/2014/main" id="{DE044474-82CA-4DB8-93A0-0611DF078CF9}"/>
               </a:ext>
             </a:extLst>
           </p:cNvPr>
@@ -14707,7 +14719,7 @@
           <p:cNvPr id="37" name="Shape 35">
             <a:extLst xmlns:a="http://schemas.openxmlformats.org/drawingml/2006/main">
               <a:ext uri="{FF2B5EF4-FFF2-40B4-BE49-F238E27FC236}">
-                <a16:creationId xmlns:a16="http://schemas.microsoft.com/office/drawing/2014/main" id="{0EF97978-A817-48DE-842D-7982DF8F5F83}"/>
+                <a16:creationId xmlns:a16="http://schemas.microsoft.com/office/drawing/2014/main" id="{2712DF72-D64F-4686-82F3-0E01BC310BD1}"/>
               </a:ext>
             </a:extLst>
           </p:cNvPr>
@@ -14745,7 +14757,7 @@
           <p:cNvPr id="38" name="Text 36">
             <a:extLst xmlns:a="http://schemas.openxmlformats.org/drawingml/2006/main">
               <a:ext uri="{FF2B5EF4-FFF2-40B4-BE49-F238E27FC236}">
-                <a16:creationId xmlns:a16="http://schemas.microsoft.com/office/drawing/2014/main" id="{A0391440-5D90-48FB-A3CA-9B32B8084400}"/>
+                <a16:creationId xmlns:a16="http://schemas.microsoft.com/office/drawing/2014/main" id="{909D4D59-1673-497E-9C0C-4303C6809310}"/>
               </a:ext>
             </a:extLst>
           </p:cNvPr>
@@ -14790,7 +14802,7 @@
           <p:cNvPr id="39" name="Text 37">
             <a:extLst xmlns:a="http://schemas.openxmlformats.org/drawingml/2006/main">
               <a:ext uri="{FF2B5EF4-FFF2-40B4-BE49-F238E27FC236}">
-                <a16:creationId xmlns:a16="http://schemas.microsoft.com/office/drawing/2014/main" id="{857DBFFA-8701-4DAA-B83C-EB65F7CF2E54}"/>
+                <a16:creationId xmlns:a16="http://schemas.microsoft.com/office/drawing/2014/main" id="{A707BA86-E1C8-4DF8-A04D-4456F1D8508F}"/>
               </a:ext>
             </a:extLst>
           </p:cNvPr>
@@ -14838,7 +14850,7 @@
           <p:cNvPr id="40" name="Shape 38">
             <a:extLst xmlns:a="http://schemas.openxmlformats.org/drawingml/2006/main">
               <a:ext uri="{FF2B5EF4-FFF2-40B4-BE49-F238E27FC236}">
-                <a16:creationId xmlns:a16="http://schemas.microsoft.com/office/drawing/2014/main" id="{BA7D6D53-08CB-4C56-8BEB-34872F2FA22F}"/>
+                <a16:creationId xmlns:a16="http://schemas.microsoft.com/office/drawing/2014/main" id="{728C682B-7A6A-4E6A-85AD-0D4A6CF73ACA}"/>
               </a:ext>
             </a:extLst>
           </p:cNvPr>
@@ -14876,7 +14888,7 @@
           <p:cNvPr id="41" name="Text 39">
             <a:extLst xmlns:a="http://schemas.openxmlformats.org/drawingml/2006/main">
               <a:ext uri="{FF2B5EF4-FFF2-40B4-BE49-F238E27FC236}">
-                <a16:creationId xmlns:a16="http://schemas.microsoft.com/office/drawing/2014/main" id="{6B9942A4-7E55-4B89-8208-CEE25562D9C9}"/>
+                <a16:creationId xmlns:a16="http://schemas.microsoft.com/office/drawing/2014/main" id="{CFE9D110-3542-45DE-9700-94FABBC87602}"/>
               </a:ext>
             </a:extLst>
           </p:cNvPr>
@@ -14921,7 +14933,7 @@
           <p:cNvPr id="42" name="Text 40">
             <a:extLst xmlns:a="http://schemas.openxmlformats.org/drawingml/2006/main">
               <a:ext uri="{FF2B5EF4-FFF2-40B4-BE49-F238E27FC236}">
-                <a16:creationId xmlns:a16="http://schemas.microsoft.com/office/drawing/2014/main" id="{6025DD05-2AA3-411A-8A15-F35F3C4231C6}"/>
+                <a16:creationId xmlns:a16="http://schemas.microsoft.com/office/drawing/2014/main" id="{847CC2ED-8644-4A15-8270-FCD895C343AB}"/>
               </a:ext>
             </a:extLst>
           </p:cNvPr>
@@ -14969,7 +14981,7 @@
           <p:cNvPr id="43" name="Text 41">
             <a:extLst xmlns:a="http://schemas.openxmlformats.org/drawingml/2006/main">
               <a:ext uri="{FF2B5EF4-FFF2-40B4-BE49-F238E27FC236}">
-                <a16:creationId xmlns:a16="http://schemas.microsoft.com/office/drawing/2014/main" id="{75581E45-714E-4495-BB48-AB55ABE8F5B1}"/>
+                <a16:creationId xmlns:a16="http://schemas.microsoft.com/office/drawing/2014/main" id="{FBBCC908-3153-43C6-833E-74801E084DCA}"/>
               </a:ext>
             </a:extLst>
           </p:cNvPr>
@@ -15012,7 +15024,7 @@
     </p:spTree>
     <p:extLst>
       <p:ext uri="{BB962C8B-B14F-4D97-AF65-F5344CB8AC3E}">
-        <p14:creationId xmlns:p14="http://schemas.microsoft.com/office/powerpoint/2010/main" val="1016592885"/>
+        <p14:creationId xmlns:p14="http://schemas.microsoft.com/office/powerpoint/2010/main" val="1710878554"/>
       </p:ext>
     </p:extLst>
   </p:cSld>
@@ -15043,7 +15055,7 @@
           <p:cNvPr id="2" name="Text 0">
             <a:extLst xmlns:a="http://schemas.openxmlformats.org/drawingml/2006/main">
               <a:ext uri="{FF2B5EF4-FFF2-40B4-BE49-F238E27FC236}">
-                <a16:creationId xmlns:a16="http://schemas.microsoft.com/office/drawing/2014/main" id="{64635647-1916-4CD3-8754-7C407046E9BF}"/>
+                <a16:creationId xmlns:a16="http://schemas.microsoft.com/office/drawing/2014/main" id="{47537E44-A4A7-4272-A7C5-B375E12F86C9}"/>
               </a:ext>
             </a:extLst>
           </p:cNvPr>
@@ -15088,7 +15100,7 @@
           <p:cNvPr id="3" name="Text 1">
             <a:extLst xmlns:a="http://schemas.openxmlformats.org/drawingml/2006/main">
               <a:ext uri="{FF2B5EF4-FFF2-40B4-BE49-F238E27FC236}">
-                <a16:creationId xmlns:a16="http://schemas.microsoft.com/office/drawing/2014/main" id="{139D2D66-3A79-413D-AF12-02681E3D8942}"/>
+                <a16:creationId xmlns:a16="http://schemas.microsoft.com/office/drawing/2014/main" id="{6A80AD53-3C3C-49A3-9172-6A94E7C9FBEC}"/>
               </a:ext>
             </a:extLst>
           </p:cNvPr>
@@ -15133,7 +15145,7 @@
           <p:cNvPr id="4" name="Text 2">
             <a:extLst xmlns:a="http://schemas.openxmlformats.org/drawingml/2006/main">
               <a:ext uri="{FF2B5EF4-FFF2-40B4-BE49-F238E27FC236}">
-                <a16:creationId xmlns:a16="http://schemas.microsoft.com/office/drawing/2014/main" id="{65C3040A-95CA-43AA-8B4C-AD9C519D9717}"/>
+                <a16:creationId xmlns:a16="http://schemas.microsoft.com/office/drawing/2014/main" id="{B31A8A42-EF37-472E-B8ED-67DCC92F51CC}"/>
               </a:ext>
             </a:extLst>
           </p:cNvPr>
@@ -15178,7 +15190,7 @@
           <p:cNvPr id="5" name="Text 3">
             <a:extLst xmlns:a="http://schemas.openxmlformats.org/drawingml/2006/main">
               <a:ext uri="{FF2B5EF4-FFF2-40B4-BE49-F238E27FC236}">
-                <a16:creationId xmlns:a16="http://schemas.microsoft.com/office/drawing/2014/main" id="{88B9AD50-158F-4FCA-BDAE-15DD30126A58}"/>
+                <a16:creationId xmlns:a16="http://schemas.microsoft.com/office/drawing/2014/main" id="{53C7FB97-8465-4540-9A88-5482265A302F}"/>
               </a:ext>
             </a:extLst>
           </p:cNvPr>
@@ -15223,7 +15235,7 @@
           <p:cNvPr id="6" name="Text 4">
             <a:extLst xmlns:a="http://schemas.openxmlformats.org/drawingml/2006/main">
               <a:ext uri="{FF2B5EF4-FFF2-40B4-BE49-F238E27FC236}">
-                <a16:creationId xmlns:a16="http://schemas.microsoft.com/office/drawing/2014/main" id="{2307B965-6466-4C8B-9A5C-B1FA22FDE238}"/>
+                <a16:creationId xmlns:a16="http://schemas.microsoft.com/office/drawing/2014/main" id="{C871D1D2-BCEA-4DD1-982D-0F7883CEB63B}"/>
               </a:ext>
             </a:extLst>
           </p:cNvPr>
@@ -15318,7 +15330,7 @@
           <p:cNvPr id="7" name="Shape 5">
             <a:extLst xmlns:a="http://schemas.openxmlformats.org/drawingml/2006/main">
               <a:ext uri="{FF2B5EF4-FFF2-40B4-BE49-F238E27FC236}">
-                <a16:creationId xmlns:a16="http://schemas.microsoft.com/office/drawing/2014/main" id="{3B491C2A-6AA6-4F91-8C49-5AACFAF94B66}"/>
+                <a16:creationId xmlns:a16="http://schemas.microsoft.com/office/drawing/2014/main" id="{1CAE864C-7F77-4950-86F2-8A68DF374833}"/>
               </a:ext>
             </a:extLst>
           </p:cNvPr>
@@ -15365,7 +15377,7 @@
           <p:cNvPr id="8" name="Text 6">
             <a:extLst xmlns:a="http://schemas.openxmlformats.org/drawingml/2006/main">
               <a:ext uri="{FF2B5EF4-FFF2-40B4-BE49-F238E27FC236}">
-                <a16:creationId xmlns:a16="http://schemas.microsoft.com/office/drawing/2014/main" id="{3817793A-737E-4BBC-8E7E-74BE3F394A5D}"/>
+                <a16:creationId xmlns:a16="http://schemas.microsoft.com/office/drawing/2014/main" id="{6F60C7D7-A7CC-4458-950E-BE5BE78ACB19}"/>
               </a:ext>
             </a:extLst>
           </p:cNvPr>
@@ -15431,7 +15443,7 @@
         </p:xfrm>
         <a:graphic xmlns:a="http://schemas.openxmlformats.org/drawingml/2006/main">
           <a:graphicData uri="http://schemas.openxmlformats.org/drawingml/2006/chart">
-            <c:chart xmlns:r="http://schemas.openxmlformats.org/officeDocument/2006/relationships" xmlns:c="http://schemas.openxmlformats.org/drawingml/2006/chart" r:id="Rc8b8038fa4d04c7b"/>
+            <c:chart xmlns:r="http://schemas.openxmlformats.org/officeDocument/2006/relationships" xmlns:c="http://schemas.openxmlformats.org/drawingml/2006/chart" r:id="R93b44f2577944592"/>
           </a:graphicData>
         </a:graphic>
       </p:graphicFrame>
@@ -15440,7 +15452,7 @@
           <p:cNvPr id="10" name="Text 7">
             <a:extLst xmlns:a="http://schemas.openxmlformats.org/drawingml/2006/main">
               <a:ext uri="{FF2B5EF4-FFF2-40B4-BE49-F238E27FC236}">
-                <a16:creationId xmlns:a16="http://schemas.microsoft.com/office/drawing/2014/main" id="{22AE4BC8-2645-481C-9F71-B47F501B0838}"/>
+                <a16:creationId xmlns:a16="http://schemas.microsoft.com/office/drawing/2014/main" id="{0B331E79-403C-4717-87B5-C776DCD7014B}"/>
               </a:ext>
             </a:extLst>
           </p:cNvPr>
@@ -15485,7 +15497,7 @@
           <p:cNvPr id="11" name="Shape 8">
             <a:extLst xmlns:a="http://schemas.openxmlformats.org/drawingml/2006/main">
               <a:ext uri="{FF2B5EF4-FFF2-40B4-BE49-F238E27FC236}">
-                <a16:creationId xmlns:a16="http://schemas.microsoft.com/office/drawing/2014/main" id="{EB36CBBE-68A4-4425-8837-1DE670B4F28C}"/>
+                <a16:creationId xmlns:a16="http://schemas.microsoft.com/office/drawing/2014/main" id="{504CA319-4503-4550-BED0-9646276253BA}"/>
               </a:ext>
             </a:extLst>
           </p:cNvPr>
@@ -15532,7 +15544,7 @@
           <p:cNvPr id="12" name="Text 9">
             <a:extLst xmlns:a="http://schemas.openxmlformats.org/drawingml/2006/main">
               <a:ext uri="{FF2B5EF4-FFF2-40B4-BE49-F238E27FC236}">
-                <a16:creationId xmlns:a16="http://schemas.microsoft.com/office/drawing/2014/main" id="{0F1EA3BC-0357-4369-BAE1-62E0856D2A05}"/>
+                <a16:creationId xmlns:a16="http://schemas.microsoft.com/office/drawing/2014/main" id="{B9DE1BD4-A71F-4F10-8273-119119BEB0FA}"/>
               </a:ext>
             </a:extLst>
           </p:cNvPr>
@@ -15577,7 +15589,7 @@
           <p:cNvPr id="13" name="Text 10">
             <a:extLst xmlns:a="http://schemas.openxmlformats.org/drawingml/2006/main">
               <a:ext uri="{FF2B5EF4-FFF2-40B4-BE49-F238E27FC236}">
-                <a16:creationId xmlns:a16="http://schemas.microsoft.com/office/drawing/2014/main" id="{5B5E6D13-CF36-408E-8731-0E1746769A58}"/>
+                <a16:creationId xmlns:a16="http://schemas.microsoft.com/office/drawing/2014/main" id="{1269F315-3838-4710-B568-BFB9F8E72BE4}"/>
               </a:ext>
             </a:extLst>
           </p:cNvPr>
@@ -15625,7 +15637,7 @@
           <p:cNvPr id="14" name="Shape 11">
             <a:extLst xmlns:a="http://schemas.openxmlformats.org/drawingml/2006/main">
               <a:ext uri="{FF2B5EF4-FFF2-40B4-BE49-F238E27FC236}">
-                <a16:creationId xmlns:a16="http://schemas.microsoft.com/office/drawing/2014/main" id="{18281481-2C5A-42BF-99A7-C3E0FD6BA482}"/>
+                <a16:creationId xmlns:a16="http://schemas.microsoft.com/office/drawing/2014/main" id="{F7A47A27-B0B6-4E8F-9186-88A38BD528FD}"/>
               </a:ext>
             </a:extLst>
           </p:cNvPr>
@@ -15672,7 +15684,7 @@
           <p:cNvPr id="15" name="Text 12">
             <a:extLst xmlns:a="http://schemas.openxmlformats.org/drawingml/2006/main">
               <a:ext uri="{FF2B5EF4-FFF2-40B4-BE49-F238E27FC236}">
-                <a16:creationId xmlns:a16="http://schemas.microsoft.com/office/drawing/2014/main" id="{5091AE71-CBE4-4F96-8953-8641EFB0E91B}"/>
+                <a16:creationId xmlns:a16="http://schemas.microsoft.com/office/drawing/2014/main" id="{B030B3D6-2053-4919-89BB-471DCF2C5693}"/>
               </a:ext>
             </a:extLst>
           </p:cNvPr>
@@ -15717,7 +15729,7 @@
           <p:cNvPr id="16" name="Text 13">
             <a:extLst xmlns:a="http://schemas.openxmlformats.org/drawingml/2006/main">
               <a:ext uri="{FF2B5EF4-FFF2-40B4-BE49-F238E27FC236}">
-                <a16:creationId xmlns:a16="http://schemas.microsoft.com/office/drawing/2014/main" id="{F5E269C4-D833-45FF-A08B-54C43D0F696A}"/>
+                <a16:creationId xmlns:a16="http://schemas.microsoft.com/office/drawing/2014/main" id="{1C112EB6-1F04-437D-A914-EA9DE46CC9DC}"/>
               </a:ext>
             </a:extLst>
           </p:cNvPr>
@@ -15765,7 +15777,7 @@
           <p:cNvPr id="17" name="Shape 14">
             <a:extLst xmlns:a="http://schemas.openxmlformats.org/drawingml/2006/main">
               <a:ext uri="{FF2B5EF4-FFF2-40B4-BE49-F238E27FC236}">
-                <a16:creationId xmlns:a16="http://schemas.microsoft.com/office/drawing/2014/main" id="{9FD70871-B247-46FA-80F8-57FFE78F55C0}"/>
+                <a16:creationId xmlns:a16="http://schemas.microsoft.com/office/drawing/2014/main" id="{A0F0D2CF-5774-482D-86F3-DD087F64C25B}"/>
               </a:ext>
             </a:extLst>
           </p:cNvPr>
@@ -15812,7 +15824,7 @@
           <p:cNvPr id="18" name="Text 15">
             <a:extLst xmlns:a="http://schemas.openxmlformats.org/drawingml/2006/main">
               <a:ext uri="{FF2B5EF4-FFF2-40B4-BE49-F238E27FC236}">
-                <a16:creationId xmlns:a16="http://schemas.microsoft.com/office/drawing/2014/main" id="{7D5E5E1A-F492-4753-A92F-668A8F14443E}"/>
+                <a16:creationId xmlns:a16="http://schemas.microsoft.com/office/drawing/2014/main" id="{205E22A5-2EE1-48E3-B813-9F8ECFC7FCE0}"/>
               </a:ext>
             </a:extLst>
           </p:cNvPr>
@@ -15857,7 +15869,7 @@
           <p:cNvPr id="19" name="Text 16">
             <a:extLst xmlns:a="http://schemas.openxmlformats.org/drawingml/2006/main">
               <a:ext uri="{FF2B5EF4-FFF2-40B4-BE49-F238E27FC236}">
-                <a16:creationId xmlns:a16="http://schemas.microsoft.com/office/drawing/2014/main" id="{0FF10DA2-2C8B-451F-BD1C-5E96F7A60668}"/>
+                <a16:creationId xmlns:a16="http://schemas.microsoft.com/office/drawing/2014/main" id="{C430A1E3-8371-4072-ADB8-EB429DD46746}"/>
               </a:ext>
             </a:extLst>
           </p:cNvPr>
@@ -15905,7 +15917,7 @@
           <p:cNvPr id="20" name="Shape 17">
             <a:extLst xmlns:a="http://schemas.openxmlformats.org/drawingml/2006/main">
               <a:ext uri="{FF2B5EF4-FFF2-40B4-BE49-F238E27FC236}">
-                <a16:creationId xmlns:a16="http://schemas.microsoft.com/office/drawing/2014/main" id="{7E540658-DA8B-499E-96BE-8B3C1F1C33C6}"/>
+                <a16:creationId xmlns:a16="http://schemas.microsoft.com/office/drawing/2014/main" id="{11198349-2C62-42B2-81AD-DD208A9EE460}"/>
               </a:ext>
             </a:extLst>
           </p:cNvPr>
@@ -15952,7 +15964,7 @@
           <p:cNvPr id="21" name="Text 18">
             <a:extLst xmlns:a="http://schemas.openxmlformats.org/drawingml/2006/main">
               <a:ext uri="{FF2B5EF4-FFF2-40B4-BE49-F238E27FC236}">
-                <a16:creationId xmlns:a16="http://schemas.microsoft.com/office/drawing/2014/main" id="{ADF783FD-8F42-416E-8931-E97EC6FD2524}"/>
+                <a16:creationId xmlns:a16="http://schemas.microsoft.com/office/drawing/2014/main" id="{7AC907E9-FA09-4C97-B6D2-85352B8B81C8}"/>
               </a:ext>
             </a:extLst>
           </p:cNvPr>
@@ -15997,7 +16009,7 @@
           <p:cNvPr id="22" name="Text 19">
             <a:extLst xmlns:a="http://schemas.openxmlformats.org/drawingml/2006/main">
               <a:ext uri="{FF2B5EF4-FFF2-40B4-BE49-F238E27FC236}">
-                <a16:creationId xmlns:a16="http://schemas.microsoft.com/office/drawing/2014/main" id="{4112E350-06AB-4EA5-B899-3CCB168A73C0}"/>
+                <a16:creationId xmlns:a16="http://schemas.microsoft.com/office/drawing/2014/main" id="{7614188A-3CB4-47CE-8487-D559EF6C2F42}"/>
               </a:ext>
             </a:extLst>
           </p:cNvPr>
@@ -16045,7 +16057,7 @@
           <p:cNvPr id="23" name="Shape 20">
             <a:extLst xmlns:a="http://schemas.openxmlformats.org/drawingml/2006/main">
               <a:ext uri="{FF2B5EF4-FFF2-40B4-BE49-F238E27FC236}">
-                <a16:creationId xmlns:a16="http://schemas.microsoft.com/office/drawing/2014/main" id="{5BE4E9A0-EBD1-411E-976F-4043D734A3F6}"/>
+                <a16:creationId xmlns:a16="http://schemas.microsoft.com/office/drawing/2014/main" id="{0990E30D-8046-4C98-9C26-18279DE78184}"/>
               </a:ext>
             </a:extLst>
           </p:cNvPr>
@@ -16092,7 +16104,7 @@
           <p:cNvPr id="24" name="Text 21">
             <a:extLst xmlns:a="http://schemas.openxmlformats.org/drawingml/2006/main">
               <a:ext uri="{FF2B5EF4-FFF2-40B4-BE49-F238E27FC236}">
-                <a16:creationId xmlns:a16="http://schemas.microsoft.com/office/drawing/2014/main" id="{FE5B0869-8CE2-4D88-AA91-329630CA0AC1}"/>
+                <a16:creationId xmlns:a16="http://schemas.microsoft.com/office/drawing/2014/main" id="{37C8CDF8-2CF2-4C1A-81D1-CF64697AEE67}"/>
               </a:ext>
             </a:extLst>
           </p:cNvPr>
@@ -16137,7 +16149,7 @@
           <p:cNvPr id="25" name="Text 22">
             <a:extLst xmlns:a="http://schemas.openxmlformats.org/drawingml/2006/main">
               <a:ext uri="{FF2B5EF4-FFF2-40B4-BE49-F238E27FC236}">
-                <a16:creationId xmlns:a16="http://schemas.microsoft.com/office/drawing/2014/main" id="{5FE3E0E6-5475-4AE4-93E5-560353B6ADA3}"/>
+                <a16:creationId xmlns:a16="http://schemas.microsoft.com/office/drawing/2014/main" id="{9B992CEA-D603-49CA-B538-DEBCF25A2D43}"/>
               </a:ext>
             </a:extLst>
           </p:cNvPr>
@@ -16185,7 +16197,7 @@
           <p:cNvPr id="26" name="Shape 23">
             <a:extLst xmlns:a="http://schemas.openxmlformats.org/drawingml/2006/main">
               <a:ext uri="{FF2B5EF4-FFF2-40B4-BE49-F238E27FC236}">
-                <a16:creationId xmlns:a16="http://schemas.microsoft.com/office/drawing/2014/main" id="{0A9E71BC-368E-4B50-AD42-3FB6F83FF430}"/>
+                <a16:creationId xmlns:a16="http://schemas.microsoft.com/office/drawing/2014/main" id="{B17F6C2F-F64F-4191-ABE4-FA873C2F849A}"/>
               </a:ext>
             </a:extLst>
           </p:cNvPr>
@@ -16232,7 +16244,7 @@
           <p:cNvPr id="27" name="Text 24">
             <a:extLst xmlns:a="http://schemas.openxmlformats.org/drawingml/2006/main">
               <a:ext uri="{FF2B5EF4-FFF2-40B4-BE49-F238E27FC236}">
-                <a16:creationId xmlns:a16="http://schemas.microsoft.com/office/drawing/2014/main" id="{8D045384-E946-48A1-B85C-043E46ADF916}"/>
+                <a16:creationId xmlns:a16="http://schemas.microsoft.com/office/drawing/2014/main" id="{A081508E-AA46-4C9F-8E51-6763A345C1AB}"/>
               </a:ext>
             </a:extLst>
           </p:cNvPr>
@@ -16277,7 +16289,7 @@
           <p:cNvPr id="28" name="Text 25">
             <a:extLst xmlns:a="http://schemas.openxmlformats.org/drawingml/2006/main">
               <a:ext uri="{FF2B5EF4-FFF2-40B4-BE49-F238E27FC236}">
-                <a16:creationId xmlns:a16="http://schemas.microsoft.com/office/drawing/2014/main" id="{E6BC6749-5B82-4149-9FE6-F8589044D3FA}"/>
+                <a16:creationId xmlns:a16="http://schemas.microsoft.com/office/drawing/2014/main" id="{959B6D4F-64E9-4793-BB33-0A494CA09C8D}"/>
               </a:ext>
             </a:extLst>
           </p:cNvPr>
@@ -16325,7 +16337,7 @@
           <p:cNvPr id="29" name="Shape 26">
             <a:extLst xmlns:a="http://schemas.openxmlformats.org/drawingml/2006/main">
               <a:ext uri="{FF2B5EF4-FFF2-40B4-BE49-F238E27FC236}">
-                <a16:creationId xmlns:a16="http://schemas.microsoft.com/office/drawing/2014/main" id="{1A5CE76C-49C3-416B-8A04-53411E86628F}"/>
+                <a16:creationId xmlns:a16="http://schemas.microsoft.com/office/drawing/2014/main" id="{C84FB3D6-BB69-4FFB-89DC-AAF3B8F3C395}"/>
               </a:ext>
             </a:extLst>
           </p:cNvPr>
@@ -16372,7 +16384,7 @@
           <p:cNvPr id="30" name="Text 27">
             <a:extLst xmlns:a="http://schemas.openxmlformats.org/drawingml/2006/main">
               <a:ext uri="{FF2B5EF4-FFF2-40B4-BE49-F238E27FC236}">
-                <a16:creationId xmlns:a16="http://schemas.microsoft.com/office/drawing/2014/main" id="{C80C1477-A33E-45D6-AD65-39F5986E14C9}"/>
+                <a16:creationId xmlns:a16="http://schemas.microsoft.com/office/drawing/2014/main" id="{644EF105-CCF6-4C40-9692-AF1A0F4A5AB4}"/>
               </a:ext>
             </a:extLst>
           </p:cNvPr>
@@ -16417,7 +16429,7 @@
           <p:cNvPr id="31" name="Text 28">
             <a:extLst xmlns:a="http://schemas.openxmlformats.org/drawingml/2006/main">
               <a:ext uri="{FF2B5EF4-FFF2-40B4-BE49-F238E27FC236}">
-                <a16:creationId xmlns:a16="http://schemas.microsoft.com/office/drawing/2014/main" id="{D3E2E9CB-F8D6-4FC0-A7D8-270FCF5B28FB}"/>
+                <a16:creationId xmlns:a16="http://schemas.microsoft.com/office/drawing/2014/main" id="{3D0490D6-6CD6-4203-ABF6-D6AD041BB4C2}"/>
               </a:ext>
             </a:extLst>
           </p:cNvPr>
@@ -16463,7 +16475,7 @@
     </p:spTree>
     <p:extLst>
       <p:ext uri="{BB962C8B-B14F-4D97-AF65-F5344CB8AC3E}">
-        <p14:creationId xmlns:p14="http://schemas.microsoft.com/office/powerpoint/2010/main" val="209261277"/>
+        <p14:creationId xmlns:p14="http://schemas.microsoft.com/office/powerpoint/2010/main" val="1208971195"/>
       </p:ext>
     </p:extLst>
   </p:cSld>
@@ -16494,7 +16506,7 @@
           <p:cNvPr id="2" name="Text 0">
             <a:extLst xmlns:a="http://schemas.openxmlformats.org/drawingml/2006/main">
               <a:ext uri="{FF2B5EF4-FFF2-40B4-BE49-F238E27FC236}">
-                <a16:creationId xmlns:a16="http://schemas.microsoft.com/office/drawing/2014/main" id="{64635647-1916-4CD3-8754-7C407046E9BF}"/>
+                <a16:creationId xmlns:a16="http://schemas.microsoft.com/office/drawing/2014/main" id="{47537E44-A4A7-4272-A7C5-B375E12F86C9}"/>
               </a:ext>
             </a:extLst>
           </p:cNvPr>
@@ -16539,7 +16551,7 @@
           <p:cNvPr id="3" name="Text 1">
             <a:extLst xmlns:a="http://schemas.openxmlformats.org/drawingml/2006/main">
               <a:ext uri="{FF2B5EF4-FFF2-40B4-BE49-F238E27FC236}">
-                <a16:creationId xmlns:a16="http://schemas.microsoft.com/office/drawing/2014/main" id="{139D2D66-3A79-413D-AF12-02681E3D8942}"/>
+                <a16:creationId xmlns:a16="http://schemas.microsoft.com/office/drawing/2014/main" id="{6A80AD53-3C3C-49A3-9172-6A94E7C9FBEC}"/>
               </a:ext>
             </a:extLst>
           </p:cNvPr>
@@ -16584,7 +16596,7 @@
           <p:cNvPr id="4" name="Text 2">
             <a:extLst xmlns:a="http://schemas.openxmlformats.org/drawingml/2006/main">
               <a:ext uri="{FF2B5EF4-FFF2-40B4-BE49-F238E27FC236}">
-                <a16:creationId xmlns:a16="http://schemas.microsoft.com/office/drawing/2014/main" id="{65C3040A-95CA-43AA-8B4C-AD9C519D9717}"/>
+                <a16:creationId xmlns:a16="http://schemas.microsoft.com/office/drawing/2014/main" id="{B31A8A42-EF37-472E-B8ED-67DCC92F51CC}"/>
               </a:ext>
             </a:extLst>
           </p:cNvPr>
@@ -16619,7 +16631,7 @@
                 <a:ea typeface="Calibri"/>
                 <a:cs typeface="Calibri"/>
               </a:rPr>
-              <a:t>RESULTS  ·  RQ6  ·  10 BENCHMARK FAMILIES</a:t>
+              <a:t>RESULTS  ·  RQ6  ·  3 REAL WORKFLOW FAMILIES</a:t>
             </a:r>
           </a:p>
         </p:txBody>
@@ -16629,7 +16641,7 @@
           <p:cNvPr id="5" name="Text 3">
             <a:extLst xmlns:a="http://schemas.openxmlformats.org/drawingml/2006/main">
               <a:ext uri="{FF2B5EF4-FFF2-40B4-BE49-F238E27FC236}">
-                <a16:creationId xmlns:a16="http://schemas.microsoft.com/office/drawing/2014/main" id="{88B9AD50-158F-4FCA-BDAE-15DD30126A58}"/>
+                <a16:creationId xmlns:a16="http://schemas.microsoft.com/office/drawing/2014/main" id="{53C7FB97-8465-4540-9A88-5482265A302F}"/>
               </a:ext>
             </a:extLst>
           </p:cNvPr>
@@ -16664,7 +16676,7 @@
                 <a:ea typeface="Cambria"/>
                 <a:cs typeface="Cambria"/>
               </a:rPr>
-              <a:t>Two compiler corpora recur; neither reaches admission</a:t>
+              <a:t>Efficiency transfers; manual programs remain the runtime baseline</a:t>
             </a:r>
           </a:p>
         </p:txBody>
@@ -16674,7 +16686,7 @@
           <p:cNvPr id="6" name="Text 4">
             <a:extLst xmlns:a="http://schemas.openxmlformats.org/drawingml/2006/main">
               <a:ext uri="{FF2B5EF4-FFF2-40B4-BE49-F238E27FC236}">
-                <a16:creationId xmlns:a16="http://schemas.microsoft.com/office/drawing/2014/main" id="{2307B965-6466-4C8B-9A5C-B1FA22FDE238}"/>
+                <a16:creationId xmlns:a16="http://schemas.microsoft.com/office/drawing/2014/main" id="{C871D1D2-BCEA-4DD1-982D-0F7883CEB63B}"/>
               </a:ext>
             </a:extLst>
           </p:cNvPr>
@@ -16715,7 +16727,7 @@
                 <a:ea typeface="Calibri"/>
                 <a:cs typeface="Calibri"/>
               </a:rPr>
-              <a:t>The common IR screens 5,419 tasks and 17,836 reference actions across eight accessible task sources.</a:t>
+              <a:t>Three distinct decisions and tool vocabularies use 132 balanced discovery records and 30 disjoint held-out records each.</a:t>
             </a:r>
           </a:p>
           <a:p xmlns:a="http://schemas.openxmlformats.org/drawingml/2006/main">
@@ -16737,7 +16749,7 @@
                 <a:ea typeface="Calibri"/>
                 <a:cs typeface="Calibri"/>
               </a:rPr>
-              <a:t>API-Bank is the only additional complete-trace corpus: 212 tasks yield 48 candidate windows; 2 families synthesize.</a:t>
+              <a:t>Compiled programs preserve 90/90 exact outcomes versus 89/90 baseline while cutting requests 66.6%, tokens 63.1%, observed latency 64.2%, and estimated cost 58.7% in aggregate.</a:t>
             </a:r>
           </a:p>
           <a:p xmlns:a="http://schemas.openxmlformats.org/drawingml/2006/main">
@@ -16759,7 +16771,7 @@
                 <a:ea typeface="Calibri"/>
                 <a:cs typeface="Calibri"/>
               </a:rPr>
-              <a:t>Held-out replay gives 0 pass / 2 abstain / 0 wrong. Maximum support is 8 versus 92 required, so every family retires.</a:t>
+              <a:t>Hand-written programs also reach 90/90; automatic discovery and lifecycle—not runtime dominance—are the contribution.</a:t>
             </a:r>
           </a:p>
         </p:txBody>
@@ -16769,7 +16781,7 @@
           <p:cNvPr id="7" name="Shape 5">
             <a:extLst xmlns:a="http://schemas.openxmlformats.org/drawingml/2006/main">
               <a:ext uri="{FF2B5EF4-FFF2-40B4-BE49-F238E27FC236}">
-                <a16:creationId xmlns:a16="http://schemas.microsoft.com/office/drawing/2014/main" id="{3B491C2A-6AA6-4F91-8C49-5AACFAF94B66}"/>
+                <a16:creationId xmlns:a16="http://schemas.microsoft.com/office/drawing/2014/main" id="{1CAE864C-7F77-4950-86F2-8A68DF374833}"/>
               </a:ext>
             </a:extLst>
           </p:cNvPr>
@@ -16816,7 +16828,7 @@
           <p:cNvPr id="8" name="Text 6">
             <a:extLst xmlns:a="http://schemas.openxmlformats.org/drawingml/2006/main">
               <a:ext uri="{FF2B5EF4-FFF2-40B4-BE49-F238E27FC236}">
-                <a16:creationId xmlns:a16="http://schemas.microsoft.com/office/drawing/2014/main" id="{3817793A-737E-4BBC-8E7E-74BE3F394A5D}"/>
+                <a16:creationId xmlns:a16="http://schemas.microsoft.com/office/drawing/2014/main" id="{6F60C7D7-A7CC-4458-950E-BE5BE78ACB19}"/>
               </a:ext>
             </a:extLst>
           </p:cNvPr>
@@ -16854,7 +16866,7 @@
                 <a:ea typeface="Calibri"/>
                 <a:cs typeface="Calibri"/>
               </a:rPr>
-              <a:t>Breadth does not rescue admission. NESTFUL's maximum support of 26 is already the upper bar shown here; API-Bank reaches only 8. The new corpus independently supports refusal, while task-only, simulated, hosted, and gated paths stay in their own evidence classes.</a:t>
+              <a:t>The two new families compile verified three-read pre-model programs; the original issue family retains its conservative two-read prefix. The study changes decision and tools, but not repository or time: cross-repository and time-forward transfer remain open.</a:t>
             </a:r>
           </a:p>
         </p:txBody>
@@ -16871,7 +16883,7 @@
         </p:xfrm>
         <a:graphic xmlns:a="http://schemas.openxmlformats.org/drawingml/2006/main">
           <a:graphicData uri="http://schemas.openxmlformats.org/drawingml/2006/chart">
-            <c:chart xmlns:r="http://schemas.openxmlformats.org/officeDocument/2006/relationships" xmlns:c="http://schemas.openxmlformats.org/drawingml/2006/chart" r:id="R842d50e6d0304570"/>
+            <c:chart xmlns:r="http://schemas.openxmlformats.org/officeDocument/2006/relationships" xmlns:c="http://schemas.openxmlformats.org/drawingml/2006/chart" r:id="Rafe49cfed8f44a59"/>
           </a:graphicData>
         </a:graphic>
       </p:graphicFrame>
@@ -16880,7 +16892,7 @@
           <p:cNvPr id="10" name="Text 7">
             <a:extLst xmlns:a="http://schemas.openxmlformats.org/drawingml/2006/main">
               <a:ext uri="{FF2B5EF4-FFF2-40B4-BE49-F238E27FC236}">
-                <a16:creationId xmlns:a16="http://schemas.microsoft.com/office/drawing/2014/main" id="{22AE4BC8-2645-481C-9F71-B47F501B0838}"/>
+                <a16:creationId xmlns:a16="http://schemas.microsoft.com/office/drawing/2014/main" id="{0B331E79-403C-4717-87B5-C776DCD7014B}"/>
               </a:ext>
             </a:extLst>
           </p:cNvPr>
@@ -16915,7 +16927,7 @@
                 <a:ea typeface="Calibri"/>
                 <a:cs typeface="Calibri"/>
               </a:rPr>
-              <a:t>10-BENCHMARK LEDGER — EXECUTION DEPTHS ARE NOT POOLED</a:t>
+              <a:t>90 HELD-OUT PUBLIC RECORDS — LIVE PROVIDER — NO SIMULATION</a:t>
             </a:r>
           </a:p>
         </p:txBody>
@@ -16925,7 +16937,7 @@
           <p:cNvPr id="11" name="Shape 8">
             <a:extLst xmlns:a="http://schemas.openxmlformats.org/drawingml/2006/main">
               <a:ext uri="{FF2B5EF4-FFF2-40B4-BE49-F238E27FC236}">
-                <a16:creationId xmlns:a16="http://schemas.microsoft.com/office/drawing/2014/main" id="{EB36CBBE-68A4-4425-8837-1DE670B4F28C}"/>
+                <a16:creationId xmlns:a16="http://schemas.microsoft.com/office/drawing/2014/main" id="{504CA319-4503-4550-BED0-9646276253BA}"/>
               </a:ext>
             </a:extLst>
           </p:cNvPr>
@@ -16972,7 +16984,7 @@
           <p:cNvPr id="12" name="Text 9">
             <a:extLst xmlns:a="http://schemas.openxmlformats.org/drawingml/2006/main">
               <a:ext uri="{FF2B5EF4-FFF2-40B4-BE49-F238E27FC236}">
-                <a16:creationId xmlns:a16="http://schemas.microsoft.com/office/drawing/2014/main" id="{0F1EA3BC-0357-4369-BAE1-62E0856D2A05}"/>
+                <a16:creationId xmlns:a16="http://schemas.microsoft.com/office/drawing/2014/main" id="{B9DE1BD4-A71F-4F10-8273-119119BEB0FA}"/>
               </a:ext>
             </a:extLst>
           </p:cNvPr>
@@ -17007,7 +17019,7 @@
                 <a:ea typeface="Cambria"/>
                 <a:cs typeface="Cambria"/>
               </a:rPr>
-              <a:t>5,419</a:t>
+              <a:t>3</a:t>
             </a:r>
           </a:p>
         </p:txBody>
@@ -17017,7 +17029,7 @@
           <p:cNvPr id="13" name="Text 10">
             <a:extLst xmlns:a="http://schemas.openxmlformats.org/drawingml/2006/main">
               <a:ext uri="{FF2B5EF4-FFF2-40B4-BE49-F238E27FC236}">
-                <a16:creationId xmlns:a16="http://schemas.microsoft.com/office/drawing/2014/main" id="{5B5E6D13-CF36-408E-8731-0E1746769A58}"/>
+                <a16:creationId xmlns:a16="http://schemas.microsoft.com/office/drawing/2014/main" id="{1269F315-3838-4710-B568-BFB9F8E72BE4}"/>
               </a:ext>
             </a:extLst>
           </p:cNvPr>
@@ -17055,7 +17067,7 @@
                 <a:ea typeface="Calibri"/>
                 <a:cs typeface="Calibri"/>
               </a:rPr>
-              <a:t>screened tasks</a:t>
+              <a:t>workflow families</a:t>
             </a:r>
           </a:p>
         </p:txBody>
@@ -17065,7 +17077,7 @@
           <p:cNvPr id="14" name="Shape 11">
             <a:extLst xmlns:a="http://schemas.openxmlformats.org/drawingml/2006/main">
               <a:ext uri="{FF2B5EF4-FFF2-40B4-BE49-F238E27FC236}">
-                <a16:creationId xmlns:a16="http://schemas.microsoft.com/office/drawing/2014/main" id="{18281481-2C5A-42BF-99A7-C3E0FD6BA482}"/>
+                <a16:creationId xmlns:a16="http://schemas.microsoft.com/office/drawing/2014/main" id="{F7A47A27-B0B6-4E8F-9186-88A38BD528FD}"/>
               </a:ext>
             </a:extLst>
           </p:cNvPr>
@@ -17112,7 +17124,7 @@
           <p:cNvPr id="15" name="Text 12">
             <a:extLst xmlns:a="http://schemas.openxmlformats.org/drawingml/2006/main">
               <a:ext uri="{FF2B5EF4-FFF2-40B4-BE49-F238E27FC236}">
-                <a16:creationId xmlns:a16="http://schemas.microsoft.com/office/drawing/2014/main" id="{5091AE71-CBE4-4F96-8953-8641EFB0E91B}"/>
+                <a16:creationId xmlns:a16="http://schemas.microsoft.com/office/drawing/2014/main" id="{B030B3D6-2053-4919-89BB-471DCF2C5693}"/>
               </a:ext>
             </a:extLst>
           </p:cNvPr>
@@ -17147,7 +17159,7 @@
                 <a:ea typeface="Cambria"/>
                 <a:cs typeface="Cambria"/>
               </a:rPr>
-              <a:t>17,836</a:t>
+              <a:t>90 / 90</a:t>
             </a:r>
           </a:p>
         </p:txBody>
@@ -17157,7 +17169,7 @@
           <p:cNvPr id="16" name="Text 13">
             <a:extLst xmlns:a="http://schemas.openxmlformats.org/drawingml/2006/main">
               <a:ext uri="{FF2B5EF4-FFF2-40B4-BE49-F238E27FC236}">
-                <a16:creationId xmlns:a16="http://schemas.microsoft.com/office/drawing/2014/main" id="{F5E269C4-D833-45FF-A08B-54C43D0F696A}"/>
+                <a16:creationId xmlns:a16="http://schemas.microsoft.com/office/drawing/2014/main" id="{1C112EB6-1F04-437D-A914-EA9DE46CC9DC}"/>
               </a:ext>
             </a:extLst>
           </p:cNvPr>
@@ -17195,7 +17207,7 @@
                 <a:ea typeface="Calibri"/>
                 <a:cs typeface="Calibri"/>
               </a:rPr>
-              <a:t>reference actions</a:t>
+              <a:t>compiled / manual exact</a:t>
             </a:r>
           </a:p>
         </p:txBody>
@@ -17205,7 +17217,7 @@
           <p:cNvPr id="17" name="Shape 14">
             <a:extLst xmlns:a="http://schemas.openxmlformats.org/drawingml/2006/main">
               <a:ext uri="{FF2B5EF4-FFF2-40B4-BE49-F238E27FC236}">
-                <a16:creationId xmlns:a16="http://schemas.microsoft.com/office/drawing/2014/main" id="{9FD70871-B247-46FA-80F8-57FFE78F55C0}"/>
+                <a16:creationId xmlns:a16="http://schemas.microsoft.com/office/drawing/2014/main" id="{A0F0D2CF-5774-482D-86F3-DD087F64C25B}"/>
               </a:ext>
             </a:extLst>
           </p:cNvPr>
@@ -17252,7 +17264,7 @@
           <p:cNvPr id="18" name="Text 15">
             <a:extLst xmlns:a="http://schemas.openxmlformats.org/drawingml/2006/main">
               <a:ext uri="{FF2B5EF4-FFF2-40B4-BE49-F238E27FC236}">
-                <a16:creationId xmlns:a16="http://schemas.microsoft.com/office/drawing/2014/main" id="{7D5E5E1A-F492-4753-A92F-668A8F14443E}"/>
+                <a16:creationId xmlns:a16="http://schemas.microsoft.com/office/drawing/2014/main" id="{205E22A5-2EE1-48E3-B813-9F8ECFC7FCE0}"/>
               </a:ext>
             </a:extLst>
           </p:cNvPr>
@@ -17287,7 +17299,7 @@
                 <a:ea typeface="Cambria"/>
                 <a:cs typeface="Cambria"/>
               </a:rPr>
-              <a:t>212</a:t>
+              <a:t>89 / 90</a:t>
             </a:r>
           </a:p>
         </p:txBody>
@@ -17297,7 +17309,7 @@
           <p:cNvPr id="19" name="Text 16">
             <a:extLst xmlns:a="http://schemas.openxmlformats.org/drawingml/2006/main">
               <a:ext uri="{FF2B5EF4-FFF2-40B4-BE49-F238E27FC236}">
-                <a16:creationId xmlns:a16="http://schemas.microsoft.com/office/drawing/2014/main" id="{0FF10DA2-2C8B-451F-BD1C-5E96F7A60668}"/>
+                <a16:creationId xmlns:a16="http://schemas.microsoft.com/office/drawing/2014/main" id="{C430A1E3-8371-4072-ADB8-EB429DD46746}"/>
               </a:ext>
             </a:extLst>
           </p:cNvPr>
@@ -17335,7 +17347,7 @@
                 <a:ea typeface="Calibri"/>
                 <a:cs typeface="Calibri"/>
               </a:rPr>
-              <a:t>API-Bank complete traces</a:t>
+              <a:t>baseline exact</a:t>
             </a:r>
           </a:p>
         </p:txBody>
@@ -17345,7 +17357,7 @@
           <p:cNvPr id="20" name="Shape 17">
             <a:extLst xmlns:a="http://schemas.openxmlformats.org/drawingml/2006/main">
               <a:ext uri="{FF2B5EF4-FFF2-40B4-BE49-F238E27FC236}">
-                <a16:creationId xmlns:a16="http://schemas.microsoft.com/office/drawing/2014/main" id="{7E540658-DA8B-499E-96BE-8B3C1F1C33C6}"/>
+                <a16:creationId xmlns:a16="http://schemas.microsoft.com/office/drawing/2014/main" id="{11198349-2C62-42B2-81AD-DD208A9EE460}"/>
               </a:ext>
             </a:extLst>
           </p:cNvPr>
@@ -17392,7 +17404,7 @@
           <p:cNvPr id="21" name="Text 18">
             <a:extLst xmlns:a="http://schemas.openxmlformats.org/drawingml/2006/main">
               <a:ext uri="{FF2B5EF4-FFF2-40B4-BE49-F238E27FC236}">
-                <a16:creationId xmlns:a16="http://schemas.microsoft.com/office/drawing/2014/main" id="{ADF783FD-8F42-416E-8931-E97EC6FD2524}"/>
+                <a16:creationId xmlns:a16="http://schemas.microsoft.com/office/drawing/2014/main" id="{7AC907E9-FA09-4C97-B6D2-85352B8B81C8}"/>
               </a:ext>
             </a:extLst>
           </p:cNvPr>
@@ -17427,7 +17439,7 @@
                 <a:ea typeface="Cambria"/>
                 <a:cs typeface="Cambria"/>
               </a:rPr>
-              <a:t>2 / 8</a:t>
+              <a:t>−66.6%</a:t>
             </a:r>
           </a:p>
         </p:txBody>
@@ -17437,7 +17449,7 @@
           <p:cNvPr id="22" name="Text 19">
             <a:extLst xmlns:a="http://schemas.openxmlformats.org/drawingml/2006/main">
               <a:ext uri="{FF2B5EF4-FFF2-40B4-BE49-F238E27FC236}">
-                <a16:creationId xmlns:a16="http://schemas.microsoft.com/office/drawing/2014/main" id="{4112E350-06AB-4EA5-B899-3CCB168A73C0}"/>
+                <a16:creationId xmlns:a16="http://schemas.microsoft.com/office/drawing/2014/main" id="{7614188A-3CB4-47CE-8487-D559EF6C2F42}"/>
               </a:ext>
             </a:extLst>
           </p:cNvPr>
@@ -17475,7 +17487,7 @@
                 <a:ea typeface="Calibri"/>
                 <a:cs typeface="Calibri"/>
               </a:rPr>
-              <a:t>synthesized / max support</a:t>
+              <a:t>provider requests</a:t>
             </a:r>
           </a:p>
         </p:txBody>
@@ -17485,7 +17497,7 @@
           <p:cNvPr id="23" name="Shape 20">
             <a:extLst xmlns:a="http://schemas.openxmlformats.org/drawingml/2006/main">
               <a:ext uri="{FF2B5EF4-FFF2-40B4-BE49-F238E27FC236}">
-                <a16:creationId xmlns:a16="http://schemas.microsoft.com/office/drawing/2014/main" id="{5BE4E9A0-EBD1-411E-976F-4043D734A3F6}"/>
+                <a16:creationId xmlns:a16="http://schemas.microsoft.com/office/drawing/2014/main" id="{0990E30D-8046-4C98-9C26-18279DE78184}"/>
               </a:ext>
             </a:extLst>
           </p:cNvPr>
@@ -17532,7 +17544,7 @@
           <p:cNvPr id="24" name="Text 21">
             <a:extLst xmlns:a="http://schemas.openxmlformats.org/drawingml/2006/main">
               <a:ext uri="{FF2B5EF4-FFF2-40B4-BE49-F238E27FC236}">
-                <a16:creationId xmlns:a16="http://schemas.microsoft.com/office/drawing/2014/main" id="{FE5B0869-8CE2-4D88-AA91-329630CA0AC1}"/>
+                <a16:creationId xmlns:a16="http://schemas.microsoft.com/office/drawing/2014/main" id="{37C8CDF8-2CF2-4C1A-81D1-CF64697AEE67}"/>
               </a:ext>
             </a:extLst>
           </p:cNvPr>
@@ -17567,7 +17579,7 @@
                 <a:ea typeface="Cambria"/>
                 <a:cs typeface="Cambria"/>
               </a:rPr>
-              <a:t>0 / 2 / 0</a:t>
+              <a:t>−63.1%</a:t>
             </a:r>
           </a:p>
         </p:txBody>
@@ -17577,7 +17589,7 @@
           <p:cNvPr id="25" name="Text 22">
             <a:extLst xmlns:a="http://schemas.openxmlformats.org/drawingml/2006/main">
               <a:ext uri="{FF2B5EF4-FFF2-40B4-BE49-F238E27FC236}">
-                <a16:creationId xmlns:a16="http://schemas.microsoft.com/office/drawing/2014/main" id="{5FE3E0E6-5475-4AE4-93E5-560353B6ADA3}"/>
+                <a16:creationId xmlns:a16="http://schemas.microsoft.com/office/drawing/2014/main" id="{9B992CEA-D603-49CA-B538-DEBCF25A2D43}"/>
               </a:ext>
             </a:extLst>
           </p:cNvPr>
@@ -17615,7 +17627,7 @@
                 <a:ea typeface="Calibri"/>
                 <a:cs typeface="Calibri"/>
               </a:rPr>
-              <a:t>pass / abstain / wrong</a:t>
+              <a:t>total tokens</a:t>
             </a:r>
           </a:p>
         </p:txBody>
@@ -17625,7 +17637,7 @@
           <p:cNvPr id="26" name="Shape 23">
             <a:extLst xmlns:a="http://schemas.openxmlformats.org/drawingml/2006/main">
               <a:ext uri="{FF2B5EF4-FFF2-40B4-BE49-F238E27FC236}">
-                <a16:creationId xmlns:a16="http://schemas.microsoft.com/office/drawing/2014/main" id="{0A9E71BC-368E-4B50-AD42-3FB6F83FF430}"/>
+                <a16:creationId xmlns:a16="http://schemas.microsoft.com/office/drawing/2014/main" id="{B17F6C2F-F64F-4191-ABE4-FA873C2F849A}"/>
               </a:ext>
             </a:extLst>
           </p:cNvPr>
@@ -17672,7 +17684,7 @@
           <p:cNvPr id="27" name="Text 24">
             <a:extLst xmlns:a="http://schemas.openxmlformats.org/drawingml/2006/main">
               <a:ext uri="{FF2B5EF4-FFF2-40B4-BE49-F238E27FC236}">
-                <a16:creationId xmlns:a16="http://schemas.microsoft.com/office/drawing/2014/main" id="{8D045384-E946-48A1-B85C-043E46ADF916}"/>
+                <a16:creationId xmlns:a16="http://schemas.microsoft.com/office/drawing/2014/main" id="{A081508E-AA46-4C9F-8E51-6763A345C1AB}"/>
               </a:ext>
             </a:extLst>
           </p:cNvPr>
@@ -17707,7 +17719,7 @@
                 <a:ea typeface="Cambria"/>
                 <a:cs typeface="Cambria"/>
               </a:rPr>
-              <a:t>0</a:t>
+              <a:t>−64.2%</a:t>
             </a:r>
           </a:p>
         </p:txBody>
@@ -17717,7 +17729,7 @@
           <p:cNvPr id="28" name="Text 25">
             <a:extLst xmlns:a="http://schemas.openxmlformats.org/drawingml/2006/main">
               <a:ext uri="{FF2B5EF4-FFF2-40B4-BE49-F238E27FC236}">
-                <a16:creationId xmlns:a16="http://schemas.microsoft.com/office/drawing/2014/main" id="{E6BC6749-5B82-4149-9FE6-F8589044D3FA}"/>
+                <a16:creationId xmlns:a16="http://schemas.microsoft.com/office/drawing/2014/main" id="{959B6D4F-64E9-4793-BB33-0A494CA09C8D}"/>
               </a:ext>
             </a:extLst>
           </p:cNvPr>
@@ -17755,7 +17767,7 @@
                 <a:ea typeface="Calibri"/>
                 <a:cs typeface="Calibri"/>
               </a:rPr>
-              <a:t>new certifiable families</a:t>
+              <a:t>observed latency</a:t>
             </a:r>
           </a:p>
         </p:txBody>
@@ -17765,7 +17777,7 @@
           <p:cNvPr id="29" name="Shape 26">
             <a:extLst xmlns:a="http://schemas.openxmlformats.org/drawingml/2006/main">
               <a:ext uri="{FF2B5EF4-FFF2-40B4-BE49-F238E27FC236}">
-                <a16:creationId xmlns:a16="http://schemas.microsoft.com/office/drawing/2014/main" id="{1A5CE76C-49C3-416B-8A04-53411E86628F}"/>
+                <a16:creationId xmlns:a16="http://schemas.microsoft.com/office/drawing/2014/main" id="{C84FB3D6-BB69-4FFB-89DC-AAF3B8F3C395}"/>
               </a:ext>
             </a:extLst>
           </p:cNvPr>
@@ -17812,7 +17824,7 @@
           <p:cNvPr id="30" name="Text 27">
             <a:extLst xmlns:a="http://schemas.openxmlformats.org/drawingml/2006/main">
               <a:ext uri="{FF2B5EF4-FFF2-40B4-BE49-F238E27FC236}">
-                <a16:creationId xmlns:a16="http://schemas.microsoft.com/office/drawing/2014/main" id="{C80C1477-A33E-45D6-AD65-39F5986E14C9}"/>
+                <a16:creationId xmlns:a16="http://schemas.microsoft.com/office/drawing/2014/main" id="{644EF105-CCF6-4C40-9692-AF1A0F4A5AB4}"/>
               </a:ext>
             </a:extLst>
           </p:cNvPr>
@@ -17847,7 +17859,7 @@
                 <a:ea typeface="Cambria"/>
                 <a:cs typeface="Cambria"/>
               </a:rPr>
-              <a:t>5 / 3</a:t>
+              <a:t>−58.7%</a:t>
             </a:r>
           </a:p>
         </p:txBody>
@@ -17857,7 +17869,7 @@
           <p:cNvPr id="31" name="Text 28">
             <a:extLst xmlns:a="http://schemas.openxmlformats.org/drawingml/2006/main">
               <a:ext uri="{FF2B5EF4-FFF2-40B4-BE49-F238E27FC236}">
-                <a16:creationId xmlns:a16="http://schemas.microsoft.com/office/drawing/2014/main" id="{D3E2E9CB-F8D6-4FC0-A7D8-270FCF5B28FB}"/>
+                <a16:creationId xmlns:a16="http://schemas.microsoft.com/office/drawing/2014/main" id="{3D0490D6-6CD6-4203-ABF6-D6AD041BB4C2}"/>
               </a:ext>
             </a:extLst>
           </p:cNvPr>
@@ -17895,7 +17907,7 @@
                 <a:ea typeface="Calibri"/>
                 <a:cs typeface="Calibri"/>
               </a:rPr>
-              <a:t>executed / live-provider paths</a:t>
+              <a:t>estimated cost</a:t>
             </a:r>
           </a:p>
         </p:txBody>
@@ -17903,7 +17915,7 @@
     </p:spTree>
     <p:extLst>
       <p:ext uri="{BB962C8B-B14F-4D97-AF65-F5344CB8AC3E}">
-        <p14:creationId xmlns:p14="http://schemas.microsoft.com/office/powerpoint/2010/main" val="209261277"/>
+        <p14:creationId xmlns:p14="http://schemas.microsoft.com/office/powerpoint/2010/main" val="1208971195"/>
       </p:ext>
     </p:extLst>
   </p:cSld>
@@ -17934,7 +17946,7 @@
           <p:cNvPr id="2" name="Text 0">
             <a:extLst xmlns:a="http://schemas.openxmlformats.org/drawingml/2006/main">
               <a:ext uri="{FF2B5EF4-FFF2-40B4-BE49-F238E27FC236}">
-                <a16:creationId xmlns:a16="http://schemas.microsoft.com/office/drawing/2014/main" id="{FAD6B510-CA4D-4E5A-BCA6-80DF8AE89C7B}"/>
+                <a16:creationId xmlns:a16="http://schemas.microsoft.com/office/drawing/2014/main" id="{0A48F156-0314-48B6-9AC2-BFD670EA0E6B}"/>
               </a:ext>
             </a:extLst>
           </p:cNvPr>
@@ -17979,7 +17991,7 @@
           <p:cNvPr id="3" name="Text 1">
             <a:extLst xmlns:a="http://schemas.openxmlformats.org/drawingml/2006/main">
               <a:ext uri="{FF2B5EF4-FFF2-40B4-BE49-F238E27FC236}">
-                <a16:creationId xmlns:a16="http://schemas.microsoft.com/office/drawing/2014/main" id="{6A8D29E0-D3EF-4EF7-93A0-B50B568CFEBB}"/>
+                <a16:creationId xmlns:a16="http://schemas.microsoft.com/office/drawing/2014/main" id="{0CDAAB7F-D55A-48E2-81FC-A693635ACFEF}"/>
               </a:ext>
             </a:extLst>
           </p:cNvPr>
@@ -18024,7 +18036,7 @@
           <p:cNvPr id="4" name="Text 2">
             <a:extLst xmlns:a="http://schemas.openxmlformats.org/drawingml/2006/main">
               <a:ext uri="{FF2B5EF4-FFF2-40B4-BE49-F238E27FC236}">
-                <a16:creationId xmlns:a16="http://schemas.microsoft.com/office/drawing/2014/main" id="{607A8216-9497-4337-97F9-FA2A1B511CAB}"/>
+                <a16:creationId xmlns:a16="http://schemas.microsoft.com/office/drawing/2014/main" id="{81FD6E9F-57DA-44AE-8C38-DD2CEBEF1E31}"/>
               </a:ext>
             </a:extLst>
           </p:cNvPr>
@@ -18069,7 +18081,7 @@
           <p:cNvPr id="5" name="Text 3">
             <a:extLst xmlns:a="http://schemas.openxmlformats.org/drawingml/2006/main">
               <a:ext uri="{FF2B5EF4-FFF2-40B4-BE49-F238E27FC236}">
-                <a16:creationId xmlns:a16="http://schemas.microsoft.com/office/drawing/2014/main" id="{C1FEDB79-204D-44A7-910E-A31606F93DD2}"/>
+                <a16:creationId xmlns:a16="http://schemas.microsoft.com/office/drawing/2014/main" id="{320FF2DF-80A2-4B64-8CBD-6C607722090B}"/>
               </a:ext>
             </a:extLst>
           </p:cNvPr>
@@ -18121,7 +18133,7 @@
         </p:xfrm>
         <a:graphic xmlns:a="http://schemas.openxmlformats.org/drawingml/2006/main">
           <a:graphicData uri="http://schemas.openxmlformats.org/drawingml/2006/chart">
-            <c:chart xmlns:r="http://schemas.openxmlformats.org/officeDocument/2006/relationships" xmlns:c="http://schemas.openxmlformats.org/drawingml/2006/chart" r:id="Ra1421eb3262c4316"/>
+            <c:chart xmlns:r="http://schemas.openxmlformats.org/officeDocument/2006/relationships" xmlns:c="http://schemas.openxmlformats.org/drawingml/2006/chart" r:id="R4ed7d00ca4714534"/>
           </a:graphicData>
         </a:graphic>
       </p:graphicFrame>
@@ -18130,7 +18142,7 @@
           <p:cNvPr id="7" name="Shape 4">
             <a:extLst xmlns:a="http://schemas.openxmlformats.org/drawingml/2006/main">
               <a:ext uri="{FF2B5EF4-FFF2-40B4-BE49-F238E27FC236}">
-                <a16:creationId xmlns:a16="http://schemas.microsoft.com/office/drawing/2014/main" id="{C7B69F05-4B4E-472C-9430-92CA4AB91C10}"/>
+                <a16:creationId xmlns:a16="http://schemas.microsoft.com/office/drawing/2014/main" id="{4C61DBFC-3CBC-453A-A842-A96AC39B9262}"/>
               </a:ext>
             </a:extLst>
           </p:cNvPr>
@@ -18177,7 +18189,7 @@
           <p:cNvPr id="8" name="Text 5">
             <a:extLst xmlns:a="http://schemas.openxmlformats.org/drawingml/2006/main">
               <a:ext uri="{FF2B5EF4-FFF2-40B4-BE49-F238E27FC236}">
-                <a16:creationId xmlns:a16="http://schemas.microsoft.com/office/drawing/2014/main" id="{650E68FD-F768-45CF-9D37-5B7FD4757C6F}"/>
+                <a16:creationId xmlns:a16="http://schemas.microsoft.com/office/drawing/2014/main" id="{ABF0743B-9F2B-4063-930E-A556F8699D86}"/>
               </a:ext>
             </a:extLst>
           </p:cNvPr>
@@ -18222,7 +18234,7 @@
           <p:cNvPr id="9" name="Text 6">
             <a:extLst xmlns:a="http://schemas.openxmlformats.org/drawingml/2006/main">
               <a:ext uri="{FF2B5EF4-FFF2-40B4-BE49-F238E27FC236}">
-                <a16:creationId xmlns:a16="http://schemas.microsoft.com/office/drawing/2014/main" id="{E4971A5A-1CF4-4ED7-AC86-B04F800A69BA}"/>
+                <a16:creationId xmlns:a16="http://schemas.microsoft.com/office/drawing/2014/main" id="{66007DC8-2D11-48B1-8C63-F8A73B914034}"/>
               </a:ext>
             </a:extLst>
           </p:cNvPr>
@@ -18361,7 +18373,7 @@
           <p:cNvPr id="10" name="Shape 7">
             <a:extLst xmlns:a="http://schemas.openxmlformats.org/drawingml/2006/main">
               <a:ext uri="{FF2B5EF4-FFF2-40B4-BE49-F238E27FC236}">
-                <a16:creationId xmlns:a16="http://schemas.microsoft.com/office/drawing/2014/main" id="{2C0E8BDD-3914-4835-823C-C1B0457AB81D}"/>
+                <a16:creationId xmlns:a16="http://schemas.microsoft.com/office/drawing/2014/main" id="{7197A531-2B36-490B-B3BF-4974B5C7C125}"/>
               </a:ext>
             </a:extLst>
           </p:cNvPr>
@@ -18408,7 +18420,7 @@
           <p:cNvPr id="11" name="Text 8">
             <a:extLst xmlns:a="http://schemas.openxmlformats.org/drawingml/2006/main">
               <a:ext uri="{FF2B5EF4-FFF2-40B4-BE49-F238E27FC236}">
-                <a16:creationId xmlns:a16="http://schemas.microsoft.com/office/drawing/2014/main" id="{A0A4F5F3-A7D8-4523-98A7-979EBE6ACCF6}"/>
+                <a16:creationId xmlns:a16="http://schemas.microsoft.com/office/drawing/2014/main" id="{ADE69949-8BFE-4889-94EA-01B65AC9FF02}"/>
               </a:ext>
             </a:extLst>
           </p:cNvPr>
@@ -18453,7 +18465,7 @@
           <p:cNvPr id="12" name="Text 9">
             <a:extLst xmlns:a="http://schemas.openxmlformats.org/drawingml/2006/main">
               <a:ext uri="{FF2B5EF4-FFF2-40B4-BE49-F238E27FC236}">
-                <a16:creationId xmlns:a16="http://schemas.microsoft.com/office/drawing/2014/main" id="{29B1843E-1F18-4619-BEB1-EFFE0DE594DE}"/>
+                <a16:creationId xmlns:a16="http://schemas.microsoft.com/office/drawing/2014/main" id="{2AA261BB-EEA6-40D9-B313-1C6A2F24B38D}"/>
               </a:ext>
             </a:extLst>
           </p:cNvPr>
@@ -18501,7 +18513,7 @@
           <p:cNvPr id="13" name="Shape 10">
             <a:extLst xmlns:a="http://schemas.openxmlformats.org/drawingml/2006/main">
               <a:ext uri="{FF2B5EF4-FFF2-40B4-BE49-F238E27FC236}">
-                <a16:creationId xmlns:a16="http://schemas.microsoft.com/office/drawing/2014/main" id="{2B2E4CA9-2D18-48E8-8469-DBCB6C19403F}"/>
+                <a16:creationId xmlns:a16="http://schemas.microsoft.com/office/drawing/2014/main" id="{A138B87F-C837-47F9-BAC9-34439541613E}"/>
               </a:ext>
             </a:extLst>
           </p:cNvPr>
@@ -18548,7 +18560,7 @@
           <p:cNvPr id="14" name="Text 11">
             <a:extLst xmlns:a="http://schemas.openxmlformats.org/drawingml/2006/main">
               <a:ext uri="{FF2B5EF4-FFF2-40B4-BE49-F238E27FC236}">
-                <a16:creationId xmlns:a16="http://schemas.microsoft.com/office/drawing/2014/main" id="{070DB887-0D26-4CE6-BB31-29F24178DB38}"/>
+                <a16:creationId xmlns:a16="http://schemas.microsoft.com/office/drawing/2014/main" id="{5FA24466-6EDC-406B-B8A9-D824D1B0980C}"/>
               </a:ext>
             </a:extLst>
           </p:cNvPr>
@@ -18593,7 +18605,7 @@
           <p:cNvPr id="15" name="Text 12">
             <a:extLst xmlns:a="http://schemas.openxmlformats.org/drawingml/2006/main">
               <a:ext uri="{FF2B5EF4-FFF2-40B4-BE49-F238E27FC236}">
-                <a16:creationId xmlns:a16="http://schemas.microsoft.com/office/drawing/2014/main" id="{CDABDEA7-EB73-4B01-9DD3-F5ECF1CC2D18}"/>
+                <a16:creationId xmlns:a16="http://schemas.microsoft.com/office/drawing/2014/main" id="{393DF808-5D23-422A-A18B-5F6E177B9D09}"/>
               </a:ext>
             </a:extLst>
           </p:cNvPr>
@@ -18641,7 +18653,7 @@
           <p:cNvPr id="16" name="Shape 13">
             <a:extLst xmlns:a="http://schemas.openxmlformats.org/drawingml/2006/main">
               <a:ext uri="{FF2B5EF4-FFF2-40B4-BE49-F238E27FC236}">
-                <a16:creationId xmlns:a16="http://schemas.microsoft.com/office/drawing/2014/main" id="{D701F096-D1BC-46DC-9488-0785CE31F642}"/>
+                <a16:creationId xmlns:a16="http://schemas.microsoft.com/office/drawing/2014/main" id="{6D40F684-4CDE-4CEB-A185-8CF76B9B182B}"/>
               </a:ext>
             </a:extLst>
           </p:cNvPr>
@@ -18688,7 +18700,7 @@
           <p:cNvPr id="17" name="Text 14">
             <a:extLst xmlns:a="http://schemas.openxmlformats.org/drawingml/2006/main">
               <a:ext uri="{FF2B5EF4-FFF2-40B4-BE49-F238E27FC236}">
-                <a16:creationId xmlns:a16="http://schemas.microsoft.com/office/drawing/2014/main" id="{BDF027F2-E5E2-43EA-80DB-00ECDE5868B0}"/>
+                <a16:creationId xmlns:a16="http://schemas.microsoft.com/office/drawing/2014/main" id="{9E31FDD4-16BD-4491-A0D3-16CFA2F63744}"/>
               </a:ext>
             </a:extLst>
           </p:cNvPr>
@@ -18733,7 +18745,7 @@
           <p:cNvPr id="18" name="Text 15">
             <a:extLst xmlns:a="http://schemas.openxmlformats.org/drawingml/2006/main">
               <a:ext uri="{FF2B5EF4-FFF2-40B4-BE49-F238E27FC236}">
-                <a16:creationId xmlns:a16="http://schemas.microsoft.com/office/drawing/2014/main" id="{AECEE730-71E5-45A9-8630-4A90B513EFDF}"/>
+                <a16:creationId xmlns:a16="http://schemas.microsoft.com/office/drawing/2014/main" id="{D636444D-DE9B-423C-BC24-7250B5EB5A74}"/>
               </a:ext>
             </a:extLst>
           </p:cNvPr>
@@ -18781,7 +18793,7 @@
           <p:cNvPr id="19" name="Shape 16">
             <a:extLst xmlns:a="http://schemas.openxmlformats.org/drawingml/2006/main">
               <a:ext uri="{FF2B5EF4-FFF2-40B4-BE49-F238E27FC236}">
-                <a16:creationId xmlns:a16="http://schemas.microsoft.com/office/drawing/2014/main" id="{0F2AB561-6292-4CB6-BE89-9B7D180BAFB7}"/>
+                <a16:creationId xmlns:a16="http://schemas.microsoft.com/office/drawing/2014/main" id="{B0500DE4-6F7E-443B-9DD2-8AC3DF7E84C0}"/>
               </a:ext>
             </a:extLst>
           </p:cNvPr>
@@ -18828,7 +18840,7 @@
           <p:cNvPr id="20" name="Text 17">
             <a:extLst xmlns:a="http://schemas.openxmlformats.org/drawingml/2006/main">
               <a:ext uri="{FF2B5EF4-FFF2-40B4-BE49-F238E27FC236}">
-                <a16:creationId xmlns:a16="http://schemas.microsoft.com/office/drawing/2014/main" id="{644B07C3-379B-4991-89D3-A621FB24D42A}"/>
+                <a16:creationId xmlns:a16="http://schemas.microsoft.com/office/drawing/2014/main" id="{925E4CA0-874E-4511-8102-0F27E4DF2866}"/>
               </a:ext>
             </a:extLst>
           </p:cNvPr>
@@ -18873,7 +18885,7 @@
           <p:cNvPr id="21" name="Text 18">
             <a:extLst xmlns:a="http://schemas.openxmlformats.org/drawingml/2006/main">
               <a:ext uri="{FF2B5EF4-FFF2-40B4-BE49-F238E27FC236}">
-                <a16:creationId xmlns:a16="http://schemas.microsoft.com/office/drawing/2014/main" id="{C155D0F0-9D10-4450-909F-0F4DF22A4476}"/>
+                <a16:creationId xmlns:a16="http://schemas.microsoft.com/office/drawing/2014/main" id="{486E1845-39DD-4439-8EB3-5229C2FC79A0}"/>
               </a:ext>
             </a:extLst>
           </p:cNvPr>
@@ -18921,7 +18933,7 @@
           <p:cNvPr id="22" name="Shape 19">
             <a:extLst xmlns:a="http://schemas.openxmlformats.org/drawingml/2006/main">
               <a:ext uri="{FF2B5EF4-FFF2-40B4-BE49-F238E27FC236}">
-                <a16:creationId xmlns:a16="http://schemas.microsoft.com/office/drawing/2014/main" id="{F54CB5D5-BAE9-40F9-B5BA-B12B72CF173F}"/>
+                <a16:creationId xmlns:a16="http://schemas.microsoft.com/office/drawing/2014/main" id="{DC265A55-82AC-4D07-A1EB-9CA876D226B1}"/>
               </a:ext>
             </a:extLst>
           </p:cNvPr>
@@ -18968,7 +18980,7 @@
           <p:cNvPr id="23" name="Text 20">
             <a:extLst xmlns:a="http://schemas.openxmlformats.org/drawingml/2006/main">
               <a:ext uri="{FF2B5EF4-FFF2-40B4-BE49-F238E27FC236}">
-                <a16:creationId xmlns:a16="http://schemas.microsoft.com/office/drawing/2014/main" id="{AB90C9F5-E33F-4F9B-B2C2-F2190704ADAD}"/>
+                <a16:creationId xmlns:a16="http://schemas.microsoft.com/office/drawing/2014/main" id="{13BD151F-375E-4D72-9564-0242C3749C0D}"/>
               </a:ext>
             </a:extLst>
           </p:cNvPr>
@@ -19013,7 +19025,7 @@
           <p:cNvPr id="24" name="Text 21">
             <a:extLst xmlns:a="http://schemas.openxmlformats.org/drawingml/2006/main">
               <a:ext uri="{FF2B5EF4-FFF2-40B4-BE49-F238E27FC236}">
-                <a16:creationId xmlns:a16="http://schemas.microsoft.com/office/drawing/2014/main" id="{493F7286-402D-4834-AE13-B301CC838975}"/>
+                <a16:creationId xmlns:a16="http://schemas.microsoft.com/office/drawing/2014/main" id="{D87EF1AD-708B-4620-A29B-F00CC54D6A8C}"/>
               </a:ext>
             </a:extLst>
           </p:cNvPr>
@@ -19061,7 +19073,7 @@
           <p:cNvPr id="25" name="Shape 22">
             <a:extLst xmlns:a="http://schemas.openxmlformats.org/drawingml/2006/main">
               <a:ext uri="{FF2B5EF4-FFF2-40B4-BE49-F238E27FC236}">
-                <a16:creationId xmlns:a16="http://schemas.microsoft.com/office/drawing/2014/main" id="{BF193FBE-B09D-4BD7-83F2-D4786EA5B60F}"/>
+                <a16:creationId xmlns:a16="http://schemas.microsoft.com/office/drawing/2014/main" id="{7375B8E6-8262-4F0B-A01D-2556BCCE6A3F}"/>
               </a:ext>
             </a:extLst>
           </p:cNvPr>
@@ -19108,7 +19120,7 @@
           <p:cNvPr id="26" name="Text 23">
             <a:extLst xmlns:a="http://schemas.openxmlformats.org/drawingml/2006/main">
               <a:ext uri="{FF2B5EF4-FFF2-40B4-BE49-F238E27FC236}">
-                <a16:creationId xmlns:a16="http://schemas.microsoft.com/office/drawing/2014/main" id="{8B8F28AD-C461-44D3-BFB0-7663F70FC383}"/>
+                <a16:creationId xmlns:a16="http://schemas.microsoft.com/office/drawing/2014/main" id="{FF7C28D9-DF8F-470D-AA8E-B064C61EFB41}"/>
               </a:ext>
             </a:extLst>
           </p:cNvPr>
@@ -19153,7 +19165,7 @@
           <p:cNvPr id="27" name="Text 24">
             <a:extLst xmlns:a="http://schemas.openxmlformats.org/drawingml/2006/main">
               <a:ext uri="{FF2B5EF4-FFF2-40B4-BE49-F238E27FC236}">
-                <a16:creationId xmlns:a16="http://schemas.microsoft.com/office/drawing/2014/main" id="{36ADA37E-D1C5-46DB-BF07-17E074C22FC4}"/>
+                <a16:creationId xmlns:a16="http://schemas.microsoft.com/office/drawing/2014/main" id="{F90DD29E-DE11-4BEF-B98B-38039B91580D}"/>
               </a:ext>
             </a:extLst>
           </p:cNvPr>
@@ -19201,7 +19213,7 @@
           <p:cNvPr id="28" name="Text 25">
             <a:extLst xmlns:a="http://schemas.openxmlformats.org/drawingml/2006/main">
               <a:ext uri="{FF2B5EF4-FFF2-40B4-BE49-F238E27FC236}">
-                <a16:creationId xmlns:a16="http://schemas.microsoft.com/office/drawing/2014/main" id="{5F00A9D9-DD3E-4E22-B228-E4E3A60D7732}"/>
+                <a16:creationId xmlns:a16="http://schemas.microsoft.com/office/drawing/2014/main" id="{83699E44-7180-4CA2-81BC-AB23E260B536}"/>
               </a:ext>
             </a:extLst>
           </p:cNvPr>
@@ -19244,7 +19256,7 @@
     </p:spTree>
     <p:extLst>
       <p:ext uri="{BB962C8B-B14F-4D97-AF65-F5344CB8AC3E}">
-        <p14:creationId xmlns:p14="http://schemas.microsoft.com/office/powerpoint/2010/main" val="1884342912"/>
+        <p14:creationId xmlns:p14="http://schemas.microsoft.com/office/powerpoint/2010/main" val="11734618"/>
       </p:ext>
     </p:extLst>
   </p:cSld>
@@ -19275,7 +19287,7 @@
           <p:cNvPr id="2" name="Text 0">
             <a:extLst xmlns:a="http://schemas.openxmlformats.org/drawingml/2006/main">
               <a:ext uri="{FF2B5EF4-FFF2-40B4-BE49-F238E27FC236}">
-                <a16:creationId xmlns:a16="http://schemas.microsoft.com/office/drawing/2014/main" id="{66397A77-7806-4B2C-B108-501451B09991}"/>
+                <a16:creationId xmlns:a16="http://schemas.microsoft.com/office/drawing/2014/main" id="{4821F673-7DDF-4865-8EC4-8A2E7BBDEEFF}"/>
               </a:ext>
             </a:extLst>
           </p:cNvPr>
@@ -19320,7 +19332,7 @@
           <p:cNvPr id="3" name="Text 1">
             <a:extLst xmlns:a="http://schemas.openxmlformats.org/drawingml/2006/main">
               <a:ext uri="{FF2B5EF4-FFF2-40B4-BE49-F238E27FC236}">
-                <a16:creationId xmlns:a16="http://schemas.microsoft.com/office/drawing/2014/main" id="{2D69AD82-3DD1-45A0-8CDD-A8C8E949898D}"/>
+                <a16:creationId xmlns:a16="http://schemas.microsoft.com/office/drawing/2014/main" id="{6F657F30-0FD0-498F-BDE7-4B787BB139E2}"/>
               </a:ext>
             </a:extLst>
           </p:cNvPr>
@@ -19365,7 +19377,7 @@
           <p:cNvPr id="4" name="Text 2">
             <a:extLst xmlns:a="http://schemas.openxmlformats.org/drawingml/2006/main">
               <a:ext uri="{FF2B5EF4-FFF2-40B4-BE49-F238E27FC236}">
-                <a16:creationId xmlns:a16="http://schemas.microsoft.com/office/drawing/2014/main" id="{00B5C6AC-45D0-4FC5-853D-E6630F8076B6}"/>
+                <a16:creationId xmlns:a16="http://schemas.microsoft.com/office/drawing/2014/main" id="{F7FDF488-878D-4DB9-94D7-3A26B55071D3}"/>
               </a:ext>
             </a:extLst>
           </p:cNvPr>
@@ -19410,7 +19422,7 @@
           <p:cNvPr id="5" name="Text 3">
             <a:extLst xmlns:a="http://schemas.openxmlformats.org/drawingml/2006/main">
               <a:ext uri="{FF2B5EF4-FFF2-40B4-BE49-F238E27FC236}">
-                <a16:creationId xmlns:a16="http://schemas.microsoft.com/office/drawing/2014/main" id="{F33F60E5-8113-41A7-8F18-E5362D1FB87C}"/>
+                <a16:creationId xmlns:a16="http://schemas.microsoft.com/office/drawing/2014/main" id="{5E7BE4F2-7AC3-4D5A-B718-41A2928A8777}"/>
               </a:ext>
             </a:extLst>
           </p:cNvPr>
@@ -19455,7 +19467,7 @@
           <p:cNvPr id="6" name="Text 4">
             <a:extLst xmlns:a="http://schemas.openxmlformats.org/drawingml/2006/main">
               <a:ext uri="{FF2B5EF4-FFF2-40B4-BE49-F238E27FC236}">
-                <a16:creationId xmlns:a16="http://schemas.microsoft.com/office/drawing/2014/main" id="{60F17AB3-72B9-457F-A825-B5AB207D5F06}"/>
+                <a16:creationId xmlns:a16="http://schemas.microsoft.com/office/drawing/2014/main" id="{6B25FC00-DD2B-40C2-94F8-0ED166855AB2}"/>
               </a:ext>
             </a:extLst>
           </p:cNvPr>
@@ -19514,7 +19526,7 @@
           <p:cNvPr id="7" name="Text 5">
             <a:extLst xmlns:a="http://schemas.openxmlformats.org/drawingml/2006/main">
               <a:ext uri="{FF2B5EF4-FFF2-40B4-BE49-F238E27FC236}">
-                <a16:creationId xmlns:a16="http://schemas.microsoft.com/office/drawing/2014/main" id="{108D5F66-6BF0-4FB4-BA64-2F4C44571AB3}"/>
+                <a16:creationId xmlns:a16="http://schemas.microsoft.com/office/drawing/2014/main" id="{188D4145-9C7B-40EB-A463-378009E3E0BF}"/>
               </a:ext>
             </a:extLst>
           </p:cNvPr>
@@ -19559,7 +19571,7 @@
           <p:cNvPr id="8" name="Shape 6">
             <a:extLst xmlns:a="http://schemas.openxmlformats.org/drawingml/2006/main">
               <a:ext uri="{FF2B5EF4-FFF2-40B4-BE49-F238E27FC236}">
-                <a16:creationId xmlns:a16="http://schemas.microsoft.com/office/drawing/2014/main" id="{D11383C8-9304-4EBB-B9B3-1534F6F15719}"/>
+                <a16:creationId xmlns:a16="http://schemas.microsoft.com/office/drawing/2014/main" id="{F460FB3D-B5FC-4465-B2D8-1D8EA766E447}"/>
               </a:ext>
             </a:extLst>
           </p:cNvPr>
@@ -19606,7 +19618,7 @@
           <p:cNvPr id="9" name="Shape 7">
             <a:extLst xmlns:a="http://schemas.openxmlformats.org/drawingml/2006/main">
               <a:ext uri="{FF2B5EF4-FFF2-40B4-BE49-F238E27FC236}">
-                <a16:creationId xmlns:a16="http://schemas.microsoft.com/office/drawing/2014/main" id="{F6E6EB56-3C1D-4CE7-B13A-600F654DF1CC}"/>
+                <a16:creationId xmlns:a16="http://schemas.microsoft.com/office/drawing/2014/main" id="{E6DE435B-D449-49CE-97AD-2DF35ECF73C5}"/>
               </a:ext>
             </a:extLst>
           </p:cNvPr>
@@ -19644,7 +19656,7 @@
           <p:cNvPr id="10" name="Text 8">
             <a:extLst xmlns:a="http://schemas.openxmlformats.org/drawingml/2006/main">
               <a:ext uri="{FF2B5EF4-FFF2-40B4-BE49-F238E27FC236}">
-                <a16:creationId xmlns:a16="http://schemas.microsoft.com/office/drawing/2014/main" id="{9DDA3276-D48F-4154-B244-5839BAFB0DEC}"/>
+                <a16:creationId xmlns:a16="http://schemas.microsoft.com/office/drawing/2014/main" id="{C36AE5C2-1C7B-4F28-979D-073DB667A833}"/>
               </a:ext>
             </a:extLst>
           </p:cNvPr>
@@ -19689,7 +19701,7 @@
           <p:cNvPr id="11" name="Text 9">
             <a:extLst xmlns:a="http://schemas.openxmlformats.org/drawingml/2006/main">
               <a:ext uri="{FF2B5EF4-FFF2-40B4-BE49-F238E27FC236}">
-                <a16:creationId xmlns:a16="http://schemas.microsoft.com/office/drawing/2014/main" id="{2112B7D5-CD04-4DCE-B754-A28A1AB879E0}"/>
+                <a16:creationId xmlns:a16="http://schemas.microsoft.com/office/drawing/2014/main" id="{F1E3877D-6D0B-4858-9D9E-B05A0F85CB7D}"/>
               </a:ext>
             </a:extLst>
           </p:cNvPr>
@@ -19737,7 +19749,7 @@
           <p:cNvPr id="12" name="Text 10">
             <a:extLst xmlns:a="http://schemas.openxmlformats.org/drawingml/2006/main">
               <a:ext uri="{FF2B5EF4-FFF2-40B4-BE49-F238E27FC236}">
-                <a16:creationId xmlns:a16="http://schemas.microsoft.com/office/drawing/2014/main" id="{1D67D649-B7A4-4FFC-9534-4D4CD0B04F6C}"/>
+                <a16:creationId xmlns:a16="http://schemas.microsoft.com/office/drawing/2014/main" id="{89B47872-EBC0-485F-8446-964BD15861A8}"/>
               </a:ext>
             </a:extLst>
           </p:cNvPr>
@@ -19785,7 +19797,7 @@
           <p:cNvPr id="13" name="Shape 11">
             <a:extLst xmlns:a="http://schemas.openxmlformats.org/drawingml/2006/main">
               <a:ext uri="{FF2B5EF4-FFF2-40B4-BE49-F238E27FC236}">
-                <a16:creationId xmlns:a16="http://schemas.microsoft.com/office/drawing/2014/main" id="{C2933D0C-9E71-41D0-B43F-9FB0BA3FA95B}"/>
+                <a16:creationId xmlns:a16="http://schemas.microsoft.com/office/drawing/2014/main" id="{F02C8F91-37C9-4F7C-BB75-5360AA4BC1B1}"/>
               </a:ext>
             </a:extLst>
           </p:cNvPr>
@@ -19832,7 +19844,7 @@
           <p:cNvPr id="14" name="Shape 12">
             <a:extLst xmlns:a="http://schemas.openxmlformats.org/drawingml/2006/main">
               <a:ext uri="{FF2B5EF4-FFF2-40B4-BE49-F238E27FC236}">
-                <a16:creationId xmlns:a16="http://schemas.microsoft.com/office/drawing/2014/main" id="{07B9BAFC-67E9-4E74-B10E-0310251D1764}"/>
+                <a16:creationId xmlns:a16="http://schemas.microsoft.com/office/drawing/2014/main" id="{120E5738-735C-4A35-9B96-AECD44513CBE}"/>
               </a:ext>
             </a:extLst>
           </p:cNvPr>
@@ -19870,7 +19882,7 @@
           <p:cNvPr id="15" name="Text 13">
             <a:extLst xmlns:a="http://schemas.openxmlformats.org/drawingml/2006/main">
               <a:ext uri="{FF2B5EF4-FFF2-40B4-BE49-F238E27FC236}">
-                <a16:creationId xmlns:a16="http://schemas.microsoft.com/office/drawing/2014/main" id="{169BF2E1-936D-470F-91D9-C971EE98BFC6}"/>
+                <a16:creationId xmlns:a16="http://schemas.microsoft.com/office/drawing/2014/main" id="{8D9C84D4-C5C0-4BF3-A564-380955924A13}"/>
               </a:ext>
             </a:extLst>
           </p:cNvPr>
@@ -19915,7 +19927,7 @@
           <p:cNvPr id="16" name="Text 14">
             <a:extLst xmlns:a="http://schemas.openxmlformats.org/drawingml/2006/main">
               <a:ext uri="{FF2B5EF4-FFF2-40B4-BE49-F238E27FC236}">
-                <a16:creationId xmlns:a16="http://schemas.microsoft.com/office/drawing/2014/main" id="{C525A08D-539A-4BD3-9D9A-7EE90C01CDFD}"/>
+                <a16:creationId xmlns:a16="http://schemas.microsoft.com/office/drawing/2014/main" id="{5716223A-AEB7-4FD0-B5CE-5C327A48E70D}"/>
               </a:ext>
             </a:extLst>
           </p:cNvPr>
@@ -19963,7 +19975,7 @@
           <p:cNvPr id="17" name="Text 15">
             <a:extLst xmlns:a="http://schemas.openxmlformats.org/drawingml/2006/main">
               <a:ext uri="{FF2B5EF4-FFF2-40B4-BE49-F238E27FC236}">
-                <a16:creationId xmlns:a16="http://schemas.microsoft.com/office/drawing/2014/main" id="{40D64B4A-CE2B-4A01-8724-ED4A74C93039}"/>
+                <a16:creationId xmlns:a16="http://schemas.microsoft.com/office/drawing/2014/main" id="{21AB890A-76F5-4BAD-9F76-4E3F9AFCE3D7}"/>
               </a:ext>
             </a:extLst>
           </p:cNvPr>
@@ -20011,7 +20023,7 @@
           <p:cNvPr id="18" name="Shape 16">
             <a:extLst xmlns:a="http://schemas.openxmlformats.org/drawingml/2006/main">
               <a:ext uri="{FF2B5EF4-FFF2-40B4-BE49-F238E27FC236}">
-                <a16:creationId xmlns:a16="http://schemas.microsoft.com/office/drawing/2014/main" id="{DD92FD2D-BCFD-4F0D-A70C-38ADC61E19A1}"/>
+                <a16:creationId xmlns:a16="http://schemas.microsoft.com/office/drawing/2014/main" id="{D5B30607-7DAF-4EF3-9D86-0E183C0CDF4A}"/>
               </a:ext>
             </a:extLst>
           </p:cNvPr>
@@ -20058,7 +20070,7 @@
           <p:cNvPr id="19" name="Shape 17">
             <a:extLst xmlns:a="http://schemas.openxmlformats.org/drawingml/2006/main">
               <a:ext uri="{FF2B5EF4-FFF2-40B4-BE49-F238E27FC236}">
-                <a16:creationId xmlns:a16="http://schemas.microsoft.com/office/drawing/2014/main" id="{9B674616-5CD8-456E-AAE6-F89DFA76EEC0}"/>
+                <a16:creationId xmlns:a16="http://schemas.microsoft.com/office/drawing/2014/main" id="{FA872E8D-02BA-40E0-9044-D209D1F6A8D3}"/>
               </a:ext>
             </a:extLst>
           </p:cNvPr>
@@ -20096,7 +20108,7 @@
           <p:cNvPr id="20" name="Text 18">
             <a:extLst xmlns:a="http://schemas.openxmlformats.org/drawingml/2006/main">
               <a:ext uri="{FF2B5EF4-FFF2-40B4-BE49-F238E27FC236}">
-                <a16:creationId xmlns:a16="http://schemas.microsoft.com/office/drawing/2014/main" id="{B6F2F8CD-F69E-449F-94DB-45D5F7B53DC1}"/>
+                <a16:creationId xmlns:a16="http://schemas.microsoft.com/office/drawing/2014/main" id="{FBF78AE7-C754-41B0-BB93-32A9AD48CACA}"/>
               </a:ext>
             </a:extLst>
           </p:cNvPr>
@@ -20141,7 +20153,7 @@
           <p:cNvPr id="21" name="Text 19">
             <a:extLst xmlns:a="http://schemas.openxmlformats.org/drawingml/2006/main">
               <a:ext uri="{FF2B5EF4-FFF2-40B4-BE49-F238E27FC236}">
-                <a16:creationId xmlns:a16="http://schemas.microsoft.com/office/drawing/2014/main" id="{E3176B18-9BA0-4ABC-B63E-69C7D6316B4E}"/>
+                <a16:creationId xmlns:a16="http://schemas.microsoft.com/office/drawing/2014/main" id="{678E4642-49AF-4D12-83B8-C70046A752CB}"/>
               </a:ext>
             </a:extLst>
           </p:cNvPr>
@@ -20189,7 +20201,7 @@
           <p:cNvPr id="22" name="Text 20">
             <a:extLst xmlns:a="http://schemas.openxmlformats.org/drawingml/2006/main">
               <a:ext uri="{FF2B5EF4-FFF2-40B4-BE49-F238E27FC236}">
-                <a16:creationId xmlns:a16="http://schemas.microsoft.com/office/drawing/2014/main" id="{C2FD6EA2-BB9F-4017-A5D9-E75847A75996}"/>
+                <a16:creationId xmlns:a16="http://schemas.microsoft.com/office/drawing/2014/main" id="{85D080BB-C6ED-4AC4-97C2-4E74BE0EC3A1}"/>
               </a:ext>
             </a:extLst>
           </p:cNvPr>
@@ -20237,7 +20249,7 @@
           <p:cNvPr id="23" name="Shape 21">
             <a:extLst xmlns:a="http://schemas.openxmlformats.org/drawingml/2006/main">
               <a:ext uri="{FF2B5EF4-FFF2-40B4-BE49-F238E27FC236}">
-                <a16:creationId xmlns:a16="http://schemas.microsoft.com/office/drawing/2014/main" id="{39429F5B-9982-46AF-9AF9-2CCA64F08F23}"/>
+                <a16:creationId xmlns:a16="http://schemas.microsoft.com/office/drawing/2014/main" id="{40A5C583-2B30-4491-8E8F-A4DF358E72F3}"/>
               </a:ext>
             </a:extLst>
           </p:cNvPr>
@@ -20284,7 +20296,7 @@
           <p:cNvPr id="24" name="Shape 22">
             <a:extLst xmlns:a="http://schemas.openxmlformats.org/drawingml/2006/main">
               <a:ext uri="{FF2B5EF4-FFF2-40B4-BE49-F238E27FC236}">
-                <a16:creationId xmlns:a16="http://schemas.microsoft.com/office/drawing/2014/main" id="{67342B5A-14C6-4926-AEA4-3223F653B0C0}"/>
+                <a16:creationId xmlns:a16="http://schemas.microsoft.com/office/drawing/2014/main" id="{B420A09C-2582-49B5-BD76-02CCD2A6D9B3}"/>
               </a:ext>
             </a:extLst>
           </p:cNvPr>
@@ -20322,7 +20334,7 @@
           <p:cNvPr id="25" name="Text 23">
             <a:extLst xmlns:a="http://schemas.openxmlformats.org/drawingml/2006/main">
               <a:ext uri="{FF2B5EF4-FFF2-40B4-BE49-F238E27FC236}">
-                <a16:creationId xmlns:a16="http://schemas.microsoft.com/office/drawing/2014/main" id="{FE418E73-2101-49CC-A38E-4C19DE449A1C}"/>
+                <a16:creationId xmlns:a16="http://schemas.microsoft.com/office/drawing/2014/main" id="{A1076141-6AE3-4DDB-BE71-F16DA4B5320D}"/>
               </a:ext>
             </a:extLst>
           </p:cNvPr>
@@ -20367,7 +20379,7 @@
           <p:cNvPr id="26" name="Text 24">
             <a:extLst xmlns:a="http://schemas.openxmlformats.org/drawingml/2006/main">
               <a:ext uri="{FF2B5EF4-FFF2-40B4-BE49-F238E27FC236}">
-                <a16:creationId xmlns:a16="http://schemas.microsoft.com/office/drawing/2014/main" id="{7C2DB2DA-5062-404D-A21A-A9937945E0E9}"/>
+                <a16:creationId xmlns:a16="http://schemas.microsoft.com/office/drawing/2014/main" id="{D6C12CBF-AB26-4E2E-BC54-3CF14952DFB3}"/>
               </a:ext>
             </a:extLst>
           </p:cNvPr>
@@ -20415,7 +20427,7 @@
           <p:cNvPr id="27" name="Text 25">
             <a:extLst xmlns:a="http://schemas.openxmlformats.org/drawingml/2006/main">
               <a:ext uri="{FF2B5EF4-FFF2-40B4-BE49-F238E27FC236}">
-                <a16:creationId xmlns:a16="http://schemas.microsoft.com/office/drawing/2014/main" id="{3CAE8D69-3246-4BC5-B6A1-AF83FD75B23C}"/>
+                <a16:creationId xmlns:a16="http://schemas.microsoft.com/office/drawing/2014/main" id="{B359AC5B-F005-4F49-BDCE-0AD58230E4FD}"/>
               </a:ext>
             </a:extLst>
           </p:cNvPr>
@@ -20463,7 +20475,7 @@
           <p:cNvPr id="28" name="Shape 26">
             <a:extLst xmlns:a="http://schemas.openxmlformats.org/drawingml/2006/main">
               <a:ext uri="{FF2B5EF4-FFF2-40B4-BE49-F238E27FC236}">
-                <a16:creationId xmlns:a16="http://schemas.microsoft.com/office/drawing/2014/main" id="{93FAA3BA-A376-4D5D-B44B-F3B5974F8244}"/>
+                <a16:creationId xmlns:a16="http://schemas.microsoft.com/office/drawing/2014/main" id="{77778F5B-71DD-4356-B685-0E4F71E7DD39}"/>
               </a:ext>
             </a:extLst>
           </p:cNvPr>
@@ -20510,7 +20522,7 @@
           <p:cNvPr id="29" name="Text 27">
             <a:extLst xmlns:a="http://schemas.openxmlformats.org/drawingml/2006/main">
               <a:ext uri="{FF2B5EF4-FFF2-40B4-BE49-F238E27FC236}">
-                <a16:creationId xmlns:a16="http://schemas.microsoft.com/office/drawing/2014/main" id="{D942F297-3020-4007-83D1-D34E61ADC65A}"/>
+                <a16:creationId xmlns:a16="http://schemas.microsoft.com/office/drawing/2014/main" id="{1FF5DB31-36D3-4A03-ACCA-5DCEDC94A9C3}"/>
               </a:ext>
             </a:extLst>
           </p:cNvPr>
@@ -20555,7 +20567,7 @@
           <p:cNvPr id="30" name="Text 28">
             <a:extLst xmlns:a="http://schemas.openxmlformats.org/drawingml/2006/main">
               <a:ext uri="{FF2B5EF4-FFF2-40B4-BE49-F238E27FC236}">
-                <a16:creationId xmlns:a16="http://schemas.microsoft.com/office/drawing/2014/main" id="{9534BFC3-0836-452A-8E84-81B0C98E853A}"/>
+                <a16:creationId xmlns:a16="http://schemas.microsoft.com/office/drawing/2014/main" id="{9F84ED43-7AA2-4333-9530-13A2374364A0}"/>
               </a:ext>
             </a:extLst>
           </p:cNvPr>
@@ -20603,7 +20615,7 @@
           <p:cNvPr id="31" name="Shape 29">
             <a:extLst xmlns:a="http://schemas.openxmlformats.org/drawingml/2006/main">
               <a:ext uri="{FF2B5EF4-FFF2-40B4-BE49-F238E27FC236}">
-                <a16:creationId xmlns:a16="http://schemas.microsoft.com/office/drawing/2014/main" id="{3EEBCC7F-6754-461E-9662-3106A7070B8B}"/>
+                <a16:creationId xmlns:a16="http://schemas.microsoft.com/office/drawing/2014/main" id="{14467AC7-DD15-48E0-BF37-3918861CF95C}"/>
               </a:ext>
             </a:extLst>
           </p:cNvPr>
@@ -20650,7 +20662,7 @@
           <p:cNvPr id="32" name="Text 30">
             <a:extLst xmlns:a="http://schemas.openxmlformats.org/drawingml/2006/main">
               <a:ext uri="{FF2B5EF4-FFF2-40B4-BE49-F238E27FC236}">
-                <a16:creationId xmlns:a16="http://schemas.microsoft.com/office/drawing/2014/main" id="{DC21DD72-1738-4356-9D02-3E97B706148A}"/>
+                <a16:creationId xmlns:a16="http://schemas.microsoft.com/office/drawing/2014/main" id="{DEB9E126-1643-4CB7-AF0B-32BFB30F1959}"/>
               </a:ext>
             </a:extLst>
           </p:cNvPr>
@@ -20695,7 +20707,7 @@
           <p:cNvPr id="33" name="Text 31">
             <a:extLst xmlns:a="http://schemas.openxmlformats.org/drawingml/2006/main">
               <a:ext uri="{FF2B5EF4-FFF2-40B4-BE49-F238E27FC236}">
-                <a16:creationId xmlns:a16="http://schemas.microsoft.com/office/drawing/2014/main" id="{46AA2F0A-29E8-42C1-86B5-2545083D8B97}"/>
+                <a16:creationId xmlns:a16="http://schemas.microsoft.com/office/drawing/2014/main" id="{3B809124-0ABE-473F-B944-9FE783A031BC}"/>
               </a:ext>
             </a:extLst>
           </p:cNvPr>
@@ -20743,7 +20755,7 @@
           <p:cNvPr id="34" name="Text 32">
             <a:extLst xmlns:a="http://schemas.openxmlformats.org/drawingml/2006/main">
               <a:ext uri="{FF2B5EF4-FFF2-40B4-BE49-F238E27FC236}">
-                <a16:creationId xmlns:a16="http://schemas.microsoft.com/office/drawing/2014/main" id="{933BD004-E3C5-4821-83D3-596DD399F033}"/>
+                <a16:creationId xmlns:a16="http://schemas.microsoft.com/office/drawing/2014/main" id="{8D74C65D-3B47-46DA-8632-5280F7EA7557}"/>
               </a:ext>
             </a:extLst>
           </p:cNvPr>
@@ -20786,7 +20798,7 @@
     </p:spTree>
     <p:extLst>
       <p:ext uri="{BB962C8B-B14F-4D97-AF65-F5344CB8AC3E}">
-        <p14:creationId xmlns:p14="http://schemas.microsoft.com/office/powerpoint/2010/main" val="781843047"/>
+        <p14:creationId xmlns:p14="http://schemas.microsoft.com/office/powerpoint/2010/main" val="716447601"/>
       </p:ext>
     </p:extLst>
   </p:cSld>
@@ -20817,7 +20829,7 @@
           <p:cNvPr id="2" name="Text 0">
             <a:extLst xmlns:a="http://schemas.openxmlformats.org/drawingml/2006/main">
               <a:ext uri="{FF2B5EF4-FFF2-40B4-BE49-F238E27FC236}">
-                <a16:creationId xmlns:a16="http://schemas.microsoft.com/office/drawing/2014/main" id="{75B581A0-13E3-48C7-BF80-E7E26214069B}"/>
+                <a16:creationId xmlns:a16="http://schemas.microsoft.com/office/drawing/2014/main" id="{8E3F032C-D25F-4585-A7FF-6CC83698BC6A}"/>
               </a:ext>
             </a:extLst>
           </p:cNvPr>
@@ -20862,7 +20874,7 @@
           <p:cNvPr id="3" name="Text 1">
             <a:extLst xmlns:a="http://schemas.openxmlformats.org/drawingml/2006/main">
               <a:ext uri="{FF2B5EF4-FFF2-40B4-BE49-F238E27FC236}">
-                <a16:creationId xmlns:a16="http://schemas.microsoft.com/office/drawing/2014/main" id="{1844ECE5-887D-4A22-ABDF-7512D4815905}"/>
+                <a16:creationId xmlns:a16="http://schemas.microsoft.com/office/drawing/2014/main" id="{AA93A86D-EECB-4D09-AEEB-E6F412DCAF06}"/>
               </a:ext>
             </a:extLst>
           </p:cNvPr>
@@ -20907,7 +20919,7 @@
           <p:cNvPr id="4" name="Text 2">
             <a:extLst xmlns:a="http://schemas.openxmlformats.org/drawingml/2006/main">
               <a:ext uri="{FF2B5EF4-FFF2-40B4-BE49-F238E27FC236}">
-                <a16:creationId xmlns:a16="http://schemas.microsoft.com/office/drawing/2014/main" id="{A966F9F8-5094-40A6-97A9-276697AA093B}"/>
+                <a16:creationId xmlns:a16="http://schemas.microsoft.com/office/drawing/2014/main" id="{63398244-6090-4BFF-8527-9C0D16216319}"/>
               </a:ext>
             </a:extLst>
           </p:cNvPr>
@@ -20952,7 +20964,7 @@
           <p:cNvPr id="5" name="Text 3">
             <a:extLst xmlns:a="http://schemas.openxmlformats.org/drawingml/2006/main">
               <a:ext uri="{FF2B5EF4-FFF2-40B4-BE49-F238E27FC236}">
-                <a16:creationId xmlns:a16="http://schemas.microsoft.com/office/drawing/2014/main" id="{52DE7541-418B-4BBF-BEC9-4EAC88EE8109}"/>
+                <a16:creationId xmlns:a16="http://schemas.microsoft.com/office/drawing/2014/main" id="{D1480F4A-9610-4C68-9AF8-FE62CCE57377}"/>
               </a:ext>
             </a:extLst>
           </p:cNvPr>
@@ -20997,7 +21009,7 @@
           <p:cNvPr id="6" name="Shape 4">
             <a:extLst xmlns:a="http://schemas.openxmlformats.org/drawingml/2006/main">
               <a:ext uri="{FF2B5EF4-FFF2-40B4-BE49-F238E27FC236}">
-                <a16:creationId xmlns:a16="http://schemas.microsoft.com/office/drawing/2014/main" id="{3A07636D-C302-4334-99FE-BB23B734C5AE}"/>
+                <a16:creationId xmlns:a16="http://schemas.microsoft.com/office/drawing/2014/main" id="{6BD3F316-1314-4940-8E3F-F5A39B4BD84A}"/>
               </a:ext>
             </a:extLst>
           </p:cNvPr>
@@ -21044,7 +21056,7 @@
           <p:cNvPr id="7" name="Text 5">
             <a:extLst xmlns:a="http://schemas.openxmlformats.org/drawingml/2006/main">
               <a:ext uri="{FF2B5EF4-FFF2-40B4-BE49-F238E27FC236}">
-                <a16:creationId xmlns:a16="http://schemas.microsoft.com/office/drawing/2014/main" id="{53838216-C21E-447C-A034-165D69BFFC68}"/>
+                <a16:creationId xmlns:a16="http://schemas.microsoft.com/office/drawing/2014/main" id="{A696AC94-4EE9-4FA0-BD03-2459CD66D4F3}"/>
               </a:ext>
             </a:extLst>
           </p:cNvPr>
@@ -21089,7 +21101,7 @@
           <p:cNvPr id="8" name="Text 6">
             <a:extLst xmlns:a="http://schemas.openxmlformats.org/drawingml/2006/main">
               <a:ext uri="{FF2B5EF4-FFF2-40B4-BE49-F238E27FC236}">
-                <a16:creationId xmlns:a16="http://schemas.microsoft.com/office/drawing/2014/main" id="{45A5A1D8-A781-47AA-9E45-509DA1FCA06A}"/>
+                <a16:creationId xmlns:a16="http://schemas.microsoft.com/office/drawing/2014/main" id="{FFA3A40F-19A4-4C70-9D1E-442837DFCB91}"/>
               </a:ext>
             </a:extLst>
           </p:cNvPr>
@@ -21134,7 +21146,7 @@
           <p:cNvPr id="9" name="Text 7">
             <a:extLst xmlns:a="http://schemas.openxmlformats.org/drawingml/2006/main">
               <a:ext uri="{FF2B5EF4-FFF2-40B4-BE49-F238E27FC236}">
-                <a16:creationId xmlns:a16="http://schemas.microsoft.com/office/drawing/2014/main" id="{3BF0C8A7-0AB5-4E12-94F5-A89C97A39D21}"/>
+                <a16:creationId xmlns:a16="http://schemas.microsoft.com/office/drawing/2014/main" id="{CDEEDF83-31CA-4E9A-A864-BB968BA9E50A}"/>
               </a:ext>
             </a:extLst>
           </p:cNvPr>
@@ -21179,7 +21191,7 @@
           <p:cNvPr id="10" name="Text 8">
             <a:extLst xmlns:a="http://schemas.openxmlformats.org/drawingml/2006/main">
               <a:ext uri="{FF2B5EF4-FFF2-40B4-BE49-F238E27FC236}">
-                <a16:creationId xmlns:a16="http://schemas.microsoft.com/office/drawing/2014/main" id="{D6012347-EF2E-4418-BAE4-7FA50C8D531D}"/>
+                <a16:creationId xmlns:a16="http://schemas.microsoft.com/office/drawing/2014/main" id="{D0C9BD12-45C8-48C0-BC58-AF6E701BE504}"/>
               </a:ext>
             </a:extLst>
           </p:cNvPr>
@@ -21224,7 +21236,7 @@
           <p:cNvPr id="11" name="Text 9">
             <a:extLst xmlns:a="http://schemas.openxmlformats.org/drawingml/2006/main">
               <a:ext uri="{FF2B5EF4-FFF2-40B4-BE49-F238E27FC236}">
-                <a16:creationId xmlns:a16="http://schemas.microsoft.com/office/drawing/2014/main" id="{9CDE7853-76F4-4415-ADC6-D3188F55E5BE}"/>
+                <a16:creationId xmlns:a16="http://schemas.microsoft.com/office/drawing/2014/main" id="{BA6DFC75-7B96-413C-8760-6BBF2921BD71}"/>
               </a:ext>
             </a:extLst>
           </p:cNvPr>
@@ -21269,7 +21281,7 @@
           <p:cNvPr id="12" name="Text 10">
             <a:extLst xmlns:a="http://schemas.openxmlformats.org/drawingml/2006/main">
               <a:ext uri="{FF2B5EF4-FFF2-40B4-BE49-F238E27FC236}">
-                <a16:creationId xmlns:a16="http://schemas.microsoft.com/office/drawing/2014/main" id="{6FE4F4E2-7EB3-4170-A0DC-D1359B214D7C}"/>
+                <a16:creationId xmlns:a16="http://schemas.microsoft.com/office/drawing/2014/main" id="{1A1CF3E1-1F53-488E-BD6D-22DEC515FBCF}"/>
               </a:ext>
             </a:extLst>
           </p:cNvPr>
@@ -21314,7 +21326,7 @@
           <p:cNvPr id="13" name="Text 11">
             <a:extLst xmlns:a="http://schemas.openxmlformats.org/drawingml/2006/main">
               <a:ext uri="{FF2B5EF4-FFF2-40B4-BE49-F238E27FC236}">
-                <a16:creationId xmlns:a16="http://schemas.microsoft.com/office/drawing/2014/main" id="{CABDA575-927C-4E82-B404-F234BE736F11}"/>
+                <a16:creationId xmlns:a16="http://schemas.microsoft.com/office/drawing/2014/main" id="{DC7AF2AD-9D01-4A96-9758-CC5517DAAA0D}"/>
               </a:ext>
             </a:extLst>
           </p:cNvPr>
@@ -21359,7 +21371,7 @@
           <p:cNvPr id="14" name="Text 12">
             <a:extLst xmlns:a="http://schemas.openxmlformats.org/drawingml/2006/main">
               <a:ext uri="{FF2B5EF4-FFF2-40B4-BE49-F238E27FC236}">
-                <a16:creationId xmlns:a16="http://schemas.microsoft.com/office/drawing/2014/main" id="{89BAA964-FECA-477D-94F9-320620DAE6B5}"/>
+                <a16:creationId xmlns:a16="http://schemas.microsoft.com/office/drawing/2014/main" id="{3B967263-5B1D-4EFA-BD61-C19F6DED6512}"/>
               </a:ext>
             </a:extLst>
           </p:cNvPr>
@@ -21404,7 +21416,7 @@
           <p:cNvPr id="15" name="Text 13">
             <a:extLst xmlns:a="http://schemas.openxmlformats.org/drawingml/2006/main">
               <a:ext uri="{FF2B5EF4-FFF2-40B4-BE49-F238E27FC236}">
-                <a16:creationId xmlns:a16="http://schemas.microsoft.com/office/drawing/2014/main" id="{C6D62987-955E-4615-92FD-E6C617BC98A6}"/>
+                <a16:creationId xmlns:a16="http://schemas.microsoft.com/office/drawing/2014/main" id="{2D9C33EC-F984-4D1D-980B-EEF93D35CA72}"/>
               </a:ext>
             </a:extLst>
           </p:cNvPr>
@@ -21449,7 +21461,7 @@
           <p:cNvPr id="16" name="Text 14">
             <a:extLst xmlns:a="http://schemas.openxmlformats.org/drawingml/2006/main">
               <a:ext uri="{FF2B5EF4-FFF2-40B4-BE49-F238E27FC236}">
-                <a16:creationId xmlns:a16="http://schemas.microsoft.com/office/drawing/2014/main" id="{5F612F14-6D8F-4C5D-A651-11D0C2201110}"/>
+                <a16:creationId xmlns:a16="http://schemas.microsoft.com/office/drawing/2014/main" id="{FF60723B-8349-403F-A53A-A0327C891B1E}"/>
               </a:ext>
             </a:extLst>
           </p:cNvPr>
@@ -21494,7 +21506,7 @@
           <p:cNvPr id="17" name="Text 15">
             <a:extLst xmlns:a="http://schemas.openxmlformats.org/drawingml/2006/main">
               <a:ext uri="{FF2B5EF4-FFF2-40B4-BE49-F238E27FC236}">
-                <a16:creationId xmlns:a16="http://schemas.microsoft.com/office/drawing/2014/main" id="{DD678503-8245-4969-B5AC-E8ADFB9973B2}"/>
+                <a16:creationId xmlns:a16="http://schemas.microsoft.com/office/drawing/2014/main" id="{033BE9AF-2C6C-462A-86AF-A0E9780A1A2F}"/>
               </a:ext>
             </a:extLst>
           </p:cNvPr>
@@ -21542,7 +21554,7 @@
           <p:cNvPr id="18" name="Shape 16">
             <a:extLst xmlns:a="http://schemas.openxmlformats.org/drawingml/2006/main">
               <a:ext uri="{FF2B5EF4-FFF2-40B4-BE49-F238E27FC236}">
-                <a16:creationId xmlns:a16="http://schemas.microsoft.com/office/drawing/2014/main" id="{20C4ED8F-6ECB-455D-94E4-D97CEEBD1119}"/>
+                <a16:creationId xmlns:a16="http://schemas.microsoft.com/office/drawing/2014/main" id="{AA1A7F52-4F04-4FBF-B92A-A345026E9BC6}"/>
               </a:ext>
             </a:extLst>
           </p:cNvPr>
@@ -21589,7 +21601,7 @@
           <p:cNvPr id="19" name="Text 17">
             <a:extLst xmlns:a="http://schemas.openxmlformats.org/drawingml/2006/main">
               <a:ext uri="{FF2B5EF4-FFF2-40B4-BE49-F238E27FC236}">
-                <a16:creationId xmlns:a16="http://schemas.microsoft.com/office/drawing/2014/main" id="{524289B0-2FD4-4814-86C8-F31253DCECAF}"/>
+                <a16:creationId xmlns:a16="http://schemas.microsoft.com/office/drawing/2014/main" id="{E8154E67-F9A2-44B5-A741-8C69DD6DDA00}"/>
               </a:ext>
             </a:extLst>
           </p:cNvPr>
@@ -21634,7 +21646,7 @@
           <p:cNvPr id="20" name="Text 18">
             <a:extLst xmlns:a="http://schemas.openxmlformats.org/drawingml/2006/main">
               <a:ext uri="{FF2B5EF4-FFF2-40B4-BE49-F238E27FC236}">
-                <a16:creationId xmlns:a16="http://schemas.microsoft.com/office/drawing/2014/main" id="{F97F7DBE-B487-4296-B578-E156749FB85C}"/>
+                <a16:creationId xmlns:a16="http://schemas.microsoft.com/office/drawing/2014/main" id="{49502C56-F0AC-4DDC-995D-57D9BC0C1006}"/>
               </a:ext>
             </a:extLst>
           </p:cNvPr>
@@ -21679,7 +21691,7 @@
           <p:cNvPr id="21" name="Text 19">
             <a:extLst xmlns:a="http://schemas.openxmlformats.org/drawingml/2006/main">
               <a:ext uri="{FF2B5EF4-FFF2-40B4-BE49-F238E27FC236}">
-                <a16:creationId xmlns:a16="http://schemas.microsoft.com/office/drawing/2014/main" id="{7632F33F-5ABF-4C32-A7C3-62EA6752BDBB}"/>
+                <a16:creationId xmlns:a16="http://schemas.microsoft.com/office/drawing/2014/main" id="{E94C5A0C-BDDD-41F4-BCC0-7346B1715F32}"/>
               </a:ext>
             </a:extLst>
           </p:cNvPr>
@@ -21724,7 +21736,7 @@
           <p:cNvPr id="22" name="Text 20">
             <a:extLst xmlns:a="http://schemas.openxmlformats.org/drawingml/2006/main">
               <a:ext uri="{FF2B5EF4-FFF2-40B4-BE49-F238E27FC236}">
-                <a16:creationId xmlns:a16="http://schemas.microsoft.com/office/drawing/2014/main" id="{0F46A0B3-DFF1-409B-80ED-111FEAB10E51}"/>
+                <a16:creationId xmlns:a16="http://schemas.microsoft.com/office/drawing/2014/main" id="{77E7C9ED-BC41-4BD6-97C3-517173C7FD5B}"/>
               </a:ext>
             </a:extLst>
           </p:cNvPr>
@@ -21769,7 +21781,7 @@
           <p:cNvPr id="23" name="Text 21">
             <a:extLst xmlns:a="http://schemas.openxmlformats.org/drawingml/2006/main">
               <a:ext uri="{FF2B5EF4-FFF2-40B4-BE49-F238E27FC236}">
-                <a16:creationId xmlns:a16="http://schemas.microsoft.com/office/drawing/2014/main" id="{C806EDEF-D6A2-4338-AC31-C998A9409EC4}"/>
+                <a16:creationId xmlns:a16="http://schemas.microsoft.com/office/drawing/2014/main" id="{3642335A-7AAD-42E4-A729-0FE55400A6D1}"/>
               </a:ext>
             </a:extLst>
           </p:cNvPr>
@@ -21814,7 +21826,7 @@
           <p:cNvPr id="24" name="Text 22">
             <a:extLst xmlns:a="http://schemas.openxmlformats.org/drawingml/2006/main">
               <a:ext uri="{FF2B5EF4-FFF2-40B4-BE49-F238E27FC236}">
-                <a16:creationId xmlns:a16="http://schemas.microsoft.com/office/drawing/2014/main" id="{D65A2B10-A252-44B7-B63B-7B4AFDC6A291}"/>
+                <a16:creationId xmlns:a16="http://schemas.microsoft.com/office/drawing/2014/main" id="{46CDE77F-EFAF-436D-8FF0-B135CF59A108}"/>
               </a:ext>
             </a:extLst>
           </p:cNvPr>
@@ -21859,7 +21871,7 @@
           <p:cNvPr id="25" name="Text 23">
             <a:extLst xmlns:a="http://schemas.openxmlformats.org/drawingml/2006/main">
               <a:ext uri="{FF2B5EF4-FFF2-40B4-BE49-F238E27FC236}">
-                <a16:creationId xmlns:a16="http://schemas.microsoft.com/office/drawing/2014/main" id="{B9162762-8190-4D70-A180-A1278FBDCB48}"/>
+                <a16:creationId xmlns:a16="http://schemas.microsoft.com/office/drawing/2014/main" id="{519A63CD-332C-41F3-98F7-8EE4F35DE4F8}"/>
               </a:ext>
             </a:extLst>
           </p:cNvPr>
@@ -21904,7 +21916,7 @@
           <p:cNvPr id="26" name="Text 24">
             <a:extLst xmlns:a="http://schemas.openxmlformats.org/drawingml/2006/main">
               <a:ext uri="{FF2B5EF4-FFF2-40B4-BE49-F238E27FC236}">
-                <a16:creationId xmlns:a16="http://schemas.microsoft.com/office/drawing/2014/main" id="{E79CB1CC-B37A-4906-9AB5-27BD39797E8D}"/>
+                <a16:creationId xmlns:a16="http://schemas.microsoft.com/office/drawing/2014/main" id="{9DAFEC9E-D11A-45AC-89CA-062B2050E56E}"/>
               </a:ext>
             </a:extLst>
           </p:cNvPr>
@@ -21949,7 +21961,7 @@
           <p:cNvPr id="27" name="Text 25">
             <a:extLst xmlns:a="http://schemas.openxmlformats.org/drawingml/2006/main">
               <a:ext uri="{FF2B5EF4-FFF2-40B4-BE49-F238E27FC236}">
-                <a16:creationId xmlns:a16="http://schemas.microsoft.com/office/drawing/2014/main" id="{20C10BF4-DA9A-4A2B-B825-DDBA2B8D70C7}"/>
+                <a16:creationId xmlns:a16="http://schemas.microsoft.com/office/drawing/2014/main" id="{6407689E-BCAC-4097-8A9D-46C135040BF9}"/>
               </a:ext>
             </a:extLst>
           </p:cNvPr>
@@ -21994,7 +22006,7 @@
           <p:cNvPr id="28" name="Text 26">
             <a:extLst xmlns:a="http://schemas.openxmlformats.org/drawingml/2006/main">
               <a:ext uri="{FF2B5EF4-FFF2-40B4-BE49-F238E27FC236}">
-                <a16:creationId xmlns:a16="http://schemas.microsoft.com/office/drawing/2014/main" id="{17C33B8B-4A43-4DA4-97F1-BC4CA231B6B3}"/>
+                <a16:creationId xmlns:a16="http://schemas.microsoft.com/office/drawing/2014/main" id="{EBC973A9-801C-41EF-A907-18372F0D0C6D}"/>
               </a:ext>
             </a:extLst>
           </p:cNvPr>
@@ -22039,7 +22051,7 @@
           <p:cNvPr id="29" name="Text 27">
             <a:extLst xmlns:a="http://schemas.openxmlformats.org/drawingml/2006/main">
               <a:ext uri="{FF2B5EF4-FFF2-40B4-BE49-F238E27FC236}">
-                <a16:creationId xmlns:a16="http://schemas.microsoft.com/office/drawing/2014/main" id="{9FF1BF1D-7506-4E98-A0C7-22EC882DBD1F}"/>
+                <a16:creationId xmlns:a16="http://schemas.microsoft.com/office/drawing/2014/main" id="{2320FFBC-5637-4A74-BD9F-7A989B610415}"/>
               </a:ext>
             </a:extLst>
           </p:cNvPr>
@@ -22087,7 +22099,7 @@
           <p:cNvPr id="30" name="Shape 28">
             <a:extLst xmlns:a="http://schemas.openxmlformats.org/drawingml/2006/main">
               <a:ext uri="{FF2B5EF4-FFF2-40B4-BE49-F238E27FC236}">
-                <a16:creationId xmlns:a16="http://schemas.microsoft.com/office/drawing/2014/main" id="{9C02F703-197B-4A53-B9A5-25B4D57C2939}"/>
+                <a16:creationId xmlns:a16="http://schemas.microsoft.com/office/drawing/2014/main" id="{575D170A-AB71-44AE-A6B7-BD35300E8410}"/>
               </a:ext>
             </a:extLst>
           </p:cNvPr>
@@ -22134,7 +22146,7 @@
           <p:cNvPr id="31" name="Shape 29">
             <a:extLst xmlns:a="http://schemas.openxmlformats.org/drawingml/2006/main">
               <a:ext uri="{FF2B5EF4-FFF2-40B4-BE49-F238E27FC236}">
-                <a16:creationId xmlns:a16="http://schemas.microsoft.com/office/drawing/2014/main" id="{02690300-0A62-4E9F-95BA-29C274B5FAA3}"/>
+                <a16:creationId xmlns:a16="http://schemas.microsoft.com/office/drawing/2014/main" id="{399F185D-E60A-4CCE-A744-522FD1034806}"/>
               </a:ext>
             </a:extLst>
           </p:cNvPr>
@@ -22172,7 +22184,7 @@
           <p:cNvPr id="32" name="Text 30">
             <a:extLst xmlns:a="http://schemas.openxmlformats.org/drawingml/2006/main">
               <a:ext uri="{FF2B5EF4-FFF2-40B4-BE49-F238E27FC236}">
-                <a16:creationId xmlns:a16="http://schemas.microsoft.com/office/drawing/2014/main" id="{846A87DB-7AFC-433E-A155-90ECEED3B345}"/>
+                <a16:creationId xmlns:a16="http://schemas.microsoft.com/office/drawing/2014/main" id="{C4B57419-3704-4836-B10B-403823CD0FCB}"/>
               </a:ext>
             </a:extLst>
           </p:cNvPr>
@@ -22217,7 +22229,7 @@
           <p:cNvPr id="33" name="Text 31">
             <a:extLst xmlns:a="http://schemas.openxmlformats.org/drawingml/2006/main">
               <a:ext uri="{FF2B5EF4-FFF2-40B4-BE49-F238E27FC236}">
-                <a16:creationId xmlns:a16="http://schemas.microsoft.com/office/drawing/2014/main" id="{F1C1F781-96C9-45F7-BDCD-EC895DA202B1}"/>
+                <a16:creationId xmlns:a16="http://schemas.microsoft.com/office/drawing/2014/main" id="{DC33878E-656A-4A71-9384-BE03387BF4B2}"/>
               </a:ext>
             </a:extLst>
           </p:cNvPr>
@@ -22262,7 +22274,7 @@
           <p:cNvPr id="34" name="Text 32">
             <a:extLst xmlns:a="http://schemas.openxmlformats.org/drawingml/2006/main">
               <a:ext uri="{FF2B5EF4-FFF2-40B4-BE49-F238E27FC236}">
-                <a16:creationId xmlns:a16="http://schemas.microsoft.com/office/drawing/2014/main" id="{00FE17CE-52AC-4B8F-9904-5562A42C1B3D}"/>
+                <a16:creationId xmlns:a16="http://schemas.microsoft.com/office/drawing/2014/main" id="{5B707EB1-9AEB-4D4A-92B7-16252FE4DFF3}"/>
               </a:ext>
             </a:extLst>
           </p:cNvPr>
@@ -22310,7 +22322,7 @@
           <p:cNvPr id="35" name="Text 33">
             <a:extLst xmlns:a="http://schemas.openxmlformats.org/drawingml/2006/main">
               <a:ext uri="{FF2B5EF4-FFF2-40B4-BE49-F238E27FC236}">
-                <a16:creationId xmlns:a16="http://schemas.microsoft.com/office/drawing/2014/main" id="{0E929226-17C6-45B0-901B-FF42056DC568}"/>
+                <a16:creationId xmlns:a16="http://schemas.microsoft.com/office/drawing/2014/main" id="{7E348B89-99D2-4DC7-8EEA-4C914D11F149}"/>
               </a:ext>
             </a:extLst>
           </p:cNvPr>
@@ -22356,7 +22368,7 @@
     </p:spTree>
     <p:extLst>
       <p:ext uri="{BB962C8B-B14F-4D97-AF65-F5344CB8AC3E}">
-        <p14:creationId xmlns:p14="http://schemas.microsoft.com/office/powerpoint/2010/main" val="1197467510"/>
+        <p14:creationId xmlns:p14="http://schemas.microsoft.com/office/powerpoint/2010/main" val="1890896495"/>
       </p:ext>
     </p:extLst>
   </p:cSld>
@@ -22387,7 +22399,7 @@
           <p:cNvPr id="2" name="Text 0">
             <a:extLst xmlns:a="http://schemas.openxmlformats.org/drawingml/2006/main">
               <a:ext uri="{FF2B5EF4-FFF2-40B4-BE49-F238E27FC236}">
-                <a16:creationId xmlns:a16="http://schemas.microsoft.com/office/drawing/2014/main" id="{059392E6-7BC2-4AE4-B116-0635B70082A6}"/>
+                <a16:creationId xmlns:a16="http://schemas.microsoft.com/office/drawing/2014/main" id="{6E42CDD7-4211-449D-83B9-341058FA45BA}"/>
               </a:ext>
             </a:extLst>
           </p:cNvPr>
@@ -22432,7 +22444,7 @@
           <p:cNvPr id="3" name="Text 1">
             <a:extLst xmlns:a="http://schemas.openxmlformats.org/drawingml/2006/main">
               <a:ext uri="{FF2B5EF4-FFF2-40B4-BE49-F238E27FC236}">
-                <a16:creationId xmlns:a16="http://schemas.microsoft.com/office/drawing/2014/main" id="{5781948E-2BC4-4B4B-BA7D-D6DEDC0098F1}"/>
+                <a16:creationId xmlns:a16="http://schemas.microsoft.com/office/drawing/2014/main" id="{BE79CD0C-2B11-4BCC-A317-BA4B212A7560}"/>
               </a:ext>
             </a:extLst>
           </p:cNvPr>
@@ -22477,7 +22489,7 @@
           <p:cNvPr id="4" name="Text 2">
             <a:extLst xmlns:a="http://schemas.openxmlformats.org/drawingml/2006/main">
               <a:ext uri="{FF2B5EF4-FFF2-40B4-BE49-F238E27FC236}">
-                <a16:creationId xmlns:a16="http://schemas.microsoft.com/office/drawing/2014/main" id="{4A594072-A72D-4466-8908-1019B67BEEEE}"/>
+                <a16:creationId xmlns:a16="http://schemas.microsoft.com/office/drawing/2014/main" id="{3570640A-3AE3-4301-A297-66397EDFB929}"/>
               </a:ext>
             </a:extLst>
           </p:cNvPr>
@@ -22522,7 +22534,7 @@
           <p:cNvPr id="5" name="Text 3">
             <a:extLst xmlns:a="http://schemas.openxmlformats.org/drawingml/2006/main">
               <a:ext uri="{FF2B5EF4-FFF2-40B4-BE49-F238E27FC236}">
-                <a16:creationId xmlns:a16="http://schemas.microsoft.com/office/drawing/2014/main" id="{6D93CA6D-EF59-43D9-8F34-A090A5AA8B96}"/>
+                <a16:creationId xmlns:a16="http://schemas.microsoft.com/office/drawing/2014/main" id="{859F5A76-1A19-4F21-B825-04DD44B26A77}"/>
               </a:ext>
             </a:extLst>
           </p:cNvPr>
@@ -22574,7 +22586,7 @@
         </p:xfrm>
         <a:graphic xmlns:a="http://schemas.openxmlformats.org/drawingml/2006/main">
           <a:graphicData uri="http://schemas.openxmlformats.org/drawingml/2006/chart">
-            <c:chart xmlns:r="http://schemas.openxmlformats.org/officeDocument/2006/relationships" xmlns:c="http://schemas.openxmlformats.org/drawingml/2006/chart" r:id="Rfbebbb71ebe74ee5"/>
+            <c:chart xmlns:r="http://schemas.openxmlformats.org/officeDocument/2006/relationships" xmlns:c="http://schemas.openxmlformats.org/drawingml/2006/chart" r:id="Rf7e89719cfc84b8b"/>
           </a:graphicData>
         </a:graphic>
       </p:graphicFrame>
@@ -22583,7 +22595,7 @@
           <p:cNvPr id="7" name="Shape 4">
             <a:extLst xmlns:a="http://schemas.openxmlformats.org/drawingml/2006/main">
               <a:ext uri="{FF2B5EF4-FFF2-40B4-BE49-F238E27FC236}">
-                <a16:creationId xmlns:a16="http://schemas.microsoft.com/office/drawing/2014/main" id="{B20A263F-FABB-4506-BD82-A42BB4DCAA72}"/>
+                <a16:creationId xmlns:a16="http://schemas.microsoft.com/office/drawing/2014/main" id="{07BED1E1-6750-4CC2-AA8C-71A0C5770277}"/>
               </a:ext>
             </a:extLst>
           </p:cNvPr>
@@ -22630,7 +22642,7 @@
           <p:cNvPr id="8" name="Text 5">
             <a:extLst xmlns:a="http://schemas.openxmlformats.org/drawingml/2006/main">
               <a:ext uri="{FF2B5EF4-FFF2-40B4-BE49-F238E27FC236}">
-                <a16:creationId xmlns:a16="http://schemas.microsoft.com/office/drawing/2014/main" id="{13DB7385-08F3-4260-8E8D-0CCAB9E197E5}"/>
+                <a16:creationId xmlns:a16="http://schemas.microsoft.com/office/drawing/2014/main" id="{C43D8500-6186-4031-BBB6-194214E2DA53}"/>
               </a:ext>
             </a:extLst>
           </p:cNvPr>
@@ -22678,7 +22690,7 @@
           <p:cNvPr id="9" name="Text 6">
             <a:extLst xmlns:a="http://schemas.openxmlformats.org/drawingml/2006/main">
               <a:ext uri="{FF2B5EF4-FFF2-40B4-BE49-F238E27FC236}">
-                <a16:creationId xmlns:a16="http://schemas.microsoft.com/office/drawing/2014/main" id="{78CA008E-62CF-43DC-96C6-D7AB66C1E0C9}"/>
+                <a16:creationId xmlns:a16="http://schemas.microsoft.com/office/drawing/2014/main" id="{1263DA13-21FD-4B14-BC4A-15FC11F87C88}"/>
               </a:ext>
             </a:extLst>
           </p:cNvPr>
@@ -22726,7 +22738,7 @@
           <p:cNvPr id="10" name="Shape 7">
             <a:extLst xmlns:a="http://schemas.openxmlformats.org/drawingml/2006/main">
               <a:ext uri="{FF2B5EF4-FFF2-40B4-BE49-F238E27FC236}">
-                <a16:creationId xmlns:a16="http://schemas.microsoft.com/office/drawing/2014/main" id="{183E4612-80ED-4B60-8590-8BE585E0E994}"/>
+                <a16:creationId xmlns:a16="http://schemas.microsoft.com/office/drawing/2014/main" id="{EF807858-8A9F-483A-874A-A15CCBD500B4}"/>
               </a:ext>
             </a:extLst>
           </p:cNvPr>
@@ -22773,7 +22785,7 @@
           <p:cNvPr id="11" name="Text 8">
             <a:extLst xmlns:a="http://schemas.openxmlformats.org/drawingml/2006/main">
               <a:ext uri="{FF2B5EF4-FFF2-40B4-BE49-F238E27FC236}">
-                <a16:creationId xmlns:a16="http://schemas.microsoft.com/office/drawing/2014/main" id="{D832ECA8-2418-498A-BDAC-174D5B14ACE8}"/>
+                <a16:creationId xmlns:a16="http://schemas.microsoft.com/office/drawing/2014/main" id="{EA9184DB-138F-4183-9782-53783E101EDA}"/>
               </a:ext>
             </a:extLst>
           </p:cNvPr>
@@ -22821,7 +22833,7 @@
           <p:cNvPr id="12" name="Text 9">
             <a:extLst xmlns:a="http://schemas.openxmlformats.org/drawingml/2006/main">
               <a:ext uri="{FF2B5EF4-FFF2-40B4-BE49-F238E27FC236}">
-                <a16:creationId xmlns:a16="http://schemas.microsoft.com/office/drawing/2014/main" id="{58AAAAD9-1441-41DC-84A6-4BA787A2CB72}"/>
+                <a16:creationId xmlns:a16="http://schemas.microsoft.com/office/drawing/2014/main" id="{6F91352F-F5AE-4011-B936-2C354E8264C7}"/>
               </a:ext>
             </a:extLst>
           </p:cNvPr>
@@ -22869,7 +22881,7 @@
           <p:cNvPr id="13" name="Shape 10">
             <a:extLst xmlns:a="http://schemas.openxmlformats.org/drawingml/2006/main">
               <a:ext uri="{FF2B5EF4-FFF2-40B4-BE49-F238E27FC236}">
-                <a16:creationId xmlns:a16="http://schemas.microsoft.com/office/drawing/2014/main" id="{7ACA5692-8EA7-4DE0-8DF4-6D09F8CCF87B}"/>
+                <a16:creationId xmlns:a16="http://schemas.microsoft.com/office/drawing/2014/main" id="{02DF17B6-B52B-4213-A066-9C578D9D4888}"/>
               </a:ext>
             </a:extLst>
           </p:cNvPr>
@@ -22916,7 +22928,7 @@
           <p:cNvPr id="14" name="Text 11">
             <a:extLst xmlns:a="http://schemas.openxmlformats.org/drawingml/2006/main">
               <a:ext uri="{FF2B5EF4-FFF2-40B4-BE49-F238E27FC236}">
-                <a16:creationId xmlns:a16="http://schemas.microsoft.com/office/drawing/2014/main" id="{0C34D275-11A4-45D3-B732-FCE331326073}"/>
+                <a16:creationId xmlns:a16="http://schemas.microsoft.com/office/drawing/2014/main" id="{BBB5A4AD-DD14-4F2C-8897-16178C93DE83}"/>
               </a:ext>
             </a:extLst>
           </p:cNvPr>
@@ -22964,7 +22976,7 @@
           <p:cNvPr id="15" name="Text 12">
             <a:extLst xmlns:a="http://schemas.openxmlformats.org/drawingml/2006/main">
               <a:ext uri="{FF2B5EF4-FFF2-40B4-BE49-F238E27FC236}">
-                <a16:creationId xmlns:a16="http://schemas.microsoft.com/office/drawing/2014/main" id="{ED3B050D-6772-453B-B61C-35B49583677F}"/>
+                <a16:creationId xmlns:a16="http://schemas.microsoft.com/office/drawing/2014/main" id="{F9D28600-AE56-4137-835C-CA049ED468E6}"/>
               </a:ext>
             </a:extLst>
           </p:cNvPr>
@@ -23012,7 +23024,7 @@
           <p:cNvPr id="16" name="Shape 13">
             <a:extLst xmlns:a="http://schemas.openxmlformats.org/drawingml/2006/main">
               <a:ext uri="{FF2B5EF4-FFF2-40B4-BE49-F238E27FC236}">
-                <a16:creationId xmlns:a16="http://schemas.microsoft.com/office/drawing/2014/main" id="{605CD892-9A5F-4497-96BC-56092924FFFF}"/>
+                <a16:creationId xmlns:a16="http://schemas.microsoft.com/office/drawing/2014/main" id="{0470E3F2-F547-400C-A6B9-C86F9DA31267}"/>
               </a:ext>
             </a:extLst>
           </p:cNvPr>
@@ -23052,7 +23064,7 @@
           <p:cNvPr id="17" name="Text 14">
             <a:extLst xmlns:a="http://schemas.openxmlformats.org/drawingml/2006/main">
               <a:ext uri="{FF2B5EF4-FFF2-40B4-BE49-F238E27FC236}">
-                <a16:creationId xmlns:a16="http://schemas.microsoft.com/office/drawing/2014/main" id="{19CD50CB-9585-4A04-B8B9-F1B08913032D}"/>
+                <a16:creationId xmlns:a16="http://schemas.microsoft.com/office/drawing/2014/main" id="{8E0F12B6-DD51-41F1-A604-37D51F5615AE}"/>
               </a:ext>
             </a:extLst>
           </p:cNvPr>
@@ -23109,7 +23121,7 @@
     </p:spTree>
     <p:extLst>
       <p:ext uri="{BB962C8B-B14F-4D97-AF65-F5344CB8AC3E}">
-        <p14:creationId xmlns:p14="http://schemas.microsoft.com/office/powerpoint/2010/main" val="886417927"/>
+        <p14:creationId xmlns:p14="http://schemas.microsoft.com/office/powerpoint/2010/main" val="710459316"/>
       </p:ext>
     </p:extLst>
   </p:cSld>
@@ -23140,7 +23152,7 @@
           <p:cNvPr id="2" name="Text 0">
             <a:extLst xmlns:a="http://schemas.openxmlformats.org/drawingml/2006/main">
               <a:ext uri="{FF2B5EF4-FFF2-40B4-BE49-F238E27FC236}">
-                <a16:creationId xmlns:a16="http://schemas.microsoft.com/office/drawing/2014/main" id="{443626E8-1061-4744-BBEC-BAAE516F02AF}"/>
+                <a16:creationId xmlns:a16="http://schemas.microsoft.com/office/drawing/2014/main" id="{FBC6A6CE-9F0C-40EE-AC35-D7A16ECCB166}"/>
               </a:ext>
             </a:extLst>
           </p:cNvPr>
@@ -23185,7 +23197,7 @@
           <p:cNvPr id="3" name="Text 1">
             <a:extLst xmlns:a="http://schemas.openxmlformats.org/drawingml/2006/main">
               <a:ext uri="{FF2B5EF4-FFF2-40B4-BE49-F238E27FC236}">
-                <a16:creationId xmlns:a16="http://schemas.microsoft.com/office/drawing/2014/main" id="{D4B4D3DB-B166-4ECA-9090-4E161B92F494}"/>
+                <a16:creationId xmlns:a16="http://schemas.microsoft.com/office/drawing/2014/main" id="{E07F6890-C811-46F7-80E6-42831AC9DD44}"/>
               </a:ext>
             </a:extLst>
           </p:cNvPr>
@@ -23230,7 +23242,7 @@
           <p:cNvPr id="4" name="Text 2">
             <a:extLst xmlns:a="http://schemas.openxmlformats.org/drawingml/2006/main">
               <a:ext uri="{FF2B5EF4-FFF2-40B4-BE49-F238E27FC236}">
-                <a16:creationId xmlns:a16="http://schemas.microsoft.com/office/drawing/2014/main" id="{48D36649-F9FC-46DA-AD35-EBA1F56F6407}"/>
+                <a16:creationId xmlns:a16="http://schemas.microsoft.com/office/drawing/2014/main" id="{27FB6F4A-E7E6-42B0-9254-BDF9FEEB2A5A}"/>
               </a:ext>
             </a:extLst>
           </p:cNvPr>
@@ -23275,7 +23287,7 @@
           <p:cNvPr id="5" name="Text 3">
             <a:extLst xmlns:a="http://schemas.openxmlformats.org/drawingml/2006/main">
               <a:ext uri="{FF2B5EF4-FFF2-40B4-BE49-F238E27FC236}">
-                <a16:creationId xmlns:a16="http://schemas.microsoft.com/office/drawing/2014/main" id="{45772990-5544-4061-89D8-7C98A1658892}"/>
+                <a16:creationId xmlns:a16="http://schemas.microsoft.com/office/drawing/2014/main" id="{96EDC97A-1BDF-4A8E-975F-BF2890467C10}"/>
               </a:ext>
             </a:extLst>
           </p:cNvPr>
@@ -23320,7 +23332,7 @@
           <p:cNvPr id="6" name="Text 4">
             <a:extLst xmlns:a="http://schemas.openxmlformats.org/drawingml/2006/main">
               <a:ext uri="{FF2B5EF4-FFF2-40B4-BE49-F238E27FC236}">
-                <a16:creationId xmlns:a16="http://schemas.microsoft.com/office/drawing/2014/main" id="{09E1C720-1A2E-4F9B-A858-DA0EF8B705CE}"/>
+                <a16:creationId xmlns:a16="http://schemas.microsoft.com/office/drawing/2014/main" id="{7F2D473F-985E-45EC-B66F-69CA8F95D27D}"/>
               </a:ext>
             </a:extLst>
           </p:cNvPr>
@@ -23368,7 +23380,7 @@
           <p:cNvPr id="7" name="Text 5">
             <a:extLst xmlns:a="http://schemas.openxmlformats.org/drawingml/2006/main">
               <a:ext uri="{FF2B5EF4-FFF2-40B4-BE49-F238E27FC236}">
-                <a16:creationId xmlns:a16="http://schemas.microsoft.com/office/drawing/2014/main" id="{6CC3FFDF-C634-4518-AB2D-575AF1729C19}"/>
+                <a16:creationId xmlns:a16="http://schemas.microsoft.com/office/drawing/2014/main" id="{6DC29F87-C3C8-4DC9-8BA8-97250D814178}"/>
               </a:ext>
             </a:extLst>
           </p:cNvPr>
@@ -24673,7 +24685,7 @@
           <p:cNvPr id="9" name="Shape 6">
             <a:extLst xmlns:a="http://schemas.openxmlformats.org/drawingml/2006/main">
               <a:ext uri="{FF2B5EF4-FFF2-40B4-BE49-F238E27FC236}">
-                <a16:creationId xmlns:a16="http://schemas.microsoft.com/office/drawing/2014/main" id="{1F3C4023-21FB-42E5-8A51-1324F7ADEF43}"/>
+                <a16:creationId xmlns:a16="http://schemas.microsoft.com/office/drawing/2014/main" id="{08D8B07D-161E-41EC-A4A2-4AE25AF019E8}"/>
               </a:ext>
             </a:extLst>
           </p:cNvPr>
@@ -24720,7 +24732,7 @@
           <p:cNvPr id="10" name="Text 7">
             <a:extLst xmlns:a="http://schemas.openxmlformats.org/drawingml/2006/main">
               <a:ext uri="{FF2B5EF4-FFF2-40B4-BE49-F238E27FC236}">
-                <a16:creationId xmlns:a16="http://schemas.microsoft.com/office/drawing/2014/main" id="{EBD1AA50-483A-4FC0-BFDD-9071A853B1B9}"/>
+                <a16:creationId xmlns:a16="http://schemas.microsoft.com/office/drawing/2014/main" id="{5B43D450-2D5D-48B5-8ACE-579DF8A54F4B}"/>
               </a:ext>
             </a:extLst>
           </p:cNvPr>
@@ -24768,7 +24780,7 @@
           <p:cNvPr id="11" name="Shape 8">
             <a:extLst xmlns:a="http://schemas.openxmlformats.org/drawingml/2006/main">
               <a:ext uri="{FF2B5EF4-FFF2-40B4-BE49-F238E27FC236}">
-                <a16:creationId xmlns:a16="http://schemas.microsoft.com/office/drawing/2014/main" id="{40AD9056-809E-4088-B916-2E057F18B9B3}"/>
+                <a16:creationId xmlns:a16="http://schemas.microsoft.com/office/drawing/2014/main" id="{0DF2ABBC-85CC-4894-813D-D8170F33E898}"/>
               </a:ext>
             </a:extLst>
           </p:cNvPr>
@@ -24815,7 +24827,7 @@
           <p:cNvPr id="12" name="Shape 9">
             <a:extLst xmlns:a="http://schemas.openxmlformats.org/drawingml/2006/main">
               <a:ext uri="{FF2B5EF4-FFF2-40B4-BE49-F238E27FC236}">
-                <a16:creationId xmlns:a16="http://schemas.microsoft.com/office/drawing/2014/main" id="{90A99EE7-358E-490B-B83D-E3AAE2418A52}"/>
+                <a16:creationId xmlns:a16="http://schemas.microsoft.com/office/drawing/2014/main" id="{398D3420-B7ED-467B-9EDA-D2E4B402B58B}"/>
               </a:ext>
             </a:extLst>
           </p:cNvPr>
@@ -24853,7 +24865,7 @@
           <p:cNvPr id="13" name="Text 10">
             <a:extLst xmlns:a="http://schemas.openxmlformats.org/drawingml/2006/main">
               <a:ext uri="{FF2B5EF4-FFF2-40B4-BE49-F238E27FC236}">
-                <a16:creationId xmlns:a16="http://schemas.microsoft.com/office/drawing/2014/main" id="{D5F79568-529B-4372-ACC3-06316CBE80A3}"/>
+                <a16:creationId xmlns:a16="http://schemas.microsoft.com/office/drawing/2014/main" id="{3041BF9B-F22B-40BE-B3E0-7ABB099567AD}"/>
               </a:ext>
             </a:extLst>
           </p:cNvPr>
@@ -24898,7 +24910,7 @@
           <p:cNvPr id="14" name="Text 11">
             <a:extLst xmlns:a="http://schemas.openxmlformats.org/drawingml/2006/main">
               <a:ext uri="{FF2B5EF4-FFF2-40B4-BE49-F238E27FC236}">
-                <a16:creationId xmlns:a16="http://schemas.microsoft.com/office/drawing/2014/main" id="{4F416914-E7D1-4855-9ADF-99BB049492FD}"/>
+                <a16:creationId xmlns:a16="http://schemas.microsoft.com/office/drawing/2014/main" id="{6B2CA800-0CCD-41FB-B109-2C1628E53F4F}"/>
               </a:ext>
             </a:extLst>
           </p:cNvPr>
@@ -24943,7 +24955,7 @@
           <p:cNvPr id="15" name="Text 12">
             <a:extLst xmlns:a="http://schemas.openxmlformats.org/drawingml/2006/main">
               <a:ext uri="{FF2B5EF4-FFF2-40B4-BE49-F238E27FC236}">
-                <a16:creationId xmlns:a16="http://schemas.microsoft.com/office/drawing/2014/main" id="{4D8202FD-0364-4929-BBC7-1196597BD721}"/>
+                <a16:creationId xmlns:a16="http://schemas.microsoft.com/office/drawing/2014/main" id="{724DAE22-27E9-4BA5-B764-36F51D0B9DCA}"/>
               </a:ext>
             </a:extLst>
           </p:cNvPr>
@@ -25038,7 +25050,7 @@
           <p:cNvPr id="16" name="Shape 13">
             <a:extLst xmlns:a="http://schemas.openxmlformats.org/drawingml/2006/main">
               <a:ext uri="{FF2B5EF4-FFF2-40B4-BE49-F238E27FC236}">
-                <a16:creationId xmlns:a16="http://schemas.microsoft.com/office/drawing/2014/main" id="{9406E63F-8AC7-4CC2-AF0D-2A6FB16E725E}"/>
+                <a16:creationId xmlns:a16="http://schemas.microsoft.com/office/drawing/2014/main" id="{50E3D1BF-DBB0-4260-BDEB-41F90CB58079}"/>
               </a:ext>
             </a:extLst>
           </p:cNvPr>
@@ -25085,7 +25097,7 @@
           <p:cNvPr id="17" name="Shape 14">
             <a:extLst xmlns:a="http://schemas.openxmlformats.org/drawingml/2006/main">
               <a:ext uri="{FF2B5EF4-FFF2-40B4-BE49-F238E27FC236}">
-                <a16:creationId xmlns:a16="http://schemas.microsoft.com/office/drawing/2014/main" id="{E92DD719-2413-4295-BCA3-A63472EACB6B}"/>
+                <a16:creationId xmlns:a16="http://schemas.microsoft.com/office/drawing/2014/main" id="{FC4DD8D8-17B5-4397-874A-BE8A7E739E29}"/>
               </a:ext>
             </a:extLst>
           </p:cNvPr>
@@ -25123,7 +25135,7 @@
           <p:cNvPr id="18" name="Text 15">
             <a:extLst xmlns:a="http://schemas.openxmlformats.org/drawingml/2006/main">
               <a:ext uri="{FF2B5EF4-FFF2-40B4-BE49-F238E27FC236}">
-                <a16:creationId xmlns:a16="http://schemas.microsoft.com/office/drawing/2014/main" id="{FF156D8B-009F-4C3E-BD51-F4A8E48E0121}"/>
+                <a16:creationId xmlns:a16="http://schemas.microsoft.com/office/drawing/2014/main" id="{FAD6C25A-DAC3-4B38-95A0-DA49A029A733}"/>
               </a:ext>
             </a:extLst>
           </p:cNvPr>
@@ -25168,7 +25180,7 @@
           <p:cNvPr id="19" name="Text 16">
             <a:extLst xmlns:a="http://schemas.openxmlformats.org/drawingml/2006/main">
               <a:ext uri="{FF2B5EF4-FFF2-40B4-BE49-F238E27FC236}">
-                <a16:creationId xmlns:a16="http://schemas.microsoft.com/office/drawing/2014/main" id="{01960C03-B4B0-406D-95BE-ACE3EEAB411B}"/>
+                <a16:creationId xmlns:a16="http://schemas.microsoft.com/office/drawing/2014/main" id="{90E16726-DD65-4809-90DC-4D3E9D838E9E}"/>
               </a:ext>
             </a:extLst>
           </p:cNvPr>
@@ -25213,7 +25225,7 @@
           <p:cNvPr id="20" name="Text 17">
             <a:extLst xmlns:a="http://schemas.openxmlformats.org/drawingml/2006/main">
               <a:ext uri="{FF2B5EF4-FFF2-40B4-BE49-F238E27FC236}">
-                <a16:creationId xmlns:a16="http://schemas.microsoft.com/office/drawing/2014/main" id="{9581DA24-30B5-45C5-8C60-7C5E524AF388}"/>
+                <a16:creationId xmlns:a16="http://schemas.microsoft.com/office/drawing/2014/main" id="{470567E6-9FA9-40B2-B4E4-DBA2328F915D}"/>
               </a:ext>
             </a:extLst>
           </p:cNvPr>
@@ -25308,7 +25320,7 @@
           <p:cNvPr id="21" name="Shape 18">
             <a:extLst xmlns:a="http://schemas.openxmlformats.org/drawingml/2006/main">
               <a:ext uri="{FF2B5EF4-FFF2-40B4-BE49-F238E27FC236}">
-                <a16:creationId xmlns:a16="http://schemas.microsoft.com/office/drawing/2014/main" id="{06D3AA9D-9E1F-4A66-ADFA-EFB3C966472D}"/>
+                <a16:creationId xmlns:a16="http://schemas.microsoft.com/office/drawing/2014/main" id="{8C7EFCD5-4CA7-4C80-BBCA-1FA489843EDB}"/>
               </a:ext>
             </a:extLst>
           </p:cNvPr>
@@ -25355,7 +25367,7 @@
           <p:cNvPr id="8" name="Text 19">
             <a:extLst xmlns:a="http://schemas.openxmlformats.org/drawingml/2006/main">
               <a:ext uri="{FF2B5EF4-FFF2-40B4-BE49-F238E27FC236}">
-                <a16:creationId xmlns:a16="http://schemas.microsoft.com/office/drawing/2014/main" id="{A01BF5B7-7983-4994-A188-96A0C33DDD92}"/>
+                <a16:creationId xmlns:a16="http://schemas.microsoft.com/office/drawing/2014/main" id="{14A6AA90-4F74-454D-91AE-3E4E095D9FFD}"/>
               </a:ext>
             </a:extLst>
           </p:cNvPr>
@@ -25400,7 +25412,7 @@
           <p:cNvPr id="23" name="Text 20">
             <a:extLst xmlns:a="http://schemas.openxmlformats.org/drawingml/2006/main">
               <a:ext uri="{FF2B5EF4-FFF2-40B4-BE49-F238E27FC236}">
-                <a16:creationId xmlns:a16="http://schemas.microsoft.com/office/drawing/2014/main" id="{DCA9657D-DA26-4F10-BE03-247530161919}"/>
+                <a16:creationId xmlns:a16="http://schemas.microsoft.com/office/drawing/2014/main" id="{6B892196-2A1E-4EB7-8238-15B36016FAC6}"/>
               </a:ext>
             </a:extLst>
           </p:cNvPr>
@@ -25446,7 +25458,7 @@
     </p:spTree>
     <p:extLst>
       <p:ext uri="{BB962C8B-B14F-4D97-AF65-F5344CB8AC3E}">
-        <p14:creationId xmlns:p14="http://schemas.microsoft.com/office/powerpoint/2010/main" val="131281640"/>
+        <p14:creationId xmlns:p14="http://schemas.microsoft.com/office/powerpoint/2010/main" val="1482190084"/>
       </p:ext>
     </p:extLst>
   </p:cSld>
@@ -25477,7 +25489,7 @@
           <p:cNvPr id="2" name="Text 0">
             <a:extLst xmlns:a="http://schemas.openxmlformats.org/drawingml/2006/main">
               <a:ext uri="{FF2B5EF4-FFF2-40B4-BE49-F238E27FC236}">
-                <a16:creationId xmlns:a16="http://schemas.microsoft.com/office/drawing/2014/main" id="{443626E8-1061-4744-BBEC-BAAE516F02AF}"/>
+                <a16:creationId xmlns:a16="http://schemas.microsoft.com/office/drawing/2014/main" id="{FBC6A6CE-9F0C-40EE-AC35-D7A16ECCB166}"/>
               </a:ext>
             </a:extLst>
           </p:cNvPr>
@@ -25522,7 +25534,7 @@
           <p:cNvPr id="3" name="Text 1">
             <a:extLst xmlns:a="http://schemas.openxmlformats.org/drawingml/2006/main">
               <a:ext uri="{FF2B5EF4-FFF2-40B4-BE49-F238E27FC236}">
-                <a16:creationId xmlns:a16="http://schemas.microsoft.com/office/drawing/2014/main" id="{D4B4D3DB-B166-4ECA-9090-4E161B92F494}"/>
+                <a16:creationId xmlns:a16="http://schemas.microsoft.com/office/drawing/2014/main" id="{E07F6890-C811-46F7-80E6-42831AC9DD44}"/>
               </a:ext>
             </a:extLst>
           </p:cNvPr>
@@ -25567,7 +25579,7 @@
           <p:cNvPr id="4" name="Text 2">
             <a:extLst xmlns:a="http://schemas.openxmlformats.org/drawingml/2006/main">
               <a:ext uri="{FF2B5EF4-FFF2-40B4-BE49-F238E27FC236}">
-                <a16:creationId xmlns:a16="http://schemas.microsoft.com/office/drawing/2014/main" id="{48D36649-F9FC-46DA-AD35-EBA1F56F6407}"/>
+                <a16:creationId xmlns:a16="http://schemas.microsoft.com/office/drawing/2014/main" id="{27FB6F4A-E7E6-42B0-9254-BDF9FEEB2A5A}"/>
               </a:ext>
             </a:extLst>
           </p:cNvPr>
@@ -25612,7 +25624,7 @@
           <p:cNvPr id="5" name="Text 3">
             <a:extLst xmlns:a="http://schemas.openxmlformats.org/drawingml/2006/main">
               <a:ext uri="{FF2B5EF4-FFF2-40B4-BE49-F238E27FC236}">
-                <a16:creationId xmlns:a16="http://schemas.microsoft.com/office/drawing/2014/main" id="{45772990-5544-4061-89D8-7C98A1658892}"/>
+                <a16:creationId xmlns:a16="http://schemas.microsoft.com/office/drawing/2014/main" id="{96EDC97A-1BDF-4A8E-975F-BF2890467C10}"/>
               </a:ext>
             </a:extLst>
           </p:cNvPr>
@@ -25657,7 +25669,7 @@
           <p:cNvPr id="6" name="Text 4">
             <a:extLst xmlns:a="http://schemas.openxmlformats.org/drawingml/2006/main">
               <a:ext uri="{FF2B5EF4-FFF2-40B4-BE49-F238E27FC236}">
-                <a16:creationId xmlns:a16="http://schemas.microsoft.com/office/drawing/2014/main" id="{09E1C720-1A2E-4F9B-A858-DA0EF8B705CE}"/>
+                <a16:creationId xmlns:a16="http://schemas.microsoft.com/office/drawing/2014/main" id="{7F2D473F-985E-45EC-B66F-69CA8F95D27D}"/>
               </a:ext>
             </a:extLst>
           </p:cNvPr>
@@ -25705,7 +25717,7 @@
           <p:cNvPr id="7" name="Text 5">
             <a:extLst xmlns:a="http://schemas.openxmlformats.org/drawingml/2006/main">
               <a:ext uri="{FF2B5EF4-FFF2-40B4-BE49-F238E27FC236}">
-                <a16:creationId xmlns:a16="http://schemas.microsoft.com/office/drawing/2014/main" id="{6CC3FFDF-C634-4518-AB2D-575AF1729C19}"/>
+                <a16:creationId xmlns:a16="http://schemas.microsoft.com/office/drawing/2014/main" id="{6DC29F87-C3C8-4DC9-8BA8-97250D814178}"/>
               </a:ext>
             </a:extLst>
           </p:cNvPr>
@@ -27010,7 +27022,7 @@
           <p:cNvPr id="9" name="Shape 6">
             <a:extLst xmlns:a="http://schemas.openxmlformats.org/drawingml/2006/main">
               <a:ext uri="{FF2B5EF4-FFF2-40B4-BE49-F238E27FC236}">
-                <a16:creationId xmlns:a16="http://schemas.microsoft.com/office/drawing/2014/main" id="{1F3C4023-21FB-42E5-8A51-1324F7ADEF43}"/>
+                <a16:creationId xmlns:a16="http://schemas.microsoft.com/office/drawing/2014/main" id="{08D8B07D-161E-41EC-A4A2-4AE25AF019E8}"/>
               </a:ext>
             </a:extLst>
           </p:cNvPr>
@@ -27057,7 +27069,7 @@
           <p:cNvPr id="10" name="Text 7">
             <a:extLst xmlns:a="http://schemas.openxmlformats.org/drawingml/2006/main">
               <a:ext uri="{FF2B5EF4-FFF2-40B4-BE49-F238E27FC236}">
-                <a16:creationId xmlns:a16="http://schemas.microsoft.com/office/drawing/2014/main" id="{EBD1AA50-483A-4FC0-BFDD-9071A853B1B9}"/>
+                <a16:creationId xmlns:a16="http://schemas.microsoft.com/office/drawing/2014/main" id="{5B43D450-2D5D-48B5-8ACE-579DF8A54F4B}"/>
               </a:ext>
             </a:extLst>
           </p:cNvPr>
@@ -27105,7 +27117,7 @@
           <p:cNvPr id="11" name="Shape 8">
             <a:extLst xmlns:a="http://schemas.openxmlformats.org/drawingml/2006/main">
               <a:ext uri="{FF2B5EF4-FFF2-40B4-BE49-F238E27FC236}">
-                <a16:creationId xmlns:a16="http://schemas.microsoft.com/office/drawing/2014/main" id="{40AD9056-809E-4088-B916-2E057F18B9B3}"/>
+                <a16:creationId xmlns:a16="http://schemas.microsoft.com/office/drawing/2014/main" id="{0DF2ABBC-85CC-4894-813D-D8170F33E898}"/>
               </a:ext>
             </a:extLst>
           </p:cNvPr>
@@ -27152,7 +27164,7 @@
           <p:cNvPr id="12" name="Shape 9">
             <a:extLst xmlns:a="http://schemas.openxmlformats.org/drawingml/2006/main">
               <a:ext uri="{FF2B5EF4-FFF2-40B4-BE49-F238E27FC236}">
-                <a16:creationId xmlns:a16="http://schemas.microsoft.com/office/drawing/2014/main" id="{90A99EE7-358E-490B-B83D-E3AAE2418A52}"/>
+                <a16:creationId xmlns:a16="http://schemas.microsoft.com/office/drawing/2014/main" id="{398D3420-B7ED-467B-9EDA-D2E4B402B58B}"/>
               </a:ext>
             </a:extLst>
           </p:cNvPr>
@@ -27190,7 +27202,7 @@
           <p:cNvPr id="13" name="Text 10">
             <a:extLst xmlns:a="http://schemas.openxmlformats.org/drawingml/2006/main">
               <a:ext uri="{FF2B5EF4-FFF2-40B4-BE49-F238E27FC236}">
-                <a16:creationId xmlns:a16="http://schemas.microsoft.com/office/drawing/2014/main" id="{D5F79568-529B-4372-ACC3-06316CBE80A3}"/>
+                <a16:creationId xmlns:a16="http://schemas.microsoft.com/office/drawing/2014/main" id="{3041BF9B-F22B-40BE-B3E0-7ABB099567AD}"/>
               </a:ext>
             </a:extLst>
           </p:cNvPr>
@@ -27235,7 +27247,7 @@
           <p:cNvPr id="14" name="Text 11">
             <a:extLst xmlns:a="http://schemas.openxmlformats.org/drawingml/2006/main">
               <a:ext uri="{FF2B5EF4-FFF2-40B4-BE49-F238E27FC236}">
-                <a16:creationId xmlns:a16="http://schemas.microsoft.com/office/drawing/2014/main" id="{4F416914-E7D1-4855-9ADF-99BB049492FD}"/>
+                <a16:creationId xmlns:a16="http://schemas.microsoft.com/office/drawing/2014/main" id="{6B2CA800-0CCD-41FB-B109-2C1628E53F4F}"/>
               </a:ext>
             </a:extLst>
           </p:cNvPr>
@@ -27280,7 +27292,7 @@
           <p:cNvPr id="15" name="Text 12">
             <a:extLst xmlns:a="http://schemas.openxmlformats.org/drawingml/2006/main">
               <a:ext uri="{FF2B5EF4-FFF2-40B4-BE49-F238E27FC236}">
-                <a16:creationId xmlns:a16="http://schemas.microsoft.com/office/drawing/2014/main" id="{4D8202FD-0364-4929-BBC7-1196597BD721}"/>
+                <a16:creationId xmlns:a16="http://schemas.microsoft.com/office/drawing/2014/main" id="{724DAE22-27E9-4BA5-B764-36F51D0B9DCA}"/>
               </a:ext>
             </a:extLst>
           </p:cNvPr>
@@ -27375,7 +27387,7 @@
           <p:cNvPr id="16" name="Shape 13">
             <a:extLst xmlns:a="http://schemas.openxmlformats.org/drawingml/2006/main">
               <a:ext uri="{FF2B5EF4-FFF2-40B4-BE49-F238E27FC236}">
-                <a16:creationId xmlns:a16="http://schemas.microsoft.com/office/drawing/2014/main" id="{9406E63F-8AC7-4CC2-AF0D-2A6FB16E725E}"/>
+                <a16:creationId xmlns:a16="http://schemas.microsoft.com/office/drawing/2014/main" id="{50E3D1BF-DBB0-4260-BDEB-41F90CB58079}"/>
               </a:ext>
             </a:extLst>
           </p:cNvPr>
@@ -27422,7 +27434,7 @@
           <p:cNvPr id="17" name="Shape 14">
             <a:extLst xmlns:a="http://schemas.openxmlformats.org/drawingml/2006/main">
               <a:ext uri="{FF2B5EF4-FFF2-40B4-BE49-F238E27FC236}">
-                <a16:creationId xmlns:a16="http://schemas.microsoft.com/office/drawing/2014/main" id="{E92DD719-2413-4295-BCA3-A63472EACB6B}"/>
+                <a16:creationId xmlns:a16="http://schemas.microsoft.com/office/drawing/2014/main" id="{FC4DD8D8-17B5-4397-874A-BE8A7E739E29}"/>
               </a:ext>
             </a:extLst>
           </p:cNvPr>
@@ -27460,7 +27472,7 @@
           <p:cNvPr id="18" name="Text 15">
             <a:extLst xmlns:a="http://schemas.openxmlformats.org/drawingml/2006/main">
               <a:ext uri="{FF2B5EF4-FFF2-40B4-BE49-F238E27FC236}">
-                <a16:creationId xmlns:a16="http://schemas.microsoft.com/office/drawing/2014/main" id="{FF156D8B-009F-4C3E-BD51-F4A8E48E0121}"/>
+                <a16:creationId xmlns:a16="http://schemas.microsoft.com/office/drawing/2014/main" id="{FAD6C25A-DAC3-4B38-95A0-DA49A029A733}"/>
               </a:ext>
             </a:extLst>
           </p:cNvPr>
@@ -27505,7 +27517,7 @@
           <p:cNvPr id="19" name="Text 16">
             <a:extLst xmlns:a="http://schemas.openxmlformats.org/drawingml/2006/main">
               <a:ext uri="{FF2B5EF4-FFF2-40B4-BE49-F238E27FC236}">
-                <a16:creationId xmlns:a16="http://schemas.microsoft.com/office/drawing/2014/main" id="{01960C03-B4B0-406D-95BE-ACE3EEAB411B}"/>
+                <a16:creationId xmlns:a16="http://schemas.microsoft.com/office/drawing/2014/main" id="{90E16726-DD65-4809-90DC-4D3E9D838E9E}"/>
               </a:ext>
             </a:extLst>
           </p:cNvPr>
@@ -27550,7 +27562,7 @@
           <p:cNvPr id="20" name="Text 17">
             <a:extLst xmlns:a="http://schemas.openxmlformats.org/drawingml/2006/main">
               <a:ext uri="{FF2B5EF4-FFF2-40B4-BE49-F238E27FC236}">
-                <a16:creationId xmlns:a16="http://schemas.microsoft.com/office/drawing/2014/main" id="{9581DA24-30B5-45C5-8C60-7C5E524AF388}"/>
+                <a16:creationId xmlns:a16="http://schemas.microsoft.com/office/drawing/2014/main" id="{470567E6-9FA9-40B2-B4E4-DBA2328F915D}"/>
               </a:ext>
             </a:extLst>
           </p:cNvPr>
@@ -27645,7 +27657,7 @@
           <p:cNvPr id="21" name="Shape 18">
             <a:extLst xmlns:a="http://schemas.openxmlformats.org/drawingml/2006/main">
               <a:ext uri="{FF2B5EF4-FFF2-40B4-BE49-F238E27FC236}">
-                <a16:creationId xmlns:a16="http://schemas.microsoft.com/office/drawing/2014/main" id="{06D3AA9D-9E1F-4A66-ADFA-EFB3C966472D}"/>
+                <a16:creationId xmlns:a16="http://schemas.microsoft.com/office/drawing/2014/main" id="{8C7EFCD5-4CA7-4C80-BBCA-1FA489843EDB}"/>
               </a:ext>
             </a:extLst>
           </p:cNvPr>
@@ -27692,7 +27704,7 @@
           <p:cNvPr id="8" name="Text 19">
             <a:extLst xmlns:a="http://schemas.openxmlformats.org/drawingml/2006/main">
               <a:ext uri="{FF2B5EF4-FFF2-40B4-BE49-F238E27FC236}">
-                <a16:creationId xmlns:a16="http://schemas.microsoft.com/office/drawing/2014/main" id="{A01BF5B7-7983-4994-A188-96A0C33DDD92}"/>
+                <a16:creationId xmlns:a16="http://schemas.microsoft.com/office/drawing/2014/main" id="{14A6AA90-4F74-454D-91AE-3E4E095D9FFD}"/>
               </a:ext>
             </a:extLst>
           </p:cNvPr>
@@ -27737,7 +27749,7 @@
           <p:cNvPr id="23" name="Text 20">
             <a:extLst xmlns:a="http://schemas.openxmlformats.org/drawingml/2006/main">
               <a:ext uri="{FF2B5EF4-FFF2-40B4-BE49-F238E27FC236}">
-                <a16:creationId xmlns:a16="http://schemas.microsoft.com/office/drawing/2014/main" id="{DCA9657D-DA26-4F10-BE03-247530161919}"/>
+                <a16:creationId xmlns:a16="http://schemas.microsoft.com/office/drawing/2014/main" id="{6B892196-2A1E-4EB7-8238-15B36016FAC6}"/>
               </a:ext>
             </a:extLst>
           </p:cNvPr>
@@ -27783,7 +27795,7 @@
     </p:spTree>
     <p:extLst>
       <p:ext uri="{BB962C8B-B14F-4D97-AF65-F5344CB8AC3E}">
-        <p14:creationId xmlns:p14="http://schemas.microsoft.com/office/powerpoint/2010/main" val="131281640"/>
+        <p14:creationId xmlns:p14="http://schemas.microsoft.com/office/powerpoint/2010/main" val="1482190084"/>
       </p:ext>
     </p:extLst>
   </p:cSld>
@@ -27814,7 +27826,7 @@
           <p:cNvPr id="2" name="Text 0">
             <a:extLst xmlns:a="http://schemas.openxmlformats.org/drawingml/2006/main">
               <a:ext uri="{FF2B5EF4-FFF2-40B4-BE49-F238E27FC236}">
-                <a16:creationId xmlns:a16="http://schemas.microsoft.com/office/drawing/2014/main" id="{B8A19F68-C01B-4186-B7D4-A7DF8A0AF61B}"/>
+                <a16:creationId xmlns:a16="http://schemas.microsoft.com/office/drawing/2014/main" id="{966172AB-0156-4D9E-8C0F-7EF7CFAB0464}"/>
               </a:ext>
             </a:extLst>
           </p:cNvPr>
@@ -27859,7 +27871,7 @@
           <p:cNvPr id="3" name="Text 1">
             <a:extLst xmlns:a="http://schemas.openxmlformats.org/drawingml/2006/main">
               <a:ext uri="{FF2B5EF4-FFF2-40B4-BE49-F238E27FC236}">
-                <a16:creationId xmlns:a16="http://schemas.microsoft.com/office/drawing/2014/main" id="{25CF51A7-6DFC-452B-9AFA-96EA6C1C25DF}"/>
+                <a16:creationId xmlns:a16="http://schemas.microsoft.com/office/drawing/2014/main" id="{5C7455E1-785E-48D3-B920-BB6E45D6A9F3}"/>
               </a:ext>
             </a:extLst>
           </p:cNvPr>
@@ -27904,7 +27916,7 @@
           <p:cNvPr id="4" name="Text 2">
             <a:extLst xmlns:a="http://schemas.openxmlformats.org/drawingml/2006/main">
               <a:ext uri="{FF2B5EF4-FFF2-40B4-BE49-F238E27FC236}">
-                <a16:creationId xmlns:a16="http://schemas.microsoft.com/office/drawing/2014/main" id="{880A38BB-9F1F-4F91-A6CC-E7C77A176B25}"/>
+                <a16:creationId xmlns:a16="http://schemas.microsoft.com/office/drawing/2014/main" id="{6B6DF9C1-6A37-4FE2-B7DE-2ADBBFA8B82C}"/>
               </a:ext>
             </a:extLst>
           </p:cNvPr>
@@ -27949,7 +27961,7 @@
           <p:cNvPr id="5" name="Text 3">
             <a:extLst xmlns:a="http://schemas.openxmlformats.org/drawingml/2006/main">
               <a:ext uri="{FF2B5EF4-FFF2-40B4-BE49-F238E27FC236}">
-                <a16:creationId xmlns:a16="http://schemas.microsoft.com/office/drawing/2014/main" id="{066C768C-3504-4F8F-A63E-931B4ED1C4B9}"/>
+                <a16:creationId xmlns:a16="http://schemas.microsoft.com/office/drawing/2014/main" id="{A041EEE5-859D-41B0-8D14-928DE2A4F7CA}"/>
               </a:ext>
             </a:extLst>
           </p:cNvPr>
@@ -27994,7 +28006,7 @@
           <p:cNvPr id="6" name="Shape 4">
             <a:extLst xmlns:a="http://schemas.openxmlformats.org/drawingml/2006/main">
               <a:ext uri="{FF2B5EF4-FFF2-40B4-BE49-F238E27FC236}">
-                <a16:creationId xmlns:a16="http://schemas.microsoft.com/office/drawing/2014/main" id="{58CE09A1-6B84-42C2-9A41-7EB1278DFC56}"/>
+                <a16:creationId xmlns:a16="http://schemas.microsoft.com/office/drawing/2014/main" id="{232A0338-6CB4-48E1-AE4A-9A7EC5324614}"/>
               </a:ext>
             </a:extLst>
           </p:cNvPr>
@@ -28038,7 +28050,7 @@
           <p:nvPr/>
         </p:nvPicPr>
         <p:blipFill>
-          <a:blip xmlns:r="http://schemas.openxmlformats.org/officeDocument/2006/relationships" xmlns:a="http://schemas.openxmlformats.org/drawingml/2006/main" r:embed="Reec707c7cfee4310"/>
+          <a:blip xmlns:r="http://schemas.openxmlformats.org/officeDocument/2006/relationships" xmlns:a="http://schemas.openxmlformats.org/drawingml/2006/main" r:embed="Refb1a229ba2a4350"/>
           <a:stretch xmlns:a="http://schemas.openxmlformats.org/drawingml/2006/main">
             <a:fillRect l="0" t="0" r="0" b="0"/>
           </a:stretch>
@@ -28058,7 +28070,7 @@
           <p:cNvPr id="8" name="Text 5">
             <a:extLst xmlns:a="http://schemas.openxmlformats.org/drawingml/2006/main">
               <a:ext uri="{FF2B5EF4-FFF2-40B4-BE49-F238E27FC236}">
-                <a16:creationId xmlns:a16="http://schemas.microsoft.com/office/drawing/2014/main" id="{C2886D00-A23C-4FF9-BE5F-186C1730F166}"/>
+                <a16:creationId xmlns:a16="http://schemas.microsoft.com/office/drawing/2014/main" id="{84ED202D-28A7-48B8-BF7D-F7AAFDB1A88C}"/>
               </a:ext>
             </a:extLst>
           </p:cNvPr>
@@ -28106,7 +28118,7 @@
           <p:cNvPr id="9" name="Text 6">
             <a:extLst xmlns:a="http://schemas.openxmlformats.org/drawingml/2006/main">
               <a:ext uri="{FF2B5EF4-FFF2-40B4-BE49-F238E27FC236}">
-                <a16:creationId xmlns:a16="http://schemas.microsoft.com/office/drawing/2014/main" id="{5400591B-F01F-4152-B261-CDBAF2C2EA68}"/>
+                <a16:creationId xmlns:a16="http://schemas.microsoft.com/office/drawing/2014/main" id="{219003E1-D86E-4F03-A431-70F78645D7F1}"/>
               </a:ext>
             </a:extLst>
           </p:cNvPr>
@@ -28151,7 +28163,7 @@
           <p:cNvPr id="10" name="Shape 7">
             <a:extLst xmlns:a="http://schemas.openxmlformats.org/drawingml/2006/main">
               <a:ext uri="{FF2B5EF4-FFF2-40B4-BE49-F238E27FC236}">
-                <a16:creationId xmlns:a16="http://schemas.microsoft.com/office/drawing/2014/main" id="{CA4F70B7-D93E-44C9-8471-BBC1BAAD9FE2}"/>
+                <a16:creationId xmlns:a16="http://schemas.microsoft.com/office/drawing/2014/main" id="{1E096FF8-1E28-488C-B2D1-6D5F0D216241}"/>
               </a:ext>
             </a:extLst>
           </p:cNvPr>
@@ -28195,7 +28207,7 @@
           <p:nvPr/>
         </p:nvPicPr>
         <p:blipFill>
-          <a:blip xmlns:r="http://schemas.openxmlformats.org/officeDocument/2006/relationships" xmlns:a="http://schemas.openxmlformats.org/drawingml/2006/main" r:embed="R4daf0117483b4ca4"/>
+          <a:blip xmlns:r="http://schemas.openxmlformats.org/officeDocument/2006/relationships" xmlns:a="http://schemas.openxmlformats.org/drawingml/2006/main" r:embed="Re60d18479385409a"/>
           <a:stretch xmlns:a="http://schemas.openxmlformats.org/drawingml/2006/main">
             <a:fillRect l="0" t="0" r="0" b="0"/>
           </a:stretch>
@@ -28215,7 +28227,7 @@
           <p:cNvPr id="12" name="Text 8">
             <a:extLst xmlns:a="http://schemas.openxmlformats.org/drawingml/2006/main">
               <a:ext uri="{FF2B5EF4-FFF2-40B4-BE49-F238E27FC236}">
-                <a16:creationId xmlns:a16="http://schemas.microsoft.com/office/drawing/2014/main" id="{C5E678FA-7184-44AB-9DE0-A2177A96E15E}"/>
+                <a16:creationId xmlns:a16="http://schemas.microsoft.com/office/drawing/2014/main" id="{91E2F876-9EF5-42FD-BACB-163C6EB852F1}"/>
               </a:ext>
             </a:extLst>
           </p:cNvPr>
@@ -28263,7 +28275,7 @@
           <p:cNvPr id="13" name="Text 9">
             <a:extLst xmlns:a="http://schemas.openxmlformats.org/drawingml/2006/main">
               <a:ext uri="{FF2B5EF4-FFF2-40B4-BE49-F238E27FC236}">
-                <a16:creationId xmlns:a16="http://schemas.microsoft.com/office/drawing/2014/main" id="{7ABE706F-AA3E-437A-B5C7-A368E3BE48D3}"/>
+                <a16:creationId xmlns:a16="http://schemas.microsoft.com/office/drawing/2014/main" id="{0A89DD46-587D-4D23-AB32-570ABEC84C2D}"/>
               </a:ext>
             </a:extLst>
           </p:cNvPr>
@@ -28315,7 +28327,7 @@
         </p:xfrm>
         <a:graphic xmlns:a="http://schemas.openxmlformats.org/drawingml/2006/main">
           <a:graphicData uri="http://schemas.openxmlformats.org/drawingml/2006/chart">
-            <c:chart xmlns:r="http://schemas.openxmlformats.org/officeDocument/2006/relationships" xmlns:c="http://schemas.openxmlformats.org/drawingml/2006/chart" r:id="Rcb09fc9d54bd4d5f"/>
+            <c:chart xmlns:r="http://schemas.openxmlformats.org/officeDocument/2006/relationships" xmlns:c="http://schemas.openxmlformats.org/drawingml/2006/chart" r:id="Raf07c2eb598c40af"/>
           </a:graphicData>
         </a:graphic>
       </p:graphicFrame>
@@ -28324,7 +28336,7 @@
           <p:cNvPr id="15" name="Text 10">
             <a:extLst xmlns:a="http://schemas.openxmlformats.org/drawingml/2006/main">
               <a:ext uri="{FF2B5EF4-FFF2-40B4-BE49-F238E27FC236}">
-                <a16:creationId xmlns:a16="http://schemas.microsoft.com/office/drawing/2014/main" id="{29F19BD4-CFAA-4E2B-9EE7-C4E82191CF2D}"/>
+                <a16:creationId xmlns:a16="http://schemas.microsoft.com/office/drawing/2014/main" id="{8767978D-38A2-4B1D-9A8F-176D2AFA179B}"/>
               </a:ext>
             </a:extLst>
           </p:cNvPr>
@@ -28372,7 +28384,7 @@
           <p:cNvPr id="16" name="Shape 11">
             <a:extLst xmlns:a="http://schemas.openxmlformats.org/drawingml/2006/main">
               <a:ext uri="{FF2B5EF4-FFF2-40B4-BE49-F238E27FC236}">
-                <a16:creationId xmlns:a16="http://schemas.microsoft.com/office/drawing/2014/main" id="{BE36C405-61BC-4CAA-BEF6-96DCA319913E}"/>
+                <a16:creationId xmlns:a16="http://schemas.microsoft.com/office/drawing/2014/main" id="{86FACEBA-311D-4CD6-B289-52E1A33612D5}"/>
               </a:ext>
             </a:extLst>
           </p:cNvPr>
@@ -28419,7 +28431,7 @@
           <p:cNvPr id="17" name="Text 12">
             <a:extLst xmlns:a="http://schemas.openxmlformats.org/drawingml/2006/main">
               <a:ext uri="{FF2B5EF4-FFF2-40B4-BE49-F238E27FC236}">
-                <a16:creationId xmlns:a16="http://schemas.microsoft.com/office/drawing/2014/main" id="{A0E14F7A-E340-4329-9133-DD60D9D493FA}"/>
+                <a16:creationId xmlns:a16="http://schemas.microsoft.com/office/drawing/2014/main" id="{D84B9C37-8138-46CD-A25E-8DEBD2EDA7F9}"/>
               </a:ext>
             </a:extLst>
           </p:cNvPr>
@@ -28467,7 +28479,7 @@
           <p:cNvPr id="18" name="Text 13">
             <a:extLst xmlns:a="http://schemas.openxmlformats.org/drawingml/2006/main">
               <a:ext uri="{FF2B5EF4-FFF2-40B4-BE49-F238E27FC236}">
-                <a16:creationId xmlns:a16="http://schemas.microsoft.com/office/drawing/2014/main" id="{BC1C249B-A38A-481A-A25C-7E3D444A94B7}"/>
+                <a16:creationId xmlns:a16="http://schemas.microsoft.com/office/drawing/2014/main" id="{B7B673BB-1515-4F79-A40F-59DAF128A406}"/>
               </a:ext>
             </a:extLst>
           </p:cNvPr>
@@ -28512,7 +28524,7 @@
           <p:cNvPr id="19" name="Text 14">
             <a:extLst xmlns:a="http://schemas.openxmlformats.org/drawingml/2006/main">
               <a:ext uri="{FF2B5EF4-FFF2-40B4-BE49-F238E27FC236}">
-                <a16:creationId xmlns:a16="http://schemas.microsoft.com/office/drawing/2014/main" id="{5998543A-2AE9-4370-8820-FDFC612B8E1D}"/>
+                <a16:creationId xmlns:a16="http://schemas.microsoft.com/office/drawing/2014/main" id="{A71E98EF-3980-4CB5-A04E-5649AEFC3042}"/>
               </a:ext>
             </a:extLst>
           </p:cNvPr>
@@ -28557,7 +28569,7 @@
           <p:cNvPr id="20" name="Text 15">
             <a:extLst xmlns:a="http://schemas.openxmlformats.org/drawingml/2006/main">
               <a:ext uri="{FF2B5EF4-FFF2-40B4-BE49-F238E27FC236}">
-                <a16:creationId xmlns:a16="http://schemas.microsoft.com/office/drawing/2014/main" id="{3AFDF5EE-576C-47EE-9B02-63E8220464DA}"/>
+                <a16:creationId xmlns:a16="http://schemas.microsoft.com/office/drawing/2014/main" id="{D61CB5C0-0F4B-484E-8DFF-66C1796B68D6}"/>
               </a:ext>
             </a:extLst>
           </p:cNvPr>
@@ -28602,7 +28614,7 @@
           <p:cNvPr id="21" name="Text 16">
             <a:extLst xmlns:a="http://schemas.openxmlformats.org/drawingml/2006/main">
               <a:ext uri="{FF2B5EF4-FFF2-40B4-BE49-F238E27FC236}">
-                <a16:creationId xmlns:a16="http://schemas.microsoft.com/office/drawing/2014/main" id="{EA792F88-213A-4C2D-9C41-1F52FE95DC86}"/>
+                <a16:creationId xmlns:a16="http://schemas.microsoft.com/office/drawing/2014/main" id="{3C2EFC2A-8B92-456B-9819-D4CB458C7C35}"/>
               </a:ext>
             </a:extLst>
           </p:cNvPr>
@@ -28647,7 +28659,7 @@
           <p:cNvPr id="22" name="Text 17">
             <a:extLst xmlns:a="http://schemas.openxmlformats.org/drawingml/2006/main">
               <a:ext uri="{FF2B5EF4-FFF2-40B4-BE49-F238E27FC236}">
-                <a16:creationId xmlns:a16="http://schemas.microsoft.com/office/drawing/2014/main" id="{891ECA00-D9AD-46E1-BBC4-DC88A3E08911}"/>
+                <a16:creationId xmlns:a16="http://schemas.microsoft.com/office/drawing/2014/main" id="{2D21574C-99F6-4D2E-9B4A-02EC8DE0C668}"/>
               </a:ext>
             </a:extLst>
           </p:cNvPr>
@@ -28692,7 +28704,7 @@
           <p:cNvPr id="23" name="Text 18">
             <a:extLst xmlns:a="http://schemas.openxmlformats.org/drawingml/2006/main">
               <a:ext uri="{FF2B5EF4-FFF2-40B4-BE49-F238E27FC236}">
-                <a16:creationId xmlns:a16="http://schemas.microsoft.com/office/drawing/2014/main" id="{82B89BA0-A5B3-4750-8907-1E1AC2BBE375}"/>
+                <a16:creationId xmlns:a16="http://schemas.microsoft.com/office/drawing/2014/main" id="{C6BB1A42-D8F8-4B60-AAC8-CA296133BB92}"/>
               </a:ext>
             </a:extLst>
           </p:cNvPr>
@@ -28737,7 +28749,7 @@
           <p:cNvPr id="24" name="Text 19">
             <a:extLst xmlns:a="http://schemas.openxmlformats.org/drawingml/2006/main">
               <a:ext uri="{FF2B5EF4-FFF2-40B4-BE49-F238E27FC236}">
-                <a16:creationId xmlns:a16="http://schemas.microsoft.com/office/drawing/2014/main" id="{246F71AC-EAB9-453A-837D-02BADD34DE27}"/>
+                <a16:creationId xmlns:a16="http://schemas.microsoft.com/office/drawing/2014/main" id="{F0D2D968-3A81-4D41-A675-4DD4EC267BFA}"/>
               </a:ext>
             </a:extLst>
           </p:cNvPr>
@@ -28782,7 +28794,7 @@
           <p:cNvPr id="25" name="Text 20">
             <a:extLst xmlns:a="http://schemas.openxmlformats.org/drawingml/2006/main">
               <a:ext uri="{FF2B5EF4-FFF2-40B4-BE49-F238E27FC236}">
-                <a16:creationId xmlns:a16="http://schemas.microsoft.com/office/drawing/2014/main" id="{995698B2-C590-4C97-BD30-1BB401FA3804}"/>
+                <a16:creationId xmlns:a16="http://schemas.microsoft.com/office/drawing/2014/main" id="{F9AB7D47-FE14-4431-81EC-8B3F8E463A24}"/>
               </a:ext>
             </a:extLst>
           </p:cNvPr>
@@ -28827,7 +28839,7 @@
           <p:cNvPr id="26" name="Text 21">
             <a:extLst xmlns:a="http://schemas.openxmlformats.org/drawingml/2006/main">
               <a:ext uri="{FF2B5EF4-FFF2-40B4-BE49-F238E27FC236}">
-                <a16:creationId xmlns:a16="http://schemas.microsoft.com/office/drawing/2014/main" id="{DF80C5C5-3556-4521-9E99-F7E86DFFE0DA}"/>
+                <a16:creationId xmlns:a16="http://schemas.microsoft.com/office/drawing/2014/main" id="{F77A6F62-859E-4B97-89F2-18D81AB86E9B}"/>
               </a:ext>
             </a:extLst>
           </p:cNvPr>
@@ -28872,7 +28884,7 @@
           <p:cNvPr id="27" name="Text 22">
             <a:extLst xmlns:a="http://schemas.openxmlformats.org/drawingml/2006/main">
               <a:ext uri="{FF2B5EF4-FFF2-40B4-BE49-F238E27FC236}">
-                <a16:creationId xmlns:a16="http://schemas.microsoft.com/office/drawing/2014/main" id="{B12D2AFD-6D85-4613-A338-CD9A2BC023AD}"/>
+                <a16:creationId xmlns:a16="http://schemas.microsoft.com/office/drawing/2014/main" id="{F8189361-BAD5-43E1-A3AD-937068CD94DA}"/>
               </a:ext>
             </a:extLst>
           </p:cNvPr>
@@ -28917,7 +28929,7 @@
           <p:cNvPr id="28" name="Text 23">
             <a:extLst xmlns:a="http://schemas.openxmlformats.org/drawingml/2006/main">
               <a:ext uri="{FF2B5EF4-FFF2-40B4-BE49-F238E27FC236}">
-                <a16:creationId xmlns:a16="http://schemas.microsoft.com/office/drawing/2014/main" id="{3182C867-657F-4275-9516-3CD8D9E16202}"/>
+                <a16:creationId xmlns:a16="http://schemas.microsoft.com/office/drawing/2014/main" id="{5E38413D-D647-4CAB-9533-9B135D541842}"/>
               </a:ext>
             </a:extLst>
           </p:cNvPr>
@@ -28962,7 +28974,7 @@
           <p:cNvPr id="29" name="Text 24">
             <a:extLst xmlns:a="http://schemas.openxmlformats.org/drawingml/2006/main">
               <a:ext uri="{FF2B5EF4-FFF2-40B4-BE49-F238E27FC236}">
-                <a16:creationId xmlns:a16="http://schemas.microsoft.com/office/drawing/2014/main" id="{9339A8FC-2B67-47F8-A50D-1826527C6A97}"/>
+                <a16:creationId xmlns:a16="http://schemas.microsoft.com/office/drawing/2014/main" id="{A8FB0AC5-4333-4EC0-8580-46D06DB4D480}"/>
               </a:ext>
             </a:extLst>
           </p:cNvPr>
@@ -29007,7 +29019,7 @@
           <p:cNvPr id="30" name="Shape 25">
             <a:extLst xmlns:a="http://schemas.openxmlformats.org/drawingml/2006/main">
               <a:ext uri="{FF2B5EF4-FFF2-40B4-BE49-F238E27FC236}">
-                <a16:creationId xmlns:a16="http://schemas.microsoft.com/office/drawing/2014/main" id="{36309FD6-B3B1-41A3-ADA6-B8AAFD45E3AB}"/>
+                <a16:creationId xmlns:a16="http://schemas.microsoft.com/office/drawing/2014/main" id="{BF4E8DAA-864C-4421-A726-37EFCB8FFACE}"/>
               </a:ext>
             </a:extLst>
           </p:cNvPr>
@@ -29054,7 +29066,7 @@
           <p:cNvPr id="31" name="Text 26">
             <a:extLst xmlns:a="http://schemas.openxmlformats.org/drawingml/2006/main">
               <a:ext uri="{FF2B5EF4-FFF2-40B4-BE49-F238E27FC236}">
-                <a16:creationId xmlns:a16="http://schemas.microsoft.com/office/drawing/2014/main" id="{9D1AB9B5-3050-4F36-9157-80DE0F3B8C53}"/>
+                <a16:creationId xmlns:a16="http://schemas.microsoft.com/office/drawing/2014/main" id="{A51ED285-CF40-4675-90CE-43100E5C9BC6}"/>
               </a:ext>
             </a:extLst>
           </p:cNvPr>
@@ -29099,7 +29111,7 @@
           <p:cNvPr id="32" name="Text 27">
             <a:extLst xmlns:a="http://schemas.openxmlformats.org/drawingml/2006/main">
               <a:ext uri="{FF2B5EF4-FFF2-40B4-BE49-F238E27FC236}">
-                <a16:creationId xmlns:a16="http://schemas.microsoft.com/office/drawing/2014/main" id="{0B17D424-58B6-49CC-9A3E-DB8E181B7002}"/>
+                <a16:creationId xmlns:a16="http://schemas.microsoft.com/office/drawing/2014/main" id="{76D94229-E934-4301-A360-89FDE22CFB39}"/>
               </a:ext>
             </a:extLst>
           </p:cNvPr>
@@ -29145,7 +29157,7 @@
     </p:spTree>
     <p:extLst>
       <p:ext uri="{BB962C8B-B14F-4D97-AF65-F5344CB8AC3E}">
-        <p14:creationId xmlns:p14="http://schemas.microsoft.com/office/powerpoint/2010/main" val="116065899"/>
+        <p14:creationId xmlns:p14="http://schemas.microsoft.com/office/powerpoint/2010/main" val="426605014"/>
       </p:ext>
     </p:extLst>
   </p:cSld>
@@ -29176,7 +29188,7 @@
           <p:cNvPr id="2" name="Text 0">
             <a:extLst xmlns:a="http://schemas.openxmlformats.org/drawingml/2006/main">
               <a:ext uri="{FF2B5EF4-FFF2-40B4-BE49-F238E27FC236}">
-                <a16:creationId xmlns:a16="http://schemas.microsoft.com/office/drawing/2014/main" id="{E88827F0-1B81-4113-963F-66BF22E0488A}"/>
+                <a16:creationId xmlns:a16="http://schemas.microsoft.com/office/drawing/2014/main" id="{48702BE8-324D-456F-AC29-AEE3C5775E37}"/>
               </a:ext>
             </a:extLst>
           </p:cNvPr>
@@ -29221,7 +29233,7 @@
           <p:cNvPr id="3" name="Text 1">
             <a:extLst xmlns:a="http://schemas.openxmlformats.org/drawingml/2006/main">
               <a:ext uri="{FF2B5EF4-FFF2-40B4-BE49-F238E27FC236}">
-                <a16:creationId xmlns:a16="http://schemas.microsoft.com/office/drawing/2014/main" id="{2D12BF92-FFBB-4D4D-82CF-F7F3A563A536}"/>
+                <a16:creationId xmlns:a16="http://schemas.microsoft.com/office/drawing/2014/main" id="{29F39E1D-8134-4F73-B39A-155824CECCC5}"/>
               </a:ext>
             </a:extLst>
           </p:cNvPr>
@@ -29266,7 +29278,7 @@
           <p:cNvPr id="4" name="Text 2">
             <a:extLst xmlns:a="http://schemas.openxmlformats.org/drawingml/2006/main">
               <a:ext uri="{FF2B5EF4-FFF2-40B4-BE49-F238E27FC236}">
-                <a16:creationId xmlns:a16="http://schemas.microsoft.com/office/drawing/2014/main" id="{1ECBE9CC-F120-4FCC-85F3-171E5399BF3E}"/>
+                <a16:creationId xmlns:a16="http://schemas.microsoft.com/office/drawing/2014/main" id="{CBDEDD38-434C-4E24-AF1F-2276D208CCDD}"/>
               </a:ext>
             </a:extLst>
           </p:cNvPr>
@@ -29311,7 +29323,7 @@
           <p:cNvPr id="5" name="Text 3">
             <a:extLst xmlns:a="http://schemas.openxmlformats.org/drawingml/2006/main">
               <a:ext uri="{FF2B5EF4-FFF2-40B4-BE49-F238E27FC236}">
-                <a16:creationId xmlns:a16="http://schemas.microsoft.com/office/drawing/2014/main" id="{89B162AA-A8BF-4F34-B936-FEB3FB677FDB}"/>
+                <a16:creationId xmlns:a16="http://schemas.microsoft.com/office/drawing/2014/main" id="{5522CF11-B87B-4B58-A449-04661FC5C9A9}"/>
               </a:ext>
             </a:extLst>
           </p:cNvPr>
@@ -29356,7 +29368,7 @@
           <p:cNvPr id="6" name="Shape 4">
             <a:extLst xmlns:a="http://schemas.openxmlformats.org/drawingml/2006/main">
               <a:ext uri="{FF2B5EF4-FFF2-40B4-BE49-F238E27FC236}">
-                <a16:creationId xmlns:a16="http://schemas.microsoft.com/office/drawing/2014/main" id="{60CFBB1C-089C-4C42-9225-383544E2511A}"/>
+                <a16:creationId xmlns:a16="http://schemas.microsoft.com/office/drawing/2014/main" id="{EBD2983E-3573-4616-936A-4DE04D044D41}"/>
               </a:ext>
             </a:extLst>
           </p:cNvPr>
@@ -29403,7 +29415,7 @@
           <p:cNvPr id="7" name="Shape 5">
             <a:extLst xmlns:a="http://schemas.openxmlformats.org/drawingml/2006/main">
               <a:ext uri="{FF2B5EF4-FFF2-40B4-BE49-F238E27FC236}">
-                <a16:creationId xmlns:a16="http://schemas.microsoft.com/office/drawing/2014/main" id="{D9F37DA9-B9A8-404F-822E-0A5145CE4BB1}"/>
+                <a16:creationId xmlns:a16="http://schemas.microsoft.com/office/drawing/2014/main" id="{CCA95C26-0C64-4A17-9718-CA916A592D2A}"/>
               </a:ext>
             </a:extLst>
           </p:cNvPr>
@@ -29441,7 +29453,7 @@
           <p:cNvPr id="8" name="Text 6">
             <a:extLst xmlns:a="http://schemas.openxmlformats.org/drawingml/2006/main">
               <a:ext uri="{FF2B5EF4-FFF2-40B4-BE49-F238E27FC236}">
-                <a16:creationId xmlns:a16="http://schemas.microsoft.com/office/drawing/2014/main" id="{AA1CB4C7-C7C3-4D83-A783-129104C9F5DE}"/>
+                <a16:creationId xmlns:a16="http://schemas.microsoft.com/office/drawing/2014/main" id="{7BA30F6B-CC75-43D4-B34A-BECF520B065F}"/>
               </a:ext>
             </a:extLst>
           </p:cNvPr>
@@ -29486,7 +29498,7 @@
           <p:cNvPr id="9" name="Text 7">
             <a:extLst xmlns:a="http://schemas.openxmlformats.org/drawingml/2006/main">
               <a:ext uri="{FF2B5EF4-FFF2-40B4-BE49-F238E27FC236}">
-                <a16:creationId xmlns:a16="http://schemas.microsoft.com/office/drawing/2014/main" id="{3471CC86-DF93-4C79-9958-EF6C0AD9A82C}"/>
+                <a16:creationId xmlns:a16="http://schemas.microsoft.com/office/drawing/2014/main" id="{16638613-D627-405D-91FD-BC3B2136052A}"/>
               </a:ext>
             </a:extLst>
           </p:cNvPr>
@@ -29534,7 +29546,7 @@
           <p:cNvPr id="10" name="Text 8">
             <a:extLst xmlns:a="http://schemas.openxmlformats.org/drawingml/2006/main">
               <a:ext uri="{FF2B5EF4-FFF2-40B4-BE49-F238E27FC236}">
-                <a16:creationId xmlns:a16="http://schemas.microsoft.com/office/drawing/2014/main" id="{4ABD8390-3DDB-46FF-B2D2-3A5D02034EB5}"/>
+                <a16:creationId xmlns:a16="http://schemas.microsoft.com/office/drawing/2014/main" id="{A6BCF052-A963-4AEF-8B6E-1FCEFFB1DE42}"/>
               </a:ext>
             </a:extLst>
           </p:cNvPr>
@@ -29582,7 +29594,7 @@
           <p:cNvPr id="11" name="Shape 9">
             <a:extLst xmlns:a="http://schemas.openxmlformats.org/drawingml/2006/main">
               <a:ext uri="{FF2B5EF4-FFF2-40B4-BE49-F238E27FC236}">
-                <a16:creationId xmlns:a16="http://schemas.microsoft.com/office/drawing/2014/main" id="{BA0D48FA-B8B4-4AE7-AC3D-FC03D3907F40}"/>
+                <a16:creationId xmlns:a16="http://schemas.microsoft.com/office/drawing/2014/main" id="{2A4A24ED-EA5C-4B4A-ABEE-911E8174CCB5}"/>
               </a:ext>
             </a:extLst>
           </p:cNvPr>
@@ -29629,7 +29641,7 @@
           <p:cNvPr id="12" name="Shape 10">
             <a:extLst xmlns:a="http://schemas.openxmlformats.org/drawingml/2006/main">
               <a:ext uri="{FF2B5EF4-FFF2-40B4-BE49-F238E27FC236}">
-                <a16:creationId xmlns:a16="http://schemas.microsoft.com/office/drawing/2014/main" id="{D29E704E-56FF-4CF4-B399-0996C3FBE0B2}"/>
+                <a16:creationId xmlns:a16="http://schemas.microsoft.com/office/drawing/2014/main" id="{8C3863E4-EF57-4045-B1C9-92E949CE9786}"/>
               </a:ext>
             </a:extLst>
           </p:cNvPr>
@@ -29667,7 +29679,7 @@
           <p:cNvPr id="13" name="Text 11">
             <a:extLst xmlns:a="http://schemas.openxmlformats.org/drawingml/2006/main">
               <a:ext uri="{FF2B5EF4-FFF2-40B4-BE49-F238E27FC236}">
-                <a16:creationId xmlns:a16="http://schemas.microsoft.com/office/drawing/2014/main" id="{919C0044-3E32-48CA-8C26-3D72F1EC50C2}"/>
+                <a16:creationId xmlns:a16="http://schemas.microsoft.com/office/drawing/2014/main" id="{1346EFBF-CBD2-4C2C-B696-BD6416BA08B9}"/>
               </a:ext>
             </a:extLst>
           </p:cNvPr>
@@ -29712,7 +29724,7 @@
           <p:cNvPr id="14" name="Text 12">
             <a:extLst xmlns:a="http://schemas.openxmlformats.org/drawingml/2006/main">
               <a:ext uri="{FF2B5EF4-FFF2-40B4-BE49-F238E27FC236}">
-                <a16:creationId xmlns:a16="http://schemas.microsoft.com/office/drawing/2014/main" id="{7CADF393-E1B0-4F09-9422-5D597714F1D3}"/>
+                <a16:creationId xmlns:a16="http://schemas.microsoft.com/office/drawing/2014/main" id="{04276B8E-81B6-48B8-938B-C81BA86F187B}"/>
               </a:ext>
             </a:extLst>
           </p:cNvPr>
@@ -29760,7 +29772,7 @@
           <p:cNvPr id="15" name="Text 13">
             <a:extLst xmlns:a="http://schemas.openxmlformats.org/drawingml/2006/main">
               <a:ext uri="{FF2B5EF4-FFF2-40B4-BE49-F238E27FC236}">
-                <a16:creationId xmlns:a16="http://schemas.microsoft.com/office/drawing/2014/main" id="{0F758DA3-B9F1-4000-A229-A0CC7151F2A8}"/>
+                <a16:creationId xmlns:a16="http://schemas.microsoft.com/office/drawing/2014/main" id="{F988EDF5-4483-4B2A-B0A4-4F3D0CBE21BF}"/>
               </a:ext>
             </a:extLst>
           </p:cNvPr>
@@ -29808,7 +29820,7 @@
           <p:cNvPr id="16" name="Shape 14">
             <a:extLst xmlns:a="http://schemas.openxmlformats.org/drawingml/2006/main">
               <a:ext uri="{FF2B5EF4-FFF2-40B4-BE49-F238E27FC236}">
-                <a16:creationId xmlns:a16="http://schemas.microsoft.com/office/drawing/2014/main" id="{D04A497C-1125-4D8D-A969-2769C3FD1111}"/>
+                <a16:creationId xmlns:a16="http://schemas.microsoft.com/office/drawing/2014/main" id="{0ACF13B3-B369-48CD-A91B-B677D0495D2C}"/>
               </a:ext>
             </a:extLst>
           </p:cNvPr>
@@ -29855,7 +29867,7 @@
           <p:cNvPr id="17" name="Shape 15">
             <a:extLst xmlns:a="http://schemas.openxmlformats.org/drawingml/2006/main">
               <a:ext uri="{FF2B5EF4-FFF2-40B4-BE49-F238E27FC236}">
-                <a16:creationId xmlns:a16="http://schemas.microsoft.com/office/drawing/2014/main" id="{322E259B-D08B-4A99-BC6E-9CCA4E8F3D5D}"/>
+                <a16:creationId xmlns:a16="http://schemas.microsoft.com/office/drawing/2014/main" id="{039F9E50-5DB2-4953-854B-F9871522833D}"/>
               </a:ext>
             </a:extLst>
           </p:cNvPr>
@@ -29893,7 +29905,7 @@
           <p:cNvPr id="18" name="Text 16">
             <a:extLst xmlns:a="http://schemas.openxmlformats.org/drawingml/2006/main">
               <a:ext uri="{FF2B5EF4-FFF2-40B4-BE49-F238E27FC236}">
-                <a16:creationId xmlns:a16="http://schemas.microsoft.com/office/drawing/2014/main" id="{A94FCA6C-BD9E-41ED-9F8E-E467DC18D7A9}"/>
+                <a16:creationId xmlns:a16="http://schemas.microsoft.com/office/drawing/2014/main" id="{B7549CEB-A88D-49B9-8A8E-B2109842605F}"/>
               </a:ext>
             </a:extLst>
           </p:cNvPr>
@@ -29938,7 +29950,7 @@
           <p:cNvPr id="19" name="Text 17">
             <a:extLst xmlns:a="http://schemas.openxmlformats.org/drawingml/2006/main">
               <a:ext uri="{FF2B5EF4-FFF2-40B4-BE49-F238E27FC236}">
-                <a16:creationId xmlns:a16="http://schemas.microsoft.com/office/drawing/2014/main" id="{ED70C9AE-CFAE-42B5-A059-BC17F5ED232A}"/>
+                <a16:creationId xmlns:a16="http://schemas.microsoft.com/office/drawing/2014/main" id="{600108BA-1E71-4E79-817F-08A520B75737}"/>
               </a:ext>
             </a:extLst>
           </p:cNvPr>
@@ -29986,7 +29998,7 @@
           <p:cNvPr id="20" name="Text 18">
             <a:extLst xmlns:a="http://schemas.openxmlformats.org/drawingml/2006/main">
               <a:ext uri="{FF2B5EF4-FFF2-40B4-BE49-F238E27FC236}">
-                <a16:creationId xmlns:a16="http://schemas.microsoft.com/office/drawing/2014/main" id="{0C34AEF6-145A-4493-BC82-E420FF53FF51}"/>
+                <a16:creationId xmlns:a16="http://schemas.microsoft.com/office/drawing/2014/main" id="{4E5E9028-89D6-42D1-9F5A-15C4DEBA2A10}"/>
               </a:ext>
             </a:extLst>
           </p:cNvPr>
@@ -30034,7 +30046,7 @@
           <p:cNvPr id="21" name="Shape 19">
             <a:extLst xmlns:a="http://schemas.openxmlformats.org/drawingml/2006/main">
               <a:ext uri="{FF2B5EF4-FFF2-40B4-BE49-F238E27FC236}">
-                <a16:creationId xmlns:a16="http://schemas.microsoft.com/office/drawing/2014/main" id="{B0144BE2-017B-4D92-AD3A-94793D1BE52D}"/>
+                <a16:creationId xmlns:a16="http://schemas.microsoft.com/office/drawing/2014/main" id="{A3D8B40E-4346-4956-87BE-EF4D4AB2697E}"/>
               </a:ext>
             </a:extLst>
           </p:cNvPr>
@@ -30081,7 +30093,7 @@
           <p:cNvPr id="22" name="Shape 20">
             <a:extLst xmlns:a="http://schemas.openxmlformats.org/drawingml/2006/main">
               <a:ext uri="{FF2B5EF4-FFF2-40B4-BE49-F238E27FC236}">
-                <a16:creationId xmlns:a16="http://schemas.microsoft.com/office/drawing/2014/main" id="{3C4B04D1-5791-48A7-B2D8-EB45D3615B99}"/>
+                <a16:creationId xmlns:a16="http://schemas.microsoft.com/office/drawing/2014/main" id="{B4ECE22F-536D-423F-9BC8-916AAD13445E}"/>
               </a:ext>
             </a:extLst>
           </p:cNvPr>
@@ -30119,7 +30131,7 @@
           <p:cNvPr id="23" name="Text 21">
             <a:extLst xmlns:a="http://schemas.openxmlformats.org/drawingml/2006/main">
               <a:ext uri="{FF2B5EF4-FFF2-40B4-BE49-F238E27FC236}">
-                <a16:creationId xmlns:a16="http://schemas.microsoft.com/office/drawing/2014/main" id="{AD2CE0C6-A693-4B88-9164-5A50D2CCDB6E}"/>
+                <a16:creationId xmlns:a16="http://schemas.microsoft.com/office/drawing/2014/main" id="{1DB5096C-500E-4528-B55A-DF67E1422E20}"/>
               </a:ext>
             </a:extLst>
           </p:cNvPr>
@@ -30164,7 +30176,7 @@
           <p:cNvPr id="24" name="Text 22">
             <a:extLst xmlns:a="http://schemas.openxmlformats.org/drawingml/2006/main">
               <a:ext uri="{FF2B5EF4-FFF2-40B4-BE49-F238E27FC236}">
-                <a16:creationId xmlns:a16="http://schemas.microsoft.com/office/drawing/2014/main" id="{F7A51FA8-FE95-469C-9DC5-B115B4C0586B}"/>
+                <a16:creationId xmlns:a16="http://schemas.microsoft.com/office/drawing/2014/main" id="{354BC2F3-1D0D-47BD-B486-564DB3DD25DC}"/>
               </a:ext>
             </a:extLst>
           </p:cNvPr>
@@ -30212,7 +30224,7 @@
           <p:cNvPr id="25" name="Text 23">
             <a:extLst xmlns:a="http://schemas.openxmlformats.org/drawingml/2006/main">
               <a:ext uri="{FF2B5EF4-FFF2-40B4-BE49-F238E27FC236}">
-                <a16:creationId xmlns:a16="http://schemas.microsoft.com/office/drawing/2014/main" id="{F29E9DE4-FF60-4350-B0DD-395CB8AA37B6}"/>
+                <a16:creationId xmlns:a16="http://schemas.microsoft.com/office/drawing/2014/main" id="{1D5FC5BF-1144-4321-93ED-A43C0D0BE7F8}"/>
               </a:ext>
             </a:extLst>
           </p:cNvPr>
@@ -30260,7 +30272,7 @@
           <p:cNvPr id="26" name="Shape 24">
             <a:extLst xmlns:a="http://schemas.openxmlformats.org/drawingml/2006/main">
               <a:ext uri="{FF2B5EF4-FFF2-40B4-BE49-F238E27FC236}">
-                <a16:creationId xmlns:a16="http://schemas.microsoft.com/office/drawing/2014/main" id="{E86F3201-A620-4D9A-BD5B-032770E9603F}"/>
+                <a16:creationId xmlns:a16="http://schemas.microsoft.com/office/drawing/2014/main" id="{58EC248D-4D9F-4479-A0B8-649273F0A853}"/>
               </a:ext>
             </a:extLst>
           </p:cNvPr>
@@ -30307,7 +30319,7 @@
           <p:cNvPr id="27" name="Shape 25">
             <a:extLst xmlns:a="http://schemas.openxmlformats.org/drawingml/2006/main">
               <a:ext uri="{FF2B5EF4-FFF2-40B4-BE49-F238E27FC236}">
-                <a16:creationId xmlns:a16="http://schemas.microsoft.com/office/drawing/2014/main" id="{9C022523-829C-4A4A-AAB0-E0C29B4591E3}"/>
+                <a16:creationId xmlns:a16="http://schemas.microsoft.com/office/drawing/2014/main" id="{B8816433-0000-46F8-B3F4-5C5BB0CF4CBB}"/>
               </a:ext>
             </a:extLst>
           </p:cNvPr>
@@ -30345,7 +30357,7 @@
           <p:cNvPr id="28" name="Text 26">
             <a:extLst xmlns:a="http://schemas.openxmlformats.org/drawingml/2006/main">
               <a:ext uri="{FF2B5EF4-FFF2-40B4-BE49-F238E27FC236}">
-                <a16:creationId xmlns:a16="http://schemas.microsoft.com/office/drawing/2014/main" id="{49BEE019-54C3-4CDF-B483-2216A72BD62C}"/>
+                <a16:creationId xmlns:a16="http://schemas.microsoft.com/office/drawing/2014/main" id="{95FBE5B1-E314-425E-A212-0DEC53DA541C}"/>
               </a:ext>
             </a:extLst>
           </p:cNvPr>
@@ -30390,7 +30402,7 @@
           <p:cNvPr id="29" name="Text 27">
             <a:extLst xmlns:a="http://schemas.openxmlformats.org/drawingml/2006/main">
               <a:ext uri="{FF2B5EF4-FFF2-40B4-BE49-F238E27FC236}">
-                <a16:creationId xmlns:a16="http://schemas.microsoft.com/office/drawing/2014/main" id="{C1135432-1EC8-47A5-8D7F-AA08C33A4780}"/>
+                <a16:creationId xmlns:a16="http://schemas.microsoft.com/office/drawing/2014/main" id="{5CE0BD2D-61F6-48EA-A3AA-F22F475150EF}"/>
               </a:ext>
             </a:extLst>
           </p:cNvPr>
@@ -30438,7 +30450,7 @@
           <p:cNvPr id="30" name="Text 28">
             <a:extLst xmlns:a="http://schemas.openxmlformats.org/drawingml/2006/main">
               <a:ext uri="{FF2B5EF4-FFF2-40B4-BE49-F238E27FC236}">
-                <a16:creationId xmlns:a16="http://schemas.microsoft.com/office/drawing/2014/main" id="{96AF3299-85A7-4298-9470-2E907AA73858}"/>
+                <a16:creationId xmlns:a16="http://schemas.microsoft.com/office/drawing/2014/main" id="{715A3F47-6E76-4A0A-AD8B-9AAD5FB096F1}"/>
               </a:ext>
             </a:extLst>
           </p:cNvPr>
@@ -30486,7 +30498,7 @@
           <p:cNvPr id="31" name="Shape 29">
             <a:extLst xmlns:a="http://schemas.openxmlformats.org/drawingml/2006/main">
               <a:ext uri="{FF2B5EF4-FFF2-40B4-BE49-F238E27FC236}">
-                <a16:creationId xmlns:a16="http://schemas.microsoft.com/office/drawing/2014/main" id="{3E58A518-90AD-4FA1-B062-8593D548561B}"/>
+                <a16:creationId xmlns:a16="http://schemas.microsoft.com/office/drawing/2014/main" id="{661C1005-18BE-479F-8593-3D8867B760C6}"/>
               </a:ext>
             </a:extLst>
           </p:cNvPr>
@@ -30533,7 +30545,7 @@
           <p:cNvPr id="32" name="Shape 30">
             <a:extLst xmlns:a="http://schemas.openxmlformats.org/drawingml/2006/main">
               <a:ext uri="{FF2B5EF4-FFF2-40B4-BE49-F238E27FC236}">
-                <a16:creationId xmlns:a16="http://schemas.microsoft.com/office/drawing/2014/main" id="{6F33719E-BE0F-4EC7-AD1C-4295A625A492}"/>
+                <a16:creationId xmlns:a16="http://schemas.microsoft.com/office/drawing/2014/main" id="{2E895156-44CA-4656-A30E-47FF3B3295BD}"/>
               </a:ext>
             </a:extLst>
           </p:cNvPr>
@@ -30571,7 +30583,7 @@
           <p:cNvPr id="33" name="Text 31">
             <a:extLst xmlns:a="http://schemas.openxmlformats.org/drawingml/2006/main">
               <a:ext uri="{FF2B5EF4-FFF2-40B4-BE49-F238E27FC236}">
-                <a16:creationId xmlns:a16="http://schemas.microsoft.com/office/drawing/2014/main" id="{5A7E11F8-DD08-4AF2-A1BF-50A9685A1D34}"/>
+                <a16:creationId xmlns:a16="http://schemas.microsoft.com/office/drawing/2014/main" id="{840416C0-C42A-4235-9E6E-E419F33F4EE1}"/>
               </a:ext>
             </a:extLst>
           </p:cNvPr>
@@ -30616,7 +30628,7 @@
           <p:cNvPr id="34" name="Text 32">
             <a:extLst xmlns:a="http://schemas.openxmlformats.org/drawingml/2006/main">
               <a:ext uri="{FF2B5EF4-FFF2-40B4-BE49-F238E27FC236}">
-                <a16:creationId xmlns:a16="http://schemas.microsoft.com/office/drawing/2014/main" id="{BAD215F0-568C-4284-937C-C68884B6177B}"/>
+                <a16:creationId xmlns:a16="http://schemas.microsoft.com/office/drawing/2014/main" id="{6E875685-004F-426E-BC12-0DA967D77D35}"/>
               </a:ext>
             </a:extLst>
           </p:cNvPr>
@@ -30664,7 +30676,7 @@
           <p:cNvPr id="35" name="Text 33">
             <a:extLst xmlns:a="http://schemas.openxmlformats.org/drawingml/2006/main">
               <a:ext uri="{FF2B5EF4-FFF2-40B4-BE49-F238E27FC236}">
-                <a16:creationId xmlns:a16="http://schemas.microsoft.com/office/drawing/2014/main" id="{B04E4038-B090-4016-8A2C-2871B28A1CB5}"/>
+                <a16:creationId xmlns:a16="http://schemas.microsoft.com/office/drawing/2014/main" id="{EB3D8C84-1ABA-4F8F-8603-AFBC3B307147}"/>
               </a:ext>
             </a:extLst>
           </p:cNvPr>
@@ -30712,7 +30724,7 @@
           <p:cNvPr id="36" name="Text 34">
             <a:extLst xmlns:a="http://schemas.openxmlformats.org/drawingml/2006/main">
               <a:ext uri="{FF2B5EF4-FFF2-40B4-BE49-F238E27FC236}">
-                <a16:creationId xmlns:a16="http://schemas.microsoft.com/office/drawing/2014/main" id="{CF17F32A-7776-4E42-97EC-4452A6D5CA21}"/>
+                <a16:creationId xmlns:a16="http://schemas.microsoft.com/office/drawing/2014/main" id="{91491671-35EA-4A24-99EF-E28729F85087}"/>
               </a:ext>
             </a:extLst>
           </p:cNvPr>
@@ -30758,7 +30770,7 @@
     </p:spTree>
     <p:extLst>
       <p:ext uri="{BB962C8B-B14F-4D97-AF65-F5344CB8AC3E}">
-        <p14:creationId xmlns:p14="http://schemas.microsoft.com/office/powerpoint/2010/main" val="437162550"/>
+        <p14:creationId xmlns:p14="http://schemas.microsoft.com/office/powerpoint/2010/main" val="1940819812"/>
       </p:ext>
     </p:extLst>
   </p:cSld>
@@ -30789,7 +30801,7 @@
           <p:cNvPr id="2" name="Text 0">
             <a:extLst xmlns:a="http://schemas.openxmlformats.org/drawingml/2006/main">
               <a:ext uri="{FF2B5EF4-FFF2-40B4-BE49-F238E27FC236}">
-                <a16:creationId xmlns:a16="http://schemas.microsoft.com/office/drawing/2014/main" id="{8D032085-CA1A-4C9D-9899-BD3D35405A88}"/>
+                <a16:creationId xmlns:a16="http://schemas.microsoft.com/office/drawing/2014/main" id="{F7BB1295-F522-464E-B4F7-DD24014932E4}"/>
               </a:ext>
             </a:extLst>
           </p:cNvPr>
@@ -30834,7 +30846,7 @@
           <p:cNvPr id="3" name="Text 1">
             <a:extLst xmlns:a="http://schemas.openxmlformats.org/drawingml/2006/main">
               <a:ext uri="{FF2B5EF4-FFF2-40B4-BE49-F238E27FC236}">
-                <a16:creationId xmlns:a16="http://schemas.microsoft.com/office/drawing/2014/main" id="{09D5A99D-D97C-43D3-8478-4B5B5FD0B74D}"/>
+                <a16:creationId xmlns:a16="http://schemas.microsoft.com/office/drawing/2014/main" id="{FE3A6A64-DA5F-4679-8C10-CD91861998C7}"/>
               </a:ext>
             </a:extLst>
           </p:cNvPr>
@@ -30879,7 +30891,7 @@
           <p:cNvPr id="4" name="Text 2">
             <a:extLst xmlns:a="http://schemas.openxmlformats.org/drawingml/2006/main">
               <a:ext uri="{FF2B5EF4-FFF2-40B4-BE49-F238E27FC236}">
-                <a16:creationId xmlns:a16="http://schemas.microsoft.com/office/drawing/2014/main" id="{7FFDFE78-D90C-4A58-9E23-8AB9565B9833}"/>
+                <a16:creationId xmlns:a16="http://schemas.microsoft.com/office/drawing/2014/main" id="{6B22A45B-DE6E-49A2-A014-67E8FE2312AC}"/>
               </a:ext>
             </a:extLst>
           </p:cNvPr>
@@ -30924,7 +30936,7 @@
           <p:cNvPr id="5" name="Text 3">
             <a:extLst xmlns:a="http://schemas.openxmlformats.org/drawingml/2006/main">
               <a:ext uri="{FF2B5EF4-FFF2-40B4-BE49-F238E27FC236}">
-                <a16:creationId xmlns:a16="http://schemas.microsoft.com/office/drawing/2014/main" id="{178CC56C-B356-4729-9054-866274D1C9AA}"/>
+                <a16:creationId xmlns:a16="http://schemas.microsoft.com/office/drawing/2014/main" id="{C088B000-38C4-408D-88CF-D0075A120B97}"/>
               </a:ext>
             </a:extLst>
           </p:cNvPr>
@@ -33877,7 +33889,7 @@
           <p:cNvPr id="7" name="Text 4">
             <a:extLst xmlns:a="http://schemas.openxmlformats.org/drawingml/2006/main">
               <a:ext uri="{FF2B5EF4-FFF2-40B4-BE49-F238E27FC236}">
-                <a16:creationId xmlns:a16="http://schemas.microsoft.com/office/drawing/2014/main" id="{DE1BAC61-5072-4425-9D81-49A1D456E533}"/>
+                <a16:creationId xmlns:a16="http://schemas.microsoft.com/office/drawing/2014/main" id="{EDDF13C5-BA5E-45E0-83C0-C4007F49FA6C}"/>
               </a:ext>
             </a:extLst>
           </p:cNvPr>
@@ -33922,7 +33934,7 @@
           <p:cNvPr id="8" name="Shape 5">
             <a:extLst xmlns:a="http://schemas.openxmlformats.org/drawingml/2006/main">
               <a:ext uri="{FF2B5EF4-FFF2-40B4-BE49-F238E27FC236}">
-                <a16:creationId xmlns:a16="http://schemas.microsoft.com/office/drawing/2014/main" id="{B8FBF9DE-DC94-410C-A164-51601C6A8A2B}"/>
+                <a16:creationId xmlns:a16="http://schemas.microsoft.com/office/drawing/2014/main" id="{2EE21761-3870-4E81-9CD2-602455424147}"/>
               </a:ext>
             </a:extLst>
           </p:cNvPr>
@@ -33962,7 +33974,7 @@
           <p:cNvPr id="9" name="Text 6">
             <a:extLst xmlns:a="http://schemas.openxmlformats.org/drawingml/2006/main">
               <a:ext uri="{FF2B5EF4-FFF2-40B4-BE49-F238E27FC236}">
-                <a16:creationId xmlns:a16="http://schemas.microsoft.com/office/drawing/2014/main" id="{668CB950-6BB7-4C92-8EAD-A781420991E2}"/>
+                <a16:creationId xmlns:a16="http://schemas.microsoft.com/office/drawing/2014/main" id="{544DF6D9-5767-4776-9D02-97CBDAFECCB4}"/>
               </a:ext>
             </a:extLst>
           </p:cNvPr>
@@ -34007,7 +34019,7 @@
           <p:cNvPr id="10" name="Text 7">
             <a:extLst xmlns:a="http://schemas.openxmlformats.org/drawingml/2006/main">
               <a:ext uri="{FF2B5EF4-FFF2-40B4-BE49-F238E27FC236}">
-                <a16:creationId xmlns:a16="http://schemas.microsoft.com/office/drawing/2014/main" id="{F0141F95-ECB7-46B1-BA0A-ED263DAC7185}"/>
+                <a16:creationId xmlns:a16="http://schemas.microsoft.com/office/drawing/2014/main" id="{3858940A-45A5-4E76-B458-5E1CD02234DE}"/>
               </a:ext>
             </a:extLst>
           </p:cNvPr>
@@ -34053,7 +34065,7 @@
     </p:spTree>
     <p:extLst>
       <p:ext uri="{BB962C8B-B14F-4D97-AF65-F5344CB8AC3E}">
-        <p14:creationId xmlns:p14="http://schemas.microsoft.com/office/powerpoint/2010/main" val="50791231"/>
+        <p14:creationId xmlns:p14="http://schemas.microsoft.com/office/powerpoint/2010/main" val="179620032"/>
       </p:ext>
     </p:extLst>
   </p:cSld>
@@ -34084,7 +34096,7 @@
           <p:cNvPr id="2" name="Text 0">
             <a:extLst xmlns:a="http://schemas.openxmlformats.org/drawingml/2006/main">
               <a:ext uri="{FF2B5EF4-FFF2-40B4-BE49-F238E27FC236}">
-                <a16:creationId xmlns:a16="http://schemas.microsoft.com/office/drawing/2014/main" id="{5AF04202-C93B-48D0-8E90-0AF6981932F7}"/>
+                <a16:creationId xmlns:a16="http://schemas.microsoft.com/office/drawing/2014/main" id="{5D08A5F4-0233-45C6-AE04-C6AFDAD40F86}"/>
               </a:ext>
             </a:extLst>
           </p:cNvPr>
@@ -34129,7 +34141,7 @@
           <p:cNvPr id="3" name="Text 1">
             <a:extLst xmlns:a="http://schemas.openxmlformats.org/drawingml/2006/main">
               <a:ext uri="{FF2B5EF4-FFF2-40B4-BE49-F238E27FC236}">
-                <a16:creationId xmlns:a16="http://schemas.microsoft.com/office/drawing/2014/main" id="{E49E0A12-3119-426F-8395-A8BC4472396E}"/>
+                <a16:creationId xmlns:a16="http://schemas.microsoft.com/office/drawing/2014/main" id="{72A0DFC9-74E7-46BD-B218-3A32A2E15ADC}"/>
               </a:ext>
             </a:extLst>
           </p:cNvPr>
@@ -34174,7 +34186,7 @@
           <p:cNvPr id="4" name="Shape 2">
             <a:extLst xmlns:a="http://schemas.openxmlformats.org/drawingml/2006/main">
               <a:ext uri="{FF2B5EF4-FFF2-40B4-BE49-F238E27FC236}">
-                <a16:creationId xmlns:a16="http://schemas.microsoft.com/office/drawing/2014/main" id="{77C70667-DC10-4DD2-850C-14114BDE23D9}"/>
+                <a16:creationId xmlns:a16="http://schemas.microsoft.com/office/drawing/2014/main" id="{C2313D65-C95B-4FC5-B193-E4FC69E37DB8}"/>
               </a:ext>
             </a:extLst>
           </p:cNvPr>
@@ -34214,7 +34226,7 @@
           <p:cNvPr id="5" name="Shape 3">
             <a:extLst xmlns:a="http://schemas.openxmlformats.org/drawingml/2006/main">
               <a:ext uri="{FF2B5EF4-FFF2-40B4-BE49-F238E27FC236}">
-                <a16:creationId xmlns:a16="http://schemas.microsoft.com/office/drawing/2014/main" id="{BDB918DC-55F3-4F98-821E-561E90B3C210}"/>
+                <a16:creationId xmlns:a16="http://schemas.microsoft.com/office/drawing/2014/main" id="{2F5FD107-1396-4A39-B19C-431DE962CE89}"/>
               </a:ext>
             </a:extLst>
           </p:cNvPr>
@@ -34254,7 +34266,7 @@
           <p:cNvPr id="6" name="Text 4">
             <a:extLst xmlns:a="http://schemas.openxmlformats.org/drawingml/2006/main">
               <a:ext uri="{FF2B5EF4-FFF2-40B4-BE49-F238E27FC236}">
-                <a16:creationId xmlns:a16="http://schemas.microsoft.com/office/drawing/2014/main" id="{B22EA5C1-5DA6-43CA-B9E0-6CCFA2E13075}"/>
+                <a16:creationId xmlns:a16="http://schemas.microsoft.com/office/drawing/2014/main" id="{0DC73319-F62D-476D-84B5-4D54D2395037}"/>
               </a:ext>
             </a:extLst>
           </p:cNvPr>
@@ -34299,7 +34311,7 @@
           <p:cNvPr id="7" name="Text 5">
             <a:extLst xmlns:a="http://schemas.openxmlformats.org/drawingml/2006/main">
               <a:ext uri="{FF2B5EF4-FFF2-40B4-BE49-F238E27FC236}">
-                <a16:creationId xmlns:a16="http://schemas.microsoft.com/office/drawing/2014/main" id="{3B9BC499-FB25-405F-AFE5-DFAD3B91E97C}"/>
+                <a16:creationId xmlns:a16="http://schemas.microsoft.com/office/drawing/2014/main" id="{D714EEFA-F7B5-429E-9D43-6ED391B453E9}"/>
               </a:ext>
             </a:extLst>
           </p:cNvPr>
@@ -34344,7 +34356,7 @@
           <p:cNvPr id="8" name="Shape 6">
             <a:extLst xmlns:a="http://schemas.openxmlformats.org/drawingml/2006/main">
               <a:ext uri="{FF2B5EF4-FFF2-40B4-BE49-F238E27FC236}">
-                <a16:creationId xmlns:a16="http://schemas.microsoft.com/office/drawing/2014/main" id="{875BF8FD-402D-436B-9378-03EF041E72D1}"/>
+                <a16:creationId xmlns:a16="http://schemas.microsoft.com/office/drawing/2014/main" id="{11352775-A67E-4A97-B827-F89DEFAD575D}"/>
               </a:ext>
             </a:extLst>
           </p:cNvPr>
@@ -34382,7 +34394,7 @@
           <p:cNvPr id="9" name="Text 7">
             <a:extLst xmlns:a="http://schemas.openxmlformats.org/drawingml/2006/main">
               <a:ext uri="{FF2B5EF4-FFF2-40B4-BE49-F238E27FC236}">
-                <a16:creationId xmlns:a16="http://schemas.microsoft.com/office/drawing/2014/main" id="{8CE440EF-67CD-4FBA-92ED-C4FAFB110FC6}"/>
+                <a16:creationId xmlns:a16="http://schemas.microsoft.com/office/drawing/2014/main" id="{E1E19219-1267-40E4-92FE-1D70F2D2A2E3}"/>
               </a:ext>
             </a:extLst>
           </p:cNvPr>
@@ -34427,7 +34439,7 @@
           <p:cNvPr id="10" name="Text 8">
             <a:extLst xmlns:a="http://schemas.openxmlformats.org/drawingml/2006/main">
               <a:ext uri="{FF2B5EF4-FFF2-40B4-BE49-F238E27FC236}">
-                <a16:creationId xmlns:a16="http://schemas.microsoft.com/office/drawing/2014/main" id="{AF1E2DC1-AC50-406C-B993-D2E6497D0039}"/>
+                <a16:creationId xmlns:a16="http://schemas.microsoft.com/office/drawing/2014/main" id="{FD4ABD62-865B-4A76-ADDE-B5D74C0375F9}"/>
               </a:ext>
             </a:extLst>
           </p:cNvPr>
@@ -34475,7 +34487,7 @@
           <p:cNvPr id="11" name="Text 9">
             <a:extLst xmlns:a="http://schemas.openxmlformats.org/drawingml/2006/main">
               <a:ext uri="{FF2B5EF4-FFF2-40B4-BE49-F238E27FC236}">
-                <a16:creationId xmlns:a16="http://schemas.microsoft.com/office/drawing/2014/main" id="{D320041A-E84E-4361-A176-75648577A293}"/>
+                <a16:creationId xmlns:a16="http://schemas.microsoft.com/office/drawing/2014/main" id="{3BDC27FF-A142-45EB-B532-2DD5ED6FC4CF}"/>
               </a:ext>
             </a:extLst>
           </p:cNvPr>
@@ -34523,7 +34535,7 @@
           <p:cNvPr id="12" name="Shape 10">
             <a:extLst xmlns:a="http://schemas.openxmlformats.org/drawingml/2006/main">
               <a:ext uri="{FF2B5EF4-FFF2-40B4-BE49-F238E27FC236}">
-                <a16:creationId xmlns:a16="http://schemas.microsoft.com/office/drawing/2014/main" id="{9C6817A2-8238-472F-B437-9A5CB124ADEB}"/>
+                <a16:creationId xmlns:a16="http://schemas.microsoft.com/office/drawing/2014/main" id="{35221CE8-4BAB-4FFA-9D3D-B3233CDA0831}"/>
               </a:ext>
             </a:extLst>
           </p:cNvPr>
@@ -34561,7 +34573,7 @@
           <p:cNvPr id="13" name="Text 11">
             <a:extLst xmlns:a="http://schemas.openxmlformats.org/drawingml/2006/main">
               <a:ext uri="{FF2B5EF4-FFF2-40B4-BE49-F238E27FC236}">
-                <a16:creationId xmlns:a16="http://schemas.microsoft.com/office/drawing/2014/main" id="{B95C9B7A-49A3-4170-8E40-2076A63CEFB3}"/>
+                <a16:creationId xmlns:a16="http://schemas.microsoft.com/office/drawing/2014/main" id="{A8B2417E-AD81-461D-986F-8AECC09F6EF2}"/>
               </a:ext>
             </a:extLst>
           </p:cNvPr>
@@ -34606,7 +34618,7 @@
           <p:cNvPr id="14" name="Text 12">
             <a:extLst xmlns:a="http://schemas.openxmlformats.org/drawingml/2006/main">
               <a:ext uri="{FF2B5EF4-FFF2-40B4-BE49-F238E27FC236}">
-                <a16:creationId xmlns:a16="http://schemas.microsoft.com/office/drawing/2014/main" id="{045E34CF-C67E-4B96-AF00-AEA0BCEBFE22}"/>
+                <a16:creationId xmlns:a16="http://schemas.microsoft.com/office/drawing/2014/main" id="{68B596C9-0DE5-4D13-BA58-4378063B8EBF}"/>
               </a:ext>
             </a:extLst>
           </p:cNvPr>
@@ -34654,7 +34666,7 @@
           <p:cNvPr id="15" name="Text 13">
             <a:extLst xmlns:a="http://schemas.openxmlformats.org/drawingml/2006/main">
               <a:ext uri="{FF2B5EF4-FFF2-40B4-BE49-F238E27FC236}">
-                <a16:creationId xmlns:a16="http://schemas.microsoft.com/office/drawing/2014/main" id="{49FD76CA-912E-45E6-8102-82369B8E8D36}"/>
+                <a16:creationId xmlns:a16="http://schemas.microsoft.com/office/drawing/2014/main" id="{F806987F-740A-4BB5-B995-2FD045A48409}"/>
               </a:ext>
             </a:extLst>
           </p:cNvPr>
@@ -34702,7 +34714,7 @@
           <p:cNvPr id="16" name="Shape 14">
             <a:extLst xmlns:a="http://schemas.openxmlformats.org/drawingml/2006/main">
               <a:ext uri="{FF2B5EF4-FFF2-40B4-BE49-F238E27FC236}">
-                <a16:creationId xmlns:a16="http://schemas.microsoft.com/office/drawing/2014/main" id="{46806AAE-5A25-4D9D-876F-0214980EF0F2}"/>
+                <a16:creationId xmlns:a16="http://schemas.microsoft.com/office/drawing/2014/main" id="{845DFFB3-0A4C-410C-B303-131874FE103F}"/>
               </a:ext>
             </a:extLst>
           </p:cNvPr>
@@ -34740,7 +34752,7 @@
           <p:cNvPr id="17" name="Text 15">
             <a:extLst xmlns:a="http://schemas.openxmlformats.org/drawingml/2006/main">
               <a:ext uri="{FF2B5EF4-FFF2-40B4-BE49-F238E27FC236}">
-                <a16:creationId xmlns:a16="http://schemas.microsoft.com/office/drawing/2014/main" id="{7AC1041D-F4E0-460B-945D-C1FF023BD414}"/>
+                <a16:creationId xmlns:a16="http://schemas.microsoft.com/office/drawing/2014/main" id="{5443B23B-AF5F-458D-940F-78701515534C}"/>
               </a:ext>
             </a:extLst>
           </p:cNvPr>
@@ -34785,7 +34797,7 @@
           <p:cNvPr id="18" name="Text 16">
             <a:extLst xmlns:a="http://schemas.openxmlformats.org/drawingml/2006/main">
               <a:ext uri="{FF2B5EF4-FFF2-40B4-BE49-F238E27FC236}">
-                <a16:creationId xmlns:a16="http://schemas.microsoft.com/office/drawing/2014/main" id="{E939E3DF-7FB4-41D7-8B61-7006D630A81D}"/>
+                <a16:creationId xmlns:a16="http://schemas.microsoft.com/office/drawing/2014/main" id="{ED3049A6-9035-4FC7-B6BE-704C9DF45686}"/>
               </a:ext>
             </a:extLst>
           </p:cNvPr>
@@ -34833,7 +34845,7 @@
           <p:cNvPr id="19" name="Text 17">
             <a:extLst xmlns:a="http://schemas.openxmlformats.org/drawingml/2006/main">
               <a:ext uri="{FF2B5EF4-FFF2-40B4-BE49-F238E27FC236}">
-                <a16:creationId xmlns:a16="http://schemas.microsoft.com/office/drawing/2014/main" id="{538F781A-02E3-4A38-B8F5-C22A65B692EF}"/>
+                <a16:creationId xmlns:a16="http://schemas.microsoft.com/office/drawing/2014/main" id="{C917F34B-C7B9-44BC-A1A1-6FBD94979E96}"/>
               </a:ext>
             </a:extLst>
           </p:cNvPr>
@@ -34881,7 +34893,7 @@
           <p:cNvPr id="20" name="Shape 18">
             <a:extLst xmlns:a="http://schemas.openxmlformats.org/drawingml/2006/main">
               <a:ext uri="{FF2B5EF4-FFF2-40B4-BE49-F238E27FC236}">
-                <a16:creationId xmlns:a16="http://schemas.microsoft.com/office/drawing/2014/main" id="{232D6EAB-BBC9-4B82-A0E9-C636754B8D43}"/>
+                <a16:creationId xmlns:a16="http://schemas.microsoft.com/office/drawing/2014/main" id="{868BE950-B8AD-4214-B3E1-793E98FFD35D}"/>
               </a:ext>
             </a:extLst>
           </p:cNvPr>
@@ -34919,7 +34931,7 @@
           <p:cNvPr id="21" name="Text 19">
             <a:extLst xmlns:a="http://schemas.openxmlformats.org/drawingml/2006/main">
               <a:ext uri="{FF2B5EF4-FFF2-40B4-BE49-F238E27FC236}">
-                <a16:creationId xmlns:a16="http://schemas.microsoft.com/office/drawing/2014/main" id="{CB3237FA-C2A1-41E6-BF78-CB1F7DB79069}"/>
+                <a16:creationId xmlns:a16="http://schemas.microsoft.com/office/drawing/2014/main" id="{945A0477-4E75-484A-8660-37709C644502}"/>
               </a:ext>
             </a:extLst>
           </p:cNvPr>
@@ -34964,7 +34976,7 @@
           <p:cNvPr id="22" name="Text 20">
             <a:extLst xmlns:a="http://schemas.openxmlformats.org/drawingml/2006/main">
               <a:ext uri="{FF2B5EF4-FFF2-40B4-BE49-F238E27FC236}">
-                <a16:creationId xmlns:a16="http://schemas.microsoft.com/office/drawing/2014/main" id="{07D77FD8-6A2E-4968-865F-A749FEB43FA5}"/>
+                <a16:creationId xmlns:a16="http://schemas.microsoft.com/office/drawing/2014/main" id="{C578487D-8A47-4D9F-B07F-AD87A4840493}"/>
               </a:ext>
             </a:extLst>
           </p:cNvPr>
@@ -35012,7 +35024,7 @@
           <p:cNvPr id="23" name="Text 21">
             <a:extLst xmlns:a="http://schemas.openxmlformats.org/drawingml/2006/main">
               <a:ext uri="{FF2B5EF4-FFF2-40B4-BE49-F238E27FC236}">
-                <a16:creationId xmlns:a16="http://schemas.microsoft.com/office/drawing/2014/main" id="{EBCB0A20-E220-4FE5-9B21-9D2370405C97}"/>
+                <a16:creationId xmlns:a16="http://schemas.microsoft.com/office/drawing/2014/main" id="{0B8FA3A9-6183-4D21-A7D3-F325DA4CEDDE}"/>
               </a:ext>
             </a:extLst>
           </p:cNvPr>
@@ -35060,7 +35072,7 @@
           <p:cNvPr id="24" name="Shape 22">
             <a:extLst xmlns:a="http://schemas.openxmlformats.org/drawingml/2006/main">
               <a:ext uri="{FF2B5EF4-FFF2-40B4-BE49-F238E27FC236}">
-                <a16:creationId xmlns:a16="http://schemas.microsoft.com/office/drawing/2014/main" id="{760CFA6C-F115-401E-835E-9E12AF552BD0}"/>
+                <a16:creationId xmlns:a16="http://schemas.microsoft.com/office/drawing/2014/main" id="{82C21D68-30B4-4977-B6DB-07B6D6B5FB25}"/>
               </a:ext>
             </a:extLst>
           </p:cNvPr>
@@ -35096,7 +35108,7 @@
           <p:cNvPr id="25" name="Text 23">
             <a:extLst xmlns:a="http://schemas.openxmlformats.org/drawingml/2006/main">
               <a:ext uri="{FF2B5EF4-FFF2-40B4-BE49-F238E27FC236}">
-                <a16:creationId xmlns:a16="http://schemas.microsoft.com/office/drawing/2014/main" id="{7735B16F-BADE-4380-8108-BA5C7A9EB6C3}"/>
+                <a16:creationId xmlns:a16="http://schemas.microsoft.com/office/drawing/2014/main" id="{A901C9A5-3FDE-412B-A337-7615CE5749A2}"/>
               </a:ext>
             </a:extLst>
           </p:cNvPr>
@@ -35131,7 +35143,7 @@
                 <a:ea typeface="Calibri"/>
                 <a:cs typeface="Calibri"/>
               </a:rPr>
-              <a:t>Next scientific threshold: preregistered multi-family, time-forward comparison with engineering effort, cache economics, drift, and executable AWO / Agent JIT / EvoC2F baselines.</a:t>
+              <a:t>Next scientific threshold: preregistered cross-repository, time-forward comparison with engineering effort, cache economics, drift, and executable AWO / Agent JIT / EvoC2F baselines.</a:t>
             </a:r>
           </a:p>
         </p:txBody>
@@ -35139,7 +35151,7 @@
     </p:spTree>
     <p:extLst>
       <p:ext uri="{BB962C8B-B14F-4D97-AF65-F5344CB8AC3E}">
-        <p14:creationId xmlns:p14="http://schemas.microsoft.com/office/powerpoint/2010/main" val="1199931836"/>
+        <p14:creationId xmlns:p14="http://schemas.microsoft.com/office/powerpoint/2010/main" val="992884867"/>
       </p:ext>
     </p:extLst>
   </p:cSld>
@@ -35170,7 +35182,7 @@
           <p:cNvPr id="2" name="Text 0">
             <a:extLst xmlns:a="http://schemas.openxmlformats.org/drawingml/2006/main">
               <a:ext uri="{FF2B5EF4-FFF2-40B4-BE49-F238E27FC236}">
-                <a16:creationId xmlns:a16="http://schemas.microsoft.com/office/drawing/2014/main" id="{59DBBC8A-5770-4A97-A8B1-DD4848F1D329}"/>
+                <a16:creationId xmlns:a16="http://schemas.microsoft.com/office/drawing/2014/main" id="{580A623C-A907-4DA9-B3FA-5561CF6E9A8B}"/>
               </a:ext>
             </a:extLst>
           </p:cNvPr>
@@ -35215,7 +35227,7 @@
           <p:cNvPr id="3" name="Text 1">
             <a:extLst xmlns:a="http://schemas.openxmlformats.org/drawingml/2006/main">
               <a:ext uri="{FF2B5EF4-FFF2-40B4-BE49-F238E27FC236}">
-                <a16:creationId xmlns:a16="http://schemas.microsoft.com/office/drawing/2014/main" id="{36BC257F-DE92-495D-95CE-E1370D5BFC08}"/>
+                <a16:creationId xmlns:a16="http://schemas.microsoft.com/office/drawing/2014/main" id="{31873201-FA00-475E-B8A6-5467A8C16B78}"/>
               </a:ext>
             </a:extLst>
           </p:cNvPr>
@@ -35260,7 +35272,7 @@
           <p:cNvPr id="4" name="Text 2">
             <a:extLst xmlns:a="http://schemas.openxmlformats.org/drawingml/2006/main">
               <a:ext uri="{FF2B5EF4-FFF2-40B4-BE49-F238E27FC236}">
-                <a16:creationId xmlns:a16="http://schemas.microsoft.com/office/drawing/2014/main" id="{312321E0-EE63-491E-AD49-597B4D7A89A9}"/>
+                <a16:creationId xmlns:a16="http://schemas.microsoft.com/office/drawing/2014/main" id="{8F3D6EE9-E06A-4BFC-833E-C17379E8CD6B}"/>
               </a:ext>
             </a:extLst>
           </p:cNvPr>
@@ -35305,7 +35317,7 @@
           <p:cNvPr id="5" name="Text 3">
             <a:extLst xmlns:a="http://schemas.openxmlformats.org/drawingml/2006/main">
               <a:ext uri="{FF2B5EF4-FFF2-40B4-BE49-F238E27FC236}">
-                <a16:creationId xmlns:a16="http://schemas.microsoft.com/office/drawing/2014/main" id="{15B11B85-70E6-48CD-8E8B-543FDE01360E}"/>
+                <a16:creationId xmlns:a16="http://schemas.microsoft.com/office/drawing/2014/main" id="{4C419C6E-72D2-400C-9269-3F033E473EE9}"/>
               </a:ext>
             </a:extLst>
           </p:cNvPr>
@@ -38202,7 +38214,7 @@
           <p:cNvPr id="7" name="Shape 4">
             <a:extLst xmlns:a="http://schemas.openxmlformats.org/drawingml/2006/main">
               <a:ext uri="{FF2B5EF4-FFF2-40B4-BE49-F238E27FC236}">
-                <a16:creationId xmlns:a16="http://schemas.microsoft.com/office/drawing/2014/main" id="{2D5E2884-F3C8-42F8-829D-840D75192820}"/>
+                <a16:creationId xmlns:a16="http://schemas.microsoft.com/office/drawing/2014/main" id="{F004D95F-7426-46D9-A46E-0C3C3D8B5528}"/>
               </a:ext>
             </a:extLst>
           </p:cNvPr>
@@ -38249,7 +38261,7 @@
           <p:cNvPr id="8" name="Text 5">
             <a:extLst xmlns:a="http://schemas.openxmlformats.org/drawingml/2006/main">
               <a:ext uri="{FF2B5EF4-FFF2-40B4-BE49-F238E27FC236}">
-                <a16:creationId xmlns:a16="http://schemas.microsoft.com/office/drawing/2014/main" id="{ED55C99B-D934-4CEC-833D-54DAC143F2DC}"/>
+                <a16:creationId xmlns:a16="http://schemas.microsoft.com/office/drawing/2014/main" id="{8E138E78-0FB2-4EBB-B0BE-0D387C3F0BA3}"/>
               </a:ext>
             </a:extLst>
           </p:cNvPr>
@@ -38294,7 +38306,7 @@
           <p:cNvPr id="9" name="Text 6">
             <a:extLst xmlns:a="http://schemas.openxmlformats.org/drawingml/2006/main">
               <a:ext uri="{FF2B5EF4-FFF2-40B4-BE49-F238E27FC236}">
-                <a16:creationId xmlns:a16="http://schemas.microsoft.com/office/drawing/2014/main" id="{416DB2F8-5280-4E3C-BEF8-193282E3A76F}"/>
+                <a16:creationId xmlns:a16="http://schemas.microsoft.com/office/drawing/2014/main" id="{23A4AD74-263A-4D37-88FE-F4DB75D90DBD}"/>
               </a:ext>
             </a:extLst>
           </p:cNvPr>
@@ -38342,7 +38354,7 @@
           <p:cNvPr id="10" name="Shape 7">
             <a:extLst xmlns:a="http://schemas.openxmlformats.org/drawingml/2006/main">
               <a:ext uri="{FF2B5EF4-FFF2-40B4-BE49-F238E27FC236}">
-                <a16:creationId xmlns:a16="http://schemas.microsoft.com/office/drawing/2014/main" id="{6AAB8779-B8F1-4437-AB50-097805EA887D}"/>
+                <a16:creationId xmlns:a16="http://schemas.microsoft.com/office/drawing/2014/main" id="{DE7A1838-DAEC-4434-A792-3A49E7113330}"/>
               </a:ext>
             </a:extLst>
           </p:cNvPr>
@@ -38389,7 +38401,7 @@
           <p:cNvPr id="11" name="Text 8">
             <a:extLst xmlns:a="http://schemas.openxmlformats.org/drawingml/2006/main">
               <a:ext uri="{FF2B5EF4-FFF2-40B4-BE49-F238E27FC236}">
-                <a16:creationId xmlns:a16="http://schemas.microsoft.com/office/drawing/2014/main" id="{C6DDAEE8-AA8D-4914-AACA-DC6A5E00D10B}"/>
+                <a16:creationId xmlns:a16="http://schemas.microsoft.com/office/drawing/2014/main" id="{1C9A5F33-B7C1-4351-AE39-BE6EFC8A9201}"/>
               </a:ext>
             </a:extLst>
           </p:cNvPr>
@@ -38434,7 +38446,7 @@
           <p:cNvPr id="12" name="Text 9">
             <a:extLst xmlns:a="http://schemas.openxmlformats.org/drawingml/2006/main">
               <a:ext uri="{FF2B5EF4-FFF2-40B4-BE49-F238E27FC236}">
-                <a16:creationId xmlns:a16="http://schemas.microsoft.com/office/drawing/2014/main" id="{77173471-3107-4B38-9B24-EA8EB4556973}"/>
+                <a16:creationId xmlns:a16="http://schemas.microsoft.com/office/drawing/2014/main" id="{F0999E94-E4C9-4CAF-8A8F-553D3EF7B44C}"/>
               </a:ext>
             </a:extLst>
           </p:cNvPr>
@@ -38480,7 +38492,7 @@
     </p:spTree>
     <p:extLst>
       <p:ext uri="{BB962C8B-B14F-4D97-AF65-F5344CB8AC3E}">
-        <p14:creationId xmlns:p14="http://schemas.microsoft.com/office/powerpoint/2010/main" val="174352898"/>
+        <p14:creationId xmlns:p14="http://schemas.microsoft.com/office/powerpoint/2010/main" val="298049349"/>
       </p:ext>
     </p:extLst>
   </p:cSld>
@@ -38511,7 +38523,7 @@
           <p:cNvPr id="2" name="Text 0">
             <a:extLst xmlns:a="http://schemas.openxmlformats.org/drawingml/2006/main">
               <a:ext uri="{FF2B5EF4-FFF2-40B4-BE49-F238E27FC236}">
-                <a16:creationId xmlns:a16="http://schemas.microsoft.com/office/drawing/2014/main" id="{E7070C9E-FDA8-4344-A25A-95F52D55F8E5}"/>
+                <a16:creationId xmlns:a16="http://schemas.microsoft.com/office/drawing/2014/main" id="{A9B06555-6821-4955-8F31-D77E742CAE6F}"/>
               </a:ext>
             </a:extLst>
           </p:cNvPr>
@@ -38556,7 +38568,7 @@
           <p:cNvPr id="3" name="Text 1">
             <a:extLst xmlns:a="http://schemas.openxmlformats.org/drawingml/2006/main">
               <a:ext uri="{FF2B5EF4-FFF2-40B4-BE49-F238E27FC236}">
-                <a16:creationId xmlns:a16="http://schemas.microsoft.com/office/drawing/2014/main" id="{EF24A43F-1885-45C8-BBA9-D8078F7C26DD}"/>
+                <a16:creationId xmlns:a16="http://schemas.microsoft.com/office/drawing/2014/main" id="{58BAB8DD-8ED3-4DCC-AFD7-F8771EE47562}"/>
               </a:ext>
             </a:extLst>
           </p:cNvPr>
@@ -38601,7 +38613,7 @@
           <p:cNvPr id="4" name="Text 2">
             <a:extLst xmlns:a="http://schemas.openxmlformats.org/drawingml/2006/main">
               <a:ext uri="{FF2B5EF4-FFF2-40B4-BE49-F238E27FC236}">
-                <a16:creationId xmlns:a16="http://schemas.microsoft.com/office/drawing/2014/main" id="{15F422C7-18D5-487C-B94E-D00CD9539FFE}"/>
+                <a16:creationId xmlns:a16="http://schemas.microsoft.com/office/drawing/2014/main" id="{4F12BEB5-FE2B-4763-87B0-E81840861F45}"/>
               </a:ext>
             </a:extLst>
           </p:cNvPr>
@@ -38646,7 +38658,7 @@
           <p:cNvPr id="5" name="Text 3">
             <a:extLst xmlns:a="http://schemas.openxmlformats.org/drawingml/2006/main">
               <a:ext uri="{FF2B5EF4-FFF2-40B4-BE49-F238E27FC236}">
-                <a16:creationId xmlns:a16="http://schemas.microsoft.com/office/drawing/2014/main" id="{DE50D1F2-A92A-4E9D-868F-4BA986443947}"/>
+                <a16:creationId xmlns:a16="http://schemas.microsoft.com/office/drawing/2014/main" id="{FABE4C15-C0F5-4E35-AD6B-D16B519BF66D}"/>
               </a:ext>
             </a:extLst>
           </p:cNvPr>
@@ -38691,7 +38703,7 @@
           <p:cNvPr id="6" name="Shape 4">
             <a:extLst xmlns:a="http://schemas.openxmlformats.org/drawingml/2006/main">
               <a:ext uri="{FF2B5EF4-FFF2-40B4-BE49-F238E27FC236}">
-                <a16:creationId xmlns:a16="http://schemas.microsoft.com/office/drawing/2014/main" id="{16B4859A-851F-48A5-BF4B-9208F37DD7B4}"/>
+                <a16:creationId xmlns:a16="http://schemas.microsoft.com/office/drawing/2014/main" id="{C511B681-99B3-4691-A07E-71DB570467B4}"/>
               </a:ext>
             </a:extLst>
           </p:cNvPr>
@@ -38738,7 +38750,7 @@
           <p:cNvPr id="7" name="Text 5">
             <a:extLst xmlns:a="http://schemas.openxmlformats.org/drawingml/2006/main">
               <a:ext uri="{FF2B5EF4-FFF2-40B4-BE49-F238E27FC236}">
-                <a16:creationId xmlns:a16="http://schemas.microsoft.com/office/drawing/2014/main" id="{1EF90643-298F-4C68-BC03-F02C181D5B1D}"/>
+                <a16:creationId xmlns:a16="http://schemas.microsoft.com/office/drawing/2014/main" id="{27E9C577-6AA1-4435-B901-73FEB798ECBA}"/>
               </a:ext>
             </a:extLst>
           </p:cNvPr>
@@ -38786,7 +38798,7 @@
           <p:cNvPr id="8" name="Text 6">
             <a:extLst xmlns:a="http://schemas.openxmlformats.org/drawingml/2006/main">
               <a:ext uri="{FF2B5EF4-FFF2-40B4-BE49-F238E27FC236}">
-                <a16:creationId xmlns:a16="http://schemas.microsoft.com/office/drawing/2014/main" id="{DCB428C0-4AE7-4367-B247-D6364BAAA000}"/>
+                <a16:creationId xmlns:a16="http://schemas.microsoft.com/office/drawing/2014/main" id="{52D438EA-C529-425C-9549-AAF0C360400A}"/>
               </a:ext>
             </a:extLst>
           </p:cNvPr>
@@ -38831,7 +38843,7 @@
           <p:cNvPr id="9" name="Shape 7">
             <a:extLst xmlns:a="http://schemas.openxmlformats.org/drawingml/2006/main">
               <a:ext uri="{FF2B5EF4-FFF2-40B4-BE49-F238E27FC236}">
-                <a16:creationId xmlns:a16="http://schemas.microsoft.com/office/drawing/2014/main" id="{8D0F6B22-C6D9-49FF-830C-7E4E362A7889}"/>
+                <a16:creationId xmlns:a16="http://schemas.microsoft.com/office/drawing/2014/main" id="{9712C2D9-4877-4D09-BDD3-662C1FB1B18A}"/>
               </a:ext>
             </a:extLst>
           </p:cNvPr>
@@ -38869,7 +38881,7 @@
           <p:cNvPr id="10" name="Text 8">
             <a:extLst xmlns:a="http://schemas.openxmlformats.org/drawingml/2006/main">
               <a:ext uri="{FF2B5EF4-FFF2-40B4-BE49-F238E27FC236}">
-                <a16:creationId xmlns:a16="http://schemas.microsoft.com/office/drawing/2014/main" id="{13DFDFED-19FC-4339-9C5E-C4D2AC753DDA}"/>
+                <a16:creationId xmlns:a16="http://schemas.microsoft.com/office/drawing/2014/main" id="{DA63DF72-1BFB-4C58-BA7D-C0E71BA584EA}"/>
               </a:ext>
             </a:extLst>
           </p:cNvPr>
@@ -38914,7 +38926,7 @@
           <p:cNvPr id="11" name="Text 9">
             <a:extLst xmlns:a="http://schemas.openxmlformats.org/drawingml/2006/main">
               <a:ext uri="{FF2B5EF4-FFF2-40B4-BE49-F238E27FC236}">
-                <a16:creationId xmlns:a16="http://schemas.microsoft.com/office/drawing/2014/main" id="{99FF2418-A712-4391-A551-E28DA27BF1D4}"/>
+                <a16:creationId xmlns:a16="http://schemas.microsoft.com/office/drawing/2014/main" id="{629C9237-F26E-42B9-A6FA-C4370709A031}"/>
               </a:ext>
             </a:extLst>
           </p:cNvPr>
@@ -38962,7 +38974,7 @@
           <p:cNvPr id="12" name="Shape 10">
             <a:extLst xmlns:a="http://schemas.openxmlformats.org/drawingml/2006/main">
               <a:ext uri="{FF2B5EF4-FFF2-40B4-BE49-F238E27FC236}">
-                <a16:creationId xmlns:a16="http://schemas.microsoft.com/office/drawing/2014/main" id="{E41D1E99-31DD-4C18-ABDD-2FB6406ACC8F}"/>
+                <a16:creationId xmlns:a16="http://schemas.microsoft.com/office/drawing/2014/main" id="{1CB2940A-BDE9-4743-AD5F-0CFCEB41060F}"/>
               </a:ext>
             </a:extLst>
           </p:cNvPr>
@@ -39000,7 +39012,7 @@
           <p:cNvPr id="13" name="Text 11">
             <a:extLst xmlns:a="http://schemas.openxmlformats.org/drawingml/2006/main">
               <a:ext uri="{FF2B5EF4-FFF2-40B4-BE49-F238E27FC236}">
-                <a16:creationId xmlns:a16="http://schemas.microsoft.com/office/drawing/2014/main" id="{E25701A6-9303-4F8A-B72F-864CD10184B8}"/>
+                <a16:creationId xmlns:a16="http://schemas.microsoft.com/office/drawing/2014/main" id="{3B9DA952-C838-4035-B06A-D0CD82C34246}"/>
               </a:ext>
             </a:extLst>
           </p:cNvPr>
@@ -39045,7 +39057,7 @@
           <p:cNvPr id="14" name="Text 12">
             <a:extLst xmlns:a="http://schemas.openxmlformats.org/drawingml/2006/main">
               <a:ext uri="{FF2B5EF4-FFF2-40B4-BE49-F238E27FC236}">
-                <a16:creationId xmlns:a16="http://schemas.microsoft.com/office/drawing/2014/main" id="{D0953189-DB2F-4BF3-AF76-70B4BC12003C}"/>
+                <a16:creationId xmlns:a16="http://schemas.microsoft.com/office/drawing/2014/main" id="{2D3B8DB7-BD84-4948-A5A0-B0543D1DD1CC}"/>
               </a:ext>
             </a:extLst>
           </p:cNvPr>
@@ -39083,7 +39095,7 @@
                 <a:ea typeface="Calibri"/>
                 <a:cs typeface="Calibri"/>
               </a:rPr>
-              <a:t>On unseen real records, how do a compiled prefix, a hand-written composite, and guarded composite synthesis trade factual quality against requests, tokens, latency, and cost?</a:t>
+              <a:t>Across distinct real-record workflow families, do guarded programs preserve exact outcomes while reducing requests, tokens, latency, and cost—and how do they compare with fair manual programs?</a:t>
             </a:r>
           </a:p>
         </p:txBody>
@@ -39093,7 +39105,7 @@
           <p:cNvPr id="15" name="Shape 13">
             <a:extLst xmlns:a="http://schemas.openxmlformats.org/drawingml/2006/main">
               <a:ext uri="{FF2B5EF4-FFF2-40B4-BE49-F238E27FC236}">
-                <a16:creationId xmlns:a16="http://schemas.microsoft.com/office/drawing/2014/main" id="{14959D34-932F-4EC6-9449-54EC0BB3CD01}"/>
+                <a16:creationId xmlns:a16="http://schemas.microsoft.com/office/drawing/2014/main" id="{13A96BC2-4020-4A6B-87C5-102C7C4A4091}"/>
               </a:ext>
             </a:extLst>
           </p:cNvPr>
@@ -39131,7 +39143,7 @@
           <p:cNvPr id="16" name="Text 14">
             <a:extLst xmlns:a="http://schemas.openxmlformats.org/drawingml/2006/main">
               <a:ext uri="{FF2B5EF4-FFF2-40B4-BE49-F238E27FC236}">
-                <a16:creationId xmlns:a16="http://schemas.microsoft.com/office/drawing/2014/main" id="{6E10204E-708D-43A0-B3C7-804BD0131502}"/>
+                <a16:creationId xmlns:a16="http://schemas.microsoft.com/office/drawing/2014/main" id="{A65EE218-B210-4855-A941-8CAC5BE9D1E0}"/>
               </a:ext>
             </a:extLst>
           </p:cNvPr>
@@ -39176,7 +39188,7 @@
           <p:cNvPr id="17" name="Text 15">
             <a:extLst xmlns:a="http://schemas.openxmlformats.org/drawingml/2006/main">
               <a:ext uri="{FF2B5EF4-FFF2-40B4-BE49-F238E27FC236}">
-                <a16:creationId xmlns:a16="http://schemas.microsoft.com/office/drawing/2014/main" id="{E3E5F9B7-F9C2-4C6F-B2C9-FE8424EE3D2A}"/>
+                <a16:creationId xmlns:a16="http://schemas.microsoft.com/office/drawing/2014/main" id="{D8DC7015-9A93-4656-99E8-C5AAF5FEA269}"/>
               </a:ext>
             </a:extLst>
           </p:cNvPr>
@@ -39224,7 +39236,7 @@
           <p:cNvPr id="18" name="Shape 16">
             <a:extLst xmlns:a="http://schemas.openxmlformats.org/drawingml/2006/main">
               <a:ext uri="{FF2B5EF4-FFF2-40B4-BE49-F238E27FC236}">
-                <a16:creationId xmlns:a16="http://schemas.microsoft.com/office/drawing/2014/main" id="{732FAE55-B7D1-496E-8D6C-FA49F22243D5}"/>
+                <a16:creationId xmlns:a16="http://schemas.microsoft.com/office/drawing/2014/main" id="{6A3C5F6C-4F8E-4A68-AC77-884512EC17E0}"/>
               </a:ext>
             </a:extLst>
           </p:cNvPr>
@@ -39262,7 +39274,7 @@
           <p:cNvPr id="19" name="Text 17">
             <a:extLst xmlns:a="http://schemas.openxmlformats.org/drawingml/2006/main">
               <a:ext uri="{FF2B5EF4-FFF2-40B4-BE49-F238E27FC236}">
-                <a16:creationId xmlns:a16="http://schemas.microsoft.com/office/drawing/2014/main" id="{356A426F-4550-455F-90D9-4B3C2A24BA36}"/>
+                <a16:creationId xmlns:a16="http://schemas.microsoft.com/office/drawing/2014/main" id="{6032280C-731D-480B-B827-8BD0B647DE62}"/>
               </a:ext>
             </a:extLst>
           </p:cNvPr>
@@ -39307,7 +39319,7 @@
           <p:cNvPr id="20" name="Text 18">
             <a:extLst xmlns:a="http://schemas.openxmlformats.org/drawingml/2006/main">
               <a:ext uri="{FF2B5EF4-FFF2-40B4-BE49-F238E27FC236}">
-                <a16:creationId xmlns:a16="http://schemas.microsoft.com/office/drawing/2014/main" id="{1E90EC1F-C3A7-4E86-8B06-6A032F8B605A}"/>
+                <a16:creationId xmlns:a16="http://schemas.microsoft.com/office/drawing/2014/main" id="{4D779559-F4D2-4D0C-A4AE-E4D1D6D3F69F}"/>
               </a:ext>
             </a:extLst>
           </p:cNvPr>
@@ -39355,7 +39367,7 @@
           <p:cNvPr id="21" name="Shape 19">
             <a:extLst xmlns:a="http://schemas.openxmlformats.org/drawingml/2006/main">
               <a:ext uri="{FF2B5EF4-FFF2-40B4-BE49-F238E27FC236}">
-                <a16:creationId xmlns:a16="http://schemas.microsoft.com/office/drawing/2014/main" id="{AE0E6BB5-9BAB-471C-BBB6-EE6367ED97DF}"/>
+                <a16:creationId xmlns:a16="http://schemas.microsoft.com/office/drawing/2014/main" id="{31665DA9-9434-4F56-94DD-D2867CB8C8E8}"/>
               </a:ext>
             </a:extLst>
           </p:cNvPr>
@@ -39393,7 +39405,7 @@
           <p:cNvPr id="22" name="Text 20">
             <a:extLst xmlns:a="http://schemas.openxmlformats.org/drawingml/2006/main">
               <a:ext uri="{FF2B5EF4-FFF2-40B4-BE49-F238E27FC236}">
-                <a16:creationId xmlns:a16="http://schemas.microsoft.com/office/drawing/2014/main" id="{7537D5C3-48D9-4973-9231-6DF367988771}"/>
+                <a16:creationId xmlns:a16="http://schemas.microsoft.com/office/drawing/2014/main" id="{F0BBCC0F-4EDC-4554-8784-C2B156699D11}"/>
               </a:ext>
             </a:extLst>
           </p:cNvPr>
@@ -39438,7 +39450,7 @@
           <p:cNvPr id="23" name="Text 21">
             <a:extLst xmlns:a="http://schemas.openxmlformats.org/drawingml/2006/main">
               <a:ext uri="{FF2B5EF4-FFF2-40B4-BE49-F238E27FC236}">
-                <a16:creationId xmlns:a16="http://schemas.microsoft.com/office/drawing/2014/main" id="{0E53742A-89CC-4E15-86D4-8AC29C05C573}"/>
+                <a16:creationId xmlns:a16="http://schemas.microsoft.com/office/drawing/2014/main" id="{74E41EAF-315D-4667-95F9-A1EE57209C62}"/>
               </a:ext>
             </a:extLst>
           </p:cNvPr>
@@ -39486,7 +39498,7 @@
           <p:cNvPr id="24" name="Text 22">
             <a:extLst xmlns:a="http://schemas.openxmlformats.org/drawingml/2006/main">
               <a:ext uri="{FF2B5EF4-FFF2-40B4-BE49-F238E27FC236}">
-                <a16:creationId xmlns:a16="http://schemas.microsoft.com/office/drawing/2014/main" id="{785D1AE9-65AD-45EF-8D5F-A97AC7D051A8}"/>
+                <a16:creationId xmlns:a16="http://schemas.microsoft.com/office/drawing/2014/main" id="{7FC822F7-0D42-4622-8854-8CCA28099D05}"/>
               </a:ext>
             </a:extLst>
           </p:cNvPr>
@@ -39531,7 +39543,7 @@
           <p:cNvPr id="25" name="Shape 23">
             <a:extLst xmlns:a="http://schemas.openxmlformats.org/drawingml/2006/main">
               <a:ext uri="{FF2B5EF4-FFF2-40B4-BE49-F238E27FC236}">
-                <a16:creationId xmlns:a16="http://schemas.microsoft.com/office/drawing/2014/main" id="{A3727803-38AD-4C36-B235-E32BE3ACA1B5}"/>
+                <a16:creationId xmlns:a16="http://schemas.microsoft.com/office/drawing/2014/main" id="{C54E368E-6EF7-4013-81DE-DFA0415BF4C9}"/>
               </a:ext>
             </a:extLst>
           </p:cNvPr>
@@ -39578,7 +39590,7 @@
           <p:cNvPr id="26" name="Text 24">
             <a:extLst xmlns:a="http://schemas.openxmlformats.org/drawingml/2006/main">
               <a:ext uri="{FF2B5EF4-FFF2-40B4-BE49-F238E27FC236}">
-                <a16:creationId xmlns:a16="http://schemas.microsoft.com/office/drawing/2014/main" id="{31179332-BB3D-4084-A083-8D112A8C362A}"/>
+                <a16:creationId xmlns:a16="http://schemas.microsoft.com/office/drawing/2014/main" id="{9276E226-D5AA-4574-8D1E-2E7ECF78ED16}"/>
               </a:ext>
             </a:extLst>
           </p:cNvPr>
@@ -39663,7 +39675,7 @@
                 <a:ea typeface="Calibri"/>
                 <a:cs typeface="Calibri"/>
               </a:rPr>
-              <a:t>A real-provider, real-public-record study in which the agent chooses tool order and quality is graded independently of execution conformance</a:t>
+              <a:t>A 90-case real-provider study spanning three decisions, tool vocabularies, and exact graders</a:t>
             </a:r>
           </a:p>
           <a:p xmlns:a="http://schemas.openxmlformats.org/drawingml/2006/main">
@@ -39685,7 +39697,7 @@
                 <a:ea typeface="Calibri"/>
                 <a:cs typeface="Calibri"/>
               </a:rPr>
-              <a:t>A ten-benchmark interoperability audit with two compiler substrates, explicit gates, and no pooled score</a:t>
+              <a:t>An identifier-aware contract refinement derived from an archived failed pilot</a:t>
             </a:r>
           </a:p>
           <a:p xmlns:a="http://schemas.openxmlformats.org/drawingml/2006/main">
@@ -39707,7 +39719,7 @@
                 <a:ea typeface="Calibri"/>
                 <a:cs typeface="Calibri"/>
               </a:rPr>
-              <a:t>A measured-action portfolio plus guarded composite synthesis over an already admitted read program</a:t>
+              <a:t>NESTFUL and API-Bank refusal evidence plus a supplementary interoperability ledger</a:t>
             </a:r>
           </a:p>
         </p:txBody>
@@ -39717,7 +39729,7 @@
           <p:cNvPr id="27" name="Shape 25">
             <a:extLst xmlns:a="http://schemas.openxmlformats.org/drawingml/2006/main">
               <a:ext uri="{FF2B5EF4-FFF2-40B4-BE49-F238E27FC236}">
-                <a16:creationId xmlns:a16="http://schemas.microsoft.com/office/drawing/2014/main" id="{1C9E286C-EA5E-4E3E-B312-2DD87EAD1890}"/>
+                <a16:creationId xmlns:a16="http://schemas.microsoft.com/office/drawing/2014/main" id="{CFD113BC-AF90-44C2-96EB-FEB87DC83834}"/>
               </a:ext>
             </a:extLst>
           </p:cNvPr>
@@ -39764,7 +39776,7 @@
           <p:cNvPr id="28" name="Text 26">
             <a:extLst xmlns:a="http://schemas.openxmlformats.org/drawingml/2006/main">
               <a:ext uri="{FF2B5EF4-FFF2-40B4-BE49-F238E27FC236}">
-                <a16:creationId xmlns:a16="http://schemas.microsoft.com/office/drawing/2014/main" id="{0D2B2EE5-61EE-4D2E-8D53-BFA7212463A3}"/>
+                <a16:creationId xmlns:a16="http://schemas.microsoft.com/office/drawing/2014/main" id="{8ACB4CF8-F507-456D-AE67-FAE71483BA8B}"/>
               </a:ext>
             </a:extLst>
           </p:cNvPr>
@@ -39809,7 +39821,7 @@
           <p:cNvPr id="29" name="Text 27">
             <a:extLst xmlns:a="http://schemas.openxmlformats.org/drawingml/2006/main">
               <a:ext uri="{FF2B5EF4-FFF2-40B4-BE49-F238E27FC236}">
-                <a16:creationId xmlns:a16="http://schemas.microsoft.com/office/drawing/2014/main" id="{B43583C7-B9E4-41A8-94A9-7722B81DC9BA}"/>
+                <a16:creationId xmlns:a16="http://schemas.microsoft.com/office/drawing/2014/main" id="{AEA32E05-9BE5-4D83-8831-11772780FB7A}"/>
               </a:ext>
             </a:extLst>
           </p:cNvPr>
@@ -39855,7 +39867,7 @@
     </p:spTree>
     <p:extLst>
       <p:ext uri="{BB962C8B-B14F-4D97-AF65-F5344CB8AC3E}">
-        <p14:creationId xmlns:p14="http://schemas.microsoft.com/office/powerpoint/2010/main" val="1087285703"/>
+        <p14:creationId xmlns:p14="http://schemas.microsoft.com/office/powerpoint/2010/main" val="1079950325"/>
       </p:ext>
     </p:extLst>
   </p:cSld>
@@ -39886,7 +39898,7 @@
           <p:cNvPr id="2" name="Text 0">
             <a:extLst xmlns:a="http://schemas.openxmlformats.org/drawingml/2006/main">
               <a:ext uri="{FF2B5EF4-FFF2-40B4-BE49-F238E27FC236}">
-                <a16:creationId xmlns:a16="http://schemas.microsoft.com/office/drawing/2014/main" id="{209F6398-306B-4150-869C-C8917F9B0A47}"/>
+                <a16:creationId xmlns:a16="http://schemas.microsoft.com/office/drawing/2014/main" id="{A772311B-E8FC-4A4C-BDB1-7BC7BEEE3D55}"/>
               </a:ext>
             </a:extLst>
           </p:cNvPr>
@@ -39931,7 +39943,7 @@
           <p:cNvPr id="3" name="Text 1">
             <a:extLst xmlns:a="http://schemas.openxmlformats.org/drawingml/2006/main">
               <a:ext uri="{FF2B5EF4-FFF2-40B4-BE49-F238E27FC236}">
-                <a16:creationId xmlns:a16="http://schemas.microsoft.com/office/drawing/2014/main" id="{A4AA7D44-F7B5-4836-9EB9-AA12FBDCFFC8}"/>
+                <a16:creationId xmlns:a16="http://schemas.microsoft.com/office/drawing/2014/main" id="{BABF6359-198B-4D62-859F-402841164D28}"/>
               </a:ext>
             </a:extLst>
           </p:cNvPr>
@@ -39976,7 +39988,7 @@
           <p:cNvPr id="4" name="Shape 2">
             <a:extLst xmlns:a="http://schemas.openxmlformats.org/drawingml/2006/main">
               <a:ext uri="{FF2B5EF4-FFF2-40B4-BE49-F238E27FC236}">
-                <a16:creationId xmlns:a16="http://schemas.microsoft.com/office/drawing/2014/main" id="{147B624E-437E-4041-80C2-90EAF668E93E}"/>
+                <a16:creationId xmlns:a16="http://schemas.microsoft.com/office/drawing/2014/main" id="{511C65AC-AD18-4B89-ADE2-B44248F4D700}"/>
               </a:ext>
             </a:extLst>
           </p:cNvPr>
@@ -40016,7 +40028,7 @@
           <p:cNvPr id="5" name="Shape 3">
             <a:extLst xmlns:a="http://schemas.openxmlformats.org/drawingml/2006/main">
               <a:ext uri="{FF2B5EF4-FFF2-40B4-BE49-F238E27FC236}">
-                <a16:creationId xmlns:a16="http://schemas.microsoft.com/office/drawing/2014/main" id="{CE1FD6AB-AC88-46FA-A84A-B39193FC04D0}"/>
+                <a16:creationId xmlns:a16="http://schemas.microsoft.com/office/drawing/2014/main" id="{649C7446-AFB1-4077-BDE6-4AA97D97F27E}"/>
               </a:ext>
             </a:extLst>
           </p:cNvPr>
@@ -40056,7 +40068,7 @@
           <p:cNvPr id="6" name="Text 4">
             <a:extLst xmlns:a="http://schemas.openxmlformats.org/drawingml/2006/main">
               <a:ext uri="{FF2B5EF4-FFF2-40B4-BE49-F238E27FC236}">
-                <a16:creationId xmlns:a16="http://schemas.microsoft.com/office/drawing/2014/main" id="{1F036374-FCF1-428D-9E13-681C2FDCA0AB}"/>
+                <a16:creationId xmlns:a16="http://schemas.microsoft.com/office/drawing/2014/main" id="{6D8C66EB-16BE-4DF4-BAC6-BD0939241218}"/>
               </a:ext>
             </a:extLst>
           </p:cNvPr>
@@ -40101,7 +40113,7 @@
           <p:cNvPr id="7" name="Text 5">
             <a:extLst xmlns:a="http://schemas.openxmlformats.org/drawingml/2006/main">
               <a:ext uri="{FF2B5EF4-FFF2-40B4-BE49-F238E27FC236}">
-                <a16:creationId xmlns:a16="http://schemas.microsoft.com/office/drawing/2014/main" id="{100D0E24-048D-4B5A-B58B-063B6DCB3AC7}"/>
+                <a16:creationId xmlns:a16="http://schemas.microsoft.com/office/drawing/2014/main" id="{0555B7AE-A99D-4448-9F3E-F63750A0E402}"/>
               </a:ext>
             </a:extLst>
           </p:cNvPr>
@@ -40146,7 +40158,7 @@
           <p:cNvPr id="8" name="Text 6">
             <a:extLst xmlns:a="http://schemas.openxmlformats.org/drawingml/2006/main">
               <a:ext uri="{FF2B5EF4-FFF2-40B4-BE49-F238E27FC236}">
-                <a16:creationId xmlns:a16="http://schemas.microsoft.com/office/drawing/2014/main" id="{50641EC0-FAD1-45FA-911C-A50C29DA13B2}"/>
+                <a16:creationId xmlns:a16="http://schemas.microsoft.com/office/drawing/2014/main" id="{C219DACA-89CD-4F0A-B887-BC06532E614B}"/>
               </a:ext>
             </a:extLst>
           </p:cNvPr>
@@ -40192,7 +40204,7 @@
     </p:spTree>
     <p:extLst>
       <p:ext uri="{BB962C8B-B14F-4D97-AF65-F5344CB8AC3E}">
-        <p14:creationId xmlns:p14="http://schemas.microsoft.com/office/powerpoint/2010/main" val="1184534807"/>
+        <p14:creationId xmlns:p14="http://schemas.microsoft.com/office/powerpoint/2010/main" val="917614541"/>
       </p:ext>
     </p:extLst>
   </p:cSld>
@@ -40223,7 +40235,7 @@
           <p:cNvPr id="2" name="Text 0">
             <a:extLst xmlns:a="http://schemas.openxmlformats.org/drawingml/2006/main">
               <a:ext uri="{FF2B5EF4-FFF2-40B4-BE49-F238E27FC236}">
-                <a16:creationId xmlns:a16="http://schemas.microsoft.com/office/drawing/2014/main" id="{2F430739-D90F-434A-8461-D5BC54D4F74F}"/>
+                <a16:creationId xmlns:a16="http://schemas.microsoft.com/office/drawing/2014/main" id="{EBDA3A27-5D45-460D-8DC9-C26DADEBE80A}"/>
               </a:ext>
             </a:extLst>
           </p:cNvPr>
@@ -40268,7 +40280,7 @@
           <p:cNvPr id="3" name="Text 1">
             <a:extLst xmlns:a="http://schemas.openxmlformats.org/drawingml/2006/main">
               <a:ext uri="{FF2B5EF4-FFF2-40B4-BE49-F238E27FC236}">
-                <a16:creationId xmlns:a16="http://schemas.microsoft.com/office/drawing/2014/main" id="{2BE2FA0A-2FA6-42CD-AAD5-F50C2F326C81}"/>
+                <a16:creationId xmlns:a16="http://schemas.microsoft.com/office/drawing/2014/main" id="{F4D46B08-D6A9-4B27-8374-3A59CD5CAEEC}"/>
               </a:ext>
             </a:extLst>
           </p:cNvPr>
@@ -40313,7 +40325,7 @@
           <p:cNvPr id="4" name="Text 2">
             <a:extLst xmlns:a="http://schemas.openxmlformats.org/drawingml/2006/main">
               <a:ext uri="{FF2B5EF4-FFF2-40B4-BE49-F238E27FC236}">
-                <a16:creationId xmlns:a16="http://schemas.microsoft.com/office/drawing/2014/main" id="{84D9FB4D-47A7-4768-8296-3ABD89BD7850}"/>
+                <a16:creationId xmlns:a16="http://schemas.microsoft.com/office/drawing/2014/main" id="{0141B7CD-2312-41C5-B86E-56765061B503}"/>
               </a:ext>
             </a:extLst>
           </p:cNvPr>
@@ -40358,7 +40370,7 @@
           <p:cNvPr id="5" name="Text 3">
             <a:extLst xmlns:a="http://schemas.openxmlformats.org/drawingml/2006/main">
               <a:ext uri="{FF2B5EF4-FFF2-40B4-BE49-F238E27FC236}">
-                <a16:creationId xmlns:a16="http://schemas.microsoft.com/office/drawing/2014/main" id="{B7FA3568-5358-4D27-9238-23FB49575C22}"/>
+                <a16:creationId xmlns:a16="http://schemas.microsoft.com/office/drawing/2014/main" id="{13BB30FD-9C75-462D-BF66-DD243A6E4658}"/>
               </a:ext>
             </a:extLst>
           </p:cNvPr>
@@ -40403,7 +40415,7 @@
           <p:cNvPr id="6" name="Shape 4">
             <a:extLst xmlns:a="http://schemas.openxmlformats.org/drawingml/2006/main">
               <a:ext uri="{FF2B5EF4-FFF2-40B4-BE49-F238E27FC236}">
-                <a16:creationId xmlns:a16="http://schemas.microsoft.com/office/drawing/2014/main" id="{1A7F208F-92ED-4601-9B03-560248932984}"/>
+                <a16:creationId xmlns:a16="http://schemas.microsoft.com/office/drawing/2014/main" id="{8C473482-F02D-4F60-8554-1FAFF5AE5FF8}"/>
               </a:ext>
             </a:extLst>
           </p:cNvPr>
@@ -40447,7 +40459,7 @@
           <p:nvPr/>
         </p:nvPicPr>
         <p:blipFill>
-          <a:blip xmlns:r="http://schemas.openxmlformats.org/officeDocument/2006/relationships" xmlns:a="http://schemas.openxmlformats.org/drawingml/2006/main" r:embed="R52dbdd49234e43bd"/>
+          <a:blip xmlns:r="http://schemas.openxmlformats.org/officeDocument/2006/relationships" xmlns:a="http://schemas.openxmlformats.org/drawingml/2006/main" r:embed="Raeae6d7ef68a44db"/>
           <a:stretch xmlns:a="http://schemas.openxmlformats.org/drawingml/2006/main">
             <a:fillRect l="0" t="0" r="0" b="0"/>
           </a:stretch>
@@ -40467,7 +40479,7 @@
           <p:cNvPr id="8" name="Text 5">
             <a:extLst xmlns:a="http://schemas.openxmlformats.org/drawingml/2006/main">
               <a:ext uri="{FF2B5EF4-FFF2-40B4-BE49-F238E27FC236}">
-                <a16:creationId xmlns:a16="http://schemas.microsoft.com/office/drawing/2014/main" id="{603F6314-6A3F-42F1-8867-C8F9D3FD8E3B}"/>
+                <a16:creationId xmlns:a16="http://schemas.microsoft.com/office/drawing/2014/main" id="{38330CEB-1516-46F8-A826-FE2D5E5105A0}"/>
               </a:ext>
             </a:extLst>
           </p:cNvPr>
@@ -40512,7 +40524,7 @@
           <p:cNvPr id="9" name="Shape 6">
             <a:extLst xmlns:a="http://schemas.openxmlformats.org/drawingml/2006/main">
               <a:ext uri="{FF2B5EF4-FFF2-40B4-BE49-F238E27FC236}">
-                <a16:creationId xmlns:a16="http://schemas.microsoft.com/office/drawing/2014/main" id="{B059949E-455B-4DA9-8B97-9B14C33EF11D}"/>
+                <a16:creationId xmlns:a16="http://schemas.microsoft.com/office/drawing/2014/main" id="{14E44604-EA5C-4CA0-870F-2DE375A7037D}"/>
               </a:ext>
             </a:extLst>
           </p:cNvPr>
@@ -40556,7 +40568,7 @@
           <p:nvPr/>
         </p:nvPicPr>
         <p:blipFill>
-          <a:blip xmlns:r="http://schemas.openxmlformats.org/officeDocument/2006/relationships" xmlns:a="http://schemas.openxmlformats.org/drawingml/2006/main" r:embed="R1b283beca8e64181"/>
+          <a:blip xmlns:r="http://schemas.openxmlformats.org/officeDocument/2006/relationships" xmlns:a="http://schemas.openxmlformats.org/drawingml/2006/main" r:embed="Rbc47ccce8d0c40fc"/>
           <a:stretch xmlns:a="http://schemas.openxmlformats.org/drawingml/2006/main">
             <a:fillRect l="0" t="0" r="0" b="0"/>
           </a:stretch>
@@ -40576,7 +40588,7 @@
           <p:cNvPr id="11" name="Text 7">
             <a:extLst xmlns:a="http://schemas.openxmlformats.org/drawingml/2006/main">
               <a:ext uri="{FF2B5EF4-FFF2-40B4-BE49-F238E27FC236}">
-                <a16:creationId xmlns:a16="http://schemas.microsoft.com/office/drawing/2014/main" id="{A04CD853-C7EC-4728-92F3-334F81A1BC77}"/>
+                <a16:creationId xmlns:a16="http://schemas.microsoft.com/office/drawing/2014/main" id="{6FAF4EDD-9DD9-4B73-894B-925ADD1B44D2}"/>
               </a:ext>
             </a:extLst>
           </p:cNvPr>
@@ -40624,7 +40636,7 @@
           <p:cNvPr id="12" name="Text 8">
             <a:extLst xmlns:a="http://schemas.openxmlformats.org/drawingml/2006/main">
               <a:ext uri="{FF2B5EF4-FFF2-40B4-BE49-F238E27FC236}">
-                <a16:creationId xmlns:a16="http://schemas.microsoft.com/office/drawing/2014/main" id="{D02F5D22-64A7-493E-8ED0-023DE8924B19}"/>
+                <a16:creationId xmlns:a16="http://schemas.microsoft.com/office/drawing/2014/main" id="{6C6E15A6-619B-45B9-8A84-C777E6262263}"/>
               </a:ext>
             </a:extLst>
           </p:cNvPr>
@@ -40669,7 +40681,7 @@
           <p:cNvPr id="13" name="Shape 9">
             <a:extLst xmlns:a="http://schemas.openxmlformats.org/drawingml/2006/main">
               <a:ext uri="{FF2B5EF4-FFF2-40B4-BE49-F238E27FC236}">
-                <a16:creationId xmlns:a16="http://schemas.microsoft.com/office/drawing/2014/main" id="{F42CA792-D287-4E64-9597-E05DFAD0BD0E}"/>
+                <a16:creationId xmlns:a16="http://schemas.microsoft.com/office/drawing/2014/main" id="{5781A0DA-4A79-4F0A-8726-E3849FA60003}"/>
               </a:ext>
             </a:extLst>
           </p:cNvPr>
@@ -40709,7 +40721,7 @@
           <p:cNvPr id="14" name="Text 10">
             <a:extLst xmlns:a="http://schemas.openxmlformats.org/drawingml/2006/main">
               <a:ext uri="{FF2B5EF4-FFF2-40B4-BE49-F238E27FC236}">
-                <a16:creationId xmlns:a16="http://schemas.microsoft.com/office/drawing/2014/main" id="{A0D85A4E-CB9D-4865-937F-1989C4808C42}"/>
+                <a16:creationId xmlns:a16="http://schemas.microsoft.com/office/drawing/2014/main" id="{46620888-7BD6-44DB-AF9F-BAFCB58BC1BF}"/>
               </a:ext>
             </a:extLst>
           </p:cNvPr>
@@ -40754,7 +40766,7 @@
           <p:cNvPr id="15" name="Text 11">
             <a:extLst xmlns:a="http://schemas.openxmlformats.org/drawingml/2006/main">
               <a:ext uri="{FF2B5EF4-FFF2-40B4-BE49-F238E27FC236}">
-                <a16:creationId xmlns:a16="http://schemas.microsoft.com/office/drawing/2014/main" id="{F60A8796-250B-4A28-AD87-5C03EAAF1E30}"/>
+                <a16:creationId xmlns:a16="http://schemas.microsoft.com/office/drawing/2014/main" id="{6CD8542F-F642-4C73-AB61-93E372D34E46}"/>
               </a:ext>
             </a:extLst>
           </p:cNvPr>
@@ -40802,7 +40814,7 @@
           <p:cNvPr id="16" name="Shape 12">
             <a:extLst xmlns:a="http://schemas.openxmlformats.org/drawingml/2006/main">
               <a:ext uri="{FF2B5EF4-FFF2-40B4-BE49-F238E27FC236}">
-                <a16:creationId xmlns:a16="http://schemas.microsoft.com/office/drawing/2014/main" id="{F496B7DE-0C4E-4E59-903B-3B20EBD2E406}"/>
+                <a16:creationId xmlns:a16="http://schemas.microsoft.com/office/drawing/2014/main" id="{2A849BAA-05CB-4B17-80F2-5D72976B7C8A}"/>
               </a:ext>
             </a:extLst>
           </p:cNvPr>
@@ -40846,7 +40858,7 @@
           <p:nvPr/>
         </p:nvPicPr>
         <p:blipFill>
-          <a:blip xmlns:r="http://schemas.openxmlformats.org/officeDocument/2006/relationships" xmlns:a="http://schemas.openxmlformats.org/drawingml/2006/main" r:embed="Rf1bee85442d7443b"/>
+          <a:blip xmlns:r="http://schemas.openxmlformats.org/officeDocument/2006/relationships" xmlns:a="http://schemas.openxmlformats.org/drawingml/2006/main" r:embed="R2f99da65047244e2"/>
           <a:stretch xmlns:a="http://schemas.openxmlformats.org/drawingml/2006/main">
             <a:fillRect l="0" t="0" r="0" b="0"/>
           </a:stretch>
@@ -40866,7 +40878,7 @@
           <p:cNvPr id="18" name="Text 13">
             <a:extLst xmlns:a="http://schemas.openxmlformats.org/drawingml/2006/main">
               <a:ext uri="{FF2B5EF4-FFF2-40B4-BE49-F238E27FC236}">
-                <a16:creationId xmlns:a16="http://schemas.microsoft.com/office/drawing/2014/main" id="{79D3F9DA-7EBA-4A05-A8C4-37F0A9E81F1E}"/>
+                <a16:creationId xmlns:a16="http://schemas.microsoft.com/office/drawing/2014/main" id="{FAE95E03-D1A7-4A8F-9431-A6DDEBC33A93}"/>
               </a:ext>
             </a:extLst>
           </p:cNvPr>
@@ -40911,7 +40923,7 @@
           <p:cNvPr id="19" name="Text 14">
             <a:extLst xmlns:a="http://schemas.openxmlformats.org/drawingml/2006/main">
               <a:ext uri="{FF2B5EF4-FFF2-40B4-BE49-F238E27FC236}">
-                <a16:creationId xmlns:a16="http://schemas.microsoft.com/office/drawing/2014/main" id="{75F5B920-F9A6-4CC2-A2CA-2E25DA1F637E}"/>
+                <a16:creationId xmlns:a16="http://schemas.microsoft.com/office/drawing/2014/main" id="{A1406440-7275-48CF-9ECB-3103BF8BAAE4}"/>
               </a:ext>
             </a:extLst>
           </p:cNvPr>
@@ -40959,7 +40971,7 @@
           <p:cNvPr id="20" name="Text 15">
             <a:extLst xmlns:a="http://schemas.openxmlformats.org/drawingml/2006/main">
               <a:ext uri="{FF2B5EF4-FFF2-40B4-BE49-F238E27FC236}">
-                <a16:creationId xmlns:a16="http://schemas.microsoft.com/office/drawing/2014/main" id="{849B3B5F-8E85-44E5-BA60-DFF6294922B2}"/>
+                <a16:creationId xmlns:a16="http://schemas.microsoft.com/office/drawing/2014/main" id="{5A2FF050-D807-44B6-BA51-267A44FAB62B}"/>
               </a:ext>
             </a:extLst>
           </p:cNvPr>
@@ -41004,7 +41016,7 @@
           <p:cNvPr id="21" name="Shape 16">
             <a:extLst xmlns:a="http://schemas.openxmlformats.org/drawingml/2006/main">
               <a:ext uri="{FF2B5EF4-FFF2-40B4-BE49-F238E27FC236}">
-                <a16:creationId xmlns:a16="http://schemas.microsoft.com/office/drawing/2014/main" id="{1C86EA16-4085-4F98-AD18-9F6D01F1C1F8}"/>
+                <a16:creationId xmlns:a16="http://schemas.microsoft.com/office/drawing/2014/main" id="{7D53A56C-BCA4-4330-86D1-BA301151DC8A}"/>
               </a:ext>
             </a:extLst>
           </p:cNvPr>
@@ -41051,7 +41063,7 @@
           <p:cNvPr id="22" name="Text 17">
             <a:extLst xmlns:a="http://schemas.openxmlformats.org/drawingml/2006/main">
               <a:ext uri="{FF2B5EF4-FFF2-40B4-BE49-F238E27FC236}">
-                <a16:creationId xmlns:a16="http://schemas.microsoft.com/office/drawing/2014/main" id="{77DF3CB2-15AD-40F4-B93E-4F5825D634D4}"/>
+                <a16:creationId xmlns:a16="http://schemas.microsoft.com/office/drawing/2014/main" id="{15BD495D-CF8E-4DF2-9D61-B02DE580A782}"/>
               </a:ext>
             </a:extLst>
           </p:cNvPr>
@@ -41096,7 +41108,7 @@
           <p:cNvPr id="23" name="Text 18">
             <a:extLst xmlns:a="http://schemas.openxmlformats.org/drawingml/2006/main">
               <a:ext uri="{FF2B5EF4-FFF2-40B4-BE49-F238E27FC236}">
-                <a16:creationId xmlns:a16="http://schemas.microsoft.com/office/drawing/2014/main" id="{46CF822E-DE27-4309-BE9E-04FA44CB1982}"/>
+                <a16:creationId xmlns:a16="http://schemas.microsoft.com/office/drawing/2014/main" id="{28AC42FE-ED16-4FC5-9E2D-03D70B715FB8}"/>
               </a:ext>
             </a:extLst>
           </p:cNvPr>
@@ -41141,7 +41153,7 @@
           <p:cNvPr id="24" name="Text 19">
             <a:extLst xmlns:a="http://schemas.openxmlformats.org/drawingml/2006/main">
               <a:ext uri="{FF2B5EF4-FFF2-40B4-BE49-F238E27FC236}">
-                <a16:creationId xmlns:a16="http://schemas.microsoft.com/office/drawing/2014/main" id="{DCD7A72A-DDB5-42EF-A9A8-B92174F6C7B0}"/>
+                <a16:creationId xmlns:a16="http://schemas.microsoft.com/office/drawing/2014/main" id="{633C0A3A-6E1D-493E-9E8E-C37C1D6A7931}"/>
               </a:ext>
             </a:extLst>
           </p:cNvPr>
@@ -41186,7 +41198,7 @@
           <p:cNvPr id="25" name="Text 20">
             <a:extLst xmlns:a="http://schemas.openxmlformats.org/drawingml/2006/main">
               <a:ext uri="{FF2B5EF4-FFF2-40B4-BE49-F238E27FC236}">
-                <a16:creationId xmlns:a16="http://schemas.microsoft.com/office/drawing/2014/main" id="{C9736CEA-D144-4F2F-93F7-62854C21EB82}"/>
+                <a16:creationId xmlns:a16="http://schemas.microsoft.com/office/drawing/2014/main" id="{46483AFF-4033-401D-8785-1B98DCD772CD}"/>
               </a:ext>
             </a:extLst>
           </p:cNvPr>
@@ -41231,7 +41243,7 @@
           <p:cNvPr id="26" name="Text 21">
             <a:extLst xmlns:a="http://schemas.openxmlformats.org/drawingml/2006/main">
               <a:ext uri="{FF2B5EF4-FFF2-40B4-BE49-F238E27FC236}">
-                <a16:creationId xmlns:a16="http://schemas.microsoft.com/office/drawing/2014/main" id="{D37F56FA-7927-42E9-9EC0-37FE9174AB90}"/>
+                <a16:creationId xmlns:a16="http://schemas.microsoft.com/office/drawing/2014/main" id="{2A17905E-8482-4ED4-8688-54B0F7799F5F}"/>
               </a:ext>
             </a:extLst>
           </p:cNvPr>
@@ -41276,7 +41288,7 @@
           <p:cNvPr id="27" name="Text 22">
             <a:extLst xmlns:a="http://schemas.openxmlformats.org/drawingml/2006/main">
               <a:ext uri="{FF2B5EF4-FFF2-40B4-BE49-F238E27FC236}">
-                <a16:creationId xmlns:a16="http://schemas.microsoft.com/office/drawing/2014/main" id="{795348F3-04FC-4ED1-9CFF-2258848AC26A}"/>
+                <a16:creationId xmlns:a16="http://schemas.microsoft.com/office/drawing/2014/main" id="{BE092B7A-6006-4D4F-A819-7A655FF957CF}"/>
               </a:ext>
             </a:extLst>
           </p:cNvPr>
@@ -41321,7 +41333,7 @@
           <p:cNvPr id="28" name="Text 23">
             <a:extLst xmlns:a="http://schemas.openxmlformats.org/drawingml/2006/main">
               <a:ext uri="{FF2B5EF4-FFF2-40B4-BE49-F238E27FC236}">
-                <a16:creationId xmlns:a16="http://schemas.microsoft.com/office/drawing/2014/main" id="{B0F4EBC8-643D-4529-961C-30C812182385}"/>
+                <a16:creationId xmlns:a16="http://schemas.microsoft.com/office/drawing/2014/main" id="{91C2F84A-CC00-4689-9CBA-4E8258B1704D}"/>
               </a:ext>
             </a:extLst>
           </p:cNvPr>
@@ -41366,7 +41378,7 @@
           <p:cNvPr id="29" name="Text 24">
             <a:extLst xmlns:a="http://schemas.openxmlformats.org/drawingml/2006/main">
               <a:ext uri="{FF2B5EF4-FFF2-40B4-BE49-F238E27FC236}">
-                <a16:creationId xmlns:a16="http://schemas.microsoft.com/office/drawing/2014/main" id="{0ED43E3A-537C-47D9-B31F-A25B79A9C838}"/>
+                <a16:creationId xmlns:a16="http://schemas.microsoft.com/office/drawing/2014/main" id="{039EF1ED-B42B-4311-A3A9-FF518DCA1650}"/>
               </a:ext>
             </a:extLst>
           </p:cNvPr>
@@ -41411,7 +41423,7 @@
           <p:cNvPr id="30" name="Text 25">
             <a:extLst xmlns:a="http://schemas.openxmlformats.org/drawingml/2006/main">
               <a:ext uri="{FF2B5EF4-FFF2-40B4-BE49-F238E27FC236}">
-                <a16:creationId xmlns:a16="http://schemas.microsoft.com/office/drawing/2014/main" id="{3AC8316D-363B-4D62-86C6-4551C01882F0}"/>
+                <a16:creationId xmlns:a16="http://schemas.microsoft.com/office/drawing/2014/main" id="{0EAE9FDB-CA93-4A6F-81F3-8590F1AEA98F}"/>
               </a:ext>
             </a:extLst>
           </p:cNvPr>
@@ -41456,7 +41468,7 @@
           <p:cNvPr id="31" name="Text 26">
             <a:extLst xmlns:a="http://schemas.openxmlformats.org/drawingml/2006/main">
               <a:ext uri="{FF2B5EF4-FFF2-40B4-BE49-F238E27FC236}">
-                <a16:creationId xmlns:a16="http://schemas.microsoft.com/office/drawing/2014/main" id="{F0A3DA38-AD46-43B6-931A-4F583C2D32EB}"/>
+                <a16:creationId xmlns:a16="http://schemas.microsoft.com/office/drawing/2014/main" id="{00C8F880-DD43-44DF-904A-4DAFEAFD2BCA}"/>
               </a:ext>
             </a:extLst>
           </p:cNvPr>
@@ -41501,7 +41513,7 @@
           <p:cNvPr id="32" name="Text 27">
             <a:extLst xmlns:a="http://schemas.openxmlformats.org/drawingml/2006/main">
               <a:ext uri="{FF2B5EF4-FFF2-40B4-BE49-F238E27FC236}">
-                <a16:creationId xmlns:a16="http://schemas.microsoft.com/office/drawing/2014/main" id="{B06EAC45-7486-483A-9232-1BB59C2211D8}"/>
+                <a16:creationId xmlns:a16="http://schemas.microsoft.com/office/drawing/2014/main" id="{683BFB72-D487-434E-AADD-56F95359D798}"/>
               </a:ext>
             </a:extLst>
           </p:cNvPr>
@@ -41546,7 +41558,7 @@
           <p:cNvPr id="33" name="Text 28">
             <a:extLst xmlns:a="http://schemas.openxmlformats.org/drawingml/2006/main">
               <a:ext uri="{FF2B5EF4-FFF2-40B4-BE49-F238E27FC236}">
-                <a16:creationId xmlns:a16="http://schemas.microsoft.com/office/drawing/2014/main" id="{BB7FA5EB-5204-4200-963F-6FC82E83D0FF}"/>
+                <a16:creationId xmlns:a16="http://schemas.microsoft.com/office/drawing/2014/main" id="{29071BF0-6C05-4F2E-8F2D-830A14C7DE30}"/>
               </a:ext>
             </a:extLst>
           </p:cNvPr>
@@ -41591,7 +41603,7 @@
           <p:cNvPr id="34" name="Text 29">
             <a:extLst xmlns:a="http://schemas.openxmlformats.org/drawingml/2006/main">
               <a:ext uri="{FF2B5EF4-FFF2-40B4-BE49-F238E27FC236}">
-                <a16:creationId xmlns:a16="http://schemas.microsoft.com/office/drawing/2014/main" id="{AC8F09BF-DE58-462F-9D47-1F43FB5C64C9}"/>
+                <a16:creationId xmlns:a16="http://schemas.microsoft.com/office/drawing/2014/main" id="{3FAA0747-9675-4BF6-81B8-60CC718A6184}"/>
               </a:ext>
             </a:extLst>
           </p:cNvPr>
@@ -41637,7 +41649,7 @@
     </p:spTree>
     <p:extLst>
       <p:ext uri="{BB962C8B-B14F-4D97-AF65-F5344CB8AC3E}">
-        <p14:creationId xmlns:p14="http://schemas.microsoft.com/office/powerpoint/2010/main" val="823881582"/>
+        <p14:creationId xmlns:p14="http://schemas.microsoft.com/office/powerpoint/2010/main" val="35549161"/>
       </p:ext>
     </p:extLst>
   </p:cSld>
@@ -41668,7 +41680,7 @@
           <p:cNvPr id="2" name="Text 0">
             <a:extLst xmlns:a="http://schemas.openxmlformats.org/drawingml/2006/main">
               <a:ext uri="{FF2B5EF4-FFF2-40B4-BE49-F238E27FC236}">
-                <a16:creationId xmlns:a16="http://schemas.microsoft.com/office/drawing/2014/main" id="{CD0C0387-5FA1-4C02-B870-9B06C4816513}"/>
+                <a16:creationId xmlns:a16="http://schemas.microsoft.com/office/drawing/2014/main" id="{0B9865BD-0730-47F7-B347-B20D2DFF8168}"/>
               </a:ext>
             </a:extLst>
           </p:cNvPr>
@@ -41713,7 +41725,7 @@
           <p:cNvPr id="3" name="Text 1">
             <a:extLst xmlns:a="http://schemas.openxmlformats.org/drawingml/2006/main">
               <a:ext uri="{FF2B5EF4-FFF2-40B4-BE49-F238E27FC236}">
-                <a16:creationId xmlns:a16="http://schemas.microsoft.com/office/drawing/2014/main" id="{71623440-B212-46EF-B449-A0EB784A8FAB}"/>
+                <a16:creationId xmlns:a16="http://schemas.microsoft.com/office/drawing/2014/main" id="{622FF87C-D219-4CE4-8586-08CCD8DBF51F}"/>
               </a:ext>
             </a:extLst>
           </p:cNvPr>
@@ -41758,7 +41770,7 @@
           <p:cNvPr id="4" name="Text 2">
             <a:extLst xmlns:a="http://schemas.openxmlformats.org/drawingml/2006/main">
               <a:ext uri="{FF2B5EF4-FFF2-40B4-BE49-F238E27FC236}">
-                <a16:creationId xmlns:a16="http://schemas.microsoft.com/office/drawing/2014/main" id="{A7589D6F-EADC-42FC-8645-D50382ACEEA9}"/>
+                <a16:creationId xmlns:a16="http://schemas.microsoft.com/office/drawing/2014/main" id="{6B59E82D-106B-4E56-AB6B-80C2D16B45A9}"/>
               </a:ext>
             </a:extLst>
           </p:cNvPr>
@@ -41803,7 +41815,7 @@
           <p:cNvPr id="5" name="Text 3">
             <a:extLst xmlns:a="http://schemas.openxmlformats.org/drawingml/2006/main">
               <a:ext uri="{FF2B5EF4-FFF2-40B4-BE49-F238E27FC236}">
-                <a16:creationId xmlns:a16="http://schemas.microsoft.com/office/drawing/2014/main" id="{F8E36713-9BE7-4E88-9992-AAB594C211B0}"/>
+                <a16:creationId xmlns:a16="http://schemas.microsoft.com/office/drawing/2014/main" id="{60F328D9-9508-42DE-A9D9-DF1974A00E62}"/>
               </a:ext>
             </a:extLst>
           </p:cNvPr>
@@ -41848,7 +41860,7 @@
           <p:cNvPr id="6" name="Text 4">
             <a:extLst xmlns:a="http://schemas.openxmlformats.org/drawingml/2006/main">
               <a:ext uri="{FF2B5EF4-FFF2-40B4-BE49-F238E27FC236}">
-                <a16:creationId xmlns:a16="http://schemas.microsoft.com/office/drawing/2014/main" id="{1765165A-E33A-4047-A6FF-9B2C5F121990}"/>
+                <a16:creationId xmlns:a16="http://schemas.microsoft.com/office/drawing/2014/main" id="{B865397D-E6D4-45D3-8120-EFBC8216A7C1}"/>
               </a:ext>
             </a:extLst>
           </p:cNvPr>
@@ -41893,7 +41905,7 @@
           <p:cNvPr id="7" name="Shape 5">
             <a:extLst xmlns:a="http://schemas.openxmlformats.org/drawingml/2006/main">
               <a:ext uri="{FF2B5EF4-FFF2-40B4-BE49-F238E27FC236}">
-                <a16:creationId xmlns:a16="http://schemas.microsoft.com/office/drawing/2014/main" id="{3EF52F01-0663-4C5F-987C-C58AF0E7636C}"/>
+                <a16:creationId xmlns:a16="http://schemas.microsoft.com/office/drawing/2014/main" id="{32D9A786-7AC4-4EC4-8DFC-12F3DA560852}"/>
               </a:ext>
             </a:extLst>
           </p:cNvPr>
@@ -41944,7 +41956,7 @@
           <p:nvPr/>
         </p:nvPicPr>
         <p:blipFill>
-          <a:blip xmlns:r="http://schemas.openxmlformats.org/officeDocument/2006/relationships" xmlns:a="http://schemas.openxmlformats.org/drawingml/2006/main" r:embed="R94ae1b703c634ca0"/>
+          <a:blip xmlns:r="http://schemas.openxmlformats.org/officeDocument/2006/relationships" xmlns:a="http://schemas.openxmlformats.org/drawingml/2006/main" r:embed="Rd4dc0a2224984972"/>
           <a:stretch xmlns:a="http://schemas.openxmlformats.org/drawingml/2006/main">
             <a:fillRect l="0" t="0" r="0" b="0"/>
           </a:stretch>
@@ -41964,7 +41976,7 @@
           <p:cNvPr id="9" name="Text 6">
             <a:extLst xmlns:a="http://schemas.openxmlformats.org/drawingml/2006/main">
               <a:ext uri="{FF2B5EF4-FFF2-40B4-BE49-F238E27FC236}">
-                <a16:creationId xmlns:a16="http://schemas.microsoft.com/office/drawing/2014/main" id="{820DD6C4-5D97-421F-AFFC-B7BC19C63B42}"/>
+                <a16:creationId xmlns:a16="http://schemas.microsoft.com/office/drawing/2014/main" id="{377B5148-4556-4EEA-BDC1-238C0D3E2EB8}"/>
               </a:ext>
             </a:extLst>
           </p:cNvPr>
@@ -42031,7 +42043,7 @@
           <p:cNvPr id="10" name="Shape 7">
             <a:extLst xmlns:a="http://schemas.openxmlformats.org/drawingml/2006/main">
               <a:ext uri="{FF2B5EF4-FFF2-40B4-BE49-F238E27FC236}">
-                <a16:creationId xmlns:a16="http://schemas.microsoft.com/office/drawing/2014/main" id="{F27401BC-7993-49BA-AD62-6F94AED8148D}"/>
+                <a16:creationId xmlns:a16="http://schemas.microsoft.com/office/drawing/2014/main" id="{485BAD68-A64E-452C-A51B-C94189E336F4}"/>
               </a:ext>
             </a:extLst>
           </p:cNvPr>
@@ -42082,7 +42094,7 @@
           <p:nvPr/>
         </p:nvPicPr>
         <p:blipFill>
-          <a:blip xmlns:r="http://schemas.openxmlformats.org/officeDocument/2006/relationships" xmlns:a="http://schemas.openxmlformats.org/drawingml/2006/main" r:embed="Rd429fd8537634efa"/>
+          <a:blip xmlns:r="http://schemas.openxmlformats.org/officeDocument/2006/relationships" xmlns:a="http://schemas.openxmlformats.org/drawingml/2006/main" r:embed="Rfc22c605335345c3"/>
           <a:stretch xmlns:a="http://schemas.openxmlformats.org/drawingml/2006/main">
             <a:fillRect l="0" t="0" r="0" b="0"/>
           </a:stretch>
@@ -42102,7 +42114,7 @@
           <p:cNvPr id="12" name="Text 8">
             <a:extLst xmlns:a="http://schemas.openxmlformats.org/drawingml/2006/main">
               <a:ext uri="{FF2B5EF4-FFF2-40B4-BE49-F238E27FC236}">
-                <a16:creationId xmlns:a16="http://schemas.microsoft.com/office/drawing/2014/main" id="{AF44DA90-E1AE-46AA-9728-1B718C0F176E}"/>
+                <a16:creationId xmlns:a16="http://schemas.microsoft.com/office/drawing/2014/main" id="{2A5FD6E6-4283-4F99-B819-4C5F919C00D9}"/>
               </a:ext>
             </a:extLst>
           </p:cNvPr>
@@ -42169,7 +42181,7 @@
           <p:cNvPr id="13" name="Shape 9">
             <a:extLst xmlns:a="http://schemas.openxmlformats.org/drawingml/2006/main">
               <a:ext uri="{FF2B5EF4-FFF2-40B4-BE49-F238E27FC236}">
-                <a16:creationId xmlns:a16="http://schemas.microsoft.com/office/drawing/2014/main" id="{99CB5001-476F-4322-BA69-72F6F291E254}"/>
+                <a16:creationId xmlns:a16="http://schemas.microsoft.com/office/drawing/2014/main" id="{E54E8228-C9A4-47F1-88C8-4E3EFC7E1C7E}"/>
               </a:ext>
             </a:extLst>
           </p:cNvPr>
@@ -42220,7 +42232,7 @@
           <p:nvPr/>
         </p:nvPicPr>
         <p:blipFill>
-          <a:blip xmlns:r="http://schemas.openxmlformats.org/officeDocument/2006/relationships" xmlns:a="http://schemas.openxmlformats.org/drawingml/2006/main" r:embed="R4d0daecc523a4952"/>
+          <a:blip xmlns:r="http://schemas.openxmlformats.org/officeDocument/2006/relationships" xmlns:a="http://schemas.openxmlformats.org/drawingml/2006/main" r:embed="R761d834f794d4db0"/>
           <a:stretch xmlns:a="http://schemas.openxmlformats.org/drawingml/2006/main">
             <a:fillRect l="0" t="0" r="0" b="0"/>
           </a:stretch>
@@ -42240,7 +42252,7 @@
           <p:cNvPr id="15" name="Text 10">
             <a:extLst xmlns:a="http://schemas.openxmlformats.org/drawingml/2006/main">
               <a:ext uri="{FF2B5EF4-FFF2-40B4-BE49-F238E27FC236}">
-                <a16:creationId xmlns:a16="http://schemas.microsoft.com/office/drawing/2014/main" id="{570CDA52-E6F6-4546-ACAC-33CDA867E941}"/>
+                <a16:creationId xmlns:a16="http://schemas.microsoft.com/office/drawing/2014/main" id="{AA465308-E04C-4D9A-9B77-8F84D43EC438}"/>
               </a:ext>
             </a:extLst>
           </p:cNvPr>
@@ -42307,7 +42319,7 @@
           <p:cNvPr id="16" name="Shape 11">
             <a:extLst xmlns:a="http://schemas.openxmlformats.org/drawingml/2006/main">
               <a:ext uri="{FF2B5EF4-FFF2-40B4-BE49-F238E27FC236}">
-                <a16:creationId xmlns:a16="http://schemas.microsoft.com/office/drawing/2014/main" id="{28C53554-E446-46E7-887D-91DAF260D097}"/>
+                <a16:creationId xmlns:a16="http://schemas.microsoft.com/office/drawing/2014/main" id="{7F7F50C0-85C0-43AD-AEA7-0AF62901E2CE}"/>
               </a:ext>
             </a:extLst>
           </p:cNvPr>
@@ -42358,7 +42370,7 @@
           <p:nvPr/>
         </p:nvPicPr>
         <p:blipFill>
-          <a:blip xmlns:r="http://schemas.openxmlformats.org/officeDocument/2006/relationships" xmlns:a="http://schemas.openxmlformats.org/drawingml/2006/main" r:embed="R7c09735991e14589"/>
+          <a:blip xmlns:r="http://schemas.openxmlformats.org/officeDocument/2006/relationships" xmlns:a="http://schemas.openxmlformats.org/drawingml/2006/main" r:embed="R194c4db7d6e04f8d"/>
           <a:stretch xmlns:a="http://schemas.openxmlformats.org/drawingml/2006/main">
             <a:fillRect l="0" t="0" r="0" b="0"/>
           </a:stretch>
@@ -42378,7 +42390,7 @@
           <p:cNvPr id="18" name="Text 12">
             <a:extLst xmlns:a="http://schemas.openxmlformats.org/drawingml/2006/main">
               <a:ext uri="{FF2B5EF4-FFF2-40B4-BE49-F238E27FC236}">
-                <a16:creationId xmlns:a16="http://schemas.microsoft.com/office/drawing/2014/main" id="{2141EC21-02CC-4EDC-9CFB-07145EFFE2A5}"/>
+                <a16:creationId xmlns:a16="http://schemas.microsoft.com/office/drawing/2014/main" id="{D7A590A4-D4A2-4852-B4EC-1E7EF8B3662F}"/>
               </a:ext>
             </a:extLst>
           </p:cNvPr>
@@ -42445,7 +42457,7 @@
           <p:cNvPr id="19" name="Shape 13">
             <a:extLst xmlns:a="http://schemas.openxmlformats.org/drawingml/2006/main">
               <a:ext uri="{FF2B5EF4-FFF2-40B4-BE49-F238E27FC236}">
-                <a16:creationId xmlns:a16="http://schemas.microsoft.com/office/drawing/2014/main" id="{EBAE4708-FDA7-43F3-ADCB-5D442FD5B428}"/>
+                <a16:creationId xmlns:a16="http://schemas.microsoft.com/office/drawing/2014/main" id="{F30A947E-D181-492F-9644-733044A7750C}"/>
               </a:ext>
             </a:extLst>
           </p:cNvPr>
@@ -42496,7 +42508,7 @@
           <p:nvPr/>
         </p:nvPicPr>
         <p:blipFill>
-          <a:blip xmlns:r="http://schemas.openxmlformats.org/officeDocument/2006/relationships" xmlns:a="http://schemas.openxmlformats.org/drawingml/2006/main" r:embed="Re73b26fd1183468b"/>
+          <a:blip xmlns:r="http://schemas.openxmlformats.org/officeDocument/2006/relationships" xmlns:a="http://schemas.openxmlformats.org/drawingml/2006/main" r:embed="R5285c72c05a64e0a"/>
           <a:stretch xmlns:a="http://schemas.openxmlformats.org/drawingml/2006/main">
             <a:fillRect l="0" t="0" r="0" b="0"/>
           </a:stretch>
@@ -42516,7 +42528,7 @@
           <p:cNvPr id="21" name="Text 14">
             <a:extLst xmlns:a="http://schemas.openxmlformats.org/drawingml/2006/main">
               <a:ext uri="{FF2B5EF4-FFF2-40B4-BE49-F238E27FC236}">
-                <a16:creationId xmlns:a16="http://schemas.microsoft.com/office/drawing/2014/main" id="{69BECC3D-258A-40B8-BE68-066B46060504}"/>
+                <a16:creationId xmlns:a16="http://schemas.microsoft.com/office/drawing/2014/main" id="{D3E6F28D-9AFC-49AB-8682-941426B63776}"/>
               </a:ext>
             </a:extLst>
           </p:cNvPr>
@@ -42583,7 +42595,7 @@
           <p:cNvPr id="22" name="Shape 15">
             <a:extLst xmlns:a="http://schemas.openxmlformats.org/drawingml/2006/main">
               <a:ext uri="{FF2B5EF4-FFF2-40B4-BE49-F238E27FC236}">
-                <a16:creationId xmlns:a16="http://schemas.microsoft.com/office/drawing/2014/main" id="{70C0582B-88E1-44A3-87CE-11C7B9F3F67E}"/>
+                <a16:creationId xmlns:a16="http://schemas.microsoft.com/office/drawing/2014/main" id="{10410A07-4416-4082-9D33-43BD4D0710A6}"/>
               </a:ext>
             </a:extLst>
           </p:cNvPr>
@@ -42634,7 +42646,7 @@
           <p:nvPr/>
         </p:nvPicPr>
         <p:blipFill>
-          <a:blip xmlns:r="http://schemas.openxmlformats.org/officeDocument/2006/relationships" xmlns:a="http://schemas.openxmlformats.org/drawingml/2006/main" r:embed="R2c3cf8fc8c4447bb"/>
+          <a:blip xmlns:r="http://schemas.openxmlformats.org/officeDocument/2006/relationships" xmlns:a="http://schemas.openxmlformats.org/drawingml/2006/main" r:embed="Rc8d0612ccfcb46e3"/>
           <a:stretch xmlns:a="http://schemas.openxmlformats.org/drawingml/2006/main">
             <a:fillRect l="0" t="0" r="0" b="0"/>
           </a:stretch>
@@ -42654,7 +42666,7 @@
           <p:cNvPr id="24" name="Text 16">
             <a:extLst xmlns:a="http://schemas.openxmlformats.org/drawingml/2006/main">
               <a:ext uri="{FF2B5EF4-FFF2-40B4-BE49-F238E27FC236}">
-                <a16:creationId xmlns:a16="http://schemas.microsoft.com/office/drawing/2014/main" id="{EA2654A0-0BFD-4380-87D5-63F79C26A00C}"/>
+                <a16:creationId xmlns:a16="http://schemas.microsoft.com/office/drawing/2014/main" id="{CA4E0D06-C664-49AA-8E6F-C9F0681810E1}"/>
               </a:ext>
             </a:extLst>
           </p:cNvPr>
@@ -42721,7 +42733,7 @@
           <p:cNvPr id="25" name="Shape 17">
             <a:extLst xmlns:a="http://schemas.openxmlformats.org/drawingml/2006/main">
               <a:ext uri="{FF2B5EF4-FFF2-40B4-BE49-F238E27FC236}">
-                <a16:creationId xmlns:a16="http://schemas.microsoft.com/office/drawing/2014/main" id="{5E3A02CB-AA8A-4499-80D5-04618DAB782B}"/>
+                <a16:creationId xmlns:a16="http://schemas.microsoft.com/office/drawing/2014/main" id="{812B9D06-F90C-42C3-B815-E894E6C7447D}"/>
               </a:ext>
             </a:extLst>
           </p:cNvPr>
@@ -42765,7 +42777,7 @@
           <p:nvPr/>
         </p:nvPicPr>
         <p:blipFill>
-          <a:blip xmlns:r="http://schemas.openxmlformats.org/officeDocument/2006/relationships" xmlns:a="http://schemas.openxmlformats.org/drawingml/2006/main" r:embed="R62c282d4b9b34af4"/>
+          <a:blip xmlns:r="http://schemas.openxmlformats.org/officeDocument/2006/relationships" xmlns:a="http://schemas.openxmlformats.org/drawingml/2006/main" r:embed="R288d036c6ace4987"/>
           <a:stretch xmlns:a="http://schemas.openxmlformats.org/drawingml/2006/main">
             <a:fillRect l="0" t="0" r="0" b="0"/>
           </a:stretch>
@@ -42785,7 +42797,7 @@
           <p:cNvPr id="27" name="Text 18">
             <a:extLst xmlns:a="http://schemas.openxmlformats.org/drawingml/2006/main">
               <a:ext uri="{FF2B5EF4-FFF2-40B4-BE49-F238E27FC236}">
-                <a16:creationId xmlns:a16="http://schemas.microsoft.com/office/drawing/2014/main" id="{822FD481-4A78-492A-9E9B-4291923ED491}"/>
+                <a16:creationId xmlns:a16="http://schemas.microsoft.com/office/drawing/2014/main" id="{14F887F3-361F-445A-B6FB-EE57C57A82E5}"/>
               </a:ext>
             </a:extLst>
           </p:cNvPr>
@@ -42833,7 +42845,7 @@
           <p:cNvPr id="28" name="Text 19">
             <a:extLst xmlns:a="http://schemas.openxmlformats.org/drawingml/2006/main">
               <a:ext uri="{FF2B5EF4-FFF2-40B4-BE49-F238E27FC236}">
-                <a16:creationId xmlns:a16="http://schemas.microsoft.com/office/drawing/2014/main" id="{47D31DF3-8EDC-4F73-A5F4-6F8E1B5A4329}"/>
+                <a16:creationId xmlns:a16="http://schemas.microsoft.com/office/drawing/2014/main" id="{5D018A0B-9CAF-420B-95DD-95D14EC565E2}"/>
               </a:ext>
             </a:extLst>
           </p:cNvPr>
@@ -42878,7 +42890,7 @@
           <p:cNvPr id="29" name="Shape 20">
             <a:extLst xmlns:a="http://schemas.openxmlformats.org/drawingml/2006/main">
               <a:ext uri="{FF2B5EF4-FFF2-40B4-BE49-F238E27FC236}">
-                <a16:creationId xmlns:a16="http://schemas.microsoft.com/office/drawing/2014/main" id="{EA4915CA-4C2C-42CA-AA70-6799E043ED60}"/>
+                <a16:creationId xmlns:a16="http://schemas.microsoft.com/office/drawing/2014/main" id="{39C2A875-7D8D-49A6-ADC0-E335FDBE6CE0}"/>
               </a:ext>
             </a:extLst>
           </p:cNvPr>
@@ -42922,7 +42934,7 @@
           <p:nvPr/>
         </p:nvPicPr>
         <p:blipFill>
-          <a:blip xmlns:r="http://schemas.openxmlformats.org/officeDocument/2006/relationships" xmlns:a="http://schemas.openxmlformats.org/drawingml/2006/main" r:embed="R57b01a2153ed471a"/>
+          <a:blip xmlns:r="http://schemas.openxmlformats.org/officeDocument/2006/relationships" xmlns:a="http://schemas.openxmlformats.org/drawingml/2006/main" r:embed="Red1230a12e954ff0"/>
           <a:stretch xmlns:a="http://schemas.openxmlformats.org/drawingml/2006/main">
             <a:fillRect l="0" t="0" r="0" b="0"/>
           </a:stretch>
@@ -42942,7 +42954,7 @@
           <p:cNvPr id="31" name="Text 21">
             <a:extLst xmlns:a="http://schemas.openxmlformats.org/drawingml/2006/main">
               <a:ext uri="{FF2B5EF4-FFF2-40B4-BE49-F238E27FC236}">
-                <a16:creationId xmlns:a16="http://schemas.microsoft.com/office/drawing/2014/main" id="{C51A011E-F218-40BE-870A-26CB40C0FB32}"/>
+                <a16:creationId xmlns:a16="http://schemas.microsoft.com/office/drawing/2014/main" id="{D21ED47D-3D1D-4103-82A3-6867E1E2F634}"/>
               </a:ext>
             </a:extLst>
           </p:cNvPr>
@@ -42990,7 +43002,7 @@
           <p:cNvPr id="32" name="Text 22">
             <a:extLst xmlns:a="http://schemas.openxmlformats.org/drawingml/2006/main">
               <a:ext uri="{FF2B5EF4-FFF2-40B4-BE49-F238E27FC236}">
-                <a16:creationId xmlns:a16="http://schemas.microsoft.com/office/drawing/2014/main" id="{1C192D4D-34E2-4621-906B-EEE2E4AA2813}"/>
+                <a16:creationId xmlns:a16="http://schemas.microsoft.com/office/drawing/2014/main" id="{E166FDDA-2FEA-4322-A350-2FC5E9476AC4}"/>
               </a:ext>
             </a:extLst>
           </p:cNvPr>
@@ -43035,7 +43047,7 @@
           <p:cNvPr id="33" name="Shape 23">
             <a:extLst xmlns:a="http://schemas.openxmlformats.org/drawingml/2006/main">
               <a:ext uri="{FF2B5EF4-FFF2-40B4-BE49-F238E27FC236}">
-                <a16:creationId xmlns:a16="http://schemas.microsoft.com/office/drawing/2014/main" id="{B7C04778-54CE-4CCD-AD1F-80D4FE7397BF}"/>
+                <a16:creationId xmlns:a16="http://schemas.microsoft.com/office/drawing/2014/main" id="{E4C34BCD-5905-4E43-9F16-9D2C9D5C2171}"/>
               </a:ext>
             </a:extLst>
           </p:cNvPr>
@@ -43082,7 +43094,7 @@
           <p:cNvPr id="34" name="Text 24">
             <a:extLst xmlns:a="http://schemas.openxmlformats.org/drawingml/2006/main">
               <a:ext uri="{FF2B5EF4-FFF2-40B4-BE49-F238E27FC236}">
-                <a16:creationId xmlns:a16="http://schemas.microsoft.com/office/drawing/2014/main" id="{370D2CBB-1EB6-401C-A702-F493B90F2B60}"/>
+                <a16:creationId xmlns:a16="http://schemas.microsoft.com/office/drawing/2014/main" id="{DB54ADE6-B51F-4BD3-9EFC-E0F84D2BCDCC}"/>
               </a:ext>
             </a:extLst>
           </p:cNvPr>
@@ -43141,7 +43153,7 @@
           <p:cNvPr id="35" name="Text 25">
             <a:extLst xmlns:a="http://schemas.openxmlformats.org/drawingml/2006/main">
               <a:ext uri="{FF2B5EF4-FFF2-40B4-BE49-F238E27FC236}">
-                <a16:creationId xmlns:a16="http://schemas.microsoft.com/office/drawing/2014/main" id="{84A61C05-BF89-4B19-BE6E-76827573CA3B}"/>
+                <a16:creationId xmlns:a16="http://schemas.microsoft.com/office/drawing/2014/main" id="{21056B15-2F28-40A3-9C33-9DFF9ED984E1}"/>
               </a:ext>
             </a:extLst>
           </p:cNvPr>
@@ -43186,7 +43198,7 @@
           <p:cNvPr id="36" name="Shape 26">
             <a:extLst xmlns:a="http://schemas.openxmlformats.org/drawingml/2006/main">
               <a:ext uri="{FF2B5EF4-FFF2-40B4-BE49-F238E27FC236}">
-                <a16:creationId xmlns:a16="http://schemas.microsoft.com/office/drawing/2014/main" id="{777E638B-B1C7-4649-809B-35CB8306ECD6}"/>
+                <a16:creationId xmlns:a16="http://schemas.microsoft.com/office/drawing/2014/main" id="{D0F29156-B44A-4CEE-AA76-B0370E59E7E7}"/>
               </a:ext>
             </a:extLst>
           </p:cNvPr>
@@ -43233,7 +43245,7 @@
           <p:cNvPr id="37" name="Text 27">
             <a:extLst xmlns:a="http://schemas.openxmlformats.org/drawingml/2006/main">
               <a:ext uri="{FF2B5EF4-FFF2-40B4-BE49-F238E27FC236}">
-                <a16:creationId xmlns:a16="http://schemas.microsoft.com/office/drawing/2014/main" id="{DAD37A76-85A2-41C2-9A2D-6FBADECD7B6E}"/>
+                <a16:creationId xmlns:a16="http://schemas.microsoft.com/office/drawing/2014/main" id="{7F32E295-7DA8-40BF-A3B9-619C1816CC5C}"/>
               </a:ext>
             </a:extLst>
           </p:cNvPr>
@@ -43278,7 +43290,7 @@
           <p:cNvPr id="38" name="Text 28">
             <a:extLst xmlns:a="http://schemas.openxmlformats.org/drawingml/2006/main">
               <a:ext uri="{FF2B5EF4-FFF2-40B4-BE49-F238E27FC236}">
-                <a16:creationId xmlns:a16="http://schemas.microsoft.com/office/drawing/2014/main" id="{DA1D074B-83C0-4A2C-861C-837F1B4F9757}"/>
+                <a16:creationId xmlns:a16="http://schemas.microsoft.com/office/drawing/2014/main" id="{884ED6EC-A741-4249-B1C0-FE954B954870}"/>
               </a:ext>
             </a:extLst>
           </p:cNvPr>
@@ -43326,7 +43338,7 @@
           <p:cNvPr id="39" name="Shape 29">
             <a:extLst xmlns:a="http://schemas.openxmlformats.org/drawingml/2006/main">
               <a:ext uri="{FF2B5EF4-FFF2-40B4-BE49-F238E27FC236}">
-                <a16:creationId xmlns:a16="http://schemas.microsoft.com/office/drawing/2014/main" id="{141BD60E-9178-429C-A53C-3BF3C90B1270}"/>
+                <a16:creationId xmlns:a16="http://schemas.microsoft.com/office/drawing/2014/main" id="{88274E45-856E-49DE-96A1-8B3810B014BA}"/>
               </a:ext>
             </a:extLst>
           </p:cNvPr>
@@ -43373,7 +43385,7 @@
           <p:cNvPr id="40" name="Text 30">
             <a:extLst xmlns:a="http://schemas.openxmlformats.org/drawingml/2006/main">
               <a:ext uri="{FF2B5EF4-FFF2-40B4-BE49-F238E27FC236}">
-                <a16:creationId xmlns:a16="http://schemas.microsoft.com/office/drawing/2014/main" id="{B3DC56E2-C6FE-4FFF-9F44-53311F9AC2C2}"/>
+                <a16:creationId xmlns:a16="http://schemas.microsoft.com/office/drawing/2014/main" id="{70608C26-342D-44C8-AEC5-6EF71AE99C50}"/>
               </a:ext>
             </a:extLst>
           </p:cNvPr>
@@ -43418,7 +43430,7 @@
           <p:cNvPr id="41" name="Text 31">
             <a:extLst xmlns:a="http://schemas.openxmlformats.org/drawingml/2006/main">
               <a:ext uri="{FF2B5EF4-FFF2-40B4-BE49-F238E27FC236}">
-                <a16:creationId xmlns:a16="http://schemas.microsoft.com/office/drawing/2014/main" id="{3791D769-934B-4636-B986-489B428AFDC8}"/>
+                <a16:creationId xmlns:a16="http://schemas.microsoft.com/office/drawing/2014/main" id="{4191B484-2245-4BED-8615-59A1A1542A6A}"/>
               </a:ext>
             </a:extLst>
           </p:cNvPr>
@@ -43464,7 +43476,7 @@
     </p:spTree>
     <p:extLst>
       <p:ext uri="{BB962C8B-B14F-4D97-AF65-F5344CB8AC3E}">
-        <p14:creationId xmlns:p14="http://schemas.microsoft.com/office/powerpoint/2010/main" val="507594195"/>
+        <p14:creationId xmlns:p14="http://schemas.microsoft.com/office/powerpoint/2010/main" val="1813473456"/>
       </p:ext>
     </p:extLst>
   </p:cSld>
@@ -43495,7 +43507,7 @@
           <p:cNvPr id="2" name="Text 0">
             <a:extLst xmlns:a="http://schemas.openxmlformats.org/drawingml/2006/main">
               <a:ext uri="{FF2B5EF4-FFF2-40B4-BE49-F238E27FC236}">
-                <a16:creationId xmlns:a16="http://schemas.microsoft.com/office/drawing/2014/main" id="{215FB89E-0A87-4488-A06E-C7E0F01741F4}"/>
+                <a16:creationId xmlns:a16="http://schemas.microsoft.com/office/drawing/2014/main" id="{09653145-4669-4D09-A7DD-63128B94B30B}"/>
               </a:ext>
             </a:extLst>
           </p:cNvPr>
@@ -43540,7 +43552,7 @@
           <p:cNvPr id="3" name="Text 1">
             <a:extLst xmlns:a="http://schemas.openxmlformats.org/drawingml/2006/main">
               <a:ext uri="{FF2B5EF4-FFF2-40B4-BE49-F238E27FC236}">
-                <a16:creationId xmlns:a16="http://schemas.microsoft.com/office/drawing/2014/main" id="{0223EBDA-E1B2-4EE8-A262-EF343462AD30}"/>
+                <a16:creationId xmlns:a16="http://schemas.microsoft.com/office/drawing/2014/main" id="{1CAD4048-158D-4BEB-86B3-09C9B6974749}"/>
               </a:ext>
             </a:extLst>
           </p:cNvPr>
@@ -43585,7 +43597,7 @@
           <p:cNvPr id="4" name="Shape 2">
             <a:extLst xmlns:a="http://schemas.openxmlformats.org/drawingml/2006/main">
               <a:ext uri="{FF2B5EF4-FFF2-40B4-BE49-F238E27FC236}">
-                <a16:creationId xmlns:a16="http://schemas.microsoft.com/office/drawing/2014/main" id="{F2BEF704-2866-409B-9BE0-897B2575597D}"/>
+                <a16:creationId xmlns:a16="http://schemas.microsoft.com/office/drawing/2014/main" id="{2C34C992-A0A0-4473-B0A6-810EC382A642}"/>
               </a:ext>
             </a:extLst>
           </p:cNvPr>
@@ -43625,7 +43637,7 @@
           <p:cNvPr id="5" name="Shape 3">
             <a:extLst xmlns:a="http://schemas.openxmlformats.org/drawingml/2006/main">
               <a:ext uri="{FF2B5EF4-FFF2-40B4-BE49-F238E27FC236}">
-                <a16:creationId xmlns:a16="http://schemas.microsoft.com/office/drawing/2014/main" id="{C53346F2-1C5B-4778-89B3-28944412D98A}"/>
+                <a16:creationId xmlns:a16="http://schemas.microsoft.com/office/drawing/2014/main" id="{10437909-C8F4-43D3-9A71-83417B1A622F}"/>
               </a:ext>
             </a:extLst>
           </p:cNvPr>
@@ -43665,7 +43677,7 @@
           <p:cNvPr id="6" name="Text 4">
             <a:extLst xmlns:a="http://schemas.openxmlformats.org/drawingml/2006/main">
               <a:ext uri="{FF2B5EF4-FFF2-40B4-BE49-F238E27FC236}">
-                <a16:creationId xmlns:a16="http://schemas.microsoft.com/office/drawing/2014/main" id="{9F6D68C8-9917-4823-9EC8-DDFE722EF058}"/>
+                <a16:creationId xmlns:a16="http://schemas.microsoft.com/office/drawing/2014/main" id="{DEE09ED6-1013-405E-8782-F480C76ADE10}"/>
               </a:ext>
             </a:extLst>
           </p:cNvPr>
@@ -43710,7 +43722,7 @@
           <p:cNvPr id="7" name="Text 5">
             <a:extLst xmlns:a="http://schemas.openxmlformats.org/drawingml/2006/main">
               <a:ext uri="{FF2B5EF4-FFF2-40B4-BE49-F238E27FC236}">
-                <a16:creationId xmlns:a16="http://schemas.microsoft.com/office/drawing/2014/main" id="{A045CF5A-C8B9-4124-961E-504131A188CB}"/>
+                <a16:creationId xmlns:a16="http://schemas.microsoft.com/office/drawing/2014/main" id="{F698F7B2-02AD-49C5-9CFC-44333EE37657}"/>
               </a:ext>
             </a:extLst>
           </p:cNvPr>
@@ -43755,7 +43767,7 @@
           <p:cNvPr id="8" name="Text 6">
             <a:extLst xmlns:a="http://schemas.openxmlformats.org/drawingml/2006/main">
               <a:ext uri="{FF2B5EF4-FFF2-40B4-BE49-F238E27FC236}">
-                <a16:creationId xmlns:a16="http://schemas.microsoft.com/office/drawing/2014/main" id="{DDA0A58E-01DE-4398-A48D-93A2EFFA5224}"/>
+                <a16:creationId xmlns:a16="http://schemas.microsoft.com/office/drawing/2014/main" id="{19F1E9D0-7E44-4120-AE56-D40E7E6193AB}"/>
               </a:ext>
             </a:extLst>
           </p:cNvPr>
@@ -43801,7 +43813,7 @@
     </p:spTree>
     <p:extLst>
       <p:ext uri="{BB962C8B-B14F-4D97-AF65-F5344CB8AC3E}">
-        <p14:creationId xmlns:p14="http://schemas.microsoft.com/office/powerpoint/2010/main" val="2113463460"/>
+        <p14:creationId xmlns:p14="http://schemas.microsoft.com/office/powerpoint/2010/main" val="308543224"/>
       </p:ext>
     </p:extLst>
   </p:cSld>
@@ -43832,7 +43844,7 @@
           <p:cNvPr id="2" name="Text 0">
             <a:extLst xmlns:a="http://schemas.openxmlformats.org/drawingml/2006/main">
               <a:ext uri="{FF2B5EF4-FFF2-40B4-BE49-F238E27FC236}">
-                <a16:creationId xmlns:a16="http://schemas.microsoft.com/office/drawing/2014/main" id="{31620802-213E-4F95-993C-E4A2171B0A71}"/>
+                <a16:creationId xmlns:a16="http://schemas.microsoft.com/office/drawing/2014/main" id="{6433E200-A34C-4543-B745-3C8EA4485018}"/>
               </a:ext>
             </a:extLst>
           </p:cNvPr>
@@ -43877,7 +43889,7 @@
           <p:cNvPr id="3" name="Text 1">
             <a:extLst xmlns:a="http://schemas.openxmlformats.org/drawingml/2006/main">
               <a:ext uri="{FF2B5EF4-FFF2-40B4-BE49-F238E27FC236}">
-                <a16:creationId xmlns:a16="http://schemas.microsoft.com/office/drawing/2014/main" id="{8625E1C7-4C3C-420B-9309-EDAB949A7130}"/>
+                <a16:creationId xmlns:a16="http://schemas.microsoft.com/office/drawing/2014/main" id="{CF92455F-0693-40AA-865A-E9A87A7CCDD5}"/>
               </a:ext>
             </a:extLst>
           </p:cNvPr>
@@ -43922,7 +43934,7 @@
           <p:cNvPr id="4" name="Text 2">
             <a:extLst xmlns:a="http://schemas.openxmlformats.org/drawingml/2006/main">
               <a:ext uri="{FF2B5EF4-FFF2-40B4-BE49-F238E27FC236}">
-                <a16:creationId xmlns:a16="http://schemas.microsoft.com/office/drawing/2014/main" id="{EC9A433A-9EBD-4387-ACA5-C875A01C776F}"/>
+                <a16:creationId xmlns:a16="http://schemas.microsoft.com/office/drawing/2014/main" id="{E06C559D-DBE3-4824-91B2-773D11B65061}"/>
               </a:ext>
             </a:extLst>
           </p:cNvPr>
@@ -43967,7 +43979,7 @@
           <p:cNvPr id="5" name="Text 3">
             <a:extLst xmlns:a="http://schemas.openxmlformats.org/drawingml/2006/main">
               <a:ext uri="{FF2B5EF4-FFF2-40B4-BE49-F238E27FC236}">
-                <a16:creationId xmlns:a16="http://schemas.microsoft.com/office/drawing/2014/main" id="{B3DF3B59-D3B0-4E5E-8289-B7E6C20247AD}"/>
+                <a16:creationId xmlns:a16="http://schemas.microsoft.com/office/drawing/2014/main" id="{016B9B0F-A883-4CED-939A-E0873DCA1286}"/>
               </a:ext>
             </a:extLst>
           </p:cNvPr>
@@ -44012,7 +44024,7 @@
           <p:cNvPr id="6" name="Shape 4">
             <a:extLst xmlns:a="http://schemas.openxmlformats.org/drawingml/2006/main">
               <a:ext uri="{FF2B5EF4-FFF2-40B4-BE49-F238E27FC236}">
-                <a16:creationId xmlns:a16="http://schemas.microsoft.com/office/drawing/2014/main" id="{0573A8E5-308C-4476-BDC3-63E19D54ED2F}"/>
+                <a16:creationId xmlns:a16="http://schemas.microsoft.com/office/drawing/2014/main" id="{D6DA1880-4E5E-4649-9B88-35BDEA06470E}"/>
               </a:ext>
             </a:extLst>
           </p:cNvPr>
@@ -44059,7 +44071,7 @@
           <p:cNvPr id="7" name="Shape 5">
             <a:extLst xmlns:a="http://schemas.openxmlformats.org/drawingml/2006/main">
               <a:ext uri="{FF2B5EF4-FFF2-40B4-BE49-F238E27FC236}">
-                <a16:creationId xmlns:a16="http://schemas.microsoft.com/office/drawing/2014/main" id="{4D1FEFF1-D5CB-4E2C-A808-2B936761A2E0}"/>
+                <a16:creationId xmlns:a16="http://schemas.microsoft.com/office/drawing/2014/main" id="{B93C2A30-8046-4D07-970B-029E61E7F9DE}"/>
               </a:ext>
             </a:extLst>
           </p:cNvPr>
@@ -44097,7 +44109,7 @@
           <p:cNvPr id="8" name="Text 6">
             <a:extLst xmlns:a="http://schemas.openxmlformats.org/drawingml/2006/main">
               <a:ext uri="{FF2B5EF4-FFF2-40B4-BE49-F238E27FC236}">
-                <a16:creationId xmlns:a16="http://schemas.microsoft.com/office/drawing/2014/main" id="{80AE4CF0-7DC1-4048-9CBA-64F2938D5E32}"/>
+                <a16:creationId xmlns:a16="http://schemas.microsoft.com/office/drawing/2014/main" id="{88818098-62A3-4F30-9AFE-36983C9AD519}"/>
               </a:ext>
             </a:extLst>
           </p:cNvPr>
@@ -44142,7 +44154,7 @@
           <p:cNvPr id="9" name="Text 7">
             <a:extLst xmlns:a="http://schemas.openxmlformats.org/drawingml/2006/main">
               <a:ext uri="{FF2B5EF4-FFF2-40B4-BE49-F238E27FC236}">
-                <a16:creationId xmlns:a16="http://schemas.microsoft.com/office/drawing/2014/main" id="{E0052972-54D0-43A3-8F65-818DC41ED318}"/>
+                <a16:creationId xmlns:a16="http://schemas.microsoft.com/office/drawing/2014/main" id="{522113C2-83FC-44F4-8707-A5B33F3302A4}"/>
               </a:ext>
             </a:extLst>
           </p:cNvPr>
@@ -44187,7 +44199,7 @@
           <p:cNvPr id="10" name="Text 8">
             <a:extLst xmlns:a="http://schemas.openxmlformats.org/drawingml/2006/main">
               <a:ext uri="{FF2B5EF4-FFF2-40B4-BE49-F238E27FC236}">
-                <a16:creationId xmlns:a16="http://schemas.microsoft.com/office/drawing/2014/main" id="{79F375CF-76B1-4663-A97F-CE5B4D3F2303}"/>
+                <a16:creationId xmlns:a16="http://schemas.microsoft.com/office/drawing/2014/main" id="{7BB590D1-9098-4958-A092-608BEAB5BD6E}"/>
               </a:ext>
             </a:extLst>
           </p:cNvPr>
@@ -44232,7 +44244,7 @@
           <p:cNvPr id="11" name="Shape 9">
             <a:extLst xmlns:a="http://schemas.openxmlformats.org/drawingml/2006/main">
               <a:ext uri="{FF2B5EF4-FFF2-40B4-BE49-F238E27FC236}">
-                <a16:creationId xmlns:a16="http://schemas.microsoft.com/office/drawing/2014/main" id="{D6F5C86D-EAB3-4F08-B859-F84F77C9FD76}"/>
+                <a16:creationId xmlns:a16="http://schemas.microsoft.com/office/drawing/2014/main" id="{AACE80C4-F79E-4214-820A-F33BCCE19F31}"/>
               </a:ext>
             </a:extLst>
           </p:cNvPr>
@@ -44279,7 +44291,7 @@
           <p:cNvPr id="12" name="Shape 10">
             <a:extLst xmlns:a="http://schemas.openxmlformats.org/drawingml/2006/main">
               <a:ext uri="{FF2B5EF4-FFF2-40B4-BE49-F238E27FC236}">
-                <a16:creationId xmlns:a16="http://schemas.microsoft.com/office/drawing/2014/main" id="{FCB14B56-B2A1-44AF-9117-4F9B4156FB47}"/>
+                <a16:creationId xmlns:a16="http://schemas.microsoft.com/office/drawing/2014/main" id="{41A6B3E5-FAB0-4572-BDF4-074688A3B4F9}"/>
               </a:ext>
             </a:extLst>
           </p:cNvPr>
@@ -44317,7 +44329,7 @@
           <p:cNvPr id="13" name="Text 11">
             <a:extLst xmlns:a="http://schemas.openxmlformats.org/drawingml/2006/main">
               <a:ext uri="{FF2B5EF4-FFF2-40B4-BE49-F238E27FC236}">
-                <a16:creationId xmlns:a16="http://schemas.microsoft.com/office/drawing/2014/main" id="{C3612DE7-ABFF-4FAF-800B-B7D658F591E6}"/>
+                <a16:creationId xmlns:a16="http://schemas.microsoft.com/office/drawing/2014/main" id="{4ADF58A3-2620-4101-8C2B-72554BBACD52}"/>
               </a:ext>
             </a:extLst>
           </p:cNvPr>
@@ -44362,7 +44374,7 @@
           <p:cNvPr id="14" name="Text 12">
             <a:extLst xmlns:a="http://schemas.openxmlformats.org/drawingml/2006/main">
               <a:ext uri="{FF2B5EF4-FFF2-40B4-BE49-F238E27FC236}">
-                <a16:creationId xmlns:a16="http://schemas.microsoft.com/office/drawing/2014/main" id="{644DA5D9-8915-4D39-85A8-0177D5517A89}"/>
+                <a16:creationId xmlns:a16="http://schemas.microsoft.com/office/drawing/2014/main" id="{FFF516E3-A039-4C07-B0EC-995435CC03AE}"/>
               </a:ext>
             </a:extLst>
           </p:cNvPr>
@@ -44407,7 +44419,7 @@
           <p:cNvPr id="15" name="Text 13">
             <a:extLst xmlns:a="http://schemas.openxmlformats.org/drawingml/2006/main">
               <a:ext uri="{FF2B5EF4-FFF2-40B4-BE49-F238E27FC236}">
-                <a16:creationId xmlns:a16="http://schemas.microsoft.com/office/drawing/2014/main" id="{48A1496E-46F1-4EA2-B70B-A35519CD8B7B}"/>
+                <a16:creationId xmlns:a16="http://schemas.microsoft.com/office/drawing/2014/main" id="{18BAD397-C25A-4431-8567-44548902D84D}"/>
               </a:ext>
             </a:extLst>
           </p:cNvPr>
@@ -44452,7 +44464,7 @@
           <p:cNvPr id="16" name="Shape 14">
             <a:extLst xmlns:a="http://schemas.openxmlformats.org/drawingml/2006/main">
               <a:ext uri="{FF2B5EF4-FFF2-40B4-BE49-F238E27FC236}">
-                <a16:creationId xmlns:a16="http://schemas.microsoft.com/office/drawing/2014/main" id="{2ACFBC75-7EF1-4225-97A2-89D9078596D7}"/>
+                <a16:creationId xmlns:a16="http://schemas.microsoft.com/office/drawing/2014/main" id="{5121AD30-4498-4517-8F8C-02ADE8E96A0D}"/>
               </a:ext>
             </a:extLst>
           </p:cNvPr>
@@ -44499,7 +44511,7 @@
           <p:cNvPr id="17" name="Shape 15">
             <a:extLst xmlns:a="http://schemas.openxmlformats.org/drawingml/2006/main">
               <a:ext uri="{FF2B5EF4-FFF2-40B4-BE49-F238E27FC236}">
-                <a16:creationId xmlns:a16="http://schemas.microsoft.com/office/drawing/2014/main" id="{E8AB404F-EB14-4C71-A4F7-DB843446B8A2}"/>
+                <a16:creationId xmlns:a16="http://schemas.microsoft.com/office/drawing/2014/main" id="{2C69DD0F-EC45-46A6-B60E-59EBF34F60DA}"/>
               </a:ext>
             </a:extLst>
           </p:cNvPr>
@@ -44537,7 +44549,7 @@
           <p:cNvPr id="18" name="Text 16">
             <a:extLst xmlns:a="http://schemas.openxmlformats.org/drawingml/2006/main">
               <a:ext uri="{FF2B5EF4-FFF2-40B4-BE49-F238E27FC236}">
-                <a16:creationId xmlns:a16="http://schemas.microsoft.com/office/drawing/2014/main" id="{D2C277C9-E5A6-43D0-ADD6-C32E0B5AA848}"/>
+                <a16:creationId xmlns:a16="http://schemas.microsoft.com/office/drawing/2014/main" id="{B656E81C-7290-42D9-872B-DFC1C9FE99C7}"/>
               </a:ext>
             </a:extLst>
           </p:cNvPr>
@@ -44582,7 +44594,7 @@
           <p:cNvPr id="19" name="Text 17">
             <a:extLst xmlns:a="http://schemas.openxmlformats.org/drawingml/2006/main">
               <a:ext uri="{FF2B5EF4-FFF2-40B4-BE49-F238E27FC236}">
-                <a16:creationId xmlns:a16="http://schemas.microsoft.com/office/drawing/2014/main" id="{8FA64344-32FB-4AC8-B6DE-5786AC0F8C07}"/>
+                <a16:creationId xmlns:a16="http://schemas.microsoft.com/office/drawing/2014/main" id="{ADFF25B0-136B-4D6E-820F-1B4CF91C4A4C}"/>
               </a:ext>
             </a:extLst>
           </p:cNvPr>
@@ -44627,7 +44639,7 @@
           <p:cNvPr id="20" name="Text 18">
             <a:extLst xmlns:a="http://schemas.openxmlformats.org/drawingml/2006/main">
               <a:ext uri="{FF2B5EF4-FFF2-40B4-BE49-F238E27FC236}">
-                <a16:creationId xmlns:a16="http://schemas.microsoft.com/office/drawing/2014/main" id="{8DB8FA14-D56F-44F0-BCE0-37895486C421}"/>
+                <a16:creationId xmlns:a16="http://schemas.microsoft.com/office/drawing/2014/main" id="{BA895F14-6540-4666-ADC3-F076648C60D5}"/>
               </a:ext>
             </a:extLst>
           </p:cNvPr>
@@ -44672,7 +44684,7 @@
           <p:cNvPr id="21" name="Text 19">
             <a:extLst xmlns:a="http://schemas.openxmlformats.org/drawingml/2006/main">
               <a:ext uri="{FF2B5EF4-FFF2-40B4-BE49-F238E27FC236}">
-                <a16:creationId xmlns:a16="http://schemas.microsoft.com/office/drawing/2014/main" id="{36E5964F-5DA0-4137-9D65-935964040BB5}"/>
+                <a16:creationId xmlns:a16="http://schemas.microsoft.com/office/drawing/2014/main" id="{144CB40B-3092-436E-BCDD-4A443FCEBFCB}"/>
               </a:ext>
             </a:extLst>
           </p:cNvPr>
@@ -44717,7 +44729,7 @@
           <p:cNvPr id="22" name="Shape 20">
             <a:extLst xmlns:a="http://schemas.openxmlformats.org/drawingml/2006/main">
               <a:ext uri="{FF2B5EF4-FFF2-40B4-BE49-F238E27FC236}">
-                <a16:creationId xmlns:a16="http://schemas.microsoft.com/office/drawing/2014/main" id="{7269230A-1F8D-4190-B080-BC3491CE9B62}"/>
+                <a16:creationId xmlns:a16="http://schemas.microsoft.com/office/drawing/2014/main" id="{9E067F2C-8202-4476-BAA0-5925BC4F1109}"/>
               </a:ext>
             </a:extLst>
           </p:cNvPr>
@@ -44764,7 +44776,7 @@
           <p:cNvPr id="23" name="Shape 21">
             <a:extLst xmlns:a="http://schemas.openxmlformats.org/drawingml/2006/main">
               <a:ext uri="{FF2B5EF4-FFF2-40B4-BE49-F238E27FC236}">
-                <a16:creationId xmlns:a16="http://schemas.microsoft.com/office/drawing/2014/main" id="{70C578AA-F967-480C-BDC8-4E41A33C2E1A}"/>
+                <a16:creationId xmlns:a16="http://schemas.microsoft.com/office/drawing/2014/main" id="{531AD106-4AC9-49DE-B320-16466715CD44}"/>
               </a:ext>
             </a:extLst>
           </p:cNvPr>
@@ -44802,7 +44814,7 @@
           <p:cNvPr id="24" name="Text 22">
             <a:extLst xmlns:a="http://schemas.openxmlformats.org/drawingml/2006/main">
               <a:ext uri="{FF2B5EF4-FFF2-40B4-BE49-F238E27FC236}">
-                <a16:creationId xmlns:a16="http://schemas.microsoft.com/office/drawing/2014/main" id="{6AFC8AAE-7E21-456C-A5DE-49D4073F3169}"/>
+                <a16:creationId xmlns:a16="http://schemas.microsoft.com/office/drawing/2014/main" id="{BC228CD8-7C98-47A9-9B8A-5A89CC6A6079}"/>
               </a:ext>
             </a:extLst>
           </p:cNvPr>
@@ -44847,7 +44859,7 @@
           <p:cNvPr id="25" name="Text 23">
             <a:extLst xmlns:a="http://schemas.openxmlformats.org/drawingml/2006/main">
               <a:ext uri="{FF2B5EF4-FFF2-40B4-BE49-F238E27FC236}">
-                <a16:creationId xmlns:a16="http://schemas.microsoft.com/office/drawing/2014/main" id="{546233CB-D18A-4630-9285-6D89AE385253}"/>
+                <a16:creationId xmlns:a16="http://schemas.microsoft.com/office/drawing/2014/main" id="{953755C5-6B82-4469-A73B-718AA53FB4E4}"/>
               </a:ext>
             </a:extLst>
           </p:cNvPr>
@@ -44892,7 +44904,7 @@
           <p:cNvPr id="26" name="Text 24">
             <a:extLst xmlns:a="http://schemas.openxmlformats.org/drawingml/2006/main">
               <a:ext uri="{FF2B5EF4-FFF2-40B4-BE49-F238E27FC236}">
-                <a16:creationId xmlns:a16="http://schemas.microsoft.com/office/drawing/2014/main" id="{A1573BDA-9AA6-49A8-9A9C-850FF8EE369E}"/>
+                <a16:creationId xmlns:a16="http://schemas.microsoft.com/office/drawing/2014/main" id="{EAC6F950-8C80-4B87-B371-6B386647E0D1}"/>
               </a:ext>
             </a:extLst>
           </p:cNvPr>
@@ -44940,7 +44952,7 @@
           <p:cNvPr id="27" name="Shape 25">
             <a:extLst xmlns:a="http://schemas.openxmlformats.org/drawingml/2006/main">
               <a:ext uri="{FF2B5EF4-FFF2-40B4-BE49-F238E27FC236}">
-                <a16:creationId xmlns:a16="http://schemas.microsoft.com/office/drawing/2014/main" id="{991264B6-00E7-4FE6-88C6-87F7481F1A80}"/>
+                <a16:creationId xmlns:a16="http://schemas.microsoft.com/office/drawing/2014/main" id="{179E5683-6DD8-44C4-9AB8-BD1D002E51BF}"/>
               </a:ext>
             </a:extLst>
           </p:cNvPr>
@@ -44978,7 +44990,7 @@
           <p:cNvPr id="28" name="Shape 26">
             <a:extLst xmlns:a="http://schemas.openxmlformats.org/drawingml/2006/main">
               <a:ext uri="{FF2B5EF4-FFF2-40B4-BE49-F238E27FC236}">
-                <a16:creationId xmlns:a16="http://schemas.microsoft.com/office/drawing/2014/main" id="{B0AFE761-4F4E-4687-87BF-A25F96DE1473}"/>
+                <a16:creationId xmlns:a16="http://schemas.microsoft.com/office/drawing/2014/main" id="{9ABE39CC-07E3-4A87-B181-B9507117B7A4}"/>
               </a:ext>
             </a:extLst>
           </p:cNvPr>
@@ -45025,7 +45037,7 @@
           <p:cNvPr id="29" name="Shape 27">
             <a:extLst xmlns:a="http://schemas.openxmlformats.org/drawingml/2006/main">
               <a:ext uri="{FF2B5EF4-FFF2-40B4-BE49-F238E27FC236}">
-                <a16:creationId xmlns:a16="http://schemas.microsoft.com/office/drawing/2014/main" id="{8FCD1408-B21B-48DA-9591-FC88183CA112}"/>
+                <a16:creationId xmlns:a16="http://schemas.microsoft.com/office/drawing/2014/main" id="{1ED27118-37E8-4DA7-8864-9FF61370198E}"/>
               </a:ext>
             </a:extLst>
           </p:cNvPr>
@@ -45063,7 +45075,7 @@
           <p:cNvPr id="30" name="Text 28">
             <a:extLst xmlns:a="http://schemas.openxmlformats.org/drawingml/2006/main">
               <a:ext uri="{FF2B5EF4-FFF2-40B4-BE49-F238E27FC236}">
-                <a16:creationId xmlns:a16="http://schemas.microsoft.com/office/drawing/2014/main" id="{A4D2ED15-C2DD-4477-BBB0-C9BE087460AA}"/>
+                <a16:creationId xmlns:a16="http://schemas.microsoft.com/office/drawing/2014/main" id="{B621A7EC-A4DA-4F4D-9157-3E290A14A752}"/>
               </a:ext>
             </a:extLst>
           </p:cNvPr>
@@ -45108,7 +45120,7 @@
           <p:cNvPr id="31" name="Text 29">
             <a:extLst xmlns:a="http://schemas.openxmlformats.org/drawingml/2006/main">
               <a:ext uri="{FF2B5EF4-FFF2-40B4-BE49-F238E27FC236}">
-                <a16:creationId xmlns:a16="http://schemas.microsoft.com/office/drawing/2014/main" id="{88F2C140-E928-4FBD-AE6F-C14E89E4B0F6}"/>
+                <a16:creationId xmlns:a16="http://schemas.microsoft.com/office/drawing/2014/main" id="{6A6CF94C-508C-48D0-8DEE-9C1804DFE131}"/>
               </a:ext>
             </a:extLst>
           </p:cNvPr>
@@ -45153,7 +45165,7 @@
           <p:cNvPr id="32" name="Text 30">
             <a:extLst xmlns:a="http://schemas.openxmlformats.org/drawingml/2006/main">
               <a:ext uri="{FF2B5EF4-FFF2-40B4-BE49-F238E27FC236}">
-                <a16:creationId xmlns:a16="http://schemas.microsoft.com/office/drawing/2014/main" id="{264E1520-6AFD-484A-A3CC-32D44E0DAB0E}"/>
+                <a16:creationId xmlns:a16="http://schemas.microsoft.com/office/drawing/2014/main" id="{8072302E-E5D5-4F32-B202-D29C719564EB}"/>
               </a:ext>
             </a:extLst>
           </p:cNvPr>
@@ -45201,7 +45213,7 @@
           <p:cNvPr id="33" name="Shape 31">
             <a:extLst xmlns:a="http://schemas.openxmlformats.org/drawingml/2006/main">
               <a:ext uri="{FF2B5EF4-FFF2-40B4-BE49-F238E27FC236}">
-                <a16:creationId xmlns:a16="http://schemas.microsoft.com/office/drawing/2014/main" id="{F7DB3F87-32C4-4F7F-93F7-B26B3F9713CF}"/>
+                <a16:creationId xmlns:a16="http://schemas.microsoft.com/office/drawing/2014/main" id="{66BA0E56-E9DD-4572-9B03-2A53BE494E59}"/>
               </a:ext>
             </a:extLst>
           </p:cNvPr>
@@ -45239,7 +45251,7 @@
           <p:cNvPr id="34" name="Shape 32">
             <a:extLst xmlns:a="http://schemas.openxmlformats.org/drawingml/2006/main">
               <a:ext uri="{FF2B5EF4-FFF2-40B4-BE49-F238E27FC236}">
-                <a16:creationId xmlns:a16="http://schemas.microsoft.com/office/drawing/2014/main" id="{AACBE59C-B549-4209-BB7D-F69872E8949B}"/>
+                <a16:creationId xmlns:a16="http://schemas.microsoft.com/office/drawing/2014/main" id="{6B4E4771-8E8F-42F1-AD7A-B7AEFB8BB299}"/>
               </a:ext>
             </a:extLst>
           </p:cNvPr>
@@ -45286,7 +45298,7 @@
           <p:cNvPr id="35" name="Shape 33">
             <a:extLst xmlns:a="http://schemas.openxmlformats.org/drawingml/2006/main">
               <a:ext uri="{FF2B5EF4-FFF2-40B4-BE49-F238E27FC236}">
-                <a16:creationId xmlns:a16="http://schemas.microsoft.com/office/drawing/2014/main" id="{52399C25-D554-448D-8066-F80F2101088E}"/>
+                <a16:creationId xmlns:a16="http://schemas.microsoft.com/office/drawing/2014/main" id="{2ECB9464-31EC-4AD0-9DC5-3E076EFDD72A}"/>
               </a:ext>
             </a:extLst>
           </p:cNvPr>
@@ -45324,7 +45336,7 @@
           <p:cNvPr id="36" name="Text 34">
             <a:extLst xmlns:a="http://schemas.openxmlformats.org/drawingml/2006/main">
               <a:ext uri="{FF2B5EF4-FFF2-40B4-BE49-F238E27FC236}">
-                <a16:creationId xmlns:a16="http://schemas.microsoft.com/office/drawing/2014/main" id="{7C3CDB47-DE0E-4A1A-B854-19E2A3B1BA49}"/>
+                <a16:creationId xmlns:a16="http://schemas.microsoft.com/office/drawing/2014/main" id="{240EBCBE-8E46-4F77-81D0-8E522BDC2AE3}"/>
               </a:ext>
             </a:extLst>
           </p:cNvPr>
@@ -45369,7 +45381,7 @@
           <p:cNvPr id="37" name="Text 35">
             <a:extLst xmlns:a="http://schemas.openxmlformats.org/drawingml/2006/main">
               <a:ext uri="{FF2B5EF4-FFF2-40B4-BE49-F238E27FC236}">
-                <a16:creationId xmlns:a16="http://schemas.microsoft.com/office/drawing/2014/main" id="{AB5A3716-5C3A-4BCD-9947-A97151FED412}"/>
+                <a16:creationId xmlns:a16="http://schemas.microsoft.com/office/drawing/2014/main" id="{CD15BEC7-5837-4603-B00C-C302EDDE14DA}"/>
               </a:ext>
             </a:extLst>
           </p:cNvPr>
@@ -45414,7 +45426,7 @@
           <p:cNvPr id="38" name="Text 36">
             <a:extLst xmlns:a="http://schemas.openxmlformats.org/drawingml/2006/main">
               <a:ext uri="{FF2B5EF4-FFF2-40B4-BE49-F238E27FC236}">
-                <a16:creationId xmlns:a16="http://schemas.microsoft.com/office/drawing/2014/main" id="{3ADC9E7D-869F-4D19-B307-0C30F0650399}"/>
+                <a16:creationId xmlns:a16="http://schemas.microsoft.com/office/drawing/2014/main" id="{259C7177-3B07-41B5-82CC-0D73D5EDA14A}"/>
               </a:ext>
             </a:extLst>
           </p:cNvPr>
@@ -45462,7 +45474,7 @@
           <p:cNvPr id="39" name="Shape 37">
             <a:extLst xmlns:a="http://schemas.openxmlformats.org/drawingml/2006/main">
               <a:ext uri="{FF2B5EF4-FFF2-40B4-BE49-F238E27FC236}">
-                <a16:creationId xmlns:a16="http://schemas.microsoft.com/office/drawing/2014/main" id="{9BCB37E3-55B2-4685-A1D2-87440E58B8AC}"/>
+                <a16:creationId xmlns:a16="http://schemas.microsoft.com/office/drawing/2014/main" id="{DE766FB8-A49F-4CBF-8DCA-1C7550920768}"/>
               </a:ext>
             </a:extLst>
           </p:cNvPr>
@@ -45500,7 +45512,7 @@
           <p:cNvPr id="40" name="Shape 38">
             <a:extLst xmlns:a="http://schemas.openxmlformats.org/drawingml/2006/main">
               <a:ext uri="{FF2B5EF4-FFF2-40B4-BE49-F238E27FC236}">
-                <a16:creationId xmlns:a16="http://schemas.microsoft.com/office/drawing/2014/main" id="{202B1041-AFC2-497D-A54B-E683A721170B}"/>
+                <a16:creationId xmlns:a16="http://schemas.microsoft.com/office/drawing/2014/main" id="{1990AF8C-8249-483F-BBD6-403BCC692235}"/>
               </a:ext>
             </a:extLst>
           </p:cNvPr>
@@ -45547,7 +45559,7 @@
           <p:cNvPr id="41" name="Shape 39">
             <a:extLst xmlns:a="http://schemas.openxmlformats.org/drawingml/2006/main">
               <a:ext uri="{FF2B5EF4-FFF2-40B4-BE49-F238E27FC236}">
-                <a16:creationId xmlns:a16="http://schemas.microsoft.com/office/drawing/2014/main" id="{223C9D0A-5318-4E88-8D9E-3FE1E4493990}"/>
+                <a16:creationId xmlns:a16="http://schemas.microsoft.com/office/drawing/2014/main" id="{9BB377D9-0FD1-482C-9D28-4E401F69B857}"/>
               </a:ext>
             </a:extLst>
           </p:cNvPr>
@@ -45585,7 +45597,7 @@
           <p:cNvPr id="42" name="Text 40">
             <a:extLst xmlns:a="http://schemas.openxmlformats.org/drawingml/2006/main">
               <a:ext uri="{FF2B5EF4-FFF2-40B4-BE49-F238E27FC236}">
-                <a16:creationId xmlns:a16="http://schemas.microsoft.com/office/drawing/2014/main" id="{320B23E3-DD00-4626-9975-BB10E975A5D9}"/>
+                <a16:creationId xmlns:a16="http://schemas.microsoft.com/office/drawing/2014/main" id="{F83309B0-3354-4B36-8CF9-89586960C0E2}"/>
               </a:ext>
             </a:extLst>
           </p:cNvPr>
@@ -45630,7 +45642,7 @@
           <p:cNvPr id="43" name="Text 41">
             <a:extLst xmlns:a="http://schemas.openxmlformats.org/drawingml/2006/main">
               <a:ext uri="{FF2B5EF4-FFF2-40B4-BE49-F238E27FC236}">
-                <a16:creationId xmlns:a16="http://schemas.microsoft.com/office/drawing/2014/main" id="{D9C37C5B-C012-4C66-A11C-AB1198935D6F}"/>
+                <a16:creationId xmlns:a16="http://schemas.microsoft.com/office/drawing/2014/main" id="{86D51E9F-BBEC-408A-8BB6-6E3957EAC706}"/>
               </a:ext>
             </a:extLst>
           </p:cNvPr>
@@ -45675,7 +45687,7 @@
           <p:cNvPr id="44" name="Text 42">
             <a:extLst xmlns:a="http://schemas.openxmlformats.org/drawingml/2006/main">
               <a:ext uri="{FF2B5EF4-FFF2-40B4-BE49-F238E27FC236}">
-                <a16:creationId xmlns:a16="http://schemas.microsoft.com/office/drawing/2014/main" id="{9263A6E8-7C9B-4CD6-9744-D11120A64AE1}"/>
+                <a16:creationId xmlns:a16="http://schemas.microsoft.com/office/drawing/2014/main" id="{274DC2BB-55B3-47BD-8D87-7AC01D9B9536}"/>
               </a:ext>
             </a:extLst>
           </p:cNvPr>
@@ -45723,7 +45735,7 @@
           <p:cNvPr id="45" name="Shape 43">
             <a:extLst xmlns:a="http://schemas.openxmlformats.org/drawingml/2006/main">
               <a:ext uri="{FF2B5EF4-FFF2-40B4-BE49-F238E27FC236}">
-                <a16:creationId xmlns:a16="http://schemas.microsoft.com/office/drawing/2014/main" id="{AFD25D08-ABEE-4830-BCE4-664FD9FCAA99}"/>
+                <a16:creationId xmlns:a16="http://schemas.microsoft.com/office/drawing/2014/main" id="{48F19D82-D74F-4C49-A853-924FCD6A3B5C}"/>
               </a:ext>
             </a:extLst>
           </p:cNvPr>
@@ -45761,7 +45773,7 @@
           <p:cNvPr id="46" name="Shape 44">
             <a:extLst xmlns:a="http://schemas.openxmlformats.org/drawingml/2006/main">
               <a:ext uri="{FF2B5EF4-FFF2-40B4-BE49-F238E27FC236}">
-                <a16:creationId xmlns:a16="http://schemas.microsoft.com/office/drawing/2014/main" id="{A88BCA04-F830-4DF7-9ADC-6DFEF89EB1D0}"/>
+                <a16:creationId xmlns:a16="http://schemas.microsoft.com/office/drawing/2014/main" id="{C20FAD21-A248-4F99-A5E9-F48132A3C180}"/>
               </a:ext>
             </a:extLst>
           </p:cNvPr>
@@ -45808,7 +45820,7 @@
           <p:cNvPr id="47" name="Shape 45">
             <a:extLst xmlns:a="http://schemas.openxmlformats.org/drawingml/2006/main">
               <a:ext uri="{FF2B5EF4-FFF2-40B4-BE49-F238E27FC236}">
-                <a16:creationId xmlns:a16="http://schemas.microsoft.com/office/drawing/2014/main" id="{9DBC3832-4941-427B-AFFC-AA1C608220FF}"/>
+                <a16:creationId xmlns:a16="http://schemas.microsoft.com/office/drawing/2014/main" id="{7C10AD1C-43CB-4ED5-9007-12F5C2556CB5}"/>
               </a:ext>
             </a:extLst>
           </p:cNvPr>
@@ -45846,7 +45858,7 @@
           <p:cNvPr id="48" name="Text 46">
             <a:extLst xmlns:a="http://schemas.openxmlformats.org/drawingml/2006/main">
               <a:ext uri="{FF2B5EF4-FFF2-40B4-BE49-F238E27FC236}">
-                <a16:creationId xmlns:a16="http://schemas.microsoft.com/office/drawing/2014/main" id="{A8184FE9-F090-4F1E-AAAE-29D54DC1C87B}"/>
+                <a16:creationId xmlns:a16="http://schemas.microsoft.com/office/drawing/2014/main" id="{5BC8A1C1-7DFD-43E5-8180-68A1B18D3E27}"/>
               </a:ext>
             </a:extLst>
           </p:cNvPr>
@@ -45891,7 +45903,7 @@
           <p:cNvPr id="49" name="Text 47">
             <a:extLst xmlns:a="http://schemas.openxmlformats.org/drawingml/2006/main">
               <a:ext uri="{FF2B5EF4-FFF2-40B4-BE49-F238E27FC236}">
-                <a16:creationId xmlns:a16="http://schemas.microsoft.com/office/drawing/2014/main" id="{14AC077B-6F35-4770-B596-A572A715D4AA}"/>
+                <a16:creationId xmlns:a16="http://schemas.microsoft.com/office/drawing/2014/main" id="{D72607E3-4C95-49A5-BFEC-68CFEC7211EC}"/>
               </a:ext>
             </a:extLst>
           </p:cNvPr>
@@ -45936,7 +45948,7 @@
           <p:cNvPr id="50" name="Text 48">
             <a:extLst xmlns:a="http://schemas.openxmlformats.org/drawingml/2006/main">
               <a:ext uri="{FF2B5EF4-FFF2-40B4-BE49-F238E27FC236}">
-                <a16:creationId xmlns:a16="http://schemas.microsoft.com/office/drawing/2014/main" id="{497587C9-6255-45F5-8181-66A1CA711AAC}"/>
+                <a16:creationId xmlns:a16="http://schemas.microsoft.com/office/drawing/2014/main" id="{3A08B39B-D359-4296-B9C6-871E19BC9696}"/>
               </a:ext>
             </a:extLst>
           </p:cNvPr>
@@ -45984,7 +45996,7 @@
           <p:cNvPr id="51" name="Shape 49">
             <a:extLst xmlns:a="http://schemas.openxmlformats.org/drawingml/2006/main">
               <a:ext uri="{FF2B5EF4-FFF2-40B4-BE49-F238E27FC236}">
-                <a16:creationId xmlns:a16="http://schemas.microsoft.com/office/drawing/2014/main" id="{E162723A-8BE9-49ED-834B-22B4749B3178}"/>
+                <a16:creationId xmlns:a16="http://schemas.microsoft.com/office/drawing/2014/main" id="{376E0BDA-8B3C-48A5-AE6F-FBAB97CD02F4}"/>
               </a:ext>
             </a:extLst>
           </p:cNvPr>
@@ -46022,7 +46034,7 @@
           <p:cNvPr id="52" name="Shape 50">
             <a:extLst xmlns:a="http://schemas.openxmlformats.org/drawingml/2006/main">
               <a:ext uri="{FF2B5EF4-FFF2-40B4-BE49-F238E27FC236}">
-                <a16:creationId xmlns:a16="http://schemas.microsoft.com/office/drawing/2014/main" id="{C567ED31-36BE-4EFD-B128-82110850ABFA}"/>
+                <a16:creationId xmlns:a16="http://schemas.microsoft.com/office/drawing/2014/main" id="{8D997F3C-117D-4331-949F-DAE1FB5A73F4}"/>
               </a:ext>
             </a:extLst>
           </p:cNvPr>
@@ -46069,7 +46081,7 @@
           <p:cNvPr id="53" name="Shape 51">
             <a:extLst xmlns:a="http://schemas.openxmlformats.org/drawingml/2006/main">
               <a:ext uri="{FF2B5EF4-FFF2-40B4-BE49-F238E27FC236}">
-                <a16:creationId xmlns:a16="http://schemas.microsoft.com/office/drawing/2014/main" id="{C8986211-7EFD-45EA-BE45-F822CACA7F4A}"/>
+                <a16:creationId xmlns:a16="http://schemas.microsoft.com/office/drawing/2014/main" id="{88C53FFB-E0F0-4815-9EA8-E39B47536124}"/>
               </a:ext>
             </a:extLst>
           </p:cNvPr>
@@ -46107,7 +46119,7 @@
           <p:cNvPr id="54" name="Text 52">
             <a:extLst xmlns:a="http://schemas.openxmlformats.org/drawingml/2006/main">
               <a:ext uri="{FF2B5EF4-FFF2-40B4-BE49-F238E27FC236}">
-                <a16:creationId xmlns:a16="http://schemas.microsoft.com/office/drawing/2014/main" id="{47ABA284-3085-45E0-AC9E-79B117411379}"/>
+                <a16:creationId xmlns:a16="http://schemas.microsoft.com/office/drawing/2014/main" id="{D45C36AA-BFAE-41B2-8EAA-91413C508732}"/>
               </a:ext>
             </a:extLst>
           </p:cNvPr>
@@ -46152,7 +46164,7 @@
           <p:cNvPr id="55" name="Text 53">
             <a:extLst xmlns:a="http://schemas.openxmlformats.org/drawingml/2006/main">
               <a:ext uri="{FF2B5EF4-FFF2-40B4-BE49-F238E27FC236}">
-                <a16:creationId xmlns:a16="http://schemas.microsoft.com/office/drawing/2014/main" id="{74747502-21CA-4D96-9CD0-07A3FF3A08BC}"/>
+                <a16:creationId xmlns:a16="http://schemas.microsoft.com/office/drawing/2014/main" id="{87D8D92E-D1DF-4FAA-8750-7298D306F4B6}"/>
               </a:ext>
             </a:extLst>
           </p:cNvPr>
@@ -46197,7 +46209,7 @@
           <p:cNvPr id="56" name="Text 54">
             <a:extLst xmlns:a="http://schemas.openxmlformats.org/drawingml/2006/main">
               <a:ext uri="{FF2B5EF4-FFF2-40B4-BE49-F238E27FC236}">
-                <a16:creationId xmlns:a16="http://schemas.microsoft.com/office/drawing/2014/main" id="{F2DA6964-81E3-4BE4-A720-2A86E058F791}"/>
+                <a16:creationId xmlns:a16="http://schemas.microsoft.com/office/drawing/2014/main" id="{A13BCD53-C641-45DD-BC24-DD6F2CF2449B}"/>
               </a:ext>
             </a:extLst>
           </p:cNvPr>
@@ -46245,7 +46257,7 @@
           <p:cNvPr id="57" name="Shape 55">
             <a:extLst xmlns:a="http://schemas.openxmlformats.org/drawingml/2006/main">
               <a:ext uri="{FF2B5EF4-FFF2-40B4-BE49-F238E27FC236}">
-                <a16:creationId xmlns:a16="http://schemas.microsoft.com/office/drawing/2014/main" id="{9FB0711B-1EA8-4C76-90AD-FB02BC29444D}"/>
+                <a16:creationId xmlns:a16="http://schemas.microsoft.com/office/drawing/2014/main" id="{43745BC8-CA1C-433E-941D-586D0828E04F}"/>
               </a:ext>
             </a:extLst>
           </p:cNvPr>
@@ -46292,7 +46304,7 @@
           <p:cNvPr id="58" name="Text 56">
             <a:extLst xmlns:a="http://schemas.openxmlformats.org/drawingml/2006/main">
               <a:ext uri="{FF2B5EF4-FFF2-40B4-BE49-F238E27FC236}">
-                <a16:creationId xmlns:a16="http://schemas.microsoft.com/office/drawing/2014/main" id="{276F1048-793E-4762-8A83-4F6D2A9601E1}"/>
+                <a16:creationId xmlns:a16="http://schemas.microsoft.com/office/drawing/2014/main" id="{3AB89940-AD1E-4271-BC19-19D1CF4B7F78}"/>
               </a:ext>
             </a:extLst>
           </p:cNvPr>
@@ -46337,7 +46349,7 @@
           <p:cNvPr id="59" name="Text 57">
             <a:extLst xmlns:a="http://schemas.openxmlformats.org/drawingml/2006/main">
               <a:ext uri="{FF2B5EF4-FFF2-40B4-BE49-F238E27FC236}">
-                <a16:creationId xmlns:a16="http://schemas.microsoft.com/office/drawing/2014/main" id="{D433C37F-D28C-45CC-A47D-8E16D72DF261}"/>
+                <a16:creationId xmlns:a16="http://schemas.microsoft.com/office/drawing/2014/main" id="{53B72380-CEF2-4B7A-883C-2E3EF0524B4A}"/>
               </a:ext>
             </a:extLst>
           </p:cNvPr>
@@ -46383,7 +46395,7 @@
     </p:spTree>
     <p:extLst>
       <p:ext uri="{BB962C8B-B14F-4D97-AF65-F5344CB8AC3E}">
-        <p14:creationId xmlns:p14="http://schemas.microsoft.com/office/powerpoint/2010/main" val="814315686"/>
+        <p14:creationId xmlns:p14="http://schemas.microsoft.com/office/powerpoint/2010/main" val="2020062987"/>
       </p:ext>
     </p:extLst>
   </p:cSld>

--- a/paper/slides/compiling-recurrent-agent-workflows-into-guarded-programs.pptx
+++ b/paper/slides/compiling-recurrent-agent-workflows-into-guarded-programs.pptx
@@ -2,39 +2,39 @@
 <file path=ppt/presentation.xml><?xml version="1.0" encoding="utf-8"?>
 <p:presentation xmlns:p="http://schemas.openxmlformats.org/presentationml/2006/main">
   <p:sldMasterIdLst>
-    <p:sldMasterId xmlns:r="http://schemas.openxmlformats.org/officeDocument/2006/relationships" id="2147483648" r:id="R9f402fae09054bf3"/>
+    <p:sldMasterId xmlns:r="http://schemas.openxmlformats.org/officeDocument/2006/relationships" id="2147483648" r:id="Ra6f33a157f4f42e1"/>
   </p:sldMasterIdLst>
   <p:notesMasterIdLst>
-    <p:notesMasterId xmlns:r="http://schemas.openxmlformats.org/officeDocument/2006/relationships" r:id="Re2772b1134a448ae"/>
+    <p:notesMasterId xmlns:r="http://schemas.openxmlformats.org/officeDocument/2006/relationships" r:id="R31898192c61341b3"/>
   </p:notesMasterIdLst>
   <p:sldIdLst>
-    <p:sldId xmlns:r="http://schemas.openxmlformats.org/officeDocument/2006/relationships" id="256" r:id="R2547694add834b98"/>
-    <p:sldId xmlns:r="http://schemas.openxmlformats.org/officeDocument/2006/relationships" id="257" r:id="Rc477d00c79f0436e"/>
-    <p:sldId xmlns:r="http://schemas.openxmlformats.org/officeDocument/2006/relationships" id="258" r:id="R229b5fddf08d4a73"/>
-    <p:sldId xmlns:r="http://schemas.openxmlformats.org/officeDocument/2006/relationships" id="259" r:id="Refa2f2cd6d5a4aad"/>
-    <p:sldId xmlns:r="http://schemas.openxmlformats.org/officeDocument/2006/relationships" id="260" r:id="R26bf9864515e4381"/>
-    <p:sldId xmlns:r="http://schemas.openxmlformats.org/officeDocument/2006/relationships" id="261" r:id="R75f19e12cced48f4"/>
-    <p:sldId xmlns:r="http://schemas.openxmlformats.org/officeDocument/2006/relationships" id="262" r:id="R59ab7917e90f487d"/>
-    <p:sldId xmlns:r="http://schemas.openxmlformats.org/officeDocument/2006/relationships" id="263" r:id="R4be2fde561c8409f"/>
-    <p:sldId xmlns:r="http://schemas.openxmlformats.org/officeDocument/2006/relationships" id="264" r:id="R6d3669da19994729"/>
-    <p:sldId xmlns:r="http://schemas.openxmlformats.org/officeDocument/2006/relationships" id="265" r:id="R68d69d6b5c054daa"/>
-    <p:sldId xmlns:r="http://schemas.openxmlformats.org/officeDocument/2006/relationships" id="266" r:id="R2eafa8cbc5fe41fb"/>
-    <p:sldId xmlns:r="http://schemas.openxmlformats.org/officeDocument/2006/relationships" id="267" r:id="R0a78af36994d4240"/>
-    <p:sldId xmlns:r="http://schemas.openxmlformats.org/officeDocument/2006/relationships" id="268" r:id="Rda5772d90eda4cb3"/>
-    <p:sldId xmlns:r="http://schemas.openxmlformats.org/officeDocument/2006/relationships" id="269" r:id="Rc929832839c14340"/>
-    <p:sldId xmlns:r="http://schemas.openxmlformats.org/officeDocument/2006/relationships" id="270" r:id="Rd753fb8afeb04975"/>
-    <p:sldId xmlns:r="http://schemas.openxmlformats.org/officeDocument/2006/relationships" id="271" r:id="Rc08593dc22564d96"/>
-    <p:sldId xmlns:r="http://schemas.openxmlformats.org/officeDocument/2006/relationships" id="272" r:id="R85237e9423e74c19"/>
-    <p:sldId xmlns:r="http://schemas.openxmlformats.org/officeDocument/2006/relationships" id="273" r:id="R40bebf42569a40b2"/>
-    <p:sldId xmlns:r="http://schemas.openxmlformats.org/officeDocument/2006/relationships" id="274" r:id="R3e05ec44dafe49cb"/>
-    <p:sldId xmlns:r="http://schemas.openxmlformats.org/officeDocument/2006/relationships" id="275" r:id="Rfc8397f5238f48e3"/>
-    <p:sldId xmlns:r="http://schemas.openxmlformats.org/officeDocument/2006/relationships" id="276" r:id="R993fec7be19b4712"/>
-    <p:sldId xmlns:r="http://schemas.openxmlformats.org/officeDocument/2006/relationships" id="277" r:id="R8b9e7b1ca04e4f17"/>
-    <p:sldId xmlns:r="http://schemas.openxmlformats.org/officeDocument/2006/relationships" id="278" r:id="Rfe82071f826f4625"/>
-    <p:sldId xmlns:r="http://schemas.openxmlformats.org/officeDocument/2006/relationships" id="279" r:id="Rc1414b2e5f6b492c"/>
-    <p:sldId xmlns:r="http://schemas.openxmlformats.org/officeDocument/2006/relationships" id="280" r:id="R4a418c5f8c9548ec"/>
-    <p:sldId xmlns:r="http://schemas.openxmlformats.org/officeDocument/2006/relationships" id="281" r:id="Reb2944ef19e9486f"/>
-    <p:sldId xmlns:r="http://schemas.openxmlformats.org/officeDocument/2006/relationships" id="282" r:id="Rd68b0039c50747e6"/>
+    <p:sldId xmlns:r="http://schemas.openxmlformats.org/officeDocument/2006/relationships" id="256" r:id="R7c9f64c740904aea"/>
+    <p:sldId xmlns:r="http://schemas.openxmlformats.org/officeDocument/2006/relationships" id="257" r:id="Rd592e6dab0ef4f4d"/>
+    <p:sldId xmlns:r="http://schemas.openxmlformats.org/officeDocument/2006/relationships" id="258" r:id="R2b779bc60e324d68"/>
+    <p:sldId xmlns:r="http://schemas.openxmlformats.org/officeDocument/2006/relationships" id="259" r:id="R76249f07d93a44ea"/>
+    <p:sldId xmlns:r="http://schemas.openxmlformats.org/officeDocument/2006/relationships" id="260" r:id="R60cc051afdd94906"/>
+    <p:sldId xmlns:r="http://schemas.openxmlformats.org/officeDocument/2006/relationships" id="261" r:id="R5691bb3f078c4123"/>
+    <p:sldId xmlns:r="http://schemas.openxmlformats.org/officeDocument/2006/relationships" id="262" r:id="R3f8878d2863d41f1"/>
+    <p:sldId xmlns:r="http://schemas.openxmlformats.org/officeDocument/2006/relationships" id="263" r:id="Refcc3aee39b64a63"/>
+    <p:sldId xmlns:r="http://schemas.openxmlformats.org/officeDocument/2006/relationships" id="264" r:id="Re0dd0ae08ad247f6"/>
+    <p:sldId xmlns:r="http://schemas.openxmlformats.org/officeDocument/2006/relationships" id="265" r:id="Re0e85e453b4340da"/>
+    <p:sldId xmlns:r="http://schemas.openxmlformats.org/officeDocument/2006/relationships" id="266" r:id="Rb8f414fe2bc84f3c"/>
+    <p:sldId xmlns:r="http://schemas.openxmlformats.org/officeDocument/2006/relationships" id="267" r:id="R94ff287843864392"/>
+    <p:sldId xmlns:r="http://schemas.openxmlformats.org/officeDocument/2006/relationships" id="268" r:id="R448d27e2cc104f74"/>
+    <p:sldId xmlns:r="http://schemas.openxmlformats.org/officeDocument/2006/relationships" id="269" r:id="R4bb0d7a24893452e"/>
+    <p:sldId xmlns:r="http://schemas.openxmlformats.org/officeDocument/2006/relationships" id="270" r:id="R60355df6e657423d"/>
+    <p:sldId xmlns:r="http://schemas.openxmlformats.org/officeDocument/2006/relationships" id="271" r:id="R4102f26a33d84bb4"/>
+    <p:sldId xmlns:r="http://schemas.openxmlformats.org/officeDocument/2006/relationships" id="272" r:id="Rb0414a4b77c442ec"/>
+    <p:sldId xmlns:r="http://schemas.openxmlformats.org/officeDocument/2006/relationships" id="273" r:id="R9a1dd547072f4e97"/>
+    <p:sldId xmlns:r="http://schemas.openxmlformats.org/officeDocument/2006/relationships" id="274" r:id="Rcc0c8a491cc044af"/>
+    <p:sldId xmlns:r="http://schemas.openxmlformats.org/officeDocument/2006/relationships" id="275" r:id="Rf40dd3e8b3e54971"/>
+    <p:sldId xmlns:r="http://schemas.openxmlformats.org/officeDocument/2006/relationships" id="276" r:id="R6dafad61a6304997"/>
+    <p:sldId xmlns:r="http://schemas.openxmlformats.org/officeDocument/2006/relationships" id="277" r:id="R8c09bad9bc9b4543"/>
+    <p:sldId xmlns:r="http://schemas.openxmlformats.org/officeDocument/2006/relationships" id="278" r:id="R466be1c2a16b43b2"/>
+    <p:sldId xmlns:r="http://schemas.openxmlformats.org/officeDocument/2006/relationships" id="279" r:id="R73a5f1c911b44be9"/>
+    <p:sldId xmlns:r="http://schemas.openxmlformats.org/officeDocument/2006/relationships" id="280" r:id="Rebff5e4969a24e75"/>
+    <p:sldId xmlns:r="http://schemas.openxmlformats.org/officeDocument/2006/relationships" id="281" r:id="R09c4dd3bc584415a"/>
+    <p:sldId xmlns:r="http://schemas.openxmlformats.org/officeDocument/2006/relationships" id="282" r:id="R0c143c5346554d69"/>
   </p:sldIdLst>
   <p:sldSz cx="12192000" cy="6858000"/>
   <p:notesSz cx="6858000" cy="9144000"/>
@@ -2356,7 +2356,7 @@
   </p:cSld>
   <p:clrMap bg1="lt1" tx1="dk1" bg2="lt2" tx2="dk2" accent1="accent1" accent2="accent2" accent3="accent3" accent4="accent4" accent5="accent5" accent6="accent6" hlink="hlink" folHlink="folHlink"/>
   <p:sldLayoutIdLst>
-    <p:sldLayoutId xmlns:r="http://schemas.openxmlformats.org/officeDocument/2006/relationships" id="2147483649" r:id="R785de914a7f1494a"/>
+    <p:sldLayoutId xmlns:r="http://schemas.openxmlformats.org/officeDocument/2006/relationships" id="2147483649" r:id="Re3c9748574414eeb"/>
   </p:sldLayoutIdLst>
   <p:txStyles>
     <p:titleStyle>
@@ -4021,7 +4021,7 @@
           <p:cNvPr id="2" name="Shape 0">
             <a:extLst xmlns:a="http://schemas.openxmlformats.org/drawingml/2006/main">
               <a:ext uri="{FF2B5EF4-FFF2-40B4-BE49-F238E27FC236}">
-                <a16:creationId xmlns:a16="http://schemas.microsoft.com/office/drawing/2014/main" id="{798A6864-4997-4A5B-BE50-B7ED0BA6EA49}"/>
+                <a16:creationId xmlns:a16="http://schemas.microsoft.com/office/drawing/2014/main" id="{1A2FFEA7-6501-4989-8759-2723716D736C}"/>
               </a:ext>
             </a:extLst>
           </p:cNvPr>
@@ -4061,7 +4061,7 @@
           <p:cNvPr id="3" name="Shape 1">
             <a:extLst xmlns:a="http://schemas.openxmlformats.org/drawingml/2006/main">
               <a:ext uri="{FF2B5EF4-FFF2-40B4-BE49-F238E27FC236}">
-                <a16:creationId xmlns:a16="http://schemas.microsoft.com/office/drawing/2014/main" id="{98B003DF-B1AA-4628-AA79-D3C67FD8511A}"/>
+                <a16:creationId xmlns:a16="http://schemas.microsoft.com/office/drawing/2014/main" id="{EA379408-97A9-4A71-8BB8-00D71FDFD39E}"/>
               </a:ext>
             </a:extLst>
           </p:cNvPr>
@@ -4101,7 +4101,7 @@
           <p:cNvPr id="4" name="Shape 2">
             <a:extLst xmlns:a="http://schemas.openxmlformats.org/drawingml/2006/main">
               <a:ext uri="{FF2B5EF4-FFF2-40B4-BE49-F238E27FC236}">
-                <a16:creationId xmlns:a16="http://schemas.microsoft.com/office/drawing/2014/main" id="{DDDEAFEF-F4E6-439D-AB1F-D37888A95BB7}"/>
+                <a16:creationId xmlns:a16="http://schemas.microsoft.com/office/drawing/2014/main" id="{32E3CD93-23A5-4FE8-99FC-981BAFE4BA73}"/>
               </a:ext>
             </a:extLst>
           </p:cNvPr>
@@ -4141,7 +4141,7 @@
           <p:cNvPr id="5" name="Text 3">
             <a:extLst xmlns:a="http://schemas.openxmlformats.org/drawingml/2006/main">
               <a:ext uri="{FF2B5EF4-FFF2-40B4-BE49-F238E27FC236}">
-                <a16:creationId xmlns:a16="http://schemas.microsoft.com/office/drawing/2014/main" id="{061D4504-961D-4A8E-AB71-4518D7B13187}"/>
+                <a16:creationId xmlns:a16="http://schemas.microsoft.com/office/drawing/2014/main" id="{F9739D09-BB16-44CC-B240-4E76EC1C468B}"/>
               </a:ext>
             </a:extLst>
           </p:cNvPr>
@@ -4186,7 +4186,7 @@
           <p:cNvPr id="6" name="Text 4">
             <a:extLst xmlns:a="http://schemas.openxmlformats.org/drawingml/2006/main">
               <a:ext uri="{FF2B5EF4-FFF2-40B4-BE49-F238E27FC236}">
-                <a16:creationId xmlns:a16="http://schemas.microsoft.com/office/drawing/2014/main" id="{F6B2009C-4BD6-4D6E-AAF3-4F6782417088}"/>
+                <a16:creationId xmlns:a16="http://schemas.microsoft.com/office/drawing/2014/main" id="{B79844C4-7AFA-49C9-B3F8-6440BDE4E88D}"/>
               </a:ext>
             </a:extLst>
           </p:cNvPr>
@@ -4234,7 +4234,7 @@
           <p:cNvPr id="7" name="Text 5">
             <a:extLst xmlns:a="http://schemas.openxmlformats.org/drawingml/2006/main">
               <a:ext uri="{FF2B5EF4-FFF2-40B4-BE49-F238E27FC236}">
-                <a16:creationId xmlns:a16="http://schemas.microsoft.com/office/drawing/2014/main" id="{214A8CCB-4590-4C1C-B8FF-F8E9654B87F4}"/>
+                <a16:creationId xmlns:a16="http://schemas.microsoft.com/office/drawing/2014/main" id="{189026B7-9996-4B37-80DB-41EDE0704C58}"/>
               </a:ext>
             </a:extLst>
           </p:cNvPr>
@@ -4282,7 +4282,7 @@
           <p:cNvPr id="8" name="Shape 6">
             <a:extLst xmlns:a="http://schemas.openxmlformats.org/drawingml/2006/main">
               <a:ext uri="{FF2B5EF4-FFF2-40B4-BE49-F238E27FC236}">
-                <a16:creationId xmlns:a16="http://schemas.microsoft.com/office/drawing/2014/main" id="{D4899A11-1B6A-4275-B445-640EE008A6FF}"/>
+                <a16:creationId xmlns:a16="http://schemas.microsoft.com/office/drawing/2014/main" id="{9218F37F-D6F0-446A-A755-95AF7D2DF3A3}"/>
               </a:ext>
             </a:extLst>
           </p:cNvPr>
@@ -4318,7 +4318,7 @@
           <p:cNvPr id="9" name="Text 7">
             <a:extLst xmlns:a="http://schemas.openxmlformats.org/drawingml/2006/main">
               <a:ext uri="{FF2B5EF4-FFF2-40B4-BE49-F238E27FC236}">
-                <a16:creationId xmlns:a16="http://schemas.microsoft.com/office/drawing/2014/main" id="{0FB77748-62C0-41F9-BF6F-250C87137CB9}"/>
+                <a16:creationId xmlns:a16="http://schemas.microsoft.com/office/drawing/2014/main" id="{5D72604B-F345-4FD0-8004-1B2AD5A58F6A}"/>
               </a:ext>
             </a:extLst>
           </p:cNvPr>
@@ -4363,7 +4363,7 @@
           <p:cNvPr id="10" name="Text 8">
             <a:extLst xmlns:a="http://schemas.openxmlformats.org/drawingml/2006/main">
               <a:ext uri="{FF2B5EF4-FFF2-40B4-BE49-F238E27FC236}">
-                <a16:creationId xmlns:a16="http://schemas.microsoft.com/office/drawing/2014/main" id="{E436A607-EA8A-4FB7-852F-28EE9047996D}"/>
+                <a16:creationId xmlns:a16="http://schemas.microsoft.com/office/drawing/2014/main" id="{1F1550F7-2A46-44C3-87E9-7BE6AF91808E}"/>
               </a:ext>
             </a:extLst>
           </p:cNvPr>
@@ -4430,7 +4430,7 @@
           <p:cNvPr id="11" name="Text 9">
             <a:extLst xmlns:a="http://schemas.openxmlformats.org/drawingml/2006/main">
               <a:ext uri="{FF2B5EF4-FFF2-40B4-BE49-F238E27FC236}">
-                <a16:creationId xmlns:a16="http://schemas.microsoft.com/office/drawing/2014/main" id="{509F00DC-36D9-48CB-BF2D-C66776CAAB26}"/>
+                <a16:creationId xmlns:a16="http://schemas.microsoft.com/office/drawing/2014/main" id="{E3960870-7F20-4E37-98A9-C92ABDFFC357}"/>
               </a:ext>
             </a:extLst>
           </p:cNvPr>
@@ -4475,7 +4475,7 @@
           <p:cNvPr id="12" name="Text 10">
             <a:extLst xmlns:a="http://schemas.openxmlformats.org/drawingml/2006/main">
               <a:ext uri="{FF2B5EF4-FFF2-40B4-BE49-F238E27FC236}">
-                <a16:creationId xmlns:a16="http://schemas.microsoft.com/office/drawing/2014/main" id="{0CB476BD-837E-4BCE-ACF8-7D58098C1859}"/>
+                <a16:creationId xmlns:a16="http://schemas.microsoft.com/office/drawing/2014/main" id="{6549AFDE-6027-406C-A1D6-7E350D1F1AAB}"/>
               </a:ext>
             </a:extLst>
           </p:cNvPr>
@@ -4542,7 +4542,7 @@
           <p:cNvPr id="13" name="Text 11">
             <a:extLst xmlns:a="http://schemas.openxmlformats.org/drawingml/2006/main">
               <a:ext uri="{FF2B5EF4-FFF2-40B4-BE49-F238E27FC236}">
-                <a16:creationId xmlns:a16="http://schemas.microsoft.com/office/drawing/2014/main" id="{DA0BD656-1392-4E63-A78D-C022C8EA8521}"/>
+                <a16:creationId xmlns:a16="http://schemas.microsoft.com/office/drawing/2014/main" id="{46D8C737-1F26-4D80-9C0A-E44685688B27}"/>
               </a:ext>
             </a:extLst>
           </p:cNvPr>
@@ -4587,7 +4587,7 @@
           <p:cNvPr id="14" name="Text 12">
             <a:extLst xmlns:a="http://schemas.openxmlformats.org/drawingml/2006/main">
               <a:ext uri="{FF2B5EF4-FFF2-40B4-BE49-F238E27FC236}">
-                <a16:creationId xmlns:a16="http://schemas.microsoft.com/office/drawing/2014/main" id="{7D5E89BE-8A0F-414E-80F5-817E1770D727}"/>
+                <a16:creationId xmlns:a16="http://schemas.microsoft.com/office/drawing/2014/main" id="{0A9AA230-251F-4889-9D1E-1826D9B8C9E8}"/>
               </a:ext>
             </a:extLst>
           </p:cNvPr>
@@ -4654,7 +4654,7 @@
           <p:cNvPr id="15" name="Text 13">
             <a:extLst xmlns:a="http://schemas.openxmlformats.org/drawingml/2006/main">
               <a:ext uri="{FF2B5EF4-FFF2-40B4-BE49-F238E27FC236}">
-                <a16:creationId xmlns:a16="http://schemas.microsoft.com/office/drawing/2014/main" id="{B4289B81-B165-40DE-BB1E-F3F112CE3D8F}"/>
+                <a16:creationId xmlns:a16="http://schemas.microsoft.com/office/drawing/2014/main" id="{085A28D6-9BD2-4982-94A5-5743942A571D}"/>
               </a:ext>
             </a:extLst>
           </p:cNvPr>
@@ -4697,7 +4697,7 @@
     </p:spTree>
     <p:extLst>
       <p:ext uri="{BB962C8B-B14F-4D97-AF65-F5344CB8AC3E}">
-        <p14:creationId xmlns:p14="http://schemas.microsoft.com/office/powerpoint/2010/main" val="431059015"/>
+        <p14:creationId xmlns:p14="http://schemas.microsoft.com/office/powerpoint/2010/main" val="954553077"/>
       </p:ext>
     </p:extLst>
   </p:cSld>
@@ -4728,7 +4728,7 @@
           <p:cNvPr id="2" name="Text 0">
             <a:extLst xmlns:a="http://schemas.openxmlformats.org/drawingml/2006/main">
               <a:ext uri="{FF2B5EF4-FFF2-40B4-BE49-F238E27FC236}">
-                <a16:creationId xmlns:a16="http://schemas.microsoft.com/office/drawing/2014/main" id="{029D601B-80D5-4BFB-97F3-85EAD6F1EF59}"/>
+                <a16:creationId xmlns:a16="http://schemas.microsoft.com/office/drawing/2014/main" id="{BE79DD96-1398-4564-AEFE-1D63F03FAA09}"/>
               </a:ext>
             </a:extLst>
           </p:cNvPr>
@@ -4773,7 +4773,7 @@
           <p:cNvPr id="3" name="Text 1">
             <a:extLst xmlns:a="http://schemas.openxmlformats.org/drawingml/2006/main">
               <a:ext uri="{FF2B5EF4-FFF2-40B4-BE49-F238E27FC236}">
-                <a16:creationId xmlns:a16="http://schemas.microsoft.com/office/drawing/2014/main" id="{4964D68B-1906-4CFC-8B23-E5964CBA043B}"/>
+                <a16:creationId xmlns:a16="http://schemas.microsoft.com/office/drawing/2014/main" id="{9D15F593-37C3-41E6-97A2-FA1BCACC30CA}"/>
               </a:ext>
             </a:extLst>
           </p:cNvPr>
@@ -4818,7 +4818,7 @@
           <p:cNvPr id="4" name="Text 2">
             <a:extLst xmlns:a="http://schemas.openxmlformats.org/drawingml/2006/main">
               <a:ext uri="{FF2B5EF4-FFF2-40B4-BE49-F238E27FC236}">
-                <a16:creationId xmlns:a16="http://schemas.microsoft.com/office/drawing/2014/main" id="{A2D5BE75-150E-4EEC-A8FC-D90131E2C950}"/>
+                <a16:creationId xmlns:a16="http://schemas.microsoft.com/office/drawing/2014/main" id="{88C4ECCA-898E-4CC5-A826-2761AC6C4AC3}"/>
               </a:ext>
             </a:extLst>
           </p:cNvPr>
@@ -4863,7 +4863,7 @@
           <p:cNvPr id="5" name="Text 3">
             <a:extLst xmlns:a="http://schemas.openxmlformats.org/drawingml/2006/main">
               <a:ext uri="{FF2B5EF4-FFF2-40B4-BE49-F238E27FC236}">
-                <a16:creationId xmlns:a16="http://schemas.microsoft.com/office/drawing/2014/main" id="{A452E9CF-7ACA-459C-9FB3-C1D52B2EF024}"/>
+                <a16:creationId xmlns:a16="http://schemas.microsoft.com/office/drawing/2014/main" id="{F191C55A-6A01-4E97-86F7-965A97FAB661}"/>
               </a:ext>
             </a:extLst>
           </p:cNvPr>
@@ -4908,7 +4908,7 @@
           <p:cNvPr id="6" name="Text 4">
             <a:extLst xmlns:a="http://schemas.openxmlformats.org/drawingml/2006/main">
               <a:ext uri="{FF2B5EF4-FFF2-40B4-BE49-F238E27FC236}">
-                <a16:creationId xmlns:a16="http://schemas.microsoft.com/office/drawing/2014/main" id="{95F9805C-1A2D-41BD-97F7-2958846BAF04}"/>
+                <a16:creationId xmlns:a16="http://schemas.microsoft.com/office/drawing/2014/main" id="{1527A4B5-B5DD-4204-BF7A-41EAAC580A59}"/>
               </a:ext>
             </a:extLst>
           </p:cNvPr>
@@ -4956,7 +4956,7 @@
           <p:cNvPr id="7" name="Shape 5">
             <a:extLst xmlns:a="http://schemas.openxmlformats.org/drawingml/2006/main">
               <a:ext uri="{FF2B5EF4-FFF2-40B4-BE49-F238E27FC236}">
-                <a16:creationId xmlns:a16="http://schemas.microsoft.com/office/drawing/2014/main" id="{BF6CA0B5-E1CB-4353-BFB6-E65B66600C40}"/>
+                <a16:creationId xmlns:a16="http://schemas.microsoft.com/office/drawing/2014/main" id="{E8BB116B-C988-4698-B881-9774B18C5665}"/>
               </a:ext>
             </a:extLst>
           </p:cNvPr>
@@ -5003,7 +5003,7 @@
           <p:cNvPr id="8" name="Shape 6">
             <a:extLst xmlns:a="http://schemas.openxmlformats.org/drawingml/2006/main">
               <a:ext uri="{FF2B5EF4-FFF2-40B4-BE49-F238E27FC236}">
-                <a16:creationId xmlns:a16="http://schemas.microsoft.com/office/drawing/2014/main" id="{B4ED6B45-57A8-4E90-9356-CD58E82DC42C}"/>
+                <a16:creationId xmlns:a16="http://schemas.microsoft.com/office/drawing/2014/main" id="{423016A2-4147-451F-9E8B-3F7D0DD737C9}"/>
               </a:ext>
             </a:extLst>
           </p:cNvPr>
@@ -5041,7 +5041,7 @@
           <p:cNvPr id="9" name="Text 7">
             <a:extLst xmlns:a="http://schemas.openxmlformats.org/drawingml/2006/main">
               <a:ext uri="{FF2B5EF4-FFF2-40B4-BE49-F238E27FC236}">
-                <a16:creationId xmlns:a16="http://schemas.microsoft.com/office/drawing/2014/main" id="{8284E78C-6BAB-47B1-BD39-B0C63BF20FAF}"/>
+                <a16:creationId xmlns:a16="http://schemas.microsoft.com/office/drawing/2014/main" id="{22BFBB6C-6ABD-4F9F-B320-0C7D80E1BC2C}"/>
               </a:ext>
             </a:extLst>
           </p:cNvPr>
@@ -5086,7 +5086,7 @@
           <p:cNvPr id="10" name="Text 8">
             <a:extLst xmlns:a="http://schemas.openxmlformats.org/drawingml/2006/main">
               <a:ext uri="{FF2B5EF4-FFF2-40B4-BE49-F238E27FC236}">
-                <a16:creationId xmlns:a16="http://schemas.microsoft.com/office/drawing/2014/main" id="{CD93556A-E567-4B17-AD35-0AB244082189}"/>
+                <a16:creationId xmlns:a16="http://schemas.microsoft.com/office/drawing/2014/main" id="{C3A9B93B-8D5C-4ED6-ADA4-E834D2E8F12E}"/>
               </a:ext>
             </a:extLst>
           </p:cNvPr>
@@ -5131,7 +5131,7 @@
           <p:cNvPr id="11" name="Text 9">
             <a:extLst xmlns:a="http://schemas.openxmlformats.org/drawingml/2006/main">
               <a:ext uri="{FF2B5EF4-FFF2-40B4-BE49-F238E27FC236}">
-                <a16:creationId xmlns:a16="http://schemas.microsoft.com/office/drawing/2014/main" id="{F8573556-5374-425B-A3A9-D673C9231AB0}"/>
+                <a16:creationId xmlns:a16="http://schemas.microsoft.com/office/drawing/2014/main" id="{C7B18032-A97B-4384-8737-4F0CC2C46BAF}"/>
               </a:ext>
             </a:extLst>
           </p:cNvPr>
@@ -5176,7 +5176,7 @@
           <p:cNvPr id="12" name="Text 10">
             <a:extLst xmlns:a="http://schemas.openxmlformats.org/drawingml/2006/main">
               <a:ext uri="{FF2B5EF4-FFF2-40B4-BE49-F238E27FC236}">
-                <a16:creationId xmlns:a16="http://schemas.microsoft.com/office/drawing/2014/main" id="{A5D3AE3F-6B76-4D35-8541-59B766E521B2}"/>
+                <a16:creationId xmlns:a16="http://schemas.microsoft.com/office/drawing/2014/main" id="{6E3FB97F-9875-46FC-93BB-066DD72BD4B9}"/>
               </a:ext>
             </a:extLst>
           </p:cNvPr>
@@ -5224,7 +5224,7 @@
           <p:cNvPr id="13" name="Shape 11">
             <a:extLst xmlns:a="http://schemas.openxmlformats.org/drawingml/2006/main">
               <a:ext uri="{FF2B5EF4-FFF2-40B4-BE49-F238E27FC236}">
-                <a16:creationId xmlns:a16="http://schemas.microsoft.com/office/drawing/2014/main" id="{0C8FB9A9-109A-45AB-B8F8-27B4C4D44263}"/>
+                <a16:creationId xmlns:a16="http://schemas.microsoft.com/office/drawing/2014/main" id="{52155148-8DE2-47F3-AF55-7CB8901183CA}"/>
               </a:ext>
             </a:extLst>
           </p:cNvPr>
@@ -5271,7 +5271,7 @@
           <p:cNvPr id="14" name="Shape 12">
             <a:extLst xmlns:a="http://schemas.openxmlformats.org/drawingml/2006/main">
               <a:ext uri="{FF2B5EF4-FFF2-40B4-BE49-F238E27FC236}">
-                <a16:creationId xmlns:a16="http://schemas.microsoft.com/office/drawing/2014/main" id="{D2552AA7-2DC5-431D-BE30-8219A1134B7B}"/>
+                <a16:creationId xmlns:a16="http://schemas.microsoft.com/office/drawing/2014/main" id="{7CA8CC9B-8408-4A67-AAF4-CC907E2C27DD}"/>
               </a:ext>
             </a:extLst>
           </p:cNvPr>
@@ -5309,7 +5309,7 @@
           <p:cNvPr id="15" name="Text 13">
             <a:extLst xmlns:a="http://schemas.openxmlformats.org/drawingml/2006/main">
               <a:ext uri="{FF2B5EF4-FFF2-40B4-BE49-F238E27FC236}">
-                <a16:creationId xmlns:a16="http://schemas.microsoft.com/office/drawing/2014/main" id="{84A80C35-0174-4E74-AF0B-13BC3972B8AC}"/>
+                <a16:creationId xmlns:a16="http://schemas.microsoft.com/office/drawing/2014/main" id="{C610E811-F53A-4D54-A5D8-654AD3246BCE}"/>
               </a:ext>
             </a:extLst>
           </p:cNvPr>
@@ -5354,7 +5354,7 @@
           <p:cNvPr id="16" name="Text 14">
             <a:extLst xmlns:a="http://schemas.openxmlformats.org/drawingml/2006/main">
               <a:ext uri="{FF2B5EF4-FFF2-40B4-BE49-F238E27FC236}">
-                <a16:creationId xmlns:a16="http://schemas.microsoft.com/office/drawing/2014/main" id="{923472A3-2163-4BD3-9BBD-E584EB8B2BCD}"/>
+                <a16:creationId xmlns:a16="http://schemas.microsoft.com/office/drawing/2014/main" id="{3057D461-63DD-470C-A3C4-7316727CA1FD}"/>
               </a:ext>
             </a:extLst>
           </p:cNvPr>
@@ -5399,7 +5399,7 @@
           <p:cNvPr id="17" name="Text 15">
             <a:extLst xmlns:a="http://schemas.openxmlformats.org/drawingml/2006/main">
               <a:ext uri="{FF2B5EF4-FFF2-40B4-BE49-F238E27FC236}">
-                <a16:creationId xmlns:a16="http://schemas.microsoft.com/office/drawing/2014/main" id="{5AA74B2F-7E0C-4A7C-A92B-40F6B231527F}"/>
+                <a16:creationId xmlns:a16="http://schemas.microsoft.com/office/drawing/2014/main" id="{8C414CCA-A911-4E41-AADA-231028F64555}"/>
               </a:ext>
             </a:extLst>
           </p:cNvPr>
@@ -5444,7 +5444,7 @@
           <p:cNvPr id="18" name="Text 16">
             <a:extLst xmlns:a="http://schemas.openxmlformats.org/drawingml/2006/main">
               <a:ext uri="{FF2B5EF4-FFF2-40B4-BE49-F238E27FC236}">
-                <a16:creationId xmlns:a16="http://schemas.microsoft.com/office/drawing/2014/main" id="{8D4F90E1-0AF9-4320-832E-2CF18DD92034}"/>
+                <a16:creationId xmlns:a16="http://schemas.microsoft.com/office/drawing/2014/main" id="{B05EC7F5-B8A1-4149-B11C-8824AEFE3E89}"/>
               </a:ext>
             </a:extLst>
           </p:cNvPr>
@@ -5492,7 +5492,7 @@
           <p:cNvPr id="19" name="Shape 17">
             <a:extLst xmlns:a="http://schemas.openxmlformats.org/drawingml/2006/main">
               <a:ext uri="{FF2B5EF4-FFF2-40B4-BE49-F238E27FC236}">
-                <a16:creationId xmlns:a16="http://schemas.microsoft.com/office/drawing/2014/main" id="{CAADCA37-AEAF-4183-AFE5-B37D04E444F4}"/>
+                <a16:creationId xmlns:a16="http://schemas.microsoft.com/office/drawing/2014/main" id="{873DD2A4-B2ED-4F3E-8FCC-CF176F16C907}"/>
               </a:ext>
             </a:extLst>
           </p:cNvPr>
@@ -5539,7 +5539,7 @@
           <p:cNvPr id="20" name="Shape 18">
             <a:extLst xmlns:a="http://schemas.openxmlformats.org/drawingml/2006/main">
               <a:ext uri="{FF2B5EF4-FFF2-40B4-BE49-F238E27FC236}">
-                <a16:creationId xmlns:a16="http://schemas.microsoft.com/office/drawing/2014/main" id="{B88F08BC-E13C-44FD-9F9F-B69B86953101}"/>
+                <a16:creationId xmlns:a16="http://schemas.microsoft.com/office/drawing/2014/main" id="{78C1B957-6B78-46EA-AD4C-AC8EEC9576F7}"/>
               </a:ext>
             </a:extLst>
           </p:cNvPr>
@@ -5577,7 +5577,7 @@
           <p:cNvPr id="21" name="Text 19">
             <a:extLst xmlns:a="http://schemas.openxmlformats.org/drawingml/2006/main">
               <a:ext uri="{FF2B5EF4-FFF2-40B4-BE49-F238E27FC236}">
-                <a16:creationId xmlns:a16="http://schemas.microsoft.com/office/drawing/2014/main" id="{37F7907E-F3DD-490C-8351-359B97FCC60B}"/>
+                <a16:creationId xmlns:a16="http://schemas.microsoft.com/office/drawing/2014/main" id="{E732482C-F860-4500-8880-538C9928B433}"/>
               </a:ext>
             </a:extLst>
           </p:cNvPr>
@@ -5622,7 +5622,7 @@
           <p:cNvPr id="22" name="Text 20">
             <a:extLst xmlns:a="http://schemas.openxmlformats.org/drawingml/2006/main">
               <a:ext uri="{FF2B5EF4-FFF2-40B4-BE49-F238E27FC236}">
-                <a16:creationId xmlns:a16="http://schemas.microsoft.com/office/drawing/2014/main" id="{20F7402D-B621-4937-880F-E3169C656942}"/>
+                <a16:creationId xmlns:a16="http://schemas.microsoft.com/office/drawing/2014/main" id="{8AC944B1-D5ED-41F2-9286-C00183D3AFBE}"/>
               </a:ext>
             </a:extLst>
           </p:cNvPr>
@@ -5667,7 +5667,7 @@
           <p:cNvPr id="23" name="Text 21">
             <a:extLst xmlns:a="http://schemas.openxmlformats.org/drawingml/2006/main">
               <a:ext uri="{FF2B5EF4-FFF2-40B4-BE49-F238E27FC236}">
-                <a16:creationId xmlns:a16="http://schemas.microsoft.com/office/drawing/2014/main" id="{69B250E3-56A3-4B10-9FEC-DB21D2DBECF3}"/>
+                <a16:creationId xmlns:a16="http://schemas.microsoft.com/office/drawing/2014/main" id="{BADA0C5A-6CE5-424C-BE39-65B5DEB70A20}"/>
               </a:ext>
             </a:extLst>
           </p:cNvPr>
@@ -5712,7 +5712,7 @@
           <p:cNvPr id="24" name="Text 22">
             <a:extLst xmlns:a="http://schemas.openxmlformats.org/drawingml/2006/main">
               <a:ext uri="{FF2B5EF4-FFF2-40B4-BE49-F238E27FC236}">
-                <a16:creationId xmlns:a16="http://schemas.microsoft.com/office/drawing/2014/main" id="{77A3728D-E1C4-4F5E-900A-84AF9722F524}"/>
+                <a16:creationId xmlns:a16="http://schemas.microsoft.com/office/drawing/2014/main" id="{46FDF204-B9FF-46E8-B70C-2BFDAEA3D248}"/>
               </a:ext>
             </a:extLst>
           </p:cNvPr>
@@ -5760,7 +5760,7 @@
           <p:cNvPr id="25" name="Shape 23">
             <a:extLst xmlns:a="http://schemas.openxmlformats.org/drawingml/2006/main">
               <a:ext uri="{FF2B5EF4-FFF2-40B4-BE49-F238E27FC236}">
-                <a16:creationId xmlns:a16="http://schemas.microsoft.com/office/drawing/2014/main" id="{100BD8B6-C833-4608-BBCF-B041390731E9}"/>
+                <a16:creationId xmlns:a16="http://schemas.microsoft.com/office/drawing/2014/main" id="{55309F1D-18FD-4D8D-A82C-6E02BB38E2E1}"/>
               </a:ext>
             </a:extLst>
           </p:cNvPr>
@@ -5800,7 +5800,7 @@
           <p:cNvPr id="26" name="Text 24">
             <a:extLst xmlns:a="http://schemas.openxmlformats.org/drawingml/2006/main">
               <a:ext uri="{FF2B5EF4-FFF2-40B4-BE49-F238E27FC236}">
-                <a16:creationId xmlns:a16="http://schemas.microsoft.com/office/drawing/2014/main" id="{9CD41E5D-6DDD-4E55-827F-AA1DBD11EE21}"/>
+                <a16:creationId xmlns:a16="http://schemas.microsoft.com/office/drawing/2014/main" id="{778E02F8-0AE8-4BAC-B1E7-683F8C3EB18D}"/>
               </a:ext>
             </a:extLst>
           </p:cNvPr>
@@ -5859,7 +5859,7 @@
           <p:cNvPr id="27" name="Text 25">
             <a:extLst xmlns:a="http://schemas.openxmlformats.org/drawingml/2006/main">
               <a:ext uri="{FF2B5EF4-FFF2-40B4-BE49-F238E27FC236}">
-                <a16:creationId xmlns:a16="http://schemas.microsoft.com/office/drawing/2014/main" id="{B07A4AC2-FDB2-4987-AFA3-A11B088DEB3A}"/>
+                <a16:creationId xmlns:a16="http://schemas.microsoft.com/office/drawing/2014/main" id="{B4582C86-E07F-4356-87C8-459D6ADED3F8}"/>
               </a:ext>
             </a:extLst>
           </p:cNvPr>
@@ -5904,7 +5904,7 @@
           <p:cNvPr id="28" name="Shape 26">
             <a:extLst xmlns:a="http://schemas.openxmlformats.org/drawingml/2006/main">
               <a:ext uri="{FF2B5EF4-FFF2-40B4-BE49-F238E27FC236}">
-                <a16:creationId xmlns:a16="http://schemas.microsoft.com/office/drawing/2014/main" id="{08C77636-439B-4653-84DB-37554BA6034F}"/>
+                <a16:creationId xmlns:a16="http://schemas.microsoft.com/office/drawing/2014/main" id="{4E79BE31-16F4-40D4-8456-6EEB7DBAFB85}"/>
               </a:ext>
             </a:extLst>
           </p:cNvPr>
@@ -5951,7 +5951,7 @@
           <p:cNvPr id="29" name="Text 27">
             <a:extLst xmlns:a="http://schemas.openxmlformats.org/drawingml/2006/main">
               <a:ext uri="{FF2B5EF4-FFF2-40B4-BE49-F238E27FC236}">
-                <a16:creationId xmlns:a16="http://schemas.microsoft.com/office/drawing/2014/main" id="{A96DEF05-56B4-4C96-9057-948E9B6AFDD9}"/>
+                <a16:creationId xmlns:a16="http://schemas.microsoft.com/office/drawing/2014/main" id="{D9A8CF16-BF4C-4D3B-AC4E-AE30122AEE75}"/>
               </a:ext>
             </a:extLst>
           </p:cNvPr>
@@ -5996,7 +5996,7 @@
           <p:cNvPr id="30" name="Text 28">
             <a:extLst xmlns:a="http://schemas.openxmlformats.org/drawingml/2006/main">
               <a:ext uri="{FF2B5EF4-FFF2-40B4-BE49-F238E27FC236}">
-                <a16:creationId xmlns:a16="http://schemas.microsoft.com/office/drawing/2014/main" id="{AD9E803E-B614-4443-AC8B-101995F99EBA}"/>
+                <a16:creationId xmlns:a16="http://schemas.microsoft.com/office/drawing/2014/main" id="{A2D5A6F1-5FB4-430C-A7F4-EB096BEE8012}"/>
               </a:ext>
             </a:extLst>
           </p:cNvPr>
@@ -6041,7 +6041,7 @@
           <p:cNvPr id="31" name="Text 29">
             <a:extLst xmlns:a="http://schemas.openxmlformats.org/drawingml/2006/main">
               <a:ext uri="{FF2B5EF4-FFF2-40B4-BE49-F238E27FC236}">
-                <a16:creationId xmlns:a16="http://schemas.microsoft.com/office/drawing/2014/main" id="{2AA3A80E-39DE-441D-B725-312BB0F64AB5}"/>
+                <a16:creationId xmlns:a16="http://schemas.microsoft.com/office/drawing/2014/main" id="{6195770B-8412-4DAF-B3A5-94FDE31D7C61}"/>
               </a:ext>
             </a:extLst>
           </p:cNvPr>
@@ -6089,7 +6089,7 @@
           <p:cNvPr id="32" name="Shape 30">
             <a:extLst xmlns:a="http://schemas.openxmlformats.org/drawingml/2006/main">
               <a:ext uri="{FF2B5EF4-FFF2-40B4-BE49-F238E27FC236}">
-                <a16:creationId xmlns:a16="http://schemas.microsoft.com/office/drawing/2014/main" id="{6F70DBB7-6C72-40E9-BDEE-14A65200EE62}"/>
+                <a16:creationId xmlns:a16="http://schemas.microsoft.com/office/drawing/2014/main" id="{2F814A01-59E1-4E17-AA43-E5B110B2340C}"/>
               </a:ext>
             </a:extLst>
           </p:cNvPr>
@@ -6136,7 +6136,7 @@
           <p:cNvPr id="33" name="Text 31">
             <a:extLst xmlns:a="http://schemas.openxmlformats.org/drawingml/2006/main">
               <a:ext uri="{FF2B5EF4-FFF2-40B4-BE49-F238E27FC236}">
-                <a16:creationId xmlns:a16="http://schemas.microsoft.com/office/drawing/2014/main" id="{300DDA09-DE03-4A19-BFF3-C280209F6434}"/>
+                <a16:creationId xmlns:a16="http://schemas.microsoft.com/office/drawing/2014/main" id="{F607D9F5-F5F0-4F8E-A023-69D4842D47CE}"/>
               </a:ext>
             </a:extLst>
           </p:cNvPr>
@@ -6181,7 +6181,7 @@
           <p:cNvPr id="34" name="Text 32">
             <a:extLst xmlns:a="http://schemas.openxmlformats.org/drawingml/2006/main">
               <a:ext uri="{FF2B5EF4-FFF2-40B4-BE49-F238E27FC236}">
-                <a16:creationId xmlns:a16="http://schemas.microsoft.com/office/drawing/2014/main" id="{23BEBFC6-F241-4928-A800-B8A22744F4F5}"/>
+                <a16:creationId xmlns:a16="http://schemas.microsoft.com/office/drawing/2014/main" id="{BAEAF0A2-F930-485D-A535-1516367DFB2E}"/>
               </a:ext>
             </a:extLst>
           </p:cNvPr>
@@ -6226,7 +6226,7 @@
           <p:cNvPr id="35" name="Text 33">
             <a:extLst xmlns:a="http://schemas.openxmlformats.org/drawingml/2006/main">
               <a:ext uri="{FF2B5EF4-FFF2-40B4-BE49-F238E27FC236}">
-                <a16:creationId xmlns:a16="http://schemas.microsoft.com/office/drawing/2014/main" id="{949F0236-E291-4F65-989E-7CA461954FB8}"/>
+                <a16:creationId xmlns:a16="http://schemas.microsoft.com/office/drawing/2014/main" id="{865F0288-B3F6-4E15-BD98-14EC1BC33F8C}"/>
               </a:ext>
             </a:extLst>
           </p:cNvPr>
@@ -6274,7 +6274,7 @@
           <p:cNvPr id="36" name="Shape 34">
             <a:extLst xmlns:a="http://schemas.openxmlformats.org/drawingml/2006/main">
               <a:ext uri="{FF2B5EF4-FFF2-40B4-BE49-F238E27FC236}">
-                <a16:creationId xmlns:a16="http://schemas.microsoft.com/office/drawing/2014/main" id="{2822731B-9C32-4DD0-95AD-BE74A1D62A4D}"/>
+                <a16:creationId xmlns:a16="http://schemas.microsoft.com/office/drawing/2014/main" id="{E1A175B9-C2D8-4213-8850-A2BE551FCAC1}"/>
               </a:ext>
             </a:extLst>
           </p:cNvPr>
@@ -6321,7 +6321,7 @@
           <p:cNvPr id="37" name="Text 35">
             <a:extLst xmlns:a="http://schemas.openxmlformats.org/drawingml/2006/main">
               <a:ext uri="{FF2B5EF4-FFF2-40B4-BE49-F238E27FC236}">
-                <a16:creationId xmlns:a16="http://schemas.microsoft.com/office/drawing/2014/main" id="{C15E5371-EB44-4F5C-806E-5255078E7161}"/>
+                <a16:creationId xmlns:a16="http://schemas.microsoft.com/office/drawing/2014/main" id="{3BF23A9A-0BF3-407A-B406-1EDE49B765EC}"/>
               </a:ext>
             </a:extLst>
           </p:cNvPr>
@@ -6366,7 +6366,7 @@
           <p:cNvPr id="38" name="Text 36">
             <a:extLst xmlns:a="http://schemas.openxmlformats.org/drawingml/2006/main">
               <a:ext uri="{FF2B5EF4-FFF2-40B4-BE49-F238E27FC236}">
-                <a16:creationId xmlns:a16="http://schemas.microsoft.com/office/drawing/2014/main" id="{209133E2-0578-4E7F-8EC7-D473CB92092A}"/>
+                <a16:creationId xmlns:a16="http://schemas.microsoft.com/office/drawing/2014/main" id="{C1AB8E2F-EF6B-4B43-AA3C-AD1A2AB2F272}"/>
               </a:ext>
             </a:extLst>
           </p:cNvPr>
@@ -6411,7 +6411,7 @@
           <p:cNvPr id="39" name="Text 37">
             <a:extLst xmlns:a="http://schemas.openxmlformats.org/drawingml/2006/main">
               <a:ext uri="{FF2B5EF4-FFF2-40B4-BE49-F238E27FC236}">
-                <a16:creationId xmlns:a16="http://schemas.microsoft.com/office/drawing/2014/main" id="{41E9A03E-2BE1-4F38-B4C3-2F29268C6E03}"/>
+                <a16:creationId xmlns:a16="http://schemas.microsoft.com/office/drawing/2014/main" id="{43402633-FA29-49A4-95DC-CAA676B335FC}"/>
               </a:ext>
             </a:extLst>
           </p:cNvPr>
@@ -6459,7 +6459,7 @@
           <p:cNvPr id="40" name="Shape 38">
             <a:extLst xmlns:a="http://schemas.openxmlformats.org/drawingml/2006/main">
               <a:ext uri="{FF2B5EF4-FFF2-40B4-BE49-F238E27FC236}">
-                <a16:creationId xmlns:a16="http://schemas.microsoft.com/office/drawing/2014/main" id="{6F3FE31E-4DF9-4E46-8345-05807C817686}"/>
+                <a16:creationId xmlns:a16="http://schemas.microsoft.com/office/drawing/2014/main" id="{7319EB09-573F-4AAB-B03D-825D79B44665}"/>
               </a:ext>
             </a:extLst>
           </p:cNvPr>
@@ -6506,7 +6506,7 @@
           <p:cNvPr id="41" name="Text 39">
             <a:extLst xmlns:a="http://schemas.openxmlformats.org/drawingml/2006/main">
               <a:ext uri="{FF2B5EF4-FFF2-40B4-BE49-F238E27FC236}">
-                <a16:creationId xmlns:a16="http://schemas.microsoft.com/office/drawing/2014/main" id="{BC300BEA-F349-49F2-B9DA-116058A89405}"/>
+                <a16:creationId xmlns:a16="http://schemas.microsoft.com/office/drawing/2014/main" id="{3E2DB3A0-4B6B-431D-9373-A66DFF638658}"/>
               </a:ext>
             </a:extLst>
           </p:cNvPr>
@@ -6551,7 +6551,7 @@
           <p:cNvPr id="42" name="Text 40">
             <a:extLst xmlns:a="http://schemas.openxmlformats.org/drawingml/2006/main">
               <a:ext uri="{FF2B5EF4-FFF2-40B4-BE49-F238E27FC236}">
-                <a16:creationId xmlns:a16="http://schemas.microsoft.com/office/drawing/2014/main" id="{72457F25-33B5-48BA-848C-2EA4DA7D3A82}"/>
+                <a16:creationId xmlns:a16="http://schemas.microsoft.com/office/drawing/2014/main" id="{94AC91D8-7626-4AA0-9B5C-043964A74E8C}"/>
               </a:ext>
             </a:extLst>
           </p:cNvPr>
@@ -6596,7 +6596,7 @@
           <p:cNvPr id="43" name="Text 41">
             <a:extLst xmlns:a="http://schemas.openxmlformats.org/drawingml/2006/main">
               <a:ext uri="{FF2B5EF4-FFF2-40B4-BE49-F238E27FC236}">
-                <a16:creationId xmlns:a16="http://schemas.microsoft.com/office/drawing/2014/main" id="{34E818F9-2E14-4532-A6E3-DD4F99A049B0}"/>
+                <a16:creationId xmlns:a16="http://schemas.microsoft.com/office/drawing/2014/main" id="{9FE3A24C-5103-4E57-B82D-61988EADEC71}"/>
               </a:ext>
             </a:extLst>
           </p:cNvPr>
@@ -6644,7 +6644,7 @@
           <p:cNvPr id="44" name="Shape 42">
             <a:extLst xmlns:a="http://schemas.openxmlformats.org/drawingml/2006/main">
               <a:ext uri="{FF2B5EF4-FFF2-40B4-BE49-F238E27FC236}">
-                <a16:creationId xmlns:a16="http://schemas.microsoft.com/office/drawing/2014/main" id="{202184FA-E236-473C-B270-CB1D043248B2}"/>
+                <a16:creationId xmlns:a16="http://schemas.microsoft.com/office/drawing/2014/main" id="{44A53926-FFD4-41E5-A148-F74D8D0B2A37}"/>
               </a:ext>
             </a:extLst>
           </p:cNvPr>
@@ -6691,7 +6691,7 @@
           <p:cNvPr id="45" name="Text 43">
             <a:extLst xmlns:a="http://schemas.openxmlformats.org/drawingml/2006/main">
               <a:ext uri="{FF2B5EF4-FFF2-40B4-BE49-F238E27FC236}">
-                <a16:creationId xmlns:a16="http://schemas.microsoft.com/office/drawing/2014/main" id="{58268BE8-121A-4648-9B27-39B76D1A4FD0}"/>
+                <a16:creationId xmlns:a16="http://schemas.microsoft.com/office/drawing/2014/main" id="{9076C8C0-D114-40F0-B783-F835D5181CA1}"/>
               </a:ext>
             </a:extLst>
           </p:cNvPr>
@@ -6736,7 +6736,7 @@
           <p:cNvPr id="46" name="Text 44">
             <a:extLst xmlns:a="http://schemas.openxmlformats.org/drawingml/2006/main">
               <a:ext uri="{FF2B5EF4-FFF2-40B4-BE49-F238E27FC236}">
-                <a16:creationId xmlns:a16="http://schemas.microsoft.com/office/drawing/2014/main" id="{1BEABF59-6515-4704-BDC2-3C58B431D612}"/>
+                <a16:creationId xmlns:a16="http://schemas.microsoft.com/office/drawing/2014/main" id="{A445D0A6-BF1B-45F5-BB30-C6B3AF18A55A}"/>
               </a:ext>
             </a:extLst>
           </p:cNvPr>
@@ -6781,7 +6781,7 @@
           <p:cNvPr id="47" name="Text 45">
             <a:extLst xmlns:a="http://schemas.openxmlformats.org/drawingml/2006/main">
               <a:ext uri="{FF2B5EF4-FFF2-40B4-BE49-F238E27FC236}">
-                <a16:creationId xmlns:a16="http://schemas.microsoft.com/office/drawing/2014/main" id="{D602032F-C15A-4C04-B38C-0E94D07FAA6B}"/>
+                <a16:creationId xmlns:a16="http://schemas.microsoft.com/office/drawing/2014/main" id="{C51589FE-A505-4FC7-AD5C-F2F3BDB089EE}"/>
               </a:ext>
             </a:extLst>
           </p:cNvPr>
@@ -6829,7 +6829,7 @@
           <p:cNvPr id="48" name="Shape 46">
             <a:extLst xmlns:a="http://schemas.openxmlformats.org/drawingml/2006/main">
               <a:ext uri="{FF2B5EF4-FFF2-40B4-BE49-F238E27FC236}">
-                <a16:creationId xmlns:a16="http://schemas.microsoft.com/office/drawing/2014/main" id="{CF3695D4-E4EA-4357-959B-AA2D377E9A4D}"/>
+                <a16:creationId xmlns:a16="http://schemas.microsoft.com/office/drawing/2014/main" id="{2ACE499B-BF3F-4F33-A9CE-596F920520AA}"/>
               </a:ext>
             </a:extLst>
           </p:cNvPr>
@@ -6876,7 +6876,7 @@
           <p:cNvPr id="49" name="Text 47">
             <a:extLst xmlns:a="http://schemas.openxmlformats.org/drawingml/2006/main">
               <a:ext uri="{FF2B5EF4-FFF2-40B4-BE49-F238E27FC236}">
-                <a16:creationId xmlns:a16="http://schemas.microsoft.com/office/drawing/2014/main" id="{AA0920C9-1193-492E-A4E2-A3FAB10BB58A}"/>
+                <a16:creationId xmlns:a16="http://schemas.microsoft.com/office/drawing/2014/main" id="{159D143A-CE5F-4FE6-80BF-9D6805D17D43}"/>
               </a:ext>
             </a:extLst>
           </p:cNvPr>
@@ -6921,7 +6921,7 @@
           <p:cNvPr id="50" name="Text 48">
             <a:extLst xmlns:a="http://schemas.openxmlformats.org/drawingml/2006/main">
               <a:ext uri="{FF2B5EF4-FFF2-40B4-BE49-F238E27FC236}">
-                <a16:creationId xmlns:a16="http://schemas.microsoft.com/office/drawing/2014/main" id="{169E89B9-9DC6-4549-B29B-E85EDFBA2314}"/>
+                <a16:creationId xmlns:a16="http://schemas.microsoft.com/office/drawing/2014/main" id="{C15589AC-FD4D-4E4E-8DCF-8C57CA481DB7}"/>
               </a:ext>
             </a:extLst>
           </p:cNvPr>
@@ -6966,7 +6966,7 @@
           <p:cNvPr id="51" name="Text 49">
             <a:extLst xmlns:a="http://schemas.openxmlformats.org/drawingml/2006/main">
               <a:ext uri="{FF2B5EF4-FFF2-40B4-BE49-F238E27FC236}">
-                <a16:creationId xmlns:a16="http://schemas.microsoft.com/office/drawing/2014/main" id="{E91E95CC-A52F-46F7-B140-56BD3A6AEDF4}"/>
+                <a16:creationId xmlns:a16="http://schemas.microsoft.com/office/drawing/2014/main" id="{F6F4E593-D33C-4B87-9AC6-CB7CA599F5C9}"/>
               </a:ext>
             </a:extLst>
           </p:cNvPr>
@@ -7014,7 +7014,7 @@
           <p:cNvPr id="52" name="Text 50">
             <a:extLst xmlns:a="http://schemas.openxmlformats.org/drawingml/2006/main">
               <a:ext uri="{FF2B5EF4-FFF2-40B4-BE49-F238E27FC236}">
-                <a16:creationId xmlns:a16="http://schemas.microsoft.com/office/drawing/2014/main" id="{24F2A593-687B-49F7-B301-615A8208732D}"/>
+                <a16:creationId xmlns:a16="http://schemas.microsoft.com/office/drawing/2014/main" id="{CE7FEFFC-EE79-41AF-83D9-B312F9C8132E}"/>
               </a:ext>
             </a:extLst>
           </p:cNvPr>
@@ -7060,7 +7060,7 @@
     </p:spTree>
     <p:extLst>
       <p:ext uri="{BB962C8B-B14F-4D97-AF65-F5344CB8AC3E}">
-        <p14:creationId xmlns:p14="http://schemas.microsoft.com/office/powerpoint/2010/main" val="375488760"/>
+        <p14:creationId xmlns:p14="http://schemas.microsoft.com/office/powerpoint/2010/main" val="2115886067"/>
       </p:ext>
     </p:extLst>
   </p:cSld>
@@ -7091,7 +7091,7 @@
           <p:cNvPr id="2" name="Text 0">
             <a:extLst xmlns:a="http://schemas.openxmlformats.org/drawingml/2006/main">
               <a:ext uri="{FF2B5EF4-FFF2-40B4-BE49-F238E27FC236}">
-                <a16:creationId xmlns:a16="http://schemas.microsoft.com/office/drawing/2014/main" id="{FFEA6243-7117-49A4-AFCA-654E827CD71A}"/>
+                <a16:creationId xmlns:a16="http://schemas.microsoft.com/office/drawing/2014/main" id="{7D6A2C2C-8204-447B-A672-46B84F609076}"/>
               </a:ext>
             </a:extLst>
           </p:cNvPr>
@@ -7136,7 +7136,7 @@
           <p:cNvPr id="3" name="Text 1">
             <a:extLst xmlns:a="http://schemas.openxmlformats.org/drawingml/2006/main">
               <a:ext uri="{FF2B5EF4-FFF2-40B4-BE49-F238E27FC236}">
-                <a16:creationId xmlns:a16="http://schemas.microsoft.com/office/drawing/2014/main" id="{18B449A7-D6E3-4972-93BE-19629744AE24}"/>
+                <a16:creationId xmlns:a16="http://schemas.microsoft.com/office/drawing/2014/main" id="{9C33329B-1637-4634-A22D-1F4A8AB81BCC}"/>
               </a:ext>
             </a:extLst>
           </p:cNvPr>
@@ -7181,7 +7181,7 @@
           <p:cNvPr id="4" name="Text 2">
             <a:extLst xmlns:a="http://schemas.openxmlformats.org/drawingml/2006/main">
               <a:ext uri="{FF2B5EF4-FFF2-40B4-BE49-F238E27FC236}">
-                <a16:creationId xmlns:a16="http://schemas.microsoft.com/office/drawing/2014/main" id="{2F1CDA4E-404A-42A4-AD7B-09DA9319F65C}"/>
+                <a16:creationId xmlns:a16="http://schemas.microsoft.com/office/drawing/2014/main" id="{EF12BFBC-9E5C-4AC8-A3B5-86AC5231B8D3}"/>
               </a:ext>
             </a:extLst>
           </p:cNvPr>
@@ -7226,7 +7226,7 @@
           <p:cNvPr id="5" name="Text 3">
             <a:extLst xmlns:a="http://schemas.openxmlformats.org/drawingml/2006/main">
               <a:ext uri="{FF2B5EF4-FFF2-40B4-BE49-F238E27FC236}">
-                <a16:creationId xmlns:a16="http://schemas.microsoft.com/office/drawing/2014/main" id="{57F4E772-D91D-4B11-A68F-412513A2514F}"/>
+                <a16:creationId xmlns:a16="http://schemas.microsoft.com/office/drawing/2014/main" id="{01BE8EE9-52A8-4D6F-960C-A6B89EF52C43}"/>
               </a:ext>
             </a:extLst>
           </p:cNvPr>
@@ -7271,7 +7271,7 @@
           <p:cNvPr id="6" name="Text 4">
             <a:extLst xmlns:a="http://schemas.openxmlformats.org/drawingml/2006/main">
               <a:ext uri="{FF2B5EF4-FFF2-40B4-BE49-F238E27FC236}">
-                <a16:creationId xmlns:a16="http://schemas.microsoft.com/office/drawing/2014/main" id="{2F324625-27BE-470B-87EE-D739B7B0C858}"/>
+                <a16:creationId xmlns:a16="http://schemas.microsoft.com/office/drawing/2014/main" id="{A9DADA0D-F81A-4CC3-A35E-99E4A792AD0C}"/>
               </a:ext>
             </a:extLst>
           </p:cNvPr>
@@ -7319,7 +7319,7 @@
           <p:cNvPr id="7" name="Shape 5">
             <a:extLst xmlns:a="http://schemas.openxmlformats.org/drawingml/2006/main">
               <a:ext uri="{FF2B5EF4-FFF2-40B4-BE49-F238E27FC236}">
-                <a16:creationId xmlns:a16="http://schemas.microsoft.com/office/drawing/2014/main" id="{BEB5361F-FBDB-43A3-94EC-6EB11A702903}"/>
+                <a16:creationId xmlns:a16="http://schemas.microsoft.com/office/drawing/2014/main" id="{047957DA-A093-4888-8C0C-5E1A001F5DE2}"/>
               </a:ext>
             </a:extLst>
           </p:cNvPr>
@@ -7363,7 +7363,7 @@
           <p:nvPr/>
         </p:nvPicPr>
         <p:blipFill>
-          <a:blip xmlns:r="http://schemas.openxmlformats.org/officeDocument/2006/relationships" xmlns:a="http://schemas.openxmlformats.org/drawingml/2006/main" r:embed="Rf60217384cb34468"/>
+          <a:blip xmlns:r="http://schemas.openxmlformats.org/officeDocument/2006/relationships" xmlns:a="http://schemas.openxmlformats.org/drawingml/2006/main" r:embed="Rc709e4e0ae83451a"/>
           <a:stretch xmlns:a="http://schemas.openxmlformats.org/drawingml/2006/main">
             <a:fillRect l="0" t="0" r="0" b="0"/>
           </a:stretch>
@@ -7383,7 +7383,7 @@
           <p:cNvPr id="9" name="Text 6">
             <a:extLst xmlns:a="http://schemas.openxmlformats.org/drawingml/2006/main">
               <a:ext uri="{FF2B5EF4-FFF2-40B4-BE49-F238E27FC236}">
-                <a16:creationId xmlns:a16="http://schemas.microsoft.com/office/drawing/2014/main" id="{27A56FAA-8F5D-47FA-8110-6043D66E3095}"/>
+                <a16:creationId xmlns:a16="http://schemas.microsoft.com/office/drawing/2014/main" id="{EC9940D5-249E-4F7B-9ED1-97F78CF20313}"/>
               </a:ext>
             </a:extLst>
           </p:cNvPr>
@@ -7431,7 +7431,7 @@
           <p:cNvPr id="10" name="Text 7">
             <a:extLst xmlns:a="http://schemas.openxmlformats.org/drawingml/2006/main">
               <a:ext uri="{FF2B5EF4-FFF2-40B4-BE49-F238E27FC236}">
-                <a16:creationId xmlns:a16="http://schemas.microsoft.com/office/drawing/2014/main" id="{AF494CB4-9766-49C5-89F7-9511DA4B13AB}"/>
+                <a16:creationId xmlns:a16="http://schemas.microsoft.com/office/drawing/2014/main" id="{4E7D7B78-9A7D-47E4-B682-624A9210C2BC}"/>
               </a:ext>
             </a:extLst>
           </p:cNvPr>
@@ -7476,7 +7476,7 @@
           <p:cNvPr id="11" name="Shape 8">
             <a:extLst xmlns:a="http://schemas.openxmlformats.org/drawingml/2006/main">
               <a:ext uri="{FF2B5EF4-FFF2-40B4-BE49-F238E27FC236}">
-                <a16:creationId xmlns:a16="http://schemas.microsoft.com/office/drawing/2014/main" id="{F345CFA9-3EE5-4381-BC2A-651A38683408}"/>
+                <a16:creationId xmlns:a16="http://schemas.microsoft.com/office/drawing/2014/main" id="{B09EC3B6-099D-4275-A079-A33CCB541580}"/>
               </a:ext>
             </a:extLst>
           </p:cNvPr>
@@ -7523,7 +7523,7 @@
           <p:cNvPr id="12" name="Text 9">
             <a:extLst xmlns:a="http://schemas.openxmlformats.org/drawingml/2006/main">
               <a:ext uri="{FF2B5EF4-FFF2-40B4-BE49-F238E27FC236}">
-                <a16:creationId xmlns:a16="http://schemas.microsoft.com/office/drawing/2014/main" id="{00B22076-CB27-4F94-8FF9-D800DA71A0D6}"/>
+                <a16:creationId xmlns:a16="http://schemas.microsoft.com/office/drawing/2014/main" id="{1D992E07-C545-4813-A372-5CFCA9085015}"/>
               </a:ext>
             </a:extLst>
           </p:cNvPr>
@@ -7582,7 +7582,7 @@
           <p:cNvPr id="13" name="Shape 10">
             <a:extLst xmlns:a="http://schemas.openxmlformats.org/drawingml/2006/main">
               <a:ext uri="{FF2B5EF4-FFF2-40B4-BE49-F238E27FC236}">
-                <a16:creationId xmlns:a16="http://schemas.microsoft.com/office/drawing/2014/main" id="{14D08725-653C-471D-8ACF-233E7A71CE75}"/>
+                <a16:creationId xmlns:a16="http://schemas.microsoft.com/office/drawing/2014/main" id="{82F0AE8B-F931-4563-B733-E11509C53494}"/>
               </a:ext>
             </a:extLst>
           </p:cNvPr>
@@ -7626,7 +7626,7 @@
           <p:nvPr/>
         </p:nvPicPr>
         <p:blipFill>
-          <a:blip xmlns:r="http://schemas.openxmlformats.org/officeDocument/2006/relationships" xmlns:a="http://schemas.openxmlformats.org/drawingml/2006/main" r:embed="R9364614e0bf74fa0"/>
+          <a:blip xmlns:r="http://schemas.openxmlformats.org/officeDocument/2006/relationships" xmlns:a="http://schemas.openxmlformats.org/drawingml/2006/main" r:embed="R7f96038fa9b54867"/>
           <a:stretch xmlns:a="http://schemas.openxmlformats.org/drawingml/2006/main">
             <a:fillRect l="0" t="0" r="0" b="0"/>
           </a:stretch>
@@ -7646,7 +7646,7 @@
           <p:cNvPr id="15" name="Text 11">
             <a:extLst xmlns:a="http://schemas.openxmlformats.org/drawingml/2006/main">
               <a:ext uri="{FF2B5EF4-FFF2-40B4-BE49-F238E27FC236}">
-                <a16:creationId xmlns:a16="http://schemas.microsoft.com/office/drawing/2014/main" id="{A75C7A31-A695-4077-A31B-2E4D8DD4FAAD}"/>
+                <a16:creationId xmlns:a16="http://schemas.microsoft.com/office/drawing/2014/main" id="{EACDE75D-4B50-41D7-B876-E411AB3BE0AF}"/>
               </a:ext>
             </a:extLst>
           </p:cNvPr>
@@ -7694,7 +7694,7 @@
           <p:cNvPr id="16" name="Text 12">
             <a:extLst xmlns:a="http://schemas.openxmlformats.org/drawingml/2006/main">
               <a:ext uri="{FF2B5EF4-FFF2-40B4-BE49-F238E27FC236}">
-                <a16:creationId xmlns:a16="http://schemas.microsoft.com/office/drawing/2014/main" id="{0F0564E3-186F-41A6-931A-6A5CFF10F2EC}"/>
+                <a16:creationId xmlns:a16="http://schemas.microsoft.com/office/drawing/2014/main" id="{59027797-D0DE-4489-9D41-EEDDBE5CDC42}"/>
               </a:ext>
             </a:extLst>
           </p:cNvPr>
@@ -7739,7 +7739,7 @@
           <p:cNvPr id="17" name="Shape 13">
             <a:extLst xmlns:a="http://schemas.openxmlformats.org/drawingml/2006/main">
               <a:ext uri="{FF2B5EF4-FFF2-40B4-BE49-F238E27FC236}">
-                <a16:creationId xmlns:a16="http://schemas.microsoft.com/office/drawing/2014/main" id="{FA7DF620-A4F3-4EEF-B030-1F4ED3045D9E}"/>
+                <a16:creationId xmlns:a16="http://schemas.microsoft.com/office/drawing/2014/main" id="{F505853E-1E12-44C0-97B8-BC54ACDDA5E6}"/>
               </a:ext>
             </a:extLst>
           </p:cNvPr>
@@ -7786,7 +7786,7 @@
           <p:cNvPr id="18" name="Text 14">
             <a:extLst xmlns:a="http://schemas.openxmlformats.org/drawingml/2006/main">
               <a:ext uri="{FF2B5EF4-FFF2-40B4-BE49-F238E27FC236}">
-                <a16:creationId xmlns:a16="http://schemas.microsoft.com/office/drawing/2014/main" id="{1B4D314E-4954-4358-A8E1-E19AD9E80A41}"/>
+                <a16:creationId xmlns:a16="http://schemas.microsoft.com/office/drawing/2014/main" id="{3685D4D7-5CD8-427B-A6A7-0E5D9C2C02B0}"/>
               </a:ext>
             </a:extLst>
           </p:cNvPr>
@@ -7831,7 +7831,7 @@
           <p:cNvPr id="19" name="Text 15">
             <a:extLst xmlns:a="http://schemas.openxmlformats.org/drawingml/2006/main">
               <a:ext uri="{FF2B5EF4-FFF2-40B4-BE49-F238E27FC236}">
-                <a16:creationId xmlns:a16="http://schemas.microsoft.com/office/drawing/2014/main" id="{40524692-CA24-4986-AFA1-6DF32261EB15}"/>
+                <a16:creationId xmlns:a16="http://schemas.microsoft.com/office/drawing/2014/main" id="{13E62D42-1D9E-41C8-A0AC-0F9588939FD2}"/>
               </a:ext>
             </a:extLst>
           </p:cNvPr>
@@ -7876,7 +7876,7 @@
           <p:cNvPr id="20" name="Text 16">
             <a:extLst xmlns:a="http://schemas.openxmlformats.org/drawingml/2006/main">
               <a:ext uri="{FF2B5EF4-FFF2-40B4-BE49-F238E27FC236}">
-                <a16:creationId xmlns:a16="http://schemas.microsoft.com/office/drawing/2014/main" id="{2D7C37CA-6EBC-42CE-BB3D-C5A9F9940EF1}"/>
+                <a16:creationId xmlns:a16="http://schemas.microsoft.com/office/drawing/2014/main" id="{2EDF42DB-A458-473C-82BC-9FDAE0E2954E}"/>
               </a:ext>
             </a:extLst>
           </p:cNvPr>
@@ -7921,7 +7921,7 @@
           <p:cNvPr id="21" name="Text 17">
             <a:extLst xmlns:a="http://schemas.openxmlformats.org/drawingml/2006/main">
               <a:ext uri="{FF2B5EF4-FFF2-40B4-BE49-F238E27FC236}">
-                <a16:creationId xmlns:a16="http://schemas.microsoft.com/office/drawing/2014/main" id="{F5C61FED-15D7-4BDD-8940-8BDE56FF880D}"/>
+                <a16:creationId xmlns:a16="http://schemas.microsoft.com/office/drawing/2014/main" id="{756C2298-8D13-4DC3-AAF2-940AAC15E128}"/>
               </a:ext>
             </a:extLst>
           </p:cNvPr>
@@ -7966,7 +7966,7 @@
           <p:cNvPr id="22" name="Text 18">
             <a:extLst xmlns:a="http://schemas.openxmlformats.org/drawingml/2006/main">
               <a:ext uri="{FF2B5EF4-FFF2-40B4-BE49-F238E27FC236}">
-                <a16:creationId xmlns:a16="http://schemas.microsoft.com/office/drawing/2014/main" id="{16ED643A-E1FC-486B-8E38-BB65FEA55289}"/>
+                <a16:creationId xmlns:a16="http://schemas.microsoft.com/office/drawing/2014/main" id="{1597F0DB-037C-413A-8E48-F0D320E2E191}"/>
               </a:ext>
             </a:extLst>
           </p:cNvPr>
@@ -8011,7 +8011,7 @@
           <p:cNvPr id="23" name="Text 19">
             <a:extLst xmlns:a="http://schemas.openxmlformats.org/drawingml/2006/main">
               <a:ext uri="{FF2B5EF4-FFF2-40B4-BE49-F238E27FC236}">
-                <a16:creationId xmlns:a16="http://schemas.microsoft.com/office/drawing/2014/main" id="{345AF3C9-B8AC-4BE2-86EC-9FC3AE78C8B3}"/>
+                <a16:creationId xmlns:a16="http://schemas.microsoft.com/office/drawing/2014/main" id="{9C7C1F7D-2823-4EF9-8676-CC605F74AC4C}"/>
               </a:ext>
             </a:extLst>
           </p:cNvPr>
@@ -8056,7 +8056,7 @@
           <p:cNvPr id="24" name="Text 20">
             <a:extLst xmlns:a="http://schemas.openxmlformats.org/drawingml/2006/main">
               <a:ext uri="{FF2B5EF4-FFF2-40B4-BE49-F238E27FC236}">
-                <a16:creationId xmlns:a16="http://schemas.microsoft.com/office/drawing/2014/main" id="{226F2B80-92E1-4095-BE4D-63876DCF557E}"/>
+                <a16:creationId xmlns:a16="http://schemas.microsoft.com/office/drawing/2014/main" id="{63E6AFB6-E561-452E-96F4-EAEB327A85A0}"/>
               </a:ext>
             </a:extLst>
           </p:cNvPr>
@@ -8101,7 +8101,7 @@
           <p:cNvPr id="25" name="Shape 21">
             <a:extLst xmlns:a="http://schemas.openxmlformats.org/drawingml/2006/main">
               <a:ext uri="{FF2B5EF4-FFF2-40B4-BE49-F238E27FC236}">
-                <a16:creationId xmlns:a16="http://schemas.microsoft.com/office/drawing/2014/main" id="{9A2DEE45-05BA-4BFD-A01D-918C1BD037E3}"/>
+                <a16:creationId xmlns:a16="http://schemas.microsoft.com/office/drawing/2014/main" id="{8B27E39C-7A76-44E9-8F7C-4DBA5495ECE2}"/>
               </a:ext>
             </a:extLst>
           </p:cNvPr>
@@ -8137,7 +8137,7 @@
           <p:cNvPr id="26" name="Text 22">
             <a:extLst xmlns:a="http://schemas.openxmlformats.org/drawingml/2006/main">
               <a:ext uri="{FF2B5EF4-FFF2-40B4-BE49-F238E27FC236}">
-                <a16:creationId xmlns:a16="http://schemas.microsoft.com/office/drawing/2014/main" id="{1E2F06D6-E5F4-4EA6-A823-825B64B07091}"/>
+                <a16:creationId xmlns:a16="http://schemas.microsoft.com/office/drawing/2014/main" id="{53BD9B50-79DE-4DC3-9097-9A484D4F8722}"/>
               </a:ext>
             </a:extLst>
           </p:cNvPr>
@@ -8215,7 +8215,7 @@
           <p:cNvPr id="27" name="Text 23">
             <a:extLst xmlns:a="http://schemas.openxmlformats.org/drawingml/2006/main">
               <a:ext uri="{FF2B5EF4-FFF2-40B4-BE49-F238E27FC236}">
-                <a16:creationId xmlns:a16="http://schemas.microsoft.com/office/drawing/2014/main" id="{21B41A13-B94F-4848-9459-A81F6717AD92}"/>
+                <a16:creationId xmlns:a16="http://schemas.microsoft.com/office/drawing/2014/main" id="{735C840B-C2CC-4F83-A24D-C324F0161B69}"/>
               </a:ext>
             </a:extLst>
           </p:cNvPr>
@@ -8261,7 +8261,7 @@
     </p:spTree>
     <p:extLst>
       <p:ext uri="{BB962C8B-B14F-4D97-AF65-F5344CB8AC3E}">
-        <p14:creationId xmlns:p14="http://schemas.microsoft.com/office/powerpoint/2010/main" val="1671646746"/>
+        <p14:creationId xmlns:p14="http://schemas.microsoft.com/office/powerpoint/2010/main" val="947803610"/>
       </p:ext>
     </p:extLst>
   </p:cSld>
@@ -8292,7 +8292,7 @@
           <p:cNvPr id="2" name="Text 0">
             <a:extLst xmlns:a="http://schemas.openxmlformats.org/drawingml/2006/main">
               <a:ext uri="{FF2B5EF4-FFF2-40B4-BE49-F238E27FC236}">
-                <a16:creationId xmlns:a16="http://schemas.microsoft.com/office/drawing/2014/main" id="{80B4A953-911D-4271-9E45-BC1ECF075B4A}"/>
+                <a16:creationId xmlns:a16="http://schemas.microsoft.com/office/drawing/2014/main" id="{47D135B6-5D23-4FE8-9F53-EA59E6B8D2FA}"/>
               </a:ext>
             </a:extLst>
           </p:cNvPr>
@@ -8337,7 +8337,7 @@
           <p:cNvPr id="3" name="Text 1">
             <a:extLst xmlns:a="http://schemas.openxmlformats.org/drawingml/2006/main">
               <a:ext uri="{FF2B5EF4-FFF2-40B4-BE49-F238E27FC236}">
-                <a16:creationId xmlns:a16="http://schemas.microsoft.com/office/drawing/2014/main" id="{02DE17C0-A779-47F2-9EF4-B730C00EDE63}"/>
+                <a16:creationId xmlns:a16="http://schemas.microsoft.com/office/drawing/2014/main" id="{B6FD1F6C-A7A8-40BF-B25F-CD9ABDA3A132}"/>
               </a:ext>
             </a:extLst>
           </p:cNvPr>
@@ -8382,7 +8382,7 @@
           <p:cNvPr id="4" name="Text 2">
             <a:extLst xmlns:a="http://schemas.openxmlformats.org/drawingml/2006/main">
               <a:ext uri="{FF2B5EF4-FFF2-40B4-BE49-F238E27FC236}">
-                <a16:creationId xmlns:a16="http://schemas.microsoft.com/office/drawing/2014/main" id="{813C6A0B-7993-45D3-B3A4-F17BFA26C26E}"/>
+                <a16:creationId xmlns:a16="http://schemas.microsoft.com/office/drawing/2014/main" id="{603A8FEF-156F-4985-B173-28E7D5887878}"/>
               </a:ext>
             </a:extLst>
           </p:cNvPr>
@@ -8427,7 +8427,7 @@
           <p:cNvPr id="5" name="Text 3">
             <a:extLst xmlns:a="http://schemas.openxmlformats.org/drawingml/2006/main">
               <a:ext uri="{FF2B5EF4-FFF2-40B4-BE49-F238E27FC236}">
-                <a16:creationId xmlns:a16="http://schemas.microsoft.com/office/drawing/2014/main" id="{70777BAF-96E7-4265-A1EE-F9B7BEE37718}"/>
+                <a16:creationId xmlns:a16="http://schemas.microsoft.com/office/drawing/2014/main" id="{96CA3872-9F60-4C6D-A6EC-47FD30865425}"/>
               </a:ext>
             </a:extLst>
           </p:cNvPr>
@@ -8472,7 +8472,7 @@
           <p:cNvPr id="6" name="Shape 4">
             <a:extLst xmlns:a="http://schemas.openxmlformats.org/drawingml/2006/main">
               <a:ext uri="{FF2B5EF4-FFF2-40B4-BE49-F238E27FC236}">
-                <a16:creationId xmlns:a16="http://schemas.microsoft.com/office/drawing/2014/main" id="{0A1EAED6-8519-40FC-A7CF-8F0591E3A26F}"/>
+                <a16:creationId xmlns:a16="http://schemas.microsoft.com/office/drawing/2014/main" id="{44EC2C6E-0569-4898-B15E-4FBD1C548765}"/>
               </a:ext>
             </a:extLst>
           </p:cNvPr>
@@ -8519,7 +8519,7 @@
           <p:cNvPr id="7" name="Text 5">
             <a:extLst xmlns:a="http://schemas.openxmlformats.org/drawingml/2006/main">
               <a:ext uri="{FF2B5EF4-FFF2-40B4-BE49-F238E27FC236}">
-                <a16:creationId xmlns:a16="http://schemas.microsoft.com/office/drawing/2014/main" id="{97FE9352-B0E4-438B-AD8D-18C7EC7FC74A}"/>
+                <a16:creationId xmlns:a16="http://schemas.microsoft.com/office/drawing/2014/main" id="{0877028A-9139-4F65-985F-0858A8C7E80E}"/>
               </a:ext>
             </a:extLst>
           </p:cNvPr>
@@ -8564,7 +8564,7 @@
           <p:cNvPr id="8" name="Text 6">
             <a:extLst xmlns:a="http://schemas.openxmlformats.org/drawingml/2006/main">
               <a:ext uri="{FF2B5EF4-FFF2-40B4-BE49-F238E27FC236}">
-                <a16:creationId xmlns:a16="http://schemas.microsoft.com/office/drawing/2014/main" id="{B1E5EA18-F1CC-4CDF-9232-7940E761F5CA}"/>
+                <a16:creationId xmlns:a16="http://schemas.microsoft.com/office/drawing/2014/main" id="{3EA2CBB8-0D9C-42BE-AC15-398AB5D2C045}"/>
               </a:ext>
             </a:extLst>
           </p:cNvPr>
@@ -8681,7 +8681,7 @@
           <p:cNvPr id="9" name="Shape 7">
             <a:extLst xmlns:a="http://schemas.openxmlformats.org/drawingml/2006/main">
               <a:ext uri="{FF2B5EF4-FFF2-40B4-BE49-F238E27FC236}">
-                <a16:creationId xmlns:a16="http://schemas.microsoft.com/office/drawing/2014/main" id="{9464B6A0-0A3F-4997-97DA-2AD11F3CEE56}"/>
+                <a16:creationId xmlns:a16="http://schemas.microsoft.com/office/drawing/2014/main" id="{9DCF6D6A-4082-4747-945F-EAE0B7A67143}"/>
               </a:ext>
             </a:extLst>
           </p:cNvPr>
@@ -8728,7 +8728,7 @@
           <p:cNvPr id="10" name="Text 8">
             <a:extLst xmlns:a="http://schemas.openxmlformats.org/drawingml/2006/main">
               <a:ext uri="{FF2B5EF4-FFF2-40B4-BE49-F238E27FC236}">
-                <a16:creationId xmlns:a16="http://schemas.microsoft.com/office/drawing/2014/main" id="{DE48EBE5-B4C6-4AF3-A48A-FA29350C284E}"/>
+                <a16:creationId xmlns:a16="http://schemas.microsoft.com/office/drawing/2014/main" id="{FA51A592-4AE0-4B8D-A1FB-A37C30E11499}"/>
               </a:ext>
             </a:extLst>
           </p:cNvPr>
@@ -8773,7 +8773,7 @@
           <p:cNvPr id="11" name="Text 9">
             <a:extLst xmlns:a="http://schemas.openxmlformats.org/drawingml/2006/main">
               <a:ext uri="{FF2B5EF4-FFF2-40B4-BE49-F238E27FC236}">
-                <a16:creationId xmlns:a16="http://schemas.microsoft.com/office/drawing/2014/main" id="{598BF406-2C95-4DE9-88FB-CE01FA34303F}"/>
+                <a16:creationId xmlns:a16="http://schemas.microsoft.com/office/drawing/2014/main" id="{E1A9A9E4-D43D-4017-A38F-1FC72443F846}"/>
               </a:ext>
             </a:extLst>
           </p:cNvPr>
@@ -8912,7 +8912,7 @@
           <p:cNvPr id="12" name="Shape 10">
             <a:extLst xmlns:a="http://schemas.openxmlformats.org/drawingml/2006/main">
               <a:ext uri="{FF2B5EF4-FFF2-40B4-BE49-F238E27FC236}">
-                <a16:creationId xmlns:a16="http://schemas.microsoft.com/office/drawing/2014/main" id="{6517B240-15BE-4C67-BF07-4B1BE18BC58E}"/>
+                <a16:creationId xmlns:a16="http://schemas.microsoft.com/office/drawing/2014/main" id="{16A50691-C17B-403C-A024-74EB699A2880}"/>
               </a:ext>
             </a:extLst>
           </p:cNvPr>
@@ -8959,7 +8959,7 @@
           <p:cNvPr id="13" name="Text 11">
             <a:extLst xmlns:a="http://schemas.openxmlformats.org/drawingml/2006/main">
               <a:ext uri="{FF2B5EF4-FFF2-40B4-BE49-F238E27FC236}">
-                <a16:creationId xmlns:a16="http://schemas.microsoft.com/office/drawing/2014/main" id="{47CAFCD5-7802-4AB4-99A6-2DE730EFFC06}"/>
+                <a16:creationId xmlns:a16="http://schemas.microsoft.com/office/drawing/2014/main" id="{0F192B9F-63D5-4075-B94A-7D34958C7763}"/>
               </a:ext>
             </a:extLst>
           </p:cNvPr>
@@ -9004,7 +9004,7 @@
           <p:cNvPr id="14" name="Text 12">
             <a:extLst xmlns:a="http://schemas.openxmlformats.org/drawingml/2006/main">
               <a:ext uri="{FF2B5EF4-FFF2-40B4-BE49-F238E27FC236}">
-                <a16:creationId xmlns:a16="http://schemas.microsoft.com/office/drawing/2014/main" id="{241B6770-1551-4FA4-912E-D597CDFA9390}"/>
+                <a16:creationId xmlns:a16="http://schemas.microsoft.com/office/drawing/2014/main" id="{3171E06D-0DFA-4E60-A2ED-5E42A2D5F3FB}"/>
               </a:ext>
             </a:extLst>
           </p:cNvPr>
@@ -9143,7 +9143,7 @@
           <p:cNvPr id="15" name="Shape 13">
             <a:extLst xmlns:a="http://schemas.openxmlformats.org/drawingml/2006/main">
               <a:ext uri="{FF2B5EF4-FFF2-40B4-BE49-F238E27FC236}">
-                <a16:creationId xmlns:a16="http://schemas.microsoft.com/office/drawing/2014/main" id="{9AB32CED-C395-4CF7-B9F0-9DB0F51ABAF9}"/>
+                <a16:creationId xmlns:a16="http://schemas.microsoft.com/office/drawing/2014/main" id="{651384FA-ECC7-4E06-8D62-599CB89E9DE7}"/>
               </a:ext>
             </a:extLst>
           </p:cNvPr>
@@ -9190,7 +9190,7 @@
           <p:cNvPr id="16" name="Shape 14">
             <a:extLst xmlns:a="http://schemas.openxmlformats.org/drawingml/2006/main">
               <a:ext uri="{FF2B5EF4-FFF2-40B4-BE49-F238E27FC236}">
-                <a16:creationId xmlns:a16="http://schemas.microsoft.com/office/drawing/2014/main" id="{36E8D991-7215-4002-8406-42DC416A151E}"/>
+                <a16:creationId xmlns:a16="http://schemas.microsoft.com/office/drawing/2014/main" id="{66A8B8F6-6C35-49A4-8656-59741D914AD7}"/>
               </a:ext>
             </a:extLst>
           </p:cNvPr>
@@ -9228,7 +9228,7 @@
           <p:cNvPr id="17" name="Text 15">
             <a:extLst xmlns:a="http://schemas.openxmlformats.org/drawingml/2006/main">
               <a:ext uri="{FF2B5EF4-FFF2-40B4-BE49-F238E27FC236}">
-                <a16:creationId xmlns:a16="http://schemas.microsoft.com/office/drawing/2014/main" id="{D2797AD8-AA60-402C-B775-59D071BBE9F5}"/>
+                <a16:creationId xmlns:a16="http://schemas.microsoft.com/office/drawing/2014/main" id="{3EE60373-BECA-4AE4-A703-AB835968349A}"/>
               </a:ext>
             </a:extLst>
           </p:cNvPr>
@@ -9273,7 +9273,7 @@
           <p:cNvPr id="18" name="Text 16">
             <a:extLst xmlns:a="http://schemas.openxmlformats.org/drawingml/2006/main">
               <a:ext uri="{FF2B5EF4-FFF2-40B4-BE49-F238E27FC236}">
-                <a16:creationId xmlns:a16="http://schemas.microsoft.com/office/drawing/2014/main" id="{D8905D48-F266-4F82-A346-7C650F5E07E8}"/>
+                <a16:creationId xmlns:a16="http://schemas.microsoft.com/office/drawing/2014/main" id="{E4DC2000-7FC7-4750-A4D3-8595797CDE19}"/>
               </a:ext>
             </a:extLst>
           </p:cNvPr>
@@ -9318,7 +9318,7 @@
           <p:cNvPr id="19" name="Text 17">
             <a:extLst xmlns:a="http://schemas.openxmlformats.org/drawingml/2006/main">
               <a:ext uri="{FF2B5EF4-FFF2-40B4-BE49-F238E27FC236}">
-                <a16:creationId xmlns:a16="http://schemas.microsoft.com/office/drawing/2014/main" id="{3236C627-88B0-43B9-8BEA-F751C57376CB}"/>
+                <a16:creationId xmlns:a16="http://schemas.microsoft.com/office/drawing/2014/main" id="{1363487A-37F7-4C45-9946-6DB6FADB8BA7}"/>
               </a:ext>
             </a:extLst>
           </p:cNvPr>
@@ -9364,7 +9364,7 @@
     </p:spTree>
     <p:extLst>
       <p:ext uri="{BB962C8B-B14F-4D97-AF65-F5344CB8AC3E}">
-        <p14:creationId xmlns:p14="http://schemas.microsoft.com/office/powerpoint/2010/main" val="664316324"/>
+        <p14:creationId xmlns:p14="http://schemas.microsoft.com/office/powerpoint/2010/main" val="2038550398"/>
       </p:ext>
     </p:extLst>
   </p:cSld>
@@ -9395,7 +9395,7 @@
           <p:cNvPr id="2" name="Text 0">
             <a:extLst xmlns:a="http://schemas.openxmlformats.org/drawingml/2006/main">
               <a:ext uri="{FF2B5EF4-FFF2-40B4-BE49-F238E27FC236}">
-                <a16:creationId xmlns:a16="http://schemas.microsoft.com/office/drawing/2014/main" id="{BF3D0C11-2058-4EFE-82A2-5569CC0D9EB9}"/>
+                <a16:creationId xmlns:a16="http://schemas.microsoft.com/office/drawing/2014/main" id="{F7C39B87-46AB-464B-9FE6-355EB88F1B7A}"/>
               </a:ext>
             </a:extLst>
           </p:cNvPr>
@@ -9440,7 +9440,7 @@
           <p:cNvPr id="3" name="Text 1">
             <a:extLst xmlns:a="http://schemas.openxmlformats.org/drawingml/2006/main">
               <a:ext uri="{FF2B5EF4-FFF2-40B4-BE49-F238E27FC236}">
-                <a16:creationId xmlns:a16="http://schemas.microsoft.com/office/drawing/2014/main" id="{8F25D2A2-FEFA-4CC0-84BF-66490D86DB33}"/>
+                <a16:creationId xmlns:a16="http://schemas.microsoft.com/office/drawing/2014/main" id="{BD29D810-3126-4E15-BCEA-084C5E5FE9A4}"/>
               </a:ext>
             </a:extLst>
           </p:cNvPr>
@@ -9485,7 +9485,7 @@
           <p:cNvPr id="4" name="Text 2">
             <a:extLst xmlns:a="http://schemas.openxmlformats.org/drawingml/2006/main">
               <a:ext uri="{FF2B5EF4-FFF2-40B4-BE49-F238E27FC236}">
-                <a16:creationId xmlns:a16="http://schemas.microsoft.com/office/drawing/2014/main" id="{95DB7404-8D31-40F1-B0CD-3B84D004B97A}"/>
+                <a16:creationId xmlns:a16="http://schemas.microsoft.com/office/drawing/2014/main" id="{9558AFD8-9541-4FF4-8B79-3EE7504DC118}"/>
               </a:ext>
             </a:extLst>
           </p:cNvPr>
@@ -9530,7 +9530,7 @@
           <p:cNvPr id="5" name="Text 3">
             <a:extLst xmlns:a="http://schemas.openxmlformats.org/drawingml/2006/main">
               <a:ext uri="{FF2B5EF4-FFF2-40B4-BE49-F238E27FC236}">
-                <a16:creationId xmlns:a16="http://schemas.microsoft.com/office/drawing/2014/main" id="{95E74D8E-6591-45A4-A472-EE1E5C3D5A33}"/>
+                <a16:creationId xmlns:a16="http://schemas.microsoft.com/office/drawing/2014/main" id="{1DB4C977-F457-4F87-B209-5C09DC88038F}"/>
               </a:ext>
             </a:extLst>
           </p:cNvPr>
@@ -9579,7 +9579,7 @@
           <p:nvPr/>
         </p:nvPicPr>
         <p:blipFill>
-          <a:blip xmlns:r="http://schemas.openxmlformats.org/officeDocument/2006/relationships" xmlns:a="http://schemas.openxmlformats.org/drawingml/2006/main" r:embed="R84cb459bcdf84867"/>
+          <a:blip xmlns:r="http://schemas.openxmlformats.org/officeDocument/2006/relationships" xmlns:a="http://schemas.openxmlformats.org/drawingml/2006/main" r:embed="Rbfb1e94d7750465b"/>
           <a:stretch xmlns:a="http://schemas.openxmlformats.org/drawingml/2006/main">
             <a:fillRect l="0" t="0" r="0" b="0"/>
           </a:stretch>
@@ -9599,7 +9599,7 @@
           <p:cNvPr id="7" name="Text 4">
             <a:extLst xmlns:a="http://schemas.openxmlformats.org/drawingml/2006/main">
               <a:ext uri="{FF2B5EF4-FFF2-40B4-BE49-F238E27FC236}">
-                <a16:creationId xmlns:a16="http://schemas.microsoft.com/office/drawing/2014/main" id="{A9F7CB68-A3B1-472A-94BC-1B8CA6CE3D99}"/>
+                <a16:creationId xmlns:a16="http://schemas.microsoft.com/office/drawing/2014/main" id="{77637331-8532-432E-ABD9-7EECD6659378}"/>
               </a:ext>
             </a:extLst>
           </p:cNvPr>
@@ -9644,7 +9644,7 @@
           <p:cNvPr id="8" name="Shape 5">
             <a:extLst xmlns:a="http://schemas.openxmlformats.org/drawingml/2006/main">
               <a:ext uri="{FF2B5EF4-FFF2-40B4-BE49-F238E27FC236}">
-                <a16:creationId xmlns:a16="http://schemas.microsoft.com/office/drawing/2014/main" id="{D2AB2C92-70EE-4BBA-8C15-94E4ED1E602F}"/>
+                <a16:creationId xmlns:a16="http://schemas.microsoft.com/office/drawing/2014/main" id="{5F1F23D7-D411-4138-B576-286E074CA852}"/>
               </a:ext>
             </a:extLst>
           </p:cNvPr>
@@ -9688,7 +9688,7 @@
           <p:nvPr/>
         </p:nvPicPr>
         <p:blipFill>
-          <a:blip xmlns:r="http://schemas.openxmlformats.org/officeDocument/2006/relationships" xmlns:a="http://schemas.openxmlformats.org/drawingml/2006/main" r:embed="R080e67e8e7464882"/>
+          <a:blip xmlns:r="http://schemas.openxmlformats.org/officeDocument/2006/relationships" xmlns:a="http://schemas.openxmlformats.org/drawingml/2006/main" r:embed="Rc178615803424db7"/>
           <a:stretch xmlns:a="http://schemas.openxmlformats.org/drawingml/2006/main">
             <a:fillRect l="0" t="0" r="0" b="0"/>
           </a:stretch>
@@ -9708,7 +9708,7 @@
           <p:cNvPr id="10" name="Text 6">
             <a:extLst xmlns:a="http://schemas.openxmlformats.org/drawingml/2006/main">
               <a:ext uri="{FF2B5EF4-FFF2-40B4-BE49-F238E27FC236}">
-                <a16:creationId xmlns:a16="http://schemas.microsoft.com/office/drawing/2014/main" id="{91365205-E08B-4B5C-9326-282E878BE593}"/>
+                <a16:creationId xmlns:a16="http://schemas.microsoft.com/office/drawing/2014/main" id="{B70E0F6E-5316-4DB8-B845-C73D5BBC0308}"/>
               </a:ext>
             </a:extLst>
           </p:cNvPr>
@@ -9757,7 +9757,7 @@
           <p:nvPr/>
         </p:nvPicPr>
         <p:blipFill>
-          <a:blip xmlns:r="http://schemas.openxmlformats.org/officeDocument/2006/relationships" xmlns:a="http://schemas.openxmlformats.org/drawingml/2006/main" r:embed="R9103066dac1a49ef"/>
+          <a:blip xmlns:r="http://schemas.openxmlformats.org/officeDocument/2006/relationships" xmlns:a="http://schemas.openxmlformats.org/drawingml/2006/main" r:embed="R3f72aa398c184ba5"/>
           <a:stretch xmlns:a="http://schemas.openxmlformats.org/drawingml/2006/main">
             <a:fillRect l="0" t="0" r="0" b="0"/>
           </a:stretch>
@@ -9777,7 +9777,7 @@
           <p:cNvPr id="12" name="Text 7">
             <a:extLst xmlns:a="http://schemas.openxmlformats.org/drawingml/2006/main">
               <a:ext uri="{FF2B5EF4-FFF2-40B4-BE49-F238E27FC236}">
-                <a16:creationId xmlns:a16="http://schemas.microsoft.com/office/drawing/2014/main" id="{A06BA3C0-3F8D-4DC1-878D-BAB6C91D0517}"/>
+                <a16:creationId xmlns:a16="http://schemas.microsoft.com/office/drawing/2014/main" id="{40F640D7-0610-4D76-A0EA-D643AF727FD6}"/>
               </a:ext>
             </a:extLst>
           </p:cNvPr>
@@ -9822,7 +9822,7 @@
           <p:cNvPr id="13" name="Text 8">
             <a:extLst xmlns:a="http://schemas.openxmlformats.org/drawingml/2006/main">
               <a:ext uri="{FF2B5EF4-FFF2-40B4-BE49-F238E27FC236}">
-                <a16:creationId xmlns:a16="http://schemas.microsoft.com/office/drawing/2014/main" id="{D2F34746-737A-4F9B-B42F-DF465576E1F6}"/>
+                <a16:creationId xmlns:a16="http://schemas.microsoft.com/office/drawing/2014/main" id="{BFE1081D-9FEC-46EC-AA09-0E6D0F909862}"/>
               </a:ext>
             </a:extLst>
           </p:cNvPr>
@@ -9870,7 +9870,7 @@
           <p:cNvPr id="14" name="Shape 9">
             <a:extLst xmlns:a="http://schemas.openxmlformats.org/drawingml/2006/main">
               <a:ext uri="{FF2B5EF4-FFF2-40B4-BE49-F238E27FC236}">
-                <a16:creationId xmlns:a16="http://schemas.microsoft.com/office/drawing/2014/main" id="{92F92F01-1200-4373-B4BB-861A18E86EE6}"/>
+                <a16:creationId xmlns:a16="http://schemas.microsoft.com/office/drawing/2014/main" id="{B407AF1A-1429-4344-AB68-37551261CD45}"/>
               </a:ext>
             </a:extLst>
           </p:cNvPr>
@@ -9910,7 +9910,7 @@
           <p:cNvPr id="15" name="Text 10">
             <a:extLst xmlns:a="http://schemas.openxmlformats.org/drawingml/2006/main">
               <a:ext uri="{FF2B5EF4-FFF2-40B4-BE49-F238E27FC236}">
-                <a16:creationId xmlns:a16="http://schemas.microsoft.com/office/drawing/2014/main" id="{74E15FFE-66AD-4760-AB78-7468AD287436}"/>
+                <a16:creationId xmlns:a16="http://schemas.microsoft.com/office/drawing/2014/main" id="{8892D6A8-3A87-45B1-BB71-0AAB87C10F11}"/>
               </a:ext>
             </a:extLst>
           </p:cNvPr>
@@ -9955,7 +9955,7 @@
           <p:cNvPr id="16" name="Text 11">
             <a:extLst xmlns:a="http://schemas.openxmlformats.org/drawingml/2006/main">
               <a:ext uri="{FF2B5EF4-FFF2-40B4-BE49-F238E27FC236}">
-                <a16:creationId xmlns:a16="http://schemas.microsoft.com/office/drawing/2014/main" id="{1E61E934-F54D-4FB3-887F-0721A0A99F7C}"/>
+                <a16:creationId xmlns:a16="http://schemas.microsoft.com/office/drawing/2014/main" id="{E10785E1-520C-435F-99AB-0A2B9DCFD346}"/>
               </a:ext>
             </a:extLst>
           </p:cNvPr>
@@ -10003,7 +10003,7 @@
           <p:cNvPr id="17" name="Shape 12">
             <a:extLst xmlns:a="http://schemas.openxmlformats.org/drawingml/2006/main">
               <a:ext uri="{FF2B5EF4-FFF2-40B4-BE49-F238E27FC236}">
-                <a16:creationId xmlns:a16="http://schemas.microsoft.com/office/drawing/2014/main" id="{5B63F9CD-B85C-41FA-9259-29550E881823}"/>
+                <a16:creationId xmlns:a16="http://schemas.microsoft.com/office/drawing/2014/main" id="{2023FB92-66CB-4F99-A515-82A68C7D6448}"/>
               </a:ext>
             </a:extLst>
           </p:cNvPr>
@@ -10050,7 +10050,7 @@
           <p:cNvPr id="18" name="Text 13">
             <a:extLst xmlns:a="http://schemas.openxmlformats.org/drawingml/2006/main">
               <a:ext uri="{FF2B5EF4-FFF2-40B4-BE49-F238E27FC236}">
-                <a16:creationId xmlns:a16="http://schemas.microsoft.com/office/drawing/2014/main" id="{ED0FF6F6-038A-41F9-8F37-8C1D60DDB38E}"/>
+                <a16:creationId xmlns:a16="http://schemas.microsoft.com/office/drawing/2014/main" id="{B34CEFC6-7083-4D4C-85E5-BB7EBC556682}"/>
               </a:ext>
             </a:extLst>
           </p:cNvPr>
@@ -10099,7 +10099,7 @@
           <p:nvPr/>
         </p:nvPicPr>
         <p:blipFill>
-          <a:blip xmlns:r="http://schemas.openxmlformats.org/officeDocument/2006/relationships" xmlns:a="http://schemas.openxmlformats.org/drawingml/2006/main" r:embed="Rc767b501dcb444e1"/>
+          <a:blip xmlns:r="http://schemas.openxmlformats.org/officeDocument/2006/relationships" xmlns:a="http://schemas.openxmlformats.org/drawingml/2006/main" r:embed="Rcb4c72656323471b"/>
           <a:stretch xmlns:a="http://schemas.openxmlformats.org/drawingml/2006/main">
             <a:fillRect l="0" t="0" r="0" b="0"/>
           </a:stretch>
@@ -10119,7 +10119,7 @@
           <p:cNvPr id="20" name="Text 14">
             <a:extLst xmlns:a="http://schemas.openxmlformats.org/drawingml/2006/main">
               <a:ext uri="{FF2B5EF4-FFF2-40B4-BE49-F238E27FC236}">
-                <a16:creationId xmlns:a16="http://schemas.microsoft.com/office/drawing/2014/main" id="{381D8C09-80FE-444D-85F5-70E9EB563E34}"/>
+                <a16:creationId xmlns:a16="http://schemas.microsoft.com/office/drawing/2014/main" id="{1DD5F0DC-5F31-4069-9219-3827F491027B}"/>
               </a:ext>
             </a:extLst>
           </p:cNvPr>
@@ -10164,7 +10164,7 @@
           <p:cNvPr id="21" name="Text 15">
             <a:extLst xmlns:a="http://schemas.openxmlformats.org/drawingml/2006/main">
               <a:ext uri="{FF2B5EF4-FFF2-40B4-BE49-F238E27FC236}">
-                <a16:creationId xmlns:a16="http://schemas.microsoft.com/office/drawing/2014/main" id="{07FD1814-54A3-4439-B379-3E8C27BB98BF}"/>
+                <a16:creationId xmlns:a16="http://schemas.microsoft.com/office/drawing/2014/main" id="{742287FA-AE9C-4F13-8A60-DC59FEB467CC}"/>
               </a:ext>
             </a:extLst>
           </p:cNvPr>
@@ -10250,7 +10250,7 @@
           <p:cNvPr id="22" name="Text 16">
             <a:extLst xmlns:a="http://schemas.openxmlformats.org/drawingml/2006/main">
               <a:ext uri="{FF2B5EF4-FFF2-40B4-BE49-F238E27FC236}">
-                <a16:creationId xmlns:a16="http://schemas.microsoft.com/office/drawing/2014/main" id="{9B03E3C2-0734-4F05-B315-604977012891}"/>
+                <a16:creationId xmlns:a16="http://schemas.microsoft.com/office/drawing/2014/main" id="{3C6781C6-B7E2-4019-8529-8B65566F3135}"/>
               </a:ext>
             </a:extLst>
           </p:cNvPr>
@@ -10298,7 +10298,7 @@
           <p:cNvPr id="23" name="Shape 17">
             <a:extLst xmlns:a="http://schemas.openxmlformats.org/drawingml/2006/main">
               <a:ext uri="{FF2B5EF4-FFF2-40B4-BE49-F238E27FC236}">
-                <a16:creationId xmlns:a16="http://schemas.microsoft.com/office/drawing/2014/main" id="{B300BF07-77E0-4F7A-AE55-35584E54412D}"/>
+                <a16:creationId xmlns:a16="http://schemas.microsoft.com/office/drawing/2014/main" id="{97CBB4CA-F425-4BB0-ABD8-934BFF065CA5}"/>
               </a:ext>
             </a:extLst>
           </p:cNvPr>
@@ -10345,7 +10345,7 @@
           <p:cNvPr id="24" name="Text 18">
             <a:extLst xmlns:a="http://schemas.openxmlformats.org/drawingml/2006/main">
               <a:ext uri="{FF2B5EF4-FFF2-40B4-BE49-F238E27FC236}">
-                <a16:creationId xmlns:a16="http://schemas.microsoft.com/office/drawing/2014/main" id="{5638134B-BFD7-4715-8B88-9933DA9C10DC}"/>
+                <a16:creationId xmlns:a16="http://schemas.microsoft.com/office/drawing/2014/main" id="{D49ECDB6-7916-4883-835E-6CEDCB1C0C83}"/>
               </a:ext>
             </a:extLst>
           </p:cNvPr>
@@ -10390,7 +10390,7 @@
           <p:cNvPr id="25" name="Text 19">
             <a:extLst xmlns:a="http://schemas.openxmlformats.org/drawingml/2006/main">
               <a:ext uri="{FF2B5EF4-FFF2-40B4-BE49-F238E27FC236}">
-                <a16:creationId xmlns:a16="http://schemas.microsoft.com/office/drawing/2014/main" id="{E9854A9C-47B3-449A-AEA1-96E745395969}"/>
+                <a16:creationId xmlns:a16="http://schemas.microsoft.com/office/drawing/2014/main" id="{77CED5A0-1B5F-425D-9E34-94708E014DAB}"/>
               </a:ext>
             </a:extLst>
           </p:cNvPr>
@@ -10438,7 +10438,7 @@
           <p:cNvPr id="26" name="Text 20">
             <a:extLst xmlns:a="http://schemas.openxmlformats.org/drawingml/2006/main">
               <a:ext uri="{FF2B5EF4-FFF2-40B4-BE49-F238E27FC236}">
-                <a16:creationId xmlns:a16="http://schemas.microsoft.com/office/drawing/2014/main" id="{1A7E5788-50FF-441E-B673-122D47119E9A}"/>
+                <a16:creationId xmlns:a16="http://schemas.microsoft.com/office/drawing/2014/main" id="{59B58FC4-0AD7-40DB-BC22-293EEF89DE59}"/>
               </a:ext>
             </a:extLst>
           </p:cNvPr>
@@ -10483,7 +10483,7 @@
           <p:cNvPr id="27" name="Shape 21">
             <a:extLst xmlns:a="http://schemas.openxmlformats.org/drawingml/2006/main">
               <a:ext uri="{FF2B5EF4-FFF2-40B4-BE49-F238E27FC236}">
-                <a16:creationId xmlns:a16="http://schemas.microsoft.com/office/drawing/2014/main" id="{8FD2EDAC-C27E-454A-A228-34AEF3412EFC}"/>
+                <a16:creationId xmlns:a16="http://schemas.microsoft.com/office/drawing/2014/main" id="{3FFD8465-580F-4A62-B9FB-9AC673ED0FF7}"/>
               </a:ext>
             </a:extLst>
           </p:cNvPr>
@@ -10530,7 +10530,7 @@
           <p:cNvPr id="28" name="Text 22">
             <a:extLst xmlns:a="http://schemas.openxmlformats.org/drawingml/2006/main">
               <a:ext uri="{FF2B5EF4-FFF2-40B4-BE49-F238E27FC236}">
-                <a16:creationId xmlns:a16="http://schemas.microsoft.com/office/drawing/2014/main" id="{6CACA926-479C-47FD-B001-F15C1E025672}"/>
+                <a16:creationId xmlns:a16="http://schemas.microsoft.com/office/drawing/2014/main" id="{B8FEC359-1848-43BB-A0AA-7E03F691CE9E}"/>
               </a:ext>
             </a:extLst>
           </p:cNvPr>
@@ -10575,7 +10575,7 @@
           <p:cNvPr id="29" name="Text 23">
             <a:extLst xmlns:a="http://schemas.openxmlformats.org/drawingml/2006/main">
               <a:ext uri="{FF2B5EF4-FFF2-40B4-BE49-F238E27FC236}">
-                <a16:creationId xmlns:a16="http://schemas.microsoft.com/office/drawing/2014/main" id="{E6591113-F31E-4044-BB71-766B53800597}"/>
+                <a16:creationId xmlns:a16="http://schemas.microsoft.com/office/drawing/2014/main" id="{62930F60-EEFE-4A53-9817-57570033F41E}"/>
               </a:ext>
             </a:extLst>
           </p:cNvPr>
@@ -10623,7 +10623,7 @@
           <p:cNvPr id="30" name="Shape 24">
             <a:extLst xmlns:a="http://schemas.openxmlformats.org/drawingml/2006/main">
               <a:ext uri="{FF2B5EF4-FFF2-40B4-BE49-F238E27FC236}">
-                <a16:creationId xmlns:a16="http://schemas.microsoft.com/office/drawing/2014/main" id="{589E704E-9958-4B33-B999-865616CFDB90}"/>
+                <a16:creationId xmlns:a16="http://schemas.microsoft.com/office/drawing/2014/main" id="{93E3BBD1-EBE1-4502-9E46-BBFF9B500777}"/>
               </a:ext>
             </a:extLst>
           </p:cNvPr>
@@ -10670,7 +10670,7 @@
           <p:cNvPr id="31" name="Text 25">
             <a:extLst xmlns:a="http://schemas.openxmlformats.org/drawingml/2006/main">
               <a:ext uri="{FF2B5EF4-FFF2-40B4-BE49-F238E27FC236}">
-                <a16:creationId xmlns:a16="http://schemas.microsoft.com/office/drawing/2014/main" id="{D9A4E16D-1CD6-4781-9147-330CD08A8B16}"/>
+                <a16:creationId xmlns:a16="http://schemas.microsoft.com/office/drawing/2014/main" id="{399C9A5B-9AF7-40A4-803E-6569D62A6CDC}"/>
               </a:ext>
             </a:extLst>
           </p:cNvPr>
@@ -10715,7 +10715,7 @@
           <p:cNvPr id="32" name="Text 26">
             <a:extLst xmlns:a="http://schemas.openxmlformats.org/drawingml/2006/main">
               <a:ext uri="{FF2B5EF4-FFF2-40B4-BE49-F238E27FC236}">
-                <a16:creationId xmlns:a16="http://schemas.microsoft.com/office/drawing/2014/main" id="{3C98F2B8-94EE-4A9A-9569-A9E6F0BCA34B}"/>
+                <a16:creationId xmlns:a16="http://schemas.microsoft.com/office/drawing/2014/main" id="{4B65C59E-20D7-40F5-9C25-FD781626FB07}"/>
               </a:ext>
             </a:extLst>
           </p:cNvPr>
@@ -10763,7 +10763,7 @@
           <p:cNvPr id="33" name="Shape 27">
             <a:extLst xmlns:a="http://schemas.openxmlformats.org/drawingml/2006/main">
               <a:ext uri="{FF2B5EF4-FFF2-40B4-BE49-F238E27FC236}">
-                <a16:creationId xmlns:a16="http://schemas.microsoft.com/office/drawing/2014/main" id="{68CCBC6E-8D90-482E-BDB7-2B12F456D90D}"/>
+                <a16:creationId xmlns:a16="http://schemas.microsoft.com/office/drawing/2014/main" id="{13E4117B-289C-44AB-A166-C3A52C41BE3A}"/>
               </a:ext>
             </a:extLst>
           </p:cNvPr>
@@ -10810,7 +10810,7 @@
           <p:cNvPr id="34" name="Text 28">
             <a:extLst xmlns:a="http://schemas.openxmlformats.org/drawingml/2006/main">
               <a:ext uri="{FF2B5EF4-FFF2-40B4-BE49-F238E27FC236}">
-                <a16:creationId xmlns:a16="http://schemas.microsoft.com/office/drawing/2014/main" id="{62B1DE56-8084-40C4-929B-080B5ED98DBE}"/>
+                <a16:creationId xmlns:a16="http://schemas.microsoft.com/office/drawing/2014/main" id="{B8F0DE5D-953D-4C40-8626-A680260E8E10}"/>
               </a:ext>
             </a:extLst>
           </p:cNvPr>
@@ -10855,7 +10855,7 @@
           <p:cNvPr id="35" name="Text 29">
             <a:extLst xmlns:a="http://schemas.openxmlformats.org/drawingml/2006/main">
               <a:ext uri="{FF2B5EF4-FFF2-40B4-BE49-F238E27FC236}">
-                <a16:creationId xmlns:a16="http://schemas.microsoft.com/office/drawing/2014/main" id="{8DC13B1E-B1D2-4F7A-8F9E-6AF000E54797}"/>
+                <a16:creationId xmlns:a16="http://schemas.microsoft.com/office/drawing/2014/main" id="{37BEC2C8-34F0-4363-94AE-D0570C35C3F1}"/>
               </a:ext>
             </a:extLst>
           </p:cNvPr>
@@ -10903,7 +10903,7 @@
           <p:cNvPr id="36" name="Text 30">
             <a:extLst xmlns:a="http://schemas.openxmlformats.org/drawingml/2006/main">
               <a:ext uri="{FF2B5EF4-FFF2-40B4-BE49-F238E27FC236}">
-                <a16:creationId xmlns:a16="http://schemas.microsoft.com/office/drawing/2014/main" id="{3BCED952-E03B-4BAA-832A-F5CBDC939DF8}"/>
+                <a16:creationId xmlns:a16="http://schemas.microsoft.com/office/drawing/2014/main" id="{056D226C-FB46-41CE-8C8D-B297B4DF3033}"/>
               </a:ext>
             </a:extLst>
           </p:cNvPr>
@@ -10949,7 +10949,7 @@
     </p:spTree>
     <p:extLst>
       <p:ext uri="{BB962C8B-B14F-4D97-AF65-F5344CB8AC3E}">
-        <p14:creationId xmlns:p14="http://schemas.microsoft.com/office/powerpoint/2010/main" val="1595599157"/>
+        <p14:creationId xmlns:p14="http://schemas.microsoft.com/office/powerpoint/2010/main" val="1201757452"/>
       </p:ext>
     </p:extLst>
   </p:cSld>
@@ -10980,7 +10980,7 @@
           <p:cNvPr id="2" name="Text 0">
             <a:extLst xmlns:a="http://schemas.openxmlformats.org/drawingml/2006/main">
               <a:ext uri="{FF2B5EF4-FFF2-40B4-BE49-F238E27FC236}">
-                <a16:creationId xmlns:a16="http://schemas.microsoft.com/office/drawing/2014/main" id="{680433BD-66C4-4BD9-9C71-FF12FA843BFB}"/>
+                <a16:creationId xmlns:a16="http://schemas.microsoft.com/office/drawing/2014/main" id="{B83A611C-492C-4B86-B406-D805766108F3}"/>
               </a:ext>
             </a:extLst>
           </p:cNvPr>
@@ -11025,7 +11025,7 @@
           <p:cNvPr id="3" name="Text 1">
             <a:extLst xmlns:a="http://schemas.openxmlformats.org/drawingml/2006/main">
               <a:ext uri="{FF2B5EF4-FFF2-40B4-BE49-F238E27FC236}">
-                <a16:creationId xmlns:a16="http://schemas.microsoft.com/office/drawing/2014/main" id="{B86E9609-4E38-4343-867B-54496AB287F3}"/>
+                <a16:creationId xmlns:a16="http://schemas.microsoft.com/office/drawing/2014/main" id="{C6CB182E-A74C-4508-99F0-3CED05901F06}"/>
               </a:ext>
             </a:extLst>
           </p:cNvPr>
@@ -11070,7 +11070,7 @@
           <p:cNvPr id="4" name="Text 2">
             <a:extLst xmlns:a="http://schemas.openxmlformats.org/drawingml/2006/main">
               <a:ext uri="{FF2B5EF4-FFF2-40B4-BE49-F238E27FC236}">
-                <a16:creationId xmlns:a16="http://schemas.microsoft.com/office/drawing/2014/main" id="{673A9E08-8BD3-4B31-8BE9-8B6BE0C3CAA6}"/>
+                <a16:creationId xmlns:a16="http://schemas.microsoft.com/office/drawing/2014/main" id="{6B976EFE-7135-4D77-B05B-908D147EE031}"/>
               </a:ext>
             </a:extLst>
           </p:cNvPr>
@@ -11115,7 +11115,7 @@
           <p:cNvPr id="5" name="Text 3">
             <a:extLst xmlns:a="http://schemas.openxmlformats.org/drawingml/2006/main">
               <a:ext uri="{FF2B5EF4-FFF2-40B4-BE49-F238E27FC236}">
-                <a16:creationId xmlns:a16="http://schemas.microsoft.com/office/drawing/2014/main" id="{DF4BF5F8-2D9F-482C-A7A1-FE812AD875F1}"/>
+                <a16:creationId xmlns:a16="http://schemas.microsoft.com/office/drawing/2014/main" id="{D65EFEEB-C9CB-4A95-B328-F77C9AE9B211}"/>
               </a:ext>
             </a:extLst>
           </p:cNvPr>
@@ -11160,7 +11160,7 @@
           <p:cNvPr id="6" name="Text 4">
             <a:extLst xmlns:a="http://schemas.openxmlformats.org/drawingml/2006/main">
               <a:ext uri="{FF2B5EF4-FFF2-40B4-BE49-F238E27FC236}">
-                <a16:creationId xmlns:a16="http://schemas.microsoft.com/office/drawing/2014/main" id="{AF145C39-B8BA-4BAC-8A6E-2BA076D5A435}"/>
+                <a16:creationId xmlns:a16="http://schemas.microsoft.com/office/drawing/2014/main" id="{A08690A2-398F-4C46-8275-E2250C47BC96}"/>
               </a:ext>
             </a:extLst>
           </p:cNvPr>
@@ -11205,7 +11205,7 @@
           <p:cNvPr id="7" name="Shape 5">
             <a:extLst xmlns:a="http://schemas.openxmlformats.org/drawingml/2006/main">
               <a:ext uri="{FF2B5EF4-FFF2-40B4-BE49-F238E27FC236}">
-                <a16:creationId xmlns:a16="http://schemas.microsoft.com/office/drawing/2014/main" id="{CA0AA3CD-F02F-426E-9182-6773636E1E36}"/>
+                <a16:creationId xmlns:a16="http://schemas.microsoft.com/office/drawing/2014/main" id="{94160543-A9A7-4C2A-85C6-9C0929723A75}"/>
               </a:ext>
             </a:extLst>
           </p:cNvPr>
@@ -11245,7 +11245,7 @@
           <p:cNvPr id="8" name="Text 6">
             <a:extLst xmlns:a="http://schemas.openxmlformats.org/drawingml/2006/main">
               <a:ext uri="{FF2B5EF4-FFF2-40B4-BE49-F238E27FC236}">
-                <a16:creationId xmlns:a16="http://schemas.microsoft.com/office/drawing/2014/main" id="{F0943166-8B72-4F79-A3C5-859AF6B6073B}"/>
+                <a16:creationId xmlns:a16="http://schemas.microsoft.com/office/drawing/2014/main" id="{B4F0239C-F392-4DD1-9614-064AE1DDBA6B}"/>
               </a:ext>
             </a:extLst>
           </p:cNvPr>
@@ -11290,7 +11290,7 @@
           <p:cNvPr id="9" name="Shape 7">
             <a:extLst xmlns:a="http://schemas.openxmlformats.org/drawingml/2006/main">
               <a:ext uri="{FF2B5EF4-FFF2-40B4-BE49-F238E27FC236}">
-                <a16:creationId xmlns:a16="http://schemas.microsoft.com/office/drawing/2014/main" id="{FEC7D90D-95E1-4535-8DD7-1CA90FF36DB6}"/>
+                <a16:creationId xmlns:a16="http://schemas.microsoft.com/office/drawing/2014/main" id="{108CE175-007D-4D6C-BF81-142ACDD0B72E}"/>
               </a:ext>
             </a:extLst>
           </p:cNvPr>
@@ -11330,7 +11330,7 @@
           <p:cNvPr id="10" name="Text 8">
             <a:extLst xmlns:a="http://schemas.openxmlformats.org/drawingml/2006/main">
               <a:ext uri="{FF2B5EF4-FFF2-40B4-BE49-F238E27FC236}">
-                <a16:creationId xmlns:a16="http://schemas.microsoft.com/office/drawing/2014/main" id="{9368F322-EAE4-4680-BB22-DE3F78E03F5A}"/>
+                <a16:creationId xmlns:a16="http://schemas.microsoft.com/office/drawing/2014/main" id="{AE4C48AC-008D-4FF7-8877-A0B92F798382}"/>
               </a:ext>
             </a:extLst>
           </p:cNvPr>
@@ -11375,7 +11375,7 @@
           <p:cNvPr id="11" name="Shape 9">
             <a:extLst xmlns:a="http://schemas.openxmlformats.org/drawingml/2006/main">
               <a:ext uri="{FF2B5EF4-FFF2-40B4-BE49-F238E27FC236}">
-                <a16:creationId xmlns:a16="http://schemas.microsoft.com/office/drawing/2014/main" id="{47786BC2-C9F6-4FF5-8055-7021DFD9F507}"/>
+                <a16:creationId xmlns:a16="http://schemas.microsoft.com/office/drawing/2014/main" id="{E9C3AAAF-92C1-42E3-A1D3-F988EC21CFCC}"/>
               </a:ext>
             </a:extLst>
           </p:cNvPr>
@@ -11415,7 +11415,7 @@
           <p:cNvPr id="12" name="Text 10">
             <a:extLst xmlns:a="http://schemas.openxmlformats.org/drawingml/2006/main">
               <a:ext uri="{FF2B5EF4-FFF2-40B4-BE49-F238E27FC236}">
-                <a16:creationId xmlns:a16="http://schemas.microsoft.com/office/drawing/2014/main" id="{8FED0E02-5C2E-4446-AAE5-495F848F6325}"/>
+                <a16:creationId xmlns:a16="http://schemas.microsoft.com/office/drawing/2014/main" id="{FBC6D10F-5C70-4470-989B-117226BA024D}"/>
               </a:ext>
             </a:extLst>
           </p:cNvPr>
@@ -11460,7 +11460,7 @@
           <p:cNvPr id="13" name="Shape 11">
             <a:extLst xmlns:a="http://schemas.openxmlformats.org/drawingml/2006/main">
               <a:ext uri="{FF2B5EF4-FFF2-40B4-BE49-F238E27FC236}">
-                <a16:creationId xmlns:a16="http://schemas.microsoft.com/office/drawing/2014/main" id="{C3BB33FD-2D50-473C-AF38-1DD4AAC4824F}"/>
+                <a16:creationId xmlns:a16="http://schemas.microsoft.com/office/drawing/2014/main" id="{6BE23348-4897-4C5F-983D-F64D5F32C448}"/>
               </a:ext>
             </a:extLst>
           </p:cNvPr>
@@ -11500,7 +11500,7 @@
           <p:cNvPr id="14" name="Text 12">
             <a:extLst xmlns:a="http://schemas.openxmlformats.org/drawingml/2006/main">
               <a:ext uri="{FF2B5EF4-FFF2-40B4-BE49-F238E27FC236}">
-                <a16:creationId xmlns:a16="http://schemas.microsoft.com/office/drawing/2014/main" id="{40A52FD0-F597-451A-8B61-71D759A91809}"/>
+                <a16:creationId xmlns:a16="http://schemas.microsoft.com/office/drawing/2014/main" id="{D7F325A8-1AD1-465C-AD68-C042CB6ED389}"/>
               </a:ext>
             </a:extLst>
           </p:cNvPr>
@@ -11545,7 +11545,7 @@
           <p:cNvPr id="15" name="Shape 13">
             <a:extLst xmlns:a="http://schemas.openxmlformats.org/drawingml/2006/main">
               <a:ext uri="{FF2B5EF4-FFF2-40B4-BE49-F238E27FC236}">
-                <a16:creationId xmlns:a16="http://schemas.microsoft.com/office/drawing/2014/main" id="{8F632457-3B55-468D-A4A0-B623D2962886}"/>
+                <a16:creationId xmlns:a16="http://schemas.microsoft.com/office/drawing/2014/main" id="{EF02AF13-66D8-45A9-94CE-B5E8A240DEAA}"/>
               </a:ext>
             </a:extLst>
           </p:cNvPr>
@@ -11585,7 +11585,7 @@
           <p:cNvPr id="16" name="Text 14">
             <a:extLst xmlns:a="http://schemas.openxmlformats.org/drawingml/2006/main">
               <a:ext uri="{FF2B5EF4-FFF2-40B4-BE49-F238E27FC236}">
-                <a16:creationId xmlns:a16="http://schemas.microsoft.com/office/drawing/2014/main" id="{198A838C-1397-4665-9FCE-A2692883659F}"/>
+                <a16:creationId xmlns:a16="http://schemas.microsoft.com/office/drawing/2014/main" id="{EE6A39F2-1B64-4ACF-A8DE-B15A1368416A}"/>
               </a:ext>
             </a:extLst>
           </p:cNvPr>
@@ -11630,7 +11630,7 @@
           <p:cNvPr id="17" name="Shape 15">
             <a:extLst xmlns:a="http://schemas.openxmlformats.org/drawingml/2006/main">
               <a:ext uri="{FF2B5EF4-FFF2-40B4-BE49-F238E27FC236}">
-                <a16:creationId xmlns:a16="http://schemas.microsoft.com/office/drawing/2014/main" id="{4D845B0D-8748-4D51-B7E9-D19FF07DD789}"/>
+                <a16:creationId xmlns:a16="http://schemas.microsoft.com/office/drawing/2014/main" id="{9593DED5-6475-4C47-BADC-1EE2C1E69139}"/>
               </a:ext>
             </a:extLst>
           </p:cNvPr>
@@ -11670,7 +11670,7 @@
           <p:cNvPr id="18" name="Text 16">
             <a:extLst xmlns:a="http://schemas.openxmlformats.org/drawingml/2006/main">
               <a:ext uri="{FF2B5EF4-FFF2-40B4-BE49-F238E27FC236}">
-                <a16:creationId xmlns:a16="http://schemas.microsoft.com/office/drawing/2014/main" id="{164E0B83-4659-40DE-BAED-EE5E85A2A4F6}"/>
+                <a16:creationId xmlns:a16="http://schemas.microsoft.com/office/drawing/2014/main" id="{62A82CBD-B283-4734-A45B-42AAB49F48E8}"/>
               </a:ext>
             </a:extLst>
           </p:cNvPr>
@@ -11715,7 +11715,7 @@
           <p:cNvPr id="19" name="Text 17">
             <a:extLst xmlns:a="http://schemas.openxmlformats.org/drawingml/2006/main">
               <a:ext uri="{FF2B5EF4-FFF2-40B4-BE49-F238E27FC236}">
-                <a16:creationId xmlns:a16="http://schemas.microsoft.com/office/drawing/2014/main" id="{D7285974-66FB-48C6-BDB2-3C72C0A75C75}"/>
+                <a16:creationId xmlns:a16="http://schemas.microsoft.com/office/drawing/2014/main" id="{3E3AD459-D5F2-49EB-B4F2-3B4BC924D2B5}"/>
               </a:ext>
             </a:extLst>
           </p:cNvPr>
@@ -11760,7 +11760,7 @@
           <p:cNvPr id="20" name="Shape 18">
             <a:extLst xmlns:a="http://schemas.openxmlformats.org/drawingml/2006/main">
               <a:ext uri="{FF2B5EF4-FFF2-40B4-BE49-F238E27FC236}">
-                <a16:creationId xmlns:a16="http://schemas.microsoft.com/office/drawing/2014/main" id="{04031A9A-FAD5-4D22-B118-012A2C9F257D}"/>
+                <a16:creationId xmlns:a16="http://schemas.microsoft.com/office/drawing/2014/main" id="{3F6343D4-66CD-4B05-960A-428EC1BB89A8}"/>
               </a:ext>
             </a:extLst>
           </p:cNvPr>
@@ -11807,7 +11807,7 @@
           <p:cNvPr id="21" name="Text 19">
             <a:extLst xmlns:a="http://schemas.openxmlformats.org/drawingml/2006/main">
               <a:ext uri="{FF2B5EF4-FFF2-40B4-BE49-F238E27FC236}">
-                <a16:creationId xmlns:a16="http://schemas.microsoft.com/office/drawing/2014/main" id="{593610D7-8E10-4DBF-A53E-40125CFFB1B1}"/>
+                <a16:creationId xmlns:a16="http://schemas.microsoft.com/office/drawing/2014/main" id="{3AE2D586-6632-4561-8E89-D077937EF132}"/>
               </a:ext>
             </a:extLst>
           </p:cNvPr>
@@ -11852,7 +11852,7 @@
           <p:cNvPr id="22" name="Text 20">
             <a:extLst xmlns:a="http://schemas.openxmlformats.org/drawingml/2006/main">
               <a:ext uri="{FF2B5EF4-FFF2-40B4-BE49-F238E27FC236}">
-                <a16:creationId xmlns:a16="http://schemas.microsoft.com/office/drawing/2014/main" id="{30770DE0-AB9A-4AC0-BCBE-053D7FAAC10E}"/>
+                <a16:creationId xmlns:a16="http://schemas.microsoft.com/office/drawing/2014/main" id="{A1B09CBB-1282-445C-9AD3-5482268F1648}"/>
               </a:ext>
             </a:extLst>
           </p:cNvPr>
@@ -11897,7 +11897,7 @@
           <p:cNvPr id="23" name="Text 21">
             <a:extLst xmlns:a="http://schemas.openxmlformats.org/drawingml/2006/main">
               <a:ext uri="{FF2B5EF4-FFF2-40B4-BE49-F238E27FC236}">
-                <a16:creationId xmlns:a16="http://schemas.microsoft.com/office/drawing/2014/main" id="{4E77408A-1FE8-4012-8F41-9310AC85AAA9}"/>
+                <a16:creationId xmlns:a16="http://schemas.microsoft.com/office/drawing/2014/main" id="{83240614-B7A0-40CA-89E0-15CEDB0D8D88}"/>
               </a:ext>
             </a:extLst>
           </p:cNvPr>
@@ -11945,7 +11945,7 @@
           <p:cNvPr id="24" name="Shape 22">
             <a:extLst xmlns:a="http://schemas.openxmlformats.org/drawingml/2006/main">
               <a:ext uri="{FF2B5EF4-FFF2-40B4-BE49-F238E27FC236}">
-                <a16:creationId xmlns:a16="http://schemas.microsoft.com/office/drawing/2014/main" id="{BEE3E533-7B9F-4A9A-AD51-B09EDD334B3A}"/>
+                <a16:creationId xmlns:a16="http://schemas.microsoft.com/office/drawing/2014/main" id="{D31EF7CB-2D10-4304-849B-AA584C5297E5}"/>
               </a:ext>
             </a:extLst>
           </p:cNvPr>
@@ -11992,7 +11992,7 @@
           <p:cNvPr id="25" name="Text 23">
             <a:extLst xmlns:a="http://schemas.openxmlformats.org/drawingml/2006/main">
               <a:ext uri="{FF2B5EF4-FFF2-40B4-BE49-F238E27FC236}">
-                <a16:creationId xmlns:a16="http://schemas.microsoft.com/office/drawing/2014/main" id="{85E990A1-7CE6-4FD9-8908-C6B3F02F07B6}"/>
+                <a16:creationId xmlns:a16="http://schemas.microsoft.com/office/drawing/2014/main" id="{8C4148FB-3660-4E54-AFEA-BDBBFEDFB163}"/>
               </a:ext>
             </a:extLst>
           </p:cNvPr>
@@ -12037,7 +12037,7 @@
           <p:cNvPr id="26" name="Text 24">
             <a:extLst xmlns:a="http://schemas.openxmlformats.org/drawingml/2006/main">
               <a:ext uri="{FF2B5EF4-FFF2-40B4-BE49-F238E27FC236}">
-                <a16:creationId xmlns:a16="http://schemas.microsoft.com/office/drawing/2014/main" id="{89FCA97B-801B-4F21-B12F-16A2690479D1}"/>
+                <a16:creationId xmlns:a16="http://schemas.microsoft.com/office/drawing/2014/main" id="{CD1FDB4F-B843-465B-8C62-E3BDAAAF0066}"/>
               </a:ext>
             </a:extLst>
           </p:cNvPr>
@@ -12082,7 +12082,7 @@
           <p:cNvPr id="27" name="Text 25">
             <a:extLst xmlns:a="http://schemas.openxmlformats.org/drawingml/2006/main">
               <a:ext uri="{FF2B5EF4-FFF2-40B4-BE49-F238E27FC236}">
-                <a16:creationId xmlns:a16="http://schemas.microsoft.com/office/drawing/2014/main" id="{63906A46-7E36-40AF-8C10-46B3E502C619}"/>
+                <a16:creationId xmlns:a16="http://schemas.microsoft.com/office/drawing/2014/main" id="{6A012AEA-BDDB-4448-922C-5980FE6D4DFF}"/>
               </a:ext>
             </a:extLst>
           </p:cNvPr>
@@ -12130,7 +12130,7 @@
           <p:cNvPr id="28" name="Shape 26">
             <a:extLst xmlns:a="http://schemas.openxmlformats.org/drawingml/2006/main">
               <a:ext uri="{FF2B5EF4-FFF2-40B4-BE49-F238E27FC236}">
-                <a16:creationId xmlns:a16="http://schemas.microsoft.com/office/drawing/2014/main" id="{AC4A98E3-7776-4837-B626-D3676E5F6B48}"/>
+                <a16:creationId xmlns:a16="http://schemas.microsoft.com/office/drawing/2014/main" id="{B2CB71D1-0E4E-4E52-BF78-D32CCDC7757E}"/>
               </a:ext>
             </a:extLst>
           </p:cNvPr>
@@ -12177,7 +12177,7 @@
           <p:cNvPr id="29" name="Text 27">
             <a:extLst xmlns:a="http://schemas.openxmlformats.org/drawingml/2006/main">
               <a:ext uri="{FF2B5EF4-FFF2-40B4-BE49-F238E27FC236}">
-                <a16:creationId xmlns:a16="http://schemas.microsoft.com/office/drawing/2014/main" id="{246686D3-AE41-4AEE-890C-56324397EBEE}"/>
+                <a16:creationId xmlns:a16="http://schemas.microsoft.com/office/drawing/2014/main" id="{FB72D3BB-186C-47FD-AE1E-8784497BD162}"/>
               </a:ext>
             </a:extLst>
           </p:cNvPr>
@@ -12222,7 +12222,7 @@
           <p:cNvPr id="30" name="Text 28">
             <a:extLst xmlns:a="http://schemas.openxmlformats.org/drawingml/2006/main">
               <a:ext uri="{FF2B5EF4-FFF2-40B4-BE49-F238E27FC236}">
-                <a16:creationId xmlns:a16="http://schemas.microsoft.com/office/drawing/2014/main" id="{652E45A6-23B6-4BA7-A860-E2A06D12F043}"/>
+                <a16:creationId xmlns:a16="http://schemas.microsoft.com/office/drawing/2014/main" id="{A64A6B24-F305-411D-BDF2-11E93BD4E738}"/>
               </a:ext>
             </a:extLst>
           </p:cNvPr>
@@ -12267,7 +12267,7 @@
           <p:cNvPr id="31" name="Text 29">
             <a:extLst xmlns:a="http://schemas.openxmlformats.org/drawingml/2006/main">
               <a:ext uri="{FF2B5EF4-FFF2-40B4-BE49-F238E27FC236}">
-                <a16:creationId xmlns:a16="http://schemas.microsoft.com/office/drawing/2014/main" id="{F2791497-D17B-40CD-B686-BCB1A61688D1}"/>
+                <a16:creationId xmlns:a16="http://schemas.microsoft.com/office/drawing/2014/main" id="{B88D0875-CF25-4EDA-B115-40A18CCC2767}"/>
               </a:ext>
             </a:extLst>
           </p:cNvPr>
@@ -12315,7 +12315,7 @@
           <p:cNvPr id="32" name="Shape 30">
             <a:extLst xmlns:a="http://schemas.openxmlformats.org/drawingml/2006/main">
               <a:ext uri="{FF2B5EF4-FFF2-40B4-BE49-F238E27FC236}">
-                <a16:creationId xmlns:a16="http://schemas.microsoft.com/office/drawing/2014/main" id="{D0C64257-7D40-409D-95A0-37932273C43B}"/>
+                <a16:creationId xmlns:a16="http://schemas.microsoft.com/office/drawing/2014/main" id="{3E6507BF-3038-4F4F-ACFF-077A0CCCEE95}"/>
               </a:ext>
             </a:extLst>
           </p:cNvPr>
@@ -12362,7 +12362,7 @@
           <p:cNvPr id="33" name="Text 31">
             <a:extLst xmlns:a="http://schemas.openxmlformats.org/drawingml/2006/main">
               <a:ext uri="{FF2B5EF4-FFF2-40B4-BE49-F238E27FC236}">
-                <a16:creationId xmlns:a16="http://schemas.microsoft.com/office/drawing/2014/main" id="{AC9722D7-1400-4A90-B009-371483237D13}"/>
+                <a16:creationId xmlns:a16="http://schemas.microsoft.com/office/drawing/2014/main" id="{FB424899-98B9-40B0-A62F-7EEA1BD3EDC3}"/>
               </a:ext>
             </a:extLst>
           </p:cNvPr>
@@ -12407,7 +12407,7 @@
           <p:cNvPr id="34" name="Text 32">
             <a:extLst xmlns:a="http://schemas.openxmlformats.org/drawingml/2006/main">
               <a:ext uri="{FF2B5EF4-FFF2-40B4-BE49-F238E27FC236}">
-                <a16:creationId xmlns:a16="http://schemas.microsoft.com/office/drawing/2014/main" id="{2D66F40A-E535-46FE-AB30-E63D31D04068}"/>
+                <a16:creationId xmlns:a16="http://schemas.microsoft.com/office/drawing/2014/main" id="{134F8A30-7B73-45AF-B705-9C87481F45EB}"/>
               </a:ext>
             </a:extLst>
           </p:cNvPr>
@@ -12452,7 +12452,7 @@
           <p:cNvPr id="35" name="Text 33">
             <a:extLst xmlns:a="http://schemas.openxmlformats.org/drawingml/2006/main">
               <a:ext uri="{FF2B5EF4-FFF2-40B4-BE49-F238E27FC236}">
-                <a16:creationId xmlns:a16="http://schemas.microsoft.com/office/drawing/2014/main" id="{F3038332-9641-4759-B6BC-1D6CC68AC2A4}"/>
+                <a16:creationId xmlns:a16="http://schemas.microsoft.com/office/drawing/2014/main" id="{78CD3EC7-2660-421D-824D-CFF015624781}"/>
               </a:ext>
             </a:extLst>
           </p:cNvPr>
@@ -12500,7 +12500,7 @@
           <p:cNvPr id="36" name="Text 34">
             <a:extLst xmlns:a="http://schemas.openxmlformats.org/drawingml/2006/main">
               <a:ext uri="{FF2B5EF4-FFF2-40B4-BE49-F238E27FC236}">
-                <a16:creationId xmlns:a16="http://schemas.microsoft.com/office/drawing/2014/main" id="{3651CB39-869A-4D4E-AE29-B2544C12259B}"/>
+                <a16:creationId xmlns:a16="http://schemas.microsoft.com/office/drawing/2014/main" id="{F8854B21-31F5-49EC-99E8-BC33A9BB3846}"/>
               </a:ext>
             </a:extLst>
           </p:cNvPr>
@@ -12545,7 +12545,7 @@
           <p:cNvPr id="37" name="Text 35">
             <a:extLst xmlns:a="http://schemas.openxmlformats.org/drawingml/2006/main">
               <a:ext uri="{FF2B5EF4-FFF2-40B4-BE49-F238E27FC236}">
-                <a16:creationId xmlns:a16="http://schemas.microsoft.com/office/drawing/2014/main" id="{8C6405E1-0E3B-475B-9AE6-3990D0C72899}"/>
+                <a16:creationId xmlns:a16="http://schemas.microsoft.com/office/drawing/2014/main" id="{782460AC-36E8-4D12-8F4B-DDE5BE7E51FD}"/>
               </a:ext>
             </a:extLst>
           </p:cNvPr>
@@ -12593,7 +12593,7 @@
           <p:cNvPr id="38" name="Text 36">
             <a:extLst xmlns:a="http://schemas.openxmlformats.org/drawingml/2006/main">
               <a:ext uri="{FF2B5EF4-FFF2-40B4-BE49-F238E27FC236}">
-                <a16:creationId xmlns:a16="http://schemas.microsoft.com/office/drawing/2014/main" id="{D82131E4-91EB-49C7-8689-89CF303D7EFB}"/>
+                <a16:creationId xmlns:a16="http://schemas.microsoft.com/office/drawing/2014/main" id="{F93BCA70-8569-4483-BEDF-57409F1441FE}"/>
               </a:ext>
             </a:extLst>
           </p:cNvPr>
@@ -12639,7 +12639,7 @@
     </p:spTree>
     <p:extLst>
       <p:ext uri="{BB962C8B-B14F-4D97-AF65-F5344CB8AC3E}">
-        <p14:creationId xmlns:p14="http://schemas.microsoft.com/office/powerpoint/2010/main" val="430555586"/>
+        <p14:creationId xmlns:p14="http://schemas.microsoft.com/office/powerpoint/2010/main" val="510680896"/>
       </p:ext>
     </p:extLst>
   </p:cSld>
@@ -12670,7 +12670,7 @@
           <p:cNvPr id="2" name="Text 0">
             <a:extLst xmlns:a="http://schemas.openxmlformats.org/drawingml/2006/main">
               <a:ext uri="{FF2B5EF4-FFF2-40B4-BE49-F238E27FC236}">
-                <a16:creationId xmlns:a16="http://schemas.microsoft.com/office/drawing/2014/main" id="{DCE9050C-5C47-4CCF-AA23-36213958A4BB}"/>
+                <a16:creationId xmlns:a16="http://schemas.microsoft.com/office/drawing/2014/main" id="{E2262CC4-F5CF-4683-941D-403358E8D0A9}"/>
               </a:ext>
             </a:extLst>
           </p:cNvPr>
@@ -12715,7 +12715,7 @@
           <p:cNvPr id="3" name="Text 1">
             <a:extLst xmlns:a="http://schemas.openxmlformats.org/drawingml/2006/main">
               <a:ext uri="{FF2B5EF4-FFF2-40B4-BE49-F238E27FC236}">
-                <a16:creationId xmlns:a16="http://schemas.microsoft.com/office/drawing/2014/main" id="{DBB7ED47-C961-4003-8893-A15A642CF8FA}"/>
+                <a16:creationId xmlns:a16="http://schemas.microsoft.com/office/drawing/2014/main" id="{6DD17CC5-3C13-4D8C-B845-5BF8E1346F03}"/>
               </a:ext>
             </a:extLst>
           </p:cNvPr>
@@ -12760,7 +12760,7 @@
           <p:cNvPr id="4" name="Shape 2">
             <a:extLst xmlns:a="http://schemas.openxmlformats.org/drawingml/2006/main">
               <a:ext uri="{FF2B5EF4-FFF2-40B4-BE49-F238E27FC236}">
-                <a16:creationId xmlns:a16="http://schemas.microsoft.com/office/drawing/2014/main" id="{0810DBF9-703E-4D5D-8FC2-023FC94F9C36}"/>
+                <a16:creationId xmlns:a16="http://schemas.microsoft.com/office/drawing/2014/main" id="{1F7BE446-0704-429A-8AA7-8FA5B3E0E809}"/>
               </a:ext>
             </a:extLst>
           </p:cNvPr>
@@ -12800,7 +12800,7 @@
           <p:cNvPr id="5" name="Shape 3">
             <a:extLst xmlns:a="http://schemas.openxmlformats.org/drawingml/2006/main">
               <a:ext uri="{FF2B5EF4-FFF2-40B4-BE49-F238E27FC236}">
-                <a16:creationId xmlns:a16="http://schemas.microsoft.com/office/drawing/2014/main" id="{FB75E91C-045B-492C-BB57-90C2AB9992D5}"/>
+                <a16:creationId xmlns:a16="http://schemas.microsoft.com/office/drawing/2014/main" id="{DF8CB7A7-8431-4B48-96B9-DFEFBA763518}"/>
               </a:ext>
             </a:extLst>
           </p:cNvPr>
@@ -12840,7 +12840,7 @@
           <p:cNvPr id="6" name="Text 4">
             <a:extLst xmlns:a="http://schemas.openxmlformats.org/drawingml/2006/main">
               <a:ext uri="{FF2B5EF4-FFF2-40B4-BE49-F238E27FC236}">
-                <a16:creationId xmlns:a16="http://schemas.microsoft.com/office/drawing/2014/main" id="{8521004D-D4E5-4675-8405-F5A4A4A60BE5}"/>
+                <a16:creationId xmlns:a16="http://schemas.microsoft.com/office/drawing/2014/main" id="{C2F24DF8-4397-44C6-81F9-495175A033DC}"/>
               </a:ext>
             </a:extLst>
           </p:cNvPr>
@@ -12885,7 +12885,7 @@
           <p:cNvPr id="7" name="Text 5">
             <a:extLst xmlns:a="http://schemas.openxmlformats.org/drawingml/2006/main">
               <a:ext uri="{FF2B5EF4-FFF2-40B4-BE49-F238E27FC236}">
-                <a16:creationId xmlns:a16="http://schemas.microsoft.com/office/drawing/2014/main" id="{14387C86-3C3C-4EF0-B9BE-FA5D23EF0C6F}"/>
+                <a16:creationId xmlns:a16="http://schemas.microsoft.com/office/drawing/2014/main" id="{C0BCC708-085F-4DC2-B435-F9A45164DF43}"/>
               </a:ext>
             </a:extLst>
           </p:cNvPr>
@@ -12930,7 +12930,7 @@
           <p:cNvPr id="8" name="Text 6">
             <a:extLst xmlns:a="http://schemas.openxmlformats.org/drawingml/2006/main">
               <a:ext uri="{FF2B5EF4-FFF2-40B4-BE49-F238E27FC236}">
-                <a16:creationId xmlns:a16="http://schemas.microsoft.com/office/drawing/2014/main" id="{A0E66700-01F8-4FC9-A650-5205CD1F05BE}"/>
+                <a16:creationId xmlns:a16="http://schemas.microsoft.com/office/drawing/2014/main" id="{0ABD7EF6-351A-4C82-9DDF-55731BE56066}"/>
               </a:ext>
             </a:extLst>
           </p:cNvPr>
@@ -12976,7 +12976,7 @@
     </p:spTree>
     <p:extLst>
       <p:ext uri="{BB962C8B-B14F-4D97-AF65-F5344CB8AC3E}">
-        <p14:creationId xmlns:p14="http://schemas.microsoft.com/office/powerpoint/2010/main" val="1036716278"/>
+        <p14:creationId xmlns:p14="http://schemas.microsoft.com/office/powerpoint/2010/main" val="596310260"/>
       </p:ext>
     </p:extLst>
   </p:cSld>
@@ -13007,7 +13007,7 @@
           <p:cNvPr id="2" name="Text 0">
             <a:extLst xmlns:a="http://schemas.openxmlformats.org/drawingml/2006/main">
               <a:ext uri="{FF2B5EF4-FFF2-40B4-BE49-F238E27FC236}">
-                <a16:creationId xmlns:a16="http://schemas.microsoft.com/office/drawing/2014/main" id="{A08F987B-AD7F-47EB-9882-AAF15DED3F59}"/>
+                <a16:creationId xmlns:a16="http://schemas.microsoft.com/office/drawing/2014/main" id="{B516370B-D70C-4A03-BE94-DFCFF9ECB4FE}"/>
               </a:ext>
             </a:extLst>
           </p:cNvPr>
@@ -13052,7 +13052,7 @@
           <p:cNvPr id="3" name="Text 1">
             <a:extLst xmlns:a="http://schemas.openxmlformats.org/drawingml/2006/main">
               <a:ext uri="{FF2B5EF4-FFF2-40B4-BE49-F238E27FC236}">
-                <a16:creationId xmlns:a16="http://schemas.microsoft.com/office/drawing/2014/main" id="{06FEAB90-FFDD-4A32-9432-42E8CF977A99}"/>
+                <a16:creationId xmlns:a16="http://schemas.microsoft.com/office/drawing/2014/main" id="{E96CBDC2-BAC5-4292-8643-D5A71481340D}"/>
               </a:ext>
             </a:extLst>
           </p:cNvPr>
@@ -13097,7 +13097,7 @@
           <p:cNvPr id="4" name="Text 2">
             <a:extLst xmlns:a="http://schemas.openxmlformats.org/drawingml/2006/main">
               <a:ext uri="{FF2B5EF4-FFF2-40B4-BE49-F238E27FC236}">
-                <a16:creationId xmlns:a16="http://schemas.microsoft.com/office/drawing/2014/main" id="{1F77A664-792C-4F02-A4BC-43A198584F99}"/>
+                <a16:creationId xmlns:a16="http://schemas.microsoft.com/office/drawing/2014/main" id="{E8652ECE-51C1-4D93-982D-ACE419B1F5C3}"/>
               </a:ext>
             </a:extLst>
           </p:cNvPr>
@@ -13142,7 +13142,7 @@
           <p:cNvPr id="5" name="Text 3">
             <a:extLst xmlns:a="http://schemas.openxmlformats.org/drawingml/2006/main">
               <a:ext uri="{FF2B5EF4-FFF2-40B4-BE49-F238E27FC236}">
-                <a16:creationId xmlns:a16="http://schemas.microsoft.com/office/drawing/2014/main" id="{4EF569E1-CC1D-40FE-8B1A-22874A4586D8}"/>
+                <a16:creationId xmlns:a16="http://schemas.microsoft.com/office/drawing/2014/main" id="{3D182A5F-B097-4B06-AE3B-B5F0C13916AF}"/>
               </a:ext>
             </a:extLst>
           </p:cNvPr>
@@ -13187,7 +13187,7 @@
           <p:cNvPr id="6" name="Shape 4">
             <a:extLst xmlns:a="http://schemas.openxmlformats.org/drawingml/2006/main">
               <a:ext uri="{FF2B5EF4-FFF2-40B4-BE49-F238E27FC236}">
-                <a16:creationId xmlns:a16="http://schemas.microsoft.com/office/drawing/2014/main" id="{3EC4D47D-6168-4B5A-9028-32A8A4954844}"/>
+                <a16:creationId xmlns:a16="http://schemas.microsoft.com/office/drawing/2014/main" id="{A5B9F9BD-87BE-4944-909C-4C30678A3E53}"/>
               </a:ext>
             </a:extLst>
           </p:cNvPr>
@@ -13234,7 +13234,7 @@
           <p:cNvPr id="7" name="Shape 5">
             <a:extLst xmlns:a="http://schemas.openxmlformats.org/drawingml/2006/main">
               <a:ext uri="{FF2B5EF4-FFF2-40B4-BE49-F238E27FC236}">
-                <a16:creationId xmlns:a16="http://schemas.microsoft.com/office/drawing/2014/main" id="{0B86A913-A4D3-465E-AED1-2DAC003A160E}"/>
+                <a16:creationId xmlns:a16="http://schemas.microsoft.com/office/drawing/2014/main" id="{BB7DBF4A-A312-446F-87AF-C9963570B892}"/>
               </a:ext>
             </a:extLst>
           </p:cNvPr>
@@ -13272,7 +13272,7 @@
           <p:cNvPr id="8" name="Text 6">
             <a:extLst xmlns:a="http://schemas.openxmlformats.org/drawingml/2006/main">
               <a:ext uri="{FF2B5EF4-FFF2-40B4-BE49-F238E27FC236}">
-                <a16:creationId xmlns:a16="http://schemas.microsoft.com/office/drawing/2014/main" id="{E8A17156-446E-48BE-98B3-E925A9FCC526}"/>
+                <a16:creationId xmlns:a16="http://schemas.microsoft.com/office/drawing/2014/main" id="{6ED3D7B6-391E-49E0-B0E8-B19F3A373AC6}"/>
               </a:ext>
             </a:extLst>
           </p:cNvPr>
@@ -13317,7 +13317,7 @@
           <p:cNvPr id="9" name="Text 7">
             <a:extLst xmlns:a="http://schemas.openxmlformats.org/drawingml/2006/main">
               <a:ext uri="{FF2B5EF4-FFF2-40B4-BE49-F238E27FC236}">
-                <a16:creationId xmlns:a16="http://schemas.microsoft.com/office/drawing/2014/main" id="{EA42C537-9C61-499C-AB98-453FBCB1003B}"/>
+                <a16:creationId xmlns:a16="http://schemas.microsoft.com/office/drawing/2014/main" id="{27168C7D-AEC9-40B8-9CB5-EA1DB6A80FBF}"/>
               </a:ext>
             </a:extLst>
           </p:cNvPr>
@@ -13365,7 +13365,7 @@
           <p:cNvPr id="10" name="Text 8">
             <a:extLst xmlns:a="http://schemas.openxmlformats.org/drawingml/2006/main">
               <a:ext uri="{FF2B5EF4-FFF2-40B4-BE49-F238E27FC236}">
-                <a16:creationId xmlns:a16="http://schemas.microsoft.com/office/drawing/2014/main" id="{8E93980E-47E6-4B4F-A55C-CCF3711367E1}"/>
+                <a16:creationId xmlns:a16="http://schemas.microsoft.com/office/drawing/2014/main" id="{6EFFAA55-6C17-4430-8EB7-E676ED31636E}"/>
               </a:ext>
             </a:extLst>
           </p:cNvPr>
@@ -13413,7 +13413,7 @@
           <p:cNvPr id="11" name="Text 9">
             <a:extLst xmlns:a="http://schemas.openxmlformats.org/drawingml/2006/main">
               <a:ext uri="{FF2B5EF4-FFF2-40B4-BE49-F238E27FC236}">
-                <a16:creationId xmlns:a16="http://schemas.microsoft.com/office/drawing/2014/main" id="{F8F8B8B0-02A7-4B44-A38B-FB1B4DFADF2F}"/>
+                <a16:creationId xmlns:a16="http://schemas.microsoft.com/office/drawing/2014/main" id="{04C908BA-E683-485B-B5C3-7D4B5C8B3E5F}"/>
               </a:ext>
             </a:extLst>
           </p:cNvPr>
@@ -13508,7 +13508,7 @@
           <p:cNvPr id="12" name="Shape 10">
             <a:extLst xmlns:a="http://schemas.openxmlformats.org/drawingml/2006/main">
               <a:ext uri="{FF2B5EF4-FFF2-40B4-BE49-F238E27FC236}">
-                <a16:creationId xmlns:a16="http://schemas.microsoft.com/office/drawing/2014/main" id="{576196EF-C8A5-4677-8AF0-D43C01CFEFE1}"/>
+                <a16:creationId xmlns:a16="http://schemas.microsoft.com/office/drawing/2014/main" id="{1FBE9F84-C96A-49F2-A0DA-A5C6DFFE2989}"/>
               </a:ext>
             </a:extLst>
           </p:cNvPr>
@@ -13555,7 +13555,7 @@
           <p:cNvPr id="13" name="Shape 11">
             <a:extLst xmlns:a="http://schemas.openxmlformats.org/drawingml/2006/main">
               <a:ext uri="{FF2B5EF4-FFF2-40B4-BE49-F238E27FC236}">
-                <a16:creationId xmlns:a16="http://schemas.microsoft.com/office/drawing/2014/main" id="{5E7210F2-A2A9-4ADD-B3A9-586BC614C5A7}"/>
+                <a16:creationId xmlns:a16="http://schemas.microsoft.com/office/drawing/2014/main" id="{72D2549C-B747-4A52-A843-ED80A1E4D2B3}"/>
               </a:ext>
             </a:extLst>
           </p:cNvPr>
@@ -13593,7 +13593,7 @@
           <p:cNvPr id="14" name="Text 12">
             <a:extLst xmlns:a="http://schemas.openxmlformats.org/drawingml/2006/main">
               <a:ext uri="{FF2B5EF4-FFF2-40B4-BE49-F238E27FC236}">
-                <a16:creationId xmlns:a16="http://schemas.microsoft.com/office/drawing/2014/main" id="{07E79065-F923-4F5B-9873-CC552BF4F2E4}"/>
+                <a16:creationId xmlns:a16="http://schemas.microsoft.com/office/drawing/2014/main" id="{83F3D6D7-0702-41EE-9243-E9678D90CD67}"/>
               </a:ext>
             </a:extLst>
           </p:cNvPr>
@@ -13638,7 +13638,7 @@
           <p:cNvPr id="15" name="Text 13">
             <a:extLst xmlns:a="http://schemas.openxmlformats.org/drawingml/2006/main">
               <a:ext uri="{FF2B5EF4-FFF2-40B4-BE49-F238E27FC236}">
-                <a16:creationId xmlns:a16="http://schemas.microsoft.com/office/drawing/2014/main" id="{D68CEE04-6536-4793-8D5F-C8D83999E20E}"/>
+                <a16:creationId xmlns:a16="http://schemas.microsoft.com/office/drawing/2014/main" id="{C2AC3956-9F40-469B-92E7-57284315A528}"/>
               </a:ext>
             </a:extLst>
           </p:cNvPr>
@@ -13686,7 +13686,7 @@
           <p:cNvPr id="16" name="Text 14">
             <a:extLst xmlns:a="http://schemas.openxmlformats.org/drawingml/2006/main">
               <a:ext uri="{FF2B5EF4-FFF2-40B4-BE49-F238E27FC236}">
-                <a16:creationId xmlns:a16="http://schemas.microsoft.com/office/drawing/2014/main" id="{D02B9856-0263-4C4A-8D43-B8A5B45C748D}"/>
+                <a16:creationId xmlns:a16="http://schemas.microsoft.com/office/drawing/2014/main" id="{DBA93F0B-2C6C-40F6-8543-0947F59AD3C8}"/>
               </a:ext>
             </a:extLst>
           </p:cNvPr>
@@ -13734,7 +13734,7 @@
           <p:cNvPr id="17" name="Text 15">
             <a:extLst xmlns:a="http://schemas.openxmlformats.org/drawingml/2006/main">
               <a:ext uri="{FF2B5EF4-FFF2-40B4-BE49-F238E27FC236}">
-                <a16:creationId xmlns:a16="http://schemas.microsoft.com/office/drawing/2014/main" id="{11A4EE48-ADDA-4332-AF0F-A8170F4A1F0F}"/>
+                <a16:creationId xmlns:a16="http://schemas.microsoft.com/office/drawing/2014/main" id="{AC26C033-F8B3-48BA-A283-64369EF92B87}"/>
               </a:ext>
             </a:extLst>
           </p:cNvPr>
@@ -13829,7 +13829,7 @@
           <p:cNvPr id="18" name="Shape 16">
             <a:extLst xmlns:a="http://schemas.openxmlformats.org/drawingml/2006/main">
               <a:ext uri="{FF2B5EF4-FFF2-40B4-BE49-F238E27FC236}">
-                <a16:creationId xmlns:a16="http://schemas.microsoft.com/office/drawing/2014/main" id="{C1BDA678-6B42-4A01-B707-7DE51DDD998D}"/>
+                <a16:creationId xmlns:a16="http://schemas.microsoft.com/office/drawing/2014/main" id="{1C4C31BB-6D0C-4CD8-895E-DCF7811E4CD9}"/>
               </a:ext>
             </a:extLst>
           </p:cNvPr>
@@ -13876,7 +13876,7 @@
           <p:cNvPr id="19" name="Shape 17">
             <a:extLst xmlns:a="http://schemas.openxmlformats.org/drawingml/2006/main">
               <a:ext uri="{FF2B5EF4-FFF2-40B4-BE49-F238E27FC236}">
-                <a16:creationId xmlns:a16="http://schemas.microsoft.com/office/drawing/2014/main" id="{6C3739E3-EB41-41B1-9885-12C586F34C34}"/>
+                <a16:creationId xmlns:a16="http://schemas.microsoft.com/office/drawing/2014/main" id="{101CBD24-8A1F-4274-8502-E0EB452974D3}"/>
               </a:ext>
             </a:extLst>
           </p:cNvPr>
@@ -13914,7 +13914,7 @@
           <p:cNvPr id="20" name="Text 18">
             <a:extLst xmlns:a="http://schemas.openxmlformats.org/drawingml/2006/main">
               <a:ext uri="{FF2B5EF4-FFF2-40B4-BE49-F238E27FC236}">
-                <a16:creationId xmlns:a16="http://schemas.microsoft.com/office/drawing/2014/main" id="{1926C4CA-C84D-47D7-8EDB-1F24C0B7E840}"/>
+                <a16:creationId xmlns:a16="http://schemas.microsoft.com/office/drawing/2014/main" id="{62FF871B-313B-4C2B-9113-14B03787C2C9}"/>
               </a:ext>
             </a:extLst>
           </p:cNvPr>
@@ -13959,7 +13959,7 @@
           <p:cNvPr id="21" name="Text 19">
             <a:extLst xmlns:a="http://schemas.openxmlformats.org/drawingml/2006/main">
               <a:ext uri="{FF2B5EF4-FFF2-40B4-BE49-F238E27FC236}">
-                <a16:creationId xmlns:a16="http://schemas.microsoft.com/office/drawing/2014/main" id="{2673F193-2B8C-4C45-B750-2C17CCD0A66F}"/>
+                <a16:creationId xmlns:a16="http://schemas.microsoft.com/office/drawing/2014/main" id="{99B00806-9D17-4E49-9D7F-800B910F0C76}"/>
               </a:ext>
             </a:extLst>
           </p:cNvPr>
@@ -14007,7 +14007,7 @@
           <p:cNvPr id="22" name="Text 20">
             <a:extLst xmlns:a="http://schemas.openxmlformats.org/drawingml/2006/main">
               <a:ext uri="{FF2B5EF4-FFF2-40B4-BE49-F238E27FC236}">
-                <a16:creationId xmlns:a16="http://schemas.microsoft.com/office/drawing/2014/main" id="{C6F62315-A986-43DE-AB99-75D6F3764CEB}"/>
+                <a16:creationId xmlns:a16="http://schemas.microsoft.com/office/drawing/2014/main" id="{FAE20360-4938-43E1-BF07-A25E2E213AB2}"/>
               </a:ext>
             </a:extLst>
           </p:cNvPr>
@@ -14055,7 +14055,7 @@
           <p:cNvPr id="23" name="Text 21">
             <a:extLst xmlns:a="http://schemas.openxmlformats.org/drawingml/2006/main">
               <a:ext uri="{FF2B5EF4-FFF2-40B4-BE49-F238E27FC236}">
-                <a16:creationId xmlns:a16="http://schemas.microsoft.com/office/drawing/2014/main" id="{5B011794-F6EB-4137-BE39-A892582D125B}"/>
+                <a16:creationId xmlns:a16="http://schemas.microsoft.com/office/drawing/2014/main" id="{B3BF3912-FEF7-436A-9324-84788DCBD97A}"/>
               </a:ext>
             </a:extLst>
           </p:cNvPr>
@@ -14150,7 +14150,7 @@
           <p:cNvPr id="24" name="Text 22">
             <a:extLst xmlns:a="http://schemas.openxmlformats.org/drawingml/2006/main">
               <a:ext uri="{FF2B5EF4-FFF2-40B4-BE49-F238E27FC236}">
-                <a16:creationId xmlns:a16="http://schemas.microsoft.com/office/drawing/2014/main" id="{173CE47A-140E-4019-BCA0-7F421C595347}"/>
+                <a16:creationId xmlns:a16="http://schemas.microsoft.com/office/drawing/2014/main" id="{AD642A2B-3837-404B-A55C-0BB0779F9BC5}"/>
               </a:ext>
             </a:extLst>
           </p:cNvPr>
@@ -14195,7 +14195,7 @@
           <p:cNvPr id="25" name="Shape 23">
             <a:extLst xmlns:a="http://schemas.openxmlformats.org/drawingml/2006/main">
               <a:ext uri="{FF2B5EF4-FFF2-40B4-BE49-F238E27FC236}">
-                <a16:creationId xmlns:a16="http://schemas.microsoft.com/office/drawing/2014/main" id="{C7CCAA43-84D6-4056-BCB6-AE86E3DEA06A}"/>
+                <a16:creationId xmlns:a16="http://schemas.microsoft.com/office/drawing/2014/main" id="{8A18DE42-C71F-4641-86CF-B2ABB9D2A955}"/>
               </a:ext>
             </a:extLst>
           </p:cNvPr>
@@ -14233,7 +14233,7 @@
           <p:cNvPr id="26" name="Text 24">
             <a:extLst xmlns:a="http://schemas.openxmlformats.org/drawingml/2006/main">
               <a:ext uri="{FF2B5EF4-FFF2-40B4-BE49-F238E27FC236}">
-                <a16:creationId xmlns:a16="http://schemas.microsoft.com/office/drawing/2014/main" id="{C6F9E31A-FD93-45F0-BDE7-E41D886B4D33}"/>
+                <a16:creationId xmlns:a16="http://schemas.microsoft.com/office/drawing/2014/main" id="{0BFA5797-C084-48A7-B63C-D13B19705494}"/>
               </a:ext>
             </a:extLst>
           </p:cNvPr>
@@ -14278,7 +14278,7 @@
           <p:cNvPr id="27" name="Text 25">
             <a:extLst xmlns:a="http://schemas.openxmlformats.org/drawingml/2006/main">
               <a:ext uri="{FF2B5EF4-FFF2-40B4-BE49-F238E27FC236}">
-                <a16:creationId xmlns:a16="http://schemas.microsoft.com/office/drawing/2014/main" id="{5766204A-112B-4FC6-A2BD-47A2798DC5B0}"/>
+                <a16:creationId xmlns:a16="http://schemas.microsoft.com/office/drawing/2014/main" id="{72B02E0A-74C5-409E-B0D5-AF3FD488C1A7}"/>
               </a:ext>
             </a:extLst>
           </p:cNvPr>
@@ -14326,7 +14326,7 @@
           <p:cNvPr id="28" name="Shape 26">
             <a:extLst xmlns:a="http://schemas.openxmlformats.org/drawingml/2006/main">
               <a:ext uri="{FF2B5EF4-FFF2-40B4-BE49-F238E27FC236}">
-                <a16:creationId xmlns:a16="http://schemas.microsoft.com/office/drawing/2014/main" id="{C1FF0893-374D-4FC3-B0A4-BDC1676763F3}"/>
+                <a16:creationId xmlns:a16="http://schemas.microsoft.com/office/drawing/2014/main" id="{84EF8C1A-3B96-4375-8463-40E32A008789}"/>
               </a:ext>
             </a:extLst>
           </p:cNvPr>
@@ -14364,7 +14364,7 @@
           <p:cNvPr id="29" name="Text 27">
             <a:extLst xmlns:a="http://schemas.openxmlformats.org/drawingml/2006/main">
               <a:ext uri="{FF2B5EF4-FFF2-40B4-BE49-F238E27FC236}">
-                <a16:creationId xmlns:a16="http://schemas.microsoft.com/office/drawing/2014/main" id="{4D33D5BA-BDD9-438A-91CE-20CADFB31D26}"/>
+                <a16:creationId xmlns:a16="http://schemas.microsoft.com/office/drawing/2014/main" id="{46D71D8F-4088-4CD1-9431-7BC756DEB40C}"/>
               </a:ext>
             </a:extLst>
           </p:cNvPr>
@@ -14409,7 +14409,7 @@
           <p:cNvPr id="30" name="Text 28">
             <a:extLst xmlns:a="http://schemas.openxmlformats.org/drawingml/2006/main">
               <a:ext uri="{FF2B5EF4-FFF2-40B4-BE49-F238E27FC236}">
-                <a16:creationId xmlns:a16="http://schemas.microsoft.com/office/drawing/2014/main" id="{E85AFBB4-7E34-4F85-8A12-B9624A5CDAA2}"/>
+                <a16:creationId xmlns:a16="http://schemas.microsoft.com/office/drawing/2014/main" id="{5BDA185C-01F7-4FCF-AD07-79C7E84A62D8}"/>
               </a:ext>
             </a:extLst>
           </p:cNvPr>
@@ -14457,7 +14457,7 @@
           <p:cNvPr id="31" name="Shape 29">
             <a:extLst xmlns:a="http://schemas.openxmlformats.org/drawingml/2006/main">
               <a:ext uri="{FF2B5EF4-FFF2-40B4-BE49-F238E27FC236}">
-                <a16:creationId xmlns:a16="http://schemas.microsoft.com/office/drawing/2014/main" id="{9EA52254-22B6-401D-9E92-DC7A238F3532}"/>
+                <a16:creationId xmlns:a16="http://schemas.microsoft.com/office/drawing/2014/main" id="{81C76F6A-F731-4E5F-8815-156D7EAC9B8A}"/>
               </a:ext>
             </a:extLst>
           </p:cNvPr>
@@ -14495,7 +14495,7 @@
           <p:cNvPr id="32" name="Text 30">
             <a:extLst xmlns:a="http://schemas.openxmlformats.org/drawingml/2006/main">
               <a:ext uri="{FF2B5EF4-FFF2-40B4-BE49-F238E27FC236}">
-                <a16:creationId xmlns:a16="http://schemas.microsoft.com/office/drawing/2014/main" id="{D781DBC1-E386-4324-820B-30B3577A2354}"/>
+                <a16:creationId xmlns:a16="http://schemas.microsoft.com/office/drawing/2014/main" id="{D0B9EE86-4786-4B3F-AC86-1A0438392897}"/>
               </a:ext>
             </a:extLst>
           </p:cNvPr>
@@ -14540,7 +14540,7 @@
           <p:cNvPr id="33" name="Text 31">
             <a:extLst xmlns:a="http://schemas.openxmlformats.org/drawingml/2006/main">
               <a:ext uri="{FF2B5EF4-FFF2-40B4-BE49-F238E27FC236}">
-                <a16:creationId xmlns:a16="http://schemas.microsoft.com/office/drawing/2014/main" id="{08F89D42-29AA-4EB3-9AF3-9DAA9E8D1336}"/>
+                <a16:creationId xmlns:a16="http://schemas.microsoft.com/office/drawing/2014/main" id="{FE02B20B-59D0-4EA9-9E3A-4C7D54C82D8C}"/>
               </a:ext>
             </a:extLst>
           </p:cNvPr>
@@ -14588,7 +14588,7 @@
           <p:cNvPr id="34" name="Shape 32">
             <a:extLst xmlns:a="http://schemas.openxmlformats.org/drawingml/2006/main">
               <a:ext uri="{FF2B5EF4-FFF2-40B4-BE49-F238E27FC236}">
-                <a16:creationId xmlns:a16="http://schemas.microsoft.com/office/drawing/2014/main" id="{C8061E82-D8DC-4D7C-A13C-E39828FE3CA1}"/>
+                <a16:creationId xmlns:a16="http://schemas.microsoft.com/office/drawing/2014/main" id="{6DAC8501-F6F5-496E-90B4-D7DC48700D7E}"/>
               </a:ext>
             </a:extLst>
           </p:cNvPr>
@@ -14626,7 +14626,7 @@
           <p:cNvPr id="35" name="Text 33">
             <a:extLst xmlns:a="http://schemas.openxmlformats.org/drawingml/2006/main">
               <a:ext uri="{FF2B5EF4-FFF2-40B4-BE49-F238E27FC236}">
-                <a16:creationId xmlns:a16="http://schemas.microsoft.com/office/drawing/2014/main" id="{15FF7C75-F32B-4AF3-BDEF-197436A25653}"/>
+                <a16:creationId xmlns:a16="http://schemas.microsoft.com/office/drawing/2014/main" id="{FD6002D7-0783-46F7-BA30-12F1D491CB75}"/>
               </a:ext>
             </a:extLst>
           </p:cNvPr>
@@ -14671,7 +14671,7 @@
           <p:cNvPr id="36" name="Text 34">
             <a:extLst xmlns:a="http://schemas.openxmlformats.org/drawingml/2006/main">
               <a:ext uri="{FF2B5EF4-FFF2-40B4-BE49-F238E27FC236}">
-                <a16:creationId xmlns:a16="http://schemas.microsoft.com/office/drawing/2014/main" id="{DE044474-82CA-4DB8-93A0-0611DF078CF9}"/>
+                <a16:creationId xmlns:a16="http://schemas.microsoft.com/office/drawing/2014/main" id="{E03CDB11-4D8D-4AAB-B13D-54FF173F10F6}"/>
               </a:ext>
             </a:extLst>
           </p:cNvPr>
@@ -14719,7 +14719,7 @@
           <p:cNvPr id="37" name="Shape 35">
             <a:extLst xmlns:a="http://schemas.openxmlformats.org/drawingml/2006/main">
               <a:ext uri="{FF2B5EF4-FFF2-40B4-BE49-F238E27FC236}">
-                <a16:creationId xmlns:a16="http://schemas.microsoft.com/office/drawing/2014/main" id="{2712DF72-D64F-4686-82F3-0E01BC310BD1}"/>
+                <a16:creationId xmlns:a16="http://schemas.microsoft.com/office/drawing/2014/main" id="{0D3DC74A-2A84-4B6B-85CA-A64395343BF2}"/>
               </a:ext>
             </a:extLst>
           </p:cNvPr>
@@ -14757,7 +14757,7 @@
           <p:cNvPr id="38" name="Text 36">
             <a:extLst xmlns:a="http://schemas.openxmlformats.org/drawingml/2006/main">
               <a:ext uri="{FF2B5EF4-FFF2-40B4-BE49-F238E27FC236}">
-                <a16:creationId xmlns:a16="http://schemas.microsoft.com/office/drawing/2014/main" id="{909D4D59-1673-497E-9C0C-4303C6809310}"/>
+                <a16:creationId xmlns:a16="http://schemas.microsoft.com/office/drawing/2014/main" id="{5D952E04-214C-410A-B537-71E9719FA5FA}"/>
               </a:ext>
             </a:extLst>
           </p:cNvPr>
@@ -14802,7 +14802,7 @@
           <p:cNvPr id="39" name="Text 37">
             <a:extLst xmlns:a="http://schemas.openxmlformats.org/drawingml/2006/main">
               <a:ext uri="{FF2B5EF4-FFF2-40B4-BE49-F238E27FC236}">
-                <a16:creationId xmlns:a16="http://schemas.microsoft.com/office/drawing/2014/main" id="{A707BA86-E1C8-4DF8-A04D-4456F1D8508F}"/>
+                <a16:creationId xmlns:a16="http://schemas.microsoft.com/office/drawing/2014/main" id="{3D0577AA-30DF-4DE0-AFC5-A163577CCE6B}"/>
               </a:ext>
             </a:extLst>
           </p:cNvPr>
@@ -14850,7 +14850,7 @@
           <p:cNvPr id="40" name="Shape 38">
             <a:extLst xmlns:a="http://schemas.openxmlformats.org/drawingml/2006/main">
               <a:ext uri="{FF2B5EF4-FFF2-40B4-BE49-F238E27FC236}">
-                <a16:creationId xmlns:a16="http://schemas.microsoft.com/office/drawing/2014/main" id="{728C682B-7A6A-4E6A-85AD-0D4A6CF73ACA}"/>
+                <a16:creationId xmlns:a16="http://schemas.microsoft.com/office/drawing/2014/main" id="{9533C424-DA28-4DD4-9107-D5A6B2ED64E5}"/>
               </a:ext>
             </a:extLst>
           </p:cNvPr>
@@ -14888,7 +14888,7 @@
           <p:cNvPr id="41" name="Text 39">
             <a:extLst xmlns:a="http://schemas.openxmlformats.org/drawingml/2006/main">
               <a:ext uri="{FF2B5EF4-FFF2-40B4-BE49-F238E27FC236}">
-                <a16:creationId xmlns:a16="http://schemas.microsoft.com/office/drawing/2014/main" id="{CFE9D110-3542-45DE-9700-94FABBC87602}"/>
+                <a16:creationId xmlns:a16="http://schemas.microsoft.com/office/drawing/2014/main" id="{D7710CC6-7F2B-4F2F-8192-A6DE264F5699}"/>
               </a:ext>
             </a:extLst>
           </p:cNvPr>
@@ -14933,7 +14933,7 @@
           <p:cNvPr id="42" name="Text 40">
             <a:extLst xmlns:a="http://schemas.openxmlformats.org/drawingml/2006/main">
               <a:ext uri="{FF2B5EF4-FFF2-40B4-BE49-F238E27FC236}">
-                <a16:creationId xmlns:a16="http://schemas.microsoft.com/office/drawing/2014/main" id="{847CC2ED-8644-4A15-8270-FCD895C343AB}"/>
+                <a16:creationId xmlns:a16="http://schemas.microsoft.com/office/drawing/2014/main" id="{9C62E1EF-829D-4457-AFD7-BF99932F4A70}"/>
               </a:ext>
             </a:extLst>
           </p:cNvPr>
@@ -14981,7 +14981,7 @@
           <p:cNvPr id="43" name="Text 41">
             <a:extLst xmlns:a="http://schemas.openxmlformats.org/drawingml/2006/main">
               <a:ext uri="{FF2B5EF4-FFF2-40B4-BE49-F238E27FC236}">
-                <a16:creationId xmlns:a16="http://schemas.microsoft.com/office/drawing/2014/main" id="{FBBCC908-3153-43C6-833E-74801E084DCA}"/>
+                <a16:creationId xmlns:a16="http://schemas.microsoft.com/office/drawing/2014/main" id="{E6E24064-6349-4B2F-A5CA-06803132EC4A}"/>
               </a:ext>
             </a:extLst>
           </p:cNvPr>
@@ -15024,7 +15024,7 @@
     </p:spTree>
     <p:extLst>
       <p:ext uri="{BB962C8B-B14F-4D97-AF65-F5344CB8AC3E}">
-        <p14:creationId xmlns:p14="http://schemas.microsoft.com/office/powerpoint/2010/main" val="1710878554"/>
+        <p14:creationId xmlns:p14="http://schemas.microsoft.com/office/powerpoint/2010/main" val="1434683315"/>
       </p:ext>
     </p:extLst>
   </p:cSld>
@@ -15055,7 +15055,7 @@
           <p:cNvPr id="2" name="Text 0">
             <a:extLst xmlns:a="http://schemas.openxmlformats.org/drawingml/2006/main">
               <a:ext uri="{FF2B5EF4-FFF2-40B4-BE49-F238E27FC236}">
-                <a16:creationId xmlns:a16="http://schemas.microsoft.com/office/drawing/2014/main" id="{47537E44-A4A7-4272-A7C5-B375E12F86C9}"/>
+                <a16:creationId xmlns:a16="http://schemas.microsoft.com/office/drawing/2014/main" id="{61EBA2E1-BB91-4003-820B-0C34DAE3D39A}"/>
               </a:ext>
             </a:extLst>
           </p:cNvPr>
@@ -15100,7 +15100,7 @@
           <p:cNvPr id="3" name="Text 1">
             <a:extLst xmlns:a="http://schemas.openxmlformats.org/drawingml/2006/main">
               <a:ext uri="{FF2B5EF4-FFF2-40B4-BE49-F238E27FC236}">
-                <a16:creationId xmlns:a16="http://schemas.microsoft.com/office/drawing/2014/main" id="{6A80AD53-3C3C-49A3-9172-6A94E7C9FBEC}"/>
+                <a16:creationId xmlns:a16="http://schemas.microsoft.com/office/drawing/2014/main" id="{7FF269B8-61D4-444E-8770-8FB2116A41D6}"/>
               </a:ext>
             </a:extLst>
           </p:cNvPr>
@@ -15145,7 +15145,7 @@
           <p:cNvPr id="4" name="Text 2">
             <a:extLst xmlns:a="http://schemas.openxmlformats.org/drawingml/2006/main">
               <a:ext uri="{FF2B5EF4-FFF2-40B4-BE49-F238E27FC236}">
-                <a16:creationId xmlns:a16="http://schemas.microsoft.com/office/drawing/2014/main" id="{B31A8A42-EF37-472E-B8ED-67DCC92F51CC}"/>
+                <a16:creationId xmlns:a16="http://schemas.microsoft.com/office/drawing/2014/main" id="{DD9647F6-8A4D-402C-AFE3-CC33425769BF}"/>
               </a:ext>
             </a:extLst>
           </p:cNvPr>
@@ -15190,7 +15190,7 @@
           <p:cNvPr id="5" name="Text 3">
             <a:extLst xmlns:a="http://schemas.openxmlformats.org/drawingml/2006/main">
               <a:ext uri="{FF2B5EF4-FFF2-40B4-BE49-F238E27FC236}">
-                <a16:creationId xmlns:a16="http://schemas.microsoft.com/office/drawing/2014/main" id="{53C7FB97-8465-4540-9A88-5482265A302F}"/>
+                <a16:creationId xmlns:a16="http://schemas.microsoft.com/office/drawing/2014/main" id="{C7D2A2CA-671C-41FF-8FA3-E84D38574C82}"/>
               </a:ext>
             </a:extLst>
           </p:cNvPr>
@@ -15235,7 +15235,7 @@
           <p:cNvPr id="6" name="Text 4">
             <a:extLst xmlns:a="http://schemas.openxmlformats.org/drawingml/2006/main">
               <a:ext uri="{FF2B5EF4-FFF2-40B4-BE49-F238E27FC236}">
-                <a16:creationId xmlns:a16="http://schemas.microsoft.com/office/drawing/2014/main" id="{C871D1D2-BCEA-4DD1-982D-0F7883CEB63B}"/>
+                <a16:creationId xmlns:a16="http://schemas.microsoft.com/office/drawing/2014/main" id="{E16C6543-5E90-4472-A172-57076FAA754D}"/>
               </a:ext>
             </a:extLst>
           </p:cNvPr>
@@ -15330,7 +15330,7 @@
           <p:cNvPr id="7" name="Shape 5">
             <a:extLst xmlns:a="http://schemas.openxmlformats.org/drawingml/2006/main">
               <a:ext uri="{FF2B5EF4-FFF2-40B4-BE49-F238E27FC236}">
-                <a16:creationId xmlns:a16="http://schemas.microsoft.com/office/drawing/2014/main" id="{1CAE864C-7F77-4950-86F2-8A68DF374833}"/>
+                <a16:creationId xmlns:a16="http://schemas.microsoft.com/office/drawing/2014/main" id="{FE000C01-BE96-4CCB-B91F-E8EB421E580A}"/>
               </a:ext>
             </a:extLst>
           </p:cNvPr>
@@ -15377,7 +15377,7 @@
           <p:cNvPr id="8" name="Text 6">
             <a:extLst xmlns:a="http://schemas.openxmlformats.org/drawingml/2006/main">
               <a:ext uri="{FF2B5EF4-FFF2-40B4-BE49-F238E27FC236}">
-                <a16:creationId xmlns:a16="http://schemas.microsoft.com/office/drawing/2014/main" id="{6F60C7D7-A7CC-4458-950E-BE5BE78ACB19}"/>
+                <a16:creationId xmlns:a16="http://schemas.microsoft.com/office/drawing/2014/main" id="{9960028B-5273-4EE3-9745-879B8EB9FB03}"/>
               </a:ext>
             </a:extLst>
           </p:cNvPr>
@@ -15443,7 +15443,7 @@
         </p:xfrm>
         <a:graphic xmlns:a="http://schemas.openxmlformats.org/drawingml/2006/main">
           <a:graphicData uri="http://schemas.openxmlformats.org/drawingml/2006/chart">
-            <c:chart xmlns:r="http://schemas.openxmlformats.org/officeDocument/2006/relationships" xmlns:c="http://schemas.openxmlformats.org/drawingml/2006/chart" r:id="R93b44f2577944592"/>
+            <c:chart xmlns:r="http://schemas.openxmlformats.org/officeDocument/2006/relationships" xmlns:c="http://schemas.openxmlformats.org/drawingml/2006/chart" r:id="R5236a7dd85af42e1"/>
           </a:graphicData>
         </a:graphic>
       </p:graphicFrame>
@@ -15452,7 +15452,7 @@
           <p:cNvPr id="10" name="Text 7">
             <a:extLst xmlns:a="http://schemas.openxmlformats.org/drawingml/2006/main">
               <a:ext uri="{FF2B5EF4-FFF2-40B4-BE49-F238E27FC236}">
-                <a16:creationId xmlns:a16="http://schemas.microsoft.com/office/drawing/2014/main" id="{0B331E79-403C-4717-87B5-C776DCD7014B}"/>
+                <a16:creationId xmlns:a16="http://schemas.microsoft.com/office/drawing/2014/main" id="{B32FD0FE-2125-4ED0-9B7E-ED068DA6B4D2}"/>
               </a:ext>
             </a:extLst>
           </p:cNvPr>
@@ -15497,7 +15497,7 @@
           <p:cNvPr id="11" name="Shape 8">
             <a:extLst xmlns:a="http://schemas.openxmlformats.org/drawingml/2006/main">
               <a:ext uri="{FF2B5EF4-FFF2-40B4-BE49-F238E27FC236}">
-                <a16:creationId xmlns:a16="http://schemas.microsoft.com/office/drawing/2014/main" id="{504CA319-4503-4550-BED0-9646276253BA}"/>
+                <a16:creationId xmlns:a16="http://schemas.microsoft.com/office/drawing/2014/main" id="{F9403A64-0ADC-4E4E-8704-8B74DF0520AB}"/>
               </a:ext>
             </a:extLst>
           </p:cNvPr>
@@ -15544,7 +15544,7 @@
           <p:cNvPr id="12" name="Text 9">
             <a:extLst xmlns:a="http://schemas.openxmlformats.org/drawingml/2006/main">
               <a:ext uri="{FF2B5EF4-FFF2-40B4-BE49-F238E27FC236}">
-                <a16:creationId xmlns:a16="http://schemas.microsoft.com/office/drawing/2014/main" id="{B9DE1BD4-A71F-4F10-8273-119119BEB0FA}"/>
+                <a16:creationId xmlns:a16="http://schemas.microsoft.com/office/drawing/2014/main" id="{0C727518-CBCB-4DC4-B3EF-F01FD432A538}"/>
               </a:ext>
             </a:extLst>
           </p:cNvPr>
@@ -15589,7 +15589,7 @@
           <p:cNvPr id="13" name="Text 10">
             <a:extLst xmlns:a="http://schemas.openxmlformats.org/drawingml/2006/main">
               <a:ext uri="{FF2B5EF4-FFF2-40B4-BE49-F238E27FC236}">
-                <a16:creationId xmlns:a16="http://schemas.microsoft.com/office/drawing/2014/main" id="{1269F315-3838-4710-B568-BFB9F8E72BE4}"/>
+                <a16:creationId xmlns:a16="http://schemas.microsoft.com/office/drawing/2014/main" id="{01DCBF64-683E-4537-9298-8BE86026B58F}"/>
               </a:ext>
             </a:extLst>
           </p:cNvPr>
@@ -15637,7 +15637,7 @@
           <p:cNvPr id="14" name="Shape 11">
             <a:extLst xmlns:a="http://schemas.openxmlformats.org/drawingml/2006/main">
               <a:ext uri="{FF2B5EF4-FFF2-40B4-BE49-F238E27FC236}">
-                <a16:creationId xmlns:a16="http://schemas.microsoft.com/office/drawing/2014/main" id="{F7A47A27-B0B6-4E8F-9186-88A38BD528FD}"/>
+                <a16:creationId xmlns:a16="http://schemas.microsoft.com/office/drawing/2014/main" id="{AB9AC33C-CF17-448C-9CB7-D3A1B7B973D0}"/>
               </a:ext>
             </a:extLst>
           </p:cNvPr>
@@ -15684,7 +15684,7 @@
           <p:cNvPr id="15" name="Text 12">
             <a:extLst xmlns:a="http://schemas.openxmlformats.org/drawingml/2006/main">
               <a:ext uri="{FF2B5EF4-FFF2-40B4-BE49-F238E27FC236}">
-                <a16:creationId xmlns:a16="http://schemas.microsoft.com/office/drawing/2014/main" id="{B030B3D6-2053-4919-89BB-471DCF2C5693}"/>
+                <a16:creationId xmlns:a16="http://schemas.microsoft.com/office/drawing/2014/main" id="{6342C8B2-A934-4C5B-A7D6-AEDB0EFC3011}"/>
               </a:ext>
             </a:extLst>
           </p:cNvPr>
@@ -15729,7 +15729,7 @@
           <p:cNvPr id="16" name="Text 13">
             <a:extLst xmlns:a="http://schemas.openxmlformats.org/drawingml/2006/main">
               <a:ext uri="{FF2B5EF4-FFF2-40B4-BE49-F238E27FC236}">
-                <a16:creationId xmlns:a16="http://schemas.microsoft.com/office/drawing/2014/main" id="{1C112EB6-1F04-437D-A914-EA9DE46CC9DC}"/>
+                <a16:creationId xmlns:a16="http://schemas.microsoft.com/office/drawing/2014/main" id="{03E2E680-43BB-4634-9245-78C2D0325DC6}"/>
               </a:ext>
             </a:extLst>
           </p:cNvPr>
@@ -15777,7 +15777,7 @@
           <p:cNvPr id="17" name="Shape 14">
             <a:extLst xmlns:a="http://schemas.openxmlformats.org/drawingml/2006/main">
               <a:ext uri="{FF2B5EF4-FFF2-40B4-BE49-F238E27FC236}">
-                <a16:creationId xmlns:a16="http://schemas.microsoft.com/office/drawing/2014/main" id="{A0F0D2CF-5774-482D-86F3-DD087F64C25B}"/>
+                <a16:creationId xmlns:a16="http://schemas.microsoft.com/office/drawing/2014/main" id="{F9E0605E-8B4A-4CC8-9BC1-523BB8C5EA3E}"/>
               </a:ext>
             </a:extLst>
           </p:cNvPr>
@@ -15824,7 +15824,7 @@
           <p:cNvPr id="18" name="Text 15">
             <a:extLst xmlns:a="http://schemas.openxmlformats.org/drawingml/2006/main">
               <a:ext uri="{FF2B5EF4-FFF2-40B4-BE49-F238E27FC236}">
-                <a16:creationId xmlns:a16="http://schemas.microsoft.com/office/drawing/2014/main" id="{205E22A5-2EE1-48E3-B813-9F8ECFC7FCE0}"/>
+                <a16:creationId xmlns:a16="http://schemas.microsoft.com/office/drawing/2014/main" id="{AB0568A1-373A-414C-9970-2BD5A0ED4AF8}"/>
               </a:ext>
             </a:extLst>
           </p:cNvPr>
@@ -15869,7 +15869,7 @@
           <p:cNvPr id="19" name="Text 16">
             <a:extLst xmlns:a="http://schemas.openxmlformats.org/drawingml/2006/main">
               <a:ext uri="{FF2B5EF4-FFF2-40B4-BE49-F238E27FC236}">
-                <a16:creationId xmlns:a16="http://schemas.microsoft.com/office/drawing/2014/main" id="{C430A1E3-8371-4072-ADB8-EB429DD46746}"/>
+                <a16:creationId xmlns:a16="http://schemas.microsoft.com/office/drawing/2014/main" id="{EE7B6940-7622-41CF-B029-52E8CCBC446B}"/>
               </a:ext>
             </a:extLst>
           </p:cNvPr>
@@ -15917,7 +15917,7 @@
           <p:cNvPr id="20" name="Shape 17">
             <a:extLst xmlns:a="http://schemas.openxmlformats.org/drawingml/2006/main">
               <a:ext uri="{FF2B5EF4-FFF2-40B4-BE49-F238E27FC236}">
-                <a16:creationId xmlns:a16="http://schemas.microsoft.com/office/drawing/2014/main" id="{11198349-2C62-42B2-81AD-DD208A9EE460}"/>
+                <a16:creationId xmlns:a16="http://schemas.microsoft.com/office/drawing/2014/main" id="{8014AB30-670C-4EEB-A042-CCFEDCC252EF}"/>
               </a:ext>
             </a:extLst>
           </p:cNvPr>
@@ -15964,7 +15964,7 @@
           <p:cNvPr id="21" name="Text 18">
             <a:extLst xmlns:a="http://schemas.openxmlformats.org/drawingml/2006/main">
               <a:ext uri="{FF2B5EF4-FFF2-40B4-BE49-F238E27FC236}">
-                <a16:creationId xmlns:a16="http://schemas.microsoft.com/office/drawing/2014/main" id="{7AC907E9-FA09-4C97-B6D2-85352B8B81C8}"/>
+                <a16:creationId xmlns:a16="http://schemas.microsoft.com/office/drawing/2014/main" id="{F30DA9F6-2B2A-48B0-B3A6-9435E7E9C9CC}"/>
               </a:ext>
             </a:extLst>
           </p:cNvPr>
@@ -16009,7 +16009,7 @@
           <p:cNvPr id="22" name="Text 19">
             <a:extLst xmlns:a="http://schemas.openxmlformats.org/drawingml/2006/main">
               <a:ext uri="{FF2B5EF4-FFF2-40B4-BE49-F238E27FC236}">
-                <a16:creationId xmlns:a16="http://schemas.microsoft.com/office/drawing/2014/main" id="{7614188A-3CB4-47CE-8487-D559EF6C2F42}"/>
+                <a16:creationId xmlns:a16="http://schemas.microsoft.com/office/drawing/2014/main" id="{F8E5481A-0AD6-4BE9-AFCF-89FC87B20122}"/>
               </a:ext>
             </a:extLst>
           </p:cNvPr>
@@ -16057,7 +16057,7 @@
           <p:cNvPr id="23" name="Shape 20">
             <a:extLst xmlns:a="http://schemas.openxmlformats.org/drawingml/2006/main">
               <a:ext uri="{FF2B5EF4-FFF2-40B4-BE49-F238E27FC236}">
-                <a16:creationId xmlns:a16="http://schemas.microsoft.com/office/drawing/2014/main" id="{0990E30D-8046-4C98-9C26-18279DE78184}"/>
+                <a16:creationId xmlns:a16="http://schemas.microsoft.com/office/drawing/2014/main" id="{CFBC7A1C-6826-42E4-BE45-BF41C9426DB1}"/>
               </a:ext>
             </a:extLst>
           </p:cNvPr>
@@ -16104,7 +16104,7 @@
           <p:cNvPr id="24" name="Text 21">
             <a:extLst xmlns:a="http://schemas.openxmlformats.org/drawingml/2006/main">
               <a:ext uri="{FF2B5EF4-FFF2-40B4-BE49-F238E27FC236}">
-                <a16:creationId xmlns:a16="http://schemas.microsoft.com/office/drawing/2014/main" id="{37C8CDF8-2CF2-4C1A-81D1-CF64697AEE67}"/>
+                <a16:creationId xmlns:a16="http://schemas.microsoft.com/office/drawing/2014/main" id="{955CA460-C668-487A-AFCD-4A4CEA42FC80}"/>
               </a:ext>
             </a:extLst>
           </p:cNvPr>
@@ -16149,7 +16149,7 @@
           <p:cNvPr id="25" name="Text 22">
             <a:extLst xmlns:a="http://schemas.openxmlformats.org/drawingml/2006/main">
               <a:ext uri="{FF2B5EF4-FFF2-40B4-BE49-F238E27FC236}">
-                <a16:creationId xmlns:a16="http://schemas.microsoft.com/office/drawing/2014/main" id="{9B992CEA-D603-49CA-B538-DEBCF25A2D43}"/>
+                <a16:creationId xmlns:a16="http://schemas.microsoft.com/office/drawing/2014/main" id="{69D17C19-FFE7-4538-99EC-0112E32C9077}"/>
               </a:ext>
             </a:extLst>
           </p:cNvPr>
@@ -16197,7 +16197,7 @@
           <p:cNvPr id="26" name="Shape 23">
             <a:extLst xmlns:a="http://schemas.openxmlformats.org/drawingml/2006/main">
               <a:ext uri="{FF2B5EF4-FFF2-40B4-BE49-F238E27FC236}">
-                <a16:creationId xmlns:a16="http://schemas.microsoft.com/office/drawing/2014/main" id="{B17F6C2F-F64F-4191-ABE4-FA873C2F849A}"/>
+                <a16:creationId xmlns:a16="http://schemas.microsoft.com/office/drawing/2014/main" id="{57CED6A0-206F-4EBA-822C-10CDE14AC62B}"/>
               </a:ext>
             </a:extLst>
           </p:cNvPr>
@@ -16244,7 +16244,7 @@
           <p:cNvPr id="27" name="Text 24">
             <a:extLst xmlns:a="http://schemas.openxmlformats.org/drawingml/2006/main">
               <a:ext uri="{FF2B5EF4-FFF2-40B4-BE49-F238E27FC236}">
-                <a16:creationId xmlns:a16="http://schemas.microsoft.com/office/drawing/2014/main" id="{A081508E-AA46-4C9F-8E51-6763A345C1AB}"/>
+                <a16:creationId xmlns:a16="http://schemas.microsoft.com/office/drawing/2014/main" id="{2DD0B960-FB70-4C8C-B48F-1F154568A544}"/>
               </a:ext>
             </a:extLst>
           </p:cNvPr>
@@ -16289,7 +16289,7 @@
           <p:cNvPr id="28" name="Text 25">
             <a:extLst xmlns:a="http://schemas.openxmlformats.org/drawingml/2006/main">
               <a:ext uri="{FF2B5EF4-FFF2-40B4-BE49-F238E27FC236}">
-                <a16:creationId xmlns:a16="http://schemas.microsoft.com/office/drawing/2014/main" id="{959B6D4F-64E9-4793-BB33-0A494CA09C8D}"/>
+                <a16:creationId xmlns:a16="http://schemas.microsoft.com/office/drawing/2014/main" id="{9B10F922-93B2-477E-A8CC-5536A1392F8C}"/>
               </a:ext>
             </a:extLst>
           </p:cNvPr>
@@ -16337,7 +16337,7 @@
           <p:cNvPr id="29" name="Shape 26">
             <a:extLst xmlns:a="http://schemas.openxmlformats.org/drawingml/2006/main">
               <a:ext uri="{FF2B5EF4-FFF2-40B4-BE49-F238E27FC236}">
-                <a16:creationId xmlns:a16="http://schemas.microsoft.com/office/drawing/2014/main" id="{C84FB3D6-BB69-4FFB-89DC-AAF3B8F3C395}"/>
+                <a16:creationId xmlns:a16="http://schemas.microsoft.com/office/drawing/2014/main" id="{3EC1CA03-3575-46A3-A2D1-F8F00F444742}"/>
               </a:ext>
             </a:extLst>
           </p:cNvPr>
@@ -16384,7 +16384,7 @@
           <p:cNvPr id="30" name="Text 27">
             <a:extLst xmlns:a="http://schemas.openxmlformats.org/drawingml/2006/main">
               <a:ext uri="{FF2B5EF4-FFF2-40B4-BE49-F238E27FC236}">
-                <a16:creationId xmlns:a16="http://schemas.microsoft.com/office/drawing/2014/main" id="{644EF105-CCF6-4C40-9692-AF1A0F4A5AB4}"/>
+                <a16:creationId xmlns:a16="http://schemas.microsoft.com/office/drawing/2014/main" id="{2F834B61-AD4E-4BFB-A2BD-A047519E6B8E}"/>
               </a:ext>
             </a:extLst>
           </p:cNvPr>
@@ -16429,7 +16429,7 @@
           <p:cNvPr id="31" name="Text 28">
             <a:extLst xmlns:a="http://schemas.openxmlformats.org/drawingml/2006/main">
               <a:ext uri="{FF2B5EF4-FFF2-40B4-BE49-F238E27FC236}">
-                <a16:creationId xmlns:a16="http://schemas.microsoft.com/office/drawing/2014/main" id="{3D0490D6-6CD6-4203-ABF6-D6AD041BB4C2}"/>
+                <a16:creationId xmlns:a16="http://schemas.microsoft.com/office/drawing/2014/main" id="{CD27D36D-02B2-4EBB-8F4B-8D9CF4B3E398}"/>
               </a:ext>
             </a:extLst>
           </p:cNvPr>
@@ -16475,7 +16475,7 @@
     </p:spTree>
     <p:extLst>
       <p:ext uri="{BB962C8B-B14F-4D97-AF65-F5344CB8AC3E}">
-        <p14:creationId xmlns:p14="http://schemas.microsoft.com/office/powerpoint/2010/main" val="1208971195"/>
+        <p14:creationId xmlns:p14="http://schemas.microsoft.com/office/powerpoint/2010/main" val="768937393"/>
       </p:ext>
     </p:extLst>
   </p:cSld>
@@ -16506,7 +16506,7 @@
           <p:cNvPr id="2" name="Text 0">
             <a:extLst xmlns:a="http://schemas.openxmlformats.org/drawingml/2006/main">
               <a:ext uri="{FF2B5EF4-FFF2-40B4-BE49-F238E27FC236}">
-                <a16:creationId xmlns:a16="http://schemas.microsoft.com/office/drawing/2014/main" id="{47537E44-A4A7-4272-A7C5-B375E12F86C9}"/>
+                <a16:creationId xmlns:a16="http://schemas.microsoft.com/office/drawing/2014/main" id="{61EBA2E1-BB91-4003-820B-0C34DAE3D39A}"/>
               </a:ext>
             </a:extLst>
           </p:cNvPr>
@@ -16551,7 +16551,7 @@
           <p:cNvPr id="3" name="Text 1">
             <a:extLst xmlns:a="http://schemas.openxmlformats.org/drawingml/2006/main">
               <a:ext uri="{FF2B5EF4-FFF2-40B4-BE49-F238E27FC236}">
-                <a16:creationId xmlns:a16="http://schemas.microsoft.com/office/drawing/2014/main" id="{6A80AD53-3C3C-49A3-9172-6A94E7C9FBEC}"/>
+                <a16:creationId xmlns:a16="http://schemas.microsoft.com/office/drawing/2014/main" id="{7FF269B8-61D4-444E-8770-8FB2116A41D6}"/>
               </a:ext>
             </a:extLst>
           </p:cNvPr>
@@ -16596,7 +16596,7 @@
           <p:cNvPr id="4" name="Text 2">
             <a:extLst xmlns:a="http://schemas.openxmlformats.org/drawingml/2006/main">
               <a:ext uri="{FF2B5EF4-FFF2-40B4-BE49-F238E27FC236}">
-                <a16:creationId xmlns:a16="http://schemas.microsoft.com/office/drawing/2014/main" id="{B31A8A42-EF37-472E-B8ED-67DCC92F51CC}"/>
+                <a16:creationId xmlns:a16="http://schemas.microsoft.com/office/drawing/2014/main" id="{DD9647F6-8A4D-402C-AFE3-CC33425769BF}"/>
               </a:ext>
             </a:extLst>
           </p:cNvPr>
@@ -16641,7 +16641,7 @@
           <p:cNvPr id="5" name="Text 3">
             <a:extLst xmlns:a="http://schemas.openxmlformats.org/drawingml/2006/main">
               <a:ext uri="{FF2B5EF4-FFF2-40B4-BE49-F238E27FC236}">
-                <a16:creationId xmlns:a16="http://schemas.microsoft.com/office/drawing/2014/main" id="{53C7FB97-8465-4540-9A88-5482265A302F}"/>
+                <a16:creationId xmlns:a16="http://schemas.microsoft.com/office/drawing/2014/main" id="{C7D2A2CA-671C-41FF-8FA3-E84D38574C82}"/>
               </a:ext>
             </a:extLst>
           </p:cNvPr>
@@ -16686,7 +16686,7 @@
           <p:cNvPr id="6" name="Text 4">
             <a:extLst xmlns:a="http://schemas.openxmlformats.org/drawingml/2006/main">
               <a:ext uri="{FF2B5EF4-FFF2-40B4-BE49-F238E27FC236}">
-                <a16:creationId xmlns:a16="http://schemas.microsoft.com/office/drawing/2014/main" id="{C871D1D2-BCEA-4DD1-982D-0F7883CEB63B}"/>
+                <a16:creationId xmlns:a16="http://schemas.microsoft.com/office/drawing/2014/main" id="{E16C6543-5E90-4472-A172-57076FAA754D}"/>
               </a:ext>
             </a:extLst>
           </p:cNvPr>
@@ -16727,7 +16727,7 @@
                 <a:ea typeface="Calibri"/>
                 <a:cs typeface="Calibri"/>
               </a:rPr>
-              <a:t>Three distinct decisions and tool vocabularies use 132 balanced discovery records and 30 disjoint held-out records each.</a:t>
+              <a:t>Three distinct decisions and tool vocabularies use 132 balanced discovery records and 30 disjoint held-out records each; all 90 held-out records are pairwise disjoint.</a:t>
             </a:r>
           </a:p>
           <a:p xmlns:a="http://schemas.openxmlformats.org/drawingml/2006/main">
@@ -16749,7 +16749,7 @@
                 <a:ea typeface="Calibri"/>
                 <a:cs typeface="Calibri"/>
               </a:rPr>
-              <a:t>Compiled programs preserve 90/90 exact outcomes versus 89/90 baseline while cutting requests 66.6%, tokens 63.1%, observed latency 64.2%, and estimated cost 58.7% in aggregate.</a:t>
+              <a:t>Compiled programs preserve 90/90 exact outcomes versus 89/90 baseline (exact McNemar p=1) while cutting requests 66.6%, tokens 63.1%, observed latency 64.2%, and estimated cost 58.7% in aggregate.</a:t>
             </a:r>
           </a:p>
           <a:p xmlns:a="http://schemas.openxmlformats.org/drawingml/2006/main">
@@ -16771,6 +16771,28 @@
                 <a:ea typeface="Calibri"/>
                 <a:cs typeface="Calibri"/>
               </a:rPr>
+              <a:t>All three artifacts are admitted at the registered α=.05; with no compiled-only failure the pooled discordance bound is 3.3%.</a:t>
+            </a:r>
+          </a:p>
+          <a:p xmlns:a="http://schemas.openxmlformats.org/drawingml/2006/main">
+            <a:pPr marL="342900" indent="-342900">
+              <a:lnSpc>
+                <a:spcPct val="105000"/>
+              </a:lnSpc>
+              <a:spcAft>
+                <a:spcPts val="700"/>
+              </a:spcAft>
+              <a:buChar char="•"/>
+            </a:pPr>
+            <a:r>
+              <a:rPr sz="1150">
+                <a:solidFill>
+                  <a:srgbClr val="24354F"/>
+                </a:solidFill>
+                <a:latin typeface="Calibri"/>
+                <a:ea typeface="Calibri"/>
+                <a:cs typeface="Calibri"/>
+              </a:rPr>
               <a:t>Hand-written programs also reach 90/90; automatic discovery and lifecycle—not runtime dominance—are the contribution.</a:t>
             </a:r>
           </a:p>
@@ -16781,7 +16803,7 @@
           <p:cNvPr id="7" name="Shape 5">
             <a:extLst xmlns:a="http://schemas.openxmlformats.org/drawingml/2006/main">
               <a:ext uri="{FF2B5EF4-FFF2-40B4-BE49-F238E27FC236}">
-                <a16:creationId xmlns:a16="http://schemas.microsoft.com/office/drawing/2014/main" id="{1CAE864C-7F77-4950-86F2-8A68DF374833}"/>
+                <a16:creationId xmlns:a16="http://schemas.microsoft.com/office/drawing/2014/main" id="{FE000C01-BE96-4CCB-B91F-E8EB421E580A}"/>
               </a:ext>
             </a:extLst>
           </p:cNvPr>
@@ -16828,7 +16850,7 @@
           <p:cNvPr id="8" name="Text 6">
             <a:extLst xmlns:a="http://schemas.openxmlformats.org/drawingml/2006/main">
               <a:ext uri="{FF2B5EF4-FFF2-40B4-BE49-F238E27FC236}">
-                <a16:creationId xmlns:a16="http://schemas.microsoft.com/office/drawing/2014/main" id="{6F60C7D7-A7CC-4458-950E-BE5BE78ACB19}"/>
+                <a16:creationId xmlns:a16="http://schemas.microsoft.com/office/drawing/2014/main" id="{9960028B-5273-4EE3-9745-879B8EB9FB03}"/>
               </a:ext>
             </a:extLst>
           </p:cNvPr>
@@ -16866,7 +16888,7 @@
                 <a:ea typeface="Calibri"/>
                 <a:cs typeface="Calibri"/>
               </a:rPr>
-              <a:t>The two new families compile verified three-read pre-model programs; the original issue family retains its conservative two-read prefix. The study changes decision and tools, but not repository or time: cross-repository and time-forward transfer remain open.</a:t>
+              <a:t>The two new families compile verified three-read pre-model programs; the original issue family retains its conservative two-read prefix. Both newer families are cache-cold in every arm, so part of the 32.0–75.3% cost range is prompt-cache warmth rather than compiled depth; provider-side break-even is 411, 182, and 181 episodes against 132 paid discovery episodes each. The study changes decision and tools, but not repository or time: cross-repository and time-forward transfer remain open.</a:t>
             </a:r>
           </a:p>
         </p:txBody>
@@ -16883,7 +16905,7 @@
         </p:xfrm>
         <a:graphic xmlns:a="http://schemas.openxmlformats.org/drawingml/2006/main">
           <a:graphicData uri="http://schemas.openxmlformats.org/drawingml/2006/chart">
-            <c:chart xmlns:r="http://schemas.openxmlformats.org/officeDocument/2006/relationships" xmlns:c="http://schemas.openxmlformats.org/drawingml/2006/chart" r:id="Rafe49cfed8f44a59"/>
+            <c:chart xmlns:r="http://schemas.openxmlformats.org/officeDocument/2006/relationships" xmlns:c="http://schemas.openxmlformats.org/drawingml/2006/chart" r:id="R7df5fac1fec848d9"/>
           </a:graphicData>
         </a:graphic>
       </p:graphicFrame>
@@ -16892,7 +16914,7 @@
           <p:cNvPr id="10" name="Text 7">
             <a:extLst xmlns:a="http://schemas.openxmlformats.org/drawingml/2006/main">
               <a:ext uri="{FF2B5EF4-FFF2-40B4-BE49-F238E27FC236}">
-                <a16:creationId xmlns:a16="http://schemas.microsoft.com/office/drawing/2014/main" id="{0B331E79-403C-4717-87B5-C776DCD7014B}"/>
+                <a16:creationId xmlns:a16="http://schemas.microsoft.com/office/drawing/2014/main" id="{B32FD0FE-2125-4ED0-9B7E-ED068DA6B4D2}"/>
               </a:ext>
             </a:extLst>
           </p:cNvPr>
@@ -16937,7 +16959,7 @@
           <p:cNvPr id="11" name="Shape 8">
             <a:extLst xmlns:a="http://schemas.openxmlformats.org/drawingml/2006/main">
               <a:ext uri="{FF2B5EF4-FFF2-40B4-BE49-F238E27FC236}">
-                <a16:creationId xmlns:a16="http://schemas.microsoft.com/office/drawing/2014/main" id="{504CA319-4503-4550-BED0-9646276253BA}"/>
+                <a16:creationId xmlns:a16="http://schemas.microsoft.com/office/drawing/2014/main" id="{F9403A64-0ADC-4E4E-8704-8B74DF0520AB}"/>
               </a:ext>
             </a:extLst>
           </p:cNvPr>
@@ -16984,7 +17006,7 @@
           <p:cNvPr id="12" name="Text 9">
             <a:extLst xmlns:a="http://schemas.openxmlformats.org/drawingml/2006/main">
               <a:ext uri="{FF2B5EF4-FFF2-40B4-BE49-F238E27FC236}">
-                <a16:creationId xmlns:a16="http://schemas.microsoft.com/office/drawing/2014/main" id="{B9DE1BD4-A71F-4F10-8273-119119BEB0FA}"/>
+                <a16:creationId xmlns:a16="http://schemas.microsoft.com/office/drawing/2014/main" id="{0C727518-CBCB-4DC4-B3EF-F01FD432A538}"/>
               </a:ext>
             </a:extLst>
           </p:cNvPr>
@@ -17029,7 +17051,7 @@
           <p:cNvPr id="13" name="Text 10">
             <a:extLst xmlns:a="http://schemas.openxmlformats.org/drawingml/2006/main">
               <a:ext uri="{FF2B5EF4-FFF2-40B4-BE49-F238E27FC236}">
-                <a16:creationId xmlns:a16="http://schemas.microsoft.com/office/drawing/2014/main" id="{1269F315-3838-4710-B568-BFB9F8E72BE4}"/>
+                <a16:creationId xmlns:a16="http://schemas.microsoft.com/office/drawing/2014/main" id="{01DCBF64-683E-4537-9298-8BE86026B58F}"/>
               </a:ext>
             </a:extLst>
           </p:cNvPr>
@@ -17077,7 +17099,7 @@
           <p:cNvPr id="14" name="Shape 11">
             <a:extLst xmlns:a="http://schemas.openxmlformats.org/drawingml/2006/main">
               <a:ext uri="{FF2B5EF4-FFF2-40B4-BE49-F238E27FC236}">
-                <a16:creationId xmlns:a16="http://schemas.microsoft.com/office/drawing/2014/main" id="{F7A47A27-B0B6-4E8F-9186-88A38BD528FD}"/>
+                <a16:creationId xmlns:a16="http://schemas.microsoft.com/office/drawing/2014/main" id="{AB9AC33C-CF17-448C-9CB7-D3A1B7B973D0}"/>
               </a:ext>
             </a:extLst>
           </p:cNvPr>
@@ -17124,7 +17146,7 @@
           <p:cNvPr id="15" name="Text 12">
             <a:extLst xmlns:a="http://schemas.openxmlformats.org/drawingml/2006/main">
               <a:ext uri="{FF2B5EF4-FFF2-40B4-BE49-F238E27FC236}">
-                <a16:creationId xmlns:a16="http://schemas.microsoft.com/office/drawing/2014/main" id="{B030B3D6-2053-4919-89BB-471DCF2C5693}"/>
+                <a16:creationId xmlns:a16="http://schemas.microsoft.com/office/drawing/2014/main" id="{6342C8B2-A934-4C5B-A7D6-AEDB0EFC3011}"/>
               </a:ext>
             </a:extLst>
           </p:cNvPr>
@@ -17169,7 +17191,7 @@
           <p:cNvPr id="16" name="Text 13">
             <a:extLst xmlns:a="http://schemas.openxmlformats.org/drawingml/2006/main">
               <a:ext uri="{FF2B5EF4-FFF2-40B4-BE49-F238E27FC236}">
-                <a16:creationId xmlns:a16="http://schemas.microsoft.com/office/drawing/2014/main" id="{1C112EB6-1F04-437D-A914-EA9DE46CC9DC}"/>
+                <a16:creationId xmlns:a16="http://schemas.microsoft.com/office/drawing/2014/main" id="{03E2E680-43BB-4634-9245-78C2D0325DC6}"/>
               </a:ext>
             </a:extLst>
           </p:cNvPr>
@@ -17217,7 +17239,7 @@
           <p:cNvPr id="17" name="Shape 14">
             <a:extLst xmlns:a="http://schemas.openxmlformats.org/drawingml/2006/main">
               <a:ext uri="{FF2B5EF4-FFF2-40B4-BE49-F238E27FC236}">
-                <a16:creationId xmlns:a16="http://schemas.microsoft.com/office/drawing/2014/main" id="{A0F0D2CF-5774-482D-86F3-DD087F64C25B}"/>
+                <a16:creationId xmlns:a16="http://schemas.microsoft.com/office/drawing/2014/main" id="{F9E0605E-8B4A-4CC8-9BC1-523BB8C5EA3E}"/>
               </a:ext>
             </a:extLst>
           </p:cNvPr>
@@ -17264,7 +17286,7 @@
           <p:cNvPr id="18" name="Text 15">
             <a:extLst xmlns:a="http://schemas.openxmlformats.org/drawingml/2006/main">
               <a:ext uri="{FF2B5EF4-FFF2-40B4-BE49-F238E27FC236}">
-                <a16:creationId xmlns:a16="http://schemas.microsoft.com/office/drawing/2014/main" id="{205E22A5-2EE1-48E3-B813-9F8ECFC7FCE0}"/>
+                <a16:creationId xmlns:a16="http://schemas.microsoft.com/office/drawing/2014/main" id="{AB0568A1-373A-414C-9970-2BD5A0ED4AF8}"/>
               </a:ext>
             </a:extLst>
           </p:cNvPr>
@@ -17309,7 +17331,7 @@
           <p:cNvPr id="19" name="Text 16">
             <a:extLst xmlns:a="http://schemas.openxmlformats.org/drawingml/2006/main">
               <a:ext uri="{FF2B5EF4-FFF2-40B4-BE49-F238E27FC236}">
-                <a16:creationId xmlns:a16="http://schemas.microsoft.com/office/drawing/2014/main" id="{C430A1E3-8371-4072-ADB8-EB429DD46746}"/>
+                <a16:creationId xmlns:a16="http://schemas.microsoft.com/office/drawing/2014/main" id="{EE7B6940-7622-41CF-B029-52E8CCBC446B}"/>
               </a:ext>
             </a:extLst>
           </p:cNvPr>
@@ -17357,7 +17379,7 @@
           <p:cNvPr id="20" name="Shape 17">
             <a:extLst xmlns:a="http://schemas.openxmlformats.org/drawingml/2006/main">
               <a:ext uri="{FF2B5EF4-FFF2-40B4-BE49-F238E27FC236}">
-                <a16:creationId xmlns:a16="http://schemas.microsoft.com/office/drawing/2014/main" id="{11198349-2C62-42B2-81AD-DD208A9EE460}"/>
+                <a16:creationId xmlns:a16="http://schemas.microsoft.com/office/drawing/2014/main" id="{8014AB30-670C-4EEB-A042-CCFEDCC252EF}"/>
               </a:ext>
             </a:extLst>
           </p:cNvPr>
@@ -17404,7 +17426,7 @@
           <p:cNvPr id="21" name="Text 18">
             <a:extLst xmlns:a="http://schemas.openxmlformats.org/drawingml/2006/main">
               <a:ext uri="{FF2B5EF4-FFF2-40B4-BE49-F238E27FC236}">
-                <a16:creationId xmlns:a16="http://schemas.microsoft.com/office/drawing/2014/main" id="{7AC907E9-FA09-4C97-B6D2-85352B8B81C8}"/>
+                <a16:creationId xmlns:a16="http://schemas.microsoft.com/office/drawing/2014/main" id="{F30DA9F6-2B2A-48B0-B3A6-9435E7E9C9CC}"/>
               </a:ext>
             </a:extLst>
           </p:cNvPr>
@@ -17449,7 +17471,7 @@
           <p:cNvPr id="22" name="Text 19">
             <a:extLst xmlns:a="http://schemas.openxmlformats.org/drawingml/2006/main">
               <a:ext uri="{FF2B5EF4-FFF2-40B4-BE49-F238E27FC236}">
-                <a16:creationId xmlns:a16="http://schemas.microsoft.com/office/drawing/2014/main" id="{7614188A-3CB4-47CE-8487-D559EF6C2F42}"/>
+                <a16:creationId xmlns:a16="http://schemas.microsoft.com/office/drawing/2014/main" id="{F8E5481A-0AD6-4BE9-AFCF-89FC87B20122}"/>
               </a:ext>
             </a:extLst>
           </p:cNvPr>
@@ -17497,7 +17519,7 @@
           <p:cNvPr id="23" name="Shape 20">
             <a:extLst xmlns:a="http://schemas.openxmlformats.org/drawingml/2006/main">
               <a:ext uri="{FF2B5EF4-FFF2-40B4-BE49-F238E27FC236}">
-                <a16:creationId xmlns:a16="http://schemas.microsoft.com/office/drawing/2014/main" id="{0990E30D-8046-4C98-9C26-18279DE78184}"/>
+                <a16:creationId xmlns:a16="http://schemas.microsoft.com/office/drawing/2014/main" id="{CFBC7A1C-6826-42E4-BE45-BF41C9426DB1}"/>
               </a:ext>
             </a:extLst>
           </p:cNvPr>
@@ -17544,7 +17566,7 @@
           <p:cNvPr id="24" name="Text 21">
             <a:extLst xmlns:a="http://schemas.openxmlformats.org/drawingml/2006/main">
               <a:ext uri="{FF2B5EF4-FFF2-40B4-BE49-F238E27FC236}">
-                <a16:creationId xmlns:a16="http://schemas.microsoft.com/office/drawing/2014/main" id="{37C8CDF8-2CF2-4C1A-81D1-CF64697AEE67}"/>
+                <a16:creationId xmlns:a16="http://schemas.microsoft.com/office/drawing/2014/main" id="{955CA460-C668-487A-AFCD-4A4CEA42FC80}"/>
               </a:ext>
             </a:extLst>
           </p:cNvPr>
@@ -17589,7 +17611,7 @@
           <p:cNvPr id="25" name="Text 22">
             <a:extLst xmlns:a="http://schemas.openxmlformats.org/drawingml/2006/main">
               <a:ext uri="{FF2B5EF4-FFF2-40B4-BE49-F238E27FC236}">
-                <a16:creationId xmlns:a16="http://schemas.microsoft.com/office/drawing/2014/main" id="{9B992CEA-D603-49CA-B538-DEBCF25A2D43}"/>
+                <a16:creationId xmlns:a16="http://schemas.microsoft.com/office/drawing/2014/main" id="{69D17C19-FFE7-4538-99EC-0112E32C9077}"/>
               </a:ext>
             </a:extLst>
           </p:cNvPr>
@@ -17637,7 +17659,7 @@
           <p:cNvPr id="26" name="Shape 23">
             <a:extLst xmlns:a="http://schemas.openxmlformats.org/drawingml/2006/main">
               <a:ext uri="{FF2B5EF4-FFF2-40B4-BE49-F238E27FC236}">
-                <a16:creationId xmlns:a16="http://schemas.microsoft.com/office/drawing/2014/main" id="{B17F6C2F-F64F-4191-ABE4-FA873C2F849A}"/>
+                <a16:creationId xmlns:a16="http://schemas.microsoft.com/office/drawing/2014/main" id="{57CED6A0-206F-4EBA-822C-10CDE14AC62B}"/>
               </a:ext>
             </a:extLst>
           </p:cNvPr>
@@ -17684,7 +17706,7 @@
           <p:cNvPr id="27" name="Text 24">
             <a:extLst xmlns:a="http://schemas.openxmlformats.org/drawingml/2006/main">
               <a:ext uri="{FF2B5EF4-FFF2-40B4-BE49-F238E27FC236}">
-                <a16:creationId xmlns:a16="http://schemas.microsoft.com/office/drawing/2014/main" id="{A081508E-AA46-4C9F-8E51-6763A345C1AB}"/>
+                <a16:creationId xmlns:a16="http://schemas.microsoft.com/office/drawing/2014/main" id="{2DD0B960-FB70-4C8C-B48F-1F154568A544}"/>
               </a:ext>
             </a:extLst>
           </p:cNvPr>
@@ -17729,7 +17751,7 @@
           <p:cNvPr id="28" name="Text 25">
             <a:extLst xmlns:a="http://schemas.openxmlformats.org/drawingml/2006/main">
               <a:ext uri="{FF2B5EF4-FFF2-40B4-BE49-F238E27FC236}">
-                <a16:creationId xmlns:a16="http://schemas.microsoft.com/office/drawing/2014/main" id="{959B6D4F-64E9-4793-BB33-0A494CA09C8D}"/>
+                <a16:creationId xmlns:a16="http://schemas.microsoft.com/office/drawing/2014/main" id="{9B10F922-93B2-477E-A8CC-5536A1392F8C}"/>
               </a:ext>
             </a:extLst>
           </p:cNvPr>
@@ -17777,7 +17799,7 @@
           <p:cNvPr id="29" name="Shape 26">
             <a:extLst xmlns:a="http://schemas.openxmlformats.org/drawingml/2006/main">
               <a:ext uri="{FF2B5EF4-FFF2-40B4-BE49-F238E27FC236}">
-                <a16:creationId xmlns:a16="http://schemas.microsoft.com/office/drawing/2014/main" id="{C84FB3D6-BB69-4FFB-89DC-AAF3B8F3C395}"/>
+                <a16:creationId xmlns:a16="http://schemas.microsoft.com/office/drawing/2014/main" id="{3EC1CA03-3575-46A3-A2D1-F8F00F444742}"/>
               </a:ext>
             </a:extLst>
           </p:cNvPr>
@@ -17824,7 +17846,7 @@
           <p:cNvPr id="30" name="Text 27">
             <a:extLst xmlns:a="http://schemas.openxmlformats.org/drawingml/2006/main">
               <a:ext uri="{FF2B5EF4-FFF2-40B4-BE49-F238E27FC236}">
-                <a16:creationId xmlns:a16="http://schemas.microsoft.com/office/drawing/2014/main" id="{644EF105-CCF6-4C40-9692-AF1A0F4A5AB4}"/>
+                <a16:creationId xmlns:a16="http://schemas.microsoft.com/office/drawing/2014/main" id="{2F834B61-AD4E-4BFB-A2BD-A047519E6B8E}"/>
               </a:ext>
             </a:extLst>
           </p:cNvPr>
@@ -17869,7 +17891,7 @@
           <p:cNvPr id="31" name="Text 28">
             <a:extLst xmlns:a="http://schemas.openxmlformats.org/drawingml/2006/main">
               <a:ext uri="{FF2B5EF4-FFF2-40B4-BE49-F238E27FC236}">
-                <a16:creationId xmlns:a16="http://schemas.microsoft.com/office/drawing/2014/main" id="{3D0490D6-6CD6-4203-ABF6-D6AD041BB4C2}"/>
+                <a16:creationId xmlns:a16="http://schemas.microsoft.com/office/drawing/2014/main" id="{CD27D36D-02B2-4EBB-8F4B-8D9CF4B3E398}"/>
               </a:ext>
             </a:extLst>
           </p:cNvPr>
@@ -17915,7 +17937,7 @@
     </p:spTree>
     <p:extLst>
       <p:ext uri="{BB962C8B-B14F-4D97-AF65-F5344CB8AC3E}">
-        <p14:creationId xmlns:p14="http://schemas.microsoft.com/office/powerpoint/2010/main" val="1208971195"/>
+        <p14:creationId xmlns:p14="http://schemas.microsoft.com/office/powerpoint/2010/main" val="768937393"/>
       </p:ext>
     </p:extLst>
   </p:cSld>
@@ -17946,7 +17968,7 @@
           <p:cNvPr id="2" name="Text 0">
             <a:extLst xmlns:a="http://schemas.openxmlformats.org/drawingml/2006/main">
               <a:ext uri="{FF2B5EF4-FFF2-40B4-BE49-F238E27FC236}">
-                <a16:creationId xmlns:a16="http://schemas.microsoft.com/office/drawing/2014/main" id="{0A48F156-0314-48B6-9AC2-BFD670EA0E6B}"/>
+                <a16:creationId xmlns:a16="http://schemas.microsoft.com/office/drawing/2014/main" id="{BD901B87-420C-4828-A809-C31A8629C706}"/>
               </a:ext>
             </a:extLst>
           </p:cNvPr>
@@ -17991,7 +18013,7 @@
           <p:cNvPr id="3" name="Text 1">
             <a:extLst xmlns:a="http://schemas.openxmlformats.org/drawingml/2006/main">
               <a:ext uri="{FF2B5EF4-FFF2-40B4-BE49-F238E27FC236}">
-                <a16:creationId xmlns:a16="http://schemas.microsoft.com/office/drawing/2014/main" id="{0CDAAB7F-D55A-48E2-81FC-A693635ACFEF}"/>
+                <a16:creationId xmlns:a16="http://schemas.microsoft.com/office/drawing/2014/main" id="{B900CB05-628E-45CF-A0DC-4C1142679EF2}"/>
               </a:ext>
             </a:extLst>
           </p:cNvPr>
@@ -18036,7 +18058,7 @@
           <p:cNvPr id="4" name="Text 2">
             <a:extLst xmlns:a="http://schemas.openxmlformats.org/drawingml/2006/main">
               <a:ext uri="{FF2B5EF4-FFF2-40B4-BE49-F238E27FC236}">
-                <a16:creationId xmlns:a16="http://schemas.microsoft.com/office/drawing/2014/main" id="{81FD6E9F-57DA-44AE-8C38-DD2CEBEF1E31}"/>
+                <a16:creationId xmlns:a16="http://schemas.microsoft.com/office/drawing/2014/main" id="{B7C5222A-79C3-498E-A1C8-8D7D82BA0EF2}"/>
               </a:ext>
             </a:extLst>
           </p:cNvPr>
@@ -18081,7 +18103,7 @@
           <p:cNvPr id="5" name="Text 3">
             <a:extLst xmlns:a="http://schemas.openxmlformats.org/drawingml/2006/main">
               <a:ext uri="{FF2B5EF4-FFF2-40B4-BE49-F238E27FC236}">
-                <a16:creationId xmlns:a16="http://schemas.microsoft.com/office/drawing/2014/main" id="{320FF2DF-80A2-4B64-8CBD-6C607722090B}"/>
+                <a16:creationId xmlns:a16="http://schemas.microsoft.com/office/drawing/2014/main" id="{2605E775-56C0-456B-B0E1-8190350C76A4}"/>
               </a:ext>
             </a:extLst>
           </p:cNvPr>
@@ -18133,7 +18155,7 @@
         </p:xfrm>
         <a:graphic xmlns:a="http://schemas.openxmlformats.org/drawingml/2006/main">
           <a:graphicData uri="http://schemas.openxmlformats.org/drawingml/2006/chart">
-            <c:chart xmlns:r="http://schemas.openxmlformats.org/officeDocument/2006/relationships" xmlns:c="http://schemas.openxmlformats.org/drawingml/2006/chart" r:id="R4ed7d00ca4714534"/>
+            <c:chart xmlns:r="http://schemas.openxmlformats.org/officeDocument/2006/relationships" xmlns:c="http://schemas.openxmlformats.org/drawingml/2006/chart" r:id="R7a76a4dcbe73440f"/>
           </a:graphicData>
         </a:graphic>
       </p:graphicFrame>
@@ -18142,7 +18164,7 @@
           <p:cNvPr id="7" name="Shape 4">
             <a:extLst xmlns:a="http://schemas.openxmlformats.org/drawingml/2006/main">
               <a:ext uri="{FF2B5EF4-FFF2-40B4-BE49-F238E27FC236}">
-                <a16:creationId xmlns:a16="http://schemas.microsoft.com/office/drawing/2014/main" id="{4C61DBFC-3CBC-453A-A842-A96AC39B9262}"/>
+                <a16:creationId xmlns:a16="http://schemas.microsoft.com/office/drawing/2014/main" id="{91EEFD00-2EAF-4316-85C2-AB12D3230E2A}"/>
               </a:ext>
             </a:extLst>
           </p:cNvPr>
@@ -18189,7 +18211,7 @@
           <p:cNvPr id="8" name="Text 5">
             <a:extLst xmlns:a="http://schemas.openxmlformats.org/drawingml/2006/main">
               <a:ext uri="{FF2B5EF4-FFF2-40B4-BE49-F238E27FC236}">
-                <a16:creationId xmlns:a16="http://schemas.microsoft.com/office/drawing/2014/main" id="{ABF0743B-9F2B-4063-930E-A556F8699D86}"/>
+                <a16:creationId xmlns:a16="http://schemas.microsoft.com/office/drawing/2014/main" id="{97860B53-13E1-487D-BD98-3C88FEB4AD73}"/>
               </a:ext>
             </a:extLst>
           </p:cNvPr>
@@ -18234,7 +18256,7 @@
           <p:cNvPr id="9" name="Text 6">
             <a:extLst xmlns:a="http://schemas.openxmlformats.org/drawingml/2006/main">
               <a:ext uri="{FF2B5EF4-FFF2-40B4-BE49-F238E27FC236}">
-                <a16:creationId xmlns:a16="http://schemas.microsoft.com/office/drawing/2014/main" id="{66007DC8-2D11-48B1-8C63-F8A73B914034}"/>
+                <a16:creationId xmlns:a16="http://schemas.microsoft.com/office/drawing/2014/main" id="{B4433739-7996-4C7A-94B1-A423D2BE6840}"/>
               </a:ext>
             </a:extLst>
           </p:cNvPr>
@@ -18373,7 +18395,7 @@
           <p:cNvPr id="10" name="Shape 7">
             <a:extLst xmlns:a="http://schemas.openxmlformats.org/drawingml/2006/main">
               <a:ext uri="{FF2B5EF4-FFF2-40B4-BE49-F238E27FC236}">
-                <a16:creationId xmlns:a16="http://schemas.microsoft.com/office/drawing/2014/main" id="{7197A531-2B36-490B-B3BF-4974B5C7C125}"/>
+                <a16:creationId xmlns:a16="http://schemas.microsoft.com/office/drawing/2014/main" id="{410F6585-17F3-40AE-B903-FC7698C43477}"/>
               </a:ext>
             </a:extLst>
           </p:cNvPr>
@@ -18420,7 +18442,7 @@
           <p:cNvPr id="11" name="Text 8">
             <a:extLst xmlns:a="http://schemas.openxmlformats.org/drawingml/2006/main">
               <a:ext uri="{FF2B5EF4-FFF2-40B4-BE49-F238E27FC236}">
-                <a16:creationId xmlns:a16="http://schemas.microsoft.com/office/drawing/2014/main" id="{ADE69949-8BFE-4889-94EA-01B65AC9FF02}"/>
+                <a16:creationId xmlns:a16="http://schemas.microsoft.com/office/drawing/2014/main" id="{FC8910C6-658E-42E7-A16E-0A6784D62AC6}"/>
               </a:ext>
             </a:extLst>
           </p:cNvPr>
@@ -18465,7 +18487,7 @@
           <p:cNvPr id="12" name="Text 9">
             <a:extLst xmlns:a="http://schemas.openxmlformats.org/drawingml/2006/main">
               <a:ext uri="{FF2B5EF4-FFF2-40B4-BE49-F238E27FC236}">
-                <a16:creationId xmlns:a16="http://schemas.microsoft.com/office/drawing/2014/main" id="{2AA261BB-EEA6-40D9-B313-1C6A2F24B38D}"/>
+                <a16:creationId xmlns:a16="http://schemas.microsoft.com/office/drawing/2014/main" id="{D286E7AA-4CB0-4027-9A18-97B3D13A354D}"/>
               </a:ext>
             </a:extLst>
           </p:cNvPr>
@@ -18513,7 +18535,7 @@
           <p:cNvPr id="13" name="Shape 10">
             <a:extLst xmlns:a="http://schemas.openxmlformats.org/drawingml/2006/main">
               <a:ext uri="{FF2B5EF4-FFF2-40B4-BE49-F238E27FC236}">
-                <a16:creationId xmlns:a16="http://schemas.microsoft.com/office/drawing/2014/main" id="{A138B87F-C837-47F9-BAC9-34439541613E}"/>
+                <a16:creationId xmlns:a16="http://schemas.microsoft.com/office/drawing/2014/main" id="{BA323C09-ED53-49B9-B170-68B6498CA898}"/>
               </a:ext>
             </a:extLst>
           </p:cNvPr>
@@ -18560,7 +18582,7 @@
           <p:cNvPr id="14" name="Text 11">
             <a:extLst xmlns:a="http://schemas.openxmlformats.org/drawingml/2006/main">
               <a:ext uri="{FF2B5EF4-FFF2-40B4-BE49-F238E27FC236}">
-                <a16:creationId xmlns:a16="http://schemas.microsoft.com/office/drawing/2014/main" id="{5FA24466-6EDC-406B-B8A9-D824D1B0980C}"/>
+                <a16:creationId xmlns:a16="http://schemas.microsoft.com/office/drawing/2014/main" id="{DDDE3B08-C2BD-46ED-B6B8-3A53DCD645AC}"/>
               </a:ext>
             </a:extLst>
           </p:cNvPr>
@@ -18605,7 +18627,7 @@
           <p:cNvPr id="15" name="Text 12">
             <a:extLst xmlns:a="http://schemas.openxmlformats.org/drawingml/2006/main">
               <a:ext uri="{FF2B5EF4-FFF2-40B4-BE49-F238E27FC236}">
-                <a16:creationId xmlns:a16="http://schemas.microsoft.com/office/drawing/2014/main" id="{393DF808-5D23-422A-A18B-5F6E177B9D09}"/>
+                <a16:creationId xmlns:a16="http://schemas.microsoft.com/office/drawing/2014/main" id="{CABF4F47-440C-4BBF-A3BD-49B617D1FBCA}"/>
               </a:ext>
             </a:extLst>
           </p:cNvPr>
@@ -18653,7 +18675,7 @@
           <p:cNvPr id="16" name="Shape 13">
             <a:extLst xmlns:a="http://schemas.openxmlformats.org/drawingml/2006/main">
               <a:ext uri="{FF2B5EF4-FFF2-40B4-BE49-F238E27FC236}">
-                <a16:creationId xmlns:a16="http://schemas.microsoft.com/office/drawing/2014/main" id="{6D40F684-4CDE-4CEB-A185-8CF76B9B182B}"/>
+                <a16:creationId xmlns:a16="http://schemas.microsoft.com/office/drawing/2014/main" id="{6A3EA504-16D1-4E73-89CF-51A95EFEC371}"/>
               </a:ext>
             </a:extLst>
           </p:cNvPr>
@@ -18700,7 +18722,7 @@
           <p:cNvPr id="17" name="Text 14">
             <a:extLst xmlns:a="http://schemas.openxmlformats.org/drawingml/2006/main">
               <a:ext uri="{FF2B5EF4-FFF2-40B4-BE49-F238E27FC236}">
-                <a16:creationId xmlns:a16="http://schemas.microsoft.com/office/drawing/2014/main" id="{9E31FDD4-16BD-4491-A0D3-16CFA2F63744}"/>
+                <a16:creationId xmlns:a16="http://schemas.microsoft.com/office/drawing/2014/main" id="{E82C28DB-26C6-4B88-8022-D13875BCEEF4}"/>
               </a:ext>
             </a:extLst>
           </p:cNvPr>
@@ -18745,7 +18767,7 @@
           <p:cNvPr id="18" name="Text 15">
             <a:extLst xmlns:a="http://schemas.openxmlformats.org/drawingml/2006/main">
               <a:ext uri="{FF2B5EF4-FFF2-40B4-BE49-F238E27FC236}">
-                <a16:creationId xmlns:a16="http://schemas.microsoft.com/office/drawing/2014/main" id="{D636444D-DE9B-423C-BC24-7250B5EB5A74}"/>
+                <a16:creationId xmlns:a16="http://schemas.microsoft.com/office/drawing/2014/main" id="{000A2180-A3D0-4D75-9140-D790441F0CD4}"/>
               </a:ext>
             </a:extLst>
           </p:cNvPr>
@@ -18793,7 +18815,7 @@
           <p:cNvPr id="19" name="Shape 16">
             <a:extLst xmlns:a="http://schemas.openxmlformats.org/drawingml/2006/main">
               <a:ext uri="{FF2B5EF4-FFF2-40B4-BE49-F238E27FC236}">
-                <a16:creationId xmlns:a16="http://schemas.microsoft.com/office/drawing/2014/main" id="{B0500DE4-6F7E-443B-9DD2-8AC3DF7E84C0}"/>
+                <a16:creationId xmlns:a16="http://schemas.microsoft.com/office/drawing/2014/main" id="{E6A26659-DE2E-4270-A226-3C25BB7C092F}"/>
               </a:ext>
             </a:extLst>
           </p:cNvPr>
@@ -18840,7 +18862,7 @@
           <p:cNvPr id="20" name="Text 17">
             <a:extLst xmlns:a="http://schemas.openxmlformats.org/drawingml/2006/main">
               <a:ext uri="{FF2B5EF4-FFF2-40B4-BE49-F238E27FC236}">
-                <a16:creationId xmlns:a16="http://schemas.microsoft.com/office/drawing/2014/main" id="{925E4CA0-874E-4511-8102-0F27E4DF2866}"/>
+                <a16:creationId xmlns:a16="http://schemas.microsoft.com/office/drawing/2014/main" id="{A2EDF812-069F-492B-91C7-1CCBA3C1A8C9}"/>
               </a:ext>
             </a:extLst>
           </p:cNvPr>
@@ -18885,7 +18907,7 @@
           <p:cNvPr id="21" name="Text 18">
             <a:extLst xmlns:a="http://schemas.openxmlformats.org/drawingml/2006/main">
               <a:ext uri="{FF2B5EF4-FFF2-40B4-BE49-F238E27FC236}">
-                <a16:creationId xmlns:a16="http://schemas.microsoft.com/office/drawing/2014/main" id="{486E1845-39DD-4439-8EB3-5229C2FC79A0}"/>
+                <a16:creationId xmlns:a16="http://schemas.microsoft.com/office/drawing/2014/main" id="{C409B171-DF04-41B1-97EB-C3AAAE184E17}"/>
               </a:ext>
             </a:extLst>
           </p:cNvPr>
@@ -18933,7 +18955,7 @@
           <p:cNvPr id="22" name="Shape 19">
             <a:extLst xmlns:a="http://schemas.openxmlformats.org/drawingml/2006/main">
               <a:ext uri="{FF2B5EF4-FFF2-40B4-BE49-F238E27FC236}">
-                <a16:creationId xmlns:a16="http://schemas.microsoft.com/office/drawing/2014/main" id="{DC265A55-82AC-4D07-A1EB-9CA876D226B1}"/>
+                <a16:creationId xmlns:a16="http://schemas.microsoft.com/office/drawing/2014/main" id="{64768BAF-66DD-4327-B3FD-72CF476370C1}"/>
               </a:ext>
             </a:extLst>
           </p:cNvPr>
@@ -18980,7 +19002,7 @@
           <p:cNvPr id="23" name="Text 20">
             <a:extLst xmlns:a="http://schemas.openxmlformats.org/drawingml/2006/main">
               <a:ext uri="{FF2B5EF4-FFF2-40B4-BE49-F238E27FC236}">
-                <a16:creationId xmlns:a16="http://schemas.microsoft.com/office/drawing/2014/main" id="{13BD151F-375E-4D72-9564-0242C3749C0D}"/>
+                <a16:creationId xmlns:a16="http://schemas.microsoft.com/office/drawing/2014/main" id="{11B31463-7EAE-4233-A7CD-2354DE23B645}"/>
               </a:ext>
             </a:extLst>
           </p:cNvPr>
@@ -19025,7 +19047,7 @@
           <p:cNvPr id="24" name="Text 21">
             <a:extLst xmlns:a="http://schemas.openxmlformats.org/drawingml/2006/main">
               <a:ext uri="{FF2B5EF4-FFF2-40B4-BE49-F238E27FC236}">
-                <a16:creationId xmlns:a16="http://schemas.microsoft.com/office/drawing/2014/main" id="{D87EF1AD-708B-4620-A29B-F00CC54D6A8C}"/>
+                <a16:creationId xmlns:a16="http://schemas.microsoft.com/office/drawing/2014/main" id="{1B2A1142-B1EB-4E1C-B298-11A66A535DED}"/>
               </a:ext>
             </a:extLst>
           </p:cNvPr>
@@ -19073,7 +19095,7 @@
           <p:cNvPr id="25" name="Shape 22">
             <a:extLst xmlns:a="http://schemas.openxmlformats.org/drawingml/2006/main">
               <a:ext uri="{FF2B5EF4-FFF2-40B4-BE49-F238E27FC236}">
-                <a16:creationId xmlns:a16="http://schemas.microsoft.com/office/drawing/2014/main" id="{7375B8E6-8262-4F0B-A01D-2556BCCE6A3F}"/>
+                <a16:creationId xmlns:a16="http://schemas.microsoft.com/office/drawing/2014/main" id="{110A2506-18D8-4128-84F3-747CEBE28B87}"/>
               </a:ext>
             </a:extLst>
           </p:cNvPr>
@@ -19120,7 +19142,7 @@
           <p:cNvPr id="26" name="Text 23">
             <a:extLst xmlns:a="http://schemas.openxmlformats.org/drawingml/2006/main">
               <a:ext uri="{FF2B5EF4-FFF2-40B4-BE49-F238E27FC236}">
-                <a16:creationId xmlns:a16="http://schemas.microsoft.com/office/drawing/2014/main" id="{FF7C28D9-DF8F-470D-AA8E-B064C61EFB41}"/>
+                <a16:creationId xmlns:a16="http://schemas.microsoft.com/office/drawing/2014/main" id="{5A084AE7-FE0E-4275-9277-7E6C6DA997CD}"/>
               </a:ext>
             </a:extLst>
           </p:cNvPr>
@@ -19165,7 +19187,7 @@
           <p:cNvPr id="27" name="Text 24">
             <a:extLst xmlns:a="http://schemas.openxmlformats.org/drawingml/2006/main">
               <a:ext uri="{FF2B5EF4-FFF2-40B4-BE49-F238E27FC236}">
-                <a16:creationId xmlns:a16="http://schemas.microsoft.com/office/drawing/2014/main" id="{F90DD29E-DE11-4BEF-B98B-38039B91580D}"/>
+                <a16:creationId xmlns:a16="http://schemas.microsoft.com/office/drawing/2014/main" id="{A1FB5531-0070-408E-8EFE-F7C1A08CF08A}"/>
               </a:ext>
             </a:extLst>
           </p:cNvPr>
@@ -19213,7 +19235,7 @@
           <p:cNvPr id="28" name="Text 25">
             <a:extLst xmlns:a="http://schemas.openxmlformats.org/drawingml/2006/main">
               <a:ext uri="{FF2B5EF4-FFF2-40B4-BE49-F238E27FC236}">
-                <a16:creationId xmlns:a16="http://schemas.microsoft.com/office/drawing/2014/main" id="{83699E44-7180-4CA2-81BC-AB23E260B536}"/>
+                <a16:creationId xmlns:a16="http://schemas.microsoft.com/office/drawing/2014/main" id="{0B3235D2-C986-49C9-B8A7-E2BBFC195515}"/>
               </a:ext>
             </a:extLst>
           </p:cNvPr>
@@ -19256,7 +19278,7 @@
     </p:spTree>
     <p:extLst>
       <p:ext uri="{BB962C8B-B14F-4D97-AF65-F5344CB8AC3E}">
-        <p14:creationId xmlns:p14="http://schemas.microsoft.com/office/powerpoint/2010/main" val="11734618"/>
+        <p14:creationId xmlns:p14="http://schemas.microsoft.com/office/powerpoint/2010/main" val="835436690"/>
       </p:ext>
     </p:extLst>
   </p:cSld>
@@ -19287,7 +19309,7 @@
           <p:cNvPr id="2" name="Text 0">
             <a:extLst xmlns:a="http://schemas.openxmlformats.org/drawingml/2006/main">
               <a:ext uri="{FF2B5EF4-FFF2-40B4-BE49-F238E27FC236}">
-                <a16:creationId xmlns:a16="http://schemas.microsoft.com/office/drawing/2014/main" id="{4821F673-7DDF-4865-8EC4-8A2E7BBDEEFF}"/>
+                <a16:creationId xmlns:a16="http://schemas.microsoft.com/office/drawing/2014/main" id="{468B8AB2-A027-49BB-84AF-1E94195A5F14}"/>
               </a:ext>
             </a:extLst>
           </p:cNvPr>
@@ -19332,7 +19354,7 @@
           <p:cNvPr id="3" name="Text 1">
             <a:extLst xmlns:a="http://schemas.openxmlformats.org/drawingml/2006/main">
               <a:ext uri="{FF2B5EF4-FFF2-40B4-BE49-F238E27FC236}">
-                <a16:creationId xmlns:a16="http://schemas.microsoft.com/office/drawing/2014/main" id="{6F657F30-0FD0-498F-BDE7-4B787BB139E2}"/>
+                <a16:creationId xmlns:a16="http://schemas.microsoft.com/office/drawing/2014/main" id="{493C9095-330B-45F1-B037-738CFAB59EE4}"/>
               </a:ext>
             </a:extLst>
           </p:cNvPr>
@@ -19377,7 +19399,7 @@
           <p:cNvPr id="4" name="Text 2">
             <a:extLst xmlns:a="http://schemas.openxmlformats.org/drawingml/2006/main">
               <a:ext uri="{FF2B5EF4-FFF2-40B4-BE49-F238E27FC236}">
-                <a16:creationId xmlns:a16="http://schemas.microsoft.com/office/drawing/2014/main" id="{F7FDF488-878D-4DB9-94D7-3A26B55071D3}"/>
+                <a16:creationId xmlns:a16="http://schemas.microsoft.com/office/drawing/2014/main" id="{79735734-042F-415F-9BE9-37B551AFFBEA}"/>
               </a:ext>
             </a:extLst>
           </p:cNvPr>
@@ -19422,7 +19444,7 @@
           <p:cNvPr id="5" name="Text 3">
             <a:extLst xmlns:a="http://schemas.openxmlformats.org/drawingml/2006/main">
               <a:ext uri="{FF2B5EF4-FFF2-40B4-BE49-F238E27FC236}">
-                <a16:creationId xmlns:a16="http://schemas.microsoft.com/office/drawing/2014/main" id="{5E7BE4F2-7AC3-4D5A-B718-41A2928A8777}"/>
+                <a16:creationId xmlns:a16="http://schemas.microsoft.com/office/drawing/2014/main" id="{37BD9962-8577-4FD6-A810-250F32794FED}"/>
               </a:ext>
             </a:extLst>
           </p:cNvPr>
@@ -19467,7 +19489,7 @@
           <p:cNvPr id="6" name="Text 4">
             <a:extLst xmlns:a="http://schemas.openxmlformats.org/drawingml/2006/main">
               <a:ext uri="{FF2B5EF4-FFF2-40B4-BE49-F238E27FC236}">
-                <a16:creationId xmlns:a16="http://schemas.microsoft.com/office/drawing/2014/main" id="{6B25FC00-DD2B-40C2-94F8-0ED166855AB2}"/>
+                <a16:creationId xmlns:a16="http://schemas.microsoft.com/office/drawing/2014/main" id="{EE434FEB-90A1-4936-89BF-83269EA8B93B}"/>
               </a:ext>
             </a:extLst>
           </p:cNvPr>
@@ -19526,7 +19548,7 @@
           <p:cNvPr id="7" name="Text 5">
             <a:extLst xmlns:a="http://schemas.openxmlformats.org/drawingml/2006/main">
               <a:ext uri="{FF2B5EF4-FFF2-40B4-BE49-F238E27FC236}">
-                <a16:creationId xmlns:a16="http://schemas.microsoft.com/office/drawing/2014/main" id="{188D4145-9C7B-40EB-A463-378009E3E0BF}"/>
+                <a16:creationId xmlns:a16="http://schemas.microsoft.com/office/drawing/2014/main" id="{ABDAE33C-2571-428A-9F01-253569A27905}"/>
               </a:ext>
             </a:extLst>
           </p:cNvPr>
@@ -19571,7 +19593,7 @@
           <p:cNvPr id="8" name="Shape 6">
             <a:extLst xmlns:a="http://schemas.openxmlformats.org/drawingml/2006/main">
               <a:ext uri="{FF2B5EF4-FFF2-40B4-BE49-F238E27FC236}">
-                <a16:creationId xmlns:a16="http://schemas.microsoft.com/office/drawing/2014/main" id="{F460FB3D-B5FC-4465-B2D8-1D8EA766E447}"/>
+                <a16:creationId xmlns:a16="http://schemas.microsoft.com/office/drawing/2014/main" id="{D8699F75-F9A5-46C5-99AE-83CD11EE8C4C}"/>
               </a:ext>
             </a:extLst>
           </p:cNvPr>
@@ -19618,7 +19640,7 @@
           <p:cNvPr id="9" name="Shape 7">
             <a:extLst xmlns:a="http://schemas.openxmlformats.org/drawingml/2006/main">
               <a:ext uri="{FF2B5EF4-FFF2-40B4-BE49-F238E27FC236}">
-                <a16:creationId xmlns:a16="http://schemas.microsoft.com/office/drawing/2014/main" id="{E6DE435B-D449-49CE-97AD-2DF35ECF73C5}"/>
+                <a16:creationId xmlns:a16="http://schemas.microsoft.com/office/drawing/2014/main" id="{AE24CF2F-B5A4-406E-A552-42A71816B851}"/>
               </a:ext>
             </a:extLst>
           </p:cNvPr>
@@ -19656,7 +19678,7 @@
           <p:cNvPr id="10" name="Text 8">
             <a:extLst xmlns:a="http://schemas.openxmlformats.org/drawingml/2006/main">
               <a:ext uri="{FF2B5EF4-FFF2-40B4-BE49-F238E27FC236}">
-                <a16:creationId xmlns:a16="http://schemas.microsoft.com/office/drawing/2014/main" id="{C36AE5C2-1C7B-4F28-979D-073DB667A833}"/>
+                <a16:creationId xmlns:a16="http://schemas.microsoft.com/office/drawing/2014/main" id="{3EEF282D-BD83-4E7D-AE36-E6789A656043}"/>
               </a:ext>
             </a:extLst>
           </p:cNvPr>
@@ -19701,7 +19723,7 @@
           <p:cNvPr id="11" name="Text 9">
             <a:extLst xmlns:a="http://schemas.openxmlformats.org/drawingml/2006/main">
               <a:ext uri="{FF2B5EF4-FFF2-40B4-BE49-F238E27FC236}">
-                <a16:creationId xmlns:a16="http://schemas.microsoft.com/office/drawing/2014/main" id="{F1E3877D-6D0B-4858-9D9E-B05A0F85CB7D}"/>
+                <a16:creationId xmlns:a16="http://schemas.microsoft.com/office/drawing/2014/main" id="{047E7201-D0E3-493F-BEA5-2AB4C743E9A3}"/>
               </a:ext>
             </a:extLst>
           </p:cNvPr>
@@ -19749,7 +19771,7 @@
           <p:cNvPr id="12" name="Text 10">
             <a:extLst xmlns:a="http://schemas.openxmlformats.org/drawingml/2006/main">
               <a:ext uri="{FF2B5EF4-FFF2-40B4-BE49-F238E27FC236}">
-                <a16:creationId xmlns:a16="http://schemas.microsoft.com/office/drawing/2014/main" id="{89B47872-EBC0-485F-8446-964BD15861A8}"/>
+                <a16:creationId xmlns:a16="http://schemas.microsoft.com/office/drawing/2014/main" id="{46D9ACEE-601B-4180-A996-2B08E155420C}"/>
               </a:ext>
             </a:extLst>
           </p:cNvPr>
@@ -19797,7 +19819,7 @@
           <p:cNvPr id="13" name="Shape 11">
             <a:extLst xmlns:a="http://schemas.openxmlformats.org/drawingml/2006/main">
               <a:ext uri="{FF2B5EF4-FFF2-40B4-BE49-F238E27FC236}">
-                <a16:creationId xmlns:a16="http://schemas.microsoft.com/office/drawing/2014/main" id="{F02C8F91-37C9-4F7C-BB75-5360AA4BC1B1}"/>
+                <a16:creationId xmlns:a16="http://schemas.microsoft.com/office/drawing/2014/main" id="{09DEC2E7-B574-42A5-AC36-22114582BBD2}"/>
               </a:ext>
             </a:extLst>
           </p:cNvPr>
@@ -19844,7 +19866,7 @@
           <p:cNvPr id="14" name="Shape 12">
             <a:extLst xmlns:a="http://schemas.openxmlformats.org/drawingml/2006/main">
               <a:ext uri="{FF2B5EF4-FFF2-40B4-BE49-F238E27FC236}">
-                <a16:creationId xmlns:a16="http://schemas.microsoft.com/office/drawing/2014/main" id="{120E5738-735C-4A35-9B96-AECD44513CBE}"/>
+                <a16:creationId xmlns:a16="http://schemas.microsoft.com/office/drawing/2014/main" id="{44E52477-97F5-4ADB-926E-B2E56762C24D}"/>
               </a:ext>
             </a:extLst>
           </p:cNvPr>
@@ -19882,7 +19904,7 @@
           <p:cNvPr id="15" name="Text 13">
             <a:extLst xmlns:a="http://schemas.openxmlformats.org/drawingml/2006/main">
               <a:ext uri="{FF2B5EF4-FFF2-40B4-BE49-F238E27FC236}">
-                <a16:creationId xmlns:a16="http://schemas.microsoft.com/office/drawing/2014/main" id="{8D9C84D4-C5C0-4BF3-A564-380955924A13}"/>
+                <a16:creationId xmlns:a16="http://schemas.microsoft.com/office/drawing/2014/main" id="{38AEC745-215A-4B38-AC32-3565E8FEFCDA}"/>
               </a:ext>
             </a:extLst>
           </p:cNvPr>
@@ -19927,7 +19949,7 @@
           <p:cNvPr id="16" name="Text 14">
             <a:extLst xmlns:a="http://schemas.openxmlformats.org/drawingml/2006/main">
               <a:ext uri="{FF2B5EF4-FFF2-40B4-BE49-F238E27FC236}">
-                <a16:creationId xmlns:a16="http://schemas.microsoft.com/office/drawing/2014/main" id="{5716223A-AEB7-4FD0-B5CE-5C327A48E70D}"/>
+                <a16:creationId xmlns:a16="http://schemas.microsoft.com/office/drawing/2014/main" id="{6E418781-42CE-400A-90CB-7B37C8291C45}"/>
               </a:ext>
             </a:extLst>
           </p:cNvPr>
@@ -19975,7 +19997,7 @@
           <p:cNvPr id="17" name="Text 15">
             <a:extLst xmlns:a="http://schemas.openxmlformats.org/drawingml/2006/main">
               <a:ext uri="{FF2B5EF4-FFF2-40B4-BE49-F238E27FC236}">
-                <a16:creationId xmlns:a16="http://schemas.microsoft.com/office/drawing/2014/main" id="{21AB890A-76F5-4BAD-9F76-4E3F9AFCE3D7}"/>
+                <a16:creationId xmlns:a16="http://schemas.microsoft.com/office/drawing/2014/main" id="{2D169046-F752-4119-A3EC-C7BAF3F22155}"/>
               </a:ext>
             </a:extLst>
           </p:cNvPr>
@@ -20023,7 +20045,7 @@
           <p:cNvPr id="18" name="Shape 16">
             <a:extLst xmlns:a="http://schemas.openxmlformats.org/drawingml/2006/main">
               <a:ext uri="{FF2B5EF4-FFF2-40B4-BE49-F238E27FC236}">
-                <a16:creationId xmlns:a16="http://schemas.microsoft.com/office/drawing/2014/main" id="{D5B30607-7DAF-4EF3-9D86-0E183C0CDF4A}"/>
+                <a16:creationId xmlns:a16="http://schemas.microsoft.com/office/drawing/2014/main" id="{32D63DFB-8324-410F-BD04-FC3395CFBAAD}"/>
               </a:ext>
             </a:extLst>
           </p:cNvPr>
@@ -20070,7 +20092,7 @@
           <p:cNvPr id="19" name="Shape 17">
             <a:extLst xmlns:a="http://schemas.openxmlformats.org/drawingml/2006/main">
               <a:ext uri="{FF2B5EF4-FFF2-40B4-BE49-F238E27FC236}">
-                <a16:creationId xmlns:a16="http://schemas.microsoft.com/office/drawing/2014/main" id="{FA872E8D-02BA-40E0-9044-D209D1F6A8D3}"/>
+                <a16:creationId xmlns:a16="http://schemas.microsoft.com/office/drawing/2014/main" id="{289332C1-9364-4BC4-8063-4518F7D38F48}"/>
               </a:ext>
             </a:extLst>
           </p:cNvPr>
@@ -20108,7 +20130,7 @@
           <p:cNvPr id="20" name="Text 18">
             <a:extLst xmlns:a="http://schemas.openxmlformats.org/drawingml/2006/main">
               <a:ext uri="{FF2B5EF4-FFF2-40B4-BE49-F238E27FC236}">
-                <a16:creationId xmlns:a16="http://schemas.microsoft.com/office/drawing/2014/main" id="{FBF78AE7-C754-41B0-BB93-32A9AD48CACA}"/>
+                <a16:creationId xmlns:a16="http://schemas.microsoft.com/office/drawing/2014/main" id="{1535C2DC-DDB8-483E-9E32-450A2A3DD444}"/>
               </a:ext>
             </a:extLst>
           </p:cNvPr>
@@ -20153,7 +20175,7 @@
           <p:cNvPr id="21" name="Text 19">
             <a:extLst xmlns:a="http://schemas.openxmlformats.org/drawingml/2006/main">
               <a:ext uri="{FF2B5EF4-FFF2-40B4-BE49-F238E27FC236}">
-                <a16:creationId xmlns:a16="http://schemas.microsoft.com/office/drawing/2014/main" id="{678E4642-49AF-4D12-83B8-C70046A752CB}"/>
+                <a16:creationId xmlns:a16="http://schemas.microsoft.com/office/drawing/2014/main" id="{F3762CD0-4ABF-4AB6-AC0F-B57CA6E4D6E9}"/>
               </a:ext>
             </a:extLst>
           </p:cNvPr>
@@ -20201,7 +20223,7 @@
           <p:cNvPr id="22" name="Text 20">
             <a:extLst xmlns:a="http://schemas.openxmlformats.org/drawingml/2006/main">
               <a:ext uri="{FF2B5EF4-FFF2-40B4-BE49-F238E27FC236}">
-                <a16:creationId xmlns:a16="http://schemas.microsoft.com/office/drawing/2014/main" id="{85D080BB-C6ED-4AC4-97C2-4E74BE0EC3A1}"/>
+                <a16:creationId xmlns:a16="http://schemas.microsoft.com/office/drawing/2014/main" id="{45A517A3-4F74-4D3B-A7C6-0BAE972E1511}"/>
               </a:ext>
             </a:extLst>
           </p:cNvPr>
@@ -20249,7 +20271,7 @@
           <p:cNvPr id="23" name="Shape 21">
             <a:extLst xmlns:a="http://schemas.openxmlformats.org/drawingml/2006/main">
               <a:ext uri="{FF2B5EF4-FFF2-40B4-BE49-F238E27FC236}">
-                <a16:creationId xmlns:a16="http://schemas.microsoft.com/office/drawing/2014/main" id="{40A5C583-2B30-4491-8E8F-A4DF358E72F3}"/>
+                <a16:creationId xmlns:a16="http://schemas.microsoft.com/office/drawing/2014/main" id="{1C992A25-204C-4718-9F35-B02445823914}"/>
               </a:ext>
             </a:extLst>
           </p:cNvPr>
@@ -20296,7 +20318,7 @@
           <p:cNvPr id="24" name="Shape 22">
             <a:extLst xmlns:a="http://schemas.openxmlformats.org/drawingml/2006/main">
               <a:ext uri="{FF2B5EF4-FFF2-40B4-BE49-F238E27FC236}">
-                <a16:creationId xmlns:a16="http://schemas.microsoft.com/office/drawing/2014/main" id="{B420A09C-2582-49B5-BD76-02CCD2A6D9B3}"/>
+                <a16:creationId xmlns:a16="http://schemas.microsoft.com/office/drawing/2014/main" id="{0CA1F1D0-34AA-4002-97D1-E2F583CB3C24}"/>
               </a:ext>
             </a:extLst>
           </p:cNvPr>
@@ -20334,7 +20356,7 @@
           <p:cNvPr id="25" name="Text 23">
             <a:extLst xmlns:a="http://schemas.openxmlformats.org/drawingml/2006/main">
               <a:ext uri="{FF2B5EF4-FFF2-40B4-BE49-F238E27FC236}">
-                <a16:creationId xmlns:a16="http://schemas.microsoft.com/office/drawing/2014/main" id="{A1076141-6AE3-4DDB-BE71-F16DA4B5320D}"/>
+                <a16:creationId xmlns:a16="http://schemas.microsoft.com/office/drawing/2014/main" id="{28DAEAA2-254E-4920-967E-4BD8F54690CB}"/>
               </a:ext>
             </a:extLst>
           </p:cNvPr>
@@ -20379,7 +20401,7 @@
           <p:cNvPr id="26" name="Text 24">
             <a:extLst xmlns:a="http://schemas.openxmlformats.org/drawingml/2006/main">
               <a:ext uri="{FF2B5EF4-FFF2-40B4-BE49-F238E27FC236}">
-                <a16:creationId xmlns:a16="http://schemas.microsoft.com/office/drawing/2014/main" id="{D6C12CBF-AB26-4E2E-BC54-3CF14952DFB3}"/>
+                <a16:creationId xmlns:a16="http://schemas.microsoft.com/office/drawing/2014/main" id="{4199882E-4B52-4D27-8A4E-40DE4728C402}"/>
               </a:ext>
             </a:extLst>
           </p:cNvPr>
@@ -20427,7 +20449,7 @@
           <p:cNvPr id="27" name="Text 25">
             <a:extLst xmlns:a="http://schemas.openxmlformats.org/drawingml/2006/main">
               <a:ext uri="{FF2B5EF4-FFF2-40B4-BE49-F238E27FC236}">
-                <a16:creationId xmlns:a16="http://schemas.microsoft.com/office/drawing/2014/main" id="{B359AC5B-F005-4F49-BDCE-0AD58230E4FD}"/>
+                <a16:creationId xmlns:a16="http://schemas.microsoft.com/office/drawing/2014/main" id="{47FE5EDA-9816-4DAD-807D-07EB7A5C66F0}"/>
               </a:ext>
             </a:extLst>
           </p:cNvPr>
@@ -20475,7 +20497,7 @@
           <p:cNvPr id="28" name="Shape 26">
             <a:extLst xmlns:a="http://schemas.openxmlformats.org/drawingml/2006/main">
               <a:ext uri="{FF2B5EF4-FFF2-40B4-BE49-F238E27FC236}">
-                <a16:creationId xmlns:a16="http://schemas.microsoft.com/office/drawing/2014/main" id="{77778F5B-71DD-4356-B685-0E4F71E7DD39}"/>
+                <a16:creationId xmlns:a16="http://schemas.microsoft.com/office/drawing/2014/main" id="{9DA62AEE-BC3D-4BAB-AC49-C8B318264712}"/>
               </a:ext>
             </a:extLst>
           </p:cNvPr>
@@ -20522,7 +20544,7 @@
           <p:cNvPr id="29" name="Text 27">
             <a:extLst xmlns:a="http://schemas.openxmlformats.org/drawingml/2006/main">
               <a:ext uri="{FF2B5EF4-FFF2-40B4-BE49-F238E27FC236}">
-                <a16:creationId xmlns:a16="http://schemas.microsoft.com/office/drawing/2014/main" id="{1FF5DB31-36D3-4A03-ACCA-5DCEDC94A9C3}"/>
+                <a16:creationId xmlns:a16="http://schemas.microsoft.com/office/drawing/2014/main" id="{2D577875-25BB-483A-ACD1-972D54BD1C86}"/>
               </a:ext>
             </a:extLst>
           </p:cNvPr>
@@ -20567,7 +20589,7 @@
           <p:cNvPr id="30" name="Text 28">
             <a:extLst xmlns:a="http://schemas.openxmlformats.org/drawingml/2006/main">
               <a:ext uri="{FF2B5EF4-FFF2-40B4-BE49-F238E27FC236}">
-                <a16:creationId xmlns:a16="http://schemas.microsoft.com/office/drawing/2014/main" id="{9F84ED43-7AA2-4333-9530-13A2374364A0}"/>
+                <a16:creationId xmlns:a16="http://schemas.microsoft.com/office/drawing/2014/main" id="{4C296D93-8F3F-4266-855B-214E25214927}"/>
               </a:ext>
             </a:extLst>
           </p:cNvPr>
@@ -20615,7 +20637,7 @@
           <p:cNvPr id="31" name="Shape 29">
             <a:extLst xmlns:a="http://schemas.openxmlformats.org/drawingml/2006/main">
               <a:ext uri="{FF2B5EF4-FFF2-40B4-BE49-F238E27FC236}">
-                <a16:creationId xmlns:a16="http://schemas.microsoft.com/office/drawing/2014/main" id="{14467AC7-DD15-48E0-BF37-3918861CF95C}"/>
+                <a16:creationId xmlns:a16="http://schemas.microsoft.com/office/drawing/2014/main" id="{3540D925-B234-4749-A337-57484E22AC88}"/>
               </a:ext>
             </a:extLst>
           </p:cNvPr>
@@ -20662,7 +20684,7 @@
           <p:cNvPr id="32" name="Text 30">
             <a:extLst xmlns:a="http://schemas.openxmlformats.org/drawingml/2006/main">
               <a:ext uri="{FF2B5EF4-FFF2-40B4-BE49-F238E27FC236}">
-                <a16:creationId xmlns:a16="http://schemas.microsoft.com/office/drawing/2014/main" id="{DEB9E126-1643-4CB7-AF0B-32BFB30F1959}"/>
+                <a16:creationId xmlns:a16="http://schemas.microsoft.com/office/drawing/2014/main" id="{E0B8487C-2434-4C34-9F86-3331F1536DCC}"/>
               </a:ext>
             </a:extLst>
           </p:cNvPr>
@@ -20707,7 +20729,7 @@
           <p:cNvPr id="33" name="Text 31">
             <a:extLst xmlns:a="http://schemas.openxmlformats.org/drawingml/2006/main">
               <a:ext uri="{FF2B5EF4-FFF2-40B4-BE49-F238E27FC236}">
-                <a16:creationId xmlns:a16="http://schemas.microsoft.com/office/drawing/2014/main" id="{3B809124-0ABE-473F-B944-9FE783A031BC}"/>
+                <a16:creationId xmlns:a16="http://schemas.microsoft.com/office/drawing/2014/main" id="{50C4DC94-6CB3-4CB5-967F-CA5328985B3E}"/>
               </a:ext>
             </a:extLst>
           </p:cNvPr>
@@ -20755,7 +20777,7 @@
           <p:cNvPr id="34" name="Text 32">
             <a:extLst xmlns:a="http://schemas.openxmlformats.org/drawingml/2006/main">
               <a:ext uri="{FF2B5EF4-FFF2-40B4-BE49-F238E27FC236}">
-                <a16:creationId xmlns:a16="http://schemas.microsoft.com/office/drawing/2014/main" id="{8D74C65D-3B47-46DA-8632-5280F7EA7557}"/>
+                <a16:creationId xmlns:a16="http://schemas.microsoft.com/office/drawing/2014/main" id="{13AEF141-0080-4296-9623-7B6FCAF60A7F}"/>
               </a:ext>
             </a:extLst>
           </p:cNvPr>
@@ -20798,7 +20820,7 @@
     </p:spTree>
     <p:extLst>
       <p:ext uri="{BB962C8B-B14F-4D97-AF65-F5344CB8AC3E}">
-        <p14:creationId xmlns:p14="http://schemas.microsoft.com/office/powerpoint/2010/main" val="716447601"/>
+        <p14:creationId xmlns:p14="http://schemas.microsoft.com/office/powerpoint/2010/main" val="2044671093"/>
       </p:ext>
     </p:extLst>
   </p:cSld>
@@ -20829,7 +20851,7 @@
           <p:cNvPr id="2" name="Text 0">
             <a:extLst xmlns:a="http://schemas.openxmlformats.org/drawingml/2006/main">
               <a:ext uri="{FF2B5EF4-FFF2-40B4-BE49-F238E27FC236}">
-                <a16:creationId xmlns:a16="http://schemas.microsoft.com/office/drawing/2014/main" id="{8E3F032C-D25F-4585-A7FF-6CC83698BC6A}"/>
+                <a16:creationId xmlns:a16="http://schemas.microsoft.com/office/drawing/2014/main" id="{68D2F780-CD7E-4287-9912-1E1D2F42E4C3}"/>
               </a:ext>
             </a:extLst>
           </p:cNvPr>
@@ -20874,7 +20896,7 @@
           <p:cNvPr id="3" name="Text 1">
             <a:extLst xmlns:a="http://schemas.openxmlformats.org/drawingml/2006/main">
               <a:ext uri="{FF2B5EF4-FFF2-40B4-BE49-F238E27FC236}">
-                <a16:creationId xmlns:a16="http://schemas.microsoft.com/office/drawing/2014/main" id="{AA93A86D-EECB-4D09-AEEB-E6F412DCAF06}"/>
+                <a16:creationId xmlns:a16="http://schemas.microsoft.com/office/drawing/2014/main" id="{91C5BF02-3AC2-4565-8287-03A83EB28069}"/>
               </a:ext>
             </a:extLst>
           </p:cNvPr>
@@ -20919,7 +20941,7 @@
           <p:cNvPr id="4" name="Text 2">
             <a:extLst xmlns:a="http://schemas.openxmlformats.org/drawingml/2006/main">
               <a:ext uri="{FF2B5EF4-FFF2-40B4-BE49-F238E27FC236}">
-                <a16:creationId xmlns:a16="http://schemas.microsoft.com/office/drawing/2014/main" id="{63398244-6090-4BFF-8527-9C0D16216319}"/>
+                <a16:creationId xmlns:a16="http://schemas.microsoft.com/office/drawing/2014/main" id="{5EB4CFEF-34F1-4D82-BC22-DBAF92357E5E}"/>
               </a:ext>
             </a:extLst>
           </p:cNvPr>
@@ -20964,7 +20986,7 @@
           <p:cNvPr id="5" name="Text 3">
             <a:extLst xmlns:a="http://schemas.openxmlformats.org/drawingml/2006/main">
               <a:ext uri="{FF2B5EF4-FFF2-40B4-BE49-F238E27FC236}">
-                <a16:creationId xmlns:a16="http://schemas.microsoft.com/office/drawing/2014/main" id="{D1480F4A-9610-4C68-9AF8-FE62CCE57377}"/>
+                <a16:creationId xmlns:a16="http://schemas.microsoft.com/office/drawing/2014/main" id="{D523BD44-1C12-46F1-A753-940BC2AC8221}"/>
               </a:ext>
             </a:extLst>
           </p:cNvPr>
@@ -21009,7 +21031,7 @@
           <p:cNvPr id="6" name="Shape 4">
             <a:extLst xmlns:a="http://schemas.openxmlformats.org/drawingml/2006/main">
               <a:ext uri="{FF2B5EF4-FFF2-40B4-BE49-F238E27FC236}">
-                <a16:creationId xmlns:a16="http://schemas.microsoft.com/office/drawing/2014/main" id="{6BD3F316-1314-4940-8E3F-F5A39B4BD84A}"/>
+                <a16:creationId xmlns:a16="http://schemas.microsoft.com/office/drawing/2014/main" id="{5D17CEA0-41B2-470F-A064-572E9189326A}"/>
               </a:ext>
             </a:extLst>
           </p:cNvPr>
@@ -21056,7 +21078,7 @@
           <p:cNvPr id="7" name="Text 5">
             <a:extLst xmlns:a="http://schemas.openxmlformats.org/drawingml/2006/main">
               <a:ext uri="{FF2B5EF4-FFF2-40B4-BE49-F238E27FC236}">
-                <a16:creationId xmlns:a16="http://schemas.microsoft.com/office/drawing/2014/main" id="{A696AC94-4EE9-4FA0-BD03-2459CD66D4F3}"/>
+                <a16:creationId xmlns:a16="http://schemas.microsoft.com/office/drawing/2014/main" id="{97F6A203-925D-4BB2-857C-5A9B9DFCE119}"/>
               </a:ext>
             </a:extLst>
           </p:cNvPr>
@@ -21101,7 +21123,7 @@
           <p:cNvPr id="8" name="Text 6">
             <a:extLst xmlns:a="http://schemas.openxmlformats.org/drawingml/2006/main">
               <a:ext uri="{FF2B5EF4-FFF2-40B4-BE49-F238E27FC236}">
-                <a16:creationId xmlns:a16="http://schemas.microsoft.com/office/drawing/2014/main" id="{FFA3A40F-19A4-4C70-9D1E-442837DFCB91}"/>
+                <a16:creationId xmlns:a16="http://schemas.microsoft.com/office/drawing/2014/main" id="{BF304F30-B28B-481A-9FE6-6A494265D3DD}"/>
               </a:ext>
             </a:extLst>
           </p:cNvPr>
@@ -21146,7 +21168,7 @@
           <p:cNvPr id="9" name="Text 7">
             <a:extLst xmlns:a="http://schemas.openxmlformats.org/drawingml/2006/main">
               <a:ext uri="{FF2B5EF4-FFF2-40B4-BE49-F238E27FC236}">
-                <a16:creationId xmlns:a16="http://schemas.microsoft.com/office/drawing/2014/main" id="{CDEEDF83-31CA-4E9A-A864-BB968BA9E50A}"/>
+                <a16:creationId xmlns:a16="http://schemas.microsoft.com/office/drawing/2014/main" id="{DB8414C7-F309-4335-B6D1-74CB5AC5D0E0}"/>
               </a:ext>
             </a:extLst>
           </p:cNvPr>
@@ -21191,7 +21213,7 @@
           <p:cNvPr id="10" name="Text 8">
             <a:extLst xmlns:a="http://schemas.openxmlformats.org/drawingml/2006/main">
               <a:ext uri="{FF2B5EF4-FFF2-40B4-BE49-F238E27FC236}">
-                <a16:creationId xmlns:a16="http://schemas.microsoft.com/office/drawing/2014/main" id="{D0C9BD12-45C8-48C0-BC58-AF6E701BE504}"/>
+                <a16:creationId xmlns:a16="http://schemas.microsoft.com/office/drawing/2014/main" id="{157A420D-EDB0-4A0B-958E-B42A445B1A57}"/>
               </a:ext>
             </a:extLst>
           </p:cNvPr>
@@ -21236,7 +21258,7 @@
           <p:cNvPr id="11" name="Text 9">
             <a:extLst xmlns:a="http://schemas.openxmlformats.org/drawingml/2006/main">
               <a:ext uri="{FF2B5EF4-FFF2-40B4-BE49-F238E27FC236}">
-                <a16:creationId xmlns:a16="http://schemas.microsoft.com/office/drawing/2014/main" id="{BA6DFC75-7B96-413C-8760-6BBF2921BD71}"/>
+                <a16:creationId xmlns:a16="http://schemas.microsoft.com/office/drawing/2014/main" id="{0216CD5F-AB09-4C08-8069-EEEAC6C3BF41}"/>
               </a:ext>
             </a:extLst>
           </p:cNvPr>
@@ -21281,7 +21303,7 @@
           <p:cNvPr id="12" name="Text 10">
             <a:extLst xmlns:a="http://schemas.openxmlformats.org/drawingml/2006/main">
               <a:ext uri="{FF2B5EF4-FFF2-40B4-BE49-F238E27FC236}">
-                <a16:creationId xmlns:a16="http://schemas.microsoft.com/office/drawing/2014/main" id="{1A1CF3E1-1F53-488E-BD6D-22DEC515FBCF}"/>
+                <a16:creationId xmlns:a16="http://schemas.microsoft.com/office/drawing/2014/main" id="{B03C82F9-055D-4241-91CF-1E13600919B4}"/>
               </a:ext>
             </a:extLst>
           </p:cNvPr>
@@ -21326,7 +21348,7 @@
           <p:cNvPr id="13" name="Text 11">
             <a:extLst xmlns:a="http://schemas.openxmlformats.org/drawingml/2006/main">
               <a:ext uri="{FF2B5EF4-FFF2-40B4-BE49-F238E27FC236}">
-                <a16:creationId xmlns:a16="http://schemas.microsoft.com/office/drawing/2014/main" id="{DC7AF2AD-9D01-4A96-9758-CC5517DAAA0D}"/>
+                <a16:creationId xmlns:a16="http://schemas.microsoft.com/office/drawing/2014/main" id="{FE782F5B-3DA3-42FD-8696-FBB797DFD361}"/>
               </a:ext>
             </a:extLst>
           </p:cNvPr>
@@ -21371,7 +21393,7 @@
           <p:cNvPr id="14" name="Text 12">
             <a:extLst xmlns:a="http://schemas.openxmlformats.org/drawingml/2006/main">
               <a:ext uri="{FF2B5EF4-FFF2-40B4-BE49-F238E27FC236}">
-                <a16:creationId xmlns:a16="http://schemas.microsoft.com/office/drawing/2014/main" id="{3B967263-5B1D-4EFA-BD61-C19F6DED6512}"/>
+                <a16:creationId xmlns:a16="http://schemas.microsoft.com/office/drawing/2014/main" id="{0EB5638F-BED2-4935-826A-44F8C82A6392}"/>
               </a:ext>
             </a:extLst>
           </p:cNvPr>
@@ -21416,7 +21438,7 @@
           <p:cNvPr id="15" name="Text 13">
             <a:extLst xmlns:a="http://schemas.openxmlformats.org/drawingml/2006/main">
               <a:ext uri="{FF2B5EF4-FFF2-40B4-BE49-F238E27FC236}">
-                <a16:creationId xmlns:a16="http://schemas.microsoft.com/office/drawing/2014/main" id="{2D9C33EC-F984-4D1D-980B-EEF93D35CA72}"/>
+                <a16:creationId xmlns:a16="http://schemas.microsoft.com/office/drawing/2014/main" id="{ABFDB29F-C6BC-4D6D-B841-26C5B9183316}"/>
               </a:ext>
             </a:extLst>
           </p:cNvPr>
@@ -21461,7 +21483,7 @@
           <p:cNvPr id="16" name="Text 14">
             <a:extLst xmlns:a="http://schemas.openxmlformats.org/drawingml/2006/main">
               <a:ext uri="{FF2B5EF4-FFF2-40B4-BE49-F238E27FC236}">
-                <a16:creationId xmlns:a16="http://schemas.microsoft.com/office/drawing/2014/main" id="{FF60723B-8349-403F-A53A-A0327C891B1E}"/>
+                <a16:creationId xmlns:a16="http://schemas.microsoft.com/office/drawing/2014/main" id="{7D41A7A1-4D62-4FC3-8BEA-8563950AEEB7}"/>
               </a:ext>
             </a:extLst>
           </p:cNvPr>
@@ -21506,7 +21528,7 @@
           <p:cNvPr id="17" name="Text 15">
             <a:extLst xmlns:a="http://schemas.openxmlformats.org/drawingml/2006/main">
               <a:ext uri="{FF2B5EF4-FFF2-40B4-BE49-F238E27FC236}">
-                <a16:creationId xmlns:a16="http://schemas.microsoft.com/office/drawing/2014/main" id="{033BE9AF-2C6C-462A-86AF-A0E9780A1A2F}"/>
+                <a16:creationId xmlns:a16="http://schemas.microsoft.com/office/drawing/2014/main" id="{C084E31B-84EF-4D8D-8C10-C8DC26B96F81}"/>
               </a:ext>
             </a:extLst>
           </p:cNvPr>
@@ -21554,7 +21576,7 @@
           <p:cNvPr id="18" name="Shape 16">
             <a:extLst xmlns:a="http://schemas.openxmlformats.org/drawingml/2006/main">
               <a:ext uri="{FF2B5EF4-FFF2-40B4-BE49-F238E27FC236}">
-                <a16:creationId xmlns:a16="http://schemas.microsoft.com/office/drawing/2014/main" id="{AA1A7F52-4F04-4FBF-B92A-A345026E9BC6}"/>
+                <a16:creationId xmlns:a16="http://schemas.microsoft.com/office/drawing/2014/main" id="{CA7E7CDA-43C6-46EF-95AC-9D685C3BD062}"/>
               </a:ext>
             </a:extLst>
           </p:cNvPr>
@@ -21601,7 +21623,7 @@
           <p:cNvPr id="19" name="Text 17">
             <a:extLst xmlns:a="http://schemas.openxmlformats.org/drawingml/2006/main">
               <a:ext uri="{FF2B5EF4-FFF2-40B4-BE49-F238E27FC236}">
-                <a16:creationId xmlns:a16="http://schemas.microsoft.com/office/drawing/2014/main" id="{E8154E67-F9A2-44B5-A741-8C69DD6DDA00}"/>
+                <a16:creationId xmlns:a16="http://schemas.microsoft.com/office/drawing/2014/main" id="{A8ED96A2-2DB1-4E4F-9E1A-A2FE72A3A7C8}"/>
               </a:ext>
             </a:extLst>
           </p:cNvPr>
@@ -21646,7 +21668,7 @@
           <p:cNvPr id="20" name="Text 18">
             <a:extLst xmlns:a="http://schemas.openxmlformats.org/drawingml/2006/main">
               <a:ext uri="{FF2B5EF4-FFF2-40B4-BE49-F238E27FC236}">
-                <a16:creationId xmlns:a16="http://schemas.microsoft.com/office/drawing/2014/main" id="{49502C56-F0AC-4DDC-995D-57D9BC0C1006}"/>
+                <a16:creationId xmlns:a16="http://schemas.microsoft.com/office/drawing/2014/main" id="{F2F8B897-D0D4-495F-816A-6286A1724281}"/>
               </a:ext>
             </a:extLst>
           </p:cNvPr>
@@ -21691,7 +21713,7 @@
           <p:cNvPr id="21" name="Text 19">
             <a:extLst xmlns:a="http://schemas.openxmlformats.org/drawingml/2006/main">
               <a:ext uri="{FF2B5EF4-FFF2-40B4-BE49-F238E27FC236}">
-                <a16:creationId xmlns:a16="http://schemas.microsoft.com/office/drawing/2014/main" id="{E94C5A0C-BDDD-41F4-BCC0-7346B1715F32}"/>
+                <a16:creationId xmlns:a16="http://schemas.microsoft.com/office/drawing/2014/main" id="{7EA4C625-0C96-4AC0-9807-2001012A0C82}"/>
               </a:ext>
             </a:extLst>
           </p:cNvPr>
@@ -21736,7 +21758,7 @@
           <p:cNvPr id="22" name="Text 20">
             <a:extLst xmlns:a="http://schemas.openxmlformats.org/drawingml/2006/main">
               <a:ext uri="{FF2B5EF4-FFF2-40B4-BE49-F238E27FC236}">
-                <a16:creationId xmlns:a16="http://schemas.microsoft.com/office/drawing/2014/main" id="{77E7C9ED-BC41-4BD6-97C3-517173C7FD5B}"/>
+                <a16:creationId xmlns:a16="http://schemas.microsoft.com/office/drawing/2014/main" id="{F4CADD13-7721-4C21-A2F9-328CEF30A2A9}"/>
               </a:ext>
             </a:extLst>
           </p:cNvPr>
@@ -21781,7 +21803,7 @@
           <p:cNvPr id="23" name="Text 21">
             <a:extLst xmlns:a="http://schemas.openxmlformats.org/drawingml/2006/main">
               <a:ext uri="{FF2B5EF4-FFF2-40B4-BE49-F238E27FC236}">
-                <a16:creationId xmlns:a16="http://schemas.microsoft.com/office/drawing/2014/main" id="{3642335A-7AAD-42E4-A729-0FE55400A6D1}"/>
+                <a16:creationId xmlns:a16="http://schemas.microsoft.com/office/drawing/2014/main" id="{B43EB1A1-C4D9-4E45-91BE-F49396A0C9F5}"/>
               </a:ext>
             </a:extLst>
           </p:cNvPr>
@@ -21826,7 +21848,7 @@
           <p:cNvPr id="24" name="Text 22">
             <a:extLst xmlns:a="http://schemas.openxmlformats.org/drawingml/2006/main">
               <a:ext uri="{FF2B5EF4-FFF2-40B4-BE49-F238E27FC236}">
-                <a16:creationId xmlns:a16="http://schemas.microsoft.com/office/drawing/2014/main" id="{46CDE77F-EFAF-436D-8FF0-B135CF59A108}"/>
+                <a16:creationId xmlns:a16="http://schemas.microsoft.com/office/drawing/2014/main" id="{DEB2E538-A497-4C94-B158-7176B0CF1D0D}"/>
               </a:ext>
             </a:extLst>
           </p:cNvPr>
@@ -21871,7 +21893,7 @@
           <p:cNvPr id="25" name="Text 23">
             <a:extLst xmlns:a="http://schemas.openxmlformats.org/drawingml/2006/main">
               <a:ext uri="{FF2B5EF4-FFF2-40B4-BE49-F238E27FC236}">
-                <a16:creationId xmlns:a16="http://schemas.microsoft.com/office/drawing/2014/main" id="{519A63CD-332C-41F3-98F7-8EE4F35DE4F8}"/>
+                <a16:creationId xmlns:a16="http://schemas.microsoft.com/office/drawing/2014/main" id="{6BB45B8B-9949-466F-B65D-2BC9E4245DA3}"/>
               </a:ext>
             </a:extLst>
           </p:cNvPr>
@@ -21916,7 +21938,7 @@
           <p:cNvPr id="26" name="Text 24">
             <a:extLst xmlns:a="http://schemas.openxmlformats.org/drawingml/2006/main">
               <a:ext uri="{FF2B5EF4-FFF2-40B4-BE49-F238E27FC236}">
-                <a16:creationId xmlns:a16="http://schemas.microsoft.com/office/drawing/2014/main" id="{9DAFEC9E-D11A-45AC-89CA-062B2050E56E}"/>
+                <a16:creationId xmlns:a16="http://schemas.microsoft.com/office/drawing/2014/main" id="{717E4E33-BC45-4C59-BA2D-6314A879A900}"/>
               </a:ext>
             </a:extLst>
           </p:cNvPr>
@@ -21961,7 +21983,7 @@
           <p:cNvPr id="27" name="Text 25">
             <a:extLst xmlns:a="http://schemas.openxmlformats.org/drawingml/2006/main">
               <a:ext uri="{FF2B5EF4-FFF2-40B4-BE49-F238E27FC236}">
-                <a16:creationId xmlns:a16="http://schemas.microsoft.com/office/drawing/2014/main" id="{6407689E-BCAC-4097-8A9D-46C135040BF9}"/>
+                <a16:creationId xmlns:a16="http://schemas.microsoft.com/office/drawing/2014/main" id="{9706D796-61D1-49D6-A13E-B28083E38117}"/>
               </a:ext>
             </a:extLst>
           </p:cNvPr>
@@ -22006,7 +22028,7 @@
           <p:cNvPr id="28" name="Text 26">
             <a:extLst xmlns:a="http://schemas.openxmlformats.org/drawingml/2006/main">
               <a:ext uri="{FF2B5EF4-FFF2-40B4-BE49-F238E27FC236}">
-                <a16:creationId xmlns:a16="http://schemas.microsoft.com/office/drawing/2014/main" id="{EBC973A9-801C-41EF-A907-18372F0D0C6D}"/>
+                <a16:creationId xmlns:a16="http://schemas.microsoft.com/office/drawing/2014/main" id="{8F65A9F3-2772-44B4-BB72-05E29A47FC3A}"/>
               </a:ext>
             </a:extLst>
           </p:cNvPr>
@@ -22051,7 +22073,7 @@
           <p:cNvPr id="29" name="Text 27">
             <a:extLst xmlns:a="http://schemas.openxmlformats.org/drawingml/2006/main">
               <a:ext uri="{FF2B5EF4-FFF2-40B4-BE49-F238E27FC236}">
-                <a16:creationId xmlns:a16="http://schemas.microsoft.com/office/drawing/2014/main" id="{2320FFBC-5637-4A74-BD9F-7A989B610415}"/>
+                <a16:creationId xmlns:a16="http://schemas.microsoft.com/office/drawing/2014/main" id="{8C5DF349-4923-434F-A22F-F33A5791C1C4}"/>
               </a:ext>
             </a:extLst>
           </p:cNvPr>
@@ -22099,7 +22121,7 @@
           <p:cNvPr id="30" name="Shape 28">
             <a:extLst xmlns:a="http://schemas.openxmlformats.org/drawingml/2006/main">
               <a:ext uri="{FF2B5EF4-FFF2-40B4-BE49-F238E27FC236}">
-                <a16:creationId xmlns:a16="http://schemas.microsoft.com/office/drawing/2014/main" id="{575D170A-AB71-44AE-A6B7-BD35300E8410}"/>
+                <a16:creationId xmlns:a16="http://schemas.microsoft.com/office/drawing/2014/main" id="{DAFFD835-9ECC-4326-BB28-F9EE2C313D24}"/>
               </a:ext>
             </a:extLst>
           </p:cNvPr>
@@ -22146,7 +22168,7 @@
           <p:cNvPr id="31" name="Shape 29">
             <a:extLst xmlns:a="http://schemas.openxmlformats.org/drawingml/2006/main">
               <a:ext uri="{FF2B5EF4-FFF2-40B4-BE49-F238E27FC236}">
-                <a16:creationId xmlns:a16="http://schemas.microsoft.com/office/drawing/2014/main" id="{399F185D-E60A-4CCE-A744-522FD1034806}"/>
+                <a16:creationId xmlns:a16="http://schemas.microsoft.com/office/drawing/2014/main" id="{E0F51929-3717-4EDA-9E17-CA03B41D1AF8}"/>
               </a:ext>
             </a:extLst>
           </p:cNvPr>
@@ -22184,7 +22206,7 @@
           <p:cNvPr id="32" name="Text 30">
             <a:extLst xmlns:a="http://schemas.openxmlformats.org/drawingml/2006/main">
               <a:ext uri="{FF2B5EF4-FFF2-40B4-BE49-F238E27FC236}">
-                <a16:creationId xmlns:a16="http://schemas.microsoft.com/office/drawing/2014/main" id="{C4B57419-3704-4836-B10B-403823CD0FCB}"/>
+                <a16:creationId xmlns:a16="http://schemas.microsoft.com/office/drawing/2014/main" id="{4FF653A0-B50E-4053-A9EB-7E9A1533F927}"/>
               </a:ext>
             </a:extLst>
           </p:cNvPr>
@@ -22229,7 +22251,7 @@
           <p:cNvPr id="33" name="Text 31">
             <a:extLst xmlns:a="http://schemas.openxmlformats.org/drawingml/2006/main">
               <a:ext uri="{FF2B5EF4-FFF2-40B4-BE49-F238E27FC236}">
-                <a16:creationId xmlns:a16="http://schemas.microsoft.com/office/drawing/2014/main" id="{DC33878E-656A-4A71-9384-BE03387BF4B2}"/>
+                <a16:creationId xmlns:a16="http://schemas.microsoft.com/office/drawing/2014/main" id="{1755EF7E-2C4E-48FE-B51B-057B17F9ED87}"/>
               </a:ext>
             </a:extLst>
           </p:cNvPr>
@@ -22274,7 +22296,7 @@
           <p:cNvPr id="34" name="Text 32">
             <a:extLst xmlns:a="http://schemas.openxmlformats.org/drawingml/2006/main">
               <a:ext uri="{FF2B5EF4-FFF2-40B4-BE49-F238E27FC236}">
-                <a16:creationId xmlns:a16="http://schemas.microsoft.com/office/drawing/2014/main" id="{5B707EB1-9AEB-4D4A-92B7-16252FE4DFF3}"/>
+                <a16:creationId xmlns:a16="http://schemas.microsoft.com/office/drawing/2014/main" id="{F97C92E0-7D51-4562-9E09-FFE6D9331BEF}"/>
               </a:ext>
             </a:extLst>
           </p:cNvPr>
@@ -22322,7 +22344,7 @@
           <p:cNvPr id="35" name="Text 33">
             <a:extLst xmlns:a="http://schemas.openxmlformats.org/drawingml/2006/main">
               <a:ext uri="{FF2B5EF4-FFF2-40B4-BE49-F238E27FC236}">
-                <a16:creationId xmlns:a16="http://schemas.microsoft.com/office/drawing/2014/main" id="{7E348B89-99D2-4DC7-8EEA-4C914D11F149}"/>
+                <a16:creationId xmlns:a16="http://schemas.microsoft.com/office/drawing/2014/main" id="{CB37B22E-001C-4AF0-A8D8-D65286C31791}"/>
               </a:ext>
             </a:extLst>
           </p:cNvPr>
@@ -22368,7 +22390,7 @@
     </p:spTree>
     <p:extLst>
       <p:ext uri="{BB962C8B-B14F-4D97-AF65-F5344CB8AC3E}">
-        <p14:creationId xmlns:p14="http://schemas.microsoft.com/office/powerpoint/2010/main" val="1890896495"/>
+        <p14:creationId xmlns:p14="http://schemas.microsoft.com/office/powerpoint/2010/main" val="1309303971"/>
       </p:ext>
     </p:extLst>
   </p:cSld>
@@ -22399,7 +22421,7 @@
           <p:cNvPr id="2" name="Text 0">
             <a:extLst xmlns:a="http://schemas.openxmlformats.org/drawingml/2006/main">
               <a:ext uri="{FF2B5EF4-FFF2-40B4-BE49-F238E27FC236}">
-                <a16:creationId xmlns:a16="http://schemas.microsoft.com/office/drawing/2014/main" id="{6E42CDD7-4211-449D-83B9-341058FA45BA}"/>
+                <a16:creationId xmlns:a16="http://schemas.microsoft.com/office/drawing/2014/main" id="{A32B28CC-C5A5-439E-AFD0-EA9B5777836D}"/>
               </a:ext>
             </a:extLst>
           </p:cNvPr>
@@ -22444,7 +22466,7 @@
           <p:cNvPr id="3" name="Text 1">
             <a:extLst xmlns:a="http://schemas.openxmlformats.org/drawingml/2006/main">
               <a:ext uri="{FF2B5EF4-FFF2-40B4-BE49-F238E27FC236}">
-                <a16:creationId xmlns:a16="http://schemas.microsoft.com/office/drawing/2014/main" id="{BE79CD0C-2B11-4BCC-A317-BA4B212A7560}"/>
+                <a16:creationId xmlns:a16="http://schemas.microsoft.com/office/drawing/2014/main" id="{70462BAD-1BFA-4C63-8A8F-61B7D2F808AB}"/>
               </a:ext>
             </a:extLst>
           </p:cNvPr>
@@ -22489,7 +22511,7 @@
           <p:cNvPr id="4" name="Text 2">
             <a:extLst xmlns:a="http://schemas.openxmlformats.org/drawingml/2006/main">
               <a:ext uri="{FF2B5EF4-FFF2-40B4-BE49-F238E27FC236}">
-                <a16:creationId xmlns:a16="http://schemas.microsoft.com/office/drawing/2014/main" id="{3570640A-3AE3-4301-A297-66397EDFB929}"/>
+                <a16:creationId xmlns:a16="http://schemas.microsoft.com/office/drawing/2014/main" id="{01C8FBC7-4648-4830-BC6F-118DB3488472}"/>
               </a:ext>
             </a:extLst>
           </p:cNvPr>
@@ -22534,7 +22556,7 @@
           <p:cNvPr id="5" name="Text 3">
             <a:extLst xmlns:a="http://schemas.openxmlformats.org/drawingml/2006/main">
               <a:ext uri="{FF2B5EF4-FFF2-40B4-BE49-F238E27FC236}">
-                <a16:creationId xmlns:a16="http://schemas.microsoft.com/office/drawing/2014/main" id="{859F5A76-1A19-4F21-B825-04DD44B26A77}"/>
+                <a16:creationId xmlns:a16="http://schemas.microsoft.com/office/drawing/2014/main" id="{523FCC0C-DE06-4761-895E-9AE697A6F7B5}"/>
               </a:ext>
             </a:extLst>
           </p:cNvPr>
@@ -22586,7 +22608,7 @@
         </p:xfrm>
         <a:graphic xmlns:a="http://schemas.openxmlformats.org/drawingml/2006/main">
           <a:graphicData uri="http://schemas.openxmlformats.org/drawingml/2006/chart">
-            <c:chart xmlns:r="http://schemas.openxmlformats.org/officeDocument/2006/relationships" xmlns:c="http://schemas.openxmlformats.org/drawingml/2006/chart" r:id="Rf7e89719cfc84b8b"/>
+            <c:chart xmlns:r="http://schemas.openxmlformats.org/officeDocument/2006/relationships" xmlns:c="http://schemas.openxmlformats.org/drawingml/2006/chart" r:id="R43e41adab0e54d91"/>
           </a:graphicData>
         </a:graphic>
       </p:graphicFrame>
@@ -22595,7 +22617,7 @@
           <p:cNvPr id="7" name="Shape 4">
             <a:extLst xmlns:a="http://schemas.openxmlformats.org/drawingml/2006/main">
               <a:ext uri="{FF2B5EF4-FFF2-40B4-BE49-F238E27FC236}">
-                <a16:creationId xmlns:a16="http://schemas.microsoft.com/office/drawing/2014/main" id="{07BED1E1-6750-4CC2-AA8C-71A0C5770277}"/>
+                <a16:creationId xmlns:a16="http://schemas.microsoft.com/office/drawing/2014/main" id="{1E5C47E7-EB3C-4FF5-A5D6-CE08402B28A1}"/>
               </a:ext>
             </a:extLst>
           </p:cNvPr>
@@ -22642,7 +22664,7 @@
           <p:cNvPr id="8" name="Text 5">
             <a:extLst xmlns:a="http://schemas.openxmlformats.org/drawingml/2006/main">
               <a:ext uri="{FF2B5EF4-FFF2-40B4-BE49-F238E27FC236}">
-                <a16:creationId xmlns:a16="http://schemas.microsoft.com/office/drawing/2014/main" id="{C43D8500-6186-4031-BBB6-194214E2DA53}"/>
+                <a16:creationId xmlns:a16="http://schemas.microsoft.com/office/drawing/2014/main" id="{B7B2F913-1D2A-4CD2-9280-808FAABD6D25}"/>
               </a:ext>
             </a:extLst>
           </p:cNvPr>
@@ -22690,7 +22712,7 @@
           <p:cNvPr id="9" name="Text 6">
             <a:extLst xmlns:a="http://schemas.openxmlformats.org/drawingml/2006/main">
               <a:ext uri="{FF2B5EF4-FFF2-40B4-BE49-F238E27FC236}">
-                <a16:creationId xmlns:a16="http://schemas.microsoft.com/office/drawing/2014/main" id="{1263DA13-21FD-4B14-BC4A-15FC11F87C88}"/>
+                <a16:creationId xmlns:a16="http://schemas.microsoft.com/office/drawing/2014/main" id="{E4819C4C-412A-4A38-9547-F007ACC1B99E}"/>
               </a:ext>
             </a:extLst>
           </p:cNvPr>
@@ -22738,7 +22760,7 @@
           <p:cNvPr id="10" name="Shape 7">
             <a:extLst xmlns:a="http://schemas.openxmlformats.org/drawingml/2006/main">
               <a:ext uri="{FF2B5EF4-FFF2-40B4-BE49-F238E27FC236}">
-                <a16:creationId xmlns:a16="http://schemas.microsoft.com/office/drawing/2014/main" id="{EF807858-8A9F-483A-874A-A15CCBD500B4}"/>
+                <a16:creationId xmlns:a16="http://schemas.microsoft.com/office/drawing/2014/main" id="{831751BF-F4F2-4212-8E64-663687B4BB1F}"/>
               </a:ext>
             </a:extLst>
           </p:cNvPr>
@@ -22785,7 +22807,7 @@
           <p:cNvPr id="11" name="Text 8">
             <a:extLst xmlns:a="http://schemas.openxmlformats.org/drawingml/2006/main">
               <a:ext uri="{FF2B5EF4-FFF2-40B4-BE49-F238E27FC236}">
-                <a16:creationId xmlns:a16="http://schemas.microsoft.com/office/drawing/2014/main" id="{EA9184DB-138F-4183-9782-53783E101EDA}"/>
+                <a16:creationId xmlns:a16="http://schemas.microsoft.com/office/drawing/2014/main" id="{E38163DB-0985-4F21-B1CE-3C4F8FCEEA38}"/>
               </a:ext>
             </a:extLst>
           </p:cNvPr>
@@ -22833,7 +22855,7 @@
           <p:cNvPr id="12" name="Text 9">
             <a:extLst xmlns:a="http://schemas.openxmlformats.org/drawingml/2006/main">
               <a:ext uri="{FF2B5EF4-FFF2-40B4-BE49-F238E27FC236}">
-                <a16:creationId xmlns:a16="http://schemas.microsoft.com/office/drawing/2014/main" id="{6F91352F-F5AE-4011-B936-2C354E8264C7}"/>
+                <a16:creationId xmlns:a16="http://schemas.microsoft.com/office/drawing/2014/main" id="{6BAD191E-6367-4DC0-9072-0FB7F6F5105D}"/>
               </a:ext>
             </a:extLst>
           </p:cNvPr>
@@ -22881,7 +22903,7 @@
           <p:cNvPr id="13" name="Shape 10">
             <a:extLst xmlns:a="http://schemas.openxmlformats.org/drawingml/2006/main">
               <a:ext uri="{FF2B5EF4-FFF2-40B4-BE49-F238E27FC236}">
-                <a16:creationId xmlns:a16="http://schemas.microsoft.com/office/drawing/2014/main" id="{02DF17B6-B52B-4213-A066-9C578D9D4888}"/>
+                <a16:creationId xmlns:a16="http://schemas.microsoft.com/office/drawing/2014/main" id="{A858DF89-8394-4867-853E-668B7EAA98D5}"/>
               </a:ext>
             </a:extLst>
           </p:cNvPr>
@@ -22928,7 +22950,7 @@
           <p:cNvPr id="14" name="Text 11">
             <a:extLst xmlns:a="http://schemas.openxmlformats.org/drawingml/2006/main">
               <a:ext uri="{FF2B5EF4-FFF2-40B4-BE49-F238E27FC236}">
-                <a16:creationId xmlns:a16="http://schemas.microsoft.com/office/drawing/2014/main" id="{BBB5A4AD-DD14-4F2C-8897-16178C93DE83}"/>
+                <a16:creationId xmlns:a16="http://schemas.microsoft.com/office/drawing/2014/main" id="{B4BF8730-8DA2-496F-958C-BFC8B219AF74}"/>
               </a:ext>
             </a:extLst>
           </p:cNvPr>
@@ -22976,7 +22998,7 @@
           <p:cNvPr id="15" name="Text 12">
             <a:extLst xmlns:a="http://schemas.openxmlformats.org/drawingml/2006/main">
               <a:ext uri="{FF2B5EF4-FFF2-40B4-BE49-F238E27FC236}">
-                <a16:creationId xmlns:a16="http://schemas.microsoft.com/office/drawing/2014/main" id="{F9D28600-AE56-4137-835C-CA049ED468E6}"/>
+                <a16:creationId xmlns:a16="http://schemas.microsoft.com/office/drawing/2014/main" id="{BDAF82D0-E4D6-49AD-8C2E-D4D42251A71A}"/>
               </a:ext>
             </a:extLst>
           </p:cNvPr>
@@ -23024,7 +23046,7 @@
           <p:cNvPr id="16" name="Shape 13">
             <a:extLst xmlns:a="http://schemas.openxmlformats.org/drawingml/2006/main">
               <a:ext uri="{FF2B5EF4-FFF2-40B4-BE49-F238E27FC236}">
-                <a16:creationId xmlns:a16="http://schemas.microsoft.com/office/drawing/2014/main" id="{0470E3F2-F547-400C-A6B9-C86F9DA31267}"/>
+                <a16:creationId xmlns:a16="http://schemas.microsoft.com/office/drawing/2014/main" id="{616C6D55-9616-4500-9FF8-12AF62096000}"/>
               </a:ext>
             </a:extLst>
           </p:cNvPr>
@@ -23064,7 +23086,7 @@
           <p:cNvPr id="17" name="Text 14">
             <a:extLst xmlns:a="http://schemas.openxmlformats.org/drawingml/2006/main">
               <a:ext uri="{FF2B5EF4-FFF2-40B4-BE49-F238E27FC236}">
-                <a16:creationId xmlns:a16="http://schemas.microsoft.com/office/drawing/2014/main" id="{8E0F12B6-DD51-41F1-A604-37D51F5615AE}"/>
+                <a16:creationId xmlns:a16="http://schemas.microsoft.com/office/drawing/2014/main" id="{08DCD02B-B7A0-4C56-9BFE-3D83AD4ECE24}"/>
               </a:ext>
             </a:extLst>
           </p:cNvPr>
@@ -23121,7 +23143,7 @@
     </p:spTree>
     <p:extLst>
       <p:ext uri="{BB962C8B-B14F-4D97-AF65-F5344CB8AC3E}">
-        <p14:creationId xmlns:p14="http://schemas.microsoft.com/office/powerpoint/2010/main" val="710459316"/>
+        <p14:creationId xmlns:p14="http://schemas.microsoft.com/office/powerpoint/2010/main" val="1166645108"/>
       </p:ext>
     </p:extLst>
   </p:cSld>
@@ -23152,7 +23174,7 @@
           <p:cNvPr id="2" name="Text 0">
             <a:extLst xmlns:a="http://schemas.openxmlformats.org/drawingml/2006/main">
               <a:ext uri="{FF2B5EF4-FFF2-40B4-BE49-F238E27FC236}">
-                <a16:creationId xmlns:a16="http://schemas.microsoft.com/office/drawing/2014/main" id="{FBC6A6CE-9F0C-40EE-AC35-D7A16ECCB166}"/>
+                <a16:creationId xmlns:a16="http://schemas.microsoft.com/office/drawing/2014/main" id="{1D4258D5-98EA-47AC-A166-5156862B5DFD}"/>
               </a:ext>
             </a:extLst>
           </p:cNvPr>
@@ -23197,7 +23219,7 @@
           <p:cNvPr id="3" name="Text 1">
             <a:extLst xmlns:a="http://schemas.openxmlformats.org/drawingml/2006/main">
               <a:ext uri="{FF2B5EF4-FFF2-40B4-BE49-F238E27FC236}">
-                <a16:creationId xmlns:a16="http://schemas.microsoft.com/office/drawing/2014/main" id="{E07F6890-C811-46F7-80E6-42831AC9DD44}"/>
+                <a16:creationId xmlns:a16="http://schemas.microsoft.com/office/drawing/2014/main" id="{1D7FDA5D-03ED-4A01-AC41-476528B830FC}"/>
               </a:ext>
             </a:extLst>
           </p:cNvPr>
@@ -23242,7 +23264,7 @@
           <p:cNvPr id="4" name="Text 2">
             <a:extLst xmlns:a="http://schemas.openxmlformats.org/drawingml/2006/main">
               <a:ext uri="{FF2B5EF4-FFF2-40B4-BE49-F238E27FC236}">
-                <a16:creationId xmlns:a16="http://schemas.microsoft.com/office/drawing/2014/main" id="{27FB6F4A-E7E6-42B0-9254-BDF9FEEB2A5A}"/>
+                <a16:creationId xmlns:a16="http://schemas.microsoft.com/office/drawing/2014/main" id="{3CEF64B6-B61B-4341-952C-E88F48197F80}"/>
               </a:ext>
             </a:extLst>
           </p:cNvPr>
@@ -23287,7 +23309,7 @@
           <p:cNvPr id="5" name="Text 3">
             <a:extLst xmlns:a="http://schemas.openxmlformats.org/drawingml/2006/main">
               <a:ext uri="{FF2B5EF4-FFF2-40B4-BE49-F238E27FC236}">
-                <a16:creationId xmlns:a16="http://schemas.microsoft.com/office/drawing/2014/main" id="{96EDC97A-1BDF-4A8E-975F-BF2890467C10}"/>
+                <a16:creationId xmlns:a16="http://schemas.microsoft.com/office/drawing/2014/main" id="{00FE2AF0-1A91-4FC1-A740-78AE2F86B5C8}"/>
               </a:ext>
             </a:extLst>
           </p:cNvPr>
@@ -23332,7 +23354,7 @@
           <p:cNvPr id="6" name="Text 4">
             <a:extLst xmlns:a="http://schemas.openxmlformats.org/drawingml/2006/main">
               <a:ext uri="{FF2B5EF4-FFF2-40B4-BE49-F238E27FC236}">
-                <a16:creationId xmlns:a16="http://schemas.microsoft.com/office/drawing/2014/main" id="{7F2D473F-985E-45EC-B66F-69CA8F95D27D}"/>
+                <a16:creationId xmlns:a16="http://schemas.microsoft.com/office/drawing/2014/main" id="{EFF827D8-6CA7-4A5D-82ED-DA439FA8FFB4}"/>
               </a:ext>
             </a:extLst>
           </p:cNvPr>
@@ -23370,7 +23392,7 @@
                 <a:ea typeface="Calibri"/>
                 <a:cs typeface="Calibri"/>
               </a:rPr>
-              <a:t>Against partial GRC, the hand-written composite matches exact quality and request savings while using one interface and fewer tokens. That negative result motivates interface-level synthesis rather than weakening admission.</a:t>
+              <a:t>Against partial GRC, the hand-written composite matches exact quality and request savings while using one interface and fewer tokens. Once prefix reuse is priced the margin narrows: 30.9% fewer tokens but only 8.0% lower cost, because fusing three reads destroys the cached prefix (0.0% cache reads against 27.8% compiled). That negative result motivates interface-level synthesis rather than weakening admission.</a:t>
             </a:r>
           </a:p>
         </p:txBody>
@@ -23380,7 +23402,7 @@
           <p:cNvPr id="7" name="Text 5">
             <a:extLst xmlns:a="http://schemas.openxmlformats.org/drawingml/2006/main">
               <a:ext uri="{FF2B5EF4-FFF2-40B4-BE49-F238E27FC236}">
-                <a16:creationId xmlns:a16="http://schemas.microsoft.com/office/drawing/2014/main" id="{6DC29F87-C3C8-4DC9-8BA8-97250D814178}"/>
+                <a16:creationId xmlns:a16="http://schemas.microsoft.com/office/drawing/2014/main" id="{0284D8CD-115F-4235-A90A-120AF97F348B}"/>
               </a:ext>
             </a:extLst>
           </p:cNvPr>
@@ -24685,7 +24707,7 @@
           <p:cNvPr id="9" name="Shape 6">
             <a:extLst xmlns:a="http://schemas.openxmlformats.org/drawingml/2006/main">
               <a:ext uri="{FF2B5EF4-FFF2-40B4-BE49-F238E27FC236}">
-                <a16:creationId xmlns:a16="http://schemas.microsoft.com/office/drawing/2014/main" id="{08D8B07D-161E-41EC-A4A2-4AE25AF019E8}"/>
+                <a16:creationId xmlns:a16="http://schemas.microsoft.com/office/drawing/2014/main" id="{B7658AAE-B014-4D87-9171-9BAB272DE7DA}"/>
               </a:ext>
             </a:extLst>
           </p:cNvPr>
@@ -24732,7 +24754,7 @@
           <p:cNvPr id="10" name="Text 7">
             <a:extLst xmlns:a="http://schemas.openxmlformats.org/drawingml/2006/main">
               <a:ext uri="{FF2B5EF4-FFF2-40B4-BE49-F238E27FC236}">
-                <a16:creationId xmlns:a16="http://schemas.microsoft.com/office/drawing/2014/main" id="{5B43D450-2D5D-48B5-8ACE-579DF8A54F4B}"/>
+                <a16:creationId xmlns:a16="http://schemas.microsoft.com/office/drawing/2014/main" id="{42C7FE94-2ED3-48BD-8084-676E02B56C19}"/>
               </a:ext>
             </a:extLst>
           </p:cNvPr>
@@ -24780,7 +24802,7 @@
           <p:cNvPr id="11" name="Shape 8">
             <a:extLst xmlns:a="http://schemas.openxmlformats.org/drawingml/2006/main">
               <a:ext uri="{FF2B5EF4-FFF2-40B4-BE49-F238E27FC236}">
-                <a16:creationId xmlns:a16="http://schemas.microsoft.com/office/drawing/2014/main" id="{0DF2ABBC-85CC-4894-813D-D8170F33E898}"/>
+                <a16:creationId xmlns:a16="http://schemas.microsoft.com/office/drawing/2014/main" id="{1C095187-7E1B-4694-AD41-35A7C976B2CF}"/>
               </a:ext>
             </a:extLst>
           </p:cNvPr>
@@ -24827,7 +24849,7 @@
           <p:cNvPr id="12" name="Shape 9">
             <a:extLst xmlns:a="http://schemas.openxmlformats.org/drawingml/2006/main">
               <a:ext uri="{FF2B5EF4-FFF2-40B4-BE49-F238E27FC236}">
-                <a16:creationId xmlns:a16="http://schemas.microsoft.com/office/drawing/2014/main" id="{398D3420-B7ED-467B-9EDA-D2E4B402B58B}"/>
+                <a16:creationId xmlns:a16="http://schemas.microsoft.com/office/drawing/2014/main" id="{9F07AA65-0135-4A75-9353-B55424320192}"/>
               </a:ext>
             </a:extLst>
           </p:cNvPr>
@@ -24865,7 +24887,7 @@
           <p:cNvPr id="13" name="Text 10">
             <a:extLst xmlns:a="http://schemas.openxmlformats.org/drawingml/2006/main">
               <a:ext uri="{FF2B5EF4-FFF2-40B4-BE49-F238E27FC236}">
-                <a16:creationId xmlns:a16="http://schemas.microsoft.com/office/drawing/2014/main" id="{3041BF9B-F22B-40BE-B3E0-7ABB099567AD}"/>
+                <a16:creationId xmlns:a16="http://schemas.microsoft.com/office/drawing/2014/main" id="{62DD83FB-6BC9-4093-93E7-EFD5D1C2C3EB}"/>
               </a:ext>
             </a:extLst>
           </p:cNvPr>
@@ -24910,7 +24932,7 @@
           <p:cNvPr id="14" name="Text 11">
             <a:extLst xmlns:a="http://schemas.openxmlformats.org/drawingml/2006/main">
               <a:ext uri="{FF2B5EF4-FFF2-40B4-BE49-F238E27FC236}">
-                <a16:creationId xmlns:a16="http://schemas.microsoft.com/office/drawing/2014/main" id="{6B2CA800-0CCD-41FB-B109-2C1628E53F4F}"/>
+                <a16:creationId xmlns:a16="http://schemas.microsoft.com/office/drawing/2014/main" id="{30435034-7625-4E6A-BA03-4C3678828FB9}"/>
               </a:ext>
             </a:extLst>
           </p:cNvPr>
@@ -24955,7 +24977,7 @@
           <p:cNvPr id="15" name="Text 12">
             <a:extLst xmlns:a="http://schemas.openxmlformats.org/drawingml/2006/main">
               <a:ext uri="{FF2B5EF4-FFF2-40B4-BE49-F238E27FC236}">
-                <a16:creationId xmlns:a16="http://schemas.microsoft.com/office/drawing/2014/main" id="{724DAE22-27E9-4BA5-B764-36F51D0B9DCA}"/>
+                <a16:creationId xmlns:a16="http://schemas.microsoft.com/office/drawing/2014/main" id="{E7A3FA1F-2676-422A-8634-83404DC39735}"/>
               </a:ext>
             </a:extLst>
           </p:cNvPr>
@@ -25050,7 +25072,7 @@
           <p:cNvPr id="16" name="Shape 13">
             <a:extLst xmlns:a="http://schemas.openxmlformats.org/drawingml/2006/main">
               <a:ext uri="{FF2B5EF4-FFF2-40B4-BE49-F238E27FC236}">
-                <a16:creationId xmlns:a16="http://schemas.microsoft.com/office/drawing/2014/main" id="{50E3D1BF-DBB0-4260-BDEB-41F90CB58079}"/>
+                <a16:creationId xmlns:a16="http://schemas.microsoft.com/office/drawing/2014/main" id="{0C938060-EF59-4B26-BB16-A1EDF83AC272}"/>
               </a:ext>
             </a:extLst>
           </p:cNvPr>
@@ -25097,7 +25119,7 @@
           <p:cNvPr id="17" name="Shape 14">
             <a:extLst xmlns:a="http://schemas.openxmlformats.org/drawingml/2006/main">
               <a:ext uri="{FF2B5EF4-FFF2-40B4-BE49-F238E27FC236}">
-                <a16:creationId xmlns:a16="http://schemas.microsoft.com/office/drawing/2014/main" id="{FC4DD8D8-17B5-4397-874A-BE8A7E739E29}"/>
+                <a16:creationId xmlns:a16="http://schemas.microsoft.com/office/drawing/2014/main" id="{A6CEC372-7DED-4421-A7D8-C86564F5F64C}"/>
               </a:ext>
             </a:extLst>
           </p:cNvPr>
@@ -25135,7 +25157,7 @@
           <p:cNvPr id="18" name="Text 15">
             <a:extLst xmlns:a="http://schemas.openxmlformats.org/drawingml/2006/main">
               <a:ext uri="{FF2B5EF4-FFF2-40B4-BE49-F238E27FC236}">
-                <a16:creationId xmlns:a16="http://schemas.microsoft.com/office/drawing/2014/main" id="{FAD6C25A-DAC3-4B38-95A0-DA49A029A733}"/>
+                <a16:creationId xmlns:a16="http://schemas.microsoft.com/office/drawing/2014/main" id="{08358223-012D-4551-99DF-BEAAF176936A}"/>
               </a:ext>
             </a:extLst>
           </p:cNvPr>
@@ -25180,7 +25202,7 @@
           <p:cNvPr id="19" name="Text 16">
             <a:extLst xmlns:a="http://schemas.openxmlformats.org/drawingml/2006/main">
               <a:ext uri="{FF2B5EF4-FFF2-40B4-BE49-F238E27FC236}">
-                <a16:creationId xmlns:a16="http://schemas.microsoft.com/office/drawing/2014/main" id="{90E16726-DD65-4809-90DC-4D3E9D838E9E}"/>
+                <a16:creationId xmlns:a16="http://schemas.microsoft.com/office/drawing/2014/main" id="{C621FFCB-2015-4BB5-AB4D-2EED1638C60D}"/>
               </a:ext>
             </a:extLst>
           </p:cNvPr>
@@ -25225,7 +25247,7 @@
           <p:cNvPr id="20" name="Text 17">
             <a:extLst xmlns:a="http://schemas.openxmlformats.org/drawingml/2006/main">
               <a:ext uri="{FF2B5EF4-FFF2-40B4-BE49-F238E27FC236}">
-                <a16:creationId xmlns:a16="http://schemas.microsoft.com/office/drawing/2014/main" id="{470567E6-9FA9-40B2-B4E4-DBA2328F915D}"/>
+                <a16:creationId xmlns:a16="http://schemas.microsoft.com/office/drawing/2014/main" id="{99405B54-CE37-43DE-800A-06386A024932}"/>
               </a:ext>
             </a:extLst>
           </p:cNvPr>
@@ -25320,7 +25342,7 @@
           <p:cNvPr id="21" name="Shape 18">
             <a:extLst xmlns:a="http://schemas.openxmlformats.org/drawingml/2006/main">
               <a:ext uri="{FF2B5EF4-FFF2-40B4-BE49-F238E27FC236}">
-                <a16:creationId xmlns:a16="http://schemas.microsoft.com/office/drawing/2014/main" id="{8C7EFCD5-4CA7-4C80-BBCA-1FA489843EDB}"/>
+                <a16:creationId xmlns:a16="http://schemas.microsoft.com/office/drawing/2014/main" id="{C866F2C8-EDAE-4253-9726-18901A5042CA}"/>
               </a:ext>
             </a:extLst>
           </p:cNvPr>
@@ -25367,7 +25389,7 @@
           <p:cNvPr id="8" name="Text 19">
             <a:extLst xmlns:a="http://schemas.openxmlformats.org/drawingml/2006/main">
               <a:ext uri="{FF2B5EF4-FFF2-40B4-BE49-F238E27FC236}">
-                <a16:creationId xmlns:a16="http://schemas.microsoft.com/office/drawing/2014/main" id="{14A6AA90-4F74-454D-91AE-3E4E095D9FFD}"/>
+                <a16:creationId xmlns:a16="http://schemas.microsoft.com/office/drawing/2014/main" id="{D8DAC051-315E-49F0-A4DC-031BE80BF7DD}"/>
               </a:ext>
             </a:extLst>
           </p:cNvPr>
@@ -25412,7 +25434,7 @@
           <p:cNvPr id="23" name="Text 20">
             <a:extLst xmlns:a="http://schemas.openxmlformats.org/drawingml/2006/main">
               <a:ext uri="{FF2B5EF4-FFF2-40B4-BE49-F238E27FC236}">
-                <a16:creationId xmlns:a16="http://schemas.microsoft.com/office/drawing/2014/main" id="{6B892196-2A1E-4EB7-8238-15B36016FAC6}"/>
+                <a16:creationId xmlns:a16="http://schemas.microsoft.com/office/drawing/2014/main" id="{94488B91-4A81-4E50-911B-BD838648C7FD}"/>
               </a:ext>
             </a:extLst>
           </p:cNvPr>
@@ -25458,7 +25480,7 @@
     </p:spTree>
     <p:extLst>
       <p:ext uri="{BB962C8B-B14F-4D97-AF65-F5344CB8AC3E}">
-        <p14:creationId xmlns:p14="http://schemas.microsoft.com/office/powerpoint/2010/main" val="1482190084"/>
+        <p14:creationId xmlns:p14="http://schemas.microsoft.com/office/powerpoint/2010/main" val="1648619474"/>
       </p:ext>
     </p:extLst>
   </p:cSld>
@@ -25489,7 +25511,7 @@
           <p:cNvPr id="2" name="Text 0">
             <a:extLst xmlns:a="http://schemas.openxmlformats.org/drawingml/2006/main">
               <a:ext uri="{FF2B5EF4-FFF2-40B4-BE49-F238E27FC236}">
-                <a16:creationId xmlns:a16="http://schemas.microsoft.com/office/drawing/2014/main" id="{FBC6A6CE-9F0C-40EE-AC35-D7A16ECCB166}"/>
+                <a16:creationId xmlns:a16="http://schemas.microsoft.com/office/drawing/2014/main" id="{1D4258D5-98EA-47AC-A166-5156862B5DFD}"/>
               </a:ext>
             </a:extLst>
           </p:cNvPr>
@@ -25534,7 +25556,7 @@
           <p:cNvPr id="3" name="Text 1">
             <a:extLst xmlns:a="http://schemas.openxmlformats.org/drawingml/2006/main">
               <a:ext uri="{FF2B5EF4-FFF2-40B4-BE49-F238E27FC236}">
-                <a16:creationId xmlns:a16="http://schemas.microsoft.com/office/drawing/2014/main" id="{E07F6890-C811-46F7-80E6-42831AC9DD44}"/>
+                <a16:creationId xmlns:a16="http://schemas.microsoft.com/office/drawing/2014/main" id="{1D7FDA5D-03ED-4A01-AC41-476528B830FC}"/>
               </a:ext>
             </a:extLst>
           </p:cNvPr>
@@ -25579,7 +25601,7 @@
           <p:cNvPr id="4" name="Text 2">
             <a:extLst xmlns:a="http://schemas.openxmlformats.org/drawingml/2006/main">
               <a:ext uri="{FF2B5EF4-FFF2-40B4-BE49-F238E27FC236}">
-                <a16:creationId xmlns:a16="http://schemas.microsoft.com/office/drawing/2014/main" id="{27FB6F4A-E7E6-42B0-9254-BDF9FEEB2A5A}"/>
+                <a16:creationId xmlns:a16="http://schemas.microsoft.com/office/drawing/2014/main" id="{3CEF64B6-B61B-4341-952C-E88F48197F80}"/>
               </a:ext>
             </a:extLst>
           </p:cNvPr>
@@ -25624,7 +25646,7 @@
           <p:cNvPr id="5" name="Text 3">
             <a:extLst xmlns:a="http://schemas.openxmlformats.org/drawingml/2006/main">
               <a:ext uri="{FF2B5EF4-FFF2-40B4-BE49-F238E27FC236}">
-                <a16:creationId xmlns:a16="http://schemas.microsoft.com/office/drawing/2014/main" id="{96EDC97A-1BDF-4A8E-975F-BF2890467C10}"/>
+                <a16:creationId xmlns:a16="http://schemas.microsoft.com/office/drawing/2014/main" id="{00FE2AF0-1A91-4FC1-A740-78AE2F86B5C8}"/>
               </a:ext>
             </a:extLst>
           </p:cNvPr>
@@ -25669,7 +25691,7 @@
           <p:cNvPr id="6" name="Text 4">
             <a:extLst xmlns:a="http://schemas.openxmlformats.org/drawingml/2006/main">
               <a:ext uri="{FF2B5EF4-FFF2-40B4-BE49-F238E27FC236}">
-                <a16:creationId xmlns:a16="http://schemas.microsoft.com/office/drawing/2014/main" id="{7F2D473F-985E-45EC-B66F-69CA8F95D27D}"/>
+                <a16:creationId xmlns:a16="http://schemas.microsoft.com/office/drawing/2014/main" id="{EFF827D8-6CA7-4A5D-82ED-DA439FA8FFB4}"/>
               </a:ext>
             </a:extLst>
           </p:cNvPr>
@@ -25717,7 +25739,7 @@
           <p:cNvPr id="7" name="Text 5">
             <a:extLst xmlns:a="http://schemas.openxmlformats.org/drawingml/2006/main">
               <a:ext uri="{FF2B5EF4-FFF2-40B4-BE49-F238E27FC236}">
-                <a16:creationId xmlns:a16="http://schemas.microsoft.com/office/drawing/2014/main" id="{6DC29F87-C3C8-4DC9-8BA8-97250D814178}"/>
+                <a16:creationId xmlns:a16="http://schemas.microsoft.com/office/drawing/2014/main" id="{0284D8CD-115F-4235-A90A-120AF97F348B}"/>
               </a:ext>
             </a:extLst>
           </p:cNvPr>
@@ -27022,7 +27044,7 @@
           <p:cNvPr id="9" name="Shape 6">
             <a:extLst xmlns:a="http://schemas.openxmlformats.org/drawingml/2006/main">
               <a:ext uri="{FF2B5EF4-FFF2-40B4-BE49-F238E27FC236}">
-                <a16:creationId xmlns:a16="http://schemas.microsoft.com/office/drawing/2014/main" id="{08D8B07D-161E-41EC-A4A2-4AE25AF019E8}"/>
+                <a16:creationId xmlns:a16="http://schemas.microsoft.com/office/drawing/2014/main" id="{B7658AAE-B014-4D87-9171-9BAB272DE7DA}"/>
               </a:ext>
             </a:extLst>
           </p:cNvPr>
@@ -27069,7 +27091,7 @@
           <p:cNvPr id="10" name="Text 7">
             <a:extLst xmlns:a="http://schemas.openxmlformats.org/drawingml/2006/main">
               <a:ext uri="{FF2B5EF4-FFF2-40B4-BE49-F238E27FC236}">
-                <a16:creationId xmlns:a16="http://schemas.microsoft.com/office/drawing/2014/main" id="{5B43D450-2D5D-48B5-8ACE-579DF8A54F4B}"/>
+                <a16:creationId xmlns:a16="http://schemas.microsoft.com/office/drawing/2014/main" id="{42C7FE94-2ED3-48BD-8084-676E02B56C19}"/>
               </a:ext>
             </a:extLst>
           </p:cNvPr>
@@ -27117,7 +27139,7 @@
           <p:cNvPr id="11" name="Shape 8">
             <a:extLst xmlns:a="http://schemas.openxmlformats.org/drawingml/2006/main">
               <a:ext uri="{FF2B5EF4-FFF2-40B4-BE49-F238E27FC236}">
-                <a16:creationId xmlns:a16="http://schemas.microsoft.com/office/drawing/2014/main" id="{0DF2ABBC-85CC-4894-813D-D8170F33E898}"/>
+                <a16:creationId xmlns:a16="http://schemas.microsoft.com/office/drawing/2014/main" id="{1C095187-7E1B-4694-AD41-35A7C976B2CF}"/>
               </a:ext>
             </a:extLst>
           </p:cNvPr>
@@ -27164,7 +27186,7 @@
           <p:cNvPr id="12" name="Shape 9">
             <a:extLst xmlns:a="http://schemas.openxmlformats.org/drawingml/2006/main">
               <a:ext uri="{FF2B5EF4-FFF2-40B4-BE49-F238E27FC236}">
-                <a16:creationId xmlns:a16="http://schemas.microsoft.com/office/drawing/2014/main" id="{398D3420-B7ED-467B-9EDA-D2E4B402B58B}"/>
+                <a16:creationId xmlns:a16="http://schemas.microsoft.com/office/drawing/2014/main" id="{9F07AA65-0135-4A75-9353-B55424320192}"/>
               </a:ext>
             </a:extLst>
           </p:cNvPr>
@@ -27202,7 +27224,7 @@
           <p:cNvPr id="13" name="Text 10">
             <a:extLst xmlns:a="http://schemas.openxmlformats.org/drawingml/2006/main">
               <a:ext uri="{FF2B5EF4-FFF2-40B4-BE49-F238E27FC236}">
-                <a16:creationId xmlns:a16="http://schemas.microsoft.com/office/drawing/2014/main" id="{3041BF9B-F22B-40BE-B3E0-7ABB099567AD}"/>
+                <a16:creationId xmlns:a16="http://schemas.microsoft.com/office/drawing/2014/main" id="{62DD83FB-6BC9-4093-93E7-EFD5D1C2C3EB}"/>
               </a:ext>
             </a:extLst>
           </p:cNvPr>
@@ -27247,7 +27269,7 @@
           <p:cNvPr id="14" name="Text 11">
             <a:extLst xmlns:a="http://schemas.openxmlformats.org/drawingml/2006/main">
               <a:ext uri="{FF2B5EF4-FFF2-40B4-BE49-F238E27FC236}">
-                <a16:creationId xmlns:a16="http://schemas.microsoft.com/office/drawing/2014/main" id="{6B2CA800-0CCD-41FB-B109-2C1628E53F4F}"/>
+                <a16:creationId xmlns:a16="http://schemas.microsoft.com/office/drawing/2014/main" id="{30435034-7625-4E6A-BA03-4C3678828FB9}"/>
               </a:ext>
             </a:extLst>
           </p:cNvPr>
@@ -27292,7 +27314,7 @@
           <p:cNvPr id="15" name="Text 12">
             <a:extLst xmlns:a="http://schemas.openxmlformats.org/drawingml/2006/main">
               <a:ext uri="{FF2B5EF4-FFF2-40B4-BE49-F238E27FC236}">
-                <a16:creationId xmlns:a16="http://schemas.microsoft.com/office/drawing/2014/main" id="{724DAE22-27E9-4BA5-B764-36F51D0B9DCA}"/>
+                <a16:creationId xmlns:a16="http://schemas.microsoft.com/office/drawing/2014/main" id="{E7A3FA1F-2676-422A-8634-83404DC39735}"/>
               </a:ext>
             </a:extLst>
           </p:cNvPr>
@@ -27387,7 +27409,7 @@
           <p:cNvPr id="16" name="Shape 13">
             <a:extLst xmlns:a="http://schemas.openxmlformats.org/drawingml/2006/main">
               <a:ext uri="{FF2B5EF4-FFF2-40B4-BE49-F238E27FC236}">
-                <a16:creationId xmlns:a16="http://schemas.microsoft.com/office/drawing/2014/main" id="{50E3D1BF-DBB0-4260-BDEB-41F90CB58079}"/>
+                <a16:creationId xmlns:a16="http://schemas.microsoft.com/office/drawing/2014/main" id="{0C938060-EF59-4B26-BB16-A1EDF83AC272}"/>
               </a:ext>
             </a:extLst>
           </p:cNvPr>
@@ -27434,7 +27456,7 @@
           <p:cNvPr id="17" name="Shape 14">
             <a:extLst xmlns:a="http://schemas.openxmlformats.org/drawingml/2006/main">
               <a:ext uri="{FF2B5EF4-FFF2-40B4-BE49-F238E27FC236}">
-                <a16:creationId xmlns:a16="http://schemas.microsoft.com/office/drawing/2014/main" id="{FC4DD8D8-17B5-4397-874A-BE8A7E739E29}"/>
+                <a16:creationId xmlns:a16="http://schemas.microsoft.com/office/drawing/2014/main" id="{A6CEC372-7DED-4421-A7D8-C86564F5F64C}"/>
               </a:ext>
             </a:extLst>
           </p:cNvPr>
@@ -27472,7 +27494,7 @@
           <p:cNvPr id="18" name="Text 15">
             <a:extLst xmlns:a="http://schemas.openxmlformats.org/drawingml/2006/main">
               <a:ext uri="{FF2B5EF4-FFF2-40B4-BE49-F238E27FC236}">
-                <a16:creationId xmlns:a16="http://schemas.microsoft.com/office/drawing/2014/main" id="{FAD6C25A-DAC3-4B38-95A0-DA49A029A733}"/>
+                <a16:creationId xmlns:a16="http://schemas.microsoft.com/office/drawing/2014/main" id="{08358223-012D-4551-99DF-BEAAF176936A}"/>
               </a:ext>
             </a:extLst>
           </p:cNvPr>
@@ -27517,7 +27539,7 @@
           <p:cNvPr id="19" name="Text 16">
             <a:extLst xmlns:a="http://schemas.openxmlformats.org/drawingml/2006/main">
               <a:ext uri="{FF2B5EF4-FFF2-40B4-BE49-F238E27FC236}">
-                <a16:creationId xmlns:a16="http://schemas.microsoft.com/office/drawing/2014/main" id="{90E16726-DD65-4809-90DC-4D3E9D838E9E}"/>
+                <a16:creationId xmlns:a16="http://schemas.microsoft.com/office/drawing/2014/main" id="{C621FFCB-2015-4BB5-AB4D-2EED1638C60D}"/>
               </a:ext>
             </a:extLst>
           </p:cNvPr>
@@ -27562,7 +27584,7 @@
           <p:cNvPr id="20" name="Text 17">
             <a:extLst xmlns:a="http://schemas.openxmlformats.org/drawingml/2006/main">
               <a:ext uri="{FF2B5EF4-FFF2-40B4-BE49-F238E27FC236}">
-                <a16:creationId xmlns:a16="http://schemas.microsoft.com/office/drawing/2014/main" id="{470567E6-9FA9-40B2-B4E4-DBA2328F915D}"/>
+                <a16:creationId xmlns:a16="http://schemas.microsoft.com/office/drawing/2014/main" id="{99405B54-CE37-43DE-800A-06386A024932}"/>
               </a:ext>
             </a:extLst>
           </p:cNvPr>
@@ -27657,7 +27679,7 @@
           <p:cNvPr id="21" name="Shape 18">
             <a:extLst xmlns:a="http://schemas.openxmlformats.org/drawingml/2006/main">
               <a:ext uri="{FF2B5EF4-FFF2-40B4-BE49-F238E27FC236}">
-                <a16:creationId xmlns:a16="http://schemas.microsoft.com/office/drawing/2014/main" id="{8C7EFCD5-4CA7-4C80-BBCA-1FA489843EDB}"/>
+                <a16:creationId xmlns:a16="http://schemas.microsoft.com/office/drawing/2014/main" id="{C866F2C8-EDAE-4253-9726-18901A5042CA}"/>
               </a:ext>
             </a:extLst>
           </p:cNvPr>
@@ -27704,7 +27726,7 @@
           <p:cNvPr id="8" name="Text 19">
             <a:extLst xmlns:a="http://schemas.openxmlformats.org/drawingml/2006/main">
               <a:ext uri="{FF2B5EF4-FFF2-40B4-BE49-F238E27FC236}">
-                <a16:creationId xmlns:a16="http://schemas.microsoft.com/office/drawing/2014/main" id="{14A6AA90-4F74-454D-91AE-3E4E095D9FFD}"/>
+                <a16:creationId xmlns:a16="http://schemas.microsoft.com/office/drawing/2014/main" id="{D8DAC051-315E-49F0-A4DC-031BE80BF7DD}"/>
               </a:ext>
             </a:extLst>
           </p:cNvPr>
@@ -27749,7 +27771,7 @@
           <p:cNvPr id="23" name="Text 20">
             <a:extLst xmlns:a="http://schemas.openxmlformats.org/drawingml/2006/main">
               <a:ext uri="{FF2B5EF4-FFF2-40B4-BE49-F238E27FC236}">
-                <a16:creationId xmlns:a16="http://schemas.microsoft.com/office/drawing/2014/main" id="{6B892196-2A1E-4EB7-8238-15B36016FAC6}"/>
+                <a16:creationId xmlns:a16="http://schemas.microsoft.com/office/drawing/2014/main" id="{94488B91-4A81-4E50-911B-BD838648C7FD}"/>
               </a:ext>
             </a:extLst>
           </p:cNvPr>
@@ -27787,7 +27809,7 @@
                 <a:ea typeface="Calibri"/>
                 <a:cs typeface="Calibri"/>
               </a:rPr>
-              <a:t>The fair manual program closes the earlier placement confound: GCS and manual execution tie on requests, interfaces, input tokens, and exact quality. Official GEPA 0.1.4 makes 14 real task evaluations and three reflections, but retains its seed. Its 59-request, 63,954-token optimization overhead is reported separately. This six-case result supports automatic guarded specialization—not runtime dominance or general GEPA failure.</a:t>
+              <a:t>The fair manual program closes the earlier placement confound: GCS and manual execution tie on requests, interfaces, input tokens, and exact quality. Official GEPA 0.1.4 makes 14 real task evaluations and three reflections, but retains its seed. Its 59-request, 63,954-token optimization overhead is reported separately. Risk scope: the GCS artifact here is calibrated at α=.10 (88/92 groups admitted, bound 0.052) and would retire at the registered α=.05, so this is a 10%-selective-risk result. This six-case result supports automatic guarded specialization—not runtime dominance or general GEPA failure.</a:t>
             </a:r>
           </a:p>
         </p:txBody>
@@ -27795,7 +27817,7 @@
     </p:spTree>
     <p:extLst>
       <p:ext uri="{BB962C8B-B14F-4D97-AF65-F5344CB8AC3E}">
-        <p14:creationId xmlns:p14="http://schemas.microsoft.com/office/powerpoint/2010/main" val="1482190084"/>
+        <p14:creationId xmlns:p14="http://schemas.microsoft.com/office/powerpoint/2010/main" val="1648619474"/>
       </p:ext>
     </p:extLst>
   </p:cSld>
@@ -27826,7 +27848,7 @@
           <p:cNvPr id="2" name="Text 0">
             <a:extLst xmlns:a="http://schemas.openxmlformats.org/drawingml/2006/main">
               <a:ext uri="{FF2B5EF4-FFF2-40B4-BE49-F238E27FC236}">
-                <a16:creationId xmlns:a16="http://schemas.microsoft.com/office/drawing/2014/main" id="{966172AB-0156-4D9E-8C0F-7EF7CFAB0464}"/>
+                <a16:creationId xmlns:a16="http://schemas.microsoft.com/office/drawing/2014/main" id="{B747AD9B-64DA-4A8E-873A-82EBF8BA16DA}"/>
               </a:ext>
             </a:extLst>
           </p:cNvPr>
@@ -27871,7 +27893,7 @@
           <p:cNvPr id="3" name="Text 1">
             <a:extLst xmlns:a="http://schemas.openxmlformats.org/drawingml/2006/main">
               <a:ext uri="{FF2B5EF4-FFF2-40B4-BE49-F238E27FC236}">
-                <a16:creationId xmlns:a16="http://schemas.microsoft.com/office/drawing/2014/main" id="{5C7455E1-785E-48D3-B920-BB6E45D6A9F3}"/>
+                <a16:creationId xmlns:a16="http://schemas.microsoft.com/office/drawing/2014/main" id="{F946450A-F2A3-4113-B670-C187B1202B6B}"/>
               </a:ext>
             </a:extLst>
           </p:cNvPr>
@@ -27916,7 +27938,7 @@
           <p:cNvPr id="4" name="Text 2">
             <a:extLst xmlns:a="http://schemas.openxmlformats.org/drawingml/2006/main">
               <a:ext uri="{FF2B5EF4-FFF2-40B4-BE49-F238E27FC236}">
-                <a16:creationId xmlns:a16="http://schemas.microsoft.com/office/drawing/2014/main" id="{6B6DF9C1-6A37-4FE2-B7DE-2ADBBFA8B82C}"/>
+                <a16:creationId xmlns:a16="http://schemas.microsoft.com/office/drawing/2014/main" id="{AEFA695F-1BFA-4F6D-91FA-AF31DB6B2C12}"/>
               </a:ext>
             </a:extLst>
           </p:cNvPr>
@@ -27961,7 +27983,7 @@
           <p:cNvPr id="5" name="Text 3">
             <a:extLst xmlns:a="http://schemas.openxmlformats.org/drawingml/2006/main">
               <a:ext uri="{FF2B5EF4-FFF2-40B4-BE49-F238E27FC236}">
-                <a16:creationId xmlns:a16="http://schemas.microsoft.com/office/drawing/2014/main" id="{A041EEE5-859D-41B0-8D14-928DE2A4F7CA}"/>
+                <a16:creationId xmlns:a16="http://schemas.microsoft.com/office/drawing/2014/main" id="{FF59FC1F-4626-42D3-9E79-1BEA4B1C6085}"/>
               </a:ext>
             </a:extLst>
           </p:cNvPr>
@@ -28006,7 +28028,7 @@
           <p:cNvPr id="6" name="Shape 4">
             <a:extLst xmlns:a="http://schemas.openxmlformats.org/drawingml/2006/main">
               <a:ext uri="{FF2B5EF4-FFF2-40B4-BE49-F238E27FC236}">
-                <a16:creationId xmlns:a16="http://schemas.microsoft.com/office/drawing/2014/main" id="{232A0338-6CB4-48E1-AE4A-9A7EC5324614}"/>
+                <a16:creationId xmlns:a16="http://schemas.microsoft.com/office/drawing/2014/main" id="{8C1BCF80-C285-4318-8424-9A21AB38DC9F}"/>
               </a:ext>
             </a:extLst>
           </p:cNvPr>
@@ -28050,7 +28072,7 @@
           <p:nvPr/>
         </p:nvPicPr>
         <p:blipFill>
-          <a:blip xmlns:r="http://schemas.openxmlformats.org/officeDocument/2006/relationships" xmlns:a="http://schemas.openxmlformats.org/drawingml/2006/main" r:embed="Refb1a229ba2a4350"/>
+          <a:blip xmlns:r="http://schemas.openxmlformats.org/officeDocument/2006/relationships" xmlns:a="http://schemas.openxmlformats.org/drawingml/2006/main" r:embed="R30c9b5271c594c10"/>
           <a:stretch xmlns:a="http://schemas.openxmlformats.org/drawingml/2006/main">
             <a:fillRect l="0" t="0" r="0" b="0"/>
           </a:stretch>
@@ -28070,7 +28092,7 @@
           <p:cNvPr id="8" name="Text 5">
             <a:extLst xmlns:a="http://schemas.openxmlformats.org/drawingml/2006/main">
               <a:ext uri="{FF2B5EF4-FFF2-40B4-BE49-F238E27FC236}">
-                <a16:creationId xmlns:a16="http://schemas.microsoft.com/office/drawing/2014/main" id="{84ED202D-28A7-48B8-BF7D-F7AAFDB1A88C}"/>
+                <a16:creationId xmlns:a16="http://schemas.microsoft.com/office/drawing/2014/main" id="{21CFBDA1-B9FA-4788-A1E5-A6411A8A106D}"/>
               </a:ext>
             </a:extLst>
           </p:cNvPr>
@@ -28118,7 +28140,7 @@
           <p:cNvPr id="9" name="Text 6">
             <a:extLst xmlns:a="http://schemas.openxmlformats.org/drawingml/2006/main">
               <a:ext uri="{FF2B5EF4-FFF2-40B4-BE49-F238E27FC236}">
-                <a16:creationId xmlns:a16="http://schemas.microsoft.com/office/drawing/2014/main" id="{219003E1-D86E-4F03-A431-70F78645D7F1}"/>
+                <a16:creationId xmlns:a16="http://schemas.microsoft.com/office/drawing/2014/main" id="{2A6CD02E-CFB7-44D3-84B3-6DDB862F559B}"/>
               </a:ext>
             </a:extLst>
           </p:cNvPr>
@@ -28163,7 +28185,7 @@
           <p:cNvPr id="10" name="Shape 7">
             <a:extLst xmlns:a="http://schemas.openxmlformats.org/drawingml/2006/main">
               <a:ext uri="{FF2B5EF4-FFF2-40B4-BE49-F238E27FC236}">
-                <a16:creationId xmlns:a16="http://schemas.microsoft.com/office/drawing/2014/main" id="{1E096FF8-1E28-488C-B2D1-6D5F0D216241}"/>
+                <a16:creationId xmlns:a16="http://schemas.microsoft.com/office/drawing/2014/main" id="{72E8B811-0D41-4718-A17C-8F76E73B4BAB}"/>
               </a:ext>
             </a:extLst>
           </p:cNvPr>
@@ -28207,7 +28229,7 @@
           <p:nvPr/>
         </p:nvPicPr>
         <p:blipFill>
-          <a:blip xmlns:r="http://schemas.openxmlformats.org/officeDocument/2006/relationships" xmlns:a="http://schemas.openxmlformats.org/drawingml/2006/main" r:embed="Re60d18479385409a"/>
+          <a:blip xmlns:r="http://schemas.openxmlformats.org/officeDocument/2006/relationships" xmlns:a="http://schemas.openxmlformats.org/drawingml/2006/main" r:embed="R67b2a6b7cd4445a0"/>
           <a:stretch xmlns:a="http://schemas.openxmlformats.org/drawingml/2006/main">
             <a:fillRect l="0" t="0" r="0" b="0"/>
           </a:stretch>
@@ -28227,7 +28249,7 @@
           <p:cNvPr id="12" name="Text 8">
             <a:extLst xmlns:a="http://schemas.openxmlformats.org/drawingml/2006/main">
               <a:ext uri="{FF2B5EF4-FFF2-40B4-BE49-F238E27FC236}">
-                <a16:creationId xmlns:a16="http://schemas.microsoft.com/office/drawing/2014/main" id="{91E2F876-9EF5-42FD-BACB-163C6EB852F1}"/>
+                <a16:creationId xmlns:a16="http://schemas.microsoft.com/office/drawing/2014/main" id="{0492F0A8-2257-473C-A9C7-0AFD71E8019E}"/>
               </a:ext>
             </a:extLst>
           </p:cNvPr>
@@ -28275,7 +28297,7 @@
           <p:cNvPr id="13" name="Text 9">
             <a:extLst xmlns:a="http://schemas.openxmlformats.org/drawingml/2006/main">
               <a:ext uri="{FF2B5EF4-FFF2-40B4-BE49-F238E27FC236}">
-                <a16:creationId xmlns:a16="http://schemas.microsoft.com/office/drawing/2014/main" id="{0A89DD46-587D-4D23-AB32-570ABEC84C2D}"/>
+                <a16:creationId xmlns:a16="http://schemas.microsoft.com/office/drawing/2014/main" id="{A56540E5-9AF3-4DB5-830E-606B8F46E69D}"/>
               </a:ext>
             </a:extLst>
           </p:cNvPr>
@@ -28327,7 +28349,7 @@
         </p:xfrm>
         <a:graphic xmlns:a="http://schemas.openxmlformats.org/drawingml/2006/main">
           <a:graphicData uri="http://schemas.openxmlformats.org/drawingml/2006/chart">
-            <c:chart xmlns:r="http://schemas.openxmlformats.org/officeDocument/2006/relationships" xmlns:c="http://schemas.openxmlformats.org/drawingml/2006/chart" r:id="Raf07c2eb598c40af"/>
+            <c:chart xmlns:r="http://schemas.openxmlformats.org/officeDocument/2006/relationships" xmlns:c="http://schemas.openxmlformats.org/drawingml/2006/chart" r:id="Rfe1b320a21f34d32"/>
           </a:graphicData>
         </a:graphic>
       </p:graphicFrame>
@@ -28336,7 +28358,7 @@
           <p:cNvPr id="15" name="Text 10">
             <a:extLst xmlns:a="http://schemas.openxmlformats.org/drawingml/2006/main">
               <a:ext uri="{FF2B5EF4-FFF2-40B4-BE49-F238E27FC236}">
-                <a16:creationId xmlns:a16="http://schemas.microsoft.com/office/drawing/2014/main" id="{8767978D-38A2-4B1D-9A8F-176D2AFA179B}"/>
+                <a16:creationId xmlns:a16="http://schemas.microsoft.com/office/drawing/2014/main" id="{68440535-6310-497D-BD0C-831C98B03440}"/>
               </a:ext>
             </a:extLst>
           </p:cNvPr>
@@ -28384,7 +28406,7 @@
           <p:cNvPr id="16" name="Shape 11">
             <a:extLst xmlns:a="http://schemas.openxmlformats.org/drawingml/2006/main">
               <a:ext uri="{FF2B5EF4-FFF2-40B4-BE49-F238E27FC236}">
-                <a16:creationId xmlns:a16="http://schemas.microsoft.com/office/drawing/2014/main" id="{86FACEBA-311D-4CD6-B289-52E1A33612D5}"/>
+                <a16:creationId xmlns:a16="http://schemas.microsoft.com/office/drawing/2014/main" id="{2572EAC4-DD16-4570-ABA5-BB4926A9FEDC}"/>
               </a:ext>
             </a:extLst>
           </p:cNvPr>
@@ -28431,7 +28453,7 @@
           <p:cNvPr id="17" name="Text 12">
             <a:extLst xmlns:a="http://schemas.openxmlformats.org/drawingml/2006/main">
               <a:ext uri="{FF2B5EF4-FFF2-40B4-BE49-F238E27FC236}">
-                <a16:creationId xmlns:a16="http://schemas.microsoft.com/office/drawing/2014/main" id="{D84B9C37-8138-46CD-A25E-8DEBD2EDA7F9}"/>
+                <a16:creationId xmlns:a16="http://schemas.microsoft.com/office/drawing/2014/main" id="{B7A5E8E0-AEE6-47B3-A8F6-EF84C311508B}"/>
               </a:ext>
             </a:extLst>
           </p:cNvPr>
@@ -28479,7 +28501,7 @@
           <p:cNvPr id="18" name="Text 13">
             <a:extLst xmlns:a="http://schemas.openxmlformats.org/drawingml/2006/main">
               <a:ext uri="{FF2B5EF4-FFF2-40B4-BE49-F238E27FC236}">
-                <a16:creationId xmlns:a16="http://schemas.microsoft.com/office/drawing/2014/main" id="{B7B673BB-1515-4F79-A40F-59DAF128A406}"/>
+                <a16:creationId xmlns:a16="http://schemas.microsoft.com/office/drawing/2014/main" id="{BE2A6406-4C2A-4240-867A-CD1E2E280A1F}"/>
               </a:ext>
             </a:extLst>
           </p:cNvPr>
@@ -28524,7 +28546,7 @@
           <p:cNvPr id="19" name="Text 14">
             <a:extLst xmlns:a="http://schemas.openxmlformats.org/drawingml/2006/main">
               <a:ext uri="{FF2B5EF4-FFF2-40B4-BE49-F238E27FC236}">
-                <a16:creationId xmlns:a16="http://schemas.microsoft.com/office/drawing/2014/main" id="{A71E98EF-3980-4CB5-A04E-5649AEFC3042}"/>
+                <a16:creationId xmlns:a16="http://schemas.microsoft.com/office/drawing/2014/main" id="{69418A75-0AE6-47BD-BD89-2AB870F5D905}"/>
               </a:ext>
             </a:extLst>
           </p:cNvPr>
@@ -28569,7 +28591,7 @@
           <p:cNvPr id="20" name="Text 15">
             <a:extLst xmlns:a="http://schemas.openxmlformats.org/drawingml/2006/main">
               <a:ext uri="{FF2B5EF4-FFF2-40B4-BE49-F238E27FC236}">
-                <a16:creationId xmlns:a16="http://schemas.microsoft.com/office/drawing/2014/main" id="{D61CB5C0-0F4B-484E-8DFF-66C1796B68D6}"/>
+                <a16:creationId xmlns:a16="http://schemas.microsoft.com/office/drawing/2014/main" id="{AE88C580-0FC6-41A1-90B7-4B4A307FFAE3}"/>
               </a:ext>
             </a:extLst>
           </p:cNvPr>
@@ -28614,7 +28636,7 @@
           <p:cNvPr id="21" name="Text 16">
             <a:extLst xmlns:a="http://schemas.openxmlformats.org/drawingml/2006/main">
               <a:ext uri="{FF2B5EF4-FFF2-40B4-BE49-F238E27FC236}">
-                <a16:creationId xmlns:a16="http://schemas.microsoft.com/office/drawing/2014/main" id="{3C2EFC2A-8B92-456B-9819-D4CB458C7C35}"/>
+                <a16:creationId xmlns:a16="http://schemas.microsoft.com/office/drawing/2014/main" id="{8A1216B5-4A32-40A1-9C43-D456D10A739C}"/>
               </a:ext>
             </a:extLst>
           </p:cNvPr>
@@ -28659,7 +28681,7 @@
           <p:cNvPr id="22" name="Text 17">
             <a:extLst xmlns:a="http://schemas.openxmlformats.org/drawingml/2006/main">
               <a:ext uri="{FF2B5EF4-FFF2-40B4-BE49-F238E27FC236}">
-                <a16:creationId xmlns:a16="http://schemas.microsoft.com/office/drawing/2014/main" id="{2D21574C-99F6-4D2E-9B4A-02EC8DE0C668}"/>
+                <a16:creationId xmlns:a16="http://schemas.microsoft.com/office/drawing/2014/main" id="{9B81F335-27B1-46F4-9361-523CE7C26DCE}"/>
               </a:ext>
             </a:extLst>
           </p:cNvPr>
@@ -28704,7 +28726,7 @@
           <p:cNvPr id="23" name="Text 18">
             <a:extLst xmlns:a="http://schemas.openxmlformats.org/drawingml/2006/main">
               <a:ext uri="{FF2B5EF4-FFF2-40B4-BE49-F238E27FC236}">
-                <a16:creationId xmlns:a16="http://schemas.microsoft.com/office/drawing/2014/main" id="{C6BB1A42-D8F8-4B60-AAC8-CA296133BB92}"/>
+                <a16:creationId xmlns:a16="http://schemas.microsoft.com/office/drawing/2014/main" id="{0601CDFC-4D08-4F2A-B210-7C8825072DA1}"/>
               </a:ext>
             </a:extLst>
           </p:cNvPr>
@@ -28749,7 +28771,7 @@
           <p:cNvPr id="24" name="Text 19">
             <a:extLst xmlns:a="http://schemas.openxmlformats.org/drawingml/2006/main">
               <a:ext uri="{FF2B5EF4-FFF2-40B4-BE49-F238E27FC236}">
-                <a16:creationId xmlns:a16="http://schemas.microsoft.com/office/drawing/2014/main" id="{F0D2D968-3A81-4D41-A675-4DD4EC267BFA}"/>
+                <a16:creationId xmlns:a16="http://schemas.microsoft.com/office/drawing/2014/main" id="{FD47020F-EEB0-4848-A920-B11B39935DE4}"/>
               </a:ext>
             </a:extLst>
           </p:cNvPr>
@@ -28794,7 +28816,7 @@
           <p:cNvPr id="25" name="Text 20">
             <a:extLst xmlns:a="http://schemas.openxmlformats.org/drawingml/2006/main">
               <a:ext uri="{FF2B5EF4-FFF2-40B4-BE49-F238E27FC236}">
-                <a16:creationId xmlns:a16="http://schemas.microsoft.com/office/drawing/2014/main" id="{F9AB7D47-FE14-4431-81EC-8B3F8E463A24}"/>
+                <a16:creationId xmlns:a16="http://schemas.microsoft.com/office/drawing/2014/main" id="{6E1E6E9B-B613-48A7-ACB2-DD40A3D75C26}"/>
               </a:ext>
             </a:extLst>
           </p:cNvPr>
@@ -28839,7 +28861,7 @@
           <p:cNvPr id="26" name="Text 21">
             <a:extLst xmlns:a="http://schemas.openxmlformats.org/drawingml/2006/main">
               <a:ext uri="{FF2B5EF4-FFF2-40B4-BE49-F238E27FC236}">
-                <a16:creationId xmlns:a16="http://schemas.microsoft.com/office/drawing/2014/main" id="{F77A6F62-859E-4B97-89F2-18D81AB86E9B}"/>
+                <a16:creationId xmlns:a16="http://schemas.microsoft.com/office/drawing/2014/main" id="{1FCED8C9-A909-4FC4-A264-8DD7BFD707E3}"/>
               </a:ext>
             </a:extLst>
           </p:cNvPr>
@@ -28884,7 +28906,7 @@
           <p:cNvPr id="27" name="Text 22">
             <a:extLst xmlns:a="http://schemas.openxmlformats.org/drawingml/2006/main">
               <a:ext uri="{FF2B5EF4-FFF2-40B4-BE49-F238E27FC236}">
-                <a16:creationId xmlns:a16="http://schemas.microsoft.com/office/drawing/2014/main" id="{F8189361-BAD5-43E1-A3AD-937068CD94DA}"/>
+                <a16:creationId xmlns:a16="http://schemas.microsoft.com/office/drawing/2014/main" id="{3A78CAB0-61B1-4FB1-8445-AA18D3B1286E}"/>
               </a:ext>
             </a:extLst>
           </p:cNvPr>
@@ -28929,7 +28951,7 @@
           <p:cNvPr id="28" name="Text 23">
             <a:extLst xmlns:a="http://schemas.openxmlformats.org/drawingml/2006/main">
               <a:ext uri="{FF2B5EF4-FFF2-40B4-BE49-F238E27FC236}">
-                <a16:creationId xmlns:a16="http://schemas.microsoft.com/office/drawing/2014/main" id="{5E38413D-D647-4CAB-9533-9B135D541842}"/>
+                <a16:creationId xmlns:a16="http://schemas.microsoft.com/office/drawing/2014/main" id="{384D46FF-2A9C-4D1F-94CC-F845FE510896}"/>
               </a:ext>
             </a:extLst>
           </p:cNvPr>
@@ -28974,7 +28996,7 @@
           <p:cNvPr id="29" name="Text 24">
             <a:extLst xmlns:a="http://schemas.openxmlformats.org/drawingml/2006/main">
               <a:ext uri="{FF2B5EF4-FFF2-40B4-BE49-F238E27FC236}">
-                <a16:creationId xmlns:a16="http://schemas.microsoft.com/office/drawing/2014/main" id="{A8FB0AC5-4333-4EC0-8580-46D06DB4D480}"/>
+                <a16:creationId xmlns:a16="http://schemas.microsoft.com/office/drawing/2014/main" id="{A7834B04-4D6F-4461-898A-047965FDBEC9}"/>
               </a:ext>
             </a:extLst>
           </p:cNvPr>
@@ -29019,7 +29041,7 @@
           <p:cNvPr id="30" name="Shape 25">
             <a:extLst xmlns:a="http://schemas.openxmlformats.org/drawingml/2006/main">
               <a:ext uri="{FF2B5EF4-FFF2-40B4-BE49-F238E27FC236}">
-                <a16:creationId xmlns:a16="http://schemas.microsoft.com/office/drawing/2014/main" id="{BF4E8DAA-864C-4421-A726-37EFCB8FFACE}"/>
+                <a16:creationId xmlns:a16="http://schemas.microsoft.com/office/drawing/2014/main" id="{D1319558-C48F-4486-B58B-396764C4D291}"/>
               </a:ext>
             </a:extLst>
           </p:cNvPr>
@@ -29066,7 +29088,7 @@
           <p:cNvPr id="31" name="Text 26">
             <a:extLst xmlns:a="http://schemas.openxmlformats.org/drawingml/2006/main">
               <a:ext uri="{FF2B5EF4-FFF2-40B4-BE49-F238E27FC236}">
-                <a16:creationId xmlns:a16="http://schemas.microsoft.com/office/drawing/2014/main" id="{A51ED285-CF40-4675-90CE-43100E5C9BC6}"/>
+                <a16:creationId xmlns:a16="http://schemas.microsoft.com/office/drawing/2014/main" id="{BE925BB7-B2FE-4824-BE42-E4365E3DBD75}"/>
               </a:ext>
             </a:extLst>
           </p:cNvPr>
@@ -29111,7 +29133,7 @@
           <p:cNvPr id="32" name="Text 27">
             <a:extLst xmlns:a="http://schemas.openxmlformats.org/drawingml/2006/main">
               <a:ext uri="{FF2B5EF4-FFF2-40B4-BE49-F238E27FC236}">
-                <a16:creationId xmlns:a16="http://schemas.microsoft.com/office/drawing/2014/main" id="{76D94229-E934-4301-A360-89FDE22CFB39}"/>
+                <a16:creationId xmlns:a16="http://schemas.microsoft.com/office/drawing/2014/main" id="{8089BAD3-112D-43B6-8337-4B5344E4DA24}"/>
               </a:ext>
             </a:extLst>
           </p:cNvPr>
@@ -29157,7 +29179,7 @@
     </p:spTree>
     <p:extLst>
       <p:ext uri="{BB962C8B-B14F-4D97-AF65-F5344CB8AC3E}">
-        <p14:creationId xmlns:p14="http://schemas.microsoft.com/office/powerpoint/2010/main" val="426605014"/>
+        <p14:creationId xmlns:p14="http://schemas.microsoft.com/office/powerpoint/2010/main" val="280049006"/>
       </p:ext>
     </p:extLst>
   </p:cSld>
@@ -29188,7 +29210,7 @@
           <p:cNvPr id="2" name="Text 0">
             <a:extLst xmlns:a="http://schemas.openxmlformats.org/drawingml/2006/main">
               <a:ext uri="{FF2B5EF4-FFF2-40B4-BE49-F238E27FC236}">
-                <a16:creationId xmlns:a16="http://schemas.microsoft.com/office/drawing/2014/main" id="{48702BE8-324D-456F-AC29-AEE3C5775E37}"/>
+                <a16:creationId xmlns:a16="http://schemas.microsoft.com/office/drawing/2014/main" id="{BE357CE1-A3DA-49C9-A6B3-202AF05AC9A2}"/>
               </a:ext>
             </a:extLst>
           </p:cNvPr>
@@ -29233,7 +29255,7 @@
           <p:cNvPr id="3" name="Text 1">
             <a:extLst xmlns:a="http://schemas.openxmlformats.org/drawingml/2006/main">
               <a:ext uri="{FF2B5EF4-FFF2-40B4-BE49-F238E27FC236}">
-                <a16:creationId xmlns:a16="http://schemas.microsoft.com/office/drawing/2014/main" id="{29F39E1D-8134-4F73-B39A-155824CECCC5}"/>
+                <a16:creationId xmlns:a16="http://schemas.microsoft.com/office/drawing/2014/main" id="{BD270FB0-F861-4B00-9313-53A4F69D5FF5}"/>
               </a:ext>
             </a:extLst>
           </p:cNvPr>
@@ -29278,7 +29300,7 @@
           <p:cNvPr id="4" name="Text 2">
             <a:extLst xmlns:a="http://schemas.openxmlformats.org/drawingml/2006/main">
               <a:ext uri="{FF2B5EF4-FFF2-40B4-BE49-F238E27FC236}">
-                <a16:creationId xmlns:a16="http://schemas.microsoft.com/office/drawing/2014/main" id="{CBDEDD38-434C-4E24-AF1F-2276D208CCDD}"/>
+                <a16:creationId xmlns:a16="http://schemas.microsoft.com/office/drawing/2014/main" id="{9D0ABAA4-8771-4F2E-9333-44BEFBEDB3A6}"/>
               </a:ext>
             </a:extLst>
           </p:cNvPr>
@@ -29323,7 +29345,7 @@
           <p:cNvPr id="5" name="Text 3">
             <a:extLst xmlns:a="http://schemas.openxmlformats.org/drawingml/2006/main">
               <a:ext uri="{FF2B5EF4-FFF2-40B4-BE49-F238E27FC236}">
-                <a16:creationId xmlns:a16="http://schemas.microsoft.com/office/drawing/2014/main" id="{5522CF11-B87B-4B58-A449-04661FC5C9A9}"/>
+                <a16:creationId xmlns:a16="http://schemas.microsoft.com/office/drawing/2014/main" id="{F70183CC-C4E9-466E-8DFC-AF01C8699848}"/>
               </a:ext>
             </a:extLst>
           </p:cNvPr>
@@ -29368,7 +29390,7 @@
           <p:cNvPr id="6" name="Shape 4">
             <a:extLst xmlns:a="http://schemas.openxmlformats.org/drawingml/2006/main">
               <a:ext uri="{FF2B5EF4-FFF2-40B4-BE49-F238E27FC236}">
-                <a16:creationId xmlns:a16="http://schemas.microsoft.com/office/drawing/2014/main" id="{EBD2983E-3573-4616-936A-4DE04D044D41}"/>
+                <a16:creationId xmlns:a16="http://schemas.microsoft.com/office/drawing/2014/main" id="{A6B1F71C-39CD-4C18-BD86-FFD0EAB217ED}"/>
               </a:ext>
             </a:extLst>
           </p:cNvPr>
@@ -29415,7 +29437,7 @@
           <p:cNvPr id="7" name="Shape 5">
             <a:extLst xmlns:a="http://schemas.openxmlformats.org/drawingml/2006/main">
               <a:ext uri="{FF2B5EF4-FFF2-40B4-BE49-F238E27FC236}">
-                <a16:creationId xmlns:a16="http://schemas.microsoft.com/office/drawing/2014/main" id="{CCA95C26-0C64-4A17-9718-CA916A592D2A}"/>
+                <a16:creationId xmlns:a16="http://schemas.microsoft.com/office/drawing/2014/main" id="{9BF48B77-5AD7-4E93-ABF2-66F465EA410A}"/>
               </a:ext>
             </a:extLst>
           </p:cNvPr>
@@ -29453,7 +29475,7 @@
           <p:cNvPr id="8" name="Text 6">
             <a:extLst xmlns:a="http://schemas.openxmlformats.org/drawingml/2006/main">
               <a:ext uri="{FF2B5EF4-FFF2-40B4-BE49-F238E27FC236}">
-                <a16:creationId xmlns:a16="http://schemas.microsoft.com/office/drawing/2014/main" id="{7BA30F6B-CC75-43D4-B34A-BECF520B065F}"/>
+                <a16:creationId xmlns:a16="http://schemas.microsoft.com/office/drawing/2014/main" id="{BC4F5CAC-36F9-428C-9429-5172CC376DCC}"/>
               </a:ext>
             </a:extLst>
           </p:cNvPr>
@@ -29498,7 +29520,7 @@
           <p:cNvPr id="9" name="Text 7">
             <a:extLst xmlns:a="http://schemas.openxmlformats.org/drawingml/2006/main">
               <a:ext uri="{FF2B5EF4-FFF2-40B4-BE49-F238E27FC236}">
-                <a16:creationId xmlns:a16="http://schemas.microsoft.com/office/drawing/2014/main" id="{16638613-D627-405D-91FD-BC3B2136052A}"/>
+                <a16:creationId xmlns:a16="http://schemas.microsoft.com/office/drawing/2014/main" id="{3B1A0EE2-4CF4-43D2-992A-207CAF776890}"/>
               </a:ext>
             </a:extLst>
           </p:cNvPr>
@@ -29546,7 +29568,7 @@
           <p:cNvPr id="10" name="Text 8">
             <a:extLst xmlns:a="http://schemas.openxmlformats.org/drawingml/2006/main">
               <a:ext uri="{FF2B5EF4-FFF2-40B4-BE49-F238E27FC236}">
-                <a16:creationId xmlns:a16="http://schemas.microsoft.com/office/drawing/2014/main" id="{A6BCF052-A963-4AEF-8B6E-1FCEFFB1DE42}"/>
+                <a16:creationId xmlns:a16="http://schemas.microsoft.com/office/drawing/2014/main" id="{050B1A6F-3C74-4F35-9E76-A9722103BA6F}"/>
               </a:ext>
             </a:extLst>
           </p:cNvPr>
@@ -29594,7 +29616,7 @@
           <p:cNvPr id="11" name="Shape 9">
             <a:extLst xmlns:a="http://schemas.openxmlformats.org/drawingml/2006/main">
               <a:ext uri="{FF2B5EF4-FFF2-40B4-BE49-F238E27FC236}">
-                <a16:creationId xmlns:a16="http://schemas.microsoft.com/office/drawing/2014/main" id="{2A4A24ED-EA5C-4B4A-ABEE-911E8174CCB5}"/>
+                <a16:creationId xmlns:a16="http://schemas.microsoft.com/office/drawing/2014/main" id="{689F81D4-2A55-4542-8FCB-4A0E3B3DC3DA}"/>
               </a:ext>
             </a:extLst>
           </p:cNvPr>
@@ -29641,7 +29663,7 @@
           <p:cNvPr id="12" name="Shape 10">
             <a:extLst xmlns:a="http://schemas.openxmlformats.org/drawingml/2006/main">
               <a:ext uri="{FF2B5EF4-FFF2-40B4-BE49-F238E27FC236}">
-                <a16:creationId xmlns:a16="http://schemas.microsoft.com/office/drawing/2014/main" id="{8C3863E4-EF57-4045-B1C9-92E949CE9786}"/>
+                <a16:creationId xmlns:a16="http://schemas.microsoft.com/office/drawing/2014/main" id="{75B7DC91-2B51-4631-B27C-294239BE9FAE}"/>
               </a:ext>
             </a:extLst>
           </p:cNvPr>
@@ -29679,7 +29701,7 @@
           <p:cNvPr id="13" name="Text 11">
             <a:extLst xmlns:a="http://schemas.openxmlformats.org/drawingml/2006/main">
               <a:ext uri="{FF2B5EF4-FFF2-40B4-BE49-F238E27FC236}">
-                <a16:creationId xmlns:a16="http://schemas.microsoft.com/office/drawing/2014/main" id="{1346EFBF-CBD2-4C2C-B696-BD6416BA08B9}"/>
+                <a16:creationId xmlns:a16="http://schemas.microsoft.com/office/drawing/2014/main" id="{FC4D173D-B43B-4587-A0AD-30610D040B08}"/>
               </a:ext>
             </a:extLst>
           </p:cNvPr>
@@ -29724,7 +29746,7 @@
           <p:cNvPr id="14" name="Text 12">
             <a:extLst xmlns:a="http://schemas.openxmlformats.org/drawingml/2006/main">
               <a:ext uri="{FF2B5EF4-FFF2-40B4-BE49-F238E27FC236}">
-                <a16:creationId xmlns:a16="http://schemas.microsoft.com/office/drawing/2014/main" id="{04276B8E-81B6-48B8-938B-C81BA86F187B}"/>
+                <a16:creationId xmlns:a16="http://schemas.microsoft.com/office/drawing/2014/main" id="{8089A3AF-B844-4894-B2B0-B6905AA55D27}"/>
               </a:ext>
             </a:extLst>
           </p:cNvPr>
@@ -29772,7 +29794,7 @@
           <p:cNvPr id="15" name="Text 13">
             <a:extLst xmlns:a="http://schemas.openxmlformats.org/drawingml/2006/main">
               <a:ext uri="{FF2B5EF4-FFF2-40B4-BE49-F238E27FC236}">
-                <a16:creationId xmlns:a16="http://schemas.microsoft.com/office/drawing/2014/main" id="{F988EDF5-4483-4B2A-B0A4-4F3D0CBE21BF}"/>
+                <a16:creationId xmlns:a16="http://schemas.microsoft.com/office/drawing/2014/main" id="{15210B99-8C50-4A04-B835-BCEADE08961D}"/>
               </a:ext>
             </a:extLst>
           </p:cNvPr>
@@ -29820,7 +29842,7 @@
           <p:cNvPr id="16" name="Shape 14">
             <a:extLst xmlns:a="http://schemas.openxmlformats.org/drawingml/2006/main">
               <a:ext uri="{FF2B5EF4-FFF2-40B4-BE49-F238E27FC236}">
-                <a16:creationId xmlns:a16="http://schemas.microsoft.com/office/drawing/2014/main" id="{0ACF13B3-B369-48CD-A91B-B677D0495D2C}"/>
+                <a16:creationId xmlns:a16="http://schemas.microsoft.com/office/drawing/2014/main" id="{4C69C06F-6FE7-44A8-A090-C1CABF06B787}"/>
               </a:ext>
             </a:extLst>
           </p:cNvPr>
@@ -29867,7 +29889,7 @@
           <p:cNvPr id="17" name="Shape 15">
             <a:extLst xmlns:a="http://schemas.openxmlformats.org/drawingml/2006/main">
               <a:ext uri="{FF2B5EF4-FFF2-40B4-BE49-F238E27FC236}">
-                <a16:creationId xmlns:a16="http://schemas.microsoft.com/office/drawing/2014/main" id="{039F9E50-5DB2-4953-854B-F9871522833D}"/>
+                <a16:creationId xmlns:a16="http://schemas.microsoft.com/office/drawing/2014/main" id="{DAE42BC7-FB4F-4A5D-AF29-8801C311F2C4}"/>
               </a:ext>
             </a:extLst>
           </p:cNvPr>
@@ -29905,7 +29927,7 @@
           <p:cNvPr id="18" name="Text 16">
             <a:extLst xmlns:a="http://schemas.openxmlformats.org/drawingml/2006/main">
               <a:ext uri="{FF2B5EF4-FFF2-40B4-BE49-F238E27FC236}">
-                <a16:creationId xmlns:a16="http://schemas.microsoft.com/office/drawing/2014/main" id="{B7549CEB-A88D-49B9-8A8E-B2109842605F}"/>
+                <a16:creationId xmlns:a16="http://schemas.microsoft.com/office/drawing/2014/main" id="{19843CBC-17D0-40CD-8EBD-E895CA31BA78}"/>
               </a:ext>
             </a:extLst>
           </p:cNvPr>
@@ -29950,7 +29972,7 @@
           <p:cNvPr id="19" name="Text 17">
             <a:extLst xmlns:a="http://schemas.openxmlformats.org/drawingml/2006/main">
               <a:ext uri="{FF2B5EF4-FFF2-40B4-BE49-F238E27FC236}">
-                <a16:creationId xmlns:a16="http://schemas.microsoft.com/office/drawing/2014/main" id="{600108BA-1E71-4E79-817F-08A520B75737}"/>
+                <a16:creationId xmlns:a16="http://schemas.microsoft.com/office/drawing/2014/main" id="{D9041EA1-0961-479F-A419-FBCF3C04F71D}"/>
               </a:ext>
             </a:extLst>
           </p:cNvPr>
@@ -29998,7 +30020,7 @@
           <p:cNvPr id="20" name="Text 18">
             <a:extLst xmlns:a="http://schemas.openxmlformats.org/drawingml/2006/main">
               <a:ext uri="{FF2B5EF4-FFF2-40B4-BE49-F238E27FC236}">
-                <a16:creationId xmlns:a16="http://schemas.microsoft.com/office/drawing/2014/main" id="{4E5E9028-89D6-42D1-9F5A-15C4DEBA2A10}"/>
+                <a16:creationId xmlns:a16="http://schemas.microsoft.com/office/drawing/2014/main" id="{5A99B486-1747-440D-A0E0-BD214A5A2E81}"/>
               </a:ext>
             </a:extLst>
           </p:cNvPr>
@@ -30046,7 +30068,7 @@
           <p:cNvPr id="21" name="Shape 19">
             <a:extLst xmlns:a="http://schemas.openxmlformats.org/drawingml/2006/main">
               <a:ext uri="{FF2B5EF4-FFF2-40B4-BE49-F238E27FC236}">
-                <a16:creationId xmlns:a16="http://schemas.microsoft.com/office/drawing/2014/main" id="{A3D8B40E-4346-4956-87BE-EF4D4AB2697E}"/>
+                <a16:creationId xmlns:a16="http://schemas.microsoft.com/office/drawing/2014/main" id="{BEB305F5-AA77-45D4-806E-AD2A74722CBE}"/>
               </a:ext>
             </a:extLst>
           </p:cNvPr>
@@ -30093,7 +30115,7 @@
           <p:cNvPr id="22" name="Shape 20">
             <a:extLst xmlns:a="http://schemas.openxmlformats.org/drawingml/2006/main">
               <a:ext uri="{FF2B5EF4-FFF2-40B4-BE49-F238E27FC236}">
-                <a16:creationId xmlns:a16="http://schemas.microsoft.com/office/drawing/2014/main" id="{B4ECE22F-536D-423F-9BC8-916AAD13445E}"/>
+                <a16:creationId xmlns:a16="http://schemas.microsoft.com/office/drawing/2014/main" id="{E4151B36-22B0-413E-8FC8-A6253C0475DA}"/>
               </a:ext>
             </a:extLst>
           </p:cNvPr>
@@ -30131,7 +30153,7 @@
           <p:cNvPr id="23" name="Text 21">
             <a:extLst xmlns:a="http://schemas.openxmlformats.org/drawingml/2006/main">
               <a:ext uri="{FF2B5EF4-FFF2-40B4-BE49-F238E27FC236}">
-                <a16:creationId xmlns:a16="http://schemas.microsoft.com/office/drawing/2014/main" id="{1DB5096C-500E-4528-B55A-DF67E1422E20}"/>
+                <a16:creationId xmlns:a16="http://schemas.microsoft.com/office/drawing/2014/main" id="{D7069AAA-D0F5-415B-A2F8-86E5C34C265C}"/>
               </a:ext>
             </a:extLst>
           </p:cNvPr>
@@ -30176,7 +30198,7 @@
           <p:cNvPr id="24" name="Text 22">
             <a:extLst xmlns:a="http://schemas.openxmlformats.org/drawingml/2006/main">
               <a:ext uri="{FF2B5EF4-FFF2-40B4-BE49-F238E27FC236}">
-                <a16:creationId xmlns:a16="http://schemas.microsoft.com/office/drawing/2014/main" id="{354BC2F3-1D0D-47BD-B486-564DB3DD25DC}"/>
+                <a16:creationId xmlns:a16="http://schemas.microsoft.com/office/drawing/2014/main" id="{97AF684D-6FA6-4D5A-A4D2-80CE575CED88}"/>
               </a:ext>
             </a:extLst>
           </p:cNvPr>
@@ -30224,7 +30246,7 @@
           <p:cNvPr id="25" name="Text 23">
             <a:extLst xmlns:a="http://schemas.openxmlformats.org/drawingml/2006/main">
               <a:ext uri="{FF2B5EF4-FFF2-40B4-BE49-F238E27FC236}">
-                <a16:creationId xmlns:a16="http://schemas.microsoft.com/office/drawing/2014/main" id="{1D5FC5BF-1144-4321-93ED-A43C0D0BE7F8}"/>
+                <a16:creationId xmlns:a16="http://schemas.microsoft.com/office/drawing/2014/main" id="{7768F2B0-0E6A-4C0E-A77C-ED9F7D2F264B}"/>
               </a:ext>
             </a:extLst>
           </p:cNvPr>
@@ -30272,7 +30294,7 @@
           <p:cNvPr id="26" name="Shape 24">
             <a:extLst xmlns:a="http://schemas.openxmlformats.org/drawingml/2006/main">
               <a:ext uri="{FF2B5EF4-FFF2-40B4-BE49-F238E27FC236}">
-                <a16:creationId xmlns:a16="http://schemas.microsoft.com/office/drawing/2014/main" id="{58EC248D-4D9F-4479-A0B8-649273F0A853}"/>
+                <a16:creationId xmlns:a16="http://schemas.microsoft.com/office/drawing/2014/main" id="{FC2A3325-57D3-4ED2-B38A-5276F492DC3D}"/>
               </a:ext>
             </a:extLst>
           </p:cNvPr>
@@ -30319,7 +30341,7 @@
           <p:cNvPr id="27" name="Shape 25">
             <a:extLst xmlns:a="http://schemas.openxmlformats.org/drawingml/2006/main">
               <a:ext uri="{FF2B5EF4-FFF2-40B4-BE49-F238E27FC236}">
-                <a16:creationId xmlns:a16="http://schemas.microsoft.com/office/drawing/2014/main" id="{B8816433-0000-46F8-B3F4-5C5BB0CF4CBB}"/>
+                <a16:creationId xmlns:a16="http://schemas.microsoft.com/office/drawing/2014/main" id="{C43C9193-97D0-4305-8D6F-1A61CB1FC832}"/>
               </a:ext>
             </a:extLst>
           </p:cNvPr>
@@ -30357,7 +30379,7 @@
           <p:cNvPr id="28" name="Text 26">
             <a:extLst xmlns:a="http://schemas.openxmlformats.org/drawingml/2006/main">
               <a:ext uri="{FF2B5EF4-FFF2-40B4-BE49-F238E27FC236}">
-                <a16:creationId xmlns:a16="http://schemas.microsoft.com/office/drawing/2014/main" id="{95FBE5B1-E314-425E-A212-0DEC53DA541C}"/>
+                <a16:creationId xmlns:a16="http://schemas.microsoft.com/office/drawing/2014/main" id="{0FF0E8FF-EE37-4E6D-94EA-447CD9F2C8E6}"/>
               </a:ext>
             </a:extLst>
           </p:cNvPr>
@@ -30402,7 +30424,7 @@
           <p:cNvPr id="29" name="Text 27">
             <a:extLst xmlns:a="http://schemas.openxmlformats.org/drawingml/2006/main">
               <a:ext uri="{FF2B5EF4-FFF2-40B4-BE49-F238E27FC236}">
-                <a16:creationId xmlns:a16="http://schemas.microsoft.com/office/drawing/2014/main" id="{5CE0BD2D-61F6-48EA-A3AA-F22F475150EF}"/>
+                <a16:creationId xmlns:a16="http://schemas.microsoft.com/office/drawing/2014/main" id="{5186EA46-4689-4B53-9E4F-A5A509519A7E}"/>
               </a:ext>
             </a:extLst>
           </p:cNvPr>
@@ -30450,7 +30472,7 @@
           <p:cNvPr id="30" name="Text 28">
             <a:extLst xmlns:a="http://schemas.openxmlformats.org/drawingml/2006/main">
               <a:ext uri="{FF2B5EF4-FFF2-40B4-BE49-F238E27FC236}">
-                <a16:creationId xmlns:a16="http://schemas.microsoft.com/office/drawing/2014/main" id="{715A3F47-6E76-4A0A-AD8B-9AAD5FB096F1}"/>
+                <a16:creationId xmlns:a16="http://schemas.microsoft.com/office/drawing/2014/main" id="{BE878E8C-B3B0-4CEE-8838-0FC2110E5B87}"/>
               </a:ext>
             </a:extLst>
           </p:cNvPr>
@@ -30498,7 +30520,7 @@
           <p:cNvPr id="31" name="Shape 29">
             <a:extLst xmlns:a="http://schemas.openxmlformats.org/drawingml/2006/main">
               <a:ext uri="{FF2B5EF4-FFF2-40B4-BE49-F238E27FC236}">
-                <a16:creationId xmlns:a16="http://schemas.microsoft.com/office/drawing/2014/main" id="{661C1005-18BE-479F-8593-3D8867B760C6}"/>
+                <a16:creationId xmlns:a16="http://schemas.microsoft.com/office/drawing/2014/main" id="{072ECF0C-A020-42FA-A9B7-6A87FC558411}"/>
               </a:ext>
             </a:extLst>
           </p:cNvPr>
@@ -30545,7 +30567,7 @@
           <p:cNvPr id="32" name="Shape 30">
             <a:extLst xmlns:a="http://schemas.openxmlformats.org/drawingml/2006/main">
               <a:ext uri="{FF2B5EF4-FFF2-40B4-BE49-F238E27FC236}">
-                <a16:creationId xmlns:a16="http://schemas.microsoft.com/office/drawing/2014/main" id="{2E895156-44CA-4656-A30E-47FF3B3295BD}"/>
+                <a16:creationId xmlns:a16="http://schemas.microsoft.com/office/drawing/2014/main" id="{36B1DC00-BFF5-4947-84E9-4ECFACA35D4D}"/>
               </a:ext>
             </a:extLst>
           </p:cNvPr>
@@ -30583,7 +30605,7 @@
           <p:cNvPr id="33" name="Text 31">
             <a:extLst xmlns:a="http://schemas.openxmlformats.org/drawingml/2006/main">
               <a:ext uri="{FF2B5EF4-FFF2-40B4-BE49-F238E27FC236}">
-                <a16:creationId xmlns:a16="http://schemas.microsoft.com/office/drawing/2014/main" id="{840416C0-C42A-4235-9E6E-E419F33F4EE1}"/>
+                <a16:creationId xmlns:a16="http://schemas.microsoft.com/office/drawing/2014/main" id="{17EF352A-F0EE-426E-AE01-EF4B4405DFD9}"/>
               </a:ext>
             </a:extLst>
           </p:cNvPr>
@@ -30628,7 +30650,7 @@
           <p:cNvPr id="34" name="Text 32">
             <a:extLst xmlns:a="http://schemas.openxmlformats.org/drawingml/2006/main">
               <a:ext uri="{FF2B5EF4-FFF2-40B4-BE49-F238E27FC236}">
-                <a16:creationId xmlns:a16="http://schemas.microsoft.com/office/drawing/2014/main" id="{6E875685-004F-426E-BC12-0DA967D77D35}"/>
+                <a16:creationId xmlns:a16="http://schemas.microsoft.com/office/drawing/2014/main" id="{6E7FE7CE-A80E-48F6-A3F5-2BC5650EBDBD}"/>
               </a:ext>
             </a:extLst>
           </p:cNvPr>
@@ -30676,7 +30698,7 @@
           <p:cNvPr id="35" name="Text 33">
             <a:extLst xmlns:a="http://schemas.openxmlformats.org/drawingml/2006/main">
               <a:ext uri="{FF2B5EF4-FFF2-40B4-BE49-F238E27FC236}">
-                <a16:creationId xmlns:a16="http://schemas.microsoft.com/office/drawing/2014/main" id="{EB3D8C84-1ABA-4F8F-8603-AFBC3B307147}"/>
+                <a16:creationId xmlns:a16="http://schemas.microsoft.com/office/drawing/2014/main" id="{E23A4064-5F2F-4E52-A6F2-43DBE17FEEAA}"/>
               </a:ext>
             </a:extLst>
           </p:cNvPr>
@@ -30724,7 +30746,7 @@
           <p:cNvPr id="36" name="Text 34">
             <a:extLst xmlns:a="http://schemas.openxmlformats.org/drawingml/2006/main">
               <a:ext uri="{FF2B5EF4-FFF2-40B4-BE49-F238E27FC236}">
-                <a16:creationId xmlns:a16="http://schemas.microsoft.com/office/drawing/2014/main" id="{91491671-35EA-4A24-99EF-E28729F85087}"/>
+                <a16:creationId xmlns:a16="http://schemas.microsoft.com/office/drawing/2014/main" id="{B11D2FCE-17A2-4BC6-8575-2ED34D155AAF}"/>
               </a:ext>
             </a:extLst>
           </p:cNvPr>
@@ -30762,7 +30784,7 @@
                 <a:ea typeface="Calibri"/>
                 <a:cs typeface="Calibri"/>
               </a:rPr>
-              <a:t>Also: discovery is not free (132 episodes cost 528 provider requests, 533,293 tokens, and about $0.096); the fair-placement/GEPA study has only six held-out records; risk control is per artifact; the closed DSL misses legitimate transformations and loops; and pre-snapshot Git ancestry cannot be reconstructed.</a:t>
+              <a:t>Also: discovery is not free (132 episodes cost 528 provider requests, 533,293 tokens, and about $0.096), and provider-side break-even runs 181–411 episodes; part of the reported 32.0–75.3% cost range is prompt-cache warmth rather than compiled depth, and no cache-controlled replication exists; the fair-placement/GEPA study has only six held-out records; risk control is per artifact; the closed DSL misses legitimate transformations and loops; and pre-snapshot Git ancestry cannot be reconstructed.</a:t>
             </a:r>
           </a:p>
         </p:txBody>
@@ -30770,7 +30792,7 @@
     </p:spTree>
     <p:extLst>
       <p:ext uri="{BB962C8B-B14F-4D97-AF65-F5344CB8AC3E}">
-        <p14:creationId xmlns:p14="http://schemas.microsoft.com/office/powerpoint/2010/main" val="1940819812"/>
+        <p14:creationId xmlns:p14="http://schemas.microsoft.com/office/powerpoint/2010/main" val="849195648"/>
       </p:ext>
     </p:extLst>
   </p:cSld>
@@ -30801,7 +30823,7 @@
           <p:cNvPr id="2" name="Text 0">
             <a:extLst xmlns:a="http://schemas.openxmlformats.org/drawingml/2006/main">
               <a:ext uri="{FF2B5EF4-FFF2-40B4-BE49-F238E27FC236}">
-                <a16:creationId xmlns:a16="http://schemas.microsoft.com/office/drawing/2014/main" id="{F7BB1295-F522-464E-B4F7-DD24014932E4}"/>
+                <a16:creationId xmlns:a16="http://schemas.microsoft.com/office/drawing/2014/main" id="{70ED5F6B-CEDB-4652-A7B8-417B0A20932E}"/>
               </a:ext>
             </a:extLst>
           </p:cNvPr>
@@ -30846,7 +30868,7 @@
           <p:cNvPr id="3" name="Text 1">
             <a:extLst xmlns:a="http://schemas.openxmlformats.org/drawingml/2006/main">
               <a:ext uri="{FF2B5EF4-FFF2-40B4-BE49-F238E27FC236}">
-                <a16:creationId xmlns:a16="http://schemas.microsoft.com/office/drawing/2014/main" id="{FE3A6A64-DA5F-4679-8C10-CD91861998C7}"/>
+                <a16:creationId xmlns:a16="http://schemas.microsoft.com/office/drawing/2014/main" id="{D32E7537-29B5-400D-AF8C-7A1664E3CC80}"/>
               </a:ext>
             </a:extLst>
           </p:cNvPr>
@@ -30891,7 +30913,7 @@
           <p:cNvPr id="4" name="Text 2">
             <a:extLst xmlns:a="http://schemas.openxmlformats.org/drawingml/2006/main">
               <a:ext uri="{FF2B5EF4-FFF2-40B4-BE49-F238E27FC236}">
-                <a16:creationId xmlns:a16="http://schemas.microsoft.com/office/drawing/2014/main" id="{6B22A45B-DE6E-49A2-A014-67E8FE2312AC}"/>
+                <a16:creationId xmlns:a16="http://schemas.microsoft.com/office/drawing/2014/main" id="{C6A5A488-3A02-4BA9-A998-24632BFC5B4D}"/>
               </a:ext>
             </a:extLst>
           </p:cNvPr>
@@ -30936,7 +30958,7 @@
           <p:cNvPr id="5" name="Text 3">
             <a:extLst xmlns:a="http://schemas.openxmlformats.org/drawingml/2006/main">
               <a:ext uri="{FF2B5EF4-FFF2-40B4-BE49-F238E27FC236}">
-                <a16:creationId xmlns:a16="http://schemas.microsoft.com/office/drawing/2014/main" id="{C088B000-38C4-408D-88CF-D0075A120B97}"/>
+                <a16:creationId xmlns:a16="http://schemas.microsoft.com/office/drawing/2014/main" id="{8150CFCA-65BA-4DD4-B17A-F93F42975E51}"/>
               </a:ext>
             </a:extLst>
           </p:cNvPr>
@@ -33889,7 +33911,7 @@
           <p:cNvPr id="7" name="Text 4">
             <a:extLst xmlns:a="http://schemas.openxmlformats.org/drawingml/2006/main">
               <a:ext uri="{FF2B5EF4-FFF2-40B4-BE49-F238E27FC236}">
-                <a16:creationId xmlns:a16="http://schemas.microsoft.com/office/drawing/2014/main" id="{EDDF13C5-BA5E-45E0-83C0-C4007F49FA6C}"/>
+                <a16:creationId xmlns:a16="http://schemas.microsoft.com/office/drawing/2014/main" id="{604CFAFF-7A54-485C-B5A7-A98CBC4FA51D}"/>
               </a:ext>
             </a:extLst>
           </p:cNvPr>
@@ -33934,7 +33956,7 @@
           <p:cNvPr id="8" name="Shape 5">
             <a:extLst xmlns:a="http://schemas.openxmlformats.org/drawingml/2006/main">
               <a:ext uri="{FF2B5EF4-FFF2-40B4-BE49-F238E27FC236}">
-                <a16:creationId xmlns:a16="http://schemas.microsoft.com/office/drawing/2014/main" id="{2EE21761-3870-4E81-9CD2-602455424147}"/>
+                <a16:creationId xmlns:a16="http://schemas.microsoft.com/office/drawing/2014/main" id="{E06B56E0-45E9-4F3B-9B7E-B24A84AD79A0}"/>
               </a:ext>
             </a:extLst>
           </p:cNvPr>
@@ -33974,7 +33996,7 @@
           <p:cNvPr id="9" name="Text 6">
             <a:extLst xmlns:a="http://schemas.openxmlformats.org/drawingml/2006/main">
               <a:ext uri="{FF2B5EF4-FFF2-40B4-BE49-F238E27FC236}">
-                <a16:creationId xmlns:a16="http://schemas.microsoft.com/office/drawing/2014/main" id="{544DF6D9-5767-4776-9D02-97CBDAFECCB4}"/>
+                <a16:creationId xmlns:a16="http://schemas.microsoft.com/office/drawing/2014/main" id="{42B4C456-35BA-4EF9-AD79-2E4C193BEA45}"/>
               </a:ext>
             </a:extLst>
           </p:cNvPr>
@@ -34019,7 +34041,7 @@
           <p:cNvPr id="10" name="Text 7">
             <a:extLst xmlns:a="http://schemas.openxmlformats.org/drawingml/2006/main">
               <a:ext uri="{FF2B5EF4-FFF2-40B4-BE49-F238E27FC236}">
-                <a16:creationId xmlns:a16="http://schemas.microsoft.com/office/drawing/2014/main" id="{3858940A-45A5-4E76-B458-5E1CD02234DE}"/>
+                <a16:creationId xmlns:a16="http://schemas.microsoft.com/office/drawing/2014/main" id="{94ED5959-A3C6-400D-9567-0B53A61FF9EA}"/>
               </a:ext>
             </a:extLst>
           </p:cNvPr>
@@ -34065,7 +34087,7 @@
     </p:spTree>
     <p:extLst>
       <p:ext uri="{BB962C8B-B14F-4D97-AF65-F5344CB8AC3E}">
-        <p14:creationId xmlns:p14="http://schemas.microsoft.com/office/powerpoint/2010/main" val="179620032"/>
+        <p14:creationId xmlns:p14="http://schemas.microsoft.com/office/powerpoint/2010/main" val="1385779936"/>
       </p:ext>
     </p:extLst>
   </p:cSld>
@@ -34096,7 +34118,7 @@
           <p:cNvPr id="2" name="Text 0">
             <a:extLst xmlns:a="http://schemas.openxmlformats.org/drawingml/2006/main">
               <a:ext uri="{FF2B5EF4-FFF2-40B4-BE49-F238E27FC236}">
-                <a16:creationId xmlns:a16="http://schemas.microsoft.com/office/drawing/2014/main" id="{5D08A5F4-0233-45C6-AE04-C6AFDAD40F86}"/>
+                <a16:creationId xmlns:a16="http://schemas.microsoft.com/office/drawing/2014/main" id="{08FA52F8-E6C1-4930-A6D0-A5682D192000}"/>
               </a:ext>
             </a:extLst>
           </p:cNvPr>
@@ -34141,7 +34163,7 @@
           <p:cNvPr id="3" name="Text 1">
             <a:extLst xmlns:a="http://schemas.openxmlformats.org/drawingml/2006/main">
               <a:ext uri="{FF2B5EF4-FFF2-40B4-BE49-F238E27FC236}">
-                <a16:creationId xmlns:a16="http://schemas.microsoft.com/office/drawing/2014/main" id="{72A0DFC9-74E7-46BD-B218-3A32A2E15ADC}"/>
+                <a16:creationId xmlns:a16="http://schemas.microsoft.com/office/drawing/2014/main" id="{C8073621-8F20-40B3-87EF-32CE503CE271}"/>
               </a:ext>
             </a:extLst>
           </p:cNvPr>
@@ -34186,7 +34208,7 @@
           <p:cNvPr id="4" name="Shape 2">
             <a:extLst xmlns:a="http://schemas.openxmlformats.org/drawingml/2006/main">
               <a:ext uri="{FF2B5EF4-FFF2-40B4-BE49-F238E27FC236}">
-                <a16:creationId xmlns:a16="http://schemas.microsoft.com/office/drawing/2014/main" id="{C2313D65-C95B-4FC5-B193-E4FC69E37DB8}"/>
+                <a16:creationId xmlns:a16="http://schemas.microsoft.com/office/drawing/2014/main" id="{AF09B380-444A-4AF4-9C29-903BF81D2D99}"/>
               </a:ext>
             </a:extLst>
           </p:cNvPr>
@@ -34226,7 +34248,7 @@
           <p:cNvPr id="5" name="Shape 3">
             <a:extLst xmlns:a="http://schemas.openxmlformats.org/drawingml/2006/main">
               <a:ext uri="{FF2B5EF4-FFF2-40B4-BE49-F238E27FC236}">
-                <a16:creationId xmlns:a16="http://schemas.microsoft.com/office/drawing/2014/main" id="{2F5FD107-1396-4A39-B19C-431DE962CE89}"/>
+                <a16:creationId xmlns:a16="http://schemas.microsoft.com/office/drawing/2014/main" id="{F2C981EF-A57C-4AFF-9911-F0F26CF87C3E}"/>
               </a:ext>
             </a:extLst>
           </p:cNvPr>
@@ -34266,7 +34288,7 @@
           <p:cNvPr id="6" name="Text 4">
             <a:extLst xmlns:a="http://schemas.openxmlformats.org/drawingml/2006/main">
               <a:ext uri="{FF2B5EF4-FFF2-40B4-BE49-F238E27FC236}">
-                <a16:creationId xmlns:a16="http://schemas.microsoft.com/office/drawing/2014/main" id="{0DC73319-F62D-476D-84B5-4D54D2395037}"/>
+                <a16:creationId xmlns:a16="http://schemas.microsoft.com/office/drawing/2014/main" id="{52620C51-154A-4E2D-A0E5-AEC063C47F55}"/>
               </a:ext>
             </a:extLst>
           </p:cNvPr>
@@ -34311,7 +34333,7 @@
           <p:cNvPr id="7" name="Text 5">
             <a:extLst xmlns:a="http://schemas.openxmlformats.org/drawingml/2006/main">
               <a:ext uri="{FF2B5EF4-FFF2-40B4-BE49-F238E27FC236}">
-                <a16:creationId xmlns:a16="http://schemas.microsoft.com/office/drawing/2014/main" id="{D714EEFA-F7B5-429E-9D43-6ED391B453E9}"/>
+                <a16:creationId xmlns:a16="http://schemas.microsoft.com/office/drawing/2014/main" id="{AD6EEFC9-F908-43C4-AC21-587F3D898C88}"/>
               </a:ext>
             </a:extLst>
           </p:cNvPr>
@@ -34356,7 +34378,7 @@
           <p:cNvPr id="8" name="Shape 6">
             <a:extLst xmlns:a="http://schemas.openxmlformats.org/drawingml/2006/main">
               <a:ext uri="{FF2B5EF4-FFF2-40B4-BE49-F238E27FC236}">
-                <a16:creationId xmlns:a16="http://schemas.microsoft.com/office/drawing/2014/main" id="{11352775-A67E-4A97-B827-F89DEFAD575D}"/>
+                <a16:creationId xmlns:a16="http://schemas.microsoft.com/office/drawing/2014/main" id="{E746A367-AD33-41CF-9C1A-6EF94BEC08F7}"/>
               </a:ext>
             </a:extLst>
           </p:cNvPr>
@@ -34394,7 +34416,7 @@
           <p:cNvPr id="9" name="Text 7">
             <a:extLst xmlns:a="http://schemas.openxmlformats.org/drawingml/2006/main">
               <a:ext uri="{FF2B5EF4-FFF2-40B4-BE49-F238E27FC236}">
-                <a16:creationId xmlns:a16="http://schemas.microsoft.com/office/drawing/2014/main" id="{E1E19219-1267-40E4-92FE-1D70F2D2A2E3}"/>
+                <a16:creationId xmlns:a16="http://schemas.microsoft.com/office/drawing/2014/main" id="{64C1032D-81F6-4609-9A09-E9ABF53F2730}"/>
               </a:ext>
             </a:extLst>
           </p:cNvPr>
@@ -34439,7 +34461,7 @@
           <p:cNvPr id="10" name="Text 8">
             <a:extLst xmlns:a="http://schemas.openxmlformats.org/drawingml/2006/main">
               <a:ext uri="{FF2B5EF4-FFF2-40B4-BE49-F238E27FC236}">
-                <a16:creationId xmlns:a16="http://schemas.microsoft.com/office/drawing/2014/main" id="{FD4ABD62-865B-4A76-ADDE-B5D74C0375F9}"/>
+                <a16:creationId xmlns:a16="http://schemas.microsoft.com/office/drawing/2014/main" id="{B51FD4A9-0931-47F2-B68A-21DF7B03F2B3}"/>
               </a:ext>
             </a:extLst>
           </p:cNvPr>
@@ -34487,7 +34509,7 @@
           <p:cNvPr id="11" name="Text 9">
             <a:extLst xmlns:a="http://schemas.openxmlformats.org/drawingml/2006/main">
               <a:ext uri="{FF2B5EF4-FFF2-40B4-BE49-F238E27FC236}">
-                <a16:creationId xmlns:a16="http://schemas.microsoft.com/office/drawing/2014/main" id="{3BDC27FF-A142-45EB-B532-2DD5ED6FC4CF}"/>
+                <a16:creationId xmlns:a16="http://schemas.microsoft.com/office/drawing/2014/main" id="{F84196EE-F79C-44AD-8260-7DCAC4C2233D}"/>
               </a:ext>
             </a:extLst>
           </p:cNvPr>
@@ -34535,7 +34557,7 @@
           <p:cNvPr id="12" name="Shape 10">
             <a:extLst xmlns:a="http://schemas.openxmlformats.org/drawingml/2006/main">
               <a:ext uri="{FF2B5EF4-FFF2-40B4-BE49-F238E27FC236}">
-                <a16:creationId xmlns:a16="http://schemas.microsoft.com/office/drawing/2014/main" id="{35221CE8-4BAB-4FFA-9D3D-B3233CDA0831}"/>
+                <a16:creationId xmlns:a16="http://schemas.microsoft.com/office/drawing/2014/main" id="{14F3F64E-E139-478A-9457-B1EBDDBE1272}"/>
               </a:ext>
             </a:extLst>
           </p:cNvPr>
@@ -34573,7 +34595,7 @@
           <p:cNvPr id="13" name="Text 11">
             <a:extLst xmlns:a="http://schemas.openxmlformats.org/drawingml/2006/main">
               <a:ext uri="{FF2B5EF4-FFF2-40B4-BE49-F238E27FC236}">
-                <a16:creationId xmlns:a16="http://schemas.microsoft.com/office/drawing/2014/main" id="{A8B2417E-AD81-461D-986F-8AECC09F6EF2}"/>
+                <a16:creationId xmlns:a16="http://schemas.microsoft.com/office/drawing/2014/main" id="{98150271-1C19-4541-A46B-153698329E39}"/>
               </a:ext>
             </a:extLst>
           </p:cNvPr>
@@ -34618,7 +34640,7 @@
           <p:cNvPr id="14" name="Text 12">
             <a:extLst xmlns:a="http://schemas.openxmlformats.org/drawingml/2006/main">
               <a:ext uri="{FF2B5EF4-FFF2-40B4-BE49-F238E27FC236}">
-                <a16:creationId xmlns:a16="http://schemas.microsoft.com/office/drawing/2014/main" id="{68B596C9-0DE5-4D13-BA58-4378063B8EBF}"/>
+                <a16:creationId xmlns:a16="http://schemas.microsoft.com/office/drawing/2014/main" id="{13CDFF49-558D-4E11-9530-9465764310DF}"/>
               </a:ext>
             </a:extLst>
           </p:cNvPr>
@@ -34666,7 +34688,7 @@
           <p:cNvPr id="15" name="Text 13">
             <a:extLst xmlns:a="http://schemas.openxmlformats.org/drawingml/2006/main">
               <a:ext uri="{FF2B5EF4-FFF2-40B4-BE49-F238E27FC236}">
-                <a16:creationId xmlns:a16="http://schemas.microsoft.com/office/drawing/2014/main" id="{F806987F-740A-4BB5-B995-2FD045A48409}"/>
+                <a16:creationId xmlns:a16="http://schemas.microsoft.com/office/drawing/2014/main" id="{32F592D0-3AFE-4F19-BEFA-60032A5E17E9}"/>
               </a:ext>
             </a:extLst>
           </p:cNvPr>
@@ -34714,7 +34736,7 @@
           <p:cNvPr id="16" name="Shape 14">
             <a:extLst xmlns:a="http://schemas.openxmlformats.org/drawingml/2006/main">
               <a:ext uri="{FF2B5EF4-FFF2-40B4-BE49-F238E27FC236}">
-                <a16:creationId xmlns:a16="http://schemas.microsoft.com/office/drawing/2014/main" id="{845DFFB3-0A4C-410C-B303-131874FE103F}"/>
+                <a16:creationId xmlns:a16="http://schemas.microsoft.com/office/drawing/2014/main" id="{6658BC3C-8FA2-46B7-A7C8-866EEEA3D29A}"/>
               </a:ext>
             </a:extLst>
           </p:cNvPr>
@@ -34752,7 +34774,7 @@
           <p:cNvPr id="17" name="Text 15">
             <a:extLst xmlns:a="http://schemas.openxmlformats.org/drawingml/2006/main">
               <a:ext uri="{FF2B5EF4-FFF2-40B4-BE49-F238E27FC236}">
-                <a16:creationId xmlns:a16="http://schemas.microsoft.com/office/drawing/2014/main" id="{5443B23B-AF5F-458D-940F-78701515534C}"/>
+                <a16:creationId xmlns:a16="http://schemas.microsoft.com/office/drawing/2014/main" id="{F77D6704-F656-4A21-B582-D03CDF0A87D5}"/>
               </a:ext>
             </a:extLst>
           </p:cNvPr>
@@ -34797,7 +34819,7 @@
           <p:cNvPr id="18" name="Text 16">
             <a:extLst xmlns:a="http://schemas.openxmlformats.org/drawingml/2006/main">
               <a:ext uri="{FF2B5EF4-FFF2-40B4-BE49-F238E27FC236}">
-                <a16:creationId xmlns:a16="http://schemas.microsoft.com/office/drawing/2014/main" id="{ED3049A6-9035-4FC7-B6BE-704C9DF45686}"/>
+                <a16:creationId xmlns:a16="http://schemas.microsoft.com/office/drawing/2014/main" id="{DB53912F-4D82-42AB-9345-4159699F1521}"/>
               </a:ext>
             </a:extLst>
           </p:cNvPr>
@@ -34845,7 +34867,7 @@
           <p:cNvPr id="19" name="Text 17">
             <a:extLst xmlns:a="http://schemas.openxmlformats.org/drawingml/2006/main">
               <a:ext uri="{FF2B5EF4-FFF2-40B4-BE49-F238E27FC236}">
-                <a16:creationId xmlns:a16="http://schemas.microsoft.com/office/drawing/2014/main" id="{C917F34B-C7B9-44BC-A1A1-6FBD94979E96}"/>
+                <a16:creationId xmlns:a16="http://schemas.microsoft.com/office/drawing/2014/main" id="{61EF92B0-E670-45AD-8B14-00B6DC1FE784}"/>
               </a:ext>
             </a:extLst>
           </p:cNvPr>
@@ -34893,7 +34915,7 @@
           <p:cNvPr id="20" name="Shape 18">
             <a:extLst xmlns:a="http://schemas.openxmlformats.org/drawingml/2006/main">
               <a:ext uri="{FF2B5EF4-FFF2-40B4-BE49-F238E27FC236}">
-                <a16:creationId xmlns:a16="http://schemas.microsoft.com/office/drawing/2014/main" id="{868BE950-B8AD-4214-B3E1-793E98FFD35D}"/>
+                <a16:creationId xmlns:a16="http://schemas.microsoft.com/office/drawing/2014/main" id="{76567E4F-C0A5-4220-BA27-DEDC9CFBFB4D}"/>
               </a:ext>
             </a:extLst>
           </p:cNvPr>
@@ -34931,7 +34953,7 @@
           <p:cNvPr id="21" name="Text 19">
             <a:extLst xmlns:a="http://schemas.openxmlformats.org/drawingml/2006/main">
               <a:ext uri="{FF2B5EF4-FFF2-40B4-BE49-F238E27FC236}">
-                <a16:creationId xmlns:a16="http://schemas.microsoft.com/office/drawing/2014/main" id="{945A0477-4E75-484A-8660-37709C644502}"/>
+                <a16:creationId xmlns:a16="http://schemas.microsoft.com/office/drawing/2014/main" id="{F5120850-5C62-41F1-9010-E0D546992524}"/>
               </a:ext>
             </a:extLst>
           </p:cNvPr>
@@ -34976,7 +34998,7 @@
           <p:cNvPr id="22" name="Text 20">
             <a:extLst xmlns:a="http://schemas.openxmlformats.org/drawingml/2006/main">
               <a:ext uri="{FF2B5EF4-FFF2-40B4-BE49-F238E27FC236}">
-                <a16:creationId xmlns:a16="http://schemas.microsoft.com/office/drawing/2014/main" id="{C578487D-8A47-4D9F-B07F-AD87A4840493}"/>
+                <a16:creationId xmlns:a16="http://schemas.microsoft.com/office/drawing/2014/main" id="{885E2474-1246-484F-9406-7AC4A13D458D}"/>
               </a:ext>
             </a:extLst>
           </p:cNvPr>
@@ -35024,7 +35046,7 @@
           <p:cNvPr id="23" name="Text 21">
             <a:extLst xmlns:a="http://schemas.openxmlformats.org/drawingml/2006/main">
               <a:ext uri="{FF2B5EF4-FFF2-40B4-BE49-F238E27FC236}">
-                <a16:creationId xmlns:a16="http://schemas.microsoft.com/office/drawing/2014/main" id="{0B8FA3A9-6183-4D21-A7D3-F325DA4CEDDE}"/>
+                <a16:creationId xmlns:a16="http://schemas.microsoft.com/office/drawing/2014/main" id="{5624CBBD-ADE2-44CC-A8E1-1C5F30416409}"/>
               </a:ext>
             </a:extLst>
           </p:cNvPr>
@@ -35072,7 +35094,7 @@
           <p:cNvPr id="24" name="Shape 22">
             <a:extLst xmlns:a="http://schemas.openxmlformats.org/drawingml/2006/main">
               <a:ext uri="{FF2B5EF4-FFF2-40B4-BE49-F238E27FC236}">
-                <a16:creationId xmlns:a16="http://schemas.microsoft.com/office/drawing/2014/main" id="{82C21D68-30B4-4977-B6DB-07B6D6B5FB25}"/>
+                <a16:creationId xmlns:a16="http://schemas.microsoft.com/office/drawing/2014/main" id="{3F6E9BBE-72CA-4D67-AC80-55307F2563A3}"/>
               </a:ext>
             </a:extLst>
           </p:cNvPr>
@@ -35108,7 +35130,7 @@
           <p:cNvPr id="25" name="Text 23">
             <a:extLst xmlns:a="http://schemas.openxmlformats.org/drawingml/2006/main">
               <a:ext uri="{FF2B5EF4-FFF2-40B4-BE49-F238E27FC236}">
-                <a16:creationId xmlns:a16="http://schemas.microsoft.com/office/drawing/2014/main" id="{A901C9A5-3FDE-412B-A337-7615CE5749A2}"/>
+                <a16:creationId xmlns:a16="http://schemas.microsoft.com/office/drawing/2014/main" id="{460CCD72-264A-4DD1-950E-51A83B43A043}"/>
               </a:ext>
             </a:extLst>
           </p:cNvPr>
@@ -35151,7 +35173,7 @@
     </p:spTree>
     <p:extLst>
       <p:ext uri="{BB962C8B-B14F-4D97-AF65-F5344CB8AC3E}">
-        <p14:creationId xmlns:p14="http://schemas.microsoft.com/office/powerpoint/2010/main" val="992884867"/>
+        <p14:creationId xmlns:p14="http://schemas.microsoft.com/office/powerpoint/2010/main" val="812282528"/>
       </p:ext>
     </p:extLst>
   </p:cSld>
@@ -35182,7 +35204,7 @@
           <p:cNvPr id="2" name="Text 0">
             <a:extLst xmlns:a="http://schemas.openxmlformats.org/drawingml/2006/main">
               <a:ext uri="{FF2B5EF4-FFF2-40B4-BE49-F238E27FC236}">
-                <a16:creationId xmlns:a16="http://schemas.microsoft.com/office/drawing/2014/main" id="{580A623C-A907-4DA9-B3FA-5561CF6E9A8B}"/>
+                <a16:creationId xmlns:a16="http://schemas.microsoft.com/office/drawing/2014/main" id="{C90D3387-5C88-4F0A-9AE9-42AC648483A9}"/>
               </a:ext>
             </a:extLst>
           </p:cNvPr>
@@ -35227,7 +35249,7 @@
           <p:cNvPr id="3" name="Text 1">
             <a:extLst xmlns:a="http://schemas.openxmlformats.org/drawingml/2006/main">
               <a:ext uri="{FF2B5EF4-FFF2-40B4-BE49-F238E27FC236}">
-                <a16:creationId xmlns:a16="http://schemas.microsoft.com/office/drawing/2014/main" id="{31873201-FA00-475E-B8A6-5467A8C16B78}"/>
+                <a16:creationId xmlns:a16="http://schemas.microsoft.com/office/drawing/2014/main" id="{B11FF81F-86BF-4C92-AED4-D79CF25B4ABA}"/>
               </a:ext>
             </a:extLst>
           </p:cNvPr>
@@ -35272,7 +35294,7 @@
           <p:cNvPr id="4" name="Text 2">
             <a:extLst xmlns:a="http://schemas.openxmlformats.org/drawingml/2006/main">
               <a:ext uri="{FF2B5EF4-FFF2-40B4-BE49-F238E27FC236}">
-                <a16:creationId xmlns:a16="http://schemas.microsoft.com/office/drawing/2014/main" id="{8F3D6EE9-E06A-4BFC-833E-C17379E8CD6B}"/>
+                <a16:creationId xmlns:a16="http://schemas.microsoft.com/office/drawing/2014/main" id="{55AD03D9-449D-4B6B-ADB2-4676D6141E5D}"/>
               </a:ext>
             </a:extLst>
           </p:cNvPr>
@@ -35317,7 +35339,7 @@
           <p:cNvPr id="5" name="Text 3">
             <a:extLst xmlns:a="http://schemas.openxmlformats.org/drawingml/2006/main">
               <a:ext uri="{FF2B5EF4-FFF2-40B4-BE49-F238E27FC236}">
-                <a16:creationId xmlns:a16="http://schemas.microsoft.com/office/drawing/2014/main" id="{4C419C6E-72D2-400C-9269-3F033E473EE9}"/>
+                <a16:creationId xmlns:a16="http://schemas.microsoft.com/office/drawing/2014/main" id="{2E3683E5-CD72-41E7-957B-12FD9E908FEB}"/>
               </a:ext>
             </a:extLst>
           </p:cNvPr>
@@ -38214,7 +38236,7 @@
           <p:cNvPr id="7" name="Shape 4">
             <a:extLst xmlns:a="http://schemas.openxmlformats.org/drawingml/2006/main">
               <a:ext uri="{FF2B5EF4-FFF2-40B4-BE49-F238E27FC236}">
-                <a16:creationId xmlns:a16="http://schemas.microsoft.com/office/drawing/2014/main" id="{F004D95F-7426-46D9-A46E-0C3C3D8B5528}"/>
+                <a16:creationId xmlns:a16="http://schemas.microsoft.com/office/drawing/2014/main" id="{E4D0F16E-15E3-4A4F-8CE0-62703D921DC5}"/>
               </a:ext>
             </a:extLst>
           </p:cNvPr>
@@ -38261,7 +38283,7 @@
           <p:cNvPr id="8" name="Text 5">
             <a:extLst xmlns:a="http://schemas.openxmlformats.org/drawingml/2006/main">
               <a:ext uri="{FF2B5EF4-FFF2-40B4-BE49-F238E27FC236}">
-                <a16:creationId xmlns:a16="http://schemas.microsoft.com/office/drawing/2014/main" id="{8E138E78-0FB2-4EBB-B0BE-0D387C3F0BA3}"/>
+                <a16:creationId xmlns:a16="http://schemas.microsoft.com/office/drawing/2014/main" id="{A0A1FBD3-65E6-4F0C-9439-37668B194570}"/>
               </a:ext>
             </a:extLst>
           </p:cNvPr>
@@ -38306,7 +38328,7 @@
           <p:cNvPr id="9" name="Text 6">
             <a:extLst xmlns:a="http://schemas.openxmlformats.org/drawingml/2006/main">
               <a:ext uri="{FF2B5EF4-FFF2-40B4-BE49-F238E27FC236}">
-                <a16:creationId xmlns:a16="http://schemas.microsoft.com/office/drawing/2014/main" id="{23A4AD74-263A-4D37-88FE-F4DB75D90DBD}"/>
+                <a16:creationId xmlns:a16="http://schemas.microsoft.com/office/drawing/2014/main" id="{85529636-9EB0-445F-A345-9CF432862E99}"/>
               </a:ext>
             </a:extLst>
           </p:cNvPr>
@@ -38354,7 +38376,7 @@
           <p:cNvPr id="10" name="Shape 7">
             <a:extLst xmlns:a="http://schemas.openxmlformats.org/drawingml/2006/main">
               <a:ext uri="{FF2B5EF4-FFF2-40B4-BE49-F238E27FC236}">
-                <a16:creationId xmlns:a16="http://schemas.microsoft.com/office/drawing/2014/main" id="{DE7A1838-DAEC-4434-A792-3A49E7113330}"/>
+                <a16:creationId xmlns:a16="http://schemas.microsoft.com/office/drawing/2014/main" id="{47BE70A2-DD7B-4AA1-B2ED-23281900A3B2}"/>
               </a:ext>
             </a:extLst>
           </p:cNvPr>
@@ -38401,7 +38423,7 @@
           <p:cNvPr id="11" name="Text 8">
             <a:extLst xmlns:a="http://schemas.openxmlformats.org/drawingml/2006/main">
               <a:ext uri="{FF2B5EF4-FFF2-40B4-BE49-F238E27FC236}">
-                <a16:creationId xmlns:a16="http://schemas.microsoft.com/office/drawing/2014/main" id="{1C9A5F33-B7C1-4351-AE39-BE6EFC8A9201}"/>
+                <a16:creationId xmlns:a16="http://schemas.microsoft.com/office/drawing/2014/main" id="{D394FBCC-5884-4169-BEFF-2B7E60D6CE58}"/>
               </a:ext>
             </a:extLst>
           </p:cNvPr>
@@ -38446,7 +38468,7 @@
           <p:cNvPr id="12" name="Text 9">
             <a:extLst xmlns:a="http://schemas.openxmlformats.org/drawingml/2006/main">
               <a:ext uri="{FF2B5EF4-FFF2-40B4-BE49-F238E27FC236}">
-                <a16:creationId xmlns:a16="http://schemas.microsoft.com/office/drawing/2014/main" id="{F0999E94-E4C9-4CAF-8A8F-553D3EF7B44C}"/>
+                <a16:creationId xmlns:a16="http://schemas.microsoft.com/office/drawing/2014/main" id="{A7F5E6CA-F614-4F48-8407-91FAB1F7572A}"/>
               </a:ext>
             </a:extLst>
           </p:cNvPr>
@@ -38492,7 +38514,7 @@
     </p:spTree>
     <p:extLst>
       <p:ext uri="{BB962C8B-B14F-4D97-AF65-F5344CB8AC3E}">
-        <p14:creationId xmlns:p14="http://schemas.microsoft.com/office/powerpoint/2010/main" val="298049349"/>
+        <p14:creationId xmlns:p14="http://schemas.microsoft.com/office/powerpoint/2010/main" val="1491528499"/>
       </p:ext>
     </p:extLst>
   </p:cSld>
@@ -38523,7 +38545,7 @@
           <p:cNvPr id="2" name="Text 0">
             <a:extLst xmlns:a="http://schemas.openxmlformats.org/drawingml/2006/main">
               <a:ext uri="{FF2B5EF4-FFF2-40B4-BE49-F238E27FC236}">
-                <a16:creationId xmlns:a16="http://schemas.microsoft.com/office/drawing/2014/main" id="{A9B06555-6821-4955-8F31-D77E742CAE6F}"/>
+                <a16:creationId xmlns:a16="http://schemas.microsoft.com/office/drawing/2014/main" id="{9C1642AB-9166-446B-AE41-C19AD1BF052A}"/>
               </a:ext>
             </a:extLst>
           </p:cNvPr>
@@ -38568,7 +38590,7 @@
           <p:cNvPr id="3" name="Text 1">
             <a:extLst xmlns:a="http://schemas.openxmlformats.org/drawingml/2006/main">
               <a:ext uri="{FF2B5EF4-FFF2-40B4-BE49-F238E27FC236}">
-                <a16:creationId xmlns:a16="http://schemas.microsoft.com/office/drawing/2014/main" id="{58BAB8DD-8ED3-4DCC-AFD7-F8771EE47562}"/>
+                <a16:creationId xmlns:a16="http://schemas.microsoft.com/office/drawing/2014/main" id="{8BA7E545-8AB7-4040-8C1F-A1445073F38A}"/>
               </a:ext>
             </a:extLst>
           </p:cNvPr>
@@ -38613,7 +38635,7 @@
           <p:cNvPr id="4" name="Text 2">
             <a:extLst xmlns:a="http://schemas.openxmlformats.org/drawingml/2006/main">
               <a:ext uri="{FF2B5EF4-FFF2-40B4-BE49-F238E27FC236}">
-                <a16:creationId xmlns:a16="http://schemas.microsoft.com/office/drawing/2014/main" id="{4F12BEB5-FE2B-4763-87B0-E81840861F45}"/>
+                <a16:creationId xmlns:a16="http://schemas.microsoft.com/office/drawing/2014/main" id="{9D47BCB7-363C-49D6-9C77-5A2A10E08703}"/>
               </a:ext>
             </a:extLst>
           </p:cNvPr>
@@ -38658,7 +38680,7 @@
           <p:cNvPr id="5" name="Text 3">
             <a:extLst xmlns:a="http://schemas.openxmlformats.org/drawingml/2006/main">
               <a:ext uri="{FF2B5EF4-FFF2-40B4-BE49-F238E27FC236}">
-                <a16:creationId xmlns:a16="http://schemas.microsoft.com/office/drawing/2014/main" id="{FABE4C15-C0F5-4E35-AD6B-D16B519BF66D}"/>
+                <a16:creationId xmlns:a16="http://schemas.microsoft.com/office/drawing/2014/main" id="{F57DECB7-7597-485A-B14A-927DAFFAB8CF}"/>
               </a:ext>
             </a:extLst>
           </p:cNvPr>
@@ -38703,7 +38725,7 @@
           <p:cNvPr id="6" name="Shape 4">
             <a:extLst xmlns:a="http://schemas.openxmlformats.org/drawingml/2006/main">
               <a:ext uri="{FF2B5EF4-FFF2-40B4-BE49-F238E27FC236}">
-                <a16:creationId xmlns:a16="http://schemas.microsoft.com/office/drawing/2014/main" id="{C511B681-99B3-4691-A07E-71DB570467B4}"/>
+                <a16:creationId xmlns:a16="http://schemas.microsoft.com/office/drawing/2014/main" id="{5CF7C4CB-52C9-41E7-A9DB-98F029F4C550}"/>
               </a:ext>
             </a:extLst>
           </p:cNvPr>
@@ -38750,7 +38772,7 @@
           <p:cNvPr id="7" name="Text 5">
             <a:extLst xmlns:a="http://schemas.openxmlformats.org/drawingml/2006/main">
               <a:ext uri="{FF2B5EF4-FFF2-40B4-BE49-F238E27FC236}">
-                <a16:creationId xmlns:a16="http://schemas.microsoft.com/office/drawing/2014/main" id="{27E9C577-6AA1-4435-B901-73FEB798ECBA}"/>
+                <a16:creationId xmlns:a16="http://schemas.microsoft.com/office/drawing/2014/main" id="{0379D42B-BCD3-4E4F-AA54-DD8FE4A16860}"/>
               </a:ext>
             </a:extLst>
           </p:cNvPr>
@@ -38798,7 +38820,7 @@
           <p:cNvPr id="8" name="Text 6">
             <a:extLst xmlns:a="http://schemas.openxmlformats.org/drawingml/2006/main">
               <a:ext uri="{FF2B5EF4-FFF2-40B4-BE49-F238E27FC236}">
-                <a16:creationId xmlns:a16="http://schemas.microsoft.com/office/drawing/2014/main" id="{52D438EA-C529-425C-9549-AAF0C360400A}"/>
+                <a16:creationId xmlns:a16="http://schemas.microsoft.com/office/drawing/2014/main" id="{EB2077D3-E4FD-467A-82F7-D16B62667581}"/>
               </a:ext>
             </a:extLst>
           </p:cNvPr>
@@ -38843,7 +38865,7 @@
           <p:cNvPr id="9" name="Shape 7">
             <a:extLst xmlns:a="http://schemas.openxmlformats.org/drawingml/2006/main">
               <a:ext uri="{FF2B5EF4-FFF2-40B4-BE49-F238E27FC236}">
-                <a16:creationId xmlns:a16="http://schemas.microsoft.com/office/drawing/2014/main" id="{9712C2D9-4877-4D09-BDD3-662C1FB1B18A}"/>
+                <a16:creationId xmlns:a16="http://schemas.microsoft.com/office/drawing/2014/main" id="{8AF46C28-FBA4-4CA2-B06E-346F0CF06E58}"/>
               </a:ext>
             </a:extLst>
           </p:cNvPr>
@@ -38881,7 +38903,7 @@
           <p:cNvPr id="10" name="Text 8">
             <a:extLst xmlns:a="http://schemas.openxmlformats.org/drawingml/2006/main">
               <a:ext uri="{FF2B5EF4-FFF2-40B4-BE49-F238E27FC236}">
-                <a16:creationId xmlns:a16="http://schemas.microsoft.com/office/drawing/2014/main" id="{DA63DF72-1BFB-4C58-BA7D-C0E71BA584EA}"/>
+                <a16:creationId xmlns:a16="http://schemas.microsoft.com/office/drawing/2014/main" id="{D0DA9EAB-8E1C-48AB-8D51-F87C94B284C0}"/>
               </a:ext>
             </a:extLst>
           </p:cNvPr>
@@ -38926,7 +38948,7 @@
           <p:cNvPr id="11" name="Text 9">
             <a:extLst xmlns:a="http://schemas.openxmlformats.org/drawingml/2006/main">
               <a:ext uri="{FF2B5EF4-FFF2-40B4-BE49-F238E27FC236}">
-                <a16:creationId xmlns:a16="http://schemas.microsoft.com/office/drawing/2014/main" id="{629C9237-F26E-42B9-A6FA-C4370709A031}"/>
+                <a16:creationId xmlns:a16="http://schemas.microsoft.com/office/drawing/2014/main" id="{B30C408B-320E-4E1E-BAD6-2CB64647A5FA}"/>
               </a:ext>
             </a:extLst>
           </p:cNvPr>
@@ -38974,7 +38996,7 @@
           <p:cNvPr id="12" name="Shape 10">
             <a:extLst xmlns:a="http://schemas.openxmlformats.org/drawingml/2006/main">
               <a:ext uri="{FF2B5EF4-FFF2-40B4-BE49-F238E27FC236}">
-                <a16:creationId xmlns:a16="http://schemas.microsoft.com/office/drawing/2014/main" id="{1CB2940A-BDE9-4743-AD5F-0CFCEB41060F}"/>
+                <a16:creationId xmlns:a16="http://schemas.microsoft.com/office/drawing/2014/main" id="{4F512C3A-5A8A-460A-ABF9-E997D256F1A5}"/>
               </a:ext>
             </a:extLst>
           </p:cNvPr>
@@ -39012,7 +39034,7 @@
           <p:cNvPr id="13" name="Text 11">
             <a:extLst xmlns:a="http://schemas.openxmlformats.org/drawingml/2006/main">
               <a:ext uri="{FF2B5EF4-FFF2-40B4-BE49-F238E27FC236}">
-                <a16:creationId xmlns:a16="http://schemas.microsoft.com/office/drawing/2014/main" id="{3B9DA952-C838-4035-B06A-D0CD82C34246}"/>
+                <a16:creationId xmlns:a16="http://schemas.microsoft.com/office/drawing/2014/main" id="{BECE7D13-A4F5-48D4-9457-0CFF32BCB529}"/>
               </a:ext>
             </a:extLst>
           </p:cNvPr>
@@ -39057,7 +39079,7 @@
           <p:cNvPr id="14" name="Text 12">
             <a:extLst xmlns:a="http://schemas.openxmlformats.org/drawingml/2006/main">
               <a:ext uri="{FF2B5EF4-FFF2-40B4-BE49-F238E27FC236}">
-                <a16:creationId xmlns:a16="http://schemas.microsoft.com/office/drawing/2014/main" id="{2D3B8DB7-BD84-4948-A5A0-B0543D1DD1CC}"/>
+                <a16:creationId xmlns:a16="http://schemas.microsoft.com/office/drawing/2014/main" id="{624A88B3-8699-4F50-A984-D4E692D25C76}"/>
               </a:ext>
             </a:extLst>
           </p:cNvPr>
@@ -39105,7 +39127,7 @@
           <p:cNvPr id="15" name="Shape 13">
             <a:extLst xmlns:a="http://schemas.openxmlformats.org/drawingml/2006/main">
               <a:ext uri="{FF2B5EF4-FFF2-40B4-BE49-F238E27FC236}">
-                <a16:creationId xmlns:a16="http://schemas.microsoft.com/office/drawing/2014/main" id="{13A96BC2-4020-4A6B-87C5-102C7C4A4091}"/>
+                <a16:creationId xmlns:a16="http://schemas.microsoft.com/office/drawing/2014/main" id="{AAFB9DB8-D67D-405D-8923-1D43542D05AA}"/>
               </a:ext>
             </a:extLst>
           </p:cNvPr>
@@ -39143,7 +39165,7 @@
           <p:cNvPr id="16" name="Text 14">
             <a:extLst xmlns:a="http://schemas.openxmlformats.org/drawingml/2006/main">
               <a:ext uri="{FF2B5EF4-FFF2-40B4-BE49-F238E27FC236}">
-                <a16:creationId xmlns:a16="http://schemas.microsoft.com/office/drawing/2014/main" id="{A65EE218-B210-4855-A941-8CAC5BE9D1E0}"/>
+                <a16:creationId xmlns:a16="http://schemas.microsoft.com/office/drawing/2014/main" id="{26278B5F-CD53-4DCA-B555-8B47DD164D9E}"/>
               </a:ext>
             </a:extLst>
           </p:cNvPr>
@@ -39188,7 +39210,7 @@
           <p:cNvPr id="17" name="Text 15">
             <a:extLst xmlns:a="http://schemas.openxmlformats.org/drawingml/2006/main">
               <a:ext uri="{FF2B5EF4-FFF2-40B4-BE49-F238E27FC236}">
-                <a16:creationId xmlns:a16="http://schemas.microsoft.com/office/drawing/2014/main" id="{D8DC7015-9A93-4656-99E8-C5AAF5FEA269}"/>
+                <a16:creationId xmlns:a16="http://schemas.microsoft.com/office/drawing/2014/main" id="{A84F0183-A6D5-488D-8141-813E140B54BF}"/>
               </a:ext>
             </a:extLst>
           </p:cNvPr>
@@ -39236,7 +39258,7 @@
           <p:cNvPr id="18" name="Shape 16">
             <a:extLst xmlns:a="http://schemas.openxmlformats.org/drawingml/2006/main">
               <a:ext uri="{FF2B5EF4-FFF2-40B4-BE49-F238E27FC236}">
-                <a16:creationId xmlns:a16="http://schemas.microsoft.com/office/drawing/2014/main" id="{6A3C5F6C-4F8E-4A68-AC77-884512EC17E0}"/>
+                <a16:creationId xmlns:a16="http://schemas.microsoft.com/office/drawing/2014/main" id="{6BC1213D-DA42-4FA5-8CE2-DFF282E79482}"/>
               </a:ext>
             </a:extLst>
           </p:cNvPr>
@@ -39274,7 +39296,7 @@
           <p:cNvPr id="19" name="Text 17">
             <a:extLst xmlns:a="http://schemas.openxmlformats.org/drawingml/2006/main">
               <a:ext uri="{FF2B5EF4-FFF2-40B4-BE49-F238E27FC236}">
-                <a16:creationId xmlns:a16="http://schemas.microsoft.com/office/drawing/2014/main" id="{6032280C-731D-480B-B827-8BD0B647DE62}"/>
+                <a16:creationId xmlns:a16="http://schemas.microsoft.com/office/drawing/2014/main" id="{72F1841D-A3AF-477A-B7EF-ED8F0680A943}"/>
               </a:ext>
             </a:extLst>
           </p:cNvPr>
@@ -39319,7 +39341,7 @@
           <p:cNvPr id="20" name="Text 18">
             <a:extLst xmlns:a="http://schemas.openxmlformats.org/drawingml/2006/main">
               <a:ext uri="{FF2B5EF4-FFF2-40B4-BE49-F238E27FC236}">
-                <a16:creationId xmlns:a16="http://schemas.microsoft.com/office/drawing/2014/main" id="{4D779559-F4D2-4D0C-A4AE-E4D1D6D3F69F}"/>
+                <a16:creationId xmlns:a16="http://schemas.microsoft.com/office/drawing/2014/main" id="{C027E8B7-26A3-46D3-8B7D-4D4DDC8D01A0}"/>
               </a:ext>
             </a:extLst>
           </p:cNvPr>
@@ -39367,7 +39389,7 @@
           <p:cNvPr id="21" name="Shape 19">
             <a:extLst xmlns:a="http://schemas.openxmlformats.org/drawingml/2006/main">
               <a:ext uri="{FF2B5EF4-FFF2-40B4-BE49-F238E27FC236}">
-                <a16:creationId xmlns:a16="http://schemas.microsoft.com/office/drawing/2014/main" id="{31665DA9-9434-4F56-94DD-D2867CB8C8E8}"/>
+                <a16:creationId xmlns:a16="http://schemas.microsoft.com/office/drawing/2014/main" id="{78C6547A-90EE-4F58-B0C7-D172FFE3B1CF}"/>
               </a:ext>
             </a:extLst>
           </p:cNvPr>
@@ -39405,7 +39427,7 @@
           <p:cNvPr id="22" name="Text 20">
             <a:extLst xmlns:a="http://schemas.openxmlformats.org/drawingml/2006/main">
               <a:ext uri="{FF2B5EF4-FFF2-40B4-BE49-F238E27FC236}">
-                <a16:creationId xmlns:a16="http://schemas.microsoft.com/office/drawing/2014/main" id="{F0BBCC0F-4EDC-4554-8784-C2B156699D11}"/>
+                <a16:creationId xmlns:a16="http://schemas.microsoft.com/office/drawing/2014/main" id="{AC86A419-9AEA-46CE-A324-85CB6BA06D8E}"/>
               </a:ext>
             </a:extLst>
           </p:cNvPr>
@@ -39450,7 +39472,7 @@
           <p:cNvPr id="23" name="Text 21">
             <a:extLst xmlns:a="http://schemas.openxmlformats.org/drawingml/2006/main">
               <a:ext uri="{FF2B5EF4-FFF2-40B4-BE49-F238E27FC236}">
-                <a16:creationId xmlns:a16="http://schemas.microsoft.com/office/drawing/2014/main" id="{74E41EAF-315D-4667-95F9-A1EE57209C62}"/>
+                <a16:creationId xmlns:a16="http://schemas.microsoft.com/office/drawing/2014/main" id="{02C24414-05A1-4F48-A26C-A6B33E8219FA}"/>
               </a:ext>
             </a:extLst>
           </p:cNvPr>
@@ -39498,7 +39520,7 @@
           <p:cNvPr id="24" name="Text 22">
             <a:extLst xmlns:a="http://schemas.openxmlformats.org/drawingml/2006/main">
               <a:ext uri="{FF2B5EF4-FFF2-40B4-BE49-F238E27FC236}">
-                <a16:creationId xmlns:a16="http://schemas.microsoft.com/office/drawing/2014/main" id="{7FC822F7-0D42-4622-8854-8CCA28099D05}"/>
+                <a16:creationId xmlns:a16="http://schemas.microsoft.com/office/drawing/2014/main" id="{C53B652C-B266-4FB5-B153-B5E9E0B0519D}"/>
               </a:ext>
             </a:extLst>
           </p:cNvPr>
@@ -39543,7 +39565,7 @@
           <p:cNvPr id="25" name="Shape 23">
             <a:extLst xmlns:a="http://schemas.openxmlformats.org/drawingml/2006/main">
               <a:ext uri="{FF2B5EF4-FFF2-40B4-BE49-F238E27FC236}">
-                <a16:creationId xmlns:a16="http://schemas.microsoft.com/office/drawing/2014/main" id="{C54E368E-6EF7-4013-81DE-DFA0415BF4C9}"/>
+                <a16:creationId xmlns:a16="http://schemas.microsoft.com/office/drawing/2014/main" id="{E912B470-6261-44C4-964E-B1DCE0D23C18}"/>
               </a:ext>
             </a:extLst>
           </p:cNvPr>
@@ -39590,7 +39612,7 @@
           <p:cNvPr id="26" name="Text 24">
             <a:extLst xmlns:a="http://schemas.openxmlformats.org/drawingml/2006/main">
               <a:ext uri="{FF2B5EF4-FFF2-40B4-BE49-F238E27FC236}">
-                <a16:creationId xmlns:a16="http://schemas.microsoft.com/office/drawing/2014/main" id="{9276E226-D5AA-4574-8D1E-2E7ECF78ED16}"/>
+                <a16:creationId xmlns:a16="http://schemas.microsoft.com/office/drawing/2014/main" id="{257EF6C0-022E-41E7-920C-779BD394EF20}"/>
               </a:ext>
             </a:extLst>
           </p:cNvPr>
@@ -39729,7 +39751,7 @@
           <p:cNvPr id="27" name="Shape 25">
             <a:extLst xmlns:a="http://schemas.openxmlformats.org/drawingml/2006/main">
               <a:ext uri="{FF2B5EF4-FFF2-40B4-BE49-F238E27FC236}">
-                <a16:creationId xmlns:a16="http://schemas.microsoft.com/office/drawing/2014/main" id="{CFD113BC-AF90-44C2-96EB-FEB87DC83834}"/>
+                <a16:creationId xmlns:a16="http://schemas.microsoft.com/office/drawing/2014/main" id="{D19DAD66-8656-48EA-B4C8-441C988E1A6F}"/>
               </a:ext>
             </a:extLst>
           </p:cNvPr>
@@ -39776,7 +39798,7 @@
           <p:cNvPr id="28" name="Text 26">
             <a:extLst xmlns:a="http://schemas.openxmlformats.org/drawingml/2006/main">
               <a:ext uri="{FF2B5EF4-FFF2-40B4-BE49-F238E27FC236}">
-                <a16:creationId xmlns:a16="http://schemas.microsoft.com/office/drawing/2014/main" id="{8ACB4CF8-F507-456D-AE67-FAE71483BA8B}"/>
+                <a16:creationId xmlns:a16="http://schemas.microsoft.com/office/drawing/2014/main" id="{AFAF5FD4-386E-4EE0-AF30-9C38F09D31A0}"/>
               </a:ext>
             </a:extLst>
           </p:cNvPr>
@@ -39821,7 +39843,7 @@
           <p:cNvPr id="29" name="Text 27">
             <a:extLst xmlns:a="http://schemas.openxmlformats.org/drawingml/2006/main">
               <a:ext uri="{FF2B5EF4-FFF2-40B4-BE49-F238E27FC236}">
-                <a16:creationId xmlns:a16="http://schemas.microsoft.com/office/drawing/2014/main" id="{AEA32E05-9BE5-4D83-8831-11772780FB7A}"/>
+                <a16:creationId xmlns:a16="http://schemas.microsoft.com/office/drawing/2014/main" id="{41CDFC62-0EB4-4779-BCA2-9EAC04CB2D55}"/>
               </a:ext>
             </a:extLst>
           </p:cNvPr>
@@ -39867,7 +39889,7 @@
     </p:spTree>
     <p:extLst>
       <p:ext uri="{BB962C8B-B14F-4D97-AF65-F5344CB8AC3E}">
-        <p14:creationId xmlns:p14="http://schemas.microsoft.com/office/powerpoint/2010/main" val="1079950325"/>
+        <p14:creationId xmlns:p14="http://schemas.microsoft.com/office/powerpoint/2010/main" val="691915279"/>
       </p:ext>
     </p:extLst>
   </p:cSld>
@@ -39898,7 +39920,7 @@
           <p:cNvPr id="2" name="Text 0">
             <a:extLst xmlns:a="http://schemas.openxmlformats.org/drawingml/2006/main">
               <a:ext uri="{FF2B5EF4-FFF2-40B4-BE49-F238E27FC236}">
-                <a16:creationId xmlns:a16="http://schemas.microsoft.com/office/drawing/2014/main" id="{A772311B-E8FC-4A4C-BDB1-7BC7BEEE3D55}"/>
+                <a16:creationId xmlns:a16="http://schemas.microsoft.com/office/drawing/2014/main" id="{F5828BB7-3E93-4A1E-9268-6D62C893D963}"/>
               </a:ext>
             </a:extLst>
           </p:cNvPr>
@@ -39943,7 +39965,7 @@
           <p:cNvPr id="3" name="Text 1">
             <a:extLst xmlns:a="http://schemas.openxmlformats.org/drawingml/2006/main">
               <a:ext uri="{FF2B5EF4-FFF2-40B4-BE49-F238E27FC236}">
-                <a16:creationId xmlns:a16="http://schemas.microsoft.com/office/drawing/2014/main" id="{BABF6359-198B-4D62-859F-402841164D28}"/>
+                <a16:creationId xmlns:a16="http://schemas.microsoft.com/office/drawing/2014/main" id="{299E24B3-7740-4872-BCA4-02D4099E99B2}"/>
               </a:ext>
             </a:extLst>
           </p:cNvPr>
@@ -39988,7 +40010,7 @@
           <p:cNvPr id="4" name="Shape 2">
             <a:extLst xmlns:a="http://schemas.openxmlformats.org/drawingml/2006/main">
               <a:ext uri="{FF2B5EF4-FFF2-40B4-BE49-F238E27FC236}">
-                <a16:creationId xmlns:a16="http://schemas.microsoft.com/office/drawing/2014/main" id="{511C65AC-AD18-4B89-ADE2-B44248F4D700}"/>
+                <a16:creationId xmlns:a16="http://schemas.microsoft.com/office/drawing/2014/main" id="{0BB607D2-D3D2-475A-9CBB-4B983EC15CCB}"/>
               </a:ext>
             </a:extLst>
           </p:cNvPr>
@@ -40028,7 +40050,7 @@
           <p:cNvPr id="5" name="Shape 3">
             <a:extLst xmlns:a="http://schemas.openxmlformats.org/drawingml/2006/main">
               <a:ext uri="{FF2B5EF4-FFF2-40B4-BE49-F238E27FC236}">
-                <a16:creationId xmlns:a16="http://schemas.microsoft.com/office/drawing/2014/main" id="{649C7446-AFB1-4077-BDE6-4AA97D97F27E}"/>
+                <a16:creationId xmlns:a16="http://schemas.microsoft.com/office/drawing/2014/main" id="{EA5F3CAF-C5A0-4004-9B42-214F7F96840B}"/>
               </a:ext>
             </a:extLst>
           </p:cNvPr>
@@ -40068,7 +40090,7 @@
           <p:cNvPr id="6" name="Text 4">
             <a:extLst xmlns:a="http://schemas.openxmlformats.org/drawingml/2006/main">
               <a:ext uri="{FF2B5EF4-FFF2-40B4-BE49-F238E27FC236}">
-                <a16:creationId xmlns:a16="http://schemas.microsoft.com/office/drawing/2014/main" id="{6D8C66EB-16BE-4DF4-BAC6-BD0939241218}"/>
+                <a16:creationId xmlns:a16="http://schemas.microsoft.com/office/drawing/2014/main" id="{A9AB1A9D-D1BA-4C18-9596-07085A137C99}"/>
               </a:ext>
             </a:extLst>
           </p:cNvPr>
@@ -40113,7 +40135,7 @@
           <p:cNvPr id="7" name="Text 5">
             <a:extLst xmlns:a="http://schemas.openxmlformats.org/drawingml/2006/main">
               <a:ext uri="{FF2B5EF4-FFF2-40B4-BE49-F238E27FC236}">
-                <a16:creationId xmlns:a16="http://schemas.microsoft.com/office/drawing/2014/main" id="{0555B7AE-A99D-4448-9F3E-F63750A0E402}"/>
+                <a16:creationId xmlns:a16="http://schemas.microsoft.com/office/drawing/2014/main" id="{1E31F77B-CD64-48DB-9979-8AB100DED118}"/>
               </a:ext>
             </a:extLst>
           </p:cNvPr>
@@ -40158,7 +40180,7 @@
           <p:cNvPr id="8" name="Text 6">
             <a:extLst xmlns:a="http://schemas.openxmlformats.org/drawingml/2006/main">
               <a:ext uri="{FF2B5EF4-FFF2-40B4-BE49-F238E27FC236}">
-                <a16:creationId xmlns:a16="http://schemas.microsoft.com/office/drawing/2014/main" id="{C219DACA-89CD-4F0A-B887-BC06532E614B}"/>
+                <a16:creationId xmlns:a16="http://schemas.microsoft.com/office/drawing/2014/main" id="{B4B37EA4-2130-46BA-9032-33C0D6BCA227}"/>
               </a:ext>
             </a:extLst>
           </p:cNvPr>
@@ -40204,7 +40226,7 @@
     </p:spTree>
     <p:extLst>
       <p:ext uri="{BB962C8B-B14F-4D97-AF65-F5344CB8AC3E}">
-        <p14:creationId xmlns:p14="http://schemas.microsoft.com/office/powerpoint/2010/main" val="917614541"/>
+        <p14:creationId xmlns:p14="http://schemas.microsoft.com/office/powerpoint/2010/main" val="1263204724"/>
       </p:ext>
     </p:extLst>
   </p:cSld>
@@ -40235,7 +40257,7 @@
           <p:cNvPr id="2" name="Text 0">
             <a:extLst xmlns:a="http://schemas.openxmlformats.org/drawingml/2006/main">
               <a:ext uri="{FF2B5EF4-FFF2-40B4-BE49-F238E27FC236}">
-                <a16:creationId xmlns:a16="http://schemas.microsoft.com/office/drawing/2014/main" id="{EBDA3A27-5D45-460D-8DC9-C26DADEBE80A}"/>
+                <a16:creationId xmlns:a16="http://schemas.microsoft.com/office/drawing/2014/main" id="{340E672B-A6D2-4EED-BDB4-FEB9A0A555D3}"/>
               </a:ext>
             </a:extLst>
           </p:cNvPr>
@@ -40280,7 +40302,7 @@
           <p:cNvPr id="3" name="Text 1">
             <a:extLst xmlns:a="http://schemas.openxmlformats.org/drawingml/2006/main">
               <a:ext uri="{FF2B5EF4-FFF2-40B4-BE49-F238E27FC236}">
-                <a16:creationId xmlns:a16="http://schemas.microsoft.com/office/drawing/2014/main" id="{F4D46B08-D6A9-4B27-8374-3A59CD5CAEEC}"/>
+                <a16:creationId xmlns:a16="http://schemas.microsoft.com/office/drawing/2014/main" id="{704BAF99-1DC8-42C5-81D7-78F611314F90}"/>
               </a:ext>
             </a:extLst>
           </p:cNvPr>
@@ -40325,7 +40347,7 @@
           <p:cNvPr id="4" name="Text 2">
             <a:extLst xmlns:a="http://schemas.openxmlformats.org/drawingml/2006/main">
               <a:ext uri="{FF2B5EF4-FFF2-40B4-BE49-F238E27FC236}">
-                <a16:creationId xmlns:a16="http://schemas.microsoft.com/office/drawing/2014/main" id="{0141B7CD-2312-41C5-B86E-56765061B503}"/>
+                <a16:creationId xmlns:a16="http://schemas.microsoft.com/office/drawing/2014/main" id="{F0AE32D9-77A3-4A82-85EA-5598A9F3C73A}"/>
               </a:ext>
             </a:extLst>
           </p:cNvPr>
@@ -40370,7 +40392,7 @@
           <p:cNvPr id="5" name="Text 3">
             <a:extLst xmlns:a="http://schemas.openxmlformats.org/drawingml/2006/main">
               <a:ext uri="{FF2B5EF4-FFF2-40B4-BE49-F238E27FC236}">
-                <a16:creationId xmlns:a16="http://schemas.microsoft.com/office/drawing/2014/main" id="{13BB30FD-9C75-462D-BF66-DD243A6E4658}"/>
+                <a16:creationId xmlns:a16="http://schemas.microsoft.com/office/drawing/2014/main" id="{2C31A0B3-BCD4-4151-A13E-0723AC5A3D9C}"/>
               </a:ext>
             </a:extLst>
           </p:cNvPr>
@@ -40415,7 +40437,7 @@
           <p:cNvPr id="6" name="Shape 4">
             <a:extLst xmlns:a="http://schemas.openxmlformats.org/drawingml/2006/main">
               <a:ext uri="{FF2B5EF4-FFF2-40B4-BE49-F238E27FC236}">
-                <a16:creationId xmlns:a16="http://schemas.microsoft.com/office/drawing/2014/main" id="{8C473482-F02D-4F60-8554-1FAFF5AE5FF8}"/>
+                <a16:creationId xmlns:a16="http://schemas.microsoft.com/office/drawing/2014/main" id="{B3A3EF0D-FEAE-41D8-9D0F-D206198E0238}"/>
               </a:ext>
             </a:extLst>
           </p:cNvPr>
@@ -40459,7 +40481,7 @@
           <p:nvPr/>
         </p:nvPicPr>
         <p:blipFill>
-          <a:blip xmlns:r="http://schemas.openxmlformats.org/officeDocument/2006/relationships" xmlns:a="http://schemas.openxmlformats.org/drawingml/2006/main" r:embed="Raeae6d7ef68a44db"/>
+          <a:blip xmlns:r="http://schemas.openxmlformats.org/officeDocument/2006/relationships" xmlns:a="http://schemas.openxmlformats.org/drawingml/2006/main" r:embed="R552b6dc72caa4247"/>
           <a:stretch xmlns:a="http://schemas.openxmlformats.org/drawingml/2006/main">
             <a:fillRect l="0" t="0" r="0" b="0"/>
           </a:stretch>
@@ -40479,7 +40501,7 @@
           <p:cNvPr id="8" name="Text 5">
             <a:extLst xmlns:a="http://schemas.openxmlformats.org/drawingml/2006/main">
               <a:ext uri="{FF2B5EF4-FFF2-40B4-BE49-F238E27FC236}">
-                <a16:creationId xmlns:a16="http://schemas.microsoft.com/office/drawing/2014/main" id="{38330CEB-1516-46F8-A826-FE2D5E5105A0}"/>
+                <a16:creationId xmlns:a16="http://schemas.microsoft.com/office/drawing/2014/main" id="{E4158A53-D388-4FB2-BC3B-CE548FDD1375}"/>
               </a:ext>
             </a:extLst>
           </p:cNvPr>
@@ -40524,7 +40546,7 @@
           <p:cNvPr id="9" name="Shape 6">
             <a:extLst xmlns:a="http://schemas.openxmlformats.org/drawingml/2006/main">
               <a:ext uri="{FF2B5EF4-FFF2-40B4-BE49-F238E27FC236}">
-                <a16:creationId xmlns:a16="http://schemas.microsoft.com/office/drawing/2014/main" id="{14E44604-EA5C-4CA0-870F-2DE375A7037D}"/>
+                <a16:creationId xmlns:a16="http://schemas.microsoft.com/office/drawing/2014/main" id="{E8914E2C-7271-4839-A694-A9E49A3D6318}"/>
               </a:ext>
             </a:extLst>
           </p:cNvPr>
@@ -40568,7 +40590,7 @@
           <p:nvPr/>
         </p:nvPicPr>
         <p:blipFill>
-          <a:blip xmlns:r="http://schemas.openxmlformats.org/officeDocument/2006/relationships" xmlns:a="http://schemas.openxmlformats.org/drawingml/2006/main" r:embed="Rbc47ccce8d0c40fc"/>
+          <a:blip xmlns:r="http://schemas.openxmlformats.org/officeDocument/2006/relationships" xmlns:a="http://schemas.openxmlformats.org/drawingml/2006/main" r:embed="R4832e41156724911"/>
           <a:stretch xmlns:a="http://schemas.openxmlformats.org/drawingml/2006/main">
             <a:fillRect l="0" t="0" r="0" b="0"/>
           </a:stretch>
@@ -40588,7 +40610,7 @@
           <p:cNvPr id="11" name="Text 7">
             <a:extLst xmlns:a="http://schemas.openxmlformats.org/drawingml/2006/main">
               <a:ext uri="{FF2B5EF4-FFF2-40B4-BE49-F238E27FC236}">
-                <a16:creationId xmlns:a16="http://schemas.microsoft.com/office/drawing/2014/main" id="{6FAF4EDD-9DD9-4B73-894B-925ADD1B44D2}"/>
+                <a16:creationId xmlns:a16="http://schemas.microsoft.com/office/drawing/2014/main" id="{4FCA790F-1C65-4987-B1C6-0A8D1BFEDA48}"/>
               </a:ext>
             </a:extLst>
           </p:cNvPr>
@@ -40636,7 +40658,7 @@
           <p:cNvPr id="12" name="Text 8">
             <a:extLst xmlns:a="http://schemas.openxmlformats.org/drawingml/2006/main">
               <a:ext uri="{FF2B5EF4-FFF2-40B4-BE49-F238E27FC236}">
-                <a16:creationId xmlns:a16="http://schemas.microsoft.com/office/drawing/2014/main" id="{6C6E15A6-619B-45B9-8A84-C777E6262263}"/>
+                <a16:creationId xmlns:a16="http://schemas.microsoft.com/office/drawing/2014/main" id="{108D38E6-289D-4745-B80B-CFBD0C7254C2}"/>
               </a:ext>
             </a:extLst>
           </p:cNvPr>
@@ -40681,7 +40703,7 @@
           <p:cNvPr id="13" name="Shape 9">
             <a:extLst xmlns:a="http://schemas.openxmlformats.org/drawingml/2006/main">
               <a:ext uri="{FF2B5EF4-FFF2-40B4-BE49-F238E27FC236}">
-                <a16:creationId xmlns:a16="http://schemas.microsoft.com/office/drawing/2014/main" id="{5781A0DA-4A79-4F0A-8726-E3849FA60003}"/>
+                <a16:creationId xmlns:a16="http://schemas.microsoft.com/office/drawing/2014/main" id="{BB62EB8A-BF88-42DB-A58D-0549E3AC578D}"/>
               </a:ext>
             </a:extLst>
           </p:cNvPr>
@@ -40721,7 +40743,7 @@
           <p:cNvPr id="14" name="Text 10">
             <a:extLst xmlns:a="http://schemas.openxmlformats.org/drawingml/2006/main">
               <a:ext uri="{FF2B5EF4-FFF2-40B4-BE49-F238E27FC236}">
-                <a16:creationId xmlns:a16="http://schemas.microsoft.com/office/drawing/2014/main" id="{46620888-7BD6-44DB-AF9F-BAFCB58BC1BF}"/>
+                <a16:creationId xmlns:a16="http://schemas.microsoft.com/office/drawing/2014/main" id="{CD0C7161-7533-4E6B-ADB7-0AED09F79D2A}"/>
               </a:ext>
             </a:extLst>
           </p:cNvPr>
@@ -40766,7 +40788,7 @@
           <p:cNvPr id="15" name="Text 11">
             <a:extLst xmlns:a="http://schemas.openxmlformats.org/drawingml/2006/main">
               <a:ext uri="{FF2B5EF4-FFF2-40B4-BE49-F238E27FC236}">
-                <a16:creationId xmlns:a16="http://schemas.microsoft.com/office/drawing/2014/main" id="{6CD8542F-F642-4C73-AB61-93E372D34E46}"/>
+                <a16:creationId xmlns:a16="http://schemas.microsoft.com/office/drawing/2014/main" id="{A5DC06C6-EB8E-4336-8AF6-6B748E15C047}"/>
               </a:ext>
             </a:extLst>
           </p:cNvPr>
@@ -40814,7 +40836,7 @@
           <p:cNvPr id="16" name="Shape 12">
             <a:extLst xmlns:a="http://schemas.openxmlformats.org/drawingml/2006/main">
               <a:ext uri="{FF2B5EF4-FFF2-40B4-BE49-F238E27FC236}">
-                <a16:creationId xmlns:a16="http://schemas.microsoft.com/office/drawing/2014/main" id="{2A849BAA-05CB-4B17-80F2-5D72976B7C8A}"/>
+                <a16:creationId xmlns:a16="http://schemas.microsoft.com/office/drawing/2014/main" id="{0D59995F-C84F-4C9E-B1A7-45432F361C4F}"/>
               </a:ext>
             </a:extLst>
           </p:cNvPr>
@@ -40858,7 +40880,7 @@
           <p:nvPr/>
         </p:nvPicPr>
         <p:blipFill>
-          <a:blip xmlns:r="http://schemas.openxmlformats.org/officeDocument/2006/relationships" xmlns:a="http://schemas.openxmlformats.org/drawingml/2006/main" r:embed="R2f99da65047244e2"/>
+          <a:blip xmlns:r="http://schemas.openxmlformats.org/officeDocument/2006/relationships" xmlns:a="http://schemas.openxmlformats.org/drawingml/2006/main" r:embed="R9f68ea71c40442d0"/>
           <a:stretch xmlns:a="http://schemas.openxmlformats.org/drawingml/2006/main">
             <a:fillRect l="0" t="0" r="0" b="0"/>
           </a:stretch>
@@ -40878,7 +40900,7 @@
           <p:cNvPr id="18" name="Text 13">
             <a:extLst xmlns:a="http://schemas.openxmlformats.org/drawingml/2006/main">
               <a:ext uri="{FF2B5EF4-FFF2-40B4-BE49-F238E27FC236}">
-                <a16:creationId xmlns:a16="http://schemas.microsoft.com/office/drawing/2014/main" id="{FAE95E03-D1A7-4A8F-9431-A6DDEBC33A93}"/>
+                <a16:creationId xmlns:a16="http://schemas.microsoft.com/office/drawing/2014/main" id="{45739EE5-A230-4C05-9583-5CEC86248E64}"/>
               </a:ext>
             </a:extLst>
           </p:cNvPr>
@@ -40923,7 +40945,7 @@
           <p:cNvPr id="19" name="Text 14">
             <a:extLst xmlns:a="http://schemas.openxmlformats.org/drawingml/2006/main">
               <a:ext uri="{FF2B5EF4-FFF2-40B4-BE49-F238E27FC236}">
-                <a16:creationId xmlns:a16="http://schemas.microsoft.com/office/drawing/2014/main" id="{A1406440-7275-48CF-9ECB-3103BF8BAAE4}"/>
+                <a16:creationId xmlns:a16="http://schemas.microsoft.com/office/drawing/2014/main" id="{FA0F426C-15D7-4EA5-9F78-EBC74EFA647D}"/>
               </a:ext>
             </a:extLst>
           </p:cNvPr>
@@ -40971,7 +40993,7 @@
           <p:cNvPr id="20" name="Text 15">
             <a:extLst xmlns:a="http://schemas.openxmlformats.org/drawingml/2006/main">
               <a:ext uri="{FF2B5EF4-FFF2-40B4-BE49-F238E27FC236}">
-                <a16:creationId xmlns:a16="http://schemas.microsoft.com/office/drawing/2014/main" id="{5A2FF050-D807-44B6-BA51-267A44FAB62B}"/>
+                <a16:creationId xmlns:a16="http://schemas.microsoft.com/office/drawing/2014/main" id="{4570D7CA-DA8D-4FAC-A9E7-F5E32D2DC2C0}"/>
               </a:ext>
             </a:extLst>
           </p:cNvPr>
@@ -41016,7 +41038,7 @@
           <p:cNvPr id="21" name="Shape 16">
             <a:extLst xmlns:a="http://schemas.openxmlformats.org/drawingml/2006/main">
               <a:ext uri="{FF2B5EF4-FFF2-40B4-BE49-F238E27FC236}">
-                <a16:creationId xmlns:a16="http://schemas.microsoft.com/office/drawing/2014/main" id="{7D53A56C-BCA4-4330-86D1-BA301151DC8A}"/>
+                <a16:creationId xmlns:a16="http://schemas.microsoft.com/office/drawing/2014/main" id="{ADAF1330-79E3-46BA-AB93-3603B320F0B5}"/>
               </a:ext>
             </a:extLst>
           </p:cNvPr>
@@ -41063,7 +41085,7 @@
           <p:cNvPr id="22" name="Text 17">
             <a:extLst xmlns:a="http://schemas.openxmlformats.org/drawingml/2006/main">
               <a:ext uri="{FF2B5EF4-FFF2-40B4-BE49-F238E27FC236}">
-                <a16:creationId xmlns:a16="http://schemas.microsoft.com/office/drawing/2014/main" id="{15BD495D-CF8E-4DF2-9D61-B02DE580A782}"/>
+                <a16:creationId xmlns:a16="http://schemas.microsoft.com/office/drawing/2014/main" id="{F90B2D16-0479-45D4-9287-C773B924816A}"/>
               </a:ext>
             </a:extLst>
           </p:cNvPr>
@@ -41108,7 +41130,7 @@
           <p:cNvPr id="23" name="Text 18">
             <a:extLst xmlns:a="http://schemas.openxmlformats.org/drawingml/2006/main">
               <a:ext uri="{FF2B5EF4-FFF2-40B4-BE49-F238E27FC236}">
-                <a16:creationId xmlns:a16="http://schemas.microsoft.com/office/drawing/2014/main" id="{28AC42FE-ED16-4FC5-9E2D-03D70B715FB8}"/>
+                <a16:creationId xmlns:a16="http://schemas.microsoft.com/office/drawing/2014/main" id="{AAD13A35-F02D-4E3E-968C-FA063EDFCE20}"/>
               </a:ext>
             </a:extLst>
           </p:cNvPr>
@@ -41153,7 +41175,7 @@
           <p:cNvPr id="24" name="Text 19">
             <a:extLst xmlns:a="http://schemas.openxmlformats.org/drawingml/2006/main">
               <a:ext uri="{FF2B5EF4-FFF2-40B4-BE49-F238E27FC236}">
-                <a16:creationId xmlns:a16="http://schemas.microsoft.com/office/drawing/2014/main" id="{633C0A3A-6E1D-493E-9E8E-C37C1D6A7931}"/>
+                <a16:creationId xmlns:a16="http://schemas.microsoft.com/office/drawing/2014/main" id="{30D9A910-D7DF-4F14-A9ED-298943B6776C}"/>
               </a:ext>
             </a:extLst>
           </p:cNvPr>
@@ -41198,7 +41220,7 @@
           <p:cNvPr id="25" name="Text 20">
             <a:extLst xmlns:a="http://schemas.openxmlformats.org/drawingml/2006/main">
               <a:ext uri="{FF2B5EF4-FFF2-40B4-BE49-F238E27FC236}">
-                <a16:creationId xmlns:a16="http://schemas.microsoft.com/office/drawing/2014/main" id="{46483AFF-4033-401D-8785-1B98DCD772CD}"/>
+                <a16:creationId xmlns:a16="http://schemas.microsoft.com/office/drawing/2014/main" id="{018DFEDC-CF65-4D02-932D-4EA3EDD5DB17}"/>
               </a:ext>
             </a:extLst>
           </p:cNvPr>
@@ -41243,7 +41265,7 @@
           <p:cNvPr id="26" name="Text 21">
             <a:extLst xmlns:a="http://schemas.openxmlformats.org/drawingml/2006/main">
               <a:ext uri="{FF2B5EF4-FFF2-40B4-BE49-F238E27FC236}">
-                <a16:creationId xmlns:a16="http://schemas.microsoft.com/office/drawing/2014/main" id="{2A17905E-8482-4ED4-8688-54B0F7799F5F}"/>
+                <a16:creationId xmlns:a16="http://schemas.microsoft.com/office/drawing/2014/main" id="{87FA214F-1BC5-4CFE-A163-9A2EF98041CE}"/>
               </a:ext>
             </a:extLst>
           </p:cNvPr>
@@ -41288,7 +41310,7 @@
           <p:cNvPr id="27" name="Text 22">
             <a:extLst xmlns:a="http://schemas.openxmlformats.org/drawingml/2006/main">
               <a:ext uri="{FF2B5EF4-FFF2-40B4-BE49-F238E27FC236}">
-                <a16:creationId xmlns:a16="http://schemas.microsoft.com/office/drawing/2014/main" id="{BE092B7A-6006-4D4F-A819-7A655FF957CF}"/>
+                <a16:creationId xmlns:a16="http://schemas.microsoft.com/office/drawing/2014/main" id="{B3994102-A2BC-4903-BE82-370A3C360A08}"/>
               </a:ext>
             </a:extLst>
           </p:cNvPr>
@@ -41333,7 +41355,7 @@
           <p:cNvPr id="28" name="Text 23">
             <a:extLst xmlns:a="http://schemas.openxmlformats.org/drawingml/2006/main">
               <a:ext uri="{FF2B5EF4-FFF2-40B4-BE49-F238E27FC236}">
-                <a16:creationId xmlns:a16="http://schemas.microsoft.com/office/drawing/2014/main" id="{91C2F84A-CC00-4689-9CBA-4E8258B1704D}"/>
+                <a16:creationId xmlns:a16="http://schemas.microsoft.com/office/drawing/2014/main" id="{7FF00C27-3D1C-4410-9F1B-128D10A00B78}"/>
               </a:ext>
             </a:extLst>
           </p:cNvPr>
@@ -41378,7 +41400,7 @@
           <p:cNvPr id="29" name="Text 24">
             <a:extLst xmlns:a="http://schemas.openxmlformats.org/drawingml/2006/main">
               <a:ext uri="{FF2B5EF4-FFF2-40B4-BE49-F238E27FC236}">
-                <a16:creationId xmlns:a16="http://schemas.microsoft.com/office/drawing/2014/main" id="{039EF1ED-B42B-4311-A3A9-FF518DCA1650}"/>
+                <a16:creationId xmlns:a16="http://schemas.microsoft.com/office/drawing/2014/main" id="{C12F14E9-B234-413F-9CF8-C3BE49F5E72B}"/>
               </a:ext>
             </a:extLst>
           </p:cNvPr>
@@ -41423,7 +41445,7 @@
           <p:cNvPr id="30" name="Text 25">
             <a:extLst xmlns:a="http://schemas.openxmlformats.org/drawingml/2006/main">
               <a:ext uri="{FF2B5EF4-FFF2-40B4-BE49-F238E27FC236}">
-                <a16:creationId xmlns:a16="http://schemas.microsoft.com/office/drawing/2014/main" id="{0EAE9FDB-CA93-4A6F-81F3-8590F1AEA98F}"/>
+                <a16:creationId xmlns:a16="http://schemas.microsoft.com/office/drawing/2014/main" id="{A89530C3-4F75-4082-859B-08679F43560A}"/>
               </a:ext>
             </a:extLst>
           </p:cNvPr>
@@ -41468,7 +41490,7 @@
           <p:cNvPr id="31" name="Text 26">
             <a:extLst xmlns:a="http://schemas.openxmlformats.org/drawingml/2006/main">
               <a:ext uri="{FF2B5EF4-FFF2-40B4-BE49-F238E27FC236}">
-                <a16:creationId xmlns:a16="http://schemas.microsoft.com/office/drawing/2014/main" id="{00C8F880-DD43-44DF-904A-4DAFEAFD2BCA}"/>
+                <a16:creationId xmlns:a16="http://schemas.microsoft.com/office/drawing/2014/main" id="{88E43648-AA5E-417B-9891-AED3C199F8F4}"/>
               </a:ext>
             </a:extLst>
           </p:cNvPr>
@@ -41513,7 +41535,7 @@
           <p:cNvPr id="32" name="Text 27">
             <a:extLst xmlns:a="http://schemas.openxmlformats.org/drawingml/2006/main">
               <a:ext uri="{FF2B5EF4-FFF2-40B4-BE49-F238E27FC236}">
-                <a16:creationId xmlns:a16="http://schemas.microsoft.com/office/drawing/2014/main" id="{683BFB72-D487-434E-AADD-56F95359D798}"/>
+                <a16:creationId xmlns:a16="http://schemas.microsoft.com/office/drawing/2014/main" id="{55CB3994-36BD-4FB6-8151-FC9E16A19DE5}"/>
               </a:ext>
             </a:extLst>
           </p:cNvPr>
@@ -41558,7 +41580,7 @@
           <p:cNvPr id="33" name="Text 28">
             <a:extLst xmlns:a="http://schemas.openxmlformats.org/drawingml/2006/main">
               <a:ext uri="{FF2B5EF4-FFF2-40B4-BE49-F238E27FC236}">
-                <a16:creationId xmlns:a16="http://schemas.microsoft.com/office/drawing/2014/main" id="{29071BF0-6C05-4F2E-8F2D-830A14C7DE30}"/>
+                <a16:creationId xmlns:a16="http://schemas.microsoft.com/office/drawing/2014/main" id="{CF661202-A13F-4D28-9827-79E6E138F3C8}"/>
               </a:ext>
             </a:extLst>
           </p:cNvPr>
@@ -41603,7 +41625,7 @@
           <p:cNvPr id="34" name="Text 29">
             <a:extLst xmlns:a="http://schemas.openxmlformats.org/drawingml/2006/main">
               <a:ext uri="{FF2B5EF4-FFF2-40B4-BE49-F238E27FC236}">
-                <a16:creationId xmlns:a16="http://schemas.microsoft.com/office/drawing/2014/main" id="{3FAA0747-9675-4BF6-81B8-60CC718A6184}"/>
+                <a16:creationId xmlns:a16="http://schemas.microsoft.com/office/drawing/2014/main" id="{202B07B5-6AF0-4500-A1D1-155DD62A9F17}"/>
               </a:ext>
             </a:extLst>
           </p:cNvPr>
@@ -41649,7 +41671,7 @@
     </p:spTree>
     <p:extLst>
       <p:ext uri="{BB962C8B-B14F-4D97-AF65-F5344CB8AC3E}">
-        <p14:creationId xmlns:p14="http://schemas.microsoft.com/office/powerpoint/2010/main" val="35549161"/>
+        <p14:creationId xmlns:p14="http://schemas.microsoft.com/office/powerpoint/2010/main" val="1799277329"/>
       </p:ext>
     </p:extLst>
   </p:cSld>
@@ -41680,7 +41702,7 @@
           <p:cNvPr id="2" name="Text 0">
             <a:extLst xmlns:a="http://schemas.openxmlformats.org/drawingml/2006/main">
               <a:ext uri="{FF2B5EF4-FFF2-40B4-BE49-F238E27FC236}">
-                <a16:creationId xmlns:a16="http://schemas.microsoft.com/office/drawing/2014/main" id="{0B9865BD-0730-47F7-B347-B20D2DFF8168}"/>
+                <a16:creationId xmlns:a16="http://schemas.microsoft.com/office/drawing/2014/main" id="{A582EB9C-F795-461C-824C-E983C547AB85}"/>
               </a:ext>
             </a:extLst>
           </p:cNvPr>
@@ -41725,7 +41747,7 @@
           <p:cNvPr id="3" name="Text 1">
             <a:extLst xmlns:a="http://schemas.openxmlformats.org/drawingml/2006/main">
               <a:ext uri="{FF2B5EF4-FFF2-40B4-BE49-F238E27FC236}">
-                <a16:creationId xmlns:a16="http://schemas.microsoft.com/office/drawing/2014/main" id="{622FF87C-D219-4CE4-8586-08CCD8DBF51F}"/>
+                <a16:creationId xmlns:a16="http://schemas.microsoft.com/office/drawing/2014/main" id="{C6043BFA-3AE6-4199-90F6-BD1BD5D7D952}"/>
               </a:ext>
             </a:extLst>
           </p:cNvPr>
@@ -41770,7 +41792,7 @@
           <p:cNvPr id="4" name="Text 2">
             <a:extLst xmlns:a="http://schemas.openxmlformats.org/drawingml/2006/main">
               <a:ext uri="{FF2B5EF4-FFF2-40B4-BE49-F238E27FC236}">
-                <a16:creationId xmlns:a16="http://schemas.microsoft.com/office/drawing/2014/main" id="{6B59E82D-106B-4E56-AB6B-80C2D16B45A9}"/>
+                <a16:creationId xmlns:a16="http://schemas.microsoft.com/office/drawing/2014/main" id="{01BC4920-F6FE-4D44-96A1-B59A4A48E17B}"/>
               </a:ext>
             </a:extLst>
           </p:cNvPr>
@@ -41815,7 +41837,7 @@
           <p:cNvPr id="5" name="Text 3">
             <a:extLst xmlns:a="http://schemas.openxmlformats.org/drawingml/2006/main">
               <a:ext uri="{FF2B5EF4-FFF2-40B4-BE49-F238E27FC236}">
-                <a16:creationId xmlns:a16="http://schemas.microsoft.com/office/drawing/2014/main" id="{60F328D9-9508-42DE-A9D9-DF1974A00E62}"/>
+                <a16:creationId xmlns:a16="http://schemas.microsoft.com/office/drawing/2014/main" id="{9ED54033-8385-421C-B360-CF74DFCEEDA4}"/>
               </a:ext>
             </a:extLst>
           </p:cNvPr>
@@ -41860,7 +41882,7 @@
           <p:cNvPr id="6" name="Text 4">
             <a:extLst xmlns:a="http://schemas.openxmlformats.org/drawingml/2006/main">
               <a:ext uri="{FF2B5EF4-FFF2-40B4-BE49-F238E27FC236}">
-                <a16:creationId xmlns:a16="http://schemas.microsoft.com/office/drawing/2014/main" id="{B865397D-E6D4-45D3-8120-EFBC8216A7C1}"/>
+                <a16:creationId xmlns:a16="http://schemas.microsoft.com/office/drawing/2014/main" id="{C64B0BD3-A8C6-4B11-9935-BFF7FDF6785B}"/>
               </a:ext>
             </a:extLst>
           </p:cNvPr>
@@ -41905,7 +41927,7 @@
           <p:cNvPr id="7" name="Shape 5">
             <a:extLst xmlns:a="http://schemas.openxmlformats.org/drawingml/2006/main">
               <a:ext uri="{FF2B5EF4-FFF2-40B4-BE49-F238E27FC236}">
-                <a16:creationId xmlns:a16="http://schemas.microsoft.com/office/drawing/2014/main" id="{32D9A786-7AC4-4EC4-8DFC-12F3DA560852}"/>
+                <a16:creationId xmlns:a16="http://schemas.microsoft.com/office/drawing/2014/main" id="{59D87D7D-7A6C-4ED2-96F5-D77B7BBAB07E}"/>
               </a:ext>
             </a:extLst>
           </p:cNvPr>
@@ -41956,7 +41978,7 @@
           <p:nvPr/>
         </p:nvPicPr>
         <p:blipFill>
-          <a:blip xmlns:r="http://schemas.openxmlformats.org/officeDocument/2006/relationships" xmlns:a="http://schemas.openxmlformats.org/drawingml/2006/main" r:embed="Rd4dc0a2224984972"/>
+          <a:blip xmlns:r="http://schemas.openxmlformats.org/officeDocument/2006/relationships" xmlns:a="http://schemas.openxmlformats.org/drawingml/2006/main" r:embed="R0bacce38a624463e"/>
           <a:stretch xmlns:a="http://schemas.openxmlformats.org/drawingml/2006/main">
             <a:fillRect l="0" t="0" r="0" b="0"/>
           </a:stretch>
@@ -41976,7 +41998,7 @@
           <p:cNvPr id="9" name="Text 6">
             <a:extLst xmlns:a="http://schemas.openxmlformats.org/drawingml/2006/main">
               <a:ext uri="{FF2B5EF4-FFF2-40B4-BE49-F238E27FC236}">
-                <a16:creationId xmlns:a16="http://schemas.microsoft.com/office/drawing/2014/main" id="{377B5148-4556-4EEA-BDC1-238C0D3E2EB8}"/>
+                <a16:creationId xmlns:a16="http://schemas.microsoft.com/office/drawing/2014/main" id="{2CC0A6CC-10E3-484C-A9A0-6DC6B212BAFA}"/>
               </a:ext>
             </a:extLst>
           </p:cNvPr>
@@ -42043,7 +42065,7 @@
           <p:cNvPr id="10" name="Shape 7">
             <a:extLst xmlns:a="http://schemas.openxmlformats.org/drawingml/2006/main">
               <a:ext uri="{FF2B5EF4-FFF2-40B4-BE49-F238E27FC236}">
-                <a16:creationId xmlns:a16="http://schemas.microsoft.com/office/drawing/2014/main" id="{485BAD68-A64E-452C-A51B-C94189E336F4}"/>
+                <a16:creationId xmlns:a16="http://schemas.microsoft.com/office/drawing/2014/main" id="{5E7F5211-04F9-4606-8CA8-C2A7B7F964A5}"/>
               </a:ext>
             </a:extLst>
           </p:cNvPr>
@@ -42094,7 +42116,7 @@
           <p:nvPr/>
         </p:nvPicPr>
         <p:blipFill>
-          <a:blip xmlns:r="http://schemas.openxmlformats.org/officeDocument/2006/relationships" xmlns:a="http://schemas.openxmlformats.org/drawingml/2006/main" r:embed="Rfc22c605335345c3"/>
+          <a:blip xmlns:r="http://schemas.openxmlformats.org/officeDocument/2006/relationships" xmlns:a="http://schemas.openxmlformats.org/drawingml/2006/main" r:embed="R3b52f5b2f5c94c04"/>
           <a:stretch xmlns:a="http://schemas.openxmlformats.org/drawingml/2006/main">
             <a:fillRect l="0" t="0" r="0" b="0"/>
           </a:stretch>
@@ -42114,7 +42136,7 @@
           <p:cNvPr id="12" name="Text 8">
             <a:extLst xmlns:a="http://schemas.openxmlformats.org/drawingml/2006/main">
               <a:ext uri="{FF2B5EF4-FFF2-40B4-BE49-F238E27FC236}">
-                <a16:creationId xmlns:a16="http://schemas.microsoft.com/office/drawing/2014/main" id="{2A5FD6E6-4283-4F99-B819-4C5F919C00D9}"/>
+                <a16:creationId xmlns:a16="http://schemas.microsoft.com/office/drawing/2014/main" id="{1237AC3D-20E0-4F9C-B79A-2629007E3FD6}"/>
               </a:ext>
             </a:extLst>
           </p:cNvPr>
@@ -42181,7 +42203,7 @@
           <p:cNvPr id="13" name="Shape 9">
             <a:extLst xmlns:a="http://schemas.openxmlformats.org/drawingml/2006/main">
               <a:ext uri="{FF2B5EF4-FFF2-40B4-BE49-F238E27FC236}">
-                <a16:creationId xmlns:a16="http://schemas.microsoft.com/office/drawing/2014/main" id="{E54E8228-C9A4-47F1-88C8-4E3EFC7E1C7E}"/>
+                <a16:creationId xmlns:a16="http://schemas.microsoft.com/office/drawing/2014/main" id="{C54B0711-72E7-4587-B7BD-8B1B58600519}"/>
               </a:ext>
             </a:extLst>
           </p:cNvPr>
@@ -42232,7 +42254,7 @@
           <p:nvPr/>
         </p:nvPicPr>
         <p:blipFill>
-          <a:blip xmlns:r="http://schemas.openxmlformats.org/officeDocument/2006/relationships" xmlns:a="http://schemas.openxmlformats.org/drawingml/2006/main" r:embed="R761d834f794d4db0"/>
+          <a:blip xmlns:r="http://schemas.openxmlformats.org/officeDocument/2006/relationships" xmlns:a="http://schemas.openxmlformats.org/drawingml/2006/main" r:embed="Rcd2d6dec024f4431"/>
           <a:stretch xmlns:a="http://schemas.openxmlformats.org/drawingml/2006/main">
             <a:fillRect l="0" t="0" r="0" b="0"/>
           </a:stretch>
@@ -42252,7 +42274,7 @@
           <p:cNvPr id="15" name="Text 10">
             <a:extLst xmlns:a="http://schemas.openxmlformats.org/drawingml/2006/main">
               <a:ext uri="{FF2B5EF4-FFF2-40B4-BE49-F238E27FC236}">
-                <a16:creationId xmlns:a16="http://schemas.microsoft.com/office/drawing/2014/main" id="{AA465308-E04C-4D9A-9B77-8F84D43EC438}"/>
+                <a16:creationId xmlns:a16="http://schemas.microsoft.com/office/drawing/2014/main" id="{54E32B84-4EC8-4290-8855-4E0BB4D05AB6}"/>
               </a:ext>
             </a:extLst>
           </p:cNvPr>
@@ -42319,7 +42341,7 @@
           <p:cNvPr id="16" name="Shape 11">
             <a:extLst xmlns:a="http://schemas.openxmlformats.org/drawingml/2006/main">
               <a:ext uri="{FF2B5EF4-FFF2-40B4-BE49-F238E27FC236}">
-                <a16:creationId xmlns:a16="http://schemas.microsoft.com/office/drawing/2014/main" id="{7F7F50C0-85C0-43AD-AEA7-0AF62901E2CE}"/>
+                <a16:creationId xmlns:a16="http://schemas.microsoft.com/office/drawing/2014/main" id="{910BE7A5-2562-4385-A148-8C3BB7DE5EC5}"/>
               </a:ext>
             </a:extLst>
           </p:cNvPr>
@@ -42370,7 +42392,7 @@
           <p:nvPr/>
         </p:nvPicPr>
         <p:blipFill>
-          <a:blip xmlns:r="http://schemas.openxmlformats.org/officeDocument/2006/relationships" xmlns:a="http://schemas.openxmlformats.org/drawingml/2006/main" r:embed="R194c4db7d6e04f8d"/>
+          <a:blip xmlns:r="http://schemas.openxmlformats.org/officeDocument/2006/relationships" xmlns:a="http://schemas.openxmlformats.org/drawingml/2006/main" r:embed="Rb34d1ae9670b4ab0"/>
           <a:stretch xmlns:a="http://schemas.openxmlformats.org/drawingml/2006/main">
             <a:fillRect l="0" t="0" r="0" b="0"/>
           </a:stretch>
@@ -42390,7 +42412,7 @@
           <p:cNvPr id="18" name="Text 12">
             <a:extLst xmlns:a="http://schemas.openxmlformats.org/drawingml/2006/main">
               <a:ext uri="{FF2B5EF4-FFF2-40B4-BE49-F238E27FC236}">
-                <a16:creationId xmlns:a16="http://schemas.microsoft.com/office/drawing/2014/main" id="{D7A590A4-D4A2-4852-B4EC-1E7EF8B3662F}"/>
+                <a16:creationId xmlns:a16="http://schemas.microsoft.com/office/drawing/2014/main" id="{53D4AC16-4E85-4CEE-AC45-F2B85B9EFA59}"/>
               </a:ext>
             </a:extLst>
           </p:cNvPr>
@@ -42457,7 +42479,7 @@
           <p:cNvPr id="19" name="Shape 13">
             <a:extLst xmlns:a="http://schemas.openxmlformats.org/drawingml/2006/main">
               <a:ext uri="{FF2B5EF4-FFF2-40B4-BE49-F238E27FC236}">
-                <a16:creationId xmlns:a16="http://schemas.microsoft.com/office/drawing/2014/main" id="{F30A947E-D181-492F-9644-733044A7750C}"/>
+                <a16:creationId xmlns:a16="http://schemas.microsoft.com/office/drawing/2014/main" id="{82E23B89-D92B-492F-B679-46E8E988D589}"/>
               </a:ext>
             </a:extLst>
           </p:cNvPr>
@@ -42508,7 +42530,7 @@
           <p:nvPr/>
         </p:nvPicPr>
         <p:blipFill>
-          <a:blip xmlns:r="http://schemas.openxmlformats.org/officeDocument/2006/relationships" xmlns:a="http://schemas.openxmlformats.org/drawingml/2006/main" r:embed="R5285c72c05a64e0a"/>
+          <a:blip xmlns:r="http://schemas.openxmlformats.org/officeDocument/2006/relationships" xmlns:a="http://schemas.openxmlformats.org/drawingml/2006/main" r:embed="R26a29eafff354f15"/>
           <a:stretch xmlns:a="http://schemas.openxmlformats.org/drawingml/2006/main">
             <a:fillRect l="0" t="0" r="0" b="0"/>
           </a:stretch>
@@ -42528,7 +42550,7 @@
           <p:cNvPr id="21" name="Text 14">
             <a:extLst xmlns:a="http://schemas.openxmlformats.org/drawingml/2006/main">
               <a:ext uri="{FF2B5EF4-FFF2-40B4-BE49-F238E27FC236}">
-                <a16:creationId xmlns:a16="http://schemas.microsoft.com/office/drawing/2014/main" id="{D3E6F28D-9AFC-49AB-8682-941426B63776}"/>
+                <a16:creationId xmlns:a16="http://schemas.microsoft.com/office/drawing/2014/main" id="{EE39680C-479C-41E1-8EDB-D6313C6339CA}"/>
               </a:ext>
             </a:extLst>
           </p:cNvPr>
@@ -42595,7 +42617,7 @@
           <p:cNvPr id="22" name="Shape 15">
             <a:extLst xmlns:a="http://schemas.openxmlformats.org/drawingml/2006/main">
               <a:ext uri="{FF2B5EF4-FFF2-40B4-BE49-F238E27FC236}">
-                <a16:creationId xmlns:a16="http://schemas.microsoft.com/office/drawing/2014/main" id="{10410A07-4416-4082-9D33-43BD4D0710A6}"/>
+                <a16:creationId xmlns:a16="http://schemas.microsoft.com/office/drawing/2014/main" id="{4D3AD86E-E713-4BFB-A8DF-1FF7897596C3}"/>
               </a:ext>
             </a:extLst>
           </p:cNvPr>
@@ -42646,7 +42668,7 @@
           <p:nvPr/>
         </p:nvPicPr>
         <p:blipFill>
-          <a:blip xmlns:r="http://schemas.openxmlformats.org/officeDocument/2006/relationships" xmlns:a="http://schemas.openxmlformats.org/drawingml/2006/main" r:embed="Rc8d0612ccfcb46e3"/>
+          <a:blip xmlns:r="http://schemas.openxmlformats.org/officeDocument/2006/relationships" xmlns:a="http://schemas.openxmlformats.org/drawingml/2006/main" r:embed="R646661bb9ef5488f"/>
           <a:stretch xmlns:a="http://schemas.openxmlformats.org/drawingml/2006/main">
             <a:fillRect l="0" t="0" r="0" b="0"/>
           </a:stretch>
@@ -42666,7 +42688,7 @@
           <p:cNvPr id="24" name="Text 16">
             <a:extLst xmlns:a="http://schemas.openxmlformats.org/drawingml/2006/main">
               <a:ext uri="{FF2B5EF4-FFF2-40B4-BE49-F238E27FC236}">
-                <a16:creationId xmlns:a16="http://schemas.microsoft.com/office/drawing/2014/main" id="{CA4E0D06-C664-49AA-8E6F-C9F0681810E1}"/>
+                <a16:creationId xmlns:a16="http://schemas.microsoft.com/office/drawing/2014/main" id="{72DA68F5-177B-4B53-97A1-8CF7F79B3919}"/>
               </a:ext>
             </a:extLst>
           </p:cNvPr>
@@ -42733,7 +42755,7 @@
           <p:cNvPr id="25" name="Shape 17">
             <a:extLst xmlns:a="http://schemas.openxmlformats.org/drawingml/2006/main">
               <a:ext uri="{FF2B5EF4-FFF2-40B4-BE49-F238E27FC236}">
-                <a16:creationId xmlns:a16="http://schemas.microsoft.com/office/drawing/2014/main" id="{812B9D06-F90C-42C3-B815-E894E6C7447D}"/>
+                <a16:creationId xmlns:a16="http://schemas.microsoft.com/office/drawing/2014/main" id="{57057271-B69B-4B19-BB7B-02D9BB8EFCC6}"/>
               </a:ext>
             </a:extLst>
           </p:cNvPr>
@@ -42777,7 +42799,7 @@
           <p:nvPr/>
         </p:nvPicPr>
         <p:blipFill>
-          <a:blip xmlns:r="http://schemas.openxmlformats.org/officeDocument/2006/relationships" xmlns:a="http://schemas.openxmlformats.org/drawingml/2006/main" r:embed="R288d036c6ace4987"/>
+          <a:blip xmlns:r="http://schemas.openxmlformats.org/officeDocument/2006/relationships" xmlns:a="http://schemas.openxmlformats.org/drawingml/2006/main" r:embed="R9b73d701d7e44040"/>
           <a:stretch xmlns:a="http://schemas.openxmlformats.org/drawingml/2006/main">
             <a:fillRect l="0" t="0" r="0" b="0"/>
           </a:stretch>
@@ -42797,7 +42819,7 @@
           <p:cNvPr id="27" name="Text 18">
             <a:extLst xmlns:a="http://schemas.openxmlformats.org/drawingml/2006/main">
               <a:ext uri="{FF2B5EF4-FFF2-40B4-BE49-F238E27FC236}">
-                <a16:creationId xmlns:a16="http://schemas.microsoft.com/office/drawing/2014/main" id="{14F887F3-361F-445A-B6FB-EE57C57A82E5}"/>
+                <a16:creationId xmlns:a16="http://schemas.microsoft.com/office/drawing/2014/main" id="{20108510-3A56-48F2-91EA-09389608A001}"/>
               </a:ext>
             </a:extLst>
           </p:cNvPr>
@@ -42845,7 +42867,7 @@
           <p:cNvPr id="28" name="Text 19">
             <a:extLst xmlns:a="http://schemas.openxmlformats.org/drawingml/2006/main">
               <a:ext uri="{FF2B5EF4-FFF2-40B4-BE49-F238E27FC236}">
-                <a16:creationId xmlns:a16="http://schemas.microsoft.com/office/drawing/2014/main" id="{5D018A0B-9CAF-420B-95DD-95D14EC565E2}"/>
+                <a16:creationId xmlns:a16="http://schemas.microsoft.com/office/drawing/2014/main" id="{DBB8E821-A3CD-4B9D-A56E-17723F38A03E}"/>
               </a:ext>
             </a:extLst>
           </p:cNvPr>
@@ -42890,7 +42912,7 @@
           <p:cNvPr id="29" name="Shape 20">
             <a:extLst xmlns:a="http://schemas.openxmlformats.org/drawingml/2006/main">
               <a:ext uri="{FF2B5EF4-FFF2-40B4-BE49-F238E27FC236}">
-                <a16:creationId xmlns:a16="http://schemas.microsoft.com/office/drawing/2014/main" id="{39C2A875-7D8D-49A6-ADC0-E335FDBE6CE0}"/>
+                <a16:creationId xmlns:a16="http://schemas.microsoft.com/office/drawing/2014/main" id="{800A005A-C375-4A9C-A05A-A1457106DE40}"/>
               </a:ext>
             </a:extLst>
           </p:cNvPr>
@@ -42934,7 +42956,7 @@
           <p:nvPr/>
         </p:nvPicPr>
         <p:blipFill>
-          <a:blip xmlns:r="http://schemas.openxmlformats.org/officeDocument/2006/relationships" xmlns:a="http://schemas.openxmlformats.org/drawingml/2006/main" r:embed="Red1230a12e954ff0"/>
+          <a:blip xmlns:r="http://schemas.openxmlformats.org/officeDocument/2006/relationships" xmlns:a="http://schemas.openxmlformats.org/drawingml/2006/main" r:embed="Rf72f8d857c3c4903"/>
           <a:stretch xmlns:a="http://schemas.openxmlformats.org/drawingml/2006/main">
             <a:fillRect l="0" t="0" r="0" b="0"/>
           </a:stretch>
@@ -42954,7 +42976,7 @@
           <p:cNvPr id="31" name="Text 21">
             <a:extLst xmlns:a="http://schemas.openxmlformats.org/drawingml/2006/main">
               <a:ext uri="{FF2B5EF4-FFF2-40B4-BE49-F238E27FC236}">
-                <a16:creationId xmlns:a16="http://schemas.microsoft.com/office/drawing/2014/main" id="{D21ED47D-3D1D-4103-82A3-6867E1E2F634}"/>
+                <a16:creationId xmlns:a16="http://schemas.microsoft.com/office/drawing/2014/main" id="{5FA8C8CA-C335-4D3C-9839-12A50FB92997}"/>
               </a:ext>
             </a:extLst>
           </p:cNvPr>
@@ -43002,7 +43024,7 @@
           <p:cNvPr id="32" name="Text 22">
             <a:extLst xmlns:a="http://schemas.openxmlformats.org/drawingml/2006/main">
               <a:ext uri="{FF2B5EF4-FFF2-40B4-BE49-F238E27FC236}">
-                <a16:creationId xmlns:a16="http://schemas.microsoft.com/office/drawing/2014/main" id="{E166FDDA-2FEA-4322-A350-2FC5E9476AC4}"/>
+                <a16:creationId xmlns:a16="http://schemas.microsoft.com/office/drawing/2014/main" id="{68388E31-8074-4B54-9390-C8525EDA54E7}"/>
               </a:ext>
             </a:extLst>
           </p:cNvPr>
@@ -43047,7 +43069,7 @@
           <p:cNvPr id="33" name="Shape 23">
             <a:extLst xmlns:a="http://schemas.openxmlformats.org/drawingml/2006/main">
               <a:ext uri="{FF2B5EF4-FFF2-40B4-BE49-F238E27FC236}">
-                <a16:creationId xmlns:a16="http://schemas.microsoft.com/office/drawing/2014/main" id="{E4C34BCD-5905-4E43-9F16-9D2C9D5C2171}"/>
+                <a16:creationId xmlns:a16="http://schemas.microsoft.com/office/drawing/2014/main" id="{76A4D3A9-BC19-487E-8B96-00F1915FBE1B}"/>
               </a:ext>
             </a:extLst>
           </p:cNvPr>
@@ -43094,7 +43116,7 @@
           <p:cNvPr id="34" name="Text 24">
             <a:extLst xmlns:a="http://schemas.openxmlformats.org/drawingml/2006/main">
               <a:ext uri="{FF2B5EF4-FFF2-40B4-BE49-F238E27FC236}">
-                <a16:creationId xmlns:a16="http://schemas.microsoft.com/office/drawing/2014/main" id="{DB54ADE6-B51F-4BD3-9EFC-E0F84D2BCDCC}"/>
+                <a16:creationId xmlns:a16="http://schemas.microsoft.com/office/drawing/2014/main" id="{BFB2F8A6-DC17-4785-86D1-133F384B81D7}"/>
               </a:ext>
             </a:extLst>
           </p:cNvPr>
@@ -43153,7 +43175,7 @@
           <p:cNvPr id="35" name="Text 25">
             <a:extLst xmlns:a="http://schemas.openxmlformats.org/drawingml/2006/main">
               <a:ext uri="{FF2B5EF4-FFF2-40B4-BE49-F238E27FC236}">
-                <a16:creationId xmlns:a16="http://schemas.microsoft.com/office/drawing/2014/main" id="{21056B15-2F28-40A3-9C33-9DFF9ED984E1}"/>
+                <a16:creationId xmlns:a16="http://schemas.microsoft.com/office/drawing/2014/main" id="{889E3655-FC9F-4DB0-A1B4-366FCEABAFAC}"/>
               </a:ext>
             </a:extLst>
           </p:cNvPr>
@@ -43198,7 +43220,7 @@
           <p:cNvPr id="36" name="Shape 26">
             <a:extLst xmlns:a="http://schemas.openxmlformats.org/drawingml/2006/main">
               <a:ext uri="{FF2B5EF4-FFF2-40B4-BE49-F238E27FC236}">
-                <a16:creationId xmlns:a16="http://schemas.microsoft.com/office/drawing/2014/main" id="{D0F29156-B44A-4CEE-AA76-B0370E59E7E7}"/>
+                <a16:creationId xmlns:a16="http://schemas.microsoft.com/office/drawing/2014/main" id="{60E5E73D-B436-411C-BE33-885C0A6F62A0}"/>
               </a:ext>
             </a:extLst>
           </p:cNvPr>
@@ -43245,7 +43267,7 @@
           <p:cNvPr id="37" name="Text 27">
             <a:extLst xmlns:a="http://schemas.openxmlformats.org/drawingml/2006/main">
               <a:ext uri="{FF2B5EF4-FFF2-40B4-BE49-F238E27FC236}">
-                <a16:creationId xmlns:a16="http://schemas.microsoft.com/office/drawing/2014/main" id="{7F32E295-7DA8-40BF-A3B9-619C1816CC5C}"/>
+                <a16:creationId xmlns:a16="http://schemas.microsoft.com/office/drawing/2014/main" id="{71591C0F-D8F3-4B25-9209-0901DDC921C5}"/>
               </a:ext>
             </a:extLst>
           </p:cNvPr>
@@ -43290,7 +43312,7 @@
           <p:cNvPr id="38" name="Text 28">
             <a:extLst xmlns:a="http://schemas.openxmlformats.org/drawingml/2006/main">
               <a:ext uri="{FF2B5EF4-FFF2-40B4-BE49-F238E27FC236}">
-                <a16:creationId xmlns:a16="http://schemas.microsoft.com/office/drawing/2014/main" id="{884ED6EC-A741-4249-B1C0-FE954B954870}"/>
+                <a16:creationId xmlns:a16="http://schemas.microsoft.com/office/drawing/2014/main" id="{A344E4C4-BF55-4047-9844-F1482ED58530}"/>
               </a:ext>
             </a:extLst>
           </p:cNvPr>
@@ -43338,7 +43360,7 @@
           <p:cNvPr id="39" name="Shape 29">
             <a:extLst xmlns:a="http://schemas.openxmlformats.org/drawingml/2006/main">
               <a:ext uri="{FF2B5EF4-FFF2-40B4-BE49-F238E27FC236}">
-                <a16:creationId xmlns:a16="http://schemas.microsoft.com/office/drawing/2014/main" id="{88274E45-856E-49DE-96A1-8B3810B014BA}"/>
+                <a16:creationId xmlns:a16="http://schemas.microsoft.com/office/drawing/2014/main" id="{262DBA16-BF11-4301-B421-CB83A3645B88}"/>
               </a:ext>
             </a:extLst>
           </p:cNvPr>
@@ -43385,7 +43407,7 @@
           <p:cNvPr id="40" name="Text 30">
             <a:extLst xmlns:a="http://schemas.openxmlformats.org/drawingml/2006/main">
               <a:ext uri="{FF2B5EF4-FFF2-40B4-BE49-F238E27FC236}">
-                <a16:creationId xmlns:a16="http://schemas.microsoft.com/office/drawing/2014/main" id="{70608C26-342D-44C8-AEC5-6EF71AE99C50}"/>
+                <a16:creationId xmlns:a16="http://schemas.microsoft.com/office/drawing/2014/main" id="{458BD751-2529-4643-AD24-F6DE448F6A1E}"/>
               </a:ext>
             </a:extLst>
           </p:cNvPr>
@@ -43430,7 +43452,7 @@
           <p:cNvPr id="41" name="Text 31">
             <a:extLst xmlns:a="http://schemas.openxmlformats.org/drawingml/2006/main">
               <a:ext uri="{FF2B5EF4-FFF2-40B4-BE49-F238E27FC236}">
-                <a16:creationId xmlns:a16="http://schemas.microsoft.com/office/drawing/2014/main" id="{4191B484-2245-4BED-8615-59A1A1542A6A}"/>
+                <a16:creationId xmlns:a16="http://schemas.microsoft.com/office/drawing/2014/main" id="{350AED90-93F6-4C59-BE74-955197177575}"/>
               </a:ext>
             </a:extLst>
           </p:cNvPr>
@@ -43476,7 +43498,7 @@
     </p:spTree>
     <p:extLst>
       <p:ext uri="{BB962C8B-B14F-4D97-AF65-F5344CB8AC3E}">
-        <p14:creationId xmlns:p14="http://schemas.microsoft.com/office/powerpoint/2010/main" val="1813473456"/>
+        <p14:creationId xmlns:p14="http://schemas.microsoft.com/office/powerpoint/2010/main" val="686768912"/>
       </p:ext>
     </p:extLst>
   </p:cSld>
@@ -43507,7 +43529,7 @@
           <p:cNvPr id="2" name="Text 0">
             <a:extLst xmlns:a="http://schemas.openxmlformats.org/drawingml/2006/main">
               <a:ext uri="{FF2B5EF4-FFF2-40B4-BE49-F238E27FC236}">
-                <a16:creationId xmlns:a16="http://schemas.microsoft.com/office/drawing/2014/main" id="{09653145-4669-4D09-A7DD-63128B94B30B}"/>
+                <a16:creationId xmlns:a16="http://schemas.microsoft.com/office/drawing/2014/main" id="{6179A4C9-9B95-4809-8D86-B7A9186797B6}"/>
               </a:ext>
             </a:extLst>
           </p:cNvPr>
@@ -43552,7 +43574,7 @@
           <p:cNvPr id="3" name="Text 1">
             <a:extLst xmlns:a="http://schemas.openxmlformats.org/drawingml/2006/main">
               <a:ext uri="{FF2B5EF4-FFF2-40B4-BE49-F238E27FC236}">
-                <a16:creationId xmlns:a16="http://schemas.microsoft.com/office/drawing/2014/main" id="{1CAD4048-158D-4BEB-86B3-09C9B6974749}"/>
+                <a16:creationId xmlns:a16="http://schemas.microsoft.com/office/drawing/2014/main" id="{0420D987-AE43-4AD3-83E6-D9D4134F7B93}"/>
               </a:ext>
             </a:extLst>
           </p:cNvPr>
@@ -43597,7 +43619,7 @@
           <p:cNvPr id="4" name="Shape 2">
             <a:extLst xmlns:a="http://schemas.openxmlformats.org/drawingml/2006/main">
               <a:ext uri="{FF2B5EF4-FFF2-40B4-BE49-F238E27FC236}">
-                <a16:creationId xmlns:a16="http://schemas.microsoft.com/office/drawing/2014/main" id="{2C34C992-A0A0-4473-B0A6-810EC382A642}"/>
+                <a16:creationId xmlns:a16="http://schemas.microsoft.com/office/drawing/2014/main" id="{250F2228-94DF-454B-BA23-2480607FEE87}"/>
               </a:ext>
             </a:extLst>
           </p:cNvPr>
@@ -43637,7 +43659,7 @@
           <p:cNvPr id="5" name="Shape 3">
             <a:extLst xmlns:a="http://schemas.openxmlformats.org/drawingml/2006/main">
               <a:ext uri="{FF2B5EF4-FFF2-40B4-BE49-F238E27FC236}">
-                <a16:creationId xmlns:a16="http://schemas.microsoft.com/office/drawing/2014/main" id="{10437909-C8F4-43D3-9A71-83417B1A622F}"/>
+                <a16:creationId xmlns:a16="http://schemas.microsoft.com/office/drawing/2014/main" id="{2905FADC-064E-4412-8AF3-010E0D196407}"/>
               </a:ext>
             </a:extLst>
           </p:cNvPr>
@@ -43677,7 +43699,7 @@
           <p:cNvPr id="6" name="Text 4">
             <a:extLst xmlns:a="http://schemas.openxmlformats.org/drawingml/2006/main">
               <a:ext uri="{FF2B5EF4-FFF2-40B4-BE49-F238E27FC236}">
-                <a16:creationId xmlns:a16="http://schemas.microsoft.com/office/drawing/2014/main" id="{DEE09ED6-1013-405E-8782-F480C76ADE10}"/>
+                <a16:creationId xmlns:a16="http://schemas.microsoft.com/office/drawing/2014/main" id="{BF2B6B60-658F-4719-A3AD-9F7407E143E7}"/>
               </a:ext>
             </a:extLst>
           </p:cNvPr>
@@ -43722,7 +43744,7 @@
           <p:cNvPr id="7" name="Text 5">
             <a:extLst xmlns:a="http://schemas.openxmlformats.org/drawingml/2006/main">
               <a:ext uri="{FF2B5EF4-FFF2-40B4-BE49-F238E27FC236}">
-                <a16:creationId xmlns:a16="http://schemas.microsoft.com/office/drawing/2014/main" id="{F698F7B2-02AD-49C5-9CFC-44333EE37657}"/>
+                <a16:creationId xmlns:a16="http://schemas.microsoft.com/office/drawing/2014/main" id="{64EDBB4C-EE62-4B55-86FB-931E2B66C134}"/>
               </a:ext>
             </a:extLst>
           </p:cNvPr>
@@ -43767,7 +43789,7 @@
           <p:cNvPr id="8" name="Text 6">
             <a:extLst xmlns:a="http://schemas.openxmlformats.org/drawingml/2006/main">
               <a:ext uri="{FF2B5EF4-FFF2-40B4-BE49-F238E27FC236}">
-                <a16:creationId xmlns:a16="http://schemas.microsoft.com/office/drawing/2014/main" id="{19F1E9D0-7E44-4120-AE56-D40E7E6193AB}"/>
+                <a16:creationId xmlns:a16="http://schemas.microsoft.com/office/drawing/2014/main" id="{A630A057-8C49-416F-B0CB-2D02205DF4D7}"/>
               </a:ext>
             </a:extLst>
           </p:cNvPr>
@@ -43813,7 +43835,7 @@
     </p:spTree>
     <p:extLst>
       <p:ext uri="{BB962C8B-B14F-4D97-AF65-F5344CB8AC3E}">
-        <p14:creationId xmlns:p14="http://schemas.microsoft.com/office/powerpoint/2010/main" val="308543224"/>
+        <p14:creationId xmlns:p14="http://schemas.microsoft.com/office/powerpoint/2010/main" val="795873752"/>
       </p:ext>
     </p:extLst>
   </p:cSld>
@@ -43844,7 +43866,7 @@
           <p:cNvPr id="2" name="Text 0">
             <a:extLst xmlns:a="http://schemas.openxmlformats.org/drawingml/2006/main">
               <a:ext uri="{FF2B5EF4-FFF2-40B4-BE49-F238E27FC236}">
-                <a16:creationId xmlns:a16="http://schemas.microsoft.com/office/drawing/2014/main" id="{6433E200-A34C-4543-B745-3C8EA4485018}"/>
+                <a16:creationId xmlns:a16="http://schemas.microsoft.com/office/drawing/2014/main" id="{79A76249-2322-41B5-AE6D-06669228B39C}"/>
               </a:ext>
             </a:extLst>
           </p:cNvPr>
@@ -43889,7 +43911,7 @@
           <p:cNvPr id="3" name="Text 1">
             <a:extLst xmlns:a="http://schemas.openxmlformats.org/drawingml/2006/main">
               <a:ext uri="{FF2B5EF4-FFF2-40B4-BE49-F238E27FC236}">
-                <a16:creationId xmlns:a16="http://schemas.microsoft.com/office/drawing/2014/main" id="{CF92455F-0693-40AA-865A-E9A87A7CCDD5}"/>
+                <a16:creationId xmlns:a16="http://schemas.microsoft.com/office/drawing/2014/main" id="{4A0E2FF7-A6DC-459E-A879-37A96978E126}"/>
               </a:ext>
             </a:extLst>
           </p:cNvPr>
@@ -43934,7 +43956,7 @@
           <p:cNvPr id="4" name="Text 2">
             <a:extLst xmlns:a="http://schemas.openxmlformats.org/drawingml/2006/main">
               <a:ext uri="{FF2B5EF4-FFF2-40B4-BE49-F238E27FC236}">
-                <a16:creationId xmlns:a16="http://schemas.microsoft.com/office/drawing/2014/main" id="{E06C559D-DBE3-4824-91B2-773D11B65061}"/>
+                <a16:creationId xmlns:a16="http://schemas.microsoft.com/office/drawing/2014/main" id="{3CB8641B-6C14-453A-962C-FC56ECCD4B44}"/>
               </a:ext>
             </a:extLst>
           </p:cNvPr>
@@ -43979,7 +44001,7 @@
           <p:cNvPr id="5" name="Text 3">
             <a:extLst xmlns:a="http://schemas.openxmlformats.org/drawingml/2006/main">
               <a:ext uri="{FF2B5EF4-FFF2-40B4-BE49-F238E27FC236}">
-                <a16:creationId xmlns:a16="http://schemas.microsoft.com/office/drawing/2014/main" id="{016B9B0F-A883-4CED-939A-E0873DCA1286}"/>
+                <a16:creationId xmlns:a16="http://schemas.microsoft.com/office/drawing/2014/main" id="{81ACFF3E-FCCA-4609-A59B-C16F5E27B9E1}"/>
               </a:ext>
             </a:extLst>
           </p:cNvPr>
@@ -44024,7 +44046,7 @@
           <p:cNvPr id="6" name="Shape 4">
             <a:extLst xmlns:a="http://schemas.openxmlformats.org/drawingml/2006/main">
               <a:ext uri="{FF2B5EF4-FFF2-40B4-BE49-F238E27FC236}">
-                <a16:creationId xmlns:a16="http://schemas.microsoft.com/office/drawing/2014/main" id="{D6DA1880-4E5E-4649-9B88-35BDEA06470E}"/>
+                <a16:creationId xmlns:a16="http://schemas.microsoft.com/office/drawing/2014/main" id="{0D9B03A4-3FF8-41A3-85EE-8B089F563B1B}"/>
               </a:ext>
             </a:extLst>
           </p:cNvPr>
@@ -44071,7 +44093,7 @@
           <p:cNvPr id="7" name="Shape 5">
             <a:extLst xmlns:a="http://schemas.openxmlformats.org/drawingml/2006/main">
               <a:ext uri="{FF2B5EF4-FFF2-40B4-BE49-F238E27FC236}">
-                <a16:creationId xmlns:a16="http://schemas.microsoft.com/office/drawing/2014/main" id="{B93C2A30-8046-4D07-970B-029E61E7F9DE}"/>
+                <a16:creationId xmlns:a16="http://schemas.microsoft.com/office/drawing/2014/main" id="{77ABCF72-053C-480A-B4D9-264699E362B8}"/>
               </a:ext>
             </a:extLst>
           </p:cNvPr>
@@ -44109,7 +44131,7 @@
           <p:cNvPr id="8" name="Text 6">
             <a:extLst xmlns:a="http://schemas.openxmlformats.org/drawingml/2006/main">
               <a:ext uri="{FF2B5EF4-FFF2-40B4-BE49-F238E27FC236}">
-                <a16:creationId xmlns:a16="http://schemas.microsoft.com/office/drawing/2014/main" id="{88818098-62A3-4F30-9AFE-36983C9AD519}"/>
+                <a16:creationId xmlns:a16="http://schemas.microsoft.com/office/drawing/2014/main" id="{53B7B942-028C-44B5-9565-B54A3BD653B6}"/>
               </a:ext>
             </a:extLst>
           </p:cNvPr>
@@ -44154,7 +44176,7 @@
           <p:cNvPr id="9" name="Text 7">
             <a:extLst xmlns:a="http://schemas.openxmlformats.org/drawingml/2006/main">
               <a:ext uri="{FF2B5EF4-FFF2-40B4-BE49-F238E27FC236}">
-                <a16:creationId xmlns:a16="http://schemas.microsoft.com/office/drawing/2014/main" id="{522113C2-83FC-44F4-8707-A5B33F3302A4}"/>
+                <a16:creationId xmlns:a16="http://schemas.microsoft.com/office/drawing/2014/main" id="{CA92CE01-BC6D-41CA-95AC-C9CFFE4BED76}"/>
               </a:ext>
             </a:extLst>
           </p:cNvPr>
@@ -44199,7 +44221,7 @@
           <p:cNvPr id="10" name="Text 8">
             <a:extLst xmlns:a="http://schemas.openxmlformats.org/drawingml/2006/main">
               <a:ext uri="{FF2B5EF4-FFF2-40B4-BE49-F238E27FC236}">
-                <a16:creationId xmlns:a16="http://schemas.microsoft.com/office/drawing/2014/main" id="{7BB590D1-9098-4958-A092-608BEAB5BD6E}"/>
+                <a16:creationId xmlns:a16="http://schemas.microsoft.com/office/drawing/2014/main" id="{567DF8A9-8AEA-4C67-AA8F-B9CB5C62B960}"/>
               </a:ext>
             </a:extLst>
           </p:cNvPr>
@@ -44244,7 +44266,7 @@
           <p:cNvPr id="11" name="Shape 9">
             <a:extLst xmlns:a="http://schemas.openxmlformats.org/drawingml/2006/main">
               <a:ext uri="{FF2B5EF4-FFF2-40B4-BE49-F238E27FC236}">
-                <a16:creationId xmlns:a16="http://schemas.microsoft.com/office/drawing/2014/main" id="{AACE80C4-F79E-4214-820A-F33BCCE19F31}"/>
+                <a16:creationId xmlns:a16="http://schemas.microsoft.com/office/drawing/2014/main" id="{62987319-1EC1-40D3-8500-A9303EE5790B}"/>
               </a:ext>
             </a:extLst>
           </p:cNvPr>
@@ -44291,7 +44313,7 @@
           <p:cNvPr id="12" name="Shape 10">
             <a:extLst xmlns:a="http://schemas.openxmlformats.org/drawingml/2006/main">
               <a:ext uri="{FF2B5EF4-FFF2-40B4-BE49-F238E27FC236}">
-                <a16:creationId xmlns:a16="http://schemas.microsoft.com/office/drawing/2014/main" id="{41A6B3E5-FAB0-4572-BDF4-074688A3B4F9}"/>
+                <a16:creationId xmlns:a16="http://schemas.microsoft.com/office/drawing/2014/main" id="{1C430F88-3ABD-4606-A5A9-569F00F22688}"/>
               </a:ext>
             </a:extLst>
           </p:cNvPr>
@@ -44329,7 +44351,7 @@
           <p:cNvPr id="13" name="Text 11">
             <a:extLst xmlns:a="http://schemas.openxmlformats.org/drawingml/2006/main">
               <a:ext uri="{FF2B5EF4-FFF2-40B4-BE49-F238E27FC236}">
-                <a16:creationId xmlns:a16="http://schemas.microsoft.com/office/drawing/2014/main" id="{4ADF58A3-2620-4101-8C2B-72554BBACD52}"/>
+                <a16:creationId xmlns:a16="http://schemas.microsoft.com/office/drawing/2014/main" id="{04FA98D9-1416-4C03-A7A6-C86EC302B63B}"/>
               </a:ext>
             </a:extLst>
           </p:cNvPr>
@@ -44374,7 +44396,7 @@
           <p:cNvPr id="14" name="Text 12">
             <a:extLst xmlns:a="http://schemas.openxmlformats.org/drawingml/2006/main">
               <a:ext uri="{FF2B5EF4-FFF2-40B4-BE49-F238E27FC236}">
-                <a16:creationId xmlns:a16="http://schemas.microsoft.com/office/drawing/2014/main" id="{FFF516E3-A039-4C07-B0EC-995435CC03AE}"/>
+                <a16:creationId xmlns:a16="http://schemas.microsoft.com/office/drawing/2014/main" id="{17186805-FAB2-46A7-B9D6-C12AEF780E78}"/>
               </a:ext>
             </a:extLst>
           </p:cNvPr>
@@ -44419,7 +44441,7 @@
           <p:cNvPr id="15" name="Text 13">
             <a:extLst xmlns:a="http://schemas.openxmlformats.org/drawingml/2006/main">
               <a:ext uri="{FF2B5EF4-FFF2-40B4-BE49-F238E27FC236}">
-                <a16:creationId xmlns:a16="http://schemas.microsoft.com/office/drawing/2014/main" id="{18BAD397-C25A-4431-8567-44548902D84D}"/>
+                <a16:creationId xmlns:a16="http://schemas.microsoft.com/office/drawing/2014/main" id="{2E5329F2-14BE-455A-B55E-98985F5BF64B}"/>
               </a:ext>
             </a:extLst>
           </p:cNvPr>
@@ -44464,7 +44486,7 @@
           <p:cNvPr id="16" name="Shape 14">
             <a:extLst xmlns:a="http://schemas.openxmlformats.org/drawingml/2006/main">
               <a:ext uri="{FF2B5EF4-FFF2-40B4-BE49-F238E27FC236}">
-                <a16:creationId xmlns:a16="http://schemas.microsoft.com/office/drawing/2014/main" id="{5121AD30-4498-4517-8F8C-02ADE8E96A0D}"/>
+                <a16:creationId xmlns:a16="http://schemas.microsoft.com/office/drawing/2014/main" id="{EF1E4C16-140A-47F4-BC4B-AEA33ABC3255}"/>
               </a:ext>
             </a:extLst>
           </p:cNvPr>
@@ -44511,7 +44533,7 @@
           <p:cNvPr id="17" name="Shape 15">
             <a:extLst xmlns:a="http://schemas.openxmlformats.org/drawingml/2006/main">
               <a:ext uri="{FF2B5EF4-FFF2-40B4-BE49-F238E27FC236}">
-                <a16:creationId xmlns:a16="http://schemas.microsoft.com/office/drawing/2014/main" id="{2C69DD0F-EC45-46A6-B60E-59EBF34F60DA}"/>
+                <a16:creationId xmlns:a16="http://schemas.microsoft.com/office/drawing/2014/main" id="{EF0A380E-0DA5-4B73-9EAD-B575E9C8EEE7}"/>
               </a:ext>
             </a:extLst>
           </p:cNvPr>
@@ -44549,7 +44571,7 @@
           <p:cNvPr id="18" name="Text 16">
             <a:extLst xmlns:a="http://schemas.openxmlformats.org/drawingml/2006/main">
               <a:ext uri="{FF2B5EF4-FFF2-40B4-BE49-F238E27FC236}">
-                <a16:creationId xmlns:a16="http://schemas.microsoft.com/office/drawing/2014/main" id="{B656E81C-7290-42D9-872B-DFC1C9FE99C7}"/>
+                <a16:creationId xmlns:a16="http://schemas.microsoft.com/office/drawing/2014/main" id="{0F944F61-BDF9-4802-BD32-2DEB4F415674}"/>
               </a:ext>
             </a:extLst>
           </p:cNvPr>
@@ -44594,7 +44616,7 @@
           <p:cNvPr id="19" name="Text 17">
             <a:extLst xmlns:a="http://schemas.openxmlformats.org/drawingml/2006/main">
               <a:ext uri="{FF2B5EF4-FFF2-40B4-BE49-F238E27FC236}">
-                <a16:creationId xmlns:a16="http://schemas.microsoft.com/office/drawing/2014/main" id="{ADFF25B0-136B-4D6E-820F-1B4CF91C4A4C}"/>
+                <a16:creationId xmlns:a16="http://schemas.microsoft.com/office/drawing/2014/main" id="{A9D0E132-0392-4333-A101-5DDB4DB519C8}"/>
               </a:ext>
             </a:extLst>
           </p:cNvPr>
@@ -44639,7 +44661,7 @@
           <p:cNvPr id="20" name="Text 18">
             <a:extLst xmlns:a="http://schemas.openxmlformats.org/drawingml/2006/main">
               <a:ext uri="{FF2B5EF4-FFF2-40B4-BE49-F238E27FC236}">
-                <a16:creationId xmlns:a16="http://schemas.microsoft.com/office/drawing/2014/main" id="{BA895F14-6540-4666-ADC3-F076648C60D5}"/>
+                <a16:creationId xmlns:a16="http://schemas.microsoft.com/office/drawing/2014/main" id="{E3A59CDF-C84D-4AED-8658-FBFC9E8AA1A1}"/>
               </a:ext>
             </a:extLst>
           </p:cNvPr>
@@ -44684,7 +44706,7 @@
           <p:cNvPr id="21" name="Text 19">
             <a:extLst xmlns:a="http://schemas.openxmlformats.org/drawingml/2006/main">
               <a:ext uri="{FF2B5EF4-FFF2-40B4-BE49-F238E27FC236}">
-                <a16:creationId xmlns:a16="http://schemas.microsoft.com/office/drawing/2014/main" id="{144CB40B-3092-436E-BCDD-4A443FCEBFCB}"/>
+                <a16:creationId xmlns:a16="http://schemas.microsoft.com/office/drawing/2014/main" id="{F7B8E869-9C78-46D2-80FE-E98A5D1B5095}"/>
               </a:ext>
             </a:extLst>
           </p:cNvPr>
@@ -44729,7 +44751,7 @@
           <p:cNvPr id="22" name="Shape 20">
             <a:extLst xmlns:a="http://schemas.openxmlformats.org/drawingml/2006/main">
               <a:ext uri="{FF2B5EF4-FFF2-40B4-BE49-F238E27FC236}">
-                <a16:creationId xmlns:a16="http://schemas.microsoft.com/office/drawing/2014/main" id="{9E067F2C-8202-4476-BAA0-5925BC4F1109}"/>
+                <a16:creationId xmlns:a16="http://schemas.microsoft.com/office/drawing/2014/main" id="{46D569D5-C047-4D72-8016-0406A28F701A}"/>
               </a:ext>
             </a:extLst>
           </p:cNvPr>
@@ -44776,7 +44798,7 @@
           <p:cNvPr id="23" name="Shape 21">
             <a:extLst xmlns:a="http://schemas.openxmlformats.org/drawingml/2006/main">
               <a:ext uri="{FF2B5EF4-FFF2-40B4-BE49-F238E27FC236}">
-                <a16:creationId xmlns:a16="http://schemas.microsoft.com/office/drawing/2014/main" id="{531AD106-4AC9-49DE-B320-16466715CD44}"/>
+                <a16:creationId xmlns:a16="http://schemas.microsoft.com/office/drawing/2014/main" id="{8036F3A9-260C-4223-BBD6-A192822CBC3A}"/>
               </a:ext>
             </a:extLst>
           </p:cNvPr>
@@ -44814,7 +44836,7 @@
           <p:cNvPr id="24" name="Text 22">
             <a:extLst xmlns:a="http://schemas.openxmlformats.org/drawingml/2006/main">
               <a:ext uri="{FF2B5EF4-FFF2-40B4-BE49-F238E27FC236}">
-                <a16:creationId xmlns:a16="http://schemas.microsoft.com/office/drawing/2014/main" id="{BC228CD8-7C98-47A9-9B8A-5A89CC6A6079}"/>
+                <a16:creationId xmlns:a16="http://schemas.microsoft.com/office/drawing/2014/main" id="{4CCAF8A3-8988-43E9-B978-680ECC37BAA3}"/>
               </a:ext>
             </a:extLst>
           </p:cNvPr>
@@ -44859,7 +44881,7 @@
           <p:cNvPr id="25" name="Text 23">
             <a:extLst xmlns:a="http://schemas.openxmlformats.org/drawingml/2006/main">
               <a:ext uri="{FF2B5EF4-FFF2-40B4-BE49-F238E27FC236}">
-                <a16:creationId xmlns:a16="http://schemas.microsoft.com/office/drawing/2014/main" id="{953755C5-6B82-4469-A73B-718AA53FB4E4}"/>
+                <a16:creationId xmlns:a16="http://schemas.microsoft.com/office/drawing/2014/main" id="{F487BCD0-2027-4EBC-A345-DC09A5567FBE}"/>
               </a:ext>
             </a:extLst>
           </p:cNvPr>
@@ -44904,7 +44926,7 @@
           <p:cNvPr id="26" name="Text 24">
             <a:extLst xmlns:a="http://schemas.openxmlformats.org/drawingml/2006/main">
               <a:ext uri="{FF2B5EF4-FFF2-40B4-BE49-F238E27FC236}">
-                <a16:creationId xmlns:a16="http://schemas.microsoft.com/office/drawing/2014/main" id="{EAC6F950-8C80-4B87-B371-6B386647E0D1}"/>
+                <a16:creationId xmlns:a16="http://schemas.microsoft.com/office/drawing/2014/main" id="{1CA0A112-1473-4BEE-A0F8-369367990BD3}"/>
               </a:ext>
             </a:extLst>
           </p:cNvPr>
@@ -44952,7 +44974,7 @@
           <p:cNvPr id="27" name="Shape 25">
             <a:extLst xmlns:a="http://schemas.openxmlformats.org/drawingml/2006/main">
               <a:ext uri="{FF2B5EF4-FFF2-40B4-BE49-F238E27FC236}">
-                <a16:creationId xmlns:a16="http://schemas.microsoft.com/office/drawing/2014/main" id="{179E5683-6DD8-44C4-9AB8-BD1D002E51BF}"/>
+                <a16:creationId xmlns:a16="http://schemas.microsoft.com/office/drawing/2014/main" id="{F76C5842-7313-43B5-B096-96342799656A}"/>
               </a:ext>
             </a:extLst>
           </p:cNvPr>
@@ -44990,7 +45012,7 @@
           <p:cNvPr id="28" name="Shape 26">
             <a:extLst xmlns:a="http://schemas.openxmlformats.org/drawingml/2006/main">
               <a:ext uri="{FF2B5EF4-FFF2-40B4-BE49-F238E27FC236}">
-                <a16:creationId xmlns:a16="http://schemas.microsoft.com/office/drawing/2014/main" id="{9ABE39CC-07E3-4A87-B181-B9507117B7A4}"/>
+                <a16:creationId xmlns:a16="http://schemas.microsoft.com/office/drawing/2014/main" id="{2DFF51D6-65BA-4A6A-8CFF-0BBB8E80BC12}"/>
               </a:ext>
             </a:extLst>
           </p:cNvPr>
@@ -45037,7 +45059,7 @@
           <p:cNvPr id="29" name="Shape 27">
             <a:extLst xmlns:a="http://schemas.openxmlformats.org/drawingml/2006/main">
               <a:ext uri="{FF2B5EF4-FFF2-40B4-BE49-F238E27FC236}">
-                <a16:creationId xmlns:a16="http://schemas.microsoft.com/office/drawing/2014/main" id="{1ED27118-37E8-4DA7-8864-9FF61370198E}"/>
+                <a16:creationId xmlns:a16="http://schemas.microsoft.com/office/drawing/2014/main" id="{7C692DCA-125F-4E58-AC20-E56CABFA6F73}"/>
               </a:ext>
             </a:extLst>
           </p:cNvPr>
@@ -45075,7 +45097,7 @@
           <p:cNvPr id="30" name="Text 28">
             <a:extLst xmlns:a="http://schemas.openxmlformats.org/drawingml/2006/main">
               <a:ext uri="{FF2B5EF4-FFF2-40B4-BE49-F238E27FC236}">
-                <a16:creationId xmlns:a16="http://schemas.microsoft.com/office/drawing/2014/main" id="{B621A7EC-A4DA-4F4D-9157-3E290A14A752}"/>
+                <a16:creationId xmlns:a16="http://schemas.microsoft.com/office/drawing/2014/main" id="{F0CBF380-2E3F-47F2-A3F0-D88DB33EA031}"/>
               </a:ext>
             </a:extLst>
           </p:cNvPr>
@@ -45120,7 +45142,7 @@
           <p:cNvPr id="31" name="Text 29">
             <a:extLst xmlns:a="http://schemas.openxmlformats.org/drawingml/2006/main">
               <a:ext uri="{FF2B5EF4-FFF2-40B4-BE49-F238E27FC236}">
-                <a16:creationId xmlns:a16="http://schemas.microsoft.com/office/drawing/2014/main" id="{6A6CF94C-508C-48D0-8DEE-9C1804DFE131}"/>
+                <a16:creationId xmlns:a16="http://schemas.microsoft.com/office/drawing/2014/main" id="{36910C72-4A89-41BF-B90E-0726A3C347A1}"/>
               </a:ext>
             </a:extLst>
           </p:cNvPr>
@@ -45165,7 +45187,7 @@
           <p:cNvPr id="32" name="Text 30">
             <a:extLst xmlns:a="http://schemas.openxmlformats.org/drawingml/2006/main">
               <a:ext uri="{FF2B5EF4-FFF2-40B4-BE49-F238E27FC236}">
-                <a16:creationId xmlns:a16="http://schemas.microsoft.com/office/drawing/2014/main" id="{8072302E-E5D5-4F32-B202-D29C719564EB}"/>
+                <a16:creationId xmlns:a16="http://schemas.microsoft.com/office/drawing/2014/main" id="{E461134B-DDCE-4225-AE06-C35D78FC8E6B}"/>
               </a:ext>
             </a:extLst>
           </p:cNvPr>
@@ -45213,7 +45235,7 @@
           <p:cNvPr id="33" name="Shape 31">
             <a:extLst xmlns:a="http://schemas.openxmlformats.org/drawingml/2006/main">
               <a:ext uri="{FF2B5EF4-FFF2-40B4-BE49-F238E27FC236}">
-                <a16:creationId xmlns:a16="http://schemas.microsoft.com/office/drawing/2014/main" id="{66BA0E56-E9DD-4572-9B03-2A53BE494E59}"/>
+                <a16:creationId xmlns:a16="http://schemas.microsoft.com/office/drawing/2014/main" id="{9DDD3F26-E117-4CD0-BB51-F343B5D3F0A6}"/>
               </a:ext>
             </a:extLst>
           </p:cNvPr>
@@ -45251,7 +45273,7 @@
           <p:cNvPr id="34" name="Shape 32">
             <a:extLst xmlns:a="http://schemas.openxmlformats.org/drawingml/2006/main">
               <a:ext uri="{FF2B5EF4-FFF2-40B4-BE49-F238E27FC236}">
-                <a16:creationId xmlns:a16="http://schemas.microsoft.com/office/drawing/2014/main" id="{6B4E4771-8E8F-42F1-AD7A-B7AEFB8BB299}"/>
+                <a16:creationId xmlns:a16="http://schemas.microsoft.com/office/drawing/2014/main" id="{EF34CE26-F37D-4B21-AE41-86F459AA5164}"/>
               </a:ext>
             </a:extLst>
           </p:cNvPr>
@@ -45298,7 +45320,7 @@
           <p:cNvPr id="35" name="Shape 33">
             <a:extLst xmlns:a="http://schemas.openxmlformats.org/drawingml/2006/main">
               <a:ext uri="{FF2B5EF4-FFF2-40B4-BE49-F238E27FC236}">
-                <a16:creationId xmlns:a16="http://schemas.microsoft.com/office/drawing/2014/main" id="{2ECB9464-31EC-4AD0-9DC5-3E076EFDD72A}"/>
+                <a16:creationId xmlns:a16="http://schemas.microsoft.com/office/drawing/2014/main" id="{66F10B5F-3B4C-4B25-ACFB-3CE442357400}"/>
               </a:ext>
             </a:extLst>
           </p:cNvPr>
@@ -45336,7 +45358,7 @@
           <p:cNvPr id="36" name="Text 34">
             <a:extLst xmlns:a="http://schemas.openxmlformats.org/drawingml/2006/main">
               <a:ext uri="{FF2B5EF4-FFF2-40B4-BE49-F238E27FC236}">
-                <a16:creationId xmlns:a16="http://schemas.microsoft.com/office/drawing/2014/main" id="{240EBCBE-8E46-4F77-81D0-8E522BDC2AE3}"/>
+                <a16:creationId xmlns:a16="http://schemas.microsoft.com/office/drawing/2014/main" id="{05C48808-528E-4D53-8FCA-FD1445713F13}"/>
               </a:ext>
             </a:extLst>
           </p:cNvPr>
@@ -45381,7 +45403,7 @@
           <p:cNvPr id="37" name="Text 35">
             <a:extLst xmlns:a="http://schemas.openxmlformats.org/drawingml/2006/main">
               <a:ext uri="{FF2B5EF4-FFF2-40B4-BE49-F238E27FC236}">
-                <a16:creationId xmlns:a16="http://schemas.microsoft.com/office/drawing/2014/main" id="{CD15BEC7-5837-4603-B00C-C302EDDE14DA}"/>
+                <a16:creationId xmlns:a16="http://schemas.microsoft.com/office/drawing/2014/main" id="{63F728BC-5563-41AD-8FB5-A5BC149B1962}"/>
               </a:ext>
             </a:extLst>
           </p:cNvPr>
@@ -45426,7 +45448,7 @@
           <p:cNvPr id="38" name="Text 36">
             <a:extLst xmlns:a="http://schemas.openxmlformats.org/drawingml/2006/main">
               <a:ext uri="{FF2B5EF4-FFF2-40B4-BE49-F238E27FC236}">
-                <a16:creationId xmlns:a16="http://schemas.microsoft.com/office/drawing/2014/main" id="{259C7177-3B07-41B5-82CC-0D73D5EDA14A}"/>
+                <a16:creationId xmlns:a16="http://schemas.microsoft.com/office/drawing/2014/main" id="{5A0C979D-CDEC-4AB0-B3EA-630F38655E55}"/>
               </a:ext>
             </a:extLst>
           </p:cNvPr>
@@ -45474,7 +45496,7 @@
           <p:cNvPr id="39" name="Shape 37">
             <a:extLst xmlns:a="http://schemas.openxmlformats.org/drawingml/2006/main">
               <a:ext uri="{FF2B5EF4-FFF2-40B4-BE49-F238E27FC236}">
-                <a16:creationId xmlns:a16="http://schemas.microsoft.com/office/drawing/2014/main" id="{DE766FB8-A49F-4CBF-8DCA-1C7550920768}"/>
+                <a16:creationId xmlns:a16="http://schemas.microsoft.com/office/drawing/2014/main" id="{86A51BAD-DBDB-41A2-A907-39DE76858285}"/>
               </a:ext>
             </a:extLst>
           </p:cNvPr>
@@ -45512,7 +45534,7 @@
           <p:cNvPr id="40" name="Shape 38">
             <a:extLst xmlns:a="http://schemas.openxmlformats.org/drawingml/2006/main">
               <a:ext uri="{FF2B5EF4-FFF2-40B4-BE49-F238E27FC236}">
-                <a16:creationId xmlns:a16="http://schemas.microsoft.com/office/drawing/2014/main" id="{1990AF8C-8249-483F-BBD6-403BCC692235}"/>
+                <a16:creationId xmlns:a16="http://schemas.microsoft.com/office/drawing/2014/main" id="{3D952C45-1F11-4561-80CB-51917A6279B8}"/>
               </a:ext>
             </a:extLst>
           </p:cNvPr>
@@ -45559,7 +45581,7 @@
           <p:cNvPr id="41" name="Shape 39">
             <a:extLst xmlns:a="http://schemas.openxmlformats.org/drawingml/2006/main">
               <a:ext uri="{FF2B5EF4-FFF2-40B4-BE49-F238E27FC236}">
-                <a16:creationId xmlns:a16="http://schemas.microsoft.com/office/drawing/2014/main" id="{9BB377D9-0FD1-482C-9D28-4E401F69B857}"/>
+                <a16:creationId xmlns:a16="http://schemas.microsoft.com/office/drawing/2014/main" id="{75B5C99C-C989-42FF-8534-9FE48A96A9EE}"/>
               </a:ext>
             </a:extLst>
           </p:cNvPr>
@@ -45597,7 +45619,7 @@
           <p:cNvPr id="42" name="Text 40">
             <a:extLst xmlns:a="http://schemas.openxmlformats.org/drawingml/2006/main">
               <a:ext uri="{FF2B5EF4-FFF2-40B4-BE49-F238E27FC236}">
-                <a16:creationId xmlns:a16="http://schemas.microsoft.com/office/drawing/2014/main" id="{F83309B0-3354-4B36-8CF9-89586960C0E2}"/>
+                <a16:creationId xmlns:a16="http://schemas.microsoft.com/office/drawing/2014/main" id="{D309DA09-2082-465C-AA7D-7CB797E4836E}"/>
               </a:ext>
             </a:extLst>
           </p:cNvPr>
@@ -45642,7 +45664,7 @@
           <p:cNvPr id="43" name="Text 41">
             <a:extLst xmlns:a="http://schemas.openxmlformats.org/drawingml/2006/main">
               <a:ext uri="{FF2B5EF4-FFF2-40B4-BE49-F238E27FC236}">
-                <a16:creationId xmlns:a16="http://schemas.microsoft.com/office/drawing/2014/main" id="{86D51E9F-BBEC-408A-8BB6-6E3957EAC706}"/>
+                <a16:creationId xmlns:a16="http://schemas.microsoft.com/office/drawing/2014/main" id="{9F2E8DD5-66B0-47D7-A083-BFC0F5D013BA}"/>
               </a:ext>
             </a:extLst>
           </p:cNvPr>
@@ -45687,7 +45709,7 @@
           <p:cNvPr id="44" name="Text 42">
             <a:extLst xmlns:a="http://schemas.openxmlformats.org/drawingml/2006/main">
               <a:ext uri="{FF2B5EF4-FFF2-40B4-BE49-F238E27FC236}">
-                <a16:creationId xmlns:a16="http://schemas.microsoft.com/office/drawing/2014/main" id="{274DC2BB-55B3-47BD-8D87-7AC01D9B9536}"/>
+                <a16:creationId xmlns:a16="http://schemas.microsoft.com/office/drawing/2014/main" id="{DB899289-62AD-494B-B9D6-CEB393C9B070}"/>
               </a:ext>
             </a:extLst>
           </p:cNvPr>
@@ -45735,7 +45757,7 @@
           <p:cNvPr id="45" name="Shape 43">
             <a:extLst xmlns:a="http://schemas.openxmlformats.org/drawingml/2006/main">
               <a:ext uri="{FF2B5EF4-FFF2-40B4-BE49-F238E27FC236}">
-                <a16:creationId xmlns:a16="http://schemas.microsoft.com/office/drawing/2014/main" id="{48F19D82-D74F-4C49-A853-924FCD6A3B5C}"/>
+                <a16:creationId xmlns:a16="http://schemas.microsoft.com/office/drawing/2014/main" id="{7122A92B-1FCC-4392-8D16-13D7C3B1C700}"/>
               </a:ext>
             </a:extLst>
           </p:cNvPr>
@@ -45773,7 +45795,7 @@
           <p:cNvPr id="46" name="Shape 44">
             <a:extLst xmlns:a="http://schemas.openxmlformats.org/drawingml/2006/main">
               <a:ext uri="{FF2B5EF4-FFF2-40B4-BE49-F238E27FC236}">
-                <a16:creationId xmlns:a16="http://schemas.microsoft.com/office/drawing/2014/main" id="{C20FAD21-A248-4F99-A5E9-F48132A3C180}"/>
+                <a16:creationId xmlns:a16="http://schemas.microsoft.com/office/drawing/2014/main" id="{74590D62-5565-4A36-8EB7-53E55071ACA4}"/>
               </a:ext>
             </a:extLst>
           </p:cNvPr>
@@ -45820,7 +45842,7 @@
           <p:cNvPr id="47" name="Shape 45">
             <a:extLst xmlns:a="http://schemas.openxmlformats.org/drawingml/2006/main">
               <a:ext uri="{FF2B5EF4-FFF2-40B4-BE49-F238E27FC236}">
-                <a16:creationId xmlns:a16="http://schemas.microsoft.com/office/drawing/2014/main" id="{7C10AD1C-43CB-4ED5-9007-12F5C2556CB5}"/>
+                <a16:creationId xmlns:a16="http://schemas.microsoft.com/office/drawing/2014/main" id="{9CB2C878-446F-4EA9-B37F-C571EFAF6DBA}"/>
               </a:ext>
             </a:extLst>
           </p:cNvPr>
@@ -45858,7 +45880,7 @@
           <p:cNvPr id="48" name="Text 46">
             <a:extLst xmlns:a="http://schemas.openxmlformats.org/drawingml/2006/main">
               <a:ext uri="{FF2B5EF4-FFF2-40B4-BE49-F238E27FC236}">
-                <a16:creationId xmlns:a16="http://schemas.microsoft.com/office/drawing/2014/main" id="{5BC8A1C1-7DFD-43E5-8180-68A1B18D3E27}"/>
+                <a16:creationId xmlns:a16="http://schemas.microsoft.com/office/drawing/2014/main" id="{7998561D-B507-4C45-B96E-5A23609E3D4E}"/>
               </a:ext>
             </a:extLst>
           </p:cNvPr>
@@ -45903,7 +45925,7 @@
           <p:cNvPr id="49" name="Text 47">
             <a:extLst xmlns:a="http://schemas.openxmlformats.org/drawingml/2006/main">
               <a:ext uri="{FF2B5EF4-FFF2-40B4-BE49-F238E27FC236}">
-                <a16:creationId xmlns:a16="http://schemas.microsoft.com/office/drawing/2014/main" id="{D72607E3-4C95-49A5-BFEC-68CFEC7211EC}"/>
+                <a16:creationId xmlns:a16="http://schemas.microsoft.com/office/drawing/2014/main" id="{42A5BE87-04CF-4EBD-BBDB-1A923E0F464B}"/>
               </a:ext>
             </a:extLst>
           </p:cNvPr>
@@ -45948,7 +45970,7 @@
           <p:cNvPr id="50" name="Text 48">
             <a:extLst xmlns:a="http://schemas.openxmlformats.org/drawingml/2006/main">
               <a:ext uri="{FF2B5EF4-FFF2-40B4-BE49-F238E27FC236}">
-                <a16:creationId xmlns:a16="http://schemas.microsoft.com/office/drawing/2014/main" id="{3A08B39B-D359-4296-B9C6-871E19BC9696}"/>
+                <a16:creationId xmlns:a16="http://schemas.microsoft.com/office/drawing/2014/main" id="{C7E59F85-762B-4291-B81F-B0D937BDCF0E}"/>
               </a:ext>
             </a:extLst>
           </p:cNvPr>
@@ -45996,7 +46018,7 @@
           <p:cNvPr id="51" name="Shape 49">
             <a:extLst xmlns:a="http://schemas.openxmlformats.org/drawingml/2006/main">
               <a:ext uri="{FF2B5EF4-FFF2-40B4-BE49-F238E27FC236}">
-                <a16:creationId xmlns:a16="http://schemas.microsoft.com/office/drawing/2014/main" id="{376E0BDA-8B3C-48A5-AE6F-FBAB97CD02F4}"/>
+                <a16:creationId xmlns:a16="http://schemas.microsoft.com/office/drawing/2014/main" id="{B0BEE2AC-7D33-477C-BD78-57DC5F313C09}"/>
               </a:ext>
             </a:extLst>
           </p:cNvPr>
@@ -46034,7 +46056,7 @@
           <p:cNvPr id="52" name="Shape 50">
             <a:extLst xmlns:a="http://schemas.openxmlformats.org/drawingml/2006/main">
               <a:ext uri="{FF2B5EF4-FFF2-40B4-BE49-F238E27FC236}">
-                <a16:creationId xmlns:a16="http://schemas.microsoft.com/office/drawing/2014/main" id="{8D997F3C-117D-4331-949F-DAE1FB5A73F4}"/>
+                <a16:creationId xmlns:a16="http://schemas.microsoft.com/office/drawing/2014/main" id="{32D4E474-3F50-47C3-97F5-E5C03B5DDAA0}"/>
               </a:ext>
             </a:extLst>
           </p:cNvPr>
@@ -46081,7 +46103,7 @@
           <p:cNvPr id="53" name="Shape 51">
             <a:extLst xmlns:a="http://schemas.openxmlformats.org/drawingml/2006/main">
               <a:ext uri="{FF2B5EF4-FFF2-40B4-BE49-F238E27FC236}">
-                <a16:creationId xmlns:a16="http://schemas.microsoft.com/office/drawing/2014/main" id="{88C53FFB-E0F0-4815-9EA8-E39B47536124}"/>
+                <a16:creationId xmlns:a16="http://schemas.microsoft.com/office/drawing/2014/main" id="{12CAC7E2-B612-4FE0-B7C9-8EA423EF7EE8}"/>
               </a:ext>
             </a:extLst>
           </p:cNvPr>
@@ -46119,7 +46141,7 @@
           <p:cNvPr id="54" name="Text 52">
             <a:extLst xmlns:a="http://schemas.openxmlformats.org/drawingml/2006/main">
               <a:ext uri="{FF2B5EF4-FFF2-40B4-BE49-F238E27FC236}">
-                <a16:creationId xmlns:a16="http://schemas.microsoft.com/office/drawing/2014/main" id="{D45C36AA-BFAE-41B2-8EAA-91413C508732}"/>
+                <a16:creationId xmlns:a16="http://schemas.microsoft.com/office/drawing/2014/main" id="{C00BBCB4-14CE-4C09-BB63-C33408FB589B}"/>
               </a:ext>
             </a:extLst>
           </p:cNvPr>
@@ -46164,7 +46186,7 @@
           <p:cNvPr id="55" name="Text 53">
             <a:extLst xmlns:a="http://schemas.openxmlformats.org/drawingml/2006/main">
               <a:ext uri="{FF2B5EF4-FFF2-40B4-BE49-F238E27FC236}">
-                <a16:creationId xmlns:a16="http://schemas.microsoft.com/office/drawing/2014/main" id="{87D8D92E-D1DF-4FAA-8750-7298D306F4B6}"/>
+                <a16:creationId xmlns:a16="http://schemas.microsoft.com/office/drawing/2014/main" id="{C97CD542-C89B-4A60-9110-1219C78F336D}"/>
               </a:ext>
             </a:extLst>
           </p:cNvPr>
@@ -46209,7 +46231,7 @@
           <p:cNvPr id="56" name="Text 54">
             <a:extLst xmlns:a="http://schemas.openxmlformats.org/drawingml/2006/main">
               <a:ext uri="{FF2B5EF4-FFF2-40B4-BE49-F238E27FC236}">
-                <a16:creationId xmlns:a16="http://schemas.microsoft.com/office/drawing/2014/main" id="{A13BCD53-C641-45DD-BC24-DD6F2CF2449B}"/>
+                <a16:creationId xmlns:a16="http://schemas.microsoft.com/office/drawing/2014/main" id="{0459F175-42DD-4502-BA0F-B7791FCA54BE}"/>
               </a:ext>
             </a:extLst>
           </p:cNvPr>
@@ -46257,7 +46279,7 @@
           <p:cNvPr id="57" name="Shape 55">
             <a:extLst xmlns:a="http://schemas.openxmlformats.org/drawingml/2006/main">
               <a:ext uri="{FF2B5EF4-FFF2-40B4-BE49-F238E27FC236}">
-                <a16:creationId xmlns:a16="http://schemas.microsoft.com/office/drawing/2014/main" id="{43745BC8-CA1C-433E-941D-586D0828E04F}"/>
+                <a16:creationId xmlns:a16="http://schemas.microsoft.com/office/drawing/2014/main" id="{C73C1118-0CD0-4F61-A441-822536BC0448}"/>
               </a:ext>
             </a:extLst>
           </p:cNvPr>
@@ -46304,7 +46326,7 @@
           <p:cNvPr id="58" name="Text 56">
             <a:extLst xmlns:a="http://schemas.openxmlformats.org/drawingml/2006/main">
               <a:ext uri="{FF2B5EF4-FFF2-40B4-BE49-F238E27FC236}">
-                <a16:creationId xmlns:a16="http://schemas.microsoft.com/office/drawing/2014/main" id="{3AB89940-AD1E-4271-BC19-19D1CF4B7F78}"/>
+                <a16:creationId xmlns:a16="http://schemas.microsoft.com/office/drawing/2014/main" id="{177F9FD9-4039-4107-BFEB-7630B3DC30B0}"/>
               </a:ext>
             </a:extLst>
           </p:cNvPr>
@@ -46349,7 +46371,7 @@
           <p:cNvPr id="59" name="Text 57">
             <a:extLst xmlns:a="http://schemas.openxmlformats.org/drawingml/2006/main">
               <a:ext uri="{FF2B5EF4-FFF2-40B4-BE49-F238E27FC236}">
-                <a16:creationId xmlns:a16="http://schemas.microsoft.com/office/drawing/2014/main" id="{53B72380-CEF2-4B7A-883C-2E3EF0524B4A}"/>
+                <a16:creationId xmlns:a16="http://schemas.microsoft.com/office/drawing/2014/main" id="{8002D195-5559-4832-8181-55304211F6CE}"/>
               </a:ext>
             </a:extLst>
           </p:cNvPr>
@@ -46395,7 +46417,7 @@
     </p:spTree>
     <p:extLst>
       <p:ext uri="{BB962C8B-B14F-4D97-AF65-F5344CB8AC3E}">
-        <p14:creationId xmlns:p14="http://schemas.microsoft.com/office/powerpoint/2010/main" val="2020062987"/>
+        <p14:creationId xmlns:p14="http://schemas.microsoft.com/office/powerpoint/2010/main" val="721774936"/>
       </p:ext>
     </p:extLst>
   </p:cSld>

--- a/paper/slides/compiling-recurrent-agent-workflows-into-guarded-programs.pptx
+++ b/paper/slides/compiling-recurrent-agent-workflows-into-guarded-programs.pptx
@@ -4206,7 +4206,9 @@
           <a:noFill xmlns:a="http://schemas.openxmlformats.org/drawingml/2006/main"/>
         </p:spPr>
         <p:txBody>
-          <a:bodyPr xmlns:a="http://schemas.openxmlformats.org/drawingml/2006/main" wrap="square" lIns="0" tIns="0" rIns="0" bIns="0" anchor="t"/>
+          <a:bodyPr xmlns:a="http://schemas.openxmlformats.org/drawingml/2006/main" wrap="square" lIns="0" tIns="0" rIns="0" bIns="0" anchor="t">
+            <a:normAutofit/>
+          </a:bodyPr>
           <a:lstStyle xmlns:a="http://schemas.openxmlformats.org/drawingml/2006/main"/>
           <a:p xmlns:a="http://schemas.openxmlformats.org/drawingml/2006/main">
             <a:pPr marL="0" indent="0">
@@ -4216,7 +4218,7 @@
               <a:buNone/>
             </a:pPr>
             <a:r>
-              <a:rPr sz="3600" b="1">
+              <a:rPr sz="3200" b="1">
                 <a:solidFill>
                   <a:srgbClr val="FFFFFF"/>
                 </a:solidFill>
@@ -4224,7 +4226,7 @@
                 <a:ea typeface="Cambria"/>
                 <a:cs typeface="Cambria"/>
               </a:rPr>
-              <a:t>Compiling Recurrent Agent Workflows into Guarded Programs</a:t>
+              <a:t>From Traces to Guarded Programs: Evidence-Gated Compilation of Recurrent Agent Workflows</a:t>
             </a:r>
           </a:p>
         </p:txBody>
